--- a/docs/presentation/BAI-Work-Defense-Deck.pptx
+++ b/docs/presentation/BAI-Work-Defense-Deck.pptx
@@ -2,31 +2,31 @@
 <file path=ppt/presentation.xml><?xml version="1.0" encoding="utf-8"?>
 <p:presentation xmlns:p="http://schemas.openxmlformats.org/presentationml/2006/main">
   <p:sldMasterIdLst>
-    <p:sldMasterId xmlns:r="http://schemas.openxmlformats.org/officeDocument/2006/relationships" id="2147483648" r:id="R03ab5cb130ac4c45"/>
+    <p:sldMasterId xmlns:r="http://schemas.openxmlformats.org/officeDocument/2006/relationships" id="2147483648" r:id="Rfc4d6d5fe28c47f9"/>
   </p:sldMasterIdLst>
   <p:notesMasterIdLst>
-    <p:notesMasterId xmlns:r="http://schemas.openxmlformats.org/officeDocument/2006/relationships" r:id="R39ca3d3b4d104d8d"/>
+    <p:notesMasterId xmlns:r="http://schemas.openxmlformats.org/officeDocument/2006/relationships" r:id="R607af0627e3f4424"/>
   </p:notesMasterIdLst>
   <p:sldIdLst>
-    <p:sldId xmlns:r="http://schemas.openxmlformats.org/officeDocument/2006/relationships" id="256" r:id="Rb91416d79fe94bb6"/>
-    <p:sldId xmlns:r="http://schemas.openxmlformats.org/officeDocument/2006/relationships" id="257" r:id="R8fe131d2e9154014"/>
-    <p:sldId xmlns:r="http://schemas.openxmlformats.org/officeDocument/2006/relationships" id="258" r:id="R6ccc3f3a6cdc4fde"/>
-    <p:sldId xmlns:r="http://schemas.openxmlformats.org/officeDocument/2006/relationships" id="259" r:id="R518dc36f24714d21"/>
-    <p:sldId xmlns:r="http://schemas.openxmlformats.org/officeDocument/2006/relationships" id="260" r:id="Rd7e1b00d45c84298"/>
-    <p:sldId xmlns:r="http://schemas.openxmlformats.org/officeDocument/2006/relationships" id="261" r:id="R4603ebbaa0e947e1"/>
-    <p:sldId xmlns:r="http://schemas.openxmlformats.org/officeDocument/2006/relationships" id="262" r:id="Rba2f574fe6024782"/>
-    <p:sldId xmlns:r="http://schemas.openxmlformats.org/officeDocument/2006/relationships" id="263" r:id="Rc927d9fa045141b5"/>
-    <p:sldId xmlns:r="http://schemas.openxmlformats.org/officeDocument/2006/relationships" id="264" r:id="R634be6c1ca674f70"/>
-    <p:sldId xmlns:r="http://schemas.openxmlformats.org/officeDocument/2006/relationships" id="265" r:id="R3a8be0c26be14cbe"/>
-    <p:sldId xmlns:r="http://schemas.openxmlformats.org/officeDocument/2006/relationships" id="266" r:id="Rec574bfc163b4512"/>
-    <p:sldId xmlns:r="http://schemas.openxmlformats.org/officeDocument/2006/relationships" id="267" r:id="R52f58f2c9b914913"/>
-    <p:sldId xmlns:r="http://schemas.openxmlformats.org/officeDocument/2006/relationships" id="268" r:id="R378cb4198ef740b2"/>
-    <p:sldId xmlns:r="http://schemas.openxmlformats.org/officeDocument/2006/relationships" id="269" r:id="R79e2ea5a27954717"/>
-    <p:sldId xmlns:r="http://schemas.openxmlformats.org/officeDocument/2006/relationships" id="270" r:id="R10a6688b7628414c"/>
-    <p:sldId xmlns:r="http://schemas.openxmlformats.org/officeDocument/2006/relationships" id="271" r:id="R4d2e87171dd342e0"/>
-    <p:sldId xmlns:r="http://schemas.openxmlformats.org/officeDocument/2006/relationships" id="272" r:id="R2d76e89663074583"/>
-    <p:sldId xmlns:r="http://schemas.openxmlformats.org/officeDocument/2006/relationships" id="273" r:id="R3a640f3e1eba4390"/>
-    <p:sldId xmlns:r="http://schemas.openxmlformats.org/officeDocument/2006/relationships" id="274" r:id="R9bf1b9346696427c"/>
+    <p:sldId xmlns:r="http://schemas.openxmlformats.org/officeDocument/2006/relationships" id="256" r:id="R52a8a2272c4e429b"/>
+    <p:sldId xmlns:r="http://schemas.openxmlformats.org/officeDocument/2006/relationships" id="257" r:id="Rf38a0b9c18194b22"/>
+    <p:sldId xmlns:r="http://schemas.openxmlformats.org/officeDocument/2006/relationships" id="258" r:id="Rba9fc5c4b9274d04"/>
+    <p:sldId xmlns:r="http://schemas.openxmlformats.org/officeDocument/2006/relationships" id="259" r:id="R4201f9851e394e28"/>
+    <p:sldId xmlns:r="http://schemas.openxmlformats.org/officeDocument/2006/relationships" id="260" r:id="R390a45b19f8f417a"/>
+    <p:sldId xmlns:r="http://schemas.openxmlformats.org/officeDocument/2006/relationships" id="261" r:id="R0ba0a68307ad4470"/>
+    <p:sldId xmlns:r="http://schemas.openxmlformats.org/officeDocument/2006/relationships" id="262" r:id="Re02a334dd0484359"/>
+    <p:sldId xmlns:r="http://schemas.openxmlformats.org/officeDocument/2006/relationships" id="263" r:id="Rcb0ce5ea0d4b4ca6"/>
+    <p:sldId xmlns:r="http://schemas.openxmlformats.org/officeDocument/2006/relationships" id="264" r:id="R992feba1bde4476e"/>
+    <p:sldId xmlns:r="http://schemas.openxmlformats.org/officeDocument/2006/relationships" id="265" r:id="R3b0153cf0b0b4293"/>
+    <p:sldId xmlns:r="http://schemas.openxmlformats.org/officeDocument/2006/relationships" id="266" r:id="R28fe7fd85ef448d4"/>
+    <p:sldId xmlns:r="http://schemas.openxmlformats.org/officeDocument/2006/relationships" id="267" r:id="R387f2ff7ff434cd9"/>
+    <p:sldId xmlns:r="http://schemas.openxmlformats.org/officeDocument/2006/relationships" id="268" r:id="Ra220fa52f9744ad6"/>
+    <p:sldId xmlns:r="http://schemas.openxmlformats.org/officeDocument/2006/relationships" id="269" r:id="R2eb1cf548c7846f4"/>
+    <p:sldId xmlns:r="http://schemas.openxmlformats.org/officeDocument/2006/relationships" id="270" r:id="Rd62d80c101d244b3"/>
+    <p:sldId xmlns:r="http://schemas.openxmlformats.org/officeDocument/2006/relationships" id="271" r:id="R4ea9c88e5dc24b59"/>
+    <p:sldId xmlns:r="http://schemas.openxmlformats.org/officeDocument/2006/relationships" id="272" r:id="Rb74ffbac44124d92"/>
+    <p:sldId xmlns:r="http://schemas.openxmlformats.org/officeDocument/2006/relationships" id="273" r:id="R5e6b7a26e8c54bd0"/>
+    <p:sldId xmlns:r="http://schemas.openxmlformats.org/officeDocument/2006/relationships" id="274" r:id="R9130338963914120"/>
   </p:sldIdLst>
   <p:sldSz cx="12191695" cy="6858000"/>
   <p:notesSz cx="6858000" cy="9144000"/>
@@ -753,10 +753,22 @@
           <a:lstStyle xmlns:a="http://schemas.openxmlformats.org/drawingml/2006/main"/>
           <a:p xmlns:a="http://schemas.openxmlformats.org/drawingml/2006/main">
             <a:r>
-              <a:t>EBAI 技术实现（建议 60 秒）
-EBAI 从远程索引开始，经过安全门、暂存缓存、原子替换和语义映射后进入 BAI 用户目录。
-资源限制、路径校验和来源标记保证安装过程可控、可追溯、不会留下半安装状态。
-命令、Agent、规则、技能和 Hook 使用不同映射规则，不是简单文本替换。</a:t>
+              <a:t>EBAI 产品能力体系（建议 60 秒）</a:t>
+            </a:r>
+          </a:p>
+          <a:p xmlns:a="http://schemas.openxmlformats.org/drawingml/2006/main">
+            <a:r>
+              <a:t>EBAI 的产品定义是 BAI Work 面向用户的能力体系；来源与安装只属于内部交付方式。</a:t>
+            </a:r>
+          </a:p>
+          <a:p xmlns:a="http://schemas.openxmlformats.org/drawingml/2006/main">
+            <a:r>
+              <a:t>当前 Commands 和 Skills 可被运行时加载，Agents 以命令工作流接入，Rules 以 Skill 指令接入。</a:t>
+            </a:r>
+          </a:p>
+          <a:p xmlns:a="http://schemas.openxmlformats.org/drawingml/2006/main">
+            <a:r>
+              <a:t>Hooks 当前仅生成默认关闭的 manifest；来源与安装是内部交付方式，不定义 EBAI 的产品身份。</a:t>
             </a:r>
           </a:p>
         </p:txBody>
@@ -826,10 +838,22 @@
           <a:lstStyle xmlns:a="http://schemas.openxmlformats.org/drawingml/2006/main"/>
           <a:p xmlns:a="http://schemas.openxmlformats.org/drawingml/2006/main">
             <a:r>
-              <a:t>EBAI Hook 安全（建议 50 秒）
-Hook 转换为 BAI 项目级 TOML，但全局 manifest 默认始终关闭。
-只有用户明确选择受信任工作区后，才会写入项目级 hooks.toml。
-这种设计把高价值自动化能力与执行信任分开，避免安装即执行。</a:t>
+              <a:t>EBAI Hook 安全（建议 50 秒）</a:t>
+            </a:r>
+          </a:p>
+          <a:p xmlns:a="http://schemas.openxmlformats.org/drawingml/2006/main">
+            <a:r>
+              <a:t>Hook 已作为 EBAI 产品能力之一被建模，覆盖消息、会话和工具调用生命周期。</a:t>
+            </a:r>
+          </a:p>
+          <a:p xmlns:a="http://schemas.openxmlformats.org/drawingml/2006/main">
+            <a:r>
+              <a:t>当前交付范围是生成默认关闭的 manifest，设置页开关禁用，BAI Code 0.9.1 也没有 Hook 执行契约。</a:t>
+            </a:r>
+          </a:p>
+          <a:p xmlns:a="http://schemas.openxmlformats.org/drawingml/2006/main">
+            <a:r>
+              <a:t>因此答辩只宣称能力定义、配置边界与安全策略已实现，不把 Hook 冒充为已执行。</a:t>
             </a:r>
           </a:p>
         </p:txBody>
@@ -1680,7 +1704,7 @@
           </a:p>
           <a:p xmlns:a="http://schemas.openxmlformats.org/drawingml/2006/main">
             <a:r>
-              <a:t>EBAI 强调安装、映射与启用的安全边界，不用无法离线复现的资源数量包装完成度。</a:t>
+              <a:t>EBAI 的 Commands、Agents、Skills、Rules 和 Hooks 是 BAI Work 面向用户的产品能力；来源与安装不定义它的产品身份。</a:t>
             </a:r>
           </a:p>
         </p:txBody>
@@ -2064,7 +2088,7 @@
   </p:cSld>
   <p:clrMap bg1="lt1" tx1="dk1" bg2="lt2" tx2="dk2" accent1="accent1" accent2="accent2" accent3="accent3" accent4="accent4" accent5="accent5" accent6="accent6" hlink="hlink" folHlink="folHlink"/>
   <p:sldLayoutIdLst>
-    <p:sldLayoutId xmlns:r="http://schemas.openxmlformats.org/officeDocument/2006/relationships" id="2147483649" r:id="R1a2d11c59ce04c08"/>
+    <p:sldLayoutId xmlns:r="http://schemas.openxmlformats.org/officeDocument/2006/relationships" id="2147483649" r:id="R03eef30da34f4454"/>
   </p:sldLayoutIdLst>
   <p:hf sldNum="0" hdr="0" ftr="0" dt="0"/>
   <p:txStyles>
@@ -2635,7 +2659,7 @@
           <p:cNvPr id="2" name="Shape 0">
             <a:extLst xmlns:a="http://schemas.openxmlformats.org/drawingml/2006/main">
               <a:ext uri="{FF2B5EF4-FFF2-40B4-BE49-F238E27FC236}">
-                <a16:creationId xmlns:a16="http://schemas.microsoft.com/office/drawing/2014/main" id="{670AD96C-C2F4-4BA6-9D5B-91FD2D5863AE}"/>
+                <a16:creationId xmlns:a16="http://schemas.microsoft.com/office/drawing/2014/main" id="{FB835E6B-DDEA-4910-9325-558BB267415A}"/>
               </a:ext>
             </a:extLst>
           </p:cNvPr>
@@ -2668,7 +2692,7 @@
           <p:cNvPr id="3" name="Shape 1">
             <a:extLst xmlns:a="http://schemas.openxmlformats.org/drawingml/2006/main">
               <a:ext uri="{FF2B5EF4-FFF2-40B4-BE49-F238E27FC236}">
-                <a16:creationId xmlns:a16="http://schemas.microsoft.com/office/drawing/2014/main" id="{8B9D5F2B-3580-48E7-BDC5-6CC992717DDB}"/>
+                <a16:creationId xmlns:a16="http://schemas.microsoft.com/office/drawing/2014/main" id="{42DC7D97-279D-4441-9BC8-A0C35FED198F}"/>
               </a:ext>
             </a:extLst>
           </p:cNvPr>
@@ -2707,7 +2731,7 @@
           <p:nvPr/>
         </p:nvPicPr>
         <p:blipFill>
-          <a:blip xmlns:r="http://schemas.openxmlformats.org/officeDocument/2006/relationships" xmlns:a="http://schemas.openxmlformats.org/drawingml/2006/main" r:embed="R410f288ba26240b9"/>
+          <a:blip xmlns:r="http://schemas.openxmlformats.org/officeDocument/2006/relationships" xmlns:a="http://schemas.openxmlformats.org/drawingml/2006/main" r:embed="R0041f6dfc1fc4269"/>
           <a:stretch xmlns:a="http://schemas.openxmlformats.org/drawingml/2006/main">
             <a:fillRect l="0" t="0" r="0" b="0"/>
           </a:stretch>
@@ -2727,7 +2751,7 @@
           <p:cNvPr id="5" name="Shape 2">
             <a:extLst xmlns:a="http://schemas.openxmlformats.org/drawingml/2006/main">
               <a:ext uri="{FF2B5EF4-FFF2-40B4-BE49-F238E27FC236}">
-                <a16:creationId xmlns:a16="http://schemas.microsoft.com/office/drawing/2014/main" id="{D4334B81-6F94-4110-9BBC-88EB7CA9EF09}"/>
+                <a16:creationId xmlns:a16="http://schemas.microsoft.com/office/drawing/2014/main" id="{484E7764-B5A7-433C-9C3F-C61AECFD6B0F}"/>
               </a:ext>
             </a:extLst>
           </p:cNvPr>
@@ -2760,7 +2784,7 @@
           <p:cNvPr id="6" name="Text 3">
             <a:extLst xmlns:a="http://schemas.openxmlformats.org/drawingml/2006/main">
               <a:ext uri="{FF2B5EF4-FFF2-40B4-BE49-F238E27FC236}">
-                <a16:creationId xmlns:a16="http://schemas.microsoft.com/office/drawing/2014/main" id="{91614ADF-D1F3-44B2-BCF2-61BB73F1C07F}"/>
+                <a16:creationId xmlns:a16="http://schemas.microsoft.com/office/drawing/2014/main" id="{7841CA46-02A9-4E1C-A520-F3C32018AABD}"/>
               </a:ext>
             </a:extLst>
           </p:cNvPr>
@@ -2807,7 +2831,7 @@
           <p:cNvPr id="7" name="Shape 4">
             <a:extLst xmlns:a="http://schemas.openxmlformats.org/drawingml/2006/main">
               <a:ext uri="{FF2B5EF4-FFF2-40B4-BE49-F238E27FC236}">
-                <a16:creationId xmlns:a16="http://schemas.microsoft.com/office/drawing/2014/main" id="{B35C234C-B264-4069-BE62-B339792125CA}"/>
+                <a16:creationId xmlns:a16="http://schemas.microsoft.com/office/drawing/2014/main" id="{148F293B-A20D-41FC-8E0A-415AB82CDB52}"/>
               </a:ext>
             </a:extLst>
           </p:cNvPr>
@@ -2840,7 +2864,7 @@
           <p:cNvPr id="8" name="Text 5">
             <a:extLst xmlns:a="http://schemas.openxmlformats.org/drawingml/2006/main">
               <a:ext uri="{FF2B5EF4-FFF2-40B4-BE49-F238E27FC236}">
-                <a16:creationId xmlns:a16="http://schemas.microsoft.com/office/drawing/2014/main" id="{7A7BAA63-662B-4B13-AA7C-170A681A49F0}"/>
+                <a16:creationId xmlns:a16="http://schemas.microsoft.com/office/drawing/2014/main" id="{DC4C7190-E5AB-4291-BA29-DB9170E03281}"/>
               </a:ext>
             </a:extLst>
           </p:cNvPr>
@@ -2891,7 +2915,7 @@
           <p:nvPr/>
         </p:nvPicPr>
         <p:blipFill>
-          <a:blip xmlns:r="http://schemas.openxmlformats.org/officeDocument/2006/relationships" xmlns:a="http://schemas.openxmlformats.org/drawingml/2006/main" r:embed="R5c9c27543df246e8"/>
+          <a:blip xmlns:r="http://schemas.openxmlformats.org/officeDocument/2006/relationships" xmlns:a="http://schemas.openxmlformats.org/drawingml/2006/main" r:embed="Rfcc2a7e737934c86"/>
           <a:stretch xmlns:a="http://schemas.openxmlformats.org/drawingml/2006/main">
             <a:fillRect l="0" t="0" r="0" b="0"/>
           </a:stretch>
@@ -2911,7 +2935,7 @@
           <p:cNvPr id="10" name="Text 6">
             <a:extLst xmlns:a="http://schemas.openxmlformats.org/drawingml/2006/main">
               <a:ext uri="{FF2B5EF4-FFF2-40B4-BE49-F238E27FC236}">
-                <a16:creationId xmlns:a16="http://schemas.microsoft.com/office/drawing/2014/main" id="{CF701DFE-A037-48FE-AD20-8C3403566614}"/>
+                <a16:creationId xmlns:a16="http://schemas.microsoft.com/office/drawing/2014/main" id="{81643A12-8218-414C-8FE5-5964358129EF}"/>
               </a:ext>
             </a:extLst>
           </p:cNvPr>
@@ -2958,7 +2982,7 @@
           <p:cNvPr id="11" name="Text 7">
             <a:extLst xmlns:a="http://schemas.openxmlformats.org/drawingml/2006/main">
               <a:ext uri="{FF2B5EF4-FFF2-40B4-BE49-F238E27FC236}">
-                <a16:creationId xmlns:a16="http://schemas.microsoft.com/office/drawing/2014/main" id="{2BEA6D1C-1DA1-401A-8137-E6EAB65CCEA6}"/>
+                <a16:creationId xmlns:a16="http://schemas.microsoft.com/office/drawing/2014/main" id="{75FACD4C-9623-4BAA-BECC-18B8D3855891}"/>
               </a:ext>
             </a:extLst>
           </p:cNvPr>
@@ -3005,7 +3029,7 @@
           <p:cNvPr id="12" name="Shape 8">
             <a:extLst xmlns:a="http://schemas.openxmlformats.org/drawingml/2006/main">
               <a:ext uri="{FF2B5EF4-FFF2-40B4-BE49-F238E27FC236}">
-                <a16:creationId xmlns:a16="http://schemas.microsoft.com/office/drawing/2014/main" id="{995B8186-9A38-436D-A82D-AFF140CD3819}"/>
+                <a16:creationId xmlns:a16="http://schemas.microsoft.com/office/drawing/2014/main" id="{F2AAC217-014C-499F-9FC1-8401F989BBFA}"/>
               </a:ext>
             </a:extLst>
           </p:cNvPr>
@@ -3040,7 +3064,7 @@
           <p:cNvPr id="13" name="Text 9">
             <a:extLst xmlns:a="http://schemas.openxmlformats.org/drawingml/2006/main">
               <a:ext uri="{FF2B5EF4-FFF2-40B4-BE49-F238E27FC236}">
-                <a16:creationId xmlns:a16="http://schemas.microsoft.com/office/drawing/2014/main" id="{416A4764-9B71-4B43-B148-04EAE6BA193F}"/>
+                <a16:creationId xmlns:a16="http://schemas.microsoft.com/office/drawing/2014/main" id="{0E4C1F2D-5608-4DB5-BE1B-4085698B98D0}"/>
               </a:ext>
             </a:extLst>
           </p:cNvPr>
@@ -3087,7 +3111,7 @@
           <p:cNvPr id="14" name="Shape 10">
             <a:extLst xmlns:a="http://schemas.openxmlformats.org/drawingml/2006/main">
               <a:ext uri="{FF2B5EF4-FFF2-40B4-BE49-F238E27FC236}">
-                <a16:creationId xmlns:a16="http://schemas.microsoft.com/office/drawing/2014/main" id="{EFE18E41-2400-495A-AD36-F7AEEA03D10F}"/>
+                <a16:creationId xmlns:a16="http://schemas.microsoft.com/office/drawing/2014/main" id="{60D63D13-5A39-4F44-B222-8FA72E98CA1A}"/>
               </a:ext>
             </a:extLst>
           </p:cNvPr>
@@ -3122,7 +3146,7 @@
           <p:cNvPr id="15" name="Text 11">
             <a:extLst xmlns:a="http://schemas.openxmlformats.org/drawingml/2006/main">
               <a:ext uri="{FF2B5EF4-FFF2-40B4-BE49-F238E27FC236}">
-                <a16:creationId xmlns:a16="http://schemas.microsoft.com/office/drawing/2014/main" id="{3D452CD8-A63B-4AC1-949A-618BE13F24BE}"/>
+                <a16:creationId xmlns:a16="http://schemas.microsoft.com/office/drawing/2014/main" id="{DB2482F4-8E7D-4920-B979-B647C93E7AF3}"/>
               </a:ext>
             </a:extLst>
           </p:cNvPr>
@@ -3169,7 +3193,7 @@
           <p:cNvPr id="16" name="Shape 12">
             <a:extLst xmlns:a="http://schemas.openxmlformats.org/drawingml/2006/main">
               <a:ext uri="{FF2B5EF4-FFF2-40B4-BE49-F238E27FC236}">
-                <a16:creationId xmlns:a16="http://schemas.microsoft.com/office/drawing/2014/main" id="{B3DFEB0D-A38A-475A-AD7A-21918561592B}"/>
+                <a16:creationId xmlns:a16="http://schemas.microsoft.com/office/drawing/2014/main" id="{EEB61189-EC06-463D-AE7F-A5F554D722D2}"/>
               </a:ext>
             </a:extLst>
           </p:cNvPr>
@@ -3204,7 +3228,7 @@
           <p:cNvPr id="17" name="Text 13">
             <a:extLst xmlns:a="http://schemas.openxmlformats.org/drawingml/2006/main">
               <a:ext uri="{FF2B5EF4-FFF2-40B4-BE49-F238E27FC236}">
-                <a16:creationId xmlns:a16="http://schemas.microsoft.com/office/drawing/2014/main" id="{C8D8DFD4-3A34-49A7-BFCF-482F78A56F89}"/>
+                <a16:creationId xmlns:a16="http://schemas.microsoft.com/office/drawing/2014/main" id="{A772CBD1-07DD-41A7-9ACE-47D77458F165}"/>
               </a:ext>
             </a:extLst>
           </p:cNvPr>
@@ -3251,7 +3275,7 @@
           <p:cNvPr id="18" name="Shape 14">
             <a:extLst xmlns:a="http://schemas.openxmlformats.org/drawingml/2006/main">
               <a:ext uri="{FF2B5EF4-FFF2-40B4-BE49-F238E27FC236}">
-                <a16:creationId xmlns:a16="http://schemas.microsoft.com/office/drawing/2014/main" id="{715A5BC2-97DA-4001-8223-E45BA30FD8E4}"/>
+                <a16:creationId xmlns:a16="http://schemas.microsoft.com/office/drawing/2014/main" id="{7582C792-A2B0-4C9B-869A-3E75CE66CFE1}"/>
               </a:ext>
             </a:extLst>
           </p:cNvPr>
@@ -3286,7 +3310,7 @@
           <p:cNvPr id="19" name="Text 15">
             <a:extLst xmlns:a="http://schemas.openxmlformats.org/drawingml/2006/main">
               <a:ext uri="{FF2B5EF4-FFF2-40B4-BE49-F238E27FC236}">
-                <a16:creationId xmlns:a16="http://schemas.microsoft.com/office/drawing/2014/main" id="{45F2910A-8B1B-4C03-A972-F3E696FC30DE}"/>
+                <a16:creationId xmlns:a16="http://schemas.microsoft.com/office/drawing/2014/main" id="{F8F2DE04-E71C-40D4-B9B5-CD799D932DCA}"/>
               </a:ext>
             </a:extLst>
           </p:cNvPr>
@@ -3333,7 +3357,7 @@
           <p:cNvPr id="20" name="Shape 16">
             <a:extLst xmlns:a="http://schemas.openxmlformats.org/drawingml/2006/main">
               <a:ext uri="{FF2B5EF4-FFF2-40B4-BE49-F238E27FC236}">
-                <a16:creationId xmlns:a16="http://schemas.microsoft.com/office/drawing/2014/main" id="{E6349136-6863-481A-ACC7-5C62751E0A97}"/>
+                <a16:creationId xmlns:a16="http://schemas.microsoft.com/office/drawing/2014/main" id="{B4B3DB54-E7B1-419E-BEF8-1BDD3483C9A2}"/>
               </a:ext>
             </a:extLst>
           </p:cNvPr>
@@ -3368,7 +3392,7 @@
           <p:cNvPr id="21" name="Text 17">
             <a:extLst xmlns:a="http://schemas.openxmlformats.org/drawingml/2006/main">
               <a:ext uri="{FF2B5EF4-FFF2-40B4-BE49-F238E27FC236}">
-                <a16:creationId xmlns:a16="http://schemas.microsoft.com/office/drawing/2014/main" id="{2DE4751A-6398-4B78-B746-87C83C954121}"/>
+                <a16:creationId xmlns:a16="http://schemas.microsoft.com/office/drawing/2014/main" id="{CE8E3ED2-8AE8-4C15-9FA3-9D1314184B2D}"/>
               </a:ext>
             </a:extLst>
           </p:cNvPr>
@@ -3415,7 +3439,7 @@
           <p:cNvPr id="22" name="Text 18">
             <a:extLst xmlns:a="http://schemas.openxmlformats.org/drawingml/2006/main">
               <a:ext uri="{FF2B5EF4-FFF2-40B4-BE49-F238E27FC236}">
-                <a16:creationId xmlns:a16="http://schemas.microsoft.com/office/drawing/2014/main" id="{46621D23-BFE8-4333-A4A3-DA59622A346B}"/>
+                <a16:creationId xmlns:a16="http://schemas.microsoft.com/office/drawing/2014/main" id="{03563FE3-6D16-43F5-9E52-0D2C5E55AF6F}"/>
               </a:ext>
             </a:extLst>
           </p:cNvPr>
@@ -3462,7 +3486,7 @@
           <p:cNvPr id="23" name="Text 19">
             <a:extLst xmlns:a="http://schemas.openxmlformats.org/drawingml/2006/main">
               <a:ext uri="{FF2B5EF4-FFF2-40B4-BE49-F238E27FC236}">
-                <a16:creationId xmlns:a16="http://schemas.microsoft.com/office/drawing/2014/main" id="{67CBE128-BA0C-40AD-A479-68B620A66CDC}"/>
+                <a16:creationId xmlns:a16="http://schemas.microsoft.com/office/drawing/2014/main" id="{015014C8-3EDB-44E4-8FAD-19826EBE02BA}"/>
               </a:ext>
             </a:extLst>
           </p:cNvPr>
@@ -3509,7 +3533,7 @@
           <p:cNvPr id="24" name="Text 20">
             <a:extLst xmlns:a="http://schemas.openxmlformats.org/drawingml/2006/main">
               <a:ext uri="{FF2B5EF4-FFF2-40B4-BE49-F238E27FC236}">
-                <a16:creationId xmlns:a16="http://schemas.microsoft.com/office/drawing/2014/main" id="{F4607C1F-B56E-40AA-94F3-0FCAF628D818}"/>
+                <a16:creationId xmlns:a16="http://schemas.microsoft.com/office/drawing/2014/main" id="{82609AE9-708A-44A6-8A7B-CF7668EED781}"/>
               </a:ext>
             </a:extLst>
           </p:cNvPr>
@@ -3554,7 +3578,7 @@
     </p:spTree>
     <p:extLst>
       <p:ext uri="{BB962C8B-B14F-4D97-AF65-F5344CB8AC3E}">
-        <p14:creationId xmlns:p14="http://schemas.microsoft.com/office/powerpoint/2010/main" val="1853965306"/>
+        <p14:creationId xmlns:p14="http://schemas.microsoft.com/office/powerpoint/2010/main" val="493482026"/>
       </p:ext>
     </p:extLst>
   </p:cSld>
@@ -3585,7 +3609,7 @@
           <p:cNvPr id="2" name="Text 0">
             <a:extLst xmlns:a="http://schemas.openxmlformats.org/drawingml/2006/main">
               <a:ext uri="{FF2B5EF4-FFF2-40B4-BE49-F238E27FC236}">
-                <a16:creationId xmlns:a16="http://schemas.microsoft.com/office/drawing/2014/main" id="{2BD80F0E-5A66-49A5-A3A1-B51FCC2302B5}"/>
+                <a16:creationId xmlns:a16="http://schemas.microsoft.com/office/drawing/2014/main" id="{64AA104D-F433-4182-9B91-A26702CD2724}"/>
               </a:ext>
             </a:extLst>
           </p:cNvPr>
@@ -3632,7 +3656,7 @@
           <p:cNvPr id="3" name="Text 1">
             <a:extLst xmlns:a="http://schemas.openxmlformats.org/drawingml/2006/main">
               <a:ext uri="{FF2B5EF4-FFF2-40B4-BE49-F238E27FC236}">
-                <a16:creationId xmlns:a16="http://schemas.microsoft.com/office/drawing/2014/main" id="{06322609-176D-4512-ABDE-BF537A457EDE}"/>
+                <a16:creationId xmlns:a16="http://schemas.microsoft.com/office/drawing/2014/main" id="{BAFE0FB4-AC8A-4E1D-A8F3-0D663D943520}"/>
               </a:ext>
             </a:extLst>
           </p:cNvPr>
@@ -3679,7 +3703,7 @@
           <p:cNvPr id="4" name="Shape 2">
             <a:extLst xmlns:a="http://schemas.openxmlformats.org/drawingml/2006/main">
               <a:ext uri="{FF2B5EF4-FFF2-40B4-BE49-F238E27FC236}">
-                <a16:creationId xmlns:a16="http://schemas.microsoft.com/office/drawing/2014/main" id="{23B9BBF0-FCA1-49D5-8D00-F6D38B7F5593}"/>
+                <a16:creationId xmlns:a16="http://schemas.microsoft.com/office/drawing/2014/main" id="{1DA7333C-BE35-4A07-8909-ED4227C4C24B}"/>
               </a:ext>
             </a:extLst>
           </p:cNvPr>
@@ -3714,7 +3738,7 @@
           <p:cNvPr id="5" name="Text 3">
             <a:extLst xmlns:a="http://schemas.openxmlformats.org/drawingml/2006/main">
               <a:ext uri="{FF2B5EF4-FFF2-40B4-BE49-F238E27FC236}">
-                <a16:creationId xmlns:a16="http://schemas.microsoft.com/office/drawing/2014/main" id="{DEC931C7-FF47-4427-974C-5452D72E8B22}"/>
+                <a16:creationId xmlns:a16="http://schemas.microsoft.com/office/drawing/2014/main" id="{545B0B75-36F2-4552-86BB-98A1571F21A6}"/>
               </a:ext>
             </a:extLst>
           </p:cNvPr>
@@ -3761,7 +3785,7 @@
           <p:cNvPr id="6" name="Shape 4">
             <a:extLst xmlns:a="http://schemas.openxmlformats.org/drawingml/2006/main">
               <a:ext uri="{FF2B5EF4-FFF2-40B4-BE49-F238E27FC236}">
-                <a16:creationId xmlns:a16="http://schemas.microsoft.com/office/drawing/2014/main" id="{8E52FF7F-FEF6-48E1-8286-F38EFD5CAF02}"/>
+                <a16:creationId xmlns:a16="http://schemas.microsoft.com/office/drawing/2014/main" id="{A64D3248-6DFD-49F4-87BB-60AD46D74AD9}"/>
               </a:ext>
             </a:extLst>
           </p:cNvPr>
@@ -3792,7 +3816,7 @@
           <p:cNvPr id="7" name="Shape 5">
             <a:extLst xmlns:a="http://schemas.openxmlformats.org/drawingml/2006/main">
               <a:ext uri="{FF2B5EF4-FFF2-40B4-BE49-F238E27FC236}">
-                <a16:creationId xmlns:a16="http://schemas.microsoft.com/office/drawing/2014/main" id="{755AB828-AAC8-4C09-A463-513541542F34}"/>
+                <a16:creationId xmlns:a16="http://schemas.microsoft.com/office/drawing/2014/main" id="{F0631058-F763-4109-BCA9-8BCB09AADD63}"/>
               </a:ext>
             </a:extLst>
           </p:cNvPr>
@@ -3827,7 +3851,7 @@
           <p:cNvPr id="8" name="Shape 6">
             <a:extLst xmlns:a="http://schemas.openxmlformats.org/drawingml/2006/main">
               <a:ext uri="{FF2B5EF4-FFF2-40B4-BE49-F238E27FC236}">
-                <a16:creationId xmlns:a16="http://schemas.microsoft.com/office/drawing/2014/main" id="{DD63AE0F-6613-48E9-B68B-EA3AFFA91658}"/>
+                <a16:creationId xmlns:a16="http://schemas.microsoft.com/office/drawing/2014/main" id="{A2D25AF8-74B8-406E-95A3-1E7E83DBC422}"/>
               </a:ext>
             </a:extLst>
           </p:cNvPr>
@@ -3862,7 +3886,7 @@
           <p:cNvPr id="9" name="Text 7">
             <a:extLst xmlns:a="http://schemas.openxmlformats.org/drawingml/2006/main">
               <a:ext uri="{FF2B5EF4-FFF2-40B4-BE49-F238E27FC236}">
-                <a16:creationId xmlns:a16="http://schemas.microsoft.com/office/drawing/2014/main" id="{686D58C1-B557-44AE-BE4E-368823F3C0EC}"/>
+                <a16:creationId xmlns:a16="http://schemas.microsoft.com/office/drawing/2014/main" id="{329CCC0D-B49B-4573-8592-DBB76B13D3C6}"/>
               </a:ext>
             </a:extLst>
           </p:cNvPr>
@@ -3909,7 +3933,7 @@
           <p:cNvPr id="10" name="Text 8">
             <a:extLst xmlns:a="http://schemas.openxmlformats.org/drawingml/2006/main">
               <a:ext uri="{FF2B5EF4-FFF2-40B4-BE49-F238E27FC236}">
-                <a16:creationId xmlns:a16="http://schemas.microsoft.com/office/drawing/2014/main" id="{58983C00-19D0-485A-929C-B02790D4F925}"/>
+                <a16:creationId xmlns:a16="http://schemas.microsoft.com/office/drawing/2014/main" id="{26E7CD40-592D-416E-AFF4-2764C7D144F5}"/>
               </a:ext>
             </a:extLst>
           </p:cNvPr>
@@ -3956,7 +3980,7 @@
           <p:cNvPr id="11" name="Text 9">
             <a:extLst xmlns:a="http://schemas.openxmlformats.org/drawingml/2006/main">
               <a:ext uri="{FF2B5EF4-FFF2-40B4-BE49-F238E27FC236}">
-                <a16:creationId xmlns:a16="http://schemas.microsoft.com/office/drawing/2014/main" id="{E0A67947-483F-49CC-80B8-66BF4648EF4A}"/>
+                <a16:creationId xmlns:a16="http://schemas.microsoft.com/office/drawing/2014/main" id="{F3AFF375-F398-47EC-820D-8DE42E8FAFF7}"/>
               </a:ext>
             </a:extLst>
           </p:cNvPr>
@@ -4003,7 +4027,7 @@
           <p:cNvPr id="12" name="Text 10">
             <a:extLst xmlns:a="http://schemas.openxmlformats.org/drawingml/2006/main">
               <a:ext uri="{FF2B5EF4-FFF2-40B4-BE49-F238E27FC236}">
-                <a16:creationId xmlns:a16="http://schemas.microsoft.com/office/drawing/2014/main" id="{94A1E8CC-93A2-4ECB-A27A-98877E351EB8}"/>
+                <a16:creationId xmlns:a16="http://schemas.microsoft.com/office/drawing/2014/main" id="{8702AD14-4DCB-4F58-A3C7-0B885EAF993E}"/>
               </a:ext>
             </a:extLst>
           </p:cNvPr>
@@ -4050,7 +4074,7 @@
           <p:cNvPr id="13" name="Text 11">
             <a:extLst xmlns:a="http://schemas.openxmlformats.org/drawingml/2006/main">
               <a:ext uri="{FF2B5EF4-FFF2-40B4-BE49-F238E27FC236}">
-                <a16:creationId xmlns:a16="http://schemas.microsoft.com/office/drawing/2014/main" id="{F0741E5E-002D-45AA-A511-EB6733F5C76D}"/>
+                <a16:creationId xmlns:a16="http://schemas.microsoft.com/office/drawing/2014/main" id="{ACCB542B-8FF7-4A80-8B57-ED5C579DAAD4}"/>
               </a:ext>
             </a:extLst>
           </p:cNvPr>
@@ -4097,7 +4121,7 @@
           <p:cNvPr id="14" name="Shape 12">
             <a:extLst xmlns:a="http://schemas.openxmlformats.org/drawingml/2006/main">
               <a:ext uri="{FF2B5EF4-FFF2-40B4-BE49-F238E27FC236}">
-                <a16:creationId xmlns:a16="http://schemas.microsoft.com/office/drawing/2014/main" id="{7D9AF714-5ED3-4883-9BCC-94C37F1478A5}"/>
+                <a16:creationId xmlns:a16="http://schemas.microsoft.com/office/drawing/2014/main" id="{F69FF9FD-E9C5-4F95-94FE-AD2DE75CFFD6}"/>
               </a:ext>
             </a:extLst>
           </p:cNvPr>
@@ -4132,7 +4156,7 @@
           <p:cNvPr id="15" name="Shape 13">
             <a:extLst xmlns:a="http://schemas.openxmlformats.org/drawingml/2006/main">
               <a:ext uri="{FF2B5EF4-FFF2-40B4-BE49-F238E27FC236}">
-                <a16:creationId xmlns:a16="http://schemas.microsoft.com/office/drawing/2014/main" id="{059B06A6-E835-4AFB-9D2E-6833A1DF3C42}"/>
+                <a16:creationId xmlns:a16="http://schemas.microsoft.com/office/drawing/2014/main" id="{BFBEA14F-8909-4468-9C71-3844ED006F22}"/>
               </a:ext>
             </a:extLst>
           </p:cNvPr>
@@ -4167,7 +4191,7 @@
           <p:cNvPr id="16" name="Text 14">
             <a:extLst xmlns:a="http://schemas.openxmlformats.org/drawingml/2006/main">
               <a:ext uri="{FF2B5EF4-FFF2-40B4-BE49-F238E27FC236}">
-                <a16:creationId xmlns:a16="http://schemas.microsoft.com/office/drawing/2014/main" id="{321B97DB-C590-4D4C-AD2D-D978CD947020}"/>
+                <a16:creationId xmlns:a16="http://schemas.microsoft.com/office/drawing/2014/main" id="{954FCB75-C812-4590-A5D9-863759319088}"/>
               </a:ext>
             </a:extLst>
           </p:cNvPr>
@@ -4214,7 +4238,7 @@
           <p:cNvPr id="17" name="Text 15">
             <a:extLst xmlns:a="http://schemas.openxmlformats.org/drawingml/2006/main">
               <a:ext uri="{FF2B5EF4-FFF2-40B4-BE49-F238E27FC236}">
-                <a16:creationId xmlns:a16="http://schemas.microsoft.com/office/drawing/2014/main" id="{19FB647C-7C6A-46FA-9548-8C4BF21F6177}"/>
+                <a16:creationId xmlns:a16="http://schemas.microsoft.com/office/drawing/2014/main" id="{68B81649-929C-4065-90F3-8267AEE6010F}"/>
               </a:ext>
             </a:extLst>
           </p:cNvPr>
@@ -4261,7 +4285,7 @@
           <p:cNvPr id="18" name="Text 16">
             <a:extLst xmlns:a="http://schemas.openxmlformats.org/drawingml/2006/main">
               <a:ext uri="{FF2B5EF4-FFF2-40B4-BE49-F238E27FC236}">
-                <a16:creationId xmlns:a16="http://schemas.microsoft.com/office/drawing/2014/main" id="{478AE509-052D-42C0-A5D4-5ED42F00405A}"/>
+                <a16:creationId xmlns:a16="http://schemas.microsoft.com/office/drawing/2014/main" id="{DF873A6E-6717-484C-8D69-5FFF38029DF8}"/>
               </a:ext>
             </a:extLst>
           </p:cNvPr>
@@ -4308,7 +4332,7 @@
           <p:cNvPr id="19" name="Text 17">
             <a:extLst xmlns:a="http://schemas.openxmlformats.org/drawingml/2006/main">
               <a:ext uri="{FF2B5EF4-FFF2-40B4-BE49-F238E27FC236}">
-                <a16:creationId xmlns:a16="http://schemas.microsoft.com/office/drawing/2014/main" id="{BB929015-3395-4712-964A-9CEBA23C4785}"/>
+                <a16:creationId xmlns:a16="http://schemas.microsoft.com/office/drawing/2014/main" id="{434E8950-D4EC-4A41-9241-FD152F6E3857}"/>
               </a:ext>
             </a:extLst>
           </p:cNvPr>
@@ -4355,7 +4379,7 @@
           <p:cNvPr id="20" name="Text 18">
             <a:extLst xmlns:a="http://schemas.openxmlformats.org/drawingml/2006/main">
               <a:ext uri="{FF2B5EF4-FFF2-40B4-BE49-F238E27FC236}">
-                <a16:creationId xmlns:a16="http://schemas.microsoft.com/office/drawing/2014/main" id="{6898B573-208C-4B59-95E8-A6F34CF8E597}"/>
+                <a16:creationId xmlns:a16="http://schemas.microsoft.com/office/drawing/2014/main" id="{10546948-C65D-4554-919F-1989DEFEBC38}"/>
               </a:ext>
             </a:extLst>
           </p:cNvPr>
@@ -4402,7 +4426,7 @@
           <p:cNvPr id="21" name="Shape 19">
             <a:extLst xmlns:a="http://schemas.openxmlformats.org/drawingml/2006/main">
               <a:ext uri="{FF2B5EF4-FFF2-40B4-BE49-F238E27FC236}">
-                <a16:creationId xmlns:a16="http://schemas.microsoft.com/office/drawing/2014/main" id="{085A3217-DA91-4F72-86D2-1CD212CD5B3A}"/>
+                <a16:creationId xmlns:a16="http://schemas.microsoft.com/office/drawing/2014/main" id="{513D29F2-5552-4FF2-8705-77AAF7680F0D}"/>
               </a:ext>
             </a:extLst>
           </p:cNvPr>
@@ -4437,7 +4461,7 @@
           <p:cNvPr id="22" name="Shape 20">
             <a:extLst xmlns:a="http://schemas.openxmlformats.org/drawingml/2006/main">
               <a:ext uri="{FF2B5EF4-FFF2-40B4-BE49-F238E27FC236}">
-                <a16:creationId xmlns:a16="http://schemas.microsoft.com/office/drawing/2014/main" id="{A037904D-0194-4D7C-844B-7593672D626A}"/>
+                <a16:creationId xmlns:a16="http://schemas.microsoft.com/office/drawing/2014/main" id="{18817F49-ED7E-4AC1-A4D2-A82D4866AC3E}"/>
               </a:ext>
             </a:extLst>
           </p:cNvPr>
@@ -4472,7 +4496,7 @@
           <p:cNvPr id="23" name="Text 21">
             <a:extLst xmlns:a="http://schemas.openxmlformats.org/drawingml/2006/main">
               <a:ext uri="{FF2B5EF4-FFF2-40B4-BE49-F238E27FC236}">
-                <a16:creationId xmlns:a16="http://schemas.microsoft.com/office/drawing/2014/main" id="{D8106877-3093-40F4-A0A2-B8EBB885E919}"/>
+                <a16:creationId xmlns:a16="http://schemas.microsoft.com/office/drawing/2014/main" id="{B1D881D3-38A1-4452-907F-08889B47D281}"/>
               </a:ext>
             </a:extLst>
           </p:cNvPr>
@@ -4519,7 +4543,7 @@
           <p:cNvPr id="24" name="Text 22">
             <a:extLst xmlns:a="http://schemas.openxmlformats.org/drawingml/2006/main">
               <a:ext uri="{FF2B5EF4-FFF2-40B4-BE49-F238E27FC236}">
-                <a16:creationId xmlns:a16="http://schemas.microsoft.com/office/drawing/2014/main" id="{E264CB5F-D7C6-4800-89AA-F8D7280064EC}"/>
+                <a16:creationId xmlns:a16="http://schemas.microsoft.com/office/drawing/2014/main" id="{89F1E6DA-72C9-43A1-8BEA-81A447331BA5}"/>
               </a:ext>
             </a:extLst>
           </p:cNvPr>
@@ -4566,7 +4590,7 @@
           <p:cNvPr id="25" name="Text 23">
             <a:extLst xmlns:a="http://schemas.openxmlformats.org/drawingml/2006/main">
               <a:ext uri="{FF2B5EF4-FFF2-40B4-BE49-F238E27FC236}">
-                <a16:creationId xmlns:a16="http://schemas.microsoft.com/office/drawing/2014/main" id="{B76FBB48-69EF-4FDB-A51A-F1C3093F671A}"/>
+                <a16:creationId xmlns:a16="http://schemas.microsoft.com/office/drawing/2014/main" id="{76686AD2-E33D-4957-9B91-CF1FD86AE5B6}"/>
               </a:ext>
             </a:extLst>
           </p:cNvPr>
@@ -4613,7 +4637,7 @@
           <p:cNvPr id="26" name="Text 24">
             <a:extLst xmlns:a="http://schemas.openxmlformats.org/drawingml/2006/main">
               <a:ext uri="{FF2B5EF4-FFF2-40B4-BE49-F238E27FC236}">
-                <a16:creationId xmlns:a16="http://schemas.microsoft.com/office/drawing/2014/main" id="{77FA0072-C3A4-4418-A6A5-345B11308787}"/>
+                <a16:creationId xmlns:a16="http://schemas.microsoft.com/office/drawing/2014/main" id="{B082038A-24FF-411A-B231-100D8C960CB7}"/>
               </a:ext>
             </a:extLst>
           </p:cNvPr>
@@ -4660,7 +4684,7 @@
           <p:cNvPr id="27" name="Text 25">
             <a:extLst xmlns:a="http://schemas.openxmlformats.org/drawingml/2006/main">
               <a:ext uri="{FF2B5EF4-FFF2-40B4-BE49-F238E27FC236}">
-                <a16:creationId xmlns:a16="http://schemas.microsoft.com/office/drawing/2014/main" id="{3048C07F-EA75-4B02-B886-5E1E48D23B94}"/>
+                <a16:creationId xmlns:a16="http://schemas.microsoft.com/office/drawing/2014/main" id="{1E77A530-122A-4401-A217-9CB0AE27229A}"/>
               </a:ext>
             </a:extLst>
           </p:cNvPr>
@@ -4707,7 +4731,7 @@
           <p:cNvPr id="28" name="Shape 26">
             <a:extLst xmlns:a="http://schemas.openxmlformats.org/drawingml/2006/main">
               <a:ext uri="{FF2B5EF4-FFF2-40B4-BE49-F238E27FC236}">
-                <a16:creationId xmlns:a16="http://schemas.microsoft.com/office/drawing/2014/main" id="{A7244615-1D12-4E5E-8820-8C4FB1D4E582}"/>
+                <a16:creationId xmlns:a16="http://schemas.microsoft.com/office/drawing/2014/main" id="{0A4E8D4D-1E8D-4301-9EB1-4EC4F31123AD}"/>
               </a:ext>
             </a:extLst>
           </p:cNvPr>
@@ -4742,7 +4766,7 @@
           <p:cNvPr id="29" name="Text 27">
             <a:extLst xmlns:a="http://schemas.openxmlformats.org/drawingml/2006/main">
               <a:ext uri="{FF2B5EF4-FFF2-40B4-BE49-F238E27FC236}">
-                <a16:creationId xmlns:a16="http://schemas.microsoft.com/office/drawing/2014/main" id="{6807358F-4DEE-40F8-8488-DF341362B29B}"/>
+                <a16:creationId xmlns:a16="http://schemas.microsoft.com/office/drawing/2014/main" id="{0D059468-68D7-4538-BE3F-0DB105EA717A}"/>
               </a:ext>
             </a:extLst>
           </p:cNvPr>
@@ -4789,7 +4813,7 @@
           <p:cNvPr id="30" name="Text 28">
             <a:extLst xmlns:a="http://schemas.openxmlformats.org/drawingml/2006/main">
               <a:ext uri="{FF2B5EF4-FFF2-40B4-BE49-F238E27FC236}">
-                <a16:creationId xmlns:a16="http://schemas.microsoft.com/office/drawing/2014/main" id="{09C8D9AD-CC3D-4391-9BBB-1E5ECFAC43D9}"/>
+                <a16:creationId xmlns:a16="http://schemas.microsoft.com/office/drawing/2014/main" id="{36736BDB-3CA5-4992-B408-5A19781E8A0E}"/>
               </a:ext>
             </a:extLst>
           </p:cNvPr>
@@ -4836,7 +4860,7 @@
           <p:cNvPr id="31" name="Text 29">
             <a:extLst xmlns:a="http://schemas.openxmlformats.org/drawingml/2006/main">
               <a:ext uri="{FF2B5EF4-FFF2-40B4-BE49-F238E27FC236}">
-                <a16:creationId xmlns:a16="http://schemas.microsoft.com/office/drawing/2014/main" id="{255A510C-D4D9-4C70-85D3-6AFED3D4F5D9}"/>
+                <a16:creationId xmlns:a16="http://schemas.microsoft.com/office/drawing/2014/main" id="{416A169B-CAB4-4ACA-AE78-3C5676FFA53B}"/>
               </a:ext>
             </a:extLst>
           </p:cNvPr>
@@ -4881,7 +4905,7 @@
     </p:spTree>
     <p:extLst>
       <p:ext uri="{BB962C8B-B14F-4D97-AF65-F5344CB8AC3E}">
-        <p14:creationId xmlns:p14="http://schemas.microsoft.com/office/powerpoint/2010/main" val="449903512"/>
+        <p14:creationId xmlns:p14="http://schemas.microsoft.com/office/powerpoint/2010/main" val="943976179"/>
       </p:ext>
     </p:extLst>
   </p:cSld>
@@ -4912,7 +4936,7 @@
           <p:cNvPr id="2" name="Text 0">
             <a:extLst xmlns:a="http://schemas.openxmlformats.org/drawingml/2006/main">
               <a:ext uri="{FF2B5EF4-FFF2-40B4-BE49-F238E27FC236}">
-                <a16:creationId xmlns:a16="http://schemas.microsoft.com/office/drawing/2014/main" id="{55BDBC1E-FBCC-4120-83CF-DFB32DA54D02}"/>
+                <a16:creationId xmlns:a16="http://schemas.microsoft.com/office/drawing/2014/main" id="{81544A75-BF71-4BF4-A2F6-05BD78FF2D69}"/>
               </a:ext>
             </a:extLst>
           </p:cNvPr>
@@ -4933,7 +4957,7 @@
         </p:spPr>
         <p:txBody>
           <a:bodyPr xmlns:a="http://schemas.openxmlformats.org/drawingml/2006/main" wrap="square" lIns="0" tIns="0" rIns="0" bIns="0" anchor="ctr">
-            <a:normAutofit/>
+            <a:normAutofit fontScale="100000"/>
           </a:bodyPr>
           <a:lstStyle xmlns:a="http://schemas.openxmlformats.org/drawingml/2006/main"/>
           <a:p xmlns:a="http://schemas.openxmlformats.org/drawingml/2006/main">
@@ -4949,7 +4973,7 @@
                 <a:ea typeface="Aptos"/>
                 <a:cs typeface="Aptos"/>
               </a:rPr>
-              <a:t>EBAI TECHNICAL PIPELINE</a:t>
+              <a:t>EBAI PRODUCT CAPABILITY SYSTEM</a:t>
             </a:r>
           </a:p>
         </p:txBody>
@@ -4959,7 +4983,7 @@
           <p:cNvPr id="3" name="Text 1">
             <a:extLst xmlns:a="http://schemas.openxmlformats.org/drawingml/2006/main">
               <a:ext uri="{FF2B5EF4-FFF2-40B4-BE49-F238E27FC236}">
-                <a16:creationId xmlns:a16="http://schemas.microsoft.com/office/drawing/2014/main" id="{C21B1FA7-C706-43B1-B5EF-F242E841AF80}"/>
+                <a16:creationId xmlns:a16="http://schemas.microsoft.com/office/drawing/2014/main" id="{A87DB829-89EF-43A9-B998-6B667A8C9866}"/>
               </a:ext>
             </a:extLst>
           </p:cNvPr>
@@ -4980,7 +5004,7 @@
         </p:spPr>
         <p:txBody>
           <a:bodyPr xmlns:a="http://schemas.openxmlformats.org/drawingml/2006/main" wrap="square" lIns="0" tIns="0" rIns="0" bIns="0" anchor="ctr">
-            <a:normAutofit/>
+            <a:normAutofit fontScale="100000"/>
           </a:bodyPr>
           <a:lstStyle xmlns:a="http://schemas.openxmlformats.org/drawingml/2006/main"/>
           <a:p xmlns:a="http://schemas.openxmlformats.org/drawingml/2006/main">
@@ -4996,7 +5020,7 @@
                 <a:ea typeface="PingFang SC"/>
                 <a:cs typeface="PingFang SC"/>
               </a:rPr>
-              <a:t>EBAI：把外部能力资产转译为 BAI 原生结构</a:t>
+              <a:t>EBAI：BAI Work 面向用户的能力体系</a:t>
             </a:r>
           </a:p>
         </p:txBody>
@@ -5006,7 +5030,7 @@
           <p:cNvPr id="4" name="Shape 2">
             <a:extLst xmlns:a="http://schemas.openxmlformats.org/drawingml/2006/main">
               <a:ext uri="{FF2B5EF4-FFF2-40B4-BE49-F238E27FC236}">
-                <a16:creationId xmlns:a16="http://schemas.microsoft.com/office/drawing/2014/main" id="{60FFA831-830D-413D-94E2-01EB08C763DA}"/>
+                <a16:creationId xmlns:a16="http://schemas.microsoft.com/office/drawing/2014/main" id="{DC6B92B6-4160-4E3B-B25E-4D6EF891A9FD}"/>
               </a:ext>
             </a:extLst>
           </p:cNvPr>
@@ -5041,7 +5065,7 @@
           <p:cNvPr id="5" name="Text 3">
             <a:extLst xmlns:a="http://schemas.openxmlformats.org/drawingml/2006/main">
               <a:ext uri="{FF2B5EF4-FFF2-40B4-BE49-F238E27FC236}">
-                <a16:creationId xmlns:a16="http://schemas.microsoft.com/office/drawing/2014/main" id="{B49F964E-43F8-4863-8525-8FAD12790F63}"/>
+                <a16:creationId xmlns:a16="http://schemas.microsoft.com/office/drawing/2014/main" id="{7F2B86CC-076F-473C-B814-A478B67F2300}"/>
               </a:ext>
             </a:extLst>
           </p:cNvPr>
@@ -5062,7 +5086,7 @@
         </p:spPr>
         <p:txBody>
           <a:bodyPr xmlns:a="http://schemas.openxmlformats.org/drawingml/2006/main" wrap="square" lIns="0" tIns="0" rIns="0" bIns="0" anchor="ctr">
-            <a:normAutofit/>
+            <a:normAutofit fontScale="100000"/>
           </a:bodyPr>
           <a:lstStyle xmlns:a="http://schemas.openxmlformats.org/drawingml/2006/main"/>
           <a:p xmlns:a="http://schemas.openxmlformats.org/drawingml/2006/main">
@@ -5078,7 +5102,7 @@
                 <a:ea typeface="PingFang SC"/>
                 <a:cs typeface="PingFang SC"/>
               </a:rPr>
-              <a:t>能力兼容层</a:t>
+              <a:t>产品能力层</a:t>
             </a:r>
           </a:p>
         </p:txBody>
@@ -5088,7 +5112,7 @@
           <p:cNvPr id="6" name="Shape 4">
             <a:extLst xmlns:a="http://schemas.openxmlformats.org/drawingml/2006/main">
               <a:ext uri="{FF2B5EF4-FFF2-40B4-BE49-F238E27FC236}">
-                <a16:creationId xmlns:a16="http://schemas.microsoft.com/office/drawing/2014/main" id="{937FE754-487D-4A39-9CF3-0248DC4297CC}"/>
+                <a16:creationId xmlns:a16="http://schemas.microsoft.com/office/drawing/2014/main" id="{71FDED17-A539-475C-9AAF-4A7B96728FA7}"/>
               </a:ext>
             </a:extLst>
           </p:cNvPr>
@@ -5119,7 +5143,7 @@
           <p:cNvPr id="7" name="Shape 5">
             <a:extLst xmlns:a="http://schemas.openxmlformats.org/drawingml/2006/main">
               <a:ext uri="{FF2B5EF4-FFF2-40B4-BE49-F238E27FC236}">
-                <a16:creationId xmlns:a16="http://schemas.microsoft.com/office/drawing/2014/main" id="{E2F00DBD-E621-41B2-893D-08552D58692B}"/>
+                <a16:creationId xmlns:a16="http://schemas.microsoft.com/office/drawing/2014/main" id="{6FA73892-ADB0-47DF-A7E6-5CE8299743C9}"/>
               </a:ext>
             </a:extLst>
           </p:cNvPr>
@@ -5154,7 +5178,7 @@
           <p:cNvPr id="8" name="Text 6">
             <a:extLst xmlns:a="http://schemas.openxmlformats.org/drawingml/2006/main">
               <a:ext uri="{FF2B5EF4-FFF2-40B4-BE49-F238E27FC236}">
-                <a16:creationId xmlns:a16="http://schemas.microsoft.com/office/drawing/2014/main" id="{4ED30C3F-E88E-42BA-AAE3-A2CE7C384819}"/>
+                <a16:creationId xmlns:a16="http://schemas.microsoft.com/office/drawing/2014/main" id="{BB47A42D-58D5-4666-91D8-A4B0BC2615AE}"/>
               </a:ext>
             </a:extLst>
           </p:cNvPr>
@@ -5175,7 +5199,7 @@
         </p:spPr>
         <p:txBody>
           <a:bodyPr xmlns:a="http://schemas.openxmlformats.org/drawingml/2006/main" wrap="square" lIns="0" tIns="0" rIns="0" bIns="0" anchor="ctr">
-            <a:normAutofit/>
+            <a:normAutofit fontScale="100000"/>
           </a:bodyPr>
           <a:lstStyle xmlns:a="http://schemas.openxmlformats.org/drawingml/2006/main"/>
           <a:p xmlns:a="http://schemas.openxmlformats.org/drawingml/2006/main">
@@ -5191,7 +5215,7 @@
                 <a:ea typeface="Aptos"/>
                 <a:cs typeface="Aptos"/>
               </a:rPr>
-              <a:t>Remote Index</a:t>
+              <a:t>EBAI</a:t>
             </a:r>
           </a:p>
         </p:txBody>
@@ -5201,7 +5225,7 @@
           <p:cNvPr id="9" name="Text 7">
             <a:extLst xmlns:a="http://schemas.openxmlformats.org/drawingml/2006/main">
               <a:ext uri="{FF2B5EF4-FFF2-40B4-BE49-F238E27FC236}">
-                <a16:creationId xmlns:a16="http://schemas.microsoft.com/office/drawing/2014/main" id="{1FF1994D-EE52-435D-A1DF-DB07AA76DBA2}"/>
+                <a16:creationId xmlns:a16="http://schemas.microsoft.com/office/drawing/2014/main" id="{279A0152-8555-418D-AD15-EF1513155420}"/>
               </a:ext>
             </a:extLst>
           </p:cNvPr>
@@ -5222,7 +5246,7 @@
         </p:spPr>
         <p:txBody>
           <a:bodyPr xmlns:a="http://schemas.openxmlformats.org/drawingml/2006/main" wrap="square" lIns="0" tIns="0" rIns="0" bIns="0" anchor="ctr">
-            <a:normAutofit/>
+            <a:normAutofit fontScale="100000"/>
           </a:bodyPr>
           <a:lstStyle xmlns:a="http://schemas.openxmlformats.org/drawingml/2006/main"/>
           <a:p xmlns:a="http://schemas.openxmlformats.org/drawingml/2006/main">
@@ -5238,7 +5262,7 @@
                 <a:ea typeface="PingFang SC"/>
                 <a:cs typeface="PingFang SC"/>
               </a:rPr>
-              <a:t>递归索引</a:t>
+              <a:t>能力随应用呈现</a:t>
             </a:r>
           </a:p>
           <a:p xmlns:a="http://schemas.openxmlformats.org/drawingml/2006/main">
@@ -5254,49 +5278,17 @@
                 <a:ea typeface="PingFang SC"/>
                 <a:cs typeface="PingFang SC"/>
               </a:rPr>
-              <a:t>版本与来源记录</a:t>
-            </a:r>
-          </a:p>
-        </p:txBody>
-      </p:sp>
-      <p:sp>
-        <p:nvSpPr>
-          <p:cNvPr id="10" name="Shape 8">
-            <a:extLst xmlns:a="http://schemas.openxmlformats.org/drawingml/2006/main">
-              <a:ext uri="{FF2B5EF4-FFF2-40B4-BE49-F238E27FC236}">
-                <a16:creationId xmlns:a16="http://schemas.microsoft.com/office/drawing/2014/main" id="{44C99609-F58D-486A-A8AB-45BFB0ACDE6A}"/>
-              </a:ext>
-            </a:extLst>
-          </p:cNvPr>
-          <p:cNvSpPr>
-            <a:spLocks xmlns:a="http://schemas.openxmlformats.org/drawingml/2006/main" noGrp="1"/>
-          </p:cNvSpPr>
-          <p:nvPr/>
-        </p:nvSpPr>
-        <p:spPr>
-          <a:xfrm xmlns:a="http://schemas.openxmlformats.org/drawingml/2006/main">
-            <a:off x="2084832" y="2560320"/>
-            <a:ext cx="246888" cy="0"/>
-          </a:xfrm>
-          <a:prstGeom xmlns:a="http://schemas.openxmlformats.org/drawingml/2006/main" prst="line">
-            <a:avLst/>
-          </a:prstGeom>
-          <a:noFill xmlns:a="http://schemas.openxmlformats.org/drawingml/2006/main"/>
-          <a:ln xmlns:a="http://schemas.openxmlformats.org/drawingml/2006/main" w="13970">
-            <a:solidFill>
-              <a:srgbClr val="69727E"/>
-            </a:solidFill>
-            <a:prstDash val="solid"/>
-            <a:tailEnd type="triangle"/>
-          </a:ln>
-        </p:spPr>
+              <a:t>统一产品身份</a:t>
+            </a:r>
+          </a:p>
+        </p:txBody>
       </p:sp>
       <p:sp>
         <p:nvSpPr>
           <p:cNvPr id="11" name="Shape 9">
             <a:extLst xmlns:a="http://schemas.openxmlformats.org/drawingml/2006/main">
               <a:ext uri="{FF2B5EF4-FFF2-40B4-BE49-F238E27FC236}">
-                <a16:creationId xmlns:a16="http://schemas.microsoft.com/office/drawing/2014/main" id="{96E314AE-7BF6-429E-BB58-DF8986250F4C}"/>
+                <a16:creationId xmlns:a16="http://schemas.microsoft.com/office/drawing/2014/main" id="{61D793BA-ABFC-44D6-949A-1A98AF42EB7A}"/>
               </a:ext>
             </a:extLst>
           </p:cNvPr>
@@ -5331,7 +5323,7 @@
           <p:cNvPr id="12" name="Text 10">
             <a:extLst xmlns:a="http://schemas.openxmlformats.org/drawingml/2006/main">
               <a:ext uri="{FF2B5EF4-FFF2-40B4-BE49-F238E27FC236}">
-                <a16:creationId xmlns:a16="http://schemas.microsoft.com/office/drawing/2014/main" id="{3CA07F54-480C-407B-841C-853629D4A92E}"/>
+                <a16:creationId xmlns:a16="http://schemas.microsoft.com/office/drawing/2014/main" id="{EBEECF73-BB14-4F33-8C3B-3932F94EDCD5}"/>
               </a:ext>
             </a:extLst>
           </p:cNvPr>
@@ -5352,7 +5344,7 @@
         </p:spPr>
         <p:txBody>
           <a:bodyPr xmlns:a="http://schemas.openxmlformats.org/drawingml/2006/main" wrap="square" lIns="0" tIns="0" rIns="0" bIns="0" anchor="ctr">
-            <a:normAutofit/>
+            <a:normAutofit fontScale="100000"/>
           </a:bodyPr>
           <a:lstStyle xmlns:a="http://schemas.openxmlformats.org/drawingml/2006/main"/>
           <a:p xmlns:a="http://schemas.openxmlformats.org/drawingml/2006/main">
@@ -5368,7 +5360,7 @@
                 <a:ea typeface="Aptos"/>
                 <a:cs typeface="Aptos"/>
               </a:rPr>
-              <a:t>Safety Gate</a:t>
+              <a:t>Commands</a:t>
             </a:r>
           </a:p>
         </p:txBody>
@@ -5378,7 +5370,7 @@
           <p:cNvPr id="13" name="Text 11">
             <a:extLst xmlns:a="http://schemas.openxmlformats.org/drawingml/2006/main">
               <a:ext uri="{FF2B5EF4-FFF2-40B4-BE49-F238E27FC236}">
-                <a16:creationId xmlns:a16="http://schemas.microsoft.com/office/drawing/2014/main" id="{CFEC94CA-A245-4076-988E-E70D9DBEA4C8}"/>
+                <a16:creationId xmlns:a16="http://schemas.microsoft.com/office/drawing/2014/main" id="{4D909481-1E1D-489C-AD04-94114443B726}"/>
               </a:ext>
             </a:extLst>
           </p:cNvPr>
@@ -5399,7 +5391,7 @@
         </p:spPr>
         <p:txBody>
           <a:bodyPr xmlns:a="http://schemas.openxmlformats.org/drawingml/2006/main" wrap="square" lIns="0" tIns="0" rIns="0" bIns="0" anchor="ctr">
-            <a:normAutofit/>
+            <a:normAutofit fontScale="100000"/>
           </a:bodyPr>
           <a:lstStyle xmlns:a="http://schemas.openxmlformats.org/drawingml/2006/main"/>
           <a:p xmlns:a="http://schemas.openxmlformats.org/drawingml/2006/main">
@@ -5415,7 +5407,7 @@
                 <a:ea typeface="PingFang SC"/>
                 <a:cs typeface="PingFang SC"/>
               </a:rPr>
-              <a:t>路径校验</a:t>
+              <a:t>项目命令</a:t>
             </a:r>
           </a:p>
           <a:p xmlns:a="http://schemas.openxmlformats.org/drawingml/2006/main">
@@ -5431,49 +5423,17 @@
                 <a:ea typeface="PingFang SC"/>
                 <a:cs typeface="PingFang SC"/>
               </a:rPr>
-              <a:t>大小与数量上限</a:t>
-            </a:r>
-          </a:p>
-        </p:txBody>
-      </p:sp>
-      <p:sp>
-        <p:nvSpPr>
-          <p:cNvPr id="14" name="Shape 12">
-            <a:extLst xmlns:a="http://schemas.openxmlformats.org/drawingml/2006/main">
-              <a:ext uri="{FF2B5EF4-FFF2-40B4-BE49-F238E27FC236}">
-                <a16:creationId xmlns:a16="http://schemas.microsoft.com/office/drawing/2014/main" id="{45C0270F-25D5-4013-AF14-B18B8A75AB13}"/>
-              </a:ext>
-            </a:extLst>
-          </p:cNvPr>
-          <p:cNvSpPr>
-            <a:spLocks xmlns:a="http://schemas.openxmlformats.org/drawingml/2006/main" noGrp="1"/>
-          </p:cNvSpPr>
-          <p:nvPr/>
-        </p:nvSpPr>
-        <p:spPr>
-          <a:xfrm xmlns:a="http://schemas.openxmlformats.org/drawingml/2006/main">
-            <a:off x="3986784" y="2560320"/>
-            <a:ext cx="246888" cy="0"/>
-          </a:xfrm>
-          <a:prstGeom xmlns:a="http://schemas.openxmlformats.org/drawingml/2006/main" prst="line">
-            <a:avLst/>
-          </a:prstGeom>
-          <a:noFill xmlns:a="http://schemas.openxmlformats.org/drawingml/2006/main"/>
-          <a:ln xmlns:a="http://schemas.openxmlformats.org/drawingml/2006/main" w="13970">
-            <a:solidFill>
-              <a:srgbClr val="69727E"/>
-            </a:solidFill>
-            <a:prstDash val="solid"/>
-            <a:tailEnd type="triangle"/>
-          </a:ln>
-        </p:spPr>
+              <a:t>运行时可加载</a:t>
+            </a:r>
+          </a:p>
+        </p:txBody>
       </p:sp>
       <p:sp>
         <p:nvSpPr>
           <p:cNvPr id="15" name="Shape 13">
             <a:extLst xmlns:a="http://schemas.openxmlformats.org/drawingml/2006/main">
               <a:ext uri="{FF2B5EF4-FFF2-40B4-BE49-F238E27FC236}">
-                <a16:creationId xmlns:a16="http://schemas.microsoft.com/office/drawing/2014/main" id="{6356709F-F089-4567-82ED-FBEBEF0F3314}"/>
+                <a16:creationId xmlns:a16="http://schemas.microsoft.com/office/drawing/2014/main" id="{57B29451-42E7-43B9-A2BC-E8F432D3AA98}"/>
               </a:ext>
             </a:extLst>
           </p:cNvPr>
@@ -5508,7 +5468,7 @@
           <p:cNvPr id="16" name="Text 14">
             <a:extLst xmlns:a="http://schemas.openxmlformats.org/drawingml/2006/main">
               <a:ext uri="{FF2B5EF4-FFF2-40B4-BE49-F238E27FC236}">
-                <a16:creationId xmlns:a16="http://schemas.microsoft.com/office/drawing/2014/main" id="{2B5761D0-1449-4D57-B5E5-196A076DC296}"/>
+                <a16:creationId xmlns:a16="http://schemas.microsoft.com/office/drawing/2014/main" id="{B90F575B-253A-4728-BD52-DA0B3FFD3D96}"/>
               </a:ext>
             </a:extLst>
           </p:cNvPr>
@@ -5529,7 +5489,7 @@
         </p:spPr>
         <p:txBody>
           <a:bodyPr xmlns:a="http://schemas.openxmlformats.org/drawingml/2006/main" wrap="square" lIns="0" tIns="0" rIns="0" bIns="0" anchor="ctr">
-            <a:normAutofit/>
+            <a:normAutofit fontScale="100000"/>
           </a:bodyPr>
           <a:lstStyle xmlns:a="http://schemas.openxmlformats.org/drawingml/2006/main"/>
           <a:p xmlns:a="http://schemas.openxmlformats.org/drawingml/2006/main">
@@ -5545,7 +5505,7 @@
                 <a:ea typeface="Aptos"/>
                 <a:cs typeface="Aptos"/>
               </a:rPr>
-              <a:t>Staging Cache</a:t>
+              <a:t>Agents</a:t>
             </a:r>
           </a:p>
         </p:txBody>
@@ -5555,7 +5515,7 @@
           <p:cNvPr id="17" name="Text 15">
             <a:extLst xmlns:a="http://schemas.openxmlformats.org/drawingml/2006/main">
               <a:ext uri="{FF2B5EF4-FFF2-40B4-BE49-F238E27FC236}">
-                <a16:creationId xmlns:a16="http://schemas.microsoft.com/office/drawing/2014/main" id="{E497BAC9-3712-48C6-9BE9-74C2374AEE1E}"/>
+                <a16:creationId xmlns:a16="http://schemas.microsoft.com/office/drawing/2014/main" id="{051818F8-6834-4A8C-A405-47FB44D28ECA}"/>
               </a:ext>
             </a:extLst>
           </p:cNvPr>
@@ -5576,7 +5536,7 @@
         </p:spPr>
         <p:txBody>
           <a:bodyPr xmlns:a="http://schemas.openxmlformats.org/drawingml/2006/main" wrap="square" lIns="0" tIns="0" rIns="0" bIns="0" anchor="ctr">
-            <a:normAutofit/>
+            <a:normAutofit fontScale="100000"/>
           </a:bodyPr>
           <a:lstStyle xmlns:a="http://schemas.openxmlformats.org/drawingml/2006/main"/>
           <a:p xmlns:a="http://schemas.openxmlformats.org/drawingml/2006/main">
@@ -5592,7 +5552,7 @@
                 <a:ea typeface="PingFang SC"/>
                 <a:cs typeface="PingFang SC"/>
               </a:rPr>
-              <a:t>并发下载</a:t>
+              <a:t>专业角色</a:t>
             </a:r>
           </a:p>
           <a:p xmlns:a="http://schemas.openxmlformats.org/drawingml/2006/main">
@@ -5608,49 +5568,17 @@
                 <a:ea typeface="PingFang SC"/>
                 <a:cs typeface="PingFang SC"/>
               </a:rPr>
-              <a:t>随机暂存目录</a:t>
-            </a:r>
-          </a:p>
-        </p:txBody>
-      </p:sp>
-      <p:sp>
-        <p:nvSpPr>
-          <p:cNvPr id="18" name="Shape 16">
-            <a:extLst xmlns:a="http://schemas.openxmlformats.org/drawingml/2006/main">
-              <a:ext uri="{FF2B5EF4-FFF2-40B4-BE49-F238E27FC236}">
-                <a16:creationId xmlns:a16="http://schemas.microsoft.com/office/drawing/2014/main" id="{7D0C2D33-0D46-4917-8B4D-050163DB0F5D}"/>
-              </a:ext>
-            </a:extLst>
-          </p:cNvPr>
-          <p:cNvSpPr>
-            <a:spLocks xmlns:a="http://schemas.openxmlformats.org/drawingml/2006/main" noGrp="1"/>
-          </p:cNvSpPr>
-          <p:nvPr/>
-        </p:nvSpPr>
-        <p:spPr>
-          <a:xfrm xmlns:a="http://schemas.openxmlformats.org/drawingml/2006/main">
-            <a:off x="5888736" y="2560320"/>
-            <a:ext cx="246888" cy="0"/>
-          </a:xfrm>
-          <a:prstGeom xmlns:a="http://schemas.openxmlformats.org/drawingml/2006/main" prst="line">
-            <a:avLst/>
-          </a:prstGeom>
-          <a:noFill xmlns:a="http://schemas.openxmlformats.org/drawingml/2006/main"/>
-          <a:ln xmlns:a="http://schemas.openxmlformats.org/drawingml/2006/main" w="13970">
-            <a:solidFill>
-              <a:srgbClr val="69727E"/>
-            </a:solidFill>
-            <a:prstDash val="solid"/>
-            <a:tailEnd type="triangle"/>
-          </a:ln>
-        </p:spPr>
+              <a:t>以命令工作流接入</a:t>
+            </a:r>
+          </a:p>
+        </p:txBody>
       </p:sp>
       <p:sp>
         <p:nvSpPr>
           <p:cNvPr id="19" name="Shape 17">
             <a:extLst xmlns:a="http://schemas.openxmlformats.org/drawingml/2006/main">
               <a:ext uri="{FF2B5EF4-FFF2-40B4-BE49-F238E27FC236}">
-                <a16:creationId xmlns:a16="http://schemas.microsoft.com/office/drawing/2014/main" id="{964822BD-0C86-4C7B-9CC9-8C5E4E89E402}"/>
+                <a16:creationId xmlns:a16="http://schemas.microsoft.com/office/drawing/2014/main" id="{737FB9C9-6794-489F-96CA-39100957F400}"/>
               </a:ext>
             </a:extLst>
           </p:cNvPr>
@@ -5685,7 +5613,7 @@
           <p:cNvPr id="20" name="Text 18">
             <a:extLst xmlns:a="http://schemas.openxmlformats.org/drawingml/2006/main">
               <a:ext uri="{FF2B5EF4-FFF2-40B4-BE49-F238E27FC236}">
-                <a16:creationId xmlns:a16="http://schemas.microsoft.com/office/drawing/2014/main" id="{EFF77004-2433-4A9E-A88C-92B0D43C990C}"/>
+                <a16:creationId xmlns:a16="http://schemas.microsoft.com/office/drawing/2014/main" id="{170EF84A-0411-4BAF-A21F-C0A5E178FE0C}"/>
               </a:ext>
             </a:extLst>
           </p:cNvPr>
@@ -5706,7 +5634,7 @@
         </p:spPr>
         <p:txBody>
           <a:bodyPr xmlns:a="http://schemas.openxmlformats.org/drawingml/2006/main" wrap="square" lIns="0" tIns="0" rIns="0" bIns="0" anchor="ctr">
-            <a:normAutofit/>
+            <a:normAutofit fontScale="100000"/>
           </a:bodyPr>
           <a:lstStyle xmlns:a="http://schemas.openxmlformats.org/drawingml/2006/main"/>
           <a:p xmlns:a="http://schemas.openxmlformats.org/drawingml/2006/main">
@@ -5722,7 +5650,7 @@
                 <a:ea typeface="Aptos"/>
                 <a:cs typeface="Aptos"/>
               </a:rPr>
-              <a:t>Atomic Swap</a:t>
+              <a:t>Skills</a:t>
             </a:r>
           </a:p>
         </p:txBody>
@@ -5732,7 +5660,7 @@
           <p:cNvPr id="21" name="Text 19">
             <a:extLst xmlns:a="http://schemas.openxmlformats.org/drawingml/2006/main">
               <a:ext uri="{FF2B5EF4-FFF2-40B4-BE49-F238E27FC236}">
-                <a16:creationId xmlns:a16="http://schemas.microsoft.com/office/drawing/2014/main" id="{6D644F30-2D45-40EC-93D5-591817C4152A}"/>
+                <a16:creationId xmlns:a16="http://schemas.microsoft.com/office/drawing/2014/main" id="{E8533BF4-A1AE-465D-9B0B-0DFBADE8D2EF}"/>
               </a:ext>
             </a:extLst>
           </p:cNvPr>
@@ -5753,7 +5681,7 @@
         </p:spPr>
         <p:txBody>
           <a:bodyPr xmlns:a="http://schemas.openxmlformats.org/drawingml/2006/main" wrap="square" lIns="0" tIns="0" rIns="0" bIns="0" anchor="ctr">
-            <a:normAutofit/>
+            <a:normAutofit fontScale="100000"/>
           </a:bodyPr>
           <a:lstStyle xmlns:a="http://schemas.openxmlformats.org/drawingml/2006/main"/>
           <a:p xmlns:a="http://schemas.openxmlformats.org/drawingml/2006/main">
@@ -5769,7 +5697,7 @@
                 <a:ea typeface="PingFang SC"/>
                 <a:cs typeface="PingFang SC"/>
               </a:rPr>
-              <a:t>完整后 rename</a:t>
+              <a:t>任务方法</a:t>
             </a:r>
           </a:p>
           <a:p xmlns:a="http://schemas.openxmlformats.org/drawingml/2006/main">
@@ -5785,49 +5713,17 @@
                 <a:ea typeface="PingFang SC"/>
                 <a:cs typeface="PingFang SC"/>
               </a:rPr>
-              <a:t>避免半安装状态</a:t>
-            </a:r>
-          </a:p>
-        </p:txBody>
-      </p:sp>
-      <p:sp>
-        <p:nvSpPr>
-          <p:cNvPr id="22" name="Shape 20">
-            <a:extLst xmlns:a="http://schemas.openxmlformats.org/drawingml/2006/main">
-              <a:ext uri="{FF2B5EF4-FFF2-40B4-BE49-F238E27FC236}">
-                <a16:creationId xmlns:a16="http://schemas.microsoft.com/office/drawing/2014/main" id="{838D9F8E-163C-47DE-B870-A3FB2921BF6A}"/>
-              </a:ext>
-            </a:extLst>
-          </p:cNvPr>
-          <p:cNvSpPr>
-            <a:spLocks xmlns:a="http://schemas.openxmlformats.org/drawingml/2006/main" noGrp="1"/>
-          </p:cNvSpPr>
-          <p:nvPr/>
-        </p:nvSpPr>
-        <p:spPr>
-          <a:xfrm xmlns:a="http://schemas.openxmlformats.org/drawingml/2006/main">
-            <a:off x="7790688" y="2560320"/>
-            <a:ext cx="246888" cy="0"/>
-          </a:xfrm>
-          <a:prstGeom xmlns:a="http://schemas.openxmlformats.org/drawingml/2006/main" prst="line">
-            <a:avLst/>
-          </a:prstGeom>
-          <a:noFill xmlns:a="http://schemas.openxmlformats.org/drawingml/2006/main"/>
-          <a:ln xmlns:a="http://schemas.openxmlformats.org/drawingml/2006/main" w="13970">
-            <a:solidFill>
-              <a:srgbClr val="69727E"/>
-            </a:solidFill>
-            <a:prstDash val="solid"/>
-            <a:tailEnd type="triangle"/>
-          </a:ln>
-        </p:spPr>
+              <a:t>运行时可加载</a:t>
+            </a:r>
+          </a:p>
+        </p:txBody>
       </p:sp>
       <p:sp>
         <p:nvSpPr>
           <p:cNvPr id="23" name="Shape 21">
             <a:extLst xmlns:a="http://schemas.openxmlformats.org/drawingml/2006/main">
               <a:ext uri="{FF2B5EF4-FFF2-40B4-BE49-F238E27FC236}">
-                <a16:creationId xmlns:a16="http://schemas.microsoft.com/office/drawing/2014/main" id="{910486E5-0FA3-45B2-926A-AE2836A47B9E}"/>
+                <a16:creationId xmlns:a16="http://schemas.microsoft.com/office/drawing/2014/main" id="{3BD8561C-1270-4327-8216-9A8EECB8AC7D}"/>
               </a:ext>
             </a:extLst>
           </p:cNvPr>
@@ -5862,7 +5758,7 @@
           <p:cNvPr id="24" name="Text 22">
             <a:extLst xmlns:a="http://schemas.openxmlformats.org/drawingml/2006/main">
               <a:ext uri="{FF2B5EF4-FFF2-40B4-BE49-F238E27FC236}">
-                <a16:creationId xmlns:a16="http://schemas.microsoft.com/office/drawing/2014/main" id="{172E590D-116E-4F5C-B3F0-4EB721C07660}"/>
+                <a16:creationId xmlns:a16="http://schemas.microsoft.com/office/drawing/2014/main" id="{F3F3F2E8-2E2A-4EC3-985D-A16C5BB8FAC1}"/>
               </a:ext>
             </a:extLst>
           </p:cNvPr>
@@ -5883,7 +5779,7 @@
         </p:spPr>
         <p:txBody>
           <a:bodyPr xmlns:a="http://schemas.openxmlformats.org/drawingml/2006/main" wrap="square" lIns="0" tIns="0" rIns="0" bIns="0" anchor="ctr">
-            <a:normAutofit/>
+            <a:normAutofit fontScale="100000"/>
           </a:bodyPr>
           <a:lstStyle xmlns:a="http://schemas.openxmlformats.org/drawingml/2006/main"/>
           <a:p xmlns:a="http://schemas.openxmlformats.org/drawingml/2006/main">
@@ -5899,7 +5795,7 @@
                 <a:ea typeface="Aptos"/>
                 <a:cs typeface="Aptos"/>
               </a:rPr>
-              <a:t>Semantic Mapper</a:t>
+              <a:t>Rules</a:t>
             </a:r>
           </a:p>
         </p:txBody>
@@ -5909,7 +5805,7 @@
           <p:cNvPr id="25" name="Text 23">
             <a:extLst xmlns:a="http://schemas.openxmlformats.org/drawingml/2006/main">
               <a:ext uri="{FF2B5EF4-FFF2-40B4-BE49-F238E27FC236}">
-                <a16:creationId xmlns:a16="http://schemas.microsoft.com/office/drawing/2014/main" id="{B156C95E-C9E0-445C-9717-FF0CDA33E6F7}"/>
+                <a16:creationId xmlns:a16="http://schemas.microsoft.com/office/drawing/2014/main" id="{2B2909A1-CBD2-4D93-8ECC-92424A6D0645}"/>
               </a:ext>
             </a:extLst>
           </p:cNvPr>
@@ -5930,7 +5826,7 @@
         </p:spPr>
         <p:txBody>
           <a:bodyPr xmlns:a="http://schemas.openxmlformats.org/drawingml/2006/main" wrap="square" lIns="0" tIns="0" rIns="0" bIns="0" anchor="ctr">
-            <a:normAutofit/>
+            <a:normAutofit fontScale="100000"/>
           </a:bodyPr>
           <a:lstStyle xmlns:a="http://schemas.openxmlformats.org/drawingml/2006/main"/>
           <a:p xmlns:a="http://schemas.openxmlformats.org/drawingml/2006/main">
@@ -5946,7 +5842,7 @@
                 <a:ea typeface="PingFang SC"/>
                 <a:cs typeface="PingFang SC"/>
               </a:rPr>
-              <a:t>命令 / Agent / Rule</a:t>
+              <a:t>行为约束</a:t>
             </a:r>
           </a:p>
           <a:p xmlns:a="http://schemas.openxmlformats.org/drawingml/2006/main">
@@ -5962,49 +5858,17 @@
                 <a:ea typeface="PingFang SC"/>
                 <a:cs typeface="PingFang SC"/>
               </a:rPr>
-              <a:t>Skill / Hook 转译</a:t>
-            </a:r>
-          </a:p>
-        </p:txBody>
-      </p:sp>
-      <p:sp>
-        <p:nvSpPr>
-          <p:cNvPr id="26" name="Shape 24">
-            <a:extLst xmlns:a="http://schemas.openxmlformats.org/drawingml/2006/main">
-              <a:ext uri="{FF2B5EF4-FFF2-40B4-BE49-F238E27FC236}">
-                <a16:creationId xmlns:a16="http://schemas.microsoft.com/office/drawing/2014/main" id="{D99F302A-A00F-4A32-9321-8C9614E25DF1}"/>
-              </a:ext>
-            </a:extLst>
-          </p:cNvPr>
-          <p:cNvSpPr>
-            <a:spLocks xmlns:a="http://schemas.openxmlformats.org/drawingml/2006/main" noGrp="1"/>
-          </p:cNvSpPr>
-          <p:nvPr/>
-        </p:nvSpPr>
-        <p:spPr>
-          <a:xfrm xmlns:a="http://schemas.openxmlformats.org/drawingml/2006/main">
-            <a:off x="9692640" y="2560320"/>
-            <a:ext cx="246888" cy="0"/>
-          </a:xfrm>
-          <a:prstGeom xmlns:a="http://schemas.openxmlformats.org/drawingml/2006/main" prst="line">
-            <a:avLst/>
-          </a:prstGeom>
-          <a:noFill xmlns:a="http://schemas.openxmlformats.org/drawingml/2006/main"/>
-          <a:ln xmlns:a="http://schemas.openxmlformats.org/drawingml/2006/main" w="13970">
-            <a:solidFill>
-              <a:srgbClr val="69727E"/>
-            </a:solidFill>
-            <a:prstDash val="solid"/>
-            <a:tailEnd type="triangle"/>
-          </a:ln>
-        </p:spPr>
+              <a:t>以 Skill 指令接入</a:t>
+            </a:r>
+          </a:p>
+        </p:txBody>
       </p:sp>
       <p:sp>
         <p:nvSpPr>
           <p:cNvPr id="27" name="Shape 25">
             <a:extLst xmlns:a="http://schemas.openxmlformats.org/drawingml/2006/main">
               <a:ext uri="{FF2B5EF4-FFF2-40B4-BE49-F238E27FC236}">
-                <a16:creationId xmlns:a16="http://schemas.microsoft.com/office/drawing/2014/main" id="{AADB76E3-12D0-4E2A-8823-D5E0A92D8E88}"/>
+                <a16:creationId xmlns:a16="http://schemas.microsoft.com/office/drawing/2014/main" id="{1ECBE1AF-5068-4C67-8C2A-942D302FE14B}"/>
               </a:ext>
             </a:extLst>
           </p:cNvPr>
@@ -6039,7 +5903,7 @@
           <p:cNvPr id="28" name="Text 26">
             <a:extLst xmlns:a="http://schemas.openxmlformats.org/drawingml/2006/main">
               <a:ext uri="{FF2B5EF4-FFF2-40B4-BE49-F238E27FC236}">
-                <a16:creationId xmlns:a16="http://schemas.microsoft.com/office/drawing/2014/main" id="{1E9C18DD-3FCC-4DA8-A997-61C4C20D8D63}"/>
+                <a16:creationId xmlns:a16="http://schemas.microsoft.com/office/drawing/2014/main" id="{61A1737E-E286-45C2-8194-60FFB3839D0C}"/>
               </a:ext>
             </a:extLst>
           </p:cNvPr>
@@ -6060,7 +5924,7 @@
         </p:spPr>
         <p:txBody>
           <a:bodyPr xmlns:a="http://schemas.openxmlformats.org/drawingml/2006/main" wrap="square" lIns="0" tIns="0" rIns="0" bIns="0" anchor="ctr">
-            <a:normAutofit/>
+            <a:normAutofit fontScale="100000"/>
           </a:bodyPr>
           <a:lstStyle xmlns:a="http://schemas.openxmlformats.org/drawingml/2006/main"/>
           <a:p xmlns:a="http://schemas.openxmlformats.org/drawingml/2006/main">
@@ -6076,7 +5940,7 @@
                 <a:ea typeface="Aptos"/>
                 <a:cs typeface="Aptos"/>
               </a:rPr>
-              <a:t>BAI Home</a:t>
+              <a:t>Hooks</a:t>
             </a:r>
           </a:p>
         </p:txBody>
@@ -6086,7 +5950,7 @@
           <p:cNvPr id="29" name="Text 27">
             <a:extLst xmlns:a="http://schemas.openxmlformats.org/drawingml/2006/main">
               <a:ext uri="{FF2B5EF4-FFF2-40B4-BE49-F238E27FC236}">
-                <a16:creationId xmlns:a16="http://schemas.microsoft.com/office/drawing/2014/main" id="{C80652EF-60BD-48CC-9F72-61579427D5B3}"/>
+                <a16:creationId xmlns:a16="http://schemas.microsoft.com/office/drawing/2014/main" id="{A859503B-4FBD-4536-9732-AA4F598816DF}"/>
               </a:ext>
             </a:extLst>
           </p:cNvPr>
@@ -6107,7 +5971,7 @@
         </p:spPr>
         <p:txBody>
           <a:bodyPr xmlns:a="http://schemas.openxmlformats.org/drawingml/2006/main" wrap="square" lIns="0" tIns="0" rIns="0" bIns="0" anchor="ctr">
-            <a:normAutofit/>
+            <a:normAutofit fontScale="100000"/>
           </a:bodyPr>
           <a:lstStyle xmlns:a="http://schemas.openxmlformats.org/drawingml/2006/main"/>
           <a:p xmlns:a="http://schemas.openxmlformats.org/drawingml/2006/main">
@@ -6123,7 +5987,7 @@
                 <a:ea typeface="PingFang SC"/>
                 <a:cs typeface="PingFang SC"/>
               </a:rPr>
-              <a:t>用户目录与</a:t>
+              <a:t>自动化契约</a:t>
             </a:r>
           </a:p>
           <a:p xmlns:a="http://schemas.openxmlformats.org/drawingml/2006/main">
@@ -6139,7 +6003,7 @@
                 <a:ea typeface="PingFang SC"/>
                 <a:cs typeface="PingFang SC"/>
               </a:rPr>
-              <a:t>项目作用域目标</a:t>
+              <a:t>Manifest 已生成</a:t>
             </a:r>
           </a:p>
         </p:txBody>
@@ -6149,7 +6013,7 @@
           <p:cNvPr id="30" name="Shape 28">
             <a:extLst xmlns:a="http://schemas.openxmlformats.org/drawingml/2006/main">
               <a:ext uri="{FF2B5EF4-FFF2-40B4-BE49-F238E27FC236}">
-                <a16:creationId xmlns:a16="http://schemas.microsoft.com/office/drawing/2014/main" id="{AEB74D9D-DBFF-466D-954C-1BE701266E80}"/>
+                <a16:creationId xmlns:a16="http://schemas.microsoft.com/office/drawing/2014/main" id="{53513593-EFC3-44AF-AA4D-B3D6A125AD10}"/>
               </a:ext>
             </a:extLst>
           </p:cNvPr>
@@ -6184,7 +6048,7 @@
           <p:cNvPr id="31" name="Text 29">
             <a:extLst xmlns:a="http://schemas.openxmlformats.org/drawingml/2006/main">
               <a:ext uri="{FF2B5EF4-FFF2-40B4-BE49-F238E27FC236}">
-                <a16:creationId xmlns:a16="http://schemas.microsoft.com/office/drawing/2014/main" id="{57FF99B5-A64A-447B-A2C9-49ADB6B8185B}"/>
+                <a16:creationId xmlns:a16="http://schemas.microsoft.com/office/drawing/2014/main" id="{F00C93AD-6DF1-4E11-A771-CCB55E3ADE3C}"/>
               </a:ext>
             </a:extLst>
           </p:cNvPr>
@@ -6205,7 +6069,7 @@
         </p:spPr>
         <p:txBody>
           <a:bodyPr xmlns:a="http://schemas.openxmlformats.org/drawingml/2006/main" wrap="square" lIns="0" tIns="0" rIns="0" bIns="0" anchor="ctr">
-            <a:normAutofit/>
+            <a:normAutofit fontScale="86172"/>
           </a:bodyPr>
           <a:lstStyle xmlns:a="http://schemas.openxmlformats.org/drawingml/2006/main"/>
           <a:p xmlns:a="http://schemas.openxmlformats.org/drawingml/2006/main">
@@ -6221,7 +6085,7 @@
                 <a:ea typeface="PingFang SC"/>
                 <a:cs typeface="PingFang SC"/>
               </a:rPr>
-              <a:t>资源约束</a:t>
+              <a:t>用户可用能力</a:t>
             </a:r>
           </a:p>
         </p:txBody>
@@ -6231,7 +6095,7 @@
           <p:cNvPr id="32" name="Shape 30">
             <a:extLst xmlns:a="http://schemas.openxmlformats.org/drawingml/2006/main">
               <a:ext uri="{FF2B5EF4-FFF2-40B4-BE49-F238E27FC236}">
-                <a16:creationId xmlns:a16="http://schemas.microsoft.com/office/drawing/2014/main" id="{467FD48E-8CF1-4D03-8709-8627D4AD327B}"/>
+                <a16:creationId xmlns:a16="http://schemas.microsoft.com/office/drawing/2014/main" id="{E274351F-008A-4200-8385-30AAA987F6A7}"/>
               </a:ext>
             </a:extLst>
           </p:cNvPr>
@@ -6264,7 +6128,7 @@
           <p:cNvPr id="33" name="Text 31">
             <a:extLst xmlns:a="http://schemas.openxmlformats.org/drawingml/2006/main">
               <a:ext uri="{FF2B5EF4-FFF2-40B4-BE49-F238E27FC236}">
-                <a16:creationId xmlns:a16="http://schemas.microsoft.com/office/drawing/2014/main" id="{747B58F1-FA2D-4A8D-9512-DA017D7805AB}"/>
+                <a16:creationId xmlns:a16="http://schemas.microsoft.com/office/drawing/2014/main" id="{9033B354-90D2-4F5B-B5EE-72C54FB9710A}"/>
               </a:ext>
             </a:extLst>
           </p:cNvPr>
@@ -6285,7 +6149,7 @@
         </p:spPr>
         <p:txBody>
           <a:bodyPr xmlns:a="http://schemas.openxmlformats.org/drawingml/2006/main" wrap="square" lIns="0" tIns="0" rIns="0" bIns="0" anchor="t">
-            <a:normAutofit/>
+            <a:normAutofit fontScale="100000"/>
           </a:bodyPr>
           <a:lstStyle xmlns:a="http://schemas.openxmlformats.org/drawingml/2006/main"/>
           <a:p xmlns:a="http://schemas.openxmlformats.org/drawingml/2006/main">
@@ -6301,7 +6165,7 @@
                 <a:ea typeface="PingFang SC"/>
                 <a:cs typeface="PingFang SC"/>
               </a:rPr>
-              <a:t>最多 3,000 文件 · 单文件 2 MiB · 总量 96 MiB</a:t>
+              <a:t>命令、技能与规则进入任务上下文</a:t>
             </a:r>
           </a:p>
         </p:txBody>
@@ -6311,7 +6175,7 @@
           <p:cNvPr id="34" name="Shape 32">
             <a:extLst xmlns:a="http://schemas.openxmlformats.org/drawingml/2006/main">
               <a:ext uri="{FF2B5EF4-FFF2-40B4-BE49-F238E27FC236}">
-                <a16:creationId xmlns:a16="http://schemas.microsoft.com/office/drawing/2014/main" id="{075CDE57-A805-46D5-9B35-7AD347B813C2}"/>
+                <a16:creationId xmlns:a16="http://schemas.microsoft.com/office/drawing/2014/main" id="{C3F88B18-2B2B-4EF1-BCAD-687E8854187B}"/>
               </a:ext>
             </a:extLst>
           </p:cNvPr>
@@ -6344,7 +6208,7 @@
           <p:cNvPr id="35" name="Text 33">
             <a:extLst xmlns:a="http://schemas.openxmlformats.org/drawingml/2006/main">
               <a:ext uri="{FF2B5EF4-FFF2-40B4-BE49-F238E27FC236}">
-                <a16:creationId xmlns:a16="http://schemas.microsoft.com/office/drawing/2014/main" id="{025E8709-2846-4288-863B-4C007F29F09E}"/>
+                <a16:creationId xmlns:a16="http://schemas.microsoft.com/office/drawing/2014/main" id="{E600158F-7571-47D1-B3C1-2FDB2106325F}"/>
               </a:ext>
             </a:extLst>
           </p:cNvPr>
@@ -6365,7 +6229,7 @@
         </p:spPr>
         <p:txBody>
           <a:bodyPr xmlns:a="http://schemas.openxmlformats.org/drawingml/2006/main" wrap="square" lIns="0" tIns="0" rIns="0" bIns="0" anchor="t">
-            <a:normAutofit/>
+            <a:normAutofit fontScale="100000"/>
           </a:bodyPr>
           <a:lstStyle xmlns:a="http://schemas.openxmlformats.org/drawingml/2006/main"/>
           <a:p xmlns:a="http://schemas.openxmlformats.org/drawingml/2006/main">
@@ -6381,7 +6245,7 @@
                 <a:ea typeface="PingFang SC"/>
                 <a:cs typeface="PingFang SC"/>
               </a:rPr>
-              <a:t>下载并发度 8；拒绝绝对路径、反斜杠与路径穿越</a:t>
+              <a:t>Agent 以专业命令工作流对用户呈现</a:t>
             </a:r>
           </a:p>
         </p:txBody>
@@ -6391,7 +6255,7 @@
           <p:cNvPr id="36" name="Shape 34">
             <a:extLst xmlns:a="http://schemas.openxmlformats.org/drawingml/2006/main">
               <a:ext uri="{FF2B5EF4-FFF2-40B4-BE49-F238E27FC236}">
-                <a16:creationId xmlns:a16="http://schemas.microsoft.com/office/drawing/2014/main" id="{72843E26-1B5A-4A9D-A6F8-CCCA223D5952}"/>
+                <a16:creationId xmlns:a16="http://schemas.microsoft.com/office/drawing/2014/main" id="{DC6BDB33-7787-4299-AFDB-3B2A22FD4FC7}"/>
               </a:ext>
             </a:extLst>
           </p:cNvPr>
@@ -6424,7 +6288,7 @@
           <p:cNvPr id="37" name="Text 35">
             <a:extLst xmlns:a="http://schemas.openxmlformats.org/drawingml/2006/main">
               <a:ext uri="{FF2B5EF4-FFF2-40B4-BE49-F238E27FC236}">
-                <a16:creationId xmlns:a16="http://schemas.microsoft.com/office/drawing/2014/main" id="{0AEAA8EE-BEA6-4663-A847-A84E499F60A4}"/>
+                <a16:creationId xmlns:a16="http://schemas.microsoft.com/office/drawing/2014/main" id="{47741A2D-20C9-43D8-8D0F-7DDDCA236D9B}"/>
               </a:ext>
             </a:extLst>
           </p:cNvPr>
@@ -6445,7 +6309,7 @@
         </p:spPr>
         <p:txBody>
           <a:bodyPr xmlns:a="http://schemas.openxmlformats.org/drawingml/2006/main" wrap="square" lIns="0" tIns="0" rIns="0" bIns="0" anchor="t">
-            <a:normAutofit/>
+            <a:normAutofit fontScale="100000"/>
           </a:bodyPr>
           <a:lstStyle xmlns:a="http://schemas.openxmlformats.org/drawingml/2006/main"/>
           <a:p xmlns:a="http://schemas.openxmlformats.org/drawingml/2006/main">
@@ -6461,7 +6325,7 @@
                 <a:ea typeface="PingFang SC"/>
                 <a:cs typeface="PingFang SC"/>
               </a:rPr>
-              <a:t>标记 source / ref / commit / file count，支持追溯</a:t>
+              <a:t>Hooks 保留能力定义，执行契约待 Runtime 支持</a:t>
             </a:r>
           </a:p>
         </p:txBody>
@@ -6471,7 +6335,7 @@
           <p:cNvPr id="38" name="Shape 36">
             <a:extLst xmlns:a="http://schemas.openxmlformats.org/drawingml/2006/main">
               <a:ext uri="{FF2B5EF4-FFF2-40B4-BE49-F238E27FC236}">
-                <a16:creationId xmlns:a16="http://schemas.microsoft.com/office/drawing/2014/main" id="{EEE86920-2F06-40D2-96EF-3195CB90DB45}"/>
+                <a16:creationId xmlns:a16="http://schemas.microsoft.com/office/drawing/2014/main" id="{DE93BDBC-FBB3-46B3-99DF-8306A5784CA7}"/>
               </a:ext>
             </a:extLst>
           </p:cNvPr>
@@ -6506,7 +6370,7 @@
           <p:cNvPr id="39" name="Text 37">
             <a:extLst xmlns:a="http://schemas.openxmlformats.org/drawingml/2006/main">
               <a:ext uri="{FF2B5EF4-FFF2-40B4-BE49-F238E27FC236}">
-                <a16:creationId xmlns:a16="http://schemas.microsoft.com/office/drawing/2014/main" id="{F6C4B23D-9B30-465E-99DC-F26D8D806909}"/>
+                <a16:creationId xmlns:a16="http://schemas.microsoft.com/office/drawing/2014/main" id="{85384F4F-F064-4B16-9E92-7F363FA7A9B2}"/>
               </a:ext>
             </a:extLst>
           </p:cNvPr>
@@ -6527,7 +6391,7 @@
         </p:spPr>
         <p:txBody>
           <a:bodyPr xmlns:a="http://schemas.openxmlformats.org/drawingml/2006/main" wrap="square" lIns="0" tIns="0" rIns="0" bIns="0" anchor="ctr">
-            <a:normAutofit/>
+            <a:normAutofit fontScale="100000"/>
           </a:bodyPr>
           <a:lstStyle xmlns:a="http://schemas.openxmlformats.org/drawingml/2006/main"/>
           <a:p xmlns:a="http://schemas.openxmlformats.org/drawingml/2006/main">
@@ -6543,7 +6407,7 @@
                 <a:ea typeface="PingFang SC"/>
                 <a:cs typeface="PingFang SC"/>
               </a:rPr>
-              <a:t>安装目标</a:t>
+              <a:t>当前状态</a:t>
             </a:r>
           </a:p>
         </p:txBody>
@@ -6553,7 +6417,7 @@
           <p:cNvPr id="40" name="Text 38">
             <a:extLst xmlns:a="http://schemas.openxmlformats.org/drawingml/2006/main">
               <a:ext uri="{FF2B5EF4-FFF2-40B4-BE49-F238E27FC236}">
-                <a16:creationId xmlns:a16="http://schemas.microsoft.com/office/drawing/2014/main" id="{324A6157-2821-4712-80F9-1E451E32FBD6}"/>
+                <a16:creationId xmlns:a16="http://schemas.microsoft.com/office/drawing/2014/main" id="{959F6067-2E3E-4546-803E-20AAE7732661}"/>
               </a:ext>
             </a:extLst>
           </p:cNvPr>
@@ -6574,7 +6438,7 @@
         </p:spPr>
         <p:txBody>
           <a:bodyPr xmlns:a="http://schemas.openxmlformats.org/drawingml/2006/main" wrap="square" lIns="0" tIns="0" rIns="0" bIns="0" anchor="t">
-            <a:normAutofit/>
+            <a:normAutofit fontScale="100000"/>
           </a:bodyPr>
           <a:lstStyle xmlns:a="http://schemas.openxmlformats.org/drawingml/2006/main"/>
           <a:p xmlns:a="http://schemas.openxmlformats.org/drawingml/2006/main">
@@ -6590,7 +6454,7 @@
                 <a:ea typeface="Aptos"/>
                 <a:cs typeface="Aptos"/>
               </a:rPr>
-              <a:t>~/.bai/commands</a:t>
+              <a:t>Commands · Skills：安装后可加载</a:t>
             </a:r>
           </a:p>
           <a:p xmlns:a="http://schemas.openxmlformats.org/drawingml/2006/main">
@@ -6606,7 +6470,7 @@
                 <a:ea typeface="Aptos"/>
                 <a:cs typeface="Aptos"/>
               </a:rPr>
-              <a:t>~/.bai/skills</a:t>
+              <a:t>Agents：命令化接入</a:t>
             </a:r>
           </a:p>
           <a:p xmlns:a="http://schemas.openxmlformats.org/drawingml/2006/main">
@@ -6622,7 +6486,7 @@
                 <a:ea typeface="Aptos"/>
                 <a:cs typeface="Aptos"/>
               </a:rPr>
-              <a:t>~/.bai/skills/ebai-rules</a:t>
+              <a:t>Rules：Skill 化接入</a:t>
             </a:r>
           </a:p>
           <a:p xmlns:a="http://schemas.openxmlformats.org/drawingml/2006/main">
@@ -6638,7 +6502,7 @@
                 <a:ea typeface="Aptos"/>
                 <a:cs typeface="Aptos"/>
               </a:rPr>
-              <a:t>~/.bai/ebai/hooks/hooks.toml</a:t>
+              <a:t>Hooks：默认关闭</a:t>
             </a:r>
           </a:p>
         </p:txBody>
@@ -6648,7 +6512,7 @@
           <p:cNvPr id="41" name="Text 39">
             <a:extLst xmlns:a="http://schemas.openxmlformats.org/drawingml/2006/main">
               <a:ext uri="{FF2B5EF4-FFF2-40B4-BE49-F238E27FC236}">
-                <a16:creationId xmlns:a16="http://schemas.microsoft.com/office/drawing/2014/main" id="{A5D75108-828E-478A-9D41-AFAA5DD1D726}"/>
+                <a16:creationId xmlns:a16="http://schemas.microsoft.com/office/drawing/2014/main" id="{132659FF-C961-4DB9-9F93-CF3CE4E41077}"/>
               </a:ext>
             </a:extLst>
           </p:cNvPr>
@@ -6669,7 +6533,7 @@
         </p:spPr>
         <p:txBody>
           <a:bodyPr xmlns:a="http://schemas.openxmlformats.org/drawingml/2006/main" wrap="square" lIns="0" tIns="0" rIns="0" bIns="0" anchor="ctr">
-            <a:normAutofit/>
+            <a:normAutofit fontScale="100000"/>
           </a:bodyPr>
           <a:lstStyle xmlns:a="http://schemas.openxmlformats.org/drawingml/2006/main"/>
           <a:p xmlns:a="http://schemas.openxmlformats.org/drawingml/2006/main">
@@ -6685,7 +6549,7 @@
                 <a:ea typeface="PingFang SC"/>
                 <a:cs typeface="PingFang SC"/>
               </a:rPr>
-              <a:t>EBAI 不是文本替换，而是带来源、冲突处理与安全约束的语义迁移。</a:t>
+              <a:t>这些能力就是 BAI Work 的产品能力；来源与安装只属于内部交付方式。</a:t>
             </a:r>
           </a:p>
         </p:txBody>
@@ -6695,7 +6559,7 @@
           <p:cNvPr id="42" name="Text 40">
             <a:extLst xmlns:a="http://schemas.openxmlformats.org/drawingml/2006/main">
               <a:ext uri="{FF2B5EF4-FFF2-40B4-BE49-F238E27FC236}">
-                <a16:creationId xmlns:a16="http://schemas.microsoft.com/office/drawing/2014/main" id="{A497B849-2487-44E4-BF51-A033EBA9D983}"/>
+                <a16:creationId xmlns:a16="http://schemas.microsoft.com/office/drawing/2014/main" id="{85D8D5DB-DD5B-414D-BD33-FDF6A1D9C4CE}"/>
               </a:ext>
             </a:extLst>
           </p:cNvPr>
@@ -6716,7 +6580,7 @@
         </p:spPr>
         <p:txBody>
           <a:bodyPr xmlns:a="http://schemas.openxmlformats.org/drawingml/2006/main" wrap="square" lIns="0" tIns="0" rIns="0" bIns="0" anchor="ctr">
-            <a:normAutofit/>
+            <a:normAutofit fontScale="100000"/>
           </a:bodyPr>
           <a:lstStyle xmlns:a="http://schemas.openxmlformats.org/drawingml/2006/main"/>
           <a:p xmlns:a="http://schemas.openxmlformats.org/drawingml/2006/main">
@@ -6732,7 +6596,7 @@
                 <a:ea typeface="Aptos"/>
                 <a:cs typeface="Aptos"/>
               </a:rPr>
-              <a:t>实现证据：EBAI source service · EBAI mapping service · mapping tests</a:t>
+              <a:t>实现证据：runtime instruction loader · component install tests · hook manifest guard</a:t>
             </a:r>
           </a:p>
         </p:txBody>
@@ -6742,7 +6606,7 @@
           <p:cNvPr id="43" name="Text 41">
             <a:extLst xmlns:a="http://schemas.openxmlformats.org/drawingml/2006/main">
               <a:ext uri="{FF2B5EF4-FFF2-40B4-BE49-F238E27FC236}">
-                <a16:creationId xmlns:a16="http://schemas.microsoft.com/office/drawing/2014/main" id="{FF1982EF-62CA-4AEC-B588-BA8C4DD3418A}"/>
+                <a16:creationId xmlns:a16="http://schemas.microsoft.com/office/drawing/2014/main" id="{F8C617C6-0E40-4AA3-A7F8-8E5AF2648D43}"/>
               </a:ext>
             </a:extLst>
           </p:cNvPr>
@@ -6787,7 +6651,7 @@
     </p:spTree>
     <p:extLst>
       <p:ext uri="{BB962C8B-B14F-4D97-AF65-F5344CB8AC3E}">
-        <p14:creationId xmlns:p14="http://schemas.microsoft.com/office/powerpoint/2010/main" val="1084197997"/>
+        <p14:creationId xmlns:p14="http://schemas.microsoft.com/office/powerpoint/2010/main" val="1858472735"/>
       </p:ext>
     </p:extLst>
   </p:cSld>
@@ -6818,7 +6682,7 @@
           <p:cNvPr id="2" name="Text 0">
             <a:extLst xmlns:a="http://schemas.openxmlformats.org/drawingml/2006/main">
               <a:ext uri="{FF2B5EF4-FFF2-40B4-BE49-F238E27FC236}">
-                <a16:creationId xmlns:a16="http://schemas.microsoft.com/office/drawing/2014/main" id="{DF181B62-18C9-4A7A-A612-0CC144054FDF}"/>
+                <a16:creationId xmlns:a16="http://schemas.microsoft.com/office/drawing/2014/main" id="{AA2CDD78-A266-4970-A329-6FFC3943B4AE}"/>
               </a:ext>
             </a:extLst>
           </p:cNvPr>
@@ -6839,7 +6703,7 @@
         </p:spPr>
         <p:txBody>
           <a:bodyPr xmlns:a="http://schemas.openxmlformats.org/drawingml/2006/main" wrap="square" lIns="0" tIns="0" rIns="0" bIns="0" anchor="ctr">
-            <a:normAutofit/>
+            <a:normAutofit fontScale="100000"/>
           </a:bodyPr>
           <a:lstStyle xmlns:a="http://schemas.openxmlformats.org/drawingml/2006/main"/>
           <a:p xmlns:a="http://schemas.openxmlformats.org/drawingml/2006/main">
@@ -6855,7 +6719,7 @@
                 <a:ea typeface="Aptos"/>
                 <a:cs typeface="Aptos"/>
               </a:rPr>
-              <a:t>PROJECT-SCOPED HOOKS</a:t>
+              <a:t>HOOK CAPABILITY BOUNDARY</a:t>
             </a:r>
           </a:p>
         </p:txBody>
@@ -6865,7 +6729,7 @@
           <p:cNvPr id="3" name="Text 1">
             <a:extLst xmlns:a="http://schemas.openxmlformats.org/drawingml/2006/main">
               <a:ext uri="{FF2B5EF4-FFF2-40B4-BE49-F238E27FC236}">
-                <a16:creationId xmlns:a16="http://schemas.microsoft.com/office/drawing/2014/main" id="{30A14199-4D4F-479B-A243-17B559A3A03C}"/>
+                <a16:creationId xmlns:a16="http://schemas.microsoft.com/office/drawing/2014/main" id="{BBB4B400-243A-4EED-B368-AF85D2C61484}"/>
               </a:ext>
             </a:extLst>
           </p:cNvPr>
@@ -6886,7 +6750,7 @@
         </p:spPr>
         <p:txBody>
           <a:bodyPr xmlns:a="http://schemas.openxmlformats.org/drawingml/2006/main" wrap="square" lIns="0" tIns="0" rIns="0" bIns="0" anchor="ctr">
-            <a:normAutofit/>
+            <a:normAutofit fontScale="100000"/>
           </a:bodyPr>
           <a:lstStyle xmlns:a="http://schemas.openxmlformats.org/drawingml/2006/main"/>
           <a:p xmlns:a="http://schemas.openxmlformats.org/drawingml/2006/main">
@@ -6902,7 +6766,7 @@
                 <a:ea typeface="PingFang SC"/>
                 <a:cs typeface="PingFang SC"/>
               </a:rPr>
-              <a:t>EBAI Hooks：转换能力，但不自动扩大执行权限</a:t>
+              <a:t>EBAI Hooks：能力已纳入产品体系，执行仍服从 Runtime 契约</a:t>
             </a:r>
           </a:p>
         </p:txBody>
@@ -6912,7 +6776,7 @@
           <p:cNvPr id="4" name="Shape 2">
             <a:extLst xmlns:a="http://schemas.openxmlformats.org/drawingml/2006/main">
               <a:ext uri="{FF2B5EF4-FFF2-40B4-BE49-F238E27FC236}">
-                <a16:creationId xmlns:a16="http://schemas.microsoft.com/office/drawing/2014/main" id="{82E84910-6EE2-45A4-AB3A-F53454B20C85}"/>
+                <a16:creationId xmlns:a16="http://schemas.microsoft.com/office/drawing/2014/main" id="{7EE838AC-AA25-424F-AE73-30ACA80A6E8B}"/>
               </a:ext>
             </a:extLst>
           </p:cNvPr>
@@ -6947,7 +6811,7 @@
           <p:cNvPr id="5" name="Text 3">
             <a:extLst xmlns:a="http://schemas.openxmlformats.org/drawingml/2006/main">
               <a:ext uri="{FF2B5EF4-FFF2-40B4-BE49-F238E27FC236}">
-                <a16:creationId xmlns:a16="http://schemas.microsoft.com/office/drawing/2014/main" id="{0452A405-9E1E-4706-ACA9-804784D4BD9A}"/>
+                <a16:creationId xmlns:a16="http://schemas.microsoft.com/office/drawing/2014/main" id="{9E2FA208-5F37-495D-910A-0BA68DE1397F}"/>
               </a:ext>
             </a:extLst>
           </p:cNvPr>
@@ -6968,7 +6832,7 @@
         </p:spPr>
         <p:txBody>
           <a:bodyPr xmlns:a="http://schemas.openxmlformats.org/drawingml/2006/main" wrap="square" lIns="0" tIns="0" rIns="0" bIns="0" anchor="ctr">
-            <a:normAutofit/>
+            <a:normAutofit fontScale="100000"/>
           </a:bodyPr>
           <a:lstStyle xmlns:a="http://schemas.openxmlformats.org/drawingml/2006/main"/>
           <a:p xmlns:a="http://schemas.openxmlformats.org/drawingml/2006/main">
@@ -6984,7 +6848,7 @@
                 <a:ea typeface="PingFang SC"/>
                 <a:cs typeface="PingFang SC"/>
               </a:rPr>
-              <a:t>可信执行</a:t>
+              <a:t>能力边界</a:t>
             </a:r>
           </a:p>
         </p:txBody>
@@ -6994,7 +6858,7 @@
           <p:cNvPr id="6" name="Shape 4">
             <a:extLst xmlns:a="http://schemas.openxmlformats.org/drawingml/2006/main">
               <a:ext uri="{FF2B5EF4-FFF2-40B4-BE49-F238E27FC236}">
-                <a16:creationId xmlns:a16="http://schemas.microsoft.com/office/drawing/2014/main" id="{998D6F59-2E25-4796-8307-2E97DC9593AA}"/>
+                <a16:creationId xmlns:a16="http://schemas.microsoft.com/office/drawing/2014/main" id="{4BBF21ED-46AF-4875-92AF-26354A1BA93E}"/>
               </a:ext>
             </a:extLst>
           </p:cNvPr>
@@ -7025,7 +6889,7 @@
           <p:cNvPr id="7" name="Shape 5">
             <a:extLst xmlns:a="http://schemas.openxmlformats.org/drawingml/2006/main">
               <a:ext uri="{FF2B5EF4-FFF2-40B4-BE49-F238E27FC236}">
-                <a16:creationId xmlns:a16="http://schemas.microsoft.com/office/drawing/2014/main" id="{1DAD7886-1EA4-44F6-A58D-8A8BEDCF16E3}"/>
+                <a16:creationId xmlns:a16="http://schemas.microsoft.com/office/drawing/2014/main" id="{95DEDE31-77C6-49AB-A510-F11F7D6FDBC7}"/>
               </a:ext>
             </a:extLst>
           </p:cNvPr>
@@ -7060,7 +6924,7 @@
           <p:cNvPr id="8" name="Text 6">
             <a:extLst xmlns:a="http://schemas.openxmlformats.org/drawingml/2006/main">
               <a:ext uri="{FF2B5EF4-FFF2-40B4-BE49-F238E27FC236}">
-                <a16:creationId xmlns:a16="http://schemas.microsoft.com/office/drawing/2014/main" id="{DBD159D0-6FC1-496B-8332-432409ED9060}"/>
+                <a16:creationId xmlns:a16="http://schemas.microsoft.com/office/drawing/2014/main" id="{C41758CC-EA9D-48BD-A0EB-C3FE33070F18}"/>
               </a:ext>
             </a:extLst>
           </p:cNvPr>
@@ -7081,7 +6945,7 @@
         </p:spPr>
         <p:txBody>
           <a:bodyPr xmlns:a="http://schemas.openxmlformats.org/drawingml/2006/main" wrap="square" lIns="0" tIns="0" rIns="0" bIns="0" anchor="ctr">
-            <a:normAutofit/>
+            <a:normAutofit fontScale="100000"/>
           </a:bodyPr>
           <a:lstStyle xmlns:a="http://schemas.openxmlformats.org/drawingml/2006/main"/>
           <a:p xmlns:a="http://schemas.openxmlformats.org/drawingml/2006/main">
@@ -7097,7 +6961,7 @@
                 <a:ea typeface="PingFang SC"/>
                 <a:cs typeface="PingFang SC"/>
               </a:rPr>
-              <a:t>事件语义转换</a:t>
+              <a:t>Hook 能力模型</a:t>
             </a:r>
           </a:p>
         </p:txBody>
@@ -7107,7 +6971,7 @@
           <p:cNvPr id="9" name="Text 7">
             <a:extLst xmlns:a="http://schemas.openxmlformats.org/drawingml/2006/main">
               <a:ext uri="{FF2B5EF4-FFF2-40B4-BE49-F238E27FC236}">
-                <a16:creationId xmlns:a16="http://schemas.microsoft.com/office/drawing/2014/main" id="{167FAECA-8D5B-47A1-AE96-EF16BCDBF2A5}"/>
+                <a16:creationId xmlns:a16="http://schemas.microsoft.com/office/drawing/2014/main" id="{3D4C51F1-708C-4C1C-95CD-E05A760D189E}"/>
               </a:ext>
             </a:extLst>
           </p:cNvPr>
@@ -7128,7 +6992,7 @@
         </p:spPr>
         <p:txBody>
           <a:bodyPr xmlns:a="http://schemas.openxmlformats.org/drawingml/2006/main" wrap="square" lIns="0" tIns="0" rIns="0" bIns="0" anchor="ctr">
-            <a:normAutofit/>
+            <a:normAutofit fontScale="100000"/>
           </a:bodyPr>
           <a:lstStyle xmlns:a="http://schemas.openxmlformats.org/drawingml/2006/main"/>
           <a:p xmlns:a="http://schemas.openxmlformats.org/drawingml/2006/main">
@@ -7144,7 +7008,7 @@
                 <a:ea typeface="Aptos"/>
                 <a:cs typeface="Aptos"/>
               </a:rPr>
-              <a:t>PreToolUse</a:t>
+              <a:t>消息</a:t>
             </a:r>
           </a:p>
         </p:txBody>
@@ -7154,7 +7018,7 @@
           <p:cNvPr id="10" name="Shape 8">
             <a:extLst xmlns:a="http://schemas.openxmlformats.org/drawingml/2006/main">
               <a:ext uri="{FF2B5EF4-FFF2-40B4-BE49-F238E27FC236}">
-                <a16:creationId xmlns:a16="http://schemas.microsoft.com/office/drawing/2014/main" id="{F7D4D3C4-6CED-4156-9FB9-016E079E4DC1}"/>
+                <a16:creationId xmlns:a16="http://schemas.microsoft.com/office/drawing/2014/main" id="{84D6017C-C4B4-4AAE-A4DF-022BE59C4336}"/>
               </a:ext>
             </a:extLst>
           </p:cNvPr>
@@ -7186,7 +7050,7 @@
           <p:cNvPr id="11" name="Text 9">
             <a:extLst xmlns:a="http://schemas.openxmlformats.org/drawingml/2006/main">
               <a:ext uri="{FF2B5EF4-FFF2-40B4-BE49-F238E27FC236}">
-                <a16:creationId xmlns:a16="http://schemas.microsoft.com/office/drawing/2014/main" id="{726AB1C9-19CC-4308-A653-481BCB42C312}"/>
+                <a16:creationId xmlns:a16="http://schemas.microsoft.com/office/drawing/2014/main" id="{476C4FED-7F08-41A4-9FFC-CFF7C03DEDAA}"/>
               </a:ext>
             </a:extLst>
           </p:cNvPr>
@@ -7207,7 +7071,7 @@
         </p:spPr>
         <p:txBody>
           <a:bodyPr xmlns:a="http://schemas.openxmlformats.org/drawingml/2006/main" wrap="square" lIns="0" tIns="0" rIns="0" bIns="0" anchor="ctr">
-            <a:normAutofit/>
+            <a:normAutofit fontScale="100000"/>
           </a:bodyPr>
           <a:lstStyle xmlns:a="http://schemas.openxmlformats.org/drawingml/2006/main"/>
           <a:p xmlns:a="http://schemas.openxmlformats.org/drawingml/2006/main">
@@ -7223,7 +7087,7 @@
                 <a:ea typeface="Aptos"/>
                 <a:cs typeface="Aptos"/>
               </a:rPr>
-              <a:t>tool_call_before</a:t>
+              <a:t>message_submit</a:t>
             </a:r>
           </a:p>
         </p:txBody>
@@ -7233,7 +7097,7 @@
           <p:cNvPr id="12" name="Text 10">
             <a:extLst xmlns:a="http://schemas.openxmlformats.org/drawingml/2006/main">
               <a:ext uri="{FF2B5EF4-FFF2-40B4-BE49-F238E27FC236}">
-                <a16:creationId xmlns:a16="http://schemas.microsoft.com/office/drawing/2014/main" id="{DE4508A0-A2E1-4D37-8B52-C8359B20F92A}"/>
+                <a16:creationId xmlns:a16="http://schemas.microsoft.com/office/drawing/2014/main" id="{C0929A51-0C23-4531-874C-D5379B272DA2}"/>
               </a:ext>
             </a:extLst>
           </p:cNvPr>
@@ -7254,7 +7118,7 @@
         </p:spPr>
         <p:txBody>
           <a:bodyPr xmlns:a="http://schemas.openxmlformats.org/drawingml/2006/main" wrap="square" lIns="0" tIns="0" rIns="0" bIns="0" anchor="ctr">
-            <a:normAutofit/>
+            <a:normAutofit fontScale="100000"/>
           </a:bodyPr>
           <a:lstStyle xmlns:a="http://schemas.openxmlformats.org/drawingml/2006/main"/>
           <a:p xmlns:a="http://schemas.openxmlformats.org/drawingml/2006/main">
@@ -7270,7 +7134,7 @@
                 <a:ea typeface="Aptos"/>
                 <a:cs typeface="Aptos"/>
               </a:rPr>
-              <a:t>PostToolUse</a:t>
+              <a:t>会话开始</a:t>
             </a:r>
           </a:p>
         </p:txBody>
@@ -7280,7 +7144,7 @@
           <p:cNvPr id="13" name="Shape 11">
             <a:extLst xmlns:a="http://schemas.openxmlformats.org/drawingml/2006/main">
               <a:ext uri="{FF2B5EF4-FFF2-40B4-BE49-F238E27FC236}">
-                <a16:creationId xmlns:a16="http://schemas.microsoft.com/office/drawing/2014/main" id="{FE9AEA2D-9AA5-4EC3-B4E5-C05D798C7150}"/>
+                <a16:creationId xmlns:a16="http://schemas.microsoft.com/office/drawing/2014/main" id="{DF1C3DB4-11D3-445F-B9CF-4181CE848B59}"/>
               </a:ext>
             </a:extLst>
           </p:cNvPr>
@@ -7312,7 +7176,7 @@
           <p:cNvPr id="14" name="Text 12">
             <a:extLst xmlns:a="http://schemas.openxmlformats.org/drawingml/2006/main">
               <a:ext uri="{FF2B5EF4-FFF2-40B4-BE49-F238E27FC236}">
-                <a16:creationId xmlns:a16="http://schemas.microsoft.com/office/drawing/2014/main" id="{FCDDA5E6-115F-4407-B5A3-482C6D8C717C}"/>
+                <a16:creationId xmlns:a16="http://schemas.microsoft.com/office/drawing/2014/main" id="{16070BF7-0C50-438F-A415-6D120E3BD528}"/>
               </a:ext>
             </a:extLst>
           </p:cNvPr>
@@ -7333,7 +7197,7 @@
         </p:spPr>
         <p:txBody>
           <a:bodyPr xmlns:a="http://schemas.openxmlformats.org/drawingml/2006/main" wrap="square" lIns="0" tIns="0" rIns="0" bIns="0" anchor="ctr">
-            <a:normAutofit/>
+            <a:normAutofit fontScale="100000"/>
           </a:bodyPr>
           <a:lstStyle xmlns:a="http://schemas.openxmlformats.org/drawingml/2006/main"/>
           <a:p xmlns:a="http://schemas.openxmlformats.org/drawingml/2006/main">
@@ -7349,7 +7213,7 @@
                 <a:ea typeface="Aptos"/>
                 <a:cs typeface="Aptos"/>
               </a:rPr>
-              <a:t>tool_call_after</a:t>
+              <a:t>session_start</a:t>
             </a:r>
           </a:p>
         </p:txBody>
@@ -7359,7 +7223,7 @@
           <p:cNvPr id="15" name="Text 13">
             <a:extLst xmlns:a="http://schemas.openxmlformats.org/drawingml/2006/main">
               <a:ext uri="{FF2B5EF4-FFF2-40B4-BE49-F238E27FC236}">
-                <a16:creationId xmlns:a16="http://schemas.microsoft.com/office/drawing/2014/main" id="{A0928E76-A5B5-44EF-B5F4-443AB001BF0E}"/>
+                <a16:creationId xmlns:a16="http://schemas.microsoft.com/office/drawing/2014/main" id="{B19A67A4-1B06-44AE-B9C1-AF21ED6A3E81}"/>
               </a:ext>
             </a:extLst>
           </p:cNvPr>
@@ -7380,7 +7244,7 @@
         </p:spPr>
         <p:txBody>
           <a:bodyPr xmlns:a="http://schemas.openxmlformats.org/drawingml/2006/main" wrap="square" lIns="0" tIns="0" rIns="0" bIns="0" anchor="ctr">
-            <a:normAutofit/>
+            <a:normAutofit fontScale="100000"/>
           </a:bodyPr>
           <a:lstStyle xmlns:a="http://schemas.openxmlformats.org/drawingml/2006/main"/>
           <a:p xmlns:a="http://schemas.openxmlformats.org/drawingml/2006/main">
@@ -7396,7 +7260,7 @@
                 <a:ea typeface="Aptos"/>
                 <a:cs typeface="Aptos"/>
               </a:rPr>
-              <a:t>SessionStart</a:t>
+              <a:t>工具调用前</a:t>
             </a:r>
           </a:p>
         </p:txBody>
@@ -7406,7 +7270,7 @@
           <p:cNvPr id="16" name="Shape 14">
             <a:extLst xmlns:a="http://schemas.openxmlformats.org/drawingml/2006/main">
               <a:ext uri="{FF2B5EF4-FFF2-40B4-BE49-F238E27FC236}">
-                <a16:creationId xmlns:a16="http://schemas.microsoft.com/office/drawing/2014/main" id="{C04CD056-17BA-46D9-AD8F-4A7286416574}"/>
+                <a16:creationId xmlns:a16="http://schemas.microsoft.com/office/drawing/2014/main" id="{A191CFB3-A488-4EE5-9313-0F290D723CF8}"/>
               </a:ext>
             </a:extLst>
           </p:cNvPr>
@@ -7438,7 +7302,7 @@
           <p:cNvPr id="17" name="Text 15">
             <a:extLst xmlns:a="http://schemas.openxmlformats.org/drawingml/2006/main">
               <a:ext uri="{FF2B5EF4-FFF2-40B4-BE49-F238E27FC236}">
-                <a16:creationId xmlns:a16="http://schemas.microsoft.com/office/drawing/2014/main" id="{207546F8-E8F4-4DA3-B06A-0CE86007920D}"/>
+                <a16:creationId xmlns:a16="http://schemas.microsoft.com/office/drawing/2014/main" id="{6F1F94B0-9CEC-4052-B5DA-FF9E765D20B0}"/>
               </a:ext>
             </a:extLst>
           </p:cNvPr>
@@ -7459,7 +7323,7 @@
         </p:spPr>
         <p:txBody>
           <a:bodyPr xmlns:a="http://schemas.openxmlformats.org/drawingml/2006/main" wrap="square" lIns="0" tIns="0" rIns="0" bIns="0" anchor="ctr">
-            <a:normAutofit/>
+            <a:normAutofit fontScale="100000"/>
           </a:bodyPr>
           <a:lstStyle xmlns:a="http://schemas.openxmlformats.org/drawingml/2006/main"/>
           <a:p xmlns:a="http://schemas.openxmlformats.org/drawingml/2006/main">
@@ -7475,7 +7339,7 @@
                 <a:ea typeface="Aptos"/>
                 <a:cs typeface="Aptos"/>
               </a:rPr>
-              <a:t>session_start</a:t>
+              <a:t>tool_call_before</a:t>
             </a:r>
           </a:p>
         </p:txBody>
@@ -7485,7 +7349,7 @@
           <p:cNvPr id="18" name="Text 16">
             <a:extLst xmlns:a="http://schemas.openxmlformats.org/drawingml/2006/main">
               <a:ext uri="{FF2B5EF4-FFF2-40B4-BE49-F238E27FC236}">
-                <a16:creationId xmlns:a16="http://schemas.microsoft.com/office/drawing/2014/main" id="{7AD76866-AD5F-4577-A32C-5AF164BF208C}"/>
+                <a16:creationId xmlns:a16="http://schemas.microsoft.com/office/drawing/2014/main" id="{BAECA2D0-F889-498D-B69A-FAE7AFA059ED}"/>
               </a:ext>
             </a:extLst>
           </p:cNvPr>
@@ -7506,7 +7370,7 @@
         </p:spPr>
         <p:txBody>
           <a:bodyPr xmlns:a="http://schemas.openxmlformats.org/drawingml/2006/main" wrap="square" lIns="0" tIns="0" rIns="0" bIns="0" anchor="ctr">
-            <a:normAutofit/>
+            <a:normAutofit fontScale="100000"/>
           </a:bodyPr>
           <a:lstStyle xmlns:a="http://schemas.openxmlformats.org/drawingml/2006/main"/>
           <a:p xmlns:a="http://schemas.openxmlformats.org/drawingml/2006/main">
@@ -7522,7 +7386,7 @@
                 <a:ea typeface="Aptos"/>
                 <a:cs typeface="Aptos"/>
               </a:rPr>
-              <a:t>SessionEnd</a:t>
+              <a:t>工具调用后</a:t>
             </a:r>
           </a:p>
         </p:txBody>
@@ -7532,7 +7396,7 @@
           <p:cNvPr id="19" name="Shape 17">
             <a:extLst xmlns:a="http://schemas.openxmlformats.org/drawingml/2006/main">
               <a:ext uri="{FF2B5EF4-FFF2-40B4-BE49-F238E27FC236}">
-                <a16:creationId xmlns:a16="http://schemas.microsoft.com/office/drawing/2014/main" id="{BF332789-CA30-48FC-BB03-8AF3D14ECDCC}"/>
+                <a16:creationId xmlns:a16="http://schemas.microsoft.com/office/drawing/2014/main" id="{2BEC5FD7-5F85-4F30-A44F-BB914135DBCB}"/>
               </a:ext>
             </a:extLst>
           </p:cNvPr>
@@ -7564,7 +7428,7 @@
           <p:cNvPr id="20" name="Text 18">
             <a:extLst xmlns:a="http://schemas.openxmlformats.org/drawingml/2006/main">
               <a:ext uri="{FF2B5EF4-FFF2-40B4-BE49-F238E27FC236}">
-                <a16:creationId xmlns:a16="http://schemas.microsoft.com/office/drawing/2014/main" id="{54000FA6-335F-4391-8628-E905AA4C8165}"/>
+                <a16:creationId xmlns:a16="http://schemas.microsoft.com/office/drawing/2014/main" id="{971692C6-D9EA-4282-A7CF-0327A37F7922}"/>
               </a:ext>
             </a:extLst>
           </p:cNvPr>
@@ -7585,7 +7449,7 @@
         </p:spPr>
         <p:txBody>
           <a:bodyPr xmlns:a="http://schemas.openxmlformats.org/drawingml/2006/main" wrap="square" lIns="0" tIns="0" rIns="0" bIns="0" anchor="ctr">
-            <a:normAutofit/>
+            <a:normAutofit fontScale="100000"/>
           </a:bodyPr>
           <a:lstStyle xmlns:a="http://schemas.openxmlformats.org/drawingml/2006/main"/>
           <a:p xmlns:a="http://schemas.openxmlformats.org/drawingml/2006/main">
@@ -7601,7 +7465,7 @@
                 <a:ea typeface="Aptos"/>
                 <a:cs typeface="Aptos"/>
               </a:rPr>
-              <a:t>session_end</a:t>
+              <a:t>tool_call_after</a:t>
             </a:r>
           </a:p>
         </p:txBody>
@@ -7611,7 +7475,7 @@
           <p:cNvPr id="21" name="Text 19">
             <a:extLst xmlns:a="http://schemas.openxmlformats.org/drawingml/2006/main">
               <a:ext uri="{FF2B5EF4-FFF2-40B4-BE49-F238E27FC236}">
-                <a16:creationId xmlns:a16="http://schemas.microsoft.com/office/drawing/2014/main" id="{93BFC980-9105-4D64-BB0F-C219C03C8C0A}"/>
+                <a16:creationId xmlns:a16="http://schemas.microsoft.com/office/drawing/2014/main" id="{05BE509F-2AD6-4DBF-9978-C540A3ABF33F}"/>
               </a:ext>
             </a:extLst>
           </p:cNvPr>
@@ -7632,7 +7496,7 @@
         </p:spPr>
         <p:txBody>
           <a:bodyPr xmlns:a="http://schemas.openxmlformats.org/drawingml/2006/main" wrap="square" lIns="0" tIns="0" rIns="0" bIns="0" anchor="ctr">
-            <a:normAutofit/>
+            <a:normAutofit fontScale="100000"/>
           </a:bodyPr>
           <a:lstStyle xmlns:a="http://schemas.openxmlformats.org/drawingml/2006/main"/>
           <a:p xmlns:a="http://schemas.openxmlformats.org/drawingml/2006/main">
@@ -7648,7 +7512,7 @@
                 <a:ea typeface="Aptos"/>
                 <a:cs typeface="Aptos"/>
               </a:rPr>
-              <a:t>Stop</a:t>
+              <a:t>轮次结束</a:t>
             </a:r>
           </a:p>
         </p:txBody>
@@ -7658,7 +7522,7 @@
           <p:cNvPr id="22" name="Shape 20">
             <a:extLst xmlns:a="http://schemas.openxmlformats.org/drawingml/2006/main">
               <a:ext uri="{FF2B5EF4-FFF2-40B4-BE49-F238E27FC236}">
-                <a16:creationId xmlns:a16="http://schemas.microsoft.com/office/drawing/2014/main" id="{1E089270-BCC1-4282-A3DB-73E92D68B8B7}"/>
+                <a16:creationId xmlns:a16="http://schemas.microsoft.com/office/drawing/2014/main" id="{4BEDB7FA-D5DF-450A-8C82-B14A60886A35}"/>
               </a:ext>
             </a:extLst>
           </p:cNvPr>
@@ -7690,7 +7554,7 @@
           <p:cNvPr id="23" name="Text 21">
             <a:extLst xmlns:a="http://schemas.openxmlformats.org/drawingml/2006/main">
               <a:ext uri="{FF2B5EF4-FFF2-40B4-BE49-F238E27FC236}">
-                <a16:creationId xmlns:a16="http://schemas.microsoft.com/office/drawing/2014/main" id="{CFDF4AD6-0B26-46A6-8164-AD8BFFAED2F7}"/>
+                <a16:creationId xmlns:a16="http://schemas.microsoft.com/office/drawing/2014/main" id="{BE2B92A8-6604-4DD7-B26A-43E9456AEE9D}"/>
               </a:ext>
             </a:extLst>
           </p:cNvPr>
@@ -7737,7 +7601,7 @@
           <p:cNvPr id="24" name="Text 22">
             <a:extLst xmlns:a="http://schemas.openxmlformats.org/drawingml/2006/main">
               <a:ext uri="{FF2B5EF4-FFF2-40B4-BE49-F238E27FC236}">
-                <a16:creationId xmlns:a16="http://schemas.microsoft.com/office/drawing/2014/main" id="{97573AE6-C53B-4FDC-9906-53DAA0136832}"/>
+                <a16:creationId xmlns:a16="http://schemas.microsoft.com/office/drawing/2014/main" id="{5ED91AC1-5333-461E-A713-0252EC8598B5}"/>
               </a:ext>
             </a:extLst>
           </p:cNvPr>
@@ -7758,7 +7622,7 @@
         </p:spPr>
         <p:txBody>
           <a:bodyPr xmlns:a="http://schemas.openxmlformats.org/drawingml/2006/main" wrap="square" lIns="0" tIns="0" rIns="0" bIns="0" anchor="ctr">
-            <a:normAutofit/>
+            <a:normAutofit fontScale="100000"/>
           </a:bodyPr>
           <a:lstStyle xmlns:a="http://schemas.openxmlformats.org/drawingml/2006/main"/>
           <a:p xmlns:a="http://schemas.openxmlformats.org/drawingml/2006/main">
@@ -7774,7 +7638,7 @@
                 <a:ea typeface="Aptos"/>
                 <a:cs typeface="Aptos"/>
               </a:rPr>
-              <a:t>UserPromptSubmit</a:t>
+              <a:t>会话结束</a:t>
             </a:r>
           </a:p>
         </p:txBody>
@@ -7784,7 +7648,7 @@
           <p:cNvPr id="25" name="Shape 23">
             <a:extLst xmlns:a="http://schemas.openxmlformats.org/drawingml/2006/main">
               <a:ext uri="{FF2B5EF4-FFF2-40B4-BE49-F238E27FC236}">
-                <a16:creationId xmlns:a16="http://schemas.microsoft.com/office/drawing/2014/main" id="{9A0D7B92-7ABF-47FA-88F2-20227CC35234}"/>
+                <a16:creationId xmlns:a16="http://schemas.microsoft.com/office/drawing/2014/main" id="{66DCF7B1-696C-486B-9825-AEE9FC6D05DE}"/>
               </a:ext>
             </a:extLst>
           </p:cNvPr>
@@ -7816,7 +7680,7 @@
           <p:cNvPr id="26" name="Text 24">
             <a:extLst xmlns:a="http://schemas.openxmlformats.org/drawingml/2006/main">
               <a:ext uri="{FF2B5EF4-FFF2-40B4-BE49-F238E27FC236}">
-                <a16:creationId xmlns:a16="http://schemas.microsoft.com/office/drawing/2014/main" id="{675642C3-9797-4800-AE9C-C564850EB990}"/>
+                <a16:creationId xmlns:a16="http://schemas.microsoft.com/office/drawing/2014/main" id="{9E39A109-D726-4D05-81DA-31D9FE31FD3A}"/>
               </a:ext>
             </a:extLst>
           </p:cNvPr>
@@ -7837,7 +7701,7 @@
         </p:spPr>
         <p:txBody>
           <a:bodyPr xmlns:a="http://schemas.openxmlformats.org/drawingml/2006/main" wrap="square" lIns="0" tIns="0" rIns="0" bIns="0" anchor="ctr">
-            <a:normAutofit/>
+            <a:normAutofit fontScale="100000"/>
           </a:bodyPr>
           <a:lstStyle xmlns:a="http://schemas.openxmlformats.org/drawingml/2006/main"/>
           <a:p xmlns:a="http://schemas.openxmlformats.org/drawingml/2006/main">
@@ -7853,7 +7717,7 @@
                 <a:ea typeface="Aptos"/>
                 <a:cs typeface="Aptos"/>
               </a:rPr>
-              <a:t>message_submit</a:t>
+              <a:t>session_end</a:t>
             </a:r>
           </a:p>
         </p:txBody>
@@ -7863,7 +7727,7 @@
           <p:cNvPr id="27" name="Shape 25">
             <a:extLst xmlns:a="http://schemas.openxmlformats.org/drawingml/2006/main">
               <a:ext uri="{FF2B5EF4-FFF2-40B4-BE49-F238E27FC236}">
-                <a16:creationId xmlns:a16="http://schemas.microsoft.com/office/drawing/2014/main" id="{87CE3FF0-BFDE-406C-AB84-1DE69FE346B1}"/>
+                <a16:creationId xmlns:a16="http://schemas.microsoft.com/office/drawing/2014/main" id="{4424AD4E-8CEA-4D87-B062-BFC947941122}"/>
               </a:ext>
             </a:extLst>
           </p:cNvPr>
@@ -7898,7 +7762,7 @@
           <p:cNvPr id="28" name="Text 26">
             <a:extLst xmlns:a="http://schemas.openxmlformats.org/drawingml/2006/main">
               <a:ext uri="{FF2B5EF4-FFF2-40B4-BE49-F238E27FC236}">
-                <a16:creationId xmlns:a16="http://schemas.microsoft.com/office/drawing/2014/main" id="{48E1E12B-3114-469C-9089-123D009C4D36}"/>
+                <a16:creationId xmlns:a16="http://schemas.microsoft.com/office/drawing/2014/main" id="{C8CF84E5-57C2-4C14-9423-6418488C686C}"/>
               </a:ext>
             </a:extLst>
           </p:cNvPr>
@@ -7919,7 +7783,7 @@
         </p:spPr>
         <p:txBody>
           <a:bodyPr xmlns:a="http://schemas.openxmlformats.org/drawingml/2006/main" wrap="square" lIns="0" tIns="0" rIns="0" bIns="0" anchor="ctr">
-            <a:normAutofit/>
+            <a:normAutofit fontScale="100000"/>
           </a:bodyPr>
           <a:lstStyle xmlns:a="http://schemas.openxmlformats.org/drawingml/2006/main"/>
           <a:p xmlns:a="http://schemas.openxmlformats.org/drawingml/2006/main">
@@ -7935,7 +7799,7 @@
                 <a:ea typeface="PingFang SC"/>
                 <a:cs typeface="PingFang SC"/>
               </a:rPr>
-              <a:t>默认安全策略</a:t>
+              <a:t>当前交付状态</a:t>
             </a:r>
           </a:p>
         </p:txBody>
@@ -7945,7 +7809,7 @@
           <p:cNvPr id="29" name="Shape 27">
             <a:extLst xmlns:a="http://schemas.openxmlformats.org/drawingml/2006/main">
               <a:ext uri="{FF2B5EF4-FFF2-40B4-BE49-F238E27FC236}">
-                <a16:creationId xmlns:a16="http://schemas.microsoft.com/office/drawing/2014/main" id="{59B45D32-8462-44BF-866E-44C03E5097F0}"/>
+                <a16:creationId xmlns:a16="http://schemas.microsoft.com/office/drawing/2014/main" id="{7BCF6FC3-2319-4B35-8C2F-56E318498D6A}"/>
               </a:ext>
             </a:extLst>
           </p:cNvPr>
@@ -7978,7 +7842,7 @@
           <p:cNvPr id="30" name="Text 28">
             <a:extLst xmlns:a="http://schemas.openxmlformats.org/drawingml/2006/main">
               <a:ext uri="{FF2B5EF4-FFF2-40B4-BE49-F238E27FC236}">
-                <a16:creationId xmlns:a16="http://schemas.microsoft.com/office/drawing/2014/main" id="{B1877944-EAAB-4698-9D8C-30905756AA4C}"/>
+                <a16:creationId xmlns:a16="http://schemas.microsoft.com/office/drawing/2014/main" id="{7872A9BD-67B5-4678-963E-D32061A668E4}"/>
               </a:ext>
             </a:extLst>
           </p:cNvPr>
@@ -7999,7 +7863,7 @@
         </p:spPr>
         <p:txBody>
           <a:bodyPr xmlns:a="http://schemas.openxmlformats.org/drawingml/2006/main" wrap="square" lIns="0" tIns="0" rIns="0" bIns="0" anchor="t">
-            <a:normAutofit/>
+            <a:normAutofit fontScale="100000"/>
           </a:bodyPr>
           <a:lstStyle xmlns:a="http://schemas.openxmlformats.org/drawingml/2006/main"/>
           <a:p xmlns:a="http://schemas.openxmlformats.org/drawingml/2006/main">
@@ -8015,7 +7879,7 @@
                 <a:ea typeface="PingFang SC"/>
                 <a:cs typeface="PingFang SC"/>
               </a:rPr>
-              <a:t>全局 manifest 始终 enabled = false</a:t>
+              <a:t>生成的全局 manifest 始终 enabled = false</a:t>
             </a:r>
           </a:p>
         </p:txBody>
@@ -8025,7 +7889,7 @@
           <p:cNvPr id="31" name="Shape 29">
             <a:extLst xmlns:a="http://schemas.openxmlformats.org/drawingml/2006/main">
               <a:ext uri="{FF2B5EF4-FFF2-40B4-BE49-F238E27FC236}">
-                <a16:creationId xmlns:a16="http://schemas.microsoft.com/office/drawing/2014/main" id="{4D6E4E46-B626-4143-84EA-3CB6FA00DB02}"/>
+                <a16:creationId xmlns:a16="http://schemas.microsoft.com/office/drawing/2014/main" id="{500A07FA-0F27-44FC-AB54-B5414CFD3759}"/>
               </a:ext>
             </a:extLst>
           </p:cNvPr>
@@ -8058,7 +7922,7 @@
           <p:cNvPr id="32" name="Text 30">
             <a:extLst xmlns:a="http://schemas.openxmlformats.org/drawingml/2006/main">
               <a:ext uri="{FF2B5EF4-FFF2-40B4-BE49-F238E27FC236}">
-                <a16:creationId xmlns:a16="http://schemas.microsoft.com/office/drawing/2014/main" id="{2C10DB4F-E97D-4AE4-91BA-CEBBCAEE10D4}"/>
+                <a16:creationId xmlns:a16="http://schemas.microsoft.com/office/drawing/2014/main" id="{A7036F96-2E13-4E6A-97BD-A66DEB5E459C}"/>
               </a:ext>
             </a:extLst>
           </p:cNvPr>
@@ -8079,7 +7943,7 @@
         </p:spPr>
         <p:txBody>
           <a:bodyPr xmlns:a="http://schemas.openxmlformats.org/drawingml/2006/main" wrap="square" lIns="0" tIns="0" rIns="0" bIns="0" anchor="t">
-            <a:normAutofit/>
+            <a:normAutofit fontScale="100000"/>
           </a:bodyPr>
           <a:lstStyle xmlns:a="http://schemas.openxmlformats.org/drawingml/2006/main"/>
           <a:p xmlns:a="http://schemas.openxmlformats.org/drawingml/2006/main">
@@ -8095,7 +7959,7 @@
                 <a:ea typeface="PingFang SC"/>
                 <a:cs typeface="PingFang SC"/>
               </a:rPr>
-              <a:t>启用必须显式选择受信任 workspace</a:t>
+              <a:t>当前设置页 Hook 开关保持禁用</a:t>
             </a:r>
           </a:p>
         </p:txBody>
@@ -8105,7 +7969,7 @@
           <p:cNvPr id="33" name="Shape 31">
             <a:extLst xmlns:a="http://schemas.openxmlformats.org/drawingml/2006/main">
               <a:ext uri="{FF2B5EF4-FFF2-40B4-BE49-F238E27FC236}">
-                <a16:creationId xmlns:a16="http://schemas.microsoft.com/office/drawing/2014/main" id="{B376B8DD-7BC4-4EAE-B71C-53A7A5ABB656}"/>
+                <a16:creationId xmlns:a16="http://schemas.microsoft.com/office/drawing/2014/main" id="{ED0B979C-B655-41E0-8075-F88E22B8B8E4}"/>
               </a:ext>
             </a:extLst>
           </p:cNvPr>
@@ -8138,7 +8002,7 @@
           <p:cNvPr id="34" name="Text 32">
             <a:extLst xmlns:a="http://schemas.openxmlformats.org/drawingml/2006/main">
               <a:ext uri="{FF2B5EF4-FFF2-40B4-BE49-F238E27FC236}">
-                <a16:creationId xmlns:a16="http://schemas.microsoft.com/office/drawing/2014/main" id="{4C50371F-9383-4225-A76C-DABF2AA9AAA6}"/>
+                <a16:creationId xmlns:a16="http://schemas.microsoft.com/office/drawing/2014/main" id="{A24A9DC7-B07B-4C85-9B6D-695C3FDEE860}"/>
               </a:ext>
             </a:extLst>
           </p:cNvPr>
@@ -8159,7 +8023,7 @@
         </p:spPr>
         <p:txBody>
           <a:bodyPr xmlns:a="http://schemas.openxmlformats.org/drawingml/2006/main" wrap="square" lIns="0" tIns="0" rIns="0" bIns="0" anchor="t">
-            <a:normAutofit/>
+            <a:normAutofit fontScale="100000"/>
           </a:bodyPr>
           <a:lstStyle xmlns:a="http://schemas.openxmlformats.org/drawingml/2006/main"/>
           <a:p xmlns:a="http://schemas.openxmlformats.org/drawingml/2006/main">
@@ -8175,7 +8039,7 @@
                 <a:ea typeface="PingFang SC"/>
                 <a:cs typeface="PingFang SC"/>
               </a:rPr>
-              <a:t>只写入 &lt;workspace&gt;/.bai/hooks.toml</a:t>
+              <a:t>BAI Code 0.9.1 尚无 Hook 执行契约</a:t>
             </a:r>
           </a:p>
         </p:txBody>
@@ -8185,7 +8049,7 @@
           <p:cNvPr id="35" name="Shape 33">
             <a:extLst xmlns:a="http://schemas.openxmlformats.org/drawingml/2006/main">
               <a:ext uri="{FF2B5EF4-FFF2-40B4-BE49-F238E27FC236}">
-                <a16:creationId xmlns:a16="http://schemas.microsoft.com/office/drawing/2014/main" id="{0B7A5B1F-DAF0-4406-A6A2-BC62E534DEA3}"/>
+                <a16:creationId xmlns:a16="http://schemas.microsoft.com/office/drawing/2014/main" id="{7CAC9C5C-26E4-4A94-8ABC-EFE3C815B2A1}"/>
               </a:ext>
             </a:extLst>
           </p:cNvPr>
@@ -8218,7 +8082,7 @@
           <p:cNvPr id="36" name="Text 34">
             <a:extLst xmlns:a="http://schemas.openxmlformats.org/drawingml/2006/main">
               <a:ext uri="{FF2B5EF4-FFF2-40B4-BE49-F238E27FC236}">
-                <a16:creationId xmlns:a16="http://schemas.microsoft.com/office/drawing/2014/main" id="{BBF5365F-61D7-4842-A227-0871968454FD}"/>
+                <a16:creationId xmlns:a16="http://schemas.microsoft.com/office/drawing/2014/main" id="{8E6F6A32-5D16-4D22-B398-50AEE1B3288F}"/>
               </a:ext>
             </a:extLst>
           </p:cNvPr>
@@ -8239,7 +8103,7 @@
         </p:spPr>
         <p:txBody>
           <a:bodyPr xmlns:a="http://schemas.openxmlformats.org/drawingml/2006/main" wrap="square" lIns="0" tIns="0" rIns="0" bIns="0" anchor="t">
-            <a:normAutofit/>
+            <a:normAutofit fontScale="100000"/>
           </a:bodyPr>
           <a:lstStyle xmlns:a="http://schemas.openxmlformats.org/drawingml/2006/main"/>
           <a:p xmlns:a="http://schemas.openxmlformats.org/drawingml/2006/main">
@@ -8255,7 +8119,7 @@
                 <a:ea typeface="PingFang SC"/>
                 <a:cs typeface="PingFang SC"/>
               </a:rPr>
-              <a:t>复制规则时拒绝符号链接与不安全路径</a:t>
+              <a:t>只有显式工作区才允许生成项目配置</a:t>
             </a:r>
           </a:p>
         </p:txBody>
@@ -8265,7 +8129,7 @@
           <p:cNvPr id="37" name="Shape 35">
             <a:extLst xmlns:a="http://schemas.openxmlformats.org/drawingml/2006/main">
               <a:ext uri="{FF2B5EF4-FFF2-40B4-BE49-F238E27FC236}">
-                <a16:creationId xmlns:a16="http://schemas.microsoft.com/office/drawing/2014/main" id="{1912CE2C-9B16-4248-B453-5241FBC858DA}"/>
+                <a16:creationId xmlns:a16="http://schemas.microsoft.com/office/drawing/2014/main" id="{07864D2D-CAC1-4F5D-9D8B-2DF701108F7B}"/>
               </a:ext>
             </a:extLst>
           </p:cNvPr>
@@ -8298,7 +8162,7 @@
           <p:cNvPr id="38" name="Text 36">
             <a:extLst xmlns:a="http://schemas.openxmlformats.org/drawingml/2006/main">
               <a:ext uri="{FF2B5EF4-FFF2-40B4-BE49-F238E27FC236}">
-                <a16:creationId xmlns:a16="http://schemas.microsoft.com/office/drawing/2014/main" id="{355F8018-C053-4A7A-9B92-CCE0E0288CBD}"/>
+                <a16:creationId xmlns:a16="http://schemas.microsoft.com/office/drawing/2014/main" id="{D444FA76-1D7A-44D8-8019-6FF73FEE4AD3}"/>
               </a:ext>
             </a:extLst>
           </p:cNvPr>
@@ -8319,7 +8183,7 @@
         </p:spPr>
         <p:txBody>
           <a:bodyPr xmlns:a="http://schemas.openxmlformats.org/drawingml/2006/main" wrap="square" lIns="0" tIns="0" rIns="0" bIns="0" anchor="t">
-            <a:normAutofit/>
+            <a:normAutofit fontScale="100000"/>
           </a:bodyPr>
           <a:lstStyle xmlns:a="http://schemas.openxmlformats.org/drawingml/2006/main"/>
           <a:p xmlns:a="http://schemas.openxmlformats.org/drawingml/2006/main">
@@ -8335,7 +8199,7 @@
                 <a:ea typeface="PingFang SC"/>
                 <a:cs typeface="PingFang SC"/>
               </a:rPr>
-              <a:t>外部可执行脚本必须用户主动授权</a:t>
+              <a:t>不安全路径与符号链接会被拒绝</a:t>
             </a:r>
           </a:p>
         </p:txBody>
@@ -8345,7 +8209,7 @@
           <p:cNvPr id="39" name="Shape 37">
             <a:extLst xmlns:a="http://schemas.openxmlformats.org/drawingml/2006/main">
               <a:ext uri="{FF2B5EF4-FFF2-40B4-BE49-F238E27FC236}">
-                <a16:creationId xmlns:a16="http://schemas.microsoft.com/office/drawing/2014/main" id="{1DD79C6A-1D08-4E6E-AE2E-ADF001A7C560}"/>
+                <a16:creationId xmlns:a16="http://schemas.microsoft.com/office/drawing/2014/main" id="{E1343146-C111-4523-A747-30FBB0369865}"/>
               </a:ext>
             </a:extLst>
           </p:cNvPr>
@@ -8378,7 +8242,7 @@
           <p:cNvPr id="40" name="Text 38">
             <a:extLst xmlns:a="http://schemas.openxmlformats.org/drawingml/2006/main">
               <a:ext uri="{FF2B5EF4-FFF2-40B4-BE49-F238E27FC236}">
-                <a16:creationId xmlns:a16="http://schemas.microsoft.com/office/drawing/2014/main" id="{453AC9CE-31C0-44F5-8CEA-CA831B0D8FB7}"/>
+                <a16:creationId xmlns:a16="http://schemas.microsoft.com/office/drawing/2014/main" id="{576A2197-38F9-41BD-8DEA-B24EE3860635}"/>
               </a:ext>
             </a:extLst>
           </p:cNvPr>
@@ -8399,7 +8263,7 @@
         </p:spPr>
         <p:txBody>
           <a:bodyPr xmlns:a="http://schemas.openxmlformats.org/drawingml/2006/main" wrap="square" lIns="0" tIns="0" rIns="0" bIns="0" anchor="t">
-            <a:normAutofit/>
+            <a:normAutofit fontScale="100000"/>
           </a:bodyPr>
           <a:lstStyle xmlns:a="http://schemas.openxmlformats.org/drawingml/2006/main"/>
           <a:p xmlns:a="http://schemas.openxmlformats.org/drawingml/2006/main">
@@ -8415,7 +8279,7 @@
                 <a:ea typeface="PingFang SC"/>
                 <a:cs typeface="PingFang SC"/>
               </a:rPr>
-              <a:t>支持 dry-run、force、overwrite 与 skip 摘要</a:t>
+              <a:t>未支持事件被记录，不伪装为已执行</a:t>
             </a:r>
           </a:p>
         </p:txBody>
@@ -8425,7 +8289,7 @@
           <p:cNvPr id="41" name="Shape 39">
             <a:extLst xmlns:a="http://schemas.openxmlformats.org/drawingml/2006/main">
               <a:ext uri="{FF2B5EF4-FFF2-40B4-BE49-F238E27FC236}">
-                <a16:creationId xmlns:a16="http://schemas.microsoft.com/office/drawing/2014/main" id="{5171D375-F6DA-4874-A97B-B0F975AA88DC}"/>
+                <a16:creationId xmlns:a16="http://schemas.microsoft.com/office/drawing/2014/main" id="{F223A2BB-5AC4-49F4-938D-3B885F154439}"/>
               </a:ext>
             </a:extLst>
           </p:cNvPr>
@@ -8460,7 +8324,7 @@
           <p:cNvPr id="42" name="Text 40">
             <a:extLst xmlns:a="http://schemas.openxmlformats.org/drawingml/2006/main">
               <a:ext uri="{FF2B5EF4-FFF2-40B4-BE49-F238E27FC236}">
-                <a16:creationId xmlns:a16="http://schemas.microsoft.com/office/drawing/2014/main" id="{D723E159-29DD-4013-B796-A0C2A2FA8D4E}"/>
+                <a16:creationId xmlns:a16="http://schemas.microsoft.com/office/drawing/2014/main" id="{7D63D3B8-B962-4A27-AC7C-8490716349EF}"/>
               </a:ext>
             </a:extLst>
           </p:cNvPr>
@@ -8481,7 +8345,7 @@
         </p:spPr>
         <p:txBody>
           <a:bodyPr xmlns:a="http://schemas.openxmlformats.org/drawingml/2006/main" wrap="square" lIns="0" tIns="0" rIns="0" bIns="0" anchor="ctr">
-            <a:normAutofit/>
+            <a:normAutofit fontScale="100000"/>
           </a:bodyPr>
           <a:lstStyle xmlns:a="http://schemas.openxmlformats.org/drawingml/2006/main"/>
           <a:p xmlns:a="http://schemas.openxmlformats.org/drawingml/2006/main">
@@ -8497,7 +8361,7 @@
                 <a:ea typeface="PingFang SC"/>
                 <a:cs typeface="PingFang SC"/>
               </a:rPr>
-              <a:t>默认关闭</a:t>
+              <a:t>能力已建模</a:t>
             </a:r>
           </a:p>
         </p:txBody>
@@ -8507,7 +8371,7 @@
           <p:cNvPr id="43" name="Shape 41">
             <a:extLst xmlns:a="http://schemas.openxmlformats.org/drawingml/2006/main">
               <a:ext uri="{FF2B5EF4-FFF2-40B4-BE49-F238E27FC236}">
-                <a16:creationId xmlns:a16="http://schemas.microsoft.com/office/drawing/2014/main" id="{5927A858-7752-45E7-8216-2182CE2D907E}"/>
+                <a16:creationId xmlns:a16="http://schemas.microsoft.com/office/drawing/2014/main" id="{83CB2EBC-7217-4973-9717-48166A9E56FD}"/>
               </a:ext>
             </a:extLst>
           </p:cNvPr>
@@ -8542,7 +8406,7 @@
           <p:cNvPr id="44" name="Text 42">
             <a:extLst xmlns:a="http://schemas.openxmlformats.org/drawingml/2006/main">
               <a:ext uri="{FF2B5EF4-FFF2-40B4-BE49-F238E27FC236}">
-                <a16:creationId xmlns:a16="http://schemas.microsoft.com/office/drawing/2014/main" id="{AD17C6E9-3097-44E3-B435-E51D0AC21D9E}"/>
+                <a16:creationId xmlns:a16="http://schemas.microsoft.com/office/drawing/2014/main" id="{CE7CAA29-5C14-4C00-B12A-1D187887D788}"/>
               </a:ext>
             </a:extLst>
           </p:cNvPr>
@@ -8563,7 +8427,7 @@
         </p:spPr>
         <p:txBody>
           <a:bodyPr xmlns:a="http://schemas.openxmlformats.org/drawingml/2006/main" wrap="square" lIns="0" tIns="0" rIns="0" bIns="0" anchor="ctr">
-            <a:normAutofit/>
+            <a:normAutofit fontScale="100000"/>
           </a:bodyPr>
           <a:lstStyle xmlns:a="http://schemas.openxmlformats.org/drawingml/2006/main"/>
           <a:p xmlns:a="http://schemas.openxmlformats.org/drawingml/2006/main">
@@ -8579,7 +8443,7 @@
                 <a:ea typeface="PingFang SC"/>
                 <a:cs typeface="PingFang SC"/>
               </a:rPr>
-              <a:t>项目作用域</a:t>
+              <a:t>执行未开放</a:t>
             </a:r>
           </a:p>
         </p:txBody>
@@ -8589,7 +8453,7 @@
           <p:cNvPr id="45" name="Shape 43">
             <a:extLst xmlns:a="http://schemas.openxmlformats.org/drawingml/2006/main">
               <a:ext uri="{FF2B5EF4-FFF2-40B4-BE49-F238E27FC236}">
-                <a16:creationId xmlns:a16="http://schemas.microsoft.com/office/drawing/2014/main" id="{ABFD0118-95C9-4640-BADB-5C34495BE4A9}"/>
+                <a16:creationId xmlns:a16="http://schemas.microsoft.com/office/drawing/2014/main" id="{8A713237-FF54-45C9-9126-29374223902D}"/>
               </a:ext>
             </a:extLst>
           </p:cNvPr>
@@ -8624,7 +8488,7 @@
           <p:cNvPr id="46" name="Text 44">
             <a:extLst xmlns:a="http://schemas.openxmlformats.org/drawingml/2006/main">
               <a:ext uri="{FF2B5EF4-FFF2-40B4-BE49-F238E27FC236}">
-                <a16:creationId xmlns:a16="http://schemas.microsoft.com/office/drawing/2014/main" id="{1B4ED09F-DDDE-4FD2-A232-E0E54084C6DC}"/>
+                <a16:creationId xmlns:a16="http://schemas.microsoft.com/office/drawing/2014/main" id="{9E286A9C-247F-4BC7-9008-8EDCE3A0B170}"/>
               </a:ext>
             </a:extLst>
           </p:cNvPr>
@@ -8645,7 +8509,7 @@
         </p:spPr>
         <p:txBody>
           <a:bodyPr xmlns:a="http://schemas.openxmlformats.org/drawingml/2006/main" wrap="square" lIns="0" tIns="0" rIns="0" bIns="0" anchor="ctr">
-            <a:normAutofit/>
+            <a:normAutofit fontScale="100000"/>
           </a:bodyPr>
           <a:lstStyle xmlns:a="http://schemas.openxmlformats.org/drawingml/2006/main"/>
           <a:p xmlns:a="http://schemas.openxmlformats.org/drawingml/2006/main">
@@ -8661,7 +8525,7 @@
                 <a:ea typeface="PingFang SC"/>
                 <a:cs typeface="PingFang SC"/>
               </a:rPr>
-              <a:t>显式信任</a:t>
+              <a:t>边界可验证</a:t>
             </a:r>
           </a:p>
         </p:txBody>
@@ -8671,7 +8535,7 @@
           <p:cNvPr id="47" name="Text 45">
             <a:extLst xmlns:a="http://schemas.openxmlformats.org/drawingml/2006/main">
               <a:ext uri="{FF2B5EF4-FFF2-40B4-BE49-F238E27FC236}">
-                <a16:creationId xmlns:a16="http://schemas.microsoft.com/office/drawing/2014/main" id="{66A15AD9-4683-4180-ABFF-9AEB1B99517D}"/>
+                <a16:creationId xmlns:a16="http://schemas.microsoft.com/office/drawing/2014/main" id="{47505E09-83A4-4E87-9B3A-7D09B1384720}"/>
               </a:ext>
             </a:extLst>
           </p:cNvPr>
@@ -8692,7 +8556,7 @@
         </p:spPr>
         <p:txBody>
           <a:bodyPr xmlns:a="http://schemas.openxmlformats.org/drawingml/2006/main" wrap="square" lIns="0" tIns="0" rIns="0" bIns="0" anchor="ctr">
-            <a:normAutofit/>
+            <a:normAutofit fontScale="100000"/>
           </a:bodyPr>
           <a:lstStyle xmlns:a="http://schemas.openxmlformats.org/drawingml/2006/main"/>
           <a:p xmlns:a="http://schemas.openxmlformats.org/drawingml/2006/main">
@@ -8708,7 +8572,7 @@
                 <a:ea typeface="Aptos"/>
                 <a:cs typeface="Aptos"/>
               </a:rPr>
-              <a:t>安全原则：安装不等于执行；能力转译不等于隐式信任</a:t>
+              <a:t>交付原则：产品能力与当前可执行状态分开陈述；未开放能力不冒充为已生效</a:t>
             </a:r>
           </a:p>
         </p:txBody>
@@ -8718,7 +8582,7 @@
           <p:cNvPr id="48" name="Text 46">
             <a:extLst xmlns:a="http://schemas.openxmlformats.org/drawingml/2006/main">
               <a:ext uri="{FF2B5EF4-FFF2-40B4-BE49-F238E27FC236}">
-                <a16:creationId xmlns:a16="http://schemas.microsoft.com/office/drawing/2014/main" id="{73834543-60C7-4AB9-9553-0DD558103E4C}"/>
+                <a16:creationId xmlns:a16="http://schemas.microsoft.com/office/drawing/2014/main" id="{A28D68E5-45A1-4E8D-ADCD-64C9BFBEF8D5}"/>
               </a:ext>
             </a:extLst>
           </p:cNvPr>
@@ -8763,7 +8627,7 @@
     </p:spTree>
     <p:extLst>
       <p:ext uri="{BB962C8B-B14F-4D97-AF65-F5344CB8AC3E}">
-        <p14:creationId xmlns:p14="http://schemas.microsoft.com/office/powerpoint/2010/main" val="1165643581"/>
+        <p14:creationId xmlns:p14="http://schemas.microsoft.com/office/powerpoint/2010/main" val="1680045924"/>
       </p:ext>
     </p:extLst>
   </p:cSld>
@@ -8794,7 +8658,7 @@
           <p:cNvPr id="2" name="Text 0">
             <a:extLst xmlns:a="http://schemas.openxmlformats.org/drawingml/2006/main">
               <a:ext uri="{FF2B5EF4-FFF2-40B4-BE49-F238E27FC236}">
-                <a16:creationId xmlns:a16="http://schemas.microsoft.com/office/drawing/2014/main" id="{F595FE0F-379D-499E-B1DE-C93031FB5553}"/>
+                <a16:creationId xmlns:a16="http://schemas.microsoft.com/office/drawing/2014/main" id="{E7579306-6A0B-4EC0-B6FC-8F6CBB273DB7}"/>
               </a:ext>
             </a:extLst>
           </p:cNvPr>
@@ -8841,7 +8705,7 @@
           <p:cNvPr id="3" name="Text 1">
             <a:extLst xmlns:a="http://schemas.openxmlformats.org/drawingml/2006/main">
               <a:ext uri="{FF2B5EF4-FFF2-40B4-BE49-F238E27FC236}">
-                <a16:creationId xmlns:a16="http://schemas.microsoft.com/office/drawing/2014/main" id="{57F5DE9C-9507-48FD-991C-32293A056CB3}"/>
+                <a16:creationId xmlns:a16="http://schemas.microsoft.com/office/drawing/2014/main" id="{AACE9AAF-3356-4AAA-AB0B-B3CE7BFFED48}"/>
               </a:ext>
             </a:extLst>
           </p:cNvPr>
@@ -8888,7 +8752,7 @@
           <p:cNvPr id="4" name="Shape 2">
             <a:extLst xmlns:a="http://schemas.openxmlformats.org/drawingml/2006/main">
               <a:ext uri="{FF2B5EF4-FFF2-40B4-BE49-F238E27FC236}">
-                <a16:creationId xmlns:a16="http://schemas.microsoft.com/office/drawing/2014/main" id="{F7785805-A575-4E3A-B6F8-AEA8240F4729}"/>
+                <a16:creationId xmlns:a16="http://schemas.microsoft.com/office/drawing/2014/main" id="{5A7BF7CD-24F1-4A14-8349-87223062C672}"/>
               </a:ext>
             </a:extLst>
           </p:cNvPr>
@@ -8923,7 +8787,7 @@
           <p:cNvPr id="5" name="Text 3">
             <a:extLst xmlns:a="http://schemas.openxmlformats.org/drawingml/2006/main">
               <a:ext uri="{FF2B5EF4-FFF2-40B4-BE49-F238E27FC236}">
-                <a16:creationId xmlns:a16="http://schemas.microsoft.com/office/drawing/2014/main" id="{A03E2C40-62DA-456B-BDDC-B642C090A247}"/>
+                <a16:creationId xmlns:a16="http://schemas.microsoft.com/office/drawing/2014/main" id="{4108F707-AE65-41F7-82F0-3DE10D92ABE8}"/>
               </a:ext>
             </a:extLst>
           </p:cNvPr>
@@ -8970,7 +8834,7 @@
           <p:cNvPr id="6" name="Shape 4">
             <a:extLst xmlns:a="http://schemas.openxmlformats.org/drawingml/2006/main">
               <a:ext uri="{FF2B5EF4-FFF2-40B4-BE49-F238E27FC236}">
-                <a16:creationId xmlns:a16="http://schemas.microsoft.com/office/drawing/2014/main" id="{2593A061-4EB5-4FF9-817D-B4B6DE36980E}"/>
+                <a16:creationId xmlns:a16="http://schemas.microsoft.com/office/drawing/2014/main" id="{417117BC-D956-4DFF-AB83-6650815D6210}"/>
               </a:ext>
             </a:extLst>
           </p:cNvPr>
@@ -9001,7 +8865,7 @@
           <p:cNvPr id="7" name="Shape 5">
             <a:extLst xmlns:a="http://schemas.openxmlformats.org/drawingml/2006/main">
               <a:ext uri="{FF2B5EF4-FFF2-40B4-BE49-F238E27FC236}">
-                <a16:creationId xmlns:a16="http://schemas.microsoft.com/office/drawing/2014/main" id="{9E967376-6298-4672-B6E3-BAD7A25C6F5F}"/>
+                <a16:creationId xmlns:a16="http://schemas.microsoft.com/office/drawing/2014/main" id="{72F756E6-2DFA-4EB8-9576-F81C956A34D9}"/>
               </a:ext>
             </a:extLst>
           </p:cNvPr>
@@ -9036,7 +8900,7 @@
           <p:cNvPr id="8" name="Shape 6">
             <a:extLst xmlns:a="http://schemas.openxmlformats.org/drawingml/2006/main">
               <a:ext uri="{FF2B5EF4-FFF2-40B4-BE49-F238E27FC236}">
-                <a16:creationId xmlns:a16="http://schemas.microsoft.com/office/drawing/2014/main" id="{55F70390-14AF-4425-A42A-A7FCE966F5F8}"/>
+                <a16:creationId xmlns:a16="http://schemas.microsoft.com/office/drawing/2014/main" id="{AEE8CD0C-C715-45C9-A0DE-0D063FCDC50D}"/>
               </a:ext>
             </a:extLst>
           </p:cNvPr>
@@ -9071,7 +8935,7 @@
           <p:cNvPr id="9" name="Text 7">
             <a:extLst xmlns:a="http://schemas.openxmlformats.org/drawingml/2006/main">
               <a:ext uri="{FF2B5EF4-FFF2-40B4-BE49-F238E27FC236}">
-                <a16:creationId xmlns:a16="http://schemas.microsoft.com/office/drawing/2014/main" id="{6FE957FE-F3F6-4EC5-89E2-D41E0B9BE89B}"/>
+                <a16:creationId xmlns:a16="http://schemas.microsoft.com/office/drawing/2014/main" id="{AADC5556-CC2D-4DAD-821F-66BD8CDCC663}"/>
               </a:ext>
             </a:extLst>
           </p:cNvPr>
@@ -9118,7 +8982,7 @@
           <p:cNvPr id="10" name="Text 8">
             <a:extLst xmlns:a="http://schemas.openxmlformats.org/drawingml/2006/main">
               <a:ext uri="{FF2B5EF4-FFF2-40B4-BE49-F238E27FC236}">
-                <a16:creationId xmlns:a16="http://schemas.microsoft.com/office/drawing/2014/main" id="{6200F72E-A3A2-478E-B72B-A5899700BE1D}"/>
+                <a16:creationId xmlns:a16="http://schemas.microsoft.com/office/drawing/2014/main" id="{319BD611-0D10-4860-9D95-44B32406A161}"/>
               </a:ext>
             </a:extLst>
           </p:cNvPr>
@@ -9165,7 +9029,7 @@
           <p:cNvPr id="11" name="Shape 9">
             <a:extLst xmlns:a="http://schemas.openxmlformats.org/drawingml/2006/main">
               <a:ext uri="{FF2B5EF4-FFF2-40B4-BE49-F238E27FC236}">
-                <a16:creationId xmlns:a16="http://schemas.microsoft.com/office/drawing/2014/main" id="{89BDA6CC-1740-42F2-9A33-7300D307B17D}"/>
+                <a16:creationId xmlns:a16="http://schemas.microsoft.com/office/drawing/2014/main" id="{922C29D9-C037-4872-A29A-332FDEBDA7C0}"/>
               </a:ext>
             </a:extLst>
           </p:cNvPr>
@@ -9200,7 +9064,7 @@
           <p:cNvPr id="12" name="Text 10">
             <a:extLst xmlns:a="http://schemas.openxmlformats.org/drawingml/2006/main">
               <a:ext uri="{FF2B5EF4-FFF2-40B4-BE49-F238E27FC236}">
-                <a16:creationId xmlns:a16="http://schemas.microsoft.com/office/drawing/2014/main" id="{6641E74A-AFC8-419C-B54D-412DF612E656}"/>
+                <a16:creationId xmlns:a16="http://schemas.microsoft.com/office/drawing/2014/main" id="{23C47017-5099-4FFA-8B65-59454DDF50DC}"/>
               </a:ext>
             </a:extLst>
           </p:cNvPr>
@@ -9247,7 +9111,7 @@
           <p:cNvPr id="13" name="Text 11">
             <a:extLst xmlns:a="http://schemas.openxmlformats.org/drawingml/2006/main">
               <a:ext uri="{FF2B5EF4-FFF2-40B4-BE49-F238E27FC236}">
-                <a16:creationId xmlns:a16="http://schemas.microsoft.com/office/drawing/2014/main" id="{4942BD5F-303B-4AA4-9E65-BF3177E113EB}"/>
+                <a16:creationId xmlns:a16="http://schemas.microsoft.com/office/drawing/2014/main" id="{D68F778B-A763-4678-B994-CEF58BC0DA37}"/>
               </a:ext>
             </a:extLst>
           </p:cNvPr>
@@ -9294,7 +9158,7 @@
           <p:cNvPr id="14" name="Shape 12">
             <a:extLst xmlns:a="http://schemas.openxmlformats.org/drawingml/2006/main">
               <a:ext uri="{FF2B5EF4-FFF2-40B4-BE49-F238E27FC236}">
-                <a16:creationId xmlns:a16="http://schemas.microsoft.com/office/drawing/2014/main" id="{B368DB8C-1FEC-4C10-BC63-9C0E0B3F5BC4}"/>
+                <a16:creationId xmlns:a16="http://schemas.microsoft.com/office/drawing/2014/main" id="{43C50399-52FF-43B3-82C7-DE3502C0067B}"/>
               </a:ext>
             </a:extLst>
           </p:cNvPr>
@@ -9329,7 +9193,7 @@
           <p:cNvPr id="15" name="Text 13">
             <a:extLst xmlns:a="http://schemas.openxmlformats.org/drawingml/2006/main">
               <a:ext uri="{FF2B5EF4-FFF2-40B4-BE49-F238E27FC236}">
-                <a16:creationId xmlns:a16="http://schemas.microsoft.com/office/drawing/2014/main" id="{2688C6C8-2591-4BED-90BA-EB40E571ADAD}"/>
+                <a16:creationId xmlns:a16="http://schemas.microsoft.com/office/drawing/2014/main" id="{2DA47522-D452-47F5-90EE-FF069337E143}"/>
               </a:ext>
             </a:extLst>
           </p:cNvPr>
@@ -9376,7 +9240,7 @@
           <p:cNvPr id="16" name="Text 14">
             <a:extLst xmlns:a="http://schemas.openxmlformats.org/drawingml/2006/main">
               <a:ext uri="{FF2B5EF4-FFF2-40B4-BE49-F238E27FC236}">
-                <a16:creationId xmlns:a16="http://schemas.microsoft.com/office/drawing/2014/main" id="{B07FF4B3-4898-43D5-9A6C-DA8E58B8ADB5}"/>
+                <a16:creationId xmlns:a16="http://schemas.microsoft.com/office/drawing/2014/main" id="{819F725A-A6FA-4FF7-ABAB-B8BF8FC04CA5}"/>
               </a:ext>
             </a:extLst>
           </p:cNvPr>
@@ -9423,7 +9287,7 @@
           <p:cNvPr id="17" name="Shape 15">
             <a:extLst xmlns:a="http://schemas.openxmlformats.org/drawingml/2006/main">
               <a:ext uri="{FF2B5EF4-FFF2-40B4-BE49-F238E27FC236}">
-                <a16:creationId xmlns:a16="http://schemas.microsoft.com/office/drawing/2014/main" id="{3F8F7C41-9135-4689-B6C5-721E6425574B}"/>
+                <a16:creationId xmlns:a16="http://schemas.microsoft.com/office/drawing/2014/main" id="{EDC71A7A-EFC9-4667-BCA8-1F01793F7337}"/>
               </a:ext>
             </a:extLst>
           </p:cNvPr>
@@ -9458,7 +9322,7 @@
           <p:cNvPr id="18" name="Text 16">
             <a:extLst xmlns:a="http://schemas.openxmlformats.org/drawingml/2006/main">
               <a:ext uri="{FF2B5EF4-FFF2-40B4-BE49-F238E27FC236}">
-                <a16:creationId xmlns:a16="http://schemas.microsoft.com/office/drawing/2014/main" id="{52AA5259-3685-44E2-AF10-E24BA4832ACB}"/>
+                <a16:creationId xmlns:a16="http://schemas.microsoft.com/office/drawing/2014/main" id="{1AFF7F6A-0F34-4374-A3AC-BC5BF31455AA}"/>
               </a:ext>
             </a:extLst>
           </p:cNvPr>
@@ -9505,7 +9369,7 @@
           <p:cNvPr id="19" name="Text 17">
             <a:extLst xmlns:a="http://schemas.openxmlformats.org/drawingml/2006/main">
               <a:ext uri="{FF2B5EF4-FFF2-40B4-BE49-F238E27FC236}">
-                <a16:creationId xmlns:a16="http://schemas.microsoft.com/office/drawing/2014/main" id="{4A1AE21E-6D51-4C92-9C64-5A2ED5A075A6}"/>
+                <a16:creationId xmlns:a16="http://schemas.microsoft.com/office/drawing/2014/main" id="{34807926-5336-4BB4-A846-5F68A2FCB450}"/>
               </a:ext>
             </a:extLst>
           </p:cNvPr>
@@ -9552,7 +9416,7 @@
           <p:cNvPr id="20" name="Shape 18">
             <a:extLst xmlns:a="http://schemas.openxmlformats.org/drawingml/2006/main">
               <a:ext uri="{FF2B5EF4-FFF2-40B4-BE49-F238E27FC236}">
-                <a16:creationId xmlns:a16="http://schemas.microsoft.com/office/drawing/2014/main" id="{373B4496-DF3F-417C-B2BC-425C2B8169DF}"/>
+                <a16:creationId xmlns:a16="http://schemas.microsoft.com/office/drawing/2014/main" id="{031FADEC-2D27-4EC5-A1C3-B917F9D8FCA8}"/>
               </a:ext>
             </a:extLst>
           </p:cNvPr>
@@ -9584,7 +9448,7 @@
           <p:cNvPr id="21" name="Shape 19">
             <a:extLst xmlns:a="http://schemas.openxmlformats.org/drawingml/2006/main">
               <a:ext uri="{FF2B5EF4-FFF2-40B4-BE49-F238E27FC236}">
-                <a16:creationId xmlns:a16="http://schemas.microsoft.com/office/drawing/2014/main" id="{8788FBB6-A07F-40A8-BDE3-0A77716D4BA7}"/>
+                <a16:creationId xmlns:a16="http://schemas.microsoft.com/office/drawing/2014/main" id="{E0DB1F4A-E4E5-4561-9B45-F562F574CA77}"/>
               </a:ext>
             </a:extLst>
           </p:cNvPr>
@@ -9616,7 +9480,7 @@
           <p:cNvPr id="22" name="Shape 20">
             <a:extLst xmlns:a="http://schemas.openxmlformats.org/drawingml/2006/main">
               <a:ext uri="{FF2B5EF4-FFF2-40B4-BE49-F238E27FC236}">
-                <a16:creationId xmlns:a16="http://schemas.microsoft.com/office/drawing/2014/main" id="{0ADEC171-5D67-4AAB-90FF-683C708243DD}"/>
+                <a16:creationId xmlns:a16="http://schemas.microsoft.com/office/drawing/2014/main" id="{4E968AE8-2E8B-459D-8866-BC4FC843BB9A}"/>
               </a:ext>
             </a:extLst>
           </p:cNvPr>
@@ -9648,7 +9512,7 @@
           <p:cNvPr id="23" name="Shape 21">
             <a:extLst xmlns:a="http://schemas.openxmlformats.org/drawingml/2006/main">
               <a:ext uri="{FF2B5EF4-FFF2-40B4-BE49-F238E27FC236}">
-                <a16:creationId xmlns:a16="http://schemas.microsoft.com/office/drawing/2014/main" id="{01250ECD-C01B-42AC-BA0F-B13D91139CD6}"/>
+                <a16:creationId xmlns:a16="http://schemas.microsoft.com/office/drawing/2014/main" id="{C9B91ACB-BACC-43C1-AAA7-AA37BFAEC10D}"/>
               </a:ext>
             </a:extLst>
           </p:cNvPr>
@@ -9680,7 +9544,7 @@
           <p:cNvPr id="24" name="Shape 22">
             <a:extLst xmlns:a="http://schemas.openxmlformats.org/drawingml/2006/main">
               <a:ext uri="{FF2B5EF4-FFF2-40B4-BE49-F238E27FC236}">
-                <a16:creationId xmlns:a16="http://schemas.microsoft.com/office/drawing/2014/main" id="{FADA9602-6495-4141-AC48-F5A4646AA868}"/>
+                <a16:creationId xmlns:a16="http://schemas.microsoft.com/office/drawing/2014/main" id="{C7C75F9F-008A-4A0E-B5D7-9E15563AAB57}"/>
               </a:ext>
             </a:extLst>
           </p:cNvPr>
@@ -9715,7 +9579,7 @@
           <p:cNvPr id="25" name="Text 23">
             <a:extLst xmlns:a="http://schemas.openxmlformats.org/drawingml/2006/main">
               <a:ext uri="{FF2B5EF4-FFF2-40B4-BE49-F238E27FC236}">
-                <a16:creationId xmlns:a16="http://schemas.microsoft.com/office/drawing/2014/main" id="{4AFC141B-DCBD-498A-9A49-769CF94D96E2}"/>
+                <a16:creationId xmlns:a16="http://schemas.microsoft.com/office/drawing/2014/main" id="{7AAF42E2-B2E9-4990-80D3-393CE5628A14}"/>
               </a:ext>
             </a:extLst>
           </p:cNvPr>
@@ -9762,7 +9626,7 @@
           <p:cNvPr id="26" name="Shape 24">
             <a:extLst xmlns:a="http://schemas.openxmlformats.org/drawingml/2006/main">
               <a:ext uri="{FF2B5EF4-FFF2-40B4-BE49-F238E27FC236}">
-                <a16:creationId xmlns:a16="http://schemas.microsoft.com/office/drawing/2014/main" id="{CEE5C930-5114-4AD6-B539-A93ABF4579D7}"/>
+                <a16:creationId xmlns:a16="http://schemas.microsoft.com/office/drawing/2014/main" id="{524DF2D4-3CFB-469A-A8B5-75F99201FCB1}"/>
               </a:ext>
             </a:extLst>
           </p:cNvPr>
@@ -9797,7 +9661,7 @@
           <p:cNvPr id="27" name="Text 25">
             <a:extLst xmlns:a="http://schemas.openxmlformats.org/drawingml/2006/main">
               <a:ext uri="{FF2B5EF4-FFF2-40B4-BE49-F238E27FC236}">
-                <a16:creationId xmlns:a16="http://schemas.microsoft.com/office/drawing/2014/main" id="{B3DE15DE-4EF0-4DDC-905F-3A9B7BCBF259}"/>
+                <a16:creationId xmlns:a16="http://schemas.microsoft.com/office/drawing/2014/main" id="{1D95D396-0E16-4E5B-A047-3DEC77DBF5B0}"/>
               </a:ext>
             </a:extLst>
           </p:cNvPr>
@@ -9844,7 +9708,7 @@
           <p:cNvPr id="28" name="Shape 26">
             <a:extLst xmlns:a="http://schemas.openxmlformats.org/drawingml/2006/main">
               <a:ext uri="{FF2B5EF4-FFF2-40B4-BE49-F238E27FC236}">
-                <a16:creationId xmlns:a16="http://schemas.microsoft.com/office/drawing/2014/main" id="{88359DDF-AA4E-433D-BA06-738C834A5C76}"/>
+                <a16:creationId xmlns:a16="http://schemas.microsoft.com/office/drawing/2014/main" id="{5DBADFF8-D879-42FB-827D-A428311CC376}"/>
               </a:ext>
             </a:extLst>
           </p:cNvPr>
@@ -9877,7 +9741,7 @@
           <p:cNvPr id="29" name="Text 27">
             <a:extLst xmlns:a="http://schemas.openxmlformats.org/drawingml/2006/main">
               <a:ext uri="{FF2B5EF4-FFF2-40B4-BE49-F238E27FC236}">
-                <a16:creationId xmlns:a16="http://schemas.microsoft.com/office/drawing/2014/main" id="{DE512C1F-4316-4C0D-AFE9-CA7C53CE5FEA}"/>
+                <a16:creationId xmlns:a16="http://schemas.microsoft.com/office/drawing/2014/main" id="{D7EC79D5-96E8-47F1-ADDE-189FD818A0FC}"/>
               </a:ext>
             </a:extLst>
           </p:cNvPr>
@@ -9924,7 +9788,7 @@
           <p:cNvPr id="30" name="Shape 28">
             <a:extLst xmlns:a="http://schemas.openxmlformats.org/drawingml/2006/main">
               <a:ext uri="{FF2B5EF4-FFF2-40B4-BE49-F238E27FC236}">
-                <a16:creationId xmlns:a16="http://schemas.microsoft.com/office/drawing/2014/main" id="{A63CDA36-AF5A-446E-BA0A-1AC5D8EB7AE7}"/>
+                <a16:creationId xmlns:a16="http://schemas.microsoft.com/office/drawing/2014/main" id="{7D7B0B76-A825-4FDB-B324-D827740A4249}"/>
               </a:ext>
             </a:extLst>
           </p:cNvPr>
@@ -9957,7 +9821,7 @@
           <p:cNvPr id="31" name="Text 29">
             <a:extLst xmlns:a="http://schemas.openxmlformats.org/drawingml/2006/main">
               <a:ext uri="{FF2B5EF4-FFF2-40B4-BE49-F238E27FC236}">
-                <a16:creationId xmlns:a16="http://schemas.microsoft.com/office/drawing/2014/main" id="{8C9B5847-64C8-4035-AB23-4A2F143EE077}"/>
+                <a16:creationId xmlns:a16="http://schemas.microsoft.com/office/drawing/2014/main" id="{7F5690AA-4F89-444D-BA24-5B06A3C3725B}"/>
               </a:ext>
             </a:extLst>
           </p:cNvPr>
@@ -10004,7 +9868,7 @@
           <p:cNvPr id="32" name="Shape 30">
             <a:extLst xmlns:a="http://schemas.openxmlformats.org/drawingml/2006/main">
               <a:ext uri="{FF2B5EF4-FFF2-40B4-BE49-F238E27FC236}">
-                <a16:creationId xmlns:a16="http://schemas.microsoft.com/office/drawing/2014/main" id="{DE03188E-7184-41CF-93CA-8CA4BD65235F}"/>
+                <a16:creationId xmlns:a16="http://schemas.microsoft.com/office/drawing/2014/main" id="{D84BC92B-F830-4C4C-A4AF-BF6F4280B44F}"/>
               </a:ext>
             </a:extLst>
           </p:cNvPr>
@@ -10037,7 +9901,7 @@
           <p:cNvPr id="33" name="Text 31">
             <a:extLst xmlns:a="http://schemas.openxmlformats.org/drawingml/2006/main">
               <a:ext uri="{FF2B5EF4-FFF2-40B4-BE49-F238E27FC236}">
-                <a16:creationId xmlns:a16="http://schemas.microsoft.com/office/drawing/2014/main" id="{BB46B0C7-B8D7-45D9-B933-85E67F5C2B6A}"/>
+                <a16:creationId xmlns:a16="http://schemas.microsoft.com/office/drawing/2014/main" id="{966AA021-280A-4673-82FB-74A4CCDD48EB}"/>
               </a:ext>
             </a:extLst>
           </p:cNvPr>
@@ -10084,7 +9948,7 @@
           <p:cNvPr id="34" name="Shape 32">
             <a:extLst xmlns:a="http://schemas.openxmlformats.org/drawingml/2006/main">
               <a:ext uri="{FF2B5EF4-FFF2-40B4-BE49-F238E27FC236}">
-                <a16:creationId xmlns:a16="http://schemas.microsoft.com/office/drawing/2014/main" id="{87DC370C-F75D-4642-9835-E84582228963}"/>
+                <a16:creationId xmlns:a16="http://schemas.microsoft.com/office/drawing/2014/main" id="{13981144-D49A-4BF3-BD60-6309C8F597C5}"/>
               </a:ext>
             </a:extLst>
           </p:cNvPr>
@@ -10117,7 +9981,7 @@
           <p:cNvPr id="35" name="Text 33">
             <a:extLst xmlns:a="http://schemas.openxmlformats.org/drawingml/2006/main">
               <a:ext uri="{FF2B5EF4-FFF2-40B4-BE49-F238E27FC236}">
-                <a16:creationId xmlns:a16="http://schemas.microsoft.com/office/drawing/2014/main" id="{5641903A-053A-495E-A0C7-18E4C2ECB3E6}"/>
+                <a16:creationId xmlns:a16="http://schemas.microsoft.com/office/drawing/2014/main" id="{5C24F05D-9F5D-4361-B925-1122C1608C0D}"/>
               </a:ext>
             </a:extLst>
           </p:cNvPr>
@@ -10164,7 +10028,7 @@
           <p:cNvPr id="36" name="Shape 34">
             <a:extLst xmlns:a="http://schemas.openxmlformats.org/drawingml/2006/main">
               <a:ext uri="{FF2B5EF4-FFF2-40B4-BE49-F238E27FC236}">
-                <a16:creationId xmlns:a16="http://schemas.microsoft.com/office/drawing/2014/main" id="{1D23CD83-3656-47D1-A90D-7706399D9888}"/>
+                <a16:creationId xmlns:a16="http://schemas.microsoft.com/office/drawing/2014/main" id="{EB946F4C-3F90-4CCC-9E64-70AAEB14E74A}"/>
               </a:ext>
             </a:extLst>
           </p:cNvPr>
@@ -10197,7 +10061,7 @@
           <p:cNvPr id="37" name="Text 35">
             <a:extLst xmlns:a="http://schemas.openxmlformats.org/drawingml/2006/main">
               <a:ext uri="{FF2B5EF4-FFF2-40B4-BE49-F238E27FC236}">
-                <a16:creationId xmlns:a16="http://schemas.microsoft.com/office/drawing/2014/main" id="{EC795937-5B84-4DB9-AD79-1DD476404750}"/>
+                <a16:creationId xmlns:a16="http://schemas.microsoft.com/office/drawing/2014/main" id="{3CC300FD-7AD2-480B-BA6B-6B477036BE79}"/>
               </a:ext>
             </a:extLst>
           </p:cNvPr>
@@ -10244,7 +10108,7 @@
           <p:cNvPr id="38" name="Shape 36">
             <a:extLst xmlns:a="http://schemas.openxmlformats.org/drawingml/2006/main">
               <a:ext uri="{FF2B5EF4-FFF2-40B4-BE49-F238E27FC236}">
-                <a16:creationId xmlns:a16="http://schemas.microsoft.com/office/drawing/2014/main" id="{FF7625EB-0FCD-4CD6-BBC2-B3276062DEB0}"/>
+                <a16:creationId xmlns:a16="http://schemas.microsoft.com/office/drawing/2014/main" id="{31942984-BC30-4A6C-8F6D-DAD37B1F9992}"/>
               </a:ext>
             </a:extLst>
           </p:cNvPr>
@@ -10277,7 +10141,7 @@
           <p:cNvPr id="39" name="Text 37">
             <a:extLst xmlns:a="http://schemas.openxmlformats.org/drawingml/2006/main">
               <a:ext uri="{FF2B5EF4-FFF2-40B4-BE49-F238E27FC236}">
-                <a16:creationId xmlns:a16="http://schemas.microsoft.com/office/drawing/2014/main" id="{D4946830-9DEE-42A5-B687-922C0A46211D}"/>
+                <a16:creationId xmlns:a16="http://schemas.microsoft.com/office/drawing/2014/main" id="{D022EB2A-9FB6-4E5E-A46A-0164B4B11007}"/>
               </a:ext>
             </a:extLst>
           </p:cNvPr>
@@ -10324,7 +10188,7 @@
           <p:cNvPr id="40" name="Text 38">
             <a:extLst xmlns:a="http://schemas.openxmlformats.org/drawingml/2006/main">
               <a:ext uri="{FF2B5EF4-FFF2-40B4-BE49-F238E27FC236}">
-                <a16:creationId xmlns:a16="http://schemas.microsoft.com/office/drawing/2014/main" id="{EB7CD08A-A8F0-4C4F-A6D8-4D292784DD67}"/>
+                <a16:creationId xmlns:a16="http://schemas.microsoft.com/office/drawing/2014/main" id="{BCD2957E-0A81-4846-BCBC-0B0D05BABE4E}"/>
               </a:ext>
             </a:extLst>
           </p:cNvPr>
@@ -10371,7 +10235,7 @@
           <p:cNvPr id="41" name="Text 39">
             <a:extLst xmlns:a="http://schemas.openxmlformats.org/drawingml/2006/main">
               <a:ext uri="{FF2B5EF4-FFF2-40B4-BE49-F238E27FC236}">
-                <a16:creationId xmlns:a16="http://schemas.microsoft.com/office/drawing/2014/main" id="{2386B687-73F7-4719-8348-FFBB2E0F887C}"/>
+                <a16:creationId xmlns:a16="http://schemas.microsoft.com/office/drawing/2014/main" id="{46DFD2EA-F3C3-4A46-A16F-40AC7FCEBD65}"/>
               </a:ext>
             </a:extLst>
           </p:cNvPr>
@@ -10416,7 +10280,7 @@
     </p:spTree>
     <p:extLst>
       <p:ext uri="{BB962C8B-B14F-4D97-AF65-F5344CB8AC3E}">
-        <p14:creationId xmlns:p14="http://schemas.microsoft.com/office/powerpoint/2010/main" val="974678399"/>
+        <p14:creationId xmlns:p14="http://schemas.microsoft.com/office/powerpoint/2010/main" val="974626401"/>
       </p:ext>
     </p:extLst>
   </p:cSld>
@@ -10447,7 +10311,7 @@
           <p:cNvPr id="2" name="Text 0">
             <a:extLst xmlns:a="http://schemas.openxmlformats.org/drawingml/2006/main">
               <a:ext uri="{FF2B5EF4-FFF2-40B4-BE49-F238E27FC236}">
-                <a16:creationId xmlns:a16="http://schemas.microsoft.com/office/drawing/2014/main" id="{53B38DF9-4B46-41C0-9173-994327750522}"/>
+                <a16:creationId xmlns:a16="http://schemas.microsoft.com/office/drawing/2014/main" id="{96B610F2-2058-4340-860C-348F9398CF4E}"/>
               </a:ext>
             </a:extLst>
           </p:cNvPr>
@@ -10494,7 +10358,7 @@
           <p:cNvPr id="3" name="Text 1">
             <a:extLst xmlns:a="http://schemas.openxmlformats.org/drawingml/2006/main">
               <a:ext uri="{FF2B5EF4-FFF2-40B4-BE49-F238E27FC236}">
-                <a16:creationId xmlns:a16="http://schemas.microsoft.com/office/drawing/2014/main" id="{4CA16E27-3895-46F6-88D7-239586ED9DC2}"/>
+                <a16:creationId xmlns:a16="http://schemas.microsoft.com/office/drawing/2014/main" id="{3F522D4C-A4A3-45D9-BF49-20E7F13DAF01}"/>
               </a:ext>
             </a:extLst>
           </p:cNvPr>
@@ -10541,7 +10405,7 @@
           <p:cNvPr id="4" name="Shape 2">
             <a:extLst xmlns:a="http://schemas.openxmlformats.org/drawingml/2006/main">
               <a:ext uri="{FF2B5EF4-FFF2-40B4-BE49-F238E27FC236}">
-                <a16:creationId xmlns:a16="http://schemas.microsoft.com/office/drawing/2014/main" id="{E3F42037-2039-41C6-890A-6505645D0455}"/>
+                <a16:creationId xmlns:a16="http://schemas.microsoft.com/office/drawing/2014/main" id="{8A48E91B-1D66-40F2-9D2A-7C0E7DEDA762}"/>
               </a:ext>
             </a:extLst>
           </p:cNvPr>
@@ -10576,7 +10440,7 @@
           <p:cNvPr id="5" name="Text 3">
             <a:extLst xmlns:a="http://schemas.openxmlformats.org/drawingml/2006/main">
               <a:ext uri="{FF2B5EF4-FFF2-40B4-BE49-F238E27FC236}">
-                <a16:creationId xmlns:a16="http://schemas.microsoft.com/office/drawing/2014/main" id="{3DBC2582-18DA-44C8-982F-3FC72899C8DF}"/>
+                <a16:creationId xmlns:a16="http://schemas.microsoft.com/office/drawing/2014/main" id="{2B024D7E-638B-4639-A028-CDDC8B8B1C7E}"/>
               </a:ext>
             </a:extLst>
           </p:cNvPr>
@@ -10623,7 +10487,7 @@
           <p:cNvPr id="6" name="Shape 4">
             <a:extLst xmlns:a="http://schemas.openxmlformats.org/drawingml/2006/main">
               <a:ext uri="{FF2B5EF4-FFF2-40B4-BE49-F238E27FC236}">
-                <a16:creationId xmlns:a16="http://schemas.microsoft.com/office/drawing/2014/main" id="{0B0D2EAB-F833-4E7D-A112-F5170BC4B487}"/>
+                <a16:creationId xmlns:a16="http://schemas.microsoft.com/office/drawing/2014/main" id="{C44F64B8-3A71-4C77-B7AE-ED762BFC9D80}"/>
               </a:ext>
             </a:extLst>
           </p:cNvPr>
@@ -10654,7 +10518,7 @@
           <p:cNvPr id="7" name="Shape 5">
             <a:extLst xmlns:a="http://schemas.openxmlformats.org/drawingml/2006/main">
               <a:ext uri="{FF2B5EF4-FFF2-40B4-BE49-F238E27FC236}">
-                <a16:creationId xmlns:a16="http://schemas.microsoft.com/office/drawing/2014/main" id="{71DCF1FC-DF0B-4D36-A09C-52D00E281D94}"/>
+                <a16:creationId xmlns:a16="http://schemas.microsoft.com/office/drawing/2014/main" id="{C1D7D60B-8F46-40FF-AD81-88045FFEFA33}"/>
               </a:ext>
             </a:extLst>
           </p:cNvPr>
@@ -10689,7 +10553,7 @@
           <p:cNvPr id="8" name="Text 6">
             <a:extLst xmlns:a="http://schemas.openxmlformats.org/drawingml/2006/main">
               <a:ext uri="{FF2B5EF4-FFF2-40B4-BE49-F238E27FC236}">
-                <a16:creationId xmlns:a16="http://schemas.microsoft.com/office/drawing/2014/main" id="{36D0758E-26D5-495F-9CF4-C34E549C7E75}"/>
+                <a16:creationId xmlns:a16="http://schemas.microsoft.com/office/drawing/2014/main" id="{0A69E2BF-3FD4-4616-B0D2-038D324BBC3B}"/>
               </a:ext>
             </a:extLst>
           </p:cNvPr>
@@ -10736,7 +10600,7 @@
           <p:cNvPr id="9" name="Shape 7">
             <a:extLst xmlns:a="http://schemas.openxmlformats.org/drawingml/2006/main">
               <a:ext uri="{FF2B5EF4-FFF2-40B4-BE49-F238E27FC236}">
-                <a16:creationId xmlns:a16="http://schemas.microsoft.com/office/drawing/2014/main" id="{676F2B86-F1F4-4D12-A5C8-3874F54DF364}"/>
+                <a16:creationId xmlns:a16="http://schemas.microsoft.com/office/drawing/2014/main" id="{1188F063-041F-400B-B803-8620ED5E30A6}"/>
               </a:ext>
             </a:extLst>
           </p:cNvPr>
@@ -10771,7 +10635,7 @@
           <p:cNvPr id="10" name="Text 8">
             <a:extLst xmlns:a="http://schemas.openxmlformats.org/drawingml/2006/main">
               <a:ext uri="{FF2B5EF4-FFF2-40B4-BE49-F238E27FC236}">
-                <a16:creationId xmlns:a16="http://schemas.microsoft.com/office/drawing/2014/main" id="{9C89AA93-E315-43EF-905C-FC0DF569A892}"/>
+                <a16:creationId xmlns:a16="http://schemas.microsoft.com/office/drawing/2014/main" id="{AFAA1105-F73B-4B7F-913C-03B46F2C9850}"/>
               </a:ext>
             </a:extLst>
           </p:cNvPr>
@@ -10818,7 +10682,7 @@
           <p:cNvPr id="11" name="Shape 9">
             <a:extLst xmlns:a="http://schemas.openxmlformats.org/drawingml/2006/main">
               <a:ext uri="{FF2B5EF4-FFF2-40B4-BE49-F238E27FC236}">
-                <a16:creationId xmlns:a16="http://schemas.microsoft.com/office/drawing/2014/main" id="{4B240DD1-51DA-4C72-BC20-FDFE4C2F9AEC}"/>
+                <a16:creationId xmlns:a16="http://schemas.microsoft.com/office/drawing/2014/main" id="{B8AA9828-8C69-4A17-A893-E9D6FEB80DEF}"/>
               </a:ext>
             </a:extLst>
           </p:cNvPr>
@@ -10853,7 +10717,7 @@
           <p:cNvPr id="12" name="Text 10">
             <a:extLst xmlns:a="http://schemas.openxmlformats.org/drawingml/2006/main">
               <a:ext uri="{FF2B5EF4-FFF2-40B4-BE49-F238E27FC236}">
-                <a16:creationId xmlns:a16="http://schemas.microsoft.com/office/drawing/2014/main" id="{7A4C82E2-8DEF-48A9-9EEA-213B849C0A4D}"/>
+                <a16:creationId xmlns:a16="http://schemas.microsoft.com/office/drawing/2014/main" id="{CE719845-B920-4179-A2D5-1A2505121BE7}"/>
               </a:ext>
             </a:extLst>
           </p:cNvPr>
@@ -10900,7 +10764,7 @@
           <p:cNvPr id="13" name="Shape 11">
             <a:extLst xmlns:a="http://schemas.openxmlformats.org/drawingml/2006/main">
               <a:ext uri="{FF2B5EF4-FFF2-40B4-BE49-F238E27FC236}">
-                <a16:creationId xmlns:a16="http://schemas.microsoft.com/office/drawing/2014/main" id="{FFF43E76-6FA6-4012-B437-6FC427E2EB6B}"/>
+                <a16:creationId xmlns:a16="http://schemas.microsoft.com/office/drawing/2014/main" id="{D5C86E2C-FC5B-4835-871B-EFF192A3C2F5}"/>
               </a:ext>
             </a:extLst>
           </p:cNvPr>
@@ -10935,7 +10799,7 @@
           <p:cNvPr id="14" name="Text 12">
             <a:extLst xmlns:a="http://schemas.openxmlformats.org/drawingml/2006/main">
               <a:ext uri="{FF2B5EF4-FFF2-40B4-BE49-F238E27FC236}">
-                <a16:creationId xmlns:a16="http://schemas.microsoft.com/office/drawing/2014/main" id="{B94AFBD3-ECBF-4514-BAFC-47574B56CA07}"/>
+                <a16:creationId xmlns:a16="http://schemas.microsoft.com/office/drawing/2014/main" id="{FB8C9EA9-135C-4C25-8AF8-684F17342EC9}"/>
               </a:ext>
             </a:extLst>
           </p:cNvPr>
@@ -10982,7 +10846,7 @@
           <p:cNvPr id="15" name="Shape 13">
             <a:extLst xmlns:a="http://schemas.openxmlformats.org/drawingml/2006/main">
               <a:ext uri="{FF2B5EF4-FFF2-40B4-BE49-F238E27FC236}">
-                <a16:creationId xmlns:a16="http://schemas.microsoft.com/office/drawing/2014/main" id="{AA9F2BE7-5BE2-4ED0-B51E-DCD8BDA9023B}"/>
+                <a16:creationId xmlns:a16="http://schemas.microsoft.com/office/drawing/2014/main" id="{C04E5B4D-95BA-4D99-BC81-EF841CF863E3}"/>
               </a:ext>
             </a:extLst>
           </p:cNvPr>
@@ -11015,7 +10879,7 @@
           <p:cNvPr id="16" name="Text 14">
             <a:extLst xmlns:a="http://schemas.openxmlformats.org/drawingml/2006/main">
               <a:ext uri="{FF2B5EF4-FFF2-40B4-BE49-F238E27FC236}">
-                <a16:creationId xmlns:a16="http://schemas.microsoft.com/office/drawing/2014/main" id="{01FB6C1E-13E1-4B00-BB0B-2336E761DD6F}"/>
+                <a16:creationId xmlns:a16="http://schemas.microsoft.com/office/drawing/2014/main" id="{AAE2777E-84DD-462E-9128-F2D2A29E37BD}"/>
               </a:ext>
             </a:extLst>
           </p:cNvPr>
@@ -11062,7 +10926,7 @@
           <p:cNvPr id="17" name="Text 15">
             <a:extLst xmlns:a="http://schemas.openxmlformats.org/drawingml/2006/main">
               <a:ext uri="{FF2B5EF4-FFF2-40B4-BE49-F238E27FC236}">
-                <a16:creationId xmlns:a16="http://schemas.microsoft.com/office/drawing/2014/main" id="{6472D6AF-A242-477D-B77A-AF3536211FAD}"/>
+                <a16:creationId xmlns:a16="http://schemas.microsoft.com/office/drawing/2014/main" id="{07F97513-5E1F-4784-A61C-D16DD28BE118}"/>
               </a:ext>
             </a:extLst>
           </p:cNvPr>
@@ -11109,7 +10973,7 @@
           <p:cNvPr id="18" name="Text 16">
             <a:extLst xmlns:a="http://schemas.openxmlformats.org/drawingml/2006/main">
               <a:ext uri="{FF2B5EF4-FFF2-40B4-BE49-F238E27FC236}">
-                <a16:creationId xmlns:a16="http://schemas.microsoft.com/office/drawing/2014/main" id="{F4034E70-D870-40AC-AA50-D18CA0E88DAC}"/>
+                <a16:creationId xmlns:a16="http://schemas.microsoft.com/office/drawing/2014/main" id="{B48D76C8-D0C0-4686-BF65-5CE854227126}"/>
               </a:ext>
             </a:extLst>
           </p:cNvPr>
@@ -11156,7 +11020,7 @@
           <p:cNvPr id="19" name="Text 17">
             <a:extLst xmlns:a="http://schemas.openxmlformats.org/drawingml/2006/main">
               <a:ext uri="{FF2B5EF4-FFF2-40B4-BE49-F238E27FC236}">
-                <a16:creationId xmlns:a16="http://schemas.microsoft.com/office/drawing/2014/main" id="{21785C18-37F7-4F11-9B20-8177BC4E0BF9}"/>
+                <a16:creationId xmlns:a16="http://schemas.microsoft.com/office/drawing/2014/main" id="{43E4EA6C-32DB-40AB-B4FF-DADD91325F23}"/>
               </a:ext>
             </a:extLst>
           </p:cNvPr>
@@ -11203,7 +11067,7 @@
           <p:cNvPr id="20" name="Shape 18">
             <a:extLst xmlns:a="http://schemas.openxmlformats.org/drawingml/2006/main">
               <a:ext uri="{FF2B5EF4-FFF2-40B4-BE49-F238E27FC236}">
-                <a16:creationId xmlns:a16="http://schemas.microsoft.com/office/drawing/2014/main" id="{F9CCD220-E4FC-4060-9527-CEEDD6B88F6F}"/>
+                <a16:creationId xmlns:a16="http://schemas.microsoft.com/office/drawing/2014/main" id="{0AF6EC2B-EB0A-4C4E-9D3D-6AA94BC19439}"/>
               </a:ext>
             </a:extLst>
           </p:cNvPr>
@@ -11236,7 +11100,7 @@
           <p:cNvPr id="21" name="Text 19">
             <a:extLst xmlns:a="http://schemas.openxmlformats.org/drawingml/2006/main">
               <a:ext uri="{FF2B5EF4-FFF2-40B4-BE49-F238E27FC236}">
-                <a16:creationId xmlns:a16="http://schemas.microsoft.com/office/drawing/2014/main" id="{2B786C74-3B73-4B45-9805-E593EF934279}"/>
+                <a16:creationId xmlns:a16="http://schemas.microsoft.com/office/drawing/2014/main" id="{38DB82C3-0E77-442F-A5D7-2D373BFF093E}"/>
               </a:ext>
             </a:extLst>
           </p:cNvPr>
@@ -11283,7 +11147,7 @@
           <p:cNvPr id="22" name="Text 20">
             <a:extLst xmlns:a="http://schemas.openxmlformats.org/drawingml/2006/main">
               <a:ext uri="{FF2B5EF4-FFF2-40B4-BE49-F238E27FC236}">
-                <a16:creationId xmlns:a16="http://schemas.microsoft.com/office/drawing/2014/main" id="{31026A15-3B69-4ABA-A5A5-C89491E55638}"/>
+                <a16:creationId xmlns:a16="http://schemas.microsoft.com/office/drawing/2014/main" id="{879041B8-07BE-4C6F-A09D-7A2154149A33}"/>
               </a:ext>
             </a:extLst>
           </p:cNvPr>
@@ -11330,7 +11194,7 @@
           <p:cNvPr id="23" name="Text 21">
             <a:extLst xmlns:a="http://schemas.openxmlformats.org/drawingml/2006/main">
               <a:ext uri="{FF2B5EF4-FFF2-40B4-BE49-F238E27FC236}">
-                <a16:creationId xmlns:a16="http://schemas.microsoft.com/office/drawing/2014/main" id="{BFB23902-F0A5-409C-A566-BBC36EE20DD8}"/>
+                <a16:creationId xmlns:a16="http://schemas.microsoft.com/office/drawing/2014/main" id="{8660884A-B41C-493A-8D4E-1BAF5075D952}"/>
               </a:ext>
             </a:extLst>
           </p:cNvPr>
@@ -11377,7 +11241,7 @@
           <p:cNvPr id="24" name="Text 22">
             <a:extLst xmlns:a="http://schemas.openxmlformats.org/drawingml/2006/main">
               <a:ext uri="{FF2B5EF4-FFF2-40B4-BE49-F238E27FC236}">
-                <a16:creationId xmlns:a16="http://schemas.microsoft.com/office/drawing/2014/main" id="{89850A46-CA8A-4E3A-A69F-044E74A3A3F6}"/>
+                <a16:creationId xmlns:a16="http://schemas.microsoft.com/office/drawing/2014/main" id="{560B4D5B-1273-48C2-B007-A428D92F7AD2}"/>
               </a:ext>
             </a:extLst>
           </p:cNvPr>
@@ -11424,7 +11288,7 @@
           <p:cNvPr id="25" name="Shape 23">
             <a:extLst xmlns:a="http://schemas.openxmlformats.org/drawingml/2006/main">
               <a:ext uri="{FF2B5EF4-FFF2-40B4-BE49-F238E27FC236}">
-                <a16:creationId xmlns:a16="http://schemas.microsoft.com/office/drawing/2014/main" id="{296D920E-D258-4ABF-A752-7AB84B897363}"/>
+                <a16:creationId xmlns:a16="http://schemas.microsoft.com/office/drawing/2014/main" id="{675624D7-1413-4086-A61E-2FB2D1239B85}"/>
               </a:ext>
             </a:extLst>
           </p:cNvPr>
@@ -11457,7 +11321,7 @@
           <p:cNvPr id="26" name="Text 24">
             <a:extLst xmlns:a="http://schemas.openxmlformats.org/drawingml/2006/main">
               <a:ext uri="{FF2B5EF4-FFF2-40B4-BE49-F238E27FC236}">
-                <a16:creationId xmlns:a16="http://schemas.microsoft.com/office/drawing/2014/main" id="{D9539A45-1DDD-458F-BC32-8E9D47AF8A4A}"/>
+                <a16:creationId xmlns:a16="http://schemas.microsoft.com/office/drawing/2014/main" id="{926C3A2B-D0A3-4F49-92A7-6CAAC0C1A999}"/>
               </a:ext>
             </a:extLst>
           </p:cNvPr>
@@ -11504,7 +11368,7 @@
           <p:cNvPr id="27" name="Text 25">
             <a:extLst xmlns:a="http://schemas.openxmlformats.org/drawingml/2006/main">
               <a:ext uri="{FF2B5EF4-FFF2-40B4-BE49-F238E27FC236}">
-                <a16:creationId xmlns:a16="http://schemas.microsoft.com/office/drawing/2014/main" id="{5A2378AB-ECDC-4974-A75B-D92C3ECDDF5C}"/>
+                <a16:creationId xmlns:a16="http://schemas.microsoft.com/office/drawing/2014/main" id="{3E0E4194-A8E2-4B53-8169-811EECE9A4E0}"/>
               </a:ext>
             </a:extLst>
           </p:cNvPr>
@@ -11551,7 +11415,7 @@
           <p:cNvPr id="28" name="Text 26">
             <a:extLst xmlns:a="http://schemas.openxmlformats.org/drawingml/2006/main">
               <a:ext uri="{FF2B5EF4-FFF2-40B4-BE49-F238E27FC236}">
-                <a16:creationId xmlns:a16="http://schemas.microsoft.com/office/drawing/2014/main" id="{11362ECB-E8A8-4DB8-A4E3-39BD46A6CF6B}"/>
+                <a16:creationId xmlns:a16="http://schemas.microsoft.com/office/drawing/2014/main" id="{78EB3612-4885-422D-A74F-2C5D523660C2}"/>
               </a:ext>
             </a:extLst>
           </p:cNvPr>
@@ -11598,7 +11462,7 @@
           <p:cNvPr id="29" name="Text 27">
             <a:extLst xmlns:a="http://schemas.openxmlformats.org/drawingml/2006/main">
               <a:ext uri="{FF2B5EF4-FFF2-40B4-BE49-F238E27FC236}">
-                <a16:creationId xmlns:a16="http://schemas.microsoft.com/office/drawing/2014/main" id="{5086BD01-17FB-474A-87BD-C0D0C5606BF6}"/>
+                <a16:creationId xmlns:a16="http://schemas.microsoft.com/office/drawing/2014/main" id="{394D50AD-9F95-4B4C-9F60-D8B6D4C5287C}"/>
               </a:ext>
             </a:extLst>
           </p:cNvPr>
@@ -11645,7 +11509,7 @@
           <p:cNvPr id="30" name="Shape 28">
             <a:extLst xmlns:a="http://schemas.openxmlformats.org/drawingml/2006/main">
               <a:ext uri="{FF2B5EF4-FFF2-40B4-BE49-F238E27FC236}">
-                <a16:creationId xmlns:a16="http://schemas.microsoft.com/office/drawing/2014/main" id="{E154FDFF-E55D-4948-B671-FD0249A93871}"/>
+                <a16:creationId xmlns:a16="http://schemas.microsoft.com/office/drawing/2014/main" id="{54ADCFBC-DA60-4A0A-A709-61C758C08D0E}"/>
               </a:ext>
             </a:extLst>
           </p:cNvPr>
@@ -11678,7 +11542,7 @@
           <p:cNvPr id="31" name="Text 29">
             <a:extLst xmlns:a="http://schemas.openxmlformats.org/drawingml/2006/main">
               <a:ext uri="{FF2B5EF4-FFF2-40B4-BE49-F238E27FC236}">
-                <a16:creationId xmlns:a16="http://schemas.microsoft.com/office/drawing/2014/main" id="{1F3BF88D-A89E-4126-A889-BF346503F218}"/>
+                <a16:creationId xmlns:a16="http://schemas.microsoft.com/office/drawing/2014/main" id="{2C0C35FA-70A4-42F1-BB83-C3C88B4A0D64}"/>
               </a:ext>
             </a:extLst>
           </p:cNvPr>
@@ -11715,7 +11579,7 @@
                 <a:ea typeface="PingFang SC"/>
                 <a:cs typeface="PingFang SC"/>
               </a:rPr>
-              <a:t>能力复用</a:t>
+              <a:t>能力体系</a:t>
             </a:r>
           </a:p>
         </p:txBody>
@@ -11725,7 +11589,7 @@
           <p:cNvPr id="32" name="Text 30">
             <a:extLst xmlns:a="http://schemas.openxmlformats.org/drawingml/2006/main">
               <a:ext uri="{FF2B5EF4-FFF2-40B4-BE49-F238E27FC236}">
-                <a16:creationId xmlns:a16="http://schemas.microsoft.com/office/drawing/2014/main" id="{A31F5ACE-A608-4BBD-9742-607B8B35E6D0}"/>
+                <a16:creationId xmlns:a16="http://schemas.microsoft.com/office/drawing/2014/main" id="{F1A6FC7E-E01E-47AC-97EC-E62321B90EDE}"/>
               </a:ext>
             </a:extLst>
           </p:cNvPr>
@@ -11762,7 +11626,7 @@
                 <a:ea typeface="PingFang SC"/>
                 <a:cs typeface="PingFang SC"/>
               </a:rPr>
-              <a:t>安装、映射与启用彼此分离</a:t>
+              <a:t>五类能力归入 BAI Work 产品体验</a:t>
             </a:r>
           </a:p>
         </p:txBody>
@@ -11772,7 +11636,7 @@
           <p:cNvPr id="33" name="Text 31">
             <a:extLst xmlns:a="http://schemas.openxmlformats.org/drawingml/2006/main">
               <a:ext uri="{FF2B5EF4-FFF2-40B4-BE49-F238E27FC236}">
-                <a16:creationId xmlns:a16="http://schemas.microsoft.com/office/drawing/2014/main" id="{9B9B1D77-7875-467C-848F-BC77B6F3D5E0}"/>
+                <a16:creationId xmlns:a16="http://schemas.microsoft.com/office/drawing/2014/main" id="{E32F6E7D-624F-488E-9491-F3DD451F6C14}"/>
               </a:ext>
             </a:extLst>
           </p:cNvPr>
@@ -11793,7 +11657,7 @@
         </p:spPr>
         <p:txBody>
           <a:bodyPr xmlns:a="http://schemas.openxmlformats.org/drawingml/2006/main" wrap="square" lIns="0" tIns="0" rIns="0" bIns="0" anchor="ctr">
-            <a:normAutofit fontScale="100000"/>
+            <a:normAutofit fontScale="83478"/>
           </a:bodyPr>
           <a:lstStyle xmlns:a="http://schemas.openxmlformats.org/drawingml/2006/main"/>
           <a:p xmlns:a="http://schemas.openxmlformats.org/drawingml/2006/main">
@@ -11809,7 +11673,7 @@
                 <a:ea typeface="PingFang SC"/>
                 <a:cs typeface="PingFang SC"/>
               </a:rPr>
-              <a:t>EBAI 索引 · 安全门 · 项目 Hook</a:t>
+              <a:t>命令/技能加载 · Rule 指令 · Hook manifest</a:t>
             </a:r>
           </a:p>
         </p:txBody>
@@ -11819,7 +11683,7 @@
           <p:cNvPr id="34" name="Text 32">
             <a:extLst xmlns:a="http://schemas.openxmlformats.org/drawingml/2006/main">
               <a:ext uri="{FF2B5EF4-FFF2-40B4-BE49-F238E27FC236}">
-                <a16:creationId xmlns:a16="http://schemas.microsoft.com/office/drawing/2014/main" id="{025A1503-C89E-47E2-93C7-CB4099C79009}"/>
+                <a16:creationId xmlns:a16="http://schemas.microsoft.com/office/drawing/2014/main" id="{2FA91224-539C-4F61-B113-DD93FF25D489}"/>
               </a:ext>
             </a:extLst>
           </p:cNvPr>
@@ -11856,7 +11720,7 @@
                 <a:ea typeface="PingFang SC"/>
                 <a:cs typeface="PingFang SC"/>
               </a:rPr>
-              <a:t>映射与 Hook 安全测试</a:t>
+              <a:t>加载与 manifest 安全测试</a:t>
             </a:r>
           </a:p>
         </p:txBody>
@@ -11866,7 +11730,7 @@
           <p:cNvPr id="35" name="Shape 33">
             <a:extLst xmlns:a="http://schemas.openxmlformats.org/drawingml/2006/main">
               <a:ext uri="{FF2B5EF4-FFF2-40B4-BE49-F238E27FC236}">
-                <a16:creationId xmlns:a16="http://schemas.microsoft.com/office/drawing/2014/main" id="{D4B439A7-6AA9-4C1A-86BE-56A1465397D4}"/>
+                <a16:creationId xmlns:a16="http://schemas.microsoft.com/office/drawing/2014/main" id="{33EB3CA4-5CC4-4037-9FC7-AA18FCA60FA9}"/>
               </a:ext>
             </a:extLst>
           </p:cNvPr>
@@ -11899,7 +11763,7 @@
           <p:cNvPr id="36" name="Text 34">
             <a:extLst xmlns:a="http://schemas.openxmlformats.org/drawingml/2006/main">
               <a:ext uri="{FF2B5EF4-FFF2-40B4-BE49-F238E27FC236}">
-                <a16:creationId xmlns:a16="http://schemas.microsoft.com/office/drawing/2014/main" id="{2E6FA698-88CB-4303-ADDC-87733265D811}"/>
+                <a16:creationId xmlns:a16="http://schemas.microsoft.com/office/drawing/2014/main" id="{941BA29E-C99E-4E6D-899C-7F639A46CCF1}"/>
               </a:ext>
             </a:extLst>
           </p:cNvPr>
@@ -11946,7 +11810,7 @@
           <p:cNvPr id="37" name="Text 35">
             <a:extLst xmlns:a="http://schemas.openxmlformats.org/drawingml/2006/main">
               <a:ext uri="{FF2B5EF4-FFF2-40B4-BE49-F238E27FC236}">
-                <a16:creationId xmlns:a16="http://schemas.microsoft.com/office/drawing/2014/main" id="{B1B6B361-0BDD-4973-9FFC-383AECC17629}"/>
+                <a16:creationId xmlns:a16="http://schemas.microsoft.com/office/drawing/2014/main" id="{0F67CE47-060D-43F5-BB24-6B21FA5CF2A0}"/>
               </a:ext>
             </a:extLst>
           </p:cNvPr>
@@ -11993,7 +11857,7 @@
           <p:cNvPr id="38" name="Text 36">
             <a:extLst xmlns:a="http://schemas.openxmlformats.org/drawingml/2006/main">
               <a:ext uri="{FF2B5EF4-FFF2-40B4-BE49-F238E27FC236}">
-                <a16:creationId xmlns:a16="http://schemas.microsoft.com/office/drawing/2014/main" id="{ED5A592B-6BEB-43B5-A94A-54834B400B5F}"/>
+                <a16:creationId xmlns:a16="http://schemas.microsoft.com/office/drawing/2014/main" id="{E8EBE6A2-4B43-4FFE-944C-D3CFC66FD223}"/>
               </a:ext>
             </a:extLst>
           </p:cNvPr>
@@ -12040,7 +11904,7 @@
           <p:cNvPr id="39" name="Text 37">
             <a:extLst xmlns:a="http://schemas.openxmlformats.org/drawingml/2006/main">
               <a:ext uri="{FF2B5EF4-FFF2-40B4-BE49-F238E27FC236}">
-                <a16:creationId xmlns:a16="http://schemas.microsoft.com/office/drawing/2014/main" id="{145DE60D-6D35-45C0-A8A3-4B0B45D2DA1E}"/>
+                <a16:creationId xmlns:a16="http://schemas.microsoft.com/office/drawing/2014/main" id="{9044C730-02D3-4582-BF88-1E8A3E9F46D4}"/>
               </a:ext>
             </a:extLst>
           </p:cNvPr>
@@ -12087,7 +11951,7 @@
           <p:cNvPr id="40" name="Shape 38">
             <a:extLst xmlns:a="http://schemas.openxmlformats.org/drawingml/2006/main">
               <a:ext uri="{FF2B5EF4-FFF2-40B4-BE49-F238E27FC236}">
-                <a16:creationId xmlns:a16="http://schemas.microsoft.com/office/drawing/2014/main" id="{C0E54DB2-DD47-4344-953F-3A192DEDDE73}"/>
+                <a16:creationId xmlns:a16="http://schemas.microsoft.com/office/drawing/2014/main" id="{E4603621-74E7-4865-86B5-E2300CBDFFE8}"/>
               </a:ext>
             </a:extLst>
           </p:cNvPr>
@@ -12120,7 +11984,7 @@
           <p:cNvPr id="41" name="Text 39">
             <a:extLst xmlns:a="http://schemas.openxmlformats.org/drawingml/2006/main">
               <a:ext uri="{FF2B5EF4-FFF2-40B4-BE49-F238E27FC236}">
-                <a16:creationId xmlns:a16="http://schemas.microsoft.com/office/drawing/2014/main" id="{75069815-8FF9-4A10-91EB-7C3FFCAB0EBE}"/>
+                <a16:creationId xmlns:a16="http://schemas.microsoft.com/office/drawing/2014/main" id="{9B50270E-1666-4F83-B3D3-4FF88CE69427}"/>
               </a:ext>
             </a:extLst>
           </p:cNvPr>
@@ -12167,7 +12031,7 @@
           <p:cNvPr id="42" name="Text 40">
             <a:extLst xmlns:a="http://schemas.openxmlformats.org/drawingml/2006/main">
               <a:ext uri="{FF2B5EF4-FFF2-40B4-BE49-F238E27FC236}">
-                <a16:creationId xmlns:a16="http://schemas.microsoft.com/office/drawing/2014/main" id="{59868940-F8E5-4419-8C24-8B6F4E753C53}"/>
+                <a16:creationId xmlns:a16="http://schemas.microsoft.com/office/drawing/2014/main" id="{7FC8A93D-F1C4-4467-A48B-4F4BED0F6B09}"/>
               </a:ext>
             </a:extLst>
           </p:cNvPr>
@@ -12214,7 +12078,7 @@
           <p:cNvPr id="43" name="Text 41">
             <a:extLst xmlns:a="http://schemas.openxmlformats.org/drawingml/2006/main">
               <a:ext uri="{FF2B5EF4-FFF2-40B4-BE49-F238E27FC236}">
-                <a16:creationId xmlns:a16="http://schemas.microsoft.com/office/drawing/2014/main" id="{F9D184F3-6D0B-4B6A-ABCB-C603FF8476FD}"/>
+                <a16:creationId xmlns:a16="http://schemas.microsoft.com/office/drawing/2014/main" id="{F7924CFF-EBC2-48E5-8A4B-C0EC04D616BB}"/>
               </a:ext>
             </a:extLst>
           </p:cNvPr>
@@ -12261,7 +12125,7 @@
           <p:cNvPr id="44" name="Text 42">
             <a:extLst xmlns:a="http://schemas.openxmlformats.org/drawingml/2006/main">
               <a:ext uri="{FF2B5EF4-FFF2-40B4-BE49-F238E27FC236}">
-                <a16:creationId xmlns:a16="http://schemas.microsoft.com/office/drawing/2014/main" id="{29B208AA-6BC3-46DF-ACD3-AE5E657569A3}"/>
+                <a16:creationId xmlns:a16="http://schemas.microsoft.com/office/drawing/2014/main" id="{9A2D8065-EEEA-4EE1-8A86-62FAD45A6CF2}"/>
               </a:ext>
             </a:extLst>
           </p:cNvPr>
@@ -12308,7 +12172,7 @@
           <p:cNvPr id="45" name="Shape 43">
             <a:extLst xmlns:a="http://schemas.openxmlformats.org/drawingml/2006/main">
               <a:ext uri="{FF2B5EF4-FFF2-40B4-BE49-F238E27FC236}">
-                <a16:creationId xmlns:a16="http://schemas.microsoft.com/office/drawing/2014/main" id="{3BE04097-F0CF-4465-B780-E20FF93F21F2}"/>
+                <a16:creationId xmlns:a16="http://schemas.microsoft.com/office/drawing/2014/main" id="{A6581738-38EB-4B64-93F8-BF5F5F4DE860}"/>
               </a:ext>
             </a:extLst>
           </p:cNvPr>
@@ -12343,7 +12207,7 @@
           <p:cNvPr id="46" name="Text 44">
             <a:extLst xmlns:a="http://schemas.openxmlformats.org/drawingml/2006/main">
               <a:ext uri="{FF2B5EF4-FFF2-40B4-BE49-F238E27FC236}">
-                <a16:creationId xmlns:a16="http://schemas.microsoft.com/office/drawing/2014/main" id="{38D4D43A-11B3-49B4-B921-8FA20CC73337}"/>
+                <a16:creationId xmlns:a16="http://schemas.microsoft.com/office/drawing/2014/main" id="{60453E17-63C5-467C-9800-689F732A1EAB}"/>
               </a:ext>
             </a:extLst>
           </p:cNvPr>
@@ -12390,7 +12254,7 @@
           <p:cNvPr id="47" name="Text 45">
             <a:extLst xmlns:a="http://schemas.openxmlformats.org/drawingml/2006/main">
               <a:ext uri="{FF2B5EF4-FFF2-40B4-BE49-F238E27FC236}">
-                <a16:creationId xmlns:a16="http://schemas.microsoft.com/office/drawing/2014/main" id="{82531DD8-7A14-43B5-9570-CDDAA79DEC7E}"/>
+                <a16:creationId xmlns:a16="http://schemas.microsoft.com/office/drawing/2014/main" id="{D0E76A89-7BBA-442A-9884-745F8CB2E7A7}"/>
               </a:ext>
             </a:extLst>
           </p:cNvPr>
@@ -12437,7 +12301,7 @@
           <p:cNvPr id="48" name="Text 46">
             <a:extLst xmlns:a="http://schemas.openxmlformats.org/drawingml/2006/main">
               <a:ext uri="{FF2B5EF4-FFF2-40B4-BE49-F238E27FC236}">
-                <a16:creationId xmlns:a16="http://schemas.microsoft.com/office/drawing/2014/main" id="{F804B758-D26F-4C42-A96C-39B2194BCBC1}"/>
+                <a16:creationId xmlns:a16="http://schemas.microsoft.com/office/drawing/2014/main" id="{43251FD1-54EE-4EF3-A4EB-A5EBAA41BEB2}"/>
               </a:ext>
             </a:extLst>
           </p:cNvPr>
@@ -12482,7 +12346,7 @@
     </p:spTree>
     <p:extLst>
       <p:ext uri="{BB962C8B-B14F-4D97-AF65-F5344CB8AC3E}">
-        <p14:creationId xmlns:p14="http://schemas.microsoft.com/office/powerpoint/2010/main" val="1298716259"/>
+        <p14:creationId xmlns:p14="http://schemas.microsoft.com/office/powerpoint/2010/main" val="1782632296"/>
       </p:ext>
     </p:extLst>
   </p:cSld>
@@ -12513,7 +12377,7 @@
           <p:cNvPr id="2" name="Text 0">
             <a:extLst xmlns:a="http://schemas.openxmlformats.org/drawingml/2006/main">
               <a:ext uri="{FF2B5EF4-FFF2-40B4-BE49-F238E27FC236}">
-                <a16:creationId xmlns:a16="http://schemas.microsoft.com/office/drawing/2014/main" id="{D54FA68C-0C5A-4AA1-AC7F-25FCDF58DA1D}"/>
+                <a16:creationId xmlns:a16="http://schemas.microsoft.com/office/drawing/2014/main" id="{452DC930-EB29-4E28-97AC-E761400DF87D}"/>
               </a:ext>
             </a:extLst>
           </p:cNvPr>
@@ -12560,7 +12424,7 @@
           <p:cNvPr id="3" name="Text 1">
             <a:extLst xmlns:a="http://schemas.openxmlformats.org/drawingml/2006/main">
               <a:ext uri="{FF2B5EF4-FFF2-40B4-BE49-F238E27FC236}">
-                <a16:creationId xmlns:a16="http://schemas.microsoft.com/office/drawing/2014/main" id="{2FCD9E07-22D9-412A-95F6-DA332A861AB0}"/>
+                <a16:creationId xmlns:a16="http://schemas.microsoft.com/office/drawing/2014/main" id="{547C7CA7-FA72-45EB-BFBF-5A3B6CE83B40}"/>
               </a:ext>
             </a:extLst>
           </p:cNvPr>
@@ -12607,7 +12471,7 @@
           <p:cNvPr id="4" name="Shape 2">
             <a:extLst xmlns:a="http://schemas.openxmlformats.org/drawingml/2006/main">
               <a:ext uri="{FF2B5EF4-FFF2-40B4-BE49-F238E27FC236}">
-                <a16:creationId xmlns:a16="http://schemas.microsoft.com/office/drawing/2014/main" id="{2DCAA024-486B-4409-B237-EF0B99E84D6C}"/>
+                <a16:creationId xmlns:a16="http://schemas.microsoft.com/office/drawing/2014/main" id="{43AB1B2D-A788-49ED-B787-B20BB6B021CF}"/>
               </a:ext>
             </a:extLst>
           </p:cNvPr>
@@ -12642,7 +12506,7 @@
           <p:cNvPr id="5" name="Text 3">
             <a:extLst xmlns:a="http://schemas.openxmlformats.org/drawingml/2006/main">
               <a:ext uri="{FF2B5EF4-FFF2-40B4-BE49-F238E27FC236}">
-                <a16:creationId xmlns:a16="http://schemas.microsoft.com/office/drawing/2014/main" id="{0C680136-BEEA-4C88-A3A2-6759CF1DBA5F}"/>
+                <a16:creationId xmlns:a16="http://schemas.microsoft.com/office/drawing/2014/main" id="{FC9B4730-47F1-4BC7-A79B-D340997A116E}"/>
               </a:ext>
             </a:extLst>
           </p:cNvPr>
@@ -12689,7 +12553,7 @@
           <p:cNvPr id="6" name="Shape 4">
             <a:extLst xmlns:a="http://schemas.openxmlformats.org/drawingml/2006/main">
               <a:ext uri="{FF2B5EF4-FFF2-40B4-BE49-F238E27FC236}">
-                <a16:creationId xmlns:a16="http://schemas.microsoft.com/office/drawing/2014/main" id="{9A5CEA11-8F76-4C06-8797-80338923B879}"/>
+                <a16:creationId xmlns:a16="http://schemas.microsoft.com/office/drawing/2014/main" id="{F786B0A1-C0AC-4D2F-B51C-4BE9B0C7588E}"/>
               </a:ext>
             </a:extLst>
           </p:cNvPr>
@@ -12720,7 +12584,7 @@
           <p:cNvPr id="7" name="Shape 5">
             <a:extLst xmlns:a="http://schemas.openxmlformats.org/drawingml/2006/main">
               <a:ext uri="{FF2B5EF4-FFF2-40B4-BE49-F238E27FC236}">
-                <a16:creationId xmlns:a16="http://schemas.microsoft.com/office/drawing/2014/main" id="{7D7A6964-2038-4354-8F7B-99F9250E5D8F}"/>
+                <a16:creationId xmlns:a16="http://schemas.microsoft.com/office/drawing/2014/main" id="{F2EBD356-804E-48F8-97C7-BABE78CE5FBD}"/>
               </a:ext>
             </a:extLst>
           </p:cNvPr>
@@ -12755,7 +12619,7 @@
           <p:cNvPr id="8" name="Text 6">
             <a:extLst xmlns:a="http://schemas.openxmlformats.org/drawingml/2006/main">
               <a:ext uri="{FF2B5EF4-FFF2-40B4-BE49-F238E27FC236}">
-                <a16:creationId xmlns:a16="http://schemas.microsoft.com/office/drawing/2014/main" id="{803460C4-3606-41E4-8714-69B93D865E00}"/>
+                <a16:creationId xmlns:a16="http://schemas.microsoft.com/office/drawing/2014/main" id="{4A92775E-5B66-4C77-B9C9-5A4656633A5A}"/>
               </a:ext>
             </a:extLst>
           </p:cNvPr>
@@ -12802,7 +12666,7 @@
           <p:cNvPr id="9" name="Text 7">
             <a:extLst xmlns:a="http://schemas.openxmlformats.org/drawingml/2006/main">
               <a:ext uri="{FF2B5EF4-FFF2-40B4-BE49-F238E27FC236}">
-                <a16:creationId xmlns:a16="http://schemas.microsoft.com/office/drawing/2014/main" id="{BF8E005B-F2B8-4DD5-B0EC-416C22867EFC}"/>
+                <a16:creationId xmlns:a16="http://schemas.microsoft.com/office/drawing/2014/main" id="{D340ECC1-76B3-4768-916A-26FE749020CA}"/>
               </a:ext>
             </a:extLst>
           </p:cNvPr>
@@ -12849,7 +12713,7 @@
           <p:cNvPr id="10" name="Text 8">
             <a:extLst xmlns:a="http://schemas.openxmlformats.org/drawingml/2006/main">
               <a:ext uri="{FF2B5EF4-FFF2-40B4-BE49-F238E27FC236}">
-                <a16:creationId xmlns:a16="http://schemas.microsoft.com/office/drawing/2014/main" id="{E6283D4F-3F91-40B0-B354-118815D40654}"/>
+                <a16:creationId xmlns:a16="http://schemas.microsoft.com/office/drawing/2014/main" id="{843D7B05-2852-4926-A911-9D809228F0D3}"/>
               </a:ext>
             </a:extLst>
           </p:cNvPr>
@@ -12896,7 +12760,7 @@
           <p:cNvPr id="11" name="Shape 9">
             <a:extLst xmlns:a="http://schemas.openxmlformats.org/drawingml/2006/main">
               <a:ext uri="{FF2B5EF4-FFF2-40B4-BE49-F238E27FC236}">
-                <a16:creationId xmlns:a16="http://schemas.microsoft.com/office/drawing/2014/main" id="{95F551CF-7696-49A4-A8B7-C31B3D3A5F68}"/>
+                <a16:creationId xmlns:a16="http://schemas.microsoft.com/office/drawing/2014/main" id="{BFC78F10-E6C0-4845-A1B2-6D05A0267902}"/>
               </a:ext>
             </a:extLst>
           </p:cNvPr>
@@ -12931,7 +12795,7 @@
           <p:cNvPr id="12" name="Text 10">
             <a:extLst xmlns:a="http://schemas.openxmlformats.org/drawingml/2006/main">
               <a:ext uri="{FF2B5EF4-FFF2-40B4-BE49-F238E27FC236}">
-                <a16:creationId xmlns:a16="http://schemas.microsoft.com/office/drawing/2014/main" id="{A4099B53-D837-4099-82AC-6374244F8FF4}"/>
+                <a16:creationId xmlns:a16="http://schemas.microsoft.com/office/drawing/2014/main" id="{B9FDC6CA-0936-465D-B789-0EA6E2526EF6}"/>
               </a:ext>
             </a:extLst>
           </p:cNvPr>
@@ -12978,7 +12842,7 @@
           <p:cNvPr id="13" name="Text 11">
             <a:extLst xmlns:a="http://schemas.openxmlformats.org/drawingml/2006/main">
               <a:ext uri="{FF2B5EF4-FFF2-40B4-BE49-F238E27FC236}">
-                <a16:creationId xmlns:a16="http://schemas.microsoft.com/office/drawing/2014/main" id="{6FBC98A7-CEA7-4BDB-895A-8EB9124A99ED}"/>
+                <a16:creationId xmlns:a16="http://schemas.microsoft.com/office/drawing/2014/main" id="{584576CD-984D-4D74-893A-8666F8047543}"/>
               </a:ext>
             </a:extLst>
           </p:cNvPr>
@@ -13025,7 +12889,7 @@
           <p:cNvPr id="14" name="Text 12">
             <a:extLst xmlns:a="http://schemas.openxmlformats.org/drawingml/2006/main">
               <a:ext uri="{FF2B5EF4-FFF2-40B4-BE49-F238E27FC236}">
-                <a16:creationId xmlns:a16="http://schemas.microsoft.com/office/drawing/2014/main" id="{EEB2C694-D173-47D2-98B5-8444FE5A857D}"/>
+                <a16:creationId xmlns:a16="http://schemas.microsoft.com/office/drawing/2014/main" id="{B3AFB4DE-EA75-4CF7-B8B8-C40E225141DD}"/>
               </a:ext>
             </a:extLst>
           </p:cNvPr>
@@ -13072,7 +12936,7 @@
           <p:cNvPr id="15" name="Shape 13">
             <a:extLst xmlns:a="http://schemas.openxmlformats.org/drawingml/2006/main">
               <a:ext uri="{FF2B5EF4-FFF2-40B4-BE49-F238E27FC236}">
-                <a16:creationId xmlns:a16="http://schemas.microsoft.com/office/drawing/2014/main" id="{3AC2EF66-0E97-4D86-8218-73632D986DCB}"/>
+                <a16:creationId xmlns:a16="http://schemas.microsoft.com/office/drawing/2014/main" id="{C8F09428-5248-4044-BB9F-AC5E7E391525}"/>
               </a:ext>
             </a:extLst>
           </p:cNvPr>
@@ -13107,7 +12971,7 @@
           <p:cNvPr id="16" name="Text 14">
             <a:extLst xmlns:a="http://schemas.openxmlformats.org/drawingml/2006/main">
               <a:ext uri="{FF2B5EF4-FFF2-40B4-BE49-F238E27FC236}">
-                <a16:creationId xmlns:a16="http://schemas.microsoft.com/office/drawing/2014/main" id="{8896A19D-F243-436A-BD51-BF02BC7BB0F0}"/>
+                <a16:creationId xmlns:a16="http://schemas.microsoft.com/office/drawing/2014/main" id="{58B1828E-C2C8-480B-95A7-2E9AE1F5B0AD}"/>
               </a:ext>
             </a:extLst>
           </p:cNvPr>
@@ -13154,7 +13018,7 @@
           <p:cNvPr id="17" name="Text 15">
             <a:extLst xmlns:a="http://schemas.openxmlformats.org/drawingml/2006/main">
               <a:ext uri="{FF2B5EF4-FFF2-40B4-BE49-F238E27FC236}">
-                <a16:creationId xmlns:a16="http://schemas.microsoft.com/office/drawing/2014/main" id="{F9C6BE8A-4223-46A6-A91B-D2416F2FF188}"/>
+                <a16:creationId xmlns:a16="http://schemas.microsoft.com/office/drawing/2014/main" id="{3114A8A2-E4C0-4011-9E43-474E63C74B57}"/>
               </a:ext>
             </a:extLst>
           </p:cNvPr>
@@ -13201,7 +13065,7 @@
           <p:cNvPr id="18" name="Text 16">
             <a:extLst xmlns:a="http://schemas.openxmlformats.org/drawingml/2006/main">
               <a:ext uri="{FF2B5EF4-FFF2-40B4-BE49-F238E27FC236}">
-                <a16:creationId xmlns:a16="http://schemas.microsoft.com/office/drawing/2014/main" id="{1FEFC446-13BF-43D3-84CC-A5F4ABE39EAB}"/>
+                <a16:creationId xmlns:a16="http://schemas.microsoft.com/office/drawing/2014/main" id="{E4270A79-46AB-40EC-A871-AE83566E1770}"/>
               </a:ext>
             </a:extLst>
           </p:cNvPr>
@@ -13248,7 +13112,7 @@
           <p:cNvPr id="19" name="Shape 17">
             <a:extLst xmlns:a="http://schemas.openxmlformats.org/drawingml/2006/main">
               <a:ext uri="{FF2B5EF4-FFF2-40B4-BE49-F238E27FC236}">
-                <a16:creationId xmlns:a16="http://schemas.microsoft.com/office/drawing/2014/main" id="{A0467FD2-D826-43D1-A371-FC8F42D5AE45}"/>
+                <a16:creationId xmlns:a16="http://schemas.microsoft.com/office/drawing/2014/main" id="{CDA4B715-AA3D-4537-B608-0DF371701001}"/>
               </a:ext>
             </a:extLst>
           </p:cNvPr>
@@ -13283,7 +13147,7 @@
           <p:cNvPr id="20" name="Text 18">
             <a:extLst xmlns:a="http://schemas.openxmlformats.org/drawingml/2006/main">
               <a:ext uri="{FF2B5EF4-FFF2-40B4-BE49-F238E27FC236}">
-                <a16:creationId xmlns:a16="http://schemas.microsoft.com/office/drawing/2014/main" id="{E798D4CB-93D5-443E-8DBF-2B54E8D6616E}"/>
+                <a16:creationId xmlns:a16="http://schemas.microsoft.com/office/drawing/2014/main" id="{E1F58A26-D78E-4BB3-B266-0817902181A2}"/>
               </a:ext>
             </a:extLst>
           </p:cNvPr>
@@ -13330,7 +13194,7 @@
           <p:cNvPr id="21" name="Text 19">
             <a:extLst xmlns:a="http://schemas.openxmlformats.org/drawingml/2006/main">
               <a:ext uri="{FF2B5EF4-FFF2-40B4-BE49-F238E27FC236}">
-                <a16:creationId xmlns:a16="http://schemas.microsoft.com/office/drawing/2014/main" id="{4EA4D5CD-B116-4904-95EF-147DF3FFD897}"/>
+                <a16:creationId xmlns:a16="http://schemas.microsoft.com/office/drawing/2014/main" id="{D905577F-29C6-4D01-BABE-93666BA5D1C3}"/>
               </a:ext>
             </a:extLst>
           </p:cNvPr>
@@ -13377,7 +13241,7 @@
           <p:cNvPr id="22" name="Text 20">
             <a:extLst xmlns:a="http://schemas.openxmlformats.org/drawingml/2006/main">
               <a:ext uri="{FF2B5EF4-FFF2-40B4-BE49-F238E27FC236}">
-                <a16:creationId xmlns:a16="http://schemas.microsoft.com/office/drawing/2014/main" id="{18DD23BF-3A95-4040-B4C6-A55633AB95D1}"/>
+                <a16:creationId xmlns:a16="http://schemas.microsoft.com/office/drawing/2014/main" id="{3D01CCB3-333D-42C6-828F-7C5AAFEC54B5}"/>
               </a:ext>
             </a:extLst>
           </p:cNvPr>
@@ -13424,7 +13288,7 @@
           <p:cNvPr id="23" name="Shape 21">
             <a:extLst xmlns:a="http://schemas.openxmlformats.org/drawingml/2006/main">
               <a:ext uri="{FF2B5EF4-FFF2-40B4-BE49-F238E27FC236}">
-                <a16:creationId xmlns:a16="http://schemas.microsoft.com/office/drawing/2014/main" id="{564ABA3D-4CCE-4310-945D-906748D412EF}"/>
+                <a16:creationId xmlns:a16="http://schemas.microsoft.com/office/drawing/2014/main" id="{E4D31F94-7DBB-48BE-857D-FDFF59C8CC82}"/>
               </a:ext>
             </a:extLst>
           </p:cNvPr>
@@ -13459,7 +13323,7 @@
           <p:cNvPr id="24" name="Text 22">
             <a:extLst xmlns:a="http://schemas.openxmlformats.org/drawingml/2006/main">
               <a:ext uri="{FF2B5EF4-FFF2-40B4-BE49-F238E27FC236}">
-                <a16:creationId xmlns:a16="http://schemas.microsoft.com/office/drawing/2014/main" id="{C10516E3-FAA3-46B5-98A3-AEEA952028D9}"/>
+                <a16:creationId xmlns:a16="http://schemas.microsoft.com/office/drawing/2014/main" id="{49F49320-A33A-4463-8A1B-AA6E979BC143}"/>
               </a:ext>
             </a:extLst>
           </p:cNvPr>
@@ -13506,7 +13370,7 @@
           <p:cNvPr id="25" name="Text 23">
             <a:extLst xmlns:a="http://schemas.openxmlformats.org/drawingml/2006/main">
               <a:ext uri="{FF2B5EF4-FFF2-40B4-BE49-F238E27FC236}">
-                <a16:creationId xmlns:a16="http://schemas.microsoft.com/office/drawing/2014/main" id="{B622F56B-AD88-4844-92BB-1BBB5A561D41}"/>
+                <a16:creationId xmlns:a16="http://schemas.microsoft.com/office/drawing/2014/main" id="{658EA683-D4E2-4EFA-8A45-E8EE64648865}"/>
               </a:ext>
             </a:extLst>
           </p:cNvPr>
@@ -13553,7 +13417,7 @@
           <p:cNvPr id="26" name="Shape 24">
             <a:extLst xmlns:a="http://schemas.openxmlformats.org/drawingml/2006/main">
               <a:ext uri="{FF2B5EF4-FFF2-40B4-BE49-F238E27FC236}">
-                <a16:creationId xmlns:a16="http://schemas.microsoft.com/office/drawing/2014/main" id="{C08EEA62-6253-4207-AD09-7B8242C1F926}"/>
+                <a16:creationId xmlns:a16="http://schemas.microsoft.com/office/drawing/2014/main" id="{DD6452F1-D0C5-47A6-A714-1736A90B09BC}"/>
               </a:ext>
             </a:extLst>
           </p:cNvPr>
@@ -13588,7 +13452,7 @@
           <p:cNvPr id="27" name="Text 25">
             <a:extLst xmlns:a="http://schemas.openxmlformats.org/drawingml/2006/main">
               <a:ext uri="{FF2B5EF4-FFF2-40B4-BE49-F238E27FC236}">
-                <a16:creationId xmlns:a16="http://schemas.microsoft.com/office/drawing/2014/main" id="{5649A419-E466-468A-8B1E-9EA082B1E0E7}"/>
+                <a16:creationId xmlns:a16="http://schemas.microsoft.com/office/drawing/2014/main" id="{30372B40-1B8A-472D-BB91-36D4040FF234}"/>
               </a:ext>
             </a:extLst>
           </p:cNvPr>
@@ -13635,7 +13499,7 @@
           <p:cNvPr id="28" name="Shape 26">
             <a:extLst xmlns:a="http://schemas.openxmlformats.org/drawingml/2006/main">
               <a:ext uri="{FF2B5EF4-FFF2-40B4-BE49-F238E27FC236}">
-                <a16:creationId xmlns:a16="http://schemas.microsoft.com/office/drawing/2014/main" id="{3C825B0E-ABE1-46A2-AA51-09BECE6A15C8}"/>
+                <a16:creationId xmlns:a16="http://schemas.microsoft.com/office/drawing/2014/main" id="{E159F0E6-3CD1-473F-A90D-0C0001AC3DBA}"/>
               </a:ext>
             </a:extLst>
           </p:cNvPr>
@@ -13670,7 +13534,7 @@
           <p:cNvPr id="29" name="Text 27">
             <a:extLst xmlns:a="http://schemas.openxmlformats.org/drawingml/2006/main">
               <a:ext uri="{FF2B5EF4-FFF2-40B4-BE49-F238E27FC236}">
-                <a16:creationId xmlns:a16="http://schemas.microsoft.com/office/drawing/2014/main" id="{55589954-C5BC-4005-AB2D-BA3B8639DD52}"/>
+                <a16:creationId xmlns:a16="http://schemas.microsoft.com/office/drawing/2014/main" id="{E5B1928C-2D36-46B6-AA5A-6F123DE34D24}"/>
               </a:ext>
             </a:extLst>
           </p:cNvPr>
@@ -13717,7 +13581,7 @@
           <p:cNvPr id="30" name="Text 28">
             <a:extLst xmlns:a="http://schemas.openxmlformats.org/drawingml/2006/main">
               <a:ext uri="{FF2B5EF4-FFF2-40B4-BE49-F238E27FC236}">
-                <a16:creationId xmlns:a16="http://schemas.microsoft.com/office/drawing/2014/main" id="{C5D15281-D5A9-440F-AF54-756C777EDE80}"/>
+                <a16:creationId xmlns:a16="http://schemas.microsoft.com/office/drawing/2014/main" id="{D7537487-69E6-485E-A05D-94EB61AEA8F5}"/>
               </a:ext>
             </a:extLst>
           </p:cNvPr>
@@ -13764,7 +13628,7 @@
           <p:cNvPr id="31" name="Shape 29">
             <a:extLst xmlns:a="http://schemas.openxmlformats.org/drawingml/2006/main">
               <a:ext uri="{FF2B5EF4-FFF2-40B4-BE49-F238E27FC236}">
-                <a16:creationId xmlns:a16="http://schemas.microsoft.com/office/drawing/2014/main" id="{A0D675B5-4A8E-4507-94FF-C64BE17C03CE}"/>
+                <a16:creationId xmlns:a16="http://schemas.microsoft.com/office/drawing/2014/main" id="{E10178AD-F621-4A74-95B9-255EB87AA548}"/>
               </a:ext>
             </a:extLst>
           </p:cNvPr>
@@ -13799,7 +13663,7 @@
           <p:cNvPr id="32" name="Text 30">
             <a:extLst xmlns:a="http://schemas.openxmlformats.org/drawingml/2006/main">
               <a:ext uri="{FF2B5EF4-FFF2-40B4-BE49-F238E27FC236}">
-                <a16:creationId xmlns:a16="http://schemas.microsoft.com/office/drawing/2014/main" id="{4F7D8B12-A7A1-4728-89EB-1AD92164D322}"/>
+                <a16:creationId xmlns:a16="http://schemas.microsoft.com/office/drawing/2014/main" id="{89D5326C-535C-470C-942C-2ECD866C49B9}"/>
               </a:ext>
             </a:extLst>
           </p:cNvPr>
@@ -13846,7 +13710,7 @@
           <p:cNvPr id="33" name="Shape 31">
             <a:extLst xmlns:a="http://schemas.openxmlformats.org/drawingml/2006/main">
               <a:ext uri="{FF2B5EF4-FFF2-40B4-BE49-F238E27FC236}">
-                <a16:creationId xmlns:a16="http://schemas.microsoft.com/office/drawing/2014/main" id="{8E6F0D0C-C841-4E1B-B850-6E0D8CA09C3F}"/>
+                <a16:creationId xmlns:a16="http://schemas.microsoft.com/office/drawing/2014/main" id="{ADF3CE87-8829-4ECF-86F2-71F2BBAC0B19}"/>
               </a:ext>
             </a:extLst>
           </p:cNvPr>
@@ -13881,7 +13745,7 @@
           <p:cNvPr id="34" name="Text 32">
             <a:extLst xmlns:a="http://schemas.openxmlformats.org/drawingml/2006/main">
               <a:ext uri="{FF2B5EF4-FFF2-40B4-BE49-F238E27FC236}">
-                <a16:creationId xmlns:a16="http://schemas.microsoft.com/office/drawing/2014/main" id="{84845527-E5CE-4B9A-9507-CA70F5A7DF0A}"/>
+                <a16:creationId xmlns:a16="http://schemas.microsoft.com/office/drawing/2014/main" id="{44114EAF-EF67-4A31-8C8B-F76DB7B1AA11}"/>
               </a:ext>
             </a:extLst>
           </p:cNvPr>
@@ -13928,7 +13792,7 @@
           <p:cNvPr id="35" name="Text 33">
             <a:extLst xmlns:a="http://schemas.openxmlformats.org/drawingml/2006/main">
               <a:ext uri="{FF2B5EF4-FFF2-40B4-BE49-F238E27FC236}">
-                <a16:creationId xmlns:a16="http://schemas.microsoft.com/office/drawing/2014/main" id="{39504861-708A-489F-8095-923DC87F81D9}"/>
+                <a16:creationId xmlns:a16="http://schemas.microsoft.com/office/drawing/2014/main" id="{974AF44F-A534-4176-A7F3-AD67FBFB7F9C}"/>
               </a:ext>
             </a:extLst>
           </p:cNvPr>
@@ -13975,7 +13839,7 @@
           <p:cNvPr id="36" name="Shape 34">
             <a:extLst xmlns:a="http://schemas.openxmlformats.org/drawingml/2006/main">
               <a:ext uri="{FF2B5EF4-FFF2-40B4-BE49-F238E27FC236}">
-                <a16:creationId xmlns:a16="http://schemas.microsoft.com/office/drawing/2014/main" id="{6CF45D2C-7E3E-4B96-9EE2-3E70FC4070BD}"/>
+                <a16:creationId xmlns:a16="http://schemas.microsoft.com/office/drawing/2014/main" id="{39B47F02-0284-4376-96FC-EBF82283F2F8}"/>
               </a:ext>
             </a:extLst>
           </p:cNvPr>
@@ -14010,7 +13874,7 @@
           <p:cNvPr id="37" name="Text 35">
             <a:extLst xmlns:a="http://schemas.openxmlformats.org/drawingml/2006/main">
               <a:ext uri="{FF2B5EF4-FFF2-40B4-BE49-F238E27FC236}">
-                <a16:creationId xmlns:a16="http://schemas.microsoft.com/office/drawing/2014/main" id="{73C58330-11E2-463C-809F-65CA01BD0F7D}"/>
+                <a16:creationId xmlns:a16="http://schemas.microsoft.com/office/drawing/2014/main" id="{9BE47B3E-CFB9-4F0F-A548-8A093514F2C7}"/>
               </a:ext>
             </a:extLst>
           </p:cNvPr>
@@ -14057,7 +13921,7 @@
           <p:cNvPr id="38" name="Shape 36">
             <a:extLst xmlns:a="http://schemas.openxmlformats.org/drawingml/2006/main">
               <a:ext uri="{FF2B5EF4-FFF2-40B4-BE49-F238E27FC236}">
-                <a16:creationId xmlns:a16="http://schemas.microsoft.com/office/drawing/2014/main" id="{B0514306-4243-4BE1-A81C-66B1576C6DC7}"/>
+                <a16:creationId xmlns:a16="http://schemas.microsoft.com/office/drawing/2014/main" id="{8A88C545-1B32-4882-AC54-ABE4F8B37AB6}"/>
               </a:ext>
             </a:extLst>
           </p:cNvPr>
@@ -14092,7 +13956,7 @@
           <p:cNvPr id="39" name="Text 37">
             <a:extLst xmlns:a="http://schemas.openxmlformats.org/drawingml/2006/main">
               <a:ext uri="{FF2B5EF4-FFF2-40B4-BE49-F238E27FC236}">
-                <a16:creationId xmlns:a16="http://schemas.microsoft.com/office/drawing/2014/main" id="{517B3740-12D0-43FD-AE48-6B3DB907511A}"/>
+                <a16:creationId xmlns:a16="http://schemas.microsoft.com/office/drawing/2014/main" id="{305F94EE-CF30-4E2D-B5ED-CE233192F8E5}"/>
               </a:ext>
             </a:extLst>
           </p:cNvPr>
@@ -14139,7 +14003,7 @@
           <p:cNvPr id="40" name="Text 38">
             <a:extLst xmlns:a="http://schemas.openxmlformats.org/drawingml/2006/main">
               <a:ext uri="{FF2B5EF4-FFF2-40B4-BE49-F238E27FC236}">
-                <a16:creationId xmlns:a16="http://schemas.microsoft.com/office/drawing/2014/main" id="{FC883D14-DA5F-4DFD-8D69-2C4187804ACC}"/>
+                <a16:creationId xmlns:a16="http://schemas.microsoft.com/office/drawing/2014/main" id="{1D80217C-6678-405B-81DF-B511F963103E}"/>
               </a:ext>
             </a:extLst>
           </p:cNvPr>
@@ -14186,7 +14050,7 @@
           <p:cNvPr id="41" name="Text 39">
             <a:extLst xmlns:a="http://schemas.openxmlformats.org/drawingml/2006/main">
               <a:ext uri="{FF2B5EF4-FFF2-40B4-BE49-F238E27FC236}">
-                <a16:creationId xmlns:a16="http://schemas.microsoft.com/office/drawing/2014/main" id="{16DE99D5-55A2-4FDB-AB3B-3DFC1DFEC2E4}"/>
+                <a16:creationId xmlns:a16="http://schemas.microsoft.com/office/drawing/2014/main" id="{4F6C43E0-E0ED-40D6-94B8-6CCC2C476764}"/>
               </a:ext>
             </a:extLst>
           </p:cNvPr>
@@ -14231,7 +14095,7 @@
     </p:spTree>
     <p:extLst>
       <p:ext uri="{BB962C8B-B14F-4D97-AF65-F5344CB8AC3E}">
-        <p14:creationId xmlns:p14="http://schemas.microsoft.com/office/powerpoint/2010/main" val="2089456918"/>
+        <p14:creationId xmlns:p14="http://schemas.microsoft.com/office/powerpoint/2010/main" val="624222442"/>
       </p:ext>
     </p:extLst>
   </p:cSld>
@@ -14262,7 +14126,7 @@
           <p:cNvPr id="2" name="Text 0">
             <a:extLst xmlns:a="http://schemas.openxmlformats.org/drawingml/2006/main">
               <a:ext uri="{FF2B5EF4-FFF2-40B4-BE49-F238E27FC236}">
-                <a16:creationId xmlns:a16="http://schemas.microsoft.com/office/drawing/2014/main" id="{8655464F-580B-408F-88FC-477CDB18388E}"/>
+                <a16:creationId xmlns:a16="http://schemas.microsoft.com/office/drawing/2014/main" id="{60ACCA45-73DA-4B04-B771-B42F529A1E04}"/>
               </a:ext>
             </a:extLst>
           </p:cNvPr>
@@ -14309,7 +14173,7 @@
           <p:cNvPr id="3" name="Text 1">
             <a:extLst xmlns:a="http://schemas.openxmlformats.org/drawingml/2006/main">
               <a:ext uri="{FF2B5EF4-FFF2-40B4-BE49-F238E27FC236}">
-                <a16:creationId xmlns:a16="http://schemas.microsoft.com/office/drawing/2014/main" id="{346CF9BB-2E26-426F-9CC9-F72169C609FB}"/>
+                <a16:creationId xmlns:a16="http://schemas.microsoft.com/office/drawing/2014/main" id="{FA9013C9-05B5-4496-8A8E-7D3DDE43F633}"/>
               </a:ext>
             </a:extLst>
           </p:cNvPr>
@@ -14356,7 +14220,7 @@
           <p:cNvPr id="4" name="Shape 2">
             <a:extLst xmlns:a="http://schemas.openxmlformats.org/drawingml/2006/main">
               <a:ext uri="{FF2B5EF4-FFF2-40B4-BE49-F238E27FC236}">
-                <a16:creationId xmlns:a16="http://schemas.microsoft.com/office/drawing/2014/main" id="{602675A8-BC2C-482C-A3DE-7C632EF4588C}"/>
+                <a16:creationId xmlns:a16="http://schemas.microsoft.com/office/drawing/2014/main" id="{51AFA4C1-759B-4A80-BAAD-C85D946930EA}"/>
               </a:ext>
             </a:extLst>
           </p:cNvPr>
@@ -14391,7 +14255,7 @@
           <p:cNvPr id="5" name="Text 3">
             <a:extLst xmlns:a="http://schemas.openxmlformats.org/drawingml/2006/main">
               <a:ext uri="{FF2B5EF4-FFF2-40B4-BE49-F238E27FC236}">
-                <a16:creationId xmlns:a16="http://schemas.microsoft.com/office/drawing/2014/main" id="{BDFCE02D-5287-4EF4-A3DC-B9CCC3077C90}"/>
+                <a16:creationId xmlns:a16="http://schemas.microsoft.com/office/drawing/2014/main" id="{72473805-EF56-47E9-817D-17D62E679938}"/>
               </a:ext>
             </a:extLst>
           </p:cNvPr>
@@ -14438,7 +14302,7 @@
           <p:cNvPr id="6" name="Shape 4">
             <a:extLst xmlns:a="http://schemas.openxmlformats.org/drawingml/2006/main">
               <a:ext uri="{FF2B5EF4-FFF2-40B4-BE49-F238E27FC236}">
-                <a16:creationId xmlns:a16="http://schemas.microsoft.com/office/drawing/2014/main" id="{80B4F96B-54D9-4F43-9773-241A1FD789B8}"/>
+                <a16:creationId xmlns:a16="http://schemas.microsoft.com/office/drawing/2014/main" id="{CC625DFC-034B-49EF-8460-DEFCD4A6831E}"/>
               </a:ext>
             </a:extLst>
           </p:cNvPr>
@@ -14469,7 +14333,7 @@
           <p:cNvPr id="7" name="Shape 5">
             <a:extLst xmlns:a="http://schemas.openxmlformats.org/drawingml/2006/main">
               <a:ext uri="{FF2B5EF4-FFF2-40B4-BE49-F238E27FC236}">
-                <a16:creationId xmlns:a16="http://schemas.microsoft.com/office/drawing/2014/main" id="{09BE9404-4818-4A47-B53E-CA50E421DBDF}"/>
+                <a16:creationId xmlns:a16="http://schemas.microsoft.com/office/drawing/2014/main" id="{E3124539-1042-4D7E-B2C2-712EDD945FCC}"/>
               </a:ext>
             </a:extLst>
           </p:cNvPr>
@@ -14504,7 +14368,7 @@
           <p:cNvPr id="8" name="Text 6">
             <a:extLst xmlns:a="http://schemas.openxmlformats.org/drawingml/2006/main">
               <a:ext uri="{FF2B5EF4-FFF2-40B4-BE49-F238E27FC236}">
-                <a16:creationId xmlns:a16="http://schemas.microsoft.com/office/drawing/2014/main" id="{01454E42-A75E-4782-ACAA-72379A96E70B}"/>
+                <a16:creationId xmlns:a16="http://schemas.microsoft.com/office/drawing/2014/main" id="{B8BC1A84-F86A-4CA6-BC18-1D6C4D1AD840}"/>
               </a:ext>
             </a:extLst>
           </p:cNvPr>
@@ -14551,7 +14415,7 @@
           <p:cNvPr id="9" name="Text 7">
             <a:extLst xmlns:a="http://schemas.openxmlformats.org/drawingml/2006/main">
               <a:ext uri="{FF2B5EF4-FFF2-40B4-BE49-F238E27FC236}">
-                <a16:creationId xmlns:a16="http://schemas.microsoft.com/office/drawing/2014/main" id="{9A718EB4-3C4D-4727-B8B1-4ACF522B8142}"/>
+                <a16:creationId xmlns:a16="http://schemas.microsoft.com/office/drawing/2014/main" id="{55DCD93E-4B68-42F6-8656-2FDFBBDB42F6}"/>
               </a:ext>
             </a:extLst>
           </p:cNvPr>
@@ -14598,7 +14462,7 @@
           <p:cNvPr id="10" name="Text 8">
             <a:extLst xmlns:a="http://schemas.openxmlformats.org/drawingml/2006/main">
               <a:ext uri="{FF2B5EF4-FFF2-40B4-BE49-F238E27FC236}">
-                <a16:creationId xmlns:a16="http://schemas.microsoft.com/office/drawing/2014/main" id="{570B8E88-33C3-43EE-A05F-A23BD2C34FB0}"/>
+                <a16:creationId xmlns:a16="http://schemas.microsoft.com/office/drawing/2014/main" id="{0EFEB569-0680-44A3-AE36-0EC600EB4080}"/>
               </a:ext>
             </a:extLst>
           </p:cNvPr>
@@ -14645,7 +14509,7 @@
           <p:cNvPr id="11" name="Text 9">
             <a:extLst xmlns:a="http://schemas.openxmlformats.org/drawingml/2006/main">
               <a:ext uri="{FF2B5EF4-FFF2-40B4-BE49-F238E27FC236}">
-                <a16:creationId xmlns:a16="http://schemas.microsoft.com/office/drawing/2014/main" id="{180F8224-3953-4940-89EC-8E24781EF5F2}"/>
+                <a16:creationId xmlns:a16="http://schemas.microsoft.com/office/drawing/2014/main" id="{AB33CC3C-4CB8-434E-AC45-F409470474D9}"/>
               </a:ext>
             </a:extLst>
           </p:cNvPr>
@@ -14692,7 +14556,7 @@
           <p:cNvPr id="12" name="Text 10">
             <a:extLst xmlns:a="http://schemas.openxmlformats.org/drawingml/2006/main">
               <a:ext uri="{FF2B5EF4-FFF2-40B4-BE49-F238E27FC236}">
-                <a16:creationId xmlns:a16="http://schemas.microsoft.com/office/drawing/2014/main" id="{44DFA1CD-1471-4F7D-8871-8F8363049BF5}"/>
+                <a16:creationId xmlns:a16="http://schemas.microsoft.com/office/drawing/2014/main" id="{311188DE-38DE-426C-A9F9-6D28BB9C1353}"/>
               </a:ext>
             </a:extLst>
           </p:cNvPr>
@@ -14739,7 +14603,7 @@
           <p:cNvPr id="13" name="Text 11">
             <a:extLst xmlns:a="http://schemas.openxmlformats.org/drawingml/2006/main">
               <a:ext uri="{FF2B5EF4-FFF2-40B4-BE49-F238E27FC236}">
-                <a16:creationId xmlns:a16="http://schemas.microsoft.com/office/drawing/2014/main" id="{23C0CE9B-AD69-4F61-95AB-0E7C73B26960}"/>
+                <a16:creationId xmlns:a16="http://schemas.microsoft.com/office/drawing/2014/main" id="{73C62BE6-2361-4E2D-95C6-19CF76267120}"/>
               </a:ext>
             </a:extLst>
           </p:cNvPr>
@@ -14786,7 +14650,7 @@
           <p:cNvPr id="14" name="Shape 12">
             <a:extLst xmlns:a="http://schemas.openxmlformats.org/drawingml/2006/main">
               <a:ext uri="{FF2B5EF4-FFF2-40B4-BE49-F238E27FC236}">
-                <a16:creationId xmlns:a16="http://schemas.microsoft.com/office/drawing/2014/main" id="{59BCFD81-EB7A-4F57-AF86-345EF3F4AB19}"/>
+                <a16:creationId xmlns:a16="http://schemas.microsoft.com/office/drawing/2014/main" id="{1E6A8FF7-C3B0-4EFE-89BE-420616CBE81B}"/>
               </a:ext>
             </a:extLst>
           </p:cNvPr>
@@ -14821,7 +14685,7 @@
           <p:cNvPr id="15" name="Text 13">
             <a:extLst xmlns:a="http://schemas.openxmlformats.org/drawingml/2006/main">
               <a:ext uri="{FF2B5EF4-FFF2-40B4-BE49-F238E27FC236}">
-                <a16:creationId xmlns:a16="http://schemas.microsoft.com/office/drawing/2014/main" id="{1621D904-A531-4C33-80D1-92ADAC0C8BFA}"/>
+                <a16:creationId xmlns:a16="http://schemas.microsoft.com/office/drawing/2014/main" id="{72124C57-1D7F-4420-81B8-96BE27E67100}"/>
               </a:ext>
             </a:extLst>
           </p:cNvPr>
@@ -14868,7 +14732,7 @@
           <p:cNvPr id="16" name="Text 14">
             <a:extLst xmlns:a="http://schemas.openxmlformats.org/drawingml/2006/main">
               <a:ext uri="{FF2B5EF4-FFF2-40B4-BE49-F238E27FC236}">
-                <a16:creationId xmlns:a16="http://schemas.microsoft.com/office/drawing/2014/main" id="{DB19F7E5-FEED-45CA-9FA9-5B9282ABDC5D}"/>
+                <a16:creationId xmlns:a16="http://schemas.microsoft.com/office/drawing/2014/main" id="{57ABD51D-4C5B-4139-A7DA-9CEE8E44FD89}"/>
               </a:ext>
             </a:extLst>
           </p:cNvPr>
@@ -14915,7 +14779,7 @@
           <p:cNvPr id="17" name="Text 15">
             <a:extLst xmlns:a="http://schemas.openxmlformats.org/drawingml/2006/main">
               <a:ext uri="{FF2B5EF4-FFF2-40B4-BE49-F238E27FC236}">
-                <a16:creationId xmlns:a16="http://schemas.microsoft.com/office/drawing/2014/main" id="{8D479597-8A26-4A1C-B0A5-DB1E26D896E2}"/>
+                <a16:creationId xmlns:a16="http://schemas.microsoft.com/office/drawing/2014/main" id="{9860D9B3-D888-423A-AED8-AD7CB7485C5B}"/>
               </a:ext>
             </a:extLst>
           </p:cNvPr>
@@ -14962,7 +14826,7 @@
           <p:cNvPr id="18" name="Text 16">
             <a:extLst xmlns:a="http://schemas.openxmlformats.org/drawingml/2006/main">
               <a:ext uri="{FF2B5EF4-FFF2-40B4-BE49-F238E27FC236}">
-                <a16:creationId xmlns:a16="http://schemas.microsoft.com/office/drawing/2014/main" id="{C840B29E-0653-40FE-88EA-C7880AF6BB9B}"/>
+                <a16:creationId xmlns:a16="http://schemas.microsoft.com/office/drawing/2014/main" id="{B73AC8A0-1203-4415-8F46-C4B0EB4DF6D3}"/>
               </a:ext>
             </a:extLst>
           </p:cNvPr>
@@ -15009,7 +14873,7 @@
           <p:cNvPr id="19" name="Text 17">
             <a:extLst xmlns:a="http://schemas.openxmlformats.org/drawingml/2006/main">
               <a:ext uri="{FF2B5EF4-FFF2-40B4-BE49-F238E27FC236}">
-                <a16:creationId xmlns:a16="http://schemas.microsoft.com/office/drawing/2014/main" id="{B2F6911F-B2A3-48FD-99B4-D7E91BF14E8A}"/>
+                <a16:creationId xmlns:a16="http://schemas.microsoft.com/office/drawing/2014/main" id="{3ADEB647-970E-4E63-B24A-2F7586D68D14}"/>
               </a:ext>
             </a:extLst>
           </p:cNvPr>
@@ -15056,7 +14920,7 @@
           <p:cNvPr id="20" name="Text 18">
             <a:extLst xmlns:a="http://schemas.openxmlformats.org/drawingml/2006/main">
               <a:ext uri="{FF2B5EF4-FFF2-40B4-BE49-F238E27FC236}">
-                <a16:creationId xmlns:a16="http://schemas.microsoft.com/office/drawing/2014/main" id="{7FDDBE91-52EC-4E6D-A9A9-98DFEC36E446}"/>
+                <a16:creationId xmlns:a16="http://schemas.microsoft.com/office/drawing/2014/main" id="{38BD3C1A-A80A-42ED-8221-CFE3FD99822B}"/>
               </a:ext>
             </a:extLst>
           </p:cNvPr>
@@ -15103,7 +14967,7 @@
           <p:cNvPr id="21" name="Shape 19">
             <a:extLst xmlns:a="http://schemas.openxmlformats.org/drawingml/2006/main">
               <a:ext uri="{FF2B5EF4-FFF2-40B4-BE49-F238E27FC236}">
-                <a16:creationId xmlns:a16="http://schemas.microsoft.com/office/drawing/2014/main" id="{0302B001-E2AA-46F7-A7BA-9FD01F98B96A}"/>
+                <a16:creationId xmlns:a16="http://schemas.microsoft.com/office/drawing/2014/main" id="{3B1DA6CA-6A56-4066-BC1C-281745B80377}"/>
               </a:ext>
             </a:extLst>
           </p:cNvPr>
@@ -15138,7 +15002,7 @@
           <p:cNvPr id="22" name="Text 20">
             <a:extLst xmlns:a="http://schemas.openxmlformats.org/drawingml/2006/main">
               <a:ext uri="{FF2B5EF4-FFF2-40B4-BE49-F238E27FC236}">
-                <a16:creationId xmlns:a16="http://schemas.microsoft.com/office/drawing/2014/main" id="{F0A04F4A-DBD3-4D86-8FF7-FFBA7509450A}"/>
+                <a16:creationId xmlns:a16="http://schemas.microsoft.com/office/drawing/2014/main" id="{E89BE428-6777-4D01-B47C-7C1729480A08}"/>
               </a:ext>
             </a:extLst>
           </p:cNvPr>
@@ -15185,7 +15049,7 @@
           <p:cNvPr id="23" name="Text 21">
             <a:extLst xmlns:a="http://schemas.openxmlformats.org/drawingml/2006/main">
               <a:ext uri="{FF2B5EF4-FFF2-40B4-BE49-F238E27FC236}">
-                <a16:creationId xmlns:a16="http://schemas.microsoft.com/office/drawing/2014/main" id="{F542F403-2A47-494E-8310-6067F9705EEC}"/>
+                <a16:creationId xmlns:a16="http://schemas.microsoft.com/office/drawing/2014/main" id="{6E02075A-C5DA-4CB6-B561-5EC24F1D206F}"/>
               </a:ext>
             </a:extLst>
           </p:cNvPr>
@@ -15232,7 +15096,7 @@
           <p:cNvPr id="24" name="Text 22">
             <a:extLst xmlns:a="http://schemas.openxmlformats.org/drawingml/2006/main">
               <a:ext uri="{FF2B5EF4-FFF2-40B4-BE49-F238E27FC236}">
-                <a16:creationId xmlns:a16="http://schemas.microsoft.com/office/drawing/2014/main" id="{1AED4351-F5C0-4EDB-AC3F-7B5300F1ACE8}"/>
+                <a16:creationId xmlns:a16="http://schemas.microsoft.com/office/drawing/2014/main" id="{E6735AD3-D72E-4255-9547-D04B2BACE7F6}"/>
               </a:ext>
             </a:extLst>
           </p:cNvPr>
@@ -15279,7 +15143,7 @@
           <p:cNvPr id="25" name="Text 23">
             <a:extLst xmlns:a="http://schemas.openxmlformats.org/drawingml/2006/main">
               <a:ext uri="{FF2B5EF4-FFF2-40B4-BE49-F238E27FC236}">
-                <a16:creationId xmlns:a16="http://schemas.microsoft.com/office/drawing/2014/main" id="{F2DE3AB3-6115-45F2-82F9-5A173468FD7C}"/>
+                <a16:creationId xmlns:a16="http://schemas.microsoft.com/office/drawing/2014/main" id="{C6CCC712-FC8C-43B7-8315-041000B2664B}"/>
               </a:ext>
             </a:extLst>
           </p:cNvPr>
@@ -15326,7 +15190,7 @@
           <p:cNvPr id="26" name="Text 24">
             <a:extLst xmlns:a="http://schemas.openxmlformats.org/drawingml/2006/main">
               <a:ext uri="{FF2B5EF4-FFF2-40B4-BE49-F238E27FC236}">
-                <a16:creationId xmlns:a16="http://schemas.microsoft.com/office/drawing/2014/main" id="{68BE639B-0842-4B7B-B855-944055F05177}"/>
+                <a16:creationId xmlns:a16="http://schemas.microsoft.com/office/drawing/2014/main" id="{5AA4CF8B-BC94-4B99-9CA0-83037041322A}"/>
               </a:ext>
             </a:extLst>
           </p:cNvPr>
@@ -15373,7 +15237,7 @@
           <p:cNvPr id="27" name="Text 25">
             <a:extLst xmlns:a="http://schemas.openxmlformats.org/drawingml/2006/main">
               <a:ext uri="{FF2B5EF4-FFF2-40B4-BE49-F238E27FC236}">
-                <a16:creationId xmlns:a16="http://schemas.microsoft.com/office/drawing/2014/main" id="{039BBC7E-30D7-4642-ADE2-3E8A2CEBF75C}"/>
+                <a16:creationId xmlns:a16="http://schemas.microsoft.com/office/drawing/2014/main" id="{B7E1A38E-8631-4939-A363-4F8CAA89D143}"/>
               </a:ext>
             </a:extLst>
           </p:cNvPr>
@@ -15420,7 +15284,7 @@
           <p:cNvPr id="28" name="Text 26">
             <a:extLst xmlns:a="http://schemas.openxmlformats.org/drawingml/2006/main">
               <a:ext uri="{FF2B5EF4-FFF2-40B4-BE49-F238E27FC236}">
-                <a16:creationId xmlns:a16="http://schemas.microsoft.com/office/drawing/2014/main" id="{0EDCFEDE-526C-497A-A728-2336AFD90427}"/>
+                <a16:creationId xmlns:a16="http://schemas.microsoft.com/office/drawing/2014/main" id="{B280E087-C5B1-4BEC-A38B-EB7397E61E93}"/>
               </a:ext>
             </a:extLst>
           </p:cNvPr>
@@ -15467,7 +15331,7 @@
           <p:cNvPr id="29" name="Text 27">
             <a:extLst xmlns:a="http://schemas.openxmlformats.org/drawingml/2006/main">
               <a:ext uri="{FF2B5EF4-FFF2-40B4-BE49-F238E27FC236}">
-                <a16:creationId xmlns:a16="http://schemas.microsoft.com/office/drawing/2014/main" id="{2723BC1C-A154-4590-B074-8979D9F34DBF}"/>
+                <a16:creationId xmlns:a16="http://schemas.microsoft.com/office/drawing/2014/main" id="{60997D95-18D6-4A10-86D5-3381B78D95EC}"/>
               </a:ext>
             </a:extLst>
           </p:cNvPr>
@@ -15514,7 +15378,7 @@
           <p:cNvPr id="30" name="Text 28">
             <a:extLst xmlns:a="http://schemas.openxmlformats.org/drawingml/2006/main">
               <a:ext uri="{FF2B5EF4-FFF2-40B4-BE49-F238E27FC236}">
-                <a16:creationId xmlns:a16="http://schemas.microsoft.com/office/drawing/2014/main" id="{D0551CFE-DEFB-442C-A0E3-75268106A776}"/>
+                <a16:creationId xmlns:a16="http://schemas.microsoft.com/office/drawing/2014/main" id="{76F42855-B8B2-47E7-A92C-E78E7DCAB401}"/>
               </a:ext>
             </a:extLst>
           </p:cNvPr>
@@ -15559,7 +15423,7 @@
     </p:spTree>
     <p:extLst>
       <p:ext uri="{BB962C8B-B14F-4D97-AF65-F5344CB8AC3E}">
-        <p14:creationId xmlns:p14="http://schemas.microsoft.com/office/powerpoint/2010/main" val="110003553"/>
+        <p14:creationId xmlns:p14="http://schemas.microsoft.com/office/powerpoint/2010/main" val="1877577489"/>
       </p:ext>
     </p:extLst>
   </p:cSld>
@@ -15590,7 +15454,7 @@
           <p:cNvPr id="2" name="Text 0">
             <a:extLst xmlns:a="http://schemas.openxmlformats.org/drawingml/2006/main">
               <a:ext uri="{FF2B5EF4-FFF2-40B4-BE49-F238E27FC236}">
-                <a16:creationId xmlns:a16="http://schemas.microsoft.com/office/drawing/2014/main" id="{B8252173-6AE7-4F34-8ACF-8DE66C4A186D}"/>
+                <a16:creationId xmlns:a16="http://schemas.microsoft.com/office/drawing/2014/main" id="{D772E54C-9199-496E-BB68-F8EDB100D311}"/>
               </a:ext>
             </a:extLst>
           </p:cNvPr>
@@ -15637,7 +15501,7 @@
           <p:cNvPr id="3" name="Text 1">
             <a:extLst xmlns:a="http://schemas.openxmlformats.org/drawingml/2006/main">
               <a:ext uri="{FF2B5EF4-FFF2-40B4-BE49-F238E27FC236}">
-                <a16:creationId xmlns:a16="http://schemas.microsoft.com/office/drawing/2014/main" id="{5ADD2E6B-01F4-409C-9C8F-5A18779AB183}"/>
+                <a16:creationId xmlns:a16="http://schemas.microsoft.com/office/drawing/2014/main" id="{8E617EB5-5A0B-4730-BA7A-B83566DB40D8}"/>
               </a:ext>
             </a:extLst>
           </p:cNvPr>
@@ -15684,7 +15548,7 @@
           <p:cNvPr id="4" name="Shape 2">
             <a:extLst xmlns:a="http://schemas.openxmlformats.org/drawingml/2006/main">
               <a:ext uri="{FF2B5EF4-FFF2-40B4-BE49-F238E27FC236}">
-                <a16:creationId xmlns:a16="http://schemas.microsoft.com/office/drawing/2014/main" id="{12C0855D-75F6-423B-BBAB-4F4AF917EFA6}"/>
+                <a16:creationId xmlns:a16="http://schemas.microsoft.com/office/drawing/2014/main" id="{B73BA6B2-3EB3-47C3-9722-8334D162CC86}"/>
               </a:ext>
             </a:extLst>
           </p:cNvPr>
@@ -15719,7 +15583,7 @@
           <p:cNvPr id="5" name="Text 3">
             <a:extLst xmlns:a="http://schemas.openxmlformats.org/drawingml/2006/main">
               <a:ext uri="{FF2B5EF4-FFF2-40B4-BE49-F238E27FC236}">
-                <a16:creationId xmlns:a16="http://schemas.microsoft.com/office/drawing/2014/main" id="{600569FA-F51D-4B81-B3B3-C9985718E9C5}"/>
+                <a16:creationId xmlns:a16="http://schemas.microsoft.com/office/drawing/2014/main" id="{A43BF4AE-1706-4390-8A0C-C89E06BE0EC1}"/>
               </a:ext>
             </a:extLst>
           </p:cNvPr>
@@ -15766,7 +15630,7 @@
           <p:cNvPr id="6" name="Shape 4">
             <a:extLst xmlns:a="http://schemas.openxmlformats.org/drawingml/2006/main">
               <a:ext uri="{FF2B5EF4-FFF2-40B4-BE49-F238E27FC236}">
-                <a16:creationId xmlns:a16="http://schemas.microsoft.com/office/drawing/2014/main" id="{3AFB1CE9-F9DF-449A-A328-8A54BE27339D}"/>
+                <a16:creationId xmlns:a16="http://schemas.microsoft.com/office/drawing/2014/main" id="{7CC7DABC-B515-408F-9ABD-7248A2F00176}"/>
               </a:ext>
             </a:extLst>
           </p:cNvPr>
@@ -15797,7 +15661,7 @@
           <p:cNvPr id="7" name="Shape 5">
             <a:extLst xmlns:a="http://schemas.openxmlformats.org/drawingml/2006/main">
               <a:ext uri="{FF2B5EF4-FFF2-40B4-BE49-F238E27FC236}">
-                <a16:creationId xmlns:a16="http://schemas.microsoft.com/office/drawing/2014/main" id="{0D3FB76E-A91A-4065-80B1-0EC9430096E0}"/>
+                <a16:creationId xmlns:a16="http://schemas.microsoft.com/office/drawing/2014/main" id="{FDEE9ACD-E367-407A-8AD6-E68DBEDE9F06}"/>
               </a:ext>
             </a:extLst>
           </p:cNvPr>
@@ -15832,7 +15696,7 @@
           <p:cNvPr id="8" name="Text 6">
             <a:extLst xmlns:a="http://schemas.openxmlformats.org/drawingml/2006/main">
               <a:ext uri="{FF2B5EF4-FFF2-40B4-BE49-F238E27FC236}">
-                <a16:creationId xmlns:a16="http://schemas.microsoft.com/office/drawing/2014/main" id="{E6B581C0-5031-46B1-958B-22D9D6B9DFA8}"/>
+                <a16:creationId xmlns:a16="http://schemas.microsoft.com/office/drawing/2014/main" id="{717BFBFB-94D2-4500-BC21-F2F6AF3804DD}"/>
               </a:ext>
             </a:extLst>
           </p:cNvPr>
@@ -15879,7 +15743,7 @@
           <p:cNvPr id="9" name="Shape 7">
             <a:extLst xmlns:a="http://schemas.openxmlformats.org/drawingml/2006/main">
               <a:ext uri="{FF2B5EF4-FFF2-40B4-BE49-F238E27FC236}">
-                <a16:creationId xmlns:a16="http://schemas.microsoft.com/office/drawing/2014/main" id="{147E6F5C-7CCC-4804-87AD-C1ECE9F340EB}"/>
+                <a16:creationId xmlns:a16="http://schemas.microsoft.com/office/drawing/2014/main" id="{CF713A71-3EE9-4ADE-AC3F-1908BD677520}"/>
               </a:ext>
             </a:extLst>
           </p:cNvPr>
@@ -15914,7 +15778,7 @@
           <p:cNvPr id="10" name="Text 8">
             <a:extLst xmlns:a="http://schemas.openxmlformats.org/drawingml/2006/main">
               <a:ext uri="{FF2B5EF4-FFF2-40B4-BE49-F238E27FC236}">
-                <a16:creationId xmlns:a16="http://schemas.microsoft.com/office/drawing/2014/main" id="{84AC862C-25CA-4E4E-901B-E719FD875765}"/>
+                <a16:creationId xmlns:a16="http://schemas.microsoft.com/office/drawing/2014/main" id="{D6502907-D383-45CA-9824-23DB5A253729}"/>
               </a:ext>
             </a:extLst>
           </p:cNvPr>
@@ -15961,7 +15825,7 @@
           <p:cNvPr id="11" name="Text 9">
             <a:extLst xmlns:a="http://schemas.openxmlformats.org/drawingml/2006/main">
               <a:ext uri="{FF2B5EF4-FFF2-40B4-BE49-F238E27FC236}">
-                <a16:creationId xmlns:a16="http://schemas.microsoft.com/office/drawing/2014/main" id="{4571D6A7-C9E0-452D-8427-52D4AB1DACEE}"/>
+                <a16:creationId xmlns:a16="http://schemas.microsoft.com/office/drawing/2014/main" id="{A00A6715-7D2F-4029-81F2-F0FE3ED2F169}"/>
               </a:ext>
             </a:extLst>
           </p:cNvPr>
@@ -16024,7 +15888,7 @@
           <p:cNvPr id="12" name="Shape 10">
             <a:extLst xmlns:a="http://schemas.openxmlformats.org/drawingml/2006/main">
               <a:ext uri="{FF2B5EF4-FFF2-40B4-BE49-F238E27FC236}">
-                <a16:creationId xmlns:a16="http://schemas.microsoft.com/office/drawing/2014/main" id="{CB247FDB-A210-451F-9DD6-E2D756E9660D}"/>
+                <a16:creationId xmlns:a16="http://schemas.microsoft.com/office/drawing/2014/main" id="{1A7A5120-151A-4FDF-8AF8-02F14953786A}"/>
               </a:ext>
             </a:extLst>
           </p:cNvPr>
@@ -16059,7 +15923,7 @@
           <p:cNvPr id="13" name="Text 11">
             <a:extLst xmlns:a="http://schemas.openxmlformats.org/drawingml/2006/main">
               <a:ext uri="{FF2B5EF4-FFF2-40B4-BE49-F238E27FC236}">
-                <a16:creationId xmlns:a16="http://schemas.microsoft.com/office/drawing/2014/main" id="{3826EDC5-974D-4174-B46C-B4FEE94CCC4A}"/>
+                <a16:creationId xmlns:a16="http://schemas.microsoft.com/office/drawing/2014/main" id="{C8CAF781-2D4C-4ECF-902D-B3FCD4A1B698}"/>
               </a:ext>
             </a:extLst>
           </p:cNvPr>
@@ -16106,7 +15970,7 @@
           <p:cNvPr id="14" name="Text 12">
             <a:extLst xmlns:a="http://schemas.openxmlformats.org/drawingml/2006/main">
               <a:ext uri="{FF2B5EF4-FFF2-40B4-BE49-F238E27FC236}">
-                <a16:creationId xmlns:a16="http://schemas.microsoft.com/office/drawing/2014/main" id="{EBAB542C-4F62-4DDD-875A-996DADC2E334}"/>
+                <a16:creationId xmlns:a16="http://schemas.microsoft.com/office/drawing/2014/main" id="{378A90CC-1ADD-4070-A667-2670B341E856}"/>
               </a:ext>
             </a:extLst>
           </p:cNvPr>
@@ -16169,7 +16033,7 @@
           <p:cNvPr id="15" name="Shape 13">
             <a:extLst xmlns:a="http://schemas.openxmlformats.org/drawingml/2006/main">
               <a:ext uri="{FF2B5EF4-FFF2-40B4-BE49-F238E27FC236}">
-                <a16:creationId xmlns:a16="http://schemas.microsoft.com/office/drawing/2014/main" id="{8D3A6BA3-1F6C-45DD-8F51-1C1FDE54484C}"/>
+                <a16:creationId xmlns:a16="http://schemas.microsoft.com/office/drawing/2014/main" id="{CF0564E2-3791-4A20-BA00-DD47CBADACA1}"/>
               </a:ext>
             </a:extLst>
           </p:cNvPr>
@@ -16204,7 +16068,7 @@
           <p:cNvPr id="16" name="Text 14">
             <a:extLst xmlns:a="http://schemas.openxmlformats.org/drawingml/2006/main">
               <a:ext uri="{FF2B5EF4-FFF2-40B4-BE49-F238E27FC236}">
-                <a16:creationId xmlns:a16="http://schemas.microsoft.com/office/drawing/2014/main" id="{F44F0DC2-F9B2-4B0A-B995-BD1E4AECB33E}"/>
+                <a16:creationId xmlns:a16="http://schemas.microsoft.com/office/drawing/2014/main" id="{B6B0FF44-0D21-4760-97C0-EB1C64F36B93}"/>
               </a:ext>
             </a:extLst>
           </p:cNvPr>
@@ -16251,7 +16115,7 @@
           <p:cNvPr id="17" name="Text 15">
             <a:extLst xmlns:a="http://schemas.openxmlformats.org/drawingml/2006/main">
               <a:ext uri="{FF2B5EF4-FFF2-40B4-BE49-F238E27FC236}">
-                <a16:creationId xmlns:a16="http://schemas.microsoft.com/office/drawing/2014/main" id="{94A84413-714B-4DE5-8337-7BC2F6BAD115}"/>
+                <a16:creationId xmlns:a16="http://schemas.microsoft.com/office/drawing/2014/main" id="{85BD0D3A-F498-43DA-BE08-73B5535EA4ED}"/>
               </a:ext>
             </a:extLst>
           </p:cNvPr>
@@ -16314,7 +16178,7 @@
           <p:cNvPr id="18" name="Shape 16">
             <a:extLst xmlns:a="http://schemas.openxmlformats.org/drawingml/2006/main">
               <a:ext uri="{FF2B5EF4-FFF2-40B4-BE49-F238E27FC236}">
-                <a16:creationId xmlns:a16="http://schemas.microsoft.com/office/drawing/2014/main" id="{F3B7C617-DE95-4FEB-A32E-9A15E350B938}"/>
+                <a16:creationId xmlns:a16="http://schemas.microsoft.com/office/drawing/2014/main" id="{9BA0B89B-EC20-4F5D-BF26-BC00C31F80C6}"/>
               </a:ext>
             </a:extLst>
           </p:cNvPr>
@@ -16349,7 +16213,7 @@
           <p:cNvPr id="19" name="Text 17">
             <a:extLst xmlns:a="http://schemas.openxmlformats.org/drawingml/2006/main">
               <a:ext uri="{FF2B5EF4-FFF2-40B4-BE49-F238E27FC236}">
-                <a16:creationId xmlns:a16="http://schemas.microsoft.com/office/drawing/2014/main" id="{F9CD0B3C-B926-4CFD-BE37-E58790BB4099}"/>
+                <a16:creationId xmlns:a16="http://schemas.microsoft.com/office/drawing/2014/main" id="{F22D2254-438E-4DAA-8210-FEC22B8D1198}"/>
               </a:ext>
             </a:extLst>
           </p:cNvPr>
@@ -16396,7 +16260,7 @@
           <p:cNvPr id="20" name="Text 18">
             <a:extLst xmlns:a="http://schemas.openxmlformats.org/drawingml/2006/main">
               <a:ext uri="{FF2B5EF4-FFF2-40B4-BE49-F238E27FC236}">
-                <a16:creationId xmlns:a16="http://schemas.microsoft.com/office/drawing/2014/main" id="{ED38FAEA-DEBA-4B09-8C1B-9433BF5E3392}"/>
+                <a16:creationId xmlns:a16="http://schemas.microsoft.com/office/drawing/2014/main" id="{8C011002-7FB7-4F63-B689-A2DBA6E8EEA4}"/>
               </a:ext>
             </a:extLst>
           </p:cNvPr>
@@ -16459,7 +16323,7 @@
           <p:cNvPr id="21" name="Shape 19">
             <a:extLst xmlns:a="http://schemas.openxmlformats.org/drawingml/2006/main">
               <a:ext uri="{FF2B5EF4-FFF2-40B4-BE49-F238E27FC236}">
-                <a16:creationId xmlns:a16="http://schemas.microsoft.com/office/drawing/2014/main" id="{A7701BE4-D0CE-4724-AA79-036ABB74A685}"/>
+                <a16:creationId xmlns:a16="http://schemas.microsoft.com/office/drawing/2014/main" id="{D10C2000-9C88-48DA-A3D4-8463C65A0E44}"/>
               </a:ext>
             </a:extLst>
           </p:cNvPr>
@@ -16494,7 +16358,7 @@
           <p:cNvPr id="22" name="Text 20">
             <a:extLst xmlns:a="http://schemas.openxmlformats.org/drawingml/2006/main">
               <a:ext uri="{FF2B5EF4-FFF2-40B4-BE49-F238E27FC236}">
-                <a16:creationId xmlns:a16="http://schemas.microsoft.com/office/drawing/2014/main" id="{5400A2D3-1FE3-418C-A02B-CEC0F0CD529D}"/>
+                <a16:creationId xmlns:a16="http://schemas.microsoft.com/office/drawing/2014/main" id="{2AFA0BF8-3487-42AB-8A5A-96B3F44634F9}"/>
               </a:ext>
             </a:extLst>
           </p:cNvPr>
@@ -16541,7 +16405,7 @@
           <p:cNvPr id="23" name="Shape 21">
             <a:extLst xmlns:a="http://schemas.openxmlformats.org/drawingml/2006/main">
               <a:ext uri="{FF2B5EF4-FFF2-40B4-BE49-F238E27FC236}">
-                <a16:creationId xmlns:a16="http://schemas.microsoft.com/office/drawing/2014/main" id="{2C2328B2-082B-44BF-9842-9A3D7247CFD2}"/>
+                <a16:creationId xmlns:a16="http://schemas.microsoft.com/office/drawing/2014/main" id="{5947F754-829E-48C8-BA27-ED298F69E418}"/>
               </a:ext>
             </a:extLst>
           </p:cNvPr>
@@ -16574,7 +16438,7 @@
           <p:cNvPr id="24" name="Text 22">
             <a:extLst xmlns:a="http://schemas.openxmlformats.org/drawingml/2006/main">
               <a:ext uri="{FF2B5EF4-FFF2-40B4-BE49-F238E27FC236}">
-                <a16:creationId xmlns:a16="http://schemas.microsoft.com/office/drawing/2014/main" id="{B38AC704-E04E-4BAD-B8BC-0FB1476AA73F}"/>
+                <a16:creationId xmlns:a16="http://schemas.microsoft.com/office/drawing/2014/main" id="{E56906D0-C349-4E0B-9BA0-F608E17DF0C5}"/>
               </a:ext>
             </a:extLst>
           </p:cNvPr>
@@ -16621,7 +16485,7 @@
           <p:cNvPr id="25" name="Shape 23">
             <a:extLst xmlns:a="http://schemas.openxmlformats.org/drawingml/2006/main">
               <a:ext uri="{FF2B5EF4-FFF2-40B4-BE49-F238E27FC236}">
-                <a16:creationId xmlns:a16="http://schemas.microsoft.com/office/drawing/2014/main" id="{EE74E3EE-5860-4D0F-8D57-EAF33D9A6D49}"/>
+                <a16:creationId xmlns:a16="http://schemas.microsoft.com/office/drawing/2014/main" id="{CF78C72B-C649-4845-84B5-54205E0643EF}"/>
               </a:ext>
             </a:extLst>
           </p:cNvPr>
@@ -16654,7 +16518,7 @@
           <p:cNvPr id="26" name="Text 24">
             <a:extLst xmlns:a="http://schemas.openxmlformats.org/drawingml/2006/main">
               <a:ext uri="{FF2B5EF4-FFF2-40B4-BE49-F238E27FC236}">
-                <a16:creationId xmlns:a16="http://schemas.microsoft.com/office/drawing/2014/main" id="{0E387861-FB90-4899-9F9E-AAA44948BF1A}"/>
+                <a16:creationId xmlns:a16="http://schemas.microsoft.com/office/drawing/2014/main" id="{C3F80E14-FF56-4E20-BEC6-248667B23A07}"/>
               </a:ext>
             </a:extLst>
           </p:cNvPr>
@@ -16701,7 +16565,7 @@
           <p:cNvPr id="27" name="Shape 25">
             <a:extLst xmlns:a="http://schemas.openxmlformats.org/drawingml/2006/main">
               <a:ext uri="{FF2B5EF4-FFF2-40B4-BE49-F238E27FC236}">
-                <a16:creationId xmlns:a16="http://schemas.microsoft.com/office/drawing/2014/main" id="{09DC44F5-FB9F-4589-9FCD-3A22CEACABAE}"/>
+                <a16:creationId xmlns:a16="http://schemas.microsoft.com/office/drawing/2014/main" id="{F978D188-A4ED-4F3B-B63D-6678D9C66C59}"/>
               </a:ext>
             </a:extLst>
           </p:cNvPr>
@@ -16734,7 +16598,7 @@
           <p:cNvPr id="28" name="Text 26">
             <a:extLst xmlns:a="http://schemas.openxmlformats.org/drawingml/2006/main">
               <a:ext uri="{FF2B5EF4-FFF2-40B4-BE49-F238E27FC236}">
-                <a16:creationId xmlns:a16="http://schemas.microsoft.com/office/drawing/2014/main" id="{060D9A92-74CB-4D8D-A20F-BBFB7E225E36}"/>
+                <a16:creationId xmlns:a16="http://schemas.microsoft.com/office/drawing/2014/main" id="{820969EA-37B5-4E35-988B-102A2E7DEF72}"/>
               </a:ext>
             </a:extLst>
           </p:cNvPr>
@@ -16781,7 +16645,7 @@
           <p:cNvPr id="29" name="Shape 27">
             <a:extLst xmlns:a="http://schemas.openxmlformats.org/drawingml/2006/main">
               <a:ext uri="{FF2B5EF4-FFF2-40B4-BE49-F238E27FC236}">
-                <a16:creationId xmlns:a16="http://schemas.microsoft.com/office/drawing/2014/main" id="{CF4E53DE-DD2C-4EB6-BDA2-25F708434F34}"/>
+                <a16:creationId xmlns:a16="http://schemas.microsoft.com/office/drawing/2014/main" id="{53C86638-FF1D-4793-A756-0F450CC57A0F}"/>
               </a:ext>
             </a:extLst>
           </p:cNvPr>
@@ -16816,7 +16680,7 @@
           <p:cNvPr id="30" name="Text 28">
             <a:extLst xmlns:a="http://schemas.openxmlformats.org/drawingml/2006/main">
               <a:ext uri="{FF2B5EF4-FFF2-40B4-BE49-F238E27FC236}">
-                <a16:creationId xmlns:a16="http://schemas.microsoft.com/office/drawing/2014/main" id="{FFACB1E5-E55D-4C24-A06F-C0BBB64E5A3B}"/>
+                <a16:creationId xmlns:a16="http://schemas.microsoft.com/office/drawing/2014/main" id="{47E97361-C33F-4A11-B113-F66549AB33CF}"/>
               </a:ext>
             </a:extLst>
           </p:cNvPr>
@@ -16863,7 +16727,7 @@
           <p:cNvPr id="31" name="Text 29">
             <a:extLst xmlns:a="http://schemas.openxmlformats.org/drawingml/2006/main">
               <a:ext uri="{FF2B5EF4-FFF2-40B4-BE49-F238E27FC236}">
-                <a16:creationId xmlns:a16="http://schemas.microsoft.com/office/drawing/2014/main" id="{2397A7AE-AD03-468A-A0A6-FAEA0557149B}"/>
+                <a16:creationId xmlns:a16="http://schemas.microsoft.com/office/drawing/2014/main" id="{328052D3-09EA-4BFA-A657-7FADEB91FA0C}"/>
               </a:ext>
             </a:extLst>
           </p:cNvPr>
@@ -16926,7 +16790,7 @@
           <p:cNvPr id="32" name="Shape 30">
             <a:extLst xmlns:a="http://schemas.openxmlformats.org/drawingml/2006/main">
               <a:ext uri="{FF2B5EF4-FFF2-40B4-BE49-F238E27FC236}">
-                <a16:creationId xmlns:a16="http://schemas.microsoft.com/office/drawing/2014/main" id="{F50A44F0-0CB3-4C33-A385-CF6321EA6A8F}"/>
+                <a16:creationId xmlns:a16="http://schemas.microsoft.com/office/drawing/2014/main" id="{4FA476E1-04E7-48A7-A48A-37502AC02C73}"/>
               </a:ext>
             </a:extLst>
           </p:cNvPr>
@@ -16961,7 +16825,7 @@
           <p:cNvPr id="33" name="Text 31">
             <a:extLst xmlns:a="http://schemas.openxmlformats.org/drawingml/2006/main">
               <a:ext uri="{FF2B5EF4-FFF2-40B4-BE49-F238E27FC236}">
-                <a16:creationId xmlns:a16="http://schemas.microsoft.com/office/drawing/2014/main" id="{81A2887D-1707-41F3-A671-467641E9DD62}"/>
+                <a16:creationId xmlns:a16="http://schemas.microsoft.com/office/drawing/2014/main" id="{C27C8F44-E85A-493B-B359-70A40021B8F2}"/>
               </a:ext>
             </a:extLst>
           </p:cNvPr>
@@ -17008,7 +16872,7 @@
           <p:cNvPr id="34" name="Shape 32">
             <a:extLst xmlns:a="http://schemas.openxmlformats.org/drawingml/2006/main">
               <a:ext uri="{FF2B5EF4-FFF2-40B4-BE49-F238E27FC236}">
-                <a16:creationId xmlns:a16="http://schemas.microsoft.com/office/drawing/2014/main" id="{BD41F08B-A620-4530-BDB8-CBB719B3CD2A}"/>
+                <a16:creationId xmlns:a16="http://schemas.microsoft.com/office/drawing/2014/main" id="{236CB777-FEF9-459E-93C8-F91F6BC531C1}"/>
               </a:ext>
             </a:extLst>
           </p:cNvPr>
@@ -17043,7 +16907,7 @@
           <p:cNvPr id="35" name="Text 33">
             <a:extLst xmlns:a="http://schemas.openxmlformats.org/drawingml/2006/main">
               <a:ext uri="{FF2B5EF4-FFF2-40B4-BE49-F238E27FC236}">
-                <a16:creationId xmlns:a16="http://schemas.microsoft.com/office/drawing/2014/main" id="{CC887B62-8EA6-4FB8-A56D-27F0C4C7D803}"/>
+                <a16:creationId xmlns:a16="http://schemas.microsoft.com/office/drawing/2014/main" id="{F818007E-E794-4A7E-ABC2-500375D43D2B}"/>
               </a:ext>
             </a:extLst>
           </p:cNvPr>
@@ -17090,7 +16954,7 @@
           <p:cNvPr id="36" name="Shape 34">
             <a:extLst xmlns:a="http://schemas.openxmlformats.org/drawingml/2006/main">
               <a:ext uri="{FF2B5EF4-FFF2-40B4-BE49-F238E27FC236}">
-                <a16:creationId xmlns:a16="http://schemas.microsoft.com/office/drawing/2014/main" id="{3AF65EE1-4BE8-4B80-A001-C3BD4BC55F1B}"/>
+                <a16:creationId xmlns:a16="http://schemas.microsoft.com/office/drawing/2014/main" id="{838A0AA5-9A74-445E-9A3D-D823C503BBBB}"/>
               </a:ext>
             </a:extLst>
           </p:cNvPr>
@@ -17125,7 +16989,7 @@
           <p:cNvPr id="37" name="Text 35">
             <a:extLst xmlns:a="http://schemas.openxmlformats.org/drawingml/2006/main">
               <a:ext uri="{FF2B5EF4-FFF2-40B4-BE49-F238E27FC236}">
-                <a16:creationId xmlns:a16="http://schemas.microsoft.com/office/drawing/2014/main" id="{361C00C1-60F6-4C95-B660-0CE92AFA7441}"/>
+                <a16:creationId xmlns:a16="http://schemas.microsoft.com/office/drawing/2014/main" id="{D429796F-75E5-4D49-B358-0560EC2FADF7}"/>
               </a:ext>
             </a:extLst>
           </p:cNvPr>
@@ -17172,7 +17036,7 @@
           <p:cNvPr id="38" name="Shape 36">
             <a:extLst xmlns:a="http://schemas.openxmlformats.org/drawingml/2006/main">
               <a:ext uri="{FF2B5EF4-FFF2-40B4-BE49-F238E27FC236}">
-                <a16:creationId xmlns:a16="http://schemas.microsoft.com/office/drawing/2014/main" id="{6C8CE71F-8C27-4B91-916F-E5BEFD619452}"/>
+                <a16:creationId xmlns:a16="http://schemas.microsoft.com/office/drawing/2014/main" id="{D44E8749-98BE-4A9B-942C-928FCEA5089D}"/>
               </a:ext>
             </a:extLst>
           </p:cNvPr>
@@ -17207,7 +17071,7 @@
           <p:cNvPr id="39" name="Text 37">
             <a:extLst xmlns:a="http://schemas.openxmlformats.org/drawingml/2006/main">
               <a:ext uri="{FF2B5EF4-FFF2-40B4-BE49-F238E27FC236}">
-                <a16:creationId xmlns:a16="http://schemas.microsoft.com/office/drawing/2014/main" id="{2DF72045-A5D1-4F2F-9921-188A5B9B211A}"/>
+                <a16:creationId xmlns:a16="http://schemas.microsoft.com/office/drawing/2014/main" id="{2AA86FA2-F611-49D2-A7AD-04D32DC0D0A6}"/>
               </a:ext>
             </a:extLst>
           </p:cNvPr>
@@ -17254,7 +17118,7 @@
           <p:cNvPr id="40" name="Shape 38">
             <a:extLst xmlns:a="http://schemas.openxmlformats.org/drawingml/2006/main">
               <a:ext uri="{FF2B5EF4-FFF2-40B4-BE49-F238E27FC236}">
-                <a16:creationId xmlns:a16="http://schemas.microsoft.com/office/drawing/2014/main" id="{B05717E5-EA3D-4361-A53B-37FA6DA19251}"/>
+                <a16:creationId xmlns:a16="http://schemas.microsoft.com/office/drawing/2014/main" id="{657BB8A3-AF7D-4BE2-B1DA-208CD5626C3B}"/>
               </a:ext>
             </a:extLst>
           </p:cNvPr>
@@ -17289,7 +17153,7 @@
           <p:cNvPr id="41" name="Text 39">
             <a:extLst xmlns:a="http://schemas.openxmlformats.org/drawingml/2006/main">
               <a:ext uri="{FF2B5EF4-FFF2-40B4-BE49-F238E27FC236}">
-                <a16:creationId xmlns:a16="http://schemas.microsoft.com/office/drawing/2014/main" id="{AD1DEAB8-D325-4207-8D4B-EAAA1CA4EDD8}"/>
+                <a16:creationId xmlns:a16="http://schemas.microsoft.com/office/drawing/2014/main" id="{EEDF0DCC-0C1C-4E62-BA0C-8FE320AB838B}"/>
               </a:ext>
             </a:extLst>
           </p:cNvPr>
@@ -17336,7 +17200,7 @@
           <p:cNvPr id="42" name="Text 40">
             <a:extLst xmlns:a="http://schemas.openxmlformats.org/drawingml/2006/main">
               <a:ext uri="{FF2B5EF4-FFF2-40B4-BE49-F238E27FC236}">
-                <a16:creationId xmlns:a16="http://schemas.microsoft.com/office/drawing/2014/main" id="{49DD1DD7-DE04-46F7-9423-FD033CDE73A6}"/>
+                <a16:creationId xmlns:a16="http://schemas.microsoft.com/office/drawing/2014/main" id="{CCE5BA01-2B83-46C3-817D-6E62E15665B2}"/>
               </a:ext>
             </a:extLst>
           </p:cNvPr>
@@ -17383,7 +17247,7 @@
           <p:cNvPr id="43" name="Text 41">
             <a:extLst xmlns:a="http://schemas.openxmlformats.org/drawingml/2006/main">
               <a:ext uri="{FF2B5EF4-FFF2-40B4-BE49-F238E27FC236}">
-                <a16:creationId xmlns:a16="http://schemas.microsoft.com/office/drawing/2014/main" id="{E9575792-F152-4031-972C-D1CC3B1EAE94}"/>
+                <a16:creationId xmlns:a16="http://schemas.microsoft.com/office/drawing/2014/main" id="{843F8D52-07AB-47A4-9C31-A9CC63369B20}"/>
               </a:ext>
             </a:extLst>
           </p:cNvPr>
@@ -17428,7 +17292,7 @@
     </p:spTree>
     <p:extLst>
       <p:ext uri="{BB962C8B-B14F-4D97-AF65-F5344CB8AC3E}">
-        <p14:creationId xmlns:p14="http://schemas.microsoft.com/office/powerpoint/2010/main" val="905902655"/>
+        <p14:creationId xmlns:p14="http://schemas.microsoft.com/office/powerpoint/2010/main" val="1356362639"/>
       </p:ext>
     </p:extLst>
   </p:cSld>
@@ -17459,7 +17323,7 @@
           <p:cNvPr id="2" name="Text 0">
             <a:extLst xmlns:a="http://schemas.openxmlformats.org/drawingml/2006/main">
               <a:ext uri="{FF2B5EF4-FFF2-40B4-BE49-F238E27FC236}">
-                <a16:creationId xmlns:a16="http://schemas.microsoft.com/office/drawing/2014/main" id="{E6ADD80F-9AB4-43E1-B3C2-748182757CE3}"/>
+                <a16:creationId xmlns:a16="http://schemas.microsoft.com/office/drawing/2014/main" id="{615C689E-00B7-4B7B-AC03-81FE112C7317}"/>
               </a:ext>
             </a:extLst>
           </p:cNvPr>
@@ -17506,7 +17370,7 @@
           <p:cNvPr id="3" name="Text 1">
             <a:extLst xmlns:a="http://schemas.openxmlformats.org/drawingml/2006/main">
               <a:ext uri="{FF2B5EF4-FFF2-40B4-BE49-F238E27FC236}">
-                <a16:creationId xmlns:a16="http://schemas.microsoft.com/office/drawing/2014/main" id="{196CB77B-24FE-47D2-8C4D-5C5174F47360}"/>
+                <a16:creationId xmlns:a16="http://schemas.microsoft.com/office/drawing/2014/main" id="{E90A9548-F991-43B9-80B4-6CE95DB47734}"/>
               </a:ext>
             </a:extLst>
           </p:cNvPr>
@@ -17553,7 +17417,7 @@
           <p:cNvPr id="4" name="Shape 2">
             <a:extLst xmlns:a="http://schemas.openxmlformats.org/drawingml/2006/main">
               <a:ext uri="{FF2B5EF4-FFF2-40B4-BE49-F238E27FC236}">
-                <a16:creationId xmlns:a16="http://schemas.microsoft.com/office/drawing/2014/main" id="{2496745D-04C1-49DE-BFE2-5BF73AB60CD5}"/>
+                <a16:creationId xmlns:a16="http://schemas.microsoft.com/office/drawing/2014/main" id="{41375E31-01B2-47B5-9E92-EF0F51FD7E3C}"/>
               </a:ext>
             </a:extLst>
           </p:cNvPr>
@@ -17588,7 +17452,7 @@
           <p:cNvPr id="5" name="Text 3">
             <a:extLst xmlns:a="http://schemas.openxmlformats.org/drawingml/2006/main">
               <a:ext uri="{FF2B5EF4-FFF2-40B4-BE49-F238E27FC236}">
-                <a16:creationId xmlns:a16="http://schemas.microsoft.com/office/drawing/2014/main" id="{21BB874E-1F68-46C4-BE69-767552B33F3E}"/>
+                <a16:creationId xmlns:a16="http://schemas.microsoft.com/office/drawing/2014/main" id="{E38EC4ED-F4D7-42E2-890D-BDD5BF370DDB}"/>
               </a:ext>
             </a:extLst>
           </p:cNvPr>
@@ -17635,7 +17499,7 @@
           <p:cNvPr id="6" name="Shape 4">
             <a:extLst xmlns:a="http://schemas.openxmlformats.org/drawingml/2006/main">
               <a:ext uri="{FF2B5EF4-FFF2-40B4-BE49-F238E27FC236}">
-                <a16:creationId xmlns:a16="http://schemas.microsoft.com/office/drawing/2014/main" id="{EAE68CA2-FFE7-458C-B8C1-536D83DAE13A}"/>
+                <a16:creationId xmlns:a16="http://schemas.microsoft.com/office/drawing/2014/main" id="{6864BB14-922B-4A91-BBC2-2DDCCBB1DF74}"/>
               </a:ext>
             </a:extLst>
           </p:cNvPr>
@@ -17666,7 +17530,7 @@
           <p:cNvPr id="7" name="Shape 5">
             <a:extLst xmlns:a="http://schemas.openxmlformats.org/drawingml/2006/main">
               <a:ext uri="{FF2B5EF4-FFF2-40B4-BE49-F238E27FC236}">
-                <a16:creationId xmlns:a16="http://schemas.microsoft.com/office/drawing/2014/main" id="{E8AF787F-B6EB-447B-B3B1-C0C67038B5E7}"/>
+                <a16:creationId xmlns:a16="http://schemas.microsoft.com/office/drawing/2014/main" id="{0DBF0CE1-AAA6-4FC2-8720-7675E75B65E4}"/>
               </a:ext>
             </a:extLst>
           </p:cNvPr>
@@ -17701,7 +17565,7 @@
           <p:cNvPr id="8" name="Shape 6">
             <a:extLst xmlns:a="http://schemas.openxmlformats.org/drawingml/2006/main">
               <a:ext uri="{FF2B5EF4-FFF2-40B4-BE49-F238E27FC236}">
-                <a16:creationId xmlns:a16="http://schemas.microsoft.com/office/drawing/2014/main" id="{18927C8A-080D-4757-B852-54ED40DA68DC}"/>
+                <a16:creationId xmlns:a16="http://schemas.microsoft.com/office/drawing/2014/main" id="{B423AEF2-F301-4D4B-9F08-8D81853771A2}"/>
               </a:ext>
             </a:extLst>
           </p:cNvPr>
@@ -17736,7 +17600,7 @@
           <p:cNvPr id="9" name="Text 7">
             <a:extLst xmlns:a="http://schemas.openxmlformats.org/drawingml/2006/main">
               <a:ext uri="{FF2B5EF4-FFF2-40B4-BE49-F238E27FC236}">
-                <a16:creationId xmlns:a16="http://schemas.microsoft.com/office/drawing/2014/main" id="{EEF0F6C5-E365-43D6-AFAE-DCBEC50EEFA1}"/>
+                <a16:creationId xmlns:a16="http://schemas.microsoft.com/office/drawing/2014/main" id="{8EB4E725-A6BB-4987-BE48-89274EF2CA49}"/>
               </a:ext>
             </a:extLst>
           </p:cNvPr>
@@ -17783,7 +17647,7 @@
           <p:cNvPr id="10" name="Text 8">
             <a:extLst xmlns:a="http://schemas.openxmlformats.org/drawingml/2006/main">
               <a:ext uri="{FF2B5EF4-FFF2-40B4-BE49-F238E27FC236}">
-                <a16:creationId xmlns:a16="http://schemas.microsoft.com/office/drawing/2014/main" id="{417981D1-9823-4682-A983-408805023AFD}"/>
+                <a16:creationId xmlns:a16="http://schemas.microsoft.com/office/drawing/2014/main" id="{1FFDCADD-E09B-4AF2-A84D-979355157856}"/>
               </a:ext>
             </a:extLst>
           </p:cNvPr>
@@ -17830,7 +17694,7 @@
           <p:cNvPr id="11" name="Text 9">
             <a:extLst xmlns:a="http://schemas.openxmlformats.org/drawingml/2006/main">
               <a:ext uri="{FF2B5EF4-FFF2-40B4-BE49-F238E27FC236}">
-                <a16:creationId xmlns:a16="http://schemas.microsoft.com/office/drawing/2014/main" id="{2EBEA5F8-C1F8-414F-8008-8E8F82924576}"/>
+                <a16:creationId xmlns:a16="http://schemas.microsoft.com/office/drawing/2014/main" id="{EF0EBFBB-22B3-4436-92B1-5A701ED13E3D}"/>
               </a:ext>
             </a:extLst>
           </p:cNvPr>
@@ -17909,7 +17773,7 @@
           <p:cNvPr id="12" name="Shape 10">
             <a:extLst xmlns:a="http://schemas.openxmlformats.org/drawingml/2006/main">
               <a:ext uri="{FF2B5EF4-FFF2-40B4-BE49-F238E27FC236}">
-                <a16:creationId xmlns:a16="http://schemas.microsoft.com/office/drawing/2014/main" id="{C6A261EF-28D4-4117-BE56-1B9BB5F47AB7}"/>
+                <a16:creationId xmlns:a16="http://schemas.microsoft.com/office/drawing/2014/main" id="{50C481E0-AD0D-4D1C-B500-97AE5B2F455F}"/>
               </a:ext>
             </a:extLst>
           </p:cNvPr>
@@ -17941,7 +17805,7 @@
           <p:cNvPr id="13" name="Shape 11">
             <a:extLst xmlns:a="http://schemas.openxmlformats.org/drawingml/2006/main">
               <a:ext uri="{FF2B5EF4-FFF2-40B4-BE49-F238E27FC236}">
-                <a16:creationId xmlns:a16="http://schemas.microsoft.com/office/drawing/2014/main" id="{84D7A6F1-0426-4A00-AFCD-36AE170FC59F}"/>
+                <a16:creationId xmlns:a16="http://schemas.microsoft.com/office/drawing/2014/main" id="{9A2E7403-F339-4302-B18D-DD2A6B6AE934}"/>
               </a:ext>
             </a:extLst>
           </p:cNvPr>
@@ -17976,7 +17840,7 @@
           <p:cNvPr id="14" name="Shape 12">
             <a:extLst xmlns:a="http://schemas.openxmlformats.org/drawingml/2006/main">
               <a:ext uri="{FF2B5EF4-FFF2-40B4-BE49-F238E27FC236}">
-                <a16:creationId xmlns:a16="http://schemas.microsoft.com/office/drawing/2014/main" id="{D6CBB5BC-3766-46D0-B7B8-5D06211371D1}"/>
+                <a16:creationId xmlns:a16="http://schemas.microsoft.com/office/drawing/2014/main" id="{C714C209-0220-4786-B797-FECAC1E9093F}"/>
               </a:ext>
             </a:extLst>
           </p:cNvPr>
@@ -18011,7 +17875,7 @@
           <p:cNvPr id="15" name="Text 13">
             <a:extLst xmlns:a="http://schemas.openxmlformats.org/drawingml/2006/main">
               <a:ext uri="{FF2B5EF4-FFF2-40B4-BE49-F238E27FC236}">
-                <a16:creationId xmlns:a16="http://schemas.microsoft.com/office/drawing/2014/main" id="{5CCA3597-FE39-45C6-94FA-9CC3540C2097}"/>
+                <a16:creationId xmlns:a16="http://schemas.microsoft.com/office/drawing/2014/main" id="{A886AB2C-0C29-4DF6-AF46-7384C48040A0}"/>
               </a:ext>
             </a:extLst>
           </p:cNvPr>
@@ -18058,7 +17922,7 @@
           <p:cNvPr id="16" name="Text 14">
             <a:extLst xmlns:a="http://schemas.openxmlformats.org/drawingml/2006/main">
               <a:ext uri="{FF2B5EF4-FFF2-40B4-BE49-F238E27FC236}">
-                <a16:creationId xmlns:a16="http://schemas.microsoft.com/office/drawing/2014/main" id="{A15E872C-7618-47B8-B983-645DCA83C747}"/>
+                <a16:creationId xmlns:a16="http://schemas.microsoft.com/office/drawing/2014/main" id="{F8CD324E-2395-4936-BD68-FF8BFE9224A4}"/>
               </a:ext>
             </a:extLst>
           </p:cNvPr>
@@ -18105,7 +17969,7 @@
           <p:cNvPr id="17" name="Text 15">
             <a:extLst xmlns:a="http://schemas.openxmlformats.org/drawingml/2006/main">
               <a:ext uri="{FF2B5EF4-FFF2-40B4-BE49-F238E27FC236}">
-                <a16:creationId xmlns:a16="http://schemas.microsoft.com/office/drawing/2014/main" id="{1759726B-055A-4E55-BA5D-74BAF3D75AF5}"/>
+                <a16:creationId xmlns:a16="http://schemas.microsoft.com/office/drawing/2014/main" id="{0091DCBC-3477-4698-8638-77D41FB7F5C6}"/>
               </a:ext>
             </a:extLst>
           </p:cNvPr>
@@ -18184,7 +18048,7 @@
           <p:cNvPr id="18" name="Shape 16">
             <a:extLst xmlns:a="http://schemas.openxmlformats.org/drawingml/2006/main">
               <a:ext uri="{FF2B5EF4-FFF2-40B4-BE49-F238E27FC236}">
-                <a16:creationId xmlns:a16="http://schemas.microsoft.com/office/drawing/2014/main" id="{83C1CF51-1D70-48CD-907E-78216F41C9F7}"/>
+                <a16:creationId xmlns:a16="http://schemas.microsoft.com/office/drawing/2014/main" id="{2000AC0E-551F-4F10-B6EC-D60330832F6C}"/>
               </a:ext>
             </a:extLst>
           </p:cNvPr>
@@ -18216,7 +18080,7 @@
           <p:cNvPr id="19" name="Shape 17">
             <a:extLst xmlns:a="http://schemas.openxmlformats.org/drawingml/2006/main">
               <a:ext uri="{FF2B5EF4-FFF2-40B4-BE49-F238E27FC236}">
-                <a16:creationId xmlns:a16="http://schemas.microsoft.com/office/drawing/2014/main" id="{D6D87DFE-A0F3-40EC-A083-AEC55821D9A2}"/>
+                <a16:creationId xmlns:a16="http://schemas.microsoft.com/office/drawing/2014/main" id="{5FFE916F-4EE1-4BC6-A8AA-A8187DC4AC09}"/>
               </a:ext>
             </a:extLst>
           </p:cNvPr>
@@ -18251,7 +18115,7 @@
           <p:cNvPr id="20" name="Shape 18">
             <a:extLst xmlns:a="http://schemas.openxmlformats.org/drawingml/2006/main">
               <a:ext uri="{FF2B5EF4-FFF2-40B4-BE49-F238E27FC236}">
-                <a16:creationId xmlns:a16="http://schemas.microsoft.com/office/drawing/2014/main" id="{E8249B83-E269-4A22-8BC9-897516855153}"/>
+                <a16:creationId xmlns:a16="http://schemas.microsoft.com/office/drawing/2014/main" id="{DD0D0374-64E8-43B0-A1AC-C680D0261B36}"/>
               </a:ext>
             </a:extLst>
           </p:cNvPr>
@@ -18286,7 +18150,7 @@
           <p:cNvPr id="21" name="Text 19">
             <a:extLst xmlns:a="http://schemas.openxmlformats.org/drawingml/2006/main">
               <a:ext uri="{FF2B5EF4-FFF2-40B4-BE49-F238E27FC236}">
-                <a16:creationId xmlns:a16="http://schemas.microsoft.com/office/drawing/2014/main" id="{BAF8AFD9-1136-4077-B538-57B5FD629498}"/>
+                <a16:creationId xmlns:a16="http://schemas.microsoft.com/office/drawing/2014/main" id="{60375D18-25D6-4502-9CC2-5860879C91E4}"/>
               </a:ext>
             </a:extLst>
           </p:cNvPr>
@@ -18333,7 +18197,7 @@
           <p:cNvPr id="22" name="Text 20">
             <a:extLst xmlns:a="http://schemas.openxmlformats.org/drawingml/2006/main">
               <a:ext uri="{FF2B5EF4-FFF2-40B4-BE49-F238E27FC236}">
-                <a16:creationId xmlns:a16="http://schemas.microsoft.com/office/drawing/2014/main" id="{EB0376DA-C1A2-40C2-820C-F414965AC5F0}"/>
+                <a16:creationId xmlns:a16="http://schemas.microsoft.com/office/drawing/2014/main" id="{AB5BBE3C-BADF-4642-8679-04C10808CE0E}"/>
               </a:ext>
             </a:extLst>
           </p:cNvPr>
@@ -18380,7 +18244,7 @@
           <p:cNvPr id="23" name="Text 21">
             <a:extLst xmlns:a="http://schemas.openxmlformats.org/drawingml/2006/main">
               <a:ext uri="{FF2B5EF4-FFF2-40B4-BE49-F238E27FC236}">
-                <a16:creationId xmlns:a16="http://schemas.microsoft.com/office/drawing/2014/main" id="{3D451E61-E0CE-45D2-876D-3EFB60BF22E2}"/>
+                <a16:creationId xmlns:a16="http://schemas.microsoft.com/office/drawing/2014/main" id="{EFF6463A-FFF3-44FB-92A6-4E2C87987844}"/>
               </a:ext>
             </a:extLst>
           </p:cNvPr>
@@ -18459,7 +18323,7 @@
           <p:cNvPr id="24" name="Shape 22">
             <a:extLst xmlns:a="http://schemas.openxmlformats.org/drawingml/2006/main">
               <a:ext uri="{FF2B5EF4-FFF2-40B4-BE49-F238E27FC236}">
-                <a16:creationId xmlns:a16="http://schemas.microsoft.com/office/drawing/2014/main" id="{00710786-611E-4616-8355-7739C51C9593}"/>
+                <a16:creationId xmlns:a16="http://schemas.microsoft.com/office/drawing/2014/main" id="{C5EFF3ED-DF0E-491D-85F1-23E1793F1434}"/>
               </a:ext>
             </a:extLst>
           </p:cNvPr>
@@ -18491,7 +18355,7 @@
           <p:cNvPr id="25" name="Shape 23">
             <a:extLst xmlns:a="http://schemas.openxmlformats.org/drawingml/2006/main">
               <a:ext uri="{FF2B5EF4-FFF2-40B4-BE49-F238E27FC236}">
-                <a16:creationId xmlns:a16="http://schemas.microsoft.com/office/drawing/2014/main" id="{13B37204-1171-4C42-B08C-9ED2B26AFA9D}"/>
+                <a16:creationId xmlns:a16="http://schemas.microsoft.com/office/drawing/2014/main" id="{681AABA7-B187-4A8C-BDCA-08D96E47D175}"/>
               </a:ext>
             </a:extLst>
           </p:cNvPr>
@@ -18526,7 +18390,7 @@
           <p:cNvPr id="26" name="Shape 24">
             <a:extLst xmlns:a="http://schemas.openxmlformats.org/drawingml/2006/main">
               <a:ext uri="{FF2B5EF4-FFF2-40B4-BE49-F238E27FC236}">
-                <a16:creationId xmlns:a16="http://schemas.microsoft.com/office/drawing/2014/main" id="{17D09CE2-0A23-4E04-A462-EB4231F962AD}"/>
+                <a16:creationId xmlns:a16="http://schemas.microsoft.com/office/drawing/2014/main" id="{9FF8F833-8C7E-4845-A142-78202D3DD1C7}"/>
               </a:ext>
             </a:extLst>
           </p:cNvPr>
@@ -18561,7 +18425,7 @@
           <p:cNvPr id="27" name="Text 25">
             <a:extLst xmlns:a="http://schemas.openxmlformats.org/drawingml/2006/main">
               <a:ext uri="{FF2B5EF4-FFF2-40B4-BE49-F238E27FC236}">
-                <a16:creationId xmlns:a16="http://schemas.microsoft.com/office/drawing/2014/main" id="{4996D0A3-EA4D-4AD0-B550-1CFAC1C9540C}"/>
+                <a16:creationId xmlns:a16="http://schemas.microsoft.com/office/drawing/2014/main" id="{D08E7F83-8FF9-4071-A180-5DC436198E19}"/>
               </a:ext>
             </a:extLst>
           </p:cNvPr>
@@ -18608,7 +18472,7 @@
           <p:cNvPr id="28" name="Text 26">
             <a:extLst xmlns:a="http://schemas.openxmlformats.org/drawingml/2006/main">
               <a:ext uri="{FF2B5EF4-FFF2-40B4-BE49-F238E27FC236}">
-                <a16:creationId xmlns:a16="http://schemas.microsoft.com/office/drawing/2014/main" id="{AD59ABD9-BF17-4980-9A05-508B4F8961FE}"/>
+                <a16:creationId xmlns:a16="http://schemas.microsoft.com/office/drawing/2014/main" id="{89CD03D1-0C70-4773-A22F-26E25E43EC46}"/>
               </a:ext>
             </a:extLst>
           </p:cNvPr>
@@ -18655,7 +18519,7 @@
           <p:cNvPr id="29" name="Text 27">
             <a:extLst xmlns:a="http://schemas.openxmlformats.org/drawingml/2006/main">
               <a:ext uri="{FF2B5EF4-FFF2-40B4-BE49-F238E27FC236}">
-                <a16:creationId xmlns:a16="http://schemas.microsoft.com/office/drawing/2014/main" id="{C8C30E1A-DF71-4A06-989C-EA0EF02009C1}"/>
+                <a16:creationId xmlns:a16="http://schemas.microsoft.com/office/drawing/2014/main" id="{81FFD783-88C5-44D6-AB37-42A3B1D75B1C}"/>
               </a:ext>
             </a:extLst>
           </p:cNvPr>
@@ -18734,7 +18598,7 @@
           <p:cNvPr id="30" name="Text 28">
             <a:extLst xmlns:a="http://schemas.openxmlformats.org/drawingml/2006/main">
               <a:ext uri="{FF2B5EF4-FFF2-40B4-BE49-F238E27FC236}">
-                <a16:creationId xmlns:a16="http://schemas.microsoft.com/office/drawing/2014/main" id="{8903F9D8-6CBD-4F92-BB80-C23B1B136CE6}"/>
+                <a16:creationId xmlns:a16="http://schemas.microsoft.com/office/drawing/2014/main" id="{2B72B0A2-A88C-4B88-9175-CA616D6B861F}"/>
               </a:ext>
             </a:extLst>
           </p:cNvPr>
@@ -18781,7 +18645,7 @@
           <p:cNvPr id="31" name="Shape 29">
             <a:extLst xmlns:a="http://schemas.openxmlformats.org/drawingml/2006/main">
               <a:ext uri="{FF2B5EF4-FFF2-40B4-BE49-F238E27FC236}">
-                <a16:creationId xmlns:a16="http://schemas.microsoft.com/office/drawing/2014/main" id="{76ECE420-413F-4561-B3C0-608E02D28F0E}"/>
+                <a16:creationId xmlns:a16="http://schemas.microsoft.com/office/drawing/2014/main" id="{0B99966E-399E-4229-9ABB-EF0D63183328}"/>
               </a:ext>
             </a:extLst>
           </p:cNvPr>
@@ -18816,7 +18680,7 @@
           <p:cNvPr id="32" name="Text 30">
             <a:extLst xmlns:a="http://schemas.openxmlformats.org/drawingml/2006/main">
               <a:ext uri="{FF2B5EF4-FFF2-40B4-BE49-F238E27FC236}">
-                <a16:creationId xmlns:a16="http://schemas.microsoft.com/office/drawing/2014/main" id="{4903D190-8925-431B-9ABC-B45688D9E132}"/>
+                <a16:creationId xmlns:a16="http://schemas.microsoft.com/office/drawing/2014/main" id="{990F167A-C392-4F28-8CEB-8235C36030DD}"/>
               </a:ext>
             </a:extLst>
           </p:cNvPr>
@@ -18863,7 +18727,7 @@
           <p:cNvPr id="33" name="Text 31">
             <a:extLst xmlns:a="http://schemas.openxmlformats.org/drawingml/2006/main">
               <a:ext uri="{FF2B5EF4-FFF2-40B4-BE49-F238E27FC236}">
-                <a16:creationId xmlns:a16="http://schemas.microsoft.com/office/drawing/2014/main" id="{04253C05-B258-4B84-8BC3-D2A0992029F1}"/>
+                <a16:creationId xmlns:a16="http://schemas.microsoft.com/office/drawing/2014/main" id="{47FB8946-F26E-4CB3-8058-F0203EE307CD}"/>
               </a:ext>
             </a:extLst>
           </p:cNvPr>
@@ -18910,7 +18774,7 @@
           <p:cNvPr id="34" name="Shape 32">
             <a:extLst xmlns:a="http://schemas.openxmlformats.org/drawingml/2006/main">
               <a:ext uri="{FF2B5EF4-FFF2-40B4-BE49-F238E27FC236}">
-                <a16:creationId xmlns:a16="http://schemas.microsoft.com/office/drawing/2014/main" id="{E0042BFD-8B8C-4B5F-A47E-3A603983CE0F}"/>
+                <a16:creationId xmlns:a16="http://schemas.microsoft.com/office/drawing/2014/main" id="{1CBCB8FC-2926-442F-9322-2D1EC493BDFB}"/>
               </a:ext>
             </a:extLst>
           </p:cNvPr>
@@ -18945,7 +18809,7 @@
           <p:cNvPr id="35" name="Text 33">
             <a:extLst xmlns:a="http://schemas.openxmlformats.org/drawingml/2006/main">
               <a:ext uri="{FF2B5EF4-FFF2-40B4-BE49-F238E27FC236}">
-                <a16:creationId xmlns:a16="http://schemas.microsoft.com/office/drawing/2014/main" id="{F0D2CEF6-333E-49BA-B070-1142B5902DB1}"/>
+                <a16:creationId xmlns:a16="http://schemas.microsoft.com/office/drawing/2014/main" id="{98E1427A-8CF2-49A5-B11B-BAB3DC564586}"/>
               </a:ext>
             </a:extLst>
           </p:cNvPr>
@@ -18992,7 +18856,7 @@
           <p:cNvPr id="36" name="Text 34">
             <a:extLst xmlns:a="http://schemas.openxmlformats.org/drawingml/2006/main">
               <a:ext uri="{FF2B5EF4-FFF2-40B4-BE49-F238E27FC236}">
-                <a16:creationId xmlns:a16="http://schemas.microsoft.com/office/drawing/2014/main" id="{D0C2819E-0367-4CC4-AC42-9475078A8101}"/>
+                <a16:creationId xmlns:a16="http://schemas.microsoft.com/office/drawing/2014/main" id="{BE42557C-17F4-47BE-90DF-001041C79C58}"/>
               </a:ext>
             </a:extLst>
           </p:cNvPr>
@@ -19039,7 +18903,7 @@
           <p:cNvPr id="37" name="Shape 35">
             <a:extLst xmlns:a="http://schemas.openxmlformats.org/drawingml/2006/main">
               <a:ext uri="{FF2B5EF4-FFF2-40B4-BE49-F238E27FC236}">
-                <a16:creationId xmlns:a16="http://schemas.microsoft.com/office/drawing/2014/main" id="{49DC1C73-7344-407D-9A00-1944001AEE6D}"/>
+                <a16:creationId xmlns:a16="http://schemas.microsoft.com/office/drawing/2014/main" id="{6D233BFA-552E-4501-8759-F86E05FEE520}"/>
               </a:ext>
             </a:extLst>
           </p:cNvPr>
@@ -19074,7 +18938,7 @@
           <p:cNvPr id="38" name="Text 36">
             <a:extLst xmlns:a="http://schemas.openxmlformats.org/drawingml/2006/main">
               <a:ext uri="{FF2B5EF4-FFF2-40B4-BE49-F238E27FC236}">
-                <a16:creationId xmlns:a16="http://schemas.microsoft.com/office/drawing/2014/main" id="{2E89FD44-1FAA-4983-903D-A2677B8491D9}"/>
+                <a16:creationId xmlns:a16="http://schemas.microsoft.com/office/drawing/2014/main" id="{52FEA3B6-8BBC-41E5-A178-6F7C38EC8A3A}"/>
               </a:ext>
             </a:extLst>
           </p:cNvPr>
@@ -19121,7 +18985,7 @@
           <p:cNvPr id="39" name="Text 37">
             <a:extLst xmlns:a="http://schemas.openxmlformats.org/drawingml/2006/main">
               <a:ext uri="{FF2B5EF4-FFF2-40B4-BE49-F238E27FC236}">
-                <a16:creationId xmlns:a16="http://schemas.microsoft.com/office/drawing/2014/main" id="{73CDAAF6-2ECD-40FD-9C21-457661797505}"/>
+                <a16:creationId xmlns:a16="http://schemas.microsoft.com/office/drawing/2014/main" id="{338ACE28-EB7E-463F-A521-E0EB1BA9D005}"/>
               </a:ext>
             </a:extLst>
           </p:cNvPr>
@@ -19168,7 +19032,7 @@
           <p:cNvPr id="40" name="Shape 38">
             <a:extLst xmlns:a="http://schemas.openxmlformats.org/drawingml/2006/main">
               <a:ext uri="{FF2B5EF4-FFF2-40B4-BE49-F238E27FC236}">
-                <a16:creationId xmlns:a16="http://schemas.microsoft.com/office/drawing/2014/main" id="{998D7A60-66BD-4AF8-85EA-C18F022C5209}"/>
+                <a16:creationId xmlns:a16="http://schemas.microsoft.com/office/drawing/2014/main" id="{D4E4A8C8-0A9C-40EF-A37A-B22DEFA83DDE}"/>
               </a:ext>
             </a:extLst>
           </p:cNvPr>
@@ -19203,7 +19067,7 @@
           <p:cNvPr id="41" name="Text 39">
             <a:extLst xmlns:a="http://schemas.openxmlformats.org/drawingml/2006/main">
               <a:ext uri="{FF2B5EF4-FFF2-40B4-BE49-F238E27FC236}">
-                <a16:creationId xmlns:a16="http://schemas.microsoft.com/office/drawing/2014/main" id="{8D439EEF-52EC-4E91-8C4E-397D4D015FC1}"/>
+                <a16:creationId xmlns:a16="http://schemas.microsoft.com/office/drawing/2014/main" id="{5903A0CD-25D9-4C82-AD98-5DE4B95A27E8}"/>
               </a:ext>
             </a:extLst>
           </p:cNvPr>
@@ -19250,7 +19114,7 @@
           <p:cNvPr id="42" name="Text 40">
             <a:extLst xmlns:a="http://schemas.openxmlformats.org/drawingml/2006/main">
               <a:ext uri="{FF2B5EF4-FFF2-40B4-BE49-F238E27FC236}">
-                <a16:creationId xmlns:a16="http://schemas.microsoft.com/office/drawing/2014/main" id="{03EF00AB-16EF-45B5-B56E-244874AA280D}"/>
+                <a16:creationId xmlns:a16="http://schemas.microsoft.com/office/drawing/2014/main" id="{667CE73D-6FB0-4B9A-9905-9D078B03FD0F}"/>
               </a:ext>
             </a:extLst>
           </p:cNvPr>
@@ -19297,7 +19161,7 @@
           <p:cNvPr id="43" name="Text 41">
             <a:extLst xmlns:a="http://schemas.openxmlformats.org/drawingml/2006/main">
               <a:ext uri="{FF2B5EF4-FFF2-40B4-BE49-F238E27FC236}">
-                <a16:creationId xmlns:a16="http://schemas.microsoft.com/office/drawing/2014/main" id="{0B45193E-5705-4121-B49F-1EB408832D45}"/>
+                <a16:creationId xmlns:a16="http://schemas.microsoft.com/office/drawing/2014/main" id="{9E8E3724-3016-44EB-BE19-5168248CBD94}"/>
               </a:ext>
             </a:extLst>
           </p:cNvPr>
@@ -19344,7 +19208,7 @@
           <p:cNvPr id="44" name="Text 42">
             <a:extLst xmlns:a="http://schemas.openxmlformats.org/drawingml/2006/main">
               <a:ext uri="{FF2B5EF4-FFF2-40B4-BE49-F238E27FC236}">
-                <a16:creationId xmlns:a16="http://schemas.microsoft.com/office/drawing/2014/main" id="{4DC1F69C-6953-4C0A-93B5-64E883BBD636}"/>
+                <a16:creationId xmlns:a16="http://schemas.microsoft.com/office/drawing/2014/main" id="{3298B500-E497-42B8-A3D9-6E5225EF58B7}"/>
               </a:ext>
             </a:extLst>
           </p:cNvPr>
@@ -19391,7 +19255,7 @@
           <p:cNvPr id="45" name="Text 43">
             <a:extLst xmlns:a="http://schemas.openxmlformats.org/drawingml/2006/main">
               <a:ext uri="{FF2B5EF4-FFF2-40B4-BE49-F238E27FC236}">
-                <a16:creationId xmlns:a16="http://schemas.microsoft.com/office/drawing/2014/main" id="{F1B85F7F-FD79-4BA6-AD0A-08D5674B6494}"/>
+                <a16:creationId xmlns:a16="http://schemas.microsoft.com/office/drawing/2014/main" id="{C95BE944-C383-47DE-9B59-A827DE16FB56}"/>
               </a:ext>
             </a:extLst>
           </p:cNvPr>
@@ -19436,7 +19300,7 @@
     </p:spTree>
     <p:extLst>
       <p:ext uri="{BB962C8B-B14F-4D97-AF65-F5344CB8AC3E}">
-        <p14:creationId xmlns:p14="http://schemas.microsoft.com/office/powerpoint/2010/main" val="624748076"/>
+        <p14:creationId xmlns:p14="http://schemas.microsoft.com/office/powerpoint/2010/main" val="378005331"/>
       </p:ext>
     </p:extLst>
   </p:cSld>
@@ -19471,7 +19335,7 @@
           <p:nvPr/>
         </p:nvPicPr>
         <p:blipFill>
-          <a:blip xmlns:r="http://schemas.openxmlformats.org/officeDocument/2006/relationships" xmlns:a="http://schemas.openxmlformats.org/drawingml/2006/main" r:embed="R10ebf70ff9f6466f"/>
+          <a:blip xmlns:r="http://schemas.openxmlformats.org/officeDocument/2006/relationships" xmlns:a="http://schemas.openxmlformats.org/drawingml/2006/main" r:embed="R004ac143f95c4859"/>
           <a:stretch xmlns:a="http://schemas.openxmlformats.org/drawingml/2006/main">
             <a:fillRect l="0" t="0" r="0" b="0"/>
           </a:stretch>
@@ -19491,7 +19355,7 @@
           <p:cNvPr id="3" name="Text 0">
             <a:extLst xmlns:a="http://schemas.openxmlformats.org/drawingml/2006/main">
               <a:ext uri="{FF2B5EF4-FFF2-40B4-BE49-F238E27FC236}">
-                <a16:creationId xmlns:a16="http://schemas.microsoft.com/office/drawing/2014/main" id="{E8EEFBFB-231C-4777-BF76-59941294E80B}"/>
+                <a16:creationId xmlns:a16="http://schemas.microsoft.com/office/drawing/2014/main" id="{F3093E1F-CDB8-43B6-A054-FA84C66105AD}"/>
               </a:ext>
             </a:extLst>
           </p:cNvPr>
@@ -19538,7 +19402,7 @@
           <p:cNvPr id="4" name="Text 1">
             <a:extLst xmlns:a="http://schemas.openxmlformats.org/drawingml/2006/main">
               <a:ext uri="{FF2B5EF4-FFF2-40B4-BE49-F238E27FC236}">
-                <a16:creationId xmlns:a16="http://schemas.microsoft.com/office/drawing/2014/main" id="{298667E9-9A7B-4413-9196-F7A3558BA502}"/>
+                <a16:creationId xmlns:a16="http://schemas.microsoft.com/office/drawing/2014/main" id="{FC21CE5E-21B6-4560-A561-55EC97B9B1A4}"/>
               </a:ext>
             </a:extLst>
           </p:cNvPr>
@@ -19585,7 +19449,7 @@
           <p:cNvPr id="5" name="Text 2">
             <a:extLst xmlns:a="http://schemas.openxmlformats.org/drawingml/2006/main">
               <a:ext uri="{FF2B5EF4-FFF2-40B4-BE49-F238E27FC236}">
-                <a16:creationId xmlns:a16="http://schemas.microsoft.com/office/drawing/2014/main" id="{60B9B4EA-9DBF-40EE-A358-FF5E2D9070DC}"/>
+                <a16:creationId xmlns:a16="http://schemas.microsoft.com/office/drawing/2014/main" id="{9E39381B-3D66-46A1-90FC-7CB50D4A4C3B}"/>
               </a:ext>
             </a:extLst>
           </p:cNvPr>
@@ -19632,7 +19496,7 @@
           <p:cNvPr id="6" name="Shape 3">
             <a:extLst xmlns:a="http://schemas.openxmlformats.org/drawingml/2006/main">
               <a:ext uri="{FF2B5EF4-FFF2-40B4-BE49-F238E27FC236}">
-                <a16:creationId xmlns:a16="http://schemas.microsoft.com/office/drawing/2014/main" id="{CB863438-391E-4579-BBCD-75802E43F6EA}"/>
+                <a16:creationId xmlns:a16="http://schemas.microsoft.com/office/drawing/2014/main" id="{3ED5A627-91F7-4838-B18A-B0356043251E}"/>
               </a:ext>
             </a:extLst>
           </p:cNvPr>
@@ -19667,7 +19531,7 @@
           <p:cNvPr id="7" name="Shape 4">
             <a:extLst xmlns:a="http://schemas.openxmlformats.org/drawingml/2006/main">
               <a:ext uri="{FF2B5EF4-FFF2-40B4-BE49-F238E27FC236}">
-                <a16:creationId xmlns:a16="http://schemas.microsoft.com/office/drawing/2014/main" id="{D313226A-6C47-41B8-B185-5A5A94D5A666}"/>
+                <a16:creationId xmlns:a16="http://schemas.microsoft.com/office/drawing/2014/main" id="{304A6D4D-E7CD-403F-8BE2-DC97F47A75D8}"/>
               </a:ext>
             </a:extLst>
           </p:cNvPr>
@@ -19700,7 +19564,7 @@
           <p:cNvPr id="8" name="Text 5">
             <a:extLst xmlns:a="http://schemas.openxmlformats.org/drawingml/2006/main">
               <a:ext uri="{FF2B5EF4-FFF2-40B4-BE49-F238E27FC236}">
-                <a16:creationId xmlns:a16="http://schemas.microsoft.com/office/drawing/2014/main" id="{62DFAE5B-84DD-4824-83F4-2CA6FB158D4F}"/>
+                <a16:creationId xmlns:a16="http://schemas.microsoft.com/office/drawing/2014/main" id="{16654CC1-9BB4-444D-ADEA-F9BC7FF308BD}"/>
               </a:ext>
             </a:extLst>
           </p:cNvPr>
@@ -19747,7 +19611,7 @@
           <p:cNvPr id="9" name="Text 6">
             <a:extLst xmlns:a="http://schemas.openxmlformats.org/drawingml/2006/main">
               <a:ext uri="{FF2B5EF4-FFF2-40B4-BE49-F238E27FC236}">
-                <a16:creationId xmlns:a16="http://schemas.microsoft.com/office/drawing/2014/main" id="{390EAA53-191A-49BF-BA66-38AA4733F520}"/>
+                <a16:creationId xmlns:a16="http://schemas.microsoft.com/office/drawing/2014/main" id="{0AF8DE99-1F88-4AB5-9089-D79284E2BC50}"/>
               </a:ext>
             </a:extLst>
           </p:cNvPr>
@@ -19794,7 +19658,7 @@
           <p:cNvPr id="10" name="Shape 7">
             <a:extLst xmlns:a="http://schemas.openxmlformats.org/drawingml/2006/main">
               <a:ext uri="{FF2B5EF4-FFF2-40B4-BE49-F238E27FC236}">
-                <a16:creationId xmlns:a16="http://schemas.microsoft.com/office/drawing/2014/main" id="{AA82C89F-A6B7-43AC-A227-9751077ABD65}"/>
+                <a16:creationId xmlns:a16="http://schemas.microsoft.com/office/drawing/2014/main" id="{7C624664-6EBF-4408-9729-DF97E7647EF4}"/>
               </a:ext>
             </a:extLst>
           </p:cNvPr>
@@ -19829,7 +19693,7 @@
           <p:cNvPr id="11" name="Shape 8">
             <a:extLst xmlns:a="http://schemas.openxmlformats.org/drawingml/2006/main">
               <a:ext uri="{FF2B5EF4-FFF2-40B4-BE49-F238E27FC236}">
-                <a16:creationId xmlns:a16="http://schemas.microsoft.com/office/drawing/2014/main" id="{7A2F0C49-6E75-4C18-A7C3-DED4EE34E7FB}"/>
+                <a16:creationId xmlns:a16="http://schemas.microsoft.com/office/drawing/2014/main" id="{000FB733-16A2-4958-8227-160A92285E96}"/>
               </a:ext>
             </a:extLst>
           </p:cNvPr>
@@ -19862,7 +19726,7 @@
           <p:cNvPr id="12" name="Text 9">
             <a:extLst xmlns:a="http://schemas.openxmlformats.org/drawingml/2006/main">
               <a:ext uri="{FF2B5EF4-FFF2-40B4-BE49-F238E27FC236}">
-                <a16:creationId xmlns:a16="http://schemas.microsoft.com/office/drawing/2014/main" id="{A7B84BDB-21A4-4E81-8654-92C8AF823266}"/>
+                <a16:creationId xmlns:a16="http://schemas.microsoft.com/office/drawing/2014/main" id="{ED0EA193-A82B-4214-9961-5FEE1E9C1D61}"/>
               </a:ext>
             </a:extLst>
           </p:cNvPr>
@@ -19909,7 +19773,7 @@
           <p:cNvPr id="13" name="Text 10">
             <a:extLst xmlns:a="http://schemas.openxmlformats.org/drawingml/2006/main">
               <a:ext uri="{FF2B5EF4-FFF2-40B4-BE49-F238E27FC236}">
-                <a16:creationId xmlns:a16="http://schemas.microsoft.com/office/drawing/2014/main" id="{C1967DEF-A677-4750-A149-4E655603349A}"/>
+                <a16:creationId xmlns:a16="http://schemas.microsoft.com/office/drawing/2014/main" id="{80CFFDFD-4DA7-4ADE-97A0-A5FF9C833336}"/>
               </a:ext>
             </a:extLst>
           </p:cNvPr>
@@ -19956,7 +19820,7 @@
           <p:cNvPr id="14" name="Shape 11">
             <a:extLst xmlns:a="http://schemas.openxmlformats.org/drawingml/2006/main">
               <a:ext uri="{FF2B5EF4-FFF2-40B4-BE49-F238E27FC236}">
-                <a16:creationId xmlns:a16="http://schemas.microsoft.com/office/drawing/2014/main" id="{44A803B4-DAE1-47C5-A583-8FB17D17CE23}"/>
+                <a16:creationId xmlns:a16="http://schemas.microsoft.com/office/drawing/2014/main" id="{652B2CBA-6E24-474C-A64B-39C54E310322}"/>
               </a:ext>
             </a:extLst>
           </p:cNvPr>
@@ -19991,7 +19855,7 @@
           <p:cNvPr id="15" name="Shape 12">
             <a:extLst xmlns:a="http://schemas.openxmlformats.org/drawingml/2006/main">
               <a:ext uri="{FF2B5EF4-FFF2-40B4-BE49-F238E27FC236}">
-                <a16:creationId xmlns:a16="http://schemas.microsoft.com/office/drawing/2014/main" id="{9C11F0EC-40C6-4C05-AA0D-92F91E864EAE}"/>
+                <a16:creationId xmlns:a16="http://schemas.microsoft.com/office/drawing/2014/main" id="{47FD6815-75AC-4CFF-8E32-5413227D98CF}"/>
               </a:ext>
             </a:extLst>
           </p:cNvPr>
@@ -20024,7 +19888,7 @@
           <p:cNvPr id="16" name="Text 13">
             <a:extLst xmlns:a="http://schemas.openxmlformats.org/drawingml/2006/main">
               <a:ext uri="{FF2B5EF4-FFF2-40B4-BE49-F238E27FC236}">
-                <a16:creationId xmlns:a16="http://schemas.microsoft.com/office/drawing/2014/main" id="{65DA2FD2-9139-4790-91F3-D77CDF18CC02}"/>
+                <a16:creationId xmlns:a16="http://schemas.microsoft.com/office/drawing/2014/main" id="{1D66FD0B-61AE-4A52-A92D-4A441432D913}"/>
               </a:ext>
             </a:extLst>
           </p:cNvPr>
@@ -20071,7 +19935,7 @@
           <p:cNvPr id="17" name="Text 14">
             <a:extLst xmlns:a="http://schemas.openxmlformats.org/drawingml/2006/main">
               <a:ext uri="{FF2B5EF4-FFF2-40B4-BE49-F238E27FC236}">
-                <a16:creationId xmlns:a16="http://schemas.microsoft.com/office/drawing/2014/main" id="{C2286D03-FAAC-4F13-9171-09918880D5F3}"/>
+                <a16:creationId xmlns:a16="http://schemas.microsoft.com/office/drawing/2014/main" id="{A1BE7832-E4A2-4707-8190-36C1AE2C3A5B}"/>
               </a:ext>
             </a:extLst>
           </p:cNvPr>
@@ -20092,7 +19956,7 @@
         </p:spPr>
         <p:txBody>
           <a:bodyPr xmlns:a="http://schemas.openxmlformats.org/drawingml/2006/main" wrap="square" lIns="0" tIns="0" rIns="0" bIns="0" anchor="ctr">
-            <a:normAutofit/>
+            <a:normAutofit fontScale="100000"/>
           </a:bodyPr>
           <a:lstStyle xmlns:a="http://schemas.openxmlformats.org/drawingml/2006/main"/>
           <a:p xmlns:a="http://schemas.openxmlformats.org/drawingml/2006/main">
@@ -20108,7 +19972,7 @@
                 <a:ea typeface="PingFang SC"/>
                 <a:cs typeface="PingFang SC"/>
               </a:rPr>
-              <a:t>语义映射、来源追溯与项目级信任</a:t>
+              <a:t>产品能力体系与清晰执行边界</a:t>
             </a:r>
           </a:p>
         </p:txBody>
@@ -20118,7 +19982,7 @@
           <p:cNvPr id="18" name="Shape 15">
             <a:extLst xmlns:a="http://schemas.openxmlformats.org/drawingml/2006/main">
               <a:ext uri="{FF2B5EF4-FFF2-40B4-BE49-F238E27FC236}">
-                <a16:creationId xmlns:a16="http://schemas.microsoft.com/office/drawing/2014/main" id="{3ACFD829-2477-444B-B06E-98DCB539C4E6}"/>
+                <a16:creationId xmlns:a16="http://schemas.microsoft.com/office/drawing/2014/main" id="{FEFD512D-F967-4644-8525-E04F6A984FDF}"/>
               </a:ext>
             </a:extLst>
           </p:cNvPr>
@@ -20153,7 +20017,7 @@
           <p:cNvPr id="19" name="Shape 16">
             <a:extLst xmlns:a="http://schemas.openxmlformats.org/drawingml/2006/main">
               <a:ext uri="{FF2B5EF4-FFF2-40B4-BE49-F238E27FC236}">
-                <a16:creationId xmlns:a16="http://schemas.microsoft.com/office/drawing/2014/main" id="{4B602EBF-4DC5-4FBA-A0EF-78273D4D7303}"/>
+                <a16:creationId xmlns:a16="http://schemas.microsoft.com/office/drawing/2014/main" id="{2CFDAFD6-2247-401B-9566-29160A0D269C}"/>
               </a:ext>
             </a:extLst>
           </p:cNvPr>
@@ -20186,7 +20050,7 @@
           <p:cNvPr id="20" name="Text 17">
             <a:extLst xmlns:a="http://schemas.openxmlformats.org/drawingml/2006/main">
               <a:ext uri="{FF2B5EF4-FFF2-40B4-BE49-F238E27FC236}">
-                <a16:creationId xmlns:a16="http://schemas.microsoft.com/office/drawing/2014/main" id="{A4C78A3E-B617-4B0B-AF2A-AB0EA3913F55}"/>
+                <a16:creationId xmlns:a16="http://schemas.microsoft.com/office/drawing/2014/main" id="{91B28CAC-D4DB-4FC5-B813-61DCB36D80A3}"/>
               </a:ext>
             </a:extLst>
           </p:cNvPr>
@@ -20233,7 +20097,7 @@
           <p:cNvPr id="21" name="Text 18">
             <a:extLst xmlns:a="http://schemas.openxmlformats.org/drawingml/2006/main">
               <a:ext uri="{FF2B5EF4-FFF2-40B4-BE49-F238E27FC236}">
-                <a16:creationId xmlns:a16="http://schemas.microsoft.com/office/drawing/2014/main" id="{DB63484F-5105-4843-A65A-8274495498C3}"/>
+                <a16:creationId xmlns:a16="http://schemas.microsoft.com/office/drawing/2014/main" id="{42BF9251-F685-4500-A17B-E94B6B12989D}"/>
               </a:ext>
             </a:extLst>
           </p:cNvPr>
@@ -20280,7 +20144,7 @@
           <p:cNvPr id="22" name="Shape 19">
             <a:extLst xmlns:a="http://schemas.openxmlformats.org/drawingml/2006/main">
               <a:ext uri="{FF2B5EF4-FFF2-40B4-BE49-F238E27FC236}">
-                <a16:creationId xmlns:a16="http://schemas.microsoft.com/office/drawing/2014/main" id="{E16F88B5-7B29-4E07-9FF3-18BA0609C6A3}"/>
+                <a16:creationId xmlns:a16="http://schemas.microsoft.com/office/drawing/2014/main" id="{CAF18405-4187-43A6-A720-F58232C59D91}"/>
               </a:ext>
             </a:extLst>
           </p:cNvPr>
@@ -20315,7 +20179,7 @@
           <p:cNvPr id="23" name="Shape 20">
             <a:extLst xmlns:a="http://schemas.openxmlformats.org/drawingml/2006/main">
               <a:ext uri="{FF2B5EF4-FFF2-40B4-BE49-F238E27FC236}">
-                <a16:creationId xmlns:a16="http://schemas.microsoft.com/office/drawing/2014/main" id="{E1B1E55F-0710-450B-AFD5-28F4AEB149A0}"/>
+                <a16:creationId xmlns:a16="http://schemas.microsoft.com/office/drawing/2014/main" id="{9A0E4358-B839-4B6F-8601-A85E3E0A077C}"/>
               </a:ext>
             </a:extLst>
           </p:cNvPr>
@@ -20348,7 +20212,7 @@
           <p:cNvPr id="24" name="Text 21">
             <a:extLst xmlns:a="http://schemas.openxmlformats.org/drawingml/2006/main">
               <a:ext uri="{FF2B5EF4-FFF2-40B4-BE49-F238E27FC236}">
-                <a16:creationId xmlns:a16="http://schemas.microsoft.com/office/drawing/2014/main" id="{327F85C4-7393-4562-980F-3602D0F730BB}"/>
+                <a16:creationId xmlns:a16="http://schemas.microsoft.com/office/drawing/2014/main" id="{9192AAF5-7643-4932-B544-47BFEA7F24F3}"/>
               </a:ext>
             </a:extLst>
           </p:cNvPr>
@@ -20395,7 +20259,7 @@
           <p:cNvPr id="25" name="Text 22">
             <a:extLst xmlns:a="http://schemas.openxmlformats.org/drawingml/2006/main">
               <a:ext uri="{FF2B5EF4-FFF2-40B4-BE49-F238E27FC236}">
-                <a16:creationId xmlns:a16="http://schemas.microsoft.com/office/drawing/2014/main" id="{61539B04-0071-4660-A3BA-506FE78C9FF4}"/>
+                <a16:creationId xmlns:a16="http://schemas.microsoft.com/office/drawing/2014/main" id="{9308CEC6-633E-4E6C-A3A4-5F69FF1A9579}"/>
               </a:ext>
             </a:extLst>
           </p:cNvPr>
@@ -20442,7 +20306,7 @@
           <p:cNvPr id="26" name="Shape 23">
             <a:extLst xmlns:a="http://schemas.openxmlformats.org/drawingml/2006/main">
               <a:ext uri="{FF2B5EF4-FFF2-40B4-BE49-F238E27FC236}">
-                <a16:creationId xmlns:a16="http://schemas.microsoft.com/office/drawing/2014/main" id="{A57E35C5-CFA6-492F-A83B-11A5FC2AFE48}"/>
+                <a16:creationId xmlns:a16="http://schemas.microsoft.com/office/drawing/2014/main" id="{E5989047-2D07-4951-BA10-AF8272C99A71}"/>
               </a:ext>
             </a:extLst>
           </p:cNvPr>
@@ -20477,7 +20341,7 @@
           <p:cNvPr id="27" name="Text 24">
             <a:extLst xmlns:a="http://schemas.openxmlformats.org/drawingml/2006/main">
               <a:ext uri="{FF2B5EF4-FFF2-40B4-BE49-F238E27FC236}">
-                <a16:creationId xmlns:a16="http://schemas.microsoft.com/office/drawing/2014/main" id="{A0242197-138E-4D59-B3CB-96D7CBA09360}"/>
+                <a16:creationId xmlns:a16="http://schemas.microsoft.com/office/drawing/2014/main" id="{2D37AC81-0C11-4ABE-BDAD-99AD05D4C8EA}"/>
               </a:ext>
             </a:extLst>
           </p:cNvPr>
@@ -20524,7 +20388,7 @@
           <p:cNvPr id="28" name="Text 25">
             <a:extLst xmlns:a="http://schemas.openxmlformats.org/drawingml/2006/main">
               <a:ext uri="{FF2B5EF4-FFF2-40B4-BE49-F238E27FC236}">
-                <a16:creationId xmlns:a16="http://schemas.microsoft.com/office/drawing/2014/main" id="{8EC86760-D388-4405-ABC7-F6F671566F0C}"/>
+                <a16:creationId xmlns:a16="http://schemas.microsoft.com/office/drawing/2014/main" id="{D0671FFC-D94B-4623-A230-D6B85B1A859B}"/>
               </a:ext>
             </a:extLst>
           </p:cNvPr>
@@ -20569,7 +20433,7 @@
     </p:spTree>
     <p:extLst>
       <p:ext uri="{BB962C8B-B14F-4D97-AF65-F5344CB8AC3E}">
-        <p14:creationId xmlns:p14="http://schemas.microsoft.com/office/powerpoint/2010/main" val="1215328944"/>
+        <p14:creationId xmlns:p14="http://schemas.microsoft.com/office/powerpoint/2010/main" val="2049071992"/>
       </p:ext>
     </p:extLst>
   </p:cSld>
@@ -20600,7 +20464,7 @@
           <p:cNvPr id="2" name="Text 0">
             <a:extLst xmlns:a="http://schemas.openxmlformats.org/drawingml/2006/main">
               <a:ext uri="{FF2B5EF4-FFF2-40B4-BE49-F238E27FC236}">
-                <a16:creationId xmlns:a16="http://schemas.microsoft.com/office/drawing/2014/main" id="{8E52FCE5-69C3-48AB-BE47-89DE8EF7C021}"/>
+                <a16:creationId xmlns:a16="http://schemas.microsoft.com/office/drawing/2014/main" id="{D089D4DC-9B08-429F-8C11-251D9CF6B8C3}"/>
               </a:ext>
             </a:extLst>
           </p:cNvPr>
@@ -20647,7 +20511,7 @@
           <p:cNvPr id="3" name="Text 1">
             <a:extLst xmlns:a="http://schemas.openxmlformats.org/drawingml/2006/main">
               <a:ext uri="{FF2B5EF4-FFF2-40B4-BE49-F238E27FC236}">
-                <a16:creationId xmlns:a16="http://schemas.microsoft.com/office/drawing/2014/main" id="{14FC8516-59C1-4E01-AD37-3B63A5DFA773}"/>
+                <a16:creationId xmlns:a16="http://schemas.microsoft.com/office/drawing/2014/main" id="{16B58548-0207-4EB2-8A3B-1502CEEFA837}"/>
               </a:ext>
             </a:extLst>
           </p:cNvPr>
@@ -20694,7 +20558,7 @@
           <p:cNvPr id="4" name="Shape 2">
             <a:extLst xmlns:a="http://schemas.openxmlformats.org/drawingml/2006/main">
               <a:ext uri="{FF2B5EF4-FFF2-40B4-BE49-F238E27FC236}">
-                <a16:creationId xmlns:a16="http://schemas.microsoft.com/office/drawing/2014/main" id="{61322A62-1204-44B2-A5D9-04489D739036}"/>
+                <a16:creationId xmlns:a16="http://schemas.microsoft.com/office/drawing/2014/main" id="{F0DA6503-CC8B-4689-801C-0339D8C333B9}"/>
               </a:ext>
             </a:extLst>
           </p:cNvPr>
@@ -20729,7 +20593,7 @@
           <p:cNvPr id="5" name="Text 3">
             <a:extLst xmlns:a="http://schemas.openxmlformats.org/drawingml/2006/main">
               <a:ext uri="{FF2B5EF4-FFF2-40B4-BE49-F238E27FC236}">
-                <a16:creationId xmlns:a16="http://schemas.microsoft.com/office/drawing/2014/main" id="{5CAECA95-FF48-4BDD-A592-1141388E0B6F}"/>
+                <a16:creationId xmlns:a16="http://schemas.microsoft.com/office/drawing/2014/main" id="{5365CFD7-8E3D-4AC0-87D7-866332455CD3}"/>
               </a:ext>
             </a:extLst>
           </p:cNvPr>
@@ -20776,7 +20640,7 @@
           <p:cNvPr id="6" name="Shape 4">
             <a:extLst xmlns:a="http://schemas.openxmlformats.org/drawingml/2006/main">
               <a:ext uri="{FF2B5EF4-FFF2-40B4-BE49-F238E27FC236}">
-                <a16:creationId xmlns:a16="http://schemas.microsoft.com/office/drawing/2014/main" id="{D2DA4808-4B72-463A-9C2D-BB89D90941EC}"/>
+                <a16:creationId xmlns:a16="http://schemas.microsoft.com/office/drawing/2014/main" id="{CFC55ECB-2115-41B1-B7B7-EF3F1DBCB964}"/>
               </a:ext>
             </a:extLst>
           </p:cNvPr>
@@ -20807,7 +20671,7 @@
           <p:cNvPr id="7" name="Text 5">
             <a:extLst xmlns:a="http://schemas.openxmlformats.org/drawingml/2006/main">
               <a:ext uri="{FF2B5EF4-FFF2-40B4-BE49-F238E27FC236}">
-                <a16:creationId xmlns:a16="http://schemas.microsoft.com/office/drawing/2014/main" id="{31AF54CB-8262-496C-B8DE-3239CC2B5873}"/>
+                <a16:creationId xmlns:a16="http://schemas.microsoft.com/office/drawing/2014/main" id="{49CFF0DF-2552-4720-835A-D1A5B74C37D0}"/>
               </a:ext>
             </a:extLst>
           </p:cNvPr>
@@ -20854,7 +20718,7 @@
           <p:cNvPr id="8" name="Shape 6">
             <a:extLst xmlns:a="http://schemas.openxmlformats.org/drawingml/2006/main">
               <a:ext uri="{FF2B5EF4-FFF2-40B4-BE49-F238E27FC236}">
-                <a16:creationId xmlns:a16="http://schemas.microsoft.com/office/drawing/2014/main" id="{7F63AA30-FC21-49A4-9CBA-9FCC1A968647}"/>
+                <a16:creationId xmlns:a16="http://schemas.microsoft.com/office/drawing/2014/main" id="{4D8971C6-BC68-4BA6-98DE-3802581BBDF8}"/>
               </a:ext>
             </a:extLst>
           </p:cNvPr>
@@ -20889,7 +20753,7 @@
           <p:cNvPr id="9" name="Text 7">
             <a:extLst xmlns:a="http://schemas.openxmlformats.org/drawingml/2006/main">
               <a:ext uri="{FF2B5EF4-FFF2-40B4-BE49-F238E27FC236}">
-                <a16:creationId xmlns:a16="http://schemas.microsoft.com/office/drawing/2014/main" id="{18639BB8-C9B9-4FFF-A42F-070976B64AB7}"/>
+                <a16:creationId xmlns:a16="http://schemas.microsoft.com/office/drawing/2014/main" id="{BBF7CAFB-A73A-4E0F-AA34-7A33295FD734}"/>
               </a:ext>
             </a:extLst>
           </p:cNvPr>
@@ -20936,7 +20800,7 @@
           <p:cNvPr id="10" name="Text 8">
             <a:extLst xmlns:a="http://schemas.openxmlformats.org/drawingml/2006/main">
               <a:ext uri="{FF2B5EF4-FFF2-40B4-BE49-F238E27FC236}">
-                <a16:creationId xmlns:a16="http://schemas.microsoft.com/office/drawing/2014/main" id="{DB27435B-2F85-4A7D-B07F-F33A1BD1E1F0}"/>
+                <a16:creationId xmlns:a16="http://schemas.microsoft.com/office/drawing/2014/main" id="{9A6727AD-F661-4518-9675-D1A517453510}"/>
               </a:ext>
             </a:extLst>
           </p:cNvPr>
@@ -20983,7 +20847,7 @@
           <p:cNvPr id="11" name="Text 9">
             <a:extLst xmlns:a="http://schemas.openxmlformats.org/drawingml/2006/main">
               <a:ext uri="{FF2B5EF4-FFF2-40B4-BE49-F238E27FC236}">
-                <a16:creationId xmlns:a16="http://schemas.microsoft.com/office/drawing/2014/main" id="{3C49538C-C7D9-47BC-8670-1F9419717288}"/>
+                <a16:creationId xmlns:a16="http://schemas.microsoft.com/office/drawing/2014/main" id="{278BEEEE-BBC9-47E3-9493-E81CE0733FDB}"/>
               </a:ext>
             </a:extLst>
           </p:cNvPr>
@@ -21030,7 +20894,7 @@
           <p:cNvPr id="12" name="Shape 10">
             <a:extLst xmlns:a="http://schemas.openxmlformats.org/drawingml/2006/main">
               <a:ext uri="{FF2B5EF4-FFF2-40B4-BE49-F238E27FC236}">
-                <a16:creationId xmlns:a16="http://schemas.microsoft.com/office/drawing/2014/main" id="{2D8CC137-FDF1-40A4-A325-32AD54C2ABC6}"/>
+                <a16:creationId xmlns:a16="http://schemas.microsoft.com/office/drawing/2014/main" id="{C356A156-189C-420D-A980-16D6B8FBD263}"/>
               </a:ext>
             </a:extLst>
           </p:cNvPr>
@@ -21065,7 +20929,7 @@
           <p:cNvPr id="13" name="Text 11">
             <a:extLst xmlns:a="http://schemas.openxmlformats.org/drawingml/2006/main">
               <a:ext uri="{FF2B5EF4-FFF2-40B4-BE49-F238E27FC236}">
-                <a16:creationId xmlns:a16="http://schemas.microsoft.com/office/drawing/2014/main" id="{908B9913-9798-48F5-8E35-EE165F97B217}"/>
+                <a16:creationId xmlns:a16="http://schemas.microsoft.com/office/drawing/2014/main" id="{53706AB9-D82B-43BE-809E-152453771FF2}"/>
               </a:ext>
             </a:extLst>
           </p:cNvPr>
@@ -21112,7 +20976,7 @@
           <p:cNvPr id="14" name="Text 12">
             <a:extLst xmlns:a="http://schemas.openxmlformats.org/drawingml/2006/main">
               <a:ext uri="{FF2B5EF4-FFF2-40B4-BE49-F238E27FC236}">
-                <a16:creationId xmlns:a16="http://schemas.microsoft.com/office/drawing/2014/main" id="{FA8931E2-EB7A-499E-9D26-E957181980F5}"/>
+                <a16:creationId xmlns:a16="http://schemas.microsoft.com/office/drawing/2014/main" id="{C60C8F22-4290-4278-9126-9DD3E1BA7E4A}"/>
               </a:ext>
             </a:extLst>
           </p:cNvPr>
@@ -21159,7 +21023,7 @@
           <p:cNvPr id="15" name="Text 13">
             <a:extLst xmlns:a="http://schemas.openxmlformats.org/drawingml/2006/main">
               <a:ext uri="{FF2B5EF4-FFF2-40B4-BE49-F238E27FC236}">
-                <a16:creationId xmlns:a16="http://schemas.microsoft.com/office/drawing/2014/main" id="{8CFC5F0B-D6F7-4F02-8041-715AF32E6119}"/>
+                <a16:creationId xmlns:a16="http://schemas.microsoft.com/office/drawing/2014/main" id="{868B9C51-4A2A-46DC-80EC-ADBF649BBA10}"/>
               </a:ext>
             </a:extLst>
           </p:cNvPr>
@@ -21206,7 +21070,7 @@
           <p:cNvPr id="16" name="Shape 14">
             <a:extLst xmlns:a="http://schemas.openxmlformats.org/drawingml/2006/main">
               <a:ext uri="{FF2B5EF4-FFF2-40B4-BE49-F238E27FC236}">
-                <a16:creationId xmlns:a16="http://schemas.microsoft.com/office/drawing/2014/main" id="{D005DA0C-5B14-41D3-B131-08C80113DD7A}"/>
+                <a16:creationId xmlns:a16="http://schemas.microsoft.com/office/drawing/2014/main" id="{C92EC62F-5C50-411C-967B-D93E53B576E3}"/>
               </a:ext>
             </a:extLst>
           </p:cNvPr>
@@ -21241,7 +21105,7 @@
           <p:cNvPr id="17" name="Text 15">
             <a:extLst xmlns:a="http://schemas.openxmlformats.org/drawingml/2006/main">
               <a:ext uri="{FF2B5EF4-FFF2-40B4-BE49-F238E27FC236}">
-                <a16:creationId xmlns:a16="http://schemas.microsoft.com/office/drawing/2014/main" id="{610AE0EF-15F1-4ED9-B096-9FE5969F6AB2}"/>
+                <a16:creationId xmlns:a16="http://schemas.microsoft.com/office/drawing/2014/main" id="{C810C3EE-51AF-464E-92AD-411D8AC03807}"/>
               </a:ext>
             </a:extLst>
           </p:cNvPr>
@@ -21288,7 +21152,7 @@
           <p:cNvPr id="18" name="Text 16">
             <a:extLst xmlns:a="http://schemas.openxmlformats.org/drawingml/2006/main">
               <a:ext uri="{FF2B5EF4-FFF2-40B4-BE49-F238E27FC236}">
-                <a16:creationId xmlns:a16="http://schemas.microsoft.com/office/drawing/2014/main" id="{7E21D96B-0C26-4B29-B1BE-45CA7EAC0068}"/>
+                <a16:creationId xmlns:a16="http://schemas.microsoft.com/office/drawing/2014/main" id="{45B0D86E-D816-40C7-9300-906EFD741E0F}"/>
               </a:ext>
             </a:extLst>
           </p:cNvPr>
@@ -21335,7 +21199,7 @@
           <p:cNvPr id="19" name="Text 17">
             <a:extLst xmlns:a="http://schemas.openxmlformats.org/drawingml/2006/main">
               <a:ext uri="{FF2B5EF4-FFF2-40B4-BE49-F238E27FC236}">
-                <a16:creationId xmlns:a16="http://schemas.microsoft.com/office/drawing/2014/main" id="{273A337D-B09B-4C57-AC19-11DADC55AC7C}"/>
+                <a16:creationId xmlns:a16="http://schemas.microsoft.com/office/drawing/2014/main" id="{77D1E658-4A8F-47C3-9429-5EC4159B78C2}"/>
               </a:ext>
             </a:extLst>
           </p:cNvPr>
@@ -21382,7 +21246,7 @@
           <p:cNvPr id="20" name="Shape 18">
             <a:extLst xmlns:a="http://schemas.openxmlformats.org/drawingml/2006/main">
               <a:ext uri="{FF2B5EF4-FFF2-40B4-BE49-F238E27FC236}">
-                <a16:creationId xmlns:a16="http://schemas.microsoft.com/office/drawing/2014/main" id="{7C9AC738-674D-432E-9957-CFC33BE20CE1}"/>
+                <a16:creationId xmlns:a16="http://schemas.microsoft.com/office/drawing/2014/main" id="{D6C671C0-2223-43A7-ADCA-FB1BF5FFA671}"/>
               </a:ext>
             </a:extLst>
           </p:cNvPr>
@@ -21417,7 +21281,7 @@
           <p:cNvPr id="21" name="Text 19">
             <a:extLst xmlns:a="http://schemas.openxmlformats.org/drawingml/2006/main">
               <a:ext uri="{FF2B5EF4-FFF2-40B4-BE49-F238E27FC236}">
-                <a16:creationId xmlns:a16="http://schemas.microsoft.com/office/drawing/2014/main" id="{8FD411C6-B269-4114-9195-E2B718B924A7}"/>
+                <a16:creationId xmlns:a16="http://schemas.microsoft.com/office/drawing/2014/main" id="{ABDFFCA0-0782-4F24-862E-2115920BF07F}"/>
               </a:ext>
             </a:extLst>
           </p:cNvPr>
@@ -21464,7 +21328,7 @@
           <p:cNvPr id="22" name="Text 20">
             <a:extLst xmlns:a="http://schemas.openxmlformats.org/drawingml/2006/main">
               <a:ext uri="{FF2B5EF4-FFF2-40B4-BE49-F238E27FC236}">
-                <a16:creationId xmlns:a16="http://schemas.microsoft.com/office/drawing/2014/main" id="{036818DE-3E17-4DA1-BC92-3ED8DC0E67BA}"/>
+                <a16:creationId xmlns:a16="http://schemas.microsoft.com/office/drawing/2014/main" id="{E76D7D1F-E8B1-43D4-8C41-EBC61005D96C}"/>
               </a:ext>
             </a:extLst>
           </p:cNvPr>
@@ -21511,7 +21375,7 @@
           <p:cNvPr id="23" name="Text 21">
             <a:extLst xmlns:a="http://schemas.openxmlformats.org/drawingml/2006/main">
               <a:ext uri="{FF2B5EF4-FFF2-40B4-BE49-F238E27FC236}">
-                <a16:creationId xmlns:a16="http://schemas.microsoft.com/office/drawing/2014/main" id="{C989E509-B60F-4B9A-80B4-F69587976FFE}"/>
+                <a16:creationId xmlns:a16="http://schemas.microsoft.com/office/drawing/2014/main" id="{6F14EE74-FA3D-4855-9F76-5DED5CCDA80D}"/>
               </a:ext>
             </a:extLst>
           </p:cNvPr>
@@ -21556,7 +21420,7 @@
     </p:spTree>
     <p:extLst>
       <p:ext uri="{BB962C8B-B14F-4D97-AF65-F5344CB8AC3E}">
-        <p14:creationId xmlns:p14="http://schemas.microsoft.com/office/powerpoint/2010/main" val="1346410355"/>
+        <p14:creationId xmlns:p14="http://schemas.microsoft.com/office/powerpoint/2010/main" val="1520111807"/>
       </p:ext>
     </p:extLst>
   </p:cSld>
@@ -21587,7 +21451,7 @@
           <p:cNvPr id="2" name="Text 0">
             <a:extLst xmlns:a="http://schemas.openxmlformats.org/drawingml/2006/main">
               <a:ext uri="{FF2B5EF4-FFF2-40B4-BE49-F238E27FC236}">
-                <a16:creationId xmlns:a16="http://schemas.microsoft.com/office/drawing/2014/main" id="{1B659086-F3AB-423A-8EE1-EB24AE48A2D8}"/>
+                <a16:creationId xmlns:a16="http://schemas.microsoft.com/office/drawing/2014/main" id="{D9A00283-437F-4B4B-9FED-F6B8C259CB14}"/>
               </a:ext>
             </a:extLst>
           </p:cNvPr>
@@ -21634,7 +21498,7 @@
           <p:cNvPr id="3" name="Text 1">
             <a:extLst xmlns:a="http://schemas.openxmlformats.org/drawingml/2006/main">
               <a:ext uri="{FF2B5EF4-FFF2-40B4-BE49-F238E27FC236}">
-                <a16:creationId xmlns:a16="http://schemas.microsoft.com/office/drawing/2014/main" id="{4EB3BE65-A3EC-4DB2-A1E4-B9235B9DF764}"/>
+                <a16:creationId xmlns:a16="http://schemas.microsoft.com/office/drawing/2014/main" id="{5B68A04E-1C4F-4D8C-954B-23FDBAB0E9E4}"/>
               </a:ext>
             </a:extLst>
           </p:cNvPr>
@@ -21681,7 +21545,7 @@
           <p:cNvPr id="4" name="Shape 2">
             <a:extLst xmlns:a="http://schemas.openxmlformats.org/drawingml/2006/main">
               <a:ext uri="{FF2B5EF4-FFF2-40B4-BE49-F238E27FC236}">
-                <a16:creationId xmlns:a16="http://schemas.microsoft.com/office/drawing/2014/main" id="{DEC455BD-667E-4A7D-9B03-10BEA0B43F70}"/>
+                <a16:creationId xmlns:a16="http://schemas.microsoft.com/office/drawing/2014/main" id="{97ACDCA1-76E5-4778-8EB6-5052721FDF3A}"/>
               </a:ext>
             </a:extLst>
           </p:cNvPr>
@@ -21716,7 +21580,7 @@
           <p:cNvPr id="5" name="Text 3">
             <a:extLst xmlns:a="http://schemas.openxmlformats.org/drawingml/2006/main">
               <a:ext uri="{FF2B5EF4-FFF2-40B4-BE49-F238E27FC236}">
-                <a16:creationId xmlns:a16="http://schemas.microsoft.com/office/drawing/2014/main" id="{3EFB90D1-C07E-40C2-85D9-E2C643110637}"/>
+                <a16:creationId xmlns:a16="http://schemas.microsoft.com/office/drawing/2014/main" id="{E37D1C30-A7DB-475E-BEC4-1D4DC44682D3}"/>
               </a:ext>
             </a:extLst>
           </p:cNvPr>
@@ -21763,7 +21627,7 @@
           <p:cNvPr id="6" name="Shape 4">
             <a:extLst xmlns:a="http://schemas.openxmlformats.org/drawingml/2006/main">
               <a:ext uri="{FF2B5EF4-FFF2-40B4-BE49-F238E27FC236}">
-                <a16:creationId xmlns:a16="http://schemas.microsoft.com/office/drawing/2014/main" id="{3B3FE5CD-3823-47D5-9809-92E2C1767D51}"/>
+                <a16:creationId xmlns:a16="http://schemas.microsoft.com/office/drawing/2014/main" id="{930550F9-A202-47D9-892C-96349312595E}"/>
               </a:ext>
             </a:extLst>
           </p:cNvPr>
@@ -21794,7 +21658,7 @@
           <p:cNvPr id="7" name="Shape 5">
             <a:extLst xmlns:a="http://schemas.openxmlformats.org/drawingml/2006/main">
               <a:ext uri="{FF2B5EF4-FFF2-40B4-BE49-F238E27FC236}">
-                <a16:creationId xmlns:a16="http://schemas.microsoft.com/office/drawing/2014/main" id="{AD55A593-2747-43A0-9671-A33555F7ACB9}"/>
+                <a16:creationId xmlns:a16="http://schemas.microsoft.com/office/drawing/2014/main" id="{10D45702-B840-4545-806D-9AF723515E6B}"/>
               </a:ext>
             </a:extLst>
           </p:cNvPr>
@@ -21829,7 +21693,7 @@
           <p:cNvPr id="8" name="Text 6">
             <a:extLst xmlns:a="http://schemas.openxmlformats.org/drawingml/2006/main">
               <a:ext uri="{FF2B5EF4-FFF2-40B4-BE49-F238E27FC236}">
-                <a16:creationId xmlns:a16="http://schemas.microsoft.com/office/drawing/2014/main" id="{6F4D2A0A-2C69-491F-84A3-6624FE30D64B}"/>
+                <a16:creationId xmlns:a16="http://schemas.microsoft.com/office/drawing/2014/main" id="{24D7623C-8D9A-45D4-9D34-D1FB0D016944}"/>
               </a:ext>
             </a:extLst>
           </p:cNvPr>
@@ -21876,7 +21740,7 @@
           <p:cNvPr id="9" name="Shape 7">
             <a:extLst xmlns:a="http://schemas.openxmlformats.org/drawingml/2006/main">
               <a:ext uri="{FF2B5EF4-FFF2-40B4-BE49-F238E27FC236}">
-                <a16:creationId xmlns:a16="http://schemas.microsoft.com/office/drawing/2014/main" id="{B3677FF8-3E23-4AA3-AD34-0BB0FDCFF124}"/>
+                <a16:creationId xmlns:a16="http://schemas.microsoft.com/office/drawing/2014/main" id="{806C22F2-49A6-41D0-88CE-89700A66D19E}"/>
               </a:ext>
             </a:extLst>
           </p:cNvPr>
@@ -21911,7 +21775,7 @@
           <p:cNvPr id="10" name="Text 8">
             <a:extLst xmlns:a="http://schemas.openxmlformats.org/drawingml/2006/main">
               <a:ext uri="{FF2B5EF4-FFF2-40B4-BE49-F238E27FC236}">
-                <a16:creationId xmlns:a16="http://schemas.microsoft.com/office/drawing/2014/main" id="{25C0B257-7458-47C9-99E2-A028892F779F}"/>
+                <a16:creationId xmlns:a16="http://schemas.microsoft.com/office/drawing/2014/main" id="{70C15CCF-5FC5-40AA-9B12-B4216F0D49D3}"/>
               </a:ext>
             </a:extLst>
           </p:cNvPr>
@@ -21958,7 +21822,7 @@
           <p:cNvPr id="11" name="Text 9">
             <a:extLst xmlns:a="http://schemas.openxmlformats.org/drawingml/2006/main">
               <a:ext uri="{FF2B5EF4-FFF2-40B4-BE49-F238E27FC236}">
-                <a16:creationId xmlns:a16="http://schemas.microsoft.com/office/drawing/2014/main" id="{1F3DA3D8-40D5-4D8F-9B0E-2800E9D9EB94}"/>
+                <a16:creationId xmlns:a16="http://schemas.microsoft.com/office/drawing/2014/main" id="{0F622949-261D-4E20-A865-639B6EAFD37C}"/>
               </a:ext>
             </a:extLst>
           </p:cNvPr>
@@ -22005,7 +21869,7 @@
           <p:cNvPr id="12" name="Text 10">
             <a:extLst xmlns:a="http://schemas.openxmlformats.org/drawingml/2006/main">
               <a:ext uri="{FF2B5EF4-FFF2-40B4-BE49-F238E27FC236}">
-                <a16:creationId xmlns:a16="http://schemas.microsoft.com/office/drawing/2014/main" id="{7C84073C-A109-4BE9-9F18-84A9C257D7CC}"/>
+                <a16:creationId xmlns:a16="http://schemas.microsoft.com/office/drawing/2014/main" id="{ED2C1F51-CC99-4B56-AED7-BD6E5CE41C56}"/>
               </a:ext>
             </a:extLst>
           </p:cNvPr>
@@ -22052,7 +21916,7 @@
           <p:cNvPr id="13" name="Shape 11">
             <a:extLst xmlns:a="http://schemas.openxmlformats.org/drawingml/2006/main">
               <a:ext uri="{FF2B5EF4-FFF2-40B4-BE49-F238E27FC236}">
-                <a16:creationId xmlns:a16="http://schemas.microsoft.com/office/drawing/2014/main" id="{9ED66A64-D696-48E5-9B6B-18E1098527D0}"/>
+                <a16:creationId xmlns:a16="http://schemas.microsoft.com/office/drawing/2014/main" id="{4594A08F-21FD-4FBE-B373-794A882FE42B}"/>
               </a:ext>
             </a:extLst>
           </p:cNvPr>
@@ -22084,7 +21948,7 @@
           <p:cNvPr id="14" name="Shape 12">
             <a:extLst xmlns:a="http://schemas.openxmlformats.org/drawingml/2006/main">
               <a:ext uri="{FF2B5EF4-FFF2-40B4-BE49-F238E27FC236}">
-                <a16:creationId xmlns:a16="http://schemas.microsoft.com/office/drawing/2014/main" id="{F7FA796C-40AC-4B76-86FF-4E37D0F95002}"/>
+                <a16:creationId xmlns:a16="http://schemas.microsoft.com/office/drawing/2014/main" id="{715A7800-1FA7-469B-8EA6-75A4F02A4C1D}"/>
               </a:ext>
             </a:extLst>
           </p:cNvPr>
@@ -22119,7 +21983,7 @@
           <p:cNvPr id="15" name="Text 13">
             <a:extLst xmlns:a="http://schemas.openxmlformats.org/drawingml/2006/main">
               <a:ext uri="{FF2B5EF4-FFF2-40B4-BE49-F238E27FC236}">
-                <a16:creationId xmlns:a16="http://schemas.microsoft.com/office/drawing/2014/main" id="{C0CD7A33-0FC3-4C0F-913B-D6826D0CC355}"/>
+                <a16:creationId xmlns:a16="http://schemas.microsoft.com/office/drawing/2014/main" id="{CBA391B4-3245-4C61-BB26-408B1324FB79}"/>
               </a:ext>
             </a:extLst>
           </p:cNvPr>
@@ -22166,7 +22030,7 @@
           <p:cNvPr id="16" name="Text 14">
             <a:extLst xmlns:a="http://schemas.openxmlformats.org/drawingml/2006/main">
               <a:ext uri="{FF2B5EF4-FFF2-40B4-BE49-F238E27FC236}">
-                <a16:creationId xmlns:a16="http://schemas.microsoft.com/office/drawing/2014/main" id="{5E395378-F64A-4E4C-86F0-4E423FAAE1BF}"/>
+                <a16:creationId xmlns:a16="http://schemas.microsoft.com/office/drawing/2014/main" id="{81AD74ED-0107-4C6A-8F6C-D088C0260090}"/>
               </a:ext>
             </a:extLst>
           </p:cNvPr>
@@ -22213,7 +22077,7 @@
           <p:cNvPr id="17" name="Text 15">
             <a:extLst xmlns:a="http://schemas.openxmlformats.org/drawingml/2006/main">
               <a:ext uri="{FF2B5EF4-FFF2-40B4-BE49-F238E27FC236}">
-                <a16:creationId xmlns:a16="http://schemas.microsoft.com/office/drawing/2014/main" id="{AB5D7FA1-BE4F-4E06-A08B-554C3596C485}"/>
+                <a16:creationId xmlns:a16="http://schemas.microsoft.com/office/drawing/2014/main" id="{ACE1F8A6-C9B0-4677-AA5B-E0CBC509931B}"/>
               </a:ext>
             </a:extLst>
           </p:cNvPr>
@@ -22260,7 +22124,7 @@
           <p:cNvPr id="18" name="Shape 16">
             <a:extLst xmlns:a="http://schemas.openxmlformats.org/drawingml/2006/main">
               <a:ext uri="{FF2B5EF4-FFF2-40B4-BE49-F238E27FC236}">
-                <a16:creationId xmlns:a16="http://schemas.microsoft.com/office/drawing/2014/main" id="{2170AD77-2D0A-49FC-82AB-78D7F480A0E3}"/>
+                <a16:creationId xmlns:a16="http://schemas.microsoft.com/office/drawing/2014/main" id="{81FDA53C-7BA3-44B5-8227-20032B7E416E}"/>
               </a:ext>
             </a:extLst>
           </p:cNvPr>
@@ -22292,7 +22156,7 @@
           <p:cNvPr id="19" name="Shape 17">
             <a:extLst xmlns:a="http://schemas.openxmlformats.org/drawingml/2006/main">
               <a:ext uri="{FF2B5EF4-FFF2-40B4-BE49-F238E27FC236}">
-                <a16:creationId xmlns:a16="http://schemas.microsoft.com/office/drawing/2014/main" id="{2DF9EF2C-9F03-4EB8-9183-A33E3FEB80CA}"/>
+                <a16:creationId xmlns:a16="http://schemas.microsoft.com/office/drawing/2014/main" id="{E5A8BE4B-A3E8-4630-84BC-90CE85CB49FE}"/>
               </a:ext>
             </a:extLst>
           </p:cNvPr>
@@ -22327,7 +22191,7 @@
           <p:cNvPr id="20" name="Text 18">
             <a:extLst xmlns:a="http://schemas.openxmlformats.org/drawingml/2006/main">
               <a:ext uri="{FF2B5EF4-FFF2-40B4-BE49-F238E27FC236}">
-                <a16:creationId xmlns:a16="http://schemas.microsoft.com/office/drawing/2014/main" id="{D5B329CB-2526-48ED-B6B5-4A8A4D7578C5}"/>
+                <a16:creationId xmlns:a16="http://schemas.microsoft.com/office/drawing/2014/main" id="{021CB201-47E8-4DEC-878F-45CA6050D2CF}"/>
               </a:ext>
             </a:extLst>
           </p:cNvPr>
@@ -22374,7 +22238,7 @@
           <p:cNvPr id="21" name="Text 19">
             <a:extLst xmlns:a="http://schemas.openxmlformats.org/drawingml/2006/main">
               <a:ext uri="{FF2B5EF4-FFF2-40B4-BE49-F238E27FC236}">
-                <a16:creationId xmlns:a16="http://schemas.microsoft.com/office/drawing/2014/main" id="{229F9622-FA3C-455E-A7A5-90B65A0A6088}"/>
+                <a16:creationId xmlns:a16="http://schemas.microsoft.com/office/drawing/2014/main" id="{BB3C939B-53EB-4E6E-81DF-AB6CE237DA5F}"/>
               </a:ext>
             </a:extLst>
           </p:cNvPr>
@@ -22421,7 +22285,7 @@
           <p:cNvPr id="22" name="Text 20">
             <a:extLst xmlns:a="http://schemas.openxmlformats.org/drawingml/2006/main">
               <a:ext uri="{FF2B5EF4-FFF2-40B4-BE49-F238E27FC236}">
-                <a16:creationId xmlns:a16="http://schemas.microsoft.com/office/drawing/2014/main" id="{4B65776C-7201-4B09-810D-AC2212A36D37}"/>
+                <a16:creationId xmlns:a16="http://schemas.microsoft.com/office/drawing/2014/main" id="{A9E5913D-48BF-473C-A5DE-055175A2B84A}"/>
               </a:ext>
             </a:extLst>
           </p:cNvPr>
@@ -22468,7 +22332,7 @@
           <p:cNvPr id="23" name="Shape 21">
             <a:extLst xmlns:a="http://schemas.openxmlformats.org/drawingml/2006/main">
               <a:ext uri="{FF2B5EF4-FFF2-40B4-BE49-F238E27FC236}">
-                <a16:creationId xmlns:a16="http://schemas.microsoft.com/office/drawing/2014/main" id="{01392605-0CA3-43BB-93DE-E345F6B1AF0C}"/>
+                <a16:creationId xmlns:a16="http://schemas.microsoft.com/office/drawing/2014/main" id="{C5511782-FEAA-412D-9452-018C8F07D12E}"/>
               </a:ext>
             </a:extLst>
           </p:cNvPr>
@@ -22500,7 +22364,7 @@
           <p:cNvPr id="24" name="Shape 22">
             <a:extLst xmlns:a="http://schemas.openxmlformats.org/drawingml/2006/main">
               <a:ext uri="{FF2B5EF4-FFF2-40B4-BE49-F238E27FC236}">
-                <a16:creationId xmlns:a16="http://schemas.microsoft.com/office/drawing/2014/main" id="{934DCF56-0C7E-4E94-AE37-FD99368B5D70}"/>
+                <a16:creationId xmlns:a16="http://schemas.microsoft.com/office/drawing/2014/main" id="{8DF30195-4CC6-4070-9A4C-587ACF5DBC4A}"/>
               </a:ext>
             </a:extLst>
           </p:cNvPr>
@@ -22535,7 +22399,7 @@
           <p:cNvPr id="25" name="Text 23">
             <a:extLst xmlns:a="http://schemas.openxmlformats.org/drawingml/2006/main">
               <a:ext uri="{FF2B5EF4-FFF2-40B4-BE49-F238E27FC236}">
-                <a16:creationId xmlns:a16="http://schemas.microsoft.com/office/drawing/2014/main" id="{4F57FD5C-1090-478C-82AE-7DA534425CCB}"/>
+                <a16:creationId xmlns:a16="http://schemas.microsoft.com/office/drawing/2014/main" id="{7D4B2C10-F7C1-44D1-A4E5-E3E3BEA65903}"/>
               </a:ext>
             </a:extLst>
           </p:cNvPr>
@@ -22582,7 +22446,7 @@
           <p:cNvPr id="26" name="Text 24">
             <a:extLst xmlns:a="http://schemas.openxmlformats.org/drawingml/2006/main">
               <a:ext uri="{FF2B5EF4-FFF2-40B4-BE49-F238E27FC236}">
-                <a16:creationId xmlns:a16="http://schemas.microsoft.com/office/drawing/2014/main" id="{6AF27FCE-1826-4DFB-B762-6B38455A063F}"/>
+                <a16:creationId xmlns:a16="http://schemas.microsoft.com/office/drawing/2014/main" id="{63B86520-3C84-4FE7-8D6B-3F04EB63EFE7}"/>
               </a:ext>
             </a:extLst>
           </p:cNvPr>
@@ -22629,7 +22493,7 @@
           <p:cNvPr id="27" name="Text 25">
             <a:extLst xmlns:a="http://schemas.openxmlformats.org/drawingml/2006/main">
               <a:ext uri="{FF2B5EF4-FFF2-40B4-BE49-F238E27FC236}">
-                <a16:creationId xmlns:a16="http://schemas.microsoft.com/office/drawing/2014/main" id="{4716D08A-A19E-488A-9244-1289A8470380}"/>
+                <a16:creationId xmlns:a16="http://schemas.microsoft.com/office/drawing/2014/main" id="{14DF0789-71A6-4B04-B780-C79171553F24}"/>
               </a:ext>
             </a:extLst>
           </p:cNvPr>
@@ -22676,7 +22540,7 @@
           <p:cNvPr id="28" name="Shape 26">
             <a:extLst xmlns:a="http://schemas.openxmlformats.org/drawingml/2006/main">
               <a:ext uri="{FF2B5EF4-FFF2-40B4-BE49-F238E27FC236}">
-                <a16:creationId xmlns:a16="http://schemas.microsoft.com/office/drawing/2014/main" id="{8803C772-CD53-45C3-8AF5-A262BC80708B}"/>
+                <a16:creationId xmlns:a16="http://schemas.microsoft.com/office/drawing/2014/main" id="{B3ECF8AB-7B3F-400F-A838-B93B04D8A06F}"/>
               </a:ext>
             </a:extLst>
           </p:cNvPr>
@@ -22708,7 +22572,7 @@
           <p:cNvPr id="29" name="Shape 27">
             <a:extLst xmlns:a="http://schemas.openxmlformats.org/drawingml/2006/main">
               <a:ext uri="{FF2B5EF4-FFF2-40B4-BE49-F238E27FC236}">
-                <a16:creationId xmlns:a16="http://schemas.microsoft.com/office/drawing/2014/main" id="{D7F11DEF-373E-451C-865F-ABA495826451}"/>
+                <a16:creationId xmlns:a16="http://schemas.microsoft.com/office/drawing/2014/main" id="{763741BE-F7A0-426F-9CCC-04FCA73596E3}"/>
               </a:ext>
             </a:extLst>
           </p:cNvPr>
@@ -22743,7 +22607,7 @@
           <p:cNvPr id="30" name="Text 28">
             <a:extLst xmlns:a="http://schemas.openxmlformats.org/drawingml/2006/main">
               <a:ext uri="{FF2B5EF4-FFF2-40B4-BE49-F238E27FC236}">
-                <a16:creationId xmlns:a16="http://schemas.microsoft.com/office/drawing/2014/main" id="{E53DB942-CE9F-4CA7-A167-FF5AB275A94E}"/>
+                <a16:creationId xmlns:a16="http://schemas.microsoft.com/office/drawing/2014/main" id="{DEAC824C-A110-499E-820B-2FE6AE341325}"/>
               </a:ext>
             </a:extLst>
           </p:cNvPr>
@@ -22790,7 +22654,7 @@
           <p:cNvPr id="31" name="Text 29">
             <a:extLst xmlns:a="http://schemas.openxmlformats.org/drawingml/2006/main">
               <a:ext uri="{FF2B5EF4-FFF2-40B4-BE49-F238E27FC236}">
-                <a16:creationId xmlns:a16="http://schemas.microsoft.com/office/drawing/2014/main" id="{4E93C2BC-7061-4694-9927-CC0CAFB3EB5B}"/>
+                <a16:creationId xmlns:a16="http://schemas.microsoft.com/office/drawing/2014/main" id="{09703CFB-1B8A-4A4C-8F0E-FF8646C583E7}"/>
               </a:ext>
             </a:extLst>
           </p:cNvPr>
@@ -22837,7 +22701,7 @@
           <p:cNvPr id="32" name="Text 30">
             <a:extLst xmlns:a="http://schemas.openxmlformats.org/drawingml/2006/main">
               <a:ext uri="{FF2B5EF4-FFF2-40B4-BE49-F238E27FC236}">
-                <a16:creationId xmlns:a16="http://schemas.microsoft.com/office/drawing/2014/main" id="{2C1DD156-83EE-416A-A53A-1FCFFCF206FC}"/>
+                <a16:creationId xmlns:a16="http://schemas.microsoft.com/office/drawing/2014/main" id="{9811A692-9D0A-4AF4-938E-C10BB3151F06}"/>
               </a:ext>
             </a:extLst>
           </p:cNvPr>
@@ -22884,7 +22748,7 @@
           <p:cNvPr id="33" name="Shape 31">
             <a:extLst xmlns:a="http://schemas.openxmlformats.org/drawingml/2006/main">
               <a:ext uri="{FF2B5EF4-FFF2-40B4-BE49-F238E27FC236}">
-                <a16:creationId xmlns:a16="http://schemas.microsoft.com/office/drawing/2014/main" id="{50924996-E3D6-4F7A-9DA7-21F92CB4AE6D}"/>
+                <a16:creationId xmlns:a16="http://schemas.microsoft.com/office/drawing/2014/main" id="{BB5251B2-58AC-4F73-9D46-5AAC1EE99D69}"/>
               </a:ext>
             </a:extLst>
           </p:cNvPr>
@@ -22919,7 +22783,7 @@
           <p:cNvPr id="34" name="Text 32">
             <a:extLst xmlns:a="http://schemas.openxmlformats.org/drawingml/2006/main">
               <a:ext uri="{FF2B5EF4-FFF2-40B4-BE49-F238E27FC236}">
-                <a16:creationId xmlns:a16="http://schemas.microsoft.com/office/drawing/2014/main" id="{AB233966-C1B2-4C11-A045-E1835548C0FF}"/>
+                <a16:creationId xmlns:a16="http://schemas.microsoft.com/office/drawing/2014/main" id="{6A458E2B-A721-4F66-9813-74B23EB8554F}"/>
               </a:ext>
             </a:extLst>
           </p:cNvPr>
@@ -22966,7 +22830,7 @@
           <p:cNvPr id="35" name="Shape 33">
             <a:extLst xmlns:a="http://schemas.openxmlformats.org/drawingml/2006/main">
               <a:ext uri="{FF2B5EF4-FFF2-40B4-BE49-F238E27FC236}">
-                <a16:creationId xmlns:a16="http://schemas.microsoft.com/office/drawing/2014/main" id="{600E1216-221A-4656-9569-6D00A92D1562}"/>
+                <a16:creationId xmlns:a16="http://schemas.microsoft.com/office/drawing/2014/main" id="{419FACC6-922A-47FA-97C2-FC9EAD5F3498}"/>
               </a:ext>
             </a:extLst>
           </p:cNvPr>
@@ -22999,7 +22863,7 @@
           <p:cNvPr id="36" name="Text 34">
             <a:extLst xmlns:a="http://schemas.openxmlformats.org/drawingml/2006/main">
               <a:ext uri="{FF2B5EF4-FFF2-40B4-BE49-F238E27FC236}">
-                <a16:creationId xmlns:a16="http://schemas.microsoft.com/office/drawing/2014/main" id="{38DAD730-BE0F-456D-A89C-FC838DA99018}"/>
+                <a16:creationId xmlns:a16="http://schemas.microsoft.com/office/drawing/2014/main" id="{4B8CD169-0A9D-4ED8-A5E3-8FD4DB687D69}"/>
               </a:ext>
             </a:extLst>
           </p:cNvPr>
@@ -23046,7 +22910,7 @@
           <p:cNvPr id="37" name="Shape 35">
             <a:extLst xmlns:a="http://schemas.openxmlformats.org/drawingml/2006/main">
               <a:ext uri="{FF2B5EF4-FFF2-40B4-BE49-F238E27FC236}">
-                <a16:creationId xmlns:a16="http://schemas.microsoft.com/office/drawing/2014/main" id="{B25E4A08-BD82-44A7-97EF-EFA22084D307}"/>
+                <a16:creationId xmlns:a16="http://schemas.microsoft.com/office/drawing/2014/main" id="{40618525-90AA-4D7B-A967-F179C1ECBFEF}"/>
               </a:ext>
             </a:extLst>
           </p:cNvPr>
@@ -23079,7 +22943,7 @@
           <p:cNvPr id="38" name="Text 36">
             <a:extLst xmlns:a="http://schemas.openxmlformats.org/drawingml/2006/main">
               <a:ext uri="{FF2B5EF4-FFF2-40B4-BE49-F238E27FC236}">
-                <a16:creationId xmlns:a16="http://schemas.microsoft.com/office/drawing/2014/main" id="{FF31D2F4-9BE3-4F4F-8909-2C9DDA6AF680}"/>
+                <a16:creationId xmlns:a16="http://schemas.microsoft.com/office/drawing/2014/main" id="{57EDC65B-C142-4EE5-BA27-7533C19D4995}"/>
               </a:ext>
             </a:extLst>
           </p:cNvPr>
@@ -23126,7 +22990,7 @@
           <p:cNvPr id="39" name="Shape 37">
             <a:extLst xmlns:a="http://schemas.openxmlformats.org/drawingml/2006/main">
               <a:ext uri="{FF2B5EF4-FFF2-40B4-BE49-F238E27FC236}">
-                <a16:creationId xmlns:a16="http://schemas.microsoft.com/office/drawing/2014/main" id="{E366DF39-C57E-46FE-A95F-70E8BE2FFD40}"/>
+                <a16:creationId xmlns:a16="http://schemas.microsoft.com/office/drawing/2014/main" id="{8DF78A81-F38D-4324-83D0-CAF12353B3A4}"/>
               </a:ext>
             </a:extLst>
           </p:cNvPr>
@@ -23159,7 +23023,7 @@
           <p:cNvPr id="40" name="Text 38">
             <a:extLst xmlns:a="http://schemas.openxmlformats.org/drawingml/2006/main">
               <a:ext uri="{FF2B5EF4-FFF2-40B4-BE49-F238E27FC236}">
-                <a16:creationId xmlns:a16="http://schemas.microsoft.com/office/drawing/2014/main" id="{649C341F-00D8-407E-A728-23325A9B0D01}"/>
+                <a16:creationId xmlns:a16="http://schemas.microsoft.com/office/drawing/2014/main" id="{C647EF19-D42B-4FD5-955B-CD7A835A0AB7}"/>
               </a:ext>
             </a:extLst>
           </p:cNvPr>
@@ -23206,7 +23070,7 @@
           <p:cNvPr id="41" name="Shape 39">
             <a:extLst xmlns:a="http://schemas.openxmlformats.org/drawingml/2006/main">
               <a:ext uri="{FF2B5EF4-FFF2-40B4-BE49-F238E27FC236}">
-                <a16:creationId xmlns:a16="http://schemas.microsoft.com/office/drawing/2014/main" id="{A44731D8-A783-4B20-B299-88A9CE6E1A43}"/>
+                <a16:creationId xmlns:a16="http://schemas.microsoft.com/office/drawing/2014/main" id="{E20FF1A1-BB1F-4FA0-B7F5-0E38CB00638E}"/>
               </a:ext>
             </a:extLst>
           </p:cNvPr>
@@ -23241,7 +23105,7 @@
           <p:cNvPr id="42" name="Text 40">
             <a:extLst xmlns:a="http://schemas.openxmlformats.org/drawingml/2006/main">
               <a:ext uri="{FF2B5EF4-FFF2-40B4-BE49-F238E27FC236}">
-                <a16:creationId xmlns:a16="http://schemas.microsoft.com/office/drawing/2014/main" id="{5C645B6A-522E-485D-BFCD-DA4E70CD2CB9}"/>
+                <a16:creationId xmlns:a16="http://schemas.microsoft.com/office/drawing/2014/main" id="{FE4A0E01-C247-4414-8CB4-099F84807A11}"/>
               </a:ext>
             </a:extLst>
           </p:cNvPr>
@@ -23288,7 +23152,7 @@
           <p:cNvPr id="43" name="Text 41">
             <a:extLst xmlns:a="http://schemas.openxmlformats.org/drawingml/2006/main">
               <a:ext uri="{FF2B5EF4-FFF2-40B4-BE49-F238E27FC236}">
-                <a16:creationId xmlns:a16="http://schemas.microsoft.com/office/drawing/2014/main" id="{EAB113BF-6B56-4B32-A928-2F52CFDF8BDD}"/>
+                <a16:creationId xmlns:a16="http://schemas.microsoft.com/office/drawing/2014/main" id="{B43C54B6-EF69-4E52-9448-7244E777060E}"/>
               </a:ext>
             </a:extLst>
           </p:cNvPr>
@@ -23367,7 +23231,7 @@
           <p:cNvPr id="44" name="Text 42">
             <a:extLst xmlns:a="http://schemas.openxmlformats.org/drawingml/2006/main">
               <a:ext uri="{FF2B5EF4-FFF2-40B4-BE49-F238E27FC236}">
-                <a16:creationId xmlns:a16="http://schemas.microsoft.com/office/drawing/2014/main" id="{36951120-1D93-43C6-96EC-BA85738EEAAD}"/>
+                <a16:creationId xmlns:a16="http://schemas.microsoft.com/office/drawing/2014/main" id="{69C5C85B-F41C-4440-A06C-315B8B59AE0A}"/>
               </a:ext>
             </a:extLst>
           </p:cNvPr>
@@ -23414,7 +23278,7 @@
           <p:cNvPr id="45" name="Text 43">
             <a:extLst xmlns:a="http://schemas.openxmlformats.org/drawingml/2006/main">
               <a:ext uri="{FF2B5EF4-FFF2-40B4-BE49-F238E27FC236}">
-                <a16:creationId xmlns:a16="http://schemas.microsoft.com/office/drawing/2014/main" id="{BBE3CAE8-3436-4A72-9089-077B1D4D03E1}"/>
+                <a16:creationId xmlns:a16="http://schemas.microsoft.com/office/drawing/2014/main" id="{B9E45CA3-C606-41C3-A23C-011B5738000F}"/>
               </a:ext>
             </a:extLst>
           </p:cNvPr>
@@ -23461,7 +23325,7 @@
           <p:cNvPr id="46" name="Text 44">
             <a:extLst xmlns:a="http://schemas.openxmlformats.org/drawingml/2006/main">
               <a:ext uri="{FF2B5EF4-FFF2-40B4-BE49-F238E27FC236}">
-                <a16:creationId xmlns:a16="http://schemas.microsoft.com/office/drawing/2014/main" id="{070943B3-44DE-4848-9673-7DCE3CDD0712}"/>
+                <a16:creationId xmlns:a16="http://schemas.microsoft.com/office/drawing/2014/main" id="{9971A2AD-84F7-40B4-AFA4-A53295A5A5D5}"/>
               </a:ext>
             </a:extLst>
           </p:cNvPr>
@@ -23506,7 +23370,7 @@
     </p:spTree>
     <p:extLst>
       <p:ext uri="{BB962C8B-B14F-4D97-AF65-F5344CB8AC3E}">
-        <p14:creationId xmlns:p14="http://schemas.microsoft.com/office/powerpoint/2010/main" val="1250000359"/>
+        <p14:creationId xmlns:p14="http://schemas.microsoft.com/office/powerpoint/2010/main" val="1174748675"/>
       </p:ext>
     </p:extLst>
   </p:cSld>
@@ -23537,7 +23401,7 @@
           <p:cNvPr id="2" name="Text 0">
             <a:extLst xmlns:a="http://schemas.openxmlformats.org/drawingml/2006/main">
               <a:ext uri="{FF2B5EF4-FFF2-40B4-BE49-F238E27FC236}">
-                <a16:creationId xmlns:a16="http://schemas.microsoft.com/office/drawing/2014/main" id="{5C4B9ACF-D817-4623-B2D8-56578D8CAB99}"/>
+                <a16:creationId xmlns:a16="http://schemas.microsoft.com/office/drawing/2014/main" id="{AC9CE5C0-E8A6-457E-9A71-17DEB816DB10}"/>
               </a:ext>
             </a:extLst>
           </p:cNvPr>
@@ -23584,7 +23448,7 @@
           <p:cNvPr id="3" name="Text 1">
             <a:extLst xmlns:a="http://schemas.openxmlformats.org/drawingml/2006/main">
               <a:ext uri="{FF2B5EF4-FFF2-40B4-BE49-F238E27FC236}">
-                <a16:creationId xmlns:a16="http://schemas.microsoft.com/office/drawing/2014/main" id="{A9FE6481-0707-43AE-8769-90E76D6A7D91}"/>
+                <a16:creationId xmlns:a16="http://schemas.microsoft.com/office/drawing/2014/main" id="{5B14510B-77C0-4774-AB98-586451C46098}"/>
               </a:ext>
             </a:extLst>
           </p:cNvPr>
@@ -23631,7 +23495,7 @@
           <p:cNvPr id="4" name="Shape 2">
             <a:extLst xmlns:a="http://schemas.openxmlformats.org/drawingml/2006/main">
               <a:ext uri="{FF2B5EF4-FFF2-40B4-BE49-F238E27FC236}">
-                <a16:creationId xmlns:a16="http://schemas.microsoft.com/office/drawing/2014/main" id="{E1FF6920-ABEC-44DC-8324-0E57566658F8}"/>
+                <a16:creationId xmlns:a16="http://schemas.microsoft.com/office/drawing/2014/main" id="{46C88044-B41D-4E62-B9DC-025022702F2B}"/>
               </a:ext>
             </a:extLst>
           </p:cNvPr>
@@ -23666,7 +23530,7 @@
           <p:cNvPr id="5" name="Text 3">
             <a:extLst xmlns:a="http://schemas.openxmlformats.org/drawingml/2006/main">
               <a:ext uri="{FF2B5EF4-FFF2-40B4-BE49-F238E27FC236}">
-                <a16:creationId xmlns:a16="http://schemas.microsoft.com/office/drawing/2014/main" id="{7DED0EDE-231E-4BED-9DAA-5E5132525BE6}"/>
+                <a16:creationId xmlns:a16="http://schemas.microsoft.com/office/drawing/2014/main" id="{BC2CB1C2-3D42-43B3-9F82-FB914E0246B8}"/>
               </a:ext>
             </a:extLst>
           </p:cNvPr>
@@ -23713,7 +23577,7 @@
           <p:cNvPr id="6" name="Shape 4">
             <a:extLst xmlns:a="http://schemas.openxmlformats.org/drawingml/2006/main">
               <a:ext uri="{FF2B5EF4-FFF2-40B4-BE49-F238E27FC236}">
-                <a16:creationId xmlns:a16="http://schemas.microsoft.com/office/drawing/2014/main" id="{1A62F40B-CEF4-4E73-8BA6-E1C62026A737}"/>
+                <a16:creationId xmlns:a16="http://schemas.microsoft.com/office/drawing/2014/main" id="{2363D235-57C9-4351-9A50-7A29F78F38DB}"/>
               </a:ext>
             </a:extLst>
           </p:cNvPr>
@@ -23744,7 +23608,7 @@
           <p:cNvPr id="7" name="Shape 5">
             <a:extLst xmlns:a="http://schemas.openxmlformats.org/drawingml/2006/main">
               <a:ext uri="{FF2B5EF4-FFF2-40B4-BE49-F238E27FC236}">
-                <a16:creationId xmlns:a16="http://schemas.microsoft.com/office/drawing/2014/main" id="{8D8AD9F7-ECBF-4908-9CB0-FFA26E0E9B84}"/>
+                <a16:creationId xmlns:a16="http://schemas.microsoft.com/office/drawing/2014/main" id="{5B501747-16E0-4DE0-8640-CDB6A8737AF3}"/>
               </a:ext>
             </a:extLst>
           </p:cNvPr>
@@ -23783,7 +23647,7 @@
           <p:nvPr/>
         </p:nvPicPr>
         <p:blipFill>
-          <a:blip xmlns:r="http://schemas.openxmlformats.org/officeDocument/2006/relationships" xmlns:a="http://schemas.openxmlformats.org/drawingml/2006/main" r:embed="Re91a1762a3a84987"/>
+          <a:blip xmlns:r="http://schemas.openxmlformats.org/officeDocument/2006/relationships" xmlns:a="http://schemas.openxmlformats.org/drawingml/2006/main" r:embed="R2cff80e557394d5f"/>
           <a:stretch xmlns:a="http://schemas.openxmlformats.org/drawingml/2006/main">
             <a:fillRect l="0" t="0" r="0" b="0"/>
           </a:stretch>
@@ -23803,7 +23667,7 @@
           <p:cNvPr id="9" name="Shape 6">
             <a:extLst xmlns:a="http://schemas.openxmlformats.org/drawingml/2006/main">
               <a:ext uri="{FF2B5EF4-FFF2-40B4-BE49-F238E27FC236}">
-                <a16:creationId xmlns:a16="http://schemas.microsoft.com/office/drawing/2014/main" id="{EF11D244-CA64-404E-89C6-52AC99D6C35D}"/>
+                <a16:creationId xmlns:a16="http://schemas.microsoft.com/office/drawing/2014/main" id="{DA0E2A96-8D1E-4B41-8C8B-F9D8B6CC40FD}"/>
               </a:ext>
             </a:extLst>
           </p:cNvPr>
@@ -23836,7 +23700,7 @@
           <p:cNvPr id="10" name="Text 7">
             <a:extLst xmlns:a="http://schemas.openxmlformats.org/drawingml/2006/main">
               <a:ext uri="{FF2B5EF4-FFF2-40B4-BE49-F238E27FC236}">
-                <a16:creationId xmlns:a16="http://schemas.microsoft.com/office/drawing/2014/main" id="{6154A7DB-5EF4-4AEE-8B12-7037E6E2D013}"/>
+                <a16:creationId xmlns:a16="http://schemas.microsoft.com/office/drawing/2014/main" id="{0F9AC49A-7298-415D-A8E5-FE83B77C6BAC}"/>
               </a:ext>
             </a:extLst>
           </p:cNvPr>
@@ -23883,7 +23747,7 @@
           <p:cNvPr id="11" name="Shape 8">
             <a:extLst xmlns:a="http://schemas.openxmlformats.org/drawingml/2006/main">
               <a:ext uri="{FF2B5EF4-FFF2-40B4-BE49-F238E27FC236}">
-                <a16:creationId xmlns:a16="http://schemas.microsoft.com/office/drawing/2014/main" id="{24F58BEF-C00B-4B44-859C-1A14005A8B03}"/>
+                <a16:creationId xmlns:a16="http://schemas.microsoft.com/office/drawing/2014/main" id="{5648A192-1D4A-47D7-8A08-B60492EC942D}"/>
               </a:ext>
             </a:extLst>
           </p:cNvPr>
@@ -23918,7 +23782,7 @@
           <p:cNvPr id="12" name="Text 9">
             <a:extLst xmlns:a="http://schemas.openxmlformats.org/drawingml/2006/main">
               <a:ext uri="{FF2B5EF4-FFF2-40B4-BE49-F238E27FC236}">
-                <a16:creationId xmlns:a16="http://schemas.microsoft.com/office/drawing/2014/main" id="{8E2D2B54-DA0D-41B7-AAA1-EEA14FF00953}"/>
+                <a16:creationId xmlns:a16="http://schemas.microsoft.com/office/drawing/2014/main" id="{148AC2AD-898C-4CE2-BB59-73B75493D153}"/>
               </a:ext>
             </a:extLst>
           </p:cNvPr>
@@ -23965,7 +23829,7 @@
           <p:cNvPr id="13" name="Text 10">
             <a:extLst xmlns:a="http://schemas.openxmlformats.org/drawingml/2006/main">
               <a:ext uri="{FF2B5EF4-FFF2-40B4-BE49-F238E27FC236}">
-                <a16:creationId xmlns:a16="http://schemas.microsoft.com/office/drawing/2014/main" id="{80FA2EC5-F684-4F77-9A49-46C4B6226372}"/>
+                <a16:creationId xmlns:a16="http://schemas.microsoft.com/office/drawing/2014/main" id="{A8315EB4-9E09-4026-80D4-A0E18BEAFA94}"/>
               </a:ext>
             </a:extLst>
           </p:cNvPr>
@@ -24012,7 +23876,7 @@
           <p:cNvPr id="14" name="Shape 11">
             <a:extLst xmlns:a="http://schemas.openxmlformats.org/drawingml/2006/main">
               <a:ext uri="{FF2B5EF4-FFF2-40B4-BE49-F238E27FC236}">
-                <a16:creationId xmlns:a16="http://schemas.microsoft.com/office/drawing/2014/main" id="{75A587DD-1A5F-4203-B31B-1D7B089B1C9A}"/>
+                <a16:creationId xmlns:a16="http://schemas.microsoft.com/office/drawing/2014/main" id="{FC7CC785-9E7D-4642-A791-4E87100A6477}"/>
               </a:ext>
             </a:extLst>
           </p:cNvPr>
@@ -24047,7 +23911,7 @@
           <p:cNvPr id="15" name="Text 12">
             <a:extLst xmlns:a="http://schemas.openxmlformats.org/drawingml/2006/main">
               <a:ext uri="{FF2B5EF4-FFF2-40B4-BE49-F238E27FC236}">
-                <a16:creationId xmlns:a16="http://schemas.microsoft.com/office/drawing/2014/main" id="{EB465094-BAFF-4011-9B1D-F63B1E9F6567}"/>
+                <a16:creationId xmlns:a16="http://schemas.microsoft.com/office/drawing/2014/main" id="{887BED1B-71F1-4314-8452-A4186820FE3A}"/>
               </a:ext>
             </a:extLst>
           </p:cNvPr>
@@ -24094,7 +23958,7 @@
           <p:cNvPr id="16" name="Text 13">
             <a:extLst xmlns:a="http://schemas.openxmlformats.org/drawingml/2006/main">
               <a:ext uri="{FF2B5EF4-FFF2-40B4-BE49-F238E27FC236}">
-                <a16:creationId xmlns:a16="http://schemas.microsoft.com/office/drawing/2014/main" id="{7144ADCB-CF57-4F46-AF0B-E6DEADCD0D2E}"/>
+                <a16:creationId xmlns:a16="http://schemas.microsoft.com/office/drawing/2014/main" id="{0B63DB1D-0A47-46BA-B5B1-25251764A61F}"/>
               </a:ext>
             </a:extLst>
           </p:cNvPr>
@@ -24141,7 +24005,7 @@
           <p:cNvPr id="17" name="Text 14">
             <a:extLst xmlns:a="http://schemas.openxmlformats.org/drawingml/2006/main">
               <a:ext uri="{FF2B5EF4-FFF2-40B4-BE49-F238E27FC236}">
-                <a16:creationId xmlns:a16="http://schemas.microsoft.com/office/drawing/2014/main" id="{F254D425-D01C-4BC2-BCDC-AEB240C2F871}"/>
+                <a16:creationId xmlns:a16="http://schemas.microsoft.com/office/drawing/2014/main" id="{B3102F0B-BE35-41CD-9B7E-78F129E0C495}"/>
               </a:ext>
             </a:extLst>
           </p:cNvPr>
@@ -24188,7 +24052,7 @@
           <p:cNvPr id="18" name="Shape 15">
             <a:extLst xmlns:a="http://schemas.openxmlformats.org/drawingml/2006/main">
               <a:ext uri="{FF2B5EF4-FFF2-40B4-BE49-F238E27FC236}">
-                <a16:creationId xmlns:a16="http://schemas.microsoft.com/office/drawing/2014/main" id="{C68D0F06-8951-454C-BA63-DA52D5359ABB}"/>
+                <a16:creationId xmlns:a16="http://schemas.microsoft.com/office/drawing/2014/main" id="{F40AC6FC-FD01-4B39-A89A-8E3CD4F412E7}"/>
               </a:ext>
             </a:extLst>
           </p:cNvPr>
@@ -24223,7 +24087,7 @@
           <p:cNvPr id="19" name="Text 16">
             <a:extLst xmlns:a="http://schemas.openxmlformats.org/drawingml/2006/main">
               <a:ext uri="{FF2B5EF4-FFF2-40B4-BE49-F238E27FC236}">
-                <a16:creationId xmlns:a16="http://schemas.microsoft.com/office/drawing/2014/main" id="{A7FDA8F6-90BF-42B4-8C4F-7E2D0551E0BE}"/>
+                <a16:creationId xmlns:a16="http://schemas.microsoft.com/office/drawing/2014/main" id="{E339AC7C-639B-4E2B-82D6-E440FD98A269}"/>
               </a:ext>
             </a:extLst>
           </p:cNvPr>
@@ -24270,7 +24134,7 @@
           <p:cNvPr id="20" name="Text 17">
             <a:extLst xmlns:a="http://schemas.openxmlformats.org/drawingml/2006/main">
               <a:ext uri="{FF2B5EF4-FFF2-40B4-BE49-F238E27FC236}">
-                <a16:creationId xmlns:a16="http://schemas.microsoft.com/office/drawing/2014/main" id="{40830656-FB0E-446A-B9DB-4C31AEFE22E1}"/>
+                <a16:creationId xmlns:a16="http://schemas.microsoft.com/office/drawing/2014/main" id="{3C5F8B8B-49CC-4BE5-8137-592177D5E53B}"/>
               </a:ext>
             </a:extLst>
           </p:cNvPr>
@@ -24317,7 +24181,7 @@
           <p:cNvPr id="21" name="Text 18">
             <a:extLst xmlns:a="http://schemas.openxmlformats.org/drawingml/2006/main">
               <a:ext uri="{FF2B5EF4-FFF2-40B4-BE49-F238E27FC236}">
-                <a16:creationId xmlns:a16="http://schemas.microsoft.com/office/drawing/2014/main" id="{94E6824A-C3A9-417C-9ED4-0D408FA796A1}"/>
+                <a16:creationId xmlns:a16="http://schemas.microsoft.com/office/drawing/2014/main" id="{B6424B61-E244-4EDF-9BAE-F673B5940275}"/>
               </a:ext>
             </a:extLst>
           </p:cNvPr>
@@ -24364,7 +24228,7 @@
           <p:cNvPr id="22" name="Shape 19">
             <a:extLst xmlns:a="http://schemas.openxmlformats.org/drawingml/2006/main">
               <a:ext uri="{FF2B5EF4-FFF2-40B4-BE49-F238E27FC236}">
-                <a16:creationId xmlns:a16="http://schemas.microsoft.com/office/drawing/2014/main" id="{F005F4B0-0C70-47BC-B0D5-EE0C92A5F664}"/>
+                <a16:creationId xmlns:a16="http://schemas.microsoft.com/office/drawing/2014/main" id="{359261A4-039A-4A02-8691-7A34AD5D4AF4}"/>
               </a:ext>
             </a:extLst>
           </p:cNvPr>
@@ -24399,7 +24263,7 @@
           <p:cNvPr id="23" name="Text 20">
             <a:extLst xmlns:a="http://schemas.openxmlformats.org/drawingml/2006/main">
               <a:ext uri="{FF2B5EF4-FFF2-40B4-BE49-F238E27FC236}">
-                <a16:creationId xmlns:a16="http://schemas.microsoft.com/office/drawing/2014/main" id="{A48B7447-4F2B-4BA1-B510-638DF1E601EC}"/>
+                <a16:creationId xmlns:a16="http://schemas.microsoft.com/office/drawing/2014/main" id="{FBF12414-480C-44FF-872C-703D29E1AA7E}"/>
               </a:ext>
             </a:extLst>
           </p:cNvPr>
@@ -24446,7 +24310,7 @@
           <p:cNvPr id="24" name="Text 21">
             <a:extLst xmlns:a="http://schemas.openxmlformats.org/drawingml/2006/main">
               <a:ext uri="{FF2B5EF4-FFF2-40B4-BE49-F238E27FC236}">
-                <a16:creationId xmlns:a16="http://schemas.microsoft.com/office/drawing/2014/main" id="{EC5724F7-65AE-4D3F-A808-729B1FB05063}"/>
+                <a16:creationId xmlns:a16="http://schemas.microsoft.com/office/drawing/2014/main" id="{5BBA8681-1551-4F9C-8A40-360FAE6F2478}"/>
               </a:ext>
             </a:extLst>
           </p:cNvPr>
@@ -24493,7 +24357,7 @@
           <p:cNvPr id="25" name="Text 22">
             <a:extLst xmlns:a="http://schemas.openxmlformats.org/drawingml/2006/main">
               <a:ext uri="{FF2B5EF4-FFF2-40B4-BE49-F238E27FC236}">
-                <a16:creationId xmlns:a16="http://schemas.microsoft.com/office/drawing/2014/main" id="{E1867A05-8B5B-45FC-A95B-27327067FE40}"/>
+                <a16:creationId xmlns:a16="http://schemas.microsoft.com/office/drawing/2014/main" id="{94128545-A753-4AE9-8EAA-C766D0CB67D8}"/>
               </a:ext>
             </a:extLst>
           </p:cNvPr>
@@ -24540,7 +24404,7 @@
           <p:cNvPr id="26" name="Shape 23">
             <a:extLst xmlns:a="http://schemas.openxmlformats.org/drawingml/2006/main">
               <a:ext uri="{FF2B5EF4-FFF2-40B4-BE49-F238E27FC236}">
-                <a16:creationId xmlns:a16="http://schemas.microsoft.com/office/drawing/2014/main" id="{C78DB5E6-7DA2-453F-98E9-DC96DA689E20}"/>
+                <a16:creationId xmlns:a16="http://schemas.microsoft.com/office/drawing/2014/main" id="{972D4801-5A9E-43F7-ACFC-4F6349B66635}"/>
               </a:ext>
             </a:extLst>
           </p:cNvPr>
@@ -24575,7 +24439,7 @@
           <p:cNvPr id="27" name="Text 24">
             <a:extLst xmlns:a="http://schemas.openxmlformats.org/drawingml/2006/main">
               <a:ext uri="{FF2B5EF4-FFF2-40B4-BE49-F238E27FC236}">
-                <a16:creationId xmlns:a16="http://schemas.microsoft.com/office/drawing/2014/main" id="{DE42321D-83A6-429C-97D0-60E58F905889}"/>
+                <a16:creationId xmlns:a16="http://schemas.microsoft.com/office/drawing/2014/main" id="{63E9CFB1-4D66-47E6-8B73-E707F6239111}"/>
               </a:ext>
             </a:extLst>
           </p:cNvPr>
@@ -24622,7 +24486,7 @@
           <p:cNvPr id="28" name="Text 25">
             <a:extLst xmlns:a="http://schemas.openxmlformats.org/drawingml/2006/main">
               <a:ext uri="{FF2B5EF4-FFF2-40B4-BE49-F238E27FC236}">
-                <a16:creationId xmlns:a16="http://schemas.microsoft.com/office/drawing/2014/main" id="{D36F31EE-BD1C-405B-A5A6-6AD5524B48E2}"/>
+                <a16:creationId xmlns:a16="http://schemas.microsoft.com/office/drawing/2014/main" id="{5E81DD6C-70B2-426A-8A76-DD050CD8EDF3}"/>
               </a:ext>
             </a:extLst>
           </p:cNvPr>
@@ -24669,7 +24533,7 @@
           <p:cNvPr id="29" name="Text 26">
             <a:extLst xmlns:a="http://schemas.openxmlformats.org/drawingml/2006/main">
               <a:ext uri="{FF2B5EF4-FFF2-40B4-BE49-F238E27FC236}">
-                <a16:creationId xmlns:a16="http://schemas.microsoft.com/office/drawing/2014/main" id="{6762F2C3-43D7-4AE7-AD3C-098D856661D9}"/>
+                <a16:creationId xmlns:a16="http://schemas.microsoft.com/office/drawing/2014/main" id="{0D345F10-9A9F-4A48-AF16-6A45E68BCD28}"/>
               </a:ext>
             </a:extLst>
           </p:cNvPr>
@@ -24716,7 +24580,7 @@
           <p:cNvPr id="30" name="Text 27">
             <a:extLst xmlns:a="http://schemas.openxmlformats.org/drawingml/2006/main">
               <a:ext uri="{FF2B5EF4-FFF2-40B4-BE49-F238E27FC236}">
-                <a16:creationId xmlns:a16="http://schemas.microsoft.com/office/drawing/2014/main" id="{678EC810-5D2A-43D0-ABFC-4B88A354D45D}"/>
+                <a16:creationId xmlns:a16="http://schemas.microsoft.com/office/drawing/2014/main" id="{6FCAD8C1-3812-4BD2-918D-C639E0C1713D}"/>
               </a:ext>
             </a:extLst>
           </p:cNvPr>
@@ -24763,7 +24627,7 @@
           <p:cNvPr id="31" name="Text 28">
             <a:extLst xmlns:a="http://schemas.openxmlformats.org/drawingml/2006/main">
               <a:ext uri="{FF2B5EF4-FFF2-40B4-BE49-F238E27FC236}">
-                <a16:creationId xmlns:a16="http://schemas.microsoft.com/office/drawing/2014/main" id="{0762386D-0322-4FA1-BBD2-435B5D56DDC3}"/>
+                <a16:creationId xmlns:a16="http://schemas.microsoft.com/office/drawing/2014/main" id="{A571657B-B5A4-4007-9FA0-0BA6DFCF9057}"/>
               </a:ext>
             </a:extLst>
           </p:cNvPr>
@@ -24808,7 +24672,7 @@
     </p:spTree>
     <p:extLst>
       <p:ext uri="{BB962C8B-B14F-4D97-AF65-F5344CB8AC3E}">
-        <p14:creationId xmlns:p14="http://schemas.microsoft.com/office/powerpoint/2010/main" val="1932918227"/>
+        <p14:creationId xmlns:p14="http://schemas.microsoft.com/office/powerpoint/2010/main" val="60783165"/>
       </p:ext>
     </p:extLst>
   </p:cSld>
@@ -24839,7 +24703,7 @@
           <p:cNvPr id="2" name="Text 0">
             <a:extLst xmlns:a="http://schemas.openxmlformats.org/drawingml/2006/main">
               <a:ext uri="{FF2B5EF4-FFF2-40B4-BE49-F238E27FC236}">
-                <a16:creationId xmlns:a16="http://schemas.microsoft.com/office/drawing/2014/main" id="{22A5DA05-1952-483F-A132-DD7A2353A4C9}"/>
+                <a16:creationId xmlns:a16="http://schemas.microsoft.com/office/drawing/2014/main" id="{2CCCCBC0-07A1-4941-99EE-92C2733A33BC}"/>
               </a:ext>
             </a:extLst>
           </p:cNvPr>
@@ -24886,7 +24750,7 @@
           <p:cNvPr id="3" name="Text 1">
             <a:extLst xmlns:a="http://schemas.openxmlformats.org/drawingml/2006/main">
               <a:ext uri="{FF2B5EF4-FFF2-40B4-BE49-F238E27FC236}">
-                <a16:creationId xmlns:a16="http://schemas.microsoft.com/office/drawing/2014/main" id="{58312E0E-6033-4519-9811-3C0FF9D61E04}"/>
+                <a16:creationId xmlns:a16="http://schemas.microsoft.com/office/drawing/2014/main" id="{185D9D70-3589-48E8-B59E-51F489E195A6}"/>
               </a:ext>
             </a:extLst>
           </p:cNvPr>
@@ -24933,7 +24797,7 @@
           <p:cNvPr id="4" name="Shape 2">
             <a:extLst xmlns:a="http://schemas.openxmlformats.org/drawingml/2006/main">
               <a:ext uri="{FF2B5EF4-FFF2-40B4-BE49-F238E27FC236}">
-                <a16:creationId xmlns:a16="http://schemas.microsoft.com/office/drawing/2014/main" id="{51857FDD-704E-48CE-B0B8-9F8F46D1AD13}"/>
+                <a16:creationId xmlns:a16="http://schemas.microsoft.com/office/drawing/2014/main" id="{F95BBC7A-7EC7-467D-862A-F0FACE3A3E82}"/>
               </a:ext>
             </a:extLst>
           </p:cNvPr>
@@ -24968,7 +24832,7 @@
           <p:cNvPr id="5" name="Text 3">
             <a:extLst xmlns:a="http://schemas.openxmlformats.org/drawingml/2006/main">
               <a:ext uri="{FF2B5EF4-FFF2-40B4-BE49-F238E27FC236}">
-                <a16:creationId xmlns:a16="http://schemas.microsoft.com/office/drawing/2014/main" id="{6D58C7D5-8D02-4DE3-BD29-1ED43FAFD20B}"/>
+                <a16:creationId xmlns:a16="http://schemas.microsoft.com/office/drawing/2014/main" id="{9A7A6E06-68E0-4C64-A423-285F6F3A4ECD}"/>
               </a:ext>
             </a:extLst>
           </p:cNvPr>
@@ -25015,7 +24879,7 @@
           <p:cNvPr id="6" name="Shape 4">
             <a:extLst xmlns:a="http://schemas.openxmlformats.org/drawingml/2006/main">
               <a:ext uri="{FF2B5EF4-FFF2-40B4-BE49-F238E27FC236}">
-                <a16:creationId xmlns:a16="http://schemas.microsoft.com/office/drawing/2014/main" id="{881BF14C-B225-4E8B-A7A7-CF8CBF55F25C}"/>
+                <a16:creationId xmlns:a16="http://schemas.microsoft.com/office/drawing/2014/main" id="{AD2EBE97-E7A4-4BF7-99D4-20BC1070EEA3}"/>
               </a:ext>
             </a:extLst>
           </p:cNvPr>
@@ -25046,7 +24910,7 @@
           <p:cNvPr id="7" name="Shape 5">
             <a:extLst xmlns:a="http://schemas.openxmlformats.org/drawingml/2006/main">
               <a:ext uri="{FF2B5EF4-FFF2-40B4-BE49-F238E27FC236}">
-                <a16:creationId xmlns:a16="http://schemas.microsoft.com/office/drawing/2014/main" id="{A2F0C02E-2852-4989-935B-3B94D595FF4E}"/>
+                <a16:creationId xmlns:a16="http://schemas.microsoft.com/office/drawing/2014/main" id="{6D4C4854-496B-4EE2-B9AB-413DC5CE6D45}"/>
               </a:ext>
             </a:extLst>
           </p:cNvPr>
@@ -25081,7 +24945,7 @@
           <p:cNvPr id="8" name="Text 6">
             <a:extLst xmlns:a="http://schemas.openxmlformats.org/drawingml/2006/main">
               <a:ext uri="{FF2B5EF4-FFF2-40B4-BE49-F238E27FC236}">
-                <a16:creationId xmlns:a16="http://schemas.microsoft.com/office/drawing/2014/main" id="{CC6B8855-46B1-48D0-9C05-367CBAB3DD0C}"/>
+                <a16:creationId xmlns:a16="http://schemas.microsoft.com/office/drawing/2014/main" id="{536BB429-C121-48B2-BEEF-001E508F26D9}"/>
               </a:ext>
             </a:extLst>
           </p:cNvPr>
@@ -25128,7 +24992,7 @@
           <p:cNvPr id="9" name="Text 7">
             <a:extLst xmlns:a="http://schemas.openxmlformats.org/drawingml/2006/main">
               <a:ext uri="{FF2B5EF4-FFF2-40B4-BE49-F238E27FC236}">
-                <a16:creationId xmlns:a16="http://schemas.microsoft.com/office/drawing/2014/main" id="{C13FA6F7-DD98-4CC6-B613-49ECB51121D1}"/>
+                <a16:creationId xmlns:a16="http://schemas.microsoft.com/office/drawing/2014/main" id="{6EE0A5CC-9AE0-41D7-B2D1-45ED72122D2B}"/>
               </a:ext>
             </a:extLst>
           </p:cNvPr>
@@ -25175,7 +25039,7 @@
           <p:cNvPr id="10" name="Text 8">
             <a:extLst xmlns:a="http://schemas.openxmlformats.org/drawingml/2006/main">
               <a:ext uri="{FF2B5EF4-FFF2-40B4-BE49-F238E27FC236}">
-                <a16:creationId xmlns:a16="http://schemas.microsoft.com/office/drawing/2014/main" id="{30949BDD-0F10-403A-9BAC-880D7150F1D5}"/>
+                <a16:creationId xmlns:a16="http://schemas.microsoft.com/office/drawing/2014/main" id="{8E461E0C-30CD-43AE-9C4D-B4300C58396D}"/>
               </a:ext>
             </a:extLst>
           </p:cNvPr>
@@ -25222,7 +25086,7 @@
           <p:cNvPr id="11" name="Shape 9">
             <a:extLst xmlns:a="http://schemas.openxmlformats.org/drawingml/2006/main">
               <a:ext uri="{FF2B5EF4-FFF2-40B4-BE49-F238E27FC236}">
-                <a16:creationId xmlns:a16="http://schemas.microsoft.com/office/drawing/2014/main" id="{7E087A2C-AC72-4552-98C3-7BA064055082}"/>
+                <a16:creationId xmlns:a16="http://schemas.microsoft.com/office/drawing/2014/main" id="{729C9FB5-6A74-4C65-A2DE-9688969C767D}"/>
               </a:ext>
             </a:extLst>
           </p:cNvPr>
@@ -25257,7 +25121,7 @@
           <p:cNvPr id="12" name="Text 10">
             <a:extLst xmlns:a="http://schemas.openxmlformats.org/drawingml/2006/main">
               <a:ext uri="{FF2B5EF4-FFF2-40B4-BE49-F238E27FC236}">
-                <a16:creationId xmlns:a16="http://schemas.microsoft.com/office/drawing/2014/main" id="{3008B090-7534-4B96-AC4C-2FD29B1928B8}"/>
+                <a16:creationId xmlns:a16="http://schemas.microsoft.com/office/drawing/2014/main" id="{CB66FA00-A5D3-44D2-A205-66D66CE522FA}"/>
               </a:ext>
             </a:extLst>
           </p:cNvPr>
@@ -25304,7 +25168,7 @@
           <p:cNvPr id="13" name="Text 11">
             <a:extLst xmlns:a="http://schemas.openxmlformats.org/drawingml/2006/main">
               <a:ext uri="{FF2B5EF4-FFF2-40B4-BE49-F238E27FC236}">
-                <a16:creationId xmlns:a16="http://schemas.microsoft.com/office/drawing/2014/main" id="{80869D89-608F-4208-8837-8C70AC9557DD}"/>
+                <a16:creationId xmlns:a16="http://schemas.microsoft.com/office/drawing/2014/main" id="{B24F68F6-C765-49FE-B84D-F7C37D160394}"/>
               </a:ext>
             </a:extLst>
           </p:cNvPr>
@@ -25351,7 +25215,7 @@
           <p:cNvPr id="14" name="Text 12">
             <a:extLst xmlns:a="http://schemas.openxmlformats.org/drawingml/2006/main">
               <a:ext uri="{FF2B5EF4-FFF2-40B4-BE49-F238E27FC236}">
-                <a16:creationId xmlns:a16="http://schemas.microsoft.com/office/drawing/2014/main" id="{C8209601-F136-4FA1-9042-ECDDE69CD6A1}"/>
+                <a16:creationId xmlns:a16="http://schemas.microsoft.com/office/drawing/2014/main" id="{6DED0637-CAAF-40AD-8F54-A5C1F62A621C}"/>
               </a:ext>
             </a:extLst>
           </p:cNvPr>
@@ -25398,7 +25262,7 @@
           <p:cNvPr id="15" name="Shape 13">
             <a:extLst xmlns:a="http://schemas.openxmlformats.org/drawingml/2006/main">
               <a:ext uri="{FF2B5EF4-FFF2-40B4-BE49-F238E27FC236}">
-                <a16:creationId xmlns:a16="http://schemas.microsoft.com/office/drawing/2014/main" id="{55A4BEB8-F0F0-43BC-A57B-BC429111F6BF}"/>
+                <a16:creationId xmlns:a16="http://schemas.microsoft.com/office/drawing/2014/main" id="{D6DEDB90-4844-4740-BFA1-9CDFBF3130A4}"/>
               </a:ext>
             </a:extLst>
           </p:cNvPr>
@@ -25433,7 +25297,7 @@
           <p:cNvPr id="16" name="Text 14">
             <a:extLst xmlns:a="http://schemas.openxmlformats.org/drawingml/2006/main">
               <a:ext uri="{FF2B5EF4-FFF2-40B4-BE49-F238E27FC236}">
-                <a16:creationId xmlns:a16="http://schemas.microsoft.com/office/drawing/2014/main" id="{90B81176-F50D-4BE6-816C-3C7AE790A44C}"/>
+                <a16:creationId xmlns:a16="http://schemas.microsoft.com/office/drawing/2014/main" id="{9936236A-A4B0-4D6C-8DAB-96417927352D}"/>
               </a:ext>
             </a:extLst>
           </p:cNvPr>
@@ -25480,7 +25344,7 @@
           <p:cNvPr id="17" name="Text 15">
             <a:extLst xmlns:a="http://schemas.openxmlformats.org/drawingml/2006/main">
               <a:ext uri="{FF2B5EF4-FFF2-40B4-BE49-F238E27FC236}">
-                <a16:creationId xmlns:a16="http://schemas.microsoft.com/office/drawing/2014/main" id="{DD95776B-7C60-468E-88DA-7AEC429A042E}"/>
+                <a16:creationId xmlns:a16="http://schemas.microsoft.com/office/drawing/2014/main" id="{404F8288-38FC-4DE6-97EF-0BB04C71EA15}"/>
               </a:ext>
             </a:extLst>
           </p:cNvPr>
@@ -25527,7 +25391,7 @@
           <p:cNvPr id="18" name="Text 16">
             <a:extLst xmlns:a="http://schemas.openxmlformats.org/drawingml/2006/main">
               <a:ext uri="{FF2B5EF4-FFF2-40B4-BE49-F238E27FC236}">
-                <a16:creationId xmlns:a16="http://schemas.microsoft.com/office/drawing/2014/main" id="{E1027980-3FA3-4EA4-8037-E65789824705}"/>
+                <a16:creationId xmlns:a16="http://schemas.microsoft.com/office/drawing/2014/main" id="{F4DF7B43-1953-4BD7-A562-67E5E4DC8BB0}"/>
               </a:ext>
             </a:extLst>
           </p:cNvPr>
@@ -25574,7 +25438,7 @@
           <p:cNvPr id="19" name="Shape 17">
             <a:extLst xmlns:a="http://schemas.openxmlformats.org/drawingml/2006/main">
               <a:ext uri="{FF2B5EF4-FFF2-40B4-BE49-F238E27FC236}">
-                <a16:creationId xmlns:a16="http://schemas.microsoft.com/office/drawing/2014/main" id="{22B8D3F7-A315-41FD-BF18-F6FD2AE77E80}"/>
+                <a16:creationId xmlns:a16="http://schemas.microsoft.com/office/drawing/2014/main" id="{7A4C8D7B-08A5-44C4-8F12-EC884B06BC41}"/>
               </a:ext>
             </a:extLst>
           </p:cNvPr>
@@ -25609,7 +25473,7 @@
           <p:cNvPr id="20" name="Text 18">
             <a:extLst xmlns:a="http://schemas.openxmlformats.org/drawingml/2006/main">
               <a:ext uri="{FF2B5EF4-FFF2-40B4-BE49-F238E27FC236}">
-                <a16:creationId xmlns:a16="http://schemas.microsoft.com/office/drawing/2014/main" id="{91694E75-CCA6-4075-B88F-0B270F19D952}"/>
+                <a16:creationId xmlns:a16="http://schemas.microsoft.com/office/drawing/2014/main" id="{C7419836-A33E-4ABB-8AEF-34251D96DE1A}"/>
               </a:ext>
             </a:extLst>
           </p:cNvPr>
@@ -25656,7 +25520,7 @@
           <p:cNvPr id="21" name="Text 19">
             <a:extLst xmlns:a="http://schemas.openxmlformats.org/drawingml/2006/main">
               <a:ext uri="{FF2B5EF4-FFF2-40B4-BE49-F238E27FC236}">
-                <a16:creationId xmlns:a16="http://schemas.microsoft.com/office/drawing/2014/main" id="{D75903E6-B1A5-4082-B680-E44E7780F425}"/>
+                <a16:creationId xmlns:a16="http://schemas.microsoft.com/office/drawing/2014/main" id="{C760A053-35A7-40DF-970D-1E987D48DD11}"/>
               </a:ext>
             </a:extLst>
           </p:cNvPr>
@@ -25703,7 +25567,7 @@
           <p:cNvPr id="22" name="Text 20">
             <a:extLst xmlns:a="http://schemas.openxmlformats.org/drawingml/2006/main">
               <a:ext uri="{FF2B5EF4-FFF2-40B4-BE49-F238E27FC236}">
-                <a16:creationId xmlns:a16="http://schemas.microsoft.com/office/drawing/2014/main" id="{7C566098-F098-4C6B-9C45-561DB85990DF}"/>
+                <a16:creationId xmlns:a16="http://schemas.microsoft.com/office/drawing/2014/main" id="{A526FDE3-878F-4FB3-B49D-83C577E0EF08}"/>
               </a:ext>
             </a:extLst>
           </p:cNvPr>
@@ -25750,7 +25614,7 @@
           <p:cNvPr id="23" name="Shape 21">
             <a:extLst xmlns:a="http://schemas.openxmlformats.org/drawingml/2006/main">
               <a:ext uri="{FF2B5EF4-FFF2-40B4-BE49-F238E27FC236}">
-                <a16:creationId xmlns:a16="http://schemas.microsoft.com/office/drawing/2014/main" id="{0C0CEE9B-8F7D-47FD-8304-732B98E90655}"/>
+                <a16:creationId xmlns:a16="http://schemas.microsoft.com/office/drawing/2014/main" id="{ABCDA704-DFC2-45DC-ABD6-9759CDC49F2C}"/>
               </a:ext>
             </a:extLst>
           </p:cNvPr>
@@ -25785,7 +25649,7 @@
           <p:cNvPr id="24" name="Text 22">
             <a:extLst xmlns:a="http://schemas.openxmlformats.org/drawingml/2006/main">
               <a:ext uri="{FF2B5EF4-FFF2-40B4-BE49-F238E27FC236}">
-                <a16:creationId xmlns:a16="http://schemas.microsoft.com/office/drawing/2014/main" id="{66E6F696-4791-487E-AFAF-B0F3A52B508B}"/>
+                <a16:creationId xmlns:a16="http://schemas.microsoft.com/office/drawing/2014/main" id="{B6F75107-8AD7-4AF7-BA29-393776880E0F}"/>
               </a:ext>
             </a:extLst>
           </p:cNvPr>
@@ -25832,7 +25696,7 @@
           <p:cNvPr id="25" name="Text 23">
             <a:extLst xmlns:a="http://schemas.openxmlformats.org/drawingml/2006/main">
               <a:ext uri="{FF2B5EF4-FFF2-40B4-BE49-F238E27FC236}">
-                <a16:creationId xmlns:a16="http://schemas.microsoft.com/office/drawing/2014/main" id="{A8D3DE81-3BD5-44EC-A909-DF3C74969062}"/>
+                <a16:creationId xmlns:a16="http://schemas.microsoft.com/office/drawing/2014/main" id="{DD2B57CE-3255-4778-A2FD-9E354CD55447}"/>
               </a:ext>
             </a:extLst>
           </p:cNvPr>
@@ -25879,7 +25743,7 @@
           <p:cNvPr id="26" name="Text 24">
             <a:extLst xmlns:a="http://schemas.openxmlformats.org/drawingml/2006/main">
               <a:ext uri="{FF2B5EF4-FFF2-40B4-BE49-F238E27FC236}">
-                <a16:creationId xmlns:a16="http://schemas.microsoft.com/office/drawing/2014/main" id="{E2673F47-5D9B-4C4A-B843-8F9D90789F15}"/>
+                <a16:creationId xmlns:a16="http://schemas.microsoft.com/office/drawing/2014/main" id="{F9F440C2-A6A3-4B27-B578-F9F3010589C5}"/>
               </a:ext>
             </a:extLst>
           </p:cNvPr>
@@ -25926,7 +25790,7 @@
           <p:cNvPr id="27" name="Shape 25">
             <a:extLst xmlns:a="http://schemas.openxmlformats.org/drawingml/2006/main">
               <a:ext uri="{FF2B5EF4-FFF2-40B4-BE49-F238E27FC236}">
-                <a16:creationId xmlns:a16="http://schemas.microsoft.com/office/drawing/2014/main" id="{4937E100-9F39-4FC3-9AC1-B7A2BBA0CCCD}"/>
+                <a16:creationId xmlns:a16="http://schemas.microsoft.com/office/drawing/2014/main" id="{D970A545-7C1C-4EB2-AB80-7F7BFEC68B53}"/>
               </a:ext>
             </a:extLst>
           </p:cNvPr>
@@ -25961,7 +25825,7 @@
           <p:cNvPr id="28" name="Text 26">
             <a:extLst xmlns:a="http://schemas.openxmlformats.org/drawingml/2006/main">
               <a:ext uri="{FF2B5EF4-FFF2-40B4-BE49-F238E27FC236}">
-                <a16:creationId xmlns:a16="http://schemas.microsoft.com/office/drawing/2014/main" id="{7A137376-C9A7-417C-839D-5D12B9A1A1CF}"/>
+                <a16:creationId xmlns:a16="http://schemas.microsoft.com/office/drawing/2014/main" id="{2ECEF183-F22D-4083-9451-13251F3404D7}"/>
               </a:ext>
             </a:extLst>
           </p:cNvPr>
@@ -26008,7 +25872,7 @@
           <p:cNvPr id="29" name="Text 27">
             <a:extLst xmlns:a="http://schemas.openxmlformats.org/drawingml/2006/main">
               <a:ext uri="{FF2B5EF4-FFF2-40B4-BE49-F238E27FC236}">
-                <a16:creationId xmlns:a16="http://schemas.microsoft.com/office/drawing/2014/main" id="{41A4B341-DCED-4391-A3D8-6646DF79721B}"/>
+                <a16:creationId xmlns:a16="http://schemas.microsoft.com/office/drawing/2014/main" id="{33EC3443-D9CC-4E33-B78B-355144954916}"/>
               </a:ext>
             </a:extLst>
           </p:cNvPr>
@@ -26029,7 +25893,7 @@
         </p:spPr>
         <p:txBody>
           <a:bodyPr xmlns:a="http://schemas.openxmlformats.org/drawingml/2006/main" wrap="square" lIns="0" tIns="0" rIns="0" bIns="0" anchor="ctr">
-            <a:normAutofit/>
+            <a:normAutofit fontScale="100000"/>
           </a:bodyPr>
           <a:lstStyle xmlns:a="http://schemas.openxmlformats.org/drawingml/2006/main"/>
           <a:p xmlns:a="http://schemas.openxmlformats.org/drawingml/2006/main">
@@ -26045,7 +25909,7 @@
                 <a:ea typeface="PingFang SC"/>
                 <a:cs typeface="PingFang SC"/>
               </a:rPr>
-              <a:t>能力扩展</a:t>
+              <a:t>产品能力</a:t>
             </a:r>
           </a:p>
         </p:txBody>
@@ -26055,7 +25919,7 @@
           <p:cNvPr id="30" name="Text 28">
             <a:extLst xmlns:a="http://schemas.openxmlformats.org/drawingml/2006/main">
               <a:ext uri="{FF2B5EF4-FFF2-40B4-BE49-F238E27FC236}">
-                <a16:creationId xmlns:a16="http://schemas.microsoft.com/office/drawing/2014/main" id="{31287CD7-2F51-44C0-BA3E-369FAC2C7DF2}"/>
+                <a16:creationId xmlns:a16="http://schemas.microsoft.com/office/drawing/2014/main" id="{535EBADC-D809-4FC0-9669-6D66A7C3EAF0}"/>
               </a:ext>
             </a:extLst>
           </p:cNvPr>
@@ -26076,7 +25940,7 @@
         </p:spPr>
         <p:txBody>
           <a:bodyPr xmlns:a="http://schemas.openxmlformats.org/drawingml/2006/main" wrap="square" lIns="0" tIns="0" rIns="0" bIns="0" anchor="t">
-            <a:normAutofit/>
+            <a:normAutofit fontScale="100000"/>
           </a:bodyPr>
           <a:lstStyle xmlns:a="http://schemas.openxmlformats.org/drawingml/2006/main"/>
           <a:p xmlns:a="http://schemas.openxmlformats.org/drawingml/2006/main">
@@ -26092,7 +25956,7 @@
                 <a:ea typeface="PingFang SC"/>
                 <a:cs typeface="PingFang SC"/>
               </a:rPr>
-              <a:t>EBAI、技能与任务自动化</a:t>
+              <a:t>EBAI 命令、技能、规则与自动化</a:t>
             </a:r>
           </a:p>
         </p:txBody>
@@ -26102,7 +25966,7 @@
           <p:cNvPr id="31" name="Shape 29">
             <a:extLst xmlns:a="http://schemas.openxmlformats.org/drawingml/2006/main">
               <a:ext uri="{FF2B5EF4-FFF2-40B4-BE49-F238E27FC236}">
-                <a16:creationId xmlns:a16="http://schemas.microsoft.com/office/drawing/2014/main" id="{44040715-D00A-42F6-B78D-71B439F475B6}"/>
+                <a16:creationId xmlns:a16="http://schemas.microsoft.com/office/drawing/2014/main" id="{94544119-A1F2-43BB-85AE-D89D334A4B2A}"/>
               </a:ext>
             </a:extLst>
           </p:cNvPr>
@@ -26137,7 +26001,7 @@
           <p:cNvPr id="32" name="Text 30">
             <a:extLst xmlns:a="http://schemas.openxmlformats.org/drawingml/2006/main">
               <a:ext uri="{FF2B5EF4-FFF2-40B4-BE49-F238E27FC236}">
-                <a16:creationId xmlns:a16="http://schemas.microsoft.com/office/drawing/2014/main" id="{A93686EC-9430-4639-8F0A-63B29E47C7F9}"/>
+                <a16:creationId xmlns:a16="http://schemas.microsoft.com/office/drawing/2014/main" id="{899B7ECA-6AAE-4015-9786-34EC2714531B}"/>
               </a:ext>
             </a:extLst>
           </p:cNvPr>
@@ -26184,7 +26048,7 @@
           <p:cNvPr id="33" name="Text 31">
             <a:extLst xmlns:a="http://schemas.openxmlformats.org/drawingml/2006/main">
               <a:ext uri="{FF2B5EF4-FFF2-40B4-BE49-F238E27FC236}">
-                <a16:creationId xmlns:a16="http://schemas.microsoft.com/office/drawing/2014/main" id="{FCC41A83-6BB5-4551-ADD2-1A4AA702EBD6}"/>
+                <a16:creationId xmlns:a16="http://schemas.microsoft.com/office/drawing/2014/main" id="{66EBCDFD-3196-447A-A4C4-33AC1B65BAC1}"/>
               </a:ext>
             </a:extLst>
           </p:cNvPr>
@@ -26231,7 +26095,7 @@
           <p:cNvPr id="34" name="Text 32">
             <a:extLst xmlns:a="http://schemas.openxmlformats.org/drawingml/2006/main">
               <a:ext uri="{FF2B5EF4-FFF2-40B4-BE49-F238E27FC236}">
-                <a16:creationId xmlns:a16="http://schemas.microsoft.com/office/drawing/2014/main" id="{86D3700D-EA09-41E6-8140-E350F7A00757}"/>
+                <a16:creationId xmlns:a16="http://schemas.microsoft.com/office/drawing/2014/main" id="{435F28C3-F640-4BE8-B3FC-2B992307A4C6}"/>
               </a:ext>
             </a:extLst>
           </p:cNvPr>
@@ -26278,7 +26142,7 @@
           <p:cNvPr id="35" name="Text 33">
             <a:extLst xmlns:a="http://schemas.openxmlformats.org/drawingml/2006/main">
               <a:ext uri="{FF2B5EF4-FFF2-40B4-BE49-F238E27FC236}">
-                <a16:creationId xmlns:a16="http://schemas.microsoft.com/office/drawing/2014/main" id="{CCB03836-604F-4E06-BF99-08F29E459F8E}"/>
+                <a16:creationId xmlns:a16="http://schemas.microsoft.com/office/drawing/2014/main" id="{6286D45E-A0F2-4CA7-98AD-02DC68F33A67}"/>
               </a:ext>
             </a:extLst>
           </p:cNvPr>
@@ -26325,7 +26189,7 @@
           <p:cNvPr id="36" name="Text 34">
             <a:extLst xmlns:a="http://schemas.openxmlformats.org/drawingml/2006/main">
               <a:ext uri="{FF2B5EF4-FFF2-40B4-BE49-F238E27FC236}">
-                <a16:creationId xmlns:a16="http://schemas.microsoft.com/office/drawing/2014/main" id="{9B927886-A3EA-45B6-B055-C9BCD3234214}"/>
+                <a16:creationId xmlns:a16="http://schemas.microsoft.com/office/drawing/2014/main" id="{D19EB7F7-970B-4DA9-862C-E0940CA5FE54}"/>
               </a:ext>
             </a:extLst>
           </p:cNvPr>
@@ -26372,7 +26236,7 @@
           <p:cNvPr id="37" name="Text 35">
             <a:extLst xmlns:a="http://schemas.openxmlformats.org/drawingml/2006/main">
               <a:ext uri="{FF2B5EF4-FFF2-40B4-BE49-F238E27FC236}">
-                <a16:creationId xmlns:a16="http://schemas.microsoft.com/office/drawing/2014/main" id="{8BF97F1B-5357-4A04-8314-0061DA361EFC}"/>
+                <a16:creationId xmlns:a16="http://schemas.microsoft.com/office/drawing/2014/main" id="{03538158-C3CE-4CF3-8F8F-4BE87536CF91}"/>
               </a:ext>
             </a:extLst>
           </p:cNvPr>
@@ -26419,7 +26283,7 @@
           <p:cNvPr id="38" name="Text 36">
             <a:extLst xmlns:a="http://schemas.openxmlformats.org/drawingml/2006/main">
               <a:ext uri="{FF2B5EF4-FFF2-40B4-BE49-F238E27FC236}">
-                <a16:creationId xmlns:a16="http://schemas.microsoft.com/office/drawing/2014/main" id="{6422D67D-5B3D-4126-A582-1D6DF103A0EF}"/>
+                <a16:creationId xmlns:a16="http://schemas.microsoft.com/office/drawing/2014/main" id="{7C7A591E-7212-4357-A8C9-6C8D85406130}"/>
               </a:ext>
             </a:extLst>
           </p:cNvPr>
@@ -26466,7 +26330,7 @@
           <p:cNvPr id="39" name="Text 37">
             <a:extLst xmlns:a="http://schemas.openxmlformats.org/drawingml/2006/main">
               <a:ext uri="{FF2B5EF4-FFF2-40B4-BE49-F238E27FC236}">
-                <a16:creationId xmlns:a16="http://schemas.microsoft.com/office/drawing/2014/main" id="{B136C637-A438-4D9F-A3C3-B9FA763F3753}"/>
+                <a16:creationId xmlns:a16="http://schemas.microsoft.com/office/drawing/2014/main" id="{F58B022E-3B1D-4698-94D9-49E441E54CBA}"/>
               </a:ext>
             </a:extLst>
           </p:cNvPr>
@@ -26513,7 +26377,7 @@
           <p:cNvPr id="40" name="Text 38">
             <a:extLst xmlns:a="http://schemas.openxmlformats.org/drawingml/2006/main">
               <a:ext uri="{FF2B5EF4-FFF2-40B4-BE49-F238E27FC236}">
-                <a16:creationId xmlns:a16="http://schemas.microsoft.com/office/drawing/2014/main" id="{09940DF0-9038-4AA6-B283-662936D413F9}"/>
+                <a16:creationId xmlns:a16="http://schemas.microsoft.com/office/drawing/2014/main" id="{F1A107DE-EEF0-4C63-9576-E551103F7D5E}"/>
               </a:ext>
             </a:extLst>
           </p:cNvPr>
@@ -26560,7 +26424,7 @@
           <p:cNvPr id="41" name="Text 39">
             <a:extLst xmlns:a="http://schemas.openxmlformats.org/drawingml/2006/main">
               <a:ext uri="{FF2B5EF4-FFF2-40B4-BE49-F238E27FC236}">
-                <a16:creationId xmlns:a16="http://schemas.microsoft.com/office/drawing/2014/main" id="{8F0DAA9D-855E-415C-96C8-F13836C93362}"/>
+                <a16:creationId xmlns:a16="http://schemas.microsoft.com/office/drawing/2014/main" id="{BC2D0E78-AB0F-4F2D-941C-B0247D532ED7}"/>
               </a:ext>
             </a:extLst>
           </p:cNvPr>
@@ -26597,7 +26461,7 @@
                 <a:ea typeface="Aptos Display"/>
                 <a:cs typeface="Aptos Display"/>
               </a:rPr>
-              <a:t>EBAI</a:t>
+              <a:t>5</a:t>
             </a:r>
           </a:p>
         </p:txBody>
@@ -26607,7 +26471,7 @@
           <p:cNvPr id="42" name="Text 40">
             <a:extLst xmlns:a="http://schemas.openxmlformats.org/drawingml/2006/main">
               <a:ext uri="{FF2B5EF4-FFF2-40B4-BE49-F238E27FC236}">
-                <a16:creationId xmlns:a16="http://schemas.microsoft.com/office/drawing/2014/main" id="{B0F5306B-A4FB-4200-8955-6F041159E513}"/>
+                <a16:creationId xmlns:a16="http://schemas.microsoft.com/office/drawing/2014/main" id="{F1D986C6-E2D8-46A8-9D51-4C928BB10098}"/>
               </a:ext>
             </a:extLst>
           </p:cNvPr>
@@ -26644,7 +26508,7 @@
                 <a:ea typeface="PingFang SC"/>
                 <a:cs typeface="PingFang SC"/>
               </a:rPr>
-              <a:t>能力映射</a:t>
+              <a:t>EBAI 能力形态</a:t>
             </a:r>
           </a:p>
         </p:txBody>
@@ -26654,7 +26518,7 @@
           <p:cNvPr id="43" name="Text 41">
             <a:extLst xmlns:a="http://schemas.openxmlformats.org/drawingml/2006/main">
               <a:ext uri="{FF2B5EF4-FFF2-40B4-BE49-F238E27FC236}">
-                <a16:creationId xmlns:a16="http://schemas.microsoft.com/office/drawing/2014/main" id="{BE85DD82-F7B0-41DE-86AB-E93A4F0FEE9B}"/>
+                <a16:creationId xmlns:a16="http://schemas.microsoft.com/office/drawing/2014/main" id="{E9F282E3-C54D-4089-91C9-B0841192C460}"/>
               </a:ext>
             </a:extLst>
           </p:cNvPr>
@@ -26691,7 +26555,7 @@
                 <a:ea typeface="PingFang SC"/>
                 <a:cs typeface="PingFang SC"/>
               </a:rPr>
-              <a:t>安装与启用分离</a:t>
+              <a:t>Command · Agent · Skill · Rule · Hook</a:t>
             </a:r>
           </a:p>
         </p:txBody>
@@ -26701,7 +26565,7 @@
           <p:cNvPr id="44" name="Text 42">
             <a:extLst xmlns:a="http://schemas.openxmlformats.org/drawingml/2006/main">
               <a:ext uri="{FF2B5EF4-FFF2-40B4-BE49-F238E27FC236}">
-                <a16:creationId xmlns:a16="http://schemas.microsoft.com/office/drawing/2014/main" id="{A9BE9D1F-E196-4EF6-8A4E-CCD04D0BBBC3}"/>
+                <a16:creationId xmlns:a16="http://schemas.microsoft.com/office/drawing/2014/main" id="{8246ABCF-F4DC-4F1B-B930-3CC3B512FF40}"/>
               </a:ext>
             </a:extLst>
           </p:cNvPr>
@@ -26748,7 +26612,7 @@
           <p:cNvPr id="45" name="Text 43">
             <a:extLst xmlns:a="http://schemas.openxmlformats.org/drawingml/2006/main">
               <a:ext uri="{FF2B5EF4-FFF2-40B4-BE49-F238E27FC236}">
-                <a16:creationId xmlns:a16="http://schemas.microsoft.com/office/drawing/2014/main" id="{8179BB57-B8BF-4F53-9531-83D39EB493C5}"/>
+                <a16:creationId xmlns:a16="http://schemas.microsoft.com/office/drawing/2014/main" id="{90B79568-7810-480E-BC63-424AA90C43BF}"/>
               </a:ext>
             </a:extLst>
           </p:cNvPr>
@@ -26795,7 +26659,7 @@
           <p:cNvPr id="46" name="Text 44">
             <a:extLst xmlns:a="http://schemas.openxmlformats.org/drawingml/2006/main">
               <a:ext uri="{FF2B5EF4-FFF2-40B4-BE49-F238E27FC236}">
-                <a16:creationId xmlns:a16="http://schemas.microsoft.com/office/drawing/2014/main" id="{4D6DB9BA-167A-4A1E-B751-1C4B82A8B967}"/>
+                <a16:creationId xmlns:a16="http://schemas.microsoft.com/office/drawing/2014/main" id="{25DFDF3C-EC12-4D28-A774-EB1BB05A5761}"/>
               </a:ext>
             </a:extLst>
           </p:cNvPr>
@@ -26842,7 +26706,7 @@
           <p:cNvPr id="47" name="Text 45">
             <a:extLst xmlns:a="http://schemas.openxmlformats.org/drawingml/2006/main">
               <a:ext uri="{FF2B5EF4-FFF2-40B4-BE49-F238E27FC236}">
-                <a16:creationId xmlns:a16="http://schemas.microsoft.com/office/drawing/2014/main" id="{1D6DAA45-3F0D-464E-8096-EE11588C577B}"/>
+                <a16:creationId xmlns:a16="http://schemas.microsoft.com/office/drawing/2014/main" id="{5857731E-896F-44C4-B17C-DFC321933749}"/>
               </a:ext>
             </a:extLst>
           </p:cNvPr>
@@ -26863,7 +26727,7 @@
         </p:spPr>
         <p:txBody>
           <a:bodyPr xmlns:a="http://schemas.openxmlformats.org/drawingml/2006/main" wrap="square" lIns="0" tIns="0" rIns="0" bIns="0" anchor="ctr">
-            <a:normAutofit/>
+            <a:normAutofit fontScale="100000"/>
           </a:bodyPr>
           <a:lstStyle xmlns:a="http://schemas.openxmlformats.org/drawingml/2006/main"/>
           <a:p xmlns:a="http://schemas.openxmlformats.org/drawingml/2006/main">
@@ -26879,7 +26743,7 @@
                 <a:ea typeface="Aptos"/>
                 <a:cs typeface="Aptos"/>
               </a:rPr>
-              <a:t>当前实现证据：README · runtime adapter · EBAI mapping tests</a:t>
+              <a:t>当前实现证据：README · runtime adapter · EBAI capability tests</a:t>
             </a:r>
           </a:p>
         </p:txBody>
@@ -26889,7 +26753,7 @@
           <p:cNvPr id="48" name="Text 46">
             <a:extLst xmlns:a="http://schemas.openxmlformats.org/drawingml/2006/main">
               <a:ext uri="{FF2B5EF4-FFF2-40B4-BE49-F238E27FC236}">
-                <a16:creationId xmlns:a16="http://schemas.microsoft.com/office/drawing/2014/main" id="{CD9913E1-9D41-4551-89F0-B8B22D5264AC}"/>
+                <a16:creationId xmlns:a16="http://schemas.microsoft.com/office/drawing/2014/main" id="{E11EA647-C90B-424E-9639-31DE03676C1F}"/>
               </a:ext>
             </a:extLst>
           </p:cNvPr>
@@ -26934,7 +26798,7 @@
     </p:spTree>
     <p:extLst>
       <p:ext uri="{BB962C8B-B14F-4D97-AF65-F5344CB8AC3E}">
-        <p14:creationId xmlns:p14="http://schemas.microsoft.com/office/powerpoint/2010/main" val="806146067"/>
+        <p14:creationId xmlns:p14="http://schemas.microsoft.com/office/powerpoint/2010/main" val="1272648219"/>
       </p:ext>
     </p:extLst>
   </p:cSld>
@@ -26965,7 +26829,7 @@
           <p:cNvPr id="2" name="Text 0">
             <a:extLst xmlns:a="http://schemas.openxmlformats.org/drawingml/2006/main">
               <a:ext uri="{FF2B5EF4-FFF2-40B4-BE49-F238E27FC236}">
-                <a16:creationId xmlns:a16="http://schemas.microsoft.com/office/drawing/2014/main" id="{EEC7F801-BED1-490B-BA7B-0A0E75E0198F}"/>
+                <a16:creationId xmlns:a16="http://schemas.microsoft.com/office/drawing/2014/main" id="{3D788D0B-88D6-4BE8-B39D-51CD78297582}"/>
               </a:ext>
             </a:extLst>
           </p:cNvPr>
@@ -27012,7 +26876,7 @@
           <p:cNvPr id="3" name="Text 1">
             <a:extLst xmlns:a="http://schemas.openxmlformats.org/drawingml/2006/main">
               <a:ext uri="{FF2B5EF4-FFF2-40B4-BE49-F238E27FC236}">
-                <a16:creationId xmlns:a16="http://schemas.microsoft.com/office/drawing/2014/main" id="{415DE117-3E3D-41FC-8FD9-0B615BF4F93E}"/>
+                <a16:creationId xmlns:a16="http://schemas.microsoft.com/office/drawing/2014/main" id="{C371CC8D-10B4-4F87-9CC3-9B489601CEAC}"/>
               </a:ext>
             </a:extLst>
           </p:cNvPr>
@@ -27059,7 +26923,7 @@
           <p:cNvPr id="4" name="Shape 2">
             <a:extLst xmlns:a="http://schemas.openxmlformats.org/drawingml/2006/main">
               <a:ext uri="{FF2B5EF4-FFF2-40B4-BE49-F238E27FC236}">
-                <a16:creationId xmlns:a16="http://schemas.microsoft.com/office/drawing/2014/main" id="{5C0483C0-74ED-4733-BB94-EA70CC015490}"/>
+                <a16:creationId xmlns:a16="http://schemas.microsoft.com/office/drawing/2014/main" id="{9308835D-FD71-40A5-B331-706C136B1389}"/>
               </a:ext>
             </a:extLst>
           </p:cNvPr>
@@ -27094,7 +26958,7 @@
           <p:cNvPr id="5" name="Text 3">
             <a:extLst xmlns:a="http://schemas.openxmlformats.org/drawingml/2006/main">
               <a:ext uri="{FF2B5EF4-FFF2-40B4-BE49-F238E27FC236}">
-                <a16:creationId xmlns:a16="http://schemas.microsoft.com/office/drawing/2014/main" id="{0DBADF87-F51F-44C6-BFF1-0C0574D6D1CA}"/>
+                <a16:creationId xmlns:a16="http://schemas.microsoft.com/office/drawing/2014/main" id="{5541478E-DA99-40A1-AD2B-F3323513C05C}"/>
               </a:ext>
             </a:extLst>
           </p:cNvPr>
@@ -27141,7 +27005,7 @@
           <p:cNvPr id="6" name="Shape 4">
             <a:extLst xmlns:a="http://schemas.openxmlformats.org/drawingml/2006/main">
               <a:ext uri="{FF2B5EF4-FFF2-40B4-BE49-F238E27FC236}">
-                <a16:creationId xmlns:a16="http://schemas.microsoft.com/office/drawing/2014/main" id="{366B2CF2-4C19-4EDE-BC1B-C32A27EE5DA2}"/>
+                <a16:creationId xmlns:a16="http://schemas.microsoft.com/office/drawing/2014/main" id="{3973004F-1ED8-4DB7-B158-64E3C5CC56D8}"/>
               </a:ext>
             </a:extLst>
           </p:cNvPr>
@@ -27172,7 +27036,7 @@
           <p:cNvPr id="7" name="Shape 5">
             <a:extLst xmlns:a="http://schemas.openxmlformats.org/drawingml/2006/main">
               <a:ext uri="{FF2B5EF4-FFF2-40B4-BE49-F238E27FC236}">
-                <a16:creationId xmlns:a16="http://schemas.microsoft.com/office/drawing/2014/main" id="{DA9B0145-6BF5-4FBD-9D2B-74BEC61C64BB}"/>
+                <a16:creationId xmlns:a16="http://schemas.microsoft.com/office/drawing/2014/main" id="{206D1034-D660-45D9-A041-82C582AD8805}"/>
               </a:ext>
             </a:extLst>
           </p:cNvPr>
@@ -27207,7 +27071,7 @@
           <p:cNvPr id="8" name="Text 6">
             <a:extLst xmlns:a="http://schemas.openxmlformats.org/drawingml/2006/main">
               <a:ext uri="{FF2B5EF4-FFF2-40B4-BE49-F238E27FC236}">
-                <a16:creationId xmlns:a16="http://schemas.microsoft.com/office/drawing/2014/main" id="{C0FDDAC8-0E57-4C26-A828-262431F4CBD3}"/>
+                <a16:creationId xmlns:a16="http://schemas.microsoft.com/office/drawing/2014/main" id="{160A4342-86C3-4C68-BBAF-2885FA2E541D}"/>
               </a:ext>
             </a:extLst>
           </p:cNvPr>
@@ -27254,7 +27118,7 @@
           <p:cNvPr id="9" name="Text 7">
             <a:extLst xmlns:a="http://schemas.openxmlformats.org/drawingml/2006/main">
               <a:ext uri="{FF2B5EF4-FFF2-40B4-BE49-F238E27FC236}">
-                <a16:creationId xmlns:a16="http://schemas.microsoft.com/office/drawing/2014/main" id="{1608CC77-A994-4639-91F2-74DA458F9550}"/>
+                <a16:creationId xmlns:a16="http://schemas.microsoft.com/office/drawing/2014/main" id="{D82DE03D-FBC4-4E3E-96EE-35F992B1215D}"/>
               </a:ext>
             </a:extLst>
           </p:cNvPr>
@@ -27317,7 +27181,7 @@
           <p:cNvPr id="10" name="Shape 8">
             <a:extLst xmlns:a="http://schemas.openxmlformats.org/drawingml/2006/main">
               <a:ext uri="{FF2B5EF4-FFF2-40B4-BE49-F238E27FC236}">
-                <a16:creationId xmlns:a16="http://schemas.microsoft.com/office/drawing/2014/main" id="{8B74927B-80B5-4095-B9BF-57F3C4FD9A2C}"/>
+                <a16:creationId xmlns:a16="http://schemas.microsoft.com/office/drawing/2014/main" id="{7B858753-8EF9-42B3-8261-66F29E80CAD5}"/>
               </a:ext>
             </a:extLst>
           </p:cNvPr>
@@ -27349,7 +27213,7 @@
           <p:cNvPr id="11" name="Shape 9">
             <a:extLst xmlns:a="http://schemas.openxmlformats.org/drawingml/2006/main">
               <a:ext uri="{FF2B5EF4-FFF2-40B4-BE49-F238E27FC236}">
-                <a16:creationId xmlns:a16="http://schemas.microsoft.com/office/drawing/2014/main" id="{0474D5C9-B675-4481-A2A9-64B1CF631BD3}"/>
+                <a16:creationId xmlns:a16="http://schemas.microsoft.com/office/drawing/2014/main" id="{DD9FC290-44BA-4DF9-A65C-8BE60684DB13}"/>
               </a:ext>
             </a:extLst>
           </p:cNvPr>
@@ -27384,7 +27248,7 @@
           <p:cNvPr id="12" name="Text 10">
             <a:extLst xmlns:a="http://schemas.openxmlformats.org/drawingml/2006/main">
               <a:ext uri="{FF2B5EF4-FFF2-40B4-BE49-F238E27FC236}">
-                <a16:creationId xmlns:a16="http://schemas.microsoft.com/office/drawing/2014/main" id="{483E0BED-62A3-4BCF-BEF4-01746370F7FC}"/>
+                <a16:creationId xmlns:a16="http://schemas.microsoft.com/office/drawing/2014/main" id="{31091D86-8B56-473A-AB12-0D354C38656B}"/>
               </a:ext>
             </a:extLst>
           </p:cNvPr>
@@ -27431,7 +27295,7 @@
           <p:cNvPr id="13" name="Text 11">
             <a:extLst xmlns:a="http://schemas.openxmlformats.org/drawingml/2006/main">
               <a:ext uri="{FF2B5EF4-FFF2-40B4-BE49-F238E27FC236}">
-                <a16:creationId xmlns:a16="http://schemas.microsoft.com/office/drawing/2014/main" id="{B37FD09A-1323-4E0D-A736-3518323565E8}"/>
+                <a16:creationId xmlns:a16="http://schemas.microsoft.com/office/drawing/2014/main" id="{53587B9C-3870-487C-B5C1-860A5A6D466D}"/>
               </a:ext>
             </a:extLst>
           </p:cNvPr>
@@ -27494,7 +27358,7 @@
           <p:cNvPr id="14" name="Shape 12">
             <a:extLst xmlns:a="http://schemas.openxmlformats.org/drawingml/2006/main">
               <a:ext uri="{FF2B5EF4-FFF2-40B4-BE49-F238E27FC236}">
-                <a16:creationId xmlns:a16="http://schemas.microsoft.com/office/drawing/2014/main" id="{30BE90AB-9E07-400C-919D-6F8386A122EF}"/>
+                <a16:creationId xmlns:a16="http://schemas.microsoft.com/office/drawing/2014/main" id="{55E50713-848A-4E1F-9518-321162F913C1}"/>
               </a:ext>
             </a:extLst>
           </p:cNvPr>
@@ -27526,7 +27390,7 @@
           <p:cNvPr id="15" name="Shape 13">
             <a:extLst xmlns:a="http://schemas.openxmlformats.org/drawingml/2006/main">
               <a:ext uri="{FF2B5EF4-FFF2-40B4-BE49-F238E27FC236}">
-                <a16:creationId xmlns:a16="http://schemas.microsoft.com/office/drawing/2014/main" id="{9A6F3AA4-2DC2-4828-B69B-0960E5DFF9EE}"/>
+                <a16:creationId xmlns:a16="http://schemas.microsoft.com/office/drawing/2014/main" id="{48206563-0BD8-46F2-ADE5-0313F46911F5}"/>
               </a:ext>
             </a:extLst>
           </p:cNvPr>
@@ -27561,7 +27425,7 @@
           <p:cNvPr id="16" name="Text 14">
             <a:extLst xmlns:a="http://schemas.openxmlformats.org/drawingml/2006/main">
               <a:ext uri="{FF2B5EF4-FFF2-40B4-BE49-F238E27FC236}">
-                <a16:creationId xmlns:a16="http://schemas.microsoft.com/office/drawing/2014/main" id="{A592B496-DC5C-49B2-8CB2-BB75345F08AC}"/>
+                <a16:creationId xmlns:a16="http://schemas.microsoft.com/office/drawing/2014/main" id="{FBB68C43-D184-4633-AFA8-CEBBA977C7A6}"/>
               </a:ext>
             </a:extLst>
           </p:cNvPr>
@@ -27608,7 +27472,7 @@
           <p:cNvPr id="17" name="Text 15">
             <a:extLst xmlns:a="http://schemas.openxmlformats.org/drawingml/2006/main">
               <a:ext uri="{FF2B5EF4-FFF2-40B4-BE49-F238E27FC236}">
-                <a16:creationId xmlns:a16="http://schemas.microsoft.com/office/drawing/2014/main" id="{98CA7470-F361-4FEC-A9C7-2E7AD4D71C07}"/>
+                <a16:creationId xmlns:a16="http://schemas.microsoft.com/office/drawing/2014/main" id="{3D2C816E-5471-4070-9024-0AFCEAEA8F76}"/>
               </a:ext>
             </a:extLst>
           </p:cNvPr>
@@ -27671,7 +27535,7 @@
           <p:cNvPr id="18" name="Shape 16">
             <a:extLst xmlns:a="http://schemas.openxmlformats.org/drawingml/2006/main">
               <a:ext uri="{FF2B5EF4-FFF2-40B4-BE49-F238E27FC236}">
-                <a16:creationId xmlns:a16="http://schemas.microsoft.com/office/drawing/2014/main" id="{E095FBEE-B3E5-497B-B2D9-169C2B7E6A6D}"/>
+                <a16:creationId xmlns:a16="http://schemas.microsoft.com/office/drawing/2014/main" id="{83152478-C36E-482A-B8E9-C7933C072E76}"/>
               </a:ext>
             </a:extLst>
           </p:cNvPr>
@@ -27703,7 +27567,7 @@
           <p:cNvPr id="19" name="Shape 17">
             <a:extLst xmlns:a="http://schemas.openxmlformats.org/drawingml/2006/main">
               <a:ext uri="{FF2B5EF4-FFF2-40B4-BE49-F238E27FC236}">
-                <a16:creationId xmlns:a16="http://schemas.microsoft.com/office/drawing/2014/main" id="{82E50475-3198-4D67-A8A7-031FA4AE1CEA}"/>
+                <a16:creationId xmlns:a16="http://schemas.microsoft.com/office/drawing/2014/main" id="{B7860C81-AC97-426E-9216-9ECD30ABFD36}"/>
               </a:ext>
             </a:extLst>
           </p:cNvPr>
@@ -27738,7 +27602,7 @@
           <p:cNvPr id="20" name="Text 18">
             <a:extLst xmlns:a="http://schemas.openxmlformats.org/drawingml/2006/main">
               <a:ext uri="{FF2B5EF4-FFF2-40B4-BE49-F238E27FC236}">
-                <a16:creationId xmlns:a16="http://schemas.microsoft.com/office/drawing/2014/main" id="{76B60702-E866-46C4-8B6F-CED580BE2E68}"/>
+                <a16:creationId xmlns:a16="http://schemas.microsoft.com/office/drawing/2014/main" id="{0AF0322B-EA5D-4E2F-9C47-18355A89F1C4}"/>
               </a:ext>
             </a:extLst>
           </p:cNvPr>
@@ -27785,7 +27649,7 @@
           <p:cNvPr id="21" name="Text 19">
             <a:extLst xmlns:a="http://schemas.openxmlformats.org/drawingml/2006/main">
               <a:ext uri="{FF2B5EF4-FFF2-40B4-BE49-F238E27FC236}">
-                <a16:creationId xmlns:a16="http://schemas.microsoft.com/office/drawing/2014/main" id="{B64434AD-E74D-4B06-AFDA-E58B5105C08A}"/>
+                <a16:creationId xmlns:a16="http://schemas.microsoft.com/office/drawing/2014/main" id="{1CC06A84-C8C0-4B61-B33B-D97D63869703}"/>
               </a:ext>
             </a:extLst>
           </p:cNvPr>
@@ -27848,7 +27712,7 @@
           <p:cNvPr id="22" name="Shape 20">
             <a:extLst xmlns:a="http://schemas.openxmlformats.org/drawingml/2006/main">
               <a:ext uri="{FF2B5EF4-FFF2-40B4-BE49-F238E27FC236}">
-                <a16:creationId xmlns:a16="http://schemas.microsoft.com/office/drawing/2014/main" id="{E2B694BB-DBEF-4487-8475-985754460788}"/>
+                <a16:creationId xmlns:a16="http://schemas.microsoft.com/office/drawing/2014/main" id="{7021C9A7-463B-4026-AC64-1943DE819254}"/>
               </a:ext>
             </a:extLst>
           </p:cNvPr>
@@ -27880,7 +27744,7 @@
           <p:cNvPr id="23" name="Shape 21">
             <a:extLst xmlns:a="http://schemas.openxmlformats.org/drawingml/2006/main">
               <a:ext uri="{FF2B5EF4-FFF2-40B4-BE49-F238E27FC236}">
-                <a16:creationId xmlns:a16="http://schemas.microsoft.com/office/drawing/2014/main" id="{30970A1B-0AA2-49AB-9D08-03ED5AC4BF2B}"/>
+                <a16:creationId xmlns:a16="http://schemas.microsoft.com/office/drawing/2014/main" id="{9538ABC5-B248-4A80-93F2-F31666F1314D}"/>
               </a:ext>
             </a:extLst>
           </p:cNvPr>
@@ -27915,7 +27779,7 @@
           <p:cNvPr id="24" name="Text 22">
             <a:extLst xmlns:a="http://schemas.openxmlformats.org/drawingml/2006/main">
               <a:ext uri="{FF2B5EF4-FFF2-40B4-BE49-F238E27FC236}">
-                <a16:creationId xmlns:a16="http://schemas.microsoft.com/office/drawing/2014/main" id="{12FF1236-58B2-49D7-B191-CC84AC62311D}"/>
+                <a16:creationId xmlns:a16="http://schemas.microsoft.com/office/drawing/2014/main" id="{6B8B2721-42A5-4473-B129-1D4AA141BDB4}"/>
               </a:ext>
             </a:extLst>
           </p:cNvPr>
@@ -27962,7 +27826,7 @@
           <p:cNvPr id="25" name="Text 23">
             <a:extLst xmlns:a="http://schemas.openxmlformats.org/drawingml/2006/main">
               <a:ext uri="{FF2B5EF4-FFF2-40B4-BE49-F238E27FC236}">
-                <a16:creationId xmlns:a16="http://schemas.microsoft.com/office/drawing/2014/main" id="{644FA50D-DA91-4B24-A459-8B7548AD76F8}"/>
+                <a16:creationId xmlns:a16="http://schemas.microsoft.com/office/drawing/2014/main" id="{D2692488-466D-4EBA-9433-4360C0F0CA8B}"/>
               </a:ext>
             </a:extLst>
           </p:cNvPr>
@@ -28025,7 +27889,7 @@
           <p:cNvPr id="26" name="Shape 24">
             <a:extLst xmlns:a="http://schemas.openxmlformats.org/drawingml/2006/main">
               <a:ext uri="{FF2B5EF4-FFF2-40B4-BE49-F238E27FC236}">
-                <a16:creationId xmlns:a16="http://schemas.microsoft.com/office/drawing/2014/main" id="{8E295650-714D-4974-BCE3-972F467DBCCD}"/>
+                <a16:creationId xmlns:a16="http://schemas.microsoft.com/office/drawing/2014/main" id="{EACC8BC3-C857-4707-A166-A093E6D20E32}"/>
               </a:ext>
             </a:extLst>
           </p:cNvPr>
@@ -28060,7 +27924,7 @@
           <p:cNvPr id="27" name="Text 25">
             <a:extLst xmlns:a="http://schemas.openxmlformats.org/drawingml/2006/main">
               <a:ext uri="{FF2B5EF4-FFF2-40B4-BE49-F238E27FC236}">
-                <a16:creationId xmlns:a16="http://schemas.microsoft.com/office/drawing/2014/main" id="{65000D46-5011-44F5-8AB8-CC56D8E7C2D6}"/>
+                <a16:creationId xmlns:a16="http://schemas.microsoft.com/office/drawing/2014/main" id="{A0275D24-DBA0-4935-ACD7-9E9BD5A689FC}"/>
               </a:ext>
             </a:extLst>
           </p:cNvPr>
@@ -28107,7 +27971,7 @@
           <p:cNvPr id="28" name="Text 26">
             <a:extLst xmlns:a="http://schemas.openxmlformats.org/drawingml/2006/main">
               <a:ext uri="{FF2B5EF4-FFF2-40B4-BE49-F238E27FC236}">
-                <a16:creationId xmlns:a16="http://schemas.microsoft.com/office/drawing/2014/main" id="{906EAF6D-B25F-4130-A9E0-D8A42FB0DF90}"/>
+                <a16:creationId xmlns:a16="http://schemas.microsoft.com/office/drawing/2014/main" id="{C02D3D82-7621-4DFC-A468-D625639AE328}"/>
               </a:ext>
             </a:extLst>
           </p:cNvPr>
@@ -28154,7 +28018,7 @@
           <p:cNvPr id="29" name="Text 27">
             <a:extLst xmlns:a="http://schemas.openxmlformats.org/drawingml/2006/main">
               <a:ext uri="{FF2B5EF4-FFF2-40B4-BE49-F238E27FC236}">
-                <a16:creationId xmlns:a16="http://schemas.microsoft.com/office/drawing/2014/main" id="{43B26668-C7B7-4C8A-BC0A-5EBB79FDCABA}"/>
+                <a16:creationId xmlns:a16="http://schemas.microsoft.com/office/drawing/2014/main" id="{3BE38264-2653-4E8C-9906-EC0BF10A8373}"/>
               </a:ext>
             </a:extLst>
           </p:cNvPr>
@@ -28201,7 +28065,7 @@
           <p:cNvPr id="30" name="Shape 28">
             <a:extLst xmlns:a="http://schemas.openxmlformats.org/drawingml/2006/main">
               <a:ext uri="{FF2B5EF4-FFF2-40B4-BE49-F238E27FC236}">
-                <a16:creationId xmlns:a16="http://schemas.microsoft.com/office/drawing/2014/main" id="{305B573C-B283-4219-BD41-C572F17AAC5F}"/>
+                <a16:creationId xmlns:a16="http://schemas.microsoft.com/office/drawing/2014/main" id="{D286034F-9A6E-489E-9925-0E54804C1007}"/>
               </a:ext>
             </a:extLst>
           </p:cNvPr>
@@ -28236,7 +28100,7 @@
           <p:cNvPr id="31" name="Text 29">
             <a:extLst xmlns:a="http://schemas.openxmlformats.org/drawingml/2006/main">
               <a:ext uri="{FF2B5EF4-FFF2-40B4-BE49-F238E27FC236}">
-                <a16:creationId xmlns:a16="http://schemas.microsoft.com/office/drawing/2014/main" id="{DFEC38AD-18E1-4256-9F2F-D05CBFCFCB9D}"/>
+                <a16:creationId xmlns:a16="http://schemas.microsoft.com/office/drawing/2014/main" id="{DA675090-2AFA-4BCE-BB89-A70419B5B8FD}"/>
               </a:ext>
             </a:extLst>
           </p:cNvPr>
@@ -28283,7 +28147,7 @@
           <p:cNvPr id="32" name="Text 30">
             <a:extLst xmlns:a="http://schemas.openxmlformats.org/drawingml/2006/main">
               <a:ext uri="{FF2B5EF4-FFF2-40B4-BE49-F238E27FC236}">
-                <a16:creationId xmlns:a16="http://schemas.microsoft.com/office/drawing/2014/main" id="{6AB99241-101A-46E9-85BE-5E094EC006F7}"/>
+                <a16:creationId xmlns:a16="http://schemas.microsoft.com/office/drawing/2014/main" id="{444088A5-50B6-4F1E-91CE-C58723675A3A}"/>
               </a:ext>
             </a:extLst>
           </p:cNvPr>
@@ -28346,7 +28210,7 @@
           <p:cNvPr id="33" name="Text 31">
             <a:extLst xmlns:a="http://schemas.openxmlformats.org/drawingml/2006/main">
               <a:ext uri="{FF2B5EF4-FFF2-40B4-BE49-F238E27FC236}">
-                <a16:creationId xmlns:a16="http://schemas.microsoft.com/office/drawing/2014/main" id="{91B3A0E8-ACA8-4A81-A05D-B488EF15919B}"/>
+                <a16:creationId xmlns:a16="http://schemas.microsoft.com/office/drawing/2014/main" id="{C9A3507D-6EA0-4CDC-88C9-524E493BDEC9}"/>
               </a:ext>
             </a:extLst>
           </p:cNvPr>
@@ -28393,7 +28257,7 @@
           <p:cNvPr id="34" name="Text 32">
             <a:extLst xmlns:a="http://schemas.openxmlformats.org/drawingml/2006/main">
               <a:ext uri="{FF2B5EF4-FFF2-40B4-BE49-F238E27FC236}">
-                <a16:creationId xmlns:a16="http://schemas.microsoft.com/office/drawing/2014/main" id="{ABF0E67F-DC3B-42C7-B443-63741B87F297}"/>
+                <a16:creationId xmlns:a16="http://schemas.microsoft.com/office/drawing/2014/main" id="{114EDE48-12DC-45E3-B1BF-5FD4F816EA92}"/>
               </a:ext>
             </a:extLst>
           </p:cNvPr>
@@ -28438,7 +28302,7 @@
     </p:spTree>
     <p:extLst>
       <p:ext uri="{BB962C8B-B14F-4D97-AF65-F5344CB8AC3E}">
-        <p14:creationId xmlns:p14="http://schemas.microsoft.com/office/powerpoint/2010/main" val="7976070"/>
+        <p14:creationId xmlns:p14="http://schemas.microsoft.com/office/powerpoint/2010/main" val="848250101"/>
       </p:ext>
     </p:extLst>
   </p:cSld>
@@ -28469,7 +28333,7 @@
           <p:cNvPr id="2" name="Text 0">
             <a:extLst xmlns:a="http://schemas.openxmlformats.org/drawingml/2006/main">
               <a:ext uri="{FF2B5EF4-FFF2-40B4-BE49-F238E27FC236}">
-                <a16:creationId xmlns:a16="http://schemas.microsoft.com/office/drawing/2014/main" id="{060675DE-85A9-4768-A53D-B742957DF855}"/>
+                <a16:creationId xmlns:a16="http://schemas.microsoft.com/office/drawing/2014/main" id="{D56C0F67-CDEB-4503-AA54-B85EB30A568D}"/>
               </a:ext>
             </a:extLst>
           </p:cNvPr>
@@ -28516,7 +28380,7 @@
           <p:cNvPr id="3" name="Text 1">
             <a:extLst xmlns:a="http://schemas.openxmlformats.org/drawingml/2006/main">
               <a:ext uri="{FF2B5EF4-FFF2-40B4-BE49-F238E27FC236}">
-                <a16:creationId xmlns:a16="http://schemas.microsoft.com/office/drawing/2014/main" id="{946E191A-20FC-4E4E-8D2F-FB658728A289}"/>
+                <a16:creationId xmlns:a16="http://schemas.microsoft.com/office/drawing/2014/main" id="{0508EDA4-F2DE-48EC-8183-81966293079A}"/>
               </a:ext>
             </a:extLst>
           </p:cNvPr>
@@ -28563,7 +28427,7 @@
           <p:cNvPr id="4" name="Shape 2">
             <a:extLst xmlns:a="http://schemas.openxmlformats.org/drawingml/2006/main">
               <a:ext uri="{FF2B5EF4-FFF2-40B4-BE49-F238E27FC236}">
-                <a16:creationId xmlns:a16="http://schemas.microsoft.com/office/drawing/2014/main" id="{AEA6F04C-7D93-42BB-A5A3-A3ED1ACE6C82}"/>
+                <a16:creationId xmlns:a16="http://schemas.microsoft.com/office/drawing/2014/main" id="{887EE2BF-0485-45EB-B21D-BAB34DB8222A}"/>
               </a:ext>
             </a:extLst>
           </p:cNvPr>
@@ -28598,7 +28462,7 @@
           <p:cNvPr id="5" name="Text 3">
             <a:extLst xmlns:a="http://schemas.openxmlformats.org/drawingml/2006/main">
               <a:ext uri="{FF2B5EF4-FFF2-40B4-BE49-F238E27FC236}">
-                <a16:creationId xmlns:a16="http://schemas.microsoft.com/office/drawing/2014/main" id="{1AD54CC4-947B-4A47-B206-7511ABD9B19D}"/>
+                <a16:creationId xmlns:a16="http://schemas.microsoft.com/office/drawing/2014/main" id="{3A274641-D6ED-40AD-9278-7D157BDC3EE9}"/>
               </a:ext>
             </a:extLst>
           </p:cNvPr>
@@ -28645,7 +28509,7 @@
           <p:cNvPr id="6" name="Shape 4">
             <a:extLst xmlns:a="http://schemas.openxmlformats.org/drawingml/2006/main">
               <a:ext uri="{FF2B5EF4-FFF2-40B4-BE49-F238E27FC236}">
-                <a16:creationId xmlns:a16="http://schemas.microsoft.com/office/drawing/2014/main" id="{DC8FFF88-6F5B-4B88-A526-1FBBFA7D9CE3}"/>
+                <a16:creationId xmlns:a16="http://schemas.microsoft.com/office/drawing/2014/main" id="{13815EB3-19AF-4BA1-BD17-FDE48661F97F}"/>
               </a:ext>
             </a:extLst>
           </p:cNvPr>
@@ -28676,7 +28540,7 @@
           <p:cNvPr id="7" name="Text 5">
             <a:extLst xmlns:a="http://schemas.openxmlformats.org/drawingml/2006/main">
               <a:ext uri="{FF2B5EF4-FFF2-40B4-BE49-F238E27FC236}">
-                <a16:creationId xmlns:a16="http://schemas.microsoft.com/office/drawing/2014/main" id="{7AA490D7-3292-4648-86DE-861471B1B036}"/>
+                <a16:creationId xmlns:a16="http://schemas.microsoft.com/office/drawing/2014/main" id="{AA011816-DE1B-4024-979E-F0B74033EFFF}"/>
               </a:ext>
             </a:extLst>
           </p:cNvPr>
@@ -28723,7 +28587,7 @@
           <p:cNvPr id="8" name="Shape 6">
             <a:extLst xmlns:a="http://schemas.openxmlformats.org/drawingml/2006/main">
               <a:ext uri="{FF2B5EF4-FFF2-40B4-BE49-F238E27FC236}">
-                <a16:creationId xmlns:a16="http://schemas.microsoft.com/office/drawing/2014/main" id="{4D35726E-178E-49B9-9BA3-A5BADDA7A53B}"/>
+                <a16:creationId xmlns:a16="http://schemas.microsoft.com/office/drawing/2014/main" id="{B9F2633A-C530-4697-B881-120D04C3FB1F}"/>
               </a:ext>
             </a:extLst>
           </p:cNvPr>
@@ -28758,7 +28622,7 @@
           <p:cNvPr id="9" name="Text 7">
             <a:extLst xmlns:a="http://schemas.openxmlformats.org/drawingml/2006/main">
               <a:ext uri="{FF2B5EF4-FFF2-40B4-BE49-F238E27FC236}">
-                <a16:creationId xmlns:a16="http://schemas.microsoft.com/office/drawing/2014/main" id="{5D11D94C-B0AD-448A-826C-AF9AF7C94534}"/>
+                <a16:creationId xmlns:a16="http://schemas.microsoft.com/office/drawing/2014/main" id="{FCD6B87E-9B7F-45F8-A631-9589BA37CCD6}"/>
               </a:ext>
             </a:extLst>
           </p:cNvPr>
@@ -28805,7 +28669,7 @@
           <p:cNvPr id="10" name="Shape 8">
             <a:extLst xmlns:a="http://schemas.openxmlformats.org/drawingml/2006/main">
               <a:ext uri="{FF2B5EF4-FFF2-40B4-BE49-F238E27FC236}">
-                <a16:creationId xmlns:a16="http://schemas.microsoft.com/office/drawing/2014/main" id="{4607526C-0D1E-4D0C-9469-B1E3DA3974E0}"/>
+                <a16:creationId xmlns:a16="http://schemas.microsoft.com/office/drawing/2014/main" id="{DD7BBABE-295F-4AA4-905A-E9B6909AF5F6}"/>
               </a:ext>
             </a:extLst>
           </p:cNvPr>
@@ -28840,7 +28704,7 @@
           <p:cNvPr id="11" name="Text 9">
             <a:extLst xmlns:a="http://schemas.openxmlformats.org/drawingml/2006/main">
               <a:ext uri="{FF2B5EF4-FFF2-40B4-BE49-F238E27FC236}">
-                <a16:creationId xmlns:a16="http://schemas.microsoft.com/office/drawing/2014/main" id="{EB4E7411-5A40-4EB2-A087-5597892B7C69}"/>
+                <a16:creationId xmlns:a16="http://schemas.microsoft.com/office/drawing/2014/main" id="{B856DE9A-7EEE-4F36-A808-C67BC3D53AFD}"/>
               </a:ext>
             </a:extLst>
           </p:cNvPr>
@@ -28887,7 +28751,7 @@
           <p:cNvPr id="12" name="Shape 10">
             <a:extLst xmlns:a="http://schemas.openxmlformats.org/drawingml/2006/main">
               <a:ext uri="{FF2B5EF4-FFF2-40B4-BE49-F238E27FC236}">
-                <a16:creationId xmlns:a16="http://schemas.microsoft.com/office/drawing/2014/main" id="{5F135F0B-C1E9-4787-87C1-63615FF15803}"/>
+                <a16:creationId xmlns:a16="http://schemas.microsoft.com/office/drawing/2014/main" id="{2561554F-0B83-4878-A18D-4B05ED351A44}"/>
               </a:ext>
             </a:extLst>
           </p:cNvPr>
@@ -28920,7 +28784,7 @@
           <p:cNvPr id="13" name="Text 11">
             <a:extLst xmlns:a="http://schemas.openxmlformats.org/drawingml/2006/main">
               <a:ext uri="{FF2B5EF4-FFF2-40B4-BE49-F238E27FC236}">
-                <a16:creationId xmlns:a16="http://schemas.microsoft.com/office/drawing/2014/main" id="{C27A1963-FB62-4847-BEFF-FDB721AF3CC6}"/>
+                <a16:creationId xmlns:a16="http://schemas.microsoft.com/office/drawing/2014/main" id="{C732179F-6EC6-4FF5-B17B-E4BC1E60DA4F}"/>
               </a:ext>
             </a:extLst>
           </p:cNvPr>
@@ -28967,7 +28831,7 @@
           <p:cNvPr id="14" name="Shape 12">
             <a:extLst xmlns:a="http://schemas.openxmlformats.org/drawingml/2006/main">
               <a:ext uri="{FF2B5EF4-FFF2-40B4-BE49-F238E27FC236}">
-                <a16:creationId xmlns:a16="http://schemas.microsoft.com/office/drawing/2014/main" id="{D5B167BC-9FF1-4433-AB2B-027F9B6B56BF}"/>
+                <a16:creationId xmlns:a16="http://schemas.microsoft.com/office/drawing/2014/main" id="{5AB7BB20-4A42-427F-9CA1-B97E655F284D}"/>
               </a:ext>
             </a:extLst>
           </p:cNvPr>
@@ -29000,7 +28864,7 @@
           <p:cNvPr id="15" name="Text 13">
             <a:extLst xmlns:a="http://schemas.openxmlformats.org/drawingml/2006/main">
               <a:ext uri="{FF2B5EF4-FFF2-40B4-BE49-F238E27FC236}">
-                <a16:creationId xmlns:a16="http://schemas.microsoft.com/office/drawing/2014/main" id="{FAC9469D-204A-4550-ADB9-D4F2F2E5E256}"/>
+                <a16:creationId xmlns:a16="http://schemas.microsoft.com/office/drawing/2014/main" id="{2AD02089-894A-424E-8F50-BDE00507E211}"/>
               </a:ext>
             </a:extLst>
           </p:cNvPr>
@@ -29047,7 +28911,7 @@
           <p:cNvPr id="16" name="Shape 14">
             <a:extLst xmlns:a="http://schemas.openxmlformats.org/drawingml/2006/main">
               <a:ext uri="{FF2B5EF4-FFF2-40B4-BE49-F238E27FC236}">
-                <a16:creationId xmlns:a16="http://schemas.microsoft.com/office/drawing/2014/main" id="{7882A1D5-0A98-40DA-AF4B-A076C28EB24A}"/>
+                <a16:creationId xmlns:a16="http://schemas.microsoft.com/office/drawing/2014/main" id="{15A12444-2F91-459F-9BFF-4BDBD8E11051}"/>
               </a:ext>
             </a:extLst>
           </p:cNvPr>
@@ -29080,7 +28944,7 @@
           <p:cNvPr id="17" name="Text 15">
             <a:extLst xmlns:a="http://schemas.openxmlformats.org/drawingml/2006/main">
               <a:ext uri="{FF2B5EF4-FFF2-40B4-BE49-F238E27FC236}">
-                <a16:creationId xmlns:a16="http://schemas.microsoft.com/office/drawing/2014/main" id="{5FE286A8-AACF-477C-A6BC-24C02B917525}"/>
+                <a16:creationId xmlns:a16="http://schemas.microsoft.com/office/drawing/2014/main" id="{8265665F-FB64-4BFC-84DF-A9034D3E9BFF}"/>
               </a:ext>
             </a:extLst>
           </p:cNvPr>
@@ -29127,7 +28991,7 @@
           <p:cNvPr id="18" name="Shape 16">
             <a:extLst xmlns:a="http://schemas.openxmlformats.org/drawingml/2006/main">
               <a:ext uri="{FF2B5EF4-FFF2-40B4-BE49-F238E27FC236}">
-                <a16:creationId xmlns:a16="http://schemas.microsoft.com/office/drawing/2014/main" id="{F0C0BBC3-4810-4941-B425-04ECC5788CB3}"/>
+                <a16:creationId xmlns:a16="http://schemas.microsoft.com/office/drawing/2014/main" id="{02E7DF52-3B6C-4DCA-80C5-6744FA3B82BE}"/>
               </a:ext>
             </a:extLst>
           </p:cNvPr>
@@ -29160,7 +29024,7 @@
           <p:cNvPr id="19" name="Text 17">
             <a:extLst xmlns:a="http://schemas.openxmlformats.org/drawingml/2006/main">
               <a:ext uri="{FF2B5EF4-FFF2-40B4-BE49-F238E27FC236}">
-                <a16:creationId xmlns:a16="http://schemas.microsoft.com/office/drawing/2014/main" id="{7D49DE1C-F31A-480A-911F-3F3C6A2C8CBE}"/>
+                <a16:creationId xmlns:a16="http://schemas.microsoft.com/office/drawing/2014/main" id="{A3C50B2C-EE5E-4C7B-93FE-CB4913D234EB}"/>
               </a:ext>
             </a:extLst>
           </p:cNvPr>
@@ -29207,7 +29071,7 @@
           <p:cNvPr id="20" name="Shape 18">
             <a:extLst xmlns:a="http://schemas.openxmlformats.org/drawingml/2006/main">
               <a:ext uri="{FF2B5EF4-FFF2-40B4-BE49-F238E27FC236}">
-                <a16:creationId xmlns:a16="http://schemas.microsoft.com/office/drawing/2014/main" id="{566760A2-CB94-4443-9523-65387E1DF141}"/>
+                <a16:creationId xmlns:a16="http://schemas.microsoft.com/office/drawing/2014/main" id="{57C980A9-ED0F-4336-81BE-5B027135310A}"/>
               </a:ext>
             </a:extLst>
           </p:cNvPr>
@@ -29242,7 +29106,7 @@
           <p:cNvPr id="21" name="Text 19">
             <a:extLst xmlns:a="http://schemas.openxmlformats.org/drawingml/2006/main">
               <a:ext uri="{FF2B5EF4-FFF2-40B4-BE49-F238E27FC236}">
-                <a16:creationId xmlns:a16="http://schemas.microsoft.com/office/drawing/2014/main" id="{36451BC1-27CA-43FD-8A62-0BBCB9154CA4}"/>
+                <a16:creationId xmlns:a16="http://schemas.microsoft.com/office/drawing/2014/main" id="{E8E2A74D-A3B4-42FA-93EB-9D4B49804024}"/>
               </a:ext>
             </a:extLst>
           </p:cNvPr>
@@ -29289,7 +29153,7 @@
           <p:cNvPr id="22" name="Shape 20">
             <a:extLst xmlns:a="http://schemas.openxmlformats.org/drawingml/2006/main">
               <a:ext uri="{FF2B5EF4-FFF2-40B4-BE49-F238E27FC236}">
-                <a16:creationId xmlns:a16="http://schemas.microsoft.com/office/drawing/2014/main" id="{174D9E15-A14A-44FF-8C1C-2CEBD991DCB9}"/>
+                <a16:creationId xmlns:a16="http://schemas.microsoft.com/office/drawing/2014/main" id="{CC45C7A7-058D-4537-9ADC-6CAE511A6149}"/>
               </a:ext>
             </a:extLst>
           </p:cNvPr>
@@ -29324,7 +29188,7 @@
           <p:cNvPr id="23" name="Text 21">
             <a:extLst xmlns:a="http://schemas.openxmlformats.org/drawingml/2006/main">
               <a:ext uri="{FF2B5EF4-FFF2-40B4-BE49-F238E27FC236}">
-                <a16:creationId xmlns:a16="http://schemas.microsoft.com/office/drawing/2014/main" id="{D92E1982-3E0C-4B70-8AEB-F080CDEC6DF5}"/>
+                <a16:creationId xmlns:a16="http://schemas.microsoft.com/office/drawing/2014/main" id="{D74BBD98-667C-49AC-8D2F-83EDF773071B}"/>
               </a:ext>
             </a:extLst>
           </p:cNvPr>
@@ -29371,7 +29235,7 @@
           <p:cNvPr id="24" name="Shape 22">
             <a:extLst xmlns:a="http://schemas.openxmlformats.org/drawingml/2006/main">
               <a:ext uri="{FF2B5EF4-FFF2-40B4-BE49-F238E27FC236}">
-                <a16:creationId xmlns:a16="http://schemas.microsoft.com/office/drawing/2014/main" id="{194AF183-DA40-482A-954A-D71AA44547D5}"/>
+                <a16:creationId xmlns:a16="http://schemas.microsoft.com/office/drawing/2014/main" id="{B8B70A0D-CFEC-46DE-9B41-1FA825504A4D}"/>
               </a:ext>
             </a:extLst>
           </p:cNvPr>
@@ -29404,7 +29268,7 @@
           <p:cNvPr id="25" name="Text 23">
             <a:extLst xmlns:a="http://schemas.openxmlformats.org/drawingml/2006/main">
               <a:ext uri="{FF2B5EF4-FFF2-40B4-BE49-F238E27FC236}">
-                <a16:creationId xmlns:a16="http://schemas.microsoft.com/office/drawing/2014/main" id="{73D6699B-F70E-48E5-A044-001E1CDFA1C3}"/>
+                <a16:creationId xmlns:a16="http://schemas.microsoft.com/office/drawing/2014/main" id="{734E4563-149D-4B85-A462-7BFAC3FC252E}"/>
               </a:ext>
             </a:extLst>
           </p:cNvPr>
@@ -29451,7 +29315,7 @@
           <p:cNvPr id="26" name="Shape 24">
             <a:extLst xmlns:a="http://schemas.openxmlformats.org/drawingml/2006/main">
               <a:ext uri="{FF2B5EF4-FFF2-40B4-BE49-F238E27FC236}">
-                <a16:creationId xmlns:a16="http://schemas.microsoft.com/office/drawing/2014/main" id="{A58FF240-A88F-4E77-8DB8-FFB4E9DB6C33}"/>
+                <a16:creationId xmlns:a16="http://schemas.microsoft.com/office/drawing/2014/main" id="{1A198848-CDBA-4BF9-8AB7-F0F9665A1772}"/>
               </a:ext>
             </a:extLst>
           </p:cNvPr>
@@ -29484,7 +29348,7 @@
           <p:cNvPr id="27" name="Text 25">
             <a:extLst xmlns:a="http://schemas.openxmlformats.org/drawingml/2006/main">
               <a:ext uri="{FF2B5EF4-FFF2-40B4-BE49-F238E27FC236}">
-                <a16:creationId xmlns:a16="http://schemas.microsoft.com/office/drawing/2014/main" id="{AD1A5C9A-0129-4D5F-96D7-86AF66FF0764}"/>
+                <a16:creationId xmlns:a16="http://schemas.microsoft.com/office/drawing/2014/main" id="{13BE4D74-2282-4A84-B1BE-4AE5586E40AA}"/>
               </a:ext>
             </a:extLst>
           </p:cNvPr>
@@ -29531,7 +29395,7 @@
           <p:cNvPr id="28" name="Shape 26">
             <a:extLst xmlns:a="http://schemas.openxmlformats.org/drawingml/2006/main">
               <a:ext uri="{FF2B5EF4-FFF2-40B4-BE49-F238E27FC236}">
-                <a16:creationId xmlns:a16="http://schemas.microsoft.com/office/drawing/2014/main" id="{C102B620-98D8-497C-8558-802644408839}"/>
+                <a16:creationId xmlns:a16="http://schemas.microsoft.com/office/drawing/2014/main" id="{1A4E822E-0F5F-4AC6-966A-4CC4BB905B1E}"/>
               </a:ext>
             </a:extLst>
           </p:cNvPr>
@@ -29564,7 +29428,7 @@
           <p:cNvPr id="29" name="Text 27">
             <a:extLst xmlns:a="http://schemas.openxmlformats.org/drawingml/2006/main">
               <a:ext uri="{FF2B5EF4-FFF2-40B4-BE49-F238E27FC236}">
-                <a16:creationId xmlns:a16="http://schemas.microsoft.com/office/drawing/2014/main" id="{D72B56A0-5CA3-4617-B906-FF4134BCECB6}"/>
+                <a16:creationId xmlns:a16="http://schemas.microsoft.com/office/drawing/2014/main" id="{74142E3E-A575-46FD-AF48-62F748EBFAB3}"/>
               </a:ext>
             </a:extLst>
           </p:cNvPr>
@@ -29611,7 +29475,7 @@
           <p:cNvPr id="30" name="Shape 28">
             <a:extLst xmlns:a="http://schemas.openxmlformats.org/drawingml/2006/main">
               <a:ext uri="{FF2B5EF4-FFF2-40B4-BE49-F238E27FC236}">
-                <a16:creationId xmlns:a16="http://schemas.microsoft.com/office/drawing/2014/main" id="{B893F773-A3BC-4CD8-9FD4-D1AC49A3B38A}"/>
+                <a16:creationId xmlns:a16="http://schemas.microsoft.com/office/drawing/2014/main" id="{1DEB1B78-75C8-4F66-9170-A7971D545A97}"/>
               </a:ext>
             </a:extLst>
           </p:cNvPr>
@@ -29644,7 +29508,7 @@
           <p:cNvPr id="31" name="Text 29">
             <a:extLst xmlns:a="http://schemas.openxmlformats.org/drawingml/2006/main">
               <a:ext uri="{FF2B5EF4-FFF2-40B4-BE49-F238E27FC236}">
-                <a16:creationId xmlns:a16="http://schemas.microsoft.com/office/drawing/2014/main" id="{9ED55295-5CB8-4839-BDDD-1DAEBE9E153E}"/>
+                <a16:creationId xmlns:a16="http://schemas.microsoft.com/office/drawing/2014/main" id="{E5024BC3-DE39-4E40-A80A-EF2B0F2B5ECF}"/>
               </a:ext>
             </a:extLst>
           </p:cNvPr>
@@ -29691,7 +29555,7 @@
           <p:cNvPr id="32" name="Shape 30">
             <a:extLst xmlns:a="http://schemas.openxmlformats.org/drawingml/2006/main">
               <a:ext uri="{FF2B5EF4-FFF2-40B4-BE49-F238E27FC236}">
-                <a16:creationId xmlns:a16="http://schemas.microsoft.com/office/drawing/2014/main" id="{0FF35518-82B4-492A-8EC4-64A5B05B6586}"/>
+                <a16:creationId xmlns:a16="http://schemas.microsoft.com/office/drawing/2014/main" id="{374ADBA4-B11F-4382-944F-328610C73B78}"/>
               </a:ext>
             </a:extLst>
           </p:cNvPr>
@@ -29726,7 +29590,7 @@
           <p:cNvPr id="33" name="Text 31">
             <a:extLst xmlns:a="http://schemas.openxmlformats.org/drawingml/2006/main">
               <a:ext uri="{FF2B5EF4-FFF2-40B4-BE49-F238E27FC236}">
-                <a16:creationId xmlns:a16="http://schemas.microsoft.com/office/drawing/2014/main" id="{67B07541-0B65-4D26-A325-12340F332122}"/>
+                <a16:creationId xmlns:a16="http://schemas.microsoft.com/office/drawing/2014/main" id="{A087A3D4-2AFC-4EF6-9242-F0F9F48F3739}"/>
               </a:ext>
             </a:extLst>
           </p:cNvPr>
@@ -29773,7 +29637,7 @@
           <p:cNvPr id="34" name="Text 32">
             <a:extLst xmlns:a="http://schemas.openxmlformats.org/drawingml/2006/main">
               <a:ext uri="{FF2B5EF4-FFF2-40B4-BE49-F238E27FC236}">
-                <a16:creationId xmlns:a16="http://schemas.microsoft.com/office/drawing/2014/main" id="{EA1CB832-0EAE-47B6-A8C3-A091A8F38618}"/>
+                <a16:creationId xmlns:a16="http://schemas.microsoft.com/office/drawing/2014/main" id="{D4BD4310-B602-4354-B07A-CD22DC84143F}"/>
               </a:ext>
             </a:extLst>
           </p:cNvPr>
@@ -29820,7 +29684,7 @@
           <p:cNvPr id="35" name="Text 33">
             <a:extLst xmlns:a="http://schemas.openxmlformats.org/drawingml/2006/main">
               <a:ext uri="{FF2B5EF4-FFF2-40B4-BE49-F238E27FC236}">
-                <a16:creationId xmlns:a16="http://schemas.microsoft.com/office/drawing/2014/main" id="{7E902EDF-EE5E-49B4-BC7A-898D4EC3AE62}"/>
+                <a16:creationId xmlns:a16="http://schemas.microsoft.com/office/drawing/2014/main" id="{B9521B86-72C9-4644-91A7-34EF60FF6E75}"/>
               </a:ext>
             </a:extLst>
           </p:cNvPr>
@@ -29865,7 +29729,7 @@
     </p:spTree>
     <p:extLst>
       <p:ext uri="{BB962C8B-B14F-4D97-AF65-F5344CB8AC3E}">
-        <p14:creationId xmlns:p14="http://schemas.microsoft.com/office/powerpoint/2010/main" val="1502402003"/>
+        <p14:creationId xmlns:p14="http://schemas.microsoft.com/office/powerpoint/2010/main" val="1681067322"/>
       </p:ext>
     </p:extLst>
   </p:cSld>
@@ -29896,7 +29760,7 @@
           <p:cNvPr id="2" name="Text 0">
             <a:extLst xmlns:a="http://schemas.openxmlformats.org/drawingml/2006/main">
               <a:ext uri="{FF2B5EF4-FFF2-40B4-BE49-F238E27FC236}">
-                <a16:creationId xmlns:a16="http://schemas.microsoft.com/office/drawing/2014/main" id="{4BB4FDCC-47AA-4CA0-B3B4-2D60FF948E89}"/>
+                <a16:creationId xmlns:a16="http://schemas.microsoft.com/office/drawing/2014/main" id="{5570C318-8931-4C27-AFEB-0518307B52CD}"/>
               </a:ext>
             </a:extLst>
           </p:cNvPr>
@@ -29943,7 +29807,7 @@
           <p:cNvPr id="3" name="Text 1">
             <a:extLst xmlns:a="http://schemas.openxmlformats.org/drawingml/2006/main">
               <a:ext uri="{FF2B5EF4-FFF2-40B4-BE49-F238E27FC236}">
-                <a16:creationId xmlns:a16="http://schemas.microsoft.com/office/drawing/2014/main" id="{1875CD9D-8295-46CE-8706-A126C89E3A08}"/>
+                <a16:creationId xmlns:a16="http://schemas.microsoft.com/office/drawing/2014/main" id="{ED8A4D98-8BC1-4887-B729-2805DFF33172}"/>
               </a:ext>
             </a:extLst>
           </p:cNvPr>
@@ -29990,7 +29854,7 @@
           <p:cNvPr id="4" name="Shape 2">
             <a:extLst xmlns:a="http://schemas.openxmlformats.org/drawingml/2006/main">
               <a:ext uri="{FF2B5EF4-FFF2-40B4-BE49-F238E27FC236}">
-                <a16:creationId xmlns:a16="http://schemas.microsoft.com/office/drawing/2014/main" id="{7A951661-B521-44B3-AA7A-792A4D63E14B}"/>
+                <a16:creationId xmlns:a16="http://schemas.microsoft.com/office/drawing/2014/main" id="{B6E0608F-E0B0-43DD-B05D-7FE6BEC7ED3B}"/>
               </a:ext>
             </a:extLst>
           </p:cNvPr>
@@ -30025,7 +29889,7 @@
           <p:cNvPr id="5" name="Text 3">
             <a:extLst xmlns:a="http://schemas.openxmlformats.org/drawingml/2006/main">
               <a:ext uri="{FF2B5EF4-FFF2-40B4-BE49-F238E27FC236}">
-                <a16:creationId xmlns:a16="http://schemas.microsoft.com/office/drawing/2014/main" id="{36BF2EA9-B080-40BC-955E-453FEAC863EE}"/>
+                <a16:creationId xmlns:a16="http://schemas.microsoft.com/office/drawing/2014/main" id="{60A08304-581E-4555-8DAC-C7FCA242FC10}"/>
               </a:ext>
             </a:extLst>
           </p:cNvPr>
@@ -30072,7 +29936,7 @@
           <p:cNvPr id="6" name="Shape 4">
             <a:extLst xmlns:a="http://schemas.openxmlformats.org/drawingml/2006/main">
               <a:ext uri="{FF2B5EF4-FFF2-40B4-BE49-F238E27FC236}">
-                <a16:creationId xmlns:a16="http://schemas.microsoft.com/office/drawing/2014/main" id="{083CC5FE-70C0-4B8D-8D82-8F1D5493A634}"/>
+                <a16:creationId xmlns:a16="http://schemas.microsoft.com/office/drawing/2014/main" id="{E76EBAAD-0356-4D7D-9E7F-E2B139E286E3}"/>
               </a:ext>
             </a:extLst>
           </p:cNvPr>
@@ -30103,7 +29967,7 @@
           <p:cNvPr id="7" name="Shape 5">
             <a:extLst xmlns:a="http://schemas.openxmlformats.org/drawingml/2006/main">
               <a:ext uri="{FF2B5EF4-FFF2-40B4-BE49-F238E27FC236}">
-                <a16:creationId xmlns:a16="http://schemas.microsoft.com/office/drawing/2014/main" id="{F26555C6-1395-47C3-B97D-2BCEFF943F6C}"/>
+                <a16:creationId xmlns:a16="http://schemas.microsoft.com/office/drawing/2014/main" id="{63503BED-62F0-430D-8F03-36E60E948D46}"/>
               </a:ext>
             </a:extLst>
           </p:cNvPr>
@@ -30138,7 +30002,7 @@
           <p:cNvPr id="8" name="Text 6">
             <a:extLst xmlns:a="http://schemas.openxmlformats.org/drawingml/2006/main">
               <a:ext uri="{FF2B5EF4-FFF2-40B4-BE49-F238E27FC236}">
-                <a16:creationId xmlns:a16="http://schemas.microsoft.com/office/drawing/2014/main" id="{7C609A1A-1670-406C-8BEC-186D23B4B827}"/>
+                <a16:creationId xmlns:a16="http://schemas.microsoft.com/office/drawing/2014/main" id="{40128803-0D6C-4ECF-825B-EB4B2349C642}"/>
               </a:ext>
             </a:extLst>
           </p:cNvPr>
@@ -30185,7 +30049,7 @@
           <p:cNvPr id="9" name="Text 7">
             <a:extLst xmlns:a="http://schemas.openxmlformats.org/drawingml/2006/main">
               <a:ext uri="{FF2B5EF4-FFF2-40B4-BE49-F238E27FC236}">
-                <a16:creationId xmlns:a16="http://schemas.microsoft.com/office/drawing/2014/main" id="{0E9DB1F4-D47A-4E0F-960A-323885B133AB}"/>
+                <a16:creationId xmlns:a16="http://schemas.microsoft.com/office/drawing/2014/main" id="{FE3AE791-B136-43F3-AB84-1379FB4CA96F}"/>
               </a:ext>
             </a:extLst>
           </p:cNvPr>
@@ -30232,7 +30096,7 @@
           <p:cNvPr id="10" name="Shape 8">
             <a:extLst xmlns:a="http://schemas.openxmlformats.org/drawingml/2006/main">
               <a:ext uri="{FF2B5EF4-FFF2-40B4-BE49-F238E27FC236}">
-                <a16:creationId xmlns:a16="http://schemas.microsoft.com/office/drawing/2014/main" id="{DA34CD53-63C0-44AF-8FA6-216EB897B9CD}"/>
+                <a16:creationId xmlns:a16="http://schemas.microsoft.com/office/drawing/2014/main" id="{3826A628-7F70-49FA-A29B-C66F6C07ED82}"/>
               </a:ext>
             </a:extLst>
           </p:cNvPr>
@@ -30264,7 +30128,7 @@
           <p:cNvPr id="11" name="Shape 9">
             <a:extLst xmlns:a="http://schemas.openxmlformats.org/drawingml/2006/main">
               <a:ext uri="{FF2B5EF4-FFF2-40B4-BE49-F238E27FC236}">
-                <a16:creationId xmlns:a16="http://schemas.microsoft.com/office/drawing/2014/main" id="{5DC835DA-CC7C-4531-8715-019A12B91C06}"/>
+                <a16:creationId xmlns:a16="http://schemas.microsoft.com/office/drawing/2014/main" id="{2C2B9F03-5AC9-4EB1-B7E3-0AFBA66B16BE}"/>
               </a:ext>
             </a:extLst>
           </p:cNvPr>
@@ -30299,7 +30163,7 @@
           <p:cNvPr id="12" name="Text 10">
             <a:extLst xmlns:a="http://schemas.openxmlformats.org/drawingml/2006/main">
               <a:ext uri="{FF2B5EF4-FFF2-40B4-BE49-F238E27FC236}">
-                <a16:creationId xmlns:a16="http://schemas.microsoft.com/office/drawing/2014/main" id="{1E7035EF-12DA-4FA4-B3FA-42BAAA2EBF26}"/>
+                <a16:creationId xmlns:a16="http://schemas.microsoft.com/office/drawing/2014/main" id="{22005CA4-579B-4B15-B32A-5850DC3A159D}"/>
               </a:ext>
             </a:extLst>
           </p:cNvPr>
@@ -30346,7 +30210,7 @@
           <p:cNvPr id="13" name="Text 11">
             <a:extLst xmlns:a="http://schemas.openxmlformats.org/drawingml/2006/main">
               <a:ext uri="{FF2B5EF4-FFF2-40B4-BE49-F238E27FC236}">
-                <a16:creationId xmlns:a16="http://schemas.microsoft.com/office/drawing/2014/main" id="{35F171AC-F655-4CE0-A66A-6573839C6B82}"/>
+                <a16:creationId xmlns:a16="http://schemas.microsoft.com/office/drawing/2014/main" id="{9CC15778-42BF-49B7-ACB8-932D3EDD031A}"/>
               </a:ext>
             </a:extLst>
           </p:cNvPr>
@@ -30393,7 +30257,7 @@
           <p:cNvPr id="14" name="Shape 12">
             <a:extLst xmlns:a="http://schemas.openxmlformats.org/drawingml/2006/main">
               <a:ext uri="{FF2B5EF4-FFF2-40B4-BE49-F238E27FC236}">
-                <a16:creationId xmlns:a16="http://schemas.microsoft.com/office/drawing/2014/main" id="{F5841DA8-6FEE-4192-993F-05CB6B3CA6D1}"/>
+                <a16:creationId xmlns:a16="http://schemas.microsoft.com/office/drawing/2014/main" id="{0AA10302-2B48-41C4-AF9C-B0F32EBD06D6}"/>
               </a:ext>
             </a:extLst>
           </p:cNvPr>
@@ -30425,7 +30289,7 @@
           <p:cNvPr id="15" name="Shape 13">
             <a:extLst xmlns:a="http://schemas.openxmlformats.org/drawingml/2006/main">
               <a:ext uri="{FF2B5EF4-FFF2-40B4-BE49-F238E27FC236}">
-                <a16:creationId xmlns:a16="http://schemas.microsoft.com/office/drawing/2014/main" id="{EA51B497-30C8-41E8-81F9-E8B21102FF78}"/>
+                <a16:creationId xmlns:a16="http://schemas.microsoft.com/office/drawing/2014/main" id="{0F2D146C-0A64-4422-A8DB-C488F9B8B7C4}"/>
               </a:ext>
             </a:extLst>
           </p:cNvPr>
@@ -30460,7 +30324,7 @@
           <p:cNvPr id="16" name="Text 14">
             <a:extLst xmlns:a="http://schemas.openxmlformats.org/drawingml/2006/main">
               <a:ext uri="{FF2B5EF4-FFF2-40B4-BE49-F238E27FC236}">
-                <a16:creationId xmlns:a16="http://schemas.microsoft.com/office/drawing/2014/main" id="{D7FD6DC0-79DC-4D6D-93DB-9F7A8746221E}"/>
+                <a16:creationId xmlns:a16="http://schemas.microsoft.com/office/drawing/2014/main" id="{99994A0B-A741-473C-AE5B-581A87440212}"/>
               </a:ext>
             </a:extLst>
           </p:cNvPr>
@@ -30507,7 +30371,7 @@
           <p:cNvPr id="17" name="Text 15">
             <a:extLst xmlns:a="http://schemas.openxmlformats.org/drawingml/2006/main">
               <a:ext uri="{FF2B5EF4-FFF2-40B4-BE49-F238E27FC236}">
-                <a16:creationId xmlns:a16="http://schemas.microsoft.com/office/drawing/2014/main" id="{BD36A4CD-66AB-46BB-BF8E-E84C17B0B061}"/>
+                <a16:creationId xmlns:a16="http://schemas.microsoft.com/office/drawing/2014/main" id="{525E99AC-448E-4301-9F8A-A552DF2BEE00}"/>
               </a:ext>
             </a:extLst>
           </p:cNvPr>
@@ -30554,7 +30418,7 @@
           <p:cNvPr id="18" name="Shape 16">
             <a:extLst xmlns:a="http://schemas.openxmlformats.org/drawingml/2006/main">
               <a:ext uri="{FF2B5EF4-FFF2-40B4-BE49-F238E27FC236}">
-                <a16:creationId xmlns:a16="http://schemas.microsoft.com/office/drawing/2014/main" id="{3FC241F0-6835-42B8-8E06-F30DC10A09A4}"/>
+                <a16:creationId xmlns:a16="http://schemas.microsoft.com/office/drawing/2014/main" id="{DC65F9E3-95B1-408A-BC42-6C7E26C2EC22}"/>
               </a:ext>
             </a:extLst>
           </p:cNvPr>
@@ -30586,7 +30450,7 @@
           <p:cNvPr id="19" name="Shape 17">
             <a:extLst xmlns:a="http://schemas.openxmlformats.org/drawingml/2006/main">
               <a:ext uri="{FF2B5EF4-FFF2-40B4-BE49-F238E27FC236}">
-                <a16:creationId xmlns:a16="http://schemas.microsoft.com/office/drawing/2014/main" id="{D27F144B-4C72-4447-8B60-CDFDA73DBDFC}"/>
+                <a16:creationId xmlns:a16="http://schemas.microsoft.com/office/drawing/2014/main" id="{7347A2F5-43D4-43B0-8776-B40A296EB130}"/>
               </a:ext>
             </a:extLst>
           </p:cNvPr>
@@ -30621,7 +30485,7 @@
           <p:cNvPr id="20" name="Text 18">
             <a:extLst xmlns:a="http://schemas.openxmlformats.org/drawingml/2006/main">
               <a:ext uri="{FF2B5EF4-FFF2-40B4-BE49-F238E27FC236}">
-                <a16:creationId xmlns:a16="http://schemas.microsoft.com/office/drawing/2014/main" id="{E8BDF23A-40C0-410A-8B9C-91FA0B4E547B}"/>
+                <a16:creationId xmlns:a16="http://schemas.microsoft.com/office/drawing/2014/main" id="{E5C46FC4-E46F-4C03-A20A-D80247EB5B0C}"/>
               </a:ext>
             </a:extLst>
           </p:cNvPr>
@@ -30668,7 +30532,7 @@
           <p:cNvPr id="21" name="Text 19">
             <a:extLst xmlns:a="http://schemas.openxmlformats.org/drawingml/2006/main">
               <a:ext uri="{FF2B5EF4-FFF2-40B4-BE49-F238E27FC236}">
-                <a16:creationId xmlns:a16="http://schemas.microsoft.com/office/drawing/2014/main" id="{C93114FA-3E7C-4510-922B-BE75BFFE6FA6}"/>
+                <a16:creationId xmlns:a16="http://schemas.microsoft.com/office/drawing/2014/main" id="{388B9D4A-5E92-438F-915D-44C794BCFEFD}"/>
               </a:ext>
             </a:extLst>
           </p:cNvPr>
@@ -30715,7 +30579,7 @@
           <p:cNvPr id="22" name="Shape 20">
             <a:extLst xmlns:a="http://schemas.openxmlformats.org/drawingml/2006/main">
               <a:ext uri="{FF2B5EF4-FFF2-40B4-BE49-F238E27FC236}">
-                <a16:creationId xmlns:a16="http://schemas.microsoft.com/office/drawing/2014/main" id="{18399817-28E8-4B82-AEF8-26AE77C6285A}"/>
+                <a16:creationId xmlns:a16="http://schemas.microsoft.com/office/drawing/2014/main" id="{94E5A42F-4A5B-473B-A645-E151871CB53B}"/>
               </a:ext>
             </a:extLst>
           </p:cNvPr>
@@ -30747,7 +30611,7 @@
           <p:cNvPr id="23" name="Shape 21">
             <a:extLst xmlns:a="http://schemas.openxmlformats.org/drawingml/2006/main">
               <a:ext uri="{FF2B5EF4-FFF2-40B4-BE49-F238E27FC236}">
-                <a16:creationId xmlns:a16="http://schemas.microsoft.com/office/drawing/2014/main" id="{6F52E32B-9117-4469-A902-9A353A221C12}"/>
+                <a16:creationId xmlns:a16="http://schemas.microsoft.com/office/drawing/2014/main" id="{F4BDB997-2ED4-4F0E-8D0F-F12E68796395}"/>
               </a:ext>
             </a:extLst>
           </p:cNvPr>
@@ -30782,7 +30646,7 @@
           <p:cNvPr id="24" name="Text 22">
             <a:extLst xmlns:a="http://schemas.openxmlformats.org/drawingml/2006/main">
               <a:ext uri="{FF2B5EF4-FFF2-40B4-BE49-F238E27FC236}">
-                <a16:creationId xmlns:a16="http://schemas.microsoft.com/office/drawing/2014/main" id="{B30A4EB3-1D84-48AC-8C34-A5109541F194}"/>
+                <a16:creationId xmlns:a16="http://schemas.microsoft.com/office/drawing/2014/main" id="{184AF0E6-BEFD-4AA9-BBAD-DAFD393F9DB7}"/>
               </a:ext>
             </a:extLst>
           </p:cNvPr>
@@ -30829,7 +30693,7 @@
           <p:cNvPr id="25" name="Text 23">
             <a:extLst xmlns:a="http://schemas.openxmlformats.org/drawingml/2006/main">
               <a:ext uri="{FF2B5EF4-FFF2-40B4-BE49-F238E27FC236}">
-                <a16:creationId xmlns:a16="http://schemas.microsoft.com/office/drawing/2014/main" id="{BA758212-793B-4B8B-902E-9FF2873C46F4}"/>
+                <a16:creationId xmlns:a16="http://schemas.microsoft.com/office/drawing/2014/main" id="{8B63BA05-A78A-4EB4-9DCD-1895BDE2AE2B}"/>
               </a:ext>
             </a:extLst>
           </p:cNvPr>
@@ -30876,7 +30740,7 @@
           <p:cNvPr id="26" name="Shape 24">
             <a:extLst xmlns:a="http://schemas.openxmlformats.org/drawingml/2006/main">
               <a:ext uri="{FF2B5EF4-FFF2-40B4-BE49-F238E27FC236}">
-                <a16:creationId xmlns:a16="http://schemas.microsoft.com/office/drawing/2014/main" id="{564A2CF0-9290-460B-98F3-36CBDFD4E363}"/>
+                <a16:creationId xmlns:a16="http://schemas.microsoft.com/office/drawing/2014/main" id="{71E35368-07DB-4F6B-BBFC-84A6444056A9}"/>
               </a:ext>
             </a:extLst>
           </p:cNvPr>
@@ -30908,7 +30772,7 @@
           <p:cNvPr id="27" name="Shape 25">
             <a:extLst xmlns:a="http://schemas.openxmlformats.org/drawingml/2006/main">
               <a:ext uri="{FF2B5EF4-FFF2-40B4-BE49-F238E27FC236}">
-                <a16:creationId xmlns:a16="http://schemas.microsoft.com/office/drawing/2014/main" id="{1C39FF0F-BE2F-4FF6-966D-2649054C159E}"/>
+                <a16:creationId xmlns:a16="http://schemas.microsoft.com/office/drawing/2014/main" id="{DB73518B-FCC6-4FD5-9A25-563C0C3A1A76}"/>
               </a:ext>
             </a:extLst>
           </p:cNvPr>
@@ -30943,7 +30807,7 @@
           <p:cNvPr id="28" name="Text 26">
             <a:extLst xmlns:a="http://schemas.openxmlformats.org/drawingml/2006/main">
               <a:ext uri="{FF2B5EF4-FFF2-40B4-BE49-F238E27FC236}">
-                <a16:creationId xmlns:a16="http://schemas.microsoft.com/office/drawing/2014/main" id="{7D21921A-34F1-4168-ACC8-2AF45D0EE8FE}"/>
+                <a16:creationId xmlns:a16="http://schemas.microsoft.com/office/drawing/2014/main" id="{FEE190CD-AABB-404F-96CD-C2DB2FE88309}"/>
               </a:ext>
             </a:extLst>
           </p:cNvPr>
@@ -30990,7 +30854,7 @@
           <p:cNvPr id="29" name="Text 27">
             <a:extLst xmlns:a="http://schemas.openxmlformats.org/drawingml/2006/main">
               <a:ext uri="{FF2B5EF4-FFF2-40B4-BE49-F238E27FC236}">
-                <a16:creationId xmlns:a16="http://schemas.microsoft.com/office/drawing/2014/main" id="{4B5AEEF3-2BDE-4EF6-A2E0-04883B2353F7}"/>
+                <a16:creationId xmlns:a16="http://schemas.microsoft.com/office/drawing/2014/main" id="{F7B04303-D85B-4D67-B740-658C4D9510F9}"/>
               </a:ext>
             </a:extLst>
           </p:cNvPr>
@@ -31037,7 +30901,7 @@
           <p:cNvPr id="30" name="Text 28">
             <a:extLst xmlns:a="http://schemas.openxmlformats.org/drawingml/2006/main">
               <a:ext uri="{FF2B5EF4-FFF2-40B4-BE49-F238E27FC236}">
-                <a16:creationId xmlns:a16="http://schemas.microsoft.com/office/drawing/2014/main" id="{B07D95A2-5211-4554-8F82-2EDFDBAA699A}"/>
+                <a16:creationId xmlns:a16="http://schemas.microsoft.com/office/drawing/2014/main" id="{D52CF3CC-1BC5-46F2-A783-095AC2670A88}"/>
               </a:ext>
             </a:extLst>
           </p:cNvPr>
@@ -31084,7 +30948,7 @@
           <p:cNvPr id="31" name="Shape 29">
             <a:extLst xmlns:a="http://schemas.openxmlformats.org/drawingml/2006/main">
               <a:ext uri="{FF2B5EF4-FFF2-40B4-BE49-F238E27FC236}">
-                <a16:creationId xmlns:a16="http://schemas.microsoft.com/office/drawing/2014/main" id="{22AE086B-55FE-450F-8C85-3640595D180A}"/>
+                <a16:creationId xmlns:a16="http://schemas.microsoft.com/office/drawing/2014/main" id="{CF13B26B-02EE-47BD-9A0A-C3311D4A1555}"/>
               </a:ext>
             </a:extLst>
           </p:cNvPr>
@@ -31119,7 +30983,7 @@
           <p:cNvPr id="32" name="Text 30">
             <a:extLst xmlns:a="http://schemas.openxmlformats.org/drawingml/2006/main">
               <a:ext uri="{FF2B5EF4-FFF2-40B4-BE49-F238E27FC236}">
-                <a16:creationId xmlns:a16="http://schemas.microsoft.com/office/drawing/2014/main" id="{B440AFB0-073B-4CE5-988A-92419F76550F}"/>
+                <a16:creationId xmlns:a16="http://schemas.microsoft.com/office/drawing/2014/main" id="{CFB4B148-7504-44C7-A235-A9ACA8A138EA}"/>
               </a:ext>
             </a:extLst>
           </p:cNvPr>
@@ -31198,7 +31062,7 @@
           <p:cNvPr id="33" name="Text 31">
             <a:extLst xmlns:a="http://schemas.openxmlformats.org/drawingml/2006/main">
               <a:ext uri="{FF2B5EF4-FFF2-40B4-BE49-F238E27FC236}">
-                <a16:creationId xmlns:a16="http://schemas.microsoft.com/office/drawing/2014/main" id="{D9B3257C-5399-4C27-A3C4-9BEC5B96167E}"/>
+                <a16:creationId xmlns:a16="http://schemas.microsoft.com/office/drawing/2014/main" id="{44DA377A-3D41-4791-9D05-FFCC307BB129}"/>
               </a:ext>
             </a:extLst>
           </p:cNvPr>
@@ -31245,7 +31109,7 @@
           <p:cNvPr id="34" name="Shape 32">
             <a:extLst xmlns:a="http://schemas.openxmlformats.org/drawingml/2006/main">
               <a:ext uri="{FF2B5EF4-FFF2-40B4-BE49-F238E27FC236}">
-                <a16:creationId xmlns:a16="http://schemas.microsoft.com/office/drawing/2014/main" id="{473EB80B-C549-440D-A681-D7FBD920AAC7}"/>
+                <a16:creationId xmlns:a16="http://schemas.microsoft.com/office/drawing/2014/main" id="{74D50861-9C53-4A08-B07A-27673036E318}"/>
               </a:ext>
             </a:extLst>
           </p:cNvPr>
@@ -31280,7 +31144,7 @@
           <p:cNvPr id="35" name="Text 33">
             <a:extLst xmlns:a="http://schemas.openxmlformats.org/drawingml/2006/main">
               <a:ext uri="{FF2B5EF4-FFF2-40B4-BE49-F238E27FC236}">
-                <a16:creationId xmlns:a16="http://schemas.microsoft.com/office/drawing/2014/main" id="{5FE9A5E2-E2ED-4457-828D-A52DE37C957C}"/>
+                <a16:creationId xmlns:a16="http://schemas.microsoft.com/office/drawing/2014/main" id="{AF1D8341-6925-428F-88E3-3436456B09D6}"/>
               </a:ext>
             </a:extLst>
           </p:cNvPr>
@@ -31359,7 +31223,7 @@
           <p:cNvPr id="36" name="Shape 34">
             <a:extLst xmlns:a="http://schemas.openxmlformats.org/drawingml/2006/main">
               <a:ext uri="{FF2B5EF4-FFF2-40B4-BE49-F238E27FC236}">
-                <a16:creationId xmlns:a16="http://schemas.microsoft.com/office/drawing/2014/main" id="{163BD817-7DE4-44E8-AFFE-06D9B80D1A22}"/>
+                <a16:creationId xmlns:a16="http://schemas.microsoft.com/office/drawing/2014/main" id="{294C881B-DC11-4B6E-95F6-178DDAA36128}"/>
               </a:ext>
             </a:extLst>
           </p:cNvPr>
@@ -31394,7 +31258,7 @@
           <p:cNvPr id="37" name="Text 35">
             <a:extLst xmlns:a="http://schemas.openxmlformats.org/drawingml/2006/main">
               <a:ext uri="{FF2B5EF4-FFF2-40B4-BE49-F238E27FC236}">
-                <a16:creationId xmlns:a16="http://schemas.microsoft.com/office/drawing/2014/main" id="{6BF0B006-2AB9-4623-BE69-F20AF36D51E4}"/>
+                <a16:creationId xmlns:a16="http://schemas.microsoft.com/office/drawing/2014/main" id="{C863E59D-7420-40DC-AEA4-47BDF30DF9EC}"/>
               </a:ext>
             </a:extLst>
           </p:cNvPr>
@@ -31441,7 +31305,7 @@
           <p:cNvPr id="38" name="Text 36">
             <a:extLst xmlns:a="http://schemas.openxmlformats.org/drawingml/2006/main">
               <a:ext uri="{FF2B5EF4-FFF2-40B4-BE49-F238E27FC236}">
-                <a16:creationId xmlns:a16="http://schemas.microsoft.com/office/drawing/2014/main" id="{DCBDE759-7CB1-4C8C-955F-214AA1820593}"/>
+                <a16:creationId xmlns:a16="http://schemas.microsoft.com/office/drawing/2014/main" id="{50B93A5A-9521-4D48-A2BE-43CC712C2516}"/>
               </a:ext>
             </a:extLst>
           </p:cNvPr>
@@ -31488,7 +31352,7 @@
           <p:cNvPr id="39" name="Text 37">
             <a:extLst xmlns:a="http://schemas.openxmlformats.org/drawingml/2006/main">
               <a:ext uri="{FF2B5EF4-FFF2-40B4-BE49-F238E27FC236}">
-                <a16:creationId xmlns:a16="http://schemas.microsoft.com/office/drawing/2014/main" id="{71B936C2-2323-4FC1-9E76-570463EC5CCA}"/>
+                <a16:creationId xmlns:a16="http://schemas.microsoft.com/office/drawing/2014/main" id="{694F0B87-1BE9-4F6C-AADE-A88E930DC278}"/>
               </a:ext>
             </a:extLst>
           </p:cNvPr>
@@ -31533,7 +31397,7 @@
     </p:spTree>
     <p:extLst>
       <p:ext uri="{BB962C8B-B14F-4D97-AF65-F5344CB8AC3E}">
-        <p14:creationId xmlns:p14="http://schemas.microsoft.com/office/powerpoint/2010/main" val="1006102723"/>
+        <p14:creationId xmlns:p14="http://schemas.microsoft.com/office/powerpoint/2010/main" val="80481956"/>
       </p:ext>
     </p:extLst>
   </p:cSld>
@@ -31564,7 +31428,7 @@
           <p:cNvPr id="2" name="Text 0">
             <a:extLst xmlns:a="http://schemas.openxmlformats.org/drawingml/2006/main">
               <a:ext uri="{FF2B5EF4-FFF2-40B4-BE49-F238E27FC236}">
-                <a16:creationId xmlns:a16="http://schemas.microsoft.com/office/drawing/2014/main" id="{28FE2B9B-F9FE-4B94-8273-D79357241D07}"/>
+                <a16:creationId xmlns:a16="http://schemas.microsoft.com/office/drawing/2014/main" id="{C7BF79D9-FDA7-4691-B8DD-E5585E710233}"/>
               </a:ext>
             </a:extLst>
           </p:cNvPr>
@@ -31611,7 +31475,7 @@
           <p:cNvPr id="3" name="Text 1">
             <a:extLst xmlns:a="http://schemas.openxmlformats.org/drawingml/2006/main">
               <a:ext uri="{FF2B5EF4-FFF2-40B4-BE49-F238E27FC236}">
-                <a16:creationId xmlns:a16="http://schemas.microsoft.com/office/drawing/2014/main" id="{8E881FC1-ABFE-4A5B-91A4-B9A54A75BCF8}"/>
+                <a16:creationId xmlns:a16="http://schemas.microsoft.com/office/drawing/2014/main" id="{CB0CA121-2B8C-4C74-9CE3-19F7DF86CF1D}"/>
               </a:ext>
             </a:extLst>
           </p:cNvPr>
@@ -31658,7 +31522,7 @@
           <p:cNvPr id="4" name="Shape 2">
             <a:extLst xmlns:a="http://schemas.openxmlformats.org/drawingml/2006/main">
               <a:ext uri="{FF2B5EF4-FFF2-40B4-BE49-F238E27FC236}">
-                <a16:creationId xmlns:a16="http://schemas.microsoft.com/office/drawing/2014/main" id="{1F86C8A8-F2C9-4EE9-8ACF-A7455F874B8C}"/>
+                <a16:creationId xmlns:a16="http://schemas.microsoft.com/office/drawing/2014/main" id="{979EBF29-2B82-4A2A-B8FE-DF0986A8C7FA}"/>
               </a:ext>
             </a:extLst>
           </p:cNvPr>
@@ -31693,7 +31557,7 @@
           <p:cNvPr id="5" name="Text 3">
             <a:extLst xmlns:a="http://schemas.openxmlformats.org/drawingml/2006/main">
               <a:ext uri="{FF2B5EF4-FFF2-40B4-BE49-F238E27FC236}">
-                <a16:creationId xmlns:a16="http://schemas.microsoft.com/office/drawing/2014/main" id="{8EB30861-A95D-46BF-9B05-A82FD851392C}"/>
+                <a16:creationId xmlns:a16="http://schemas.microsoft.com/office/drawing/2014/main" id="{1DCA0FA3-34AE-4F98-B85E-6B0C5B7BA07E}"/>
               </a:ext>
             </a:extLst>
           </p:cNvPr>
@@ -31740,7 +31604,7 @@
           <p:cNvPr id="6" name="Shape 4">
             <a:extLst xmlns:a="http://schemas.openxmlformats.org/drawingml/2006/main">
               <a:ext uri="{FF2B5EF4-FFF2-40B4-BE49-F238E27FC236}">
-                <a16:creationId xmlns:a16="http://schemas.microsoft.com/office/drawing/2014/main" id="{C80E8A60-3353-4F7A-A544-E0313F2580FA}"/>
+                <a16:creationId xmlns:a16="http://schemas.microsoft.com/office/drawing/2014/main" id="{C366358B-468C-4297-BFCC-BD1DAE4E1521}"/>
               </a:ext>
             </a:extLst>
           </p:cNvPr>
@@ -31771,7 +31635,7 @@
           <p:cNvPr id="7" name="Shape 5">
             <a:extLst xmlns:a="http://schemas.openxmlformats.org/drawingml/2006/main">
               <a:ext uri="{FF2B5EF4-FFF2-40B4-BE49-F238E27FC236}">
-                <a16:creationId xmlns:a16="http://schemas.microsoft.com/office/drawing/2014/main" id="{D1501F4C-110E-4639-85CA-BC271CF5B9FC}"/>
+                <a16:creationId xmlns:a16="http://schemas.microsoft.com/office/drawing/2014/main" id="{17F97596-9D4C-4672-BFE9-363051420EE0}"/>
               </a:ext>
             </a:extLst>
           </p:cNvPr>
@@ -31806,7 +31670,7 @@
           <p:cNvPr id="8" name="Text 6">
             <a:extLst xmlns:a="http://schemas.openxmlformats.org/drawingml/2006/main">
               <a:ext uri="{FF2B5EF4-FFF2-40B4-BE49-F238E27FC236}">
-                <a16:creationId xmlns:a16="http://schemas.microsoft.com/office/drawing/2014/main" id="{6733AE5D-755E-4C6A-8240-41F3FBAD4E97}"/>
+                <a16:creationId xmlns:a16="http://schemas.microsoft.com/office/drawing/2014/main" id="{994EE6BC-37E8-41A6-8818-25C31EF35052}"/>
               </a:ext>
             </a:extLst>
           </p:cNvPr>
@@ -31853,7 +31717,7 @@
           <p:cNvPr id="9" name="Text 7">
             <a:extLst xmlns:a="http://schemas.openxmlformats.org/drawingml/2006/main">
               <a:ext uri="{FF2B5EF4-FFF2-40B4-BE49-F238E27FC236}">
-                <a16:creationId xmlns:a16="http://schemas.microsoft.com/office/drawing/2014/main" id="{51BE422C-A11F-4AAA-88D0-C8EBFD16B478}"/>
+                <a16:creationId xmlns:a16="http://schemas.microsoft.com/office/drawing/2014/main" id="{37981DDE-0E6E-439B-8ECF-6C2758CBCBEE}"/>
               </a:ext>
             </a:extLst>
           </p:cNvPr>
@@ -31900,7 +31764,7 @@
           <p:cNvPr id="10" name="Text 8">
             <a:extLst xmlns:a="http://schemas.openxmlformats.org/drawingml/2006/main">
               <a:ext uri="{FF2B5EF4-FFF2-40B4-BE49-F238E27FC236}">
-                <a16:creationId xmlns:a16="http://schemas.microsoft.com/office/drawing/2014/main" id="{58262275-D4F3-4A1A-8E27-B8F9ECDC8C19}"/>
+                <a16:creationId xmlns:a16="http://schemas.microsoft.com/office/drawing/2014/main" id="{22797A40-0698-442D-953A-731FD8258402}"/>
               </a:ext>
             </a:extLst>
           </p:cNvPr>
@@ -31947,7 +31811,7 @@
           <p:cNvPr id="11" name="Shape 9">
             <a:extLst xmlns:a="http://schemas.openxmlformats.org/drawingml/2006/main">
               <a:ext uri="{FF2B5EF4-FFF2-40B4-BE49-F238E27FC236}">
-                <a16:creationId xmlns:a16="http://schemas.microsoft.com/office/drawing/2014/main" id="{5C5EC845-1C46-4F25-A574-B4885823A1B8}"/>
+                <a16:creationId xmlns:a16="http://schemas.microsoft.com/office/drawing/2014/main" id="{E01FA637-34E2-4DAF-8517-D47E0EBBE7C6}"/>
               </a:ext>
             </a:extLst>
           </p:cNvPr>
@@ -31982,7 +31846,7 @@
           <p:cNvPr id="12" name="Text 10">
             <a:extLst xmlns:a="http://schemas.openxmlformats.org/drawingml/2006/main">
               <a:ext uri="{FF2B5EF4-FFF2-40B4-BE49-F238E27FC236}">
-                <a16:creationId xmlns:a16="http://schemas.microsoft.com/office/drawing/2014/main" id="{94603E51-85B4-48A4-99E8-0BFE9E3897D2}"/>
+                <a16:creationId xmlns:a16="http://schemas.microsoft.com/office/drawing/2014/main" id="{1FB6886F-6CAB-4B99-9D61-34BE133E6BDD}"/>
               </a:ext>
             </a:extLst>
           </p:cNvPr>
@@ -32029,7 +31893,7 @@
           <p:cNvPr id="13" name="Shape 11">
             <a:extLst xmlns:a="http://schemas.openxmlformats.org/drawingml/2006/main">
               <a:ext uri="{FF2B5EF4-FFF2-40B4-BE49-F238E27FC236}">
-                <a16:creationId xmlns:a16="http://schemas.microsoft.com/office/drawing/2014/main" id="{302FF4B6-D51C-4C14-AF0E-E2B2376C1E4A}"/>
+                <a16:creationId xmlns:a16="http://schemas.microsoft.com/office/drawing/2014/main" id="{35A4CBC8-46D5-408C-9D3A-D67A35C26C55}"/>
               </a:ext>
             </a:extLst>
           </p:cNvPr>
@@ -32064,7 +31928,7 @@
           <p:cNvPr id="14" name="Text 12">
             <a:extLst xmlns:a="http://schemas.openxmlformats.org/drawingml/2006/main">
               <a:ext uri="{FF2B5EF4-FFF2-40B4-BE49-F238E27FC236}">
-                <a16:creationId xmlns:a16="http://schemas.microsoft.com/office/drawing/2014/main" id="{D7351253-EE6F-45FB-B653-197E2CD67494}"/>
+                <a16:creationId xmlns:a16="http://schemas.microsoft.com/office/drawing/2014/main" id="{FB4B5003-54A2-4ED0-89B7-0B7D8C34C204}"/>
               </a:ext>
             </a:extLst>
           </p:cNvPr>
@@ -32111,7 +31975,7 @@
           <p:cNvPr id="15" name="Text 13">
             <a:extLst xmlns:a="http://schemas.openxmlformats.org/drawingml/2006/main">
               <a:ext uri="{FF2B5EF4-FFF2-40B4-BE49-F238E27FC236}">
-                <a16:creationId xmlns:a16="http://schemas.microsoft.com/office/drawing/2014/main" id="{45E6843C-0491-4267-B342-9DFE61579C41}"/>
+                <a16:creationId xmlns:a16="http://schemas.microsoft.com/office/drawing/2014/main" id="{21F43ECE-0997-48EB-A7DE-079361799DC7}"/>
               </a:ext>
             </a:extLst>
           </p:cNvPr>
@@ -32158,7 +32022,7 @@
           <p:cNvPr id="16" name="Shape 14">
             <a:extLst xmlns:a="http://schemas.openxmlformats.org/drawingml/2006/main">
               <a:ext uri="{FF2B5EF4-FFF2-40B4-BE49-F238E27FC236}">
-                <a16:creationId xmlns:a16="http://schemas.microsoft.com/office/drawing/2014/main" id="{5AAD6468-0EE3-4D72-9FD9-622E5E34A9E6}"/>
+                <a16:creationId xmlns:a16="http://schemas.microsoft.com/office/drawing/2014/main" id="{B7CE9F22-4F31-407D-A165-9CC57942C68F}"/>
               </a:ext>
             </a:extLst>
           </p:cNvPr>
@@ -32193,7 +32057,7 @@
           <p:cNvPr id="17" name="Text 15">
             <a:extLst xmlns:a="http://schemas.openxmlformats.org/drawingml/2006/main">
               <a:ext uri="{FF2B5EF4-FFF2-40B4-BE49-F238E27FC236}">
-                <a16:creationId xmlns:a16="http://schemas.microsoft.com/office/drawing/2014/main" id="{36B28CF7-4BFE-4FA7-84D6-912895D05F73}"/>
+                <a16:creationId xmlns:a16="http://schemas.microsoft.com/office/drawing/2014/main" id="{76152144-27C8-472B-9461-7CAF402C3582}"/>
               </a:ext>
             </a:extLst>
           </p:cNvPr>
@@ -32240,7 +32104,7 @@
           <p:cNvPr id="18" name="Text 16">
             <a:extLst xmlns:a="http://schemas.openxmlformats.org/drawingml/2006/main">
               <a:ext uri="{FF2B5EF4-FFF2-40B4-BE49-F238E27FC236}">
-                <a16:creationId xmlns:a16="http://schemas.microsoft.com/office/drawing/2014/main" id="{1562B40A-D4F4-4C84-9905-8CF90F383B62}"/>
+                <a16:creationId xmlns:a16="http://schemas.microsoft.com/office/drawing/2014/main" id="{4D1AC2E0-E48C-4DE7-AF52-6CB07F2A3E74}"/>
               </a:ext>
             </a:extLst>
           </p:cNvPr>
@@ -32287,7 +32151,7 @@
           <p:cNvPr id="19" name="Shape 17">
             <a:extLst xmlns:a="http://schemas.openxmlformats.org/drawingml/2006/main">
               <a:ext uri="{FF2B5EF4-FFF2-40B4-BE49-F238E27FC236}">
-                <a16:creationId xmlns:a16="http://schemas.microsoft.com/office/drawing/2014/main" id="{EC5AB6F2-EAEE-4B75-B5DB-33D6508C0F08}"/>
+                <a16:creationId xmlns:a16="http://schemas.microsoft.com/office/drawing/2014/main" id="{53F80A85-8B38-4B89-A2E2-5C01965B6B5F}"/>
               </a:ext>
             </a:extLst>
           </p:cNvPr>
@@ -32322,7 +32186,7 @@
           <p:cNvPr id="20" name="Text 18">
             <a:extLst xmlns:a="http://schemas.openxmlformats.org/drawingml/2006/main">
               <a:ext uri="{FF2B5EF4-FFF2-40B4-BE49-F238E27FC236}">
-                <a16:creationId xmlns:a16="http://schemas.microsoft.com/office/drawing/2014/main" id="{1EC76601-D636-45FF-92E0-4CB79B129E81}"/>
+                <a16:creationId xmlns:a16="http://schemas.microsoft.com/office/drawing/2014/main" id="{AD6509B9-EE10-49A4-9292-3DA6A9B146EC}"/>
               </a:ext>
             </a:extLst>
           </p:cNvPr>
@@ -32369,7 +32233,7 @@
           <p:cNvPr id="21" name="Text 19">
             <a:extLst xmlns:a="http://schemas.openxmlformats.org/drawingml/2006/main">
               <a:ext uri="{FF2B5EF4-FFF2-40B4-BE49-F238E27FC236}">
-                <a16:creationId xmlns:a16="http://schemas.microsoft.com/office/drawing/2014/main" id="{7F9156D5-6C17-4FEF-B03D-569597722C0F}"/>
+                <a16:creationId xmlns:a16="http://schemas.microsoft.com/office/drawing/2014/main" id="{127AB2B1-EC79-4AEE-B1B5-AF0E95D82A95}"/>
               </a:ext>
             </a:extLst>
           </p:cNvPr>
@@ -32416,7 +32280,7 @@
           <p:cNvPr id="22" name="Shape 20">
             <a:extLst xmlns:a="http://schemas.openxmlformats.org/drawingml/2006/main">
               <a:ext uri="{FF2B5EF4-FFF2-40B4-BE49-F238E27FC236}">
-                <a16:creationId xmlns:a16="http://schemas.microsoft.com/office/drawing/2014/main" id="{029075BA-6326-4B80-B0D5-EC83B4FDFC41}"/>
+                <a16:creationId xmlns:a16="http://schemas.microsoft.com/office/drawing/2014/main" id="{3B52A53A-B6F7-4A8A-93E1-F94E6F4F4F18}"/>
               </a:ext>
             </a:extLst>
           </p:cNvPr>
@@ -32451,7 +32315,7 @@
           <p:cNvPr id="23" name="Text 21">
             <a:extLst xmlns:a="http://schemas.openxmlformats.org/drawingml/2006/main">
               <a:ext uri="{FF2B5EF4-FFF2-40B4-BE49-F238E27FC236}">
-                <a16:creationId xmlns:a16="http://schemas.microsoft.com/office/drawing/2014/main" id="{FD6E15FD-B6F7-4FC1-B278-3153ED3ACE0C}"/>
+                <a16:creationId xmlns:a16="http://schemas.microsoft.com/office/drawing/2014/main" id="{00AC61DE-F554-4ECF-839B-36CDAFCEEC9A}"/>
               </a:ext>
             </a:extLst>
           </p:cNvPr>
@@ -32498,7 +32362,7 @@
           <p:cNvPr id="24" name="Shape 22">
             <a:extLst xmlns:a="http://schemas.openxmlformats.org/drawingml/2006/main">
               <a:ext uri="{FF2B5EF4-FFF2-40B4-BE49-F238E27FC236}">
-                <a16:creationId xmlns:a16="http://schemas.microsoft.com/office/drawing/2014/main" id="{7809BEAB-729A-45B7-87F1-A1EAB3D358FD}"/>
+                <a16:creationId xmlns:a16="http://schemas.microsoft.com/office/drawing/2014/main" id="{BB9963FC-5139-404D-86D2-3525F5096700}"/>
               </a:ext>
             </a:extLst>
           </p:cNvPr>
@@ -32531,7 +32395,7 @@
           <p:cNvPr id="25" name="Text 23">
             <a:extLst xmlns:a="http://schemas.openxmlformats.org/drawingml/2006/main">
               <a:ext uri="{FF2B5EF4-FFF2-40B4-BE49-F238E27FC236}">
-                <a16:creationId xmlns:a16="http://schemas.microsoft.com/office/drawing/2014/main" id="{AA0B094E-5792-4669-90B1-23366D0F7C66}"/>
+                <a16:creationId xmlns:a16="http://schemas.microsoft.com/office/drawing/2014/main" id="{D79ED27C-5ABB-4B71-92A2-2436DBA439A6}"/>
               </a:ext>
             </a:extLst>
           </p:cNvPr>
@@ -32578,7 +32442,7 @@
           <p:cNvPr id="26" name="Shape 24">
             <a:extLst xmlns:a="http://schemas.openxmlformats.org/drawingml/2006/main">
               <a:ext uri="{FF2B5EF4-FFF2-40B4-BE49-F238E27FC236}">
-                <a16:creationId xmlns:a16="http://schemas.microsoft.com/office/drawing/2014/main" id="{59070584-B4F4-4EC7-AE49-AC54C2050660}"/>
+                <a16:creationId xmlns:a16="http://schemas.microsoft.com/office/drawing/2014/main" id="{CDFACD9A-E281-40ED-AF6A-6255E89073A5}"/>
               </a:ext>
             </a:extLst>
           </p:cNvPr>
@@ -32611,7 +32475,7 @@
           <p:cNvPr id="27" name="Text 25">
             <a:extLst xmlns:a="http://schemas.openxmlformats.org/drawingml/2006/main">
               <a:ext uri="{FF2B5EF4-FFF2-40B4-BE49-F238E27FC236}">
-                <a16:creationId xmlns:a16="http://schemas.microsoft.com/office/drawing/2014/main" id="{17C21E15-A992-45CD-949D-AE11DADE610E}"/>
+                <a16:creationId xmlns:a16="http://schemas.microsoft.com/office/drawing/2014/main" id="{9EEC4F18-1D8F-4E00-BA10-1C596B9FB6C8}"/>
               </a:ext>
             </a:extLst>
           </p:cNvPr>
@@ -32658,7 +32522,7 @@
           <p:cNvPr id="28" name="Shape 26">
             <a:extLst xmlns:a="http://schemas.openxmlformats.org/drawingml/2006/main">
               <a:ext uri="{FF2B5EF4-FFF2-40B4-BE49-F238E27FC236}">
-                <a16:creationId xmlns:a16="http://schemas.microsoft.com/office/drawing/2014/main" id="{3F4A0D15-8F59-49DE-9F93-39A069F92FBC}"/>
+                <a16:creationId xmlns:a16="http://schemas.microsoft.com/office/drawing/2014/main" id="{1841C63D-A80C-49B5-93BC-6556808D7F2C}"/>
               </a:ext>
             </a:extLst>
           </p:cNvPr>
@@ -32691,7 +32555,7 @@
           <p:cNvPr id="29" name="Text 27">
             <a:extLst xmlns:a="http://schemas.openxmlformats.org/drawingml/2006/main">
               <a:ext uri="{FF2B5EF4-FFF2-40B4-BE49-F238E27FC236}">
-                <a16:creationId xmlns:a16="http://schemas.microsoft.com/office/drawing/2014/main" id="{0C80E695-9139-40AD-8F4B-31329D08DB9F}"/>
+                <a16:creationId xmlns:a16="http://schemas.microsoft.com/office/drawing/2014/main" id="{85BE5DEC-BF47-4EEE-8A59-9DB18176059F}"/>
               </a:ext>
             </a:extLst>
           </p:cNvPr>
@@ -32738,7 +32602,7 @@
           <p:cNvPr id="30" name="Text 28">
             <a:extLst xmlns:a="http://schemas.openxmlformats.org/drawingml/2006/main">
               <a:ext uri="{FF2B5EF4-FFF2-40B4-BE49-F238E27FC236}">
-                <a16:creationId xmlns:a16="http://schemas.microsoft.com/office/drawing/2014/main" id="{A8C6AC0E-F96B-48DB-A930-EF1DFD254FBB}"/>
+                <a16:creationId xmlns:a16="http://schemas.microsoft.com/office/drawing/2014/main" id="{17B52EC7-5680-42D1-8D7D-06F4F2AD3138}"/>
               </a:ext>
             </a:extLst>
           </p:cNvPr>
@@ -32785,7 +32649,7 @@
           <p:cNvPr id="31" name="Text 29">
             <a:extLst xmlns:a="http://schemas.openxmlformats.org/drawingml/2006/main">
               <a:ext uri="{FF2B5EF4-FFF2-40B4-BE49-F238E27FC236}">
-                <a16:creationId xmlns:a16="http://schemas.microsoft.com/office/drawing/2014/main" id="{91E2E837-5FC5-436D-9E67-86BFA05FD626}"/>
+                <a16:creationId xmlns:a16="http://schemas.microsoft.com/office/drawing/2014/main" id="{2761D387-09BC-4DCC-B329-BE21C7464E0E}"/>
               </a:ext>
             </a:extLst>
           </p:cNvPr>
@@ -32832,7 +32696,7 @@
           <p:cNvPr id="32" name="Text 30">
             <a:extLst xmlns:a="http://schemas.openxmlformats.org/drawingml/2006/main">
               <a:ext uri="{FF2B5EF4-FFF2-40B4-BE49-F238E27FC236}">
-                <a16:creationId xmlns:a16="http://schemas.microsoft.com/office/drawing/2014/main" id="{73455ABE-813A-4FC0-87A1-5982208B2D0D}"/>
+                <a16:creationId xmlns:a16="http://schemas.microsoft.com/office/drawing/2014/main" id="{FEB8EEA8-8CC1-4C79-9C26-43FEF6C9B7CB}"/>
               </a:ext>
             </a:extLst>
           </p:cNvPr>
@@ -32877,7 +32741,7 @@
     </p:spTree>
     <p:extLst>
       <p:ext uri="{BB962C8B-B14F-4D97-AF65-F5344CB8AC3E}">
-        <p14:creationId xmlns:p14="http://schemas.microsoft.com/office/powerpoint/2010/main" val="1833677853"/>
+        <p14:creationId xmlns:p14="http://schemas.microsoft.com/office/powerpoint/2010/main" val="1183531340"/>
       </p:ext>
     </p:extLst>
   </p:cSld>

--- a/docs/presentation/BAI-Work-Defense-Deck.pptx
+++ b/docs/presentation/BAI-Work-Defense-Deck.pptx
@@ -2,31 +2,31 @@
 <file path=ppt/presentation.xml><?xml version="1.0" encoding="utf-8"?>
 <p:presentation xmlns:p="http://schemas.openxmlformats.org/presentationml/2006/main">
   <p:sldMasterIdLst>
-    <p:sldMasterId xmlns:r="http://schemas.openxmlformats.org/officeDocument/2006/relationships" id="2147483648" r:id="Rfc4d6d5fe28c47f9"/>
+    <p:sldMasterId xmlns:r="http://schemas.openxmlformats.org/officeDocument/2006/relationships" id="2147483648" r:id="Rc25872652052445a"/>
   </p:sldMasterIdLst>
   <p:notesMasterIdLst>
-    <p:notesMasterId xmlns:r="http://schemas.openxmlformats.org/officeDocument/2006/relationships" r:id="R607af0627e3f4424"/>
+    <p:notesMasterId xmlns:r="http://schemas.openxmlformats.org/officeDocument/2006/relationships" r:id="R6be2c663fb664f7c"/>
   </p:notesMasterIdLst>
   <p:sldIdLst>
-    <p:sldId xmlns:r="http://schemas.openxmlformats.org/officeDocument/2006/relationships" id="256" r:id="R52a8a2272c4e429b"/>
-    <p:sldId xmlns:r="http://schemas.openxmlformats.org/officeDocument/2006/relationships" id="257" r:id="Rf38a0b9c18194b22"/>
-    <p:sldId xmlns:r="http://schemas.openxmlformats.org/officeDocument/2006/relationships" id="258" r:id="Rba9fc5c4b9274d04"/>
-    <p:sldId xmlns:r="http://schemas.openxmlformats.org/officeDocument/2006/relationships" id="259" r:id="R4201f9851e394e28"/>
-    <p:sldId xmlns:r="http://schemas.openxmlformats.org/officeDocument/2006/relationships" id="260" r:id="R390a45b19f8f417a"/>
-    <p:sldId xmlns:r="http://schemas.openxmlformats.org/officeDocument/2006/relationships" id="261" r:id="R0ba0a68307ad4470"/>
-    <p:sldId xmlns:r="http://schemas.openxmlformats.org/officeDocument/2006/relationships" id="262" r:id="Re02a334dd0484359"/>
-    <p:sldId xmlns:r="http://schemas.openxmlformats.org/officeDocument/2006/relationships" id="263" r:id="Rcb0ce5ea0d4b4ca6"/>
-    <p:sldId xmlns:r="http://schemas.openxmlformats.org/officeDocument/2006/relationships" id="264" r:id="R992feba1bde4476e"/>
-    <p:sldId xmlns:r="http://schemas.openxmlformats.org/officeDocument/2006/relationships" id="265" r:id="R3b0153cf0b0b4293"/>
-    <p:sldId xmlns:r="http://schemas.openxmlformats.org/officeDocument/2006/relationships" id="266" r:id="R28fe7fd85ef448d4"/>
-    <p:sldId xmlns:r="http://schemas.openxmlformats.org/officeDocument/2006/relationships" id="267" r:id="R387f2ff7ff434cd9"/>
-    <p:sldId xmlns:r="http://schemas.openxmlformats.org/officeDocument/2006/relationships" id="268" r:id="Ra220fa52f9744ad6"/>
-    <p:sldId xmlns:r="http://schemas.openxmlformats.org/officeDocument/2006/relationships" id="269" r:id="R2eb1cf548c7846f4"/>
-    <p:sldId xmlns:r="http://schemas.openxmlformats.org/officeDocument/2006/relationships" id="270" r:id="Rd62d80c101d244b3"/>
-    <p:sldId xmlns:r="http://schemas.openxmlformats.org/officeDocument/2006/relationships" id="271" r:id="R4ea9c88e5dc24b59"/>
-    <p:sldId xmlns:r="http://schemas.openxmlformats.org/officeDocument/2006/relationships" id="272" r:id="Rb74ffbac44124d92"/>
-    <p:sldId xmlns:r="http://schemas.openxmlformats.org/officeDocument/2006/relationships" id="273" r:id="R5e6b7a26e8c54bd0"/>
-    <p:sldId xmlns:r="http://schemas.openxmlformats.org/officeDocument/2006/relationships" id="274" r:id="R9130338963914120"/>
+    <p:sldId xmlns:r="http://schemas.openxmlformats.org/officeDocument/2006/relationships" id="256" r:id="R6dacada4a1534070"/>
+    <p:sldId xmlns:r="http://schemas.openxmlformats.org/officeDocument/2006/relationships" id="257" r:id="Rf444c171f81d4e45"/>
+    <p:sldId xmlns:r="http://schemas.openxmlformats.org/officeDocument/2006/relationships" id="258" r:id="R3dea2fb87d7f45a7"/>
+    <p:sldId xmlns:r="http://schemas.openxmlformats.org/officeDocument/2006/relationships" id="259" r:id="R69d7ee90fb8b466f"/>
+    <p:sldId xmlns:r="http://schemas.openxmlformats.org/officeDocument/2006/relationships" id="260" r:id="R34e4dd31762c4b59"/>
+    <p:sldId xmlns:r="http://schemas.openxmlformats.org/officeDocument/2006/relationships" id="261" r:id="Rd4e009313c2e4732"/>
+    <p:sldId xmlns:r="http://schemas.openxmlformats.org/officeDocument/2006/relationships" id="262" r:id="R6f4402b8af614a94"/>
+    <p:sldId xmlns:r="http://schemas.openxmlformats.org/officeDocument/2006/relationships" id="263" r:id="Rb7c679bd604d46d0"/>
+    <p:sldId xmlns:r="http://schemas.openxmlformats.org/officeDocument/2006/relationships" id="264" r:id="Re15441bef143433a"/>
+    <p:sldId xmlns:r="http://schemas.openxmlformats.org/officeDocument/2006/relationships" id="265" r:id="R2bcffbdc5c4a4205"/>
+    <p:sldId xmlns:r="http://schemas.openxmlformats.org/officeDocument/2006/relationships" id="266" r:id="R054a35c735af46b7"/>
+    <p:sldId xmlns:r="http://schemas.openxmlformats.org/officeDocument/2006/relationships" id="267" r:id="Rde2a834882674bf9"/>
+    <p:sldId xmlns:r="http://schemas.openxmlformats.org/officeDocument/2006/relationships" id="268" r:id="Rb58f33b101244c1d"/>
+    <p:sldId xmlns:r="http://schemas.openxmlformats.org/officeDocument/2006/relationships" id="269" r:id="Rbc41b6eb05bd4058"/>
+    <p:sldId xmlns:r="http://schemas.openxmlformats.org/officeDocument/2006/relationships" id="270" r:id="R0df95486c23a462c"/>
+    <p:sldId xmlns:r="http://schemas.openxmlformats.org/officeDocument/2006/relationships" id="271" r:id="R1062c11ef6f04701"/>
+    <p:sldId xmlns:r="http://schemas.openxmlformats.org/officeDocument/2006/relationships" id="272" r:id="Rb26bbf5d070b40f5"/>
+    <p:sldId xmlns:r="http://schemas.openxmlformats.org/officeDocument/2006/relationships" id="273" r:id="R93d5c05475544713"/>
+    <p:sldId xmlns:r="http://schemas.openxmlformats.org/officeDocument/2006/relationships" id="274" r:id="Rf706687afbec443c"/>
   </p:sldIdLst>
   <p:sldSz cx="12191695" cy="6858000"/>
   <p:notesSz cx="6858000" cy="9144000"/>
@@ -2088,7 +2088,7 @@
   </p:cSld>
   <p:clrMap bg1="lt1" tx1="dk1" bg2="lt2" tx2="dk2" accent1="accent1" accent2="accent2" accent3="accent3" accent4="accent4" accent5="accent5" accent6="accent6" hlink="hlink" folHlink="folHlink"/>
   <p:sldLayoutIdLst>
-    <p:sldLayoutId xmlns:r="http://schemas.openxmlformats.org/officeDocument/2006/relationships" id="2147483649" r:id="R03eef30da34f4454"/>
+    <p:sldLayoutId xmlns:r="http://schemas.openxmlformats.org/officeDocument/2006/relationships" id="2147483649" r:id="R7e2ab0ef7f3f4779"/>
   </p:sldLayoutIdLst>
   <p:hf sldNum="0" hdr="0" ftr="0" dt="0"/>
   <p:txStyles>
@@ -2659,7 +2659,7 @@
           <p:cNvPr id="2" name="Shape 0">
             <a:extLst xmlns:a="http://schemas.openxmlformats.org/drawingml/2006/main">
               <a:ext uri="{FF2B5EF4-FFF2-40B4-BE49-F238E27FC236}">
-                <a16:creationId xmlns:a16="http://schemas.microsoft.com/office/drawing/2014/main" id="{FB835E6B-DDEA-4910-9325-558BB267415A}"/>
+                <a16:creationId xmlns:a16="http://schemas.microsoft.com/office/drawing/2014/main" id="{A89B3F76-A574-4D0A-9AA4-ADAFDF62D22E}"/>
               </a:ext>
             </a:extLst>
           </p:cNvPr>
@@ -2692,7 +2692,7 @@
           <p:cNvPr id="3" name="Shape 1">
             <a:extLst xmlns:a="http://schemas.openxmlformats.org/drawingml/2006/main">
               <a:ext uri="{FF2B5EF4-FFF2-40B4-BE49-F238E27FC236}">
-                <a16:creationId xmlns:a16="http://schemas.microsoft.com/office/drawing/2014/main" id="{42DC7D97-279D-4441-9BC8-A0C35FED198F}"/>
+                <a16:creationId xmlns:a16="http://schemas.microsoft.com/office/drawing/2014/main" id="{7DB25FC2-501D-4322-B375-80708BB67B5E}"/>
               </a:ext>
             </a:extLst>
           </p:cNvPr>
@@ -2731,7 +2731,7 @@
           <p:nvPr/>
         </p:nvPicPr>
         <p:blipFill>
-          <a:blip xmlns:r="http://schemas.openxmlformats.org/officeDocument/2006/relationships" xmlns:a="http://schemas.openxmlformats.org/drawingml/2006/main" r:embed="R0041f6dfc1fc4269"/>
+          <a:blip xmlns:r="http://schemas.openxmlformats.org/officeDocument/2006/relationships" xmlns:a="http://schemas.openxmlformats.org/drawingml/2006/main" r:embed="R88c22d9376794fc4"/>
           <a:stretch xmlns:a="http://schemas.openxmlformats.org/drawingml/2006/main">
             <a:fillRect l="0" t="0" r="0" b="0"/>
           </a:stretch>
@@ -2751,7 +2751,7 @@
           <p:cNvPr id="5" name="Shape 2">
             <a:extLst xmlns:a="http://schemas.openxmlformats.org/drawingml/2006/main">
               <a:ext uri="{FF2B5EF4-FFF2-40B4-BE49-F238E27FC236}">
-                <a16:creationId xmlns:a16="http://schemas.microsoft.com/office/drawing/2014/main" id="{484E7764-B5A7-433C-9C3F-C61AECFD6B0F}"/>
+                <a16:creationId xmlns:a16="http://schemas.microsoft.com/office/drawing/2014/main" id="{7DA1849B-0584-40A3-896F-47523DCA839C}"/>
               </a:ext>
             </a:extLst>
           </p:cNvPr>
@@ -2784,7 +2784,7 @@
           <p:cNvPr id="6" name="Text 3">
             <a:extLst xmlns:a="http://schemas.openxmlformats.org/drawingml/2006/main">
               <a:ext uri="{FF2B5EF4-FFF2-40B4-BE49-F238E27FC236}">
-                <a16:creationId xmlns:a16="http://schemas.microsoft.com/office/drawing/2014/main" id="{7841CA46-02A9-4E1C-A520-F3C32018AABD}"/>
+                <a16:creationId xmlns:a16="http://schemas.microsoft.com/office/drawing/2014/main" id="{EA64B761-AB3A-47E6-BA4D-43292959491C}"/>
               </a:ext>
             </a:extLst>
           </p:cNvPr>
@@ -2831,7 +2831,7 @@
           <p:cNvPr id="7" name="Shape 4">
             <a:extLst xmlns:a="http://schemas.openxmlformats.org/drawingml/2006/main">
               <a:ext uri="{FF2B5EF4-FFF2-40B4-BE49-F238E27FC236}">
-                <a16:creationId xmlns:a16="http://schemas.microsoft.com/office/drawing/2014/main" id="{148F293B-A20D-41FC-8E0A-415AB82CDB52}"/>
+                <a16:creationId xmlns:a16="http://schemas.microsoft.com/office/drawing/2014/main" id="{71B8279A-DACF-40C8-967E-00E8A7AFDBF9}"/>
               </a:ext>
             </a:extLst>
           </p:cNvPr>
@@ -2864,7 +2864,7 @@
           <p:cNvPr id="8" name="Text 5">
             <a:extLst xmlns:a="http://schemas.openxmlformats.org/drawingml/2006/main">
               <a:ext uri="{FF2B5EF4-FFF2-40B4-BE49-F238E27FC236}">
-                <a16:creationId xmlns:a16="http://schemas.microsoft.com/office/drawing/2014/main" id="{DC4C7190-E5AB-4291-BA29-DB9170E03281}"/>
+                <a16:creationId xmlns:a16="http://schemas.microsoft.com/office/drawing/2014/main" id="{616A99D6-95D9-4134-8EE1-1982073BC1C1}"/>
               </a:ext>
             </a:extLst>
           </p:cNvPr>
@@ -2915,7 +2915,7 @@
           <p:nvPr/>
         </p:nvPicPr>
         <p:blipFill>
-          <a:blip xmlns:r="http://schemas.openxmlformats.org/officeDocument/2006/relationships" xmlns:a="http://schemas.openxmlformats.org/drawingml/2006/main" r:embed="Rfcc2a7e737934c86"/>
+          <a:blip xmlns:r="http://schemas.openxmlformats.org/officeDocument/2006/relationships" xmlns:a="http://schemas.openxmlformats.org/drawingml/2006/main" r:embed="R8e00392ffff24c06"/>
           <a:stretch xmlns:a="http://schemas.openxmlformats.org/drawingml/2006/main">
             <a:fillRect l="0" t="0" r="0" b="0"/>
           </a:stretch>
@@ -2935,7 +2935,7 @@
           <p:cNvPr id="10" name="Text 6">
             <a:extLst xmlns:a="http://schemas.openxmlformats.org/drawingml/2006/main">
               <a:ext uri="{FF2B5EF4-FFF2-40B4-BE49-F238E27FC236}">
-                <a16:creationId xmlns:a16="http://schemas.microsoft.com/office/drawing/2014/main" id="{81643A12-8218-414C-8FE5-5964358129EF}"/>
+                <a16:creationId xmlns:a16="http://schemas.microsoft.com/office/drawing/2014/main" id="{3A3EA62E-8A4C-4D3F-886F-BF647965C33A}"/>
               </a:ext>
             </a:extLst>
           </p:cNvPr>
@@ -2982,7 +2982,7 @@
           <p:cNvPr id="11" name="Text 7">
             <a:extLst xmlns:a="http://schemas.openxmlformats.org/drawingml/2006/main">
               <a:ext uri="{FF2B5EF4-FFF2-40B4-BE49-F238E27FC236}">
-                <a16:creationId xmlns:a16="http://schemas.microsoft.com/office/drawing/2014/main" id="{75FACD4C-9623-4BAA-BECC-18B8D3855891}"/>
+                <a16:creationId xmlns:a16="http://schemas.microsoft.com/office/drawing/2014/main" id="{80813227-40D8-48FF-B83D-62037AC17C23}"/>
               </a:ext>
             </a:extLst>
           </p:cNvPr>
@@ -3029,7 +3029,7 @@
           <p:cNvPr id="12" name="Shape 8">
             <a:extLst xmlns:a="http://schemas.openxmlformats.org/drawingml/2006/main">
               <a:ext uri="{FF2B5EF4-FFF2-40B4-BE49-F238E27FC236}">
-                <a16:creationId xmlns:a16="http://schemas.microsoft.com/office/drawing/2014/main" id="{F2AAC217-014C-499F-9FC1-8401F989BBFA}"/>
+                <a16:creationId xmlns:a16="http://schemas.microsoft.com/office/drawing/2014/main" id="{826F5F73-91B0-4002-8FED-1C1264D0C32E}"/>
               </a:ext>
             </a:extLst>
           </p:cNvPr>
@@ -3064,7 +3064,7 @@
           <p:cNvPr id="13" name="Text 9">
             <a:extLst xmlns:a="http://schemas.openxmlformats.org/drawingml/2006/main">
               <a:ext uri="{FF2B5EF4-FFF2-40B4-BE49-F238E27FC236}">
-                <a16:creationId xmlns:a16="http://schemas.microsoft.com/office/drawing/2014/main" id="{0E4C1F2D-5608-4DB5-BE1B-4085698B98D0}"/>
+                <a16:creationId xmlns:a16="http://schemas.microsoft.com/office/drawing/2014/main" id="{7D29A61E-412C-42FF-8118-16A6325E34D3}"/>
               </a:ext>
             </a:extLst>
           </p:cNvPr>
@@ -3111,7 +3111,7 @@
           <p:cNvPr id="14" name="Shape 10">
             <a:extLst xmlns:a="http://schemas.openxmlformats.org/drawingml/2006/main">
               <a:ext uri="{FF2B5EF4-FFF2-40B4-BE49-F238E27FC236}">
-                <a16:creationId xmlns:a16="http://schemas.microsoft.com/office/drawing/2014/main" id="{60D63D13-5A39-4F44-B222-8FA72E98CA1A}"/>
+                <a16:creationId xmlns:a16="http://schemas.microsoft.com/office/drawing/2014/main" id="{B5F638CB-09B6-4393-93D9-A70305D33F9A}"/>
               </a:ext>
             </a:extLst>
           </p:cNvPr>
@@ -3146,7 +3146,7 @@
           <p:cNvPr id="15" name="Text 11">
             <a:extLst xmlns:a="http://schemas.openxmlformats.org/drawingml/2006/main">
               <a:ext uri="{FF2B5EF4-FFF2-40B4-BE49-F238E27FC236}">
-                <a16:creationId xmlns:a16="http://schemas.microsoft.com/office/drawing/2014/main" id="{DB2482F4-8E7D-4920-B979-B647C93E7AF3}"/>
+                <a16:creationId xmlns:a16="http://schemas.microsoft.com/office/drawing/2014/main" id="{47F1F4E4-1AD1-4FC0-B6D4-59B175023B1E}"/>
               </a:ext>
             </a:extLst>
           </p:cNvPr>
@@ -3193,7 +3193,7 @@
           <p:cNvPr id="16" name="Shape 12">
             <a:extLst xmlns:a="http://schemas.openxmlformats.org/drawingml/2006/main">
               <a:ext uri="{FF2B5EF4-FFF2-40B4-BE49-F238E27FC236}">
-                <a16:creationId xmlns:a16="http://schemas.microsoft.com/office/drawing/2014/main" id="{EEB61189-EC06-463D-AE7F-A5F554D722D2}"/>
+                <a16:creationId xmlns:a16="http://schemas.microsoft.com/office/drawing/2014/main" id="{C9DBF50B-6DDC-4E17-B29C-C2183DDEF898}"/>
               </a:ext>
             </a:extLst>
           </p:cNvPr>
@@ -3228,7 +3228,7 @@
           <p:cNvPr id="17" name="Text 13">
             <a:extLst xmlns:a="http://schemas.openxmlformats.org/drawingml/2006/main">
               <a:ext uri="{FF2B5EF4-FFF2-40B4-BE49-F238E27FC236}">
-                <a16:creationId xmlns:a16="http://schemas.microsoft.com/office/drawing/2014/main" id="{A772CBD1-07DD-41A7-9ACE-47D77458F165}"/>
+                <a16:creationId xmlns:a16="http://schemas.microsoft.com/office/drawing/2014/main" id="{4065EEBD-754A-4BE7-9FB1-790B431E02D7}"/>
               </a:ext>
             </a:extLst>
           </p:cNvPr>
@@ -3275,7 +3275,7 @@
           <p:cNvPr id="18" name="Shape 14">
             <a:extLst xmlns:a="http://schemas.openxmlformats.org/drawingml/2006/main">
               <a:ext uri="{FF2B5EF4-FFF2-40B4-BE49-F238E27FC236}">
-                <a16:creationId xmlns:a16="http://schemas.microsoft.com/office/drawing/2014/main" id="{7582C792-A2B0-4C9B-869A-3E75CE66CFE1}"/>
+                <a16:creationId xmlns:a16="http://schemas.microsoft.com/office/drawing/2014/main" id="{DEBFBEE6-7A10-4A1D-BB79-AEEF2BF1F484}"/>
               </a:ext>
             </a:extLst>
           </p:cNvPr>
@@ -3310,7 +3310,7 @@
           <p:cNvPr id="19" name="Text 15">
             <a:extLst xmlns:a="http://schemas.openxmlformats.org/drawingml/2006/main">
               <a:ext uri="{FF2B5EF4-FFF2-40B4-BE49-F238E27FC236}">
-                <a16:creationId xmlns:a16="http://schemas.microsoft.com/office/drawing/2014/main" id="{F8F2DE04-E71C-40D4-B9B5-CD799D932DCA}"/>
+                <a16:creationId xmlns:a16="http://schemas.microsoft.com/office/drawing/2014/main" id="{BAC50695-7C44-4FDD-8345-2C0BE0144C7C}"/>
               </a:ext>
             </a:extLst>
           </p:cNvPr>
@@ -3357,7 +3357,7 @@
           <p:cNvPr id="20" name="Shape 16">
             <a:extLst xmlns:a="http://schemas.openxmlformats.org/drawingml/2006/main">
               <a:ext uri="{FF2B5EF4-FFF2-40B4-BE49-F238E27FC236}">
-                <a16:creationId xmlns:a16="http://schemas.microsoft.com/office/drawing/2014/main" id="{B4B3DB54-E7B1-419E-BEF8-1BDD3483C9A2}"/>
+                <a16:creationId xmlns:a16="http://schemas.microsoft.com/office/drawing/2014/main" id="{D5D83D42-C5E5-4B00-A5CE-D69234E5FB74}"/>
               </a:ext>
             </a:extLst>
           </p:cNvPr>
@@ -3392,7 +3392,7 @@
           <p:cNvPr id="21" name="Text 17">
             <a:extLst xmlns:a="http://schemas.openxmlformats.org/drawingml/2006/main">
               <a:ext uri="{FF2B5EF4-FFF2-40B4-BE49-F238E27FC236}">
-                <a16:creationId xmlns:a16="http://schemas.microsoft.com/office/drawing/2014/main" id="{CE8E3ED2-8AE8-4C15-9FA3-9D1314184B2D}"/>
+                <a16:creationId xmlns:a16="http://schemas.microsoft.com/office/drawing/2014/main" id="{B91D1707-7671-43FB-8DAE-BD78A3EB04E1}"/>
               </a:ext>
             </a:extLst>
           </p:cNvPr>
@@ -3439,7 +3439,7 @@
           <p:cNvPr id="22" name="Text 18">
             <a:extLst xmlns:a="http://schemas.openxmlformats.org/drawingml/2006/main">
               <a:ext uri="{FF2B5EF4-FFF2-40B4-BE49-F238E27FC236}">
-                <a16:creationId xmlns:a16="http://schemas.microsoft.com/office/drawing/2014/main" id="{03563FE3-6D16-43F5-9E52-0D2C5E55AF6F}"/>
+                <a16:creationId xmlns:a16="http://schemas.microsoft.com/office/drawing/2014/main" id="{1D9E4101-1364-4944-AECC-83801F9E0C97}"/>
               </a:ext>
             </a:extLst>
           </p:cNvPr>
@@ -3486,7 +3486,7 @@
           <p:cNvPr id="23" name="Text 19">
             <a:extLst xmlns:a="http://schemas.openxmlformats.org/drawingml/2006/main">
               <a:ext uri="{FF2B5EF4-FFF2-40B4-BE49-F238E27FC236}">
-                <a16:creationId xmlns:a16="http://schemas.microsoft.com/office/drawing/2014/main" id="{015014C8-3EDB-44E4-8FAD-19826EBE02BA}"/>
+                <a16:creationId xmlns:a16="http://schemas.microsoft.com/office/drawing/2014/main" id="{B36AC1F5-C28C-4F33-A170-F9D4DF72CE4B}"/>
               </a:ext>
             </a:extLst>
           </p:cNvPr>
@@ -3533,7 +3533,7 @@
           <p:cNvPr id="24" name="Text 20">
             <a:extLst xmlns:a="http://schemas.openxmlformats.org/drawingml/2006/main">
               <a:ext uri="{FF2B5EF4-FFF2-40B4-BE49-F238E27FC236}">
-                <a16:creationId xmlns:a16="http://schemas.microsoft.com/office/drawing/2014/main" id="{82609AE9-708A-44A6-8A7B-CF7668EED781}"/>
+                <a16:creationId xmlns:a16="http://schemas.microsoft.com/office/drawing/2014/main" id="{AE8FC0B7-BDD7-483C-8EA4-E7F06DCE1F17}"/>
               </a:ext>
             </a:extLst>
           </p:cNvPr>
@@ -3578,7 +3578,7 @@
     </p:spTree>
     <p:extLst>
       <p:ext uri="{BB962C8B-B14F-4D97-AF65-F5344CB8AC3E}">
-        <p14:creationId xmlns:p14="http://schemas.microsoft.com/office/powerpoint/2010/main" val="493482026"/>
+        <p14:creationId xmlns:p14="http://schemas.microsoft.com/office/powerpoint/2010/main" val="1208984021"/>
       </p:ext>
     </p:extLst>
   </p:cSld>
@@ -3609,7 +3609,7 @@
           <p:cNvPr id="2" name="Text 0">
             <a:extLst xmlns:a="http://schemas.openxmlformats.org/drawingml/2006/main">
               <a:ext uri="{FF2B5EF4-FFF2-40B4-BE49-F238E27FC236}">
-                <a16:creationId xmlns:a16="http://schemas.microsoft.com/office/drawing/2014/main" id="{64AA104D-F433-4182-9B91-A26702CD2724}"/>
+                <a16:creationId xmlns:a16="http://schemas.microsoft.com/office/drawing/2014/main" id="{73D9E006-3767-47E8-9EE4-B164171EBC61}"/>
               </a:ext>
             </a:extLst>
           </p:cNvPr>
@@ -3656,7 +3656,7 @@
           <p:cNvPr id="3" name="Text 1">
             <a:extLst xmlns:a="http://schemas.openxmlformats.org/drawingml/2006/main">
               <a:ext uri="{FF2B5EF4-FFF2-40B4-BE49-F238E27FC236}">
-                <a16:creationId xmlns:a16="http://schemas.microsoft.com/office/drawing/2014/main" id="{BAFE0FB4-AC8A-4E1D-A8F3-0D663D943520}"/>
+                <a16:creationId xmlns:a16="http://schemas.microsoft.com/office/drawing/2014/main" id="{2FFF0150-7023-4ADD-981D-B88514D78E59}"/>
               </a:ext>
             </a:extLst>
           </p:cNvPr>
@@ -3703,7 +3703,7 @@
           <p:cNvPr id="4" name="Shape 2">
             <a:extLst xmlns:a="http://schemas.openxmlformats.org/drawingml/2006/main">
               <a:ext uri="{FF2B5EF4-FFF2-40B4-BE49-F238E27FC236}">
-                <a16:creationId xmlns:a16="http://schemas.microsoft.com/office/drawing/2014/main" id="{1DA7333C-BE35-4A07-8909-ED4227C4C24B}"/>
+                <a16:creationId xmlns:a16="http://schemas.microsoft.com/office/drawing/2014/main" id="{1F967F4A-A435-430D-AA40-557BD38D157D}"/>
               </a:ext>
             </a:extLst>
           </p:cNvPr>
@@ -3738,7 +3738,7 @@
           <p:cNvPr id="5" name="Text 3">
             <a:extLst xmlns:a="http://schemas.openxmlformats.org/drawingml/2006/main">
               <a:ext uri="{FF2B5EF4-FFF2-40B4-BE49-F238E27FC236}">
-                <a16:creationId xmlns:a16="http://schemas.microsoft.com/office/drawing/2014/main" id="{545B0B75-36F2-4552-86BB-98A1571F21A6}"/>
+                <a16:creationId xmlns:a16="http://schemas.microsoft.com/office/drawing/2014/main" id="{DFCD810C-303C-44CE-8D39-1C2A397C53B8}"/>
               </a:ext>
             </a:extLst>
           </p:cNvPr>
@@ -3785,7 +3785,7 @@
           <p:cNvPr id="6" name="Shape 4">
             <a:extLst xmlns:a="http://schemas.openxmlformats.org/drawingml/2006/main">
               <a:ext uri="{FF2B5EF4-FFF2-40B4-BE49-F238E27FC236}">
-                <a16:creationId xmlns:a16="http://schemas.microsoft.com/office/drawing/2014/main" id="{A64D3248-6DFD-49F4-87BB-60AD46D74AD9}"/>
+                <a16:creationId xmlns:a16="http://schemas.microsoft.com/office/drawing/2014/main" id="{93141054-B5C9-425E-AFD6-958BB65729D5}"/>
               </a:ext>
             </a:extLst>
           </p:cNvPr>
@@ -3816,7 +3816,7 @@
           <p:cNvPr id="7" name="Shape 5">
             <a:extLst xmlns:a="http://schemas.openxmlformats.org/drawingml/2006/main">
               <a:ext uri="{FF2B5EF4-FFF2-40B4-BE49-F238E27FC236}">
-                <a16:creationId xmlns:a16="http://schemas.microsoft.com/office/drawing/2014/main" id="{F0631058-F763-4109-BCA9-8BCB09AADD63}"/>
+                <a16:creationId xmlns:a16="http://schemas.microsoft.com/office/drawing/2014/main" id="{B4054D69-EDC0-4FFD-B0F5-22EE9E829A71}"/>
               </a:ext>
             </a:extLst>
           </p:cNvPr>
@@ -3851,7 +3851,7 @@
           <p:cNvPr id="8" name="Shape 6">
             <a:extLst xmlns:a="http://schemas.openxmlformats.org/drawingml/2006/main">
               <a:ext uri="{FF2B5EF4-FFF2-40B4-BE49-F238E27FC236}">
-                <a16:creationId xmlns:a16="http://schemas.microsoft.com/office/drawing/2014/main" id="{A2D25AF8-74B8-406E-95A3-1E7E83DBC422}"/>
+                <a16:creationId xmlns:a16="http://schemas.microsoft.com/office/drawing/2014/main" id="{271CE9FC-37A9-4429-9193-A446A38A6C5B}"/>
               </a:ext>
             </a:extLst>
           </p:cNvPr>
@@ -3886,7 +3886,7 @@
           <p:cNvPr id="9" name="Text 7">
             <a:extLst xmlns:a="http://schemas.openxmlformats.org/drawingml/2006/main">
               <a:ext uri="{FF2B5EF4-FFF2-40B4-BE49-F238E27FC236}">
-                <a16:creationId xmlns:a16="http://schemas.microsoft.com/office/drawing/2014/main" id="{329CCC0D-B49B-4573-8592-DBB76B13D3C6}"/>
+                <a16:creationId xmlns:a16="http://schemas.microsoft.com/office/drawing/2014/main" id="{DAC33012-7308-44FD-9AC3-07B77D934C64}"/>
               </a:ext>
             </a:extLst>
           </p:cNvPr>
@@ -3933,7 +3933,7 @@
           <p:cNvPr id="10" name="Text 8">
             <a:extLst xmlns:a="http://schemas.openxmlformats.org/drawingml/2006/main">
               <a:ext uri="{FF2B5EF4-FFF2-40B4-BE49-F238E27FC236}">
-                <a16:creationId xmlns:a16="http://schemas.microsoft.com/office/drawing/2014/main" id="{26E7CD40-592D-416E-AFF4-2764C7D144F5}"/>
+                <a16:creationId xmlns:a16="http://schemas.microsoft.com/office/drawing/2014/main" id="{CF4E7450-4E63-4769-8ACA-F5B829193F16}"/>
               </a:ext>
             </a:extLst>
           </p:cNvPr>
@@ -3980,7 +3980,7 @@
           <p:cNvPr id="11" name="Text 9">
             <a:extLst xmlns:a="http://schemas.openxmlformats.org/drawingml/2006/main">
               <a:ext uri="{FF2B5EF4-FFF2-40B4-BE49-F238E27FC236}">
-                <a16:creationId xmlns:a16="http://schemas.microsoft.com/office/drawing/2014/main" id="{F3AFF375-F398-47EC-820D-8DE42E8FAFF7}"/>
+                <a16:creationId xmlns:a16="http://schemas.microsoft.com/office/drawing/2014/main" id="{3A01B324-36E0-456D-B38F-C88B3D3CE2B5}"/>
               </a:ext>
             </a:extLst>
           </p:cNvPr>
@@ -4027,7 +4027,7 @@
           <p:cNvPr id="12" name="Text 10">
             <a:extLst xmlns:a="http://schemas.openxmlformats.org/drawingml/2006/main">
               <a:ext uri="{FF2B5EF4-FFF2-40B4-BE49-F238E27FC236}">
-                <a16:creationId xmlns:a16="http://schemas.microsoft.com/office/drawing/2014/main" id="{8702AD14-4DCB-4F58-A3C7-0B885EAF993E}"/>
+                <a16:creationId xmlns:a16="http://schemas.microsoft.com/office/drawing/2014/main" id="{2881764A-F237-4351-AC3A-D5355001DFFC}"/>
               </a:ext>
             </a:extLst>
           </p:cNvPr>
@@ -4074,7 +4074,7 @@
           <p:cNvPr id="13" name="Text 11">
             <a:extLst xmlns:a="http://schemas.openxmlformats.org/drawingml/2006/main">
               <a:ext uri="{FF2B5EF4-FFF2-40B4-BE49-F238E27FC236}">
-                <a16:creationId xmlns:a16="http://schemas.microsoft.com/office/drawing/2014/main" id="{ACCB542B-8FF7-4A80-8B57-ED5C579DAAD4}"/>
+                <a16:creationId xmlns:a16="http://schemas.microsoft.com/office/drawing/2014/main" id="{017D1588-DBAB-4F5E-A2A7-504730999188}"/>
               </a:ext>
             </a:extLst>
           </p:cNvPr>
@@ -4121,7 +4121,7 @@
           <p:cNvPr id="14" name="Shape 12">
             <a:extLst xmlns:a="http://schemas.openxmlformats.org/drawingml/2006/main">
               <a:ext uri="{FF2B5EF4-FFF2-40B4-BE49-F238E27FC236}">
-                <a16:creationId xmlns:a16="http://schemas.microsoft.com/office/drawing/2014/main" id="{F69FF9FD-E9C5-4F95-94FE-AD2DE75CFFD6}"/>
+                <a16:creationId xmlns:a16="http://schemas.microsoft.com/office/drawing/2014/main" id="{183766E4-7941-4BDD-91C4-5328B857F3B3}"/>
               </a:ext>
             </a:extLst>
           </p:cNvPr>
@@ -4156,7 +4156,7 @@
           <p:cNvPr id="15" name="Shape 13">
             <a:extLst xmlns:a="http://schemas.openxmlformats.org/drawingml/2006/main">
               <a:ext uri="{FF2B5EF4-FFF2-40B4-BE49-F238E27FC236}">
-                <a16:creationId xmlns:a16="http://schemas.microsoft.com/office/drawing/2014/main" id="{BFBEA14F-8909-4468-9C71-3844ED006F22}"/>
+                <a16:creationId xmlns:a16="http://schemas.microsoft.com/office/drawing/2014/main" id="{059349AB-BADF-40F5-AA22-586EDD316381}"/>
               </a:ext>
             </a:extLst>
           </p:cNvPr>
@@ -4191,7 +4191,7 @@
           <p:cNvPr id="16" name="Text 14">
             <a:extLst xmlns:a="http://schemas.openxmlformats.org/drawingml/2006/main">
               <a:ext uri="{FF2B5EF4-FFF2-40B4-BE49-F238E27FC236}">
-                <a16:creationId xmlns:a16="http://schemas.microsoft.com/office/drawing/2014/main" id="{954FCB75-C812-4590-A5D9-863759319088}"/>
+                <a16:creationId xmlns:a16="http://schemas.microsoft.com/office/drawing/2014/main" id="{796BBD6C-4F46-495E-BDBD-108B6F5A9072}"/>
               </a:ext>
             </a:extLst>
           </p:cNvPr>
@@ -4238,7 +4238,7 @@
           <p:cNvPr id="17" name="Text 15">
             <a:extLst xmlns:a="http://schemas.openxmlformats.org/drawingml/2006/main">
               <a:ext uri="{FF2B5EF4-FFF2-40B4-BE49-F238E27FC236}">
-                <a16:creationId xmlns:a16="http://schemas.microsoft.com/office/drawing/2014/main" id="{68B81649-929C-4065-90F3-8267AEE6010F}"/>
+                <a16:creationId xmlns:a16="http://schemas.microsoft.com/office/drawing/2014/main" id="{24FBA300-7594-4C85-90F5-093DBA4B4D70}"/>
               </a:ext>
             </a:extLst>
           </p:cNvPr>
@@ -4285,7 +4285,7 @@
           <p:cNvPr id="18" name="Text 16">
             <a:extLst xmlns:a="http://schemas.openxmlformats.org/drawingml/2006/main">
               <a:ext uri="{FF2B5EF4-FFF2-40B4-BE49-F238E27FC236}">
-                <a16:creationId xmlns:a16="http://schemas.microsoft.com/office/drawing/2014/main" id="{DF873A6E-6717-484C-8D69-5FFF38029DF8}"/>
+                <a16:creationId xmlns:a16="http://schemas.microsoft.com/office/drawing/2014/main" id="{3461BF94-7777-4EC8-9892-E34C096B6FF2}"/>
               </a:ext>
             </a:extLst>
           </p:cNvPr>
@@ -4332,7 +4332,7 @@
           <p:cNvPr id="19" name="Text 17">
             <a:extLst xmlns:a="http://schemas.openxmlformats.org/drawingml/2006/main">
               <a:ext uri="{FF2B5EF4-FFF2-40B4-BE49-F238E27FC236}">
-                <a16:creationId xmlns:a16="http://schemas.microsoft.com/office/drawing/2014/main" id="{434E8950-D4EC-4A41-9241-FD152F6E3857}"/>
+                <a16:creationId xmlns:a16="http://schemas.microsoft.com/office/drawing/2014/main" id="{D82F2907-4192-4510-A284-DF0A8C71A1F3}"/>
               </a:ext>
             </a:extLst>
           </p:cNvPr>
@@ -4379,7 +4379,7 @@
           <p:cNvPr id="20" name="Text 18">
             <a:extLst xmlns:a="http://schemas.openxmlformats.org/drawingml/2006/main">
               <a:ext uri="{FF2B5EF4-FFF2-40B4-BE49-F238E27FC236}">
-                <a16:creationId xmlns:a16="http://schemas.microsoft.com/office/drawing/2014/main" id="{10546948-C65D-4554-919F-1989DEFEBC38}"/>
+                <a16:creationId xmlns:a16="http://schemas.microsoft.com/office/drawing/2014/main" id="{9E3E3585-8A9C-4994-9851-8621ED865815}"/>
               </a:ext>
             </a:extLst>
           </p:cNvPr>
@@ -4426,7 +4426,7 @@
           <p:cNvPr id="21" name="Shape 19">
             <a:extLst xmlns:a="http://schemas.openxmlformats.org/drawingml/2006/main">
               <a:ext uri="{FF2B5EF4-FFF2-40B4-BE49-F238E27FC236}">
-                <a16:creationId xmlns:a16="http://schemas.microsoft.com/office/drawing/2014/main" id="{513D29F2-5552-4FF2-8705-77AAF7680F0D}"/>
+                <a16:creationId xmlns:a16="http://schemas.microsoft.com/office/drawing/2014/main" id="{79F92336-4456-449B-8142-D62B49FEC3BF}"/>
               </a:ext>
             </a:extLst>
           </p:cNvPr>
@@ -4461,7 +4461,7 @@
           <p:cNvPr id="22" name="Shape 20">
             <a:extLst xmlns:a="http://schemas.openxmlformats.org/drawingml/2006/main">
               <a:ext uri="{FF2B5EF4-FFF2-40B4-BE49-F238E27FC236}">
-                <a16:creationId xmlns:a16="http://schemas.microsoft.com/office/drawing/2014/main" id="{18817F49-ED7E-4AC1-A4D2-A82D4866AC3E}"/>
+                <a16:creationId xmlns:a16="http://schemas.microsoft.com/office/drawing/2014/main" id="{E7CB2537-1497-48B0-806B-8419B9548B91}"/>
               </a:ext>
             </a:extLst>
           </p:cNvPr>
@@ -4496,7 +4496,7 @@
           <p:cNvPr id="23" name="Text 21">
             <a:extLst xmlns:a="http://schemas.openxmlformats.org/drawingml/2006/main">
               <a:ext uri="{FF2B5EF4-FFF2-40B4-BE49-F238E27FC236}">
-                <a16:creationId xmlns:a16="http://schemas.microsoft.com/office/drawing/2014/main" id="{B1D881D3-38A1-4452-907F-08889B47D281}"/>
+                <a16:creationId xmlns:a16="http://schemas.microsoft.com/office/drawing/2014/main" id="{F0C16394-A542-403A-8135-AF007F2349F5}"/>
               </a:ext>
             </a:extLst>
           </p:cNvPr>
@@ -4543,7 +4543,7 @@
           <p:cNvPr id="24" name="Text 22">
             <a:extLst xmlns:a="http://schemas.openxmlformats.org/drawingml/2006/main">
               <a:ext uri="{FF2B5EF4-FFF2-40B4-BE49-F238E27FC236}">
-                <a16:creationId xmlns:a16="http://schemas.microsoft.com/office/drawing/2014/main" id="{89F1E6DA-72C9-43A1-8BEA-81A447331BA5}"/>
+                <a16:creationId xmlns:a16="http://schemas.microsoft.com/office/drawing/2014/main" id="{AD7765F1-74CC-41C7-A65C-C749FA7CD113}"/>
               </a:ext>
             </a:extLst>
           </p:cNvPr>
@@ -4590,7 +4590,7 @@
           <p:cNvPr id="25" name="Text 23">
             <a:extLst xmlns:a="http://schemas.openxmlformats.org/drawingml/2006/main">
               <a:ext uri="{FF2B5EF4-FFF2-40B4-BE49-F238E27FC236}">
-                <a16:creationId xmlns:a16="http://schemas.microsoft.com/office/drawing/2014/main" id="{76686AD2-E33D-4957-9B91-CF1FD86AE5B6}"/>
+                <a16:creationId xmlns:a16="http://schemas.microsoft.com/office/drawing/2014/main" id="{95797570-2958-433C-96D2-0C07C67BAAC0}"/>
               </a:ext>
             </a:extLst>
           </p:cNvPr>
@@ -4637,7 +4637,7 @@
           <p:cNvPr id="26" name="Text 24">
             <a:extLst xmlns:a="http://schemas.openxmlformats.org/drawingml/2006/main">
               <a:ext uri="{FF2B5EF4-FFF2-40B4-BE49-F238E27FC236}">
-                <a16:creationId xmlns:a16="http://schemas.microsoft.com/office/drawing/2014/main" id="{B082038A-24FF-411A-B231-100D8C960CB7}"/>
+                <a16:creationId xmlns:a16="http://schemas.microsoft.com/office/drawing/2014/main" id="{A5B1808C-E7C8-464B-94FF-E70A86115D8C}"/>
               </a:ext>
             </a:extLst>
           </p:cNvPr>
@@ -4684,7 +4684,7 @@
           <p:cNvPr id="27" name="Text 25">
             <a:extLst xmlns:a="http://schemas.openxmlformats.org/drawingml/2006/main">
               <a:ext uri="{FF2B5EF4-FFF2-40B4-BE49-F238E27FC236}">
-                <a16:creationId xmlns:a16="http://schemas.microsoft.com/office/drawing/2014/main" id="{1E77A530-122A-4401-A217-9CB0AE27229A}"/>
+                <a16:creationId xmlns:a16="http://schemas.microsoft.com/office/drawing/2014/main" id="{B07A4623-C4FC-4820-9442-F15A2420F44A}"/>
               </a:ext>
             </a:extLst>
           </p:cNvPr>
@@ -4731,7 +4731,7 @@
           <p:cNvPr id="28" name="Shape 26">
             <a:extLst xmlns:a="http://schemas.openxmlformats.org/drawingml/2006/main">
               <a:ext uri="{FF2B5EF4-FFF2-40B4-BE49-F238E27FC236}">
-                <a16:creationId xmlns:a16="http://schemas.microsoft.com/office/drawing/2014/main" id="{0A4E8D4D-1E8D-4301-9EB1-4EC4F31123AD}"/>
+                <a16:creationId xmlns:a16="http://schemas.microsoft.com/office/drawing/2014/main" id="{EEBCC6BE-7938-4CA3-850E-36B8C98F87D9}"/>
               </a:ext>
             </a:extLst>
           </p:cNvPr>
@@ -4766,7 +4766,7 @@
           <p:cNvPr id="29" name="Text 27">
             <a:extLst xmlns:a="http://schemas.openxmlformats.org/drawingml/2006/main">
               <a:ext uri="{FF2B5EF4-FFF2-40B4-BE49-F238E27FC236}">
-                <a16:creationId xmlns:a16="http://schemas.microsoft.com/office/drawing/2014/main" id="{0D059468-68D7-4538-BE3F-0DB105EA717A}"/>
+                <a16:creationId xmlns:a16="http://schemas.microsoft.com/office/drawing/2014/main" id="{244FAFDD-317B-454F-A1B0-FDB0BABE18BA}"/>
               </a:ext>
             </a:extLst>
           </p:cNvPr>
@@ -4813,7 +4813,7 @@
           <p:cNvPr id="30" name="Text 28">
             <a:extLst xmlns:a="http://schemas.openxmlformats.org/drawingml/2006/main">
               <a:ext uri="{FF2B5EF4-FFF2-40B4-BE49-F238E27FC236}">
-                <a16:creationId xmlns:a16="http://schemas.microsoft.com/office/drawing/2014/main" id="{36736BDB-3CA5-4992-B408-5A19781E8A0E}"/>
+                <a16:creationId xmlns:a16="http://schemas.microsoft.com/office/drawing/2014/main" id="{C3A4B7D2-7114-4714-9EEC-5E733DF93DD5}"/>
               </a:ext>
             </a:extLst>
           </p:cNvPr>
@@ -4860,7 +4860,7 @@
           <p:cNvPr id="31" name="Text 29">
             <a:extLst xmlns:a="http://schemas.openxmlformats.org/drawingml/2006/main">
               <a:ext uri="{FF2B5EF4-FFF2-40B4-BE49-F238E27FC236}">
-                <a16:creationId xmlns:a16="http://schemas.microsoft.com/office/drawing/2014/main" id="{416A169B-CAB4-4ACA-AE78-3C5676FFA53B}"/>
+                <a16:creationId xmlns:a16="http://schemas.microsoft.com/office/drawing/2014/main" id="{E3CC8256-42A2-4E70-AAF2-354B6E485275}"/>
               </a:ext>
             </a:extLst>
           </p:cNvPr>
@@ -4905,7 +4905,7 @@
     </p:spTree>
     <p:extLst>
       <p:ext uri="{BB962C8B-B14F-4D97-AF65-F5344CB8AC3E}">
-        <p14:creationId xmlns:p14="http://schemas.microsoft.com/office/powerpoint/2010/main" val="943976179"/>
+        <p14:creationId xmlns:p14="http://schemas.microsoft.com/office/powerpoint/2010/main" val="1062270606"/>
       </p:ext>
     </p:extLst>
   </p:cSld>
@@ -4936,7 +4936,7 @@
           <p:cNvPr id="2" name="Text 0">
             <a:extLst xmlns:a="http://schemas.openxmlformats.org/drawingml/2006/main">
               <a:ext uri="{FF2B5EF4-FFF2-40B4-BE49-F238E27FC236}">
-                <a16:creationId xmlns:a16="http://schemas.microsoft.com/office/drawing/2014/main" id="{81544A75-BF71-4BF4-A2F6-05BD78FF2D69}"/>
+                <a16:creationId xmlns:a16="http://schemas.microsoft.com/office/drawing/2014/main" id="{EAE4B601-4373-4F1A-A2C6-77B75958923C}"/>
               </a:ext>
             </a:extLst>
           </p:cNvPr>
@@ -4983,7 +4983,7 @@
           <p:cNvPr id="3" name="Text 1">
             <a:extLst xmlns:a="http://schemas.openxmlformats.org/drawingml/2006/main">
               <a:ext uri="{FF2B5EF4-FFF2-40B4-BE49-F238E27FC236}">
-                <a16:creationId xmlns:a16="http://schemas.microsoft.com/office/drawing/2014/main" id="{A87DB829-89EF-43A9-B998-6B667A8C9866}"/>
+                <a16:creationId xmlns:a16="http://schemas.microsoft.com/office/drawing/2014/main" id="{FBCC3B34-DCD2-4EFA-B3D5-57CA899B8C68}"/>
               </a:ext>
             </a:extLst>
           </p:cNvPr>
@@ -5030,7 +5030,7 @@
           <p:cNvPr id="4" name="Shape 2">
             <a:extLst xmlns:a="http://schemas.openxmlformats.org/drawingml/2006/main">
               <a:ext uri="{FF2B5EF4-FFF2-40B4-BE49-F238E27FC236}">
-                <a16:creationId xmlns:a16="http://schemas.microsoft.com/office/drawing/2014/main" id="{DC6B92B6-4160-4E3B-B25E-4D6EF891A9FD}"/>
+                <a16:creationId xmlns:a16="http://schemas.microsoft.com/office/drawing/2014/main" id="{824D0D28-6928-4079-AA33-35F03094A9C7}"/>
               </a:ext>
             </a:extLst>
           </p:cNvPr>
@@ -5065,7 +5065,7 @@
           <p:cNvPr id="5" name="Text 3">
             <a:extLst xmlns:a="http://schemas.openxmlformats.org/drawingml/2006/main">
               <a:ext uri="{FF2B5EF4-FFF2-40B4-BE49-F238E27FC236}">
-                <a16:creationId xmlns:a16="http://schemas.microsoft.com/office/drawing/2014/main" id="{7F2B86CC-076F-473C-B814-A478B67F2300}"/>
+                <a16:creationId xmlns:a16="http://schemas.microsoft.com/office/drawing/2014/main" id="{28B9C9D5-2263-4D67-9527-4A85C1BC2EBA}"/>
               </a:ext>
             </a:extLst>
           </p:cNvPr>
@@ -5112,7 +5112,7 @@
           <p:cNvPr id="6" name="Shape 4">
             <a:extLst xmlns:a="http://schemas.openxmlformats.org/drawingml/2006/main">
               <a:ext uri="{FF2B5EF4-FFF2-40B4-BE49-F238E27FC236}">
-                <a16:creationId xmlns:a16="http://schemas.microsoft.com/office/drawing/2014/main" id="{71FDED17-A539-475C-9AAF-4A7B96728FA7}"/>
+                <a16:creationId xmlns:a16="http://schemas.microsoft.com/office/drawing/2014/main" id="{D1826BE9-74A1-4F2F-A35E-05B5A85B2C20}"/>
               </a:ext>
             </a:extLst>
           </p:cNvPr>
@@ -5143,7 +5143,7 @@
           <p:cNvPr id="7" name="Shape 5">
             <a:extLst xmlns:a="http://schemas.openxmlformats.org/drawingml/2006/main">
               <a:ext uri="{FF2B5EF4-FFF2-40B4-BE49-F238E27FC236}">
-                <a16:creationId xmlns:a16="http://schemas.microsoft.com/office/drawing/2014/main" id="{6FA73892-ADB0-47DF-A7E6-5CE8299743C9}"/>
+                <a16:creationId xmlns:a16="http://schemas.microsoft.com/office/drawing/2014/main" id="{C648A845-05AE-4C01-8037-D320295A27C0}"/>
               </a:ext>
             </a:extLst>
           </p:cNvPr>
@@ -5178,7 +5178,7 @@
           <p:cNvPr id="8" name="Text 6">
             <a:extLst xmlns:a="http://schemas.openxmlformats.org/drawingml/2006/main">
               <a:ext uri="{FF2B5EF4-FFF2-40B4-BE49-F238E27FC236}">
-                <a16:creationId xmlns:a16="http://schemas.microsoft.com/office/drawing/2014/main" id="{BB47A42D-58D5-4666-91D8-A4B0BC2615AE}"/>
+                <a16:creationId xmlns:a16="http://schemas.microsoft.com/office/drawing/2014/main" id="{3CC24DE1-AE44-41C0-8139-C1A885C84635}"/>
               </a:ext>
             </a:extLst>
           </p:cNvPr>
@@ -5225,7 +5225,7 @@
           <p:cNvPr id="9" name="Text 7">
             <a:extLst xmlns:a="http://schemas.openxmlformats.org/drawingml/2006/main">
               <a:ext uri="{FF2B5EF4-FFF2-40B4-BE49-F238E27FC236}">
-                <a16:creationId xmlns:a16="http://schemas.microsoft.com/office/drawing/2014/main" id="{279A0152-8555-418D-AD15-EF1513155420}"/>
+                <a16:creationId xmlns:a16="http://schemas.microsoft.com/office/drawing/2014/main" id="{5E691904-63AE-43E9-B9FA-28A606CA7637}"/>
               </a:ext>
             </a:extLst>
           </p:cNvPr>
@@ -5288,7 +5288,7 @@
           <p:cNvPr id="11" name="Shape 9">
             <a:extLst xmlns:a="http://schemas.openxmlformats.org/drawingml/2006/main">
               <a:ext uri="{FF2B5EF4-FFF2-40B4-BE49-F238E27FC236}">
-                <a16:creationId xmlns:a16="http://schemas.microsoft.com/office/drawing/2014/main" id="{61D793BA-ABFC-44D6-949A-1A98AF42EB7A}"/>
+                <a16:creationId xmlns:a16="http://schemas.microsoft.com/office/drawing/2014/main" id="{E48AE584-9115-4C1A-8F00-88A9FF163273}"/>
               </a:ext>
             </a:extLst>
           </p:cNvPr>
@@ -5323,7 +5323,7 @@
           <p:cNvPr id="12" name="Text 10">
             <a:extLst xmlns:a="http://schemas.openxmlformats.org/drawingml/2006/main">
               <a:ext uri="{FF2B5EF4-FFF2-40B4-BE49-F238E27FC236}">
-                <a16:creationId xmlns:a16="http://schemas.microsoft.com/office/drawing/2014/main" id="{EBEECF73-BB14-4F33-8C3B-3932F94EDCD5}"/>
+                <a16:creationId xmlns:a16="http://schemas.microsoft.com/office/drawing/2014/main" id="{EBC76A56-018B-4CA1-BFD5-7986E05FC21A}"/>
               </a:ext>
             </a:extLst>
           </p:cNvPr>
@@ -5370,7 +5370,7 @@
           <p:cNvPr id="13" name="Text 11">
             <a:extLst xmlns:a="http://schemas.openxmlformats.org/drawingml/2006/main">
               <a:ext uri="{FF2B5EF4-FFF2-40B4-BE49-F238E27FC236}">
-                <a16:creationId xmlns:a16="http://schemas.microsoft.com/office/drawing/2014/main" id="{4D909481-1E1D-489C-AD04-94114443B726}"/>
+                <a16:creationId xmlns:a16="http://schemas.microsoft.com/office/drawing/2014/main" id="{FFD1F6A8-FA98-4756-BBD8-C3C8A8A0DA38}"/>
               </a:ext>
             </a:extLst>
           </p:cNvPr>
@@ -5433,7 +5433,7 @@
           <p:cNvPr id="15" name="Shape 13">
             <a:extLst xmlns:a="http://schemas.openxmlformats.org/drawingml/2006/main">
               <a:ext uri="{FF2B5EF4-FFF2-40B4-BE49-F238E27FC236}">
-                <a16:creationId xmlns:a16="http://schemas.microsoft.com/office/drawing/2014/main" id="{57B29451-42E7-43B9-A2BC-E8F432D3AA98}"/>
+                <a16:creationId xmlns:a16="http://schemas.microsoft.com/office/drawing/2014/main" id="{9B3EA0EC-185B-4AF9-9223-E40FF6F4E96D}"/>
               </a:ext>
             </a:extLst>
           </p:cNvPr>
@@ -5468,7 +5468,7 @@
           <p:cNvPr id="16" name="Text 14">
             <a:extLst xmlns:a="http://schemas.openxmlformats.org/drawingml/2006/main">
               <a:ext uri="{FF2B5EF4-FFF2-40B4-BE49-F238E27FC236}">
-                <a16:creationId xmlns:a16="http://schemas.microsoft.com/office/drawing/2014/main" id="{B90F575B-253A-4728-BD52-DA0B3FFD3D96}"/>
+                <a16:creationId xmlns:a16="http://schemas.microsoft.com/office/drawing/2014/main" id="{9A6A9614-3E4E-4DB8-94A5-B2011C1C9F70}"/>
               </a:ext>
             </a:extLst>
           </p:cNvPr>
@@ -5515,7 +5515,7 @@
           <p:cNvPr id="17" name="Text 15">
             <a:extLst xmlns:a="http://schemas.openxmlformats.org/drawingml/2006/main">
               <a:ext uri="{FF2B5EF4-FFF2-40B4-BE49-F238E27FC236}">
-                <a16:creationId xmlns:a16="http://schemas.microsoft.com/office/drawing/2014/main" id="{051818F8-6834-4A8C-A405-47FB44D28ECA}"/>
+                <a16:creationId xmlns:a16="http://schemas.microsoft.com/office/drawing/2014/main" id="{23AC1AE7-F261-45FB-A48B-182B6FCC9FA2}"/>
               </a:ext>
             </a:extLst>
           </p:cNvPr>
@@ -5578,7 +5578,7 @@
           <p:cNvPr id="19" name="Shape 17">
             <a:extLst xmlns:a="http://schemas.openxmlformats.org/drawingml/2006/main">
               <a:ext uri="{FF2B5EF4-FFF2-40B4-BE49-F238E27FC236}">
-                <a16:creationId xmlns:a16="http://schemas.microsoft.com/office/drawing/2014/main" id="{737FB9C9-6794-489F-96CA-39100957F400}"/>
+                <a16:creationId xmlns:a16="http://schemas.microsoft.com/office/drawing/2014/main" id="{1FF25C67-FEA7-452D-A4EF-580680EB1F92}"/>
               </a:ext>
             </a:extLst>
           </p:cNvPr>
@@ -5613,7 +5613,7 @@
           <p:cNvPr id="20" name="Text 18">
             <a:extLst xmlns:a="http://schemas.openxmlformats.org/drawingml/2006/main">
               <a:ext uri="{FF2B5EF4-FFF2-40B4-BE49-F238E27FC236}">
-                <a16:creationId xmlns:a16="http://schemas.microsoft.com/office/drawing/2014/main" id="{170EF84A-0411-4BAF-A21F-C0A5E178FE0C}"/>
+                <a16:creationId xmlns:a16="http://schemas.microsoft.com/office/drawing/2014/main" id="{EE0A42C0-70BC-4DC6-99E7-21EFE3060EFA}"/>
               </a:ext>
             </a:extLst>
           </p:cNvPr>
@@ -5660,7 +5660,7 @@
           <p:cNvPr id="21" name="Text 19">
             <a:extLst xmlns:a="http://schemas.openxmlformats.org/drawingml/2006/main">
               <a:ext uri="{FF2B5EF4-FFF2-40B4-BE49-F238E27FC236}">
-                <a16:creationId xmlns:a16="http://schemas.microsoft.com/office/drawing/2014/main" id="{E8533BF4-A1AE-465D-9B0B-0DFBADE8D2EF}"/>
+                <a16:creationId xmlns:a16="http://schemas.microsoft.com/office/drawing/2014/main" id="{E3E045CE-1FAB-443F-A742-37EDB218727A}"/>
               </a:ext>
             </a:extLst>
           </p:cNvPr>
@@ -5723,7 +5723,7 @@
           <p:cNvPr id="23" name="Shape 21">
             <a:extLst xmlns:a="http://schemas.openxmlformats.org/drawingml/2006/main">
               <a:ext uri="{FF2B5EF4-FFF2-40B4-BE49-F238E27FC236}">
-                <a16:creationId xmlns:a16="http://schemas.microsoft.com/office/drawing/2014/main" id="{3BD8561C-1270-4327-8216-9A8EECB8AC7D}"/>
+                <a16:creationId xmlns:a16="http://schemas.microsoft.com/office/drawing/2014/main" id="{0D8EDC2E-1E8E-41BF-995F-BBE14DC15A5D}"/>
               </a:ext>
             </a:extLst>
           </p:cNvPr>
@@ -5758,7 +5758,7 @@
           <p:cNvPr id="24" name="Text 22">
             <a:extLst xmlns:a="http://schemas.openxmlformats.org/drawingml/2006/main">
               <a:ext uri="{FF2B5EF4-FFF2-40B4-BE49-F238E27FC236}">
-                <a16:creationId xmlns:a16="http://schemas.microsoft.com/office/drawing/2014/main" id="{F3F3F2E8-2E2A-4EC3-985D-A16C5BB8FAC1}"/>
+                <a16:creationId xmlns:a16="http://schemas.microsoft.com/office/drawing/2014/main" id="{33596BBE-6303-41A5-9F05-1F58E5D6AE94}"/>
               </a:ext>
             </a:extLst>
           </p:cNvPr>
@@ -5805,7 +5805,7 @@
           <p:cNvPr id="25" name="Text 23">
             <a:extLst xmlns:a="http://schemas.openxmlformats.org/drawingml/2006/main">
               <a:ext uri="{FF2B5EF4-FFF2-40B4-BE49-F238E27FC236}">
-                <a16:creationId xmlns:a16="http://schemas.microsoft.com/office/drawing/2014/main" id="{2B2909A1-CBD2-4D93-8ECC-92424A6D0645}"/>
+                <a16:creationId xmlns:a16="http://schemas.microsoft.com/office/drawing/2014/main" id="{6335FBD9-3E3E-40BD-849E-B3899CDC9711}"/>
               </a:ext>
             </a:extLst>
           </p:cNvPr>
@@ -5868,7 +5868,7 @@
           <p:cNvPr id="27" name="Shape 25">
             <a:extLst xmlns:a="http://schemas.openxmlformats.org/drawingml/2006/main">
               <a:ext uri="{FF2B5EF4-FFF2-40B4-BE49-F238E27FC236}">
-                <a16:creationId xmlns:a16="http://schemas.microsoft.com/office/drawing/2014/main" id="{1ECBE1AF-5068-4C67-8C2A-942D302FE14B}"/>
+                <a16:creationId xmlns:a16="http://schemas.microsoft.com/office/drawing/2014/main" id="{F803B0CF-F2FC-4FE9-B7AD-D41F3AE1AFD0}"/>
               </a:ext>
             </a:extLst>
           </p:cNvPr>
@@ -5903,7 +5903,7 @@
           <p:cNvPr id="28" name="Text 26">
             <a:extLst xmlns:a="http://schemas.openxmlformats.org/drawingml/2006/main">
               <a:ext uri="{FF2B5EF4-FFF2-40B4-BE49-F238E27FC236}">
-                <a16:creationId xmlns:a16="http://schemas.microsoft.com/office/drawing/2014/main" id="{61A1737E-E286-45C2-8194-60FFB3839D0C}"/>
+                <a16:creationId xmlns:a16="http://schemas.microsoft.com/office/drawing/2014/main" id="{F34C78FF-B116-4005-ABDB-233EB2AEF19A}"/>
               </a:ext>
             </a:extLst>
           </p:cNvPr>
@@ -5950,7 +5950,7 @@
           <p:cNvPr id="29" name="Text 27">
             <a:extLst xmlns:a="http://schemas.openxmlformats.org/drawingml/2006/main">
               <a:ext uri="{FF2B5EF4-FFF2-40B4-BE49-F238E27FC236}">
-                <a16:creationId xmlns:a16="http://schemas.microsoft.com/office/drawing/2014/main" id="{A859503B-4FBD-4536-9732-AA4F598816DF}"/>
+                <a16:creationId xmlns:a16="http://schemas.microsoft.com/office/drawing/2014/main" id="{D4365CAC-3DE4-43A5-A89D-3037E262A4ED}"/>
               </a:ext>
             </a:extLst>
           </p:cNvPr>
@@ -6013,7 +6013,7 @@
           <p:cNvPr id="30" name="Shape 28">
             <a:extLst xmlns:a="http://schemas.openxmlformats.org/drawingml/2006/main">
               <a:ext uri="{FF2B5EF4-FFF2-40B4-BE49-F238E27FC236}">
-                <a16:creationId xmlns:a16="http://schemas.microsoft.com/office/drawing/2014/main" id="{53513593-EFC3-44AF-AA4D-B3D6A125AD10}"/>
+                <a16:creationId xmlns:a16="http://schemas.microsoft.com/office/drawing/2014/main" id="{17C8A24C-0421-4920-A853-64082EA45A8B}"/>
               </a:ext>
             </a:extLst>
           </p:cNvPr>
@@ -6048,7 +6048,7 @@
           <p:cNvPr id="31" name="Text 29">
             <a:extLst xmlns:a="http://schemas.openxmlformats.org/drawingml/2006/main">
               <a:ext uri="{FF2B5EF4-FFF2-40B4-BE49-F238E27FC236}">
-                <a16:creationId xmlns:a16="http://schemas.microsoft.com/office/drawing/2014/main" id="{F00C93AD-6DF1-4E11-A771-CCB55E3ADE3C}"/>
+                <a16:creationId xmlns:a16="http://schemas.microsoft.com/office/drawing/2014/main" id="{73E9A21D-2AB2-4F01-ABA7-290CC2EE9358}"/>
               </a:ext>
             </a:extLst>
           </p:cNvPr>
@@ -6095,7 +6095,7 @@
           <p:cNvPr id="32" name="Shape 30">
             <a:extLst xmlns:a="http://schemas.openxmlformats.org/drawingml/2006/main">
               <a:ext uri="{FF2B5EF4-FFF2-40B4-BE49-F238E27FC236}">
-                <a16:creationId xmlns:a16="http://schemas.microsoft.com/office/drawing/2014/main" id="{E274351F-008A-4200-8385-30AAA987F6A7}"/>
+                <a16:creationId xmlns:a16="http://schemas.microsoft.com/office/drawing/2014/main" id="{1F252332-F9A9-49FD-AA12-27F22D0566AF}"/>
               </a:ext>
             </a:extLst>
           </p:cNvPr>
@@ -6128,7 +6128,7 @@
           <p:cNvPr id="33" name="Text 31">
             <a:extLst xmlns:a="http://schemas.openxmlformats.org/drawingml/2006/main">
               <a:ext uri="{FF2B5EF4-FFF2-40B4-BE49-F238E27FC236}">
-                <a16:creationId xmlns:a16="http://schemas.microsoft.com/office/drawing/2014/main" id="{9033B354-90D2-4F5B-B5EE-72C54FB9710A}"/>
+                <a16:creationId xmlns:a16="http://schemas.microsoft.com/office/drawing/2014/main" id="{374AB403-065D-4EB9-86FB-50064022C0C0}"/>
               </a:ext>
             </a:extLst>
           </p:cNvPr>
@@ -6175,7 +6175,7 @@
           <p:cNvPr id="34" name="Shape 32">
             <a:extLst xmlns:a="http://schemas.openxmlformats.org/drawingml/2006/main">
               <a:ext uri="{FF2B5EF4-FFF2-40B4-BE49-F238E27FC236}">
-                <a16:creationId xmlns:a16="http://schemas.microsoft.com/office/drawing/2014/main" id="{C3F88B18-2B2B-4EF1-BCAD-687E8854187B}"/>
+                <a16:creationId xmlns:a16="http://schemas.microsoft.com/office/drawing/2014/main" id="{D6580246-3F6C-446A-9807-93F50A7C934A}"/>
               </a:ext>
             </a:extLst>
           </p:cNvPr>
@@ -6208,7 +6208,7 @@
           <p:cNvPr id="35" name="Text 33">
             <a:extLst xmlns:a="http://schemas.openxmlformats.org/drawingml/2006/main">
               <a:ext uri="{FF2B5EF4-FFF2-40B4-BE49-F238E27FC236}">
-                <a16:creationId xmlns:a16="http://schemas.microsoft.com/office/drawing/2014/main" id="{E600158F-7571-47D1-B3C1-2FDB2106325F}"/>
+                <a16:creationId xmlns:a16="http://schemas.microsoft.com/office/drawing/2014/main" id="{97CF5B0B-5D3C-4356-A68B-9BE222366F66}"/>
               </a:ext>
             </a:extLst>
           </p:cNvPr>
@@ -6255,7 +6255,7 @@
           <p:cNvPr id="36" name="Shape 34">
             <a:extLst xmlns:a="http://schemas.openxmlformats.org/drawingml/2006/main">
               <a:ext uri="{FF2B5EF4-FFF2-40B4-BE49-F238E27FC236}">
-                <a16:creationId xmlns:a16="http://schemas.microsoft.com/office/drawing/2014/main" id="{DC6BDB33-7787-4299-AFDB-3B2A22FD4FC7}"/>
+                <a16:creationId xmlns:a16="http://schemas.microsoft.com/office/drawing/2014/main" id="{0FE90188-B991-44B8-A9E3-CB6498F208CE}"/>
               </a:ext>
             </a:extLst>
           </p:cNvPr>
@@ -6288,7 +6288,7 @@
           <p:cNvPr id="37" name="Text 35">
             <a:extLst xmlns:a="http://schemas.openxmlformats.org/drawingml/2006/main">
               <a:ext uri="{FF2B5EF4-FFF2-40B4-BE49-F238E27FC236}">
-                <a16:creationId xmlns:a16="http://schemas.microsoft.com/office/drawing/2014/main" id="{47741A2D-20C9-43D8-8D0F-7DDDCA236D9B}"/>
+                <a16:creationId xmlns:a16="http://schemas.microsoft.com/office/drawing/2014/main" id="{2DDE6BFE-6281-4619-8818-1579CECC0E97}"/>
               </a:ext>
             </a:extLst>
           </p:cNvPr>
@@ -6335,7 +6335,7 @@
           <p:cNvPr id="38" name="Shape 36">
             <a:extLst xmlns:a="http://schemas.openxmlformats.org/drawingml/2006/main">
               <a:ext uri="{FF2B5EF4-FFF2-40B4-BE49-F238E27FC236}">
-                <a16:creationId xmlns:a16="http://schemas.microsoft.com/office/drawing/2014/main" id="{DE93BDBC-FBB3-46B3-99DF-8306A5784CA7}"/>
+                <a16:creationId xmlns:a16="http://schemas.microsoft.com/office/drawing/2014/main" id="{1E578235-5A52-46A1-AC6B-FE46AC2931B5}"/>
               </a:ext>
             </a:extLst>
           </p:cNvPr>
@@ -6370,7 +6370,7 @@
           <p:cNvPr id="39" name="Text 37">
             <a:extLst xmlns:a="http://schemas.openxmlformats.org/drawingml/2006/main">
               <a:ext uri="{FF2B5EF4-FFF2-40B4-BE49-F238E27FC236}">
-                <a16:creationId xmlns:a16="http://schemas.microsoft.com/office/drawing/2014/main" id="{85384F4F-F064-4B16-9E92-7F363FA7A9B2}"/>
+                <a16:creationId xmlns:a16="http://schemas.microsoft.com/office/drawing/2014/main" id="{885B421B-D53E-4691-91EF-8983FD580630}"/>
               </a:ext>
             </a:extLst>
           </p:cNvPr>
@@ -6417,7 +6417,7 @@
           <p:cNvPr id="40" name="Text 38">
             <a:extLst xmlns:a="http://schemas.openxmlformats.org/drawingml/2006/main">
               <a:ext uri="{FF2B5EF4-FFF2-40B4-BE49-F238E27FC236}">
-                <a16:creationId xmlns:a16="http://schemas.microsoft.com/office/drawing/2014/main" id="{959F6067-2E3E-4546-803E-20AAE7732661}"/>
+                <a16:creationId xmlns:a16="http://schemas.microsoft.com/office/drawing/2014/main" id="{51A82688-8206-4EB4-86D1-21E9526A1F65}"/>
               </a:ext>
             </a:extLst>
           </p:cNvPr>
@@ -6512,7 +6512,7 @@
           <p:cNvPr id="41" name="Text 39">
             <a:extLst xmlns:a="http://schemas.openxmlformats.org/drawingml/2006/main">
               <a:ext uri="{FF2B5EF4-FFF2-40B4-BE49-F238E27FC236}">
-                <a16:creationId xmlns:a16="http://schemas.microsoft.com/office/drawing/2014/main" id="{132659FF-C961-4DB9-9F93-CF3CE4E41077}"/>
+                <a16:creationId xmlns:a16="http://schemas.microsoft.com/office/drawing/2014/main" id="{525E4250-83E6-4C2B-AAB8-6993C52E63EC}"/>
               </a:ext>
             </a:extLst>
           </p:cNvPr>
@@ -6559,7 +6559,7 @@
           <p:cNvPr id="42" name="Text 40">
             <a:extLst xmlns:a="http://schemas.openxmlformats.org/drawingml/2006/main">
               <a:ext uri="{FF2B5EF4-FFF2-40B4-BE49-F238E27FC236}">
-                <a16:creationId xmlns:a16="http://schemas.microsoft.com/office/drawing/2014/main" id="{85D8D5DB-DD5B-414D-BD33-FDF6A1D9C4CE}"/>
+                <a16:creationId xmlns:a16="http://schemas.microsoft.com/office/drawing/2014/main" id="{4A81D812-85D5-4A26-8E8D-F6C9207E6758}"/>
               </a:ext>
             </a:extLst>
           </p:cNvPr>
@@ -6606,7 +6606,7 @@
           <p:cNvPr id="43" name="Text 41">
             <a:extLst xmlns:a="http://schemas.openxmlformats.org/drawingml/2006/main">
               <a:ext uri="{FF2B5EF4-FFF2-40B4-BE49-F238E27FC236}">
-                <a16:creationId xmlns:a16="http://schemas.microsoft.com/office/drawing/2014/main" id="{F8C617C6-0E40-4AA3-A7F8-8E5AF2648D43}"/>
+                <a16:creationId xmlns:a16="http://schemas.microsoft.com/office/drawing/2014/main" id="{58D0CD19-6381-4D0B-8534-E32C73359D6F}"/>
               </a:ext>
             </a:extLst>
           </p:cNvPr>
@@ -6651,7 +6651,7 @@
     </p:spTree>
     <p:extLst>
       <p:ext uri="{BB962C8B-B14F-4D97-AF65-F5344CB8AC3E}">
-        <p14:creationId xmlns:p14="http://schemas.microsoft.com/office/powerpoint/2010/main" val="1858472735"/>
+        <p14:creationId xmlns:p14="http://schemas.microsoft.com/office/powerpoint/2010/main" val="1248689404"/>
       </p:ext>
     </p:extLst>
   </p:cSld>
@@ -6682,7 +6682,7 @@
           <p:cNvPr id="2" name="Text 0">
             <a:extLst xmlns:a="http://schemas.openxmlformats.org/drawingml/2006/main">
               <a:ext uri="{FF2B5EF4-FFF2-40B4-BE49-F238E27FC236}">
-                <a16:creationId xmlns:a16="http://schemas.microsoft.com/office/drawing/2014/main" id="{AA2CDD78-A266-4970-A329-6FFC3943B4AE}"/>
+                <a16:creationId xmlns:a16="http://schemas.microsoft.com/office/drawing/2014/main" id="{036595F7-2E09-447C-860C-8DAE1577A01B}"/>
               </a:ext>
             </a:extLst>
           </p:cNvPr>
@@ -6729,7 +6729,7 @@
           <p:cNvPr id="3" name="Text 1">
             <a:extLst xmlns:a="http://schemas.openxmlformats.org/drawingml/2006/main">
               <a:ext uri="{FF2B5EF4-FFF2-40B4-BE49-F238E27FC236}">
-                <a16:creationId xmlns:a16="http://schemas.microsoft.com/office/drawing/2014/main" id="{BBB4B400-243A-4EED-B368-AF85D2C61484}"/>
+                <a16:creationId xmlns:a16="http://schemas.microsoft.com/office/drawing/2014/main" id="{0BC01419-F203-481D-9101-A31743DEBB28}"/>
               </a:ext>
             </a:extLst>
           </p:cNvPr>
@@ -6776,7 +6776,7 @@
           <p:cNvPr id="4" name="Shape 2">
             <a:extLst xmlns:a="http://schemas.openxmlformats.org/drawingml/2006/main">
               <a:ext uri="{FF2B5EF4-FFF2-40B4-BE49-F238E27FC236}">
-                <a16:creationId xmlns:a16="http://schemas.microsoft.com/office/drawing/2014/main" id="{7EE838AC-AA25-424F-AE73-30ACA80A6E8B}"/>
+                <a16:creationId xmlns:a16="http://schemas.microsoft.com/office/drawing/2014/main" id="{1BB43C63-BD46-4CB8-9A8B-67D73D8891D0}"/>
               </a:ext>
             </a:extLst>
           </p:cNvPr>
@@ -6811,7 +6811,7 @@
           <p:cNvPr id="5" name="Text 3">
             <a:extLst xmlns:a="http://schemas.openxmlformats.org/drawingml/2006/main">
               <a:ext uri="{FF2B5EF4-FFF2-40B4-BE49-F238E27FC236}">
-                <a16:creationId xmlns:a16="http://schemas.microsoft.com/office/drawing/2014/main" id="{9E2FA208-5F37-495D-910A-0BA68DE1397F}"/>
+                <a16:creationId xmlns:a16="http://schemas.microsoft.com/office/drawing/2014/main" id="{C60996AD-2C59-4FA9-A9FF-EEB2A79EB8C7}"/>
               </a:ext>
             </a:extLst>
           </p:cNvPr>
@@ -6858,7 +6858,7 @@
           <p:cNvPr id="6" name="Shape 4">
             <a:extLst xmlns:a="http://schemas.openxmlformats.org/drawingml/2006/main">
               <a:ext uri="{FF2B5EF4-FFF2-40B4-BE49-F238E27FC236}">
-                <a16:creationId xmlns:a16="http://schemas.microsoft.com/office/drawing/2014/main" id="{4BBF21ED-46AF-4875-92AF-26354A1BA93E}"/>
+                <a16:creationId xmlns:a16="http://schemas.microsoft.com/office/drawing/2014/main" id="{15796ED6-DD10-4631-AEA2-BAB6125ED647}"/>
               </a:ext>
             </a:extLst>
           </p:cNvPr>
@@ -6889,7 +6889,7 @@
           <p:cNvPr id="7" name="Shape 5">
             <a:extLst xmlns:a="http://schemas.openxmlformats.org/drawingml/2006/main">
               <a:ext uri="{FF2B5EF4-FFF2-40B4-BE49-F238E27FC236}">
-                <a16:creationId xmlns:a16="http://schemas.microsoft.com/office/drawing/2014/main" id="{95DEDE31-77C6-49AB-A510-F11F7D6FDBC7}"/>
+                <a16:creationId xmlns:a16="http://schemas.microsoft.com/office/drawing/2014/main" id="{0A9E3C43-6972-4722-8810-E9CC52437214}"/>
               </a:ext>
             </a:extLst>
           </p:cNvPr>
@@ -6924,7 +6924,7 @@
           <p:cNvPr id="8" name="Text 6">
             <a:extLst xmlns:a="http://schemas.openxmlformats.org/drawingml/2006/main">
               <a:ext uri="{FF2B5EF4-FFF2-40B4-BE49-F238E27FC236}">
-                <a16:creationId xmlns:a16="http://schemas.microsoft.com/office/drawing/2014/main" id="{C41758CC-EA9D-48BD-A0EB-C3FE33070F18}"/>
+                <a16:creationId xmlns:a16="http://schemas.microsoft.com/office/drawing/2014/main" id="{020E87B6-A60F-4E08-A873-86B64A8BA547}"/>
               </a:ext>
             </a:extLst>
           </p:cNvPr>
@@ -6971,7 +6971,7 @@
           <p:cNvPr id="9" name="Text 7">
             <a:extLst xmlns:a="http://schemas.openxmlformats.org/drawingml/2006/main">
               <a:ext uri="{FF2B5EF4-FFF2-40B4-BE49-F238E27FC236}">
-                <a16:creationId xmlns:a16="http://schemas.microsoft.com/office/drawing/2014/main" id="{3D4C51F1-708C-4C1C-95CD-E05A760D189E}"/>
+                <a16:creationId xmlns:a16="http://schemas.microsoft.com/office/drawing/2014/main" id="{CE19FA20-2743-4BB2-83CA-6CEF4961F559}"/>
               </a:ext>
             </a:extLst>
           </p:cNvPr>
@@ -7018,7 +7018,7 @@
           <p:cNvPr id="10" name="Shape 8">
             <a:extLst xmlns:a="http://schemas.openxmlformats.org/drawingml/2006/main">
               <a:ext uri="{FF2B5EF4-FFF2-40B4-BE49-F238E27FC236}">
-                <a16:creationId xmlns:a16="http://schemas.microsoft.com/office/drawing/2014/main" id="{84D6017C-C4B4-4AAE-A4DF-022BE59C4336}"/>
+                <a16:creationId xmlns:a16="http://schemas.microsoft.com/office/drawing/2014/main" id="{65398AAF-7FA2-42D7-9FC7-FCDAA21B3F21}"/>
               </a:ext>
             </a:extLst>
           </p:cNvPr>
@@ -7050,7 +7050,7 @@
           <p:cNvPr id="11" name="Text 9">
             <a:extLst xmlns:a="http://schemas.openxmlformats.org/drawingml/2006/main">
               <a:ext uri="{FF2B5EF4-FFF2-40B4-BE49-F238E27FC236}">
-                <a16:creationId xmlns:a16="http://schemas.microsoft.com/office/drawing/2014/main" id="{476C4FED-7F08-41A4-9FFC-CFF7C03DEDAA}"/>
+                <a16:creationId xmlns:a16="http://schemas.microsoft.com/office/drawing/2014/main" id="{6EDEDDE0-D2A0-4B6D-A2BE-5F01B307EC6D}"/>
               </a:ext>
             </a:extLst>
           </p:cNvPr>
@@ -7097,7 +7097,7 @@
           <p:cNvPr id="12" name="Text 10">
             <a:extLst xmlns:a="http://schemas.openxmlformats.org/drawingml/2006/main">
               <a:ext uri="{FF2B5EF4-FFF2-40B4-BE49-F238E27FC236}">
-                <a16:creationId xmlns:a16="http://schemas.microsoft.com/office/drawing/2014/main" id="{C0929A51-0C23-4531-874C-D5379B272DA2}"/>
+                <a16:creationId xmlns:a16="http://schemas.microsoft.com/office/drawing/2014/main" id="{A1AE2056-E6A6-46FA-8DAE-471041D69F6E}"/>
               </a:ext>
             </a:extLst>
           </p:cNvPr>
@@ -7144,7 +7144,7 @@
           <p:cNvPr id="13" name="Shape 11">
             <a:extLst xmlns:a="http://schemas.openxmlformats.org/drawingml/2006/main">
               <a:ext uri="{FF2B5EF4-FFF2-40B4-BE49-F238E27FC236}">
-                <a16:creationId xmlns:a16="http://schemas.microsoft.com/office/drawing/2014/main" id="{DF1C3DB4-11D3-445F-B9CF-4181CE848B59}"/>
+                <a16:creationId xmlns:a16="http://schemas.microsoft.com/office/drawing/2014/main" id="{6D71B61B-8696-4622-9DF0-C4E90F346883}"/>
               </a:ext>
             </a:extLst>
           </p:cNvPr>
@@ -7176,7 +7176,7 @@
           <p:cNvPr id="14" name="Text 12">
             <a:extLst xmlns:a="http://schemas.openxmlformats.org/drawingml/2006/main">
               <a:ext uri="{FF2B5EF4-FFF2-40B4-BE49-F238E27FC236}">
-                <a16:creationId xmlns:a16="http://schemas.microsoft.com/office/drawing/2014/main" id="{16070BF7-0C50-438F-A415-6D120E3BD528}"/>
+                <a16:creationId xmlns:a16="http://schemas.microsoft.com/office/drawing/2014/main" id="{D448A036-2D8A-49B4-A1A0-78E8E115A7E2}"/>
               </a:ext>
             </a:extLst>
           </p:cNvPr>
@@ -7223,7 +7223,7 @@
           <p:cNvPr id="15" name="Text 13">
             <a:extLst xmlns:a="http://schemas.openxmlformats.org/drawingml/2006/main">
               <a:ext uri="{FF2B5EF4-FFF2-40B4-BE49-F238E27FC236}">
-                <a16:creationId xmlns:a16="http://schemas.microsoft.com/office/drawing/2014/main" id="{B19A67A4-1B06-44AE-B9C1-AF21ED6A3E81}"/>
+                <a16:creationId xmlns:a16="http://schemas.microsoft.com/office/drawing/2014/main" id="{0F112202-C79F-41CB-A5FF-08850EBFB61B}"/>
               </a:ext>
             </a:extLst>
           </p:cNvPr>
@@ -7270,7 +7270,7 @@
           <p:cNvPr id="16" name="Shape 14">
             <a:extLst xmlns:a="http://schemas.openxmlformats.org/drawingml/2006/main">
               <a:ext uri="{FF2B5EF4-FFF2-40B4-BE49-F238E27FC236}">
-                <a16:creationId xmlns:a16="http://schemas.microsoft.com/office/drawing/2014/main" id="{A191CFB3-A488-4EE5-9313-0F290D723CF8}"/>
+                <a16:creationId xmlns:a16="http://schemas.microsoft.com/office/drawing/2014/main" id="{108A2BEF-000E-47E2-BCE7-F963875CFDD3}"/>
               </a:ext>
             </a:extLst>
           </p:cNvPr>
@@ -7302,7 +7302,7 @@
           <p:cNvPr id="17" name="Text 15">
             <a:extLst xmlns:a="http://schemas.openxmlformats.org/drawingml/2006/main">
               <a:ext uri="{FF2B5EF4-FFF2-40B4-BE49-F238E27FC236}">
-                <a16:creationId xmlns:a16="http://schemas.microsoft.com/office/drawing/2014/main" id="{6F1F94B0-9CEC-4052-B5DA-FF9E765D20B0}"/>
+                <a16:creationId xmlns:a16="http://schemas.microsoft.com/office/drawing/2014/main" id="{18C65D93-FBC8-44F5-B199-E376EC9520C3}"/>
               </a:ext>
             </a:extLst>
           </p:cNvPr>
@@ -7349,7 +7349,7 @@
           <p:cNvPr id="18" name="Text 16">
             <a:extLst xmlns:a="http://schemas.openxmlformats.org/drawingml/2006/main">
               <a:ext uri="{FF2B5EF4-FFF2-40B4-BE49-F238E27FC236}">
-                <a16:creationId xmlns:a16="http://schemas.microsoft.com/office/drawing/2014/main" id="{BAECA2D0-F889-498D-B69A-FAE7AFA059ED}"/>
+                <a16:creationId xmlns:a16="http://schemas.microsoft.com/office/drawing/2014/main" id="{1E0B20C0-18E8-4021-B3A1-D000D2DF86A2}"/>
               </a:ext>
             </a:extLst>
           </p:cNvPr>
@@ -7396,7 +7396,7 @@
           <p:cNvPr id="19" name="Shape 17">
             <a:extLst xmlns:a="http://schemas.openxmlformats.org/drawingml/2006/main">
               <a:ext uri="{FF2B5EF4-FFF2-40B4-BE49-F238E27FC236}">
-                <a16:creationId xmlns:a16="http://schemas.microsoft.com/office/drawing/2014/main" id="{2BEC5FD7-5F85-4F30-A44F-BB914135DBCB}"/>
+                <a16:creationId xmlns:a16="http://schemas.microsoft.com/office/drawing/2014/main" id="{86E39ECB-9208-4CF8-AC08-DDF900F6E99A}"/>
               </a:ext>
             </a:extLst>
           </p:cNvPr>
@@ -7428,7 +7428,7 @@
           <p:cNvPr id="20" name="Text 18">
             <a:extLst xmlns:a="http://schemas.openxmlformats.org/drawingml/2006/main">
               <a:ext uri="{FF2B5EF4-FFF2-40B4-BE49-F238E27FC236}">
-                <a16:creationId xmlns:a16="http://schemas.microsoft.com/office/drawing/2014/main" id="{971692C6-D9EA-4282-A7CF-0327A37F7922}"/>
+                <a16:creationId xmlns:a16="http://schemas.microsoft.com/office/drawing/2014/main" id="{3BF4F6AE-BFE4-438B-849F-1D120E0CD707}"/>
               </a:ext>
             </a:extLst>
           </p:cNvPr>
@@ -7475,7 +7475,7 @@
           <p:cNvPr id="21" name="Text 19">
             <a:extLst xmlns:a="http://schemas.openxmlformats.org/drawingml/2006/main">
               <a:ext uri="{FF2B5EF4-FFF2-40B4-BE49-F238E27FC236}">
-                <a16:creationId xmlns:a16="http://schemas.microsoft.com/office/drawing/2014/main" id="{05BE509F-2AD6-4DBF-9978-C540A3ABF33F}"/>
+                <a16:creationId xmlns:a16="http://schemas.microsoft.com/office/drawing/2014/main" id="{B922490E-904D-4C86-8354-FC58C07491F7}"/>
               </a:ext>
             </a:extLst>
           </p:cNvPr>
@@ -7522,7 +7522,7 @@
           <p:cNvPr id="22" name="Shape 20">
             <a:extLst xmlns:a="http://schemas.openxmlformats.org/drawingml/2006/main">
               <a:ext uri="{FF2B5EF4-FFF2-40B4-BE49-F238E27FC236}">
-                <a16:creationId xmlns:a16="http://schemas.microsoft.com/office/drawing/2014/main" id="{4BEDB7FA-D5DF-450A-8C82-B14A60886A35}"/>
+                <a16:creationId xmlns:a16="http://schemas.microsoft.com/office/drawing/2014/main" id="{7D8D76C7-961E-49BA-90E4-16A9C146D4D7}"/>
               </a:ext>
             </a:extLst>
           </p:cNvPr>
@@ -7554,7 +7554,7 @@
           <p:cNvPr id="23" name="Text 21">
             <a:extLst xmlns:a="http://schemas.openxmlformats.org/drawingml/2006/main">
               <a:ext uri="{FF2B5EF4-FFF2-40B4-BE49-F238E27FC236}">
-                <a16:creationId xmlns:a16="http://schemas.microsoft.com/office/drawing/2014/main" id="{BE2B92A8-6604-4DD7-B26A-43E9456AEE9D}"/>
+                <a16:creationId xmlns:a16="http://schemas.microsoft.com/office/drawing/2014/main" id="{FF755E00-B58D-4E72-88BA-2A57EC079A65}"/>
               </a:ext>
             </a:extLst>
           </p:cNvPr>
@@ -7601,7 +7601,7 @@
           <p:cNvPr id="24" name="Text 22">
             <a:extLst xmlns:a="http://schemas.openxmlformats.org/drawingml/2006/main">
               <a:ext uri="{FF2B5EF4-FFF2-40B4-BE49-F238E27FC236}">
-                <a16:creationId xmlns:a16="http://schemas.microsoft.com/office/drawing/2014/main" id="{5ED91AC1-5333-461E-A713-0252EC8598B5}"/>
+                <a16:creationId xmlns:a16="http://schemas.microsoft.com/office/drawing/2014/main" id="{A2AF46A8-B10C-488D-9546-AA7F5D3455BF}"/>
               </a:ext>
             </a:extLst>
           </p:cNvPr>
@@ -7648,7 +7648,7 @@
           <p:cNvPr id="25" name="Shape 23">
             <a:extLst xmlns:a="http://schemas.openxmlformats.org/drawingml/2006/main">
               <a:ext uri="{FF2B5EF4-FFF2-40B4-BE49-F238E27FC236}">
-                <a16:creationId xmlns:a16="http://schemas.microsoft.com/office/drawing/2014/main" id="{66DCF7B1-696C-486B-9825-AEE9FC6D05DE}"/>
+                <a16:creationId xmlns:a16="http://schemas.microsoft.com/office/drawing/2014/main" id="{B77927CF-994B-4F7C-9858-553B2D1A7E8D}"/>
               </a:ext>
             </a:extLst>
           </p:cNvPr>
@@ -7680,7 +7680,7 @@
           <p:cNvPr id="26" name="Text 24">
             <a:extLst xmlns:a="http://schemas.openxmlformats.org/drawingml/2006/main">
               <a:ext uri="{FF2B5EF4-FFF2-40B4-BE49-F238E27FC236}">
-                <a16:creationId xmlns:a16="http://schemas.microsoft.com/office/drawing/2014/main" id="{9E39A109-D726-4D05-81DA-31D9FE31FD3A}"/>
+                <a16:creationId xmlns:a16="http://schemas.microsoft.com/office/drawing/2014/main" id="{8D402B50-FB5D-451C-A3D5-99CC6E6B6421}"/>
               </a:ext>
             </a:extLst>
           </p:cNvPr>
@@ -7727,7 +7727,7 @@
           <p:cNvPr id="27" name="Shape 25">
             <a:extLst xmlns:a="http://schemas.openxmlformats.org/drawingml/2006/main">
               <a:ext uri="{FF2B5EF4-FFF2-40B4-BE49-F238E27FC236}">
-                <a16:creationId xmlns:a16="http://schemas.microsoft.com/office/drawing/2014/main" id="{4424AD4E-8CEA-4D87-B062-BFC947941122}"/>
+                <a16:creationId xmlns:a16="http://schemas.microsoft.com/office/drawing/2014/main" id="{7E19FC4C-7A71-4567-AF22-2509E5138402}"/>
               </a:ext>
             </a:extLst>
           </p:cNvPr>
@@ -7762,7 +7762,7 @@
           <p:cNvPr id="28" name="Text 26">
             <a:extLst xmlns:a="http://schemas.openxmlformats.org/drawingml/2006/main">
               <a:ext uri="{FF2B5EF4-FFF2-40B4-BE49-F238E27FC236}">
-                <a16:creationId xmlns:a16="http://schemas.microsoft.com/office/drawing/2014/main" id="{C8CF84E5-57C2-4C14-9423-6418488C686C}"/>
+                <a16:creationId xmlns:a16="http://schemas.microsoft.com/office/drawing/2014/main" id="{2827A290-4608-42EE-9663-510C9210237D}"/>
               </a:ext>
             </a:extLst>
           </p:cNvPr>
@@ -7809,7 +7809,7 @@
           <p:cNvPr id="29" name="Shape 27">
             <a:extLst xmlns:a="http://schemas.openxmlformats.org/drawingml/2006/main">
               <a:ext uri="{FF2B5EF4-FFF2-40B4-BE49-F238E27FC236}">
-                <a16:creationId xmlns:a16="http://schemas.microsoft.com/office/drawing/2014/main" id="{7BCF6FC3-2319-4B35-8C2F-56E318498D6A}"/>
+                <a16:creationId xmlns:a16="http://schemas.microsoft.com/office/drawing/2014/main" id="{C997C1B5-B859-4503-B97F-B40029C5F314}"/>
               </a:ext>
             </a:extLst>
           </p:cNvPr>
@@ -7842,7 +7842,7 @@
           <p:cNvPr id="30" name="Text 28">
             <a:extLst xmlns:a="http://schemas.openxmlformats.org/drawingml/2006/main">
               <a:ext uri="{FF2B5EF4-FFF2-40B4-BE49-F238E27FC236}">
-                <a16:creationId xmlns:a16="http://schemas.microsoft.com/office/drawing/2014/main" id="{7872A9BD-67B5-4678-963E-D32061A668E4}"/>
+                <a16:creationId xmlns:a16="http://schemas.microsoft.com/office/drawing/2014/main" id="{9B02CF7C-236E-42D9-8E57-A7A50B7E833E}"/>
               </a:ext>
             </a:extLst>
           </p:cNvPr>
@@ -7889,7 +7889,7 @@
           <p:cNvPr id="31" name="Shape 29">
             <a:extLst xmlns:a="http://schemas.openxmlformats.org/drawingml/2006/main">
               <a:ext uri="{FF2B5EF4-FFF2-40B4-BE49-F238E27FC236}">
-                <a16:creationId xmlns:a16="http://schemas.microsoft.com/office/drawing/2014/main" id="{500A07FA-0F27-44FC-AB54-B5414CFD3759}"/>
+                <a16:creationId xmlns:a16="http://schemas.microsoft.com/office/drawing/2014/main" id="{DFB13E1A-9BD3-426E-9CC6-462B23CC2678}"/>
               </a:ext>
             </a:extLst>
           </p:cNvPr>
@@ -7922,7 +7922,7 @@
           <p:cNvPr id="32" name="Text 30">
             <a:extLst xmlns:a="http://schemas.openxmlformats.org/drawingml/2006/main">
               <a:ext uri="{FF2B5EF4-FFF2-40B4-BE49-F238E27FC236}">
-                <a16:creationId xmlns:a16="http://schemas.microsoft.com/office/drawing/2014/main" id="{A7036F96-2E13-4E6A-97BD-A66DEB5E459C}"/>
+                <a16:creationId xmlns:a16="http://schemas.microsoft.com/office/drawing/2014/main" id="{500CD9C5-411A-428B-9B9D-95945F8500E3}"/>
               </a:ext>
             </a:extLst>
           </p:cNvPr>
@@ -7969,7 +7969,7 @@
           <p:cNvPr id="33" name="Shape 31">
             <a:extLst xmlns:a="http://schemas.openxmlformats.org/drawingml/2006/main">
               <a:ext uri="{FF2B5EF4-FFF2-40B4-BE49-F238E27FC236}">
-                <a16:creationId xmlns:a16="http://schemas.microsoft.com/office/drawing/2014/main" id="{ED0B979C-B655-41E0-8075-F88E22B8B8E4}"/>
+                <a16:creationId xmlns:a16="http://schemas.microsoft.com/office/drawing/2014/main" id="{D332FB84-A96C-48E5-A929-0C301BAE49DC}"/>
               </a:ext>
             </a:extLst>
           </p:cNvPr>
@@ -8002,7 +8002,7 @@
           <p:cNvPr id="34" name="Text 32">
             <a:extLst xmlns:a="http://schemas.openxmlformats.org/drawingml/2006/main">
               <a:ext uri="{FF2B5EF4-FFF2-40B4-BE49-F238E27FC236}">
-                <a16:creationId xmlns:a16="http://schemas.microsoft.com/office/drawing/2014/main" id="{A24A9DC7-B07B-4C85-9B6D-695C3FDEE860}"/>
+                <a16:creationId xmlns:a16="http://schemas.microsoft.com/office/drawing/2014/main" id="{588DD2B5-EAB9-42CC-9CC5-93ED64DA2188}"/>
               </a:ext>
             </a:extLst>
           </p:cNvPr>
@@ -8049,7 +8049,7 @@
           <p:cNvPr id="35" name="Shape 33">
             <a:extLst xmlns:a="http://schemas.openxmlformats.org/drawingml/2006/main">
               <a:ext uri="{FF2B5EF4-FFF2-40B4-BE49-F238E27FC236}">
-                <a16:creationId xmlns:a16="http://schemas.microsoft.com/office/drawing/2014/main" id="{7CAC9C5C-26E4-4A94-8ABC-EFE3C815B2A1}"/>
+                <a16:creationId xmlns:a16="http://schemas.microsoft.com/office/drawing/2014/main" id="{8D426218-84D7-4698-B929-6758D3E58F09}"/>
               </a:ext>
             </a:extLst>
           </p:cNvPr>
@@ -8082,7 +8082,7 @@
           <p:cNvPr id="36" name="Text 34">
             <a:extLst xmlns:a="http://schemas.openxmlformats.org/drawingml/2006/main">
               <a:ext uri="{FF2B5EF4-FFF2-40B4-BE49-F238E27FC236}">
-                <a16:creationId xmlns:a16="http://schemas.microsoft.com/office/drawing/2014/main" id="{8E6F6A32-5D16-4D22-B398-50AEE1B3288F}"/>
+                <a16:creationId xmlns:a16="http://schemas.microsoft.com/office/drawing/2014/main" id="{3FAD4C1A-2811-466F-AC12-C0650D13994C}"/>
               </a:ext>
             </a:extLst>
           </p:cNvPr>
@@ -8129,7 +8129,7 @@
           <p:cNvPr id="37" name="Shape 35">
             <a:extLst xmlns:a="http://schemas.openxmlformats.org/drawingml/2006/main">
               <a:ext uri="{FF2B5EF4-FFF2-40B4-BE49-F238E27FC236}">
-                <a16:creationId xmlns:a16="http://schemas.microsoft.com/office/drawing/2014/main" id="{07864D2D-CAC1-4F5D-9D8B-2DF701108F7B}"/>
+                <a16:creationId xmlns:a16="http://schemas.microsoft.com/office/drawing/2014/main" id="{FEB9151C-030C-4481-B14D-6ECD395C527D}"/>
               </a:ext>
             </a:extLst>
           </p:cNvPr>
@@ -8162,7 +8162,7 @@
           <p:cNvPr id="38" name="Text 36">
             <a:extLst xmlns:a="http://schemas.openxmlformats.org/drawingml/2006/main">
               <a:ext uri="{FF2B5EF4-FFF2-40B4-BE49-F238E27FC236}">
-                <a16:creationId xmlns:a16="http://schemas.microsoft.com/office/drawing/2014/main" id="{D444FA76-1D7A-44D8-8019-6FF73FEE4AD3}"/>
+                <a16:creationId xmlns:a16="http://schemas.microsoft.com/office/drawing/2014/main" id="{43DBB983-DE4C-463B-8057-B5C5593FB04D}"/>
               </a:ext>
             </a:extLst>
           </p:cNvPr>
@@ -8209,7 +8209,7 @@
           <p:cNvPr id="39" name="Shape 37">
             <a:extLst xmlns:a="http://schemas.openxmlformats.org/drawingml/2006/main">
               <a:ext uri="{FF2B5EF4-FFF2-40B4-BE49-F238E27FC236}">
-                <a16:creationId xmlns:a16="http://schemas.microsoft.com/office/drawing/2014/main" id="{E1343146-C111-4523-A747-30FBB0369865}"/>
+                <a16:creationId xmlns:a16="http://schemas.microsoft.com/office/drawing/2014/main" id="{C203A81A-7491-440F-B53C-6634C221928E}"/>
               </a:ext>
             </a:extLst>
           </p:cNvPr>
@@ -8242,7 +8242,7 @@
           <p:cNvPr id="40" name="Text 38">
             <a:extLst xmlns:a="http://schemas.openxmlformats.org/drawingml/2006/main">
               <a:ext uri="{FF2B5EF4-FFF2-40B4-BE49-F238E27FC236}">
-                <a16:creationId xmlns:a16="http://schemas.microsoft.com/office/drawing/2014/main" id="{576A2197-38F9-41BD-8DEA-B24EE3860635}"/>
+                <a16:creationId xmlns:a16="http://schemas.microsoft.com/office/drawing/2014/main" id="{3A1D9C3B-8A98-4554-8E1B-2B078762F9FA}"/>
               </a:ext>
             </a:extLst>
           </p:cNvPr>
@@ -8289,7 +8289,7 @@
           <p:cNvPr id="41" name="Shape 39">
             <a:extLst xmlns:a="http://schemas.openxmlformats.org/drawingml/2006/main">
               <a:ext uri="{FF2B5EF4-FFF2-40B4-BE49-F238E27FC236}">
-                <a16:creationId xmlns:a16="http://schemas.microsoft.com/office/drawing/2014/main" id="{F223A2BB-5AC4-49F4-938D-3B885F154439}"/>
+                <a16:creationId xmlns:a16="http://schemas.microsoft.com/office/drawing/2014/main" id="{8BCBE16E-AA85-49FD-9B2E-A3657CF9984D}"/>
               </a:ext>
             </a:extLst>
           </p:cNvPr>
@@ -8324,7 +8324,7 @@
           <p:cNvPr id="42" name="Text 40">
             <a:extLst xmlns:a="http://schemas.openxmlformats.org/drawingml/2006/main">
               <a:ext uri="{FF2B5EF4-FFF2-40B4-BE49-F238E27FC236}">
-                <a16:creationId xmlns:a16="http://schemas.microsoft.com/office/drawing/2014/main" id="{7D63D3B8-B962-4A27-AC7C-8490716349EF}"/>
+                <a16:creationId xmlns:a16="http://schemas.microsoft.com/office/drawing/2014/main" id="{C374D4AA-5622-4C57-A608-6AE8520CB4BA}"/>
               </a:ext>
             </a:extLst>
           </p:cNvPr>
@@ -8371,7 +8371,7 @@
           <p:cNvPr id="43" name="Shape 41">
             <a:extLst xmlns:a="http://schemas.openxmlformats.org/drawingml/2006/main">
               <a:ext uri="{FF2B5EF4-FFF2-40B4-BE49-F238E27FC236}">
-                <a16:creationId xmlns:a16="http://schemas.microsoft.com/office/drawing/2014/main" id="{83CB2EBC-7217-4973-9717-48166A9E56FD}"/>
+                <a16:creationId xmlns:a16="http://schemas.microsoft.com/office/drawing/2014/main" id="{B6AC69D4-E7EC-404C-BFB6-8902F362121A}"/>
               </a:ext>
             </a:extLst>
           </p:cNvPr>
@@ -8406,7 +8406,7 @@
           <p:cNvPr id="44" name="Text 42">
             <a:extLst xmlns:a="http://schemas.openxmlformats.org/drawingml/2006/main">
               <a:ext uri="{FF2B5EF4-FFF2-40B4-BE49-F238E27FC236}">
-                <a16:creationId xmlns:a16="http://schemas.microsoft.com/office/drawing/2014/main" id="{CE7CAA29-5C14-4C00-B12A-1D187887D788}"/>
+                <a16:creationId xmlns:a16="http://schemas.microsoft.com/office/drawing/2014/main" id="{AB22707C-A9C9-457C-9176-90005BECBDAE}"/>
               </a:ext>
             </a:extLst>
           </p:cNvPr>
@@ -8453,7 +8453,7 @@
           <p:cNvPr id="45" name="Shape 43">
             <a:extLst xmlns:a="http://schemas.openxmlformats.org/drawingml/2006/main">
               <a:ext uri="{FF2B5EF4-FFF2-40B4-BE49-F238E27FC236}">
-                <a16:creationId xmlns:a16="http://schemas.microsoft.com/office/drawing/2014/main" id="{8A713237-FF54-45C9-9126-29374223902D}"/>
+                <a16:creationId xmlns:a16="http://schemas.microsoft.com/office/drawing/2014/main" id="{4D3D4E8E-B5D2-4447-AA16-5F61F8A2C0C6}"/>
               </a:ext>
             </a:extLst>
           </p:cNvPr>
@@ -8488,7 +8488,7 @@
           <p:cNvPr id="46" name="Text 44">
             <a:extLst xmlns:a="http://schemas.openxmlformats.org/drawingml/2006/main">
               <a:ext uri="{FF2B5EF4-FFF2-40B4-BE49-F238E27FC236}">
-                <a16:creationId xmlns:a16="http://schemas.microsoft.com/office/drawing/2014/main" id="{9E286A9C-247F-4BC7-9008-8EDCE3A0B170}"/>
+                <a16:creationId xmlns:a16="http://schemas.microsoft.com/office/drawing/2014/main" id="{CC286DB0-AEF5-45C0-AE16-B684488156A4}"/>
               </a:ext>
             </a:extLst>
           </p:cNvPr>
@@ -8535,7 +8535,7 @@
           <p:cNvPr id="47" name="Text 45">
             <a:extLst xmlns:a="http://schemas.openxmlformats.org/drawingml/2006/main">
               <a:ext uri="{FF2B5EF4-FFF2-40B4-BE49-F238E27FC236}">
-                <a16:creationId xmlns:a16="http://schemas.microsoft.com/office/drawing/2014/main" id="{47505E09-83A4-4E87-9B3A-7D09B1384720}"/>
+                <a16:creationId xmlns:a16="http://schemas.microsoft.com/office/drawing/2014/main" id="{1D596C21-F824-4168-9D66-2735530532E5}"/>
               </a:ext>
             </a:extLst>
           </p:cNvPr>
@@ -8582,7 +8582,7 @@
           <p:cNvPr id="48" name="Text 46">
             <a:extLst xmlns:a="http://schemas.openxmlformats.org/drawingml/2006/main">
               <a:ext uri="{FF2B5EF4-FFF2-40B4-BE49-F238E27FC236}">
-                <a16:creationId xmlns:a16="http://schemas.microsoft.com/office/drawing/2014/main" id="{A28D68E5-45A1-4E8D-ADCD-64C9BFBEF8D5}"/>
+                <a16:creationId xmlns:a16="http://schemas.microsoft.com/office/drawing/2014/main" id="{7E24EE53-DEDC-4B29-AD50-F562427B4646}"/>
               </a:ext>
             </a:extLst>
           </p:cNvPr>
@@ -8627,7 +8627,7 @@
     </p:spTree>
     <p:extLst>
       <p:ext uri="{BB962C8B-B14F-4D97-AF65-F5344CB8AC3E}">
-        <p14:creationId xmlns:p14="http://schemas.microsoft.com/office/powerpoint/2010/main" val="1680045924"/>
+        <p14:creationId xmlns:p14="http://schemas.microsoft.com/office/powerpoint/2010/main" val="475272914"/>
       </p:ext>
     </p:extLst>
   </p:cSld>
@@ -8658,7 +8658,7 @@
           <p:cNvPr id="2" name="Text 0">
             <a:extLst xmlns:a="http://schemas.openxmlformats.org/drawingml/2006/main">
               <a:ext uri="{FF2B5EF4-FFF2-40B4-BE49-F238E27FC236}">
-                <a16:creationId xmlns:a16="http://schemas.microsoft.com/office/drawing/2014/main" id="{E7579306-6A0B-4EC0-B6FC-8F6CBB273DB7}"/>
+                <a16:creationId xmlns:a16="http://schemas.microsoft.com/office/drawing/2014/main" id="{78E0D5EC-F64F-4283-B78C-23FFBB1835F5}"/>
               </a:ext>
             </a:extLst>
           </p:cNvPr>
@@ -8705,7 +8705,7 @@
           <p:cNvPr id="3" name="Text 1">
             <a:extLst xmlns:a="http://schemas.openxmlformats.org/drawingml/2006/main">
               <a:ext uri="{FF2B5EF4-FFF2-40B4-BE49-F238E27FC236}">
-                <a16:creationId xmlns:a16="http://schemas.microsoft.com/office/drawing/2014/main" id="{AACE9AAF-3356-4AAA-AB0B-B3CE7BFFED48}"/>
+                <a16:creationId xmlns:a16="http://schemas.microsoft.com/office/drawing/2014/main" id="{E37AD1C4-2ECB-4F6C-8F76-24B63601DAC6}"/>
               </a:ext>
             </a:extLst>
           </p:cNvPr>
@@ -8752,7 +8752,7 @@
           <p:cNvPr id="4" name="Shape 2">
             <a:extLst xmlns:a="http://schemas.openxmlformats.org/drawingml/2006/main">
               <a:ext uri="{FF2B5EF4-FFF2-40B4-BE49-F238E27FC236}">
-                <a16:creationId xmlns:a16="http://schemas.microsoft.com/office/drawing/2014/main" id="{5A7BF7CD-24F1-4A14-8349-87223062C672}"/>
+                <a16:creationId xmlns:a16="http://schemas.microsoft.com/office/drawing/2014/main" id="{FC373B7B-0ECA-4D7C-8E47-D2F800B18224}"/>
               </a:ext>
             </a:extLst>
           </p:cNvPr>
@@ -8787,7 +8787,7 @@
           <p:cNvPr id="5" name="Text 3">
             <a:extLst xmlns:a="http://schemas.openxmlformats.org/drawingml/2006/main">
               <a:ext uri="{FF2B5EF4-FFF2-40B4-BE49-F238E27FC236}">
-                <a16:creationId xmlns:a16="http://schemas.microsoft.com/office/drawing/2014/main" id="{4108F707-AE65-41F7-82F0-3DE10D92ABE8}"/>
+                <a16:creationId xmlns:a16="http://schemas.microsoft.com/office/drawing/2014/main" id="{C4783DC4-E6B1-4EF6-BAE9-797F45A5570B}"/>
               </a:ext>
             </a:extLst>
           </p:cNvPr>
@@ -8834,7 +8834,7 @@
           <p:cNvPr id="6" name="Shape 4">
             <a:extLst xmlns:a="http://schemas.openxmlformats.org/drawingml/2006/main">
               <a:ext uri="{FF2B5EF4-FFF2-40B4-BE49-F238E27FC236}">
-                <a16:creationId xmlns:a16="http://schemas.microsoft.com/office/drawing/2014/main" id="{417117BC-D956-4DFF-AB83-6650815D6210}"/>
+                <a16:creationId xmlns:a16="http://schemas.microsoft.com/office/drawing/2014/main" id="{0A289F4B-733B-4A8F-B141-1FD6BCC96F25}"/>
               </a:ext>
             </a:extLst>
           </p:cNvPr>
@@ -8865,7 +8865,7 @@
           <p:cNvPr id="7" name="Shape 5">
             <a:extLst xmlns:a="http://schemas.openxmlformats.org/drawingml/2006/main">
               <a:ext uri="{FF2B5EF4-FFF2-40B4-BE49-F238E27FC236}">
-                <a16:creationId xmlns:a16="http://schemas.microsoft.com/office/drawing/2014/main" id="{72F756E6-2DFA-4EB8-9576-F81C956A34D9}"/>
+                <a16:creationId xmlns:a16="http://schemas.microsoft.com/office/drawing/2014/main" id="{E9A9B220-D629-4B19-8FF5-C7917CB1F54C}"/>
               </a:ext>
             </a:extLst>
           </p:cNvPr>
@@ -8900,7 +8900,7 @@
           <p:cNvPr id="8" name="Shape 6">
             <a:extLst xmlns:a="http://schemas.openxmlformats.org/drawingml/2006/main">
               <a:ext uri="{FF2B5EF4-FFF2-40B4-BE49-F238E27FC236}">
-                <a16:creationId xmlns:a16="http://schemas.microsoft.com/office/drawing/2014/main" id="{AEE8CD0C-C715-45C9-A0DE-0D063FCDC50D}"/>
+                <a16:creationId xmlns:a16="http://schemas.microsoft.com/office/drawing/2014/main" id="{42025334-E3A9-48E3-BF7E-7A9E26566C66}"/>
               </a:ext>
             </a:extLst>
           </p:cNvPr>
@@ -8935,7 +8935,7 @@
           <p:cNvPr id="9" name="Text 7">
             <a:extLst xmlns:a="http://schemas.openxmlformats.org/drawingml/2006/main">
               <a:ext uri="{FF2B5EF4-FFF2-40B4-BE49-F238E27FC236}">
-                <a16:creationId xmlns:a16="http://schemas.microsoft.com/office/drawing/2014/main" id="{AADC5556-CC2D-4DAD-821F-66BD8CDCC663}"/>
+                <a16:creationId xmlns:a16="http://schemas.microsoft.com/office/drawing/2014/main" id="{1463CDF5-9C1D-4E21-AE38-4D15943AC34A}"/>
               </a:ext>
             </a:extLst>
           </p:cNvPr>
@@ -8982,7 +8982,7 @@
           <p:cNvPr id="10" name="Text 8">
             <a:extLst xmlns:a="http://schemas.openxmlformats.org/drawingml/2006/main">
               <a:ext uri="{FF2B5EF4-FFF2-40B4-BE49-F238E27FC236}">
-                <a16:creationId xmlns:a16="http://schemas.microsoft.com/office/drawing/2014/main" id="{319BD611-0D10-4860-9D95-44B32406A161}"/>
+                <a16:creationId xmlns:a16="http://schemas.microsoft.com/office/drawing/2014/main" id="{C60E79BC-FB92-44D5-B466-2878ABFA0D54}"/>
               </a:ext>
             </a:extLst>
           </p:cNvPr>
@@ -9029,7 +9029,7 @@
           <p:cNvPr id="11" name="Shape 9">
             <a:extLst xmlns:a="http://schemas.openxmlformats.org/drawingml/2006/main">
               <a:ext uri="{FF2B5EF4-FFF2-40B4-BE49-F238E27FC236}">
-                <a16:creationId xmlns:a16="http://schemas.microsoft.com/office/drawing/2014/main" id="{922C29D9-C037-4872-A29A-332FDEBDA7C0}"/>
+                <a16:creationId xmlns:a16="http://schemas.microsoft.com/office/drawing/2014/main" id="{B6B2FB3B-5061-40AC-9F63-A0B047CC32D0}"/>
               </a:ext>
             </a:extLst>
           </p:cNvPr>
@@ -9064,7 +9064,7 @@
           <p:cNvPr id="12" name="Text 10">
             <a:extLst xmlns:a="http://schemas.openxmlformats.org/drawingml/2006/main">
               <a:ext uri="{FF2B5EF4-FFF2-40B4-BE49-F238E27FC236}">
-                <a16:creationId xmlns:a16="http://schemas.microsoft.com/office/drawing/2014/main" id="{23C47017-5099-4FFA-8B65-59454DDF50DC}"/>
+                <a16:creationId xmlns:a16="http://schemas.microsoft.com/office/drawing/2014/main" id="{3FCB2DD4-0F60-4AC4-AADA-FE365E855B98}"/>
               </a:ext>
             </a:extLst>
           </p:cNvPr>
@@ -9111,7 +9111,7 @@
           <p:cNvPr id="13" name="Text 11">
             <a:extLst xmlns:a="http://schemas.openxmlformats.org/drawingml/2006/main">
               <a:ext uri="{FF2B5EF4-FFF2-40B4-BE49-F238E27FC236}">
-                <a16:creationId xmlns:a16="http://schemas.microsoft.com/office/drawing/2014/main" id="{D68F778B-A763-4678-B994-CEF58BC0DA37}"/>
+                <a16:creationId xmlns:a16="http://schemas.microsoft.com/office/drawing/2014/main" id="{142E0B4B-F59C-4DBD-8A17-CD3153FB1080}"/>
               </a:ext>
             </a:extLst>
           </p:cNvPr>
@@ -9158,7 +9158,7 @@
           <p:cNvPr id="14" name="Shape 12">
             <a:extLst xmlns:a="http://schemas.openxmlformats.org/drawingml/2006/main">
               <a:ext uri="{FF2B5EF4-FFF2-40B4-BE49-F238E27FC236}">
-                <a16:creationId xmlns:a16="http://schemas.microsoft.com/office/drawing/2014/main" id="{43C50399-52FF-43B3-82C7-DE3502C0067B}"/>
+                <a16:creationId xmlns:a16="http://schemas.microsoft.com/office/drawing/2014/main" id="{38E9EE4F-35B0-45FE-A0AD-EF7019338E28}"/>
               </a:ext>
             </a:extLst>
           </p:cNvPr>
@@ -9193,7 +9193,7 @@
           <p:cNvPr id="15" name="Text 13">
             <a:extLst xmlns:a="http://schemas.openxmlformats.org/drawingml/2006/main">
               <a:ext uri="{FF2B5EF4-FFF2-40B4-BE49-F238E27FC236}">
-                <a16:creationId xmlns:a16="http://schemas.microsoft.com/office/drawing/2014/main" id="{2DA47522-D452-47F5-90EE-FF069337E143}"/>
+                <a16:creationId xmlns:a16="http://schemas.microsoft.com/office/drawing/2014/main" id="{D853217D-D9B1-4741-A359-144F0E9CDC73}"/>
               </a:ext>
             </a:extLst>
           </p:cNvPr>
@@ -9240,7 +9240,7 @@
           <p:cNvPr id="16" name="Text 14">
             <a:extLst xmlns:a="http://schemas.openxmlformats.org/drawingml/2006/main">
               <a:ext uri="{FF2B5EF4-FFF2-40B4-BE49-F238E27FC236}">
-                <a16:creationId xmlns:a16="http://schemas.microsoft.com/office/drawing/2014/main" id="{819F725A-A6FA-4FF7-ABAB-B8BF8FC04CA5}"/>
+                <a16:creationId xmlns:a16="http://schemas.microsoft.com/office/drawing/2014/main" id="{5F3347BA-B35C-4057-9E52-B5AEF48AE778}"/>
               </a:ext>
             </a:extLst>
           </p:cNvPr>
@@ -9287,7 +9287,7 @@
           <p:cNvPr id="17" name="Shape 15">
             <a:extLst xmlns:a="http://schemas.openxmlformats.org/drawingml/2006/main">
               <a:ext uri="{FF2B5EF4-FFF2-40B4-BE49-F238E27FC236}">
-                <a16:creationId xmlns:a16="http://schemas.microsoft.com/office/drawing/2014/main" id="{EDC71A7A-EFC9-4667-BCA8-1F01793F7337}"/>
+                <a16:creationId xmlns:a16="http://schemas.microsoft.com/office/drawing/2014/main" id="{504184B2-8160-423E-B1E5-9CE88605695B}"/>
               </a:ext>
             </a:extLst>
           </p:cNvPr>
@@ -9322,7 +9322,7 @@
           <p:cNvPr id="18" name="Text 16">
             <a:extLst xmlns:a="http://schemas.openxmlformats.org/drawingml/2006/main">
               <a:ext uri="{FF2B5EF4-FFF2-40B4-BE49-F238E27FC236}">
-                <a16:creationId xmlns:a16="http://schemas.microsoft.com/office/drawing/2014/main" id="{1AFF7F6A-0F34-4374-A3AC-BC5BF31455AA}"/>
+                <a16:creationId xmlns:a16="http://schemas.microsoft.com/office/drawing/2014/main" id="{1754F4EA-4612-40EA-8F7E-8119D4C5D21F}"/>
               </a:ext>
             </a:extLst>
           </p:cNvPr>
@@ -9369,7 +9369,7 @@
           <p:cNvPr id="19" name="Text 17">
             <a:extLst xmlns:a="http://schemas.openxmlformats.org/drawingml/2006/main">
               <a:ext uri="{FF2B5EF4-FFF2-40B4-BE49-F238E27FC236}">
-                <a16:creationId xmlns:a16="http://schemas.microsoft.com/office/drawing/2014/main" id="{34807926-5336-4BB4-A846-5F68A2FCB450}"/>
+                <a16:creationId xmlns:a16="http://schemas.microsoft.com/office/drawing/2014/main" id="{124B977D-57A0-46C6-8244-1F3D1C5C5EF5}"/>
               </a:ext>
             </a:extLst>
           </p:cNvPr>
@@ -9416,7 +9416,7 @@
           <p:cNvPr id="20" name="Shape 18">
             <a:extLst xmlns:a="http://schemas.openxmlformats.org/drawingml/2006/main">
               <a:ext uri="{FF2B5EF4-FFF2-40B4-BE49-F238E27FC236}">
-                <a16:creationId xmlns:a16="http://schemas.microsoft.com/office/drawing/2014/main" id="{031FADEC-2D27-4EC5-A1C3-B917F9D8FCA8}"/>
+                <a16:creationId xmlns:a16="http://schemas.microsoft.com/office/drawing/2014/main" id="{C1F8BE5E-AA36-444B-9D98-E289B6355617}"/>
               </a:ext>
             </a:extLst>
           </p:cNvPr>
@@ -9448,7 +9448,7 @@
           <p:cNvPr id="21" name="Shape 19">
             <a:extLst xmlns:a="http://schemas.openxmlformats.org/drawingml/2006/main">
               <a:ext uri="{FF2B5EF4-FFF2-40B4-BE49-F238E27FC236}">
-                <a16:creationId xmlns:a16="http://schemas.microsoft.com/office/drawing/2014/main" id="{E0DB1F4A-E4E5-4561-9B45-F562F574CA77}"/>
+                <a16:creationId xmlns:a16="http://schemas.microsoft.com/office/drawing/2014/main" id="{24877E7D-726C-46A9-ADBE-EAE1663C5838}"/>
               </a:ext>
             </a:extLst>
           </p:cNvPr>
@@ -9480,7 +9480,7 @@
           <p:cNvPr id="22" name="Shape 20">
             <a:extLst xmlns:a="http://schemas.openxmlformats.org/drawingml/2006/main">
               <a:ext uri="{FF2B5EF4-FFF2-40B4-BE49-F238E27FC236}">
-                <a16:creationId xmlns:a16="http://schemas.microsoft.com/office/drawing/2014/main" id="{4E968AE8-2E8B-459D-8866-BC4FC843BB9A}"/>
+                <a16:creationId xmlns:a16="http://schemas.microsoft.com/office/drawing/2014/main" id="{EA53FE95-1389-4381-B55B-882EE6172441}"/>
               </a:ext>
             </a:extLst>
           </p:cNvPr>
@@ -9512,7 +9512,7 @@
           <p:cNvPr id="23" name="Shape 21">
             <a:extLst xmlns:a="http://schemas.openxmlformats.org/drawingml/2006/main">
               <a:ext uri="{FF2B5EF4-FFF2-40B4-BE49-F238E27FC236}">
-                <a16:creationId xmlns:a16="http://schemas.microsoft.com/office/drawing/2014/main" id="{C9B91ACB-BACC-43C1-AAA7-AA37BFAEC10D}"/>
+                <a16:creationId xmlns:a16="http://schemas.microsoft.com/office/drawing/2014/main" id="{476E8425-A379-4C97-8A80-3045437D75EB}"/>
               </a:ext>
             </a:extLst>
           </p:cNvPr>
@@ -9544,19 +9544,19 @@
           <p:cNvPr id="24" name="Shape 22">
             <a:extLst xmlns:a="http://schemas.openxmlformats.org/drawingml/2006/main">
               <a:ext uri="{FF2B5EF4-FFF2-40B4-BE49-F238E27FC236}">
-                <a16:creationId xmlns:a16="http://schemas.microsoft.com/office/drawing/2014/main" id="{C7C75F9F-008A-4A0E-B5D7-9E15563AAB57}"/>
-              </a:ext>
-            </a:extLst>
-          </p:cNvPr>
-          <p:cNvSpPr>
-            <a:spLocks xmlns:a="http://schemas.openxmlformats.org/drawingml/2006/main" noGrp="1"/>
-          </p:cNvSpPr>
-          <p:nvPr/>
-        </p:nvSpPr>
-        <p:spPr>
-          <a:xfrm xmlns:a="http://schemas.openxmlformats.org/drawingml/2006/main">
-            <a:off x="2395728" y="3145536"/>
-            <a:ext cx="3822192" cy="640080"/>
+                <a16:creationId xmlns:a16="http://schemas.microsoft.com/office/drawing/2014/main" id="{F2E8C6B0-8329-45B0-871D-9F142EDD87BE}"/>
+              </a:ext>
+            </a:extLst>
+          </p:cNvPr>
+          <p:cNvSpPr>
+            <a:spLocks xmlns:a="http://schemas.openxmlformats.org/drawingml/2006/main" noGrp="1"/>
+          </p:cNvSpPr>
+          <p:nvPr/>
+        </p:nvSpPr>
+        <p:spPr>
+          <a:xfrm xmlns:a="http://schemas.openxmlformats.org/drawingml/2006/main">
+            <a:off x="2743200" y="3145536"/>
+            <a:ext cx="2606040" cy="640080"/>
           </a:xfrm>
           <a:prstGeom xmlns:a="http://schemas.openxmlformats.org/drawingml/2006/main" prst="roundRect">
             <a:avLst>
@@ -9579,28 +9579,28 @@
           <p:cNvPr id="25" name="Text 23">
             <a:extLst xmlns:a="http://schemas.openxmlformats.org/drawingml/2006/main">
               <a:ext uri="{FF2B5EF4-FFF2-40B4-BE49-F238E27FC236}">
-                <a16:creationId xmlns:a16="http://schemas.microsoft.com/office/drawing/2014/main" id="{7AAF42E2-B2E9-4990-80D3-393CE5628A14}"/>
-              </a:ext>
-            </a:extLst>
-          </p:cNvPr>
-          <p:cNvSpPr>
-            <a:spLocks xmlns:a="http://schemas.openxmlformats.org/drawingml/2006/main" noGrp="1"/>
-          </p:cNvSpPr>
-          <p:nvPr/>
-        </p:nvSpPr>
-        <p:spPr>
-          <a:xfrm xmlns:a="http://schemas.openxmlformats.org/drawingml/2006/main">
-            <a:off x="2615184" y="3255264"/>
-            <a:ext cx="3383280" cy="384048"/>
-          </a:xfrm>
-          <a:prstGeom xmlns:a="http://schemas.openxmlformats.org/drawingml/2006/main" prst="rect">
-            <a:avLst/>
-          </a:prstGeom>
-          <a:noFill xmlns:a="http://schemas.openxmlformats.org/drawingml/2006/main"/>
-        </p:spPr>
-        <p:txBody>
-          <a:bodyPr xmlns:a="http://schemas.openxmlformats.org/drawingml/2006/main" wrap="square" lIns="0" tIns="0" rIns="0" bIns="0" anchor="ctr">
-            <a:normAutofit/>
+                <a16:creationId xmlns:a16="http://schemas.microsoft.com/office/drawing/2014/main" id="{A819DC96-EFD8-4F36-9EB6-E0AAA20A9EAC}"/>
+              </a:ext>
+            </a:extLst>
+          </p:cNvPr>
+          <p:cNvSpPr>
+            <a:spLocks xmlns:a="http://schemas.openxmlformats.org/drawingml/2006/main" noGrp="1"/>
+          </p:cNvSpPr>
+          <p:nvPr/>
+        </p:nvSpPr>
+        <p:spPr>
+          <a:xfrm xmlns:a="http://schemas.openxmlformats.org/drawingml/2006/main">
+            <a:off x="2871216" y="3236976"/>
+            <a:ext cx="2350008" cy="420624"/>
+          </a:xfrm>
+          <a:prstGeom xmlns:a="http://schemas.openxmlformats.org/drawingml/2006/main" prst="rect">
+            <a:avLst/>
+          </a:prstGeom>
+          <a:noFill xmlns:a="http://schemas.openxmlformats.org/drawingml/2006/main"/>
+        </p:spPr>
+        <p:txBody>
+          <a:bodyPr xmlns:a="http://schemas.openxmlformats.org/drawingml/2006/main" wrap="square" lIns="0" tIns="0" rIns="0" bIns="0" anchor="ctr">
+            <a:normAutofit fontScale="100000"/>
           </a:bodyPr>
           <a:lstStyle xmlns:a="http://schemas.openxmlformats.org/drawingml/2006/main"/>
           <a:p xmlns:a="http://schemas.openxmlformats.org/drawingml/2006/main">
@@ -9616,7 +9616,7 @@
                 <a:ea typeface="PingFang SC"/>
                 <a:cs typeface="PingFang SC"/>
               </a:rPr>
-              <a:t>验证门：结果一致性 · 文件存在性 · 测试与运行证据</a:t>
+              <a:t>验证门：结果一致 · 文件存在 · 测试/运行证据</a:t>
             </a:r>
           </a:p>
         </p:txBody>
@@ -9626,7 +9626,7 @@
           <p:cNvPr id="26" name="Shape 24">
             <a:extLst xmlns:a="http://schemas.openxmlformats.org/drawingml/2006/main">
               <a:ext uri="{FF2B5EF4-FFF2-40B4-BE49-F238E27FC236}">
-                <a16:creationId xmlns:a16="http://schemas.microsoft.com/office/drawing/2014/main" id="{524DF2D4-3CFB-469A-A8B5-75F99201FCB1}"/>
+                <a16:creationId xmlns:a16="http://schemas.microsoft.com/office/drawing/2014/main" id="{9EA5F593-0094-4B1F-B883-9A15A9885B75}"/>
               </a:ext>
             </a:extLst>
           </p:cNvPr>
@@ -9661,7 +9661,7 @@
           <p:cNvPr id="27" name="Text 25">
             <a:extLst xmlns:a="http://schemas.openxmlformats.org/drawingml/2006/main">
               <a:ext uri="{FF2B5EF4-FFF2-40B4-BE49-F238E27FC236}">
-                <a16:creationId xmlns:a16="http://schemas.microsoft.com/office/drawing/2014/main" id="{1D95D396-0E16-4E5B-A047-3DEC77DBF5B0}"/>
+                <a16:creationId xmlns:a16="http://schemas.microsoft.com/office/drawing/2014/main" id="{7447E664-C305-4C4A-AFEE-CB319C74C323}"/>
               </a:ext>
             </a:extLst>
           </p:cNvPr>
@@ -9708,7 +9708,7 @@
           <p:cNvPr id="28" name="Shape 26">
             <a:extLst xmlns:a="http://schemas.openxmlformats.org/drawingml/2006/main">
               <a:ext uri="{FF2B5EF4-FFF2-40B4-BE49-F238E27FC236}">
-                <a16:creationId xmlns:a16="http://schemas.microsoft.com/office/drawing/2014/main" id="{5DBADFF8-D879-42FB-827D-A428311CC376}"/>
+                <a16:creationId xmlns:a16="http://schemas.microsoft.com/office/drawing/2014/main" id="{3C396C08-D042-4932-9053-A8526DD4C7C5}"/>
               </a:ext>
             </a:extLst>
           </p:cNvPr>
@@ -9741,7 +9741,7 @@
           <p:cNvPr id="29" name="Text 27">
             <a:extLst xmlns:a="http://schemas.openxmlformats.org/drawingml/2006/main">
               <a:ext uri="{FF2B5EF4-FFF2-40B4-BE49-F238E27FC236}">
-                <a16:creationId xmlns:a16="http://schemas.microsoft.com/office/drawing/2014/main" id="{D7EC79D5-96E8-47F1-ADDE-189FD818A0FC}"/>
+                <a16:creationId xmlns:a16="http://schemas.microsoft.com/office/drawing/2014/main" id="{8F040921-1EA8-4B11-A98D-CADF8918B644}"/>
               </a:ext>
             </a:extLst>
           </p:cNvPr>
@@ -9788,7 +9788,7 @@
           <p:cNvPr id="30" name="Shape 28">
             <a:extLst xmlns:a="http://schemas.openxmlformats.org/drawingml/2006/main">
               <a:ext uri="{FF2B5EF4-FFF2-40B4-BE49-F238E27FC236}">
-                <a16:creationId xmlns:a16="http://schemas.microsoft.com/office/drawing/2014/main" id="{7D7B0B76-A825-4FDB-B324-D827740A4249}"/>
+                <a16:creationId xmlns:a16="http://schemas.microsoft.com/office/drawing/2014/main" id="{E106C4BC-B9F7-42E2-8899-03B5B231008F}"/>
               </a:ext>
             </a:extLst>
           </p:cNvPr>
@@ -9821,7 +9821,7 @@
           <p:cNvPr id="31" name="Text 29">
             <a:extLst xmlns:a="http://schemas.openxmlformats.org/drawingml/2006/main">
               <a:ext uri="{FF2B5EF4-FFF2-40B4-BE49-F238E27FC236}">
-                <a16:creationId xmlns:a16="http://schemas.microsoft.com/office/drawing/2014/main" id="{7F5690AA-4F89-444D-BA24-5B06A3C3725B}"/>
+                <a16:creationId xmlns:a16="http://schemas.microsoft.com/office/drawing/2014/main" id="{27382588-A26A-42FF-88CF-85D7E71B27FC}"/>
               </a:ext>
             </a:extLst>
           </p:cNvPr>
@@ -9868,7 +9868,7 @@
           <p:cNvPr id="32" name="Shape 30">
             <a:extLst xmlns:a="http://schemas.openxmlformats.org/drawingml/2006/main">
               <a:ext uri="{FF2B5EF4-FFF2-40B4-BE49-F238E27FC236}">
-                <a16:creationId xmlns:a16="http://schemas.microsoft.com/office/drawing/2014/main" id="{D84BC92B-F830-4C4C-A4AF-BF6F4280B44F}"/>
+                <a16:creationId xmlns:a16="http://schemas.microsoft.com/office/drawing/2014/main" id="{1F732167-1C2D-4FF9-8249-DA3CB4B2099F}"/>
               </a:ext>
             </a:extLst>
           </p:cNvPr>
@@ -9901,7 +9901,7 @@
           <p:cNvPr id="33" name="Text 31">
             <a:extLst xmlns:a="http://schemas.openxmlformats.org/drawingml/2006/main">
               <a:ext uri="{FF2B5EF4-FFF2-40B4-BE49-F238E27FC236}">
-                <a16:creationId xmlns:a16="http://schemas.microsoft.com/office/drawing/2014/main" id="{966AA021-280A-4673-82FB-74A4CCDD48EB}"/>
+                <a16:creationId xmlns:a16="http://schemas.microsoft.com/office/drawing/2014/main" id="{621136A2-1EF5-451B-9248-8E7559BC2BAE}"/>
               </a:ext>
             </a:extLst>
           </p:cNvPr>
@@ -9948,7 +9948,7 @@
           <p:cNvPr id="34" name="Shape 32">
             <a:extLst xmlns:a="http://schemas.openxmlformats.org/drawingml/2006/main">
               <a:ext uri="{FF2B5EF4-FFF2-40B4-BE49-F238E27FC236}">
-                <a16:creationId xmlns:a16="http://schemas.microsoft.com/office/drawing/2014/main" id="{13981144-D49A-4BF3-BD60-6309C8F597C5}"/>
+                <a16:creationId xmlns:a16="http://schemas.microsoft.com/office/drawing/2014/main" id="{3F6B9110-5887-44B6-9AF7-A66317F5F5E4}"/>
               </a:ext>
             </a:extLst>
           </p:cNvPr>
@@ -9981,7 +9981,7 @@
           <p:cNvPr id="35" name="Text 33">
             <a:extLst xmlns:a="http://schemas.openxmlformats.org/drawingml/2006/main">
               <a:ext uri="{FF2B5EF4-FFF2-40B4-BE49-F238E27FC236}">
-                <a16:creationId xmlns:a16="http://schemas.microsoft.com/office/drawing/2014/main" id="{5C24F05D-9F5D-4361-B925-1122C1608C0D}"/>
+                <a16:creationId xmlns:a16="http://schemas.microsoft.com/office/drawing/2014/main" id="{286CC73B-438D-42C0-8CAF-D0AC45ECD2EC}"/>
               </a:ext>
             </a:extLst>
           </p:cNvPr>
@@ -10028,7 +10028,7 @@
           <p:cNvPr id="36" name="Shape 34">
             <a:extLst xmlns:a="http://schemas.openxmlformats.org/drawingml/2006/main">
               <a:ext uri="{FF2B5EF4-FFF2-40B4-BE49-F238E27FC236}">
-                <a16:creationId xmlns:a16="http://schemas.microsoft.com/office/drawing/2014/main" id="{EB946F4C-3F90-4CCC-9E64-70AAEB14E74A}"/>
+                <a16:creationId xmlns:a16="http://schemas.microsoft.com/office/drawing/2014/main" id="{C0826EBC-0D25-4B73-A4BE-36BFE53FC97B}"/>
               </a:ext>
             </a:extLst>
           </p:cNvPr>
@@ -10061,7 +10061,7 @@
           <p:cNvPr id="37" name="Text 35">
             <a:extLst xmlns:a="http://schemas.openxmlformats.org/drawingml/2006/main">
               <a:ext uri="{FF2B5EF4-FFF2-40B4-BE49-F238E27FC236}">
-                <a16:creationId xmlns:a16="http://schemas.microsoft.com/office/drawing/2014/main" id="{3CC300FD-7AD2-480B-BA6B-6B477036BE79}"/>
+                <a16:creationId xmlns:a16="http://schemas.microsoft.com/office/drawing/2014/main" id="{E703ADBE-6124-4880-9F11-66283812DCFD}"/>
               </a:ext>
             </a:extLst>
           </p:cNvPr>
@@ -10108,7 +10108,7 @@
           <p:cNvPr id="38" name="Shape 36">
             <a:extLst xmlns:a="http://schemas.openxmlformats.org/drawingml/2006/main">
               <a:ext uri="{FF2B5EF4-FFF2-40B4-BE49-F238E27FC236}">
-                <a16:creationId xmlns:a16="http://schemas.microsoft.com/office/drawing/2014/main" id="{31942984-BC30-4A6C-8F6D-DAD37B1F9992}"/>
+                <a16:creationId xmlns:a16="http://schemas.microsoft.com/office/drawing/2014/main" id="{7E92567B-9EEC-4624-B240-18BB85A18600}"/>
               </a:ext>
             </a:extLst>
           </p:cNvPr>
@@ -10141,7 +10141,7 @@
           <p:cNvPr id="39" name="Text 37">
             <a:extLst xmlns:a="http://schemas.openxmlformats.org/drawingml/2006/main">
               <a:ext uri="{FF2B5EF4-FFF2-40B4-BE49-F238E27FC236}">
-                <a16:creationId xmlns:a16="http://schemas.microsoft.com/office/drawing/2014/main" id="{D022EB2A-9FB6-4E5E-A46A-0164B4B11007}"/>
+                <a16:creationId xmlns:a16="http://schemas.microsoft.com/office/drawing/2014/main" id="{9949D8B7-2916-41C1-80BC-D9771A964E39}"/>
               </a:ext>
             </a:extLst>
           </p:cNvPr>
@@ -10188,7 +10188,7 @@
           <p:cNvPr id="40" name="Text 38">
             <a:extLst xmlns:a="http://schemas.openxmlformats.org/drawingml/2006/main">
               <a:ext uri="{FF2B5EF4-FFF2-40B4-BE49-F238E27FC236}">
-                <a16:creationId xmlns:a16="http://schemas.microsoft.com/office/drawing/2014/main" id="{BCD2957E-0A81-4846-BCBC-0B0D05BABE4E}"/>
+                <a16:creationId xmlns:a16="http://schemas.microsoft.com/office/drawing/2014/main" id="{D75DE2BC-F2CF-4D77-A12F-F8764D38199C}"/>
               </a:ext>
             </a:extLst>
           </p:cNvPr>
@@ -10235,7 +10235,7 @@
           <p:cNvPr id="41" name="Text 39">
             <a:extLst xmlns:a="http://schemas.openxmlformats.org/drawingml/2006/main">
               <a:ext uri="{FF2B5EF4-FFF2-40B4-BE49-F238E27FC236}">
-                <a16:creationId xmlns:a16="http://schemas.microsoft.com/office/drawing/2014/main" id="{46DFD2EA-F3C3-4A46-A16F-40AC7FCEBD65}"/>
+                <a16:creationId xmlns:a16="http://schemas.microsoft.com/office/drawing/2014/main" id="{80F5C95B-D3AC-4604-BD67-5D567733CF12}"/>
               </a:ext>
             </a:extLst>
           </p:cNvPr>
@@ -10280,7 +10280,7 @@
     </p:spTree>
     <p:extLst>
       <p:ext uri="{BB962C8B-B14F-4D97-AF65-F5344CB8AC3E}">
-        <p14:creationId xmlns:p14="http://schemas.microsoft.com/office/powerpoint/2010/main" val="974626401"/>
+        <p14:creationId xmlns:p14="http://schemas.microsoft.com/office/powerpoint/2010/main" val="1037480407"/>
       </p:ext>
     </p:extLst>
   </p:cSld>
@@ -10311,7 +10311,7 @@
           <p:cNvPr id="2" name="Text 0">
             <a:extLst xmlns:a="http://schemas.openxmlformats.org/drawingml/2006/main">
               <a:ext uri="{FF2B5EF4-FFF2-40B4-BE49-F238E27FC236}">
-                <a16:creationId xmlns:a16="http://schemas.microsoft.com/office/drawing/2014/main" id="{96B610F2-2058-4340-860C-348F9398CF4E}"/>
+                <a16:creationId xmlns:a16="http://schemas.microsoft.com/office/drawing/2014/main" id="{CED09F32-73FC-4C39-B8EA-6E6AA7B74BDF}"/>
               </a:ext>
             </a:extLst>
           </p:cNvPr>
@@ -10358,7 +10358,7 @@
           <p:cNvPr id="3" name="Text 1">
             <a:extLst xmlns:a="http://schemas.openxmlformats.org/drawingml/2006/main">
               <a:ext uri="{FF2B5EF4-FFF2-40B4-BE49-F238E27FC236}">
-                <a16:creationId xmlns:a16="http://schemas.microsoft.com/office/drawing/2014/main" id="{3F522D4C-A4A3-45D9-BF49-20E7F13DAF01}"/>
+                <a16:creationId xmlns:a16="http://schemas.microsoft.com/office/drawing/2014/main" id="{3ACBDE67-2681-48D5-AE20-B5CEFB383937}"/>
               </a:ext>
             </a:extLst>
           </p:cNvPr>
@@ -10405,7 +10405,7 @@
           <p:cNvPr id="4" name="Shape 2">
             <a:extLst xmlns:a="http://schemas.openxmlformats.org/drawingml/2006/main">
               <a:ext uri="{FF2B5EF4-FFF2-40B4-BE49-F238E27FC236}">
-                <a16:creationId xmlns:a16="http://schemas.microsoft.com/office/drawing/2014/main" id="{8A48E91B-1D66-40F2-9D2A-7C0E7DEDA762}"/>
+                <a16:creationId xmlns:a16="http://schemas.microsoft.com/office/drawing/2014/main" id="{A25086F5-ADDE-40AF-A750-100C2272A652}"/>
               </a:ext>
             </a:extLst>
           </p:cNvPr>
@@ -10440,7 +10440,7 @@
           <p:cNvPr id="5" name="Text 3">
             <a:extLst xmlns:a="http://schemas.openxmlformats.org/drawingml/2006/main">
               <a:ext uri="{FF2B5EF4-FFF2-40B4-BE49-F238E27FC236}">
-                <a16:creationId xmlns:a16="http://schemas.microsoft.com/office/drawing/2014/main" id="{2B024D7E-638B-4639-A028-CDDC8B8B1C7E}"/>
+                <a16:creationId xmlns:a16="http://schemas.microsoft.com/office/drawing/2014/main" id="{F38B608B-5AB4-4E98-9972-4B26E82D189C}"/>
               </a:ext>
             </a:extLst>
           </p:cNvPr>
@@ -10487,7 +10487,7 @@
           <p:cNvPr id="6" name="Shape 4">
             <a:extLst xmlns:a="http://schemas.openxmlformats.org/drawingml/2006/main">
               <a:ext uri="{FF2B5EF4-FFF2-40B4-BE49-F238E27FC236}">
-                <a16:creationId xmlns:a16="http://schemas.microsoft.com/office/drawing/2014/main" id="{C44F64B8-3A71-4C77-B7AE-ED762BFC9D80}"/>
+                <a16:creationId xmlns:a16="http://schemas.microsoft.com/office/drawing/2014/main" id="{D65C3F77-AB51-43A7-8ACB-B2D12E4C9275}"/>
               </a:ext>
             </a:extLst>
           </p:cNvPr>
@@ -10518,7 +10518,7 @@
           <p:cNvPr id="7" name="Shape 5">
             <a:extLst xmlns:a="http://schemas.openxmlformats.org/drawingml/2006/main">
               <a:ext uri="{FF2B5EF4-FFF2-40B4-BE49-F238E27FC236}">
-                <a16:creationId xmlns:a16="http://schemas.microsoft.com/office/drawing/2014/main" id="{C1D7D60B-8F46-40FF-AD81-88045FFEFA33}"/>
+                <a16:creationId xmlns:a16="http://schemas.microsoft.com/office/drawing/2014/main" id="{19ACCF80-19E2-465C-83FD-985768A7C066}"/>
               </a:ext>
             </a:extLst>
           </p:cNvPr>
@@ -10553,7 +10553,7 @@
           <p:cNvPr id="8" name="Text 6">
             <a:extLst xmlns:a="http://schemas.openxmlformats.org/drawingml/2006/main">
               <a:ext uri="{FF2B5EF4-FFF2-40B4-BE49-F238E27FC236}">
-                <a16:creationId xmlns:a16="http://schemas.microsoft.com/office/drawing/2014/main" id="{0A69E2BF-3FD4-4616-B0D2-038D324BBC3B}"/>
+                <a16:creationId xmlns:a16="http://schemas.microsoft.com/office/drawing/2014/main" id="{8D0E4E23-82E1-4EB7-9E5C-4667529EEC4A}"/>
               </a:ext>
             </a:extLst>
           </p:cNvPr>
@@ -10600,7 +10600,7 @@
           <p:cNvPr id="9" name="Shape 7">
             <a:extLst xmlns:a="http://schemas.openxmlformats.org/drawingml/2006/main">
               <a:ext uri="{FF2B5EF4-FFF2-40B4-BE49-F238E27FC236}">
-                <a16:creationId xmlns:a16="http://schemas.microsoft.com/office/drawing/2014/main" id="{1188F063-041F-400B-B803-8620ED5E30A6}"/>
+                <a16:creationId xmlns:a16="http://schemas.microsoft.com/office/drawing/2014/main" id="{0042C4EB-90F0-472A-94ED-C0035CEFB286}"/>
               </a:ext>
             </a:extLst>
           </p:cNvPr>
@@ -10635,7 +10635,7 @@
           <p:cNvPr id="10" name="Text 8">
             <a:extLst xmlns:a="http://schemas.openxmlformats.org/drawingml/2006/main">
               <a:ext uri="{FF2B5EF4-FFF2-40B4-BE49-F238E27FC236}">
-                <a16:creationId xmlns:a16="http://schemas.microsoft.com/office/drawing/2014/main" id="{AFAA1105-F73B-4B7F-913C-03B46F2C9850}"/>
+                <a16:creationId xmlns:a16="http://schemas.microsoft.com/office/drawing/2014/main" id="{7F263507-CD84-4600-9CD4-5F7276BC10EB}"/>
               </a:ext>
             </a:extLst>
           </p:cNvPr>
@@ -10682,7 +10682,7 @@
           <p:cNvPr id="11" name="Shape 9">
             <a:extLst xmlns:a="http://schemas.openxmlformats.org/drawingml/2006/main">
               <a:ext uri="{FF2B5EF4-FFF2-40B4-BE49-F238E27FC236}">
-                <a16:creationId xmlns:a16="http://schemas.microsoft.com/office/drawing/2014/main" id="{B8AA9828-8C69-4A17-A893-E9D6FEB80DEF}"/>
+                <a16:creationId xmlns:a16="http://schemas.microsoft.com/office/drawing/2014/main" id="{226241D2-A8A2-481E-BD3D-D4D7B7A4B6C8}"/>
               </a:ext>
             </a:extLst>
           </p:cNvPr>
@@ -10717,7 +10717,7 @@
           <p:cNvPr id="12" name="Text 10">
             <a:extLst xmlns:a="http://schemas.openxmlformats.org/drawingml/2006/main">
               <a:ext uri="{FF2B5EF4-FFF2-40B4-BE49-F238E27FC236}">
-                <a16:creationId xmlns:a16="http://schemas.microsoft.com/office/drawing/2014/main" id="{CE719845-B920-4179-A2D5-1A2505121BE7}"/>
+                <a16:creationId xmlns:a16="http://schemas.microsoft.com/office/drawing/2014/main" id="{6D6933FA-3410-4A00-9918-C5A1C36DC87F}"/>
               </a:ext>
             </a:extLst>
           </p:cNvPr>
@@ -10764,7 +10764,7 @@
           <p:cNvPr id="13" name="Shape 11">
             <a:extLst xmlns:a="http://schemas.openxmlformats.org/drawingml/2006/main">
               <a:ext uri="{FF2B5EF4-FFF2-40B4-BE49-F238E27FC236}">
-                <a16:creationId xmlns:a16="http://schemas.microsoft.com/office/drawing/2014/main" id="{D5C86E2C-FC5B-4835-871B-EFF192A3C2F5}"/>
+                <a16:creationId xmlns:a16="http://schemas.microsoft.com/office/drawing/2014/main" id="{856077D2-2851-4F57-8910-5DD66A43A88C}"/>
               </a:ext>
             </a:extLst>
           </p:cNvPr>
@@ -10799,7 +10799,7 @@
           <p:cNvPr id="14" name="Text 12">
             <a:extLst xmlns:a="http://schemas.openxmlformats.org/drawingml/2006/main">
               <a:ext uri="{FF2B5EF4-FFF2-40B4-BE49-F238E27FC236}">
-                <a16:creationId xmlns:a16="http://schemas.microsoft.com/office/drawing/2014/main" id="{FB8C9EA9-135C-4C25-8AF8-684F17342EC9}"/>
+                <a16:creationId xmlns:a16="http://schemas.microsoft.com/office/drawing/2014/main" id="{2860C1B5-CAAC-449E-9E53-0FD50F8C6C7B}"/>
               </a:ext>
             </a:extLst>
           </p:cNvPr>
@@ -10846,7 +10846,7 @@
           <p:cNvPr id="15" name="Shape 13">
             <a:extLst xmlns:a="http://schemas.openxmlformats.org/drawingml/2006/main">
               <a:ext uri="{FF2B5EF4-FFF2-40B4-BE49-F238E27FC236}">
-                <a16:creationId xmlns:a16="http://schemas.microsoft.com/office/drawing/2014/main" id="{C04E5B4D-95BA-4D99-BC81-EF841CF863E3}"/>
+                <a16:creationId xmlns:a16="http://schemas.microsoft.com/office/drawing/2014/main" id="{897F980A-B15D-4F87-97C6-BCF0299F68DE}"/>
               </a:ext>
             </a:extLst>
           </p:cNvPr>
@@ -10879,7 +10879,7 @@
           <p:cNvPr id="16" name="Text 14">
             <a:extLst xmlns:a="http://schemas.openxmlformats.org/drawingml/2006/main">
               <a:ext uri="{FF2B5EF4-FFF2-40B4-BE49-F238E27FC236}">
-                <a16:creationId xmlns:a16="http://schemas.microsoft.com/office/drawing/2014/main" id="{AAE2777E-84DD-462E-9128-F2D2A29E37BD}"/>
+                <a16:creationId xmlns:a16="http://schemas.microsoft.com/office/drawing/2014/main" id="{C5B03C4D-6C8E-437D-AFDE-67A8BCF4EA47}"/>
               </a:ext>
             </a:extLst>
           </p:cNvPr>
@@ -10926,7 +10926,7 @@
           <p:cNvPr id="17" name="Text 15">
             <a:extLst xmlns:a="http://schemas.openxmlformats.org/drawingml/2006/main">
               <a:ext uri="{FF2B5EF4-FFF2-40B4-BE49-F238E27FC236}">
-                <a16:creationId xmlns:a16="http://schemas.microsoft.com/office/drawing/2014/main" id="{07F97513-5E1F-4784-A61C-D16DD28BE118}"/>
+                <a16:creationId xmlns:a16="http://schemas.microsoft.com/office/drawing/2014/main" id="{83E7A455-E7E9-4BB3-9368-0DAC6B20DDDE}"/>
               </a:ext>
             </a:extLst>
           </p:cNvPr>
@@ -10973,7 +10973,7 @@
           <p:cNvPr id="18" name="Text 16">
             <a:extLst xmlns:a="http://schemas.openxmlformats.org/drawingml/2006/main">
               <a:ext uri="{FF2B5EF4-FFF2-40B4-BE49-F238E27FC236}">
-                <a16:creationId xmlns:a16="http://schemas.microsoft.com/office/drawing/2014/main" id="{B48D76C8-D0C0-4686-BF65-5CE854227126}"/>
+                <a16:creationId xmlns:a16="http://schemas.microsoft.com/office/drawing/2014/main" id="{0121C274-0FD9-4E3D-9CD9-AE9264285FF6}"/>
               </a:ext>
             </a:extLst>
           </p:cNvPr>
@@ -11020,7 +11020,7 @@
           <p:cNvPr id="19" name="Text 17">
             <a:extLst xmlns:a="http://schemas.openxmlformats.org/drawingml/2006/main">
               <a:ext uri="{FF2B5EF4-FFF2-40B4-BE49-F238E27FC236}">
-                <a16:creationId xmlns:a16="http://schemas.microsoft.com/office/drawing/2014/main" id="{43E4EA6C-32DB-40AB-B4FF-DADD91325F23}"/>
+                <a16:creationId xmlns:a16="http://schemas.microsoft.com/office/drawing/2014/main" id="{3FC27F65-896D-4591-A226-C7F1C4467174}"/>
               </a:ext>
             </a:extLst>
           </p:cNvPr>
@@ -11067,7 +11067,7 @@
           <p:cNvPr id="20" name="Shape 18">
             <a:extLst xmlns:a="http://schemas.openxmlformats.org/drawingml/2006/main">
               <a:ext uri="{FF2B5EF4-FFF2-40B4-BE49-F238E27FC236}">
-                <a16:creationId xmlns:a16="http://schemas.microsoft.com/office/drawing/2014/main" id="{0AF6EC2B-EB0A-4C4E-9D3D-6AA94BC19439}"/>
+                <a16:creationId xmlns:a16="http://schemas.microsoft.com/office/drawing/2014/main" id="{AD4DB7C8-403B-404D-A495-326D8BB2EC85}"/>
               </a:ext>
             </a:extLst>
           </p:cNvPr>
@@ -11100,7 +11100,7 @@
           <p:cNvPr id="21" name="Text 19">
             <a:extLst xmlns:a="http://schemas.openxmlformats.org/drawingml/2006/main">
               <a:ext uri="{FF2B5EF4-FFF2-40B4-BE49-F238E27FC236}">
-                <a16:creationId xmlns:a16="http://schemas.microsoft.com/office/drawing/2014/main" id="{38DB82C3-0E77-442F-A5D7-2D373BFF093E}"/>
+                <a16:creationId xmlns:a16="http://schemas.microsoft.com/office/drawing/2014/main" id="{CE1D5793-C07F-4E92-B930-6A790AAD67DA}"/>
               </a:ext>
             </a:extLst>
           </p:cNvPr>
@@ -11147,7 +11147,7 @@
           <p:cNvPr id="22" name="Text 20">
             <a:extLst xmlns:a="http://schemas.openxmlformats.org/drawingml/2006/main">
               <a:ext uri="{FF2B5EF4-FFF2-40B4-BE49-F238E27FC236}">
-                <a16:creationId xmlns:a16="http://schemas.microsoft.com/office/drawing/2014/main" id="{879041B8-07BE-4C6F-A09D-7A2154149A33}"/>
+                <a16:creationId xmlns:a16="http://schemas.microsoft.com/office/drawing/2014/main" id="{029EE8F8-9EA0-4D72-9454-5AE95C255C83}"/>
               </a:ext>
             </a:extLst>
           </p:cNvPr>
@@ -11194,7 +11194,7 @@
           <p:cNvPr id="23" name="Text 21">
             <a:extLst xmlns:a="http://schemas.openxmlformats.org/drawingml/2006/main">
               <a:ext uri="{FF2B5EF4-FFF2-40B4-BE49-F238E27FC236}">
-                <a16:creationId xmlns:a16="http://schemas.microsoft.com/office/drawing/2014/main" id="{8660884A-B41C-493A-8D4E-1BAF5075D952}"/>
+                <a16:creationId xmlns:a16="http://schemas.microsoft.com/office/drawing/2014/main" id="{3A6B5500-CDEB-4C41-BEC1-4D58B380E4FA}"/>
               </a:ext>
             </a:extLst>
           </p:cNvPr>
@@ -11241,7 +11241,7 @@
           <p:cNvPr id="24" name="Text 22">
             <a:extLst xmlns:a="http://schemas.openxmlformats.org/drawingml/2006/main">
               <a:ext uri="{FF2B5EF4-FFF2-40B4-BE49-F238E27FC236}">
-                <a16:creationId xmlns:a16="http://schemas.microsoft.com/office/drawing/2014/main" id="{560B4D5B-1273-48C2-B007-A428D92F7AD2}"/>
+                <a16:creationId xmlns:a16="http://schemas.microsoft.com/office/drawing/2014/main" id="{334155FA-3EE9-45F9-A68C-623223212380}"/>
               </a:ext>
             </a:extLst>
           </p:cNvPr>
@@ -11288,7 +11288,7 @@
           <p:cNvPr id="25" name="Shape 23">
             <a:extLst xmlns:a="http://schemas.openxmlformats.org/drawingml/2006/main">
               <a:ext uri="{FF2B5EF4-FFF2-40B4-BE49-F238E27FC236}">
-                <a16:creationId xmlns:a16="http://schemas.microsoft.com/office/drawing/2014/main" id="{675624D7-1413-4086-A61E-2FB2D1239B85}"/>
+                <a16:creationId xmlns:a16="http://schemas.microsoft.com/office/drawing/2014/main" id="{FC84C00E-0C2F-4149-B401-B640EDCF80C1}"/>
               </a:ext>
             </a:extLst>
           </p:cNvPr>
@@ -11321,7 +11321,7 @@
           <p:cNvPr id="26" name="Text 24">
             <a:extLst xmlns:a="http://schemas.openxmlformats.org/drawingml/2006/main">
               <a:ext uri="{FF2B5EF4-FFF2-40B4-BE49-F238E27FC236}">
-                <a16:creationId xmlns:a16="http://schemas.microsoft.com/office/drawing/2014/main" id="{926C3A2B-D0A3-4F49-92A7-6CAAC0C1A999}"/>
+                <a16:creationId xmlns:a16="http://schemas.microsoft.com/office/drawing/2014/main" id="{24EF35D2-AFEF-4CE5-9A84-F1FEDBD38D37}"/>
               </a:ext>
             </a:extLst>
           </p:cNvPr>
@@ -11368,7 +11368,7 @@
           <p:cNvPr id="27" name="Text 25">
             <a:extLst xmlns:a="http://schemas.openxmlformats.org/drawingml/2006/main">
               <a:ext uri="{FF2B5EF4-FFF2-40B4-BE49-F238E27FC236}">
-                <a16:creationId xmlns:a16="http://schemas.microsoft.com/office/drawing/2014/main" id="{3E0E4194-A8E2-4B53-8169-811EECE9A4E0}"/>
+                <a16:creationId xmlns:a16="http://schemas.microsoft.com/office/drawing/2014/main" id="{E68DFCE6-7677-4E24-9525-5647E60A54C3}"/>
               </a:ext>
             </a:extLst>
           </p:cNvPr>
@@ -11415,7 +11415,7 @@
           <p:cNvPr id="28" name="Text 26">
             <a:extLst xmlns:a="http://schemas.openxmlformats.org/drawingml/2006/main">
               <a:ext uri="{FF2B5EF4-FFF2-40B4-BE49-F238E27FC236}">
-                <a16:creationId xmlns:a16="http://schemas.microsoft.com/office/drawing/2014/main" id="{78EB3612-4885-422D-A74F-2C5D523660C2}"/>
+                <a16:creationId xmlns:a16="http://schemas.microsoft.com/office/drawing/2014/main" id="{5C7245FF-761C-4445-A546-E4AC66022D15}"/>
               </a:ext>
             </a:extLst>
           </p:cNvPr>
@@ -11462,7 +11462,7 @@
           <p:cNvPr id="29" name="Text 27">
             <a:extLst xmlns:a="http://schemas.openxmlformats.org/drawingml/2006/main">
               <a:ext uri="{FF2B5EF4-FFF2-40B4-BE49-F238E27FC236}">
-                <a16:creationId xmlns:a16="http://schemas.microsoft.com/office/drawing/2014/main" id="{394D50AD-9F95-4B4C-9F60-D8B6D4C5287C}"/>
+                <a16:creationId xmlns:a16="http://schemas.microsoft.com/office/drawing/2014/main" id="{A52D216C-4433-4C27-BC1E-65AFE53FD111}"/>
               </a:ext>
             </a:extLst>
           </p:cNvPr>
@@ -11509,7 +11509,7 @@
           <p:cNvPr id="30" name="Shape 28">
             <a:extLst xmlns:a="http://schemas.openxmlformats.org/drawingml/2006/main">
               <a:ext uri="{FF2B5EF4-FFF2-40B4-BE49-F238E27FC236}">
-                <a16:creationId xmlns:a16="http://schemas.microsoft.com/office/drawing/2014/main" id="{54ADCFBC-DA60-4A0A-A709-61C758C08D0E}"/>
+                <a16:creationId xmlns:a16="http://schemas.microsoft.com/office/drawing/2014/main" id="{53830039-F9D6-46EE-A071-BDFC1B819061}"/>
               </a:ext>
             </a:extLst>
           </p:cNvPr>
@@ -11542,7 +11542,7 @@
           <p:cNvPr id="31" name="Text 29">
             <a:extLst xmlns:a="http://schemas.openxmlformats.org/drawingml/2006/main">
               <a:ext uri="{FF2B5EF4-FFF2-40B4-BE49-F238E27FC236}">
-                <a16:creationId xmlns:a16="http://schemas.microsoft.com/office/drawing/2014/main" id="{2C0C35FA-70A4-42F1-BB83-C3C88B4A0D64}"/>
+                <a16:creationId xmlns:a16="http://schemas.microsoft.com/office/drawing/2014/main" id="{1533199D-28D9-4231-96AD-EEF26F4035F9}"/>
               </a:ext>
             </a:extLst>
           </p:cNvPr>
@@ -11589,7 +11589,7 @@
           <p:cNvPr id="32" name="Text 30">
             <a:extLst xmlns:a="http://schemas.openxmlformats.org/drawingml/2006/main">
               <a:ext uri="{FF2B5EF4-FFF2-40B4-BE49-F238E27FC236}">
-                <a16:creationId xmlns:a16="http://schemas.microsoft.com/office/drawing/2014/main" id="{F1A6FC7E-E01E-47AC-97EC-E62321B90EDE}"/>
+                <a16:creationId xmlns:a16="http://schemas.microsoft.com/office/drawing/2014/main" id="{063D868E-ADA3-444E-91E5-BF5A4B09800A}"/>
               </a:ext>
             </a:extLst>
           </p:cNvPr>
@@ -11636,7 +11636,7 @@
           <p:cNvPr id="33" name="Text 31">
             <a:extLst xmlns:a="http://schemas.openxmlformats.org/drawingml/2006/main">
               <a:ext uri="{FF2B5EF4-FFF2-40B4-BE49-F238E27FC236}">
-                <a16:creationId xmlns:a16="http://schemas.microsoft.com/office/drawing/2014/main" id="{E32F6E7D-624F-488E-9491-F3DD451F6C14}"/>
+                <a16:creationId xmlns:a16="http://schemas.microsoft.com/office/drawing/2014/main" id="{657934B3-CCEB-4A5E-8F82-DD2EC624AD3E}"/>
               </a:ext>
             </a:extLst>
           </p:cNvPr>
@@ -11683,7 +11683,7 @@
           <p:cNvPr id="34" name="Text 32">
             <a:extLst xmlns:a="http://schemas.openxmlformats.org/drawingml/2006/main">
               <a:ext uri="{FF2B5EF4-FFF2-40B4-BE49-F238E27FC236}">
-                <a16:creationId xmlns:a16="http://schemas.microsoft.com/office/drawing/2014/main" id="{2FA91224-539C-4F61-B113-DD93FF25D489}"/>
+                <a16:creationId xmlns:a16="http://schemas.microsoft.com/office/drawing/2014/main" id="{D0979BEC-850F-49C6-97E7-F5301D93FC70}"/>
               </a:ext>
             </a:extLst>
           </p:cNvPr>
@@ -11730,7 +11730,7 @@
           <p:cNvPr id="35" name="Shape 33">
             <a:extLst xmlns:a="http://schemas.openxmlformats.org/drawingml/2006/main">
               <a:ext uri="{FF2B5EF4-FFF2-40B4-BE49-F238E27FC236}">
-                <a16:creationId xmlns:a16="http://schemas.microsoft.com/office/drawing/2014/main" id="{33EB3CA4-5CC4-4037-9FC7-AA18FCA60FA9}"/>
+                <a16:creationId xmlns:a16="http://schemas.microsoft.com/office/drawing/2014/main" id="{1EA77B60-C648-4C49-80C6-CBDC6F63AF14}"/>
               </a:ext>
             </a:extLst>
           </p:cNvPr>
@@ -11763,7 +11763,7 @@
           <p:cNvPr id="36" name="Text 34">
             <a:extLst xmlns:a="http://schemas.openxmlformats.org/drawingml/2006/main">
               <a:ext uri="{FF2B5EF4-FFF2-40B4-BE49-F238E27FC236}">
-                <a16:creationId xmlns:a16="http://schemas.microsoft.com/office/drawing/2014/main" id="{941BA29E-C99E-4E6D-899C-7F639A46CCF1}"/>
+                <a16:creationId xmlns:a16="http://schemas.microsoft.com/office/drawing/2014/main" id="{BCC8FA17-D069-4AEF-A611-F736065C4DBE}"/>
               </a:ext>
             </a:extLst>
           </p:cNvPr>
@@ -11810,7 +11810,7 @@
           <p:cNvPr id="37" name="Text 35">
             <a:extLst xmlns:a="http://schemas.openxmlformats.org/drawingml/2006/main">
               <a:ext uri="{FF2B5EF4-FFF2-40B4-BE49-F238E27FC236}">
-                <a16:creationId xmlns:a16="http://schemas.microsoft.com/office/drawing/2014/main" id="{0F67CE47-060D-43F5-BB24-6B21FA5CF2A0}"/>
+                <a16:creationId xmlns:a16="http://schemas.microsoft.com/office/drawing/2014/main" id="{54174A15-28A1-444E-B327-720C41E41425}"/>
               </a:ext>
             </a:extLst>
           </p:cNvPr>
@@ -11857,7 +11857,7 @@
           <p:cNvPr id="38" name="Text 36">
             <a:extLst xmlns:a="http://schemas.openxmlformats.org/drawingml/2006/main">
               <a:ext uri="{FF2B5EF4-FFF2-40B4-BE49-F238E27FC236}">
-                <a16:creationId xmlns:a16="http://schemas.microsoft.com/office/drawing/2014/main" id="{E8EBE6A2-4B43-4FFE-944C-D3CFC66FD223}"/>
+                <a16:creationId xmlns:a16="http://schemas.microsoft.com/office/drawing/2014/main" id="{A942986C-452B-4697-8E3A-3E7A9655E8A8}"/>
               </a:ext>
             </a:extLst>
           </p:cNvPr>
@@ -11904,7 +11904,7 @@
           <p:cNvPr id="39" name="Text 37">
             <a:extLst xmlns:a="http://schemas.openxmlformats.org/drawingml/2006/main">
               <a:ext uri="{FF2B5EF4-FFF2-40B4-BE49-F238E27FC236}">
-                <a16:creationId xmlns:a16="http://schemas.microsoft.com/office/drawing/2014/main" id="{9044C730-02D3-4582-BF88-1E8A3E9F46D4}"/>
+                <a16:creationId xmlns:a16="http://schemas.microsoft.com/office/drawing/2014/main" id="{BF77F6AB-6BFC-464F-9F6E-69C1C49D0591}"/>
               </a:ext>
             </a:extLst>
           </p:cNvPr>
@@ -11951,7 +11951,7 @@
           <p:cNvPr id="40" name="Shape 38">
             <a:extLst xmlns:a="http://schemas.openxmlformats.org/drawingml/2006/main">
               <a:ext uri="{FF2B5EF4-FFF2-40B4-BE49-F238E27FC236}">
-                <a16:creationId xmlns:a16="http://schemas.microsoft.com/office/drawing/2014/main" id="{E4603621-74E7-4865-86B5-E2300CBDFFE8}"/>
+                <a16:creationId xmlns:a16="http://schemas.microsoft.com/office/drawing/2014/main" id="{766C457D-4C1B-44D1-8557-BD4A9F848A98}"/>
               </a:ext>
             </a:extLst>
           </p:cNvPr>
@@ -11984,7 +11984,7 @@
           <p:cNvPr id="41" name="Text 39">
             <a:extLst xmlns:a="http://schemas.openxmlformats.org/drawingml/2006/main">
               <a:ext uri="{FF2B5EF4-FFF2-40B4-BE49-F238E27FC236}">
-                <a16:creationId xmlns:a16="http://schemas.microsoft.com/office/drawing/2014/main" id="{9B50270E-1666-4F83-B3D3-4FF88CE69427}"/>
+                <a16:creationId xmlns:a16="http://schemas.microsoft.com/office/drawing/2014/main" id="{E6AF4F5A-FFFA-43BF-8D96-8A993FD2C322}"/>
               </a:ext>
             </a:extLst>
           </p:cNvPr>
@@ -12031,7 +12031,7 @@
           <p:cNvPr id="42" name="Text 40">
             <a:extLst xmlns:a="http://schemas.openxmlformats.org/drawingml/2006/main">
               <a:ext uri="{FF2B5EF4-FFF2-40B4-BE49-F238E27FC236}">
-                <a16:creationId xmlns:a16="http://schemas.microsoft.com/office/drawing/2014/main" id="{7FC8A93D-F1C4-4467-A48B-4F4BED0F6B09}"/>
+                <a16:creationId xmlns:a16="http://schemas.microsoft.com/office/drawing/2014/main" id="{48DE27C5-CD99-4B67-A03E-3D1CD14EE4F4}"/>
               </a:ext>
             </a:extLst>
           </p:cNvPr>
@@ -12078,7 +12078,7 @@
           <p:cNvPr id="43" name="Text 41">
             <a:extLst xmlns:a="http://schemas.openxmlformats.org/drawingml/2006/main">
               <a:ext uri="{FF2B5EF4-FFF2-40B4-BE49-F238E27FC236}">
-                <a16:creationId xmlns:a16="http://schemas.microsoft.com/office/drawing/2014/main" id="{F7924CFF-EBC2-48E5-8A4B-C0EC04D616BB}"/>
+                <a16:creationId xmlns:a16="http://schemas.microsoft.com/office/drawing/2014/main" id="{1B9F8DAE-F691-4D94-B716-A57DA3B57B44}"/>
               </a:ext>
             </a:extLst>
           </p:cNvPr>
@@ -12125,7 +12125,7 @@
           <p:cNvPr id="44" name="Text 42">
             <a:extLst xmlns:a="http://schemas.openxmlformats.org/drawingml/2006/main">
               <a:ext uri="{FF2B5EF4-FFF2-40B4-BE49-F238E27FC236}">
-                <a16:creationId xmlns:a16="http://schemas.microsoft.com/office/drawing/2014/main" id="{9A2D8065-EEEA-4EE1-8A86-62FAD45A6CF2}"/>
+                <a16:creationId xmlns:a16="http://schemas.microsoft.com/office/drawing/2014/main" id="{3D472D51-40ED-47C9-B9B0-34129129A33B}"/>
               </a:ext>
             </a:extLst>
           </p:cNvPr>
@@ -12172,7 +12172,7 @@
           <p:cNvPr id="45" name="Shape 43">
             <a:extLst xmlns:a="http://schemas.openxmlformats.org/drawingml/2006/main">
               <a:ext uri="{FF2B5EF4-FFF2-40B4-BE49-F238E27FC236}">
-                <a16:creationId xmlns:a16="http://schemas.microsoft.com/office/drawing/2014/main" id="{A6581738-38EB-4B64-93F8-BF5F5F4DE860}"/>
+                <a16:creationId xmlns:a16="http://schemas.microsoft.com/office/drawing/2014/main" id="{4FAEF741-9AF8-494A-8E59-7EEE94D9EBDD}"/>
               </a:ext>
             </a:extLst>
           </p:cNvPr>
@@ -12207,7 +12207,7 @@
           <p:cNvPr id="46" name="Text 44">
             <a:extLst xmlns:a="http://schemas.openxmlformats.org/drawingml/2006/main">
               <a:ext uri="{FF2B5EF4-FFF2-40B4-BE49-F238E27FC236}">
-                <a16:creationId xmlns:a16="http://schemas.microsoft.com/office/drawing/2014/main" id="{60453E17-63C5-467C-9800-689F732A1EAB}"/>
+                <a16:creationId xmlns:a16="http://schemas.microsoft.com/office/drawing/2014/main" id="{8CD0400D-8E16-4AEE-8E27-848261770D4E}"/>
               </a:ext>
             </a:extLst>
           </p:cNvPr>
@@ -12254,7 +12254,7 @@
           <p:cNvPr id="47" name="Text 45">
             <a:extLst xmlns:a="http://schemas.openxmlformats.org/drawingml/2006/main">
               <a:ext uri="{FF2B5EF4-FFF2-40B4-BE49-F238E27FC236}">
-                <a16:creationId xmlns:a16="http://schemas.microsoft.com/office/drawing/2014/main" id="{D0E76A89-7BBA-442A-9884-745F8CB2E7A7}"/>
+                <a16:creationId xmlns:a16="http://schemas.microsoft.com/office/drawing/2014/main" id="{60A10F16-8335-4086-A931-382B4F4C92B8}"/>
               </a:ext>
             </a:extLst>
           </p:cNvPr>
@@ -12301,7 +12301,7 @@
           <p:cNvPr id="48" name="Text 46">
             <a:extLst xmlns:a="http://schemas.openxmlformats.org/drawingml/2006/main">
               <a:ext uri="{FF2B5EF4-FFF2-40B4-BE49-F238E27FC236}">
-                <a16:creationId xmlns:a16="http://schemas.microsoft.com/office/drawing/2014/main" id="{43251FD1-54EE-4EF3-A4EB-A5EBAA41BEB2}"/>
+                <a16:creationId xmlns:a16="http://schemas.microsoft.com/office/drawing/2014/main" id="{35629A7E-19C9-4727-98A9-C0E6BB70D426}"/>
               </a:ext>
             </a:extLst>
           </p:cNvPr>
@@ -12346,7 +12346,7 @@
     </p:spTree>
     <p:extLst>
       <p:ext uri="{BB962C8B-B14F-4D97-AF65-F5344CB8AC3E}">
-        <p14:creationId xmlns:p14="http://schemas.microsoft.com/office/powerpoint/2010/main" val="1782632296"/>
+        <p14:creationId xmlns:p14="http://schemas.microsoft.com/office/powerpoint/2010/main" val="1518200311"/>
       </p:ext>
     </p:extLst>
   </p:cSld>
@@ -12377,7 +12377,7 @@
           <p:cNvPr id="2" name="Text 0">
             <a:extLst xmlns:a="http://schemas.openxmlformats.org/drawingml/2006/main">
               <a:ext uri="{FF2B5EF4-FFF2-40B4-BE49-F238E27FC236}">
-                <a16:creationId xmlns:a16="http://schemas.microsoft.com/office/drawing/2014/main" id="{452DC930-EB29-4E28-97AC-E761400DF87D}"/>
+                <a16:creationId xmlns:a16="http://schemas.microsoft.com/office/drawing/2014/main" id="{F5ACA4DF-83DE-43F9-AAF0-80C3395E2668}"/>
               </a:ext>
             </a:extLst>
           </p:cNvPr>
@@ -12424,7 +12424,7 @@
           <p:cNvPr id="3" name="Text 1">
             <a:extLst xmlns:a="http://schemas.openxmlformats.org/drawingml/2006/main">
               <a:ext uri="{FF2B5EF4-FFF2-40B4-BE49-F238E27FC236}">
-                <a16:creationId xmlns:a16="http://schemas.microsoft.com/office/drawing/2014/main" id="{547C7CA7-FA72-45EB-BFBF-5A3B6CE83B40}"/>
+                <a16:creationId xmlns:a16="http://schemas.microsoft.com/office/drawing/2014/main" id="{5C6758EA-86C4-4EB1-868B-57F7C5922F79}"/>
               </a:ext>
             </a:extLst>
           </p:cNvPr>
@@ -12471,7 +12471,7 @@
           <p:cNvPr id="4" name="Shape 2">
             <a:extLst xmlns:a="http://schemas.openxmlformats.org/drawingml/2006/main">
               <a:ext uri="{FF2B5EF4-FFF2-40B4-BE49-F238E27FC236}">
-                <a16:creationId xmlns:a16="http://schemas.microsoft.com/office/drawing/2014/main" id="{43AB1B2D-A788-49ED-B787-B20BB6B021CF}"/>
+                <a16:creationId xmlns:a16="http://schemas.microsoft.com/office/drawing/2014/main" id="{D3CB7F61-BE54-4389-8D1F-1A8CF0315D47}"/>
               </a:ext>
             </a:extLst>
           </p:cNvPr>
@@ -12506,7 +12506,7 @@
           <p:cNvPr id="5" name="Text 3">
             <a:extLst xmlns:a="http://schemas.openxmlformats.org/drawingml/2006/main">
               <a:ext uri="{FF2B5EF4-FFF2-40B4-BE49-F238E27FC236}">
-                <a16:creationId xmlns:a16="http://schemas.microsoft.com/office/drawing/2014/main" id="{FC9B4730-47F1-4BC7-A79B-D340997A116E}"/>
+                <a16:creationId xmlns:a16="http://schemas.microsoft.com/office/drawing/2014/main" id="{33E60A2B-0F88-4876-8D27-4718E5E1C3F6}"/>
               </a:ext>
             </a:extLst>
           </p:cNvPr>
@@ -12553,7 +12553,7 @@
           <p:cNvPr id="6" name="Shape 4">
             <a:extLst xmlns:a="http://schemas.openxmlformats.org/drawingml/2006/main">
               <a:ext uri="{FF2B5EF4-FFF2-40B4-BE49-F238E27FC236}">
-                <a16:creationId xmlns:a16="http://schemas.microsoft.com/office/drawing/2014/main" id="{F786B0A1-C0AC-4D2F-B51C-4BE9B0C7588E}"/>
+                <a16:creationId xmlns:a16="http://schemas.microsoft.com/office/drawing/2014/main" id="{207E249F-6ECC-4CB0-9165-F6503FA3EEF8}"/>
               </a:ext>
             </a:extLst>
           </p:cNvPr>
@@ -12584,7 +12584,7 @@
           <p:cNvPr id="7" name="Shape 5">
             <a:extLst xmlns:a="http://schemas.openxmlformats.org/drawingml/2006/main">
               <a:ext uri="{FF2B5EF4-FFF2-40B4-BE49-F238E27FC236}">
-                <a16:creationId xmlns:a16="http://schemas.microsoft.com/office/drawing/2014/main" id="{F2EBD356-804E-48F8-97C7-BABE78CE5FBD}"/>
+                <a16:creationId xmlns:a16="http://schemas.microsoft.com/office/drawing/2014/main" id="{EA81EB10-7A1F-4B45-BBCD-C64DE025F83D}"/>
               </a:ext>
             </a:extLst>
           </p:cNvPr>
@@ -12619,7 +12619,7 @@
           <p:cNvPr id="8" name="Text 6">
             <a:extLst xmlns:a="http://schemas.openxmlformats.org/drawingml/2006/main">
               <a:ext uri="{FF2B5EF4-FFF2-40B4-BE49-F238E27FC236}">
-                <a16:creationId xmlns:a16="http://schemas.microsoft.com/office/drawing/2014/main" id="{4A92775E-5B66-4C77-B9C9-5A4656633A5A}"/>
+                <a16:creationId xmlns:a16="http://schemas.microsoft.com/office/drawing/2014/main" id="{2C6000B9-2FFD-4A8A-8441-7C0F473C2598}"/>
               </a:ext>
             </a:extLst>
           </p:cNvPr>
@@ -12666,7 +12666,7 @@
           <p:cNvPr id="9" name="Text 7">
             <a:extLst xmlns:a="http://schemas.openxmlformats.org/drawingml/2006/main">
               <a:ext uri="{FF2B5EF4-FFF2-40B4-BE49-F238E27FC236}">
-                <a16:creationId xmlns:a16="http://schemas.microsoft.com/office/drawing/2014/main" id="{D340ECC1-76B3-4768-916A-26FE749020CA}"/>
+                <a16:creationId xmlns:a16="http://schemas.microsoft.com/office/drawing/2014/main" id="{F8CEAFE6-AD85-456D-B135-C1F127A1962E}"/>
               </a:ext>
             </a:extLst>
           </p:cNvPr>
@@ -12713,7 +12713,7 @@
           <p:cNvPr id="10" name="Text 8">
             <a:extLst xmlns:a="http://schemas.openxmlformats.org/drawingml/2006/main">
               <a:ext uri="{FF2B5EF4-FFF2-40B4-BE49-F238E27FC236}">
-                <a16:creationId xmlns:a16="http://schemas.microsoft.com/office/drawing/2014/main" id="{843D7B05-2852-4926-A911-9D809228F0D3}"/>
+                <a16:creationId xmlns:a16="http://schemas.microsoft.com/office/drawing/2014/main" id="{00CD9B32-E9CC-40C5-8091-C763905D019F}"/>
               </a:ext>
             </a:extLst>
           </p:cNvPr>
@@ -12760,7 +12760,7 @@
           <p:cNvPr id="11" name="Shape 9">
             <a:extLst xmlns:a="http://schemas.openxmlformats.org/drawingml/2006/main">
               <a:ext uri="{FF2B5EF4-FFF2-40B4-BE49-F238E27FC236}">
-                <a16:creationId xmlns:a16="http://schemas.microsoft.com/office/drawing/2014/main" id="{BFC78F10-E6C0-4845-A1B2-6D05A0267902}"/>
+                <a16:creationId xmlns:a16="http://schemas.microsoft.com/office/drawing/2014/main" id="{4BBBF6BD-EA80-4A18-81E3-3FA153C0F4DC}"/>
               </a:ext>
             </a:extLst>
           </p:cNvPr>
@@ -12795,7 +12795,7 @@
           <p:cNvPr id="12" name="Text 10">
             <a:extLst xmlns:a="http://schemas.openxmlformats.org/drawingml/2006/main">
               <a:ext uri="{FF2B5EF4-FFF2-40B4-BE49-F238E27FC236}">
-                <a16:creationId xmlns:a16="http://schemas.microsoft.com/office/drawing/2014/main" id="{B9FDC6CA-0936-465D-B789-0EA6E2526EF6}"/>
+                <a16:creationId xmlns:a16="http://schemas.microsoft.com/office/drawing/2014/main" id="{758F2E1D-EADD-45C3-B23E-70F7AD86A89F}"/>
               </a:ext>
             </a:extLst>
           </p:cNvPr>
@@ -12842,7 +12842,7 @@
           <p:cNvPr id="13" name="Text 11">
             <a:extLst xmlns:a="http://schemas.openxmlformats.org/drawingml/2006/main">
               <a:ext uri="{FF2B5EF4-FFF2-40B4-BE49-F238E27FC236}">
-                <a16:creationId xmlns:a16="http://schemas.microsoft.com/office/drawing/2014/main" id="{584576CD-984D-4D74-893A-8666F8047543}"/>
+                <a16:creationId xmlns:a16="http://schemas.microsoft.com/office/drawing/2014/main" id="{EE1B417C-6515-4AE8-9134-75FBD3509B1C}"/>
               </a:ext>
             </a:extLst>
           </p:cNvPr>
@@ -12889,7 +12889,7 @@
           <p:cNvPr id="14" name="Text 12">
             <a:extLst xmlns:a="http://schemas.openxmlformats.org/drawingml/2006/main">
               <a:ext uri="{FF2B5EF4-FFF2-40B4-BE49-F238E27FC236}">
-                <a16:creationId xmlns:a16="http://schemas.microsoft.com/office/drawing/2014/main" id="{B3AFB4DE-EA75-4CF7-B8B8-C40E225141DD}"/>
+                <a16:creationId xmlns:a16="http://schemas.microsoft.com/office/drawing/2014/main" id="{BA478217-96FD-4495-8B4E-7E79C9D3DE2F}"/>
               </a:ext>
             </a:extLst>
           </p:cNvPr>
@@ -12936,7 +12936,7 @@
           <p:cNvPr id="15" name="Shape 13">
             <a:extLst xmlns:a="http://schemas.openxmlformats.org/drawingml/2006/main">
               <a:ext uri="{FF2B5EF4-FFF2-40B4-BE49-F238E27FC236}">
-                <a16:creationId xmlns:a16="http://schemas.microsoft.com/office/drawing/2014/main" id="{C8F09428-5248-4044-BB9F-AC5E7E391525}"/>
+                <a16:creationId xmlns:a16="http://schemas.microsoft.com/office/drawing/2014/main" id="{80F7886C-3771-4796-B378-76222C806458}"/>
               </a:ext>
             </a:extLst>
           </p:cNvPr>
@@ -12971,7 +12971,7 @@
           <p:cNvPr id="16" name="Text 14">
             <a:extLst xmlns:a="http://schemas.openxmlformats.org/drawingml/2006/main">
               <a:ext uri="{FF2B5EF4-FFF2-40B4-BE49-F238E27FC236}">
-                <a16:creationId xmlns:a16="http://schemas.microsoft.com/office/drawing/2014/main" id="{58B1828E-C2C8-480B-95A7-2E9AE1F5B0AD}"/>
+                <a16:creationId xmlns:a16="http://schemas.microsoft.com/office/drawing/2014/main" id="{EB8BD112-0991-47CA-891E-4EC444594E6B}"/>
               </a:ext>
             </a:extLst>
           </p:cNvPr>
@@ -13018,7 +13018,7 @@
           <p:cNvPr id="17" name="Text 15">
             <a:extLst xmlns:a="http://schemas.openxmlformats.org/drawingml/2006/main">
               <a:ext uri="{FF2B5EF4-FFF2-40B4-BE49-F238E27FC236}">
-                <a16:creationId xmlns:a16="http://schemas.microsoft.com/office/drawing/2014/main" id="{3114A8A2-E4C0-4011-9E43-474E63C74B57}"/>
+                <a16:creationId xmlns:a16="http://schemas.microsoft.com/office/drawing/2014/main" id="{62B699CD-66B8-429D-AB76-80D5E97560EC}"/>
               </a:ext>
             </a:extLst>
           </p:cNvPr>
@@ -13065,7 +13065,7 @@
           <p:cNvPr id="18" name="Text 16">
             <a:extLst xmlns:a="http://schemas.openxmlformats.org/drawingml/2006/main">
               <a:ext uri="{FF2B5EF4-FFF2-40B4-BE49-F238E27FC236}">
-                <a16:creationId xmlns:a16="http://schemas.microsoft.com/office/drawing/2014/main" id="{E4270A79-46AB-40EC-A871-AE83566E1770}"/>
+                <a16:creationId xmlns:a16="http://schemas.microsoft.com/office/drawing/2014/main" id="{03B5C7AC-10B9-4C4F-9C8C-69A655B6E7A6}"/>
               </a:ext>
             </a:extLst>
           </p:cNvPr>
@@ -13112,7 +13112,7 @@
           <p:cNvPr id="19" name="Shape 17">
             <a:extLst xmlns:a="http://schemas.openxmlformats.org/drawingml/2006/main">
               <a:ext uri="{FF2B5EF4-FFF2-40B4-BE49-F238E27FC236}">
-                <a16:creationId xmlns:a16="http://schemas.microsoft.com/office/drawing/2014/main" id="{CDA4B715-AA3D-4537-B608-0DF371701001}"/>
+                <a16:creationId xmlns:a16="http://schemas.microsoft.com/office/drawing/2014/main" id="{53721670-ABF8-4E6A-BD3E-522D62A1D77D}"/>
               </a:ext>
             </a:extLst>
           </p:cNvPr>
@@ -13147,7 +13147,7 @@
           <p:cNvPr id="20" name="Text 18">
             <a:extLst xmlns:a="http://schemas.openxmlformats.org/drawingml/2006/main">
               <a:ext uri="{FF2B5EF4-FFF2-40B4-BE49-F238E27FC236}">
-                <a16:creationId xmlns:a16="http://schemas.microsoft.com/office/drawing/2014/main" id="{E1F58A26-D78E-4BB3-B266-0817902181A2}"/>
+                <a16:creationId xmlns:a16="http://schemas.microsoft.com/office/drawing/2014/main" id="{7B6932F9-5684-4AD6-9993-C426754F3BE6}"/>
               </a:ext>
             </a:extLst>
           </p:cNvPr>
@@ -13194,7 +13194,7 @@
           <p:cNvPr id="21" name="Text 19">
             <a:extLst xmlns:a="http://schemas.openxmlformats.org/drawingml/2006/main">
               <a:ext uri="{FF2B5EF4-FFF2-40B4-BE49-F238E27FC236}">
-                <a16:creationId xmlns:a16="http://schemas.microsoft.com/office/drawing/2014/main" id="{D905577F-29C6-4D01-BABE-93666BA5D1C3}"/>
+                <a16:creationId xmlns:a16="http://schemas.microsoft.com/office/drawing/2014/main" id="{EB62B5E0-73B6-4F11-8C5F-81BB975B86AA}"/>
               </a:ext>
             </a:extLst>
           </p:cNvPr>
@@ -13241,7 +13241,7 @@
           <p:cNvPr id="22" name="Text 20">
             <a:extLst xmlns:a="http://schemas.openxmlformats.org/drawingml/2006/main">
               <a:ext uri="{FF2B5EF4-FFF2-40B4-BE49-F238E27FC236}">
-                <a16:creationId xmlns:a16="http://schemas.microsoft.com/office/drawing/2014/main" id="{3D01CCB3-333D-42C6-828F-7C5AAFEC54B5}"/>
+                <a16:creationId xmlns:a16="http://schemas.microsoft.com/office/drawing/2014/main" id="{A843B18F-12D6-472C-8124-6F6B19E193A1}"/>
               </a:ext>
             </a:extLst>
           </p:cNvPr>
@@ -13288,7 +13288,7 @@
           <p:cNvPr id="23" name="Shape 21">
             <a:extLst xmlns:a="http://schemas.openxmlformats.org/drawingml/2006/main">
               <a:ext uri="{FF2B5EF4-FFF2-40B4-BE49-F238E27FC236}">
-                <a16:creationId xmlns:a16="http://schemas.microsoft.com/office/drawing/2014/main" id="{E4D31F94-7DBB-48BE-857D-FDFF59C8CC82}"/>
+                <a16:creationId xmlns:a16="http://schemas.microsoft.com/office/drawing/2014/main" id="{885120B5-8097-43B4-B0CC-2D4EA681C885}"/>
               </a:ext>
             </a:extLst>
           </p:cNvPr>
@@ -13323,7 +13323,7 @@
           <p:cNvPr id="24" name="Text 22">
             <a:extLst xmlns:a="http://schemas.openxmlformats.org/drawingml/2006/main">
               <a:ext uri="{FF2B5EF4-FFF2-40B4-BE49-F238E27FC236}">
-                <a16:creationId xmlns:a16="http://schemas.microsoft.com/office/drawing/2014/main" id="{49F49320-A33A-4463-8A1B-AA6E979BC143}"/>
+                <a16:creationId xmlns:a16="http://schemas.microsoft.com/office/drawing/2014/main" id="{ADA23B00-5192-439A-935C-2A45038E3F06}"/>
               </a:ext>
             </a:extLst>
           </p:cNvPr>
@@ -13370,7 +13370,7 @@
           <p:cNvPr id="25" name="Text 23">
             <a:extLst xmlns:a="http://schemas.openxmlformats.org/drawingml/2006/main">
               <a:ext uri="{FF2B5EF4-FFF2-40B4-BE49-F238E27FC236}">
-                <a16:creationId xmlns:a16="http://schemas.microsoft.com/office/drawing/2014/main" id="{658EA683-D4E2-4EFA-8A45-E8EE64648865}"/>
+                <a16:creationId xmlns:a16="http://schemas.microsoft.com/office/drawing/2014/main" id="{E8C0173B-8F44-4402-A743-CFE2B21F1D39}"/>
               </a:ext>
             </a:extLst>
           </p:cNvPr>
@@ -13417,7 +13417,7 @@
           <p:cNvPr id="26" name="Shape 24">
             <a:extLst xmlns:a="http://schemas.openxmlformats.org/drawingml/2006/main">
               <a:ext uri="{FF2B5EF4-FFF2-40B4-BE49-F238E27FC236}">
-                <a16:creationId xmlns:a16="http://schemas.microsoft.com/office/drawing/2014/main" id="{DD6452F1-D0C5-47A6-A714-1736A90B09BC}"/>
+                <a16:creationId xmlns:a16="http://schemas.microsoft.com/office/drawing/2014/main" id="{C2971E29-FDB6-4336-A62B-8DC28EFA9AE5}"/>
               </a:ext>
             </a:extLst>
           </p:cNvPr>
@@ -13452,7 +13452,7 @@
           <p:cNvPr id="27" name="Text 25">
             <a:extLst xmlns:a="http://schemas.openxmlformats.org/drawingml/2006/main">
               <a:ext uri="{FF2B5EF4-FFF2-40B4-BE49-F238E27FC236}">
-                <a16:creationId xmlns:a16="http://schemas.microsoft.com/office/drawing/2014/main" id="{30372B40-1B8A-472D-BB91-36D4040FF234}"/>
+                <a16:creationId xmlns:a16="http://schemas.microsoft.com/office/drawing/2014/main" id="{10F4805A-3583-4DF6-8E65-14CE24F1CFDA}"/>
               </a:ext>
             </a:extLst>
           </p:cNvPr>
@@ -13499,7 +13499,7 @@
           <p:cNvPr id="28" name="Shape 26">
             <a:extLst xmlns:a="http://schemas.openxmlformats.org/drawingml/2006/main">
               <a:ext uri="{FF2B5EF4-FFF2-40B4-BE49-F238E27FC236}">
-                <a16:creationId xmlns:a16="http://schemas.microsoft.com/office/drawing/2014/main" id="{E159F0E6-3CD1-473F-A90D-0C0001AC3DBA}"/>
+                <a16:creationId xmlns:a16="http://schemas.microsoft.com/office/drawing/2014/main" id="{3108CB52-B5A8-4CB7-AFDC-CCC7822C0177}"/>
               </a:ext>
             </a:extLst>
           </p:cNvPr>
@@ -13534,7 +13534,7 @@
           <p:cNvPr id="29" name="Text 27">
             <a:extLst xmlns:a="http://schemas.openxmlformats.org/drawingml/2006/main">
               <a:ext uri="{FF2B5EF4-FFF2-40B4-BE49-F238E27FC236}">
-                <a16:creationId xmlns:a16="http://schemas.microsoft.com/office/drawing/2014/main" id="{E5B1928C-2D36-46B6-AA5A-6F123DE34D24}"/>
+                <a16:creationId xmlns:a16="http://schemas.microsoft.com/office/drawing/2014/main" id="{3D9A3968-BE03-4F68-A918-0688740A0C14}"/>
               </a:ext>
             </a:extLst>
           </p:cNvPr>
@@ -13581,7 +13581,7 @@
           <p:cNvPr id="30" name="Text 28">
             <a:extLst xmlns:a="http://schemas.openxmlformats.org/drawingml/2006/main">
               <a:ext uri="{FF2B5EF4-FFF2-40B4-BE49-F238E27FC236}">
-                <a16:creationId xmlns:a16="http://schemas.microsoft.com/office/drawing/2014/main" id="{D7537487-69E6-485E-A05D-94EB61AEA8F5}"/>
+                <a16:creationId xmlns:a16="http://schemas.microsoft.com/office/drawing/2014/main" id="{206613B5-E0A4-4A86-9B16-0DB5B06C92E3}"/>
               </a:ext>
             </a:extLst>
           </p:cNvPr>
@@ -13628,7 +13628,7 @@
           <p:cNvPr id="31" name="Shape 29">
             <a:extLst xmlns:a="http://schemas.openxmlformats.org/drawingml/2006/main">
               <a:ext uri="{FF2B5EF4-FFF2-40B4-BE49-F238E27FC236}">
-                <a16:creationId xmlns:a16="http://schemas.microsoft.com/office/drawing/2014/main" id="{E10178AD-F621-4A74-95B9-255EB87AA548}"/>
+                <a16:creationId xmlns:a16="http://schemas.microsoft.com/office/drawing/2014/main" id="{B2875348-47CC-4CE4-BE3E-8D9D63374F6A}"/>
               </a:ext>
             </a:extLst>
           </p:cNvPr>
@@ -13663,7 +13663,7 @@
           <p:cNvPr id="32" name="Text 30">
             <a:extLst xmlns:a="http://schemas.openxmlformats.org/drawingml/2006/main">
               <a:ext uri="{FF2B5EF4-FFF2-40B4-BE49-F238E27FC236}">
-                <a16:creationId xmlns:a16="http://schemas.microsoft.com/office/drawing/2014/main" id="{89D5326C-535C-470C-942C-2ECD866C49B9}"/>
+                <a16:creationId xmlns:a16="http://schemas.microsoft.com/office/drawing/2014/main" id="{30C34956-457F-4F97-965B-24B1DB854D03}"/>
               </a:ext>
             </a:extLst>
           </p:cNvPr>
@@ -13710,7 +13710,7 @@
           <p:cNvPr id="33" name="Shape 31">
             <a:extLst xmlns:a="http://schemas.openxmlformats.org/drawingml/2006/main">
               <a:ext uri="{FF2B5EF4-FFF2-40B4-BE49-F238E27FC236}">
-                <a16:creationId xmlns:a16="http://schemas.microsoft.com/office/drawing/2014/main" id="{ADF3CE87-8829-4ECF-86F2-71F2BBAC0B19}"/>
+                <a16:creationId xmlns:a16="http://schemas.microsoft.com/office/drawing/2014/main" id="{5531EB6D-87D2-4F04-A0F0-9F28DFE307C6}"/>
               </a:ext>
             </a:extLst>
           </p:cNvPr>
@@ -13745,7 +13745,7 @@
           <p:cNvPr id="34" name="Text 32">
             <a:extLst xmlns:a="http://schemas.openxmlformats.org/drawingml/2006/main">
               <a:ext uri="{FF2B5EF4-FFF2-40B4-BE49-F238E27FC236}">
-                <a16:creationId xmlns:a16="http://schemas.microsoft.com/office/drawing/2014/main" id="{44114EAF-EF67-4A31-8C8B-F76DB7B1AA11}"/>
+                <a16:creationId xmlns:a16="http://schemas.microsoft.com/office/drawing/2014/main" id="{F33C691C-BB94-43A8-94A5-869DB57BE8E4}"/>
               </a:ext>
             </a:extLst>
           </p:cNvPr>
@@ -13792,7 +13792,7 @@
           <p:cNvPr id="35" name="Text 33">
             <a:extLst xmlns:a="http://schemas.openxmlformats.org/drawingml/2006/main">
               <a:ext uri="{FF2B5EF4-FFF2-40B4-BE49-F238E27FC236}">
-                <a16:creationId xmlns:a16="http://schemas.microsoft.com/office/drawing/2014/main" id="{974AF44F-A534-4176-A7F3-AD67FBFB7F9C}"/>
+                <a16:creationId xmlns:a16="http://schemas.microsoft.com/office/drawing/2014/main" id="{FC20E7A3-E0A1-4166-A8A7-942E6A4CE33E}"/>
               </a:ext>
             </a:extLst>
           </p:cNvPr>
@@ -13839,7 +13839,7 @@
           <p:cNvPr id="36" name="Shape 34">
             <a:extLst xmlns:a="http://schemas.openxmlformats.org/drawingml/2006/main">
               <a:ext uri="{FF2B5EF4-FFF2-40B4-BE49-F238E27FC236}">
-                <a16:creationId xmlns:a16="http://schemas.microsoft.com/office/drawing/2014/main" id="{39B47F02-0284-4376-96FC-EBF82283F2F8}"/>
+                <a16:creationId xmlns:a16="http://schemas.microsoft.com/office/drawing/2014/main" id="{B23E8660-D02A-4A3E-BEA0-1638E1732ED0}"/>
               </a:ext>
             </a:extLst>
           </p:cNvPr>
@@ -13874,7 +13874,7 @@
           <p:cNvPr id="37" name="Text 35">
             <a:extLst xmlns:a="http://schemas.openxmlformats.org/drawingml/2006/main">
               <a:ext uri="{FF2B5EF4-FFF2-40B4-BE49-F238E27FC236}">
-                <a16:creationId xmlns:a16="http://schemas.microsoft.com/office/drawing/2014/main" id="{9BE47B3E-CFB9-4F0F-A548-8A093514F2C7}"/>
+                <a16:creationId xmlns:a16="http://schemas.microsoft.com/office/drawing/2014/main" id="{58A80F6A-AED6-4348-99DB-A8352E5F3E59}"/>
               </a:ext>
             </a:extLst>
           </p:cNvPr>
@@ -13921,7 +13921,7 @@
           <p:cNvPr id="38" name="Shape 36">
             <a:extLst xmlns:a="http://schemas.openxmlformats.org/drawingml/2006/main">
               <a:ext uri="{FF2B5EF4-FFF2-40B4-BE49-F238E27FC236}">
-                <a16:creationId xmlns:a16="http://schemas.microsoft.com/office/drawing/2014/main" id="{8A88C545-1B32-4882-AC54-ABE4F8B37AB6}"/>
+                <a16:creationId xmlns:a16="http://schemas.microsoft.com/office/drawing/2014/main" id="{243FE7FB-95BB-4370-AA9B-20B4DC18E4AD}"/>
               </a:ext>
             </a:extLst>
           </p:cNvPr>
@@ -13956,7 +13956,7 @@
           <p:cNvPr id="39" name="Text 37">
             <a:extLst xmlns:a="http://schemas.openxmlformats.org/drawingml/2006/main">
               <a:ext uri="{FF2B5EF4-FFF2-40B4-BE49-F238E27FC236}">
-                <a16:creationId xmlns:a16="http://schemas.microsoft.com/office/drawing/2014/main" id="{305F94EE-CF30-4E2D-B5ED-CE233192F8E5}"/>
+                <a16:creationId xmlns:a16="http://schemas.microsoft.com/office/drawing/2014/main" id="{322547DC-12BE-4A70-B476-A325ED083288}"/>
               </a:ext>
             </a:extLst>
           </p:cNvPr>
@@ -14003,7 +14003,7 @@
           <p:cNvPr id="40" name="Text 38">
             <a:extLst xmlns:a="http://schemas.openxmlformats.org/drawingml/2006/main">
               <a:ext uri="{FF2B5EF4-FFF2-40B4-BE49-F238E27FC236}">
-                <a16:creationId xmlns:a16="http://schemas.microsoft.com/office/drawing/2014/main" id="{1D80217C-6678-405B-81DF-B511F963103E}"/>
+                <a16:creationId xmlns:a16="http://schemas.microsoft.com/office/drawing/2014/main" id="{D1AA9193-25D9-443D-99E2-FF4F57F10991}"/>
               </a:ext>
             </a:extLst>
           </p:cNvPr>
@@ -14050,7 +14050,7 @@
           <p:cNvPr id="41" name="Text 39">
             <a:extLst xmlns:a="http://schemas.openxmlformats.org/drawingml/2006/main">
               <a:ext uri="{FF2B5EF4-FFF2-40B4-BE49-F238E27FC236}">
-                <a16:creationId xmlns:a16="http://schemas.microsoft.com/office/drawing/2014/main" id="{4F6C43E0-E0ED-40D6-94B8-6CCC2C476764}"/>
+                <a16:creationId xmlns:a16="http://schemas.microsoft.com/office/drawing/2014/main" id="{3936DA71-5CF1-4333-B682-D1028141F373}"/>
               </a:ext>
             </a:extLst>
           </p:cNvPr>
@@ -14095,7 +14095,7 @@
     </p:spTree>
     <p:extLst>
       <p:ext uri="{BB962C8B-B14F-4D97-AF65-F5344CB8AC3E}">
-        <p14:creationId xmlns:p14="http://schemas.microsoft.com/office/powerpoint/2010/main" val="624222442"/>
+        <p14:creationId xmlns:p14="http://schemas.microsoft.com/office/powerpoint/2010/main" val="1198293313"/>
       </p:ext>
     </p:extLst>
   </p:cSld>
@@ -14126,7 +14126,7 @@
           <p:cNvPr id="2" name="Text 0">
             <a:extLst xmlns:a="http://schemas.openxmlformats.org/drawingml/2006/main">
               <a:ext uri="{FF2B5EF4-FFF2-40B4-BE49-F238E27FC236}">
-                <a16:creationId xmlns:a16="http://schemas.microsoft.com/office/drawing/2014/main" id="{60ACCA45-73DA-4B04-B771-B42F529A1E04}"/>
+                <a16:creationId xmlns:a16="http://schemas.microsoft.com/office/drawing/2014/main" id="{59BB1F91-DC85-4E0C-9964-167002CD2F0A}"/>
               </a:ext>
             </a:extLst>
           </p:cNvPr>
@@ -14173,7 +14173,7 @@
           <p:cNvPr id="3" name="Text 1">
             <a:extLst xmlns:a="http://schemas.openxmlformats.org/drawingml/2006/main">
               <a:ext uri="{FF2B5EF4-FFF2-40B4-BE49-F238E27FC236}">
-                <a16:creationId xmlns:a16="http://schemas.microsoft.com/office/drawing/2014/main" id="{FA9013C9-05B5-4496-8A8E-7D3DDE43F633}"/>
+                <a16:creationId xmlns:a16="http://schemas.microsoft.com/office/drawing/2014/main" id="{63372A9D-56B0-4CD8-85ED-4C02677F12A0}"/>
               </a:ext>
             </a:extLst>
           </p:cNvPr>
@@ -14220,7 +14220,7 @@
           <p:cNvPr id="4" name="Shape 2">
             <a:extLst xmlns:a="http://schemas.openxmlformats.org/drawingml/2006/main">
               <a:ext uri="{FF2B5EF4-FFF2-40B4-BE49-F238E27FC236}">
-                <a16:creationId xmlns:a16="http://schemas.microsoft.com/office/drawing/2014/main" id="{51AFA4C1-759B-4A80-BAAD-C85D946930EA}"/>
+                <a16:creationId xmlns:a16="http://schemas.microsoft.com/office/drawing/2014/main" id="{2D744AA7-DAE1-4EC2-AE0A-F772CF9FDF17}"/>
               </a:ext>
             </a:extLst>
           </p:cNvPr>
@@ -14255,7 +14255,7 @@
           <p:cNvPr id="5" name="Text 3">
             <a:extLst xmlns:a="http://schemas.openxmlformats.org/drawingml/2006/main">
               <a:ext uri="{FF2B5EF4-FFF2-40B4-BE49-F238E27FC236}">
-                <a16:creationId xmlns:a16="http://schemas.microsoft.com/office/drawing/2014/main" id="{72473805-EF56-47E9-817D-17D62E679938}"/>
+                <a16:creationId xmlns:a16="http://schemas.microsoft.com/office/drawing/2014/main" id="{3624463A-3C6E-4C15-8DFB-017EF6CC3A45}"/>
               </a:ext>
             </a:extLst>
           </p:cNvPr>
@@ -14302,7 +14302,7 @@
           <p:cNvPr id="6" name="Shape 4">
             <a:extLst xmlns:a="http://schemas.openxmlformats.org/drawingml/2006/main">
               <a:ext uri="{FF2B5EF4-FFF2-40B4-BE49-F238E27FC236}">
-                <a16:creationId xmlns:a16="http://schemas.microsoft.com/office/drawing/2014/main" id="{CC625DFC-034B-49EF-8460-DEFCD4A6831E}"/>
+                <a16:creationId xmlns:a16="http://schemas.microsoft.com/office/drawing/2014/main" id="{BB000874-692B-4EBA-9675-8B965DB6118D}"/>
               </a:ext>
             </a:extLst>
           </p:cNvPr>
@@ -14333,7 +14333,7 @@
           <p:cNvPr id="7" name="Shape 5">
             <a:extLst xmlns:a="http://schemas.openxmlformats.org/drawingml/2006/main">
               <a:ext uri="{FF2B5EF4-FFF2-40B4-BE49-F238E27FC236}">
-                <a16:creationId xmlns:a16="http://schemas.microsoft.com/office/drawing/2014/main" id="{E3124539-1042-4D7E-B2C2-712EDD945FCC}"/>
+                <a16:creationId xmlns:a16="http://schemas.microsoft.com/office/drawing/2014/main" id="{8E5378F8-0B29-48D0-9C59-22D39FF10084}"/>
               </a:ext>
             </a:extLst>
           </p:cNvPr>
@@ -14368,7 +14368,7 @@
           <p:cNvPr id="8" name="Text 6">
             <a:extLst xmlns:a="http://schemas.openxmlformats.org/drawingml/2006/main">
               <a:ext uri="{FF2B5EF4-FFF2-40B4-BE49-F238E27FC236}">
-                <a16:creationId xmlns:a16="http://schemas.microsoft.com/office/drawing/2014/main" id="{B8BC1A84-F86A-4CA6-BC18-1D6C4D1AD840}"/>
+                <a16:creationId xmlns:a16="http://schemas.microsoft.com/office/drawing/2014/main" id="{225A7A29-82A6-47FC-9CFA-7A9C186DDE4E}"/>
               </a:ext>
             </a:extLst>
           </p:cNvPr>
@@ -14415,7 +14415,7 @@
           <p:cNvPr id="9" name="Text 7">
             <a:extLst xmlns:a="http://schemas.openxmlformats.org/drawingml/2006/main">
               <a:ext uri="{FF2B5EF4-FFF2-40B4-BE49-F238E27FC236}">
-                <a16:creationId xmlns:a16="http://schemas.microsoft.com/office/drawing/2014/main" id="{55DCD93E-4B68-42F6-8656-2FDFBBDB42F6}"/>
+                <a16:creationId xmlns:a16="http://schemas.microsoft.com/office/drawing/2014/main" id="{68998B30-86A7-41AB-8C00-9FF1BF42E57E}"/>
               </a:ext>
             </a:extLst>
           </p:cNvPr>
@@ -14462,7 +14462,7 @@
           <p:cNvPr id="10" name="Text 8">
             <a:extLst xmlns:a="http://schemas.openxmlformats.org/drawingml/2006/main">
               <a:ext uri="{FF2B5EF4-FFF2-40B4-BE49-F238E27FC236}">
-                <a16:creationId xmlns:a16="http://schemas.microsoft.com/office/drawing/2014/main" id="{0EFEB569-0680-44A3-AE36-0EC600EB4080}"/>
+                <a16:creationId xmlns:a16="http://schemas.microsoft.com/office/drawing/2014/main" id="{45F1DCCE-373C-485C-B958-C281BC38C574}"/>
               </a:ext>
             </a:extLst>
           </p:cNvPr>
@@ -14509,7 +14509,7 @@
           <p:cNvPr id="11" name="Text 9">
             <a:extLst xmlns:a="http://schemas.openxmlformats.org/drawingml/2006/main">
               <a:ext uri="{FF2B5EF4-FFF2-40B4-BE49-F238E27FC236}">
-                <a16:creationId xmlns:a16="http://schemas.microsoft.com/office/drawing/2014/main" id="{AB33CC3C-4CB8-434E-AC45-F409470474D9}"/>
+                <a16:creationId xmlns:a16="http://schemas.microsoft.com/office/drawing/2014/main" id="{7F7BD9DF-0DA7-4D4A-9ABE-A68A48C69E6C}"/>
               </a:ext>
             </a:extLst>
           </p:cNvPr>
@@ -14556,7 +14556,7 @@
           <p:cNvPr id="12" name="Text 10">
             <a:extLst xmlns:a="http://schemas.openxmlformats.org/drawingml/2006/main">
               <a:ext uri="{FF2B5EF4-FFF2-40B4-BE49-F238E27FC236}">
-                <a16:creationId xmlns:a16="http://schemas.microsoft.com/office/drawing/2014/main" id="{311188DE-38DE-426C-A9F9-6D28BB9C1353}"/>
+                <a16:creationId xmlns:a16="http://schemas.microsoft.com/office/drawing/2014/main" id="{3A3D56CF-88A5-4C3A-8B1B-510F8157F9FB}"/>
               </a:ext>
             </a:extLst>
           </p:cNvPr>
@@ -14603,7 +14603,7 @@
           <p:cNvPr id="13" name="Text 11">
             <a:extLst xmlns:a="http://schemas.openxmlformats.org/drawingml/2006/main">
               <a:ext uri="{FF2B5EF4-FFF2-40B4-BE49-F238E27FC236}">
-                <a16:creationId xmlns:a16="http://schemas.microsoft.com/office/drawing/2014/main" id="{73C62BE6-2361-4E2D-95C6-19CF76267120}"/>
+                <a16:creationId xmlns:a16="http://schemas.microsoft.com/office/drawing/2014/main" id="{FD522886-EED4-455D-9316-A1DF754F136A}"/>
               </a:ext>
             </a:extLst>
           </p:cNvPr>
@@ -14650,7 +14650,7 @@
           <p:cNvPr id="14" name="Shape 12">
             <a:extLst xmlns:a="http://schemas.openxmlformats.org/drawingml/2006/main">
               <a:ext uri="{FF2B5EF4-FFF2-40B4-BE49-F238E27FC236}">
-                <a16:creationId xmlns:a16="http://schemas.microsoft.com/office/drawing/2014/main" id="{1E6A8FF7-C3B0-4EFE-89BE-420616CBE81B}"/>
+                <a16:creationId xmlns:a16="http://schemas.microsoft.com/office/drawing/2014/main" id="{DBACD16A-B908-4300-BCCF-B600FB8681A2}"/>
               </a:ext>
             </a:extLst>
           </p:cNvPr>
@@ -14685,7 +14685,7 @@
           <p:cNvPr id="15" name="Text 13">
             <a:extLst xmlns:a="http://schemas.openxmlformats.org/drawingml/2006/main">
               <a:ext uri="{FF2B5EF4-FFF2-40B4-BE49-F238E27FC236}">
-                <a16:creationId xmlns:a16="http://schemas.microsoft.com/office/drawing/2014/main" id="{72124C57-1D7F-4420-81B8-96BE27E67100}"/>
+                <a16:creationId xmlns:a16="http://schemas.microsoft.com/office/drawing/2014/main" id="{CE87C3C6-36D5-4A4F-AE41-3C27235F7442}"/>
               </a:ext>
             </a:extLst>
           </p:cNvPr>
@@ -14732,7 +14732,7 @@
           <p:cNvPr id="16" name="Text 14">
             <a:extLst xmlns:a="http://schemas.openxmlformats.org/drawingml/2006/main">
               <a:ext uri="{FF2B5EF4-FFF2-40B4-BE49-F238E27FC236}">
-                <a16:creationId xmlns:a16="http://schemas.microsoft.com/office/drawing/2014/main" id="{57ABD51D-4C5B-4139-A7DA-9CEE8E44FD89}"/>
+                <a16:creationId xmlns:a16="http://schemas.microsoft.com/office/drawing/2014/main" id="{7471F178-CFA0-449F-A38F-E7C4AFF81D85}"/>
               </a:ext>
             </a:extLst>
           </p:cNvPr>
@@ -14779,7 +14779,7 @@
           <p:cNvPr id="17" name="Text 15">
             <a:extLst xmlns:a="http://schemas.openxmlformats.org/drawingml/2006/main">
               <a:ext uri="{FF2B5EF4-FFF2-40B4-BE49-F238E27FC236}">
-                <a16:creationId xmlns:a16="http://schemas.microsoft.com/office/drawing/2014/main" id="{9860D9B3-D888-423A-AED8-AD7CB7485C5B}"/>
+                <a16:creationId xmlns:a16="http://schemas.microsoft.com/office/drawing/2014/main" id="{3AAE43F9-6070-47E7-995D-09561CD21458}"/>
               </a:ext>
             </a:extLst>
           </p:cNvPr>
@@ -14826,7 +14826,7 @@
           <p:cNvPr id="18" name="Text 16">
             <a:extLst xmlns:a="http://schemas.openxmlformats.org/drawingml/2006/main">
               <a:ext uri="{FF2B5EF4-FFF2-40B4-BE49-F238E27FC236}">
-                <a16:creationId xmlns:a16="http://schemas.microsoft.com/office/drawing/2014/main" id="{B73AC8A0-1203-4415-8F46-C4B0EB4DF6D3}"/>
+                <a16:creationId xmlns:a16="http://schemas.microsoft.com/office/drawing/2014/main" id="{27DE165B-5DDA-4B7A-B4EB-3A90C07EC705}"/>
               </a:ext>
             </a:extLst>
           </p:cNvPr>
@@ -14873,7 +14873,7 @@
           <p:cNvPr id="19" name="Text 17">
             <a:extLst xmlns:a="http://schemas.openxmlformats.org/drawingml/2006/main">
               <a:ext uri="{FF2B5EF4-FFF2-40B4-BE49-F238E27FC236}">
-                <a16:creationId xmlns:a16="http://schemas.microsoft.com/office/drawing/2014/main" id="{3ADEB647-970E-4E63-B24A-2F7586D68D14}"/>
+                <a16:creationId xmlns:a16="http://schemas.microsoft.com/office/drawing/2014/main" id="{99D5CEF8-3368-4F44-980A-7A6C3D9D9D8E}"/>
               </a:ext>
             </a:extLst>
           </p:cNvPr>
@@ -14920,7 +14920,7 @@
           <p:cNvPr id="20" name="Text 18">
             <a:extLst xmlns:a="http://schemas.openxmlformats.org/drawingml/2006/main">
               <a:ext uri="{FF2B5EF4-FFF2-40B4-BE49-F238E27FC236}">
-                <a16:creationId xmlns:a16="http://schemas.microsoft.com/office/drawing/2014/main" id="{38BD3C1A-A80A-42ED-8221-CFE3FD99822B}"/>
+                <a16:creationId xmlns:a16="http://schemas.microsoft.com/office/drawing/2014/main" id="{78B441E9-28B2-4652-89E9-EAB0C26A32F2}"/>
               </a:ext>
             </a:extLst>
           </p:cNvPr>
@@ -14967,7 +14967,7 @@
           <p:cNvPr id="21" name="Shape 19">
             <a:extLst xmlns:a="http://schemas.openxmlformats.org/drawingml/2006/main">
               <a:ext uri="{FF2B5EF4-FFF2-40B4-BE49-F238E27FC236}">
-                <a16:creationId xmlns:a16="http://schemas.microsoft.com/office/drawing/2014/main" id="{3B1DA6CA-6A56-4066-BC1C-281745B80377}"/>
+                <a16:creationId xmlns:a16="http://schemas.microsoft.com/office/drawing/2014/main" id="{509415B7-E95A-4699-A283-14782D9AF613}"/>
               </a:ext>
             </a:extLst>
           </p:cNvPr>
@@ -15002,7 +15002,7 @@
           <p:cNvPr id="22" name="Text 20">
             <a:extLst xmlns:a="http://schemas.openxmlformats.org/drawingml/2006/main">
               <a:ext uri="{FF2B5EF4-FFF2-40B4-BE49-F238E27FC236}">
-                <a16:creationId xmlns:a16="http://schemas.microsoft.com/office/drawing/2014/main" id="{E89BE428-6777-4D01-B47C-7C1729480A08}"/>
+                <a16:creationId xmlns:a16="http://schemas.microsoft.com/office/drawing/2014/main" id="{D5AA015B-0C11-4B40-B47A-4AA44124715D}"/>
               </a:ext>
             </a:extLst>
           </p:cNvPr>
@@ -15049,7 +15049,7 @@
           <p:cNvPr id="23" name="Text 21">
             <a:extLst xmlns:a="http://schemas.openxmlformats.org/drawingml/2006/main">
               <a:ext uri="{FF2B5EF4-FFF2-40B4-BE49-F238E27FC236}">
-                <a16:creationId xmlns:a16="http://schemas.microsoft.com/office/drawing/2014/main" id="{6E02075A-C5DA-4CB6-B561-5EC24F1D206F}"/>
+                <a16:creationId xmlns:a16="http://schemas.microsoft.com/office/drawing/2014/main" id="{31BE1885-E877-41B5-A573-67D26CC74334}"/>
               </a:ext>
             </a:extLst>
           </p:cNvPr>
@@ -15096,7 +15096,7 @@
           <p:cNvPr id="24" name="Text 22">
             <a:extLst xmlns:a="http://schemas.openxmlformats.org/drawingml/2006/main">
               <a:ext uri="{FF2B5EF4-FFF2-40B4-BE49-F238E27FC236}">
-                <a16:creationId xmlns:a16="http://schemas.microsoft.com/office/drawing/2014/main" id="{E6735AD3-D72E-4255-9547-D04B2BACE7F6}"/>
+                <a16:creationId xmlns:a16="http://schemas.microsoft.com/office/drawing/2014/main" id="{145F2439-F717-4124-A43C-89EC148904AE}"/>
               </a:ext>
             </a:extLst>
           </p:cNvPr>
@@ -15143,7 +15143,7 @@
           <p:cNvPr id="25" name="Text 23">
             <a:extLst xmlns:a="http://schemas.openxmlformats.org/drawingml/2006/main">
               <a:ext uri="{FF2B5EF4-FFF2-40B4-BE49-F238E27FC236}">
-                <a16:creationId xmlns:a16="http://schemas.microsoft.com/office/drawing/2014/main" id="{C6CCC712-FC8C-43B7-8315-041000B2664B}"/>
+                <a16:creationId xmlns:a16="http://schemas.microsoft.com/office/drawing/2014/main" id="{8566522E-DC59-4501-A9C4-D602297B7A9E}"/>
               </a:ext>
             </a:extLst>
           </p:cNvPr>
@@ -15190,7 +15190,7 @@
           <p:cNvPr id="26" name="Text 24">
             <a:extLst xmlns:a="http://schemas.openxmlformats.org/drawingml/2006/main">
               <a:ext uri="{FF2B5EF4-FFF2-40B4-BE49-F238E27FC236}">
-                <a16:creationId xmlns:a16="http://schemas.microsoft.com/office/drawing/2014/main" id="{5AA4CF8B-BC94-4B99-9CA0-83037041322A}"/>
+                <a16:creationId xmlns:a16="http://schemas.microsoft.com/office/drawing/2014/main" id="{3D082562-4D85-4A75-8E31-A294FB7741B3}"/>
               </a:ext>
             </a:extLst>
           </p:cNvPr>
@@ -15237,7 +15237,7 @@
           <p:cNvPr id="27" name="Text 25">
             <a:extLst xmlns:a="http://schemas.openxmlformats.org/drawingml/2006/main">
               <a:ext uri="{FF2B5EF4-FFF2-40B4-BE49-F238E27FC236}">
-                <a16:creationId xmlns:a16="http://schemas.microsoft.com/office/drawing/2014/main" id="{B7E1A38E-8631-4939-A363-4F8CAA89D143}"/>
+                <a16:creationId xmlns:a16="http://schemas.microsoft.com/office/drawing/2014/main" id="{ACEB0BBA-200A-4EF1-A77D-117A9094F0A7}"/>
               </a:ext>
             </a:extLst>
           </p:cNvPr>
@@ -15284,7 +15284,7 @@
           <p:cNvPr id="28" name="Text 26">
             <a:extLst xmlns:a="http://schemas.openxmlformats.org/drawingml/2006/main">
               <a:ext uri="{FF2B5EF4-FFF2-40B4-BE49-F238E27FC236}">
-                <a16:creationId xmlns:a16="http://schemas.microsoft.com/office/drawing/2014/main" id="{B280E087-C5B1-4BEC-A38B-EB7397E61E93}"/>
+                <a16:creationId xmlns:a16="http://schemas.microsoft.com/office/drawing/2014/main" id="{65D79CFB-ACE2-4F98-9030-3A8A6B429CAA}"/>
               </a:ext>
             </a:extLst>
           </p:cNvPr>
@@ -15331,7 +15331,7 @@
           <p:cNvPr id="29" name="Text 27">
             <a:extLst xmlns:a="http://schemas.openxmlformats.org/drawingml/2006/main">
               <a:ext uri="{FF2B5EF4-FFF2-40B4-BE49-F238E27FC236}">
-                <a16:creationId xmlns:a16="http://schemas.microsoft.com/office/drawing/2014/main" id="{60997D95-18D6-4A10-86D5-3381B78D95EC}"/>
+                <a16:creationId xmlns:a16="http://schemas.microsoft.com/office/drawing/2014/main" id="{CA89C8DC-8EC0-4967-91E6-D9BB7A813303}"/>
               </a:ext>
             </a:extLst>
           </p:cNvPr>
@@ -15378,7 +15378,7 @@
           <p:cNvPr id="30" name="Text 28">
             <a:extLst xmlns:a="http://schemas.openxmlformats.org/drawingml/2006/main">
               <a:ext uri="{FF2B5EF4-FFF2-40B4-BE49-F238E27FC236}">
-                <a16:creationId xmlns:a16="http://schemas.microsoft.com/office/drawing/2014/main" id="{76F42855-B8B2-47E7-A92C-E78E7DCAB401}"/>
+                <a16:creationId xmlns:a16="http://schemas.microsoft.com/office/drawing/2014/main" id="{CA4E9F97-D49C-4DA6-B79A-E3E24722C742}"/>
               </a:ext>
             </a:extLst>
           </p:cNvPr>
@@ -15423,7 +15423,7 @@
     </p:spTree>
     <p:extLst>
       <p:ext uri="{BB962C8B-B14F-4D97-AF65-F5344CB8AC3E}">
-        <p14:creationId xmlns:p14="http://schemas.microsoft.com/office/powerpoint/2010/main" val="1877577489"/>
+        <p14:creationId xmlns:p14="http://schemas.microsoft.com/office/powerpoint/2010/main" val="117684250"/>
       </p:ext>
     </p:extLst>
   </p:cSld>
@@ -15454,7 +15454,7 @@
           <p:cNvPr id="2" name="Text 0">
             <a:extLst xmlns:a="http://schemas.openxmlformats.org/drawingml/2006/main">
               <a:ext uri="{FF2B5EF4-FFF2-40B4-BE49-F238E27FC236}">
-                <a16:creationId xmlns:a16="http://schemas.microsoft.com/office/drawing/2014/main" id="{D772E54C-9199-496E-BB68-F8EDB100D311}"/>
+                <a16:creationId xmlns:a16="http://schemas.microsoft.com/office/drawing/2014/main" id="{9AFFC8AF-7A1C-4F76-9FDB-078BA1AEC467}"/>
               </a:ext>
             </a:extLst>
           </p:cNvPr>
@@ -15501,7 +15501,7 @@
           <p:cNvPr id="3" name="Text 1">
             <a:extLst xmlns:a="http://schemas.openxmlformats.org/drawingml/2006/main">
               <a:ext uri="{FF2B5EF4-FFF2-40B4-BE49-F238E27FC236}">
-                <a16:creationId xmlns:a16="http://schemas.microsoft.com/office/drawing/2014/main" id="{8E617EB5-5A0B-4730-BA7A-B83566DB40D8}"/>
+                <a16:creationId xmlns:a16="http://schemas.microsoft.com/office/drawing/2014/main" id="{B821E6E2-C518-47D7-80B2-3AD7DBA00C32}"/>
               </a:ext>
             </a:extLst>
           </p:cNvPr>
@@ -15548,7 +15548,7 @@
           <p:cNvPr id="4" name="Shape 2">
             <a:extLst xmlns:a="http://schemas.openxmlformats.org/drawingml/2006/main">
               <a:ext uri="{FF2B5EF4-FFF2-40B4-BE49-F238E27FC236}">
-                <a16:creationId xmlns:a16="http://schemas.microsoft.com/office/drawing/2014/main" id="{B73BA6B2-3EB3-47C3-9722-8334D162CC86}"/>
+                <a16:creationId xmlns:a16="http://schemas.microsoft.com/office/drawing/2014/main" id="{2D84BEDC-F3AB-4348-AC7E-5F4B849C57A5}"/>
               </a:ext>
             </a:extLst>
           </p:cNvPr>
@@ -15583,7 +15583,7 @@
           <p:cNvPr id="5" name="Text 3">
             <a:extLst xmlns:a="http://schemas.openxmlformats.org/drawingml/2006/main">
               <a:ext uri="{FF2B5EF4-FFF2-40B4-BE49-F238E27FC236}">
-                <a16:creationId xmlns:a16="http://schemas.microsoft.com/office/drawing/2014/main" id="{A43BF4AE-1706-4390-8A0C-C89E06BE0EC1}"/>
+                <a16:creationId xmlns:a16="http://schemas.microsoft.com/office/drawing/2014/main" id="{8CEBACD7-7CA3-447E-B2C5-70B9C3AA9A86}"/>
               </a:ext>
             </a:extLst>
           </p:cNvPr>
@@ -15630,7 +15630,7 @@
           <p:cNvPr id="6" name="Shape 4">
             <a:extLst xmlns:a="http://schemas.openxmlformats.org/drawingml/2006/main">
               <a:ext uri="{FF2B5EF4-FFF2-40B4-BE49-F238E27FC236}">
-                <a16:creationId xmlns:a16="http://schemas.microsoft.com/office/drawing/2014/main" id="{7CC7DABC-B515-408F-9ABD-7248A2F00176}"/>
+                <a16:creationId xmlns:a16="http://schemas.microsoft.com/office/drawing/2014/main" id="{40CC8638-1CEE-4ABD-AB35-A33EA59E5D67}"/>
               </a:ext>
             </a:extLst>
           </p:cNvPr>
@@ -15661,7 +15661,7 @@
           <p:cNvPr id="7" name="Shape 5">
             <a:extLst xmlns:a="http://schemas.openxmlformats.org/drawingml/2006/main">
               <a:ext uri="{FF2B5EF4-FFF2-40B4-BE49-F238E27FC236}">
-                <a16:creationId xmlns:a16="http://schemas.microsoft.com/office/drawing/2014/main" id="{FDEE9ACD-E367-407A-8AD6-E68DBEDE9F06}"/>
+                <a16:creationId xmlns:a16="http://schemas.microsoft.com/office/drawing/2014/main" id="{8DA11244-0657-45B1-90C7-14FA6E98DAB2}"/>
               </a:ext>
             </a:extLst>
           </p:cNvPr>
@@ -15696,7 +15696,7 @@
           <p:cNvPr id="8" name="Text 6">
             <a:extLst xmlns:a="http://schemas.openxmlformats.org/drawingml/2006/main">
               <a:ext uri="{FF2B5EF4-FFF2-40B4-BE49-F238E27FC236}">
-                <a16:creationId xmlns:a16="http://schemas.microsoft.com/office/drawing/2014/main" id="{717BFBFB-94D2-4500-BC21-F2F6AF3804DD}"/>
+                <a16:creationId xmlns:a16="http://schemas.microsoft.com/office/drawing/2014/main" id="{B8A9D9B1-9DEA-459B-9BC7-B6C4A43FF986}"/>
               </a:ext>
             </a:extLst>
           </p:cNvPr>
@@ -15743,7 +15743,7 @@
           <p:cNvPr id="9" name="Shape 7">
             <a:extLst xmlns:a="http://schemas.openxmlformats.org/drawingml/2006/main">
               <a:ext uri="{FF2B5EF4-FFF2-40B4-BE49-F238E27FC236}">
-                <a16:creationId xmlns:a16="http://schemas.microsoft.com/office/drawing/2014/main" id="{CF713A71-3EE9-4ADE-AC3F-1908BD677520}"/>
+                <a16:creationId xmlns:a16="http://schemas.microsoft.com/office/drawing/2014/main" id="{08A0ABC1-5A92-4CE8-8E8F-9CC49FFF242C}"/>
               </a:ext>
             </a:extLst>
           </p:cNvPr>
@@ -15778,7 +15778,7 @@
           <p:cNvPr id="10" name="Text 8">
             <a:extLst xmlns:a="http://schemas.openxmlformats.org/drawingml/2006/main">
               <a:ext uri="{FF2B5EF4-FFF2-40B4-BE49-F238E27FC236}">
-                <a16:creationId xmlns:a16="http://schemas.microsoft.com/office/drawing/2014/main" id="{D6502907-D383-45CA-9824-23DB5A253729}"/>
+                <a16:creationId xmlns:a16="http://schemas.microsoft.com/office/drawing/2014/main" id="{35818801-C569-4812-B3CF-68DA40994F84}"/>
               </a:ext>
             </a:extLst>
           </p:cNvPr>
@@ -15825,7 +15825,7 @@
           <p:cNvPr id="11" name="Text 9">
             <a:extLst xmlns:a="http://schemas.openxmlformats.org/drawingml/2006/main">
               <a:ext uri="{FF2B5EF4-FFF2-40B4-BE49-F238E27FC236}">
-                <a16:creationId xmlns:a16="http://schemas.microsoft.com/office/drawing/2014/main" id="{A00A6715-7D2F-4029-81F2-F0FE3ED2F169}"/>
+                <a16:creationId xmlns:a16="http://schemas.microsoft.com/office/drawing/2014/main" id="{3C0388A9-CBE3-4E42-B06B-6DBC592A4110}"/>
               </a:ext>
             </a:extLst>
           </p:cNvPr>
@@ -15888,7 +15888,7 @@
           <p:cNvPr id="12" name="Shape 10">
             <a:extLst xmlns:a="http://schemas.openxmlformats.org/drawingml/2006/main">
               <a:ext uri="{FF2B5EF4-FFF2-40B4-BE49-F238E27FC236}">
-                <a16:creationId xmlns:a16="http://schemas.microsoft.com/office/drawing/2014/main" id="{1A7A5120-151A-4FDF-8AF8-02F14953786A}"/>
+                <a16:creationId xmlns:a16="http://schemas.microsoft.com/office/drawing/2014/main" id="{2EA32E1E-2175-45A4-8A3A-600B1CCE2062}"/>
               </a:ext>
             </a:extLst>
           </p:cNvPr>
@@ -15923,7 +15923,7 @@
           <p:cNvPr id="13" name="Text 11">
             <a:extLst xmlns:a="http://schemas.openxmlformats.org/drawingml/2006/main">
               <a:ext uri="{FF2B5EF4-FFF2-40B4-BE49-F238E27FC236}">
-                <a16:creationId xmlns:a16="http://schemas.microsoft.com/office/drawing/2014/main" id="{C8CAF781-2D4C-4ECF-902D-B3FCD4A1B698}"/>
+                <a16:creationId xmlns:a16="http://schemas.microsoft.com/office/drawing/2014/main" id="{A762B917-8C93-4AD0-901E-B05FD3086E03}"/>
               </a:ext>
             </a:extLst>
           </p:cNvPr>
@@ -15970,7 +15970,7 @@
           <p:cNvPr id="14" name="Text 12">
             <a:extLst xmlns:a="http://schemas.openxmlformats.org/drawingml/2006/main">
               <a:ext uri="{FF2B5EF4-FFF2-40B4-BE49-F238E27FC236}">
-                <a16:creationId xmlns:a16="http://schemas.microsoft.com/office/drawing/2014/main" id="{378A90CC-1ADD-4070-A667-2670B341E856}"/>
+                <a16:creationId xmlns:a16="http://schemas.microsoft.com/office/drawing/2014/main" id="{9AECB2D0-1E41-4B6D-98CD-47E1E0D0465A}"/>
               </a:ext>
             </a:extLst>
           </p:cNvPr>
@@ -16033,7 +16033,7 @@
           <p:cNvPr id="15" name="Shape 13">
             <a:extLst xmlns:a="http://schemas.openxmlformats.org/drawingml/2006/main">
               <a:ext uri="{FF2B5EF4-FFF2-40B4-BE49-F238E27FC236}">
-                <a16:creationId xmlns:a16="http://schemas.microsoft.com/office/drawing/2014/main" id="{CF0564E2-3791-4A20-BA00-DD47CBADACA1}"/>
+                <a16:creationId xmlns:a16="http://schemas.microsoft.com/office/drawing/2014/main" id="{0221B595-CAE6-4EBA-864D-1E280E1A915A}"/>
               </a:ext>
             </a:extLst>
           </p:cNvPr>
@@ -16068,7 +16068,7 @@
           <p:cNvPr id="16" name="Text 14">
             <a:extLst xmlns:a="http://schemas.openxmlformats.org/drawingml/2006/main">
               <a:ext uri="{FF2B5EF4-FFF2-40B4-BE49-F238E27FC236}">
-                <a16:creationId xmlns:a16="http://schemas.microsoft.com/office/drawing/2014/main" id="{B6B0FF44-0D21-4760-97C0-EB1C64F36B93}"/>
+                <a16:creationId xmlns:a16="http://schemas.microsoft.com/office/drawing/2014/main" id="{0D360FCF-A2E9-42B7-A79E-450BEE0A7480}"/>
               </a:ext>
             </a:extLst>
           </p:cNvPr>
@@ -16115,7 +16115,7 @@
           <p:cNvPr id="17" name="Text 15">
             <a:extLst xmlns:a="http://schemas.openxmlformats.org/drawingml/2006/main">
               <a:ext uri="{FF2B5EF4-FFF2-40B4-BE49-F238E27FC236}">
-                <a16:creationId xmlns:a16="http://schemas.microsoft.com/office/drawing/2014/main" id="{85BD0D3A-F498-43DA-BE08-73B5535EA4ED}"/>
+                <a16:creationId xmlns:a16="http://schemas.microsoft.com/office/drawing/2014/main" id="{D4F0F80D-C4CA-4DC2-BCB9-4345FCE4E514}"/>
               </a:ext>
             </a:extLst>
           </p:cNvPr>
@@ -16178,7 +16178,7 @@
           <p:cNvPr id="18" name="Shape 16">
             <a:extLst xmlns:a="http://schemas.openxmlformats.org/drawingml/2006/main">
               <a:ext uri="{FF2B5EF4-FFF2-40B4-BE49-F238E27FC236}">
-                <a16:creationId xmlns:a16="http://schemas.microsoft.com/office/drawing/2014/main" id="{9BA0B89B-EC20-4F5D-BF26-BC00C31F80C6}"/>
+                <a16:creationId xmlns:a16="http://schemas.microsoft.com/office/drawing/2014/main" id="{43338497-98F6-4AA8-A92A-70DEA207CE1A}"/>
               </a:ext>
             </a:extLst>
           </p:cNvPr>
@@ -16213,7 +16213,7 @@
           <p:cNvPr id="19" name="Text 17">
             <a:extLst xmlns:a="http://schemas.openxmlformats.org/drawingml/2006/main">
               <a:ext uri="{FF2B5EF4-FFF2-40B4-BE49-F238E27FC236}">
-                <a16:creationId xmlns:a16="http://schemas.microsoft.com/office/drawing/2014/main" id="{F22D2254-438E-4DAA-8210-FEC22B8D1198}"/>
+                <a16:creationId xmlns:a16="http://schemas.microsoft.com/office/drawing/2014/main" id="{105A999D-488D-4017-8747-0659C02362DB}"/>
               </a:ext>
             </a:extLst>
           </p:cNvPr>
@@ -16260,7 +16260,7 @@
           <p:cNvPr id="20" name="Text 18">
             <a:extLst xmlns:a="http://schemas.openxmlformats.org/drawingml/2006/main">
               <a:ext uri="{FF2B5EF4-FFF2-40B4-BE49-F238E27FC236}">
-                <a16:creationId xmlns:a16="http://schemas.microsoft.com/office/drawing/2014/main" id="{8C011002-7FB7-4F63-B689-A2DBA6E8EEA4}"/>
+                <a16:creationId xmlns:a16="http://schemas.microsoft.com/office/drawing/2014/main" id="{B571B252-A1FE-4047-A878-C5E645EA541E}"/>
               </a:ext>
             </a:extLst>
           </p:cNvPr>
@@ -16323,7 +16323,7 @@
           <p:cNvPr id="21" name="Shape 19">
             <a:extLst xmlns:a="http://schemas.openxmlformats.org/drawingml/2006/main">
               <a:ext uri="{FF2B5EF4-FFF2-40B4-BE49-F238E27FC236}">
-                <a16:creationId xmlns:a16="http://schemas.microsoft.com/office/drawing/2014/main" id="{D10C2000-9C88-48DA-A3D4-8463C65A0E44}"/>
+                <a16:creationId xmlns:a16="http://schemas.microsoft.com/office/drawing/2014/main" id="{2DB8FB7C-F554-48DE-ADD3-55EC943DAEF6}"/>
               </a:ext>
             </a:extLst>
           </p:cNvPr>
@@ -16358,7 +16358,7 @@
           <p:cNvPr id="22" name="Text 20">
             <a:extLst xmlns:a="http://schemas.openxmlformats.org/drawingml/2006/main">
               <a:ext uri="{FF2B5EF4-FFF2-40B4-BE49-F238E27FC236}">
-                <a16:creationId xmlns:a16="http://schemas.microsoft.com/office/drawing/2014/main" id="{2AFA0BF8-3487-42AB-8A5A-96B3F44634F9}"/>
+                <a16:creationId xmlns:a16="http://schemas.microsoft.com/office/drawing/2014/main" id="{138293AE-374A-450C-A43A-88689A5E1340}"/>
               </a:ext>
             </a:extLst>
           </p:cNvPr>
@@ -16405,7 +16405,7 @@
           <p:cNvPr id="23" name="Shape 21">
             <a:extLst xmlns:a="http://schemas.openxmlformats.org/drawingml/2006/main">
               <a:ext uri="{FF2B5EF4-FFF2-40B4-BE49-F238E27FC236}">
-                <a16:creationId xmlns:a16="http://schemas.microsoft.com/office/drawing/2014/main" id="{5947F754-829E-48C8-BA27-ED298F69E418}"/>
+                <a16:creationId xmlns:a16="http://schemas.microsoft.com/office/drawing/2014/main" id="{6FC79910-95C5-420A-8747-A195E5112332}"/>
               </a:ext>
             </a:extLst>
           </p:cNvPr>
@@ -16438,7 +16438,7 @@
           <p:cNvPr id="24" name="Text 22">
             <a:extLst xmlns:a="http://schemas.openxmlformats.org/drawingml/2006/main">
               <a:ext uri="{FF2B5EF4-FFF2-40B4-BE49-F238E27FC236}">
-                <a16:creationId xmlns:a16="http://schemas.microsoft.com/office/drawing/2014/main" id="{E56906D0-C349-4E0B-9BA0-F608E17DF0C5}"/>
+                <a16:creationId xmlns:a16="http://schemas.microsoft.com/office/drawing/2014/main" id="{D15F9816-0130-4D2E-AD74-C33A4C10D853}"/>
               </a:ext>
             </a:extLst>
           </p:cNvPr>
@@ -16485,7 +16485,7 @@
           <p:cNvPr id="25" name="Shape 23">
             <a:extLst xmlns:a="http://schemas.openxmlformats.org/drawingml/2006/main">
               <a:ext uri="{FF2B5EF4-FFF2-40B4-BE49-F238E27FC236}">
-                <a16:creationId xmlns:a16="http://schemas.microsoft.com/office/drawing/2014/main" id="{CF78C72B-C649-4845-84B5-54205E0643EF}"/>
+                <a16:creationId xmlns:a16="http://schemas.microsoft.com/office/drawing/2014/main" id="{E996599F-B1C4-4AB5-9D83-4B9FB63B6EDA}"/>
               </a:ext>
             </a:extLst>
           </p:cNvPr>
@@ -16518,7 +16518,7 @@
           <p:cNvPr id="26" name="Text 24">
             <a:extLst xmlns:a="http://schemas.openxmlformats.org/drawingml/2006/main">
               <a:ext uri="{FF2B5EF4-FFF2-40B4-BE49-F238E27FC236}">
-                <a16:creationId xmlns:a16="http://schemas.microsoft.com/office/drawing/2014/main" id="{C3F80E14-FF56-4E20-BEC6-248667B23A07}"/>
+                <a16:creationId xmlns:a16="http://schemas.microsoft.com/office/drawing/2014/main" id="{C06BAEEF-26DF-45F9-AFE6-E1C371FB771A}"/>
               </a:ext>
             </a:extLst>
           </p:cNvPr>
@@ -16565,7 +16565,7 @@
           <p:cNvPr id="27" name="Shape 25">
             <a:extLst xmlns:a="http://schemas.openxmlformats.org/drawingml/2006/main">
               <a:ext uri="{FF2B5EF4-FFF2-40B4-BE49-F238E27FC236}">
-                <a16:creationId xmlns:a16="http://schemas.microsoft.com/office/drawing/2014/main" id="{F978D188-A4ED-4F3B-B63D-6678D9C66C59}"/>
+                <a16:creationId xmlns:a16="http://schemas.microsoft.com/office/drawing/2014/main" id="{ACE63136-7A94-4C45-9AF5-0EB4B1EA20A1}"/>
               </a:ext>
             </a:extLst>
           </p:cNvPr>
@@ -16598,7 +16598,7 @@
           <p:cNvPr id="28" name="Text 26">
             <a:extLst xmlns:a="http://schemas.openxmlformats.org/drawingml/2006/main">
               <a:ext uri="{FF2B5EF4-FFF2-40B4-BE49-F238E27FC236}">
-                <a16:creationId xmlns:a16="http://schemas.microsoft.com/office/drawing/2014/main" id="{820969EA-37B5-4E35-988B-102A2E7DEF72}"/>
+                <a16:creationId xmlns:a16="http://schemas.microsoft.com/office/drawing/2014/main" id="{15CEBF7A-9CC5-47E3-83C5-B13CBDAA9B53}"/>
               </a:ext>
             </a:extLst>
           </p:cNvPr>
@@ -16645,7 +16645,7 @@
           <p:cNvPr id="29" name="Shape 27">
             <a:extLst xmlns:a="http://schemas.openxmlformats.org/drawingml/2006/main">
               <a:ext uri="{FF2B5EF4-FFF2-40B4-BE49-F238E27FC236}">
-                <a16:creationId xmlns:a16="http://schemas.microsoft.com/office/drawing/2014/main" id="{53C86638-FF1D-4793-A756-0F450CC57A0F}"/>
+                <a16:creationId xmlns:a16="http://schemas.microsoft.com/office/drawing/2014/main" id="{3F5FA93A-E74C-422E-89D2-A8CE35DA4226}"/>
               </a:ext>
             </a:extLst>
           </p:cNvPr>
@@ -16680,7 +16680,7 @@
           <p:cNvPr id="30" name="Text 28">
             <a:extLst xmlns:a="http://schemas.openxmlformats.org/drawingml/2006/main">
               <a:ext uri="{FF2B5EF4-FFF2-40B4-BE49-F238E27FC236}">
-                <a16:creationId xmlns:a16="http://schemas.microsoft.com/office/drawing/2014/main" id="{47E97361-C33F-4A11-B113-F66549AB33CF}"/>
+                <a16:creationId xmlns:a16="http://schemas.microsoft.com/office/drawing/2014/main" id="{170B036A-5E35-41B6-BAEB-83EE89DC926C}"/>
               </a:ext>
             </a:extLst>
           </p:cNvPr>
@@ -16727,7 +16727,7 @@
           <p:cNvPr id="31" name="Text 29">
             <a:extLst xmlns:a="http://schemas.openxmlformats.org/drawingml/2006/main">
               <a:ext uri="{FF2B5EF4-FFF2-40B4-BE49-F238E27FC236}">
-                <a16:creationId xmlns:a16="http://schemas.microsoft.com/office/drawing/2014/main" id="{328052D3-09EA-4BFA-A657-7FADEB91FA0C}"/>
+                <a16:creationId xmlns:a16="http://schemas.microsoft.com/office/drawing/2014/main" id="{5BFABB0C-2BA4-442E-B59D-75EAA244A7D4}"/>
               </a:ext>
             </a:extLst>
           </p:cNvPr>
@@ -16790,7 +16790,7 @@
           <p:cNvPr id="32" name="Shape 30">
             <a:extLst xmlns:a="http://schemas.openxmlformats.org/drawingml/2006/main">
               <a:ext uri="{FF2B5EF4-FFF2-40B4-BE49-F238E27FC236}">
-                <a16:creationId xmlns:a16="http://schemas.microsoft.com/office/drawing/2014/main" id="{4FA476E1-04E7-48A7-A48A-37502AC02C73}"/>
+                <a16:creationId xmlns:a16="http://schemas.microsoft.com/office/drawing/2014/main" id="{930D48C4-91C3-4408-9614-4811BB9EE6D0}"/>
               </a:ext>
             </a:extLst>
           </p:cNvPr>
@@ -16825,7 +16825,7 @@
           <p:cNvPr id="33" name="Text 31">
             <a:extLst xmlns:a="http://schemas.openxmlformats.org/drawingml/2006/main">
               <a:ext uri="{FF2B5EF4-FFF2-40B4-BE49-F238E27FC236}">
-                <a16:creationId xmlns:a16="http://schemas.microsoft.com/office/drawing/2014/main" id="{C27C8F44-E85A-493B-B359-70A40021B8F2}"/>
+                <a16:creationId xmlns:a16="http://schemas.microsoft.com/office/drawing/2014/main" id="{A8F63D18-1F56-4AFF-B54B-F73B0B2E1E58}"/>
               </a:ext>
             </a:extLst>
           </p:cNvPr>
@@ -16872,7 +16872,7 @@
           <p:cNvPr id="34" name="Shape 32">
             <a:extLst xmlns:a="http://schemas.openxmlformats.org/drawingml/2006/main">
               <a:ext uri="{FF2B5EF4-FFF2-40B4-BE49-F238E27FC236}">
-                <a16:creationId xmlns:a16="http://schemas.microsoft.com/office/drawing/2014/main" id="{236CB777-FEF9-459E-93C8-F91F6BC531C1}"/>
+                <a16:creationId xmlns:a16="http://schemas.microsoft.com/office/drawing/2014/main" id="{A4FC8A9D-7971-46B5-965E-9EF2A29E8E8C}"/>
               </a:ext>
             </a:extLst>
           </p:cNvPr>
@@ -16907,7 +16907,7 @@
           <p:cNvPr id="35" name="Text 33">
             <a:extLst xmlns:a="http://schemas.openxmlformats.org/drawingml/2006/main">
               <a:ext uri="{FF2B5EF4-FFF2-40B4-BE49-F238E27FC236}">
-                <a16:creationId xmlns:a16="http://schemas.microsoft.com/office/drawing/2014/main" id="{F818007E-E794-4A7E-ABC2-500375D43D2B}"/>
+                <a16:creationId xmlns:a16="http://schemas.microsoft.com/office/drawing/2014/main" id="{84CC0ABD-4DD4-4B29-BBC7-4B90E734A924}"/>
               </a:ext>
             </a:extLst>
           </p:cNvPr>
@@ -16954,7 +16954,7 @@
           <p:cNvPr id="36" name="Shape 34">
             <a:extLst xmlns:a="http://schemas.openxmlformats.org/drawingml/2006/main">
               <a:ext uri="{FF2B5EF4-FFF2-40B4-BE49-F238E27FC236}">
-                <a16:creationId xmlns:a16="http://schemas.microsoft.com/office/drawing/2014/main" id="{838A0AA5-9A74-445E-9A3D-D823C503BBBB}"/>
+                <a16:creationId xmlns:a16="http://schemas.microsoft.com/office/drawing/2014/main" id="{BD5DED4E-CD76-4224-BE67-EF3878A22383}"/>
               </a:ext>
             </a:extLst>
           </p:cNvPr>
@@ -16989,7 +16989,7 @@
           <p:cNvPr id="37" name="Text 35">
             <a:extLst xmlns:a="http://schemas.openxmlformats.org/drawingml/2006/main">
               <a:ext uri="{FF2B5EF4-FFF2-40B4-BE49-F238E27FC236}">
-                <a16:creationId xmlns:a16="http://schemas.microsoft.com/office/drawing/2014/main" id="{D429796F-75E5-4D49-B358-0560EC2FADF7}"/>
+                <a16:creationId xmlns:a16="http://schemas.microsoft.com/office/drawing/2014/main" id="{015951DB-E069-4BD8-8ADE-706429A94231}"/>
               </a:ext>
             </a:extLst>
           </p:cNvPr>
@@ -17036,7 +17036,7 @@
           <p:cNvPr id="38" name="Shape 36">
             <a:extLst xmlns:a="http://schemas.openxmlformats.org/drawingml/2006/main">
               <a:ext uri="{FF2B5EF4-FFF2-40B4-BE49-F238E27FC236}">
-                <a16:creationId xmlns:a16="http://schemas.microsoft.com/office/drawing/2014/main" id="{D44E8749-98BE-4A9B-942C-928FCEA5089D}"/>
+                <a16:creationId xmlns:a16="http://schemas.microsoft.com/office/drawing/2014/main" id="{957FFA56-BD8D-4A87-ADE7-508D8F5D2A2F}"/>
               </a:ext>
             </a:extLst>
           </p:cNvPr>
@@ -17071,7 +17071,7 @@
           <p:cNvPr id="39" name="Text 37">
             <a:extLst xmlns:a="http://schemas.openxmlformats.org/drawingml/2006/main">
               <a:ext uri="{FF2B5EF4-FFF2-40B4-BE49-F238E27FC236}">
-                <a16:creationId xmlns:a16="http://schemas.microsoft.com/office/drawing/2014/main" id="{2AA86FA2-F611-49D2-A7AD-04D32DC0D0A6}"/>
+                <a16:creationId xmlns:a16="http://schemas.microsoft.com/office/drawing/2014/main" id="{4027FFBF-F22D-4D8C-BBAA-638B1252495A}"/>
               </a:ext>
             </a:extLst>
           </p:cNvPr>
@@ -17118,7 +17118,7 @@
           <p:cNvPr id="40" name="Shape 38">
             <a:extLst xmlns:a="http://schemas.openxmlformats.org/drawingml/2006/main">
               <a:ext uri="{FF2B5EF4-FFF2-40B4-BE49-F238E27FC236}">
-                <a16:creationId xmlns:a16="http://schemas.microsoft.com/office/drawing/2014/main" id="{657BB8A3-AF7D-4BE2-B1DA-208CD5626C3B}"/>
+                <a16:creationId xmlns:a16="http://schemas.microsoft.com/office/drawing/2014/main" id="{A6BE7386-0822-48BC-B47D-ED38D81038BE}"/>
               </a:ext>
             </a:extLst>
           </p:cNvPr>
@@ -17153,7 +17153,7 @@
           <p:cNvPr id="41" name="Text 39">
             <a:extLst xmlns:a="http://schemas.openxmlformats.org/drawingml/2006/main">
               <a:ext uri="{FF2B5EF4-FFF2-40B4-BE49-F238E27FC236}">
-                <a16:creationId xmlns:a16="http://schemas.microsoft.com/office/drawing/2014/main" id="{EEDF0DCC-0C1C-4E62-BA0C-8FE320AB838B}"/>
+                <a16:creationId xmlns:a16="http://schemas.microsoft.com/office/drawing/2014/main" id="{D964E12C-4919-41F9-A1E3-9F2C1122C61B}"/>
               </a:ext>
             </a:extLst>
           </p:cNvPr>
@@ -17200,7 +17200,7 @@
           <p:cNvPr id="42" name="Text 40">
             <a:extLst xmlns:a="http://schemas.openxmlformats.org/drawingml/2006/main">
               <a:ext uri="{FF2B5EF4-FFF2-40B4-BE49-F238E27FC236}">
-                <a16:creationId xmlns:a16="http://schemas.microsoft.com/office/drawing/2014/main" id="{CCE5BA01-2B83-46C3-817D-6E62E15665B2}"/>
+                <a16:creationId xmlns:a16="http://schemas.microsoft.com/office/drawing/2014/main" id="{EB48A52F-55FD-4C46-8B3E-8BD3925EB17C}"/>
               </a:ext>
             </a:extLst>
           </p:cNvPr>
@@ -17247,7 +17247,7 @@
           <p:cNvPr id="43" name="Text 41">
             <a:extLst xmlns:a="http://schemas.openxmlformats.org/drawingml/2006/main">
               <a:ext uri="{FF2B5EF4-FFF2-40B4-BE49-F238E27FC236}">
-                <a16:creationId xmlns:a16="http://schemas.microsoft.com/office/drawing/2014/main" id="{843F8D52-07AB-47A4-9C31-A9CC63369B20}"/>
+                <a16:creationId xmlns:a16="http://schemas.microsoft.com/office/drawing/2014/main" id="{F3927710-7C73-4A10-94A4-33C13F0C975D}"/>
               </a:ext>
             </a:extLst>
           </p:cNvPr>
@@ -17292,7 +17292,7 @@
     </p:spTree>
     <p:extLst>
       <p:ext uri="{BB962C8B-B14F-4D97-AF65-F5344CB8AC3E}">
-        <p14:creationId xmlns:p14="http://schemas.microsoft.com/office/powerpoint/2010/main" val="1356362639"/>
+        <p14:creationId xmlns:p14="http://schemas.microsoft.com/office/powerpoint/2010/main" val="1375211772"/>
       </p:ext>
     </p:extLst>
   </p:cSld>
@@ -17323,7 +17323,7 @@
           <p:cNvPr id="2" name="Text 0">
             <a:extLst xmlns:a="http://schemas.openxmlformats.org/drawingml/2006/main">
               <a:ext uri="{FF2B5EF4-FFF2-40B4-BE49-F238E27FC236}">
-                <a16:creationId xmlns:a16="http://schemas.microsoft.com/office/drawing/2014/main" id="{615C689E-00B7-4B7B-AC03-81FE112C7317}"/>
+                <a16:creationId xmlns:a16="http://schemas.microsoft.com/office/drawing/2014/main" id="{B58B40F4-7DB8-464A-8674-38254B380A10}"/>
               </a:ext>
             </a:extLst>
           </p:cNvPr>
@@ -17370,7 +17370,7 @@
           <p:cNvPr id="3" name="Text 1">
             <a:extLst xmlns:a="http://schemas.openxmlformats.org/drawingml/2006/main">
               <a:ext uri="{FF2B5EF4-FFF2-40B4-BE49-F238E27FC236}">
-                <a16:creationId xmlns:a16="http://schemas.microsoft.com/office/drawing/2014/main" id="{E90A9548-F991-43B9-80B4-6CE95DB47734}"/>
+                <a16:creationId xmlns:a16="http://schemas.microsoft.com/office/drawing/2014/main" id="{E436E317-8189-44E8-AF7A-0FD63D90BA13}"/>
               </a:ext>
             </a:extLst>
           </p:cNvPr>
@@ -17417,7 +17417,7 @@
           <p:cNvPr id="4" name="Shape 2">
             <a:extLst xmlns:a="http://schemas.openxmlformats.org/drawingml/2006/main">
               <a:ext uri="{FF2B5EF4-FFF2-40B4-BE49-F238E27FC236}">
-                <a16:creationId xmlns:a16="http://schemas.microsoft.com/office/drawing/2014/main" id="{41375E31-01B2-47B5-9E92-EF0F51FD7E3C}"/>
+                <a16:creationId xmlns:a16="http://schemas.microsoft.com/office/drawing/2014/main" id="{6F945710-0A38-4F6B-A87E-FC636D68AB73}"/>
               </a:ext>
             </a:extLst>
           </p:cNvPr>
@@ -17452,7 +17452,7 @@
           <p:cNvPr id="5" name="Text 3">
             <a:extLst xmlns:a="http://schemas.openxmlformats.org/drawingml/2006/main">
               <a:ext uri="{FF2B5EF4-FFF2-40B4-BE49-F238E27FC236}">
-                <a16:creationId xmlns:a16="http://schemas.microsoft.com/office/drawing/2014/main" id="{E38EC4ED-F4D7-42E2-890D-BDD5BF370DDB}"/>
+                <a16:creationId xmlns:a16="http://schemas.microsoft.com/office/drawing/2014/main" id="{8AB79C1A-B15F-47A0-BCAF-A19D40EB6B4E}"/>
               </a:ext>
             </a:extLst>
           </p:cNvPr>
@@ -17499,7 +17499,7 @@
           <p:cNvPr id="6" name="Shape 4">
             <a:extLst xmlns:a="http://schemas.openxmlformats.org/drawingml/2006/main">
               <a:ext uri="{FF2B5EF4-FFF2-40B4-BE49-F238E27FC236}">
-                <a16:creationId xmlns:a16="http://schemas.microsoft.com/office/drawing/2014/main" id="{6864BB14-922B-4A91-BBC2-2DDCCBB1DF74}"/>
+                <a16:creationId xmlns:a16="http://schemas.microsoft.com/office/drawing/2014/main" id="{4EF5B6E5-0DAF-4496-A647-BA58594387FF}"/>
               </a:ext>
             </a:extLst>
           </p:cNvPr>
@@ -17530,7 +17530,7 @@
           <p:cNvPr id="7" name="Shape 5">
             <a:extLst xmlns:a="http://schemas.openxmlformats.org/drawingml/2006/main">
               <a:ext uri="{FF2B5EF4-FFF2-40B4-BE49-F238E27FC236}">
-                <a16:creationId xmlns:a16="http://schemas.microsoft.com/office/drawing/2014/main" id="{0DBF0CE1-AAA6-4FC2-8720-7675E75B65E4}"/>
+                <a16:creationId xmlns:a16="http://schemas.microsoft.com/office/drawing/2014/main" id="{47110719-777B-4A96-BE05-D6AD06C63E29}"/>
               </a:ext>
             </a:extLst>
           </p:cNvPr>
@@ -17565,7 +17565,7 @@
           <p:cNvPr id="8" name="Shape 6">
             <a:extLst xmlns:a="http://schemas.openxmlformats.org/drawingml/2006/main">
               <a:ext uri="{FF2B5EF4-FFF2-40B4-BE49-F238E27FC236}">
-                <a16:creationId xmlns:a16="http://schemas.microsoft.com/office/drawing/2014/main" id="{B423AEF2-F301-4D4B-9F08-8D81853771A2}"/>
+                <a16:creationId xmlns:a16="http://schemas.microsoft.com/office/drawing/2014/main" id="{78E87879-19E4-4B81-8EF4-EF1999469BC5}"/>
               </a:ext>
             </a:extLst>
           </p:cNvPr>
@@ -17600,7 +17600,7 @@
           <p:cNvPr id="9" name="Text 7">
             <a:extLst xmlns:a="http://schemas.openxmlformats.org/drawingml/2006/main">
               <a:ext uri="{FF2B5EF4-FFF2-40B4-BE49-F238E27FC236}">
-                <a16:creationId xmlns:a16="http://schemas.microsoft.com/office/drawing/2014/main" id="{8EB4E725-A6BB-4987-BE48-89274EF2CA49}"/>
+                <a16:creationId xmlns:a16="http://schemas.microsoft.com/office/drawing/2014/main" id="{81666A3F-4EEE-4D00-895C-9B104DBD680C}"/>
               </a:ext>
             </a:extLst>
           </p:cNvPr>
@@ -17647,7 +17647,7 @@
           <p:cNvPr id="10" name="Text 8">
             <a:extLst xmlns:a="http://schemas.openxmlformats.org/drawingml/2006/main">
               <a:ext uri="{FF2B5EF4-FFF2-40B4-BE49-F238E27FC236}">
-                <a16:creationId xmlns:a16="http://schemas.microsoft.com/office/drawing/2014/main" id="{1FFDCADD-E09B-4AF2-A84D-979355157856}"/>
+                <a16:creationId xmlns:a16="http://schemas.microsoft.com/office/drawing/2014/main" id="{95DDCDDF-CC6A-4239-BC49-8643ED7B65DA}"/>
               </a:ext>
             </a:extLst>
           </p:cNvPr>
@@ -17694,7 +17694,7 @@
           <p:cNvPr id="11" name="Text 9">
             <a:extLst xmlns:a="http://schemas.openxmlformats.org/drawingml/2006/main">
               <a:ext uri="{FF2B5EF4-FFF2-40B4-BE49-F238E27FC236}">
-                <a16:creationId xmlns:a16="http://schemas.microsoft.com/office/drawing/2014/main" id="{EF0EBFBB-22B3-4436-92B1-5A701ED13E3D}"/>
+                <a16:creationId xmlns:a16="http://schemas.microsoft.com/office/drawing/2014/main" id="{0DC5FD35-3362-4758-8CDF-CBA2D2507296}"/>
               </a:ext>
             </a:extLst>
           </p:cNvPr>
@@ -17773,7 +17773,7 @@
           <p:cNvPr id="12" name="Shape 10">
             <a:extLst xmlns:a="http://schemas.openxmlformats.org/drawingml/2006/main">
               <a:ext uri="{FF2B5EF4-FFF2-40B4-BE49-F238E27FC236}">
-                <a16:creationId xmlns:a16="http://schemas.microsoft.com/office/drawing/2014/main" id="{50C481E0-AD0D-4D1C-B500-97AE5B2F455F}"/>
+                <a16:creationId xmlns:a16="http://schemas.microsoft.com/office/drawing/2014/main" id="{5D238CCD-7BF5-407F-898E-2F4BC6349469}"/>
               </a:ext>
             </a:extLst>
           </p:cNvPr>
@@ -17805,7 +17805,7 @@
           <p:cNvPr id="13" name="Shape 11">
             <a:extLst xmlns:a="http://schemas.openxmlformats.org/drawingml/2006/main">
               <a:ext uri="{FF2B5EF4-FFF2-40B4-BE49-F238E27FC236}">
-                <a16:creationId xmlns:a16="http://schemas.microsoft.com/office/drawing/2014/main" id="{9A2E7403-F339-4302-B18D-DD2A6B6AE934}"/>
+                <a16:creationId xmlns:a16="http://schemas.microsoft.com/office/drawing/2014/main" id="{A053884D-A69B-484C-A141-011353563067}"/>
               </a:ext>
             </a:extLst>
           </p:cNvPr>
@@ -17840,7 +17840,7 @@
           <p:cNvPr id="14" name="Shape 12">
             <a:extLst xmlns:a="http://schemas.openxmlformats.org/drawingml/2006/main">
               <a:ext uri="{FF2B5EF4-FFF2-40B4-BE49-F238E27FC236}">
-                <a16:creationId xmlns:a16="http://schemas.microsoft.com/office/drawing/2014/main" id="{C714C209-0220-4786-B797-FECAC1E9093F}"/>
+                <a16:creationId xmlns:a16="http://schemas.microsoft.com/office/drawing/2014/main" id="{A49526B4-2582-4838-AE76-7556AEFE1EFE}"/>
               </a:ext>
             </a:extLst>
           </p:cNvPr>
@@ -17875,7 +17875,7 @@
           <p:cNvPr id="15" name="Text 13">
             <a:extLst xmlns:a="http://schemas.openxmlformats.org/drawingml/2006/main">
               <a:ext uri="{FF2B5EF4-FFF2-40B4-BE49-F238E27FC236}">
-                <a16:creationId xmlns:a16="http://schemas.microsoft.com/office/drawing/2014/main" id="{A886AB2C-0C29-4DF6-AF46-7384C48040A0}"/>
+                <a16:creationId xmlns:a16="http://schemas.microsoft.com/office/drawing/2014/main" id="{7293BD46-1261-4765-B132-912259EBF474}"/>
               </a:ext>
             </a:extLst>
           </p:cNvPr>
@@ -17922,7 +17922,7 @@
           <p:cNvPr id="16" name="Text 14">
             <a:extLst xmlns:a="http://schemas.openxmlformats.org/drawingml/2006/main">
               <a:ext uri="{FF2B5EF4-FFF2-40B4-BE49-F238E27FC236}">
-                <a16:creationId xmlns:a16="http://schemas.microsoft.com/office/drawing/2014/main" id="{F8CD324E-2395-4936-BD68-FF8BFE9224A4}"/>
+                <a16:creationId xmlns:a16="http://schemas.microsoft.com/office/drawing/2014/main" id="{0E7AC1D9-BC83-4080-96F2-16B3B05013BA}"/>
               </a:ext>
             </a:extLst>
           </p:cNvPr>
@@ -17969,7 +17969,7 @@
           <p:cNvPr id="17" name="Text 15">
             <a:extLst xmlns:a="http://schemas.openxmlformats.org/drawingml/2006/main">
               <a:ext uri="{FF2B5EF4-FFF2-40B4-BE49-F238E27FC236}">
-                <a16:creationId xmlns:a16="http://schemas.microsoft.com/office/drawing/2014/main" id="{0091DCBC-3477-4698-8638-77D41FB7F5C6}"/>
+                <a16:creationId xmlns:a16="http://schemas.microsoft.com/office/drawing/2014/main" id="{5E1A9A91-6BCA-4436-B384-849369871E0C}"/>
               </a:ext>
             </a:extLst>
           </p:cNvPr>
@@ -18048,7 +18048,7 @@
           <p:cNvPr id="18" name="Shape 16">
             <a:extLst xmlns:a="http://schemas.openxmlformats.org/drawingml/2006/main">
               <a:ext uri="{FF2B5EF4-FFF2-40B4-BE49-F238E27FC236}">
-                <a16:creationId xmlns:a16="http://schemas.microsoft.com/office/drawing/2014/main" id="{2000AC0E-551F-4F10-B6EC-D60330832F6C}"/>
+                <a16:creationId xmlns:a16="http://schemas.microsoft.com/office/drawing/2014/main" id="{8DCAEC0A-6A06-4ECE-BAD8-E916929CD620}"/>
               </a:ext>
             </a:extLst>
           </p:cNvPr>
@@ -18080,7 +18080,7 @@
           <p:cNvPr id="19" name="Shape 17">
             <a:extLst xmlns:a="http://schemas.openxmlformats.org/drawingml/2006/main">
               <a:ext uri="{FF2B5EF4-FFF2-40B4-BE49-F238E27FC236}">
-                <a16:creationId xmlns:a16="http://schemas.microsoft.com/office/drawing/2014/main" id="{5FFE916F-4EE1-4BC6-A8AA-A8187DC4AC09}"/>
+                <a16:creationId xmlns:a16="http://schemas.microsoft.com/office/drawing/2014/main" id="{2B3F1458-40ED-4235-8F59-7B211E792A4B}"/>
               </a:ext>
             </a:extLst>
           </p:cNvPr>
@@ -18115,7 +18115,7 @@
           <p:cNvPr id="20" name="Shape 18">
             <a:extLst xmlns:a="http://schemas.openxmlformats.org/drawingml/2006/main">
               <a:ext uri="{FF2B5EF4-FFF2-40B4-BE49-F238E27FC236}">
-                <a16:creationId xmlns:a16="http://schemas.microsoft.com/office/drawing/2014/main" id="{DD0D0374-64E8-43B0-A1AC-C680D0261B36}"/>
+                <a16:creationId xmlns:a16="http://schemas.microsoft.com/office/drawing/2014/main" id="{04FE7847-BE3E-43AB-B71C-3A71553059AB}"/>
               </a:ext>
             </a:extLst>
           </p:cNvPr>
@@ -18150,7 +18150,7 @@
           <p:cNvPr id="21" name="Text 19">
             <a:extLst xmlns:a="http://schemas.openxmlformats.org/drawingml/2006/main">
               <a:ext uri="{FF2B5EF4-FFF2-40B4-BE49-F238E27FC236}">
-                <a16:creationId xmlns:a16="http://schemas.microsoft.com/office/drawing/2014/main" id="{60375D18-25D6-4502-9CC2-5860879C91E4}"/>
+                <a16:creationId xmlns:a16="http://schemas.microsoft.com/office/drawing/2014/main" id="{6B9C29F0-0BD1-46A3-9D39-E24A2C5E144F}"/>
               </a:ext>
             </a:extLst>
           </p:cNvPr>
@@ -18197,7 +18197,7 @@
           <p:cNvPr id="22" name="Text 20">
             <a:extLst xmlns:a="http://schemas.openxmlformats.org/drawingml/2006/main">
               <a:ext uri="{FF2B5EF4-FFF2-40B4-BE49-F238E27FC236}">
-                <a16:creationId xmlns:a16="http://schemas.microsoft.com/office/drawing/2014/main" id="{AB5BBE3C-BADF-4642-8679-04C10808CE0E}"/>
+                <a16:creationId xmlns:a16="http://schemas.microsoft.com/office/drawing/2014/main" id="{63BA8471-8D12-4779-8352-B09A376125C0}"/>
               </a:ext>
             </a:extLst>
           </p:cNvPr>
@@ -18244,7 +18244,7 @@
           <p:cNvPr id="23" name="Text 21">
             <a:extLst xmlns:a="http://schemas.openxmlformats.org/drawingml/2006/main">
               <a:ext uri="{FF2B5EF4-FFF2-40B4-BE49-F238E27FC236}">
-                <a16:creationId xmlns:a16="http://schemas.microsoft.com/office/drawing/2014/main" id="{EFF6463A-FFF3-44FB-92A6-4E2C87987844}"/>
+                <a16:creationId xmlns:a16="http://schemas.microsoft.com/office/drawing/2014/main" id="{77FF11DC-C8A3-4049-89C1-5127BD32DB37}"/>
               </a:ext>
             </a:extLst>
           </p:cNvPr>
@@ -18323,7 +18323,7 @@
           <p:cNvPr id="24" name="Shape 22">
             <a:extLst xmlns:a="http://schemas.openxmlformats.org/drawingml/2006/main">
               <a:ext uri="{FF2B5EF4-FFF2-40B4-BE49-F238E27FC236}">
-                <a16:creationId xmlns:a16="http://schemas.microsoft.com/office/drawing/2014/main" id="{C5EFF3ED-DF0E-491D-85F1-23E1793F1434}"/>
+                <a16:creationId xmlns:a16="http://schemas.microsoft.com/office/drawing/2014/main" id="{3FEECC39-B91B-47EF-B40A-B707CC7A0009}"/>
               </a:ext>
             </a:extLst>
           </p:cNvPr>
@@ -18355,7 +18355,7 @@
           <p:cNvPr id="25" name="Shape 23">
             <a:extLst xmlns:a="http://schemas.openxmlformats.org/drawingml/2006/main">
               <a:ext uri="{FF2B5EF4-FFF2-40B4-BE49-F238E27FC236}">
-                <a16:creationId xmlns:a16="http://schemas.microsoft.com/office/drawing/2014/main" id="{681AABA7-B187-4A8C-BDCA-08D96E47D175}"/>
+                <a16:creationId xmlns:a16="http://schemas.microsoft.com/office/drawing/2014/main" id="{609E087C-F96F-4505-8B16-E17A5BD17214}"/>
               </a:ext>
             </a:extLst>
           </p:cNvPr>
@@ -18390,7 +18390,7 @@
           <p:cNvPr id="26" name="Shape 24">
             <a:extLst xmlns:a="http://schemas.openxmlformats.org/drawingml/2006/main">
               <a:ext uri="{FF2B5EF4-FFF2-40B4-BE49-F238E27FC236}">
-                <a16:creationId xmlns:a16="http://schemas.microsoft.com/office/drawing/2014/main" id="{9FF8F833-8C7E-4845-A142-78202D3DD1C7}"/>
+                <a16:creationId xmlns:a16="http://schemas.microsoft.com/office/drawing/2014/main" id="{90A27AEC-0D6F-4DED-A5C9-B2EB14BDB461}"/>
               </a:ext>
             </a:extLst>
           </p:cNvPr>
@@ -18425,7 +18425,7 @@
           <p:cNvPr id="27" name="Text 25">
             <a:extLst xmlns:a="http://schemas.openxmlformats.org/drawingml/2006/main">
               <a:ext uri="{FF2B5EF4-FFF2-40B4-BE49-F238E27FC236}">
-                <a16:creationId xmlns:a16="http://schemas.microsoft.com/office/drawing/2014/main" id="{D08E7F83-8FF9-4071-A180-5DC436198E19}"/>
+                <a16:creationId xmlns:a16="http://schemas.microsoft.com/office/drawing/2014/main" id="{DF66E516-3D83-42DC-9F52-F5A921F88FF2}"/>
               </a:ext>
             </a:extLst>
           </p:cNvPr>
@@ -18472,7 +18472,7 @@
           <p:cNvPr id="28" name="Text 26">
             <a:extLst xmlns:a="http://schemas.openxmlformats.org/drawingml/2006/main">
               <a:ext uri="{FF2B5EF4-FFF2-40B4-BE49-F238E27FC236}">
-                <a16:creationId xmlns:a16="http://schemas.microsoft.com/office/drawing/2014/main" id="{89CD03D1-0C70-4773-A22F-26E25E43EC46}"/>
+                <a16:creationId xmlns:a16="http://schemas.microsoft.com/office/drawing/2014/main" id="{BC551E7B-D855-46AE-B04E-0B178D9B2628}"/>
               </a:ext>
             </a:extLst>
           </p:cNvPr>
@@ -18519,7 +18519,7 @@
           <p:cNvPr id="29" name="Text 27">
             <a:extLst xmlns:a="http://schemas.openxmlformats.org/drawingml/2006/main">
               <a:ext uri="{FF2B5EF4-FFF2-40B4-BE49-F238E27FC236}">
-                <a16:creationId xmlns:a16="http://schemas.microsoft.com/office/drawing/2014/main" id="{81FFD783-88C5-44D6-AB37-42A3B1D75B1C}"/>
+                <a16:creationId xmlns:a16="http://schemas.microsoft.com/office/drawing/2014/main" id="{E5E6C074-7F61-47B3-8C74-311E8B50F474}"/>
               </a:ext>
             </a:extLst>
           </p:cNvPr>
@@ -18598,7 +18598,7 @@
           <p:cNvPr id="30" name="Text 28">
             <a:extLst xmlns:a="http://schemas.openxmlformats.org/drawingml/2006/main">
               <a:ext uri="{FF2B5EF4-FFF2-40B4-BE49-F238E27FC236}">
-                <a16:creationId xmlns:a16="http://schemas.microsoft.com/office/drawing/2014/main" id="{2B72B0A2-A88C-4B88-9175-CA616D6B861F}"/>
+                <a16:creationId xmlns:a16="http://schemas.microsoft.com/office/drawing/2014/main" id="{955F8D07-FAF4-4639-9082-2AD0F7255ACA}"/>
               </a:ext>
             </a:extLst>
           </p:cNvPr>
@@ -18645,7 +18645,7 @@
           <p:cNvPr id="31" name="Shape 29">
             <a:extLst xmlns:a="http://schemas.openxmlformats.org/drawingml/2006/main">
               <a:ext uri="{FF2B5EF4-FFF2-40B4-BE49-F238E27FC236}">
-                <a16:creationId xmlns:a16="http://schemas.microsoft.com/office/drawing/2014/main" id="{0B99966E-399E-4229-9ABB-EF0D63183328}"/>
+                <a16:creationId xmlns:a16="http://schemas.microsoft.com/office/drawing/2014/main" id="{6BDD94E0-4F1C-48B1-BAEC-3C41DED90D6F}"/>
               </a:ext>
             </a:extLst>
           </p:cNvPr>
@@ -18680,7 +18680,7 @@
           <p:cNvPr id="32" name="Text 30">
             <a:extLst xmlns:a="http://schemas.openxmlformats.org/drawingml/2006/main">
               <a:ext uri="{FF2B5EF4-FFF2-40B4-BE49-F238E27FC236}">
-                <a16:creationId xmlns:a16="http://schemas.microsoft.com/office/drawing/2014/main" id="{990F167A-C392-4F28-8CEB-8235C36030DD}"/>
+                <a16:creationId xmlns:a16="http://schemas.microsoft.com/office/drawing/2014/main" id="{26E648B0-DE7C-4C33-B520-107CB50F4304}"/>
               </a:ext>
             </a:extLst>
           </p:cNvPr>
@@ -18727,7 +18727,7 @@
           <p:cNvPr id="33" name="Text 31">
             <a:extLst xmlns:a="http://schemas.openxmlformats.org/drawingml/2006/main">
               <a:ext uri="{FF2B5EF4-FFF2-40B4-BE49-F238E27FC236}">
-                <a16:creationId xmlns:a16="http://schemas.microsoft.com/office/drawing/2014/main" id="{47FB8946-F26E-4CB3-8058-F0203EE307CD}"/>
+                <a16:creationId xmlns:a16="http://schemas.microsoft.com/office/drawing/2014/main" id="{A0A3D577-EC8B-4538-8719-143D26FE6D69}"/>
               </a:ext>
             </a:extLst>
           </p:cNvPr>
@@ -18774,7 +18774,7 @@
           <p:cNvPr id="34" name="Shape 32">
             <a:extLst xmlns:a="http://schemas.openxmlformats.org/drawingml/2006/main">
               <a:ext uri="{FF2B5EF4-FFF2-40B4-BE49-F238E27FC236}">
-                <a16:creationId xmlns:a16="http://schemas.microsoft.com/office/drawing/2014/main" id="{1CBCB8FC-2926-442F-9322-2D1EC493BDFB}"/>
+                <a16:creationId xmlns:a16="http://schemas.microsoft.com/office/drawing/2014/main" id="{E71337D6-EAB0-4A8B-AF28-1B812A7E2869}"/>
               </a:ext>
             </a:extLst>
           </p:cNvPr>
@@ -18809,7 +18809,7 @@
           <p:cNvPr id="35" name="Text 33">
             <a:extLst xmlns:a="http://schemas.openxmlformats.org/drawingml/2006/main">
               <a:ext uri="{FF2B5EF4-FFF2-40B4-BE49-F238E27FC236}">
-                <a16:creationId xmlns:a16="http://schemas.microsoft.com/office/drawing/2014/main" id="{98E1427A-8CF2-49A5-B11B-BAB3DC564586}"/>
+                <a16:creationId xmlns:a16="http://schemas.microsoft.com/office/drawing/2014/main" id="{3DF5E9C5-3568-4C69-85A0-A48CB41E4B7F}"/>
               </a:ext>
             </a:extLst>
           </p:cNvPr>
@@ -18856,7 +18856,7 @@
           <p:cNvPr id="36" name="Text 34">
             <a:extLst xmlns:a="http://schemas.openxmlformats.org/drawingml/2006/main">
               <a:ext uri="{FF2B5EF4-FFF2-40B4-BE49-F238E27FC236}">
-                <a16:creationId xmlns:a16="http://schemas.microsoft.com/office/drawing/2014/main" id="{BE42557C-17F4-47BE-90DF-001041C79C58}"/>
+                <a16:creationId xmlns:a16="http://schemas.microsoft.com/office/drawing/2014/main" id="{4E38FD0B-B3B1-43D5-B722-1AE1E26BA2A7}"/>
               </a:ext>
             </a:extLst>
           </p:cNvPr>
@@ -18903,7 +18903,7 @@
           <p:cNvPr id="37" name="Shape 35">
             <a:extLst xmlns:a="http://schemas.openxmlformats.org/drawingml/2006/main">
               <a:ext uri="{FF2B5EF4-FFF2-40B4-BE49-F238E27FC236}">
-                <a16:creationId xmlns:a16="http://schemas.microsoft.com/office/drawing/2014/main" id="{6D233BFA-552E-4501-8759-F86E05FEE520}"/>
+                <a16:creationId xmlns:a16="http://schemas.microsoft.com/office/drawing/2014/main" id="{9D7E3434-BA5E-40C4-A869-E86FE0DD0218}"/>
               </a:ext>
             </a:extLst>
           </p:cNvPr>
@@ -18938,7 +18938,7 @@
           <p:cNvPr id="38" name="Text 36">
             <a:extLst xmlns:a="http://schemas.openxmlformats.org/drawingml/2006/main">
               <a:ext uri="{FF2B5EF4-FFF2-40B4-BE49-F238E27FC236}">
-                <a16:creationId xmlns:a16="http://schemas.microsoft.com/office/drawing/2014/main" id="{52FEA3B6-8BBC-41E5-A178-6F7C38EC8A3A}"/>
+                <a16:creationId xmlns:a16="http://schemas.microsoft.com/office/drawing/2014/main" id="{C3588F1C-7D93-45BD-843E-5B4353F31347}"/>
               </a:ext>
             </a:extLst>
           </p:cNvPr>
@@ -18985,7 +18985,7 @@
           <p:cNvPr id="39" name="Text 37">
             <a:extLst xmlns:a="http://schemas.openxmlformats.org/drawingml/2006/main">
               <a:ext uri="{FF2B5EF4-FFF2-40B4-BE49-F238E27FC236}">
-                <a16:creationId xmlns:a16="http://schemas.microsoft.com/office/drawing/2014/main" id="{338ACE28-EB7E-463F-A521-E0EB1BA9D005}"/>
+                <a16:creationId xmlns:a16="http://schemas.microsoft.com/office/drawing/2014/main" id="{763E1E25-C3BC-4121-A9D8-8FA32B5BE560}"/>
               </a:ext>
             </a:extLst>
           </p:cNvPr>
@@ -19032,7 +19032,7 @@
           <p:cNvPr id="40" name="Shape 38">
             <a:extLst xmlns:a="http://schemas.openxmlformats.org/drawingml/2006/main">
               <a:ext uri="{FF2B5EF4-FFF2-40B4-BE49-F238E27FC236}">
-                <a16:creationId xmlns:a16="http://schemas.microsoft.com/office/drawing/2014/main" id="{D4E4A8C8-0A9C-40EF-A37A-B22DEFA83DDE}"/>
+                <a16:creationId xmlns:a16="http://schemas.microsoft.com/office/drawing/2014/main" id="{6B6462D2-B666-4903-A232-FABDED84BF29}"/>
               </a:ext>
             </a:extLst>
           </p:cNvPr>
@@ -19067,7 +19067,7 @@
           <p:cNvPr id="41" name="Text 39">
             <a:extLst xmlns:a="http://schemas.openxmlformats.org/drawingml/2006/main">
               <a:ext uri="{FF2B5EF4-FFF2-40B4-BE49-F238E27FC236}">
-                <a16:creationId xmlns:a16="http://schemas.microsoft.com/office/drawing/2014/main" id="{5903A0CD-25D9-4C82-AD98-5DE4B95A27E8}"/>
+                <a16:creationId xmlns:a16="http://schemas.microsoft.com/office/drawing/2014/main" id="{C70B2DF6-2F27-4C55-9C16-B11B51A621AC}"/>
               </a:ext>
             </a:extLst>
           </p:cNvPr>
@@ -19114,7 +19114,7 @@
           <p:cNvPr id="42" name="Text 40">
             <a:extLst xmlns:a="http://schemas.openxmlformats.org/drawingml/2006/main">
               <a:ext uri="{FF2B5EF4-FFF2-40B4-BE49-F238E27FC236}">
-                <a16:creationId xmlns:a16="http://schemas.microsoft.com/office/drawing/2014/main" id="{667CE73D-6FB0-4B9A-9905-9D078B03FD0F}"/>
+                <a16:creationId xmlns:a16="http://schemas.microsoft.com/office/drawing/2014/main" id="{D8333F93-6213-41AC-B768-138C0E5FFBC2}"/>
               </a:ext>
             </a:extLst>
           </p:cNvPr>
@@ -19161,7 +19161,7 @@
           <p:cNvPr id="43" name="Text 41">
             <a:extLst xmlns:a="http://schemas.openxmlformats.org/drawingml/2006/main">
               <a:ext uri="{FF2B5EF4-FFF2-40B4-BE49-F238E27FC236}">
-                <a16:creationId xmlns:a16="http://schemas.microsoft.com/office/drawing/2014/main" id="{9E8E3724-3016-44EB-BE19-5168248CBD94}"/>
+                <a16:creationId xmlns:a16="http://schemas.microsoft.com/office/drawing/2014/main" id="{AD78F826-B78A-4549-87E9-543F079E2390}"/>
               </a:ext>
             </a:extLst>
           </p:cNvPr>
@@ -19208,7 +19208,7 @@
           <p:cNvPr id="44" name="Text 42">
             <a:extLst xmlns:a="http://schemas.openxmlformats.org/drawingml/2006/main">
               <a:ext uri="{FF2B5EF4-FFF2-40B4-BE49-F238E27FC236}">
-                <a16:creationId xmlns:a16="http://schemas.microsoft.com/office/drawing/2014/main" id="{3298B500-E497-42B8-A3D9-6E5225EF58B7}"/>
+                <a16:creationId xmlns:a16="http://schemas.microsoft.com/office/drawing/2014/main" id="{AE29E33A-1516-43FC-9529-31B5EB90E61B}"/>
               </a:ext>
             </a:extLst>
           </p:cNvPr>
@@ -19255,7 +19255,7 @@
           <p:cNvPr id="45" name="Text 43">
             <a:extLst xmlns:a="http://schemas.openxmlformats.org/drawingml/2006/main">
               <a:ext uri="{FF2B5EF4-FFF2-40B4-BE49-F238E27FC236}">
-                <a16:creationId xmlns:a16="http://schemas.microsoft.com/office/drawing/2014/main" id="{C95BE944-C383-47DE-9B59-A827DE16FB56}"/>
+                <a16:creationId xmlns:a16="http://schemas.microsoft.com/office/drawing/2014/main" id="{290249D9-6B15-49A4-A01B-4A1F06457BB6}"/>
               </a:ext>
             </a:extLst>
           </p:cNvPr>
@@ -19300,7 +19300,7 @@
     </p:spTree>
     <p:extLst>
       <p:ext uri="{BB962C8B-B14F-4D97-AF65-F5344CB8AC3E}">
-        <p14:creationId xmlns:p14="http://schemas.microsoft.com/office/powerpoint/2010/main" val="378005331"/>
+        <p14:creationId xmlns:p14="http://schemas.microsoft.com/office/powerpoint/2010/main" val="1977270341"/>
       </p:ext>
     </p:extLst>
   </p:cSld>
@@ -19335,7 +19335,7 @@
           <p:nvPr/>
         </p:nvPicPr>
         <p:blipFill>
-          <a:blip xmlns:r="http://schemas.openxmlformats.org/officeDocument/2006/relationships" xmlns:a="http://schemas.openxmlformats.org/drawingml/2006/main" r:embed="R004ac143f95c4859"/>
+          <a:blip xmlns:r="http://schemas.openxmlformats.org/officeDocument/2006/relationships" xmlns:a="http://schemas.openxmlformats.org/drawingml/2006/main" r:embed="R926c5f188d9a4b74"/>
           <a:stretch xmlns:a="http://schemas.openxmlformats.org/drawingml/2006/main">
             <a:fillRect l="0" t="0" r="0" b="0"/>
           </a:stretch>
@@ -19355,7 +19355,7 @@
           <p:cNvPr id="3" name="Text 0">
             <a:extLst xmlns:a="http://schemas.openxmlformats.org/drawingml/2006/main">
               <a:ext uri="{FF2B5EF4-FFF2-40B4-BE49-F238E27FC236}">
-                <a16:creationId xmlns:a16="http://schemas.microsoft.com/office/drawing/2014/main" id="{F3093E1F-CDB8-43B6-A054-FA84C66105AD}"/>
+                <a16:creationId xmlns:a16="http://schemas.microsoft.com/office/drawing/2014/main" id="{F2311976-A499-4AEC-B3D8-09CDD89DE67F}"/>
               </a:ext>
             </a:extLst>
           </p:cNvPr>
@@ -19402,7 +19402,7 @@
           <p:cNvPr id="4" name="Text 1">
             <a:extLst xmlns:a="http://schemas.openxmlformats.org/drawingml/2006/main">
               <a:ext uri="{FF2B5EF4-FFF2-40B4-BE49-F238E27FC236}">
-                <a16:creationId xmlns:a16="http://schemas.microsoft.com/office/drawing/2014/main" id="{FC21CE5E-21B6-4560-A561-55EC97B9B1A4}"/>
+                <a16:creationId xmlns:a16="http://schemas.microsoft.com/office/drawing/2014/main" id="{2A83A57F-38A5-40C4-8E8A-7F52C20AEBAB}"/>
               </a:ext>
             </a:extLst>
           </p:cNvPr>
@@ -19449,7 +19449,7 @@
           <p:cNvPr id="5" name="Text 2">
             <a:extLst xmlns:a="http://schemas.openxmlformats.org/drawingml/2006/main">
               <a:ext uri="{FF2B5EF4-FFF2-40B4-BE49-F238E27FC236}">
-                <a16:creationId xmlns:a16="http://schemas.microsoft.com/office/drawing/2014/main" id="{9E39381B-3D66-46A1-90FC-7CB50D4A4C3B}"/>
+                <a16:creationId xmlns:a16="http://schemas.microsoft.com/office/drawing/2014/main" id="{B48510D2-7080-49C4-B7CB-6738723D76EF}"/>
               </a:ext>
             </a:extLst>
           </p:cNvPr>
@@ -19496,7 +19496,7 @@
           <p:cNvPr id="6" name="Shape 3">
             <a:extLst xmlns:a="http://schemas.openxmlformats.org/drawingml/2006/main">
               <a:ext uri="{FF2B5EF4-FFF2-40B4-BE49-F238E27FC236}">
-                <a16:creationId xmlns:a16="http://schemas.microsoft.com/office/drawing/2014/main" id="{3ED5A627-91F7-4838-B18A-B0356043251E}"/>
+                <a16:creationId xmlns:a16="http://schemas.microsoft.com/office/drawing/2014/main" id="{EFF71AF3-AA3B-4ED9-9F54-A1FA54C0ECC3}"/>
               </a:ext>
             </a:extLst>
           </p:cNvPr>
@@ -19531,7 +19531,7 @@
           <p:cNvPr id="7" name="Shape 4">
             <a:extLst xmlns:a="http://schemas.openxmlformats.org/drawingml/2006/main">
               <a:ext uri="{FF2B5EF4-FFF2-40B4-BE49-F238E27FC236}">
-                <a16:creationId xmlns:a16="http://schemas.microsoft.com/office/drawing/2014/main" id="{304A6D4D-E7CD-403F-8BE2-DC97F47A75D8}"/>
+                <a16:creationId xmlns:a16="http://schemas.microsoft.com/office/drawing/2014/main" id="{CF01EC35-2F47-4915-B361-59E4E2541BFB}"/>
               </a:ext>
             </a:extLst>
           </p:cNvPr>
@@ -19564,7 +19564,7 @@
           <p:cNvPr id="8" name="Text 5">
             <a:extLst xmlns:a="http://schemas.openxmlformats.org/drawingml/2006/main">
               <a:ext uri="{FF2B5EF4-FFF2-40B4-BE49-F238E27FC236}">
-                <a16:creationId xmlns:a16="http://schemas.microsoft.com/office/drawing/2014/main" id="{16654CC1-9BB4-444D-ADEA-F9BC7FF308BD}"/>
+                <a16:creationId xmlns:a16="http://schemas.microsoft.com/office/drawing/2014/main" id="{2271C0E1-A3B3-42C5-AC6D-DB19956B8163}"/>
               </a:ext>
             </a:extLst>
           </p:cNvPr>
@@ -19611,7 +19611,7 @@
           <p:cNvPr id="9" name="Text 6">
             <a:extLst xmlns:a="http://schemas.openxmlformats.org/drawingml/2006/main">
               <a:ext uri="{FF2B5EF4-FFF2-40B4-BE49-F238E27FC236}">
-                <a16:creationId xmlns:a16="http://schemas.microsoft.com/office/drawing/2014/main" id="{0AF8DE99-1F88-4AB5-9089-D79284E2BC50}"/>
+                <a16:creationId xmlns:a16="http://schemas.microsoft.com/office/drawing/2014/main" id="{BFD4AA00-3E31-4EE8-B642-03F1B7860B8C}"/>
               </a:ext>
             </a:extLst>
           </p:cNvPr>
@@ -19658,7 +19658,7 @@
           <p:cNvPr id="10" name="Shape 7">
             <a:extLst xmlns:a="http://schemas.openxmlformats.org/drawingml/2006/main">
               <a:ext uri="{FF2B5EF4-FFF2-40B4-BE49-F238E27FC236}">
-                <a16:creationId xmlns:a16="http://schemas.microsoft.com/office/drawing/2014/main" id="{7C624664-6EBF-4408-9729-DF97E7647EF4}"/>
+                <a16:creationId xmlns:a16="http://schemas.microsoft.com/office/drawing/2014/main" id="{E47CEA80-98CA-434F-B454-3D876929187E}"/>
               </a:ext>
             </a:extLst>
           </p:cNvPr>
@@ -19693,7 +19693,7 @@
           <p:cNvPr id="11" name="Shape 8">
             <a:extLst xmlns:a="http://schemas.openxmlformats.org/drawingml/2006/main">
               <a:ext uri="{FF2B5EF4-FFF2-40B4-BE49-F238E27FC236}">
-                <a16:creationId xmlns:a16="http://schemas.microsoft.com/office/drawing/2014/main" id="{000FB733-16A2-4958-8227-160A92285E96}"/>
+                <a16:creationId xmlns:a16="http://schemas.microsoft.com/office/drawing/2014/main" id="{D93F10A8-CDAE-4189-A97B-A36BFFA56C96}"/>
               </a:ext>
             </a:extLst>
           </p:cNvPr>
@@ -19726,7 +19726,7 @@
           <p:cNvPr id="12" name="Text 9">
             <a:extLst xmlns:a="http://schemas.openxmlformats.org/drawingml/2006/main">
               <a:ext uri="{FF2B5EF4-FFF2-40B4-BE49-F238E27FC236}">
-                <a16:creationId xmlns:a16="http://schemas.microsoft.com/office/drawing/2014/main" id="{ED0EA193-A82B-4214-9961-5FEE1E9C1D61}"/>
+                <a16:creationId xmlns:a16="http://schemas.microsoft.com/office/drawing/2014/main" id="{C57A42C3-D2BB-4BE1-93B6-D61703C6F767}"/>
               </a:ext>
             </a:extLst>
           </p:cNvPr>
@@ -19773,7 +19773,7 @@
           <p:cNvPr id="13" name="Text 10">
             <a:extLst xmlns:a="http://schemas.openxmlformats.org/drawingml/2006/main">
               <a:ext uri="{FF2B5EF4-FFF2-40B4-BE49-F238E27FC236}">
-                <a16:creationId xmlns:a16="http://schemas.microsoft.com/office/drawing/2014/main" id="{80CFFDFD-4DA7-4ADE-97A0-A5FF9C833336}"/>
+                <a16:creationId xmlns:a16="http://schemas.microsoft.com/office/drawing/2014/main" id="{9B61A428-2D4A-4CF8-B7FA-26B5FFD687E3}"/>
               </a:ext>
             </a:extLst>
           </p:cNvPr>
@@ -19820,7 +19820,7 @@
           <p:cNvPr id="14" name="Shape 11">
             <a:extLst xmlns:a="http://schemas.openxmlformats.org/drawingml/2006/main">
               <a:ext uri="{FF2B5EF4-FFF2-40B4-BE49-F238E27FC236}">
-                <a16:creationId xmlns:a16="http://schemas.microsoft.com/office/drawing/2014/main" id="{652B2CBA-6E24-474C-A64B-39C54E310322}"/>
+                <a16:creationId xmlns:a16="http://schemas.microsoft.com/office/drawing/2014/main" id="{91AA1FFC-A2A0-4DA7-9BBF-1371FBBAF9B9}"/>
               </a:ext>
             </a:extLst>
           </p:cNvPr>
@@ -19855,7 +19855,7 @@
           <p:cNvPr id="15" name="Shape 12">
             <a:extLst xmlns:a="http://schemas.openxmlformats.org/drawingml/2006/main">
               <a:ext uri="{FF2B5EF4-FFF2-40B4-BE49-F238E27FC236}">
-                <a16:creationId xmlns:a16="http://schemas.microsoft.com/office/drawing/2014/main" id="{47FD6815-75AC-4CFF-8E32-5413227D98CF}"/>
+                <a16:creationId xmlns:a16="http://schemas.microsoft.com/office/drawing/2014/main" id="{66535DEC-203F-472D-B781-0E49AEF2936B}"/>
               </a:ext>
             </a:extLst>
           </p:cNvPr>
@@ -19888,7 +19888,7 @@
           <p:cNvPr id="16" name="Text 13">
             <a:extLst xmlns:a="http://schemas.openxmlformats.org/drawingml/2006/main">
               <a:ext uri="{FF2B5EF4-FFF2-40B4-BE49-F238E27FC236}">
-                <a16:creationId xmlns:a16="http://schemas.microsoft.com/office/drawing/2014/main" id="{1D66FD0B-61AE-4A52-A92D-4A441432D913}"/>
+                <a16:creationId xmlns:a16="http://schemas.microsoft.com/office/drawing/2014/main" id="{58B73E5C-D6EC-4BC9-BBEB-C0C1A25E67F9}"/>
               </a:ext>
             </a:extLst>
           </p:cNvPr>
@@ -19935,7 +19935,7 @@
           <p:cNvPr id="17" name="Text 14">
             <a:extLst xmlns:a="http://schemas.openxmlformats.org/drawingml/2006/main">
               <a:ext uri="{FF2B5EF4-FFF2-40B4-BE49-F238E27FC236}">
-                <a16:creationId xmlns:a16="http://schemas.microsoft.com/office/drawing/2014/main" id="{A1BE7832-E4A2-4707-8190-36C1AE2C3A5B}"/>
+                <a16:creationId xmlns:a16="http://schemas.microsoft.com/office/drawing/2014/main" id="{A6F56057-A114-4D52-BE26-5086D862901D}"/>
               </a:ext>
             </a:extLst>
           </p:cNvPr>
@@ -19982,7 +19982,7 @@
           <p:cNvPr id="18" name="Shape 15">
             <a:extLst xmlns:a="http://schemas.openxmlformats.org/drawingml/2006/main">
               <a:ext uri="{FF2B5EF4-FFF2-40B4-BE49-F238E27FC236}">
-                <a16:creationId xmlns:a16="http://schemas.microsoft.com/office/drawing/2014/main" id="{FEFD512D-F967-4644-8525-E04F6A984FDF}"/>
+                <a16:creationId xmlns:a16="http://schemas.microsoft.com/office/drawing/2014/main" id="{462B198B-9D0C-4B7D-B648-85EA4152E80F}"/>
               </a:ext>
             </a:extLst>
           </p:cNvPr>
@@ -20017,7 +20017,7 @@
           <p:cNvPr id="19" name="Shape 16">
             <a:extLst xmlns:a="http://schemas.openxmlformats.org/drawingml/2006/main">
               <a:ext uri="{FF2B5EF4-FFF2-40B4-BE49-F238E27FC236}">
-                <a16:creationId xmlns:a16="http://schemas.microsoft.com/office/drawing/2014/main" id="{2CFDAFD6-2247-401B-9566-29160A0D269C}"/>
+                <a16:creationId xmlns:a16="http://schemas.microsoft.com/office/drawing/2014/main" id="{98BE3FA2-9F2E-46AD-9354-1B03DD33F89B}"/>
               </a:ext>
             </a:extLst>
           </p:cNvPr>
@@ -20050,7 +20050,7 @@
           <p:cNvPr id="20" name="Text 17">
             <a:extLst xmlns:a="http://schemas.openxmlformats.org/drawingml/2006/main">
               <a:ext uri="{FF2B5EF4-FFF2-40B4-BE49-F238E27FC236}">
-                <a16:creationId xmlns:a16="http://schemas.microsoft.com/office/drawing/2014/main" id="{91B28CAC-D4DB-4FC5-B813-61DCB36D80A3}"/>
+                <a16:creationId xmlns:a16="http://schemas.microsoft.com/office/drawing/2014/main" id="{10403180-0177-4369-B2B6-E8C8B4EA3479}"/>
               </a:ext>
             </a:extLst>
           </p:cNvPr>
@@ -20097,7 +20097,7 @@
           <p:cNvPr id="21" name="Text 18">
             <a:extLst xmlns:a="http://schemas.openxmlformats.org/drawingml/2006/main">
               <a:ext uri="{FF2B5EF4-FFF2-40B4-BE49-F238E27FC236}">
-                <a16:creationId xmlns:a16="http://schemas.microsoft.com/office/drawing/2014/main" id="{42BF9251-F685-4500-A17B-E94B6B12989D}"/>
+                <a16:creationId xmlns:a16="http://schemas.microsoft.com/office/drawing/2014/main" id="{FB006128-BD60-49DB-8E5A-FDF02644D3E8}"/>
               </a:ext>
             </a:extLst>
           </p:cNvPr>
@@ -20144,7 +20144,7 @@
           <p:cNvPr id="22" name="Shape 19">
             <a:extLst xmlns:a="http://schemas.openxmlformats.org/drawingml/2006/main">
               <a:ext uri="{FF2B5EF4-FFF2-40B4-BE49-F238E27FC236}">
-                <a16:creationId xmlns:a16="http://schemas.microsoft.com/office/drawing/2014/main" id="{CAF18405-4187-43A6-A720-F58232C59D91}"/>
+                <a16:creationId xmlns:a16="http://schemas.microsoft.com/office/drawing/2014/main" id="{D1BEE0B3-FCB4-4277-826F-053504B9A987}"/>
               </a:ext>
             </a:extLst>
           </p:cNvPr>
@@ -20179,7 +20179,7 @@
           <p:cNvPr id="23" name="Shape 20">
             <a:extLst xmlns:a="http://schemas.openxmlformats.org/drawingml/2006/main">
               <a:ext uri="{FF2B5EF4-FFF2-40B4-BE49-F238E27FC236}">
-                <a16:creationId xmlns:a16="http://schemas.microsoft.com/office/drawing/2014/main" id="{9A0E4358-B839-4B6F-8601-A85E3E0A077C}"/>
+                <a16:creationId xmlns:a16="http://schemas.microsoft.com/office/drawing/2014/main" id="{DA18BF67-6141-4DF8-B880-72AC511385F0}"/>
               </a:ext>
             </a:extLst>
           </p:cNvPr>
@@ -20212,7 +20212,7 @@
           <p:cNvPr id="24" name="Text 21">
             <a:extLst xmlns:a="http://schemas.openxmlformats.org/drawingml/2006/main">
               <a:ext uri="{FF2B5EF4-FFF2-40B4-BE49-F238E27FC236}">
-                <a16:creationId xmlns:a16="http://schemas.microsoft.com/office/drawing/2014/main" id="{9192AAF5-7643-4932-B544-47BFEA7F24F3}"/>
+                <a16:creationId xmlns:a16="http://schemas.microsoft.com/office/drawing/2014/main" id="{11BFF3A2-B918-4019-BD21-C40B7D2AD6CD}"/>
               </a:ext>
             </a:extLst>
           </p:cNvPr>
@@ -20259,7 +20259,7 @@
           <p:cNvPr id="25" name="Text 22">
             <a:extLst xmlns:a="http://schemas.openxmlformats.org/drawingml/2006/main">
               <a:ext uri="{FF2B5EF4-FFF2-40B4-BE49-F238E27FC236}">
-                <a16:creationId xmlns:a16="http://schemas.microsoft.com/office/drawing/2014/main" id="{9308CEC6-633E-4E6C-A3A4-5F69FF1A9579}"/>
+                <a16:creationId xmlns:a16="http://schemas.microsoft.com/office/drawing/2014/main" id="{EFB7DD3F-90AA-4AEB-B37F-5DD44A0045CA}"/>
               </a:ext>
             </a:extLst>
           </p:cNvPr>
@@ -20306,7 +20306,7 @@
           <p:cNvPr id="26" name="Shape 23">
             <a:extLst xmlns:a="http://schemas.openxmlformats.org/drawingml/2006/main">
               <a:ext uri="{FF2B5EF4-FFF2-40B4-BE49-F238E27FC236}">
-                <a16:creationId xmlns:a16="http://schemas.microsoft.com/office/drawing/2014/main" id="{E5989047-2D07-4951-BA10-AF8272C99A71}"/>
+                <a16:creationId xmlns:a16="http://schemas.microsoft.com/office/drawing/2014/main" id="{56AFADCC-A1C4-408A-B247-B80079500B6F}"/>
               </a:ext>
             </a:extLst>
           </p:cNvPr>
@@ -20341,7 +20341,7 @@
           <p:cNvPr id="27" name="Text 24">
             <a:extLst xmlns:a="http://schemas.openxmlformats.org/drawingml/2006/main">
               <a:ext uri="{FF2B5EF4-FFF2-40B4-BE49-F238E27FC236}">
-                <a16:creationId xmlns:a16="http://schemas.microsoft.com/office/drawing/2014/main" id="{2D37AC81-0C11-4ABE-BDAD-99AD05D4C8EA}"/>
+                <a16:creationId xmlns:a16="http://schemas.microsoft.com/office/drawing/2014/main" id="{736A8879-74E6-4662-A8A2-9D3673A0A261}"/>
               </a:ext>
             </a:extLst>
           </p:cNvPr>
@@ -20388,7 +20388,7 @@
           <p:cNvPr id="28" name="Text 25">
             <a:extLst xmlns:a="http://schemas.openxmlformats.org/drawingml/2006/main">
               <a:ext uri="{FF2B5EF4-FFF2-40B4-BE49-F238E27FC236}">
-                <a16:creationId xmlns:a16="http://schemas.microsoft.com/office/drawing/2014/main" id="{D0671FFC-D94B-4623-A230-D6B85B1A859B}"/>
+                <a16:creationId xmlns:a16="http://schemas.microsoft.com/office/drawing/2014/main" id="{897B3A3F-E9E2-4B11-A8BC-FA8C902DF0AD}"/>
               </a:ext>
             </a:extLst>
           </p:cNvPr>
@@ -20433,7 +20433,7 @@
     </p:spTree>
     <p:extLst>
       <p:ext uri="{BB962C8B-B14F-4D97-AF65-F5344CB8AC3E}">
-        <p14:creationId xmlns:p14="http://schemas.microsoft.com/office/powerpoint/2010/main" val="2049071992"/>
+        <p14:creationId xmlns:p14="http://schemas.microsoft.com/office/powerpoint/2010/main" val="651935749"/>
       </p:ext>
     </p:extLst>
   </p:cSld>
@@ -20464,7 +20464,7 @@
           <p:cNvPr id="2" name="Text 0">
             <a:extLst xmlns:a="http://schemas.openxmlformats.org/drawingml/2006/main">
               <a:ext uri="{FF2B5EF4-FFF2-40B4-BE49-F238E27FC236}">
-                <a16:creationId xmlns:a16="http://schemas.microsoft.com/office/drawing/2014/main" id="{D089D4DC-9B08-429F-8C11-251D9CF6B8C3}"/>
+                <a16:creationId xmlns:a16="http://schemas.microsoft.com/office/drawing/2014/main" id="{5CECB8B8-F3D8-4508-A15D-C72C7F4A1F13}"/>
               </a:ext>
             </a:extLst>
           </p:cNvPr>
@@ -20511,7 +20511,7 @@
           <p:cNvPr id="3" name="Text 1">
             <a:extLst xmlns:a="http://schemas.openxmlformats.org/drawingml/2006/main">
               <a:ext uri="{FF2B5EF4-FFF2-40B4-BE49-F238E27FC236}">
-                <a16:creationId xmlns:a16="http://schemas.microsoft.com/office/drawing/2014/main" id="{16B58548-0207-4EB2-8A3B-1502CEEFA837}"/>
+                <a16:creationId xmlns:a16="http://schemas.microsoft.com/office/drawing/2014/main" id="{BA171385-E4F4-4EDE-9C49-41EF06DF4E45}"/>
               </a:ext>
             </a:extLst>
           </p:cNvPr>
@@ -20558,7 +20558,7 @@
           <p:cNvPr id="4" name="Shape 2">
             <a:extLst xmlns:a="http://schemas.openxmlformats.org/drawingml/2006/main">
               <a:ext uri="{FF2B5EF4-FFF2-40B4-BE49-F238E27FC236}">
-                <a16:creationId xmlns:a16="http://schemas.microsoft.com/office/drawing/2014/main" id="{F0DA6503-CC8B-4689-801C-0339D8C333B9}"/>
+                <a16:creationId xmlns:a16="http://schemas.microsoft.com/office/drawing/2014/main" id="{AB44D6A1-A707-486B-87A2-8D9C43365B54}"/>
               </a:ext>
             </a:extLst>
           </p:cNvPr>
@@ -20593,7 +20593,7 @@
           <p:cNvPr id="5" name="Text 3">
             <a:extLst xmlns:a="http://schemas.openxmlformats.org/drawingml/2006/main">
               <a:ext uri="{FF2B5EF4-FFF2-40B4-BE49-F238E27FC236}">
-                <a16:creationId xmlns:a16="http://schemas.microsoft.com/office/drawing/2014/main" id="{5365CFD7-8E3D-4AC0-87D7-866332455CD3}"/>
+                <a16:creationId xmlns:a16="http://schemas.microsoft.com/office/drawing/2014/main" id="{76EA5961-FB63-4EB8-8F63-CEB4CD59BA0C}"/>
               </a:ext>
             </a:extLst>
           </p:cNvPr>
@@ -20640,7 +20640,7 @@
           <p:cNvPr id="6" name="Shape 4">
             <a:extLst xmlns:a="http://schemas.openxmlformats.org/drawingml/2006/main">
               <a:ext uri="{FF2B5EF4-FFF2-40B4-BE49-F238E27FC236}">
-                <a16:creationId xmlns:a16="http://schemas.microsoft.com/office/drawing/2014/main" id="{CFC55ECB-2115-41B1-B7B7-EF3F1DBCB964}"/>
+                <a16:creationId xmlns:a16="http://schemas.microsoft.com/office/drawing/2014/main" id="{6BCC0C17-E066-4336-968C-B30F2202B28E}"/>
               </a:ext>
             </a:extLst>
           </p:cNvPr>
@@ -20671,7 +20671,7 @@
           <p:cNvPr id="7" name="Text 5">
             <a:extLst xmlns:a="http://schemas.openxmlformats.org/drawingml/2006/main">
               <a:ext uri="{FF2B5EF4-FFF2-40B4-BE49-F238E27FC236}">
-                <a16:creationId xmlns:a16="http://schemas.microsoft.com/office/drawing/2014/main" id="{49CFF0DF-2552-4720-835A-D1A5B74C37D0}"/>
+                <a16:creationId xmlns:a16="http://schemas.microsoft.com/office/drawing/2014/main" id="{00122229-38EB-4FC4-B17E-283A7560EE70}"/>
               </a:ext>
             </a:extLst>
           </p:cNvPr>
@@ -20718,7 +20718,7 @@
           <p:cNvPr id="8" name="Shape 6">
             <a:extLst xmlns:a="http://schemas.openxmlformats.org/drawingml/2006/main">
               <a:ext uri="{FF2B5EF4-FFF2-40B4-BE49-F238E27FC236}">
-                <a16:creationId xmlns:a16="http://schemas.microsoft.com/office/drawing/2014/main" id="{4D8971C6-BC68-4BA6-98DE-3802581BBDF8}"/>
+                <a16:creationId xmlns:a16="http://schemas.microsoft.com/office/drawing/2014/main" id="{ABA28A09-960D-4D3D-85A3-D39C2547E370}"/>
               </a:ext>
             </a:extLst>
           </p:cNvPr>
@@ -20753,7 +20753,7 @@
           <p:cNvPr id="9" name="Text 7">
             <a:extLst xmlns:a="http://schemas.openxmlformats.org/drawingml/2006/main">
               <a:ext uri="{FF2B5EF4-FFF2-40B4-BE49-F238E27FC236}">
-                <a16:creationId xmlns:a16="http://schemas.microsoft.com/office/drawing/2014/main" id="{BBF7CAFB-A73A-4E0F-AA34-7A33295FD734}"/>
+                <a16:creationId xmlns:a16="http://schemas.microsoft.com/office/drawing/2014/main" id="{75D5BB4D-3180-4720-805F-EAA075B147FF}"/>
               </a:ext>
             </a:extLst>
           </p:cNvPr>
@@ -20800,7 +20800,7 @@
           <p:cNvPr id="10" name="Text 8">
             <a:extLst xmlns:a="http://schemas.openxmlformats.org/drawingml/2006/main">
               <a:ext uri="{FF2B5EF4-FFF2-40B4-BE49-F238E27FC236}">
-                <a16:creationId xmlns:a16="http://schemas.microsoft.com/office/drawing/2014/main" id="{9A6727AD-F661-4518-9675-D1A517453510}"/>
+                <a16:creationId xmlns:a16="http://schemas.microsoft.com/office/drawing/2014/main" id="{F8DAC540-F03A-4B30-8EBC-9000FD74BCE3}"/>
               </a:ext>
             </a:extLst>
           </p:cNvPr>
@@ -20847,7 +20847,7 @@
           <p:cNvPr id="11" name="Text 9">
             <a:extLst xmlns:a="http://schemas.openxmlformats.org/drawingml/2006/main">
               <a:ext uri="{FF2B5EF4-FFF2-40B4-BE49-F238E27FC236}">
-                <a16:creationId xmlns:a16="http://schemas.microsoft.com/office/drawing/2014/main" id="{278BEEEE-BBC9-47E3-9493-E81CE0733FDB}"/>
+                <a16:creationId xmlns:a16="http://schemas.microsoft.com/office/drawing/2014/main" id="{AF7C133D-5070-4288-9B30-A77B40EEBE4F}"/>
               </a:ext>
             </a:extLst>
           </p:cNvPr>
@@ -20894,7 +20894,7 @@
           <p:cNvPr id="12" name="Shape 10">
             <a:extLst xmlns:a="http://schemas.openxmlformats.org/drawingml/2006/main">
               <a:ext uri="{FF2B5EF4-FFF2-40B4-BE49-F238E27FC236}">
-                <a16:creationId xmlns:a16="http://schemas.microsoft.com/office/drawing/2014/main" id="{C356A156-189C-420D-A980-16D6B8FBD263}"/>
+                <a16:creationId xmlns:a16="http://schemas.microsoft.com/office/drawing/2014/main" id="{0EC53F38-665F-4DAB-B804-B77A4A260096}"/>
               </a:ext>
             </a:extLst>
           </p:cNvPr>
@@ -20929,7 +20929,7 @@
           <p:cNvPr id="13" name="Text 11">
             <a:extLst xmlns:a="http://schemas.openxmlformats.org/drawingml/2006/main">
               <a:ext uri="{FF2B5EF4-FFF2-40B4-BE49-F238E27FC236}">
-                <a16:creationId xmlns:a16="http://schemas.microsoft.com/office/drawing/2014/main" id="{53706AB9-D82B-43BE-809E-152453771FF2}"/>
+                <a16:creationId xmlns:a16="http://schemas.microsoft.com/office/drawing/2014/main" id="{2C5579C9-6961-41ED-A4E2-98CCED7A7861}"/>
               </a:ext>
             </a:extLst>
           </p:cNvPr>
@@ -20976,7 +20976,7 @@
           <p:cNvPr id="14" name="Text 12">
             <a:extLst xmlns:a="http://schemas.openxmlformats.org/drawingml/2006/main">
               <a:ext uri="{FF2B5EF4-FFF2-40B4-BE49-F238E27FC236}">
-                <a16:creationId xmlns:a16="http://schemas.microsoft.com/office/drawing/2014/main" id="{C60C8F22-4290-4278-9126-9DD3E1BA7E4A}"/>
+                <a16:creationId xmlns:a16="http://schemas.microsoft.com/office/drawing/2014/main" id="{9753F68E-3D49-46D2-A033-0F04D97A199A}"/>
               </a:ext>
             </a:extLst>
           </p:cNvPr>
@@ -21023,7 +21023,7 @@
           <p:cNvPr id="15" name="Text 13">
             <a:extLst xmlns:a="http://schemas.openxmlformats.org/drawingml/2006/main">
               <a:ext uri="{FF2B5EF4-FFF2-40B4-BE49-F238E27FC236}">
-                <a16:creationId xmlns:a16="http://schemas.microsoft.com/office/drawing/2014/main" id="{868B9C51-4A2A-46DC-80EC-ADBF649BBA10}"/>
+                <a16:creationId xmlns:a16="http://schemas.microsoft.com/office/drawing/2014/main" id="{35D575C8-EE49-4439-9AC9-DDFEA0106D8C}"/>
               </a:ext>
             </a:extLst>
           </p:cNvPr>
@@ -21070,7 +21070,7 @@
           <p:cNvPr id="16" name="Shape 14">
             <a:extLst xmlns:a="http://schemas.openxmlformats.org/drawingml/2006/main">
               <a:ext uri="{FF2B5EF4-FFF2-40B4-BE49-F238E27FC236}">
-                <a16:creationId xmlns:a16="http://schemas.microsoft.com/office/drawing/2014/main" id="{C92EC62F-5C50-411C-967B-D93E53B576E3}"/>
+                <a16:creationId xmlns:a16="http://schemas.microsoft.com/office/drawing/2014/main" id="{6316E8ED-0630-4E60-A731-E229F174828A}"/>
               </a:ext>
             </a:extLst>
           </p:cNvPr>
@@ -21105,7 +21105,7 @@
           <p:cNvPr id="17" name="Text 15">
             <a:extLst xmlns:a="http://schemas.openxmlformats.org/drawingml/2006/main">
               <a:ext uri="{FF2B5EF4-FFF2-40B4-BE49-F238E27FC236}">
-                <a16:creationId xmlns:a16="http://schemas.microsoft.com/office/drawing/2014/main" id="{C810C3EE-51AF-464E-92AD-411D8AC03807}"/>
+                <a16:creationId xmlns:a16="http://schemas.microsoft.com/office/drawing/2014/main" id="{041B5E04-2E29-4745-B5AE-25926505A7EF}"/>
               </a:ext>
             </a:extLst>
           </p:cNvPr>
@@ -21152,7 +21152,7 @@
           <p:cNvPr id="18" name="Text 16">
             <a:extLst xmlns:a="http://schemas.openxmlformats.org/drawingml/2006/main">
               <a:ext uri="{FF2B5EF4-FFF2-40B4-BE49-F238E27FC236}">
-                <a16:creationId xmlns:a16="http://schemas.microsoft.com/office/drawing/2014/main" id="{45B0D86E-D816-40C7-9300-906EFD741E0F}"/>
+                <a16:creationId xmlns:a16="http://schemas.microsoft.com/office/drawing/2014/main" id="{B160A74A-2232-41B2-9BCA-161858110316}"/>
               </a:ext>
             </a:extLst>
           </p:cNvPr>
@@ -21199,7 +21199,7 @@
           <p:cNvPr id="19" name="Text 17">
             <a:extLst xmlns:a="http://schemas.openxmlformats.org/drawingml/2006/main">
               <a:ext uri="{FF2B5EF4-FFF2-40B4-BE49-F238E27FC236}">
-                <a16:creationId xmlns:a16="http://schemas.microsoft.com/office/drawing/2014/main" id="{77D1E658-4A8F-47C3-9429-5EC4159B78C2}"/>
+                <a16:creationId xmlns:a16="http://schemas.microsoft.com/office/drawing/2014/main" id="{F4D90977-AEBE-4255-81CF-25EF823D4F70}"/>
               </a:ext>
             </a:extLst>
           </p:cNvPr>
@@ -21246,7 +21246,7 @@
           <p:cNvPr id="20" name="Shape 18">
             <a:extLst xmlns:a="http://schemas.openxmlformats.org/drawingml/2006/main">
               <a:ext uri="{FF2B5EF4-FFF2-40B4-BE49-F238E27FC236}">
-                <a16:creationId xmlns:a16="http://schemas.microsoft.com/office/drawing/2014/main" id="{D6C671C0-2223-43A7-ADCA-FB1BF5FFA671}"/>
+                <a16:creationId xmlns:a16="http://schemas.microsoft.com/office/drawing/2014/main" id="{37D1FBBB-DDB2-419F-8245-3F5EB623D583}"/>
               </a:ext>
             </a:extLst>
           </p:cNvPr>
@@ -21281,7 +21281,7 @@
           <p:cNvPr id="21" name="Text 19">
             <a:extLst xmlns:a="http://schemas.openxmlformats.org/drawingml/2006/main">
               <a:ext uri="{FF2B5EF4-FFF2-40B4-BE49-F238E27FC236}">
-                <a16:creationId xmlns:a16="http://schemas.microsoft.com/office/drawing/2014/main" id="{ABDFFCA0-0782-4F24-862E-2115920BF07F}"/>
+                <a16:creationId xmlns:a16="http://schemas.microsoft.com/office/drawing/2014/main" id="{64694264-B74B-43B6-A9F1-8675AE6AE37E}"/>
               </a:ext>
             </a:extLst>
           </p:cNvPr>
@@ -21328,7 +21328,7 @@
           <p:cNvPr id="22" name="Text 20">
             <a:extLst xmlns:a="http://schemas.openxmlformats.org/drawingml/2006/main">
               <a:ext uri="{FF2B5EF4-FFF2-40B4-BE49-F238E27FC236}">
-                <a16:creationId xmlns:a16="http://schemas.microsoft.com/office/drawing/2014/main" id="{E76D7D1F-E8B1-43D4-8C41-EBC61005D96C}"/>
+                <a16:creationId xmlns:a16="http://schemas.microsoft.com/office/drawing/2014/main" id="{CE8F0A4B-E56F-4078-959B-09F8BB71E68B}"/>
               </a:ext>
             </a:extLst>
           </p:cNvPr>
@@ -21375,7 +21375,7 @@
           <p:cNvPr id="23" name="Text 21">
             <a:extLst xmlns:a="http://schemas.openxmlformats.org/drawingml/2006/main">
               <a:ext uri="{FF2B5EF4-FFF2-40B4-BE49-F238E27FC236}">
-                <a16:creationId xmlns:a16="http://schemas.microsoft.com/office/drawing/2014/main" id="{6F14EE74-FA3D-4855-9F76-5DED5CCDA80D}"/>
+                <a16:creationId xmlns:a16="http://schemas.microsoft.com/office/drawing/2014/main" id="{849DDEB8-2A84-44F1-89F4-7FFF573DB001}"/>
               </a:ext>
             </a:extLst>
           </p:cNvPr>
@@ -21420,7 +21420,7 @@
     </p:spTree>
     <p:extLst>
       <p:ext uri="{BB962C8B-B14F-4D97-AF65-F5344CB8AC3E}">
-        <p14:creationId xmlns:p14="http://schemas.microsoft.com/office/powerpoint/2010/main" val="1520111807"/>
+        <p14:creationId xmlns:p14="http://schemas.microsoft.com/office/powerpoint/2010/main" val="278951654"/>
       </p:ext>
     </p:extLst>
   </p:cSld>
@@ -21451,7 +21451,7 @@
           <p:cNvPr id="2" name="Text 0">
             <a:extLst xmlns:a="http://schemas.openxmlformats.org/drawingml/2006/main">
               <a:ext uri="{FF2B5EF4-FFF2-40B4-BE49-F238E27FC236}">
-                <a16:creationId xmlns:a16="http://schemas.microsoft.com/office/drawing/2014/main" id="{D9A00283-437F-4B4B-9FED-F6B8C259CB14}"/>
+                <a16:creationId xmlns:a16="http://schemas.microsoft.com/office/drawing/2014/main" id="{65E6B13D-C14D-4DE4-8ED8-ABAB8200D420}"/>
               </a:ext>
             </a:extLst>
           </p:cNvPr>
@@ -21498,7 +21498,7 @@
           <p:cNvPr id="3" name="Text 1">
             <a:extLst xmlns:a="http://schemas.openxmlformats.org/drawingml/2006/main">
               <a:ext uri="{FF2B5EF4-FFF2-40B4-BE49-F238E27FC236}">
-                <a16:creationId xmlns:a16="http://schemas.microsoft.com/office/drawing/2014/main" id="{5B68A04E-1C4F-4D8C-954B-23FDBAB0E9E4}"/>
+                <a16:creationId xmlns:a16="http://schemas.microsoft.com/office/drawing/2014/main" id="{563C1387-5557-4D59-8C0D-1FE591B29506}"/>
               </a:ext>
             </a:extLst>
           </p:cNvPr>
@@ -21545,7 +21545,7 @@
           <p:cNvPr id="4" name="Shape 2">
             <a:extLst xmlns:a="http://schemas.openxmlformats.org/drawingml/2006/main">
               <a:ext uri="{FF2B5EF4-FFF2-40B4-BE49-F238E27FC236}">
-                <a16:creationId xmlns:a16="http://schemas.microsoft.com/office/drawing/2014/main" id="{97ACDCA1-76E5-4778-8EB6-5052721FDF3A}"/>
+                <a16:creationId xmlns:a16="http://schemas.microsoft.com/office/drawing/2014/main" id="{9EAEFBEF-C4E0-459C-BBF1-6C7BF8C2A04C}"/>
               </a:ext>
             </a:extLst>
           </p:cNvPr>
@@ -21580,7 +21580,7 @@
           <p:cNvPr id="5" name="Text 3">
             <a:extLst xmlns:a="http://schemas.openxmlformats.org/drawingml/2006/main">
               <a:ext uri="{FF2B5EF4-FFF2-40B4-BE49-F238E27FC236}">
-                <a16:creationId xmlns:a16="http://schemas.microsoft.com/office/drawing/2014/main" id="{E37D1C30-A7DB-475E-BEC4-1D4DC44682D3}"/>
+                <a16:creationId xmlns:a16="http://schemas.microsoft.com/office/drawing/2014/main" id="{C4BC4DC0-78AE-4CE4-B786-03437B8B55F6}"/>
               </a:ext>
             </a:extLst>
           </p:cNvPr>
@@ -21627,7 +21627,7 @@
           <p:cNvPr id="6" name="Shape 4">
             <a:extLst xmlns:a="http://schemas.openxmlformats.org/drawingml/2006/main">
               <a:ext uri="{FF2B5EF4-FFF2-40B4-BE49-F238E27FC236}">
-                <a16:creationId xmlns:a16="http://schemas.microsoft.com/office/drawing/2014/main" id="{930550F9-A202-47D9-892C-96349312595E}"/>
+                <a16:creationId xmlns:a16="http://schemas.microsoft.com/office/drawing/2014/main" id="{53AF50A3-4924-4513-AADE-3810C8B06364}"/>
               </a:ext>
             </a:extLst>
           </p:cNvPr>
@@ -21658,7 +21658,7 @@
           <p:cNvPr id="7" name="Shape 5">
             <a:extLst xmlns:a="http://schemas.openxmlformats.org/drawingml/2006/main">
               <a:ext uri="{FF2B5EF4-FFF2-40B4-BE49-F238E27FC236}">
-                <a16:creationId xmlns:a16="http://schemas.microsoft.com/office/drawing/2014/main" id="{10D45702-B840-4545-806D-9AF723515E6B}"/>
+                <a16:creationId xmlns:a16="http://schemas.microsoft.com/office/drawing/2014/main" id="{88EE2B2D-06BB-4233-8916-DF0666A96DE1}"/>
               </a:ext>
             </a:extLst>
           </p:cNvPr>
@@ -21693,7 +21693,7 @@
           <p:cNvPr id="8" name="Text 6">
             <a:extLst xmlns:a="http://schemas.openxmlformats.org/drawingml/2006/main">
               <a:ext uri="{FF2B5EF4-FFF2-40B4-BE49-F238E27FC236}">
-                <a16:creationId xmlns:a16="http://schemas.microsoft.com/office/drawing/2014/main" id="{24D7623C-8D9A-45D4-9D34-D1FB0D016944}"/>
+                <a16:creationId xmlns:a16="http://schemas.microsoft.com/office/drawing/2014/main" id="{54656091-9661-4FC0-974D-5F0FF47814BF}"/>
               </a:ext>
             </a:extLst>
           </p:cNvPr>
@@ -21740,7 +21740,7 @@
           <p:cNvPr id="9" name="Shape 7">
             <a:extLst xmlns:a="http://schemas.openxmlformats.org/drawingml/2006/main">
               <a:ext uri="{FF2B5EF4-FFF2-40B4-BE49-F238E27FC236}">
-                <a16:creationId xmlns:a16="http://schemas.microsoft.com/office/drawing/2014/main" id="{806C22F2-49A6-41D0-88CE-89700A66D19E}"/>
+                <a16:creationId xmlns:a16="http://schemas.microsoft.com/office/drawing/2014/main" id="{F3CD27EF-B2C1-45A1-8299-AF1A47EB2C41}"/>
               </a:ext>
             </a:extLst>
           </p:cNvPr>
@@ -21775,7 +21775,7 @@
           <p:cNvPr id="10" name="Text 8">
             <a:extLst xmlns:a="http://schemas.openxmlformats.org/drawingml/2006/main">
               <a:ext uri="{FF2B5EF4-FFF2-40B4-BE49-F238E27FC236}">
-                <a16:creationId xmlns:a16="http://schemas.microsoft.com/office/drawing/2014/main" id="{70C15CCF-5FC5-40AA-9B12-B4216F0D49D3}"/>
+                <a16:creationId xmlns:a16="http://schemas.microsoft.com/office/drawing/2014/main" id="{77293B62-F8C3-40BB-B180-084C9E046BDB}"/>
               </a:ext>
             </a:extLst>
           </p:cNvPr>
@@ -21822,7 +21822,7 @@
           <p:cNvPr id="11" name="Text 9">
             <a:extLst xmlns:a="http://schemas.openxmlformats.org/drawingml/2006/main">
               <a:ext uri="{FF2B5EF4-FFF2-40B4-BE49-F238E27FC236}">
-                <a16:creationId xmlns:a16="http://schemas.microsoft.com/office/drawing/2014/main" id="{0F622949-261D-4E20-A865-639B6EAFD37C}"/>
+                <a16:creationId xmlns:a16="http://schemas.microsoft.com/office/drawing/2014/main" id="{0179E94A-ACEC-4EE7-B843-2CF5B0EE332E}"/>
               </a:ext>
             </a:extLst>
           </p:cNvPr>
@@ -21869,7 +21869,7 @@
           <p:cNvPr id="12" name="Text 10">
             <a:extLst xmlns:a="http://schemas.openxmlformats.org/drawingml/2006/main">
               <a:ext uri="{FF2B5EF4-FFF2-40B4-BE49-F238E27FC236}">
-                <a16:creationId xmlns:a16="http://schemas.microsoft.com/office/drawing/2014/main" id="{ED2C1F51-CC99-4B56-AED7-BD6E5CE41C56}"/>
+                <a16:creationId xmlns:a16="http://schemas.microsoft.com/office/drawing/2014/main" id="{C3367E6F-3336-4EB6-8721-4523E2F3D39B}"/>
               </a:ext>
             </a:extLst>
           </p:cNvPr>
@@ -21916,7 +21916,7 @@
           <p:cNvPr id="13" name="Shape 11">
             <a:extLst xmlns:a="http://schemas.openxmlformats.org/drawingml/2006/main">
               <a:ext uri="{FF2B5EF4-FFF2-40B4-BE49-F238E27FC236}">
-                <a16:creationId xmlns:a16="http://schemas.microsoft.com/office/drawing/2014/main" id="{4594A08F-21FD-4FBE-B373-794A882FE42B}"/>
+                <a16:creationId xmlns:a16="http://schemas.microsoft.com/office/drawing/2014/main" id="{EF4F7F93-973E-46F4-93C8-9BCCCA2CB19B}"/>
               </a:ext>
             </a:extLst>
           </p:cNvPr>
@@ -21948,7 +21948,7 @@
           <p:cNvPr id="14" name="Shape 12">
             <a:extLst xmlns:a="http://schemas.openxmlformats.org/drawingml/2006/main">
               <a:ext uri="{FF2B5EF4-FFF2-40B4-BE49-F238E27FC236}">
-                <a16:creationId xmlns:a16="http://schemas.microsoft.com/office/drawing/2014/main" id="{715A7800-1FA7-469B-8EA6-75A4F02A4C1D}"/>
+                <a16:creationId xmlns:a16="http://schemas.microsoft.com/office/drawing/2014/main" id="{7527DAD1-0572-4F67-B893-C51B512C3775}"/>
               </a:ext>
             </a:extLst>
           </p:cNvPr>
@@ -21983,7 +21983,7 @@
           <p:cNvPr id="15" name="Text 13">
             <a:extLst xmlns:a="http://schemas.openxmlformats.org/drawingml/2006/main">
               <a:ext uri="{FF2B5EF4-FFF2-40B4-BE49-F238E27FC236}">
-                <a16:creationId xmlns:a16="http://schemas.microsoft.com/office/drawing/2014/main" id="{CBA391B4-3245-4C61-BB26-408B1324FB79}"/>
+                <a16:creationId xmlns:a16="http://schemas.microsoft.com/office/drawing/2014/main" id="{A7E26DEE-6C68-4390-8655-F5551645A095}"/>
               </a:ext>
             </a:extLst>
           </p:cNvPr>
@@ -22030,7 +22030,7 @@
           <p:cNvPr id="16" name="Text 14">
             <a:extLst xmlns:a="http://schemas.openxmlformats.org/drawingml/2006/main">
               <a:ext uri="{FF2B5EF4-FFF2-40B4-BE49-F238E27FC236}">
-                <a16:creationId xmlns:a16="http://schemas.microsoft.com/office/drawing/2014/main" id="{81AD74ED-0107-4C6A-8F6C-D088C0260090}"/>
+                <a16:creationId xmlns:a16="http://schemas.microsoft.com/office/drawing/2014/main" id="{45580F86-321D-48CB-8D57-765997D623FF}"/>
               </a:ext>
             </a:extLst>
           </p:cNvPr>
@@ -22077,7 +22077,7 @@
           <p:cNvPr id="17" name="Text 15">
             <a:extLst xmlns:a="http://schemas.openxmlformats.org/drawingml/2006/main">
               <a:ext uri="{FF2B5EF4-FFF2-40B4-BE49-F238E27FC236}">
-                <a16:creationId xmlns:a16="http://schemas.microsoft.com/office/drawing/2014/main" id="{ACE1F8A6-C9B0-4677-AA5B-E0CBC509931B}"/>
+                <a16:creationId xmlns:a16="http://schemas.microsoft.com/office/drawing/2014/main" id="{A7146731-D099-43AD-9B2E-828C0581EE92}"/>
               </a:ext>
             </a:extLst>
           </p:cNvPr>
@@ -22124,7 +22124,7 @@
           <p:cNvPr id="18" name="Shape 16">
             <a:extLst xmlns:a="http://schemas.openxmlformats.org/drawingml/2006/main">
               <a:ext uri="{FF2B5EF4-FFF2-40B4-BE49-F238E27FC236}">
-                <a16:creationId xmlns:a16="http://schemas.microsoft.com/office/drawing/2014/main" id="{81FDA53C-7BA3-44B5-8227-20032B7E416E}"/>
+                <a16:creationId xmlns:a16="http://schemas.microsoft.com/office/drawing/2014/main" id="{FE2999C6-FE81-41E0-A7B0-9317C2041879}"/>
               </a:ext>
             </a:extLst>
           </p:cNvPr>
@@ -22156,7 +22156,7 @@
           <p:cNvPr id="19" name="Shape 17">
             <a:extLst xmlns:a="http://schemas.openxmlformats.org/drawingml/2006/main">
               <a:ext uri="{FF2B5EF4-FFF2-40B4-BE49-F238E27FC236}">
-                <a16:creationId xmlns:a16="http://schemas.microsoft.com/office/drawing/2014/main" id="{E5A8BE4B-A3E8-4630-84BC-90CE85CB49FE}"/>
+                <a16:creationId xmlns:a16="http://schemas.microsoft.com/office/drawing/2014/main" id="{BF5A3508-760F-44B1-94DF-93AD535761A8}"/>
               </a:ext>
             </a:extLst>
           </p:cNvPr>
@@ -22191,7 +22191,7 @@
           <p:cNvPr id="20" name="Text 18">
             <a:extLst xmlns:a="http://schemas.openxmlformats.org/drawingml/2006/main">
               <a:ext uri="{FF2B5EF4-FFF2-40B4-BE49-F238E27FC236}">
-                <a16:creationId xmlns:a16="http://schemas.microsoft.com/office/drawing/2014/main" id="{021CB201-47E8-4DEC-878F-45CA6050D2CF}"/>
+                <a16:creationId xmlns:a16="http://schemas.microsoft.com/office/drawing/2014/main" id="{0EA56631-4429-4E6D-BFC5-528D886FA102}"/>
               </a:ext>
             </a:extLst>
           </p:cNvPr>
@@ -22238,7 +22238,7 @@
           <p:cNvPr id="21" name="Text 19">
             <a:extLst xmlns:a="http://schemas.openxmlformats.org/drawingml/2006/main">
               <a:ext uri="{FF2B5EF4-FFF2-40B4-BE49-F238E27FC236}">
-                <a16:creationId xmlns:a16="http://schemas.microsoft.com/office/drawing/2014/main" id="{BB3C939B-53EB-4E6E-81DF-AB6CE237DA5F}"/>
+                <a16:creationId xmlns:a16="http://schemas.microsoft.com/office/drawing/2014/main" id="{25CFF4EF-FA1C-461C-A55F-92E1A622EC51}"/>
               </a:ext>
             </a:extLst>
           </p:cNvPr>
@@ -22285,7 +22285,7 @@
           <p:cNvPr id="22" name="Text 20">
             <a:extLst xmlns:a="http://schemas.openxmlformats.org/drawingml/2006/main">
               <a:ext uri="{FF2B5EF4-FFF2-40B4-BE49-F238E27FC236}">
-                <a16:creationId xmlns:a16="http://schemas.microsoft.com/office/drawing/2014/main" id="{A9E5913D-48BF-473C-A5DE-055175A2B84A}"/>
+                <a16:creationId xmlns:a16="http://schemas.microsoft.com/office/drawing/2014/main" id="{7018FA3C-3E5B-497B-A381-1A09F44BD4D3}"/>
               </a:ext>
             </a:extLst>
           </p:cNvPr>
@@ -22332,7 +22332,7 @@
           <p:cNvPr id="23" name="Shape 21">
             <a:extLst xmlns:a="http://schemas.openxmlformats.org/drawingml/2006/main">
               <a:ext uri="{FF2B5EF4-FFF2-40B4-BE49-F238E27FC236}">
-                <a16:creationId xmlns:a16="http://schemas.microsoft.com/office/drawing/2014/main" id="{C5511782-FEAA-412D-9452-018C8F07D12E}"/>
+                <a16:creationId xmlns:a16="http://schemas.microsoft.com/office/drawing/2014/main" id="{C03A4EBA-D0F4-4594-BB22-1D76228AB4FA}"/>
               </a:ext>
             </a:extLst>
           </p:cNvPr>
@@ -22364,7 +22364,7 @@
           <p:cNvPr id="24" name="Shape 22">
             <a:extLst xmlns:a="http://schemas.openxmlformats.org/drawingml/2006/main">
               <a:ext uri="{FF2B5EF4-FFF2-40B4-BE49-F238E27FC236}">
-                <a16:creationId xmlns:a16="http://schemas.microsoft.com/office/drawing/2014/main" id="{8DF30195-4CC6-4070-9A4C-587ACF5DBC4A}"/>
+                <a16:creationId xmlns:a16="http://schemas.microsoft.com/office/drawing/2014/main" id="{929D174C-3F13-482E-9AB8-CAB447A431BD}"/>
               </a:ext>
             </a:extLst>
           </p:cNvPr>
@@ -22399,7 +22399,7 @@
           <p:cNvPr id="25" name="Text 23">
             <a:extLst xmlns:a="http://schemas.openxmlformats.org/drawingml/2006/main">
               <a:ext uri="{FF2B5EF4-FFF2-40B4-BE49-F238E27FC236}">
-                <a16:creationId xmlns:a16="http://schemas.microsoft.com/office/drawing/2014/main" id="{7D4B2C10-F7C1-44D1-A4E5-E3E3BEA65903}"/>
+                <a16:creationId xmlns:a16="http://schemas.microsoft.com/office/drawing/2014/main" id="{BE338C68-0941-41DC-8F18-8CFA1D8BE1A2}"/>
               </a:ext>
             </a:extLst>
           </p:cNvPr>
@@ -22446,7 +22446,7 @@
           <p:cNvPr id="26" name="Text 24">
             <a:extLst xmlns:a="http://schemas.openxmlformats.org/drawingml/2006/main">
               <a:ext uri="{FF2B5EF4-FFF2-40B4-BE49-F238E27FC236}">
-                <a16:creationId xmlns:a16="http://schemas.microsoft.com/office/drawing/2014/main" id="{63B86520-3C84-4FE7-8D6B-3F04EB63EFE7}"/>
+                <a16:creationId xmlns:a16="http://schemas.microsoft.com/office/drawing/2014/main" id="{96E18D9A-E891-4FED-933A-D9F3042FDA4D}"/>
               </a:ext>
             </a:extLst>
           </p:cNvPr>
@@ -22493,7 +22493,7 @@
           <p:cNvPr id="27" name="Text 25">
             <a:extLst xmlns:a="http://schemas.openxmlformats.org/drawingml/2006/main">
               <a:ext uri="{FF2B5EF4-FFF2-40B4-BE49-F238E27FC236}">
-                <a16:creationId xmlns:a16="http://schemas.microsoft.com/office/drawing/2014/main" id="{14DF0789-71A6-4B04-B780-C79171553F24}"/>
+                <a16:creationId xmlns:a16="http://schemas.microsoft.com/office/drawing/2014/main" id="{FA34F10E-3796-45C6-9F44-AACC5D9F55A3}"/>
               </a:ext>
             </a:extLst>
           </p:cNvPr>
@@ -22540,7 +22540,7 @@
           <p:cNvPr id="28" name="Shape 26">
             <a:extLst xmlns:a="http://schemas.openxmlformats.org/drawingml/2006/main">
               <a:ext uri="{FF2B5EF4-FFF2-40B4-BE49-F238E27FC236}">
-                <a16:creationId xmlns:a16="http://schemas.microsoft.com/office/drawing/2014/main" id="{B3ECF8AB-7B3F-400F-A838-B93B04D8A06F}"/>
+                <a16:creationId xmlns:a16="http://schemas.microsoft.com/office/drawing/2014/main" id="{792540D1-6B5B-434D-A88F-8D9DD2DB7142}"/>
               </a:ext>
             </a:extLst>
           </p:cNvPr>
@@ -22572,7 +22572,7 @@
           <p:cNvPr id="29" name="Shape 27">
             <a:extLst xmlns:a="http://schemas.openxmlformats.org/drawingml/2006/main">
               <a:ext uri="{FF2B5EF4-FFF2-40B4-BE49-F238E27FC236}">
-                <a16:creationId xmlns:a16="http://schemas.microsoft.com/office/drawing/2014/main" id="{763741BE-F7A0-426F-9CCC-04FCA73596E3}"/>
+                <a16:creationId xmlns:a16="http://schemas.microsoft.com/office/drawing/2014/main" id="{A07F310A-CAE5-4F0A-9927-6F99463482D3}"/>
               </a:ext>
             </a:extLst>
           </p:cNvPr>
@@ -22607,7 +22607,7 @@
           <p:cNvPr id="30" name="Text 28">
             <a:extLst xmlns:a="http://schemas.openxmlformats.org/drawingml/2006/main">
               <a:ext uri="{FF2B5EF4-FFF2-40B4-BE49-F238E27FC236}">
-                <a16:creationId xmlns:a16="http://schemas.microsoft.com/office/drawing/2014/main" id="{DEAC824C-A110-499E-820B-2FE6AE341325}"/>
+                <a16:creationId xmlns:a16="http://schemas.microsoft.com/office/drawing/2014/main" id="{77EC6C54-1B67-4299-B62F-25089E447963}"/>
               </a:ext>
             </a:extLst>
           </p:cNvPr>
@@ -22654,7 +22654,7 @@
           <p:cNvPr id="31" name="Text 29">
             <a:extLst xmlns:a="http://schemas.openxmlformats.org/drawingml/2006/main">
               <a:ext uri="{FF2B5EF4-FFF2-40B4-BE49-F238E27FC236}">
-                <a16:creationId xmlns:a16="http://schemas.microsoft.com/office/drawing/2014/main" id="{09703CFB-1B8A-4A4C-8F0E-FF8646C583E7}"/>
+                <a16:creationId xmlns:a16="http://schemas.microsoft.com/office/drawing/2014/main" id="{8D986AA5-BE33-41EB-8FA2-92BF4A9569EA}"/>
               </a:ext>
             </a:extLst>
           </p:cNvPr>
@@ -22701,7 +22701,7 @@
           <p:cNvPr id="32" name="Text 30">
             <a:extLst xmlns:a="http://schemas.openxmlformats.org/drawingml/2006/main">
               <a:ext uri="{FF2B5EF4-FFF2-40B4-BE49-F238E27FC236}">
-                <a16:creationId xmlns:a16="http://schemas.microsoft.com/office/drawing/2014/main" id="{9811A692-9D0A-4AF4-938E-C10BB3151F06}"/>
+                <a16:creationId xmlns:a16="http://schemas.microsoft.com/office/drawing/2014/main" id="{79F4B52F-3284-4943-92E6-BBCDD69F3FB1}"/>
               </a:ext>
             </a:extLst>
           </p:cNvPr>
@@ -22748,7 +22748,7 @@
           <p:cNvPr id="33" name="Shape 31">
             <a:extLst xmlns:a="http://schemas.openxmlformats.org/drawingml/2006/main">
               <a:ext uri="{FF2B5EF4-FFF2-40B4-BE49-F238E27FC236}">
-                <a16:creationId xmlns:a16="http://schemas.microsoft.com/office/drawing/2014/main" id="{BB5251B2-58AC-4F73-9D46-5AAC1EE99D69}"/>
+                <a16:creationId xmlns:a16="http://schemas.microsoft.com/office/drawing/2014/main" id="{944FBBB4-77B1-4199-B3EB-5622FFA1A920}"/>
               </a:ext>
             </a:extLst>
           </p:cNvPr>
@@ -22783,7 +22783,7 @@
           <p:cNvPr id="34" name="Text 32">
             <a:extLst xmlns:a="http://schemas.openxmlformats.org/drawingml/2006/main">
               <a:ext uri="{FF2B5EF4-FFF2-40B4-BE49-F238E27FC236}">
-                <a16:creationId xmlns:a16="http://schemas.microsoft.com/office/drawing/2014/main" id="{6A458E2B-A721-4F66-9813-74B23EB8554F}"/>
+                <a16:creationId xmlns:a16="http://schemas.microsoft.com/office/drawing/2014/main" id="{B7A8ACE2-AB4B-4457-9DC0-A17958881116}"/>
               </a:ext>
             </a:extLst>
           </p:cNvPr>
@@ -22830,7 +22830,7 @@
           <p:cNvPr id="35" name="Shape 33">
             <a:extLst xmlns:a="http://schemas.openxmlformats.org/drawingml/2006/main">
               <a:ext uri="{FF2B5EF4-FFF2-40B4-BE49-F238E27FC236}">
-                <a16:creationId xmlns:a16="http://schemas.microsoft.com/office/drawing/2014/main" id="{419FACC6-922A-47FA-97C2-FC9EAD5F3498}"/>
+                <a16:creationId xmlns:a16="http://schemas.microsoft.com/office/drawing/2014/main" id="{C8AD4ED3-B37F-421E-9C50-3326A5585488}"/>
               </a:ext>
             </a:extLst>
           </p:cNvPr>
@@ -22863,7 +22863,7 @@
           <p:cNvPr id="36" name="Text 34">
             <a:extLst xmlns:a="http://schemas.openxmlformats.org/drawingml/2006/main">
               <a:ext uri="{FF2B5EF4-FFF2-40B4-BE49-F238E27FC236}">
-                <a16:creationId xmlns:a16="http://schemas.microsoft.com/office/drawing/2014/main" id="{4B8CD169-0A9D-4ED8-A5E3-8FD4DB687D69}"/>
+                <a16:creationId xmlns:a16="http://schemas.microsoft.com/office/drawing/2014/main" id="{BB2EE246-3968-4B18-9925-C1CAD70A78F8}"/>
               </a:ext>
             </a:extLst>
           </p:cNvPr>
@@ -22910,7 +22910,7 @@
           <p:cNvPr id="37" name="Shape 35">
             <a:extLst xmlns:a="http://schemas.openxmlformats.org/drawingml/2006/main">
               <a:ext uri="{FF2B5EF4-FFF2-40B4-BE49-F238E27FC236}">
-                <a16:creationId xmlns:a16="http://schemas.microsoft.com/office/drawing/2014/main" id="{40618525-90AA-4D7B-A967-F179C1ECBFEF}"/>
+                <a16:creationId xmlns:a16="http://schemas.microsoft.com/office/drawing/2014/main" id="{297F86A1-E195-4EC4-A3BF-0DFBB3EA4829}"/>
               </a:ext>
             </a:extLst>
           </p:cNvPr>
@@ -22943,7 +22943,7 @@
           <p:cNvPr id="38" name="Text 36">
             <a:extLst xmlns:a="http://schemas.openxmlformats.org/drawingml/2006/main">
               <a:ext uri="{FF2B5EF4-FFF2-40B4-BE49-F238E27FC236}">
-                <a16:creationId xmlns:a16="http://schemas.microsoft.com/office/drawing/2014/main" id="{57EDC65B-C142-4EE5-BA27-7533C19D4995}"/>
+                <a16:creationId xmlns:a16="http://schemas.microsoft.com/office/drawing/2014/main" id="{B452952B-8F63-48AF-9F2D-83081466C996}"/>
               </a:ext>
             </a:extLst>
           </p:cNvPr>
@@ -22990,7 +22990,7 @@
           <p:cNvPr id="39" name="Shape 37">
             <a:extLst xmlns:a="http://schemas.openxmlformats.org/drawingml/2006/main">
               <a:ext uri="{FF2B5EF4-FFF2-40B4-BE49-F238E27FC236}">
-                <a16:creationId xmlns:a16="http://schemas.microsoft.com/office/drawing/2014/main" id="{8DF78A81-F38D-4324-83D0-CAF12353B3A4}"/>
+                <a16:creationId xmlns:a16="http://schemas.microsoft.com/office/drawing/2014/main" id="{6B37B038-C0E8-4668-A9B1-A72CCEA8E6E3}"/>
               </a:ext>
             </a:extLst>
           </p:cNvPr>
@@ -23023,7 +23023,7 @@
           <p:cNvPr id="40" name="Text 38">
             <a:extLst xmlns:a="http://schemas.openxmlformats.org/drawingml/2006/main">
               <a:ext uri="{FF2B5EF4-FFF2-40B4-BE49-F238E27FC236}">
-                <a16:creationId xmlns:a16="http://schemas.microsoft.com/office/drawing/2014/main" id="{C647EF19-D42B-4FD5-955B-CD7A835A0AB7}"/>
+                <a16:creationId xmlns:a16="http://schemas.microsoft.com/office/drawing/2014/main" id="{C2F73463-A9AC-41A2-8A89-0F5EFC6C48DF}"/>
               </a:ext>
             </a:extLst>
           </p:cNvPr>
@@ -23070,7 +23070,7 @@
           <p:cNvPr id="41" name="Shape 39">
             <a:extLst xmlns:a="http://schemas.openxmlformats.org/drawingml/2006/main">
               <a:ext uri="{FF2B5EF4-FFF2-40B4-BE49-F238E27FC236}">
-                <a16:creationId xmlns:a16="http://schemas.microsoft.com/office/drawing/2014/main" id="{E20FF1A1-BB1F-4FA0-B7F5-0E38CB00638E}"/>
+                <a16:creationId xmlns:a16="http://schemas.microsoft.com/office/drawing/2014/main" id="{418F0BD8-C319-4C03-9C27-C676E2E2F4E9}"/>
               </a:ext>
             </a:extLst>
           </p:cNvPr>
@@ -23105,7 +23105,7 @@
           <p:cNvPr id="42" name="Text 40">
             <a:extLst xmlns:a="http://schemas.openxmlformats.org/drawingml/2006/main">
               <a:ext uri="{FF2B5EF4-FFF2-40B4-BE49-F238E27FC236}">
-                <a16:creationId xmlns:a16="http://schemas.microsoft.com/office/drawing/2014/main" id="{FE4A0E01-C247-4414-8CB4-099F84807A11}"/>
+                <a16:creationId xmlns:a16="http://schemas.microsoft.com/office/drawing/2014/main" id="{65EF776E-4F3E-4649-A660-A306A7F082B6}"/>
               </a:ext>
             </a:extLst>
           </p:cNvPr>
@@ -23152,7 +23152,7 @@
           <p:cNvPr id="43" name="Text 41">
             <a:extLst xmlns:a="http://schemas.openxmlformats.org/drawingml/2006/main">
               <a:ext uri="{FF2B5EF4-FFF2-40B4-BE49-F238E27FC236}">
-                <a16:creationId xmlns:a16="http://schemas.microsoft.com/office/drawing/2014/main" id="{B43C54B6-EF69-4E52-9448-7244E777060E}"/>
+                <a16:creationId xmlns:a16="http://schemas.microsoft.com/office/drawing/2014/main" id="{A93980AE-EDB8-4816-9BEB-74BA82AF445D}"/>
               </a:ext>
             </a:extLst>
           </p:cNvPr>
@@ -23231,7 +23231,7 @@
           <p:cNvPr id="44" name="Text 42">
             <a:extLst xmlns:a="http://schemas.openxmlformats.org/drawingml/2006/main">
               <a:ext uri="{FF2B5EF4-FFF2-40B4-BE49-F238E27FC236}">
-                <a16:creationId xmlns:a16="http://schemas.microsoft.com/office/drawing/2014/main" id="{69C5C85B-F41C-4440-A06C-315B8B59AE0A}"/>
+                <a16:creationId xmlns:a16="http://schemas.microsoft.com/office/drawing/2014/main" id="{A46748AB-7BA0-4EA6-8753-4BA37C74265B}"/>
               </a:ext>
             </a:extLst>
           </p:cNvPr>
@@ -23278,7 +23278,7 @@
           <p:cNvPr id="45" name="Text 43">
             <a:extLst xmlns:a="http://schemas.openxmlformats.org/drawingml/2006/main">
               <a:ext uri="{FF2B5EF4-FFF2-40B4-BE49-F238E27FC236}">
-                <a16:creationId xmlns:a16="http://schemas.microsoft.com/office/drawing/2014/main" id="{B9E45CA3-C606-41C3-A23C-011B5738000F}"/>
+                <a16:creationId xmlns:a16="http://schemas.microsoft.com/office/drawing/2014/main" id="{9FBA34E9-69F1-42CB-8828-CAA54CA25B06}"/>
               </a:ext>
             </a:extLst>
           </p:cNvPr>
@@ -23325,7 +23325,7 @@
           <p:cNvPr id="46" name="Text 44">
             <a:extLst xmlns:a="http://schemas.openxmlformats.org/drawingml/2006/main">
               <a:ext uri="{FF2B5EF4-FFF2-40B4-BE49-F238E27FC236}">
-                <a16:creationId xmlns:a16="http://schemas.microsoft.com/office/drawing/2014/main" id="{9971A2AD-84F7-40B4-AFA4-A53295A5A5D5}"/>
+                <a16:creationId xmlns:a16="http://schemas.microsoft.com/office/drawing/2014/main" id="{93B97CF7-010A-4851-B2A4-9D12583D8AEB}"/>
               </a:ext>
             </a:extLst>
           </p:cNvPr>
@@ -23370,7 +23370,7 @@
     </p:spTree>
     <p:extLst>
       <p:ext uri="{BB962C8B-B14F-4D97-AF65-F5344CB8AC3E}">
-        <p14:creationId xmlns:p14="http://schemas.microsoft.com/office/powerpoint/2010/main" val="1174748675"/>
+        <p14:creationId xmlns:p14="http://schemas.microsoft.com/office/powerpoint/2010/main" val="925021918"/>
       </p:ext>
     </p:extLst>
   </p:cSld>
@@ -23401,7 +23401,7 @@
           <p:cNvPr id="2" name="Text 0">
             <a:extLst xmlns:a="http://schemas.openxmlformats.org/drawingml/2006/main">
               <a:ext uri="{FF2B5EF4-FFF2-40B4-BE49-F238E27FC236}">
-                <a16:creationId xmlns:a16="http://schemas.microsoft.com/office/drawing/2014/main" id="{AC9CE5C0-E8A6-457E-9A71-17DEB816DB10}"/>
+                <a16:creationId xmlns:a16="http://schemas.microsoft.com/office/drawing/2014/main" id="{617146CB-DFCB-4FF8-A237-3B36C62E8460}"/>
               </a:ext>
             </a:extLst>
           </p:cNvPr>
@@ -23448,7 +23448,7 @@
           <p:cNvPr id="3" name="Text 1">
             <a:extLst xmlns:a="http://schemas.openxmlformats.org/drawingml/2006/main">
               <a:ext uri="{FF2B5EF4-FFF2-40B4-BE49-F238E27FC236}">
-                <a16:creationId xmlns:a16="http://schemas.microsoft.com/office/drawing/2014/main" id="{5B14510B-77C0-4774-AB98-586451C46098}"/>
+                <a16:creationId xmlns:a16="http://schemas.microsoft.com/office/drawing/2014/main" id="{1F6FFCEF-C88B-4C63-8CBF-9BF446E74CFD}"/>
               </a:ext>
             </a:extLst>
           </p:cNvPr>
@@ -23495,7 +23495,7 @@
           <p:cNvPr id="4" name="Shape 2">
             <a:extLst xmlns:a="http://schemas.openxmlformats.org/drawingml/2006/main">
               <a:ext uri="{FF2B5EF4-FFF2-40B4-BE49-F238E27FC236}">
-                <a16:creationId xmlns:a16="http://schemas.microsoft.com/office/drawing/2014/main" id="{46C88044-B41D-4E62-B9DC-025022702F2B}"/>
+                <a16:creationId xmlns:a16="http://schemas.microsoft.com/office/drawing/2014/main" id="{C34A458A-1C6A-4ADC-8E34-198A37E721B8}"/>
               </a:ext>
             </a:extLst>
           </p:cNvPr>
@@ -23530,7 +23530,7 @@
           <p:cNvPr id="5" name="Text 3">
             <a:extLst xmlns:a="http://schemas.openxmlformats.org/drawingml/2006/main">
               <a:ext uri="{FF2B5EF4-FFF2-40B4-BE49-F238E27FC236}">
-                <a16:creationId xmlns:a16="http://schemas.microsoft.com/office/drawing/2014/main" id="{BC2CB1C2-3D42-43B3-9F82-FB914E0246B8}"/>
+                <a16:creationId xmlns:a16="http://schemas.microsoft.com/office/drawing/2014/main" id="{CE8C8432-990B-472A-B4EB-342EE1F1589E}"/>
               </a:ext>
             </a:extLst>
           </p:cNvPr>
@@ -23577,7 +23577,7 @@
           <p:cNvPr id="6" name="Shape 4">
             <a:extLst xmlns:a="http://schemas.openxmlformats.org/drawingml/2006/main">
               <a:ext uri="{FF2B5EF4-FFF2-40B4-BE49-F238E27FC236}">
-                <a16:creationId xmlns:a16="http://schemas.microsoft.com/office/drawing/2014/main" id="{2363D235-57C9-4351-9A50-7A29F78F38DB}"/>
+                <a16:creationId xmlns:a16="http://schemas.microsoft.com/office/drawing/2014/main" id="{58BE373E-57AE-4B23-BEA8-714D61AC23C4}"/>
               </a:ext>
             </a:extLst>
           </p:cNvPr>
@@ -23608,7 +23608,7 @@
           <p:cNvPr id="7" name="Shape 5">
             <a:extLst xmlns:a="http://schemas.openxmlformats.org/drawingml/2006/main">
               <a:ext uri="{FF2B5EF4-FFF2-40B4-BE49-F238E27FC236}">
-                <a16:creationId xmlns:a16="http://schemas.microsoft.com/office/drawing/2014/main" id="{5B501747-16E0-4DE0-8640-CDB6A8737AF3}"/>
+                <a16:creationId xmlns:a16="http://schemas.microsoft.com/office/drawing/2014/main" id="{4ECE1A37-1D1A-4F89-8DE0-486EA108BA00}"/>
               </a:ext>
             </a:extLst>
           </p:cNvPr>
@@ -23647,7 +23647,7 @@
           <p:nvPr/>
         </p:nvPicPr>
         <p:blipFill>
-          <a:blip xmlns:r="http://schemas.openxmlformats.org/officeDocument/2006/relationships" xmlns:a="http://schemas.openxmlformats.org/drawingml/2006/main" r:embed="R2cff80e557394d5f"/>
+          <a:blip xmlns:r="http://schemas.openxmlformats.org/officeDocument/2006/relationships" xmlns:a="http://schemas.openxmlformats.org/drawingml/2006/main" r:embed="R7067e0ddffe44093"/>
           <a:stretch xmlns:a="http://schemas.openxmlformats.org/drawingml/2006/main">
             <a:fillRect l="0" t="0" r="0" b="0"/>
           </a:stretch>
@@ -23667,7 +23667,7 @@
           <p:cNvPr id="9" name="Shape 6">
             <a:extLst xmlns:a="http://schemas.openxmlformats.org/drawingml/2006/main">
               <a:ext uri="{FF2B5EF4-FFF2-40B4-BE49-F238E27FC236}">
-                <a16:creationId xmlns:a16="http://schemas.microsoft.com/office/drawing/2014/main" id="{DA0E2A96-8D1E-4B41-8C8B-F9D8B6CC40FD}"/>
+                <a16:creationId xmlns:a16="http://schemas.microsoft.com/office/drawing/2014/main" id="{4573920E-F206-493E-A2CE-1B6939425371}"/>
               </a:ext>
             </a:extLst>
           </p:cNvPr>
@@ -23700,7 +23700,7 @@
           <p:cNvPr id="10" name="Text 7">
             <a:extLst xmlns:a="http://schemas.openxmlformats.org/drawingml/2006/main">
               <a:ext uri="{FF2B5EF4-FFF2-40B4-BE49-F238E27FC236}">
-                <a16:creationId xmlns:a16="http://schemas.microsoft.com/office/drawing/2014/main" id="{0F9AC49A-7298-415D-A8E5-FE83B77C6BAC}"/>
+                <a16:creationId xmlns:a16="http://schemas.microsoft.com/office/drawing/2014/main" id="{E0269CE0-F50D-4B6C-A344-CA82A6C3B17A}"/>
               </a:ext>
             </a:extLst>
           </p:cNvPr>
@@ -23747,7 +23747,7 @@
           <p:cNvPr id="11" name="Shape 8">
             <a:extLst xmlns:a="http://schemas.openxmlformats.org/drawingml/2006/main">
               <a:ext uri="{FF2B5EF4-FFF2-40B4-BE49-F238E27FC236}">
-                <a16:creationId xmlns:a16="http://schemas.microsoft.com/office/drawing/2014/main" id="{5648A192-1D4A-47D7-8A08-B60492EC942D}"/>
+                <a16:creationId xmlns:a16="http://schemas.microsoft.com/office/drawing/2014/main" id="{0F0ACBBE-5E97-4A8F-98B4-D4C7BED6256F}"/>
               </a:ext>
             </a:extLst>
           </p:cNvPr>
@@ -23782,7 +23782,7 @@
           <p:cNvPr id="12" name="Text 9">
             <a:extLst xmlns:a="http://schemas.openxmlformats.org/drawingml/2006/main">
               <a:ext uri="{FF2B5EF4-FFF2-40B4-BE49-F238E27FC236}">
-                <a16:creationId xmlns:a16="http://schemas.microsoft.com/office/drawing/2014/main" id="{148AC2AD-898C-4CE2-BB59-73B75493D153}"/>
+                <a16:creationId xmlns:a16="http://schemas.microsoft.com/office/drawing/2014/main" id="{9565748A-2E7E-4579-A8E7-243A95B6CB47}"/>
               </a:ext>
             </a:extLst>
           </p:cNvPr>
@@ -23829,7 +23829,7 @@
           <p:cNvPr id="13" name="Text 10">
             <a:extLst xmlns:a="http://schemas.openxmlformats.org/drawingml/2006/main">
               <a:ext uri="{FF2B5EF4-FFF2-40B4-BE49-F238E27FC236}">
-                <a16:creationId xmlns:a16="http://schemas.microsoft.com/office/drawing/2014/main" id="{A8315EB4-9E09-4026-80D4-A0E18BEAFA94}"/>
+                <a16:creationId xmlns:a16="http://schemas.microsoft.com/office/drawing/2014/main" id="{D41F88CF-499E-4BDE-8232-A12489ED6C1A}"/>
               </a:ext>
             </a:extLst>
           </p:cNvPr>
@@ -23876,7 +23876,7 @@
           <p:cNvPr id="14" name="Shape 11">
             <a:extLst xmlns:a="http://schemas.openxmlformats.org/drawingml/2006/main">
               <a:ext uri="{FF2B5EF4-FFF2-40B4-BE49-F238E27FC236}">
-                <a16:creationId xmlns:a16="http://schemas.microsoft.com/office/drawing/2014/main" id="{FC7CC785-9E7D-4642-A791-4E87100A6477}"/>
+                <a16:creationId xmlns:a16="http://schemas.microsoft.com/office/drawing/2014/main" id="{D474011E-1BEA-4F63-A483-024A293A1B5A}"/>
               </a:ext>
             </a:extLst>
           </p:cNvPr>
@@ -23911,7 +23911,7 @@
           <p:cNvPr id="15" name="Text 12">
             <a:extLst xmlns:a="http://schemas.openxmlformats.org/drawingml/2006/main">
               <a:ext uri="{FF2B5EF4-FFF2-40B4-BE49-F238E27FC236}">
-                <a16:creationId xmlns:a16="http://schemas.microsoft.com/office/drawing/2014/main" id="{887BED1B-71F1-4314-8452-A4186820FE3A}"/>
+                <a16:creationId xmlns:a16="http://schemas.microsoft.com/office/drawing/2014/main" id="{5184227E-49C8-4F21-9B46-4E995F4985DD}"/>
               </a:ext>
             </a:extLst>
           </p:cNvPr>
@@ -23958,7 +23958,7 @@
           <p:cNvPr id="16" name="Text 13">
             <a:extLst xmlns:a="http://schemas.openxmlformats.org/drawingml/2006/main">
               <a:ext uri="{FF2B5EF4-FFF2-40B4-BE49-F238E27FC236}">
-                <a16:creationId xmlns:a16="http://schemas.microsoft.com/office/drawing/2014/main" id="{0B63DB1D-0A47-46BA-B5B1-25251764A61F}"/>
+                <a16:creationId xmlns:a16="http://schemas.microsoft.com/office/drawing/2014/main" id="{78595C55-2AB8-4DE8-87AF-636F346608FF}"/>
               </a:ext>
             </a:extLst>
           </p:cNvPr>
@@ -24005,7 +24005,7 @@
           <p:cNvPr id="17" name="Text 14">
             <a:extLst xmlns:a="http://schemas.openxmlformats.org/drawingml/2006/main">
               <a:ext uri="{FF2B5EF4-FFF2-40B4-BE49-F238E27FC236}">
-                <a16:creationId xmlns:a16="http://schemas.microsoft.com/office/drawing/2014/main" id="{B3102F0B-BE35-41CD-9B7E-78F129E0C495}"/>
+                <a16:creationId xmlns:a16="http://schemas.microsoft.com/office/drawing/2014/main" id="{6289D57D-DFF9-4E29-8081-DC921CE0E90E}"/>
               </a:ext>
             </a:extLst>
           </p:cNvPr>
@@ -24052,7 +24052,7 @@
           <p:cNvPr id="18" name="Shape 15">
             <a:extLst xmlns:a="http://schemas.openxmlformats.org/drawingml/2006/main">
               <a:ext uri="{FF2B5EF4-FFF2-40B4-BE49-F238E27FC236}">
-                <a16:creationId xmlns:a16="http://schemas.microsoft.com/office/drawing/2014/main" id="{F40AC6FC-FD01-4B39-A89A-8E3CD4F412E7}"/>
+                <a16:creationId xmlns:a16="http://schemas.microsoft.com/office/drawing/2014/main" id="{8488A4B5-D8C6-4292-8006-49C66FF76DED}"/>
               </a:ext>
             </a:extLst>
           </p:cNvPr>
@@ -24087,7 +24087,7 @@
           <p:cNvPr id="19" name="Text 16">
             <a:extLst xmlns:a="http://schemas.openxmlformats.org/drawingml/2006/main">
               <a:ext uri="{FF2B5EF4-FFF2-40B4-BE49-F238E27FC236}">
-                <a16:creationId xmlns:a16="http://schemas.microsoft.com/office/drawing/2014/main" id="{E339AC7C-639B-4E2B-82D6-E440FD98A269}"/>
+                <a16:creationId xmlns:a16="http://schemas.microsoft.com/office/drawing/2014/main" id="{A9771B5E-8C53-4151-AE7F-AA79F2D28511}"/>
               </a:ext>
             </a:extLst>
           </p:cNvPr>
@@ -24134,7 +24134,7 @@
           <p:cNvPr id="20" name="Text 17">
             <a:extLst xmlns:a="http://schemas.openxmlformats.org/drawingml/2006/main">
               <a:ext uri="{FF2B5EF4-FFF2-40B4-BE49-F238E27FC236}">
-                <a16:creationId xmlns:a16="http://schemas.microsoft.com/office/drawing/2014/main" id="{3C5F8B8B-49CC-4BE5-8137-592177D5E53B}"/>
+                <a16:creationId xmlns:a16="http://schemas.microsoft.com/office/drawing/2014/main" id="{1EFEAAF5-CF26-4129-A206-6EB0E9E23778}"/>
               </a:ext>
             </a:extLst>
           </p:cNvPr>
@@ -24181,7 +24181,7 @@
           <p:cNvPr id="21" name="Text 18">
             <a:extLst xmlns:a="http://schemas.openxmlformats.org/drawingml/2006/main">
               <a:ext uri="{FF2B5EF4-FFF2-40B4-BE49-F238E27FC236}">
-                <a16:creationId xmlns:a16="http://schemas.microsoft.com/office/drawing/2014/main" id="{B6424B61-E244-4EDF-9BAE-F673B5940275}"/>
+                <a16:creationId xmlns:a16="http://schemas.microsoft.com/office/drawing/2014/main" id="{AF7F4A59-8121-4ED5-B585-13C4DAC42238}"/>
               </a:ext>
             </a:extLst>
           </p:cNvPr>
@@ -24228,7 +24228,7 @@
           <p:cNvPr id="22" name="Shape 19">
             <a:extLst xmlns:a="http://schemas.openxmlformats.org/drawingml/2006/main">
               <a:ext uri="{FF2B5EF4-FFF2-40B4-BE49-F238E27FC236}">
-                <a16:creationId xmlns:a16="http://schemas.microsoft.com/office/drawing/2014/main" id="{359261A4-039A-4A02-8691-7A34AD5D4AF4}"/>
+                <a16:creationId xmlns:a16="http://schemas.microsoft.com/office/drawing/2014/main" id="{A961009F-81ED-4C8D-B68B-FF256311349D}"/>
               </a:ext>
             </a:extLst>
           </p:cNvPr>
@@ -24263,7 +24263,7 @@
           <p:cNvPr id="23" name="Text 20">
             <a:extLst xmlns:a="http://schemas.openxmlformats.org/drawingml/2006/main">
               <a:ext uri="{FF2B5EF4-FFF2-40B4-BE49-F238E27FC236}">
-                <a16:creationId xmlns:a16="http://schemas.microsoft.com/office/drawing/2014/main" id="{FBF12414-480C-44FF-872C-703D29E1AA7E}"/>
+                <a16:creationId xmlns:a16="http://schemas.microsoft.com/office/drawing/2014/main" id="{04066098-DB83-4D15-8718-8D9861DD6799}"/>
               </a:ext>
             </a:extLst>
           </p:cNvPr>
@@ -24310,7 +24310,7 @@
           <p:cNvPr id="24" name="Text 21">
             <a:extLst xmlns:a="http://schemas.openxmlformats.org/drawingml/2006/main">
               <a:ext uri="{FF2B5EF4-FFF2-40B4-BE49-F238E27FC236}">
-                <a16:creationId xmlns:a16="http://schemas.microsoft.com/office/drawing/2014/main" id="{5BBA8681-1551-4F9C-8A40-360FAE6F2478}"/>
+                <a16:creationId xmlns:a16="http://schemas.microsoft.com/office/drawing/2014/main" id="{5F83B1D2-0196-4360-9F2D-7903606D3EB6}"/>
               </a:ext>
             </a:extLst>
           </p:cNvPr>
@@ -24357,7 +24357,7 @@
           <p:cNvPr id="25" name="Text 22">
             <a:extLst xmlns:a="http://schemas.openxmlformats.org/drawingml/2006/main">
               <a:ext uri="{FF2B5EF4-FFF2-40B4-BE49-F238E27FC236}">
-                <a16:creationId xmlns:a16="http://schemas.microsoft.com/office/drawing/2014/main" id="{94128545-A753-4AE9-8EAA-C766D0CB67D8}"/>
+                <a16:creationId xmlns:a16="http://schemas.microsoft.com/office/drawing/2014/main" id="{5961B844-E305-40F1-8B95-EB37EB191431}"/>
               </a:ext>
             </a:extLst>
           </p:cNvPr>
@@ -24404,7 +24404,7 @@
           <p:cNvPr id="26" name="Shape 23">
             <a:extLst xmlns:a="http://schemas.openxmlformats.org/drawingml/2006/main">
               <a:ext uri="{FF2B5EF4-FFF2-40B4-BE49-F238E27FC236}">
-                <a16:creationId xmlns:a16="http://schemas.microsoft.com/office/drawing/2014/main" id="{972D4801-5A9E-43F7-ACFC-4F6349B66635}"/>
+                <a16:creationId xmlns:a16="http://schemas.microsoft.com/office/drawing/2014/main" id="{1E5BB8A4-B992-488A-BDE6-3616FCC02620}"/>
               </a:ext>
             </a:extLst>
           </p:cNvPr>
@@ -24439,7 +24439,7 @@
           <p:cNvPr id="27" name="Text 24">
             <a:extLst xmlns:a="http://schemas.openxmlformats.org/drawingml/2006/main">
               <a:ext uri="{FF2B5EF4-FFF2-40B4-BE49-F238E27FC236}">
-                <a16:creationId xmlns:a16="http://schemas.microsoft.com/office/drawing/2014/main" id="{63E9CFB1-4D66-47E6-8B73-E707F6239111}"/>
+                <a16:creationId xmlns:a16="http://schemas.microsoft.com/office/drawing/2014/main" id="{C64D5C10-30F7-4B9C-94A1-9246388A88FF}"/>
               </a:ext>
             </a:extLst>
           </p:cNvPr>
@@ -24486,7 +24486,7 @@
           <p:cNvPr id="28" name="Text 25">
             <a:extLst xmlns:a="http://schemas.openxmlformats.org/drawingml/2006/main">
               <a:ext uri="{FF2B5EF4-FFF2-40B4-BE49-F238E27FC236}">
-                <a16:creationId xmlns:a16="http://schemas.microsoft.com/office/drawing/2014/main" id="{5E81DD6C-70B2-426A-8A76-DD050CD8EDF3}"/>
+                <a16:creationId xmlns:a16="http://schemas.microsoft.com/office/drawing/2014/main" id="{321C33F0-B520-458A-88AA-6BA4A9183915}"/>
               </a:ext>
             </a:extLst>
           </p:cNvPr>
@@ -24533,7 +24533,7 @@
           <p:cNvPr id="29" name="Text 26">
             <a:extLst xmlns:a="http://schemas.openxmlformats.org/drawingml/2006/main">
               <a:ext uri="{FF2B5EF4-FFF2-40B4-BE49-F238E27FC236}">
-                <a16:creationId xmlns:a16="http://schemas.microsoft.com/office/drawing/2014/main" id="{0D345F10-9A9F-4A48-AF16-6A45E68BCD28}"/>
+                <a16:creationId xmlns:a16="http://schemas.microsoft.com/office/drawing/2014/main" id="{4FC54BDA-3AA4-4395-9AB6-B4DA53FA49F5}"/>
               </a:ext>
             </a:extLst>
           </p:cNvPr>
@@ -24580,7 +24580,7 @@
           <p:cNvPr id="30" name="Text 27">
             <a:extLst xmlns:a="http://schemas.openxmlformats.org/drawingml/2006/main">
               <a:ext uri="{FF2B5EF4-FFF2-40B4-BE49-F238E27FC236}">
-                <a16:creationId xmlns:a16="http://schemas.microsoft.com/office/drawing/2014/main" id="{6FCAD8C1-3812-4BD2-918D-C639E0C1713D}"/>
+                <a16:creationId xmlns:a16="http://schemas.microsoft.com/office/drawing/2014/main" id="{98476478-D5EC-4029-85A4-7077018AF67E}"/>
               </a:ext>
             </a:extLst>
           </p:cNvPr>
@@ -24627,7 +24627,7 @@
           <p:cNvPr id="31" name="Text 28">
             <a:extLst xmlns:a="http://schemas.openxmlformats.org/drawingml/2006/main">
               <a:ext uri="{FF2B5EF4-FFF2-40B4-BE49-F238E27FC236}">
-                <a16:creationId xmlns:a16="http://schemas.microsoft.com/office/drawing/2014/main" id="{A571657B-B5A4-4007-9FA0-0BA6DFCF9057}"/>
+                <a16:creationId xmlns:a16="http://schemas.microsoft.com/office/drawing/2014/main" id="{D12E6EB8-50BC-4050-9DFD-63EA96CECBDF}"/>
               </a:ext>
             </a:extLst>
           </p:cNvPr>
@@ -24672,7 +24672,7 @@
     </p:spTree>
     <p:extLst>
       <p:ext uri="{BB962C8B-B14F-4D97-AF65-F5344CB8AC3E}">
-        <p14:creationId xmlns:p14="http://schemas.microsoft.com/office/powerpoint/2010/main" val="60783165"/>
+        <p14:creationId xmlns:p14="http://schemas.microsoft.com/office/powerpoint/2010/main" val="1219675357"/>
       </p:ext>
     </p:extLst>
   </p:cSld>
@@ -24703,7 +24703,7 @@
           <p:cNvPr id="2" name="Text 0">
             <a:extLst xmlns:a="http://schemas.openxmlformats.org/drawingml/2006/main">
               <a:ext uri="{FF2B5EF4-FFF2-40B4-BE49-F238E27FC236}">
-                <a16:creationId xmlns:a16="http://schemas.microsoft.com/office/drawing/2014/main" id="{2CCCCBC0-07A1-4941-99EE-92C2733A33BC}"/>
+                <a16:creationId xmlns:a16="http://schemas.microsoft.com/office/drawing/2014/main" id="{2C11BF27-CD04-4CDC-916F-8739F59B0D1C}"/>
               </a:ext>
             </a:extLst>
           </p:cNvPr>
@@ -24750,7 +24750,7 @@
           <p:cNvPr id="3" name="Text 1">
             <a:extLst xmlns:a="http://schemas.openxmlformats.org/drawingml/2006/main">
               <a:ext uri="{FF2B5EF4-FFF2-40B4-BE49-F238E27FC236}">
-                <a16:creationId xmlns:a16="http://schemas.microsoft.com/office/drawing/2014/main" id="{185D9D70-3589-48E8-B59E-51F489E195A6}"/>
+                <a16:creationId xmlns:a16="http://schemas.microsoft.com/office/drawing/2014/main" id="{C700EF4E-43BD-43B0-9DCC-7F7A47FD13FA}"/>
               </a:ext>
             </a:extLst>
           </p:cNvPr>
@@ -24797,7 +24797,7 @@
           <p:cNvPr id="4" name="Shape 2">
             <a:extLst xmlns:a="http://schemas.openxmlformats.org/drawingml/2006/main">
               <a:ext uri="{FF2B5EF4-FFF2-40B4-BE49-F238E27FC236}">
-                <a16:creationId xmlns:a16="http://schemas.microsoft.com/office/drawing/2014/main" id="{F95BBC7A-7EC7-467D-862A-F0FACE3A3E82}"/>
+                <a16:creationId xmlns:a16="http://schemas.microsoft.com/office/drawing/2014/main" id="{7476F3EB-EBE3-43F5-9B7C-6F4CAEE057C7}"/>
               </a:ext>
             </a:extLst>
           </p:cNvPr>
@@ -24832,7 +24832,7 @@
           <p:cNvPr id="5" name="Text 3">
             <a:extLst xmlns:a="http://schemas.openxmlformats.org/drawingml/2006/main">
               <a:ext uri="{FF2B5EF4-FFF2-40B4-BE49-F238E27FC236}">
-                <a16:creationId xmlns:a16="http://schemas.microsoft.com/office/drawing/2014/main" id="{9A7A6E06-68E0-4C64-A423-285F6F3A4ECD}"/>
+                <a16:creationId xmlns:a16="http://schemas.microsoft.com/office/drawing/2014/main" id="{FD458956-03C9-4D90-893C-BD1B83A77D30}"/>
               </a:ext>
             </a:extLst>
           </p:cNvPr>
@@ -24879,7 +24879,7 @@
           <p:cNvPr id="6" name="Shape 4">
             <a:extLst xmlns:a="http://schemas.openxmlformats.org/drawingml/2006/main">
               <a:ext uri="{FF2B5EF4-FFF2-40B4-BE49-F238E27FC236}">
-                <a16:creationId xmlns:a16="http://schemas.microsoft.com/office/drawing/2014/main" id="{AD2EBE97-E7A4-4BF7-99D4-20BC1070EEA3}"/>
+                <a16:creationId xmlns:a16="http://schemas.microsoft.com/office/drawing/2014/main" id="{AC1AD914-D889-4D9E-B051-C512FB15D739}"/>
               </a:ext>
             </a:extLst>
           </p:cNvPr>
@@ -24910,7 +24910,7 @@
           <p:cNvPr id="7" name="Shape 5">
             <a:extLst xmlns:a="http://schemas.openxmlformats.org/drawingml/2006/main">
               <a:ext uri="{FF2B5EF4-FFF2-40B4-BE49-F238E27FC236}">
-                <a16:creationId xmlns:a16="http://schemas.microsoft.com/office/drawing/2014/main" id="{6D4C4854-496B-4EE2-B9AB-413DC5CE6D45}"/>
+                <a16:creationId xmlns:a16="http://schemas.microsoft.com/office/drawing/2014/main" id="{91A888A5-9946-4B60-A7B7-7C34CA3702C4}"/>
               </a:ext>
             </a:extLst>
           </p:cNvPr>
@@ -24945,7 +24945,7 @@
           <p:cNvPr id="8" name="Text 6">
             <a:extLst xmlns:a="http://schemas.openxmlformats.org/drawingml/2006/main">
               <a:ext uri="{FF2B5EF4-FFF2-40B4-BE49-F238E27FC236}">
-                <a16:creationId xmlns:a16="http://schemas.microsoft.com/office/drawing/2014/main" id="{536BB429-C121-48B2-BEEF-001E508F26D9}"/>
+                <a16:creationId xmlns:a16="http://schemas.microsoft.com/office/drawing/2014/main" id="{2D53F1A5-2CCE-4FE3-B3D8-35089AED7221}"/>
               </a:ext>
             </a:extLst>
           </p:cNvPr>
@@ -24992,7 +24992,7 @@
           <p:cNvPr id="9" name="Text 7">
             <a:extLst xmlns:a="http://schemas.openxmlformats.org/drawingml/2006/main">
               <a:ext uri="{FF2B5EF4-FFF2-40B4-BE49-F238E27FC236}">
-                <a16:creationId xmlns:a16="http://schemas.microsoft.com/office/drawing/2014/main" id="{6EE0A5CC-9AE0-41D7-B2D1-45ED72122D2B}"/>
+                <a16:creationId xmlns:a16="http://schemas.microsoft.com/office/drawing/2014/main" id="{0EDDED3D-42D0-474A-968A-7AA662D16A18}"/>
               </a:ext>
             </a:extLst>
           </p:cNvPr>
@@ -25039,7 +25039,7 @@
           <p:cNvPr id="10" name="Text 8">
             <a:extLst xmlns:a="http://schemas.openxmlformats.org/drawingml/2006/main">
               <a:ext uri="{FF2B5EF4-FFF2-40B4-BE49-F238E27FC236}">
-                <a16:creationId xmlns:a16="http://schemas.microsoft.com/office/drawing/2014/main" id="{8E461E0C-30CD-43AE-9C4D-B4300C58396D}"/>
+                <a16:creationId xmlns:a16="http://schemas.microsoft.com/office/drawing/2014/main" id="{7626C549-0DD8-4741-BF3B-72347D921D69}"/>
               </a:ext>
             </a:extLst>
           </p:cNvPr>
@@ -25086,7 +25086,7 @@
           <p:cNvPr id="11" name="Shape 9">
             <a:extLst xmlns:a="http://schemas.openxmlformats.org/drawingml/2006/main">
               <a:ext uri="{FF2B5EF4-FFF2-40B4-BE49-F238E27FC236}">
-                <a16:creationId xmlns:a16="http://schemas.microsoft.com/office/drawing/2014/main" id="{729C9FB5-6A74-4C65-A2DE-9688969C767D}"/>
+                <a16:creationId xmlns:a16="http://schemas.microsoft.com/office/drawing/2014/main" id="{383E2534-C457-4198-9183-D725CFA8EBF0}"/>
               </a:ext>
             </a:extLst>
           </p:cNvPr>
@@ -25121,7 +25121,7 @@
           <p:cNvPr id="12" name="Text 10">
             <a:extLst xmlns:a="http://schemas.openxmlformats.org/drawingml/2006/main">
               <a:ext uri="{FF2B5EF4-FFF2-40B4-BE49-F238E27FC236}">
-                <a16:creationId xmlns:a16="http://schemas.microsoft.com/office/drawing/2014/main" id="{CB66FA00-A5D3-44D2-A205-66D66CE522FA}"/>
+                <a16:creationId xmlns:a16="http://schemas.microsoft.com/office/drawing/2014/main" id="{2486E46A-B230-4912-9082-78266093DB19}"/>
               </a:ext>
             </a:extLst>
           </p:cNvPr>
@@ -25168,7 +25168,7 @@
           <p:cNvPr id="13" name="Text 11">
             <a:extLst xmlns:a="http://schemas.openxmlformats.org/drawingml/2006/main">
               <a:ext uri="{FF2B5EF4-FFF2-40B4-BE49-F238E27FC236}">
-                <a16:creationId xmlns:a16="http://schemas.microsoft.com/office/drawing/2014/main" id="{B24F68F6-C765-49FE-B84D-F7C37D160394}"/>
+                <a16:creationId xmlns:a16="http://schemas.microsoft.com/office/drawing/2014/main" id="{28F153AB-FEF9-4DB6-ACBB-0CABECCC24C5}"/>
               </a:ext>
             </a:extLst>
           </p:cNvPr>
@@ -25215,7 +25215,7 @@
           <p:cNvPr id="14" name="Text 12">
             <a:extLst xmlns:a="http://schemas.openxmlformats.org/drawingml/2006/main">
               <a:ext uri="{FF2B5EF4-FFF2-40B4-BE49-F238E27FC236}">
-                <a16:creationId xmlns:a16="http://schemas.microsoft.com/office/drawing/2014/main" id="{6DED0637-CAAF-40AD-8F54-A5C1F62A621C}"/>
+                <a16:creationId xmlns:a16="http://schemas.microsoft.com/office/drawing/2014/main" id="{B660B95E-CDA5-4858-B30C-4603CD4B053D}"/>
               </a:ext>
             </a:extLst>
           </p:cNvPr>
@@ -25262,7 +25262,7 @@
           <p:cNvPr id="15" name="Shape 13">
             <a:extLst xmlns:a="http://schemas.openxmlformats.org/drawingml/2006/main">
               <a:ext uri="{FF2B5EF4-FFF2-40B4-BE49-F238E27FC236}">
-                <a16:creationId xmlns:a16="http://schemas.microsoft.com/office/drawing/2014/main" id="{D6DEDB90-4844-4740-BFA1-9CDFBF3130A4}"/>
+                <a16:creationId xmlns:a16="http://schemas.microsoft.com/office/drawing/2014/main" id="{AC3B3A94-F043-4F98-967F-7D039EBB86BD}"/>
               </a:ext>
             </a:extLst>
           </p:cNvPr>
@@ -25297,7 +25297,7 @@
           <p:cNvPr id="16" name="Text 14">
             <a:extLst xmlns:a="http://schemas.openxmlformats.org/drawingml/2006/main">
               <a:ext uri="{FF2B5EF4-FFF2-40B4-BE49-F238E27FC236}">
-                <a16:creationId xmlns:a16="http://schemas.microsoft.com/office/drawing/2014/main" id="{9936236A-A4B0-4D6C-8DAB-96417927352D}"/>
+                <a16:creationId xmlns:a16="http://schemas.microsoft.com/office/drawing/2014/main" id="{A54AE688-B91A-4D4D-9FF3-3F4F7B3E1BA1}"/>
               </a:ext>
             </a:extLst>
           </p:cNvPr>
@@ -25344,7 +25344,7 @@
           <p:cNvPr id="17" name="Text 15">
             <a:extLst xmlns:a="http://schemas.openxmlformats.org/drawingml/2006/main">
               <a:ext uri="{FF2B5EF4-FFF2-40B4-BE49-F238E27FC236}">
-                <a16:creationId xmlns:a16="http://schemas.microsoft.com/office/drawing/2014/main" id="{404F8288-38FC-4DE6-97EF-0BB04C71EA15}"/>
+                <a16:creationId xmlns:a16="http://schemas.microsoft.com/office/drawing/2014/main" id="{4C5ECE4E-45E0-46FA-8D4B-3B9F9B157D9F}"/>
               </a:ext>
             </a:extLst>
           </p:cNvPr>
@@ -25391,7 +25391,7 @@
           <p:cNvPr id="18" name="Text 16">
             <a:extLst xmlns:a="http://schemas.openxmlformats.org/drawingml/2006/main">
               <a:ext uri="{FF2B5EF4-FFF2-40B4-BE49-F238E27FC236}">
-                <a16:creationId xmlns:a16="http://schemas.microsoft.com/office/drawing/2014/main" id="{F4DF7B43-1953-4BD7-A562-67E5E4DC8BB0}"/>
+                <a16:creationId xmlns:a16="http://schemas.microsoft.com/office/drawing/2014/main" id="{0FA12378-A42C-4512-ADD9-7D08CF95A36E}"/>
               </a:ext>
             </a:extLst>
           </p:cNvPr>
@@ -25438,7 +25438,7 @@
           <p:cNvPr id="19" name="Shape 17">
             <a:extLst xmlns:a="http://schemas.openxmlformats.org/drawingml/2006/main">
               <a:ext uri="{FF2B5EF4-FFF2-40B4-BE49-F238E27FC236}">
-                <a16:creationId xmlns:a16="http://schemas.microsoft.com/office/drawing/2014/main" id="{7A4C8D7B-08A5-44C4-8F12-EC884B06BC41}"/>
+                <a16:creationId xmlns:a16="http://schemas.microsoft.com/office/drawing/2014/main" id="{ADE7521F-1CAF-462C-82F9-C6170F16ECC1}"/>
               </a:ext>
             </a:extLst>
           </p:cNvPr>
@@ -25473,7 +25473,7 @@
           <p:cNvPr id="20" name="Text 18">
             <a:extLst xmlns:a="http://schemas.openxmlformats.org/drawingml/2006/main">
               <a:ext uri="{FF2B5EF4-FFF2-40B4-BE49-F238E27FC236}">
-                <a16:creationId xmlns:a16="http://schemas.microsoft.com/office/drawing/2014/main" id="{C7419836-A33E-4ABB-8AEF-34251D96DE1A}"/>
+                <a16:creationId xmlns:a16="http://schemas.microsoft.com/office/drawing/2014/main" id="{0FDE8683-22AC-4D4C-87C4-6C62BA77B29F}"/>
               </a:ext>
             </a:extLst>
           </p:cNvPr>
@@ -25520,7 +25520,7 @@
           <p:cNvPr id="21" name="Text 19">
             <a:extLst xmlns:a="http://schemas.openxmlformats.org/drawingml/2006/main">
               <a:ext uri="{FF2B5EF4-FFF2-40B4-BE49-F238E27FC236}">
-                <a16:creationId xmlns:a16="http://schemas.microsoft.com/office/drawing/2014/main" id="{C760A053-35A7-40DF-970D-1E987D48DD11}"/>
+                <a16:creationId xmlns:a16="http://schemas.microsoft.com/office/drawing/2014/main" id="{6C22082E-F773-44DD-96A2-410323CD5103}"/>
               </a:ext>
             </a:extLst>
           </p:cNvPr>
@@ -25567,7 +25567,7 @@
           <p:cNvPr id="22" name="Text 20">
             <a:extLst xmlns:a="http://schemas.openxmlformats.org/drawingml/2006/main">
               <a:ext uri="{FF2B5EF4-FFF2-40B4-BE49-F238E27FC236}">
-                <a16:creationId xmlns:a16="http://schemas.microsoft.com/office/drawing/2014/main" id="{A526FDE3-878F-4FB3-B49D-83C577E0EF08}"/>
+                <a16:creationId xmlns:a16="http://schemas.microsoft.com/office/drawing/2014/main" id="{664BE157-2AA7-48FB-B4C2-76296870018D}"/>
               </a:ext>
             </a:extLst>
           </p:cNvPr>
@@ -25614,7 +25614,7 @@
           <p:cNvPr id="23" name="Shape 21">
             <a:extLst xmlns:a="http://schemas.openxmlformats.org/drawingml/2006/main">
               <a:ext uri="{FF2B5EF4-FFF2-40B4-BE49-F238E27FC236}">
-                <a16:creationId xmlns:a16="http://schemas.microsoft.com/office/drawing/2014/main" id="{ABCDA704-DFC2-45DC-ABD6-9759CDC49F2C}"/>
+                <a16:creationId xmlns:a16="http://schemas.microsoft.com/office/drawing/2014/main" id="{B505862B-32F6-4429-B755-B1375AD814EE}"/>
               </a:ext>
             </a:extLst>
           </p:cNvPr>
@@ -25649,7 +25649,7 @@
           <p:cNvPr id="24" name="Text 22">
             <a:extLst xmlns:a="http://schemas.openxmlformats.org/drawingml/2006/main">
               <a:ext uri="{FF2B5EF4-FFF2-40B4-BE49-F238E27FC236}">
-                <a16:creationId xmlns:a16="http://schemas.microsoft.com/office/drawing/2014/main" id="{B6F75107-8AD7-4AF7-BA29-393776880E0F}"/>
+                <a16:creationId xmlns:a16="http://schemas.microsoft.com/office/drawing/2014/main" id="{A94FD894-ABC7-4AF0-BD4D-5FBA559490A0}"/>
               </a:ext>
             </a:extLst>
           </p:cNvPr>
@@ -25696,7 +25696,7 @@
           <p:cNvPr id="25" name="Text 23">
             <a:extLst xmlns:a="http://schemas.openxmlformats.org/drawingml/2006/main">
               <a:ext uri="{FF2B5EF4-FFF2-40B4-BE49-F238E27FC236}">
-                <a16:creationId xmlns:a16="http://schemas.microsoft.com/office/drawing/2014/main" id="{DD2B57CE-3255-4778-A2FD-9E354CD55447}"/>
+                <a16:creationId xmlns:a16="http://schemas.microsoft.com/office/drawing/2014/main" id="{E7F00B32-BD7B-4537-8A4B-7153FEA34736}"/>
               </a:ext>
             </a:extLst>
           </p:cNvPr>
@@ -25743,7 +25743,7 @@
           <p:cNvPr id="26" name="Text 24">
             <a:extLst xmlns:a="http://schemas.openxmlformats.org/drawingml/2006/main">
               <a:ext uri="{FF2B5EF4-FFF2-40B4-BE49-F238E27FC236}">
-                <a16:creationId xmlns:a16="http://schemas.microsoft.com/office/drawing/2014/main" id="{F9F440C2-A6A3-4B27-B578-F9F3010589C5}"/>
+                <a16:creationId xmlns:a16="http://schemas.microsoft.com/office/drawing/2014/main" id="{7296A1CB-4B25-4CA1-A192-F5F7275F176B}"/>
               </a:ext>
             </a:extLst>
           </p:cNvPr>
@@ -25790,7 +25790,7 @@
           <p:cNvPr id="27" name="Shape 25">
             <a:extLst xmlns:a="http://schemas.openxmlformats.org/drawingml/2006/main">
               <a:ext uri="{FF2B5EF4-FFF2-40B4-BE49-F238E27FC236}">
-                <a16:creationId xmlns:a16="http://schemas.microsoft.com/office/drawing/2014/main" id="{D970A545-7C1C-4EB2-AB80-7F7BFEC68B53}"/>
+                <a16:creationId xmlns:a16="http://schemas.microsoft.com/office/drawing/2014/main" id="{C8873658-973D-4AC7-8BE8-25A736BC1D02}"/>
               </a:ext>
             </a:extLst>
           </p:cNvPr>
@@ -25825,7 +25825,7 @@
           <p:cNvPr id="28" name="Text 26">
             <a:extLst xmlns:a="http://schemas.openxmlformats.org/drawingml/2006/main">
               <a:ext uri="{FF2B5EF4-FFF2-40B4-BE49-F238E27FC236}">
-                <a16:creationId xmlns:a16="http://schemas.microsoft.com/office/drawing/2014/main" id="{2ECEF183-F22D-4083-9451-13251F3404D7}"/>
+                <a16:creationId xmlns:a16="http://schemas.microsoft.com/office/drawing/2014/main" id="{D32ECDF0-5319-44D3-8524-028F2494A507}"/>
               </a:ext>
             </a:extLst>
           </p:cNvPr>
@@ -25872,7 +25872,7 @@
           <p:cNvPr id="29" name="Text 27">
             <a:extLst xmlns:a="http://schemas.openxmlformats.org/drawingml/2006/main">
               <a:ext uri="{FF2B5EF4-FFF2-40B4-BE49-F238E27FC236}">
-                <a16:creationId xmlns:a16="http://schemas.microsoft.com/office/drawing/2014/main" id="{33EC3443-D9CC-4E33-B78B-355144954916}"/>
+                <a16:creationId xmlns:a16="http://schemas.microsoft.com/office/drawing/2014/main" id="{EBA969CF-2591-407D-A299-8E7C8F797E3E}"/>
               </a:ext>
             </a:extLst>
           </p:cNvPr>
@@ -25919,7 +25919,7 @@
           <p:cNvPr id="30" name="Text 28">
             <a:extLst xmlns:a="http://schemas.openxmlformats.org/drawingml/2006/main">
               <a:ext uri="{FF2B5EF4-FFF2-40B4-BE49-F238E27FC236}">
-                <a16:creationId xmlns:a16="http://schemas.microsoft.com/office/drawing/2014/main" id="{535EBADC-D809-4FC0-9669-6D66A7C3EAF0}"/>
+                <a16:creationId xmlns:a16="http://schemas.microsoft.com/office/drawing/2014/main" id="{8E8C6159-D483-4108-BD2E-A1D33DE82136}"/>
               </a:ext>
             </a:extLst>
           </p:cNvPr>
@@ -25966,7 +25966,7 @@
           <p:cNvPr id="31" name="Shape 29">
             <a:extLst xmlns:a="http://schemas.openxmlformats.org/drawingml/2006/main">
               <a:ext uri="{FF2B5EF4-FFF2-40B4-BE49-F238E27FC236}">
-                <a16:creationId xmlns:a16="http://schemas.microsoft.com/office/drawing/2014/main" id="{94544119-A1F2-43BB-85AE-D89D334A4B2A}"/>
+                <a16:creationId xmlns:a16="http://schemas.microsoft.com/office/drawing/2014/main" id="{297F7FB3-9148-487C-B247-1882D2CD7B2E}"/>
               </a:ext>
             </a:extLst>
           </p:cNvPr>
@@ -26001,7 +26001,7 @@
           <p:cNvPr id="32" name="Text 30">
             <a:extLst xmlns:a="http://schemas.openxmlformats.org/drawingml/2006/main">
               <a:ext uri="{FF2B5EF4-FFF2-40B4-BE49-F238E27FC236}">
-                <a16:creationId xmlns:a16="http://schemas.microsoft.com/office/drawing/2014/main" id="{899B7ECA-6AAE-4015-9786-34EC2714531B}"/>
+                <a16:creationId xmlns:a16="http://schemas.microsoft.com/office/drawing/2014/main" id="{D2ECF98F-E1B4-4620-99A9-30E1A18D2E47}"/>
               </a:ext>
             </a:extLst>
           </p:cNvPr>
@@ -26048,7 +26048,7 @@
           <p:cNvPr id="33" name="Text 31">
             <a:extLst xmlns:a="http://schemas.openxmlformats.org/drawingml/2006/main">
               <a:ext uri="{FF2B5EF4-FFF2-40B4-BE49-F238E27FC236}">
-                <a16:creationId xmlns:a16="http://schemas.microsoft.com/office/drawing/2014/main" id="{66EBCDFD-3196-447A-A4C4-33AC1B65BAC1}"/>
+                <a16:creationId xmlns:a16="http://schemas.microsoft.com/office/drawing/2014/main" id="{67E42DAE-1F93-40C8-8F6B-345AF79D2513}"/>
               </a:ext>
             </a:extLst>
           </p:cNvPr>
@@ -26095,7 +26095,7 @@
           <p:cNvPr id="34" name="Text 32">
             <a:extLst xmlns:a="http://schemas.openxmlformats.org/drawingml/2006/main">
               <a:ext uri="{FF2B5EF4-FFF2-40B4-BE49-F238E27FC236}">
-                <a16:creationId xmlns:a16="http://schemas.microsoft.com/office/drawing/2014/main" id="{435F28C3-F640-4BE8-B3FC-2B992307A4C6}"/>
+                <a16:creationId xmlns:a16="http://schemas.microsoft.com/office/drawing/2014/main" id="{F11CADFA-DB47-403C-917C-28192E0C4C9E}"/>
               </a:ext>
             </a:extLst>
           </p:cNvPr>
@@ -26142,7 +26142,7 @@
           <p:cNvPr id="35" name="Text 33">
             <a:extLst xmlns:a="http://schemas.openxmlformats.org/drawingml/2006/main">
               <a:ext uri="{FF2B5EF4-FFF2-40B4-BE49-F238E27FC236}">
-                <a16:creationId xmlns:a16="http://schemas.microsoft.com/office/drawing/2014/main" id="{6286D45E-A0F2-4CA7-98AD-02DC68F33A67}"/>
+                <a16:creationId xmlns:a16="http://schemas.microsoft.com/office/drawing/2014/main" id="{33D0FDE0-D6FC-4D79-ABDA-2888F4D72ACF}"/>
               </a:ext>
             </a:extLst>
           </p:cNvPr>
@@ -26189,7 +26189,7 @@
           <p:cNvPr id="36" name="Text 34">
             <a:extLst xmlns:a="http://schemas.openxmlformats.org/drawingml/2006/main">
               <a:ext uri="{FF2B5EF4-FFF2-40B4-BE49-F238E27FC236}">
-                <a16:creationId xmlns:a16="http://schemas.microsoft.com/office/drawing/2014/main" id="{D19EB7F7-970B-4DA9-862C-E0940CA5FE54}"/>
+                <a16:creationId xmlns:a16="http://schemas.microsoft.com/office/drawing/2014/main" id="{9DD51ED8-CBA7-44B7-B8FA-C9ECE5D402C2}"/>
               </a:ext>
             </a:extLst>
           </p:cNvPr>
@@ -26236,7 +26236,7 @@
           <p:cNvPr id="37" name="Text 35">
             <a:extLst xmlns:a="http://schemas.openxmlformats.org/drawingml/2006/main">
               <a:ext uri="{FF2B5EF4-FFF2-40B4-BE49-F238E27FC236}">
-                <a16:creationId xmlns:a16="http://schemas.microsoft.com/office/drawing/2014/main" id="{03538158-C3CE-4CF3-8F8F-4BE87536CF91}"/>
+                <a16:creationId xmlns:a16="http://schemas.microsoft.com/office/drawing/2014/main" id="{B5646B81-7BB3-4E7B-8540-B71EFDE93CBB}"/>
               </a:ext>
             </a:extLst>
           </p:cNvPr>
@@ -26283,7 +26283,7 @@
           <p:cNvPr id="38" name="Text 36">
             <a:extLst xmlns:a="http://schemas.openxmlformats.org/drawingml/2006/main">
               <a:ext uri="{FF2B5EF4-FFF2-40B4-BE49-F238E27FC236}">
-                <a16:creationId xmlns:a16="http://schemas.microsoft.com/office/drawing/2014/main" id="{7C7A591E-7212-4357-A8C9-6C8D85406130}"/>
+                <a16:creationId xmlns:a16="http://schemas.microsoft.com/office/drawing/2014/main" id="{8683A959-44FF-4723-91E0-F83AFBF7B23F}"/>
               </a:ext>
             </a:extLst>
           </p:cNvPr>
@@ -26330,7 +26330,7 @@
           <p:cNvPr id="39" name="Text 37">
             <a:extLst xmlns:a="http://schemas.openxmlformats.org/drawingml/2006/main">
               <a:ext uri="{FF2B5EF4-FFF2-40B4-BE49-F238E27FC236}">
-                <a16:creationId xmlns:a16="http://schemas.microsoft.com/office/drawing/2014/main" id="{F58B022E-3B1D-4698-94D9-49E441E54CBA}"/>
+                <a16:creationId xmlns:a16="http://schemas.microsoft.com/office/drawing/2014/main" id="{D8653A8A-A488-4084-8290-59C49F8F4425}"/>
               </a:ext>
             </a:extLst>
           </p:cNvPr>
@@ -26377,7 +26377,7 @@
           <p:cNvPr id="40" name="Text 38">
             <a:extLst xmlns:a="http://schemas.openxmlformats.org/drawingml/2006/main">
               <a:ext uri="{FF2B5EF4-FFF2-40B4-BE49-F238E27FC236}">
-                <a16:creationId xmlns:a16="http://schemas.microsoft.com/office/drawing/2014/main" id="{F1A107DE-EEF0-4C63-9576-E551103F7D5E}"/>
+                <a16:creationId xmlns:a16="http://schemas.microsoft.com/office/drawing/2014/main" id="{1EC5ECD4-EFCC-422E-87DC-F244107A954A}"/>
               </a:ext>
             </a:extLst>
           </p:cNvPr>
@@ -26424,7 +26424,7 @@
           <p:cNvPr id="41" name="Text 39">
             <a:extLst xmlns:a="http://schemas.openxmlformats.org/drawingml/2006/main">
               <a:ext uri="{FF2B5EF4-FFF2-40B4-BE49-F238E27FC236}">
-                <a16:creationId xmlns:a16="http://schemas.microsoft.com/office/drawing/2014/main" id="{BC2D0E78-AB0F-4F2D-941C-B0247D532ED7}"/>
+                <a16:creationId xmlns:a16="http://schemas.microsoft.com/office/drawing/2014/main" id="{8A627912-3992-40AD-9E9C-5EED5A80F8AE}"/>
               </a:ext>
             </a:extLst>
           </p:cNvPr>
@@ -26471,7 +26471,7 @@
           <p:cNvPr id="42" name="Text 40">
             <a:extLst xmlns:a="http://schemas.openxmlformats.org/drawingml/2006/main">
               <a:ext uri="{FF2B5EF4-FFF2-40B4-BE49-F238E27FC236}">
-                <a16:creationId xmlns:a16="http://schemas.microsoft.com/office/drawing/2014/main" id="{F1D986C6-E2D8-46A8-9D51-4C928BB10098}"/>
+                <a16:creationId xmlns:a16="http://schemas.microsoft.com/office/drawing/2014/main" id="{775F0AE5-09C0-4431-AAF3-6D4E8B294E90}"/>
               </a:ext>
             </a:extLst>
           </p:cNvPr>
@@ -26518,7 +26518,7 @@
           <p:cNvPr id="43" name="Text 41">
             <a:extLst xmlns:a="http://schemas.openxmlformats.org/drawingml/2006/main">
               <a:ext uri="{FF2B5EF4-FFF2-40B4-BE49-F238E27FC236}">
-                <a16:creationId xmlns:a16="http://schemas.microsoft.com/office/drawing/2014/main" id="{E9F282E3-C54D-4089-91C9-B0841192C460}"/>
+                <a16:creationId xmlns:a16="http://schemas.microsoft.com/office/drawing/2014/main" id="{67B7579E-60CA-4463-AB69-D98E49CCF940}"/>
               </a:ext>
             </a:extLst>
           </p:cNvPr>
@@ -26565,7 +26565,7 @@
           <p:cNvPr id="44" name="Text 42">
             <a:extLst xmlns:a="http://schemas.openxmlformats.org/drawingml/2006/main">
               <a:ext uri="{FF2B5EF4-FFF2-40B4-BE49-F238E27FC236}">
-                <a16:creationId xmlns:a16="http://schemas.microsoft.com/office/drawing/2014/main" id="{8246ABCF-F4DC-4F1B-B930-3CC3B512FF40}"/>
+                <a16:creationId xmlns:a16="http://schemas.microsoft.com/office/drawing/2014/main" id="{BA8BF225-CA12-46D6-B1B0-191C6876E650}"/>
               </a:ext>
             </a:extLst>
           </p:cNvPr>
@@ -26612,7 +26612,7 @@
           <p:cNvPr id="45" name="Text 43">
             <a:extLst xmlns:a="http://schemas.openxmlformats.org/drawingml/2006/main">
               <a:ext uri="{FF2B5EF4-FFF2-40B4-BE49-F238E27FC236}">
-                <a16:creationId xmlns:a16="http://schemas.microsoft.com/office/drawing/2014/main" id="{90B79568-7810-480E-BC63-424AA90C43BF}"/>
+                <a16:creationId xmlns:a16="http://schemas.microsoft.com/office/drawing/2014/main" id="{D9BC98F2-C06D-47EC-8DC7-04F93E3A62D0}"/>
               </a:ext>
             </a:extLst>
           </p:cNvPr>
@@ -26659,7 +26659,7 @@
           <p:cNvPr id="46" name="Text 44">
             <a:extLst xmlns:a="http://schemas.openxmlformats.org/drawingml/2006/main">
               <a:ext uri="{FF2B5EF4-FFF2-40B4-BE49-F238E27FC236}">
-                <a16:creationId xmlns:a16="http://schemas.microsoft.com/office/drawing/2014/main" id="{25DFDF3C-EC12-4D28-A774-EB1BB05A5761}"/>
+                <a16:creationId xmlns:a16="http://schemas.microsoft.com/office/drawing/2014/main" id="{FFC8C252-8C58-4BB3-B7A0-FF16724C0ABD}"/>
               </a:ext>
             </a:extLst>
           </p:cNvPr>
@@ -26706,7 +26706,7 @@
           <p:cNvPr id="47" name="Text 45">
             <a:extLst xmlns:a="http://schemas.openxmlformats.org/drawingml/2006/main">
               <a:ext uri="{FF2B5EF4-FFF2-40B4-BE49-F238E27FC236}">
-                <a16:creationId xmlns:a16="http://schemas.microsoft.com/office/drawing/2014/main" id="{5857731E-896F-44C4-B17C-DFC321933749}"/>
+                <a16:creationId xmlns:a16="http://schemas.microsoft.com/office/drawing/2014/main" id="{2B2A5413-4759-4E02-B253-681DDC5F7159}"/>
               </a:ext>
             </a:extLst>
           </p:cNvPr>
@@ -26753,7 +26753,7 @@
           <p:cNvPr id="48" name="Text 46">
             <a:extLst xmlns:a="http://schemas.openxmlformats.org/drawingml/2006/main">
               <a:ext uri="{FF2B5EF4-FFF2-40B4-BE49-F238E27FC236}">
-                <a16:creationId xmlns:a16="http://schemas.microsoft.com/office/drawing/2014/main" id="{E11EA647-C90B-424E-9639-31DE03676C1F}"/>
+                <a16:creationId xmlns:a16="http://schemas.microsoft.com/office/drawing/2014/main" id="{1886946A-3097-4B57-B885-2C45AD28C4B5}"/>
               </a:ext>
             </a:extLst>
           </p:cNvPr>
@@ -26798,7 +26798,7 @@
     </p:spTree>
     <p:extLst>
       <p:ext uri="{BB962C8B-B14F-4D97-AF65-F5344CB8AC3E}">
-        <p14:creationId xmlns:p14="http://schemas.microsoft.com/office/powerpoint/2010/main" val="1272648219"/>
+        <p14:creationId xmlns:p14="http://schemas.microsoft.com/office/powerpoint/2010/main" val="2052258058"/>
       </p:ext>
     </p:extLst>
   </p:cSld>
@@ -26829,7 +26829,7 @@
           <p:cNvPr id="2" name="Text 0">
             <a:extLst xmlns:a="http://schemas.openxmlformats.org/drawingml/2006/main">
               <a:ext uri="{FF2B5EF4-FFF2-40B4-BE49-F238E27FC236}">
-                <a16:creationId xmlns:a16="http://schemas.microsoft.com/office/drawing/2014/main" id="{3D788D0B-88D6-4BE8-B39D-51CD78297582}"/>
+                <a16:creationId xmlns:a16="http://schemas.microsoft.com/office/drawing/2014/main" id="{8D60A4EE-954F-48C3-93BC-06DAFD2A336D}"/>
               </a:ext>
             </a:extLst>
           </p:cNvPr>
@@ -26876,7 +26876,7 @@
           <p:cNvPr id="3" name="Text 1">
             <a:extLst xmlns:a="http://schemas.openxmlformats.org/drawingml/2006/main">
               <a:ext uri="{FF2B5EF4-FFF2-40B4-BE49-F238E27FC236}">
-                <a16:creationId xmlns:a16="http://schemas.microsoft.com/office/drawing/2014/main" id="{C371CC8D-10B4-4F87-9CC3-9B489601CEAC}"/>
+                <a16:creationId xmlns:a16="http://schemas.microsoft.com/office/drawing/2014/main" id="{C07C4919-511D-499C-8F00-7921C1E3E104}"/>
               </a:ext>
             </a:extLst>
           </p:cNvPr>
@@ -26923,7 +26923,7 @@
           <p:cNvPr id="4" name="Shape 2">
             <a:extLst xmlns:a="http://schemas.openxmlformats.org/drawingml/2006/main">
               <a:ext uri="{FF2B5EF4-FFF2-40B4-BE49-F238E27FC236}">
-                <a16:creationId xmlns:a16="http://schemas.microsoft.com/office/drawing/2014/main" id="{9308835D-FD71-40A5-B331-706C136B1389}"/>
+                <a16:creationId xmlns:a16="http://schemas.microsoft.com/office/drawing/2014/main" id="{E4BD815B-80BA-43BC-BE43-BEE017C9B4DB}"/>
               </a:ext>
             </a:extLst>
           </p:cNvPr>
@@ -26958,7 +26958,7 @@
           <p:cNvPr id="5" name="Text 3">
             <a:extLst xmlns:a="http://schemas.openxmlformats.org/drawingml/2006/main">
               <a:ext uri="{FF2B5EF4-FFF2-40B4-BE49-F238E27FC236}">
-                <a16:creationId xmlns:a16="http://schemas.microsoft.com/office/drawing/2014/main" id="{5541478E-DA99-40A1-AD2B-F3323513C05C}"/>
+                <a16:creationId xmlns:a16="http://schemas.microsoft.com/office/drawing/2014/main" id="{047D68EC-1441-4F7B-B021-02237B50E89D}"/>
               </a:ext>
             </a:extLst>
           </p:cNvPr>
@@ -27005,7 +27005,7 @@
           <p:cNvPr id="6" name="Shape 4">
             <a:extLst xmlns:a="http://schemas.openxmlformats.org/drawingml/2006/main">
               <a:ext uri="{FF2B5EF4-FFF2-40B4-BE49-F238E27FC236}">
-                <a16:creationId xmlns:a16="http://schemas.microsoft.com/office/drawing/2014/main" id="{3973004F-1ED8-4DB7-B158-64E3C5CC56D8}"/>
+                <a16:creationId xmlns:a16="http://schemas.microsoft.com/office/drawing/2014/main" id="{2F357C91-E0A2-4252-B401-24C45A0685BA}"/>
               </a:ext>
             </a:extLst>
           </p:cNvPr>
@@ -27036,7 +27036,7 @@
           <p:cNvPr id="7" name="Shape 5">
             <a:extLst xmlns:a="http://schemas.openxmlformats.org/drawingml/2006/main">
               <a:ext uri="{FF2B5EF4-FFF2-40B4-BE49-F238E27FC236}">
-                <a16:creationId xmlns:a16="http://schemas.microsoft.com/office/drawing/2014/main" id="{206D1034-D660-45D9-A041-82C582AD8805}"/>
+                <a16:creationId xmlns:a16="http://schemas.microsoft.com/office/drawing/2014/main" id="{DCDFC25B-E67F-44D8-9F0C-DC2D67A24D3A}"/>
               </a:ext>
             </a:extLst>
           </p:cNvPr>
@@ -27071,7 +27071,7 @@
           <p:cNvPr id="8" name="Text 6">
             <a:extLst xmlns:a="http://schemas.openxmlformats.org/drawingml/2006/main">
               <a:ext uri="{FF2B5EF4-FFF2-40B4-BE49-F238E27FC236}">
-                <a16:creationId xmlns:a16="http://schemas.microsoft.com/office/drawing/2014/main" id="{160A4342-86C3-4C68-BBAF-2885FA2E541D}"/>
+                <a16:creationId xmlns:a16="http://schemas.microsoft.com/office/drawing/2014/main" id="{5EAF5210-BF75-41CD-8130-C3EE0266EE4E}"/>
               </a:ext>
             </a:extLst>
           </p:cNvPr>
@@ -27118,7 +27118,7 @@
           <p:cNvPr id="9" name="Text 7">
             <a:extLst xmlns:a="http://schemas.openxmlformats.org/drawingml/2006/main">
               <a:ext uri="{FF2B5EF4-FFF2-40B4-BE49-F238E27FC236}">
-                <a16:creationId xmlns:a16="http://schemas.microsoft.com/office/drawing/2014/main" id="{D82DE03D-FBC4-4E3E-96EE-35F992B1215D}"/>
+                <a16:creationId xmlns:a16="http://schemas.microsoft.com/office/drawing/2014/main" id="{FA923B69-7D2E-4CE0-B231-02A91940F436}"/>
               </a:ext>
             </a:extLst>
           </p:cNvPr>
@@ -27181,7 +27181,7 @@
           <p:cNvPr id="10" name="Shape 8">
             <a:extLst xmlns:a="http://schemas.openxmlformats.org/drawingml/2006/main">
               <a:ext uri="{FF2B5EF4-FFF2-40B4-BE49-F238E27FC236}">
-                <a16:creationId xmlns:a16="http://schemas.microsoft.com/office/drawing/2014/main" id="{7B858753-8EF9-42B3-8261-66F29E80CAD5}"/>
+                <a16:creationId xmlns:a16="http://schemas.microsoft.com/office/drawing/2014/main" id="{ECE45EF3-3E90-4D25-A50F-53FC8E8C0D11}"/>
               </a:ext>
             </a:extLst>
           </p:cNvPr>
@@ -27213,7 +27213,7 @@
           <p:cNvPr id="11" name="Shape 9">
             <a:extLst xmlns:a="http://schemas.openxmlformats.org/drawingml/2006/main">
               <a:ext uri="{FF2B5EF4-FFF2-40B4-BE49-F238E27FC236}">
-                <a16:creationId xmlns:a16="http://schemas.microsoft.com/office/drawing/2014/main" id="{DD9FC290-44BA-4DF9-A65C-8BE60684DB13}"/>
+                <a16:creationId xmlns:a16="http://schemas.microsoft.com/office/drawing/2014/main" id="{656808D7-9409-44D7-A89F-AFD1AE023A99}"/>
               </a:ext>
             </a:extLst>
           </p:cNvPr>
@@ -27248,7 +27248,7 @@
           <p:cNvPr id="12" name="Text 10">
             <a:extLst xmlns:a="http://schemas.openxmlformats.org/drawingml/2006/main">
               <a:ext uri="{FF2B5EF4-FFF2-40B4-BE49-F238E27FC236}">
-                <a16:creationId xmlns:a16="http://schemas.microsoft.com/office/drawing/2014/main" id="{31091D86-8B56-473A-AB12-0D354C38656B}"/>
+                <a16:creationId xmlns:a16="http://schemas.microsoft.com/office/drawing/2014/main" id="{E13D4B1A-3337-4D64-91B1-352D8F552505}"/>
               </a:ext>
             </a:extLst>
           </p:cNvPr>
@@ -27295,7 +27295,7 @@
           <p:cNvPr id="13" name="Text 11">
             <a:extLst xmlns:a="http://schemas.openxmlformats.org/drawingml/2006/main">
               <a:ext uri="{FF2B5EF4-FFF2-40B4-BE49-F238E27FC236}">
-                <a16:creationId xmlns:a16="http://schemas.microsoft.com/office/drawing/2014/main" id="{53587B9C-3870-487C-B5C1-860A5A6D466D}"/>
+                <a16:creationId xmlns:a16="http://schemas.microsoft.com/office/drawing/2014/main" id="{158EB310-262E-48ED-AF70-09E8556A3CCF}"/>
               </a:ext>
             </a:extLst>
           </p:cNvPr>
@@ -27358,7 +27358,7 @@
           <p:cNvPr id="14" name="Shape 12">
             <a:extLst xmlns:a="http://schemas.openxmlformats.org/drawingml/2006/main">
               <a:ext uri="{FF2B5EF4-FFF2-40B4-BE49-F238E27FC236}">
-                <a16:creationId xmlns:a16="http://schemas.microsoft.com/office/drawing/2014/main" id="{55E50713-848A-4E1F-9518-321162F913C1}"/>
+                <a16:creationId xmlns:a16="http://schemas.microsoft.com/office/drawing/2014/main" id="{EE5D46A3-D343-4203-B4FC-EEDF38AD2AF0}"/>
               </a:ext>
             </a:extLst>
           </p:cNvPr>
@@ -27390,7 +27390,7 @@
           <p:cNvPr id="15" name="Shape 13">
             <a:extLst xmlns:a="http://schemas.openxmlformats.org/drawingml/2006/main">
               <a:ext uri="{FF2B5EF4-FFF2-40B4-BE49-F238E27FC236}">
-                <a16:creationId xmlns:a16="http://schemas.microsoft.com/office/drawing/2014/main" id="{48206563-0BD8-46F2-ADE5-0313F46911F5}"/>
+                <a16:creationId xmlns:a16="http://schemas.microsoft.com/office/drawing/2014/main" id="{8AB304F2-DB1B-40BB-AA25-D002620C5BBD}"/>
               </a:ext>
             </a:extLst>
           </p:cNvPr>
@@ -27425,7 +27425,7 @@
           <p:cNvPr id="16" name="Text 14">
             <a:extLst xmlns:a="http://schemas.openxmlformats.org/drawingml/2006/main">
               <a:ext uri="{FF2B5EF4-FFF2-40B4-BE49-F238E27FC236}">
-                <a16:creationId xmlns:a16="http://schemas.microsoft.com/office/drawing/2014/main" id="{FBB68C43-D184-4633-AFA8-CEBBA977C7A6}"/>
+                <a16:creationId xmlns:a16="http://schemas.microsoft.com/office/drawing/2014/main" id="{D1A610FF-7C1F-4D73-BF0C-BB3452EEEF0B}"/>
               </a:ext>
             </a:extLst>
           </p:cNvPr>
@@ -27472,7 +27472,7 @@
           <p:cNvPr id="17" name="Text 15">
             <a:extLst xmlns:a="http://schemas.openxmlformats.org/drawingml/2006/main">
               <a:ext uri="{FF2B5EF4-FFF2-40B4-BE49-F238E27FC236}">
-                <a16:creationId xmlns:a16="http://schemas.microsoft.com/office/drawing/2014/main" id="{3D2C816E-5471-4070-9024-0AFCEAEA8F76}"/>
+                <a16:creationId xmlns:a16="http://schemas.microsoft.com/office/drawing/2014/main" id="{246E92DF-A5A8-4C3A-9563-5470D04C6732}"/>
               </a:ext>
             </a:extLst>
           </p:cNvPr>
@@ -27535,7 +27535,7 @@
           <p:cNvPr id="18" name="Shape 16">
             <a:extLst xmlns:a="http://schemas.openxmlformats.org/drawingml/2006/main">
               <a:ext uri="{FF2B5EF4-FFF2-40B4-BE49-F238E27FC236}">
-                <a16:creationId xmlns:a16="http://schemas.microsoft.com/office/drawing/2014/main" id="{83152478-C36E-482A-B8E9-C7933C072E76}"/>
+                <a16:creationId xmlns:a16="http://schemas.microsoft.com/office/drawing/2014/main" id="{9481D604-5380-4661-8BAD-25871EB2D65B}"/>
               </a:ext>
             </a:extLst>
           </p:cNvPr>
@@ -27567,7 +27567,7 @@
           <p:cNvPr id="19" name="Shape 17">
             <a:extLst xmlns:a="http://schemas.openxmlformats.org/drawingml/2006/main">
               <a:ext uri="{FF2B5EF4-FFF2-40B4-BE49-F238E27FC236}">
-                <a16:creationId xmlns:a16="http://schemas.microsoft.com/office/drawing/2014/main" id="{B7860C81-AC97-426E-9216-9ECD30ABFD36}"/>
+                <a16:creationId xmlns:a16="http://schemas.microsoft.com/office/drawing/2014/main" id="{769D1D4A-40B7-419F-9DE3-F943F775AD8D}"/>
               </a:ext>
             </a:extLst>
           </p:cNvPr>
@@ -27602,7 +27602,7 @@
           <p:cNvPr id="20" name="Text 18">
             <a:extLst xmlns:a="http://schemas.openxmlformats.org/drawingml/2006/main">
               <a:ext uri="{FF2B5EF4-FFF2-40B4-BE49-F238E27FC236}">
-                <a16:creationId xmlns:a16="http://schemas.microsoft.com/office/drawing/2014/main" id="{0AF0322B-EA5D-4E2F-9C47-18355A89F1C4}"/>
+                <a16:creationId xmlns:a16="http://schemas.microsoft.com/office/drawing/2014/main" id="{58C5F49E-AE87-45BD-AF7B-398FF1025BCB}"/>
               </a:ext>
             </a:extLst>
           </p:cNvPr>
@@ -27649,7 +27649,7 @@
           <p:cNvPr id="21" name="Text 19">
             <a:extLst xmlns:a="http://schemas.openxmlformats.org/drawingml/2006/main">
               <a:ext uri="{FF2B5EF4-FFF2-40B4-BE49-F238E27FC236}">
-                <a16:creationId xmlns:a16="http://schemas.microsoft.com/office/drawing/2014/main" id="{1CC06A84-C8C0-4B61-B33B-D97D63869703}"/>
+                <a16:creationId xmlns:a16="http://schemas.microsoft.com/office/drawing/2014/main" id="{7A4C9769-FA97-4C5F-8A88-B30185EC1CA3}"/>
               </a:ext>
             </a:extLst>
           </p:cNvPr>
@@ -27712,7 +27712,7 @@
           <p:cNvPr id="22" name="Shape 20">
             <a:extLst xmlns:a="http://schemas.openxmlformats.org/drawingml/2006/main">
               <a:ext uri="{FF2B5EF4-FFF2-40B4-BE49-F238E27FC236}">
-                <a16:creationId xmlns:a16="http://schemas.microsoft.com/office/drawing/2014/main" id="{7021C9A7-463B-4026-AC64-1943DE819254}"/>
+                <a16:creationId xmlns:a16="http://schemas.microsoft.com/office/drawing/2014/main" id="{8E304559-8646-411A-A742-5FC3EDE38DAF}"/>
               </a:ext>
             </a:extLst>
           </p:cNvPr>
@@ -27744,7 +27744,7 @@
           <p:cNvPr id="23" name="Shape 21">
             <a:extLst xmlns:a="http://schemas.openxmlformats.org/drawingml/2006/main">
               <a:ext uri="{FF2B5EF4-FFF2-40B4-BE49-F238E27FC236}">
-                <a16:creationId xmlns:a16="http://schemas.microsoft.com/office/drawing/2014/main" id="{9538ABC5-B248-4A80-93F2-F31666F1314D}"/>
+                <a16:creationId xmlns:a16="http://schemas.microsoft.com/office/drawing/2014/main" id="{8A79B2A6-0147-46CD-A829-B77E05DFF309}"/>
               </a:ext>
             </a:extLst>
           </p:cNvPr>
@@ -27779,7 +27779,7 @@
           <p:cNvPr id="24" name="Text 22">
             <a:extLst xmlns:a="http://schemas.openxmlformats.org/drawingml/2006/main">
               <a:ext uri="{FF2B5EF4-FFF2-40B4-BE49-F238E27FC236}">
-                <a16:creationId xmlns:a16="http://schemas.microsoft.com/office/drawing/2014/main" id="{6B8B2721-42A5-4473-B129-1D4AA141BDB4}"/>
+                <a16:creationId xmlns:a16="http://schemas.microsoft.com/office/drawing/2014/main" id="{070EE488-90FC-4647-B38D-1A526AECD595}"/>
               </a:ext>
             </a:extLst>
           </p:cNvPr>
@@ -27826,7 +27826,7 @@
           <p:cNvPr id="25" name="Text 23">
             <a:extLst xmlns:a="http://schemas.openxmlformats.org/drawingml/2006/main">
               <a:ext uri="{FF2B5EF4-FFF2-40B4-BE49-F238E27FC236}">
-                <a16:creationId xmlns:a16="http://schemas.microsoft.com/office/drawing/2014/main" id="{D2692488-466D-4EBA-9433-4360C0F0CA8B}"/>
+                <a16:creationId xmlns:a16="http://schemas.microsoft.com/office/drawing/2014/main" id="{E12E245A-D5C9-419D-B149-C778050CD38A}"/>
               </a:ext>
             </a:extLst>
           </p:cNvPr>
@@ -27889,7 +27889,7 @@
           <p:cNvPr id="26" name="Shape 24">
             <a:extLst xmlns:a="http://schemas.openxmlformats.org/drawingml/2006/main">
               <a:ext uri="{FF2B5EF4-FFF2-40B4-BE49-F238E27FC236}">
-                <a16:creationId xmlns:a16="http://schemas.microsoft.com/office/drawing/2014/main" id="{EACC8BC3-C857-4707-A166-A093E6D20E32}"/>
+                <a16:creationId xmlns:a16="http://schemas.microsoft.com/office/drawing/2014/main" id="{9FE33337-F098-4268-8DB2-EF96AC7D496F}"/>
               </a:ext>
             </a:extLst>
           </p:cNvPr>
@@ -27924,7 +27924,7 @@
           <p:cNvPr id="27" name="Text 25">
             <a:extLst xmlns:a="http://schemas.openxmlformats.org/drawingml/2006/main">
               <a:ext uri="{FF2B5EF4-FFF2-40B4-BE49-F238E27FC236}">
-                <a16:creationId xmlns:a16="http://schemas.microsoft.com/office/drawing/2014/main" id="{A0275D24-DBA0-4935-ACD7-9E9BD5A689FC}"/>
+                <a16:creationId xmlns:a16="http://schemas.microsoft.com/office/drawing/2014/main" id="{74A10744-D84A-40F9-BEA4-37688B5E29F7}"/>
               </a:ext>
             </a:extLst>
           </p:cNvPr>
@@ -27971,7 +27971,7 @@
           <p:cNvPr id="28" name="Text 26">
             <a:extLst xmlns:a="http://schemas.openxmlformats.org/drawingml/2006/main">
               <a:ext uri="{FF2B5EF4-FFF2-40B4-BE49-F238E27FC236}">
-                <a16:creationId xmlns:a16="http://schemas.microsoft.com/office/drawing/2014/main" id="{C02D3D82-7621-4DFC-A468-D625639AE328}"/>
+                <a16:creationId xmlns:a16="http://schemas.microsoft.com/office/drawing/2014/main" id="{3662ECC5-1F8C-44B3-8274-CB92A56A65CA}"/>
               </a:ext>
             </a:extLst>
           </p:cNvPr>
@@ -28018,7 +28018,7 @@
           <p:cNvPr id="29" name="Text 27">
             <a:extLst xmlns:a="http://schemas.openxmlformats.org/drawingml/2006/main">
               <a:ext uri="{FF2B5EF4-FFF2-40B4-BE49-F238E27FC236}">
-                <a16:creationId xmlns:a16="http://schemas.microsoft.com/office/drawing/2014/main" id="{3BE38264-2653-4E8C-9906-EC0BF10A8373}"/>
+                <a16:creationId xmlns:a16="http://schemas.microsoft.com/office/drawing/2014/main" id="{6DB031A2-0274-44F2-8B70-C622091D9C2C}"/>
               </a:ext>
             </a:extLst>
           </p:cNvPr>
@@ -28065,7 +28065,7 @@
           <p:cNvPr id="30" name="Shape 28">
             <a:extLst xmlns:a="http://schemas.openxmlformats.org/drawingml/2006/main">
               <a:ext uri="{FF2B5EF4-FFF2-40B4-BE49-F238E27FC236}">
-                <a16:creationId xmlns:a16="http://schemas.microsoft.com/office/drawing/2014/main" id="{D286034F-9A6E-489E-9925-0E54804C1007}"/>
+                <a16:creationId xmlns:a16="http://schemas.microsoft.com/office/drawing/2014/main" id="{7B073063-DF9C-4419-99B3-827C8D934545}"/>
               </a:ext>
             </a:extLst>
           </p:cNvPr>
@@ -28100,7 +28100,7 @@
           <p:cNvPr id="31" name="Text 29">
             <a:extLst xmlns:a="http://schemas.openxmlformats.org/drawingml/2006/main">
               <a:ext uri="{FF2B5EF4-FFF2-40B4-BE49-F238E27FC236}">
-                <a16:creationId xmlns:a16="http://schemas.microsoft.com/office/drawing/2014/main" id="{DA675090-2AFA-4BCE-BB89-A70419B5B8FD}"/>
+                <a16:creationId xmlns:a16="http://schemas.microsoft.com/office/drawing/2014/main" id="{7D8F1B6A-5E6A-41C6-BD8D-D7C5F92A389C}"/>
               </a:ext>
             </a:extLst>
           </p:cNvPr>
@@ -28147,7 +28147,7 @@
           <p:cNvPr id="32" name="Text 30">
             <a:extLst xmlns:a="http://schemas.openxmlformats.org/drawingml/2006/main">
               <a:ext uri="{FF2B5EF4-FFF2-40B4-BE49-F238E27FC236}">
-                <a16:creationId xmlns:a16="http://schemas.microsoft.com/office/drawing/2014/main" id="{444088A5-50B6-4F1E-91CE-C58723675A3A}"/>
+                <a16:creationId xmlns:a16="http://schemas.microsoft.com/office/drawing/2014/main" id="{8A304B49-5939-4E2C-B07F-6AB5A1023ECA}"/>
               </a:ext>
             </a:extLst>
           </p:cNvPr>
@@ -28210,7 +28210,7 @@
           <p:cNvPr id="33" name="Text 31">
             <a:extLst xmlns:a="http://schemas.openxmlformats.org/drawingml/2006/main">
               <a:ext uri="{FF2B5EF4-FFF2-40B4-BE49-F238E27FC236}">
-                <a16:creationId xmlns:a16="http://schemas.microsoft.com/office/drawing/2014/main" id="{C9A3507D-6EA0-4CDC-88C9-524E493BDEC9}"/>
+                <a16:creationId xmlns:a16="http://schemas.microsoft.com/office/drawing/2014/main" id="{4EE52739-F517-43D4-964B-008667EF9E5C}"/>
               </a:ext>
             </a:extLst>
           </p:cNvPr>
@@ -28257,7 +28257,7 @@
           <p:cNvPr id="34" name="Text 32">
             <a:extLst xmlns:a="http://schemas.openxmlformats.org/drawingml/2006/main">
               <a:ext uri="{FF2B5EF4-FFF2-40B4-BE49-F238E27FC236}">
-                <a16:creationId xmlns:a16="http://schemas.microsoft.com/office/drawing/2014/main" id="{114EDE48-12DC-45E3-B1BF-5FD4F816EA92}"/>
+                <a16:creationId xmlns:a16="http://schemas.microsoft.com/office/drawing/2014/main" id="{81CAE5C2-E2E5-4F29-9897-90BC629C478F}"/>
               </a:ext>
             </a:extLst>
           </p:cNvPr>
@@ -28302,7 +28302,7 @@
     </p:spTree>
     <p:extLst>
       <p:ext uri="{BB962C8B-B14F-4D97-AF65-F5344CB8AC3E}">
-        <p14:creationId xmlns:p14="http://schemas.microsoft.com/office/powerpoint/2010/main" val="848250101"/>
+        <p14:creationId xmlns:p14="http://schemas.microsoft.com/office/powerpoint/2010/main" val="1848882872"/>
       </p:ext>
     </p:extLst>
   </p:cSld>
@@ -28333,7 +28333,7 @@
           <p:cNvPr id="2" name="Text 0">
             <a:extLst xmlns:a="http://schemas.openxmlformats.org/drawingml/2006/main">
               <a:ext uri="{FF2B5EF4-FFF2-40B4-BE49-F238E27FC236}">
-                <a16:creationId xmlns:a16="http://schemas.microsoft.com/office/drawing/2014/main" id="{D56C0F67-CDEB-4503-AA54-B85EB30A568D}"/>
+                <a16:creationId xmlns:a16="http://schemas.microsoft.com/office/drawing/2014/main" id="{A3DB24B6-DBB4-4498-921D-1465371A9A5C}"/>
               </a:ext>
             </a:extLst>
           </p:cNvPr>
@@ -28380,7 +28380,7 @@
           <p:cNvPr id="3" name="Text 1">
             <a:extLst xmlns:a="http://schemas.openxmlformats.org/drawingml/2006/main">
               <a:ext uri="{FF2B5EF4-FFF2-40B4-BE49-F238E27FC236}">
-                <a16:creationId xmlns:a16="http://schemas.microsoft.com/office/drawing/2014/main" id="{0508EDA4-F2DE-48EC-8183-81966293079A}"/>
+                <a16:creationId xmlns:a16="http://schemas.microsoft.com/office/drawing/2014/main" id="{C54CAABC-CB3A-48D7-B810-C2AB3073F29A}"/>
               </a:ext>
             </a:extLst>
           </p:cNvPr>
@@ -28427,7 +28427,7 @@
           <p:cNvPr id="4" name="Shape 2">
             <a:extLst xmlns:a="http://schemas.openxmlformats.org/drawingml/2006/main">
               <a:ext uri="{FF2B5EF4-FFF2-40B4-BE49-F238E27FC236}">
-                <a16:creationId xmlns:a16="http://schemas.microsoft.com/office/drawing/2014/main" id="{887EE2BF-0485-45EB-B21D-BAB34DB8222A}"/>
+                <a16:creationId xmlns:a16="http://schemas.microsoft.com/office/drawing/2014/main" id="{1ABA7FDD-C45E-4D16-AE27-B9388A9FE108}"/>
               </a:ext>
             </a:extLst>
           </p:cNvPr>
@@ -28462,7 +28462,7 @@
           <p:cNvPr id="5" name="Text 3">
             <a:extLst xmlns:a="http://schemas.openxmlformats.org/drawingml/2006/main">
               <a:ext uri="{FF2B5EF4-FFF2-40B4-BE49-F238E27FC236}">
-                <a16:creationId xmlns:a16="http://schemas.microsoft.com/office/drawing/2014/main" id="{3A274641-D6ED-40AD-9278-7D157BDC3EE9}"/>
+                <a16:creationId xmlns:a16="http://schemas.microsoft.com/office/drawing/2014/main" id="{D00E0BCB-B537-4FE4-9FA6-7B057D609128}"/>
               </a:ext>
             </a:extLst>
           </p:cNvPr>
@@ -28509,7 +28509,7 @@
           <p:cNvPr id="6" name="Shape 4">
             <a:extLst xmlns:a="http://schemas.openxmlformats.org/drawingml/2006/main">
               <a:ext uri="{FF2B5EF4-FFF2-40B4-BE49-F238E27FC236}">
-                <a16:creationId xmlns:a16="http://schemas.microsoft.com/office/drawing/2014/main" id="{13815EB3-19AF-4BA1-BD17-FDE48661F97F}"/>
+                <a16:creationId xmlns:a16="http://schemas.microsoft.com/office/drawing/2014/main" id="{94DC5FA4-77C5-4071-A134-CD6D95DF3D53}"/>
               </a:ext>
             </a:extLst>
           </p:cNvPr>
@@ -28540,7 +28540,7 @@
           <p:cNvPr id="7" name="Text 5">
             <a:extLst xmlns:a="http://schemas.openxmlformats.org/drawingml/2006/main">
               <a:ext uri="{FF2B5EF4-FFF2-40B4-BE49-F238E27FC236}">
-                <a16:creationId xmlns:a16="http://schemas.microsoft.com/office/drawing/2014/main" id="{AA011816-DE1B-4024-979E-F0B74033EFFF}"/>
+                <a16:creationId xmlns:a16="http://schemas.microsoft.com/office/drawing/2014/main" id="{B5A8722B-41CE-487C-9B0D-45F1BECD1AE2}"/>
               </a:ext>
             </a:extLst>
           </p:cNvPr>
@@ -28587,7 +28587,7 @@
           <p:cNvPr id="8" name="Shape 6">
             <a:extLst xmlns:a="http://schemas.openxmlformats.org/drawingml/2006/main">
               <a:ext uri="{FF2B5EF4-FFF2-40B4-BE49-F238E27FC236}">
-                <a16:creationId xmlns:a16="http://schemas.microsoft.com/office/drawing/2014/main" id="{B9F2633A-C530-4697-B881-120D04C3FB1F}"/>
+                <a16:creationId xmlns:a16="http://schemas.microsoft.com/office/drawing/2014/main" id="{7C395831-0CC4-4E88-BD59-E1C899238618}"/>
               </a:ext>
             </a:extLst>
           </p:cNvPr>
@@ -28622,7 +28622,7 @@
           <p:cNvPr id="9" name="Text 7">
             <a:extLst xmlns:a="http://schemas.openxmlformats.org/drawingml/2006/main">
               <a:ext uri="{FF2B5EF4-FFF2-40B4-BE49-F238E27FC236}">
-                <a16:creationId xmlns:a16="http://schemas.microsoft.com/office/drawing/2014/main" id="{FCD6B87E-9B7F-45F8-A631-9589BA37CCD6}"/>
+                <a16:creationId xmlns:a16="http://schemas.microsoft.com/office/drawing/2014/main" id="{731D6485-D452-4681-9BB2-ADF8598DF030}"/>
               </a:ext>
             </a:extLst>
           </p:cNvPr>
@@ -28669,7 +28669,7 @@
           <p:cNvPr id="10" name="Shape 8">
             <a:extLst xmlns:a="http://schemas.openxmlformats.org/drawingml/2006/main">
               <a:ext uri="{FF2B5EF4-FFF2-40B4-BE49-F238E27FC236}">
-                <a16:creationId xmlns:a16="http://schemas.microsoft.com/office/drawing/2014/main" id="{DD7BBABE-295F-4AA4-905A-E9B6909AF5F6}"/>
+                <a16:creationId xmlns:a16="http://schemas.microsoft.com/office/drawing/2014/main" id="{786CC5B4-0959-4454-BEE2-2D369FC7145F}"/>
               </a:ext>
             </a:extLst>
           </p:cNvPr>
@@ -28704,7 +28704,7 @@
           <p:cNvPr id="11" name="Text 9">
             <a:extLst xmlns:a="http://schemas.openxmlformats.org/drawingml/2006/main">
               <a:ext uri="{FF2B5EF4-FFF2-40B4-BE49-F238E27FC236}">
-                <a16:creationId xmlns:a16="http://schemas.microsoft.com/office/drawing/2014/main" id="{B856DE9A-7EEE-4F36-A808-C67BC3D53AFD}"/>
+                <a16:creationId xmlns:a16="http://schemas.microsoft.com/office/drawing/2014/main" id="{2267D09D-A129-4D72-A6FF-B35F9C2ED758}"/>
               </a:ext>
             </a:extLst>
           </p:cNvPr>
@@ -28751,7 +28751,7 @@
           <p:cNvPr id="12" name="Shape 10">
             <a:extLst xmlns:a="http://schemas.openxmlformats.org/drawingml/2006/main">
               <a:ext uri="{FF2B5EF4-FFF2-40B4-BE49-F238E27FC236}">
-                <a16:creationId xmlns:a16="http://schemas.microsoft.com/office/drawing/2014/main" id="{2561554F-0B83-4878-A18D-4B05ED351A44}"/>
+                <a16:creationId xmlns:a16="http://schemas.microsoft.com/office/drawing/2014/main" id="{63168497-E0ED-44BB-9279-9CE5DFB46D67}"/>
               </a:ext>
             </a:extLst>
           </p:cNvPr>
@@ -28784,7 +28784,7 @@
           <p:cNvPr id="13" name="Text 11">
             <a:extLst xmlns:a="http://schemas.openxmlformats.org/drawingml/2006/main">
               <a:ext uri="{FF2B5EF4-FFF2-40B4-BE49-F238E27FC236}">
-                <a16:creationId xmlns:a16="http://schemas.microsoft.com/office/drawing/2014/main" id="{C732179F-6EC6-4FF5-B17B-E4BC1E60DA4F}"/>
+                <a16:creationId xmlns:a16="http://schemas.microsoft.com/office/drawing/2014/main" id="{DCFA64AB-FE7A-4137-A101-961907978788}"/>
               </a:ext>
             </a:extLst>
           </p:cNvPr>
@@ -28831,7 +28831,7 @@
           <p:cNvPr id="14" name="Shape 12">
             <a:extLst xmlns:a="http://schemas.openxmlformats.org/drawingml/2006/main">
               <a:ext uri="{FF2B5EF4-FFF2-40B4-BE49-F238E27FC236}">
-                <a16:creationId xmlns:a16="http://schemas.microsoft.com/office/drawing/2014/main" id="{5AB7BB20-4A42-427F-9CA1-B97E655F284D}"/>
+                <a16:creationId xmlns:a16="http://schemas.microsoft.com/office/drawing/2014/main" id="{8C6AABB5-6B2B-4383-898C-D31C0F2801D9}"/>
               </a:ext>
             </a:extLst>
           </p:cNvPr>
@@ -28864,7 +28864,7 @@
           <p:cNvPr id="15" name="Text 13">
             <a:extLst xmlns:a="http://schemas.openxmlformats.org/drawingml/2006/main">
               <a:ext uri="{FF2B5EF4-FFF2-40B4-BE49-F238E27FC236}">
-                <a16:creationId xmlns:a16="http://schemas.microsoft.com/office/drawing/2014/main" id="{2AD02089-894A-424E-8F50-BDE00507E211}"/>
+                <a16:creationId xmlns:a16="http://schemas.microsoft.com/office/drawing/2014/main" id="{D2C2FFBA-7E08-4C62-BA61-E4521B280338}"/>
               </a:ext>
             </a:extLst>
           </p:cNvPr>
@@ -28911,7 +28911,7 @@
           <p:cNvPr id="16" name="Shape 14">
             <a:extLst xmlns:a="http://schemas.openxmlformats.org/drawingml/2006/main">
               <a:ext uri="{FF2B5EF4-FFF2-40B4-BE49-F238E27FC236}">
-                <a16:creationId xmlns:a16="http://schemas.microsoft.com/office/drawing/2014/main" id="{15A12444-2F91-459F-9BFF-4BDBD8E11051}"/>
+                <a16:creationId xmlns:a16="http://schemas.microsoft.com/office/drawing/2014/main" id="{E5C9713A-6E63-4C16-A5AF-CA594C686A43}"/>
               </a:ext>
             </a:extLst>
           </p:cNvPr>
@@ -28944,7 +28944,7 @@
           <p:cNvPr id="17" name="Text 15">
             <a:extLst xmlns:a="http://schemas.openxmlformats.org/drawingml/2006/main">
               <a:ext uri="{FF2B5EF4-FFF2-40B4-BE49-F238E27FC236}">
-                <a16:creationId xmlns:a16="http://schemas.microsoft.com/office/drawing/2014/main" id="{8265665F-FB64-4BFC-84DF-A9034D3E9BFF}"/>
+                <a16:creationId xmlns:a16="http://schemas.microsoft.com/office/drawing/2014/main" id="{86CAE598-F4E7-414E-95FB-F561DE49739C}"/>
               </a:ext>
             </a:extLst>
           </p:cNvPr>
@@ -28991,7 +28991,7 @@
           <p:cNvPr id="18" name="Shape 16">
             <a:extLst xmlns:a="http://schemas.openxmlformats.org/drawingml/2006/main">
               <a:ext uri="{FF2B5EF4-FFF2-40B4-BE49-F238E27FC236}">
-                <a16:creationId xmlns:a16="http://schemas.microsoft.com/office/drawing/2014/main" id="{02E7DF52-3B6C-4DCA-80C5-6744FA3B82BE}"/>
+                <a16:creationId xmlns:a16="http://schemas.microsoft.com/office/drawing/2014/main" id="{F503D140-FFAB-4382-9847-BDC2A5D68798}"/>
               </a:ext>
             </a:extLst>
           </p:cNvPr>
@@ -29024,7 +29024,7 @@
           <p:cNvPr id="19" name="Text 17">
             <a:extLst xmlns:a="http://schemas.openxmlformats.org/drawingml/2006/main">
               <a:ext uri="{FF2B5EF4-FFF2-40B4-BE49-F238E27FC236}">
-                <a16:creationId xmlns:a16="http://schemas.microsoft.com/office/drawing/2014/main" id="{A3C50B2C-EE5E-4C7B-93FE-CB4913D234EB}"/>
+                <a16:creationId xmlns:a16="http://schemas.microsoft.com/office/drawing/2014/main" id="{501F010C-0CD5-49D9-9400-006D3D7B4BE2}"/>
               </a:ext>
             </a:extLst>
           </p:cNvPr>
@@ -29071,7 +29071,7 @@
           <p:cNvPr id="20" name="Shape 18">
             <a:extLst xmlns:a="http://schemas.openxmlformats.org/drawingml/2006/main">
               <a:ext uri="{FF2B5EF4-FFF2-40B4-BE49-F238E27FC236}">
-                <a16:creationId xmlns:a16="http://schemas.microsoft.com/office/drawing/2014/main" id="{57C980A9-ED0F-4336-81BE-5B027135310A}"/>
+                <a16:creationId xmlns:a16="http://schemas.microsoft.com/office/drawing/2014/main" id="{6F733699-F35B-495A-9607-2AE1BB6E989F}"/>
               </a:ext>
             </a:extLst>
           </p:cNvPr>
@@ -29106,7 +29106,7 @@
           <p:cNvPr id="21" name="Text 19">
             <a:extLst xmlns:a="http://schemas.openxmlformats.org/drawingml/2006/main">
               <a:ext uri="{FF2B5EF4-FFF2-40B4-BE49-F238E27FC236}">
-                <a16:creationId xmlns:a16="http://schemas.microsoft.com/office/drawing/2014/main" id="{E8E2A74D-A3B4-42FA-93EB-9D4B49804024}"/>
+                <a16:creationId xmlns:a16="http://schemas.microsoft.com/office/drawing/2014/main" id="{94B1DC5D-9130-4D75-8A19-9A13572AFD9C}"/>
               </a:ext>
             </a:extLst>
           </p:cNvPr>
@@ -29153,7 +29153,7 @@
           <p:cNvPr id="22" name="Shape 20">
             <a:extLst xmlns:a="http://schemas.openxmlformats.org/drawingml/2006/main">
               <a:ext uri="{FF2B5EF4-FFF2-40B4-BE49-F238E27FC236}">
-                <a16:creationId xmlns:a16="http://schemas.microsoft.com/office/drawing/2014/main" id="{CC45C7A7-058D-4537-9ADC-6CAE511A6149}"/>
+                <a16:creationId xmlns:a16="http://schemas.microsoft.com/office/drawing/2014/main" id="{3F656982-DAAE-4A3C-AF35-8F6AEAF9AB48}"/>
               </a:ext>
             </a:extLst>
           </p:cNvPr>
@@ -29188,7 +29188,7 @@
           <p:cNvPr id="23" name="Text 21">
             <a:extLst xmlns:a="http://schemas.openxmlformats.org/drawingml/2006/main">
               <a:ext uri="{FF2B5EF4-FFF2-40B4-BE49-F238E27FC236}">
-                <a16:creationId xmlns:a16="http://schemas.microsoft.com/office/drawing/2014/main" id="{D74BBD98-667C-49AC-8D2F-83EDF773071B}"/>
+                <a16:creationId xmlns:a16="http://schemas.microsoft.com/office/drawing/2014/main" id="{438FA255-2261-4C67-A109-DC7DC33CEC8F}"/>
               </a:ext>
             </a:extLst>
           </p:cNvPr>
@@ -29235,7 +29235,7 @@
           <p:cNvPr id="24" name="Shape 22">
             <a:extLst xmlns:a="http://schemas.openxmlformats.org/drawingml/2006/main">
               <a:ext uri="{FF2B5EF4-FFF2-40B4-BE49-F238E27FC236}">
-                <a16:creationId xmlns:a16="http://schemas.microsoft.com/office/drawing/2014/main" id="{B8B70A0D-CFEC-46DE-9B41-1FA825504A4D}"/>
+                <a16:creationId xmlns:a16="http://schemas.microsoft.com/office/drawing/2014/main" id="{AA7B1A58-4289-4236-94CF-AB1453D039D6}"/>
               </a:ext>
             </a:extLst>
           </p:cNvPr>
@@ -29268,7 +29268,7 @@
           <p:cNvPr id="25" name="Text 23">
             <a:extLst xmlns:a="http://schemas.openxmlformats.org/drawingml/2006/main">
               <a:ext uri="{FF2B5EF4-FFF2-40B4-BE49-F238E27FC236}">
-                <a16:creationId xmlns:a16="http://schemas.microsoft.com/office/drawing/2014/main" id="{734E4563-149D-4B85-A462-7BFAC3FC252E}"/>
+                <a16:creationId xmlns:a16="http://schemas.microsoft.com/office/drawing/2014/main" id="{9DAF78DC-91A0-4865-94A6-45D7A1852A8A}"/>
               </a:ext>
             </a:extLst>
           </p:cNvPr>
@@ -29315,7 +29315,7 @@
           <p:cNvPr id="26" name="Shape 24">
             <a:extLst xmlns:a="http://schemas.openxmlformats.org/drawingml/2006/main">
               <a:ext uri="{FF2B5EF4-FFF2-40B4-BE49-F238E27FC236}">
-                <a16:creationId xmlns:a16="http://schemas.microsoft.com/office/drawing/2014/main" id="{1A198848-CDBA-4BF9-8AB7-F0F9665A1772}"/>
+                <a16:creationId xmlns:a16="http://schemas.microsoft.com/office/drawing/2014/main" id="{7854A7E3-1998-4674-9622-EB49597F1069}"/>
               </a:ext>
             </a:extLst>
           </p:cNvPr>
@@ -29348,7 +29348,7 @@
           <p:cNvPr id="27" name="Text 25">
             <a:extLst xmlns:a="http://schemas.openxmlformats.org/drawingml/2006/main">
               <a:ext uri="{FF2B5EF4-FFF2-40B4-BE49-F238E27FC236}">
-                <a16:creationId xmlns:a16="http://schemas.microsoft.com/office/drawing/2014/main" id="{13BE4D74-2282-4A84-B1BE-4AE5586E40AA}"/>
+                <a16:creationId xmlns:a16="http://schemas.microsoft.com/office/drawing/2014/main" id="{670A0EBC-B9C5-4746-9D97-D90253B499F4}"/>
               </a:ext>
             </a:extLst>
           </p:cNvPr>
@@ -29395,7 +29395,7 @@
           <p:cNvPr id="28" name="Shape 26">
             <a:extLst xmlns:a="http://schemas.openxmlformats.org/drawingml/2006/main">
               <a:ext uri="{FF2B5EF4-FFF2-40B4-BE49-F238E27FC236}">
-                <a16:creationId xmlns:a16="http://schemas.microsoft.com/office/drawing/2014/main" id="{1A4E822E-0F5F-4AC6-966A-4CC4BB905B1E}"/>
+                <a16:creationId xmlns:a16="http://schemas.microsoft.com/office/drawing/2014/main" id="{1DD06951-5F01-4287-818D-3743A7619887}"/>
               </a:ext>
             </a:extLst>
           </p:cNvPr>
@@ -29428,7 +29428,7 @@
           <p:cNvPr id="29" name="Text 27">
             <a:extLst xmlns:a="http://schemas.openxmlformats.org/drawingml/2006/main">
               <a:ext uri="{FF2B5EF4-FFF2-40B4-BE49-F238E27FC236}">
-                <a16:creationId xmlns:a16="http://schemas.microsoft.com/office/drawing/2014/main" id="{74142E3E-A575-46FD-AF48-62F748EBFAB3}"/>
+                <a16:creationId xmlns:a16="http://schemas.microsoft.com/office/drawing/2014/main" id="{928E06F0-590B-4BC7-8A08-66636E995988}"/>
               </a:ext>
             </a:extLst>
           </p:cNvPr>
@@ -29475,7 +29475,7 @@
           <p:cNvPr id="30" name="Shape 28">
             <a:extLst xmlns:a="http://schemas.openxmlformats.org/drawingml/2006/main">
               <a:ext uri="{FF2B5EF4-FFF2-40B4-BE49-F238E27FC236}">
-                <a16:creationId xmlns:a16="http://schemas.microsoft.com/office/drawing/2014/main" id="{1DEB1B78-75C8-4F66-9170-A7971D545A97}"/>
+                <a16:creationId xmlns:a16="http://schemas.microsoft.com/office/drawing/2014/main" id="{CFE01C4E-1733-49CA-BCCC-8A2126D237BB}"/>
               </a:ext>
             </a:extLst>
           </p:cNvPr>
@@ -29508,7 +29508,7 @@
           <p:cNvPr id="31" name="Text 29">
             <a:extLst xmlns:a="http://schemas.openxmlformats.org/drawingml/2006/main">
               <a:ext uri="{FF2B5EF4-FFF2-40B4-BE49-F238E27FC236}">
-                <a16:creationId xmlns:a16="http://schemas.microsoft.com/office/drawing/2014/main" id="{E5024BC3-DE39-4E40-A80A-EF2B0F2B5ECF}"/>
+                <a16:creationId xmlns:a16="http://schemas.microsoft.com/office/drawing/2014/main" id="{015AE297-5670-4A28-831C-71C8B69E24F4}"/>
               </a:ext>
             </a:extLst>
           </p:cNvPr>
@@ -29555,7 +29555,7 @@
           <p:cNvPr id="32" name="Shape 30">
             <a:extLst xmlns:a="http://schemas.openxmlformats.org/drawingml/2006/main">
               <a:ext uri="{FF2B5EF4-FFF2-40B4-BE49-F238E27FC236}">
-                <a16:creationId xmlns:a16="http://schemas.microsoft.com/office/drawing/2014/main" id="{374ADBA4-B11F-4382-944F-328610C73B78}"/>
+                <a16:creationId xmlns:a16="http://schemas.microsoft.com/office/drawing/2014/main" id="{2357B33B-8AD0-4541-B023-44AE65CA8FAB}"/>
               </a:ext>
             </a:extLst>
           </p:cNvPr>
@@ -29590,7 +29590,7 @@
           <p:cNvPr id="33" name="Text 31">
             <a:extLst xmlns:a="http://schemas.openxmlformats.org/drawingml/2006/main">
               <a:ext uri="{FF2B5EF4-FFF2-40B4-BE49-F238E27FC236}">
-                <a16:creationId xmlns:a16="http://schemas.microsoft.com/office/drawing/2014/main" id="{A087A3D4-2AFC-4EF6-9242-F0F9F48F3739}"/>
+                <a16:creationId xmlns:a16="http://schemas.microsoft.com/office/drawing/2014/main" id="{26B5A987-4E85-4A49-BE7A-8A13DC760748}"/>
               </a:ext>
             </a:extLst>
           </p:cNvPr>
@@ -29637,7 +29637,7 @@
           <p:cNvPr id="34" name="Text 32">
             <a:extLst xmlns:a="http://schemas.openxmlformats.org/drawingml/2006/main">
               <a:ext uri="{FF2B5EF4-FFF2-40B4-BE49-F238E27FC236}">
-                <a16:creationId xmlns:a16="http://schemas.microsoft.com/office/drawing/2014/main" id="{D4BD4310-B602-4354-B07A-CD22DC84143F}"/>
+                <a16:creationId xmlns:a16="http://schemas.microsoft.com/office/drawing/2014/main" id="{EC879536-C659-4DFE-B95A-7168851F4FE5}"/>
               </a:ext>
             </a:extLst>
           </p:cNvPr>
@@ -29684,7 +29684,7 @@
           <p:cNvPr id="35" name="Text 33">
             <a:extLst xmlns:a="http://schemas.openxmlformats.org/drawingml/2006/main">
               <a:ext uri="{FF2B5EF4-FFF2-40B4-BE49-F238E27FC236}">
-                <a16:creationId xmlns:a16="http://schemas.microsoft.com/office/drawing/2014/main" id="{B9521B86-72C9-4644-91A7-34EF60FF6E75}"/>
+                <a16:creationId xmlns:a16="http://schemas.microsoft.com/office/drawing/2014/main" id="{B8660639-A3AF-466F-A63C-888597958D1F}"/>
               </a:ext>
             </a:extLst>
           </p:cNvPr>
@@ -29729,7 +29729,7 @@
     </p:spTree>
     <p:extLst>
       <p:ext uri="{BB962C8B-B14F-4D97-AF65-F5344CB8AC3E}">
-        <p14:creationId xmlns:p14="http://schemas.microsoft.com/office/powerpoint/2010/main" val="1681067322"/>
+        <p14:creationId xmlns:p14="http://schemas.microsoft.com/office/powerpoint/2010/main" val="2078807006"/>
       </p:ext>
     </p:extLst>
   </p:cSld>
@@ -29760,7 +29760,7 @@
           <p:cNvPr id="2" name="Text 0">
             <a:extLst xmlns:a="http://schemas.openxmlformats.org/drawingml/2006/main">
               <a:ext uri="{FF2B5EF4-FFF2-40B4-BE49-F238E27FC236}">
-                <a16:creationId xmlns:a16="http://schemas.microsoft.com/office/drawing/2014/main" id="{5570C318-8931-4C27-AFEB-0518307B52CD}"/>
+                <a16:creationId xmlns:a16="http://schemas.microsoft.com/office/drawing/2014/main" id="{B8872956-50D9-471F-8687-46A63A7D2DE6}"/>
               </a:ext>
             </a:extLst>
           </p:cNvPr>
@@ -29807,7 +29807,7 @@
           <p:cNvPr id="3" name="Text 1">
             <a:extLst xmlns:a="http://schemas.openxmlformats.org/drawingml/2006/main">
               <a:ext uri="{FF2B5EF4-FFF2-40B4-BE49-F238E27FC236}">
-                <a16:creationId xmlns:a16="http://schemas.microsoft.com/office/drawing/2014/main" id="{ED8A4D98-8BC1-4887-B729-2805DFF33172}"/>
+                <a16:creationId xmlns:a16="http://schemas.microsoft.com/office/drawing/2014/main" id="{3D39F35D-B249-48CC-9530-8E4CFCB78326}"/>
               </a:ext>
             </a:extLst>
           </p:cNvPr>
@@ -29854,7 +29854,7 @@
           <p:cNvPr id="4" name="Shape 2">
             <a:extLst xmlns:a="http://schemas.openxmlformats.org/drawingml/2006/main">
               <a:ext uri="{FF2B5EF4-FFF2-40B4-BE49-F238E27FC236}">
-                <a16:creationId xmlns:a16="http://schemas.microsoft.com/office/drawing/2014/main" id="{B6E0608F-E0B0-43DD-B05D-7FE6BEC7ED3B}"/>
+                <a16:creationId xmlns:a16="http://schemas.microsoft.com/office/drawing/2014/main" id="{2E717799-2644-4A1E-92CF-1322CBC0BCC1}"/>
               </a:ext>
             </a:extLst>
           </p:cNvPr>
@@ -29889,7 +29889,7 @@
           <p:cNvPr id="5" name="Text 3">
             <a:extLst xmlns:a="http://schemas.openxmlformats.org/drawingml/2006/main">
               <a:ext uri="{FF2B5EF4-FFF2-40B4-BE49-F238E27FC236}">
-                <a16:creationId xmlns:a16="http://schemas.microsoft.com/office/drawing/2014/main" id="{60A08304-581E-4555-8DAC-C7FCA242FC10}"/>
+                <a16:creationId xmlns:a16="http://schemas.microsoft.com/office/drawing/2014/main" id="{D709A5CD-E09E-4C48-92E2-27F7FA811255}"/>
               </a:ext>
             </a:extLst>
           </p:cNvPr>
@@ -29936,7 +29936,7 @@
           <p:cNvPr id="6" name="Shape 4">
             <a:extLst xmlns:a="http://schemas.openxmlformats.org/drawingml/2006/main">
               <a:ext uri="{FF2B5EF4-FFF2-40B4-BE49-F238E27FC236}">
-                <a16:creationId xmlns:a16="http://schemas.microsoft.com/office/drawing/2014/main" id="{E76EBAAD-0356-4D7D-9E7F-E2B139E286E3}"/>
+                <a16:creationId xmlns:a16="http://schemas.microsoft.com/office/drawing/2014/main" id="{ABA0AC52-E44D-421B-B655-7E411B191FEF}"/>
               </a:ext>
             </a:extLst>
           </p:cNvPr>
@@ -29967,7 +29967,7 @@
           <p:cNvPr id="7" name="Shape 5">
             <a:extLst xmlns:a="http://schemas.openxmlformats.org/drawingml/2006/main">
               <a:ext uri="{FF2B5EF4-FFF2-40B4-BE49-F238E27FC236}">
-                <a16:creationId xmlns:a16="http://schemas.microsoft.com/office/drawing/2014/main" id="{63503BED-62F0-430D-8F03-36E60E948D46}"/>
+                <a16:creationId xmlns:a16="http://schemas.microsoft.com/office/drawing/2014/main" id="{73CB6558-3086-4A1C-976E-75CC15BEA072}"/>
               </a:ext>
             </a:extLst>
           </p:cNvPr>
@@ -30002,7 +30002,7 @@
           <p:cNvPr id="8" name="Text 6">
             <a:extLst xmlns:a="http://schemas.openxmlformats.org/drawingml/2006/main">
               <a:ext uri="{FF2B5EF4-FFF2-40B4-BE49-F238E27FC236}">
-                <a16:creationId xmlns:a16="http://schemas.microsoft.com/office/drawing/2014/main" id="{40128803-0D6C-4ECF-825B-EB4B2349C642}"/>
+                <a16:creationId xmlns:a16="http://schemas.microsoft.com/office/drawing/2014/main" id="{D8382E8D-AC6C-4CEB-8B25-51B64FADF326}"/>
               </a:ext>
             </a:extLst>
           </p:cNvPr>
@@ -30049,7 +30049,7 @@
           <p:cNvPr id="9" name="Text 7">
             <a:extLst xmlns:a="http://schemas.openxmlformats.org/drawingml/2006/main">
               <a:ext uri="{FF2B5EF4-FFF2-40B4-BE49-F238E27FC236}">
-                <a16:creationId xmlns:a16="http://schemas.microsoft.com/office/drawing/2014/main" id="{FE3AE791-B136-43F3-AB84-1379FB4CA96F}"/>
+                <a16:creationId xmlns:a16="http://schemas.microsoft.com/office/drawing/2014/main" id="{69FA9DC4-3AB6-4EEA-B741-9E20614BF20C}"/>
               </a:ext>
             </a:extLst>
           </p:cNvPr>
@@ -30096,7 +30096,7 @@
           <p:cNvPr id="10" name="Shape 8">
             <a:extLst xmlns:a="http://schemas.openxmlformats.org/drawingml/2006/main">
               <a:ext uri="{FF2B5EF4-FFF2-40B4-BE49-F238E27FC236}">
-                <a16:creationId xmlns:a16="http://schemas.microsoft.com/office/drawing/2014/main" id="{3826A628-7F70-49FA-A29B-C66F6C07ED82}"/>
+                <a16:creationId xmlns:a16="http://schemas.microsoft.com/office/drawing/2014/main" id="{2D66045F-563E-4874-BCC8-4B70E652698D}"/>
               </a:ext>
             </a:extLst>
           </p:cNvPr>
@@ -30128,7 +30128,7 @@
           <p:cNvPr id="11" name="Shape 9">
             <a:extLst xmlns:a="http://schemas.openxmlformats.org/drawingml/2006/main">
               <a:ext uri="{FF2B5EF4-FFF2-40B4-BE49-F238E27FC236}">
-                <a16:creationId xmlns:a16="http://schemas.microsoft.com/office/drawing/2014/main" id="{2C2B9F03-5AC9-4EB1-B7E3-0AFBA66B16BE}"/>
+                <a16:creationId xmlns:a16="http://schemas.microsoft.com/office/drawing/2014/main" id="{ED07D84E-F535-4B2C-A811-975FAA6794C3}"/>
               </a:ext>
             </a:extLst>
           </p:cNvPr>
@@ -30163,7 +30163,7 @@
           <p:cNvPr id="12" name="Text 10">
             <a:extLst xmlns:a="http://schemas.openxmlformats.org/drawingml/2006/main">
               <a:ext uri="{FF2B5EF4-FFF2-40B4-BE49-F238E27FC236}">
-                <a16:creationId xmlns:a16="http://schemas.microsoft.com/office/drawing/2014/main" id="{22005CA4-579B-4B15-B32A-5850DC3A159D}"/>
+                <a16:creationId xmlns:a16="http://schemas.microsoft.com/office/drawing/2014/main" id="{F631D18F-23C3-46E9-9926-AA5B8142D603}"/>
               </a:ext>
             </a:extLst>
           </p:cNvPr>
@@ -30210,7 +30210,7 @@
           <p:cNvPr id="13" name="Text 11">
             <a:extLst xmlns:a="http://schemas.openxmlformats.org/drawingml/2006/main">
               <a:ext uri="{FF2B5EF4-FFF2-40B4-BE49-F238E27FC236}">
-                <a16:creationId xmlns:a16="http://schemas.microsoft.com/office/drawing/2014/main" id="{9CC15778-42BF-49B7-ACB8-932D3EDD031A}"/>
+                <a16:creationId xmlns:a16="http://schemas.microsoft.com/office/drawing/2014/main" id="{6E715344-479A-4845-80A8-4720415853AA}"/>
               </a:ext>
             </a:extLst>
           </p:cNvPr>
@@ -30257,7 +30257,7 @@
           <p:cNvPr id="14" name="Shape 12">
             <a:extLst xmlns:a="http://schemas.openxmlformats.org/drawingml/2006/main">
               <a:ext uri="{FF2B5EF4-FFF2-40B4-BE49-F238E27FC236}">
-                <a16:creationId xmlns:a16="http://schemas.microsoft.com/office/drawing/2014/main" id="{0AA10302-2B48-41C4-AF9C-B0F32EBD06D6}"/>
+                <a16:creationId xmlns:a16="http://schemas.microsoft.com/office/drawing/2014/main" id="{FB60B839-1BD3-4DB6-B2DC-BE39FB8320BD}"/>
               </a:ext>
             </a:extLst>
           </p:cNvPr>
@@ -30289,7 +30289,7 @@
           <p:cNvPr id="15" name="Shape 13">
             <a:extLst xmlns:a="http://schemas.openxmlformats.org/drawingml/2006/main">
               <a:ext uri="{FF2B5EF4-FFF2-40B4-BE49-F238E27FC236}">
-                <a16:creationId xmlns:a16="http://schemas.microsoft.com/office/drawing/2014/main" id="{0F2D146C-0A64-4422-A8DB-C488F9B8B7C4}"/>
+                <a16:creationId xmlns:a16="http://schemas.microsoft.com/office/drawing/2014/main" id="{C2E0EB5F-D56F-4605-81AD-5AD94D06D198}"/>
               </a:ext>
             </a:extLst>
           </p:cNvPr>
@@ -30324,7 +30324,7 @@
           <p:cNvPr id="16" name="Text 14">
             <a:extLst xmlns:a="http://schemas.openxmlformats.org/drawingml/2006/main">
               <a:ext uri="{FF2B5EF4-FFF2-40B4-BE49-F238E27FC236}">
-                <a16:creationId xmlns:a16="http://schemas.microsoft.com/office/drawing/2014/main" id="{99994A0B-A741-473C-AE5B-581A87440212}"/>
+                <a16:creationId xmlns:a16="http://schemas.microsoft.com/office/drawing/2014/main" id="{5444F1B9-6F7F-4DB9-934D-C5B76D9A9846}"/>
               </a:ext>
             </a:extLst>
           </p:cNvPr>
@@ -30371,7 +30371,7 @@
           <p:cNvPr id="17" name="Text 15">
             <a:extLst xmlns:a="http://schemas.openxmlformats.org/drawingml/2006/main">
               <a:ext uri="{FF2B5EF4-FFF2-40B4-BE49-F238E27FC236}">
-                <a16:creationId xmlns:a16="http://schemas.microsoft.com/office/drawing/2014/main" id="{525E99AC-448E-4301-9F8A-A552DF2BEE00}"/>
+                <a16:creationId xmlns:a16="http://schemas.microsoft.com/office/drawing/2014/main" id="{DF06CC2D-C065-4549-A90F-66915225BDDD}"/>
               </a:ext>
             </a:extLst>
           </p:cNvPr>
@@ -30418,7 +30418,7 @@
           <p:cNvPr id="18" name="Shape 16">
             <a:extLst xmlns:a="http://schemas.openxmlformats.org/drawingml/2006/main">
               <a:ext uri="{FF2B5EF4-FFF2-40B4-BE49-F238E27FC236}">
-                <a16:creationId xmlns:a16="http://schemas.microsoft.com/office/drawing/2014/main" id="{DC65F9E3-95B1-408A-BC42-6C7E26C2EC22}"/>
+                <a16:creationId xmlns:a16="http://schemas.microsoft.com/office/drawing/2014/main" id="{BC92669F-EDB0-48C3-8B86-E7D5F3EC25CE}"/>
               </a:ext>
             </a:extLst>
           </p:cNvPr>
@@ -30450,7 +30450,7 @@
           <p:cNvPr id="19" name="Shape 17">
             <a:extLst xmlns:a="http://schemas.openxmlformats.org/drawingml/2006/main">
               <a:ext uri="{FF2B5EF4-FFF2-40B4-BE49-F238E27FC236}">
-                <a16:creationId xmlns:a16="http://schemas.microsoft.com/office/drawing/2014/main" id="{7347A2F5-43D4-43B0-8776-B40A296EB130}"/>
+                <a16:creationId xmlns:a16="http://schemas.microsoft.com/office/drawing/2014/main" id="{A8C27809-AF66-4523-B063-BD410A407D4D}"/>
               </a:ext>
             </a:extLst>
           </p:cNvPr>
@@ -30485,7 +30485,7 @@
           <p:cNvPr id="20" name="Text 18">
             <a:extLst xmlns:a="http://schemas.openxmlformats.org/drawingml/2006/main">
               <a:ext uri="{FF2B5EF4-FFF2-40B4-BE49-F238E27FC236}">
-                <a16:creationId xmlns:a16="http://schemas.microsoft.com/office/drawing/2014/main" id="{E5C46FC4-E46F-4C03-A20A-D80247EB5B0C}"/>
+                <a16:creationId xmlns:a16="http://schemas.microsoft.com/office/drawing/2014/main" id="{741180C1-34F8-4824-889E-50BAD01F50DB}"/>
               </a:ext>
             </a:extLst>
           </p:cNvPr>
@@ -30532,7 +30532,7 @@
           <p:cNvPr id="21" name="Text 19">
             <a:extLst xmlns:a="http://schemas.openxmlformats.org/drawingml/2006/main">
               <a:ext uri="{FF2B5EF4-FFF2-40B4-BE49-F238E27FC236}">
-                <a16:creationId xmlns:a16="http://schemas.microsoft.com/office/drawing/2014/main" id="{388B9D4A-5E92-438F-915D-44C794BCFEFD}"/>
+                <a16:creationId xmlns:a16="http://schemas.microsoft.com/office/drawing/2014/main" id="{2DA01F1B-0D0A-4C5A-ACA2-0F84826D877E}"/>
               </a:ext>
             </a:extLst>
           </p:cNvPr>
@@ -30579,7 +30579,7 @@
           <p:cNvPr id="22" name="Shape 20">
             <a:extLst xmlns:a="http://schemas.openxmlformats.org/drawingml/2006/main">
               <a:ext uri="{FF2B5EF4-FFF2-40B4-BE49-F238E27FC236}">
-                <a16:creationId xmlns:a16="http://schemas.microsoft.com/office/drawing/2014/main" id="{94E5A42F-4A5B-473B-A645-E151871CB53B}"/>
+                <a16:creationId xmlns:a16="http://schemas.microsoft.com/office/drawing/2014/main" id="{E84DA2A7-8E70-4121-B336-9DE6AD51EB39}"/>
               </a:ext>
             </a:extLst>
           </p:cNvPr>
@@ -30611,7 +30611,7 @@
           <p:cNvPr id="23" name="Shape 21">
             <a:extLst xmlns:a="http://schemas.openxmlformats.org/drawingml/2006/main">
               <a:ext uri="{FF2B5EF4-FFF2-40B4-BE49-F238E27FC236}">
-                <a16:creationId xmlns:a16="http://schemas.microsoft.com/office/drawing/2014/main" id="{F4BDB997-2ED4-4F0E-8D0F-F12E68796395}"/>
+                <a16:creationId xmlns:a16="http://schemas.microsoft.com/office/drawing/2014/main" id="{C1D12FE3-848C-4F7F-A8E1-1F51D5667771}"/>
               </a:ext>
             </a:extLst>
           </p:cNvPr>
@@ -30646,7 +30646,7 @@
           <p:cNvPr id="24" name="Text 22">
             <a:extLst xmlns:a="http://schemas.openxmlformats.org/drawingml/2006/main">
               <a:ext uri="{FF2B5EF4-FFF2-40B4-BE49-F238E27FC236}">
-                <a16:creationId xmlns:a16="http://schemas.microsoft.com/office/drawing/2014/main" id="{184AF0E6-BEFD-4AA9-BBAD-DAFD393F9DB7}"/>
+                <a16:creationId xmlns:a16="http://schemas.microsoft.com/office/drawing/2014/main" id="{AB5B93C8-769F-4EBF-A552-8E920A09126D}"/>
               </a:ext>
             </a:extLst>
           </p:cNvPr>
@@ -30693,7 +30693,7 @@
           <p:cNvPr id="25" name="Text 23">
             <a:extLst xmlns:a="http://schemas.openxmlformats.org/drawingml/2006/main">
               <a:ext uri="{FF2B5EF4-FFF2-40B4-BE49-F238E27FC236}">
-                <a16:creationId xmlns:a16="http://schemas.microsoft.com/office/drawing/2014/main" id="{8B63BA05-A78A-4EB4-9DCD-1895BDE2AE2B}"/>
+                <a16:creationId xmlns:a16="http://schemas.microsoft.com/office/drawing/2014/main" id="{D37F30B0-234C-47B1-94D7-7F0A404ACBB8}"/>
               </a:ext>
             </a:extLst>
           </p:cNvPr>
@@ -30740,7 +30740,7 @@
           <p:cNvPr id="26" name="Shape 24">
             <a:extLst xmlns:a="http://schemas.openxmlformats.org/drawingml/2006/main">
               <a:ext uri="{FF2B5EF4-FFF2-40B4-BE49-F238E27FC236}">
-                <a16:creationId xmlns:a16="http://schemas.microsoft.com/office/drawing/2014/main" id="{71E35368-07DB-4F6B-BBFC-84A6444056A9}"/>
+                <a16:creationId xmlns:a16="http://schemas.microsoft.com/office/drawing/2014/main" id="{3D6629B1-8220-48F0-9CB8-FA8906FD589F}"/>
               </a:ext>
             </a:extLst>
           </p:cNvPr>
@@ -30772,7 +30772,7 @@
           <p:cNvPr id="27" name="Shape 25">
             <a:extLst xmlns:a="http://schemas.openxmlformats.org/drawingml/2006/main">
               <a:ext uri="{FF2B5EF4-FFF2-40B4-BE49-F238E27FC236}">
-                <a16:creationId xmlns:a16="http://schemas.microsoft.com/office/drawing/2014/main" id="{DB73518B-FCC6-4FD5-9A25-563C0C3A1A76}"/>
+                <a16:creationId xmlns:a16="http://schemas.microsoft.com/office/drawing/2014/main" id="{82E0DD59-8D59-4F5F-99C8-BBB58AA4FF9D}"/>
               </a:ext>
             </a:extLst>
           </p:cNvPr>
@@ -30807,7 +30807,7 @@
           <p:cNvPr id="28" name="Text 26">
             <a:extLst xmlns:a="http://schemas.openxmlformats.org/drawingml/2006/main">
               <a:ext uri="{FF2B5EF4-FFF2-40B4-BE49-F238E27FC236}">
-                <a16:creationId xmlns:a16="http://schemas.microsoft.com/office/drawing/2014/main" id="{FEE190CD-AABB-404F-96CD-C2DB2FE88309}"/>
+                <a16:creationId xmlns:a16="http://schemas.microsoft.com/office/drawing/2014/main" id="{9D27EF31-D660-412E-80F8-2106733075D4}"/>
               </a:ext>
             </a:extLst>
           </p:cNvPr>
@@ -30854,7 +30854,7 @@
           <p:cNvPr id="29" name="Text 27">
             <a:extLst xmlns:a="http://schemas.openxmlformats.org/drawingml/2006/main">
               <a:ext uri="{FF2B5EF4-FFF2-40B4-BE49-F238E27FC236}">
-                <a16:creationId xmlns:a16="http://schemas.microsoft.com/office/drawing/2014/main" id="{F7B04303-D85B-4D67-B740-658C4D9510F9}"/>
+                <a16:creationId xmlns:a16="http://schemas.microsoft.com/office/drawing/2014/main" id="{1C1928AF-FF07-4E4E-A89D-28FA90490A19}"/>
               </a:ext>
             </a:extLst>
           </p:cNvPr>
@@ -30901,7 +30901,7 @@
           <p:cNvPr id="30" name="Text 28">
             <a:extLst xmlns:a="http://schemas.openxmlformats.org/drawingml/2006/main">
               <a:ext uri="{FF2B5EF4-FFF2-40B4-BE49-F238E27FC236}">
-                <a16:creationId xmlns:a16="http://schemas.microsoft.com/office/drawing/2014/main" id="{D52CF3CC-1BC5-46F2-A783-095AC2670A88}"/>
+                <a16:creationId xmlns:a16="http://schemas.microsoft.com/office/drawing/2014/main" id="{640508CA-434C-4B34-A60D-AE7D460B95A2}"/>
               </a:ext>
             </a:extLst>
           </p:cNvPr>
@@ -30948,7 +30948,7 @@
           <p:cNvPr id="31" name="Shape 29">
             <a:extLst xmlns:a="http://schemas.openxmlformats.org/drawingml/2006/main">
               <a:ext uri="{FF2B5EF4-FFF2-40B4-BE49-F238E27FC236}">
-                <a16:creationId xmlns:a16="http://schemas.microsoft.com/office/drawing/2014/main" id="{CF13B26B-02EE-47BD-9A0A-C3311D4A1555}"/>
+                <a16:creationId xmlns:a16="http://schemas.microsoft.com/office/drawing/2014/main" id="{0CE2225A-2A11-40CE-BA08-E17F960B86A2}"/>
               </a:ext>
             </a:extLst>
           </p:cNvPr>
@@ -30983,7 +30983,7 @@
           <p:cNvPr id="32" name="Text 30">
             <a:extLst xmlns:a="http://schemas.openxmlformats.org/drawingml/2006/main">
               <a:ext uri="{FF2B5EF4-FFF2-40B4-BE49-F238E27FC236}">
-                <a16:creationId xmlns:a16="http://schemas.microsoft.com/office/drawing/2014/main" id="{CFB4B148-7504-44C7-A235-A9ACA8A138EA}"/>
+                <a16:creationId xmlns:a16="http://schemas.microsoft.com/office/drawing/2014/main" id="{DE2A5367-179C-4CC9-B6F0-96594C58647C}"/>
               </a:ext>
             </a:extLst>
           </p:cNvPr>
@@ -31062,7 +31062,7 @@
           <p:cNvPr id="33" name="Text 31">
             <a:extLst xmlns:a="http://schemas.openxmlformats.org/drawingml/2006/main">
               <a:ext uri="{FF2B5EF4-FFF2-40B4-BE49-F238E27FC236}">
-                <a16:creationId xmlns:a16="http://schemas.microsoft.com/office/drawing/2014/main" id="{44DA377A-3D41-4791-9D05-FFCC307BB129}"/>
+                <a16:creationId xmlns:a16="http://schemas.microsoft.com/office/drawing/2014/main" id="{8F49AC0F-20B1-4AE7-94F0-4B79E7EE5025}"/>
               </a:ext>
             </a:extLst>
           </p:cNvPr>
@@ -31109,7 +31109,7 @@
           <p:cNvPr id="34" name="Shape 32">
             <a:extLst xmlns:a="http://schemas.openxmlformats.org/drawingml/2006/main">
               <a:ext uri="{FF2B5EF4-FFF2-40B4-BE49-F238E27FC236}">
-                <a16:creationId xmlns:a16="http://schemas.microsoft.com/office/drawing/2014/main" id="{74D50861-9C53-4A08-B07A-27673036E318}"/>
+                <a16:creationId xmlns:a16="http://schemas.microsoft.com/office/drawing/2014/main" id="{3AB9F167-90E4-4BD0-9109-0B129DA3A4D5}"/>
               </a:ext>
             </a:extLst>
           </p:cNvPr>
@@ -31144,7 +31144,7 @@
           <p:cNvPr id="35" name="Text 33">
             <a:extLst xmlns:a="http://schemas.openxmlformats.org/drawingml/2006/main">
               <a:ext uri="{FF2B5EF4-FFF2-40B4-BE49-F238E27FC236}">
-                <a16:creationId xmlns:a16="http://schemas.microsoft.com/office/drawing/2014/main" id="{AF1D8341-6925-428F-88E3-3436456B09D6}"/>
+                <a16:creationId xmlns:a16="http://schemas.microsoft.com/office/drawing/2014/main" id="{944A05E5-4504-4B1B-A22D-56718AFAE6AB}"/>
               </a:ext>
             </a:extLst>
           </p:cNvPr>
@@ -31223,7 +31223,7 @@
           <p:cNvPr id="36" name="Shape 34">
             <a:extLst xmlns:a="http://schemas.openxmlformats.org/drawingml/2006/main">
               <a:ext uri="{FF2B5EF4-FFF2-40B4-BE49-F238E27FC236}">
-                <a16:creationId xmlns:a16="http://schemas.microsoft.com/office/drawing/2014/main" id="{294C881B-DC11-4B6E-95F6-178DDAA36128}"/>
+                <a16:creationId xmlns:a16="http://schemas.microsoft.com/office/drawing/2014/main" id="{1F62DC66-592E-493E-A40A-93F34AF91EC8}"/>
               </a:ext>
             </a:extLst>
           </p:cNvPr>
@@ -31258,7 +31258,7 @@
           <p:cNvPr id="37" name="Text 35">
             <a:extLst xmlns:a="http://schemas.openxmlformats.org/drawingml/2006/main">
               <a:ext uri="{FF2B5EF4-FFF2-40B4-BE49-F238E27FC236}">
-                <a16:creationId xmlns:a16="http://schemas.microsoft.com/office/drawing/2014/main" id="{C863E59D-7420-40DC-AEA4-47BDF30DF9EC}"/>
+                <a16:creationId xmlns:a16="http://schemas.microsoft.com/office/drawing/2014/main" id="{E44D836E-04A0-4F62-8442-2E9563409F10}"/>
               </a:ext>
             </a:extLst>
           </p:cNvPr>
@@ -31305,7 +31305,7 @@
           <p:cNvPr id="38" name="Text 36">
             <a:extLst xmlns:a="http://schemas.openxmlformats.org/drawingml/2006/main">
               <a:ext uri="{FF2B5EF4-FFF2-40B4-BE49-F238E27FC236}">
-                <a16:creationId xmlns:a16="http://schemas.microsoft.com/office/drawing/2014/main" id="{50B93A5A-9521-4D48-A2BE-43CC712C2516}"/>
+                <a16:creationId xmlns:a16="http://schemas.microsoft.com/office/drawing/2014/main" id="{7F87D2F5-45BB-4A98-BF2F-9FCDE4290848}"/>
               </a:ext>
             </a:extLst>
           </p:cNvPr>
@@ -31352,7 +31352,7 @@
           <p:cNvPr id="39" name="Text 37">
             <a:extLst xmlns:a="http://schemas.openxmlformats.org/drawingml/2006/main">
               <a:ext uri="{FF2B5EF4-FFF2-40B4-BE49-F238E27FC236}">
-                <a16:creationId xmlns:a16="http://schemas.microsoft.com/office/drawing/2014/main" id="{694F0B87-1BE9-4F6C-AADE-A88E930DC278}"/>
+                <a16:creationId xmlns:a16="http://schemas.microsoft.com/office/drawing/2014/main" id="{4164E7AC-EEF9-4E19-8746-1B959FF6BB47}"/>
               </a:ext>
             </a:extLst>
           </p:cNvPr>
@@ -31397,7 +31397,7 @@
     </p:spTree>
     <p:extLst>
       <p:ext uri="{BB962C8B-B14F-4D97-AF65-F5344CB8AC3E}">
-        <p14:creationId xmlns:p14="http://schemas.microsoft.com/office/powerpoint/2010/main" val="80481956"/>
+        <p14:creationId xmlns:p14="http://schemas.microsoft.com/office/powerpoint/2010/main" val="1937984715"/>
       </p:ext>
     </p:extLst>
   </p:cSld>
@@ -31428,7 +31428,7 @@
           <p:cNvPr id="2" name="Text 0">
             <a:extLst xmlns:a="http://schemas.openxmlformats.org/drawingml/2006/main">
               <a:ext uri="{FF2B5EF4-FFF2-40B4-BE49-F238E27FC236}">
-                <a16:creationId xmlns:a16="http://schemas.microsoft.com/office/drawing/2014/main" id="{C7BF79D9-FDA7-4691-B8DD-E5585E710233}"/>
+                <a16:creationId xmlns:a16="http://schemas.microsoft.com/office/drawing/2014/main" id="{DA4A4825-37E7-4CE1-A7C4-BA0E000CC23C}"/>
               </a:ext>
             </a:extLst>
           </p:cNvPr>
@@ -31475,7 +31475,7 @@
           <p:cNvPr id="3" name="Text 1">
             <a:extLst xmlns:a="http://schemas.openxmlformats.org/drawingml/2006/main">
               <a:ext uri="{FF2B5EF4-FFF2-40B4-BE49-F238E27FC236}">
-                <a16:creationId xmlns:a16="http://schemas.microsoft.com/office/drawing/2014/main" id="{CB0CA121-2B8C-4C74-9CE3-19F7DF86CF1D}"/>
+                <a16:creationId xmlns:a16="http://schemas.microsoft.com/office/drawing/2014/main" id="{AA6835F7-0293-471E-A061-C62626D3CBC8}"/>
               </a:ext>
             </a:extLst>
           </p:cNvPr>
@@ -31522,7 +31522,7 @@
           <p:cNvPr id="4" name="Shape 2">
             <a:extLst xmlns:a="http://schemas.openxmlformats.org/drawingml/2006/main">
               <a:ext uri="{FF2B5EF4-FFF2-40B4-BE49-F238E27FC236}">
-                <a16:creationId xmlns:a16="http://schemas.microsoft.com/office/drawing/2014/main" id="{979EBF29-2B82-4A2A-B8FE-DF0986A8C7FA}"/>
+                <a16:creationId xmlns:a16="http://schemas.microsoft.com/office/drawing/2014/main" id="{61DAB91F-8DC8-43C5-8594-4112CD3288E0}"/>
               </a:ext>
             </a:extLst>
           </p:cNvPr>
@@ -31557,7 +31557,7 @@
           <p:cNvPr id="5" name="Text 3">
             <a:extLst xmlns:a="http://schemas.openxmlformats.org/drawingml/2006/main">
               <a:ext uri="{FF2B5EF4-FFF2-40B4-BE49-F238E27FC236}">
-                <a16:creationId xmlns:a16="http://schemas.microsoft.com/office/drawing/2014/main" id="{1DCA0FA3-34AE-4F98-B85E-6B0C5B7BA07E}"/>
+                <a16:creationId xmlns:a16="http://schemas.microsoft.com/office/drawing/2014/main" id="{47023573-DDEF-4447-B60F-230441BAF544}"/>
               </a:ext>
             </a:extLst>
           </p:cNvPr>
@@ -31604,7 +31604,7 @@
           <p:cNvPr id="6" name="Shape 4">
             <a:extLst xmlns:a="http://schemas.openxmlformats.org/drawingml/2006/main">
               <a:ext uri="{FF2B5EF4-FFF2-40B4-BE49-F238E27FC236}">
-                <a16:creationId xmlns:a16="http://schemas.microsoft.com/office/drawing/2014/main" id="{C366358B-468C-4297-BFCC-BD1DAE4E1521}"/>
+                <a16:creationId xmlns:a16="http://schemas.microsoft.com/office/drawing/2014/main" id="{87CCAF1D-9BE2-42D8-BCB2-B52C6E882A30}"/>
               </a:ext>
             </a:extLst>
           </p:cNvPr>
@@ -31635,7 +31635,7 @@
           <p:cNvPr id="7" name="Shape 5">
             <a:extLst xmlns:a="http://schemas.openxmlformats.org/drawingml/2006/main">
               <a:ext uri="{FF2B5EF4-FFF2-40B4-BE49-F238E27FC236}">
-                <a16:creationId xmlns:a16="http://schemas.microsoft.com/office/drawing/2014/main" id="{17F97596-9D4C-4672-BFE9-363051420EE0}"/>
+                <a16:creationId xmlns:a16="http://schemas.microsoft.com/office/drawing/2014/main" id="{4BDEBB94-5FF4-4E72-9FEB-C93223F55EEC}"/>
               </a:ext>
             </a:extLst>
           </p:cNvPr>
@@ -31670,7 +31670,7 @@
           <p:cNvPr id="8" name="Text 6">
             <a:extLst xmlns:a="http://schemas.openxmlformats.org/drawingml/2006/main">
               <a:ext uri="{FF2B5EF4-FFF2-40B4-BE49-F238E27FC236}">
-                <a16:creationId xmlns:a16="http://schemas.microsoft.com/office/drawing/2014/main" id="{994EE6BC-37E8-41A6-8818-25C31EF35052}"/>
+                <a16:creationId xmlns:a16="http://schemas.microsoft.com/office/drawing/2014/main" id="{C72F2B2E-BA00-4FAA-B018-E702FA39FE23}"/>
               </a:ext>
             </a:extLst>
           </p:cNvPr>
@@ -31717,7 +31717,7 @@
           <p:cNvPr id="9" name="Text 7">
             <a:extLst xmlns:a="http://schemas.openxmlformats.org/drawingml/2006/main">
               <a:ext uri="{FF2B5EF4-FFF2-40B4-BE49-F238E27FC236}">
-                <a16:creationId xmlns:a16="http://schemas.microsoft.com/office/drawing/2014/main" id="{37981DDE-0E6E-439B-8ECF-6C2758CBCBEE}"/>
+                <a16:creationId xmlns:a16="http://schemas.microsoft.com/office/drawing/2014/main" id="{70B4C3BF-243C-4937-B71E-3DAC87537971}"/>
               </a:ext>
             </a:extLst>
           </p:cNvPr>
@@ -31764,7 +31764,7 @@
           <p:cNvPr id="10" name="Text 8">
             <a:extLst xmlns:a="http://schemas.openxmlformats.org/drawingml/2006/main">
               <a:ext uri="{FF2B5EF4-FFF2-40B4-BE49-F238E27FC236}">
-                <a16:creationId xmlns:a16="http://schemas.microsoft.com/office/drawing/2014/main" id="{22797A40-0698-442D-953A-731FD8258402}"/>
+                <a16:creationId xmlns:a16="http://schemas.microsoft.com/office/drawing/2014/main" id="{5C43A43F-654C-477D-9073-2C0D4F975CDC}"/>
               </a:ext>
             </a:extLst>
           </p:cNvPr>
@@ -31811,7 +31811,7 @@
           <p:cNvPr id="11" name="Shape 9">
             <a:extLst xmlns:a="http://schemas.openxmlformats.org/drawingml/2006/main">
               <a:ext uri="{FF2B5EF4-FFF2-40B4-BE49-F238E27FC236}">
-                <a16:creationId xmlns:a16="http://schemas.microsoft.com/office/drawing/2014/main" id="{E01FA637-34E2-4DAF-8517-D47E0EBBE7C6}"/>
+                <a16:creationId xmlns:a16="http://schemas.microsoft.com/office/drawing/2014/main" id="{9B3AE43B-8ACC-45CA-A0C3-8F45C049A4FF}"/>
               </a:ext>
             </a:extLst>
           </p:cNvPr>
@@ -31846,7 +31846,7 @@
           <p:cNvPr id="12" name="Text 10">
             <a:extLst xmlns:a="http://schemas.openxmlformats.org/drawingml/2006/main">
               <a:ext uri="{FF2B5EF4-FFF2-40B4-BE49-F238E27FC236}">
-                <a16:creationId xmlns:a16="http://schemas.microsoft.com/office/drawing/2014/main" id="{1FB6886F-6CAB-4B99-9D61-34BE133E6BDD}"/>
+                <a16:creationId xmlns:a16="http://schemas.microsoft.com/office/drawing/2014/main" id="{9279A9D6-6E4C-4F96-BD06-1763CC8352B1}"/>
               </a:ext>
             </a:extLst>
           </p:cNvPr>
@@ -31893,7 +31893,7 @@
           <p:cNvPr id="13" name="Shape 11">
             <a:extLst xmlns:a="http://schemas.openxmlformats.org/drawingml/2006/main">
               <a:ext uri="{FF2B5EF4-FFF2-40B4-BE49-F238E27FC236}">
-                <a16:creationId xmlns:a16="http://schemas.microsoft.com/office/drawing/2014/main" id="{35A4CBC8-46D5-408C-9D3A-D67A35C26C55}"/>
+                <a16:creationId xmlns:a16="http://schemas.microsoft.com/office/drawing/2014/main" id="{C78A7F1E-E6A5-4F63-93B6-A2B0566C7B22}"/>
               </a:ext>
             </a:extLst>
           </p:cNvPr>
@@ -31928,7 +31928,7 @@
           <p:cNvPr id="14" name="Text 12">
             <a:extLst xmlns:a="http://schemas.openxmlformats.org/drawingml/2006/main">
               <a:ext uri="{FF2B5EF4-FFF2-40B4-BE49-F238E27FC236}">
-                <a16:creationId xmlns:a16="http://schemas.microsoft.com/office/drawing/2014/main" id="{FB4B5003-54A2-4ED0-89B7-0B7D8C34C204}"/>
+                <a16:creationId xmlns:a16="http://schemas.microsoft.com/office/drawing/2014/main" id="{91D54B8E-3BFA-44FC-A059-68A9B208E7F7}"/>
               </a:ext>
             </a:extLst>
           </p:cNvPr>
@@ -31975,7 +31975,7 @@
           <p:cNvPr id="15" name="Text 13">
             <a:extLst xmlns:a="http://schemas.openxmlformats.org/drawingml/2006/main">
               <a:ext uri="{FF2B5EF4-FFF2-40B4-BE49-F238E27FC236}">
-                <a16:creationId xmlns:a16="http://schemas.microsoft.com/office/drawing/2014/main" id="{21F43ECE-0997-48EB-A7DE-079361799DC7}"/>
+                <a16:creationId xmlns:a16="http://schemas.microsoft.com/office/drawing/2014/main" id="{A43BE904-F6A3-4D3A-B60C-136571BFC97A}"/>
               </a:ext>
             </a:extLst>
           </p:cNvPr>
@@ -32022,7 +32022,7 @@
           <p:cNvPr id="16" name="Shape 14">
             <a:extLst xmlns:a="http://schemas.openxmlformats.org/drawingml/2006/main">
               <a:ext uri="{FF2B5EF4-FFF2-40B4-BE49-F238E27FC236}">
-                <a16:creationId xmlns:a16="http://schemas.microsoft.com/office/drawing/2014/main" id="{B7CE9F22-4F31-407D-A165-9CC57942C68F}"/>
+                <a16:creationId xmlns:a16="http://schemas.microsoft.com/office/drawing/2014/main" id="{113E8026-7E8C-40C9-8A95-1790C396D593}"/>
               </a:ext>
             </a:extLst>
           </p:cNvPr>
@@ -32057,7 +32057,7 @@
           <p:cNvPr id="17" name="Text 15">
             <a:extLst xmlns:a="http://schemas.openxmlformats.org/drawingml/2006/main">
               <a:ext uri="{FF2B5EF4-FFF2-40B4-BE49-F238E27FC236}">
-                <a16:creationId xmlns:a16="http://schemas.microsoft.com/office/drawing/2014/main" id="{76152144-27C8-472B-9461-7CAF402C3582}"/>
+                <a16:creationId xmlns:a16="http://schemas.microsoft.com/office/drawing/2014/main" id="{D597C878-F18F-4469-A77C-5FC159A0CA78}"/>
               </a:ext>
             </a:extLst>
           </p:cNvPr>
@@ -32104,7 +32104,7 @@
           <p:cNvPr id="18" name="Text 16">
             <a:extLst xmlns:a="http://schemas.openxmlformats.org/drawingml/2006/main">
               <a:ext uri="{FF2B5EF4-FFF2-40B4-BE49-F238E27FC236}">
-                <a16:creationId xmlns:a16="http://schemas.microsoft.com/office/drawing/2014/main" id="{4D1AC2E0-E48C-4DE7-AF52-6CB07F2A3E74}"/>
+                <a16:creationId xmlns:a16="http://schemas.microsoft.com/office/drawing/2014/main" id="{33FC0C21-7558-45EB-AD72-C64EB7DE9D26}"/>
               </a:ext>
             </a:extLst>
           </p:cNvPr>
@@ -32151,7 +32151,7 @@
           <p:cNvPr id="19" name="Shape 17">
             <a:extLst xmlns:a="http://schemas.openxmlformats.org/drawingml/2006/main">
               <a:ext uri="{FF2B5EF4-FFF2-40B4-BE49-F238E27FC236}">
-                <a16:creationId xmlns:a16="http://schemas.microsoft.com/office/drawing/2014/main" id="{53F80A85-8B38-4B89-A2E2-5C01965B6B5F}"/>
+                <a16:creationId xmlns:a16="http://schemas.microsoft.com/office/drawing/2014/main" id="{3BC1A6AC-623E-49F7-AEAF-CBCACBFECAEE}"/>
               </a:ext>
             </a:extLst>
           </p:cNvPr>
@@ -32186,7 +32186,7 @@
           <p:cNvPr id="20" name="Text 18">
             <a:extLst xmlns:a="http://schemas.openxmlformats.org/drawingml/2006/main">
               <a:ext uri="{FF2B5EF4-FFF2-40B4-BE49-F238E27FC236}">
-                <a16:creationId xmlns:a16="http://schemas.microsoft.com/office/drawing/2014/main" id="{AD6509B9-EE10-49A4-9292-3DA6A9B146EC}"/>
+                <a16:creationId xmlns:a16="http://schemas.microsoft.com/office/drawing/2014/main" id="{03727AE3-FEDA-462E-BE18-1898411ED2A2}"/>
               </a:ext>
             </a:extLst>
           </p:cNvPr>
@@ -32233,7 +32233,7 @@
           <p:cNvPr id="21" name="Text 19">
             <a:extLst xmlns:a="http://schemas.openxmlformats.org/drawingml/2006/main">
               <a:ext uri="{FF2B5EF4-FFF2-40B4-BE49-F238E27FC236}">
-                <a16:creationId xmlns:a16="http://schemas.microsoft.com/office/drawing/2014/main" id="{127AB2B1-EC79-4AEE-B1B5-AF0E95D82A95}"/>
+                <a16:creationId xmlns:a16="http://schemas.microsoft.com/office/drawing/2014/main" id="{F6632538-A38D-4FBC-AC01-04BAE7529F4F}"/>
               </a:ext>
             </a:extLst>
           </p:cNvPr>
@@ -32280,7 +32280,7 @@
           <p:cNvPr id="22" name="Shape 20">
             <a:extLst xmlns:a="http://schemas.openxmlformats.org/drawingml/2006/main">
               <a:ext uri="{FF2B5EF4-FFF2-40B4-BE49-F238E27FC236}">
-                <a16:creationId xmlns:a16="http://schemas.microsoft.com/office/drawing/2014/main" id="{3B52A53A-B6F7-4A8A-93E1-F94E6F4F4F18}"/>
+                <a16:creationId xmlns:a16="http://schemas.microsoft.com/office/drawing/2014/main" id="{7D581AD7-E1A8-415C-A40E-50D16B95BFB9}"/>
               </a:ext>
             </a:extLst>
           </p:cNvPr>
@@ -32315,7 +32315,7 @@
           <p:cNvPr id="23" name="Text 21">
             <a:extLst xmlns:a="http://schemas.openxmlformats.org/drawingml/2006/main">
               <a:ext uri="{FF2B5EF4-FFF2-40B4-BE49-F238E27FC236}">
-                <a16:creationId xmlns:a16="http://schemas.microsoft.com/office/drawing/2014/main" id="{00AC61DE-F554-4ECF-839B-36CDAFCEEC9A}"/>
+                <a16:creationId xmlns:a16="http://schemas.microsoft.com/office/drawing/2014/main" id="{F3AE1AF4-B66F-479B-93EE-6C1389D5A284}"/>
               </a:ext>
             </a:extLst>
           </p:cNvPr>
@@ -32362,7 +32362,7 @@
           <p:cNvPr id="24" name="Shape 22">
             <a:extLst xmlns:a="http://schemas.openxmlformats.org/drawingml/2006/main">
               <a:ext uri="{FF2B5EF4-FFF2-40B4-BE49-F238E27FC236}">
-                <a16:creationId xmlns:a16="http://schemas.microsoft.com/office/drawing/2014/main" id="{BB9963FC-5139-404D-86D2-3525F5096700}"/>
+                <a16:creationId xmlns:a16="http://schemas.microsoft.com/office/drawing/2014/main" id="{8C220F87-C9C1-472B-A0A6-A8F9B68C21C8}"/>
               </a:ext>
             </a:extLst>
           </p:cNvPr>
@@ -32395,7 +32395,7 @@
           <p:cNvPr id="25" name="Text 23">
             <a:extLst xmlns:a="http://schemas.openxmlformats.org/drawingml/2006/main">
               <a:ext uri="{FF2B5EF4-FFF2-40B4-BE49-F238E27FC236}">
-                <a16:creationId xmlns:a16="http://schemas.microsoft.com/office/drawing/2014/main" id="{D79ED27C-5ABB-4B71-92A2-2436DBA439A6}"/>
+                <a16:creationId xmlns:a16="http://schemas.microsoft.com/office/drawing/2014/main" id="{57560460-DCFF-4C18-A637-568574BDEE93}"/>
               </a:ext>
             </a:extLst>
           </p:cNvPr>
@@ -32442,7 +32442,7 @@
           <p:cNvPr id="26" name="Shape 24">
             <a:extLst xmlns:a="http://schemas.openxmlformats.org/drawingml/2006/main">
               <a:ext uri="{FF2B5EF4-FFF2-40B4-BE49-F238E27FC236}">
-                <a16:creationId xmlns:a16="http://schemas.microsoft.com/office/drawing/2014/main" id="{CDFACD9A-E281-40ED-AF6A-6255E89073A5}"/>
+                <a16:creationId xmlns:a16="http://schemas.microsoft.com/office/drawing/2014/main" id="{C767D10C-63E0-4D6F-8490-925954D582FB}"/>
               </a:ext>
             </a:extLst>
           </p:cNvPr>
@@ -32475,7 +32475,7 @@
           <p:cNvPr id="27" name="Text 25">
             <a:extLst xmlns:a="http://schemas.openxmlformats.org/drawingml/2006/main">
               <a:ext uri="{FF2B5EF4-FFF2-40B4-BE49-F238E27FC236}">
-                <a16:creationId xmlns:a16="http://schemas.microsoft.com/office/drawing/2014/main" id="{9EEC4F18-1D8F-4E00-BA10-1C596B9FB6C8}"/>
+                <a16:creationId xmlns:a16="http://schemas.microsoft.com/office/drawing/2014/main" id="{A3F6908F-B3E7-47BC-BC57-E27D2A3B188D}"/>
               </a:ext>
             </a:extLst>
           </p:cNvPr>
@@ -32522,7 +32522,7 @@
           <p:cNvPr id="28" name="Shape 26">
             <a:extLst xmlns:a="http://schemas.openxmlformats.org/drawingml/2006/main">
               <a:ext uri="{FF2B5EF4-FFF2-40B4-BE49-F238E27FC236}">
-                <a16:creationId xmlns:a16="http://schemas.microsoft.com/office/drawing/2014/main" id="{1841C63D-A80C-49B5-93BC-6556808D7F2C}"/>
+                <a16:creationId xmlns:a16="http://schemas.microsoft.com/office/drawing/2014/main" id="{690C5C5E-D66A-42E1-B6E2-5C0F198FC5C1}"/>
               </a:ext>
             </a:extLst>
           </p:cNvPr>
@@ -32555,7 +32555,7 @@
           <p:cNvPr id="29" name="Text 27">
             <a:extLst xmlns:a="http://schemas.openxmlformats.org/drawingml/2006/main">
               <a:ext uri="{FF2B5EF4-FFF2-40B4-BE49-F238E27FC236}">
-                <a16:creationId xmlns:a16="http://schemas.microsoft.com/office/drawing/2014/main" id="{85BE5DEC-BF47-4EEE-8A59-9DB18176059F}"/>
+                <a16:creationId xmlns:a16="http://schemas.microsoft.com/office/drawing/2014/main" id="{419813B4-17A5-44BA-8FE3-A0F2BDA570FD}"/>
               </a:ext>
             </a:extLst>
           </p:cNvPr>
@@ -32602,7 +32602,7 @@
           <p:cNvPr id="30" name="Text 28">
             <a:extLst xmlns:a="http://schemas.openxmlformats.org/drawingml/2006/main">
               <a:ext uri="{FF2B5EF4-FFF2-40B4-BE49-F238E27FC236}">
-                <a16:creationId xmlns:a16="http://schemas.microsoft.com/office/drawing/2014/main" id="{17B52EC7-5680-42D1-8D7D-06F4F2AD3138}"/>
+                <a16:creationId xmlns:a16="http://schemas.microsoft.com/office/drawing/2014/main" id="{10418C86-5A48-4EB8-AE34-4AF218FD5286}"/>
               </a:ext>
             </a:extLst>
           </p:cNvPr>
@@ -32649,7 +32649,7 @@
           <p:cNvPr id="31" name="Text 29">
             <a:extLst xmlns:a="http://schemas.openxmlformats.org/drawingml/2006/main">
               <a:ext uri="{FF2B5EF4-FFF2-40B4-BE49-F238E27FC236}">
-                <a16:creationId xmlns:a16="http://schemas.microsoft.com/office/drawing/2014/main" id="{2761D387-09BC-4DCC-B329-BE21C7464E0E}"/>
+                <a16:creationId xmlns:a16="http://schemas.microsoft.com/office/drawing/2014/main" id="{4516DAE8-E8E8-41C2-A543-1AE275D7DE71}"/>
               </a:ext>
             </a:extLst>
           </p:cNvPr>
@@ -32696,7 +32696,7 @@
           <p:cNvPr id="32" name="Text 30">
             <a:extLst xmlns:a="http://schemas.openxmlformats.org/drawingml/2006/main">
               <a:ext uri="{FF2B5EF4-FFF2-40B4-BE49-F238E27FC236}">
-                <a16:creationId xmlns:a16="http://schemas.microsoft.com/office/drawing/2014/main" id="{FEB8EEA8-8CC1-4C79-9C26-43FEF6C9B7CB}"/>
+                <a16:creationId xmlns:a16="http://schemas.microsoft.com/office/drawing/2014/main" id="{0951D8A4-12D4-41EE-BBF4-1351593B07F2}"/>
               </a:ext>
             </a:extLst>
           </p:cNvPr>
@@ -32741,7 +32741,7 @@
     </p:spTree>
     <p:extLst>
       <p:ext uri="{BB962C8B-B14F-4D97-AF65-F5344CB8AC3E}">
-        <p14:creationId xmlns:p14="http://schemas.microsoft.com/office/powerpoint/2010/main" val="1183531340"/>
+        <p14:creationId xmlns:p14="http://schemas.microsoft.com/office/powerpoint/2010/main" val="193489159"/>
       </p:ext>
     </p:extLst>
   </p:cSld>

--- a/docs/presentation/BAI-Work-Defense-Deck.pptx
+++ b/docs/presentation/BAI-Work-Defense-Deck.pptx
@@ -2,31 +2,31 @@
 <file path=ppt/presentation.xml><?xml version="1.0" encoding="utf-8"?>
 <p:presentation xmlns:p="http://schemas.openxmlformats.org/presentationml/2006/main">
   <p:sldMasterIdLst>
-    <p:sldMasterId xmlns:r="http://schemas.openxmlformats.org/officeDocument/2006/relationships" id="2147483648" r:id="Rc25872652052445a"/>
+    <p:sldMasterId xmlns:r="http://schemas.openxmlformats.org/officeDocument/2006/relationships" id="2147483648" r:id="R03f322508d664c4b"/>
   </p:sldMasterIdLst>
   <p:notesMasterIdLst>
-    <p:notesMasterId xmlns:r="http://schemas.openxmlformats.org/officeDocument/2006/relationships" r:id="R6be2c663fb664f7c"/>
+    <p:notesMasterId xmlns:r="http://schemas.openxmlformats.org/officeDocument/2006/relationships" r:id="R0fe88a2d361e4274"/>
   </p:notesMasterIdLst>
   <p:sldIdLst>
-    <p:sldId xmlns:r="http://schemas.openxmlformats.org/officeDocument/2006/relationships" id="256" r:id="R6dacada4a1534070"/>
-    <p:sldId xmlns:r="http://schemas.openxmlformats.org/officeDocument/2006/relationships" id="257" r:id="Rf444c171f81d4e45"/>
-    <p:sldId xmlns:r="http://schemas.openxmlformats.org/officeDocument/2006/relationships" id="258" r:id="R3dea2fb87d7f45a7"/>
-    <p:sldId xmlns:r="http://schemas.openxmlformats.org/officeDocument/2006/relationships" id="259" r:id="R69d7ee90fb8b466f"/>
-    <p:sldId xmlns:r="http://schemas.openxmlformats.org/officeDocument/2006/relationships" id="260" r:id="R34e4dd31762c4b59"/>
-    <p:sldId xmlns:r="http://schemas.openxmlformats.org/officeDocument/2006/relationships" id="261" r:id="Rd4e009313c2e4732"/>
-    <p:sldId xmlns:r="http://schemas.openxmlformats.org/officeDocument/2006/relationships" id="262" r:id="R6f4402b8af614a94"/>
-    <p:sldId xmlns:r="http://schemas.openxmlformats.org/officeDocument/2006/relationships" id="263" r:id="Rb7c679bd604d46d0"/>
-    <p:sldId xmlns:r="http://schemas.openxmlformats.org/officeDocument/2006/relationships" id="264" r:id="Re15441bef143433a"/>
-    <p:sldId xmlns:r="http://schemas.openxmlformats.org/officeDocument/2006/relationships" id="265" r:id="R2bcffbdc5c4a4205"/>
-    <p:sldId xmlns:r="http://schemas.openxmlformats.org/officeDocument/2006/relationships" id="266" r:id="R054a35c735af46b7"/>
-    <p:sldId xmlns:r="http://schemas.openxmlformats.org/officeDocument/2006/relationships" id="267" r:id="Rde2a834882674bf9"/>
-    <p:sldId xmlns:r="http://schemas.openxmlformats.org/officeDocument/2006/relationships" id="268" r:id="Rb58f33b101244c1d"/>
-    <p:sldId xmlns:r="http://schemas.openxmlformats.org/officeDocument/2006/relationships" id="269" r:id="Rbc41b6eb05bd4058"/>
-    <p:sldId xmlns:r="http://schemas.openxmlformats.org/officeDocument/2006/relationships" id="270" r:id="R0df95486c23a462c"/>
-    <p:sldId xmlns:r="http://schemas.openxmlformats.org/officeDocument/2006/relationships" id="271" r:id="R1062c11ef6f04701"/>
-    <p:sldId xmlns:r="http://schemas.openxmlformats.org/officeDocument/2006/relationships" id="272" r:id="Rb26bbf5d070b40f5"/>
-    <p:sldId xmlns:r="http://schemas.openxmlformats.org/officeDocument/2006/relationships" id="273" r:id="R93d5c05475544713"/>
-    <p:sldId xmlns:r="http://schemas.openxmlformats.org/officeDocument/2006/relationships" id="274" r:id="Rf706687afbec443c"/>
+    <p:sldId xmlns:r="http://schemas.openxmlformats.org/officeDocument/2006/relationships" id="256" r:id="Rc63c5ac0524845d8"/>
+    <p:sldId xmlns:r="http://schemas.openxmlformats.org/officeDocument/2006/relationships" id="257" r:id="R0336c158d2b545c5"/>
+    <p:sldId xmlns:r="http://schemas.openxmlformats.org/officeDocument/2006/relationships" id="258" r:id="R0e93daf8bdd34ef3"/>
+    <p:sldId xmlns:r="http://schemas.openxmlformats.org/officeDocument/2006/relationships" id="259" r:id="R192a4eced8354da2"/>
+    <p:sldId xmlns:r="http://schemas.openxmlformats.org/officeDocument/2006/relationships" id="260" r:id="R51dbefe00b5549dc"/>
+    <p:sldId xmlns:r="http://schemas.openxmlformats.org/officeDocument/2006/relationships" id="261" r:id="R76390e697cc7420e"/>
+    <p:sldId xmlns:r="http://schemas.openxmlformats.org/officeDocument/2006/relationships" id="262" r:id="R67528be8c10b4754"/>
+    <p:sldId xmlns:r="http://schemas.openxmlformats.org/officeDocument/2006/relationships" id="263" r:id="R9f11cbc19c1f4094"/>
+    <p:sldId xmlns:r="http://schemas.openxmlformats.org/officeDocument/2006/relationships" id="264" r:id="R6ca700e1d6944dd1"/>
+    <p:sldId xmlns:r="http://schemas.openxmlformats.org/officeDocument/2006/relationships" id="265" r:id="R66f8ca66d6af467f"/>
+    <p:sldId xmlns:r="http://schemas.openxmlformats.org/officeDocument/2006/relationships" id="266" r:id="R3fe83d6ef3224573"/>
+    <p:sldId xmlns:r="http://schemas.openxmlformats.org/officeDocument/2006/relationships" id="267" r:id="Rc37c1bde4d5d4e6d"/>
+    <p:sldId xmlns:r="http://schemas.openxmlformats.org/officeDocument/2006/relationships" id="268" r:id="R2a38bb44deb9495a"/>
+    <p:sldId xmlns:r="http://schemas.openxmlformats.org/officeDocument/2006/relationships" id="269" r:id="R77e0e24d66734e89"/>
+    <p:sldId xmlns:r="http://schemas.openxmlformats.org/officeDocument/2006/relationships" id="270" r:id="R3d4b6bb656c14fb1"/>
+    <p:sldId xmlns:r="http://schemas.openxmlformats.org/officeDocument/2006/relationships" id="271" r:id="R8333d9ec758147a9"/>
+    <p:sldId xmlns:r="http://schemas.openxmlformats.org/officeDocument/2006/relationships" id="272" r:id="R4710795d901e4d55"/>
+    <p:sldId xmlns:r="http://schemas.openxmlformats.org/officeDocument/2006/relationships" id="273" r:id="R945e3e9959d643bb"/>
+    <p:sldId xmlns:r="http://schemas.openxmlformats.org/officeDocument/2006/relationships" id="274" r:id="R41424853436b4dcc"/>
   </p:sldIdLst>
   <p:sldSz cx="12191695" cy="6858000"/>
   <p:notesSz cx="6858000" cy="9144000"/>
@@ -1300,10 +1300,17 @@
           <a:lstStyle xmlns:a="http://schemas.openxmlformats.org/drawingml/2006/main"/>
           <a:p xmlns:a="http://schemas.openxmlformats.org/drawingml/2006/main">
             <a:r>
-              <a:t>路线图与现场演示（建议 45 秒）
-前四周解决发布级稳定性，第二阶段验证首批 Cohort，第三阶段再决定规模化。
-现场演示严格控制三分钟，覆盖配置、过程、产物和安全边界。
-每个阶段都用行为指标验收，而不是继续堆叠功能数量。</a:t>
+              <a:t>十二周路线图（建议 45 秒）</a:t>
+            </a:r>
+          </a:p>
+          <a:p xmlns:a="http://schemas.openxmlformats.org/drawingml/2006/main">
+            <a:r>
+              <a:t>前四周解决发布级稳定性，第二阶段验证首批 Cohort，第三阶段再决定规模化。</a:t>
+            </a:r>
+          </a:p>
+          <a:p xmlns:a="http://schemas.openxmlformats.org/drawingml/2006/main">
+            <a:r>
+              <a:t>每个阶段用发布质量、真实激活、留存和单位经济验收，而不是继续堆叠功能数量。</a:t>
             </a:r>
           </a:p>
         </p:txBody>
@@ -2088,7 +2095,7 @@
   </p:cSld>
   <p:clrMap bg1="lt1" tx1="dk1" bg2="lt2" tx2="dk2" accent1="accent1" accent2="accent2" accent3="accent3" accent4="accent4" accent5="accent5" accent6="accent6" hlink="hlink" folHlink="folHlink"/>
   <p:sldLayoutIdLst>
-    <p:sldLayoutId xmlns:r="http://schemas.openxmlformats.org/officeDocument/2006/relationships" id="2147483649" r:id="R7e2ab0ef7f3f4779"/>
+    <p:sldLayoutId xmlns:r="http://schemas.openxmlformats.org/officeDocument/2006/relationships" id="2147483649" r:id="Rf484222b88c74348"/>
   </p:sldLayoutIdLst>
   <p:hf sldNum="0" hdr="0" ftr="0" dt="0"/>
   <p:txStyles>
@@ -2659,7 +2666,7 @@
           <p:cNvPr id="2" name="Shape 0">
             <a:extLst xmlns:a="http://schemas.openxmlformats.org/drawingml/2006/main">
               <a:ext uri="{FF2B5EF4-FFF2-40B4-BE49-F238E27FC236}">
-                <a16:creationId xmlns:a16="http://schemas.microsoft.com/office/drawing/2014/main" id="{A89B3F76-A574-4D0A-9AA4-ADAFDF62D22E}"/>
+                <a16:creationId xmlns:a16="http://schemas.microsoft.com/office/drawing/2014/main" id="{52D89CFD-1EA4-4442-8227-4F7A678644D5}"/>
               </a:ext>
             </a:extLst>
           </p:cNvPr>
@@ -2692,7 +2699,7 @@
           <p:cNvPr id="3" name="Shape 1">
             <a:extLst xmlns:a="http://schemas.openxmlformats.org/drawingml/2006/main">
               <a:ext uri="{FF2B5EF4-FFF2-40B4-BE49-F238E27FC236}">
-                <a16:creationId xmlns:a16="http://schemas.microsoft.com/office/drawing/2014/main" id="{7DB25FC2-501D-4322-B375-80708BB67B5E}"/>
+                <a16:creationId xmlns:a16="http://schemas.microsoft.com/office/drawing/2014/main" id="{0898C9EA-1A09-4411-B625-AEBC834FE8DC}"/>
               </a:ext>
             </a:extLst>
           </p:cNvPr>
@@ -2731,7 +2738,7 @@
           <p:nvPr/>
         </p:nvPicPr>
         <p:blipFill>
-          <a:blip xmlns:r="http://schemas.openxmlformats.org/officeDocument/2006/relationships" xmlns:a="http://schemas.openxmlformats.org/drawingml/2006/main" r:embed="R88c22d9376794fc4"/>
+          <a:blip xmlns:r="http://schemas.openxmlformats.org/officeDocument/2006/relationships" xmlns:a="http://schemas.openxmlformats.org/drawingml/2006/main" r:embed="R95bd07bad6a24f20"/>
           <a:stretch xmlns:a="http://schemas.openxmlformats.org/drawingml/2006/main">
             <a:fillRect l="0" t="0" r="0" b="0"/>
           </a:stretch>
@@ -2751,7 +2758,7 @@
           <p:cNvPr id="5" name="Shape 2">
             <a:extLst xmlns:a="http://schemas.openxmlformats.org/drawingml/2006/main">
               <a:ext uri="{FF2B5EF4-FFF2-40B4-BE49-F238E27FC236}">
-                <a16:creationId xmlns:a16="http://schemas.microsoft.com/office/drawing/2014/main" id="{7DA1849B-0584-40A3-896F-47523DCA839C}"/>
+                <a16:creationId xmlns:a16="http://schemas.microsoft.com/office/drawing/2014/main" id="{BC3BA958-FE36-40BA-9764-BF4355DBD0A8}"/>
               </a:ext>
             </a:extLst>
           </p:cNvPr>
@@ -2784,7 +2791,7 @@
           <p:cNvPr id="6" name="Text 3">
             <a:extLst xmlns:a="http://schemas.openxmlformats.org/drawingml/2006/main">
               <a:ext uri="{FF2B5EF4-FFF2-40B4-BE49-F238E27FC236}">
-                <a16:creationId xmlns:a16="http://schemas.microsoft.com/office/drawing/2014/main" id="{EA64B761-AB3A-47E6-BA4D-43292959491C}"/>
+                <a16:creationId xmlns:a16="http://schemas.microsoft.com/office/drawing/2014/main" id="{B7383F5A-F50C-4BE1-A502-89DD98F36C0C}"/>
               </a:ext>
             </a:extLst>
           </p:cNvPr>
@@ -2831,7 +2838,7 @@
           <p:cNvPr id="7" name="Shape 4">
             <a:extLst xmlns:a="http://schemas.openxmlformats.org/drawingml/2006/main">
               <a:ext uri="{FF2B5EF4-FFF2-40B4-BE49-F238E27FC236}">
-                <a16:creationId xmlns:a16="http://schemas.microsoft.com/office/drawing/2014/main" id="{71B8279A-DACF-40C8-967E-00E8A7AFDBF9}"/>
+                <a16:creationId xmlns:a16="http://schemas.microsoft.com/office/drawing/2014/main" id="{D4428CFC-8822-4691-A852-752750195881}"/>
               </a:ext>
             </a:extLst>
           </p:cNvPr>
@@ -2864,7 +2871,7 @@
           <p:cNvPr id="8" name="Text 5">
             <a:extLst xmlns:a="http://schemas.openxmlformats.org/drawingml/2006/main">
               <a:ext uri="{FF2B5EF4-FFF2-40B4-BE49-F238E27FC236}">
-                <a16:creationId xmlns:a16="http://schemas.microsoft.com/office/drawing/2014/main" id="{616A99D6-95D9-4134-8EE1-1982073BC1C1}"/>
+                <a16:creationId xmlns:a16="http://schemas.microsoft.com/office/drawing/2014/main" id="{048B475C-9FC6-4B3B-8BC2-D750CC902C47}"/>
               </a:ext>
             </a:extLst>
           </p:cNvPr>
@@ -2915,7 +2922,7 @@
           <p:nvPr/>
         </p:nvPicPr>
         <p:blipFill>
-          <a:blip xmlns:r="http://schemas.openxmlformats.org/officeDocument/2006/relationships" xmlns:a="http://schemas.openxmlformats.org/drawingml/2006/main" r:embed="R8e00392ffff24c06"/>
+          <a:blip xmlns:r="http://schemas.openxmlformats.org/officeDocument/2006/relationships" xmlns:a="http://schemas.openxmlformats.org/drawingml/2006/main" r:embed="Re06674cb0d654252"/>
           <a:stretch xmlns:a="http://schemas.openxmlformats.org/drawingml/2006/main">
             <a:fillRect l="0" t="0" r="0" b="0"/>
           </a:stretch>
@@ -2935,7 +2942,7 @@
           <p:cNvPr id="10" name="Text 6">
             <a:extLst xmlns:a="http://schemas.openxmlformats.org/drawingml/2006/main">
               <a:ext uri="{FF2B5EF4-FFF2-40B4-BE49-F238E27FC236}">
-                <a16:creationId xmlns:a16="http://schemas.microsoft.com/office/drawing/2014/main" id="{3A3EA62E-8A4C-4D3F-886F-BF647965C33A}"/>
+                <a16:creationId xmlns:a16="http://schemas.microsoft.com/office/drawing/2014/main" id="{F0F6485E-1D44-4759-84A1-D679E3EB709F}"/>
               </a:ext>
             </a:extLst>
           </p:cNvPr>
@@ -2982,7 +2989,7 @@
           <p:cNvPr id="11" name="Text 7">
             <a:extLst xmlns:a="http://schemas.openxmlformats.org/drawingml/2006/main">
               <a:ext uri="{FF2B5EF4-FFF2-40B4-BE49-F238E27FC236}">
-                <a16:creationId xmlns:a16="http://schemas.microsoft.com/office/drawing/2014/main" id="{80813227-40D8-48FF-B83D-62037AC17C23}"/>
+                <a16:creationId xmlns:a16="http://schemas.microsoft.com/office/drawing/2014/main" id="{A3E993E7-655E-4EEF-AB98-93B6DDD4EF79}"/>
               </a:ext>
             </a:extLst>
           </p:cNvPr>
@@ -3029,7 +3036,7 @@
           <p:cNvPr id="12" name="Shape 8">
             <a:extLst xmlns:a="http://schemas.openxmlformats.org/drawingml/2006/main">
               <a:ext uri="{FF2B5EF4-FFF2-40B4-BE49-F238E27FC236}">
-                <a16:creationId xmlns:a16="http://schemas.microsoft.com/office/drawing/2014/main" id="{826F5F73-91B0-4002-8FED-1C1264D0C32E}"/>
+                <a16:creationId xmlns:a16="http://schemas.microsoft.com/office/drawing/2014/main" id="{7287AA3E-C236-49EB-AAFA-74E30F35EF2C}"/>
               </a:ext>
             </a:extLst>
           </p:cNvPr>
@@ -3064,7 +3071,7 @@
           <p:cNvPr id="13" name="Text 9">
             <a:extLst xmlns:a="http://schemas.openxmlformats.org/drawingml/2006/main">
               <a:ext uri="{FF2B5EF4-FFF2-40B4-BE49-F238E27FC236}">
-                <a16:creationId xmlns:a16="http://schemas.microsoft.com/office/drawing/2014/main" id="{7D29A61E-412C-42FF-8118-16A6325E34D3}"/>
+                <a16:creationId xmlns:a16="http://schemas.microsoft.com/office/drawing/2014/main" id="{EF24F5DC-BB76-4A6C-9E6B-C2F25B7F5003}"/>
               </a:ext>
             </a:extLst>
           </p:cNvPr>
@@ -3111,7 +3118,7 @@
           <p:cNvPr id="14" name="Shape 10">
             <a:extLst xmlns:a="http://schemas.openxmlformats.org/drawingml/2006/main">
               <a:ext uri="{FF2B5EF4-FFF2-40B4-BE49-F238E27FC236}">
-                <a16:creationId xmlns:a16="http://schemas.microsoft.com/office/drawing/2014/main" id="{B5F638CB-09B6-4393-93D9-A70305D33F9A}"/>
+                <a16:creationId xmlns:a16="http://schemas.microsoft.com/office/drawing/2014/main" id="{C4022C6F-5358-42E1-9642-D880BE7EA486}"/>
               </a:ext>
             </a:extLst>
           </p:cNvPr>
@@ -3146,7 +3153,7 @@
           <p:cNvPr id="15" name="Text 11">
             <a:extLst xmlns:a="http://schemas.openxmlformats.org/drawingml/2006/main">
               <a:ext uri="{FF2B5EF4-FFF2-40B4-BE49-F238E27FC236}">
-                <a16:creationId xmlns:a16="http://schemas.microsoft.com/office/drawing/2014/main" id="{47F1F4E4-1AD1-4FC0-B6D4-59B175023B1E}"/>
+                <a16:creationId xmlns:a16="http://schemas.microsoft.com/office/drawing/2014/main" id="{670A67C2-5235-45E1-9EEB-41E436A03A83}"/>
               </a:ext>
             </a:extLst>
           </p:cNvPr>
@@ -3193,7 +3200,7 @@
           <p:cNvPr id="16" name="Shape 12">
             <a:extLst xmlns:a="http://schemas.openxmlformats.org/drawingml/2006/main">
               <a:ext uri="{FF2B5EF4-FFF2-40B4-BE49-F238E27FC236}">
-                <a16:creationId xmlns:a16="http://schemas.microsoft.com/office/drawing/2014/main" id="{C9DBF50B-6DDC-4E17-B29C-C2183DDEF898}"/>
+                <a16:creationId xmlns:a16="http://schemas.microsoft.com/office/drawing/2014/main" id="{566B58DF-1767-44DD-A70E-0216C13D74DE}"/>
               </a:ext>
             </a:extLst>
           </p:cNvPr>
@@ -3228,7 +3235,7 @@
           <p:cNvPr id="17" name="Text 13">
             <a:extLst xmlns:a="http://schemas.openxmlformats.org/drawingml/2006/main">
               <a:ext uri="{FF2B5EF4-FFF2-40B4-BE49-F238E27FC236}">
-                <a16:creationId xmlns:a16="http://schemas.microsoft.com/office/drawing/2014/main" id="{4065EEBD-754A-4BE7-9FB1-790B431E02D7}"/>
+                <a16:creationId xmlns:a16="http://schemas.microsoft.com/office/drawing/2014/main" id="{DE6664FD-CB1B-4588-8C98-6EE6C34688D2}"/>
               </a:ext>
             </a:extLst>
           </p:cNvPr>
@@ -3275,7 +3282,7 @@
           <p:cNvPr id="18" name="Shape 14">
             <a:extLst xmlns:a="http://schemas.openxmlformats.org/drawingml/2006/main">
               <a:ext uri="{FF2B5EF4-FFF2-40B4-BE49-F238E27FC236}">
-                <a16:creationId xmlns:a16="http://schemas.microsoft.com/office/drawing/2014/main" id="{DEBFBEE6-7A10-4A1D-BB79-AEEF2BF1F484}"/>
+                <a16:creationId xmlns:a16="http://schemas.microsoft.com/office/drawing/2014/main" id="{35BE6B28-3193-4837-B50B-1613E2D291F8}"/>
               </a:ext>
             </a:extLst>
           </p:cNvPr>
@@ -3310,7 +3317,7 @@
           <p:cNvPr id="19" name="Text 15">
             <a:extLst xmlns:a="http://schemas.openxmlformats.org/drawingml/2006/main">
               <a:ext uri="{FF2B5EF4-FFF2-40B4-BE49-F238E27FC236}">
-                <a16:creationId xmlns:a16="http://schemas.microsoft.com/office/drawing/2014/main" id="{BAC50695-7C44-4FDD-8345-2C0BE0144C7C}"/>
+                <a16:creationId xmlns:a16="http://schemas.microsoft.com/office/drawing/2014/main" id="{0123ED18-7666-4973-9FEF-D470C013F418}"/>
               </a:ext>
             </a:extLst>
           </p:cNvPr>
@@ -3357,7 +3364,7 @@
           <p:cNvPr id="20" name="Shape 16">
             <a:extLst xmlns:a="http://schemas.openxmlformats.org/drawingml/2006/main">
               <a:ext uri="{FF2B5EF4-FFF2-40B4-BE49-F238E27FC236}">
-                <a16:creationId xmlns:a16="http://schemas.microsoft.com/office/drawing/2014/main" id="{D5D83D42-C5E5-4B00-A5CE-D69234E5FB74}"/>
+                <a16:creationId xmlns:a16="http://schemas.microsoft.com/office/drawing/2014/main" id="{8B6D3B32-8010-4810-AA6D-7E62277CBE83}"/>
               </a:ext>
             </a:extLst>
           </p:cNvPr>
@@ -3392,7 +3399,7 @@
           <p:cNvPr id="21" name="Text 17">
             <a:extLst xmlns:a="http://schemas.openxmlformats.org/drawingml/2006/main">
               <a:ext uri="{FF2B5EF4-FFF2-40B4-BE49-F238E27FC236}">
-                <a16:creationId xmlns:a16="http://schemas.microsoft.com/office/drawing/2014/main" id="{B91D1707-7671-43FB-8DAE-BD78A3EB04E1}"/>
+                <a16:creationId xmlns:a16="http://schemas.microsoft.com/office/drawing/2014/main" id="{1633E2FD-5A57-40B0-B60D-3290AD821FE0}"/>
               </a:ext>
             </a:extLst>
           </p:cNvPr>
@@ -3439,7 +3446,7 @@
           <p:cNvPr id="22" name="Text 18">
             <a:extLst xmlns:a="http://schemas.openxmlformats.org/drawingml/2006/main">
               <a:ext uri="{FF2B5EF4-FFF2-40B4-BE49-F238E27FC236}">
-                <a16:creationId xmlns:a16="http://schemas.microsoft.com/office/drawing/2014/main" id="{1D9E4101-1364-4944-AECC-83801F9E0C97}"/>
+                <a16:creationId xmlns:a16="http://schemas.microsoft.com/office/drawing/2014/main" id="{1D8EBF0B-45AF-43FB-B3EC-54AFF66F5DA4}"/>
               </a:ext>
             </a:extLst>
           </p:cNvPr>
@@ -3486,7 +3493,7 @@
           <p:cNvPr id="23" name="Text 19">
             <a:extLst xmlns:a="http://schemas.openxmlformats.org/drawingml/2006/main">
               <a:ext uri="{FF2B5EF4-FFF2-40B4-BE49-F238E27FC236}">
-                <a16:creationId xmlns:a16="http://schemas.microsoft.com/office/drawing/2014/main" id="{B36AC1F5-C28C-4F33-A170-F9D4DF72CE4B}"/>
+                <a16:creationId xmlns:a16="http://schemas.microsoft.com/office/drawing/2014/main" id="{D289C999-91FB-45A7-8CB0-AA066F9565A9}"/>
               </a:ext>
             </a:extLst>
           </p:cNvPr>
@@ -3533,7 +3540,7 @@
           <p:cNvPr id="24" name="Text 20">
             <a:extLst xmlns:a="http://schemas.openxmlformats.org/drawingml/2006/main">
               <a:ext uri="{FF2B5EF4-FFF2-40B4-BE49-F238E27FC236}">
-                <a16:creationId xmlns:a16="http://schemas.microsoft.com/office/drawing/2014/main" id="{AE8FC0B7-BDD7-483C-8EA4-E7F06DCE1F17}"/>
+                <a16:creationId xmlns:a16="http://schemas.microsoft.com/office/drawing/2014/main" id="{CCB11B92-FDE2-4C8A-BE4B-4194F6BAAF86}"/>
               </a:ext>
             </a:extLst>
           </p:cNvPr>
@@ -3578,7 +3585,7 @@
     </p:spTree>
     <p:extLst>
       <p:ext uri="{BB962C8B-B14F-4D97-AF65-F5344CB8AC3E}">
-        <p14:creationId xmlns:p14="http://schemas.microsoft.com/office/powerpoint/2010/main" val="1208984021"/>
+        <p14:creationId xmlns:p14="http://schemas.microsoft.com/office/powerpoint/2010/main" val="1390719257"/>
       </p:ext>
     </p:extLst>
   </p:cSld>
@@ -3609,7 +3616,7 @@
           <p:cNvPr id="2" name="Text 0">
             <a:extLst xmlns:a="http://schemas.openxmlformats.org/drawingml/2006/main">
               <a:ext uri="{FF2B5EF4-FFF2-40B4-BE49-F238E27FC236}">
-                <a16:creationId xmlns:a16="http://schemas.microsoft.com/office/drawing/2014/main" id="{73D9E006-3767-47E8-9EE4-B164171EBC61}"/>
+                <a16:creationId xmlns:a16="http://schemas.microsoft.com/office/drawing/2014/main" id="{7CE76CA1-D5B7-4FFD-A319-9A312C692021}"/>
               </a:ext>
             </a:extLst>
           </p:cNvPr>
@@ -3656,7 +3663,7 @@
           <p:cNvPr id="3" name="Text 1">
             <a:extLst xmlns:a="http://schemas.openxmlformats.org/drawingml/2006/main">
               <a:ext uri="{FF2B5EF4-FFF2-40B4-BE49-F238E27FC236}">
-                <a16:creationId xmlns:a16="http://schemas.microsoft.com/office/drawing/2014/main" id="{2FFF0150-7023-4ADD-981D-B88514D78E59}"/>
+                <a16:creationId xmlns:a16="http://schemas.microsoft.com/office/drawing/2014/main" id="{1E23DA71-36B4-4F3B-A909-969739E2EF92}"/>
               </a:ext>
             </a:extLst>
           </p:cNvPr>
@@ -3703,7 +3710,7 @@
           <p:cNvPr id="4" name="Shape 2">
             <a:extLst xmlns:a="http://schemas.openxmlformats.org/drawingml/2006/main">
               <a:ext uri="{FF2B5EF4-FFF2-40B4-BE49-F238E27FC236}">
-                <a16:creationId xmlns:a16="http://schemas.microsoft.com/office/drawing/2014/main" id="{1F967F4A-A435-430D-AA40-557BD38D157D}"/>
+                <a16:creationId xmlns:a16="http://schemas.microsoft.com/office/drawing/2014/main" id="{75E6AA3A-E17A-4DBF-A9A3-4B4860CBA7EA}"/>
               </a:ext>
             </a:extLst>
           </p:cNvPr>
@@ -3738,7 +3745,7 @@
           <p:cNvPr id="5" name="Text 3">
             <a:extLst xmlns:a="http://schemas.openxmlformats.org/drawingml/2006/main">
               <a:ext uri="{FF2B5EF4-FFF2-40B4-BE49-F238E27FC236}">
-                <a16:creationId xmlns:a16="http://schemas.microsoft.com/office/drawing/2014/main" id="{DFCD810C-303C-44CE-8D39-1C2A397C53B8}"/>
+                <a16:creationId xmlns:a16="http://schemas.microsoft.com/office/drawing/2014/main" id="{53446072-09E7-44F1-9A25-1492AE72C036}"/>
               </a:ext>
             </a:extLst>
           </p:cNvPr>
@@ -3785,7 +3792,7 @@
           <p:cNvPr id="6" name="Shape 4">
             <a:extLst xmlns:a="http://schemas.openxmlformats.org/drawingml/2006/main">
               <a:ext uri="{FF2B5EF4-FFF2-40B4-BE49-F238E27FC236}">
-                <a16:creationId xmlns:a16="http://schemas.microsoft.com/office/drawing/2014/main" id="{93141054-B5C9-425E-AFD6-958BB65729D5}"/>
+                <a16:creationId xmlns:a16="http://schemas.microsoft.com/office/drawing/2014/main" id="{8F1DC16E-67B2-412B-B213-1610C88EA4BF}"/>
               </a:ext>
             </a:extLst>
           </p:cNvPr>
@@ -3816,7 +3823,7 @@
           <p:cNvPr id="7" name="Shape 5">
             <a:extLst xmlns:a="http://schemas.openxmlformats.org/drawingml/2006/main">
               <a:ext uri="{FF2B5EF4-FFF2-40B4-BE49-F238E27FC236}">
-                <a16:creationId xmlns:a16="http://schemas.microsoft.com/office/drawing/2014/main" id="{B4054D69-EDC0-4FFD-B0F5-22EE9E829A71}"/>
+                <a16:creationId xmlns:a16="http://schemas.microsoft.com/office/drawing/2014/main" id="{17B3D367-2A49-4364-8AC3-9F0F8F894FC1}"/>
               </a:ext>
             </a:extLst>
           </p:cNvPr>
@@ -3851,7 +3858,7 @@
           <p:cNvPr id="8" name="Shape 6">
             <a:extLst xmlns:a="http://schemas.openxmlformats.org/drawingml/2006/main">
               <a:ext uri="{FF2B5EF4-FFF2-40B4-BE49-F238E27FC236}">
-                <a16:creationId xmlns:a16="http://schemas.microsoft.com/office/drawing/2014/main" id="{271CE9FC-37A9-4429-9193-A446A38A6C5B}"/>
+                <a16:creationId xmlns:a16="http://schemas.microsoft.com/office/drawing/2014/main" id="{2B170D83-723D-45B3-8CD2-4D37ED4DF2ED}"/>
               </a:ext>
             </a:extLst>
           </p:cNvPr>
@@ -3886,7 +3893,7 @@
           <p:cNvPr id="9" name="Text 7">
             <a:extLst xmlns:a="http://schemas.openxmlformats.org/drawingml/2006/main">
               <a:ext uri="{FF2B5EF4-FFF2-40B4-BE49-F238E27FC236}">
-                <a16:creationId xmlns:a16="http://schemas.microsoft.com/office/drawing/2014/main" id="{DAC33012-7308-44FD-9AC3-07B77D934C64}"/>
+                <a16:creationId xmlns:a16="http://schemas.microsoft.com/office/drawing/2014/main" id="{20DBDB81-FBE6-481C-A6FA-25EC44F30816}"/>
               </a:ext>
             </a:extLst>
           </p:cNvPr>
@@ -3933,7 +3940,7 @@
           <p:cNvPr id="10" name="Text 8">
             <a:extLst xmlns:a="http://schemas.openxmlformats.org/drawingml/2006/main">
               <a:ext uri="{FF2B5EF4-FFF2-40B4-BE49-F238E27FC236}">
-                <a16:creationId xmlns:a16="http://schemas.microsoft.com/office/drawing/2014/main" id="{CF4E7450-4E63-4769-8ACA-F5B829193F16}"/>
+                <a16:creationId xmlns:a16="http://schemas.microsoft.com/office/drawing/2014/main" id="{F2ED80D1-9B9A-4FC0-802A-32F45FA59D2F}"/>
               </a:ext>
             </a:extLst>
           </p:cNvPr>
@@ -3980,7 +3987,7 @@
           <p:cNvPr id="11" name="Text 9">
             <a:extLst xmlns:a="http://schemas.openxmlformats.org/drawingml/2006/main">
               <a:ext uri="{FF2B5EF4-FFF2-40B4-BE49-F238E27FC236}">
-                <a16:creationId xmlns:a16="http://schemas.microsoft.com/office/drawing/2014/main" id="{3A01B324-36E0-456D-B38F-C88B3D3CE2B5}"/>
+                <a16:creationId xmlns:a16="http://schemas.microsoft.com/office/drawing/2014/main" id="{D300C368-06DE-49C5-B6A5-413B2844085B}"/>
               </a:ext>
             </a:extLst>
           </p:cNvPr>
@@ -4027,7 +4034,7 @@
           <p:cNvPr id="12" name="Text 10">
             <a:extLst xmlns:a="http://schemas.openxmlformats.org/drawingml/2006/main">
               <a:ext uri="{FF2B5EF4-FFF2-40B4-BE49-F238E27FC236}">
-                <a16:creationId xmlns:a16="http://schemas.microsoft.com/office/drawing/2014/main" id="{2881764A-F237-4351-AC3A-D5355001DFFC}"/>
+                <a16:creationId xmlns:a16="http://schemas.microsoft.com/office/drawing/2014/main" id="{66541E52-3203-42E2-8EA9-5B70A012C11F}"/>
               </a:ext>
             </a:extLst>
           </p:cNvPr>
@@ -4074,7 +4081,7 @@
           <p:cNvPr id="13" name="Text 11">
             <a:extLst xmlns:a="http://schemas.openxmlformats.org/drawingml/2006/main">
               <a:ext uri="{FF2B5EF4-FFF2-40B4-BE49-F238E27FC236}">
-                <a16:creationId xmlns:a16="http://schemas.microsoft.com/office/drawing/2014/main" id="{017D1588-DBAB-4F5E-A2A7-504730999188}"/>
+                <a16:creationId xmlns:a16="http://schemas.microsoft.com/office/drawing/2014/main" id="{ACB38532-72DB-45B6-BB9C-60F93CBCF8BE}"/>
               </a:ext>
             </a:extLst>
           </p:cNvPr>
@@ -4121,7 +4128,7 @@
           <p:cNvPr id="14" name="Shape 12">
             <a:extLst xmlns:a="http://schemas.openxmlformats.org/drawingml/2006/main">
               <a:ext uri="{FF2B5EF4-FFF2-40B4-BE49-F238E27FC236}">
-                <a16:creationId xmlns:a16="http://schemas.microsoft.com/office/drawing/2014/main" id="{183766E4-7941-4BDD-91C4-5328B857F3B3}"/>
+                <a16:creationId xmlns:a16="http://schemas.microsoft.com/office/drawing/2014/main" id="{588B004E-6567-4EC4-B98D-967FEA5C69B8}"/>
               </a:ext>
             </a:extLst>
           </p:cNvPr>
@@ -4156,7 +4163,7 @@
           <p:cNvPr id="15" name="Shape 13">
             <a:extLst xmlns:a="http://schemas.openxmlformats.org/drawingml/2006/main">
               <a:ext uri="{FF2B5EF4-FFF2-40B4-BE49-F238E27FC236}">
-                <a16:creationId xmlns:a16="http://schemas.microsoft.com/office/drawing/2014/main" id="{059349AB-BADF-40F5-AA22-586EDD316381}"/>
+                <a16:creationId xmlns:a16="http://schemas.microsoft.com/office/drawing/2014/main" id="{30F8ED0C-5E8B-4676-8C2D-97B75C894AF5}"/>
               </a:ext>
             </a:extLst>
           </p:cNvPr>
@@ -4191,7 +4198,7 @@
           <p:cNvPr id="16" name="Text 14">
             <a:extLst xmlns:a="http://schemas.openxmlformats.org/drawingml/2006/main">
               <a:ext uri="{FF2B5EF4-FFF2-40B4-BE49-F238E27FC236}">
-                <a16:creationId xmlns:a16="http://schemas.microsoft.com/office/drawing/2014/main" id="{796BBD6C-4F46-495E-BDBD-108B6F5A9072}"/>
+                <a16:creationId xmlns:a16="http://schemas.microsoft.com/office/drawing/2014/main" id="{A9842AC7-2FB2-48F7-8E59-274E92523ED3}"/>
               </a:ext>
             </a:extLst>
           </p:cNvPr>
@@ -4238,7 +4245,7 @@
           <p:cNvPr id="17" name="Text 15">
             <a:extLst xmlns:a="http://schemas.openxmlformats.org/drawingml/2006/main">
               <a:ext uri="{FF2B5EF4-FFF2-40B4-BE49-F238E27FC236}">
-                <a16:creationId xmlns:a16="http://schemas.microsoft.com/office/drawing/2014/main" id="{24FBA300-7594-4C85-90F5-093DBA4B4D70}"/>
+                <a16:creationId xmlns:a16="http://schemas.microsoft.com/office/drawing/2014/main" id="{A5B25389-11E9-48CD-9CD9-B09C7DA44312}"/>
               </a:ext>
             </a:extLst>
           </p:cNvPr>
@@ -4285,7 +4292,7 @@
           <p:cNvPr id="18" name="Text 16">
             <a:extLst xmlns:a="http://schemas.openxmlformats.org/drawingml/2006/main">
               <a:ext uri="{FF2B5EF4-FFF2-40B4-BE49-F238E27FC236}">
-                <a16:creationId xmlns:a16="http://schemas.microsoft.com/office/drawing/2014/main" id="{3461BF94-7777-4EC8-9892-E34C096B6FF2}"/>
+                <a16:creationId xmlns:a16="http://schemas.microsoft.com/office/drawing/2014/main" id="{30311814-92D8-45E7-A6B4-F9B3D8A70C44}"/>
               </a:ext>
             </a:extLst>
           </p:cNvPr>
@@ -4332,7 +4339,7 @@
           <p:cNvPr id="19" name="Text 17">
             <a:extLst xmlns:a="http://schemas.openxmlformats.org/drawingml/2006/main">
               <a:ext uri="{FF2B5EF4-FFF2-40B4-BE49-F238E27FC236}">
-                <a16:creationId xmlns:a16="http://schemas.microsoft.com/office/drawing/2014/main" id="{D82F2907-4192-4510-A284-DF0A8C71A1F3}"/>
+                <a16:creationId xmlns:a16="http://schemas.microsoft.com/office/drawing/2014/main" id="{FC369838-84D0-4787-ADA5-07EEECAC86B1}"/>
               </a:ext>
             </a:extLst>
           </p:cNvPr>
@@ -4379,7 +4386,7 @@
           <p:cNvPr id="20" name="Text 18">
             <a:extLst xmlns:a="http://schemas.openxmlformats.org/drawingml/2006/main">
               <a:ext uri="{FF2B5EF4-FFF2-40B4-BE49-F238E27FC236}">
-                <a16:creationId xmlns:a16="http://schemas.microsoft.com/office/drawing/2014/main" id="{9E3E3585-8A9C-4994-9851-8621ED865815}"/>
+                <a16:creationId xmlns:a16="http://schemas.microsoft.com/office/drawing/2014/main" id="{5375445D-D7D7-4B31-8D5E-66CEBD090521}"/>
               </a:ext>
             </a:extLst>
           </p:cNvPr>
@@ -4426,7 +4433,7 @@
           <p:cNvPr id="21" name="Shape 19">
             <a:extLst xmlns:a="http://schemas.openxmlformats.org/drawingml/2006/main">
               <a:ext uri="{FF2B5EF4-FFF2-40B4-BE49-F238E27FC236}">
-                <a16:creationId xmlns:a16="http://schemas.microsoft.com/office/drawing/2014/main" id="{79F92336-4456-449B-8142-D62B49FEC3BF}"/>
+                <a16:creationId xmlns:a16="http://schemas.microsoft.com/office/drawing/2014/main" id="{EFB330A4-794C-4895-8312-122C3AF8F1E9}"/>
               </a:ext>
             </a:extLst>
           </p:cNvPr>
@@ -4461,7 +4468,7 @@
           <p:cNvPr id="22" name="Shape 20">
             <a:extLst xmlns:a="http://schemas.openxmlformats.org/drawingml/2006/main">
               <a:ext uri="{FF2B5EF4-FFF2-40B4-BE49-F238E27FC236}">
-                <a16:creationId xmlns:a16="http://schemas.microsoft.com/office/drawing/2014/main" id="{E7CB2537-1497-48B0-806B-8419B9548B91}"/>
+                <a16:creationId xmlns:a16="http://schemas.microsoft.com/office/drawing/2014/main" id="{9B868407-914E-4378-9B33-4581EF1278C2}"/>
               </a:ext>
             </a:extLst>
           </p:cNvPr>
@@ -4496,7 +4503,7 @@
           <p:cNvPr id="23" name="Text 21">
             <a:extLst xmlns:a="http://schemas.openxmlformats.org/drawingml/2006/main">
               <a:ext uri="{FF2B5EF4-FFF2-40B4-BE49-F238E27FC236}">
-                <a16:creationId xmlns:a16="http://schemas.microsoft.com/office/drawing/2014/main" id="{F0C16394-A542-403A-8135-AF007F2349F5}"/>
+                <a16:creationId xmlns:a16="http://schemas.microsoft.com/office/drawing/2014/main" id="{EC31D20A-A9ED-4530-94B0-67C8B1698EBB}"/>
               </a:ext>
             </a:extLst>
           </p:cNvPr>
@@ -4543,7 +4550,7 @@
           <p:cNvPr id="24" name="Text 22">
             <a:extLst xmlns:a="http://schemas.openxmlformats.org/drawingml/2006/main">
               <a:ext uri="{FF2B5EF4-FFF2-40B4-BE49-F238E27FC236}">
-                <a16:creationId xmlns:a16="http://schemas.microsoft.com/office/drawing/2014/main" id="{AD7765F1-74CC-41C7-A65C-C749FA7CD113}"/>
+                <a16:creationId xmlns:a16="http://schemas.microsoft.com/office/drawing/2014/main" id="{4F65BD5B-760D-47AC-B3B6-5772393C2623}"/>
               </a:ext>
             </a:extLst>
           </p:cNvPr>
@@ -4590,7 +4597,7 @@
           <p:cNvPr id="25" name="Text 23">
             <a:extLst xmlns:a="http://schemas.openxmlformats.org/drawingml/2006/main">
               <a:ext uri="{FF2B5EF4-FFF2-40B4-BE49-F238E27FC236}">
-                <a16:creationId xmlns:a16="http://schemas.microsoft.com/office/drawing/2014/main" id="{95797570-2958-433C-96D2-0C07C67BAAC0}"/>
+                <a16:creationId xmlns:a16="http://schemas.microsoft.com/office/drawing/2014/main" id="{CAE6B60D-4F71-4E42-8E9D-6726FFD4EE41}"/>
               </a:ext>
             </a:extLst>
           </p:cNvPr>
@@ -4637,7 +4644,7 @@
           <p:cNvPr id="26" name="Text 24">
             <a:extLst xmlns:a="http://schemas.openxmlformats.org/drawingml/2006/main">
               <a:ext uri="{FF2B5EF4-FFF2-40B4-BE49-F238E27FC236}">
-                <a16:creationId xmlns:a16="http://schemas.microsoft.com/office/drawing/2014/main" id="{A5B1808C-E7C8-464B-94FF-E70A86115D8C}"/>
+                <a16:creationId xmlns:a16="http://schemas.microsoft.com/office/drawing/2014/main" id="{D243A666-ED3E-4B8E-BCDD-8358759294F1}"/>
               </a:ext>
             </a:extLst>
           </p:cNvPr>
@@ -4684,7 +4691,7 @@
           <p:cNvPr id="27" name="Text 25">
             <a:extLst xmlns:a="http://schemas.openxmlformats.org/drawingml/2006/main">
               <a:ext uri="{FF2B5EF4-FFF2-40B4-BE49-F238E27FC236}">
-                <a16:creationId xmlns:a16="http://schemas.microsoft.com/office/drawing/2014/main" id="{B07A4623-C4FC-4820-9442-F15A2420F44A}"/>
+                <a16:creationId xmlns:a16="http://schemas.microsoft.com/office/drawing/2014/main" id="{1CD6DF83-80ED-40B6-8393-61939A34A7B7}"/>
               </a:ext>
             </a:extLst>
           </p:cNvPr>
@@ -4731,7 +4738,7 @@
           <p:cNvPr id="28" name="Shape 26">
             <a:extLst xmlns:a="http://schemas.openxmlformats.org/drawingml/2006/main">
               <a:ext uri="{FF2B5EF4-FFF2-40B4-BE49-F238E27FC236}">
-                <a16:creationId xmlns:a16="http://schemas.microsoft.com/office/drawing/2014/main" id="{EEBCC6BE-7938-4CA3-850E-36B8C98F87D9}"/>
+                <a16:creationId xmlns:a16="http://schemas.microsoft.com/office/drawing/2014/main" id="{E20AE4C4-A4AB-4D22-8030-E3314E364047}"/>
               </a:ext>
             </a:extLst>
           </p:cNvPr>
@@ -4766,7 +4773,7 @@
           <p:cNvPr id="29" name="Text 27">
             <a:extLst xmlns:a="http://schemas.openxmlformats.org/drawingml/2006/main">
               <a:ext uri="{FF2B5EF4-FFF2-40B4-BE49-F238E27FC236}">
-                <a16:creationId xmlns:a16="http://schemas.microsoft.com/office/drawing/2014/main" id="{244FAFDD-317B-454F-A1B0-FDB0BABE18BA}"/>
+                <a16:creationId xmlns:a16="http://schemas.microsoft.com/office/drawing/2014/main" id="{0C8D647A-87D6-4881-8C2D-90A874C4CD48}"/>
               </a:ext>
             </a:extLst>
           </p:cNvPr>
@@ -4813,7 +4820,7 @@
           <p:cNvPr id="30" name="Text 28">
             <a:extLst xmlns:a="http://schemas.openxmlformats.org/drawingml/2006/main">
               <a:ext uri="{FF2B5EF4-FFF2-40B4-BE49-F238E27FC236}">
-                <a16:creationId xmlns:a16="http://schemas.microsoft.com/office/drawing/2014/main" id="{C3A4B7D2-7114-4714-9EEC-5E733DF93DD5}"/>
+                <a16:creationId xmlns:a16="http://schemas.microsoft.com/office/drawing/2014/main" id="{236C3E50-A06A-47A4-904D-98F39EB9F4F0}"/>
               </a:ext>
             </a:extLst>
           </p:cNvPr>
@@ -4860,7 +4867,7 @@
           <p:cNvPr id="31" name="Text 29">
             <a:extLst xmlns:a="http://schemas.openxmlformats.org/drawingml/2006/main">
               <a:ext uri="{FF2B5EF4-FFF2-40B4-BE49-F238E27FC236}">
-                <a16:creationId xmlns:a16="http://schemas.microsoft.com/office/drawing/2014/main" id="{E3CC8256-42A2-4E70-AAF2-354B6E485275}"/>
+                <a16:creationId xmlns:a16="http://schemas.microsoft.com/office/drawing/2014/main" id="{E40970A2-39D4-4EA8-B130-7360D1230348}"/>
               </a:ext>
             </a:extLst>
           </p:cNvPr>
@@ -4905,7 +4912,7 @@
     </p:spTree>
     <p:extLst>
       <p:ext uri="{BB962C8B-B14F-4D97-AF65-F5344CB8AC3E}">
-        <p14:creationId xmlns:p14="http://schemas.microsoft.com/office/powerpoint/2010/main" val="1062270606"/>
+        <p14:creationId xmlns:p14="http://schemas.microsoft.com/office/powerpoint/2010/main" val="860789924"/>
       </p:ext>
     </p:extLst>
   </p:cSld>
@@ -4936,7 +4943,7 @@
           <p:cNvPr id="2" name="Text 0">
             <a:extLst xmlns:a="http://schemas.openxmlformats.org/drawingml/2006/main">
               <a:ext uri="{FF2B5EF4-FFF2-40B4-BE49-F238E27FC236}">
-                <a16:creationId xmlns:a16="http://schemas.microsoft.com/office/drawing/2014/main" id="{EAE4B601-4373-4F1A-A2C6-77B75958923C}"/>
+                <a16:creationId xmlns:a16="http://schemas.microsoft.com/office/drawing/2014/main" id="{43733925-5497-4B1D-95A6-61191754368D}"/>
               </a:ext>
             </a:extLst>
           </p:cNvPr>
@@ -4983,7 +4990,7 @@
           <p:cNvPr id="3" name="Text 1">
             <a:extLst xmlns:a="http://schemas.openxmlformats.org/drawingml/2006/main">
               <a:ext uri="{FF2B5EF4-FFF2-40B4-BE49-F238E27FC236}">
-                <a16:creationId xmlns:a16="http://schemas.microsoft.com/office/drawing/2014/main" id="{FBCC3B34-DCD2-4EFA-B3D5-57CA899B8C68}"/>
+                <a16:creationId xmlns:a16="http://schemas.microsoft.com/office/drawing/2014/main" id="{F14ECC31-805B-4995-B046-6AD42BBF468A}"/>
               </a:ext>
             </a:extLst>
           </p:cNvPr>
@@ -5030,7 +5037,7 @@
           <p:cNvPr id="4" name="Shape 2">
             <a:extLst xmlns:a="http://schemas.openxmlformats.org/drawingml/2006/main">
               <a:ext uri="{FF2B5EF4-FFF2-40B4-BE49-F238E27FC236}">
-                <a16:creationId xmlns:a16="http://schemas.microsoft.com/office/drawing/2014/main" id="{824D0D28-6928-4079-AA33-35F03094A9C7}"/>
+                <a16:creationId xmlns:a16="http://schemas.microsoft.com/office/drawing/2014/main" id="{306CF888-F7EC-45AD-9833-611BCB0E3E46}"/>
               </a:ext>
             </a:extLst>
           </p:cNvPr>
@@ -5065,7 +5072,7 @@
           <p:cNvPr id="5" name="Text 3">
             <a:extLst xmlns:a="http://schemas.openxmlformats.org/drawingml/2006/main">
               <a:ext uri="{FF2B5EF4-FFF2-40B4-BE49-F238E27FC236}">
-                <a16:creationId xmlns:a16="http://schemas.microsoft.com/office/drawing/2014/main" id="{28B9C9D5-2263-4D67-9527-4A85C1BC2EBA}"/>
+                <a16:creationId xmlns:a16="http://schemas.microsoft.com/office/drawing/2014/main" id="{99FB63D5-CE79-4550-AC74-B52ACF3D43F2}"/>
               </a:ext>
             </a:extLst>
           </p:cNvPr>
@@ -5112,7 +5119,7 @@
           <p:cNvPr id="6" name="Shape 4">
             <a:extLst xmlns:a="http://schemas.openxmlformats.org/drawingml/2006/main">
               <a:ext uri="{FF2B5EF4-FFF2-40B4-BE49-F238E27FC236}">
-                <a16:creationId xmlns:a16="http://schemas.microsoft.com/office/drawing/2014/main" id="{D1826BE9-74A1-4F2F-A35E-05B5A85B2C20}"/>
+                <a16:creationId xmlns:a16="http://schemas.microsoft.com/office/drawing/2014/main" id="{A2B5806E-EEFF-46EA-B697-8C0B464BCC4F}"/>
               </a:ext>
             </a:extLst>
           </p:cNvPr>
@@ -5143,7 +5150,7 @@
           <p:cNvPr id="7" name="Shape 5">
             <a:extLst xmlns:a="http://schemas.openxmlformats.org/drawingml/2006/main">
               <a:ext uri="{FF2B5EF4-FFF2-40B4-BE49-F238E27FC236}">
-                <a16:creationId xmlns:a16="http://schemas.microsoft.com/office/drawing/2014/main" id="{C648A845-05AE-4C01-8037-D320295A27C0}"/>
+                <a16:creationId xmlns:a16="http://schemas.microsoft.com/office/drawing/2014/main" id="{96633842-AB5A-4683-B083-05FF4FA10C51}"/>
               </a:ext>
             </a:extLst>
           </p:cNvPr>
@@ -5178,7 +5185,7 @@
           <p:cNvPr id="8" name="Text 6">
             <a:extLst xmlns:a="http://schemas.openxmlformats.org/drawingml/2006/main">
               <a:ext uri="{FF2B5EF4-FFF2-40B4-BE49-F238E27FC236}">
-                <a16:creationId xmlns:a16="http://schemas.microsoft.com/office/drawing/2014/main" id="{3CC24DE1-AE44-41C0-8139-C1A885C84635}"/>
+                <a16:creationId xmlns:a16="http://schemas.microsoft.com/office/drawing/2014/main" id="{3EE8B194-217A-44C2-879E-D9D09C52A7E7}"/>
               </a:ext>
             </a:extLst>
           </p:cNvPr>
@@ -5225,7 +5232,7 @@
           <p:cNvPr id="9" name="Text 7">
             <a:extLst xmlns:a="http://schemas.openxmlformats.org/drawingml/2006/main">
               <a:ext uri="{FF2B5EF4-FFF2-40B4-BE49-F238E27FC236}">
-                <a16:creationId xmlns:a16="http://schemas.microsoft.com/office/drawing/2014/main" id="{5E691904-63AE-43E9-B9FA-28A606CA7637}"/>
+                <a16:creationId xmlns:a16="http://schemas.microsoft.com/office/drawing/2014/main" id="{7820C096-B971-4868-B873-0B064F00C385}"/>
               </a:ext>
             </a:extLst>
           </p:cNvPr>
@@ -5288,7 +5295,7 @@
           <p:cNvPr id="11" name="Shape 9">
             <a:extLst xmlns:a="http://schemas.openxmlformats.org/drawingml/2006/main">
               <a:ext uri="{FF2B5EF4-FFF2-40B4-BE49-F238E27FC236}">
-                <a16:creationId xmlns:a16="http://schemas.microsoft.com/office/drawing/2014/main" id="{E48AE584-9115-4C1A-8F00-88A9FF163273}"/>
+                <a16:creationId xmlns:a16="http://schemas.microsoft.com/office/drawing/2014/main" id="{315D87D8-0F53-43D9-9C7A-BCD15C91917B}"/>
               </a:ext>
             </a:extLst>
           </p:cNvPr>
@@ -5323,7 +5330,7 @@
           <p:cNvPr id="12" name="Text 10">
             <a:extLst xmlns:a="http://schemas.openxmlformats.org/drawingml/2006/main">
               <a:ext uri="{FF2B5EF4-FFF2-40B4-BE49-F238E27FC236}">
-                <a16:creationId xmlns:a16="http://schemas.microsoft.com/office/drawing/2014/main" id="{EBC76A56-018B-4CA1-BFD5-7986E05FC21A}"/>
+                <a16:creationId xmlns:a16="http://schemas.microsoft.com/office/drawing/2014/main" id="{4F1D84C6-CD2C-4B73-B630-0A85D9917FE6}"/>
               </a:ext>
             </a:extLst>
           </p:cNvPr>
@@ -5370,7 +5377,7 @@
           <p:cNvPr id="13" name="Text 11">
             <a:extLst xmlns:a="http://schemas.openxmlformats.org/drawingml/2006/main">
               <a:ext uri="{FF2B5EF4-FFF2-40B4-BE49-F238E27FC236}">
-                <a16:creationId xmlns:a16="http://schemas.microsoft.com/office/drawing/2014/main" id="{FFD1F6A8-FA98-4756-BBD8-C3C8A8A0DA38}"/>
+                <a16:creationId xmlns:a16="http://schemas.microsoft.com/office/drawing/2014/main" id="{2DE21D3A-B8D2-421A-AF83-59FC3BD1294F}"/>
               </a:ext>
             </a:extLst>
           </p:cNvPr>
@@ -5433,7 +5440,7 @@
           <p:cNvPr id="15" name="Shape 13">
             <a:extLst xmlns:a="http://schemas.openxmlformats.org/drawingml/2006/main">
               <a:ext uri="{FF2B5EF4-FFF2-40B4-BE49-F238E27FC236}">
-                <a16:creationId xmlns:a16="http://schemas.microsoft.com/office/drawing/2014/main" id="{9B3EA0EC-185B-4AF9-9223-E40FF6F4E96D}"/>
+                <a16:creationId xmlns:a16="http://schemas.microsoft.com/office/drawing/2014/main" id="{B0E4E309-7D5D-43EB-99EA-F8C41F23948A}"/>
               </a:ext>
             </a:extLst>
           </p:cNvPr>
@@ -5468,7 +5475,7 @@
           <p:cNvPr id="16" name="Text 14">
             <a:extLst xmlns:a="http://schemas.openxmlformats.org/drawingml/2006/main">
               <a:ext uri="{FF2B5EF4-FFF2-40B4-BE49-F238E27FC236}">
-                <a16:creationId xmlns:a16="http://schemas.microsoft.com/office/drawing/2014/main" id="{9A6A9614-3E4E-4DB8-94A5-B2011C1C9F70}"/>
+                <a16:creationId xmlns:a16="http://schemas.microsoft.com/office/drawing/2014/main" id="{CE026AE5-4470-40D9-866E-129839770C7A}"/>
               </a:ext>
             </a:extLst>
           </p:cNvPr>
@@ -5515,7 +5522,7 @@
           <p:cNvPr id="17" name="Text 15">
             <a:extLst xmlns:a="http://schemas.openxmlformats.org/drawingml/2006/main">
               <a:ext uri="{FF2B5EF4-FFF2-40B4-BE49-F238E27FC236}">
-                <a16:creationId xmlns:a16="http://schemas.microsoft.com/office/drawing/2014/main" id="{23AC1AE7-F261-45FB-A48B-182B6FCC9FA2}"/>
+                <a16:creationId xmlns:a16="http://schemas.microsoft.com/office/drawing/2014/main" id="{49B78527-5600-4613-B949-E24F7116A6D0}"/>
               </a:ext>
             </a:extLst>
           </p:cNvPr>
@@ -5578,7 +5585,7 @@
           <p:cNvPr id="19" name="Shape 17">
             <a:extLst xmlns:a="http://schemas.openxmlformats.org/drawingml/2006/main">
               <a:ext uri="{FF2B5EF4-FFF2-40B4-BE49-F238E27FC236}">
-                <a16:creationId xmlns:a16="http://schemas.microsoft.com/office/drawing/2014/main" id="{1FF25C67-FEA7-452D-A4EF-580680EB1F92}"/>
+                <a16:creationId xmlns:a16="http://schemas.microsoft.com/office/drawing/2014/main" id="{67FD65D2-10A0-4788-937D-4FB2001EB387}"/>
               </a:ext>
             </a:extLst>
           </p:cNvPr>
@@ -5613,7 +5620,7 @@
           <p:cNvPr id="20" name="Text 18">
             <a:extLst xmlns:a="http://schemas.openxmlformats.org/drawingml/2006/main">
               <a:ext uri="{FF2B5EF4-FFF2-40B4-BE49-F238E27FC236}">
-                <a16:creationId xmlns:a16="http://schemas.microsoft.com/office/drawing/2014/main" id="{EE0A42C0-70BC-4DC6-99E7-21EFE3060EFA}"/>
+                <a16:creationId xmlns:a16="http://schemas.microsoft.com/office/drawing/2014/main" id="{BA93BC9F-5950-4482-BC8E-55CC56A739D4}"/>
               </a:ext>
             </a:extLst>
           </p:cNvPr>
@@ -5660,7 +5667,7 @@
           <p:cNvPr id="21" name="Text 19">
             <a:extLst xmlns:a="http://schemas.openxmlformats.org/drawingml/2006/main">
               <a:ext uri="{FF2B5EF4-FFF2-40B4-BE49-F238E27FC236}">
-                <a16:creationId xmlns:a16="http://schemas.microsoft.com/office/drawing/2014/main" id="{E3E045CE-1FAB-443F-A742-37EDB218727A}"/>
+                <a16:creationId xmlns:a16="http://schemas.microsoft.com/office/drawing/2014/main" id="{F558F476-6C67-44FB-A46A-22C6031DBACD}"/>
               </a:ext>
             </a:extLst>
           </p:cNvPr>
@@ -5723,7 +5730,7 @@
           <p:cNvPr id="23" name="Shape 21">
             <a:extLst xmlns:a="http://schemas.openxmlformats.org/drawingml/2006/main">
               <a:ext uri="{FF2B5EF4-FFF2-40B4-BE49-F238E27FC236}">
-                <a16:creationId xmlns:a16="http://schemas.microsoft.com/office/drawing/2014/main" id="{0D8EDC2E-1E8E-41BF-995F-BBE14DC15A5D}"/>
+                <a16:creationId xmlns:a16="http://schemas.microsoft.com/office/drawing/2014/main" id="{1A056CDA-B07A-4454-973F-283F00770F05}"/>
               </a:ext>
             </a:extLst>
           </p:cNvPr>
@@ -5758,7 +5765,7 @@
           <p:cNvPr id="24" name="Text 22">
             <a:extLst xmlns:a="http://schemas.openxmlformats.org/drawingml/2006/main">
               <a:ext uri="{FF2B5EF4-FFF2-40B4-BE49-F238E27FC236}">
-                <a16:creationId xmlns:a16="http://schemas.microsoft.com/office/drawing/2014/main" id="{33596BBE-6303-41A5-9F05-1F58E5D6AE94}"/>
+                <a16:creationId xmlns:a16="http://schemas.microsoft.com/office/drawing/2014/main" id="{3B6F5434-CD6C-4C7C-849E-46257311BF88}"/>
               </a:ext>
             </a:extLst>
           </p:cNvPr>
@@ -5805,7 +5812,7 @@
           <p:cNvPr id="25" name="Text 23">
             <a:extLst xmlns:a="http://schemas.openxmlformats.org/drawingml/2006/main">
               <a:ext uri="{FF2B5EF4-FFF2-40B4-BE49-F238E27FC236}">
-                <a16:creationId xmlns:a16="http://schemas.microsoft.com/office/drawing/2014/main" id="{6335FBD9-3E3E-40BD-849E-B3899CDC9711}"/>
+                <a16:creationId xmlns:a16="http://schemas.microsoft.com/office/drawing/2014/main" id="{6079A1CA-FC66-4CE1-8AF4-8BF164F559F0}"/>
               </a:ext>
             </a:extLst>
           </p:cNvPr>
@@ -5868,7 +5875,7 @@
           <p:cNvPr id="27" name="Shape 25">
             <a:extLst xmlns:a="http://schemas.openxmlformats.org/drawingml/2006/main">
               <a:ext uri="{FF2B5EF4-FFF2-40B4-BE49-F238E27FC236}">
-                <a16:creationId xmlns:a16="http://schemas.microsoft.com/office/drawing/2014/main" id="{F803B0CF-F2FC-4FE9-B7AD-D41F3AE1AFD0}"/>
+                <a16:creationId xmlns:a16="http://schemas.microsoft.com/office/drawing/2014/main" id="{48F113DA-9795-407A-B480-5535F7663F57}"/>
               </a:ext>
             </a:extLst>
           </p:cNvPr>
@@ -5903,7 +5910,7 @@
           <p:cNvPr id="28" name="Text 26">
             <a:extLst xmlns:a="http://schemas.openxmlformats.org/drawingml/2006/main">
               <a:ext uri="{FF2B5EF4-FFF2-40B4-BE49-F238E27FC236}">
-                <a16:creationId xmlns:a16="http://schemas.microsoft.com/office/drawing/2014/main" id="{F34C78FF-B116-4005-ABDB-233EB2AEF19A}"/>
+                <a16:creationId xmlns:a16="http://schemas.microsoft.com/office/drawing/2014/main" id="{FBB33A4C-AEB8-4B2E-AF09-6DE904608DEF}"/>
               </a:ext>
             </a:extLst>
           </p:cNvPr>
@@ -5950,7 +5957,7 @@
           <p:cNvPr id="29" name="Text 27">
             <a:extLst xmlns:a="http://schemas.openxmlformats.org/drawingml/2006/main">
               <a:ext uri="{FF2B5EF4-FFF2-40B4-BE49-F238E27FC236}">
-                <a16:creationId xmlns:a16="http://schemas.microsoft.com/office/drawing/2014/main" id="{D4365CAC-3DE4-43A5-A89D-3037E262A4ED}"/>
+                <a16:creationId xmlns:a16="http://schemas.microsoft.com/office/drawing/2014/main" id="{2462D1AF-5FE7-4B4F-88F2-C17E398F76E9}"/>
               </a:ext>
             </a:extLst>
           </p:cNvPr>
@@ -6013,7 +6020,7 @@
           <p:cNvPr id="30" name="Shape 28">
             <a:extLst xmlns:a="http://schemas.openxmlformats.org/drawingml/2006/main">
               <a:ext uri="{FF2B5EF4-FFF2-40B4-BE49-F238E27FC236}">
-                <a16:creationId xmlns:a16="http://schemas.microsoft.com/office/drawing/2014/main" id="{17C8A24C-0421-4920-A853-64082EA45A8B}"/>
+                <a16:creationId xmlns:a16="http://schemas.microsoft.com/office/drawing/2014/main" id="{698E8660-C155-4DF8-862C-91C471C70575}"/>
               </a:ext>
             </a:extLst>
           </p:cNvPr>
@@ -6048,7 +6055,7 @@
           <p:cNvPr id="31" name="Text 29">
             <a:extLst xmlns:a="http://schemas.openxmlformats.org/drawingml/2006/main">
               <a:ext uri="{FF2B5EF4-FFF2-40B4-BE49-F238E27FC236}">
-                <a16:creationId xmlns:a16="http://schemas.microsoft.com/office/drawing/2014/main" id="{73E9A21D-2AB2-4F01-ABA7-290CC2EE9358}"/>
+                <a16:creationId xmlns:a16="http://schemas.microsoft.com/office/drawing/2014/main" id="{060F082D-0A5F-4E34-B177-FDBE80D26A3D}"/>
               </a:ext>
             </a:extLst>
           </p:cNvPr>
@@ -6095,7 +6102,7 @@
           <p:cNvPr id="32" name="Shape 30">
             <a:extLst xmlns:a="http://schemas.openxmlformats.org/drawingml/2006/main">
               <a:ext uri="{FF2B5EF4-FFF2-40B4-BE49-F238E27FC236}">
-                <a16:creationId xmlns:a16="http://schemas.microsoft.com/office/drawing/2014/main" id="{1F252332-F9A9-49FD-AA12-27F22D0566AF}"/>
+                <a16:creationId xmlns:a16="http://schemas.microsoft.com/office/drawing/2014/main" id="{AD69CFD1-CC20-491C-9B77-917E4493174B}"/>
               </a:ext>
             </a:extLst>
           </p:cNvPr>
@@ -6128,7 +6135,7 @@
           <p:cNvPr id="33" name="Text 31">
             <a:extLst xmlns:a="http://schemas.openxmlformats.org/drawingml/2006/main">
               <a:ext uri="{FF2B5EF4-FFF2-40B4-BE49-F238E27FC236}">
-                <a16:creationId xmlns:a16="http://schemas.microsoft.com/office/drawing/2014/main" id="{374AB403-065D-4EB9-86FB-50064022C0C0}"/>
+                <a16:creationId xmlns:a16="http://schemas.microsoft.com/office/drawing/2014/main" id="{8A99F748-03F2-4EE4-B4C2-3535E18B8DBD}"/>
               </a:ext>
             </a:extLst>
           </p:cNvPr>
@@ -6175,7 +6182,7 @@
           <p:cNvPr id="34" name="Shape 32">
             <a:extLst xmlns:a="http://schemas.openxmlformats.org/drawingml/2006/main">
               <a:ext uri="{FF2B5EF4-FFF2-40B4-BE49-F238E27FC236}">
-                <a16:creationId xmlns:a16="http://schemas.microsoft.com/office/drawing/2014/main" id="{D6580246-3F6C-446A-9807-93F50A7C934A}"/>
+                <a16:creationId xmlns:a16="http://schemas.microsoft.com/office/drawing/2014/main" id="{CE286534-98FB-42CB-9481-CB64764DBA5A}"/>
               </a:ext>
             </a:extLst>
           </p:cNvPr>
@@ -6208,7 +6215,7 @@
           <p:cNvPr id="35" name="Text 33">
             <a:extLst xmlns:a="http://schemas.openxmlformats.org/drawingml/2006/main">
               <a:ext uri="{FF2B5EF4-FFF2-40B4-BE49-F238E27FC236}">
-                <a16:creationId xmlns:a16="http://schemas.microsoft.com/office/drawing/2014/main" id="{97CF5B0B-5D3C-4356-A68B-9BE222366F66}"/>
+                <a16:creationId xmlns:a16="http://schemas.microsoft.com/office/drawing/2014/main" id="{C99BCE2D-CBA9-43AE-9F2F-BA4633E6155E}"/>
               </a:ext>
             </a:extLst>
           </p:cNvPr>
@@ -6255,7 +6262,7 @@
           <p:cNvPr id="36" name="Shape 34">
             <a:extLst xmlns:a="http://schemas.openxmlformats.org/drawingml/2006/main">
               <a:ext uri="{FF2B5EF4-FFF2-40B4-BE49-F238E27FC236}">
-                <a16:creationId xmlns:a16="http://schemas.microsoft.com/office/drawing/2014/main" id="{0FE90188-B991-44B8-A9E3-CB6498F208CE}"/>
+                <a16:creationId xmlns:a16="http://schemas.microsoft.com/office/drawing/2014/main" id="{ADCCE1CE-1047-44DF-85B0-8047FD7D31E6}"/>
               </a:ext>
             </a:extLst>
           </p:cNvPr>
@@ -6288,7 +6295,7 @@
           <p:cNvPr id="37" name="Text 35">
             <a:extLst xmlns:a="http://schemas.openxmlformats.org/drawingml/2006/main">
               <a:ext uri="{FF2B5EF4-FFF2-40B4-BE49-F238E27FC236}">
-                <a16:creationId xmlns:a16="http://schemas.microsoft.com/office/drawing/2014/main" id="{2DDE6BFE-6281-4619-8818-1579CECC0E97}"/>
+                <a16:creationId xmlns:a16="http://schemas.microsoft.com/office/drawing/2014/main" id="{389144D2-E11A-4D03-8605-2B42404AD02D}"/>
               </a:ext>
             </a:extLst>
           </p:cNvPr>
@@ -6335,7 +6342,7 @@
           <p:cNvPr id="38" name="Shape 36">
             <a:extLst xmlns:a="http://schemas.openxmlformats.org/drawingml/2006/main">
               <a:ext uri="{FF2B5EF4-FFF2-40B4-BE49-F238E27FC236}">
-                <a16:creationId xmlns:a16="http://schemas.microsoft.com/office/drawing/2014/main" id="{1E578235-5A52-46A1-AC6B-FE46AC2931B5}"/>
+                <a16:creationId xmlns:a16="http://schemas.microsoft.com/office/drawing/2014/main" id="{A6D8B18E-95E3-4045-8ADE-38A091350CE0}"/>
               </a:ext>
             </a:extLst>
           </p:cNvPr>
@@ -6370,7 +6377,7 @@
           <p:cNvPr id="39" name="Text 37">
             <a:extLst xmlns:a="http://schemas.openxmlformats.org/drawingml/2006/main">
               <a:ext uri="{FF2B5EF4-FFF2-40B4-BE49-F238E27FC236}">
-                <a16:creationId xmlns:a16="http://schemas.microsoft.com/office/drawing/2014/main" id="{885B421B-D53E-4691-91EF-8983FD580630}"/>
+                <a16:creationId xmlns:a16="http://schemas.microsoft.com/office/drawing/2014/main" id="{D1E2240F-C24F-4947-9492-F8DA316B97E4}"/>
               </a:ext>
             </a:extLst>
           </p:cNvPr>
@@ -6417,7 +6424,7 @@
           <p:cNvPr id="40" name="Text 38">
             <a:extLst xmlns:a="http://schemas.openxmlformats.org/drawingml/2006/main">
               <a:ext uri="{FF2B5EF4-FFF2-40B4-BE49-F238E27FC236}">
-                <a16:creationId xmlns:a16="http://schemas.microsoft.com/office/drawing/2014/main" id="{51A82688-8206-4EB4-86D1-21E9526A1F65}"/>
+                <a16:creationId xmlns:a16="http://schemas.microsoft.com/office/drawing/2014/main" id="{1854F9D1-ED81-471A-9954-31C44C27200E}"/>
               </a:ext>
             </a:extLst>
           </p:cNvPr>
@@ -6512,7 +6519,7 @@
           <p:cNvPr id="41" name="Text 39">
             <a:extLst xmlns:a="http://schemas.openxmlformats.org/drawingml/2006/main">
               <a:ext uri="{FF2B5EF4-FFF2-40B4-BE49-F238E27FC236}">
-                <a16:creationId xmlns:a16="http://schemas.microsoft.com/office/drawing/2014/main" id="{525E4250-83E6-4C2B-AAB8-6993C52E63EC}"/>
+                <a16:creationId xmlns:a16="http://schemas.microsoft.com/office/drawing/2014/main" id="{A315F553-0EDF-48CA-A12F-FA55493E7121}"/>
               </a:ext>
             </a:extLst>
           </p:cNvPr>
@@ -6559,7 +6566,7 @@
           <p:cNvPr id="42" name="Text 40">
             <a:extLst xmlns:a="http://schemas.openxmlformats.org/drawingml/2006/main">
               <a:ext uri="{FF2B5EF4-FFF2-40B4-BE49-F238E27FC236}">
-                <a16:creationId xmlns:a16="http://schemas.microsoft.com/office/drawing/2014/main" id="{4A81D812-85D5-4A26-8E8D-F6C9207E6758}"/>
+                <a16:creationId xmlns:a16="http://schemas.microsoft.com/office/drawing/2014/main" id="{E89C3B55-F85B-48D6-A089-536C583B97A9}"/>
               </a:ext>
             </a:extLst>
           </p:cNvPr>
@@ -6606,7 +6613,7 @@
           <p:cNvPr id="43" name="Text 41">
             <a:extLst xmlns:a="http://schemas.openxmlformats.org/drawingml/2006/main">
               <a:ext uri="{FF2B5EF4-FFF2-40B4-BE49-F238E27FC236}">
-                <a16:creationId xmlns:a16="http://schemas.microsoft.com/office/drawing/2014/main" id="{58D0CD19-6381-4D0B-8534-E32C73359D6F}"/>
+                <a16:creationId xmlns:a16="http://schemas.microsoft.com/office/drawing/2014/main" id="{3AD84616-08DB-4C3F-8694-1AAE0EF06631}"/>
               </a:ext>
             </a:extLst>
           </p:cNvPr>
@@ -6651,7 +6658,7 @@
     </p:spTree>
     <p:extLst>
       <p:ext uri="{BB962C8B-B14F-4D97-AF65-F5344CB8AC3E}">
-        <p14:creationId xmlns:p14="http://schemas.microsoft.com/office/powerpoint/2010/main" val="1248689404"/>
+        <p14:creationId xmlns:p14="http://schemas.microsoft.com/office/powerpoint/2010/main" val="423068142"/>
       </p:ext>
     </p:extLst>
   </p:cSld>
@@ -6682,7 +6689,7 @@
           <p:cNvPr id="2" name="Text 0">
             <a:extLst xmlns:a="http://schemas.openxmlformats.org/drawingml/2006/main">
               <a:ext uri="{FF2B5EF4-FFF2-40B4-BE49-F238E27FC236}">
-                <a16:creationId xmlns:a16="http://schemas.microsoft.com/office/drawing/2014/main" id="{036595F7-2E09-447C-860C-8DAE1577A01B}"/>
+                <a16:creationId xmlns:a16="http://schemas.microsoft.com/office/drawing/2014/main" id="{75F9999A-7FCC-41C6-B9C1-243E04062DDA}"/>
               </a:ext>
             </a:extLst>
           </p:cNvPr>
@@ -6729,7 +6736,7 @@
           <p:cNvPr id="3" name="Text 1">
             <a:extLst xmlns:a="http://schemas.openxmlformats.org/drawingml/2006/main">
               <a:ext uri="{FF2B5EF4-FFF2-40B4-BE49-F238E27FC236}">
-                <a16:creationId xmlns:a16="http://schemas.microsoft.com/office/drawing/2014/main" id="{0BC01419-F203-481D-9101-A31743DEBB28}"/>
+                <a16:creationId xmlns:a16="http://schemas.microsoft.com/office/drawing/2014/main" id="{66242D65-3347-424E-A469-61629FA5705C}"/>
               </a:ext>
             </a:extLst>
           </p:cNvPr>
@@ -6776,7 +6783,7 @@
           <p:cNvPr id="4" name="Shape 2">
             <a:extLst xmlns:a="http://schemas.openxmlformats.org/drawingml/2006/main">
               <a:ext uri="{FF2B5EF4-FFF2-40B4-BE49-F238E27FC236}">
-                <a16:creationId xmlns:a16="http://schemas.microsoft.com/office/drawing/2014/main" id="{1BB43C63-BD46-4CB8-9A8B-67D73D8891D0}"/>
+                <a16:creationId xmlns:a16="http://schemas.microsoft.com/office/drawing/2014/main" id="{82DF873E-EC85-4AD8-A04D-290230FC7216}"/>
               </a:ext>
             </a:extLst>
           </p:cNvPr>
@@ -6811,7 +6818,7 @@
           <p:cNvPr id="5" name="Text 3">
             <a:extLst xmlns:a="http://schemas.openxmlformats.org/drawingml/2006/main">
               <a:ext uri="{FF2B5EF4-FFF2-40B4-BE49-F238E27FC236}">
-                <a16:creationId xmlns:a16="http://schemas.microsoft.com/office/drawing/2014/main" id="{C60996AD-2C59-4FA9-A9FF-EEB2A79EB8C7}"/>
+                <a16:creationId xmlns:a16="http://schemas.microsoft.com/office/drawing/2014/main" id="{BF3B8073-F891-4BDC-B0D1-B131D9879F71}"/>
               </a:ext>
             </a:extLst>
           </p:cNvPr>
@@ -6858,7 +6865,7 @@
           <p:cNvPr id="6" name="Shape 4">
             <a:extLst xmlns:a="http://schemas.openxmlformats.org/drawingml/2006/main">
               <a:ext uri="{FF2B5EF4-FFF2-40B4-BE49-F238E27FC236}">
-                <a16:creationId xmlns:a16="http://schemas.microsoft.com/office/drawing/2014/main" id="{15796ED6-DD10-4631-AEA2-BAB6125ED647}"/>
+                <a16:creationId xmlns:a16="http://schemas.microsoft.com/office/drawing/2014/main" id="{D89A8F59-7255-46E6-BAE5-00B8B4F94138}"/>
               </a:ext>
             </a:extLst>
           </p:cNvPr>
@@ -6889,7 +6896,7 @@
           <p:cNvPr id="7" name="Shape 5">
             <a:extLst xmlns:a="http://schemas.openxmlformats.org/drawingml/2006/main">
               <a:ext uri="{FF2B5EF4-FFF2-40B4-BE49-F238E27FC236}">
-                <a16:creationId xmlns:a16="http://schemas.microsoft.com/office/drawing/2014/main" id="{0A9E3C43-6972-4722-8810-E9CC52437214}"/>
+                <a16:creationId xmlns:a16="http://schemas.microsoft.com/office/drawing/2014/main" id="{6AD5E47D-CDBF-4C2F-B81F-F331E7F7A282}"/>
               </a:ext>
             </a:extLst>
           </p:cNvPr>
@@ -6924,7 +6931,7 @@
           <p:cNvPr id="8" name="Text 6">
             <a:extLst xmlns:a="http://schemas.openxmlformats.org/drawingml/2006/main">
               <a:ext uri="{FF2B5EF4-FFF2-40B4-BE49-F238E27FC236}">
-                <a16:creationId xmlns:a16="http://schemas.microsoft.com/office/drawing/2014/main" id="{020E87B6-A60F-4E08-A873-86B64A8BA547}"/>
+                <a16:creationId xmlns:a16="http://schemas.microsoft.com/office/drawing/2014/main" id="{9CC5C8CE-C01A-49CC-A5A4-203C1B194EC8}"/>
               </a:ext>
             </a:extLst>
           </p:cNvPr>
@@ -6971,7 +6978,7 @@
           <p:cNvPr id="9" name="Text 7">
             <a:extLst xmlns:a="http://schemas.openxmlformats.org/drawingml/2006/main">
               <a:ext uri="{FF2B5EF4-FFF2-40B4-BE49-F238E27FC236}">
-                <a16:creationId xmlns:a16="http://schemas.microsoft.com/office/drawing/2014/main" id="{CE19FA20-2743-4BB2-83CA-6CEF4961F559}"/>
+                <a16:creationId xmlns:a16="http://schemas.microsoft.com/office/drawing/2014/main" id="{8D373C3C-2435-4678-9339-5ACBE64A358E}"/>
               </a:ext>
             </a:extLst>
           </p:cNvPr>
@@ -7018,7 +7025,7 @@
           <p:cNvPr id="10" name="Shape 8">
             <a:extLst xmlns:a="http://schemas.openxmlformats.org/drawingml/2006/main">
               <a:ext uri="{FF2B5EF4-FFF2-40B4-BE49-F238E27FC236}">
-                <a16:creationId xmlns:a16="http://schemas.microsoft.com/office/drawing/2014/main" id="{65398AAF-7FA2-42D7-9FC7-FCDAA21B3F21}"/>
+                <a16:creationId xmlns:a16="http://schemas.microsoft.com/office/drawing/2014/main" id="{FA7785A1-D9F5-4932-B590-6223C1F3686D}"/>
               </a:ext>
             </a:extLst>
           </p:cNvPr>
@@ -7050,7 +7057,7 @@
           <p:cNvPr id="11" name="Text 9">
             <a:extLst xmlns:a="http://schemas.openxmlformats.org/drawingml/2006/main">
               <a:ext uri="{FF2B5EF4-FFF2-40B4-BE49-F238E27FC236}">
-                <a16:creationId xmlns:a16="http://schemas.microsoft.com/office/drawing/2014/main" id="{6EDEDDE0-D2A0-4B6D-A2BE-5F01B307EC6D}"/>
+                <a16:creationId xmlns:a16="http://schemas.microsoft.com/office/drawing/2014/main" id="{A0FFEC23-EC8F-4310-8127-0A5626D01145}"/>
               </a:ext>
             </a:extLst>
           </p:cNvPr>
@@ -7097,7 +7104,7 @@
           <p:cNvPr id="12" name="Text 10">
             <a:extLst xmlns:a="http://schemas.openxmlformats.org/drawingml/2006/main">
               <a:ext uri="{FF2B5EF4-FFF2-40B4-BE49-F238E27FC236}">
-                <a16:creationId xmlns:a16="http://schemas.microsoft.com/office/drawing/2014/main" id="{A1AE2056-E6A6-46FA-8DAE-471041D69F6E}"/>
+                <a16:creationId xmlns:a16="http://schemas.microsoft.com/office/drawing/2014/main" id="{3352B81A-8DAC-44E2-BB02-75837EFE9154}"/>
               </a:ext>
             </a:extLst>
           </p:cNvPr>
@@ -7144,7 +7151,7 @@
           <p:cNvPr id="13" name="Shape 11">
             <a:extLst xmlns:a="http://schemas.openxmlformats.org/drawingml/2006/main">
               <a:ext uri="{FF2B5EF4-FFF2-40B4-BE49-F238E27FC236}">
-                <a16:creationId xmlns:a16="http://schemas.microsoft.com/office/drawing/2014/main" id="{6D71B61B-8696-4622-9DF0-C4E90F346883}"/>
+                <a16:creationId xmlns:a16="http://schemas.microsoft.com/office/drawing/2014/main" id="{A06C23C5-0EBD-4C1A-88AA-BC2D846499F2}"/>
               </a:ext>
             </a:extLst>
           </p:cNvPr>
@@ -7176,7 +7183,7 @@
           <p:cNvPr id="14" name="Text 12">
             <a:extLst xmlns:a="http://schemas.openxmlformats.org/drawingml/2006/main">
               <a:ext uri="{FF2B5EF4-FFF2-40B4-BE49-F238E27FC236}">
-                <a16:creationId xmlns:a16="http://schemas.microsoft.com/office/drawing/2014/main" id="{D448A036-2D8A-49B4-A1A0-78E8E115A7E2}"/>
+                <a16:creationId xmlns:a16="http://schemas.microsoft.com/office/drawing/2014/main" id="{B0E72801-8534-4278-85BC-C73DFD4763E3}"/>
               </a:ext>
             </a:extLst>
           </p:cNvPr>
@@ -7223,7 +7230,7 @@
           <p:cNvPr id="15" name="Text 13">
             <a:extLst xmlns:a="http://schemas.openxmlformats.org/drawingml/2006/main">
               <a:ext uri="{FF2B5EF4-FFF2-40B4-BE49-F238E27FC236}">
-                <a16:creationId xmlns:a16="http://schemas.microsoft.com/office/drawing/2014/main" id="{0F112202-C79F-41CB-A5FF-08850EBFB61B}"/>
+                <a16:creationId xmlns:a16="http://schemas.microsoft.com/office/drawing/2014/main" id="{E13C2E25-DA17-4769-AA05-D0A90948F182}"/>
               </a:ext>
             </a:extLst>
           </p:cNvPr>
@@ -7270,7 +7277,7 @@
           <p:cNvPr id="16" name="Shape 14">
             <a:extLst xmlns:a="http://schemas.openxmlformats.org/drawingml/2006/main">
               <a:ext uri="{FF2B5EF4-FFF2-40B4-BE49-F238E27FC236}">
-                <a16:creationId xmlns:a16="http://schemas.microsoft.com/office/drawing/2014/main" id="{108A2BEF-000E-47E2-BCE7-F963875CFDD3}"/>
+                <a16:creationId xmlns:a16="http://schemas.microsoft.com/office/drawing/2014/main" id="{B9C7A807-D334-44BA-A22C-BD5236D37B04}"/>
               </a:ext>
             </a:extLst>
           </p:cNvPr>
@@ -7302,7 +7309,7 @@
           <p:cNvPr id="17" name="Text 15">
             <a:extLst xmlns:a="http://schemas.openxmlformats.org/drawingml/2006/main">
               <a:ext uri="{FF2B5EF4-FFF2-40B4-BE49-F238E27FC236}">
-                <a16:creationId xmlns:a16="http://schemas.microsoft.com/office/drawing/2014/main" id="{18C65D93-FBC8-44F5-B199-E376EC9520C3}"/>
+                <a16:creationId xmlns:a16="http://schemas.microsoft.com/office/drawing/2014/main" id="{40C07443-C562-4B94-9146-768CDEB2B07D}"/>
               </a:ext>
             </a:extLst>
           </p:cNvPr>
@@ -7349,7 +7356,7 @@
           <p:cNvPr id="18" name="Text 16">
             <a:extLst xmlns:a="http://schemas.openxmlformats.org/drawingml/2006/main">
               <a:ext uri="{FF2B5EF4-FFF2-40B4-BE49-F238E27FC236}">
-                <a16:creationId xmlns:a16="http://schemas.microsoft.com/office/drawing/2014/main" id="{1E0B20C0-18E8-4021-B3A1-D000D2DF86A2}"/>
+                <a16:creationId xmlns:a16="http://schemas.microsoft.com/office/drawing/2014/main" id="{BF10FB04-3144-407B-B95A-960EB23F0C5D}"/>
               </a:ext>
             </a:extLst>
           </p:cNvPr>
@@ -7396,7 +7403,7 @@
           <p:cNvPr id="19" name="Shape 17">
             <a:extLst xmlns:a="http://schemas.openxmlformats.org/drawingml/2006/main">
               <a:ext uri="{FF2B5EF4-FFF2-40B4-BE49-F238E27FC236}">
-                <a16:creationId xmlns:a16="http://schemas.microsoft.com/office/drawing/2014/main" id="{86E39ECB-9208-4CF8-AC08-DDF900F6E99A}"/>
+                <a16:creationId xmlns:a16="http://schemas.microsoft.com/office/drawing/2014/main" id="{F58466B1-C852-4926-A323-8C0B6B4788FF}"/>
               </a:ext>
             </a:extLst>
           </p:cNvPr>
@@ -7428,7 +7435,7 @@
           <p:cNvPr id="20" name="Text 18">
             <a:extLst xmlns:a="http://schemas.openxmlformats.org/drawingml/2006/main">
               <a:ext uri="{FF2B5EF4-FFF2-40B4-BE49-F238E27FC236}">
-                <a16:creationId xmlns:a16="http://schemas.microsoft.com/office/drawing/2014/main" id="{3BF4F6AE-BFE4-438B-849F-1D120E0CD707}"/>
+                <a16:creationId xmlns:a16="http://schemas.microsoft.com/office/drawing/2014/main" id="{39BF4744-02CF-4CBD-B4CC-B9F3AED9E37D}"/>
               </a:ext>
             </a:extLst>
           </p:cNvPr>
@@ -7475,7 +7482,7 @@
           <p:cNvPr id="21" name="Text 19">
             <a:extLst xmlns:a="http://schemas.openxmlformats.org/drawingml/2006/main">
               <a:ext uri="{FF2B5EF4-FFF2-40B4-BE49-F238E27FC236}">
-                <a16:creationId xmlns:a16="http://schemas.microsoft.com/office/drawing/2014/main" id="{B922490E-904D-4C86-8354-FC58C07491F7}"/>
+                <a16:creationId xmlns:a16="http://schemas.microsoft.com/office/drawing/2014/main" id="{1BED6097-E53F-45E6-89A9-657505BD9DCB}"/>
               </a:ext>
             </a:extLst>
           </p:cNvPr>
@@ -7522,7 +7529,7 @@
           <p:cNvPr id="22" name="Shape 20">
             <a:extLst xmlns:a="http://schemas.openxmlformats.org/drawingml/2006/main">
               <a:ext uri="{FF2B5EF4-FFF2-40B4-BE49-F238E27FC236}">
-                <a16:creationId xmlns:a16="http://schemas.microsoft.com/office/drawing/2014/main" id="{7D8D76C7-961E-49BA-90E4-16A9C146D4D7}"/>
+                <a16:creationId xmlns:a16="http://schemas.microsoft.com/office/drawing/2014/main" id="{EEB60CE8-6956-432B-8768-5A04DEFDA2F3}"/>
               </a:ext>
             </a:extLst>
           </p:cNvPr>
@@ -7554,7 +7561,7 @@
           <p:cNvPr id="23" name="Text 21">
             <a:extLst xmlns:a="http://schemas.openxmlformats.org/drawingml/2006/main">
               <a:ext uri="{FF2B5EF4-FFF2-40B4-BE49-F238E27FC236}">
-                <a16:creationId xmlns:a16="http://schemas.microsoft.com/office/drawing/2014/main" id="{FF755E00-B58D-4E72-88BA-2A57EC079A65}"/>
+                <a16:creationId xmlns:a16="http://schemas.microsoft.com/office/drawing/2014/main" id="{B7430D43-98F2-4B73-A35B-C4AF3B2A9D68}"/>
               </a:ext>
             </a:extLst>
           </p:cNvPr>
@@ -7601,7 +7608,7 @@
           <p:cNvPr id="24" name="Text 22">
             <a:extLst xmlns:a="http://schemas.openxmlformats.org/drawingml/2006/main">
               <a:ext uri="{FF2B5EF4-FFF2-40B4-BE49-F238E27FC236}">
-                <a16:creationId xmlns:a16="http://schemas.microsoft.com/office/drawing/2014/main" id="{A2AF46A8-B10C-488D-9546-AA7F5D3455BF}"/>
+                <a16:creationId xmlns:a16="http://schemas.microsoft.com/office/drawing/2014/main" id="{38C5E674-8CAD-489E-8AE8-3C918AA70F45}"/>
               </a:ext>
             </a:extLst>
           </p:cNvPr>
@@ -7648,7 +7655,7 @@
           <p:cNvPr id="25" name="Shape 23">
             <a:extLst xmlns:a="http://schemas.openxmlformats.org/drawingml/2006/main">
               <a:ext uri="{FF2B5EF4-FFF2-40B4-BE49-F238E27FC236}">
-                <a16:creationId xmlns:a16="http://schemas.microsoft.com/office/drawing/2014/main" id="{B77927CF-994B-4F7C-9858-553B2D1A7E8D}"/>
+                <a16:creationId xmlns:a16="http://schemas.microsoft.com/office/drawing/2014/main" id="{593436B4-73E4-40E2-8893-5DF74623812D}"/>
               </a:ext>
             </a:extLst>
           </p:cNvPr>
@@ -7680,7 +7687,7 @@
           <p:cNvPr id="26" name="Text 24">
             <a:extLst xmlns:a="http://schemas.openxmlformats.org/drawingml/2006/main">
               <a:ext uri="{FF2B5EF4-FFF2-40B4-BE49-F238E27FC236}">
-                <a16:creationId xmlns:a16="http://schemas.microsoft.com/office/drawing/2014/main" id="{8D402B50-FB5D-451C-A3D5-99CC6E6B6421}"/>
+                <a16:creationId xmlns:a16="http://schemas.microsoft.com/office/drawing/2014/main" id="{98551763-E42C-4E00-93DC-032971DE0370}"/>
               </a:ext>
             </a:extLst>
           </p:cNvPr>
@@ -7727,7 +7734,7 @@
           <p:cNvPr id="27" name="Shape 25">
             <a:extLst xmlns:a="http://schemas.openxmlformats.org/drawingml/2006/main">
               <a:ext uri="{FF2B5EF4-FFF2-40B4-BE49-F238E27FC236}">
-                <a16:creationId xmlns:a16="http://schemas.microsoft.com/office/drawing/2014/main" id="{7E19FC4C-7A71-4567-AF22-2509E5138402}"/>
+                <a16:creationId xmlns:a16="http://schemas.microsoft.com/office/drawing/2014/main" id="{D13A4C90-B8AF-4A2E-BC70-48D1E55F5F1B}"/>
               </a:ext>
             </a:extLst>
           </p:cNvPr>
@@ -7762,7 +7769,7 @@
           <p:cNvPr id="28" name="Text 26">
             <a:extLst xmlns:a="http://schemas.openxmlformats.org/drawingml/2006/main">
               <a:ext uri="{FF2B5EF4-FFF2-40B4-BE49-F238E27FC236}">
-                <a16:creationId xmlns:a16="http://schemas.microsoft.com/office/drawing/2014/main" id="{2827A290-4608-42EE-9663-510C9210237D}"/>
+                <a16:creationId xmlns:a16="http://schemas.microsoft.com/office/drawing/2014/main" id="{46676A10-0553-469A-9C52-24567A93DF3E}"/>
               </a:ext>
             </a:extLst>
           </p:cNvPr>
@@ -7809,7 +7816,7 @@
           <p:cNvPr id="29" name="Shape 27">
             <a:extLst xmlns:a="http://schemas.openxmlformats.org/drawingml/2006/main">
               <a:ext uri="{FF2B5EF4-FFF2-40B4-BE49-F238E27FC236}">
-                <a16:creationId xmlns:a16="http://schemas.microsoft.com/office/drawing/2014/main" id="{C997C1B5-B859-4503-B97F-B40029C5F314}"/>
+                <a16:creationId xmlns:a16="http://schemas.microsoft.com/office/drawing/2014/main" id="{9F7DB116-12C5-435C-8A02-73E162B8B105}"/>
               </a:ext>
             </a:extLst>
           </p:cNvPr>
@@ -7842,7 +7849,7 @@
           <p:cNvPr id="30" name="Text 28">
             <a:extLst xmlns:a="http://schemas.openxmlformats.org/drawingml/2006/main">
               <a:ext uri="{FF2B5EF4-FFF2-40B4-BE49-F238E27FC236}">
-                <a16:creationId xmlns:a16="http://schemas.microsoft.com/office/drawing/2014/main" id="{9B02CF7C-236E-42D9-8E57-A7A50B7E833E}"/>
+                <a16:creationId xmlns:a16="http://schemas.microsoft.com/office/drawing/2014/main" id="{A0F879A5-28EF-41AE-AF5D-4080E62717B3}"/>
               </a:ext>
             </a:extLst>
           </p:cNvPr>
@@ -7889,7 +7896,7 @@
           <p:cNvPr id="31" name="Shape 29">
             <a:extLst xmlns:a="http://schemas.openxmlformats.org/drawingml/2006/main">
               <a:ext uri="{FF2B5EF4-FFF2-40B4-BE49-F238E27FC236}">
-                <a16:creationId xmlns:a16="http://schemas.microsoft.com/office/drawing/2014/main" id="{DFB13E1A-9BD3-426E-9CC6-462B23CC2678}"/>
+                <a16:creationId xmlns:a16="http://schemas.microsoft.com/office/drawing/2014/main" id="{13F544A2-BDC9-4CBC-9EE6-E7E8C2A97427}"/>
               </a:ext>
             </a:extLst>
           </p:cNvPr>
@@ -7922,7 +7929,7 @@
           <p:cNvPr id="32" name="Text 30">
             <a:extLst xmlns:a="http://schemas.openxmlformats.org/drawingml/2006/main">
               <a:ext uri="{FF2B5EF4-FFF2-40B4-BE49-F238E27FC236}">
-                <a16:creationId xmlns:a16="http://schemas.microsoft.com/office/drawing/2014/main" id="{500CD9C5-411A-428B-9B9D-95945F8500E3}"/>
+                <a16:creationId xmlns:a16="http://schemas.microsoft.com/office/drawing/2014/main" id="{1CE6E8FE-85E1-419F-B1A4-F99E9E2D2DBC}"/>
               </a:ext>
             </a:extLst>
           </p:cNvPr>
@@ -7969,7 +7976,7 @@
           <p:cNvPr id="33" name="Shape 31">
             <a:extLst xmlns:a="http://schemas.openxmlformats.org/drawingml/2006/main">
               <a:ext uri="{FF2B5EF4-FFF2-40B4-BE49-F238E27FC236}">
-                <a16:creationId xmlns:a16="http://schemas.microsoft.com/office/drawing/2014/main" id="{D332FB84-A96C-48E5-A929-0C301BAE49DC}"/>
+                <a16:creationId xmlns:a16="http://schemas.microsoft.com/office/drawing/2014/main" id="{FA64B9CF-6CD2-43AD-BC48-A43BCC7DCE02}"/>
               </a:ext>
             </a:extLst>
           </p:cNvPr>
@@ -8002,7 +8009,7 @@
           <p:cNvPr id="34" name="Text 32">
             <a:extLst xmlns:a="http://schemas.openxmlformats.org/drawingml/2006/main">
               <a:ext uri="{FF2B5EF4-FFF2-40B4-BE49-F238E27FC236}">
-                <a16:creationId xmlns:a16="http://schemas.microsoft.com/office/drawing/2014/main" id="{588DD2B5-EAB9-42CC-9CC5-93ED64DA2188}"/>
+                <a16:creationId xmlns:a16="http://schemas.microsoft.com/office/drawing/2014/main" id="{DF14CD99-1E96-4958-B1FE-1FC390FDDF0D}"/>
               </a:ext>
             </a:extLst>
           </p:cNvPr>
@@ -8049,7 +8056,7 @@
           <p:cNvPr id="35" name="Shape 33">
             <a:extLst xmlns:a="http://schemas.openxmlformats.org/drawingml/2006/main">
               <a:ext uri="{FF2B5EF4-FFF2-40B4-BE49-F238E27FC236}">
-                <a16:creationId xmlns:a16="http://schemas.microsoft.com/office/drawing/2014/main" id="{8D426218-84D7-4698-B929-6758D3E58F09}"/>
+                <a16:creationId xmlns:a16="http://schemas.microsoft.com/office/drawing/2014/main" id="{E869ED17-B03A-4EBD-B167-BA858214AB94}"/>
               </a:ext>
             </a:extLst>
           </p:cNvPr>
@@ -8082,7 +8089,7 @@
           <p:cNvPr id="36" name="Text 34">
             <a:extLst xmlns:a="http://schemas.openxmlformats.org/drawingml/2006/main">
               <a:ext uri="{FF2B5EF4-FFF2-40B4-BE49-F238E27FC236}">
-                <a16:creationId xmlns:a16="http://schemas.microsoft.com/office/drawing/2014/main" id="{3FAD4C1A-2811-466F-AC12-C0650D13994C}"/>
+                <a16:creationId xmlns:a16="http://schemas.microsoft.com/office/drawing/2014/main" id="{A57514F2-E353-428D-BD3D-A478FF90B336}"/>
               </a:ext>
             </a:extLst>
           </p:cNvPr>
@@ -8129,7 +8136,7 @@
           <p:cNvPr id="37" name="Shape 35">
             <a:extLst xmlns:a="http://schemas.openxmlformats.org/drawingml/2006/main">
               <a:ext uri="{FF2B5EF4-FFF2-40B4-BE49-F238E27FC236}">
-                <a16:creationId xmlns:a16="http://schemas.microsoft.com/office/drawing/2014/main" id="{FEB9151C-030C-4481-B14D-6ECD395C527D}"/>
+                <a16:creationId xmlns:a16="http://schemas.microsoft.com/office/drawing/2014/main" id="{FFB0A800-FC52-46F8-83BC-877C3252EB8A}"/>
               </a:ext>
             </a:extLst>
           </p:cNvPr>
@@ -8162,7 +8169,7 @@
           <p:cNvPr id="38" name="Text 36">
             <a:extLst xmlns:a="http://schemas.openxmlformats.org/drawingml/2006/main">
               <a:ext uri="{FF2B5EF4-FFF2-40B4-BE49-F238E27FC236}">
-                <a16:creationId xmlns:a16="http://schemas.microsoft.com/office/drawing/2014/main" id="{43DBB983-DE4C-463B-8057-B5C5593FB04D}"/>
+                <a16:creationId xmlns:a16="http://schemas.microsoft.com/office/drawing/2014/main" id="{45147916-910C-4977-A55E-A6E300D8B24D}"/>
               </a:ext>
             </a:extLst>
           </p:cNvPr>
@@ -8209,7 +8216,7 @@
           <p:cNvPr id="39" name="Shape 37">
             <a:extLst xmlns:a="http://schemas.openxmlformats.org/drawingml/2006/main">
               <a:ext uri="{FF2B5EF4-FFF2-40B4-BE49-F238E27FC236}">
-                <a16:creationId xmlns:a16="http://schemas.microsoft.com/office/drawing/2014/main" id="{C203A81A-7491-440F-B53C-6634C221928E}"/>
+                <a16:creationId xmlns:a16="http://schemas.microsoft.com/office/drawing/2014/main" id="{D7CD96E0-16C4-4B56-B02F-4BB4168AF65E}"/>
               </a:ext>
             </a:extLst>
           </p:cNvPr>
@@ -8242,7 +8249,7 @@
           <p:cNvPr id="40" name="Text 38">
             <a:extLst xmlns:a="http://schemas.openxmlformats.org/drawingml/2006/main">
               <a:ext uri="{FF2B5EF4-FFF2-40B4-BE49-F238E27FC236}">
-                <a16:creationId xmlns:a16="http://schemas.microsoft.com/office/drawing/2014/main" id="{3A1D9C3B-8A98-4554-8E1B-2B078762F9FA}"/>
+                <a16:creationId xmlns:a16="http://schemas.microsoft.com/office/drawing/2014/main" id="{E4405770-88EA-4D7F-A3FD-119191AD1B9B}"/>
               </a:ext>
             </a:extLst>
           </p:cNvPr>
@@ -8289,7 +8296,7 @@
           <p:cNvPr id="41" name="Shape 39">
             <a:extLst xmlns:a="http://schemas.openxmlformats.org/drawingml/2006/main">
               <a:ext uri="{FF2B5EF4-FFF2-40B4-BE49-F238E27FC236}">
-                <a16:creationId xmlns:a16="http://schemas.microsoft.com/office/drawing/2014/main" id="{8BCBE16E-AA85-49FD-9B2E-A3657CF9984D}"/>
+                <a16:creationId xmlns:a16="http://schemas.microsoft.com/office/drawing/2014/main" id="{6551CEF4-668C-48F3-9866-B29AE0A10506}"/>
               </a:ext>
             </a:extLst>
           </p:cNvPr>
@@ -8324,7 +8331,7 @@
           <p:cNvPr id="42" name="Text 40">
             <a:extLst xmlns:a="http://schemas.openxmlformats.org/drawingml/2006/main">
               <a:ext uri="{FF2B5EF4-FFF2-40B4-BE49-F238E27FC236}">
-                <a16:creationId xmlns:a16="http://schemas.microsoft.com/office/drawing/2014/main" id="{C374D4AA-5622-4C57-A608-6AE8520CB4BA}"/>
+                <a16:creationId xmlns:a16="http://schemas.microsoft.com/office/drawing/2014/main" id="{A7CAAFD3-266F-4BB0-951A-6519DBA0BEEA}"/>
               </a:ext>
             </a:extLst>
           </p:cNvPr>
@@ -8371,7 +8378,7 @@
           <p:cNvPr id="43" name="Shape 41">
             <a:extLst xmlns:a="http://schemas.openxmlformats.org/drawingml/2006/main">
               <a:ext uri="{FF2B5EF4-FFF2-40B4-BE49-F238E27FC236}">
-                <a16:creationId xmlns:a16="http://schemas.microsoft.com/office/drawing/2014/main" id="{B6AC69D4-E7EC-404C-BFB6-8902F362121A}"/>
+                <a16:creationId xmlns:a16="http://schemas.microsoft.com/office/drawing/2014/main" id="{24EAB360-986D-4D99-A7F4-C36B1D920866}"/>
               </a:ext>
             </a:extLst>
           </p:cNvPr>
@@ -8406,7 +8413,7 @@
           <p:cNvPr id="44" name="Text 42">
             <a:extLst xmlns:a="http://schemas.openxmlformats.org/drawingml/2006/main">
               <a:ext uri="{FF2B5EF4-FFF2-40B4-BE49-F238E27FC236}">
-                <a16:creationId xmlns:a16="http://schemas.microsoft.com/office/drawing/2014/main" id="{AB22707C-A9C9-457C-9176-90005BECBDAE}"/>
+                <a16:creationId xmlns:a16="http://schemas.microsoft.com/office/drawing/2014/main" id="{A13CCAF1-7267-403B-B766-D7FA7CC0C62D}"/>
               </a:ext>
             </a:extLst>
           </p:cNvPr>
@@ -8453,7 +8460,7 @@
           <p:cNvPr id="45" name="Shape 43">
             <a:extLst xmlns:a="http://schemas.openxmlformats.org/drawingml/2006/main">
               <a:ext uri="{FF2B5EF4-FFF2-40B4-BE49-F238E27FC236}">
-                <a16:creationId xmlns:a16="http://schemas.microsoft.com/office/drawing/2014/main" id="{4D3D4E8E-B5D2-4447-AA16-5F61F8A2C0C6}"/>
+                <a16:creationId xmlns:a16="http://schemas.microsoft.com/office/drawing/2014/main" id="{257C4771-1522-4D8C-A190-2CAB46B12606}"/>
               </a:ext>
             </a:extLst>
           </p:cNvPr>
@@ -8488,7 +8495,7 @@
           <p:cNvPr id="46" name="Text 44">
             <a:extLst xmlns:a="http://schemas.openxmlformats.org/drawingml/2006/main">
               <a:ext uri="{FF2B5EF4-FFF2-40B4-BE49-F238E27FC236}">
-                <a16:creationId xmlns:a16="http://schemas.microsoft.com/office/drawing/2014/main" id="{CC286DB0-AEF5-45C0-AE16-B684488156A4}"/>
+                <a16:creationId xmlns:a16="http://schemas.microsoft.com/office/drawing/2014/main" id="{BC6D9B51-4D52-43F9-B462-F0DC818CCF70}"/>
               </a:ext>
             </a:extLst>
           </p:cNvPr>
@@ -8535,7 +8542,7 @@
           <p:cNvPr id="47" name="Text 45">
             <a:extLst xmlns:a="http://schemas.openxmlformats.org/drawingml/2006/main">
               <a:ext uri="{FF2B5EF4-FFF2-40B4-BE49-F238E27FC236}">
-                <a16:creationId xmlns:a16="http://schemas.microsoft.com/office/drawing/2014/main" id="{1D596C21-F824-4168-9D66-2735530532E5}"/>
+                <a16:creationId xmlns:a16="http://schemas.microsoft.com/office/drawing/2014/main" id="{8BDCD775-94BE-4781-A2D3-16D259BA9029}"/>
               </a:ext>
             </a:extLst>
           </p:cNvPr>
@@ -8582,7 +8589,7 @@
           <p:cNvPr id="48" name="Text 46">
             <a:extLst xmlns:a="http://schemas.openxmlformats.org/drawingml/2006/main">
               <a:ext uri="{FF2B5EF4-FFF2-40B4-BE49-F238E27FC236}">
-                <a16:creationId xmlns:a16="http://schemas.microsoft.com/office/drawing/2014/main" id="{7E24EE53-DEDC-4B29-AD50-F562427B4646}"/>
+                <a16:creationId xmlns:a16="http://schemas.microsoft.com/office/drawing/2014/main" id="{1CF4EF38-5482-4897-B929-C6A8068A9DD9}"/>
               </a:ext>
             </a:extLst>
           </p:cNvPr>
@@ -8627,7 +8634,7 @@
     </p:spTree>
     <p:extLst>
       <p:ext uri="{BB962C8B-B14F-4D97-AF65-F5344CB8AC3E}">
-        <p14:creationId xmlns:p14="http://schemas.microsoft.com/office/powerpoint/2010/main" val="475272914"/>
+        <p14:creationId xmlns:p14="http://schemas.microsoft.com/office/powerpoint/2010/main" val="1063709225"/>
       </p:ext>
     </p:extLst>
   </p:cSld>
@@ -8658,7 +8665,7 @@
           <p:cNvPr id="2" name="Text 0">
             <a:extLst xmlns:a="http://schemas.openxmlformats.org/drawingml/2006/main">
               <a:ext uri="{FF2B5EF4-FFF2-40B4-BE49-F238E27FC236}">
-                <a16:creationId xmlns:a16="http://schemas.microsoft.com/office/drawing/2014/main" id="{78E0D5EC-F64F-4283-B78C-23FFBB1835F5}"/>
+                <a16:creationId xmlns:a16="http://schemas.microsoft.com/office/drawing/2014/main" id="{43A37539-3968-49BB-9111-9ABA0265D3D6}"/>
               </a:ext>
             </a:extLst>
           </p:cNvPr>
@@ -8705,7 +8712,7 @@
           <p:cNvPr id="3" name="Text 1">
             <a:extLst xmlns:a="http://schemas.openxmlformats.org/drawingml/2006/main">
               <a:ext uri="{FF2B5EF4-FFF2-40B4-BE49-F238E27FC236}">
-                <a16:creationId xmlns:a16="http://schemas.microsoft.com/office/drawing/2014/main" id="{E37AD1C4-2ECB-4F6C-8F76-24B63601DAC6}"/>
+                <a16:creationId xmlns:a16="http://schemas.microsoft.com/office/drawing/2014/main" id="{1F2120B7-15C3-4AB9-8B70-264AC3E29D57}"/>
               </a:ext>
             </a:extLst>
           </p:cNvPr>
@@ -8752,7 +8759,7 @@
           <p:cNvPr id="4" name="Shape 2">
             <a:extLst xmlns:a="http://schemas.openxmlformats.org/drawingml/2006/main">
               <a:ext uri="{FF2B5EF4-FFF2-40B4-BE49-F238E27FC236}">
-                <a16:creationId xmlns:a16="http://schemas.microsoft.com/office/drawing/2014/main" id="{FC373B7B-0ECA-4D7C-8E47-D2F800B18224}"/>
+                <a16:creationId xmlns:a16="http://schemas.microsoft.com/office/drawing/2014/main" id="{07D1ACC5-8F8F-4E10-840F-65E7374BAE3F}"/>
               </a:ext>
             </a:extLst>
           </p:cNvPr>
@@ -8787,7 +8794,7 @@
           <p:cNvPr id="5" name="Text 3">
             <a:extLst xmlns:a="http://schemas.openxmlformats.org/drawingml/2006/main">
               <a:ext uri="{FF2B5EF4-FFF2-40B4-BE49-F238E27FC236}">
-                <a16:creationId xmlns:a16="http://schemas.microsoft.com/office/drawing/2014/main" id="{C4783DC4-E6B1-4EF6-BAE9-797F45A5570B}"/>
+                <a16:creationId xmlns:a16="http://schemas.microsoft.com/office/drawing/2014/main" id="{1D9B7C32-577B-48BB-9642-4BFBC9915E6A}"/>
               </a:ext>
             </a:extLst>
           </p:cNvPr>
@@ -8834,7 +8841,7 @@
           <p:cNvPr id="6" name="Shape 4">
             <a:extLst xmlns:a="http://schemas.openxmlformats.org/drawingml/2006/main">
               <a:ext uri="{FF2B5EF4-FFF2-40B4-BE49-F238E27FC236}">
-                <a16:creationId xmlns:a16="http://schemas.microsoft.com/office/drawing/2014/main" id="{0A289F4B-733B-4A8F-B141-1FD6BCC96F25}"/>
+                <a16:creationId xmlns:a16="http://schemas.microsoft.com/office/drawing/2014/main" id="{54D5E22B-B54A-4740-9159-45D8C29A78C5}"/>
               </a:ext>
             </a:extLst>
           </p:cNvPr>
@@ -8865,7 +8872,7 @@
           <p:cNvPr id="7" name="Shape 5">
             <a:extLst xmlns:a="http://schemas.openxmlformats.org/drawingml/2006/main">
               <a:ext uri="{FF2B5EF4-FFF2-40B4-BE49-F238E27FC236}">
-                <a16:creationId xmlns:a16="http://schemas.microsoft.com/office/drawing/2014/main" id="{E9A9B220-D629-4B19-8FF5-C7917CB1F54C}"/>
+                <a16:creationId xmlns:a16="http://schemas.microsoft.com/office/drawing/2014/main" id="{8988F5DE-83CC-4F4F-BCA0-6936FFB5E327}"/>
               </a:ext>
             </a:extLst>
           </p:cNvPr>
@@ -8900,7 +8907,7 @@
           <p:cNvPr id="8" name="Shape 6">
             <a:extLst xmlns:a="http://schemas.openxmlformats.org/drawingml/2006/main">
               <a:ext uri="{FF2B5EF4-FFF2-40B4-BE49-F238E27FC236}">
-                <a16:creationId xmlns:a16="http://schemas.microsoft.com/office/drawing/2014/main" id="{42025334-E3A9-48E3-BF7E-7A9E26566C66}"/>
+                <a16:creationId xmlns:a16="http://schemas.microsoft.com/office/drawing/2014/main" id="{6ECCCDF6-89A4-4152-B36D-F199F7B2E1EB}"/>
               </a:ext>
             </a:extLst>
           </p:cNvPr>
@@ -8935,7 +8942,7 @@
           <p:cNvPr id="9" name="Text 7">
             <a:extLst xmlns:a="http://schemas.openxmlformats.org/drawingml/2006/main">
               <a:ext uri="{FF2B5EF4-FFF2-40B4-BE49-F238E27FC236}">
-                <a16:creationId xmlns:a16="http://schemas.microsoft.com/office/drawing/2014/main" id="{1463CDF5-9C1D-4E21-AE38-4D15943AC34A}"/>
+                <a16:creationId xmlns:a16="http://schemas.microsoft.com/office/drawing/2014/main" id="{1873307B-AD38-4CA8-8BBE-CAA1635E782B}"/>
               </a:ext>
             </a:extLst>
           </p:cNvPr>
@@ -8982,7 +8989,7 @@
           <p:cNvPr id="10" name="Text 8">
             <a:extLst xmlns:a="http://schemas.openxmlformats.org/drawingml/2006/main">
               <a:ext uri="{FF2B5EF4-FFF2-40B4-BE49-F238E27FC236}">
-                <a16:creationId xmlns:a16="http://schemas.microsoft.com/office/drawing/2014/main" id="{C60E79BC-FB92-44D5-B466-2878ABFA0D54}"/>
+                <a16:creationId xmlns:a16="http://schemas.microsoft.com/office/drawing/2014/main" id="{7408073A-0065-4D9D-9411-675A619C7356}"/>
               </a:ext>
             </a:extLst>
           </p:cNvPr>
@@ -9029,7 +9036,7 @@
           <p:cNvPr id="11" name="Shape 9">
             <a:extLst xmlns:a="http://schemas.openxmlformats.org/drawingml/2006/main">
               <a:ext uri="{FF2B5EF4-FFF2-40B4-BE49-F238E27FC236}">
-                <a16:creationId xmlns:a16="http://schemas.microsoft.com/office/drawing/2014/main" id="{B6B2FB3B-5061-40AC-9F63-A0B047CC32D0}"/>
+                <a16:creationId xmlns:a16="http://schemas.microsoft.com/office/drawing/2014/main" id="{EACB37F0-FD48-42FC-BD0F-3A776849D24B}"/>
               </a:ext>
             </a:extLst>
           </p:cNvPr>
@@ -9064,7 +9071,7 @@
           <p:cNvPr id="12" name="Text 10">
             <a:extLst xmlns:a="http://schemas.openxmlformats.org/drawingml/2006/main">
               <a:ext uri="{FF2B5EF4-FFF2-40B4-BE49-F238E27FC236}">
-                <a16:creationId xmlns:a16="http://schemas.microsoft.com/office/drawing/2014/main" id="{3FCB2DD4-0F60-4AC4-AADA-FE365E855B98}"/>
+                <a16:creationId xmlns:a16="http://schemas.microsoft.com/office/drawing/2014/main" id="{85703D0B-6A5F-4072-9F3B-33B9A35F2745}"/>
               </a:ext>
             </a:extLst>
           </p:cNvPr>
@@ -9111,7 +9118,7 @@
           <p:cNvPr id="13" name="Text 11">
             <a:extLst xmlns:a="http://schemas.openxmlformats.org/drawingml/2006/main">
               <a:ext uri="{FF2B5EF4-FFF2-40B4-BE49-F238E27FC236}">
-                <a16:creationId xmlns:a16="http://schemas.microsoft.com/office/drawing/2014/main" id="{142E0B4B-F59C-4DBD-8A17-CD3153FB1080}"/>
+                <a16:creationId xmlns:a16="http://schemas.microsoft.com/office/drawing/2014/main" id="{7EEA9614-F0FD-498C-851A-13CA966FB1B2}"/>
               </a:ext>
             </a:extLst>
           </p:cNvPr>
@@ -9158,7 +9165,7 @@
           <p:cNvPr id="14" name="Shape 12">
             <a:extLst xmlns:a="http://schemas.openxmlformats.org/drawingml/2006/main">
               <a:ext uri="{FF2B5EF4-FFF2-40B4-BE49-F238E27FC236}">
-                <a16:creationId xmlns:a16="http://schemas.microsoft.com/office/drawing/2014/main" id="{38E9EE4F-35B0-45FE-A0AD-EF7019338E28}"/>
+                <a16:creationId xmlns:a16="http://schemas.microsoft.com/office/drawing/2014/main" id="{026FB301-8E39-4874-8671-2FE4D6A38F8F}"/>
               </a:ext>
             </a:extLst>
           </p:cNvPr>
@@ -9193,7 +9200,7 @@
           <p:cNvPr id="15" name="Text 13">
             <a:extLst xmlns:a="http://schemas.openxmlformats.org/drawingml/2006/main">
               <a:ext uri="{FF2B5EF4-FFF2-40B4-BE49-F238E27FC236}">
-                <a16:creationId xmlns:a16="http://schemas.microsoft.com/office/drawing/2014/main" id="{D853217D-D9B1-4741-A359-144F0E9CDC73}"/>
+                <a16:creationId xmlns:a16="http://schemas.microsoft.com/office/drawing/2014/main" id="{01D317BC-B010-416E-89DE-C6D9D5906029}"/>
               </a:ext>
             </a:extLst>
           </p:cNvPr>
@@ -9240,7 +9247,7 @@
           <p:cNvPr id="16" name="Text 14">
             <a:extLst xmlns:a="http://schemas.openxmlformats.org/drawingml/2006/main">
               <a:ext uri="{FF2B5EF4-FFF2-40B4-BE49-F238E27FC236}">
-                <a16:creationId xmlns:a16="http://schemas.microsoft.com/office/drawing/2014/main" id="{5F3347BA-B35C-4057-9E52-B5AEF48AE778}"/>
+                <a16:creationId xmlns:a16="http://schemas.microsoft.com/office/drawing/2014/main" id="{A9D2BF24-9CF0-4392-A66F-2EB28D7A134A}"/>
               </a:ext>
             </a:extLst>
           </p:cNvPr>
@@ -9287,7 +9294,7 @@
           <p:cNvPr id="17" name="Shape 15">
             <a:extLst xmlns:a="http://schemas.openxmlformats.org/drawingml/2006/main">
               <a:ext uri="{FF2B5EF4-FFF2-40B4-BE49-F238E27FC236}">
-                <a16:creationId xmlns:a16="http://schemas.microsoft.com/office/drawing/2014/main" id="{504184B2-8160-423E-B1E5-9CE88605695B}"/>
+                <a16:creationId xmlns:a16="http://schemas.microsoft.com/office/drawing/2014/main" id="{8D0B49E5-D5C6-425D-A7C4-077FEFB152BC}"/>
               </a:ext>
             </a:extLst>
           </p:cNvPr>
@@ -9322,7 +9329,7 @@
           <p:cNvPr id="18" name="Text 16">
             <a:extLst xmlns:a="http://schemas.openxmlformats.org/drawingml/2006/main">
               <a:ext uri="{FF2B5EF4-FFF2-40B4-BE49-F238E27FC236}">
-                <a16:creationId xmlns:a16="http://schemas.microsoft.com/office/drawing/2014/main" id="{1754F4EA-4612-40EA-8F7E-8119D4C5D21F}"/>
+                <a16:creationId xmlns:a16="http://schemas.microsoft.com/office/drawing/2014/main" id="{0EDE1FCC-902F-4BE2-ACE5-E35681B3956B}"/>
               </a:ext>
             </a:extLst>
           </p:cNvPr>
@@ -9369,7 +9376,7 @@
           <p:cNvPr id="19" name="Text 17">
             <a:extLst xmlns:a="http://schemas.openxmlformats.org/drawingml/2006/main">
               <a:ext uri="{FF2B5EF4-FFF2-40B4-BE49-F238E27FC236}">
-                <a16:creationId xmlns:a16="http://schemas.microsoft.com/office/drawing/2014/main" id="{124B977D-57A0-46C6-8244-1F3D1C5C5EF5}"/>
+                <a16:creationId xmlns:a16="http://schemas.microsoft.com/office/drawing/2014/main" id="{86E587F2-6595-491C-B66F-6A6253E30095}"/>
               </a:ext>
             </a:extLst>
           </p:cNvPr>
@@ -9416,7 +9423,7 @@
           <p:cNvPr id="20" name="Shape 18">
             <a:extLst xmlns:a="http://schemas.openxmlformats.org/drawingml/2006/main">
               <a:ext uri="{FF2B5EF4-FFF2-40B4-BE49-F238E27FC236}">
-                <a16:creationId xmlns:a16="http://schemas.microsoft.com/office/drawing/2014/main" id="{C1F8BE5E-AA36-444B-9D98-E289B6355617}"/>
+                <a16:creationId xmlns:a16="http://schemas.microsoft.com/office/drawing/2014/main" id="{7685A0F3-D10C-413A-B634-B0C2F507F669}"/>
               </a:ext>
             </a:extLst>
           </p:cNvPr>
@@ -9448,7 +9455,7 @@
           <p:cNvPr id="21" name="Shape 19">
             <a:extLst xmlns:a="http://schemas.openxmlformats.org/drawingml/2006/main">
               <a:ext uri="{FF2B5EF4-FFF2-40B4-BE49-F238E27FC236}">
-                <a16:creationId xmlns:a16="http://schemas.microsoft.com/office/drawing/2014/main" id="{24877E7D-726C-46A9-ADBE-EAE1663C5838}"/>
+                <a16:creationId xmlns:a16="http://schemas.microsoft.com/office/drawing/2014/main" id="{AB15C7CC-03BB-49D1-83A5-62DA62E786E8}"/>
               </a:ext>
             </a:extLst>
           </p:cNvPr>
@@ -9480,7 +9487,7 @@
           <p:cNvPr id="22" name="Shape 20">
             <a:extLst xmlns:a="http://schemas.openxmlformats.org/drawingml/2006/main">
               <a:ext uri="{FF2B5EF4-FFF2-40B4-BE49-F238E27FC236}">
-                <a16:creationId xmlns:a16="http://schemas.microsoft.com/office/drawing/2014/main" id="{EA53FE95-1389-4381-B55B-882EE6172441}"/>
+                <a16:creationId xmlns:a16="http://schemas.microsoft.com/office/drawing/2014/main" id="{AFB3604F-47B2-4811-A67E-21A49B487402}"/>
               </a:ext>
             </a:extLst>
           </p:cNvPr>
@@ -9512,7 +9519,7 @@
           <p:cNvPr id="23" name="Shape 21">
             <a:extLst xmlns:a="http://schemas.openxmlformats.org/drawingml/2006/main">
               <a:ext uri="{FF2B5EF4-FFF2-40B4-BE49-F238E27FC236}">
-                <a16:creationId xmlns:a16="http://schemas.microsoft.com/office/drawing/2014/main" id="{476E8425-A379-4C97-8A80-3045437D75EB}"/>
+                <a16:creationId xmlns:a16="http://schemas.microsoft.com/office/drawing/2014/main" id="{CFB5EDF2-A5E7-46F4-BCD2-B2902EFDFFA1}"/>
               </a:ext>
             </a:extLst>
           </p:cNvPr>
@@ -9544,7 +9551,7 @@
           <p:cNvPr id="24" name="Shape 22">
             <a:extLst xmlns:a="http://schemas.openxmlformats.org/drawingml/2006/main">
               <a:ext uri="{FF2B5EF4-FFF2-40B4-BE49-F238E27FC236}">
-                <a16:creationId xmlns:a16="http://schemas.microsoft.com/office/drawing/2014/main" id="{F2E8C6B0-8329-45B0-871D-9F142EDD87BE}"/>
+                <a16:creationId xmlns:a16="http://schemas.microsoft.com/office/drawing/2014/main" id="{0D616701-BCDA-4972-91C8-E64C1F112D03}"/>
               </a:ext>
             </a:extLst>
           </p:cNvPr>
@@ -9579,7 +9586,7 @@
           <p:cNvPr id="25" name="Text 23">
             <a:extLst xmlns:a="http://schemas.openxmlformats.org/drawingml/2006/main">
               <a:ext uri="{FF2B5EF4-FFF2-40B4-BE49-F238E27FC236}">
-                <a16:creationId xmlns:a16="http://schemas.microsoft.com/office/drawing/2014/main" id="{A819DC96-EFD8-4F36-9EB6-E0AAA20A9EAC}"/>
+                <a16:creationId xmlns:a16="http://schemas.microsoft.com/office/drawing/2014/main" id="{09E9A6CA-9702-44AA-A189-24A0AF984CF7}"/>
               </a:ext>
             </a:extLst>
           </p:cNvPr>
@@ -9626,7 +9633,7 @@
           <p:cNvPr id="26" name="Shape 24">
             <a:extLst xmlns:a="http://schemas.openxmlformats.org/drawingml/2006/main">
               <a:ext uri="{FF2B5EF4-FFF2-40B4-BE49-F238E27FC236}">
-                <a16:creationId xmlns:a16="http://schemas.microsoft.com/office/drawing/2014/main" id="{9EA5F593-0094-4B1F-B883-9A15A9885B75}"/>
+                <a16:creationId xmlns:a16="http://schemas.microsoft.com/office/drawing/2014/main" id="{4A9794AD-6153-4730-AF8D-AD34B80DABC4}"/>
               </a:ext>
             </a:extLst>
           </p:cNvPr>
@@ -9661,7 +9668,7 @@
           <p:cNvPr id="27" name="Text 25">
             <a:extLst xmlns:a="http://schemas.openxmlformats.org/drawingml/2006/main">
               <a:ext uri="{FF2B5EF4-FFF2-40B4-BE49-F238E27FC236}">
-                <a16:creationId xmlns:a16="http://schemas.microsoft.com/office/drawing/2014/main" id="{7447E664-C305-4C4A-AFEE-CB319C74C323}"/>
+                <a16:creationId xmlns:a16="http://schemas.microsoft.com/office/drawing/2014/main" id="{934D3542-0AEE-4906-9255-85B8A01295AE}"/>
               </a:ext>
             </a:extLst>
           </p:cNvPr>
@@ -9708,7 +9715,7 @@
           <p:cNvPr id="28" name="Shape 26">
             <a:extLst xmlns:a="http://schemas.openxmlformats.org/drawingml/2006/main">
               <a:ext uri="{FF2B5EF4-FFF2-40B4-BE49-F238E27FC236}">
-                <a16:creationId xmlns:a16="http://schemas.microsoft.com/office/drawing/2014/main" id="{3C396C08-D042-4932-9053-A8526DD4C7C5}"/>
+                <a16:creationId xmlns:a16="http://schemas.microsoft.com/office/drawing/2014/main" id="{359B3BFA-710F-49BC-BA39-5FF4E191CCA2}"/>
               </a:ext>
             </a:extLst>
           </p:cNvPr>
@@ -9741,7 +9748,7 @@
           <p:cNvPr id="29" name="Text 27">
             <a:extLst xmlns:a="http://schemas.openxmlformats.org/drawingml/2006/main">
               <a:ext uri="{FF2B5EF4-FFF2-40B4-BE49-F238E27FC236}">
-                <a16:creationId xmlns:a16="http://schemas.microsoft.com/office/drawing/2014/main" id="{8F040921-1EA8-4B11-A98D-CADF8918B644}"/>
+                <a16:creationId xmlns:a16="http://schemas.microsoft.com/office/drawing/2014/main" id="{4952394D-BC40-47A4-9F66-13DC0144B4C5}"/>
               </a:ext>
             </a:extLst>
           </p:cNvPr>
@@ -9788,7 +9795,7 @@
           <p:cNvPr id="30" name="Shape 28">
             <a:extLst xmlns:a="http://schemas.openxmlformats.org/drawingml/2006/main">
               <a:ext uri="{FF2B5EF4-FFF2-40B4-BE49-F238E27FC236}">
-                <a16:creationId xmlns:a16="http://schemas.microsoft.com/office/drawing/2014/main" id="{E106C4BC-B9F7-42E2-8899-03B5B231008F}"/>
+                <a16:creationId xmlns:a16="http://schemas.microsoft.com/office/drawing/2014/main" id="{FC5EFCB4-2CA8-4ECC-A9D4-7EC0975C50AB}"/>
               </a:ext>
             </a:extLst>
           </p:cNvPr>
@@ -9821,7 +9828,7 @@
           <p:cNvPr id="31" name="Text 29">
             <a:extLst xmlns:a="http://schemas.openxmlformats.org/drawingml/2006/main">
               <a:ext uri="{FF2B5EF4-FFF2-40B4-BE49-F238E27FC236}">
-                <a16:creationId xmlns:a16="http://schemas.microsoft.com/office/drawing/2014/main" id="{27382588-A26A-42FF-88CF-85D7E71B27FC}"/>
+                <a16:creationId xmlns:a16="http://schemas.microsoft.com/office/drawing/2014/main" id="{0D692C3D-7C13-4DA8-A8DB-CD19826A3BEA}"/>
               </a:ext>
             </a:extLst>
           </p:cNvPr>
@@ -9868,7 +9875,7 @@
           <p:cNvPr id="32" name="Shape 30">
             <a:extLst xmlns:a="http://schemas.openxmlformats.org/drawingml/2006/main">
               <a:ext uri="{FF2B5EF4-FFF2-40B4-BE49-F238E27FC236}">
-                <a16:creationId xmlns:a16="http://schemas.microsoft.com/office/drawing/2014/main" id="{1F732167-1C2D-4FF9-8249-DA3CB4B2099F}"/>
+                <a16:creationId xmlns:a16="http://schemas.microsoft.com/office/drawing/2014/main" id="{CE2498D4-7A5C-4047-AD53-FE1F638982A5}"/>
               </a:ext>
             </a:extLst>
           </p:cNvPr>
@@ -9901,7 +9908,7 @@
           <p:cNvPr id="33" name="Text 31">
             <a:extLst xmlns:a="http://schemas.openxmlformats.org/drawingml/2006/main">
               <a:ext uri="{FF2B5EF4-FFF2-40B4-BE49-F238E27FC236}">
-                <a16:creationId xmlns:a16="http://schemas.microsoft.com/office/drawing/2014/main" id="{621136A2-1EF5-451B-9248-8E7559BC2BAE}"/>
+                <a16:creationId xmlns:a16="http://schemas.microsoft.com/office/drawing/2014/main" id="{4D7A42EF-FA32-44DA-A521-57A709A14991}"/>
               </a:ext>
             </a:extLst>
           </p:cNvPr>
@@ -9948,7 +9955,7 @@
           <p:cNvPr id="34" name="Shape 32">
             <a:extLst xmlns:a="http://schemas.openxmlformats.org/drawingml/2006/main">
               <a:ext uri="{FF2B5EF4-FFF2-40B4-BE49-F238E27FC236}">
-                <a16:creationId xmlns:a16="http://schemas.microsoft.com/office/drawing/2014/main" id="{3F6B9110-5887-44B6-9AF7-A66317F5F5E4}"/>
+                <a16:creationId xmlns:a16="http://schemas.microsoft.com/office/drawing/2014/main" id="{2DB8EB61-4806-4561-9217-8B442A68CA18}"/>
               </a:ext>
             </a:extLst>
           </p:cNvPr>
@@ -9981,7 +9988,7 @@
           <p:cNvPr id="35" name="Text 33">
             <a:extLst xmlns:a="http://schemas.openxmlformats.org/drawingml/2006/main">
               <a:ext uri="{FF2B5EF4-FFF2-40B4-BE49-F238E27FC236}">
-                <a16:creationId xmlns:a16="http://schemas.microsoft.com/office/drawing/2014/main" id="{286CC73B-438D-42C0-8CAF-D0AC45ECD2EC}"/>
+                <a16:creationId xmlns:a16="http://schemas.microsoft.com/office/drawing/2014/main" id="{18B1CF6E-93FD-4F7B-97E8-544381C8F3DF}"/>
               </a:ext>
             </a:extLst>
           </p:cNvPr>
@@ -10028,7 +10035,7 @@
           <p:cNvPr id="36" name="Shape 34">
             <a:extLst xmlns:a="http://schemas.openxmlformats.org/drawingml/2006/main">
               <a:ext uri="{FF2B5EF4-FFF2-40B4-BE49-F238E27FC236}">
-                <a16:creationId xmlns:a16="http://schemas.microsoft.com/office/drawing/2014/main" id="{C0826EBC-0D25-4B73-A4BE-36BFE53FC97B}"/>
+                <a16:creationId xmlns:a16="http://schemas.microsoft.com/office/drawing/2014/main" id="{58A9A8F0-F2C5-46D9-A848-EDFC6D762311}"/>
               </a:ext>
             </a:extLst>
           </p:cNvPr>
@@ -10061,7 +10068,7 @@
           <p:cNvPr id="37" name="Text 35">
             <a:extLst xmlns:a="http://schemas.openxmlformats.org/drawingml/2006/main">
               <a:ext uri="{FF2B5EF4-FFF2-40B4-BE49-F238E27FC236}">
-                <a16:creationId xmlns:a16="http://schemas.microsoft.com/office/drawing/2014/main" id="{E703ADBE-6124-4880-9F11-66283812DCFD}"/>
+                <a16:creationId xmlns:a16="http://schemas.microsoft.com/office/drawing/2014/main" id="{835F19B9-11DA-4732-8EBB-126D8C04760A}"/>
               </a:ext>
             </a:extLst>
           </p:cNvPr>
@@ -10108,7 +10115,7 @@
           <p:cNvPr id="38" name="Shape 36">
             <a:extLst xmlns:a="http://schemas.openxmlformats.org/drawingml/2006/main">
               <a:ext uri="{FF2B5EF4-FFF2-40B4-BE49-F238E27FC236}">
-                <a16:creationId xmlns:a16="http://schemas.microsoft.com/office/drawing/2014/main" id="{7E92567B-9EEC-4624-B240-18BB85A18600}"/>
+                <a16:creationId xmlns:a16="http://schemas.microsoft.com/office/drawing/2014/main" id="{1C90AFDE-3450-4F9B-8514-BF2A4FDD2518}"/>
               </a:ext>
             </a:extLst>
           </p:cNvPr>
@@ -10141,7 +10148,7 @@
           <p:cNvPr id="39" name="Text 37">
             <a:extLst xmlns:a="http://schemas.openxmlformats.org/drawingml/2006/main">
               <a:ext uri="{FF2B5EF4-FFF2-40B4-BE49-F238E27FC236}">
-                <a16:creationId xmlns:a16="http://schemas.microsoft.com/office/drawing/2014/main" id="{9949D8B7-2916-41C1-80BC-D9771A964E39}"/>
+                <a16:creationId xmlns:a16="http://schemas.microsoft.com/office/drawing/2014/main" id="{73ADE29B-C244-430C-8A56-3D76611E0B65}"/>
               </a:ext>
             </a:extLst>
           </p:cNvPr>
@@ -10188,7 +10195,7 @@
           <p:cNvPr id="40" name="Text 38">
             <a:extLst xmlns:a="http://schemas.openxmlformats.org/drawingml/2006/main">
               <a:ext uri="{FF2B5EF4-FFF2-40B4-BE49-F238E27FC236}">
-                <a16:creationId xmlns:a16="http://schemas.microsoft.com/office/drawing/2014/main" id="{D75DE2BC-F2CF-4D77-A12F-F8764D38199C}"/>
+                <a16:creationId xmlns:a16="http://schemas.microsoft.com/office/drawing/2014/main" id="{D96492D4-F2DA-48EE-8BA1-6741C9603FAC}"/>
               </a:ext>
             </a:extLst>
           </p:cNvPr>
@@ -10235,7 +10242,7 @@
           <p:cNvPr id="41" name="Text 39">
             <a:extLst xmlns:a="http://schemas.openxmlformats.org/drawingml/2006/main">
               <a:ext uri="{FF2B5EF4-FFF2-40B4-BE49-F238E27FC236}">
-                <a16:creationId xmlns:a16="http://schemas.microsoft.com/office/drawing/2014/main" id="{80F5C95B-D3AC-4604-BD67-5D567733CF12}"/>
+                <a16:creationId xmlns:a16="http://schemas.microsoft.com/office/drawing/2014/main" id="{99E20924-7674-45BD-B59B-A6A49372E7ED}"/>
               </a:ext>
             </a:extLst>
           </p:cNvPr>
@@ -10280,7 +10287,7 @@
     </p:spTree>
     <p:extLst>
       <p:ext uri="{BB962C8B-B14F-4D97-AF65-F5344CB8AC3E}">
-        <p14:creationId xmlns:p14="http://schemas.microsoft.com/office/powerpoint/2010/main" val="1037480407"/>
+        <p14:creationId xmlns:p14="http://schemas.microsoft.com/office/powerpoint/2010/main" val="610141955"/>
       </p:ext>
     </p:extLst>
   </p:cSld>
@@ -10311,7 +10318,7 @@
           <p:cNvPr id="2" name="Text 0">
             <a:extLst xmlns:a="http://schemas.openxmlformats.org/drawingml/2006/main">
               <a:ext uri="{FF2B5EF4-FFF2-40B4-BE49-F238E27FC236}">
-                <a16:creationId xmlns:a16="http://schemas.microsoft.com/office/drawing/2014/main" id="{CED09F32-73FC-4C39-B8EA-6E6AA7B74BDF}"/>
+                <a16:creationId xmlns:a16="http://schemas.microsoft.com/office/drawing/2014/main" id="{7B73DC85-B551-4A8D-B243-52B134DE7F7A}"/>
               </a:ext>
             </a:extLst>
           </p:cNvPr>
@@ -10358,7 +10365,7 @@
           <p:cNvPr id="3" name="Text 1">
             <a:extLst xmlns:a="http://schemas.openxmlformats.org/drawingml/2006/main">
               <a:ext uri="{FF2B5EF4-FFF2-40B4-BE49-F238E27FC236}">
-                <a16:creationId xmlns:a16="http://schemas.microsoft.com/office/drawing/2014/main" id="{3ACBDE67-2681-48D5-AE20-B5CEFB383937}"/>
+                <a16:creationId xmlns:a16="http://schemas.microsoft.com/office/drawing/2014/main" id="{2E88E82E-1EFF-4BB2-9F93-AB0D8CC50ECF}"/>
               </a:ext>
             </a:extLst>
           </p:cNvPr>
@@ -10405,7 +10412,7 @@
           <p:cNvPr id="4" name="Shape 2">
             <a:extLst xmlns:a="http://schemas.openxmlformats.org/drawingml/2006/main">
               <a:ext uri="{FF2B5EF4-FFF2-40B4-BE49-F238E27FC236}">
-                <a16:creationId xmlns:a16="http://schemas.microsoft.com/office/drawing/2014/main" id="{A25086F5-ADDE-40AF-A750-100C2272A652}"/>
+                <a16:creationId xmlns:a16="http://schemas.microsoft.com/office/drawing/2014/main" id="{395581FC-ACB6-4278-A7C9-50F14C6DC656}"/>
               </a:ext>
             </a:extLst>
           </p:cNvPr>
@@ -10440,7 +10447,7 @@
           <p:cNvPr id="5" name="Text 3">
             <a:extLst xmlns:a="http://schemas.openxmlformats.org/drawingml/2006/main">
               <a:ext uri="{FF2B5EF4-FFF2-40B4-BE49-F238E27FC236}">
-                <a16:creationId xmlns:a16="http://schemas.microsoft.com/office/drawing/2014/main" id="{F38B608B-5AB4-4E98-9972-4B26E82D189C}"/>
+                <a16:creationId xmlns:a16="http://schemas.microsoft.com/office/drawing/2014/main" id="{C119595E-07D9-400C-92E8-829C3614ABCD}"/>
               </a:ext>
             </a:extLst>
           </p:cNvPr>
@@ -10487,7 +10494,7 @@
           <p:cNvPr id="6" name="Shape 4">
             <a:extLst xmlns:a="http://schemas.openxmlformats.org/drawingml/2006/main">
               <a:ext uri="{FF2B5EF4-FFF2-40B4-BE49-F238E27FC236}">
-                <a16:creationId xmlns:a16="http://schemas.microsoft.com/office/drawing/2014/main" id="{D65C3F77-AB51-43A7-8ACB-B2D12E4C9275}"/>
+                <a16:creationId xmlns:a16="http://schemas.microsoft.com/office/drawing/2014/main" id="{E23C8DA4-FE7C-40C2-B5EA-386FFDCCC104}"/>
               </a:ext>
             </a:extLst>
           </p:cNvPr>
@@ -10518,7 +10525,7 @@
           <p:cNvPr id="7" name="Shape 5">
             <a:extLst xmlns:a="http://schemas.openxmlformats.org/drawingml/2006/main">
               <a:ext uri="{FF2B5EF4-FFF2-40B4-BE49-F238E27FC236}">
-                <a16:creationId xmlns:a16="http://schemas.microsoft.com/office/drawing/2014/main" id="{19ACCF80-19E2-465C-83FD-985768A7C066}"/>
+                <a16:creationId xmlns:a16="http://schemas.microsoft.com/office/drawing/2014/main" id="{5A5004A3-2BF8-41BE-9AC7-723771B85827}"/>
               </a:ext>
             </a:extLst>
           </p:cNvPr>
@@ -10553,7 +10560,7 @@
           <p:cNvPr id="8" name="Text 6">
             <a:extLst xmlns:a="http://schemas.openxmlformats.org/drawingml/2006/main">
               <a:ext uri="{FF2B5EF4-FFF2-40B4-BE49-F238E27FC236}">
-                <a16:creationId xmlns:a16="http://schemas.microsoft.com/office/drawing/2014/main" id="{8D0E4E23-82E1-4EB7-9E5C-4667529EEC4A}"/>
+                <a16:creationId xmlns:a16="http://schemas.microsoft.com/office/drawing/2014/main" id="{87B12A13-6B7D-4910-B81F-CAE6B94C5F40}"/>
               </a:ext>
             </a:extLst>
           </p:cNvPr>
@@ -10600,7 +10607,7 @@
           <p:cNvPr id="9" name="Shape 7">
             <a:extLst xmlns:a="http://schemas.openxmlformats.org/drawingml/2006/main">
               <a:ext uri="{FF2B5EF4-FFF2-40B4-BE49-F238E27FC236}">
-                <a16:creationId xmlns:a16="http://schemas.microsoft.com/office/drawing/2014/main" id="{0042C4EB-90F0-472A-94ED-C0035CEFB286}"/>
+                <a16:creationId xmlns:a16="http://schemas.microsoft.com/office/drawing/2014/main" id="{DB49463E-C467-442A-8766-CFA19E015BA8}"/>
               </a:ext>
             </a:extLst>
           </p:cNvPr>
@@ -10635,7 +10642,7 @@
           <p:cNvPr id="10" name="Text 8">
             <a:extLst xmlns:a="http://schemas.openxmlformats.org/drawingml/2006/main">
               <a:ext uri="{FF2B5EF4-FFF2-40B4-BE49-F238E27FC236}">
-                <a16:creationId xmlns:a16="http://schemas.microsoft.com/office/drawing/2014/main" id="{7F263507-CD84-4600-9CD4-5F7276BC10EB}"/>
+                <a16:creationId xmlns:a16="http://schemas.microsoft.com/office/drawing/2014/main" id="{A6EF5026-1BE2-42CB-BEF8-EA88289918CF}"/>
               </a:ext>
             </a:extLst>
           </p:cNvPr>
@@ -10682,7 +10689,7 @@
           <p:cNvPr id="11" name="Shape 9">
             <a:extLst xmlns:a="http://schemas.openxmlformats.org/drawingml/2006/main">
               <a:ext uri="{FF2B5EF4-FFF2-40B4-BE49-F238E27FC236}">
-                <a16:creationId xmlns:a16="http://schemas.microsoft.com/office/drawing/2014/main" id="{226241D2-A8A2-481E-BD3D-D4D7B7A4B6C8}"/>
+                <a16:creationId xmlns:a16="http://schemas.microsoft.com/office/drawing/2014/main" id="{3DCB78C9-E0F8-46C6-AE2E-9F72C7AB6A32}"/>
               </a:ext>
             </a:extLst>
           </p:cNvPr>
@@ -10717,7 +10724,7 @@
           <p:cNvPr id="12" name="Text 10">
             <a:extLst xmlns:a="http://schemas.openxmlformats.org/drawingml/2006/main">
               <a:ext uri="{FF2B5EF4-FFF2-40B4-BE49-F238E27FC236}">
-                <a16:creationId xmlns:a16="http://schemas.microsoft.com/office/drawing/2014/main" id="{6D6933FA-3410-4A00-9918-C5A1C36DC87F}"/>
+                <a16:creationId xmlns:a16="http://schemas.microsoft.com/office/drawing/2014/main" id="{F7D17E40-AC99-40D8-84CE-B747605348E9}"/>
               </a:ext>
             </a:extLst>
           </p:cNvPr>
@@ -10764,7 +10771,7 @@
           <p:cNvPr id="13" name="Shape 11">
             <a:extLst xmlns:a="http://schemas.openxmlformats.org/drawingml/2006/main">
               <a:ext uri="{FF2B5EF4-FFF2-40B4-BE49-F238E27FC236}">
-                <a16:creationId xmlns:a16="http://schemas.microsoft.com/office/drawing/2014/main" id="{856077D2-2851-4F57-8910-5DD66A43A88C}"/>
+                <a16:creationId xmlns:a16="http://schemas.microsoft.com/office/drawing/2014/main" id="{248EBFD5-D7A0-4F14-9399-561D614D54D6}"/>
               </a:ext>
             </a:extLst>
           </p:cNvPr>
@@ -10799,7 +10806,7 @@
           <p:cNvPr id="14" name="Text 12">
             <a:extLst xmlns:a="http://schemas.openxmlformats.org/drawingml/2006/main">
               <a:ext uri="{FF2B5EF4-FFF2-40B4-BE49-F238E27FC236}">
-                <a16:creationId xmlns:a16="http://schemas.microsoft.com/office/drawing/2014/main" id="{2860C1B5-CAAC-449E-9E53-0FD50F8C6C7B}"/>
+                <a16:creationId xmlns:a16="http://schemas.microsoft.com/office/drawing/2014/main" id="{71DCF8BC-9528-4B1B-A590-949C8E101119}"/>
               </a:ext>
             </a:extLst>
           </p:cNvPr>
@@ -10846,7 +10853,7 @@
           <p:cNvPr id="15" name="Shape 13">
             <a:extLst xmlns:a="http://schemas.openxmlformats.org/drawingml/2006/main">
               <a:ext uri="{FF2B5EF4-FFF2-40B4-BE49-F238E27FC236}">
-                <a16:creationId xmlns:a16="http://schemas.microsoft.com/office/drawing/2014/main" id="{897F980A-B15D-4F87-97C6-BCF0299F68DE}"/>
+                <a16:creationId xmlns:a16="http://schemas.microsoft.com/office/drawing/2014/main" id="{8337EB54-37CB-43DF-8600-9C09B903D577}"/>
               </a:ext>
             </a:extLst>
           </p:cNvPr>
@@ -10879,7 +10886,7 @@
           <p:cNvPr id="16" name="Text 14">
             <a:extLst xmlns:a="http://schemas.openxmlformats.org/drawingml/2006/main">
               <a:ext uri="{FF2B5EF4-FFF2-40B4-BE49-F238E27FC236}">
-                <a16:creationId xmlns:a16="http://schemas.microsoft.com/office/drawing/2014/main" id="{C5B03C4D-6C8E-437D-AFDE-67A8BCF4EA47}"/>
+                <a16:creationId xmlns:a16="http://schemas.microsoft.com/office/drawing/2014/main" id="{D6575CEB-7254-4367-B4C7-7F24DF05893A}"/>
               </a:ext>
             </a:extLst>
           </p:cNvPr>
@@ -10926,7 +10933,7 @@
           <p:cNvPr id="17" name="Text 15">
             <a:extLst xmlns:a="http://schemas.openxmlformats.org/drawingml/2006/main">
               <a:ext uri="{FF2B5EF4-FFF2-40B4-BE49-F238E27FC236}">
-                <a16:creationId xmlns:a16="http://schemas.microsoft.com/office/drawing/2014/main" id="{83E7A455-E7E9-4BB3-9368-0DAC6B20DDDE}"/>
+                <a16:creationId xmlns:a16="http://schemas.microsoft.com/office/drawing/2014/main" id="{8983B725-49E6-4299-BD07-1B997869F859}"/>
               </a:ext>
             </a:extLst>
           </p:cNvPr>
@@ -10973,7 +10980,7 @@
           <p:cNvPr id="18" name="Text 16">
             <a:extLst xmlns:a="http://schemas.openxmlformats.org/drawingml/2006/main">
               <a:ext uri="{FF2B5EF4-FFF2-40B4-BE49-F238E27FC236}">
-                <a16:creationId xmlns:a16="http://schemas.microsoft.com/office/drawing/2014/main" id="{0121C274-0FD9-4E3D-9CD9-AE9264285FF6}"/>
+                <a16:creationId xmlns:a16="http://schemas.microsoft.com/office/drawing/2014/main" id="{B750D2AD-C91D-48BA-9202-867B27931F6F}"/>
               </a:ext>
             </a:extLst>
           </p:cNvPr>
@@ -11020,7 +11027,7 @@
           <p:cNvPr id="19" name="Text 17">
             <a:extLst xmlns:a="http://schemas.openxmlformats.org/drawingml/2006/main">
               <a:ext uri="{FF2B5EF4-FFF2-40B4-BE49-F238E27FC236}">
-                <a16:creationId xmlns:a16="http://schemas.microsoft.com/office/drawing/2014/main" id="{3FC27F65-896D-4591-A226-C7F1C4467174}"/>
+                <a16:creationId xmlns:a16="http://schemas.microsoft.com/office/drawing/2014/main" id="{7F2970AD-9DDC-4C32-93B3-17AC794CBF66}"/>
               </a:ext>
             </a:extLst>
           </p:cNvPr>
@@ -11067,7 +11074,7 @@
           <p:cNvPr id="20" name="Shape 18">
             <a:extLst xmlns:a="http://schemas.openxmlformats.org/drawingml/2006/main">
               <a:ext uri="{FF2B5EF4-FFF2-40B4-BE49-F238E27FC236}">
-                <a16:creationId xmlns:a16="http://schemas.microsoft.com/office/drawing/2014/main" id="{AD4DB7C8-403B-404D-A495-326D8BB2EC85}"/>
+                <a16:creationId xmlns:a16="http://schemas.microsoft.com/office/drawing/2014/main" id="{F8C17BE2-081E-49CA-9E73-4BBCE3C60486}"/>
               </a:ext>
             </a:extLst>
           </p:cNvPr>
@@ -11100,7 +11107,7 @@
           <p:cNvPr id="21" name="Text 19">
             <a:extLst xmlns:a="http://schemas.openxmlformats.org/drawingml/2006/main">
               <a:ext uri="{FF2B5EF4-FFF2-40B4-BE49-F238E27FC236}">
-                <a16:creationId xmlns:a16="http://schemas.microsoft.com/office/drawing/2014/main" id="{CE1D5793-C07F-4E92-B930-6A790AAD67DA}"/>
+                <a16:creationId xmlns:a16="http://schemas.microsoft.com/office/drawing/2014/main" id="{77B452F1-EF70-43B3-AC84-AD48DC4E426D}"/>
               </a:ext>
             </a:extLst>
           </p:cNvPr>
@@ -11147,7 +11154,7 @@
           <p:cNvPr id="22" name="Text 20">
             <a:extLst xmlns:a="http://schemas.openxmlformats.org/drawingml/2006/main">
               <a:ext uri="{FF2B5EF4-FFF2-40B4-BE49-F238E27FC236}">
-                <a16:creationId xmlns:a16="http://schemas.microsoft.com/office/drawing/2014/main" id="{029EE8F8-9EA0-4D72-9454-5AE95C255C83}"/>
+                <a16:creationId xmlns:a16="http://schemas.microsoft.com/office/drawing/2014/main" id="{8C4965E0-3ADC-43DF-BFF9-4F31B82B9A87}"/>
               </a:ext>
             </a:extLst>
           </p:cNvPr>
@@ -11194,7 +11201,7 @@
           <p:cNvPr id="23" name="Text 21">
             <a:extLst xmlns:a="http://schemas.openxmlformats.org/drawingml/2006/main">
               <a:ext uri="{FF2B5EF4-FFF2-40B4-BE49-F238E27FC236}">
-                <a16:creationId xmlns:a16="http://schemas.microsoft.com/office/drawing/2014/main" id="{3A6B5500-CDEB-4C41-BEC1-4D58B380E4FA}"/>
+                <a16:creationId xmlns:a16="http://schemas.microsoft.com/office/drawing/2014/main" id="{CFC0968A-F791-4522-9EE1-1746DB2A6E69}"/>
               </a:ext>
             </a:extLst>
           </p:cNvPr>
@@ -11241,7 +11248,7 @@
           <p:cNvPr id="24" name="Text 22">
             <a:extLst xmlns:a="http://schemas.openxmlformats.org/drawingml/2006/main">
               <a:ext uri="{FF2B5EF4-FFF2-40B4-BE49-F238E27FC236}">
-                <a16:creationId xmlns:a16="http://schemas.microsoft.com/office/drawing/2014/main" id="{334155FA-3EE9-45F9-A68C-623223212380}"/>
+                <a16:creationId xmlns:a16="http://schemas.microsoft.com/office/drawing/2014/main" id="{20205AD8-9B87-4977-B5A0-E3A387203DCC}"/>
               </a:ext>
             </a:extLst>
           </p:cNvPr>
@@ -11288,7 +11295,7 @@
           <p:cNvPr id="25" name="Shape 23">
             <a:extLst xmlns:a="http://schemas.openxmlformats.org/drawingml/2006/main">
               <a:ext uri="{FF2B5EF4-FFF2-40B4-BE49-F238E27FC236}">
-                <a16:creationId xmlns:a16="http://schemas.microsoft.com/office/drawing/2014/main" id="{FC84C00E-0C2F-4149-B401-B640EDCF80C1}"/>
+                <a16:creationId xmlns:a16="http://schemas.microsoft.com/office/drawing/2014/main" id="{3EE1D081-C312-487F-AEBC-3ABBCACFE7B4}"/>
               </a:ext>
             </a:extLst>
           </p:cNvPr>
@@ -11321,7 +11328,7 @@
           <p:cNvPr id="26" name="Text 24">
             <a:extLst xmlns:a="http://schemas.openxmlformats.org/drawingml/2006/main">
               <a:ext uri="{FF2B5EF4-FFF2-40B4-BE49-F238E27FC236}">
-                <a16:creationId xmlns:a16="http://schemas.microsoft.com/office/drawing/2014/main" id="{24EF35D2-AFEF-4CE5-9A84-F1FEDBD38D37}"/>
+                <a16:creationId xmlns:a16="http://schemas.microsoft.com/office/drawing/2014/main" id="{874ADFC1-9D6D-45BD-AFAB-6E1A1E083842}"/>
               </a:ext>
             </a:extLst>
           </p:cNvPr>
@@ -11368,7 +11375,7 @@
           <p:cNvPr id="27" name="Text 25">
             <a:extLst xmlns:a="http://schemas.openxmlformats.org/drawingml/2006/main">
               <a:ext uri="{FF2B5EF4-FFF2-40B4-BE49-F238E27FC236}">
-                <a16:creationId xmlns:a16="http://schemas.microsoft.com/office/drawing/2014/main" id="{E68DFCE6-7677-4E24-9525-5647E60A54C3}"/>
+                <a16:creationId xmlns:a16="http://schemas.microsoft.com/office/drawing/2014/main" id="{DAF35205-C71E-41ED-A5BE-DD4A843B305C}"/>
               </a:ext>
             </a:extLst>
           </p:cNvPr>
@@ -11415,7 +11422,7 @@
           <p:cNvPr id="28" name="Text 26">
             <a:extLst xmlns:a="http://schemas.openxmlformats.org/drawingml/2006/main">
               <a:ext uri="{FF2B5EF4-FFF2-40B4-BE49-F238E27FC236}">
-                <a16:creationId xmlns:a16="http://schemas.microsoft.com/office/drawing/2014/main" id="{5C7245FF-761C-4445-A546-E4AC66022D15}"/>
+                <a16:creationId xmlns:a16="http://schemas.microsoft.com/office/drawing/2014/main" id="{B8415DB4-8674-4F37-AB12-200455426EF7}"/>
               </a:ext>
             </a:extLst>
           </p:cNvPr>
@@ -11462,7 +11469,7 @@
           <p:cNvPr id="29" name="Text 27">
             <a:extLst xmlns:a="http://schemas.openxmlformats.org/drawingml/2006/main">
               <a:ext uri="{FF2B5EF4-FFF2-40B4-BE49-F238E27FC236}">
-                <a16:creationId xmlns:a16="http://schemas.microsoft.com/office/drawing/2014/main" id="{A52D216C-4433-4C27-BC1E-65AFE53FD111}"/>
+                <a16:creationId xmlns:a16="http://schemas.microsoft.com/office/drawing/2014/main" id="{E3BEAE3C-1D72-433F-B99E-C1ACC5CB002B}"/>
               </a:ext>
             </a:extLst>
           </p:cNvPr>
@@ -11509,7 +11516,7 @@
           <p:cNvPr id="30" name="Shape 28">
             <a:extLst xmlns:a="http://schemas.openxmlformats.org/drawingml/2006/main">
               <a:ext uri="{FF2B5EF4-FFF2-40B4-BE49-F238E27FC236}">
-                <a16:creationId xmlns:a16="http://schemas.microsoft.com/office/drawing/2014/main" id="{53830039-F9D6-46EE-A071-BDFC1B819061}"/>
+                <a16:creationId xmlns:a16="http://schemas.microsoft.com/office/drawing/2014/main" id="{3726103B-4D79-4111-BED3-6BB62EC0D6CE}"/>
               </a:ext>
             </a:extLst>
           </p:cNvPr>
@@ -11542,7 +11549,7 @@
           <p:cNvPr id="31" name="Text 29">
             <a:extLst xmlns:a="http://schemas.openxmlformats.org/drawingml/2006/main">
               <a:ext uri="{FF2B5EF4-FFF2-40B4-BE49-F238E27FC236}">
-                <a16:creationId xmlns:a16="http://schemas.microsoft.com/office/drawing/2014/main" id="{1533199D-28D9-4231-96AD-EEF26F4035F9}"/>
+                <a16:creationId xmlns:a16="http://schemas.microsoft.com/office/drawing/2014/main" id="{81A6E6C3-0228-4308-BFC7-12F4297A7B50}"/>
               </a:ext>
             </a:extLst>
           </p:cNvPr>
@@ -11589,7 +11596,7 @@
           <p:cNvPr id="32" name="Text 30">
             <a:extLst xmlns:a="http://schemas.openxmlformats.org/drawingml/2006/main">
               <a:ext uri="{FF2B5EF4-FFF2-40B4-BE49-F238E27FC236}">
-                <a16:creationId xmlns:a16="http://schemas.microsoft.com/office/drawing/2014/main" id="{063D868E-ADA3-444E-91E5-BF5A4B09800A}"/>
+                <a16:creationId xmlns:a16="http://schemas.microsoft.com/office/drawing/2014/main" id="{C19984EA-0009-49B4-9B43-CA4B0F4EF4E9}"/>
               </a:ext>
             </a:extLst>
           </p:cNvPr>
@@ -11636,7 +11643,7 @@
           <p:cNvPr id="33" name="Text 31">
             <a:extLst xmlns:a="http://schemas.openxmlformats.org/drawingml/2006/main">
               <a:ext uri="{FF2B5EF4-FFF2-40B4-BE49-F238E27FC236}">
-                <a16:creationId xmlns:a16="http://schemas.microsoft.com/office/drawing/2014/main" id="{657934B3-CCEB-4A5E-8F82-DD2EC624AD3E}"/>
+                <a16:creationId xmlns:a16="http://schemas.microsoft.com/office/drawing/2014/main" id="{5E666A3E-925D-48B1-B053-D7FE2C864CD6}"/>
               </a:ext>
             </a:extLst>
           </p:cNvPr>
@@ -11683,7 +11690,7 @@
           <p:cNvPr id="34" name="Text 32">
             <a:extLst xmlns:a="http://schemas.openxmlformats.org/drawingml/2006/main">
               <a:ext uri="{FF2B5EF4-FFF2-40B4-BE49-F238E27FC236}">
-                <a16:creationId xmlns:a16="http://schemas.microsoft.com/office/drawing/2014/main" id="{D0979BEC-850F-49C6-97E7-F5301D93FC70}"/>
+                <a16:creationId xmlns:a16="http://schemas.microsoft.com/office/drawing/2014/main" id="{33D9EF85-5889-4009-9B0E-6460245BC642}"/>
               </a:ext>
             </a:extLst>
           </p:cNvPr>
@@ -11730,7 +11737,7 @@
           <p:cNvPr id="35" name="Shape 33">
             <a:extLst xmlns:a="http://schemas.openxmlformats.org/drawingml/2006/main">
               <a:ext uri="{FF2B5EF4-FFF2-40B4-BE49-F238E27FC236}">
-                <a16:creationId xmlns:a16="http://schemas.microsoft.com/office/drawing/2014/main" id="{1EA77B60-C648-4C49-80C6-CBDC6F63AF14}"/>
+                <a16:creationId xmlns:a16="http://schemas.microsoft.com/office/drawing/2014/main" id="{D90359F8-7E34-4610-B7AB-77B1F3DBCC15}"/>
               </a:ext>
             </a:extLst>
           </p:cNvPr>
@@ -11763,7 +11770,7 @@
           <p:cNvPr id="36" name="Text 34">
             <a:extLst xmlns:a="http://schemas.openxmlformats.org/drawingml/2006/main">
               <a:ext uri="{FF2B5EF4-FFF2-40B4-BE49-F238E27FC236}">
-                <a16:creationId xmlns:a16="http://schemas.microsoft.com/office/drawing/2014/main" id="{BCC8FA17-D069-4AEF-A611-F736065C4DBE}"/>
+                <a16:creationId xmlns:a16="http://schemas.microsoft.com/office/drawing/2014/main" id="{BFDB9EA6-2261-4546-9E69-45D7C05F15FE}"/>
               </a:ext>
             </a:extLst>
           </p:cNvPr>
@@ -11810,7 +11817,7 @@
           <p:cNvPr id="37" name="Text 35">
             <a:extLst xmlns:a="http://schemas.openxmlformats.org/drawingml/2006/main">
               <a:ext uri="{FF2B5EF4-FFF2-40B4-BE49-F238E27FC236}">
-                <a16:creationId xmlns:a16="http://schemas.microsoft.com/office/drawing/2014/main" id="{54174A15-28A1-444E-B327-720C41E41425}"/>
+                <a16:creationId xmlns:a16="http://schemas.microsoft.com/office/drawing/2014/main" id="{06E0CCBF-809A-4B69-A150-658FC20335FF}"/>
               </a:ext>
             </a:extLst>
           </p:cNvPr>
@@ -11857,7 +11864,7 @@
           <p:cNvPr id="38" name="Text 36">
             <a:extLst xmlns:a="http://schemas.openxmlformats.org/drawingml/2006/main">
               <a:ext uri="{FF2B5EF4-FFF2-40B4-BE49-F238E27FC236}">
-                <a16:creationId xmlns:a16="http://schemas.microsoft.com/office/drawing/2014/main" id="{A942986C-452B-4697-8E3A-3E7A9655E8A8}"/>
+                <a16:creationId xmlns:a16="http://schemas.microsoft.com/office/drawing/2014/main" id="{0E44E18B-1636-426D-98F8-DF313425DDEC}"/>
               </a:ext>
             </a:extLst>
           </p:cNvPr>
@@ -11904,7 +11911,7 @@
           <p:cNvPr id="39" name="Text 37">
             <a:extLst xmlns:a="http://schemas.openxmlformats.org/drawingml/2006/main">
               <a:ext uri="{FF2B5EF4-FFF2-40B4-BE49-F238E27FC236}">
-                <a16:creationId xmlns:a16="http://schemas.microsoft.com/office/drawing/2014/main" id="{BF77F6AB-6BFC-464F-9F6E-69C1C49D0591}"/>
+                <a16:creationId xmlns:a16="http://schemas.microsoft.com/office/drawing/2014/main" id="{E19F6D27-F01B-4A2F-A87B-9767584C33E3}"/>
               </a:ext>
             </a:extLst>
           </p:cNvPr>
@@ -11951,7 +11958,7 @@
           <p:cNvPr id="40" name="Shape 38">
             <a:extLst xmlns:a="http://schemas.openxmlformats.org/drawingml/2006/main">
               <a:ext uri="{FF2B5EF4-FFF2-40B4-BE49-F238E27FC236}">
-                <a16:creationId xmlns:a16="http://schemas.microsoft.com/office/drawing/2014/main" id="{766C457D-4C1B-44D1-8557-BD4A9F848A98}"/>
+                <a16:creationId xmlns:a16="http://schemas.microsoft.com/office/drawing/2014/main" id="{99248C4F-60BD-470E-956C-39B834BC83F5}"/>
               </a:ext>
             </a:extLst>
           </p:cNvPr>
@@ -11984,7 +11991,7 @@
           <p:cNvPr id="41" name="Text 39">
             <a:extLst xmlns:a="http://schemas.openxmlformats.org/drawingml/2006/main">
               <a:ext uri="{FF2B5EF4-FFF2-40B4-BE49-F238E27FC236}">
-                <a16:creationId xmlns:a16="http://schemas.microsoft.com/office/drawing/2014/main" id="{E6AF4F5A-FFFA-43BF-8D96-8A993FD2C322}"/>
+                <a16:creationId xmlns:a16="http://schemas.microsoft.com/office/drawing/2014/main" id="{62716077-965F-4876-902E-3A153A40FA57}"/>
               </a:ext>
             </a:extLst>
           </p:cNvPr>
@@ -12031,7 +12038,7 @@
           <p:cNvPr id="42" name="Text 40">
             <a:extLst xmlns:a="http://schemas.openxmlformats.org/drawingml/2006/main">
               <a:ext uri="{FF2B5EF4-FFF2-40B4-BE49-F238E27FC236}">
-                <a16:creationId xmlns:a16="http://schemas.microsoft.com/office/drawing/2014/main" id="{48DE27C5-CD99-4B67-A03E-3D1CD14EE4F4}"/>
+                <a16:creationId xmlns:a16="http://schemas.microsoft.com/office/drawing/2014/main" id="{02EF7568-13FB-4DE6-94F6-6F9FD6074ACE}"/>
               </a:ext>
             </a:extLst>
           </p:cNvPr>
@@ -12078,7 +12085,7 @@
           <p:cNvPr id="43" name="Text 41">
             <a:extLst xmlns:a="http://schemas.openxmlformats.org/drawingml/2006/main">
               <a:ext uri="{FF2B5EF4-FFF2-40B4-BE49-F238E27FC236}">
-                <a16:creationId xmlns:a16="http://schemas.microsoft.com/office/drawing/2014/main" id="{1B9F8DAE-F691-4D94-B716-A57DA3B57B44}"/>
+                <a16:creationId xmlns:a16="http://schemas.microsoft.com/office/drawing/2014/main" id="{6A7790C6-9833-4EA2-B34E-BAA61A51667B}"/>
               </a:ext>
             </a:extLst>
           </p:cNvPr>
@@ -12125,7 +12132,7 @@
           <p:cNvPr id="44" name="Text 42">
             <a:extLst xmlns:a="http://schemas.openxmlformats.org/drawingml/2006/main">
               <a:ext uri="{FF2B5EF4-FFF2-40B4-BE49-F238E27FC236}">
-                <a16:creationId xmlns:a16="http://schemas.microsoft.com/office/drawing/2014/main" id="{3D472D51-40ED-47C9-B9B0-34129129A33B}"/>
+                <a16:creationId xmlns:a16="http://schemas.microsoft.com/office/drawing/2014/main" id="{86144529-7118-4D52-99A8-76020887D9A9}"/>
               </a:ext>
             </a:extLst>
           </p:cNvPr>
@@ -12172,7 +12179,7 @@
           <p:cNvPr id="45" name="Shape 43">
             <a:extLst xmlns:a="http://schemas.openxmlformats.org/drawingml/2006/main">
               <a:ext uri="{FF2B5EF4-FFF2-40B4-BE49-F238E27FC236}">
-                <a16:creationId xmlns:a16="http://schemas.microsoft.com/office/drawing/2014/main" id="{4FAEF741-9AF8-494A-8E59-7EEE94D9EBDD}"/>
+                <a16:creationId xmlns:a16="http://schemas.microsoft.com/office/drawing/2014/main" id="{F1A1BFA3-7F6D-404B-B86A-0A4D2DEBB41C}"/>
               </a:ext>
             </a:extLst>
           </p:cNvPr>
@@ -12207,7 +12214,7 @@
           <p:cNvPr id="46" name="Text 44">
             <a:extLst xmlns:a="http://schemas.openxmlformats.org/drawingml/2006/main">
               <a:ext uri="{FF2B5EF4-FFF2-40B4-BE49-F238E27FC236}">
-                <a16:creationId xmlns:a16="http://schemas.microsoft.com/office/drawing/2014/main" id="{8CD0400D-8E16-4AEE-8E27-848261770D4E}"/>
+                <a16:creationId xmlns:a16="http://schemas.microsoft.com/office/drawing/2014/main" id="{C56B72D4-9F4B-4EFE-97BB-2141A601EF3B}"/>
               </a:ext>
             </a:extLst>
           </p:cNvPr>
@@ -12254,7 +12261,7 @@
           <p:cNvPr id="47" name="Text 45">
             <a:extLst xmlns:a="http://schemas.openxmlformats.org/drawingml/2006/main">
               <a:ext uri="{FF2B5EF4-FFF2-40B4-BE49-F238E27FC236}">
-                <a16:creationId xmlns:a16="http://schemas.microsoft.com/office/drawing/2014/main" id="{60A10F16-8335-4086-A931-382B4F4C92B8}"/>
+                <a16:creationId xmlns:a16="http://schemas.microsoft.com/office/drawing/2014/main" id="{C63E27C0-CC62-4BE3-B73A-E5D79946D7AC}"/>
               </a:ext>
             </a:extLst>
           </p:cNvPr>
@@ -12301,7 +12308,7 @@
           <p:cNvPr id="48" name="Text 46">
             <a:extLst xmlns:a="http://schemas.openxmlformats.org/drawingml/2006/main">
               <a:ext uri="{FF2B5EF4-FFF2-40B4-BE49-F238E27FC236}">
-                <a16:creationId xmlns:a16="http://schemas.microsoft.com/office/drawing/2014/main" id="{35629A7E-19C9-4727-98A9-C0E6BB70D426}"/>
+                <a16:creationId xmlns:a16="http://schemas.microsoft.com/office/drawing/2014/main" id="{16585625-DB1E-4603-B165-1AA20CE40D72}"/>
               </a:ext>
             </a:extLst>
           </p:cNvPr>
@@ -12346,7 +12353,7 @@
     </p:spTree>
     <p:extLst>
       <p:ext uri="{BB962C8B-B14F-4D97-AF65-F5344CB8AC3E}">
-        <p14:creationId xmlns:p14="http://schemas.microsoft.com/office/powerpoint/2010/main" val="1518200311"/>
+        <p14:creationId xmlns:p14="http://schemas.microsoft.com/office/powerpoint/2010/main" val="5239606"/>
       </p:ext>
     </p:extLst>
   </p:cSld>
@@ -12377,7 +12384,7 @@
           <p:cNvPr id="2" name="Text 0">
             <a:extLst xmlns:a="http://schemas.openxmlformats.org/drawingml/2006/main">
               <a:ext uri="{FF2B5EF4-FFF2-40B4-BE49-F238E27FC236}">
-                <a16:creationId xmlns:a16="http://schemas.microsoft.com/office/drawing/2014/main" id="{F5ACA4DF-83DE-43F9-AAF0-80C3395E2668}"/>
+                <a16:creationId xmlns:a16="http://schemas.microsoft.com/office/drawing/2014/main" id="{591B8F6F-03DE-47D3-9314-08CA8EF9AB2E}"/>
               </a:ext>
             </a:extLst>
           </p:cNvPr>
@@ -12424,7 +12431,7 @@
           <p:cNvPr id="3" name="Text 1">
             <a:extLst xmlns:a="http://schemas.openxmlformats.org/drawingml/2006/main">
               <a:ext uri="{FF2B5EF4-FFF2-40B4-BE49-F238E27FC236}">
-                <a16:creationId xmlns:a16="http://schemas.microsoft.com/office/drawing/2014/main" id="{5C6758EA-86C4-4EB1-868B-57F7C5922F79}"/>
+                <a16:creationId xmlns:a16="http://schemas.microsoft.com/office/drawing/2014/main" id="{4D45C8AB-A112-437A-86E7-DE84B83D51F4}"/>
               </a:ext>
             </a:extLst>
           </p:cNvPr>
@@ -12471,7 +12478,7 @@
           <p:cNvPr id="4" name="Shape 2">
             <a:extLst xmlns:a="http://schemas.openxmlformats.org/drawingml/2006/main">
               <a:ext uri="{FF2B5EF4-FFF2-40B4-BE49-F238E27FC236}">
-                <a16:creationId xmlns:a16="http://schemas.microsoft.com/office/drawing/2014/main" id="{D3CB7F61-BE54-4389-8D1F-1A8CF0315D47}"/>
+                <a16:creationId xmlns:a16="http://schemas.microsoft.com/office/drawing/2014/main" id="{4F5F9B6A-BB03-4598-A617-337C5325D915}"/>
               </a:ext>
             </a:extLst>
           </p:cNvPr>
@@ -12506,7 +12513,7 @@
           <p:cNvPr id="5" name="Text 3">
             <a:extLst xmlns:a="http://schemas.openxmlformats.org/drawingml/2006/main">
               <a:ext uri="{FF2B5EF4-FFF2-40B4-BE49-F238E27FC236}">
-                <a16:creationId xmlns:a16="http://schemas.microsoft.com/office/drawing/2014/main" id="{33E60A2B-0F88-4876-8D27-4718E5E1C3F6}"/>
+                <a16:creationId xmlns:a16="http://schemas.microsoft.com/office/drawing/2014/main" id="{224B4B50-2B60-4AB7-BCA6-42039E800BF2}"/>
               </a:ext>
             </a:extLst>
           </p:cNvPr>
@@ -12553,7 +12560,7 @@
           <p:cNvPr id="6" name="Shape 4">
             <a:extLst xmlns:a="http://schemas.openxmlformats.org/drawingml/2006/main">
               <a:ext uri="{FF2B5EF4-FFF2-40B4-BE49-F238E27FC236}">
-                <a16:creationId xmlns:a16="http://schemas.microsoft.com/office/drawing/2014/main" id="{207E249F-6ECC-4CB0-9165-F6503FA3EEF8}"/>
+                <a16:creationId xmlns:a16="http://schemas.microsoft.com/office/drawing/2014/main" id="{F929B08B-0177-4ED5-81EC-D003998BBF08}"/>
               </a:ext>
             </a:extLst>
           </p:cNvPr>
@@ -12584,7 +12591,7 @@
           <p:cNvPr id="7" name="Shape 5">
             <a:extLst xmlns:a="http://schemas.openxmlformats.org/drawingml/2006/main">
               <a:ext uri="{FF2B5EF4-FFF2-40B4-BE49-F238E27FC236}">
-                <a16:creationId xmlns:a16="http://schemas.microsoft.com/office/drawing/2014/main" id="{EA81EB10-7A1F-4B45-BBCD-C64DE025F83D}"/>
+                <a16:creationId xmlns:a16="http://schemas.microsoft.com/office/drawing/2014/main" id="{14ED56D4-769F-4466-B0C5-750F03E23720}"/>
               </a:ext>
             </a:extLst>
           </p:cNvPr>
@@ -12619,7 +12626,7 @@
           <p:cNvPr id="8" name="Text 6">
             <a:extLst xmlns:a="http://schemas.openxmlformats.org/drawingml/2006/main">
               <a:ext uri="{FF2B5EF4-FFF2-40B4-BE49-F238E27FC236}">
-                <a16:creationId xmlns:a16="http://schemas.microsoft.com/office/drawing/2014/main" id="{2C6000B9-2FFD-4A8A-8441-7C0F473C2598}"/>
+                <a16:creationId xmlns:a16="http://schemas.microsoft.com/office/drawing/2014/main" id="{D4562A19-F393-490F-826A-BE65DAEB8873}"/>
               </a:ext>
             </a:extLst>
           </p:cNvPr>
@@ -12666,7 +12673,7 @@
           <p:cNvPr id="9" name="Text 7">
             <a:extLst xmlns:a="http://schemas.openxmlformats.org/drawingml/2006/main">
               <a:ext uri="{FF2B5EF4-FFF2-40B4-BE49-F238E27FC236}">
-                <a16:creationId xmlns:a16="http://schemas.microsoft.com/office/drawing/2014/main" id="{F8CEAFE6-AD85-456D-B135-C1F127A1962E}"/>
+                <a16:creationId xmlns:a16="http://schemas.microsoft.com/office/drawing/2014/main" id="{E96C3642-FAC8-4B91-B5DA-F31E22328909}"/>
               </a:ext>
             </a:extLst>
           </p:cNvPr>
@@ -12713,7 +12720,7 @@
           <p:cNvPr id="10" name="Text 8">
             <a:extLst xmlns:a="http://schemas.openxmlformats.org/drawingml/2006/main">
               <a:ext uri="{FF2B5EF4-FFF2-40B4-BE49-F238E27FC236}">
-                <a16:creationId xmlns:a16="http://schemas.microsoft.com/office/drawing/2014/main" id="{00CD9B32-E9CC-40C5-8091-C763905D019F}"/>
+                <a16:creationId xmlns:a16="http://schemas.microsoft.com/office/drawing/2014/main" id="{1D50D222-5992-4F04-8FAD-D654D2AFC245}"/>
               </a:ext>
             </a:extLst>
           </p:cNvPr>
@@ -12760,7 +12767,7 @@
           <p:cNvPr id="11" name="Shape 9">
             <a:extLst xmlns:a="http://schemas.openxmlformats.org/drawingml/2006/main">
               <a:ext uri="{FF2B5EF4-FFF2-40B4-BE49-F238E27FC236}">
-                <a16:creationId xmlns:a16="http://schemas.microsoft.com/office/drawing/2014/main" id="{4BBBF6BD-EA80-4A18-81E3-3FA153C0F4DC}"/>
+                <a16:creationId xmlns:a16="http://schemas.microsoft.com/office/drawing/2014/main" id="{C8295612-39B5-46B1-9AC0-BBE29DE5E1B4}"/>
               </a:ext>
             </a:extLst>
           </p:cNvPr>
@@ -12795,7 +12802,7 @@
           <p:cNvPr id="12" name="Text 10">
             <a:extLst xmlns:a="http://schemas.openxmlformats.org/drawingml/2006/main">
               <a:ext uri="{FF2B5EF4-FFF2-40B4-BE49-F238E27FC236}">
-                <a16:creationId xmlns:a16="http://schemas.microsoft.com/office/drawing/2014/main" id="{758F2E1D-EADD-45C3-B23E-70F7AD86A89F}"/>
+                <a16:creationId xmlns:a16="http://schemas.microsoft.com/office/drawing/2014/main" id="{8599D4C6-E1D4-43EC-B705-0C5435A240FC}"/>
               </a:ext>
             </a:extLst>
           </p:cNvPr>
@@ -12842,7 +12849,7 @@
           <p:cNvPr id="13" name="Text 11">
             <a:extLst xmlns:a="http://schemas.openxmlformats.org/drawingml/2006/main">
               <a:ext uri="{FF2B5EF4-FFF2-40B4-BE49-F238E27FC236}">
-                <a16:creationId xmlns:a16="http://schemas.microsoft.com/office/drawing/2014/main" id="{EE1B417C-6515-4AE8-9134-75FBD3509B1C}"/>
+                <a16:creationId xmlns:a16="http://schemas.microsoft.com/office/drawing/2014/main" id="{009D7D2C-A8A5-4387-9F31-D6C4B922DD96}"/>
               </a:ext>
             </a:extLst>
           </p:cNvPr>
@@ -12889,7 +12896,7 @@
           <p:cNvPr id="14" name="Text 12">
             <a:extLst xmlns:a="http://schemas.openxmlformats.org/drawingml/2006/main">
               <a:ext uri="{FF2B5EF4-FFF2-40B4-BE49-F238E27FC236}">
-                <a16:creationId xmlns:a16="http://schemas.microsoft.com/office/drawing/2014/main" id="{BA478217-96FD-4495-8B4E-7E79C9D3DE2F}"/>
+                <a16:creationId xmlns:a16="http://schemas.microsoft.com/office/drawing/2014/main" id="{552B776D-4B2A-41D4-A9C1-B612521F383F}"/>
               </a:ext>
             </a:extLst>
           </p:cNvPr>
@@ -12936,7 +12943,7 @@
           <p:cNvPr id="15" name="Shape 13">
             <a:extLst xmlns:a="http://schemas.openxmlformats.org/drawingml/2006/main">
               <a:ext uri="{FF2B5EF4-FFF2-40B4-BE49-F238E27FC236}">
-                <a16:creationId xmlns:a16="http://schemas.microsoft.com/office/drawing/2014/main" id="{80F7886C-3771-4796-B378-76222C806458}"/>
+                <a16:creationId xmlns:a16="http://schemas.microsoft.com/office/drawing/2014/main" id="{77D49F28-B718-4F8B-844E-404F22A937E7}"/>
               </a:ext>
             </a:extLst>
           </p:cNvPr>
@@ -12971,7 +12978,7 @@
           <p:cNvPr id="16" name="Text 14">
             <a:extLst xmlns:a="http://schemas.openxmlformats.org/drawingml/2006/main">
               <a:ext uri="{FF2B5EF4-FFF2-40B4-BE49-F238E27FC236}">
-                <a16:creationId xmlns:a16="http://schemas.microsoft.com/office/drawing/2014/main" id="{EB8BD112-0991-47CA-891E-4EC444594E6B}"/>
+                <a16:creationId xmlns:a16="http://schemas.microsoft.com/office/drawing/2014/main" id="{E91D0773-55C9-483C-85B1-BEA351A31C9E}"/>
               </a:ext>
             </a:extLst>
           </p:cNvPr>
@@ -13018,7 +13025,7 @@
           <p:cNvPr id="17" name="Text 15">
             <a:extLst xmlns:a="http://schemas.openxmlformats.org/drawingml/2006/main">
               <a:ext uri="{FF2B5EF4-FFF2-40B4-BE49-F238E27FC236}">
-                <a16:creationId xmlns:a16="http://schemas.microsoft.com/office/drawing/2014/main" id="{62B699CD-66B8-429D-AB76-80D5E97560EC}"/>
+                <a16:creationId xmlns:a16="http://schemas.microsoft.com/office/drawing/2014/main" id="{C241A2E6-1E5A-48F8-8DEC-1A24E66CC56F}"/>
               </a:ext>
             </a:extLst>
           </p:cNvPr>
@@ -13065,7 +13072,7 @@
           <p:cNvPr id="18" name="Text 16">
             <a:extLst xmlns:a="http://schemas.openxmlformats.org/drawingml/2006/main">
               <a:ext uri="{FF2B5EF4-FFF2-40B4-BE49-F238E27FC236}">
-                <a16:creationId xmlns:a16="http://schemas.microsoft.com/office/drawing/2014/main" id="{03B5C7AC-10B9-4C4F-9C8C-69A655B6E7A6}"/>
+                <a16:creationId xmlns:a16="http://schemas.microsoft.com/office/drawing/2014/main" id="{D26629BE-D111-4DDA-98CE-22B657FB2C33}"/>
               </a:ext>
             </a:extLst>
           </p:cNvPr>
@@ -13112,7 +13119,7 @@
           <p:cNvPr id="19" name="Shape 17">
             <a:extLst xmlns:a="http://schemas.openxmlformats.org/drawingml/2006/main">
               <a:ext uri="{FF2B5EF4-FFF2-40B4-BE49-F238E27FC236}">
-                <a16:creationId xmlns:a16="http://schemas.microsoft.com/office/drawing/2014/main" id="{53721670-ABF8-4E6A-BD3E-522D62A1D77D}"/>
+                <a16:creationId xmlns:a16="http://schemas.microsoft.com/office/drawing/2014/main" id="{5A23A21D-DFBA-4B35-9CE0-36D481420A39}"/>
               </a:ext>
             </a:extLst>
           </p:cNvPr>
@@ -13147,7 +13154,7 @@
           <p:cNvPr id="20" name="Text 18">
             <a:extLst xmlns:a="http://schemas.openxmlformats.org/drawingml/2006/main">
               <a:ext uri="{FF2B5EF4-FFF2-40B4-BE49-F238E27FC236}">
-                <a16:creationId xmlns:a16="http://schemas.microsoft.com/office/drawing/2014/main" id="{7B6932F9-5684-4AD6-9993-C426754F3BE6}"/>
+                <a16:creationId xmlns:a16="http://schemas.microsoft.com/office/drawing/2014/main" id="{13F73AF6-5E72-40D7-A5D3-3C67A12B61B4}"/>
               </a:ext>
             </a:extLst>
           </p:cNvPr>
@@ -13194,7 +13201,7 @@
           <p:cNvPr id="21" name="Text 19">
             <a:extLst xmlns:a="http://schemas.openxmlformats.org/drawingml/2006/main">
               <a:ext uri="{FF2B5EF4-FFF2-40B4-BE49-F238E27FC236}">
-                <a16:creationId xmlns:a16="http://schemas.microsoft.com/office/drawing/2014/main" id="{EB62B5E0-73B6-4F11-8C5F-81BB975B86AA}"/>
+                <a16:creationId xmlns:a16="http://schemas.microsoft.com/office/drawing/2014/main" id="{270A24FF-A6AB-4B5F-A9BE-2987B85F6373}"/>
               </a:ext>
             </a:extLst>
           </p:cNvPr>
@@ -13241,7 +13248,7 @@
           <p:cNvPr id="22" name="Text 20">
             <a:extLst xmlns:a="http://schemas.openxmlformats.org/drawingml/2006/main">
               <a:ext uri="{FF2B5EF4-FFF2-40B4-BE49-F238E27FC236}">
-                <a16:creationId xmlns:a16="http://schemas.microsoft.com/office/drawing/2014/main" id="{A843B18F-12D6-472C-8124-6F6B19E193A1}"/>
+                <a16:creationId xmlns:a16="http://schemas.microsoft.com/office/drawing/2014/main" id="{D7ADA91D-DCBA-4C25-ACEC-CA63F9A2A73B}"/>
               </a:ext>
             </a:extLst>
           </p:cNvPr>
@@ -13288,7 +13295,7 @@
           <p:cNvPr id="23" name="Shape 21">
             <a:extLst xmlns:a="http://schemas.openxmlformats.org/drawingml/2006/main">
               <a:ext uri="{FF2B5EF4-FFF2-40B4-BE49-F238E27FC236}">
-                <a16:creationId xmlns:a16="http://schemas.microsoft.com/office/drawing/2014/main" id="{885120B5-8097-43B4-B0CC-2D4EA681C885}"/>
+                <a16:creationId xmlns:a16="http://schemas.microsoft.com/office/drawing/2014/main" id="{A497EC2B-7BDE-40C6-8266-FFAECCBB48EC}"/>
               </a:ext>
             </a:extLst>
           </p:cNvPr>
@@ -13323,7 +13330,7 @@
           <p:cNvPr id="24" name="Text 22">
             <a:extLst xmlns:a="http://schemas.openxmlformats.org/drawingml/2006/main">
               <a:ext uri="{FF2B5EF4-FFF2-40B4-BE49-F238E27FC236}">
-                <a16:creationId xmlns:a16="http://schemas.microsoft.com/office/drawing/2014/main" id="{ADA23B00-5192-439A-935C-2A45038E3F06}"/>
+                <a16:creationId xmlns:a16="http://schemas.microsoft.com/office/drawing/2014/main" id="{096DB532-7B2E-40AB-B09B-0D21290F4B17}"/>
               </a:ext>
             </a:extLst>
           </p:cNvPr>
@@ -13370,7 +13377,7 @@
           <p:cNvPr id="25" name="Text 23">
             <a:extLst xmlns:a="http://schemas.openxmlformats.org/drawingml/2006/main">
               <a:ext uri="{FF2B5EF4-FFF2-40B4-BE49-F238E27FC236}">
-                <a16:creationId xmlns:a16="http://schemas.microsoft.com/office/drawing/2014/main" id="{E8C0173B-8F44-4402-A743-CFE2B21F1D39}"/>
+                <a16:creationId xmlns:a16="http://schemas.microsoft.com/office/drawing/2014/main" id="{EB94B980-F7BF-4D31-93C1-B45DEEF50BFA}"/>
               </a:ext>
             </a:extLst>
           </p:cNvPr>
@@ -13417,7 +13424,7 @@
           <p:cNvPr id="26" name="Shape 24">
             <a:extLst xmlns:a="http://schemas.openxmlformats.org/drawingml/2006/main">
               <a:ext uri="{FF2B5EF4-FFF2-40B4-BE49-F238E27FC236}">
-                <a16:creationId xmlns:a16="http://schemas.microsoft.com/office/drawing/2014/main" id="{C2971E29-FDB6-4336-A62B-8DC28EFA9AE5}"/>
+                <a16:creationId xmlns:a16="http://schemas.microsoft.com/office/drawing/2014/main" id="{44374C33-4773-43FF-91E7-D5C2439902F2}"/>
               </a:ext>
             </a:extLst>
           </p:cNvPr>
@@ -13452,7 +13459,7 @@
           <p:cNvPr id="27" name="Text 25">
             <a:extLst xmlns:a="http://schemas.openxmlformats.org/drawingml/2006/main">
               <a:ext uri="{FF2B5EF4-FFF2-40B4-BE49-F238E27FC236}">
-                <a16:creationId xmlns:a16="http://schemas.microsoft.com/office/drawing/2014/main" id="{10F4805A-3583-4DF6-8E65-14CE24F1CFDA}"/>
+                <a16:creationId xmlns:a16="http://schemas.microsoft.com/office/drawing/2014/main" id="{B9B1343F-4DEE-47B9-8C3D-C07BD745C3DA}"/>
               </a:ext>
             </a:extLst>
           </p:cNvPr>
@@ -13499,7 +13506,7 @@
           <p:cNvPr id="28" name="Shape 26">
             <a:extLst xmlns:a="http://schemas.openxmlformats.org/drawingml/2006/main">
               <a:ext uri="{FF2B5EF4-FFF2-40B4-BE49-F238E27FC236}">
-                <a16:creationId xmlns:a16="http://schemas.microsoft.com/office/drawing/2014/main" id="{3108CB52-B5A8-4CB7-AFDC-CCC7822C0177}"/>
+                <a16:creationId xmlns:a16="http://schemas.microsoft.com/office/drawing/2014/main" id="{AC069ABB-2039-4863-8EC7-B785FE6817A8}"/>
               </a:ext>
             </a:extLst>
           </p:cNvPr>
@@ -13534,7 +13541,7 @@
           <p:cNvPr id="29" name="Text 27">
             <a:extLst xmlns:a="http://schemas.openxmlformats.org/drawingml/2006/main">
               <a:ext uri="{FF2B5EF4-FFF2-40B4-BE49-F238E27FC236}">
-                <a16:creationId xmlns:a16="http://schemas.microsoft.com/office/drawing/2014/main" id="{3D9A3968-BE03-4F68-A918-0688740A0C14}"/>
+                <a16:creationId xmlns:a16="http://schemas.microsoft.com/office/drawing/2014/main" id="{02F03BB9-6C1F-4CC7-9E35-B050E63C6422}"/>
               </a:ext>
             </a:extLst>
           </p:cNvPr>
@@ -13581,7 +13588,7 @@
           <p:cNvPr id="30" name="Text 28">
             <a:extLst xmlns:a="http://schemas.openxmlformats.org/drawingml/2006/main">
               <a:ext uri="{FF2B5EF4-FFF2-40B4-BE49-F238E27FC236}">
-                <a16:creationId xmlns:a16="http://schemas.microsoft.com/office/drawing/2014/main" id="{206613B5-E0A4-4A86-9B16-0DB5B06C92E3}"/>
+                <a16:creationId xmlns:a16="http://schemas.microsoft.com/office/drawing/2014/main" id="{5246182A-67EE-4D71-9834-5D50DA0722AE}"/>
               </a:ext>
             </a:extLst>
           </p:cNvPr>
@@ -13628,7 +13635,7 @@
           <p:cNvPr id="31" name="Shape 29">
             <a:extLst xmlns:a="http://schemas.openxmlformats.org/drawingml/2006/main">
               <a:ext uri="{FF2B5EF4-FFF2-40B4-BE49-F238E27FC236}">
-                <a16:creationId xmlns:a16="http://schemas.microsoft.com/office/drawing/2014/main" id="{B2875348-47CC-4CE4-BE3E-8D9D63374F6A}"/>
+                <a16:creationId xmlns:a16="http://schemas.microsoft.com/office/drawing/2014/main" id="{C25C4B80-FAE4-4F8D-86C4-4B96B0CF59A0}"/>
               </a:ext>
             </a:extLst>
           </p:cNvPr>
@@ -13663,7 +13670,7 @@
           <p:cNvPr id="32" name="Text 30">
             <a:extLst xmlns:a="http://schemas.openxmlformats.org/drawingml/2006/main">
               <a:ext uri="{FF2B5EF4-FFF2-40B4-BE49-F238E27FC236}">
-                <a16:creationId xmlns:a16="http://schemas.microsoft.com/office/drawing/2014/main" id="{30C34956-457F-4F97-965B-24B1DB854D03}"/>
+                <a16:creationId xmlns:a16="http://schemas.microsoft.com/office/drawing/2014/main" id="{3154CBD1-1F04-4F54-A91F-DDBCD1C80028}"/>
               </a:ext>
             </a:extLst>
           </p:cNvPr>
@@ -13710,7 +13717,7 @@
           <p:cNvPr id="33" name="Shape 31">
             <a:extLst xmlns:a="http://schemas.openxmlformats.org/drawingml/2006/main">
               <a:ext uri="{FF2B5EF4-FFF2-40B4-BE49-F238E27FC236}">
-                <a16:creationId xmlns:a16="http://schemas.microsoft.com/office/drawing/2014/main" id="{5531EB6D-87D2-4F04-A0F0-9F28DFE307C6}"/>
+                <a16:creationId xmlns:a16="http://schemas.microsoft.com/office/drawing/2014/main" id="{FAF1A933-AB74-411F-8F4F-D89358A84A95}"/>
               </a:ext>
             </a:extLst>
           </p:cNvPr>
@@ -13745,7 +13752,7 @@
           <p:cNvPr id="34" name="Text 32">
             <a:extLst xmlns:a="http://schemas.openxmlformats.org/drawingml/2006/main">
               <a:ext uri="{FF2B5EF4-FFF2-40B4-BE49-F238E27FC236}">
-                <a16:creationId xmlns:a16="http://schemas.microsoft.com/office/drawing/2014/main" id="{F33C691C-BB94-43A8-94A5-869DB57BE8E4}"/>
+                <a16:creationId xmlns:a16="http://schemas.microsoft.com/office/drawing/2014/main" id="{CFCAE51D-D5BB-4244-93FB-F39021500856}"/>
               </a:ext>
             </a:extLst>
           </p:cNvPr>
@@ -13792,7 +13799,7 @@
           <p:cNvPr id="35" name="Text 33">
             <a:extLst xmlns:a="http://schemas.openxmlformats.org/drawingml/2006/main">
               <a:ext uri="{FF2B5EF4-FFF2-40B4-BE49-F238E27FC236}">
-                <a16:creationId xmlns:a16="http://schemas.microsoft.com/office/drawing/2014/main" id="{FC20E7A3-E0A1-4166-A8A7-942E6A4CE33E}"/>
+                <a16:creationId xmlns:a16="http://schemas.microsoft.com/office/drawing/2014/main" id="{EF0C13AB-8782-40D8-8748-752A6D1AE370}"/>
               </a:ext>
             </a:extLst>
           </p:cNvPr>
@@ -13839,7 +13846,7 @@
           <p:cNvPr id="36" name="Shape 34">
             <a:extLst xmlns:a="http://schemas.openxmlformats.org/drawingml/2006/main">
               <a:ext uri="{FF2B5EF4-FFF2-40B4-BE49-F238E27FC236}">
-                <a16:creationId xmlns:a16="http://schemas.microsoft.com/office/drawing/2014/main" id="{B23E8660-D02A-4A3E-BEA0-1638E1732ED0}"/>
+                <a16:creationId xmlns:a16="http://schemas.microsoft.com/office/drawing/2014/main" id="{732B88B7-58D3-4360-BE93-145FB8ADD64B}"/>
               </a:ext>
             </a:extLst>
           </p:cNvPr>
@@ -13874,7 +13881,7 @@
           <p:cNvPr id="37" name="Text 35">
             <a:extLst xmlns:a="http://schemas.openxmlformats.org/drawingml/2006/main">
               <a:ext uri="{FF2B5EF4-FFF2-40B4-BE49-F238E27FC236}">
-                <a16:creationId xmlns:a16="http://schemas.microsoft.com/office/drawing/2014/main" id="{58A80F6A-AED6-4348-99DB-A8352E5F3E59}"/>
+                <a16:creationId xmlns:a16="http://schemas.microsoft.com/office/drawing/2014/main" id="{B6E306D2-DC3F-4E2A-A501-8C2A5D796CE0}"/>
               </a:ext>
             </a:extLst>
           </p:cNvPr>
@@ -13921,7 +13928,7 @@
           <p:cNvPr id="38" name="Shape 36">
             <a:extLst xmlns:a="http://schemas.openxmlformats.org/drawingml/2006/main">
               <a:ext uri="{FF2B5EF4-FFF2-40B4-BE49-F238E27FC236}">
-                <a16:creationId xmlns:a16="http://schemas.microsoft.com/office/drawing/2014/main" id="{243FE7FB-95BB-4370-AA9B-20B4DC18E4AD}"/>
+                <a16:creationId xmlns:a16="http://schemas.microsoft.com/office/drawing/2014/main" id="{F81A47B3-F4B9-4050-B4EF-C823043BA22E}"/>
               </a:ext>
             </a:extLst>
           </p:cNvPr>
@@ -13956,7 +13963,7 @@
           <p:cNvPr id="39" name="Text 37">
             <a:extLst xmlns:a="http://schemas.openxmlformats.org/drawingml/2006/main">
               <a:ext uri="{FF2B5EF4-FFF2-40B4-BE49-F238E27FC236}">
-                <a16:creationId xmlns:a16="http://schemas.microsoft.com/office/drawing/2014/main" id="{322547DC-12BE-4A70-B476-A325ED083288}"/>
+                <a16:creationId xmlns:a16="http://schemas.microsoft.com/office/drawing/2014/main" id="{AA63ADD0-4149-4E83-9E15-A41DDE113051}"/>
               </a:ext>
             </a:extLst>
           </p:cNvPr>
@@ -14003,7 +14010,7 @@
           <p:cNvPr id="40" name="Text 38">
             <a:extLst xmlns:a="http://schemas.openxmlformats.org/drawingml/2006/main">
               <a:ext uri="{FF2B5EF4-FFF2-40B4-BE49-F238E27FC236}">
-                <a16:creationId xmlns:a16="http://schemas.microsoft.com/office/drawing/2014/main" id="{D1AA9193-25D9-443D-99E2-FF4F57F10991}"/>
+                <a16:creationId xmlns:a16="http://schemas.microsoft.com/office/drawing/2014/main" id="{32A8B628-F64F-423C-A2AA-6DFD4902447A}"/>
               </a:ext>
             </a:extLst>
           </p:cNvPr>
@@ -14050,7 +14057,7 @@
           <p:cNvPr id="41" name="Text 39">
             <a:extLst xmlns:a="http://schemas.openxmlformats.org/drawingml/2006/main">
               <a:ext uri="{FF2B5EF4-FFF2-40B4-BE49-F238E27FC236}">
-                <a16:creationId xmlns:a16="http://schemas.microsoft.com/office/drawing/2014/main" id="{3936DA71-5CF1-4333-B682-D1028141F373}"/>
+                <a16:creationId xmlns:a16="http://schemas.microsoft.com/office/drawing/2014/main" id="{54487264-5CE4-4F2B-8F30-5B92A503FFC1}"/>
               </a:ext>
             </a:extLst>
           </p:cNvPr>
@@ -14095,7 +14102,7 @@
     </p:spTree>
     <p:extLst>
       <p:ext uri="{BB962C8B-B14F-4D97-AF65-F5344CB8AC3E}">
-        <p14:creationId xmlns:p14="http://schemas.microsoft.com/office/powerpoint/2010/main" val="1198293313"/>
+        <p14:creationId xmlns:p14="http://schemas.microsoft.com/office/powerpoint/2010/main" val="2103368369"/>
       </p:ext>
     </p:extLst>
   </p:cSld>
@@ -14126,7 +14133,7 @@
           <p:cNvPr id="2" name="Text 0">
             <a:extLst xmlns:a="http://schemas.openxmlformats.org/drawingml/2006/main">
               <a:ext uri="{FF2B5EF4-FFF2-40B4-BE49-F238E27FC236}">
-                <a16:creationId xmlns:a16="http://schemas.microsoft.com/office/drawing/2014/main" id="{59BB1F91-DC85-4E0C-9964-167002CD2F0A}"/>
+                <a16:creationId xmlns:a16="http://schemas.microsoft.com/office/drawing/2014/main" id="{AB22ADC5-7F44-43A5-91D1-CABF7557C000}"/>
               </a:ext>
             </a:extLst>
           </p:cNvPr>
@@ -14173,7 +14180,7 @@
           <p:cNvPr id="3" name="Text 1">
             <a:extLst xmlns:a="http://schemas.openxmlformats.org/drawingml/2006/main">
               <a:ext uri="{FF2B5EF4-FFF2-40B4-BE49-F238E27FC236}">
-                <a16:creationId xmlns:a16="http://schemas.microsoft.com/office/drawing/2014/main" id="{63372A9D-56B0-4CD8-85ED-4C02677F12A0}"/>
+                <a16:creationId xmlns:a16="http://schemas.microsoft.com/office/drawing/2014/main" id="{498B714B-C854-4321-AAE8-F6124888DC57}"/>
               </a:ext>
             </a:extLst>
           </p:cNvPr>
@@ -14220,7 +14227,7 @@
           <p:cNvPr id="4" name="Shape 2">
             <a:extLst xmlns:a="http://schemas.openxmlformats.org/drawingml/2006/main">
               <a:ext uri="{FF2B5EF4-FFF2-40B4-BE49-F238E27FC236}">
-                <a16:creationId xmlns:a16="http://schemas.microsoft.com/office/drawing/2014/main" id="{2D744AA7-DAE1-4EC2-AE0A-F772CF9FDF17}"/>
+                <a16:creationId xmlns:a16="http://schemas.microsoft.com/office/drawing/2014/main" id="{DD7B0B91-C89E-4A2C-A62E-02D9321B9DE9}"/>
               </a:ext>
             </a:extLst>
           </p:cNvPr>
@@ -14255,7 +14262,7 @@
           <p:cNvPr id="5" name="Text 3">
             <a:extLst xmlns:a="http://schemas.openxmlformats.org/drawingml/2006/main">
               <a:ext uri="{FF2B5EF4-FFF2-40B4-BE49-F238E27FC236}">
-                <a16:creationId xmlns:a16="http://schemas.microsoft.com/office/drawing/2014/main" id="{3624463A-3C6E-4C15-8DFB-017EF6CC3A45}"/>
+                <a16:creationId xmlns:a16="http://schemas.microsoft.com/office/drawing/2014/main" id="{8CBC0E2A-2B07-49FD-B247-F2C91438E2C0}"/>
               </a:ext>
             </a:extLst>
           </p:cNvPr>
@@ -14302,7 +14309,7 @@
           <p:cNvPr id="6" name="Shape 4">
             <a:extLst xmlns:a="http://schemas.openxmlformats.org/drawingml/2006/main">
               <a:ext uri="{FF2B5EF4-FFF2-40B4-BE49-F238E27FC236}">
-                <a16:creationId xmlns:a16="http://schemas.microsoft.com/office/drawing/2014/main" id="{BB000874-692B-4EBA-9675-8B965DB6118D}"/>
+                <a16:creationId xmlns:a16="http://schemas.microsoft.com/office/drawing/2014/main" id="{04F8F3F8-98C0-4861-B4DF-4474D9F6344A}"/>
               </a:ext>
             </a:extLst>
           </p:cNvPr>
@@ -14333,7 +14340,7 @@
           <p:cNvPr id="7" name="Shape 5">
             <a:extLst xmlns:a="http://schemas.openxmlformats.org/drawingml/2006/main">
               <a:ext uri="{FF2B5EF4-FFF2-40B4-BE49-F238E27FC236}">
-                <a16:creationId xmlns:a16="http://schemas.microsoft.com/office/drawing/2014/main" id="{8E5378F8-0B29-48D0-9C59-22D39FF10084}"/>
+                <a16:creationId xmlns:a16="http://schemas.microsoft.com/office/drawing/2014/main" id="{FC29BA3B-E3D8-40D1-8087-586DB51814BA}"/>
               </a:ext>
             </a:extLst>
           </p:cNvPr>
@@ -14368,7 +14375,7 @@
           <p:cNvPr id="8" name="Text 6">
             <a:extLst xmlns:a="http://schemas.openxmlformats.org/drawingml/2006/main">
               <a:ext uri="{FF2B5EF4-FFF2-40B4-BE49-F238E27FC236}">
-                <a16:creationId xmlns:a16="http://schemas.microsoft.com/office/drawing/2014/main" id="{225A7A29-82A6-47FC-9CFA-7A9C186DDE4E}"/>
+                <a16:creationId xmlns:a16="http://schemas.microsoft.com/office/drawing/2014/main" id="{E2727EC9-C70E-434F-BD18-C8BB00FA7766}"/>
               </a:ext>
             </a:extLst>
           </p:cNvPr>
@@ -14415,7 +14422,7 @@
           <p:cNvPr id="9" name="Text 7">
             <a:extLst xmlns:a="http://schemas.openxmlformats.org/drawingml/2006/main">
               <a:ext uri="{FF2B5EF4-FFF2-40B4-BE49-F238E27FC236}">
-                <a16:creationId xmlns:a16="http://schemas.microsoft.com/office/drawing/2014/main" id="{68998B30-86A7-41AB-8C00-9FF1BF42E57E}"/>
+                <a16:creationId xmlns:a16="http://schemas.microsoft.com/office/drawing/2014/main" id="{77A1999D-9870-49B9-8D5F-EC06817F9FC9}"/>
               </a:ext>
             </a:extLst>
           </p:cNvPr>
@@ -14462,7 +14469,7 @@
           <p:cNvPr id="10" name="Text 8">
             <a:extLst xmlns:a="http://schemas.openxmlformats.org/drawingml/2006/main">
               <a:ext uri="{FF2B5EF4-FFF2-40B4-BE49-F238E27FC236}">
-                <a16:creationId xmlns:a16="http://schemas.microsoft.com/office/drawing/2014/main" id="{45F1DCCE-373C-485C-B958-C281BC38C574}"/>
+                <a16:creationId xmlns:a16="http://schemas.microsoft.com/office/drawing/2014/main" id="{8A2F221B-1B41-4083-8D3D-2588588AA48C}"/>
               </a:ext>
             </a:extLst>
           </p:cNvPr>
@@ -14509,7 +14516,7 @@
           <p:cNvPr id="11" name="Text 9">
             <a:extLst xmlns:a="http://schemas.openxmlformats.org/drawingml/2006/main">
               <a:ext uri="{FF2B5EF4-FFF2-40B4-BE49-F238E27FC236}">
-                <a16:creationId xmlns:a16="http://schemas.microsoft.com/office/drawing/2014/main" id="{7F7BD9DF-0DA7-4D4A-9ABE-A68A48C69E6C}"/>
+                <a16:creationId xmlns:a16="http://schemas.microsoft.com/office/drawing/2014/main" id="{78E6FBA7-B359-4E71-8D5E-EF907D5CBD33}"/>
               </a:ext>
             </a:extLst>
           </p:cNvPr>
@@ -14556,7 +14563,7 @@
           <p:cNvPr id="12" name="Text 10">
             <a:extLst xmlns:a="http://schemas.openxmlformats.org/drawingml/2006/main">
               <a:ext uri="{FF2B5EF4-FFF2-40B4-BE49-F238E27FC236}">
-                <a16:creationId xmlns:a16="http://schemas.microsoft.com/office/drawing/2014/main" id="{3A3D56CF-88A5-4C3A-8B1B-510F8157F9FB}"/>
+                <a16:creationId xmlns:a16="http://schemas.microsoft.com/office/drawing/2014/main" id="{78E7821B-1140-4F5E-904D-103274364FE5}"/>
               </a:ext>
             </a:extLst>
           </p:cNvPr>
@@ -14603,7 +14610,7 @@
           <p:cNvPr id="13" name="Text 11">
             <a:extLst xmlns:a="http://schemas.openxmlformats.org/drawingml/2006/main">
               <a:ext uri="{FF2B5EF4-FFF2-40B4-BE49-F238E27FC236}">
-                <a16:creationId xmlns:a16="http://schemas.microsoft.com/office/drawing/2014/main" id="{FD522886-EED4-455D-9316-A1DF754F136A}"/>
+                <a16:creationId xmlns:a16="http://schemas.microsoft.com/office/drawing/2014/main" id="{67C37BD5-8E3F-4900-8BAB-30A65E4421F9}"/>
               </a:ext>
             </a:extLst>
           </p:cNvPr>
@@ -14650,7 +14657,7 @@
           <p:cNvPr id="14" name="Shape 12">
             <a:extLst xmlns:a="http://schemas.openxmlformats.org/drawingml/2006/main">
               <a:ext uri="{FF2B5EF4-FFF2-40B4-BE49-F238E27FC236}">
-                <a16:creationId xmlns:a16="http://schemas.microsoft.com/office/drawing/2014/main" id="{DBACD16A-B908-4300-BCCF-B600FB8681A2}"/>
+                <a16:creationId xmlns:a16="http://schemas.microsoft.com/office/drawing/2014/main" id="{EA142BF4-383B-441C-9A8C-67C09C659BC7}"/>
               </a:ext>
             </a:extLst>
           </p:cNvPr>
@@ -14685,7 +14692,7 @@
           <p:cNvPr id="15" name="Text 13">
             <a:extLst xmlns:a="http://schemas.openxmlformats.org/drawingml/2006/main">
               <a:ext uri="{FF2B5EF4-FFF2-40B4-BE49-F238E27FC236}">
-                <a16:creationId xmlns:a16="http://schemas.microsoft.com/office/drawing/2014/main" id="{CE87C3C6-36D5-4A4F-AE41-3C27235F7442}"/>
+                <a16:creationId xmlns:a16="http://schemas.microsoft.com/office/drawing/2014/main" id="{790BB813-5E7D-420B-A39E-D41067F8E1C7}"/>
               </a:ext>
             </a:extLst>
           </p:cNvPr>
@@ -14732,7 +14739,7 @@
           <p:cNvPr id="16" name="Text 14">
             <a:extLst xmlns:a="http://schemas.openxmlformats.org/drawingml/2006/main">
               <a:ext uri="{FF2B5EF4-FFF2-40B4-BE49-F238E27FC236}">
-                <a16:creationId xmlns:a16="http://schemas.microsoft.com/office/drawing/2014/main" id="{7471F178-CFA0-449F-A38F-E7C4AFF81D85}"/>
+                <a16:creationId xmlns:a16="http://schemas.microsoft.com/office/drawing/2014/main" id="{E1D496BC-5E90-495F-BBCD-CF840AD02057}"/>
               </a:ext>
             </a:extLst>
           </p:cNvPr>
@@ -14779,7 +14786,7 @@
           <p:cNvPr id="17" name="Text 15">
             <a:extLst xmlns:a="http://schemas.openxmlformats.org/drawingml/2006/main">
               <a:ext uri="{FF2B5EF4-FFF2-40B4-BE49-F238E27FC236}">
-                <a16:creationId xmlns:a16="http://schemas.microsoft.com/office/drawing/2014/main" id="{3AAE43F9-6070-47E7-995D-09561CD21458}"/>
+                <a16:creationId xmlns:a16="http://schemas.microsoft.com/office/drawing/2014/main" id="{F1F4F1D1-B532-49B3-928F-C42ABC26DAE9}"/>
               </a:ext>
             </a:extLst>
           </p:cNvPr>
@@ -14826,7 +14833,7 @@
           <p:cNvPr id="18" name="Text 16">
             <a:extLst xmlns:a="http://schemas.openxmlformats.org/drawingml/2006/main">
               <a:ext uri="{FF2B5EF4-FFF2-40B4-BE49-F238E27FC236}">
-                <a16:creationId xmlns:a16="http://schemas.microsoft.com/office/drawing/2014/main" id="{27DE165B-5DDA-4B7A-B4EB-3A90C07EC705}"/>
+                <a16:creationId xmlns:a16="http://schemas.microsoft.com/office/drawing/2014/main" id="{9FA70BB9-6525-4337-955F-5735F34805C4}"/>
               </a:ext>
             </a:extLst>
           </p:cNvPr>
@@ -14873,7 +14880,7 @@
           <p:cNvPr id="19" name="Text 17">
             <a:extLst xmlns:a="http://schemas.openxmlformats.org/drawingml/2006/main">
               <a:ext uri="{FF2B5EF4-FFF2-40B4-BE49-F238E27FC236}">
-                <a16:creationId xmlns:a16="http://schemas.microsoft.com/office/drawing/2014/main" id="{99D5CEF8-3368-4F44-980A-7A6C3D9D9D8E}"/>
+                <a16:creationId xmlns:a16="http://schemas.microsoft.com/office/drawing/2014/main" id="{57A364E1-3FC9-4F80-8537-FB7407C5FCC2}"/>
               </a:ext>
             </a:extLst>
           </p:cNvPr>
@@ -14920,7 +14927,7 @@
           <p:cNvPr id="20" name="Text 18">
             <a:extLst xmlns:a="http://schemas.openxmlformats.org/drawingml/2006/main">
               <a:ext uri="{FF2B5EF4-FFF2-40B4-BE49-F238E27FC236}">
-                <a16:creationId xmlns:a16="http://schemas.microsoft.com/office/drawing/2014/main" id="{78B441E9-28B2-4652-89E9-EAB0C26A32F2}"/>
+                <a16:creationId xmlns:a16="http://schemas.microsoft.com/office/drawing/2014/main" id="{5BABB09D-71C1-4B63-B231-B8B0FD672AF3}"/>
               </a:ext>
             </a:extLst>
           </p:cNvPr>
@@ -14967,7 +14974,7 @@
           <p:cNvPr id="21" name="Shape 19">
             <a:extLst xmlns:a="http://schemas.openxmlformats.org/drawingml/2006/main">
               <a:ext uri="{FF2B5EF4-FFF2-40B4-BE49-F238E27FC236}">
-                <a16:creationId xmlns:a16="http://schemas.microsoft.com/office/drawing/2014/main" id="{509415B7-E95A-4699-A283-14782D9AF613}"/>
+                <a16:creationId xmlns:a16="http://schemas.microsoft.com/office/drawing/2014/main" id="{5095A1CF-1F26-4016-A83A-B64D896C98A8}"/>
               </a:ext>
             </a:extLst>
           </p:cNvPr>
@@ -15002,7 +15009,7 @@
           <p:cNvPr id="22" name="Text 20">
             <a:extLst xmlns:a="http://schemas.openxmlformats.org/drawingml/2006/main">
               <a:ext uri="{FF2B5EF4-FFF2-40B4-BE49-F238E27FC236}">
-                <a16:creationId xmlns:a16="http://schemas.microsoft.com/office/drawing/2014/main" id="{D5AA015B-0C11-4B40-B47A-4AA44124715D}"/>
+                <a16:creationId xmlns:a16="http://schemas.microsoft.com/office/drawing/2014/main" id="{3AFF340B-D94C-4B0C-87BD-D35DE745E6B7}"/>
               </a:ext>
             </a:extLst>
           </p:cNvPr>
@@ -15049,7 +15056,7 @@
           <p:cNvPr id="23" name="Text 21">
             <a:extLst xmlns:a="http://schemas.openxmlformats.org/drawingml/2006/main">
               <a:ext uri="{FF2B5EF4-FFF2-40B4-BE49-F238E27FC236}">
-                <a16:creationId xmlns:a16="http://schemas.microsoft.com/office/drawing/2014/main" id="{31BE1885-E877-41B5-A573-67D26CC74334}"/>
+                <a16:creationId xmlns:a16="http://schemas.microsoft.com/office/drawing/2014/main" id="{0D5C5777-C3BB-4DC5-A0B2-0B6301D2FD20}"/>
               </a:ext>
             </a:extLst>
           </p:cNvPr>
@@ -15096,7 +15103,7 @@
           <p:cNvPr id="24" name="Text 22">
             <a:extLst xmlns:a="http://schemas.openxmlformats.org/drawingml/2006/main">
               <a:ext uri="{FF2B5EF4-FFF2-40B4-BE49-F238E27FC236}">
-                <a16:creationId xmlns:a16="http://schemas.microsoft.com/office/drawing/2014/main" id="{145F2439-F717-4124-A43C-89EC148904AE}"/>
+                <a16:creationId xmlns:a16="http://schemas.microsoft.com/office/drawing/2014/main" id="{D37EA724-C738-4A21-9729-0DDE8322ECC2}"/>
               </a:ext>
             </a:extLst>
           </p:cNvPr>
@@ -15143,7 +15150,7 @@
           <p:cNvPr id="25" name="Text 23">
             <a:extLst xmlns:a="http://schemas.openxmlformats.org/drawingml/2006/main">
               <a:ext uri="{FF2B5EF4-FFF2-40B4-BE49-F238E27FC236}">
-                <a16:creationId xmlns:a16="http://schemas.microsoft.com/office/drawing/2014/main" id="{8566522E-DC59-4501-A9C4-D602297B7A9E}"/>
+                <a16:creationId xmlns:a16="http://schemas.microsoft.com/office/drawing/2014/main" id="{D4B8F7AF-EE9C-485B-8937-1064889512C1}"/>
               </a:ext>
             </a:extLst>
           </p:cNvPr>
@@ -15190,7 +15197,7 @@
           <p:cNvPr id="26" name="Text 24">
             <a:extLst xmlns:a="http://schemas.openxmlformats.org/drawingml/2006/main">
               <a:ext uri="{FF2B5EF4-FFF2-40B4-BE49-F238E27FC236}">
-                <a16:creationId xmlns:a16="http://schemas.microsoft.com/office/drawing/2014/main" id="{3D082562-4D85-4A75-8E31-A294FB7741B3}"/>
+                <a16:creationId xmlns:a16="http://schemas.microsoft.com/office/drawing/2014/main" id="{4A3B81E9-7C22-44AB-91A4-49BC61678171}"/>
               </a:ext>
             </a:extLst>
           </p:cNvPr>
@@ -15237,7 +15244,7 @@
           <p:cNvPr id="27" name="Text 25">
             <a:extLst xmlns:a="http://schemas.openxmlformats.org/drawingml/2006/main">
               <a:ext uri="{FF2B5EF4-FFF2-40B4-BE49-F238E27FC236}">
-                <a16:creationId xmlns:a16="http://schemas.microsoft.com/office/drawing/2014/main" id="{ACEB0BBA-200A-4EF1-A77D-117A9094F0A7}"/>
+                <a16:creationId xmlns:a16="http://schemas.microsoft.com/office/drawing/2014/main" id="{4349B414-519E-4388-880B-CAEEA0FB060B}"/>
               </a:ext>
             </a:extLst>
           </p:cNvPr>
@@ -15284,7 +15291,7 @@
           <p:cNvPr id="28" name="Text 26">
             <a:extLst xmlns:a="http://schemas.openxmlformats.org/drawingml/2006/main">
               <a:ext uri="{FF2B5EF4-FFF2-40B4-BE49-F238E27FC236}">
-                <a16:creationId xmlns:a16="http://schemas.microsoft.com/office/drawing/2014/main" id="{65D79CFB-ACE2-4F98-9030-3A8A6B429CAA}"/>
+                <a16:creationId xmlns:a16="http://schemas.microsoft.com/office/drawing/2014/main" id="{5111D179-69AB-4ED7-A2EC-E6EB1BCFA85D}"/>
               </a:ext>
             </a:extLst>
           </p:cNvPr>
@@ -15331,7 +15338,7 @@
           <p:cNvPr id="29" name="Text 27">
             <a:extLst xmlns:a="http://schemas.openxmlformats.org/drawingml/2006/main">
               <a:ext uri="{FF2B5EF4-FFF2-40B4-BE49-F238E27FC236}">
-                <a16:creationId xmlns:a16="http://schemas.microsoft.com/office/drawing/2014/main" id="{CA89C8DC-8EC0-4967-91E6-D9BB7A813303}"/>
+                <a16:creationId xmlns:a16="http://schemas.microsoft.com/office/drawing/2014/main" id="{EADF8675-637D-49A9-8EC1-26498902816C}"/>
               </a:ext>
             </a:extLst>
           </p:cNvPr>
@@ -15378,7 +15385,7 @@
           <p:cNvPr id="30" name="Text 28">
             <a:extLst xmlns:a="http://schemas.openxmlformats.org/drawingml/2006/main">
               <a:ext uri="{FF2B5EF4-FFF2-40B4-BE49-F238E27FC236}">
-                <a16:creationId xmlns:a16="http://schemas.microsoft.com/office/drawing/2014/main" id="{CA4E9F97-D49C-4DA6-B79A-E3E24722C742}"/>
+                <a16:creationId xmlns:a16="http://schemas.microsoft.com/office/drawing/2014/main" id="{DF75E552-E8C7-44DC-94F8-96CC327B8ED3}"/>
               </a:ext>
             </a:extLst>
           </p:cNvPr>
@@ -15423,7 +15430,7 @@
     </p:spTree>
     <p:extLst>
       <p:ext uri="{BB962C8B-B14F-4D97-AF65-F5344CB8AC3E}">
-        <p14:creationId xmlns:p14="http://schemas.microsoft.com/office/powerpoint/2010/main" val="117684250"/>
+        <p14:creationId xmlns:p14="http://schemas.microsoft.com/office/powerpoint/2010/main" val="1337064864"/>
       </p:ext>
     </p:extLst>
   </p:cSld>
@@ -15454,7 +15461,7 @@
           <p:cNvPr id="2" name="Text 0">
             <a:extLst xmlns:a="http://schemas.openxmlformats.org/drawingml/2006/main">
               <a:ext uri="{FF2B5EF4-FFF2-40B4-BE49-F238E27FC236}">
-                <a16:creationId xmlns:a16="http://schemas.microsoft.com/office/drawing/2014/main" id="{9AFFC8AF-7A1C-4F76-9FDB-078BA1AEC467}"/>
+                <a16:creationId xmlns:a16="http://schemas.microsoft.com/office/drawing/2014/main" id="{018ECF08-68EA-4867-99C0-81DC43CFBE64}"/>
               </a:ext>
             </a:extLst>
           </p:cNvPr>
@@ -15501,7 +15508,7 @@
           <p:cNvPr id="3" name="Text 1">
             <a:extLst xmlns:a="http://schemas.openxmlformats.org/drawingml/2006/main">
               <a:ext uri="{FF2B5EF4-FFF2-40B4-BE49-F238E27FC236}">
-                <a16:creationId xmlns:a16="http://schemas.microsoft.com/office/drawing/2014/main" id="{B821E6E2-C518-47D7-80B2-3AD7DBA00C32}"/>
+                <a16:creationId xmlns:a16="http://schemas.microsoft.com/office/drawing/2014/main" id="{98E51069-ABA2-4DBF-82CB-92F4DC0806F2}"/>
               </a:ext>
             </a:extLst>
           </p:cNvPr>
@@ -15548,7 +15555,7 @@
           <p:cNvPr id="4" name="Shape 2">
             <a:extLst xmlns:a="http://schemas.openxmlformats.org/drawingml/2006/main">
               <a:ext uri="{FF2B5EF4-FFF2-40B4-BE49-F238E27FC236}">
-                <a16:creationId xmlns:a16="http://schemas.microsoft.com/office/drawing/2014/main" id="{2D84BEDC-F3AB-4348-AC7E-5F4B849C57A5}"/>
+                <a16:creationId xmlns:a16="http://schemas.microsoft.com/office/drawing/2014/main" id="{D9F8ACF9-6334-4B6A-B79F-DE3ED0822F7A}"/>
               </a:ext>
             </a:extLst>
           </p:cNvPr>
@@ -15583,7 +15590,7 @@
           <p:cNvPr id="5" name="Text 3">
             <a:extLst xmlns:a="http://schemas.openxmlformats.org/drawingml/2006/main">
               <a:ext uri="{FF2B5EF4-FFF2-40B4-BE49-F238E27FC236}">
-                <a16:creationId xmlns:a16="http://schemas.microsoft.com/office/drawing/2014/main" id="{8CEBACD7-7CA3-447E-B2C5-70B9C3AA9A86}"/>
+                <a16:creationId xmlns:a16="http://schemas.microsoft.com/office/drawing/2014/main" id="{FD9E1892-B38C-4AC8-8257-CC36F5762300}"/>
               </a:ext>
             </a:extLst>
           </p:cNvPr>
@@ -15630,7 +15637,7 @@
           <p:cNvPr id="6" name="Shape 4">
             <a:extLst xmlns:a="http://schemas.openxmlformats.org/drawingml/2006/main">
               <a:ext uri="{FF2B5EF4-FFF2-40B4-BE49-F238E27FC236}">
-                <a16:creationId xmlns:a16="http://schemas.microsoft.com/office/drawing/2014/main" id="{40CC8638-1CEE-4ABD-AB35-A33EA59E5D67}"/>
+                <a16:creationId xmlns:a16="http://schemas.microsoft.com/office/drawing/2014/main" id="{0BDD9EFD-8B16-4045-B7C9-ACA5C6B714B5}"/>
               </a:ext>
             </a:extLst>
           </p:cNvPr>
@@ -15661,7 +15668,7 @@
           <p:cNvPr id="7" name="Shape 5">
             <a:extLst xmlns:a="http://schemas.openxmlformats.org/drawingml/2006/main">
               <a:ext uri="{FF2B5EF4-FFF2-40B4-BE49-F238E27FC236}">
-                <a16:creationId xmlns:a16="http://schemas.microsoft.com/office/drawing/2014/main" id="{8DA11244-0657-45B1-90C7-14FA6E98DAB2}"/>
+                <a16:creationId xmlns:a16="http://schemas.microsoft.com/office/drawing/2014/main" id="{E1DC3EEF-4520-43DC-A4EA-E919FBF2D562}"/>
               </a:ext>
             </a:extLst>
           </p:cNvPr>
@@ -15696,7 +15703,7 @@
           <p:cNvPr id="8" name="Text 6">
             <a:extLst xmlns:a="http://schemas.openxmlformats.org/drawingml/2006/main">
               <a:ext uri="{FF2B5EF4-FFF2-40B4-BE49-F238E27FC236}">
-                <a16:creationId xmlns:a16="http://schemas.microsoft.com/office/drawing/2014/main" id="{B8A9D9B1-9DEA-459B-9BC7-B6C4A43FF986}"/>
+                <a16:creationId xmlns:a16="http://schemas.microsoft.com/office/drawing/2014/main" id="{93B231F8-8430-4A5D-A9FF-45DAF76E4E3E}"/>
               </a:ext>
             </a:extLst>
           </p:cNvPr>
@@ -15743,7 +15750,7 @@
           <p:cNvPr id="9" name="Shape 7">
             <a:extLst xmlns:a="http://schemas.openxmlformats.org/drawingml/2006/main">
               <a:ext uri="{FF2B5EF4-FFF2-40B4-BE49-F238E27FC236}">
-                <a16:creationId xmlns:a16="http://schemas.microsoft.com/office/drawing/2014/main" id="{08A0ABC1-5A92-4CE8-8E8F-9CC49FFF242C}"/>
+                <a16:creationId xmlns:a16="http://schemas.microsoft.com/office/drawing/2014/main" id="{3E7B5D27-FDD2-4595-9289-10BE43F72D92}"/>
               </a:ext>
             </a:extLst>
           </p:cNvPr>
@@ -15778,7 +15785,7 @@
           <p:cNvPr id="10" name="Text 8">
             <a:extLst xmlns:a="http://schemas.openxmlformats.org/drawingml/2006/main">
               <a:ext uri="{FF2B5EF4-FFF2-40B4-BE49-F238E27FC236}">
-                <a16:creationId xmlns:a16="http://schemas.microsoft.com/office/drawing/2014/main" id="{35818801-C569-4812-B3CF-68DA40994F84}"/>
+                <a16:creationId xmlns:a16="http://schemas.microsoft.com/office/drawing/2014/main" id="{4B11EA11-90E2-49D6-82DB-773F2FA8F76B}"/>
               </a:ext>
             </a:extLst>
           </p:cNvPr>
@@ -15825,7 +15832,7 @@
           <p:cNvPr id="11" name="Text 9">
             <a:extLst xmlns:a="http://schemas.openxmlformats.org/drawingml/2006/main">
               <a:ext uri="{FF2B5EF4-FFF2-40B4-BE49-F238E27FC236}">
-                <a16:creationId xmlns:a16="http://schemas.microsoft.com/office/drawing/2014/main" id="{3C0388A9-CBE3-4E42-B06B-6DBC592A4110}"/>
+                <a16:creationId xmlns:a16="http://schemas.microsoft.com/office/drawing/2014/main" id="{47999904-9A70-4056-8B84-AF11CA6CA6E2}"/>
               </a:ext>
             </a:extLst>
           </p:cNvPr>
@@ -15888,7 +15895,7 @@
           <p:cNvPr id="12" name="Shape 10">
             <a:extLst xmlns:a="http://schemas.openxmlformats.org/drawingml/2006/main">
               <a:ext uri="{FF2B5EF4-FFF2-40B4-BE49-F238E27FC236}">
-                <a16:creationId xmlns:a16="http://schemas.microsoft.com/office/drawing/2014/main" id="{2EA32E1E-2175-45A4-8A3A-600B1CCE2062}"/>
+                <a16:creationId xmlns:a16="http://schemas.microsoft.com/office/drawing/2014/main" id="{86D4F1DF-7FB2-4249-86E0-3E6D45DD2706}"/>
               </a:ext>
             </a:extLst>
           </p:cNvPr>
@@ -15923,7 +15930,7 @@
           <p:cNvPr id="13" name="Text 11">
             <a:extLst xmlns:a="http://schemas.openxmlformats.org/drawingml/2006/main">
               <a:ext uri="{FF2B5EF4-FFF2-40B4-BE49-F238E27FC236}">
-                <a16:creationId xmlns:a16="http://schemas.microsoft.com/office/drawing/2014/main" id="{A762B917-8C93-4AD0-901E-B05FD3086E03}"/>
+                <a16:creationId xmlns:a16="http://schemas.microsoft.com/office/drawing/2014/main" id="{785ACF7C-FA8F-472A-9FDA-2E4DA0E4319D}"/>
               </a:ext>
             </a:extLst>
           </p:cNvPr>
@@ -15970,7 +15977,7 @@
           <p:cNvPr id="14" name="Text 12">
             <a:extLst xmlns:a="http://schemas.openxmlformats.org/drawingml/2006/main">
               <a:ext uri="{FF2B5EF4-FFF2-40B4-BE49-F238E27FC236}">
-                <a16:creationId xmlns:a16="http://schemas.microsoft.com/office/drawing/2014/main" id="{9AECB2D0-1E41-4B6D-98CD-47E1E0D0465A}"/>
+                <a16:creationId xmlns:a16="http://schemas.microsoft.com/office/drawing/2014/main" id="{4F9DF9F3-D18D-48C2-9583-F8512E24E7E9}"/>
               </a:ext>
             </a:extLst>
           </p:cNvPr>
@@ -16033,7 +16040,7 @@
           <p:cNvPr id="15" name="Shape 13">
             <a:extLst xmlns:a="http://schemas.openxmlformats.org/drawingml/2006/main">
               <a:ext uri="{FF2B5EF4-FFF2-40B4-BE49-F238E27FC236}">
-                <a16:creationId xmlns:a16="http://schemas.microsoft.com/office/drawing/2014/main" id="{0221B595-CAE6-4EBA-864D-1E280E1A915A}"/>
+                <a16:creationId xmlns:a16="http://schemas.microsoft.com/office/drawing/2014/main" id="{6B8E2E07-B53D-46F3-B48A-8A7965F645F6}"/>
               </a:ext>
             </a:extLst>
           </p:cNvPr>
@@ -16068,7 +16075,7 @@
           <p:cNvPr id="16" name="Text 14">
             <a:extLst xmlns:a="http://schemas.openxmlformats.org/drawingml/2006/main">
               <a:ext uri="{FF2B5EF4-FFF2-40B4-BE49-F238E27FC236}">
-                <a16:creationId xmlns:a16="http://schemas.microsoft.com/office/drawing/2014/main" id="{0D360FCF-A2E9-42B7-A79E-450BEE0A7480}"/>
+                <a16:creationId xmlns:a16="http://schemas.microsoft.com/office/drawing/2014/main" id="{5B813EC4-E60B-4199-89DB-A17E09BF12DE}"/>
               </a:ext>
             </a:extLst>
           </p:cNvPr>
@@ -16115,7 +16122,7 @@
           <p:cNvPr id="17" name="Text 15">
             <a:extLst xmlns:a="http://schemas.openxmlformats.org/drawingml/2006/main">
               <a:ext uri="{FF2B5EF4-FFF2-40B4-BE49-F238E27FC236}">
-                <a16:creationId xmlns:a16="http://schemas.microsoft.com/office/drawing/2014/main" id="{D4F0F80D-C4CA-4DC2-BCB9-4345FCE4E514}"/>
+                <a16:creationId xmlns:a16="http://schemas.microsoft.com/office/drawing/2014/main" id="{63FD3AEB-2799-4C81-B1A6-140F25F038F1}"/>
               </a:ext>
             </a:extLst>
           </p:cNvPr>
@@ -16178,7 +16185,7 @@
           <p:cNvPr id="18" name="Shape 16">
             <a:extLst xmlns:a="http://schemas.openxmlformats.org/drawingml/2006/main">
               <a:ext uri="{FF2B5EF4-FFF2-40B4-BE49-F238E27FC236}">
-                <a16:creationId xmlns:a16="http://schemas.microsoft.com/office/drawing/2014/main" id="{43338497-98F6-4AA8-A92A-70DEA207CE1A}"/>
+                <a16:creationId xmlns:a16="http://schemas.microsoft.com/office/drawing/2014/main" id="{060F3F41-4A7E-4AD4-AD92-2272E259B152}"/>
               </a:ext>
             </a:extLst>
           </p:cNvPr>
@@ -16213,7 +16220,7 @@
           <p:cNvPr id="19" name="Text 17">
             <a:extLst xmlns:a="http://schemas.openxmlformats.org/drawingml/2006/main">
               <a:ext uri="{FF2B5EF4-FFF2-40B4-BE49-F238E27FC236}">
-                <a16:creationId xmlns:a16="http://schemas.microsoft.com/office/drawing/2014/main" id="{105A999D-488D-4017-8747-0659C02362DB}"/>
+                <a16:creationId xmlns:a16="http://schemas.microsoft.com/office/drawing/2014/main" id="{356B7DF3-456E-4437-A5AF-4B60299EBE1F}"/>
               </a:ext>
             </a:extLst>
           </p:cNvPr>
@@ -16260,7 +16267,7 @@
           <p:cNvPr id="20" name="Text 18">
             <a:extLst xmlns:a="http://schemas.openxmlformats.org/drawingml/2006/main">
               <a:ext uri="{FF2B5EF4-FFF2-40B4-BE49-F238E27FC236}">
-                <a16:creationId xmlns:a16="http://schemas.microsoft.com/office/drawing/2014/main" id="{B571B252-A1FE-4047-A878-C5E645EA541E}"/>
+                <a16:creationId xmlns:a16="http://schemas.microsoft.com/office/drawing/2014/main" id="{DBA0ED0B-1239-4729-813A-4821F67BBEEE}"/>
               </a:ext>
             </a:extLst>
           </p:cNvPr>
@@ -16323,7 +16330,7 @@
           <p:cNvPr id="21" name="Shape 19">
             <a:extLst xmlns:a="http://schemas.openxmlformats.org/drawingml/2006/main">
               <a:ext uri="{FF2B5EF4-FFF2-40B4-BE49-F238E27FC236}">
-                <a16:creationId xmlns:a16="http://schemas.microsoft.com/office/drawing/2014/main" id="{2DB8FB7C-F554-48DE-ADD3-55EC943DAEF6}"/>
+                <a16:creationId xmlns:a16="http://schemas.microsoft.com/office/drawing/2014/main" id="{F0ECFA6E-A4DE-4DEA-B598-F2DC42E59999}"/>
               </a:ext>
             </a:extLst>
           </p:cNvPr>
@@ -16358,7 +16365,7 @@
           <p:cNvPr id="22" name="Text 20">
             <a:extLst xmlns:a="http://schemas.openxmlformats.org/drawingml/2006/main">
               <a:ext uri="{FF2B5EF4-FFF2-40B4-BE49-F238E27FC236}">
-                <a16:creationId xmlns:a16="http://schemas.microsoft.com/office/drawing/2014/main" id="{138293AE-374A-450C-A43A-88689A5E1340}"/>
+                <a16:creationId xmlns:a16="http://schemas.microsoft.com/office/drawing/2014/main" id="{ED75F819-5DA5-4C50-963A-4EE1D79BF4E7}"/>
               </a:ext>
             </a:extLst>
           </p:cNvPr>
@@ -16405,7 +16412,7 @@
           <p:cNvPr id="23" name="Shape 21">
             <a:extLst xmlns:a="http://schemas.openxmlformats.org/drawingml/2006/main">
               <a:ext uri="{FF2B5EF4-FFF2-40B4-BE49-F238E27FC236}">
-                <a16:creationId xmlns:a16="http://schemas.microsoft.com/office/drawing/2014/main" id="{6FC79910-95C5-420A-8747-A195E5112332}"/>
+                <a16:creationId xmlns:a16="http://schemas.microsoft.com/office/drawing/2014/main" id="{0523680C-5DAE-4750-B56B-14E96EBEB46B}"/>
               </a:ext>
             </a:extLst>
           </p:cNvPr>
@@ -16438,7 +16445,7 @@
           <p:cNvPr id="24" name="Text 22">
             <a:extLst xmlns:a="http://schemas.openxmlformats.org/drawingml/2006/main">
               <a:ext uri="{FF2B5EF4-FFF2-40B4-BE49-F238E27FC236}">
-                <a16:creationId xmlns:a16="http://schemas.microsoft.com/office/drawing/2014/main" id="{D15F9816-0130-4D2E-AD74-C33A4C10D853}"/>
+                <a16:creationId xmlns:a16="http://schemas.microsoft.com/office/drawing/2014/main" id="{E106BC66-FC6A-417C-BE52-A2C3EB1D6EE1}"/>
               </a:ext>
             </a:extLst>
           </p:cNvPr>
@@ -16485,7 +16492,7 @@
           <p:cNvPr id="25" name="Shape 23">
             <a:extLst xmlns:a="http://schemas.openxmlformats.org/drawingml/2006/main">
               <a:ext uri="{FF2B5EF4-FFF2-40B4-BE49-F238E27FC236}">
-                <a16:creationId xmlns:a16="http://schemas.microsoft.com/office/drawing/2014/main" id="{E996599F-B1C4-4AB5-9D83-4B9FB63B6EDA}"/>
+                <a16:creationId xmlns:a16="http://schemas.microsoft.com/office/drawing/2014/main" id="{4BE52F97-2803-41F0-88BF-E168B401D0D3}"/>
               </a:ext>
             </a:extLst>
           </p:cNvPr>
@@ -16518,7 +16525,7 @@
           <p:cNvPr id="26" name="Text 24">
             <a:extLst xmlns:a="http://schemas.openxmlformats.org/drawingml/2006/main">
               <a:ext uri="{FF2B5EF4-FFF2-40B4-BE49-F238E27FC236}">
-                <a16:creationId xmlns:a16="http://schemas.microsoft.com/office/drawing/2014/main" id="{C06BAEEF-26DF-45F9-AFE6-E1C371FB771A}"/>
+                <a16:creationId xmlns:a16="http://schemas.microsoft.com/office/drawing/2014/main" id="{72C09CD1-2B73-4960-A031-3BF80088475B}"/>
               </a:ext>
             </a:extLst>
           </p:cNvPr>
@@ -16565,7 +16572,7 @@
           <p:cNvPr id="27" name="Shape 25">
             <a:extLst xmlns:a="http://schemas.openxmlformats.org/drawingml/2006/main">
               <a:ext uri="{FF2B5EF4-FFF2-40B4-BE49-F238E27FC236}">
-                <a16:creationId xmlns:a16="http://schemas.microsoft.com/office/drawing/2014/main" id="{ACE63136-7A94-4C45-9AF5-0EB4B1EA20A1}"/>
+                <a16:creationId xmlns:a16="http://schemas.microsoft.com/office/drawing/2014/main" id="{7B0D8088-6781-43EF-978B-1525DB6F6205}"/>
               </a:ext>
             </a:extLst>
           </p:cNvPr>
@@ -16598,7 +16605,7 @@
           <p:cNvPr id="28" name="Text 26">
             <a:extLst xmlns:a="http://schemas.openxmlformats.org/drawingml/2006/main">
               <a:ext uri="{FF2B5EF4-FFF2-40B4-BE49-F238E27FC236}">
-                <a16:creationId xmlns:a16="http://schemas.microsoft.com/office/drawing/2014/main" id="{15CEBF7A-9CC5-47E3-83C5-B13CBDAA9B53}"/>
+                <a16:creationId xmlns:a16="http://schemas.microsoft.com/office/drawing/2014/main" id="{99DCFC0D-7274-4CBE-BF49-81DAE6D7EEAD}"/>
               </a:ext>
             </a:extLst>
           </p:cNvPr>
@@ -16645,7 +16652,7 @@
           <p:cNvPr id="29" name="Shape 27">
             <a:extLst xmlns:a="http://schemas.openxmlformats.org/drawingml/2006/main">
               <a:ext uri="{FF2B5EF4-FFF2-40B4-BE49-F238E27FC236}">
-                <a16:creationId xmlns:a16="http://schemas.microsoft.com/office/drawing/2014/main" id="{3F5FA93A-E74C-422E-89D2-A8CE35DA4226}"/>
+                <a16:creationId xmlns:a16="http://schemas.microsoft.com/office/drawing/2014/main" id="{9980A3F8-22E6-4193-A703-1987C8985ACD}"/>
               </a:ext>
             </a:extLst>
           </p:cNvPr>
@@ -16680,7 +16687,7 @@
           <p:cNvPr id="30" name="Text 28">
             <a:extLst xmlns:a="http://schemas.openxmlformats.org/drawingml/2006/main">
               <a:ext uri="{FF2B5EF4-FFF2-40B4-BE49-F238E27FC236}">
-                <a16:creationId xmlns:a16="http://schemas.microsoft.com/office/drawing/2014/main" id="{170B036A-5E35-41B6-BAEB-83EE89DC926C}"/>
+                <a16:creationId xmlns:a16="http://schemas.microsoft.com/office/drawing/2014/main" id="{95210854-D878-4980-A307-806EE4A7C115}"/>
               </a:ext>
             </a:extLst>
           </p:cNvPr>
@@ -16727,7 +16734,7 @@
           <p:cNvPr id="31" name="Text 29">
             <a:extLst xmlns:a="http://schemas.openxmlformats.org/drawingml/2006/main">
               <a:ext uri="{FF2B5EF4-FFF2-40B4-BE49-F238E27FC236}">
-                <a16:creationId xmlns:a16="http://schemas.microsoft.com/office/drawing/2014/main" id="{5BFABB0C-2BA4-442E-B59D-75EAA244A7D4}"/>
+                <a16:creationId xmlns:a16="http://schemas.microsoft.com/office/drawing/2014/main" id="{EC951A5C-F160-482B-AD4F-B79DACE983EF}"/>
               </a:ext>
             </a:extLst>
           </p:cNvPr>
@@ -16790,7 +16797,7 @@
           <p:cNvPr id="32" name="Shape 30">
             <a:extLst xmlns:a="http://schemas.openxmlformats.org/drawingml/2006/main">
               <a:ext uri="{FF2B5EF4-FFF2-40B4-BE49-F238E27FC236}">
-                <a16:creationId xmlns:a16="http://schemas.microsoft.com/office/drawing/2014/main" id="{930D48C4-91C3-4408-9614-4811BB9EE6D0}"/>
+                <a16:creationId xmlns:a16="http://schemas.microsoft.com/office/drawing/2014/main" id="{89BB2863-150A-4D09-8AA4-5DD402ECA208}"/>
               </a:ext>
             </a:extLst>
           </p:cNvPr>
@@ -16825,7 +16832,7 @@
           <p:cNvPr id="33" name="Text 31">
             <a:extLst xmlns:a="http://schemas.openxmlformats.org/drawingml/2006/main">
               <a:ext uri="{FF2B5EF4-FFF2-40B4-BE49-F238E27FC236}">
-                <a16:creationId xmlns:a16="http://schemas.microsoft.com/office/drawing/2014/main" id="{A8F63D18-1F56-4AFF-B54B-F73B0B2E1E58}"/>
+                <a16:creationId xmlns:a16="http://schemas.microsoft.com/office/drawing/2014/main" id="{DBC7D35D-441A-4F5E-B2FC-7046A19FD27D}"/>
               </a:ext>
             </a:extLst>
           </p:cNvPr>
@@ -16872,7 +16879,7 @@
           <p:cNvPr id="34" name="Shape 32">
             <a:extLst xmlns:a="http://schemas.openxmlformats.org/drawingml/2006/main">
               <a:ext uri="{FF2B5EF4-FFF2-40B4-BE49-F238E27FC236}">
-                <a16:creationId xmlns:a16="http://schemas.microsoft.com/office/drawing/2014/main" id="{A4FC8A9D-7971-46B5-965E-9EF2A29E8E8C}"/>
+                <a16:creationId xmlns:a16="http://schemas.microsoft.com/office/drawing/2014/main" id="{98C34AA6-CD4E-4105-8511-ACA17CF47793}"/>
               </a:ext>
             </a:extLst>
           </p:cNvPr>
@@ -16907,7 +16914,7 @@
           <p:cNvPr id="35" name="Text 33">
             <a:extLst xmlns:a="http://schemas.openxmlformats.org/drawingml/2006/main">
               <a:ext uri="{FF2B5EF4-FFF2-40B4-BE49-F238E27FC236}">
-                <a16:creationId xmlns:a16="http://schemas.microsoft.com/office/drawing/2014/main" id="{84CC0ABD-4DD4-4B29-BBC7-4B90E734A924}"/>
+                <a16:creationId xmlns:a16="http://schemas.microsoft.com/office/drawing/2014/main" id="{3690568E-2F7A-4490-B81A-B088E60F337D}"/>
               </a:ext>
             </a:extLst>
           </p:cNvPr>
@@ -16954,7 +16961,7 @@
           <p:cNvPr id="36" name="Shape 34">
             <a:extLst xmlns:a="http://schemas.openxmlformats.org/drawingml/2006/main">
               <a:ext uri="{FF2B5EF4-FFF2-40B4-BE49-F238E27FC236}">
-                <a16:creationId xmlns:a16="http://schemas.microsoft.com/office/drawing/2014/main" id="{BD5DED4E-CD76-4224-BE67-EF3878A22383}"/>
+                <a16:creationId xmlns:a16="http://schemas.microsoft.com/office/drawing/2014/main" id="{B6134FC9-34E4-4066-9705-B190EFFFCB2D}"/>
               </a:ext>
             </a:extLst>
           </p:cNvPr>
@@ -16989,7 +16996,7 @@
           <p:cNvPr id="37" name="Text 35">
             <a:extLst xmlns:a="http://schemas.openxmlformats.org/drawingml/2006/main">
               <a:ext uri="{FF2B5EF4-FFF2-40B4-BE49-F238E27FC236}">
-                <a16:creationId xmlns:a16="http://schemas.microsoft.com/office/drawing/2014/main" id="{015951DB-E069-4BD8-8ADE-706429A94231}"/>
+                <a16:creationId xmlns:a16="http://schemas.microsoft.com/office/drawing/2014/main" id="{FBA35FBC-D175-4163-8EAE-5C2131158B39}"/>
               </a:ext>
             </a:extLst>
           </p:cNvPr>
@@ -17036,7 +17043,7 @@
           <p:cNvPr id="38" name="Shape 36">
             <a:extLst xmlns:a="http://schemas.openxmlformats.org/drawingml/2006/main">
               <a:ext uri="{FF2B5EF4-FFF2-40B4-BE49-F238E27FC236}">
-                <a16:creationId xmlns:a16="http://schemas.microsoft.com/office/drawing/2014/main" id="{957FFA56-BD8D-4A87-ADE7-508D8F5D2A2F}"/>
+                <a16:creationId xmlns:a16="http://schemas.microsoft.com/office/drawing/2014/main" id="{4AFB2CAE-9E41-48AB-9ABB-0A4D55BA2A28}"/>
               </a:ext>
             </a:extLst>
           </p:cNvPr>
@@ -17071,7 +17078,7 @@
           <p:cNvPr id="39" name="Text 37">
             <a:extLst xmlns:a="http://schemas.openxmlformats.org/drawingml/2006/main">
               <a:ext uri="{FF2B5EF4-FFF2-40B4-BE49-F238E27FC236}">
-                <a16:creationId xmlns:a16="http://schemas.microsoft.com/office/drawing/2014/main" id="{4027FFBF-F22D-4D8C-BBAA-638B1252495A}"/>
+                <a16:creationId xmlns:a16="http://schemas.microsoft.com/office/drawing/2014/main" id="{91F0DD81-4A65-4CA0-88A7-E7636A44541F}"/>
               </a:ext>
             </a:extLst>
           </p:cNvPr>
@@ -17118,7 +17125,7 @@
           <p:cNvPr id="40" name="Shape 38">
             <a:extLst xmlns:a="http://schemas.openxmlformats.org/drawingml/2006/main">
               <a:ext uri="{FF2B5EF4-FFF2-40B4-BE49-F238E27FC236}">
-                <a16:creationId xmlns:a16="http://schemas.microsoft.com/office/drawing/2014/main" id="{A6BE7386-0822-48BC-B47D-ED38D81038BE}"/>
+                <a16:creationId xmlns:a16="http://schemas.microsoft.com/office/drawing/2014/main" id="{2B8D8DCA-A79D-43AB-B87E-6256B6B153A4}"/>
               </a:ext>
             </a:extLst>
           </p:cNvPr>
@@ -17153,7 +17160,7 @@
           <p:cNvPr id="41" name="Text 39">
             <a:extLst xmlns:a="http://schemas.openxmlformats.org/drawingml/2006/main">
               <a:ext uri="{FF2B5EF4-FFF2-40B4-BE49-F238E27FC236}">
-                <a16:creationId xmlns:a16="http://schemas.microsoft.com/office/drawing/2014/main" id="{D964E12C-4919-41F9-A1E3-9F2C1122C61B}"/>
+                <a16:creationId xmlns:a16="http://schemas.microsoft.com/office/drawing/2014/main" id="{AEB44D9B-A003-486E-B6BC-28B72003EB76}"/>
               </a:ext>
             </a:extLst>
           </p:cNvPr>
@@ -17200,7 +17207,7 @@
           <p:cNvPr id="42" name="Text 40">
             <a:extLst xmlns:a="http://schemas.openxmlformats.org/drawingml/2006/main">
               <a:ext uri="{FF2B5EF4-FFF2-40B4-BE49-F238E27FC236}">
-                <a16:creationId xmlns:a16="http://schemas.microsoft.com/office/drawing/2014/main" id="{EB48A52F-55FD-4C46-8B3E-8BD3925EB17C}"/>
+                <a16:creationId xmlns:a16="http://schemas.microsoft.com/office/drawing/2014/main" id="{89B8F6C9-C9F2-4246-BE72-A3BA85D00831}"/>
               </a:ext>
             </a:extLst>
           </p:cNvPr>
@@ -17247,7 +17254,7 @@
           <p:cNvPr id="43" name="Text 41">
             <a:extLst xmlns:a="http://schemas.openxmlformats.org/drawingml/2006/main">
               <a:ext uri="{FF2B5EF4-FFF2-40B4-BE49-F238E27FC236}">
-                <a16:creationId xmlns:a16="http://schemas.microsoft.com/office/drawing/2014/main" id="{F3927710-7C73-4A10-94A4-33C13F0C975D}"/>
+                <a16:creationId xmlns:a16="http://schemas.microsoft.com/office/drawing/2014/main" id="{4240EEB9-4E45-46DA-9259-C07FB10FE6DC}"/>
               </a:ext>
             </a:extLst>
           </p:cNvPr>
@@ -17292,7 +17299,7 @@
     </p:spTree>
     <p:extLst>
       <p:ext uri="{BB962C8B-B14F-4D97-AF65-F5344CB8AC3E}">
-        <p14:creationId xmlns:p14="http://schemas.microsoft.com/office/powerpoint/2010/main" val="1375211772"/>
+        <p14:creationId xmlns:p14="http://schemas.microsoft.com/office/powerpoint/2010/main" val="373968038"/>
       </p:ext>
     </p:extLst>
   </p:cSld>
@@ -17323,7 +17330,7 @@
           <p:cNvPr id="2" name="Text 0">
             <a:extLst xmlns:a="http://schemas.openxmlformats.org/drawingml/2006/main">
               <a:ext uri="{FF2B5EF4-FFF2-40B4-BE49-F238E27FC236}">
-                <a16:creationId xmlns:a16="http://schemas.microsoft.com/office/drawing/2014/main" id="{B58B40F4-7DB8-464A-8674-38254B380A10}"/>
+                <a16:creationId xmlns:a16="http://schemas.microsoft.com/office/drawing/2014/main" id="{95C5F3BD-A939-449B-B852-661DB8C72B3C}"/>
               </a:ext>
             </a:extLst>
           </p:cNvPr>
@@ -17344,7 +17351,7 @@
         </p:spPr>
         <p:txBody>
           <a:bodyPr xmlns:a="http://schemas.openxmlformats.org/drawingml/2006/main" wrap="square" lIns="0" tIns="0" rIns="0" bIns="0" anchor="ctr">
-            <a:normAutofit/>
+            <a:normAutofit fontScale="100000"/>
           </a:bodyPr>
           <a:lstStyle xmlns:a="http://schemas.openxmlformats.org/drawingml/2006/main"/>
           <a:p xmlns:a="http://schemas.openxmlformats.org/drawingml/2006/main">
@@ -17360,7 +17367,7 @@
                 <a:ea typeface="Aptos"/>
                 <a:cs typeface="Aptos"/>
               </a:rPr>
-              <a:t>ROADMAP &amp; LIVE DEMO</a:t>
+              <a:t>12-WEEK ROADMAP</a:t>
             </a:r>
           </a:p>
         </p:txBody>
@@ -17370,7 +17377,7 @@
           <p:cNvPr id="3" name="Text 1">
             <a:extLst xmlns:a="http://schemas.openxmlformats.org/drawingml/2006/main">
               <a:ext uri="{FF2B5EF4-FFF2-40B4-BE49-F238E27FC236}">
-                <a16:creationId xmlns:a16="http://schemas.microsoft.com/office/drawing/2014/main" id="{E436E317-8189-44E8-AF7A-0FD63D90BA13}"/>
+                <a16:creationId xmlns:a16="http://schemas.microsoft.com/office/drawing/2014/main" id="{168A92E0-CCB2-4E75-9454-1CD5EB297A5D}"/>
               </a:ext>
             </a:extLst>
           </p:cNvPr>
@@ -17417,7 +17424,7 @@
           <p:cNvPr id="4" name="Shape 2">
             <a:extLst xmlns:a="http://schemas.openxmlformats.org/drawingml/2006/main">
               <a:ext uri="{FF2B5EF4-FFF2-40B4-BE49-F238E27FC236}">
-                <a16:creationId xmlns:a16="http://schemas.microsoft.com/office/drawing/2014/main" id="{6F945710-0A38-4F6B-A87E-FC636D68AB73}"/>
+                <a16:creationId xmlns:a16="http://schemas.microsoft.com/office/drawing/2014/main" id="{3C1CAF14-2BC3-4135-82B3-6A49183A31F4}"/>
               </a:ext>
             </a:extLst>
           </p:cNvPr>
@@ -17452,7 +17459,7 @@
           <p:cNvPr id="5" name="Text 3">
             <a:extLst xmlns:a="http://schemas.openxmlformats.org/drawingml/2006/main">
               <a:ext uri="{FF2B5EF4-FFF2-40B4-BE49-F238E27FC236}">
-                <a16:creationId xmlns:a16="http://schemas.microsoft.com/office/drawing/2014/main" id="{8AB79C1A-B15F-47A0-BCAF-A19D40EB6B4E}"/>
+                <a16:creationId xmlns:a16="http://schemas.microsoft.com/office/drawing/2014/main" id="{BB017735-B066-440E-80DC-E68CE0DD650A}"/>
               </a:ext>
             </a:extLst>
           </p:cNvPr>
@@ -17499,7 +17506,7 @@
           <p:cNvPr id="6" name="Shape 4">
             <a:extLst xmlns:a="http://schemas.openxmlformats.org/drawingml/2006/main">
               <a:ext uri="{FF2B5EF4-FFF2-40B4-BE49-F238E27FC236}">
-                <a16:creationId xmlns:a16="http://schemas.microsoft.com/office/drawing/2014/main" id="{4EF5B6E5-0DAF-4496-A647-BA58594387FF}"/>
+                <a16:creationId xmlns:a16="http://schemas.microsoft.com/office/drawing/2014/main" id="{4F4A3BD7-45D1-4587-A14F-362EE3F0E435}"/>
               </a:ext>
             </a:extLst>
           </p:cNvPr>
@@ -17530,7 +17537,7 @@
           <p:cNvPr id="7" name="Shape 5">
             <a:extLst xmlns:a="http://schemas.openxmlformats.org/drawingml/2006/main">
               <a:ext uri="{FF2B5EF4-FFF2-40B4-BE49-F238E27FC236}">
-                <a16:creationId xmlns:a16="http://schemas.microsoft.com/office/drawing/2014/main" id="{47110719-777B-4A96-BE05-D6AD06C63E29}"/>
+                <a16:creationId xmlns:a16="http://schemas.microsoft.com/office/drawing/2014/main" id="{8C416996-5138-48FA-B6A6-3C1B0EB37D59}"/>
               </a:ext>
             </a:extLst>
           </p:cNvPr>
@@ -17565,7 +17572,7 @@
           <p:cNvPr id="8" name="Shape 6">
             <a:extLst xmlns:a="http://schemas.openxmlformats.org/drawingml/2006/main">
               <a:ext uri="{FF2B5EF4-FFF2-40B4-BE49-F238E27FC236}">
-                <a16:creationId xmlns:a16="http://schemas.microsoft.com/office/drawing/2014/main" id="{78E87879-19E4-4B81-8EF4-EF1999469BC5}"/>
+                <a16:creationId xmlns:a16="http://schemas.microsoft.com/office/drawing/2014/main" id="{05D28A6A-4D33-4BF0-ABE3-C948A60E83C1}"/>
               </a:ext>
             </a:extLst>
           </p:cNvPr>
@@ -17600,7 +17607,7 @@
           <p:cNvPr id="9" name="Text 7">
             <a:extLst xmlns:a="http://schemas.openxmlformats.org/drawingml/2006/main">
               <a:ext uri="{FF2B5EF4-FFF2-40B4-BE49-F238E27FC236}">
-                <a16:creationId xmlns:a16="http://schemas.microsoft.com/office/drawing/2014/main" id="{81666A3F-4EEE-4D00-895C-9B104DBD680C}"/>
+                <a16:creationId xmlns:a16="http://schemas.microsoft.com/office/drawing/2014/main" id="{36ACE6FB-6A9A-46E2-BC57-59D843391359}"/>
               </a:ext>
             </a:extLst>
           </p:cNvPr>
@@ -17647,7 +17654,7 @@
           <p:cNvPr id="10" name="Text 8">
             <a:extLst xmlns:a="http://schemas.openxmlformats.org/drawingml/2006/main">
               <a:ext uri="{FF2B5EF4-FFF2-40B4-BE49-F238E27FC236}">
-                <a16:creationId xmlns:a16="http://schemas.microsoft.com/office/drawing/2014/main" id="{95DDCDDF-CC6A-4239-BC49-8643ED7B65DA}"/>
+                <a16:creationId xmlns:a16="http://schemas.microsoft.com/office/drawing/2014/main" id="{D600D403-8F24-486B-A5D6-CD25E09E0186}"/>
               </a:ext>
             </a:extLst>
           </p:cNvPr>
@@ -17694,7 +17701,7 @@
           <p:cNvPr id="11" name="Text 9">
             <a:extLst xmlns:a="http://schemas.openxmlformats.org/drawingml/2006/main">
               <a:ext uri="{FF2B5EF4-FFF2-40B4-BE49-F238E27FC236}">
-                <a16:creationId xmlns:a16="http://schemas.microsoft.com/office/drawing/2014/main" id="{0DC5FD35-3362-4758-8CDF-CBA2D2507296}"/>
+                <a16:creationId xmlns:a16="http://schemas.microsoft.com/office/drawing/2014/main" id="{901E21C9-0563-487D-B768-975F512605F3}"/>
               </a:ext>
             </a:extLst>
           </p:cNvPr>
@@ -17773,7 +17780,7 @@
           <p:cNvPr id="12" name="Shape 10">
             <a:extLst xmlns:a="http://schemas.openxmlformats.org/drawingml/2006/main">
               <a:ext uri="{FF2B5EF4-FFF2-40B4-BE49-F238E27FC236}">
-                <a16:creationId xmlns:a16="http://schemas.microsoft.com/office/drawing/2014/main" id="{5D238CCD-7BF5-407F-898E-2F4BC6349469}"/>
+                <a16:creationId xmlns:a16="http://schemas.microsoft.com/office/drawing/2014/main" id="{E30F693F-07E5-406C-944A-B17941064AB8}"/>
               </a:ext>
             </a:extLst>
           </p:cNvPr>
@@ -17805,7 +17812,7 @@
           <p:cNvPr id="13" name="Shape 11">
             <a:extLst xmlns:a="http://schemas.openxmlformats.org/drawingml/2006/main">
               <a:ext uri="{FF2B5EF4-FFF2-40B4-BE49-F238E27FC236}">
-                <a16:creationId xmlns:a16="http://schemas.microsoft.com/office/drawing/2014/main" id="{A053884D-A69B-484C-A141-011353563067}"/>
+                <a16:creationId xmlns:a16="http://schemas.microsoft.com/office/drawing/2014/main" id="{D3681828-72DE-4503-A255-3EB6CF041B1D}"/>
               </a:ext>
             </a:extLst>
           </p:cNvPr>
@@ -17840,7 +17847,7 @@
           <p:cNvPr id="14" name="Shape 12">
             <a:extLst xmlns:a="http://schemas.openxmlformats.org/drawingml/2006/main">
               <a:ext uri="{FF2B5EF4-FFF2-40B4-BE49-F238E27FC236}">
-                <a16:creationId xmlns:a16="http://schemas.microsoft.com/office/drawing/2014/main" id="{A49526B4-2582-4838-AE76-7556AEFE1EFE}"/>
+                <a16:creationId xmlns:a16="http://schemas.microsoft.com/office/drawing/2014/main" id="{AA228C96-C3ED-4B51-8383-F4B14385027E}"/>
               </a:ext>
             </a:extLst>
           </p:cNvPr>
@@ -17875,7 +17882,7 @@
           <p:cNvPr id="15" name="Text 13">
             <a:extLst xmlns:a="http://schemas.openxmlformats.org/drawingml/2006/main">
               <a:ext uri="{FF2B5EF4-FFF2-40B4-BE49-F238E27FC236}">
-                <a16:creationId xmlns:a16="http://schemas.microsoft.com/office/drawing/2014/main" id="{7293BD46-1261-4765-B132-912259EBF474}"/>
+                <a16:creationId xmlns:a16="http://schemas.microsoft.com/office/drawing/2014/main" id="{56936A5E-8343-4DD0-BE18-8583AE4AB750}"/>
               </a:ext>
             </a:extLst>
           </p:cNvPr>
@@ -17922,7 +17929,7 @@
           <p:cNvPr id="16" name="Text 14">
             <a:extLst xmlns:a="http://schemas.openxmlformats.org/drawingml/2006/main">
               <a:ext uri="{FF2B5EF4-FFF2-40B4-BE49-F238E27FC236}">
-                <a16:creationId xmlns:a16="http://schemas.microsoft.com/office/drawing/2014/main" id="{0E7AC1D9-BC83-4080-96F2-16B3B05013BA}"/>
+                <a16:creationId xmlns:a16="http://schemas.microsoft.com/office/drawing/2014/main" id="{597554EF-F02A-4415-B4D7-570856539A2B}"/>
               </a:ext>
             </a:extLst>
           </p:cNvPr>
@@ -17969,7 +17976,7 @@
           <p:cNvPr id="17" name="Text 15">
             <a:extLst xmlns:a="http://schemas.openxmlformats.org/drawingml/2006/main">
               <a:ext uri="{FF2B5EF4-FFF2-40B4-BE49-F238E27FC236}">
-                <a16:creationId xmlns:a16="http://schemas.microsoft.com/office/drawing/2014/main" id="{5E1A9A91-6BCA-4436-B384-849369871E0C}"/>
+                <a16:creationId xmlns:a16="http://schemas.microsoft.com/office/drawing/2014/main" id="{90845E6E-9496-4C5D-A7C5-19851F29AA99}"/>
               </a:ext>
             </a:extLst>
           </p:cNvPr>
@@ -18048,7 +18055,7 @@
           <p:cNvPr id="18" name="Shape 16">
             <a:extLst xmlns:a="http://schemas.openxmlformats.org/drawingml/2006/main">
               <a:ext uri="{FF2B5EF4-FFF2-40B4-BE49-F238E27FC236}">
-                <a16:creationId xmlns:a16="http://schemas.microsoft.com/office/drawing/2014/main" id="{8DCAEC0A-6A06-4ECE-BAD8-E916929CD620}"/>
+                <a16:creationId xmlns:a16="http://schemas.microsoft.com/office/drawing/2014/main" id="{143D9E73-7FCD-421E-A73B-9A79AF7653B3}"/>
               </a:ext>
             </a:extLst>
           </p:cNvPr>
@@ -18080,7 +18087,7 @@
           <p:cNvPr id="19" name="Shape 17">
             <a:extLst xmlns:a="http://schemas.openxmlformats.org/drawingml/2006/main">
               <a:ext uri="{FF2B5EF4-FFF2-40B4-BE49-F238E27FC236}">
-                <a16:creationId xmlns:a16="http://schemas.microsoft.com/office/drawing/2014/main" id="{2B3F1458-40ED-4235-8F59-7B211E792A4B}"/>
+                <a16:creationId xmlns:a16="http://schemas.microsoft.com/office/drawing/2014/main" id="{7764F4E0-0935-4DB4-AB80-6BC020106B42}"/>
               </a:ext>
             </a:extLst>
           </p:cNvPr>
@@ -18115,7 +18122,7 @@
           <p:cNvPr id="20" name="Shape 18">
             <a:extLst xmlns:a="http://schemas.openxmlformats.org/drawingml/2006/main">
               <a:ext uri="{FF2B5EF4-FFF2-40B4-BE49-F238E27FC236}">
-                <a16:creationId xmlns:a16="http://schemas.microsoft.com/office/drawing/2014/main" id="{04FE7847-BE3E-43AB-B71C-3A71553059AB}"/>
+                <a16:creationId xmlns:a16="http://schemas.microsoft.com/office/drawing/2014/main" id="{7F018030-8922-4B60-B2EE-D20395E4CBCC}"/>
               </a:ext>
             </a:extLst>
           </p:cNvPr>
@@ -18150,7 +18157,7 @@
           <p:cNvPr id="21" name="Text 19">
             <a:extLst xmlns:a="http://schemas.openxmlformats.org/drawingml/2006/main">
               <a:ext uri="{FF2B5EF4-FFF2-40B4-BE49-F238E27FC236}">
-                <a16:creationId xmlns:a16="http://schemas.microsoft.com/office/drawing/2014/main" id="{6B9C29F0-0BD1-46A3-9D39-E24A2C5E144F}"/>
+                <a16:creationId xmlns:a16="http://schemas.microsoft.com/office/drawing/2014/main" id="{E99ECA6B-7DB7-4205-B0EA-A010B3712869}"/>
               </a:ext>
             </a:extLst>
           </p:cNvPr>
@@ -18197,7 +18204,7 @@
           <p:cNvPr id="22" name="Text 20">
             <a:extLst xmlns:a="http://schemas.openxmlformats.org/drawingml/2006/main">
               <a:ext uri="{FF2B5EF4-FFF2-40B4-BE49-F238E27FC236}">
-                <a16:creationId xmlns:a16="http://schemas.microsoft.com/office/drawing/2014/main" id="{63BA8471-8D12-4779-8352-B09A376125C0}"/>
+                <a16:creationId xmlns:a16="http://schemas.microsoft.com/office/drawing/2014/main" id="{53CAA980-24FB-4885-9E70-5FC7AE6629CC}"/>
               </a:ext>
             </a:extLst>
           </p:cNvPr>
@@ -18244,7 +18251,7 @@
           <p:cNvPr id="23" name="Text 21">
             <a:extLst xmlns:a="http://schemas.openxmlformats.org/drawingml/2006/main">
               <a:ext uri="{FF2B5EF4-FFF2-40B4-BE49-F238E27FC236}">
-                <a16:creationId xmlns:a16="http://schemas.microsoft.com/office/drawing/2014/main" id="{77FF11DC-C8A3-4049-89C1-5127BD32DB37}"/>
+                <a16:creationId xmlns:a16="http://schemas.microsoft.com/office/drawing/2014/main" id="{7268A070-D999-4474-94F3-B15C613E9001}"/>
               </a:ext>
             </a:extLst>
           </p:cNvPr>
@@ -18323,7 +18330,7 @@
           <p:cNvPr id="24" name="Shape 22">
             <a:extLst xmlns:a="http://schemas.openxmlformats.org/drawingml/2006/main">
               <a:ext uri="{FF2B5EF4-FFF2-40B4-BE49-F238E27FC236}">
-                <a16:creationId xmlns:a16="http://schemas.microsoft.com/office/drawing/2014/main" id="{3FEECC39-B91B-47EF-B40A-B707CC7A0009}"/>
+                <a16:creationId xmlns:a16="http://schemas.microsoft.com/office/drawing/2014/main" id="{A904B965-5612-40CC-BB15-35A7E80778AA}"/>
               </a:ext>
             </a:extLst>
           </p:cNvPr>
@@ -18355,7 +18362,7 @@
           <p:cNvPr id="25" name="Shape 23">
             <a:extLst xmlns:a="http://schemas.openxmlformats.org/drawingml/2006/main">
               <a:ext uri="{FF2B5EF4-FFF2-40B4-BE49-F238E27FC236}">
-                <a16:creationId xmlns:a16="http://schemas.microsoft.com/office/drawing/2014/main" id="{609E087C-F96F-4505-8B16-E17A5BD17214}"/>
+                <a16:creationId xmlns:a16="http://schemas.microsoft.com/office/drawing/2014/main" id="{AB87A5AB-3CBA-4344-A5BB-F5EBB0429B32}"/>
               </a:ext>
             </a:extLst>
           </p:cNvPr>
@@ -18390,7 +18397,7 @@
           <p:cNvPr id="26" name="Shape 24">
             <a:extLst xmlns:a="http://schemas.openxmlformats.org/drawingml/2006/main">
               <a:ext uri="{FF2B5EF4-FFF2-40B4-BE49-F238E27FC236}">
-                <a16:creationId xmlns:a16="http://schemas.microsoft.com/office/drawing/2014/main" id="{90A27AEC-0D6F-4DED-A5C9-B2EB14BDB461}"/>
+                <a16:creationId xmlns:a16="http://schemas.microsoft.com/office/drawing/2014/main" id="{5374DA6D-E819-4BC4-BBB2-1E7B27962ACE}"/>
               </a:ext>
             </a:extLst>
           </p:cNvPr>
@@ -18425,7 +18432,7 @@
           <p:cNvPr id="27" name="Text 25">
             <a:extLst xmlns:a="http://schemas.openxmlformats.org/drawingml/2006/main">
               <a:ext uri="{FF2B5EF4-FFF2-40B4-BE49-F238E27FC236}">
-                <a16:creationId xmlns:a16="http://schemas.microsoft.com/office/drawing/2014/main" id="{DF66E516-3D83-42DC-9F52-F5A921F88FF2}"/>
+                <a16:creationId xmlns:a16="http://schemas.microsoft.com/office/drawing/2014/main" id="{51E78484-0111-447B-A19C-3A69697A23DC}"/>
               </a:ext>
             </a:extLst>
           </p:cNvPr>
@@ -18472,7 +18479,7 @@
           <p:cNvPr id="28" name="Text 26">
             <a:extLst xmlns:a="http://schemas.openxmlformats.org/drawingml/2006/main">
               <a:ext uri="{FF2B5EF4-FFF2-40B4-BE49-F238E27FC236}">
-                <a16:creationId xmlns:a16="http://schemas.microsoft.com/office/drawing/2014/main" id="{BC551E7B-D855-46AE-B04E-0B178D9B2628}"/>
+                <a16:creationId xmlns:a16="http://schemas.microsoft.com/office/drawing/2014/main" id="{3E652872-E58D-46F8-A1F4-4DEC92994FAF}"/>
               </a:ext>
             </a:extLst>
           </p:cNvPr>
@@ -18519,7 +18526,7 @@
           <p:cNvPr id="29" name="Text 27">
             <a:extLst xmlns:a="http://schemas.openxmlformats.org/drawingml/2006/main">
               <a:ext uri="{FF2B5EF4-FFF2-40B4-BE49-F238E27FC236}">
-                <a16:creationId xmlns:a16="http://schemas.microsoft.com/office/drawing/2014/main" id="{E5E6C074-7F61-47B3-8C74-311E8B50F474}"/>
+                <a16:creationId xmlns:a16="http://schemas.microsoft.com/office/drawing/2014/main" id="{2F5F5E98-B154-47C5-90DF-71137FFAE4A4}"/>
               </a:ext>
             </a:extLst>
           </p:cNvPr>
@@ -18595,22 +18602,69 @@
       </p:sp>
       <p:sp>
         <p:nvSpPr>
-          <p:cNvPr id="30" name="Text 28">
-            <a:extLst xmlns:a="http://schemas.openxmlformats.org/drawingml/2006/main">
-              <a:ext uri="{FF2B5EF4-FFF2-40B4-BE49-F238E27FC236}">
-                <a16:creationId xmlns:a16="http://schemas.microsoft.com/office/drawing/2014/main" id="{955F8D07-FAF4-4639-9082-2AD0F7255ACA}"/>
-              </a:ext>
-            </a:extLst>
-          </p:cNvPr>
-          <p:cNvSpPr>
-            <a:spLocks xmlns:a="http://schemas.openxmlformats.org/drawingml/2006/main" noGrp="1"/>
-          </p:cNvSpPr>
-          <p:nvPr/>
-        </p:nvSpPr>
-        <p:spPr>
-          <a:xfrm xmlns:a="http://schemas.openxmlformats.org/drawingml/2006/main">
-            <a:off x="749808" y="4626864"/>
-            <a:ext cx="1371600" cy="292608"/>
+          <p:cNvPr id="43" name="Text 41">
+            <a:extLst xmlns:a="http://schemas.openxmlformats.org/drawingml/2006/main">
+              <a:ext uri="{FF2B5EF4-FFF2-40B4-BE49-F238E27FC236}">
+                <a16:creationId xmlns:a16="http://schemas.microsoft.com/office/drawing/2014/main" id="{F01F7E3C-3C01-49D4-9C72-650DDEA9D119}"/>
+              </a:ext>
+            </a:extLst>
+          </p:cNvPr>
+          <p:cNvSpPr>
+            <a:spLocks xmlns:a="http://schemas.openxmlformats.org/drawingml/2006/main" noGrp="1"/>
+          </p:cNvSpPr>
+          <p:nvPr/>
+        </p:nvSpPr>
+        <p:spPr>
+          <a:xfrm xmlns:a="http://schemas.openxmlformats.org/drawingml/2006/main">
+            <a:off x="1280160" y="4983480"/>
+            <a:ext cx="9646920" cy="384048"/>
+          </a:xfrm>
+          <a:prstGeom xmlns:a="http://schemas.openxmlformats.org/drawingml/2006/main" prst="rect">
+            <a:avLst/>
+          </a:prstGeom>
+          <a:noFill xmlns:a="http://schemas.openxmlformats.org/drawingml/2006/main"/>
+        </p:spPr>
+        <p:txBody>
+          <a:bodyPr xmlns:a="http://schemas.openxmlformats.org/drawingml/2006/main" wrap="square" lIns="0" tIns="0" rIns="0" bIns="0" anchor="ctr">
+            <a:normAutofit fontScale="100000"/>
+          </a:bodyPr>
+          <a:lstStyle xmlns:a="http://schemas.openxmlformats.org/drawingml/2006/main"/>
+          <a:p xmlns:a="http://schemas.openxmlformats.org/drawingml/2006/main">
+            <a:pPr marL="0" indent="0" algn="ctr">
+              <a:buNone/>
+            </a:pPr>
+            <a:r>
+              <a:rPr sz="1450" b="1">
+                <a:solidFill>
+                  <a:srgbClr val="171A1F"/>
+                </a:solidFill>
+                <a:latin typeface="PingFang SC"/>
+                <a:ea typeface="PingFang SC"/>
+                <a:cs typeface="PingFang SC"/>
+              </a:rPr>
+              <a:t>12 周内只验证三件事：稳定发布、真实激活、单位经济成立。</a:t>
+            </a:r>
+          </a:p>
+        </p:txBody>
+      </p:sp>
+      <p:sp>
+        <p:nvSpPr>
+          <p:cNvPr id="44" name="Text 42">
+            <a:extLst xmlns:a="http://schemas.openxmlformats.org/drawingml/2006/main">
+              <a:ext uri="{FF2B5EF4-FFF2-40B4-BE49-F238E27FC236}">
+                <a16:creationId xmlns:a16="http://schemas.microsoft.com/office/drawing/2014/main" id="{23073CB7-FE5D-4932-87EA-461B7A3C5A4F}"/>
+              </a:ext>
+            </a:extLst>
+          </p:cNvPr>
+          <p:cNvSpPr>
+            <a:spLocks xmlns:a="http://schemas.openxmlformats.org/drawingml/2006/main" noGrp="1"/>
+          </p:cNvSpPr>
+          <p:nvPr/>
+        </p:nvSpPr>
+        <p:spPr>
+          <a:xfrm xmlns:a="http://schemas.openxmlformats.org/drawingml/2006/main">
+            <a:off x="530352" y="6547104"/>
+            <a:ext cx="9052560" cy="164592"/>
           </a:xfrm>
           <a:prstGeom xmlns:a="http://schemas.openxmlformats.org/drawingml/2006/main" prst="rect">
             <a:avLst/>
@@ -18627,119 +18681,37 @@
               <a:buNone/>
             </a:pPr>
             <a:r>
-              <a:rPr sz="1400" b="1">
-                <a:solidFill>
-                  <a:srgbClr val="2B7A78"/>
-                </a:solidFill>
-                <a:latin typeface="PingFang SC"/>
-                <a:ea typeface="PingFang SC"/>
-                <a:cs typeface="PingFang SC"/>
-              </a:rPr>
-              <a:t>3 分钟现场证明</a:t>
-            </a:r>
-          </a:p>
-        </p:txBody>
-      </p:sp>
-      <p:sp>
-        <p:nvSpPr>
-          <p:cNvPr id="31" name="Shape 29">
-            <a:extLst xmlns:a="http://schemas.openxmlformats.org/drawingml/2006/main">
-              <a:ext uri="{FF2B5EF4-FFF2-40B4-BE49-F238E27FC236}">
-                <a16:creationId xmlns:a16="http://schemas.microsoft.com/office/drawing/2014/main" id="{6BDD94E0-4F1C-48B1-BAEC-3C41DED90D6F}"/>
-              </a:ext>
-            </a:extLst>
-          </p:cNvPr>
-          <p:cNvSpPr>
-            <a:spLocks xmlns:a="http://schemas.openxmlformats.org/drawingml/2006/main" noGrp="1"/>
-          </p:cNvSpPr>
-          <p:nvPr/>
-        </p:nvSpPr>
-        <p:spPr>
-          <a:xfrm xmlns:a="http://schemas.openxmlformats.org/drawingml/2006/main">
-            <a:off x="749808" y="5084064"/>
-            <a:ext cx="2450592" cy="749808"/>
-          </a:xfrm>
-          <a:prstGeom xmlns:a="http://schemas.openxmlformats.org/drawingml/2006/main" prst="roundRect">
-            <a:avLst>
-              <a:gd name="adj" fmla="val 9756"/>
-            </a:avLst>
-          </a:prstGeom>
-          <a:solidFill xmlns:a="http://schemas.openxmlformats.org/drawingml/2006/main">
-            <a:srgbClr val="FFFFFF"/>
-          </a:solidFill>
-          <a:ln xmlns:a="http://schemas.openxmlformats.org/drawingml/2006/main" w="12700">
-            <a:solidFill>
-              <a:srgbClr val="D9DEE3"/>
-            </a:solidFill>
-            <a:prstDash val="solid"/>
-          </a:ln>
-        </p:spPr>
-      </p:sp>
-      <p:sp>
-        <p:nvSpPr>
-          <p:cNvPr id="32" name="Text 30">
-            <a:extLst xmlns:a="http://schemas.openxmlformats.org/drawingml/2006/main">
-              <a:ext uri="{FF2B5EF4-FFF2-40B4-BE49-F238E27FC236}">
-                <a16:creationId xmlns:a16="http://schemas.microsoft.com/office/drawing/2014/main" id="{26E648B0-DE7C-4C33-B520-107CB50F4304}"/>
-              </a:ext>
-            </a:extLst>
-          </p:cNvPr>
-          <p:cNvSpPr>
-            <a:spLocks xmlns:a="http://schemas.openxmlformats.org/drawingml/2006/main" noGrp="1"/>
-          </p:cNvSpPr>
-          <p:nvPr/>
-        </p:nvSpPr>
-        <p:spPr>
-          <a:xfrm xmlns:a="http://schemas.openxmlformats.org/drawingml/2006/main">
-            <a:off x="896112" y="5212080"/>
-            <a:ext cx="841248" cy="256032"/>
-          </a:xfrm>
-          <a:prstGeom xmlns:a="http://schemas.openxmlformats.org/drawingml/2006/main" prst="rect">
-            <a:avLst/>
-          </a:prstGeom>
-          <a:noFill xmlns:a="http://schemas.openxmlformats.org/drawingml/2006/main"/>
-        </p:spPr>
-        <p:txBody>
-          <a:bodyPr xmlns:a="http://schemas.openxmlformats.org/drawingml/2006/main" wrap="square" lIns="0" tIns="0" rIns="0" bIns="0" anchor="ctr">
-            <a:normAutofit/>
-          </a:bodyPr>
-          <a:lstStyle xmlns:a="http://schemas.openxmlformats.org/drawingml/2006/main"/>
-          <a:p xmlns:a="http://schemas.openxmlformats.org/drawingml/2006/main">
-            <a:pPr marL="0" indent="0" algn="l">
-              <a:buNone/>
-            </a:pPr>
-            <a:r>
-              <a:rPr sz="950" b="1">
-                <a:solidFill>
-                  <a:srgbClr val="2B7A78"/>
+              <a:rPr sz="830">
+                <a:solidFill>
+                  <a:srgbClr val="69727E"/>
                 </a:solidFill>
                 <a:latin typeface="Aptos"/>
                 <a:ea typeface="Aptos"/>
                 <a:cs typeface="Aptos"/>
               </a:rPr>
-              <a:t>00:00–00:30</a:t>
-            </a:r>
-          </a:p>
-        </p:txBody>
-      </p:sp>
-      <p:sp>
-        <p:nvSpPr>
-          <p:cNvPr id="33" name="Text 31">
-            <a:extLst xmlns:a="http://schemas.openxmlformats.org/drawingml/2006/main">
-              <a:ext uri="{FF2B5EF4-FFF2-40B4-BE49-F238E27FC236}">
-                <a16:creationId xmlns:a16="http://schemas.microsoft.com/office/drawing/2014/main" id="{A0A3D577-EC8B-4538-8719-143D26FE6D69}"/>
-              </a:ext>
-            </a:extLst>
-          </p:cNvPr>
-          <p:cNvSpPr>
-            <a:spLocks xmlns:a="http://schemas.openxmlformats.org/drawingml/2006/main" noGrp="1"/>
-          </p:cNvSpPr>
-          <p:nvPr/>
-        </p:nvSpPr>
-        <p:spPr>
-          <a:xfrm xmlns:a="http://schemas.openxmlformats.org/drawingml/2006/main">
-            <a:off x="1664208" y="5175504"/>
-            <a:ext cx="1371600" cy="384048"/>
+              <a:t>路线图优先级：稳定发布 → 真实激活 → 留存与单位经济</a:t>
+            </a:r>
+          </a:p>
+        </p:txBody>
+      </p:sp>
+      <p:sp>
+        <p:nvSpPr>
+          <p:cNvPr id="45" name="Text 43">
+            <a:extLst xmlns:a="http://schemas.openxmlformats.org/drawingml/2006/main">
+              <a:ext uri="{FF2B5EF4-FFF2-40B4-BE49-F238E27FC236}">
+                <a16:creationId xmlns:a16="http://schemas.microsoft.com/office/drawing/2014/main" id="{9D2DC193-50F5-4DA0-850B-BCBE9DDECFE6}"/>
+              </a:ext>
+            </a:extLst>
+          </p:cNvPr>
+          <p:cNvSpPr>
+            <a:spLocks xmlns:a="http://schemas.openxmlformats.org/drawingml/2006/main" noGrp="1"/>
+          </p:cNvSpPr>
+          <p:nvPr/>
+        </p:nvSpPr>
+        <p:spPr>
+          <a:xfrm xmlns:a="http://schemas.openxmlformats.org/drawingml/2006/main">
+            <a:off x="10744200" y="6528816"/>
+            <a:ext cx="896112" cy="182880"/>
           </a:xfrm>
           <a:prstGeom xmlns:a="http://schemas.openxmlformats.org/drawingml/2006/main" prst="rect">
             <a:avLst/>
@@ -18752,546 +18724,18 @@
           </a:bodyPr>
           <a:lstStyle xmlns:a="http://schemas.openxmlformats.org/drawingml/2006/main"/>
           <a:p xmlns:a="http://schemas.openxmlformats.org/drawingml/2006/main">
-            <a:pPr marL="0" indent="0" algn="ctr">
-              <a:buNone/>
-            </a:pPr>
-            <a:r>
-              <a:rPr sz="1050" b="1">
-                <a:solidFill>
-                  <a:srgbClr val="3E4650"/>
-                </a:solidFill>
-                <a:latin typeface="PingFang SC"/>
-                <a:ea typeface="PingFang SC"/>
-                <a:cs typeface="PingFang SC"/>
-              </a:rPr>
-              <a:t>输入 API Key，拉取模型</a:t>
-            </a:r>
-          </a:p>
-        </p:txBody>
-      </p:sp>
-      <p:sp>
-        <p:nvSpPr>
-          <p:cNvPr id="34" name="Shape 32">
-            <a:extLst xmlns:a="http://schemas.openxmlformats.org/drawingml/2006/main">
-              <a:ext uri="{FF2B5EF4-FFF2-40B4-BE49-F238E27FC236}">
-                <a16:creationId xmlns:a16="http://schemas.microsoft.com/office/drawing/2014/main" id="{E71337D6-EAB0-4A8B-AF28-1B812A7E2869}"/>
-              </a:ext>
-            </a:extLst>
-          </p:cNvPr>
-          <p:cNvSpPr>
-            <a:spLocks xmlns:a="http://schemas.openxmlformats.org/drawingml/2006/main" noGrp="1"/>
-          </p:cNvSpPr>
-          <p:nvPr/>
-        </p:nvSpPr>
-        <p:spPr>
-          <a:xfrm xmlns:a="http://schemas.openxmlformats.org/drawingml/2006/main">
-            <a:off x="3493008" y="5084064"/>
-            <a:ext cx="2450592" cy="749808"/>
-          </a:xfrm>
-          <a:prstGeom xmlns:a="http://schemas.openxmlformats.org/drawingml/2006/main" prst="roundRect">
-            <a:avLst>
-              <a:gd name="adj" fmla="val 9756"/>
-            </a:avLst>
-          </a:prstGeom>
-          <a:solidFill xmlns:a="http://schemas.openxmlformats.org/drawingml/2006/main">
-            <a:srgbClr val="FFFFFF"/>
-          </a:solidFill>
-          <a:ln xmlns:a="http://schemas.openxmlformats.org/drawingml/2006/main" w="12700">
-            <a:solidFill>
-              <a:srgbClr val="D9DEE3"/>
-            </a:solidFill>
-            <a:prstDash val="solid"/>
-          </a:ln>
-        </p:spPr>
-      </p:sp>
-      <p:sp>
-        <p:nvSpPr>
-          <p:cNvPr id="35" name="Text 33">
-            <a:extLst xmlns:a="http://schemas.openxmlformats.org/drawingml/2006/main">
-              <a:ext uri="{FF2B5EF4-FFF2-40B4-BE49-F238E27FC236}">
-                <a16:creationId xmlns:a16="http://schemas.microsoft.com/office/drawing/2014/main" id="{3DF5E9C5-3568-4C69-85A0-A48CB41E4B7F}"/>
-              </a:ext>
-            </a:extLst>
-          </p:cNvPr>
-          <p:cNvSpPr>
-            <a:spLocks xmlns:a="http://schemas.openxmlformats.org/drawingml/2006/main" noGrp="1"/>
-          </p:cNvSpPr>
-          <p:nvPr/>
-        </p:nvSpPr>
-        <p:spPr>
-          <a:xfrm xmlns:a="http://schemas.openxmlformats.org/drawingml/2006/main">
-            <a:off x="3639312" y="5212080"/>
-            <a:ext cx="841248" cy="256032"/>
-          </a:xfrm>
-          <a:prstGeom xmlns:a="http://schemas.openxmlformats.org/drawingml/2006/main" prst="rect">
-            <a:avLst/>
-          </a:prstGeom>
-          <a:noFill xmlns:a="http://schemas.openxmlformats.org/drawingml/2006/main"/>
-        </p:spPr>
-        <p:txBody>
-          <a:bodyPr xmlns:a="http://schemas.openxmlformats.org/drawingml/2006/main" wrap="square" lIns="0" tIns="0" rIns="0" bIns="0" anchor="ctr">
-            <a:normAutofit/>
-          </a:bodyPr>
-          <a:lstStyle xmlns:a="http://schemas.openxmlformats.org/drawingml/2006/main"/>
-          <a:p xmlns:a="http://schemas.openxmlformats.org/drawingml/2006/main">
-            <a:pPr marL="0" indent="0" algn="l">
-              <a:buNone/>
-            </a:pPr>
-            <a:r>
-              <a:rPr sz="950" b="1">
-                <a:solidFill>
-                  <a:srgbClr val="2B7A78"/>
+            <a:pPr marL="0" indent="0" algn="r">
+              <a:buNone/>
+            </a:pPr>
+            <a:r>
+              <a:rPr sz="830">
+                <a:solidFill>
+                  <a:srgbClr val="69727E"/>
                 </a:solidFill>
                 <a:latin typeface="Aptos"/>
                 <a:ea typeface="Aptos"/>
                 <a:cs typeface="Aptos"/>
               </a:rPr>
-              <a:t>00:30–01:30</a:t>
-            </a:r>
-          </a:p>
-        </p:txBody>
-      </p:sp>
-      <p:sp>
-        <p:nvSpPr>
-          <p:cNvPr id="36" name="Text 34">
-            <a:extLst xmlns:a="http://schemas.openxmlformats.org/drawingml/2006/main">
-              <a:ext uri="{FF2B5EF4-FFF2-40B4-BE49-F238E27FC236}">
-                <a16:creationId xmlns:a16="http://schemas.microsoft.com/office/drawing/2014/main" id="{4E38FD0B-B3B1-43D5-B722-1AE1E26BA2A7}"/>
-              </a:ext>
-            </a:extLst>
-          </p:cNvPr>
-          <p:cNvSpPr>
-            <a:spLocks xmlns:a="http://schemas.openxmlformats.org/drawingml/2006/main" noGrp="1"/>
-          </p:cNvSpPr>
-          <p:nvPr/>
-        </p:nvSpPr>
-        <p:spPr>
-          <a:xfrm xmlns:a="http://schemas.openxmlformats.org/drawingml/2006/main">
-            <a:off x="4407408" y="5175504"/>
-            <a:ext cx="1371600" cy="384048"/>
-          </a:xfrm>
-          <a:prstGeom xmlns:a="http://schemas.openxmlformats.org/drawingml/2006/main" prst="rect">
-            <a:avLst/>
-          </a:prstGeom>
-          <a:noFill xmlns:a="http://schemas.openxmlformats.org/drawingml/2006/main"/>
-        </p:spPr>
-        <p:txBody>
-          <a:bodyPr xmlns:a="http://schemas.openxmlformats.org/drawingml/2006/main" wrap="square" lIns="0" tIns="0" rIns="0" bIns="0" anchor="ctr">
-            <a:normAutofit/>
-          </a:bodyPr>
-          <a:lstStyle xmlns:a="http://schemas.openxmlformats.org/drawingml/2006/main"/>
-          <a:p xmlns:a="http://schemas.openxmlformats.org/drawingml/2006/main">
-            <a:pPr marL="0" indent="0" algn="ctr">
-              <a:buNone/>
-            </a:pPr>
-            <a:r>
-              <a:rPr sz="1050" b="1">
-                <a:solidFill>
-                  <a:srgbClr val="3E4650"/>
-                </a:solidFill>
-                <a:latin typeface="PingFang SC"/>
-                <a:ea typeface="PingFang SC"/>
-                <a:cs typeface="PingFang SC"/>
-              </a:rPr>
-              <a:t>发送项目任务，展示实时步骤</a:t>
-            </a:r>
-          </a:p>
-        </p:txBody>
-      </p:sp>
-      <p:sp>
-        <p:nvSpPr>
-          <p:cNvPr id="37" name="Shape 35">
-            <a:extLst xmlns:a="http://schemas.openxmlformats.org/drawingml/2006/main">
-              <a:ext uri="{FF2B5EF4-FFF2-40B4-BE49-F238E27FC236}">
-                <a16:creationId xmlns:a16="http://schemas.microsoft.com/office/drawing/2014/main" id="{9D7E3434-BA5E-40C4-A869-E86FE0DD0218}"/>
-              </a:ext>
-            </a:extLst>
-          </p:cNvPr>
-          <p:cNvSpPr>
-            <a:spLocks xmlns:a="http://schemas.openxmlformats.org/drawingml/2006/main" noGrp="1"/>
-          </p:cNvSpPr>
-          <p:nvPr/>
-        </p:nvSpPr>
-        <p:spPr>
-          <a:xfrm xmlns:a="http://schemas.openxmlformats.org/drawingml/2006/main">
-            <a:off x="6236208" y="5084064"/>
-            <a:ext cx="2450592" cy="749808"/>
-          </a:xfrm>
-          <a:prstGeom xmlns:a="http://schemas.openxmlformats.org/drawingml/2006/main" prst="roundRect">
-            <a:avLst>
-              <a:gd name="adj" fmla="val 9756"/>
-            </a:avLst>
-          </a:prstGeom>
-          <a:solidFill xmlns:a="http://schemas.openxmlformats.org/drawingml/2006/main">
-            <a:srgbClr val="FFFFFF"/>
-          </a:solidFill>
-          <a:ln xmlns:a="http://schemas.openxmlformats.org/drawingml/2006/main" w="12700">
-            <a:solidFill>
-              <a:srgbClr val="D9DEE3"/>
-            </a:solidFill>
-            <a:prstDash val="solid"/>
-          </a:ln>
-        </p:spPr>
-      </p:sp>
-      <p:sp>
-        <p:nvSpPr>
-          <p:cNvPr id="38" name="Text 36">
-            <a:extLst xmlns:a="http://schemas.openxmlformats.org/drawingml/2006/main">
-              <a:ext uri="{FF2B5EF4-FFF2-40B4-BE49-F238E27FC236}">
-                <a16:creationId xmlns:a16="http://schemas.microsoft.com/office/drawing/2014/main" id="{C3588F1C-7D93-45BD-843E-5B4353F31347}"/>
-              </a:ext>
-            </a:extLst>
-          </p:cNvPr>
-          <p:cNvSpPr>
-            <a:spLocks xmlns:a="http://schemas.openxmlformats.org/drawingml/2006/main" noGrp="1"/>
-          </p:cNvSpPr>
-          <p:nvPr/>
-        </p:nvSpPr>
-        <p:spPr>
-          <a:xfrm xmlns:a="http://schemas.openxmlformats.org/drawingml/2006/main">
-            <a:off x="6382512" y="5212080"/>
-            <a:ext cx="841248" cy="256032"/>
-          </a:xfrm>
-          <a:prstGeom xmlns:a="http://schemas.openxmlformats.org/drawingml/2006/main" prst="rect">
-            <a:avLst/>
-          </a:prstGeom>
-          <a:noFill xmlns:a="http://schemas.openxmlformats.org/drawingml/2006/main"/>
-        </p:spPr>
-        <p:txBody>
-          <a:bodyPr xmlns:a="http://schemas.openxmlformats.org/drawingml/2006/main" wrap="square" lIns="0" tIns="0" rIns="0" bIns="0" anchor="ctr">
-            <a:normAutofit/>
-          </a:bodyPr>
-          <a:lstStyle xmlns:a="http://schemas.openxmlformats.org/drawingml/2006/main"/>
-          <a:p xmlns:a="http://schemas.openxmlformats.org/drawingml/2006/main">
-            <a:pPr marL="0" indent="0" algn="l">
-              <a:buNone/>
-            </a:pPr>
-            <a:r>
-              <a:rPr sz="950" b="1">
-                <a:solidFill>
-                  <a:srgbClr val="2B7A78"/>
-                </a:solidFill>
-                <a:latin typeface="Aptos"/>
-                <a:ea typeface="Aptos"/>
-                <a:cs typeface="Aptos"/>
-              </a:rPr>
-              <a:t>01:30–02:30</a:t>
-            </a:r>
-          </a:p>
-        </p:txBody>
-      </p:sp>
-      <p:sp>
-        <p:nvSpPr>
-          <p:cNvPr id="39" name="Text 37">
-            <a:extLst xmlns:a="http://schemas.openxmlformats.org/drawingml/2006/main">
-              <a:ext uri="{FF2B5EF4-FFF2-40B4-BE49-F238E27FC236}">
-                <a16:creationId xmlns:a16="http://schemas.microsoft.com/office/drawing/2014/main" id="{763E1E25-C3BC-4121-A9D8-8FA32B5BE560}"/>
-              </a:ext>
-            </a:extLst>
-          </p:cNvPr>
-          <p:cNvSpPr>
-            <a:spLocks xmlns:a="http://schemas.openxmlformats.org/drawingml/2006/main" noGrp="1"/>
-          </p:cNvSpPr>
-          <p:nvPr/>
-        </p:nvSpPr>
-        <p:spPr>
-          <a:xfrm xmlns:a="http://schemas.openxmlformats.org/drawingml/2006/main">
-            <a:off x="7150608" y="5175504"/>
-            <a:ext cx="1371600" cy="384048"/>
-          </a:xfrm>
-          <a:prstGeom xmlns:a="http://schemas.openxmlformats.org/drawingml/2006/main" prst="rect">
-            <a:avLst/>
-          </a:prstGeom>
-          <a:noFill xmlns:a="http://schemas.openxmlformats.org/drawingml/2006/main"/>
-        </p:spPr>
-        <p:txBody>
-          <a:bodyPr xmlns:a="http://schemas.openxmlformats.org/drawingml/2006/main" wrap="square" lIns="0" tIns="0" rIns="0" bIns="0" anchor="ctr">
-            <a:normAutofit/>
-          </a:bodyPr>
-          <a:lstStyle xmlns:a="http://schemas.openxmlformats.org/drawingml/2006/main"/>
-          <a:p xmlns:a="http://schemas.openxmlformats.org/drawingml/2006/main">
-            <a:pPr marL="0" indent="0" algn="ctr">
-              <a:buNone/>
-            </a:pPr>
-            <a:r>
-              <a:rPr sz="1050" b="1">
-                <a:solidFill>
-                  <a:srgbClr val="3E4650"/>
-                </a:solidFill>
-                <a:latin typeface="PingFang SC"/>
-                <a:ea typeface="PingFang SC"/>
-                <a:cs typeface="PingFang SC"/>
-              </a:rPr>
-              <a:t>打开产物、差异和验证结果</a:t>
-            </a:r>
-          </a:p>
-        </p:txBody>
-      </p:sp>
-      <p:sp>
-        <p:nvSpPr>
-          <p:cNvPr id="40" name="Shape 38">
-            <a:extLst xmlns:a="http://schemas.openxmlformats.org/drawingml/2006/main">
-              <a:ext uri="{FF2B5EF4-FFF2-40B4-BE49-F238E27FC236}">
-                <a16:creationId xmlns:a16="http://schemas.microsoft.com/office/drawing/2014/main" id="{6B6462D2-B666-4903-A232-FABDED84BF29}"/>
-              </a:ext>
-            </a:extLst>
-          </p:cNvPr>
-          <p:cNvSpPr>
-            <a:spLocks xmlns:a="http://schemas.openxmlformats.org/drawingml/2006/main" noGrp="1"/>
-          </p:cNvSpPr>
-          <p:nvPr/>
-        </p:nvSpPr>
-        <p:spPr>
-          <a:xfrm xmlns:a="http://schemas.openxmlformats.org/drawingml/2006/main">
-            <a:off x="8979408" y="5084064"/>
-            <a:ext cx="2450592" cy="749808"/>
-          </a:xfrm>
-          <a:prstGeom xmlns:a="http://schemas.openxmlformats.org/drawingml/2006/main" prst="roundRect">
-            <a:avLst>
-              <a:gd name="adj" fmla="val 9756"/>
-            </a:avLst>
-          </a:prstGeom>
-          <a:solidFill xmlns:a="http://schemas.openxmlformats.org/drawingml/2006/main">
-            <a:srgbClr val="DDEBE3"/>
-          </a:solidFill>
-          <a:ln xmlns:a="http://schemas.openxmlformats.org/drawingml/2006/main" w="12700">
-            <a:solidFill>
-              <a:srgbClr val="39775C"/>
-            </a:solidFill>
-            <a:prstDash val="solid"/>
-          </a:ln>
-        </p:spPr>
-      </p:sp>
-      <p:sp>
-        <p:nvSpPr>
-          <p:cNvPr id="41" name="Text 39">
-            <a:extLst xmlns:a="http://schemas.openxmlformats.org/drawingml/2006/main">
-              <a:ext uri="{FF2B5EF4-FFF2-40B4-BE49-F238E27FC236}">
-                <a16:creationId xmlns:a16="http://schemas.microsoft.com/office/drawing/2014/main" id="{C70B2DF6-2F27-4C55-9C16-B11B51A621AC}"/>
-              </a:ext>
-            </a:extLst>
-          </p:cNvPr>
-          <p:cNvSpPr>
-            <a:spLocks xmlns:a="http://schemas.openxmlformats.org/drawingml/2006/main" noGrp="1"/>
-          </p:cNvSpPr>
-          <p:nvPr/>
-        </p:nvSpPr>
-        <p:spPr>
-          <a:xfrm xmlns:a="http://schemas.openxmlformats.org/drawingml/2006/main">
-            <a:off x="9125712" y="5212080"/>
-            <a:ext cx="841248" cy="256032"/>
-          </a:xfrm>
-          <a:prstGeom xmlns:a="http://schemas.openxmlformats.org/drawingml/2006/main" prst="rect">
-            <a:avLst/>
-          </a:prstGeom>
-          <a:noFill xmlns:a="http://schemas.openxmlformats.org/drawingml/2006/main"/>
-        </p:spPr>
-        <p:txBody>
-          <a:bodyPr xmlns:a="http://schemas.openxmlformats.org/drawingml/2006/main" wrap="square" lIns="0" tIns="0" rIns="0" bIns="0" anchor="ctr">
-            <a:normAutofit/>
-          </a:bodyPr>
-          <a:lstStyle xmlns:a="http://schemas.openxmlformats.org/drawingml/2006/main"/>
-          <a:p xmlns:a="http://schemas.openxmlformats.org/drawingml/2006/main">
-            <a:pPr marL="0" indent="0" algn="l">
-              <a:buNone/>
-            </a:pPr>
-            <a:r>
-              <a:rPr sz="950" b="1">
-                <a:solidFill>
-                  <a:srgbClr val="39775C"/>
-                </a:solidFill>
-                <a:latin typeface="Aptos"/>
-                <a:ea typeface="Aptos"/>
-                <a:cs typeface="Aptos"/>
-              </a:rPr>
-              <a:t>02:30–03:00</a:t>
-            </a:r>
-          </a:p>
-        </p:txBody>
-      </p:sp>
-      <p:sp>
-        <p:nvSpPr>
-          <p:cNvPr id="42" name="Text 40">
-            <a:extLst xmlns:a="http://schemas.openxmlformats.org/drawingml/2006/main">
-              <a:ext uri="{FF2B5EF4-FFF2-40B4-BE49-F238E27FC236}">
-                <a16:creationId xmlns:a16="http://schemas.microsoft.com/office/drawing/2014/main" id="{D8333F93-6213-41AC-B768-138C0E5FFBC2}"/>
-              </a:ext>
-            </a:extLst>
-          </p:cNvPr>
-          <p:cNvSpPr>
-            <a:spLocks xmlns:a="http://schemas.openxmlformats.org/drawingml/2006/main" noGrp="1"/>
-          </p:cNvSpPr>
-          <p:nvPr/>
-        </p:nvSpPr>
-        <p:spPr>
-          <a:xfrm xmlns:a="http://schemas.openxmlformats.org/drawingml/2006/main">
-            <a:off x="9893808" y="5175504"/>
-            <a:ext cx="1371600" cy="384048"/>
-          </a:xfrm>
-          <a:prstGeom xmlns:a="http://schemas.openxmlformats.org/drawingml/2006/main" prst="rect">
-            <a:avLst/>
-          </a:prstGeom>
-          <a:noFill xmlns:a="http://schemas.openxmlformats.org/drawingml/2006/main"/>
-        </p:spPr>
-        <p:txBody>
-          <a:bodyPr xmlns:a="http://schemas.openxmlformats.org/drawingml/2006/main" wrap="square" lIns="0" tIns="0" rIns="0" bIns="0" anchor="ctr">
-            <a:normAutofit/>
-          </a:bodyPr>
-          <a:lstStyle xmlns:a="http://schemas.openxmlformats.org/drawingml/2006/main"/>
-          <a:p xmlns:a="http://schemas.openxmlformats.org/drawingml/2006/main">
-            <a:pPr marL="0" indent="0" algn="ctr">
-              <a:buNone/>
-            </a:pPr>
-            <a:r>
-              <a:rPr sz="1050" b="1">
-                <a:solidFill>
-                  <a:srgbClr val="3E4650"/>
-                </a:solidFill>
-                <a:latin typeface="PingFang SC"/>
-                <a:ea typeface="PingFang SC"/>
-                <a:cs typeface="PingFang SC"/>
-              </a:rPr>
-              <a:t>展示 EBAI 安全边界与构建证据</a:t>
-            </a:r>
-          </a:p>
-        </p:txBody>
-      </p:sp>
-      <p:sp>
-        <p:nvSpPr>
-          <p:cNvPr id="43" name="Text 41">
-            <a:extLst xmlns:a="http://schemas.openxmlformats.org/drawingml/2006/main">
-              <a:ext uri="{FF2B5EF4-FFF2-40B4-BE49-F238E27FC236}">
-                <a16:creationId xmlns:a16="http://schemas.microsoft.com/office/drawing/2014/main" id="{AD78F826-B78A-4549-87E9-543F079E2390}"/>
-              </a:ext>
-            </a:extLst>
-          </p:cNvPr>
-          <p:cNvSpPr>
-            <a:spLocks xmlns:a="http://schemas.openxmlformats.org/drawingml/2006/main" noGrp="1"/>
-          </p:cNvSpPr>
-          <p:nvPr/>
-        </p:nvSpPr>
-        <p:spPr>
-          <a:xfrm xmlns:a="http://schemas.openxmlformats.org/drawingml/2006/main">
-            <a:off x="1280160" y="6053328"/>
-            <a:ext cx="9646920" cy="310896"/>
-          </a:xfrm>
-          <a:prstGeom xmlns:a="http://schemas.openxmlformats.org/drawingml/2006/main" prst="rect">
-            <a:avLst/>
-          </a:prstGeom>
-          <a:noFill xmlns:a="http://schemas.openxmlformats.org/drawingml/2006/main"/>
-        </p:spPr>
-        <p:txBody>
-          <a:bodyPr xmlns:a="http://schemas.openxmlformats.org/drawingml/2006/main" wrap="square" lIns="0" tIns="0" rIns="0" bIns="0" anchor="ctr">
-            <a:normAutofit/>
-          </a:bodyPr>
-          <a:lstStyle xmlns:a="http://schemas.openxmlformats.org/drawingml/2006/main"/>
-          <a:p xmlns:a="http://schemas.openxmlformats.org/drawingml/2006/main">
-            <a:pPr marL="0" indent="0" algn="ctr">
-              <a:buNone/>
-            </a:pPr>
-            <a:r>
-              <a:rPr sz="1450" b="1">
-                <a:solidFill>
-                  <a:srgbClr val="171A1F"/>
-                </a:solidFill>
-                <a:latin typeface="PingFang SC"/>
-                <a:ea typeface="PingFang SC"/>
-                <a:cs typeface="PingFang SC"/>
-              </a:rPr>
-              <a:t>每个阶段按行为指标验收，不以“新增多少功能”验收。</a:t>
-            </a:r>
-          </a:p>
-        </p:txBody>
-      </p:sp>
-      <p:sp>
-        <p:nvSpPr>
-          <p:cNvPr id="44" name="Text 42">
-            <a:extLst xmlns:a="http://schemas.openxmlformats.org/drawingml/2006/main">
-              <a:ext uri="{FF2B5EF4-FFF2-40B4-BE49-F238E27FC236}">
-                <a16:creationId xmlns:a16="http://schemas.microsoft.com/office/drawing/2014/main" id="{AE29E33A-1516-43FC-9529-31B5EB90E61B}"/>
-              </a:ext>
-            </a:extLst>
-          </p:cNvPr>
-          <p:cNvSpPr>
-            <a:spLocks xmlns:a="http://schemas.openxmlformats.org/drawingml/2006/main" noGrp="1"/>
-          </p:cNvSpPr>
-          <p:nvPr/>
-        </p:nvSpPr>
-        <p:spPr>
-          <a:xfrm xmlns:a="http://schemas.openxmlformats.org/drawingml/2006/main">
-            <a:off x="530352" y="6547104"/>
-            <a:ext cx="9052560" cy="164592"/>
-          </a:xfrm>
-          <a:prstGeom xmlns:a="http://schemas.openxmlformats.org/drawingml/2006/main" prst="rect">
-            <a:avLst/>
-          </a:prstGeom>
-          <a:noFill xmlns:a="http://schemas.openxmlformats.org/drawingml/2006/main"/>
-        </p:spPr>
-        <p:txBody>
-          <a:bodyPr xmlns:a="http://schemas.openxmlformats.org/drawingml/2006/main" wrap="square" lIns="0" tIns="0" rIns="0" bIns="0" anchor="ctr">
-            <a:normAutofit/>
-          </a:bodyPr>
-          <a:lstStyle xmlns:a="http://schemas.openxmlformats.org/drawingml/2006/main"/>
-          <a:p xmlns:a="http://schemas.openxmlformats.org/drawingml/2006/main">
-            <a:pPr marL="0" indent="0" algn="l">
-              <a:buNone/>
-            </a:pPr>
-            <a:r>
-              <a:rPr sz="830">
-                <a:solidFill>
-                  <a:srgbClr val="69727E"/>
-                </a:solidFill>
-                <a:latin typeface="Aptos"/>
-                <a:ea typeface="Aptos"/>
-                <a:cs typeface="Aptos"/>
-              </a:rPr>
-              <a:t>路线图优先级：稳定发布 → 真实激活 → 留存与单位经济</a:t>
-            </a:r>
-          </a:p>
-        </p:txBody>
-      </p:sp>
-      <p:sp>
-        <p:nvSpPr>
-          <p:cNvPr id="45" name="Text 43">
-            <a:extLst xmlns:a="http://schemas.openxmlformats.org/drawingml/2006/main">
-              <a:ext uri="{FF2B5EF4-FFF2-40B4-BE49-F238E27FC236}">
-                <a16:creationId xmlns:a16="http://schemas.microsoft.com/office/drawing/2014/main" id="{290249D9-6B15-49A4-A01B-4A1F06457BB6}"/>
-              </a:ext>
-            </a:extLst>
-          </p:cNvPr>
-          <p:cNvSpPr>
-            <a:spLocks xmlns:a="http://schemas.openxmlformats.org/drawingml/2006/main" noGrp="1"/>
-          </p:cNvSpPr>
-          <p:nvPr/>
-        </p:nvSpPr>
-        <p:spPr>
-          <a:xfrm xmlns:a="http://schemas.openxmlformats.org/drawingml/2006/main">
-            <a:off x="10744200" y="6528816"/>
-            <a:ext cx="896112" cy="182880"/>
-          </a:xfrm>
-          <a:prstGeom xmlns:a="http://schemas.openxmlformats.org/drawingml/2006/main" prst="rect">
-            <a:avLst/>
-          </a:prstGeom>
-          <a:noFill xmlns:a="http://schemas.openxmlformats.org/drawingml/2006/main"/>
-        </p:spPr>
-        <p:txBody>
-          <a:bodyPr xmlns:a="http://schemas.openxmlformats.org/drawingml/2006/main" wrap="square" lIns="0" tIns="0" rIns="0" bIns="0" anchor="ctr">
-            <a:normAutofit/>
-          </a:bodyPr>
-          <a:lstStyle xmlns:a="http://schemas.openxmlformats.org/drawingml/2006/main"/>
-          <a:p xmlns:a="http://schemas.openxmlformats.org/drawingml/2006/main">
-            <a:pPr marL="0" indent="0" algn="r">
-              <a:buNone/>
-            </a:pPr>
-            <a:r>
-              <a:rPr sz="830">
-                <a:solidFill>
-                  <a:srgbClr val="69727E"/>
-                </a:solidFill>
-                <a:latin typeface="Aptos"/>
-                <a:ea typeface="Aptos"/>
-                <a:cs typeface="Aptos"/>
-              </a:rPr>
               <a:t>18 / 19</a:t>
             </a:r>
           </a:p>
@@ -19300,7 +18744,7 @@
     </p:spTree>
     <p:extLst>
       <p:ext uri="{BB962C8B-B14F-4D97-AF65-F5344CB8AC3E}">
-        <p14:creationId xmlns:p14="http://schemas.microsoft.com/office/powerpoint/2010/main" val="1977270341"/>
+        <p14:creationId xmlns:p14="http://schemas.microsoft.com/office/powerpoint/2010/main" val="652155901"/>
       </p:ext>
     </p:extLst>
   </p:cSld>
@@ -19335,7 +18779,7 @@
           <p:nvPr/>
         </p:nvPicPr>
         <p:blipFill>
-          <a:blip xmlns:r="http://schemas.openxmlformats.org/officeDocument/2006/relationships" xmlns:a="http://schemas.openxmlformats.org/drawingml/2006/main" r:embed="R926c5f188d9a4b74"/>
+          <a:blip xmlns:r="http://schemas.openxmlformats.org/officeDocument/2006/relationships" xmlns:a="http://schemas.openxmlformats.org/drawingml/2006/main" r:embed="Rf16fde8891d1457a"/>
           <a:stretch xmlns:a="http://schemas.openxmlformats.org/drawingml/2006/main">
             <a:fillRect l="0" t="0" r="0" b="0"/>
           </a:stretch>
@@ -19355,7 +18799,7 @@
           <p:cNvPr id="3" name="Text 0">
             <a:extLst xmlns:a="http://schemas.openxmlformats.org/drawingml/2006/main">
               <a:ext uri="{FF2B5EF4-FFF2-40B4-BE49-F238E27FC236}">
-                <a16:creationId xmlns:a16="http://schemas.microsoft.com/office/drawing/2014/main" id="{F2311976-A499-4AEC-B3D8-09CDD89DE67F}"/>
+                <a16:creationId xmlns:a16="http://schemas.microsoft.com/office/drawing/2014/main" id="{68CDF199-6674-4336-A248-5AE731E4D01F}"/>
               </a:ext>
             </a:extLst>
           </p:cNvPr>
@@ -19402,7 +18846,7 @@
           <p:cNvPr id="4" name="Text 1">
             <a:extLst xmlns:a="http://schemas.openxmlformats.org/drawingml/2006/main">
               <a:ext uri="{FF2B5EF4-FFF2-40B4-BE49-F238E27FC236}">
-                <a16:creationId xmlns:a16="http://schemas.microsoft.com/office/drawing/2014/main" id="{2A83A57F-38A5-40C4-8E8A-7F52C20AEBAB}"/>
+                <a16:creationId xmlns:a16="http://schemas.microsoft.com/office/drawing/2014/main" id="{D92C4494-BCE1-4624-8A64-D63B7960D1E0}"/>
               </a:ext>
             </a:extLst>
           </p:cNvPr>
@@ -19449,7 +18893,7 @@
           <p:cNvPr id="5" name="Text 2">
             <a:extLst xmlns:a="http://schemas.openxmlformats.org/drawingml/2006/main">
               <a:ext uri="{FF2B5EF4-FFF2-40B4-BE49-F238E27FC236}">
-                <a16:creationId xmlns:a16="http://schemas.microsoft.com/office/drawing/2014/main" id="{B48510D2-7080-49C4-B7CB-6738723D76EF}"/>
+                <a16:creationId xmlns:a16="http://schemas.microsoft.com/office/drawing/2014/main" id="{2DF1FF0C-588F-4819-9850-F8ED8D6A4E34}"/>
               </a:ext>
             </a:extLst>
           </p:cNvPr>
@@ -19496,7 +18940,7 @@
           <p:cNvPr id="6" name="Shape 3">
             <a:extLst xmlns:a="http://schemas.openxmlformats.org/drawingml/2006/main">
               <a:ext uri="{FF2B5EF4-FFF2-40B4-BE49-F238E27FC236}">
-                <a16:creationId xmlns:a16="http://schemas.microsoft.com/office/drawing/2014/main" id="{EFF71AF3-AA3B-4ED9-9F54-A1FA54C0ECC3}"/>
+                <a16:creationId xmlns:a16="http://schemas.microsoft.com/office/drawing/2014/main" id="{159A06CB-3911-4C66-B599-644AB1415904}"/>
               </a:ext>
             </a:extLst>
           </p:cNvPr>
@@ -19531,7 +18975,7 @@
           <p:cNvPr id="7" name="Shape 4">
             <a:extLst xmlns:a="http://schemas.openxmlformats.org/drawingml/2006/main">
               <a:ext uri="{FF2B5EF4-FFF2-40B4-BE49-F238E27FC236}">
-                <a16:creationId xmlns:a16="http://schemas.microsoft.com/office/drawing/2014/main" id="{CF01EC35-2F47-4915-B361-59E4E2541BFB}"/>
+                <a16:creationId xmlns:a16="http://schemas.microsoft.com/office/drawing/2014/main" id="{8FFB7DA3-C7F5-47BF-A76B-D1DEAEB05067}"/>
               </a:ext>
             </a:extLst>
           </p:cNvPr>
@@ -19564,7 +19008,7 @@
           <p:cNvPr id="8" name="Text 5">
             <a:extLst xmlns:a="http://schemas.openxmlformats.org/drawingml/2006/main">
               <a:ext uri="{FF2B5EF4-FFF2-40B4-BE49-F238E27FC236}">
-                <a16:creationId xmlns:a16="http://schemas.microsoft.com/office/drawing/2014/main" id="{2271C0E1-A3B3-42C5-AC6D-DB19956B8163}"/>
+                <a16:creationId xmlns:a16="http://schemas.microsoft.com/office/drawing/2014/main" id="{2FBB4BAF-1225-4FBA-A06F-10FFF0A8BBB6}"/>
               </a:ext>
             </a:extLst>
           </p:cNvPr>
@@ -19611,7 +19055,7 @@
           <p:cNvPr id="9" name="Text 6">
             <a:extLst xmlns:a="http://schemas.openxmlformats.org/drawingml/2006/main">
               <a:ext uri="{FF2B5EF4-FFF2-40B4-BE49-F238E27FC236}">
-                <a16:creationId xmlns:a16="http://schemas.microsoft.com/office/drawing/2014/main" id="{BFD4AA00-3E31-4EE8-B642-03F1B7860B8C}"/>
+                <a16:creationId xmlns:a16="http://schemas.microsoft.com/office/drawing/2014/main" id="{85714D4D-9220-4B7E-B873-6A9005F3C05A}"/>
               </a:ext>
             </a:extLst>
           </p:cNvPr>
@@ -19658,7 +19102,7 @@
           <p:cNvPr id="10" name="Shape 7">
             <a:extLst xmlns:a="http://schemas.openxmlformats.org/drawingml/2006/main">
               <a:ext uri="{FF2B5EF4-FFF2-40B4-BE49-F238E27FC236}">
-                <a16:creationId xmlns:a16="http://schemas.microsoft.com/office/drawing/2014/main" id="{E47CEA80-98CA-434F-B454-3D876929187E}"/>
+                <a16:creationId xmlns:a16="http://schemas.microsoft.com/office/drawing/2014/main" id="{96DD37A8-E53B-4CEB-95B0-D6E4ACDCC321}"/>
               </a:ext>
             </a:extLst>
           </p:cNvPr>
@@ -19693,7 +19137,7 @@
           <p:cNvPr id="11" name="Shape 8">
             <a:extLst xmlns:a="http://schemas.openxmlformats.org/drawingml/2006/main">
               <a:ext uri="{FF2B5EF4-FFF2-40B4-BE49-F238E27FC236}">
-                <a16:creationId xmlns:a16="http://schemas.microsoft.com/office/drawing/2014/main" id="{D93F10A8-CDAE-4189-A97B-A36BFFA56C96}"/>
+                <a16:creationId xmlns:a16="http://schemas.microsoft.com/office/drawing/2014/main" id="{4FEA4248-8DD3-4AED-A0EB-EECFE4AD3121}"/>
               </a:ext>
             </a:extLst>
           </p:cNvPr>
@@ -19726,7 +19170,7 @@
           <p:cNvPr id="12" name="Text 9">
             <a:extLst xmlns:a="http://schemas.openxmlformats.org/drawingml/2006/main">
               <a:ext uri="{FF2B5EF4-FFF2-40B4-BE49-F238E27FC236}">
-                <a16:creationId xmlns:a16="http://schemas.microsoft.com/office/drawing/2014/main" id="{C57A42C3-D2BB-4BE1-93B6-D61703C6F767}"/>
+                <a16:creationId xmlns:a16="http://schemas.microsoft.com/office/drawing/2014/main" id="{F0E10884-95AF-4E9F-B494-8812765D0865}"/>
               </a:ext>
             </a:extLst>
           </p:cNvPr>
@@ -19773,7 +19217,7 @@
           <p:cNvPr id="13" name="Text 10">
             <a:extLst xmlns:a="http://schemas.openxmlformats.org/drawingml/2006/main">
               <a:ext uri="{FF2B5EF4-FFF2-40B4-BE49-F238E27FC236}">
-                <a16:creationId xmlns:a16="http://schemas.microsoft.com/office/drawing/2014/main" id="{9B61A428-2D4A-4CF8-B7FA-26B5FFD687E3}"/>
+                <a16:creationId xmlns:a16="http://schemas.microsoft.com/office/drawing/2014/main" id="{4F011477-37C1-4293-9E3B-C59D80E007A6}"/>
               </a:ext>
             </a:extLst>
           </p:cNvPr>
@@ -19820,7 +19264,7 @@
           <p:cNvPr id="14" name="Shape 11">
             <a:extLst xmlns:a="http://schemas.openxmlformats.org/drawingml/2006/main">
               <a:ext uri="{FF2B5EF4-FFF2-40B4-BE49-F238E27FC236}">
-                <a16:creationId xmlns:a16="http://schemas.microsoft.com/office/drawing/2014/main" id="{91AA1FFC-A2A0-4DA7-9BBF-1371FBBAF9B9}"/>
+                <a16:creationId xmlns:a16="http://schemas.microsoft.com/office/drawing/2014/main" id="{C8DC5CCD-CC0E-4F6A-88AE-11FEF8CD05E2}"/>
               </a:ext>
             </a:extLst>
           </p:cNvPr>
@@ -19855,7 +19299,7 @@
           <p:cNvPr id="15" name="Shape 12">
             <a:extLst xmlns:a="http://schemas.openxmlformats.org/drawingml/2006/main">
               <a:ext uri="{FF2B5EF4-FFF2-40B4-BE49-F238E27FC236}">
-                <a16:creationId xmlns:a16="http://schemas.microsoft.com/office/drawing/2014/main" id="{66535DEC-203F-472D-B781-0E49AEF2936B}"/>
+                <a16:creationId xmlns:a16="http://schemas.microsoft.com/office/drawing/2014/main" id="{8BD79A78-2C42-429D-8FE5-27C007F50CFD}"/>
               </a:ext>
             </a:extLst>
           </p:cNvPr>
@@ -19888,7 +19332,7 @@
           <p:cNvPr id="16" name="Text 13">
             <a:extLst xmlns:a="http://schemas.openxmlformats.org/drawingml/2006/main">
               <a:ext uri="{FF2B5EF4-FFF2-40B4-BE49-F238E27FC236}">
-                <a16:creationId xmlns:a16="http://schemas.microsoft.com/office/drawing/2014/main" id="{58B73E5C-D6EC-4BC9-BBEB-C0C1A25E67F9}"/>
+                <a16:creationId xmlns:a16="http://schemas.microsoft.com/office/drawing/2014/main" id="{86119427-B0FA-4F4C-B917-95A05D189AC7}"/>
               </a:ext>
             </a:extLst>
           </p:cNvPr>
@@ -19935,7 +19379,7 @@
           <p:cNvPr id="17" name="Text 14">
             <a:extLst xmlns:a="http://schemas.openxmlformats.org/drawingml/2006/main">
               <a:ext uri="{FF2B5EF4-FFF2-40B4-BE49-F238E27FC236}">
-                <a16:creationId xmlns:a16="http://schemas.microsoft.com/office/drawing/2014/main" id="{A6F56057-A114-4D52-BE26-5086D862901D}"/>
+                <a16:creationId xmlns:a16="http://schemas.microsoft.com/office/drawing/2014/main" id="{7F655FC9-7149-41EF-A914-AEB084717D80}"/>
               </a:ext>
             </a:extLst>
           </p:cNvPr>
@@ -19982,7 +19426,7 @@
           <p:cNvPr id="18" name="Shape 15">
             <a:extLst xmlns:a="http://schemas.openxmlformats.org/drawingml/2006/main">
               <a:ext uri="{FF2B5EF4-FFF2-40B4-BE49-F238E27FC236}">
-                <a16:creationId xmlns:a16="http://schemas.microsoft.com/office/drawing/2014/main" id="{462B198B-9D0C-4B7D-B648-85EA4152E80F}"/>
+                <a16:creationId xmlns:a16="http://schemas.microsoft.com/office/drawing/2014/main" id="{5A634518-EB60-40A3-9BA6-B65B7133CD89}"/>
               </a:ext>
             </a:extLst>
           </p:cNvPr>
@@ -20017,7 +19461,7 @@
           <p:cNvPr id="19" name="Shape 16">
             <a:extLst xmlns:a="http://schemas.openxmlformats.org/drawingml/2006/main">
               <a:ext uri="{FF2B5EF4-FFF2-40B4-BE49-F238E27FC236}">
-                <a16:creationId xmlns:a16="http://schemas.microsoft.com/office/drawing/2014/main" id="{98BE3FA2-9F2E-46AD-9354-1B03DD33F89B}"/>
+                <a16:creationId xmlns:a16="http://schemas.microsoft.com/office/drawing/2014/main" id="{4908C437-238A-49B2-A408-759071040D27}"/>
               </a:ext>
             </a:extLst>
           </p:cNvPr>
@@ -20050,7 +19494,7 @@
           <p:cNvPr id="20" name="Text 17">
             <a:extLst xmlns:a="http://schemas.openxmlformats.org/drawingml/2006/main">
               <a:ext uri="{FF2B5EF4-FFF2-40B4-BE49-F238E27FC236}">
-                <a16:creationId xmlns:a16="http://schemas.microsoft.com/office/drawing/2014/main" id="{10403180-0177-4369-B2B6-E8C8B4EA3479}"/>
+                <a16:creationId xmlns:a16="http://schemas.microsoft.com/office/drawing/2014/main" id="{B655FB28-8F68-42DF-8F41-2EF1B2720C54}"/>
               </a:ext>
             </a:extLst>
           </p:cNvPr>
@@ -20097,7 +19541,7 @@
           <p:cNvPr id="21" name="Text 18">
             <a:extLst xmlns:a="http://schemas.openxmlformats.org/drawingml/2006/main">
               <a:ext uri="{FF2B5EF4-FFF2-40B4-BE49-F238E27FC236}">
-                <a16:creationId xmlns:a16="http://schemas.microsoft.com/office/drawing/2014/main" id="{FB006128-BD60-49DB-8E5A-FDF02644D3E8}"/>
+                <a16:creationId xmlns:a16="http://schemas.microsoft.com/office/drawing/2014/main" id="{00266209-FBCE-4E69-9659-CC98C180DC89}"/>
               </a:ext>
             </a:extLst>
           </p:cNvPr>
@@ -20144,7 +19588,7 @@
           <p:cNvPr id="22" name="Shape 19">
             <a:extLst xmlns:a="http://schemas.openxmlformats.org/drawingml/2006/main">
               <a:ext uri="{FF2B5EF4-FFF2-40B4-BE49-F238E27FC236}">
-                <a16:creationId xmlns:a16="http://schemas.microsoft.com/office/drawing/2014/main" id="{D1BEE0B3-FCB4-4277-826F-053504B9A987}"/>
+                <a16:creationId xmlns:a16="http://schemas.microsoft.com/office/drawing/2014/main" id="{CDE4EFD3-16E2-4721-8924-361E8C94A5CB}"/>
               </a:ext>
             </a:extLst>
           </p:cNvPr>
@@ -20179,7 +19623,7 @@
           <p:cNvPr id="23" name="Shape 20">
             <a:extLst xmlns:a="http://schemas.openxmlformats.org/drawingml/2006/main">
               <a:ext uri="{FF2B5EF4-FFF2-40B4-BE49-F238E27FC236}">
-                <a16:creationId xmlns:a16="http://schemas.microsoft.com/office/drawing/2014/main" id="{DA18BF67-6141-4DF8-B880-72AC511385F0}"/>
+                <a16:creationId xmlns:a16="http://schemas.microsoft.com/office/drawing/2014/main" id="{81B3FDA5-89FD-4E75-8A1A-6F2BAA936C3D}"/>
               </a:ext>
             </a:extLst>
           </p:cNvPr>
@@ -20212,7 +19656,7 @@
           <p:cNvPr id="24" name="Text 21">
             <a:extLst xmlns:a="http://schemas.openxmlformats.org/drawingml/2006/main">
               <a:ext uri="{FF2B5EF4-FFF2-40B4-BE49-F238E27FC236}">
-                <a16:creationId xmlns:a16="http://schemas.microsoft.com/office/drawing/2014/main" id="{11BFF3A2-B918-4019-BD21-C40B7D2AD6CD}"/>
+                <a16:creationId xmlns:a16="http://schemas.microsoft.com/office/drawing/2014/main" id="{8A131DBA-FE11-4AEB-A43B-FFCBAE32790A}"/>
               </a:ext>
             </a:extLst>
           </p:cNvPr>
@@ -20259,7 +19703,7 @@
           <p:cNvPr id="25" name="Text 22">
             <a:extLst xmlns:a="http://schemas.openxmlformats.org/drawingml/2006/main">
               <a:ext uri="{FF2B5EF4-FFF2-40B4-BE49-F238E27FC236}">
-                <a16:creationId xmlns:a16="http://schemas.microsoft.com/office/drawing/2014/main" id="{EFB7DD3F-90AA-4AEB-B37F-5DD44A0045CA}"/>
+                <a16:creationId xmlns:a16="http://schemas.microsoft.com/office/drawing/2014/main" id="{70525E39-C0BB-448C-9244-23A0F6433756}"/>
               </a:ext>
             </a:extLst>
           </p:cNvPr>
@@ -20306,7 +19750,7 @@
           <p:cNvPr id="26" name="Shape 23">
             <a:extLst xmlns:a="http://schemas.openxmlformats.org/drawingml/2006/main">
               <a:ext uri="{FF2B5EF4-FFF2-40B4-BE49-F238E27FC236}">
-                <a16:creationId xmlns:a16="http://schemas.microsoft.com/office/drawing/2014/main" id="{56AFADCC-A1C4-408A-B247-B80079500B6F}"/>
+                <a16:creationId xmlns:a16="http://schemas.microsoft.com/office/drawing/2014/main" id="{4D26F448-7D5C-4F43-84AF-8B37DADB96F6}"/>
               </a:ext>
             </a:extLst>
           </p:cNvPr>
@@ -20341,7 +19785,7 @@
           <p:cNvPr id="27" name="Text 24">
             <a:extLst xmlns:a="http://schemas.openxmlformats.org/drawingml/2006/main">
               <a:ext uri="{FF2B5EF4-FFF2-40B4-BE49-F238E27FC236}">
-                <a16:creationId xmlns:a16="http://schemas.microsoft.com/office/drawing/2014/main" id="{736A8879-74E6-4662-A8A2-9D3673A0A261}"/>
+                <a16:creationId xmlns:a16="http://schemas.microsoft.com/office/drawing/2014/main" id="{7B531ADF-1055-48F7-879B-061B599EC1FA}"/>
               </a:ext>
             </a:extLst>
           </p:cNvPr>
@@ -20388,7 +19832,7 @@
           <p:cNvPr id="28" name="Text 25">
             <a:extLst xmlns:a="http://schemas.openxmlformats.org/drawingml/2006/main">
               <a:ext uri="{FF2B5EF4-FFF2-40B4-BE49-F238E27FC236}">
-                <a16:creationId xmlns:a16="http://schemas.microsoft.com/office/drawing/2014/main" id="{897B3A3F-E9E2-4B11-A8BC-FA8C902DF0AD}"/>
+                <a16:creationId xmlns:a16="http://schemas.microsoft.com/office/drawing/2014/main" id="{6ABAF0C7-2E2E-4C37-862B-2C6E157023C0}"/>
               </a:ext>
             </a:extLst>
           </p:cNvPr>
@@ -20433,7 +19877,7 @@
     </p:spTree>
     <p:extLst>
       <p:ext uri="{BB962C8B-B14F-4D97-AF65-F5344CB8AC3E}">
-        <p14:creationId xmlns:p14="http://schemas.microsoft.com/office/powerpoint/2010/main" val="651935749"/>
+        <p14:creationId xmlns:p14="http://schemas.microsoft.com/office/powerpoint/2010/main" val="1079231713"/>
       </p:ext>
     </p:extLst>
   </p:cSld>
@@ -20464,7 +19908,7 @@
           <p:cNvPr id="2" name="Text 0">
             <a:extLst xmlns:a="http://schemas.openxmlformats.org/drawingml/2006/main">
               <a:ext uri="{FF2B5EF4-FFF2-40B4-BE49-F238E27FC236}">
-                <a16:creationId xmlns:a16="http://schemas.microsoft.com/office/drawing/2014/main" id="{5CECB8B8-F3D8-4508-A15D-C72C7F4A1F13}"/>
+                <a16:creationId xmlns:a16="http://schemas.microsoft.com/office/drawing/2014/main" id="{8B2618D5-5737-47F5-B818-7354F1EE39E8}"/>
               </a:ext>
             </a:extLst>
           </p:cNvPr>
@@ -20511,7 +19955,7 @@
           <p:cNvPr id="3" name="Text 1">
             <a:extLst xmlns:a="http://schemas.openxmlformats.org/drawingml/2006/main">
               <a:ext uri="{FF2B5EF4-FFF2-40B4-BE49-F238E27FC236}">
-                <a16:creationId xmlns:a16="http://schemas.microsoft.com/office/drawing/2014/main" id="{BA171385-E4F4-4EDE-9C49-41EF06DF4E45}"/>
+                <a16:creationId xmlns:a16="http://schemas.microsoft.com/office/drawing/2014/main" id="{90B3CDA0-A51B-41CE-A4EA-966DA47B7171}"/>
               </a:ext>
             </a:extLst>
           </p:cNvPr>
@@ -20558,7 +20002,7 @@
           <p:cNvPr id="4" name="Shape 2">
             <a:extLst xmlns:a="http://schemas.openxmlformats.org/drawingml/2006/main">
               <a:ext uri="{FF2B5EF4-FFF2-40B4-BE49-F238E27FC236}">
-                <a16:creationId xmlns:a16="http://schemas.microsoft.com/office/drawing/2014/main" id="{AB44D6A1-A707-486B-87A2-8D9C43365B54}"/>
+                <a16:creationId xmlns:a16="http://schemas.microsoft.com/office/drawing/2014/main" id="{CF67EABC-B2F7-45C5-8626-4016EDE8C980}"/>
               </a:ext>
             </a:extLst>
           </p:cNvPr>
@@ -20593,7 +20037,7 @@
           <p:cNvPr id="5" name="Text 3">
             <a:extLst xmlns:a="http://schemas.openxmlformats.org/drawingml/2006/main">
               <a:ext uri="{FF2B5EF4-FFF2-40B4-BE49-F238E27FC236}">
-                <a16:creationId xmlns:a16="http://schemas.microsoft.com/office/drawing/2014/main" id="{76EA5961-FB63-4EB8-8F63-CEB4CD59BA0C}"/>
+                <a16:creationId xmlns:a16="http://schemas.microsoft.com/office/drawing/2014/main" id="{6AE6AD3F-5FCE-4C91-98BC-356E91889522}"/>
               </a:ext>
             </a:extLst>
           </p:cNvPr>
@@ -20640,7 +20084,7 @@
           <p:cNvPr id="6" name="Shape 4">
             <a:extLst xmlns:a="http://schemas.openxmlformats.org/drawingml/2006/main">
               <a:ext uri="{FF2B5EF4-FFF2-40B4-BE49-F238E27FC236}">
-                <a16:creationId xmlns:a16="http://schemas.microsoft.com/office/drawing/2014/main" id="{6BCC0C17-E066-4336-968C-B30F2202B28E}"/>
+                <a16:creationId xmlns:a16="http://schemas.microsoft.com/office/drawing/2014/main" id="{1C75BD72-2791-4C51-84E5-2503D7631020}"/>
               </a:ext>
             </a:extLst>
           </p:cNvPr>
@@ -20671,7 +20115,7 @@
           <p:cNvPr id="7" name="Text 5">
             <a:extLst xmlns:a="http://schemas.openxmlformats.org/drawingml/2006/main">
               <a:ext uri="{FF2B5EF4-FFF2-40B4-BE49-F238E27FC236}">
-                <a16:creationId xmlns:a16="http://schemas.microsoft.com/office/drawing/2014/main" id="{00122229-38EB-4FC4-B17E-283A7560EE70}"/>
+                <a16:creationId xmlns:a16="http://schemas.microsoft.com/office/drawing/2014/main" id="{4F5CB970-7E2B-44C5-A810-998D2DD497BA}"/>
               </a:ext>
             </a:extLst>
           </p:cNvPr>
@@ -20718,7 +20162,7 @@
           <p:cNvPr id="8" name="Shape 6">
             <a:extLst xmlns:a="http://schemas.openxmlformats.org/drawingml/2006/main">
               <a:ext uri="{FF2B5EF4-FFF2-40B4-BE49-F238E27FC236}">
-                <a16:creationId xmlns:a16="http://schemas.microsoft.com/office/drawing/2014/main" id="{ABA28A09-960D-4D3D-85A3-D39C2547E370}"/>
+                <a16:creationId xmlns:a16="http://schemas.microsoft.com/office/drawing/2014/main" id="{243AE759-D986-4056-9516-EAEC39B70BEB}"/>
               </a:ext>
             </a:extLst>
           </p:cNvPr>
@@ -20753,7 +20197,7 @@
           <p:cNvPr id="9" name="Text 7">
             <a:extLst xmlns:a="http://schemas.openxmlformats.org/drawingml/2006/main">
               <a:ext uri="{FF2B5EF4-FFF2-40B4-BE49-F238E27FC236}">
-                <a16:creationId xmlns:a16="http://schemas.microsoft.com/office/drawing/2014/main" id="{75D5BB4D-3180-4720-805F-EAA075B147FF}"/>
+                <a16:creationId xmlns:a16="http://schemas.microsoft.com/office/drawing/2014/main" id="{CDA2EA38-A1ED-4C18-81B0-0E9DAAED39C8}"/>
               </a:ext>
             </a:extLst>
           </p:cNvPr>
@@ -20800,7 +20244,7 @@
           <p:cNvPr id="10" name="Text 8">
             <a:extLst xmlns:a="http://schemas.openxmlformats.org/drawingml/2006/main">
               <a:ext uri="{FF2B5EF4-FFF2-40B4-BE49-F238E27FC236}">
-                <a16:creationId xmlns:a16="http://schemas.microsoft.com/office/drawing/2014/main" id="{F8DAC540-F03A-4B30-8EBC-9000FD74BCE3}"/>
+                <a16:creationId xmlns:a16="http://schemas.microsoft.com/office/drawing/2014/main" id="{217ECEF3-32DB-47C0-81B8-13E241EB1924}"/>
               </a:ext>
             </a:extLst>
           </p:cNvPr>
@@ -20847,7 +20291,7 @@
           <p:cNvPr id="11" name="Text 9">
             <a:extLst xmlns:a="http://schemas.openxmlformats.org/drawingml/2006/main">
               <a:ext uri="{FF2B5EF4-FFF2-40B4-BE49-F238E27FC236}">
-                <a16:creationId xmlns:a16="http://schemas.microsoft.com/office/drawing/2014/main" id="{AF7C133D-5070-4288-9B30-A77B40EEBE4F}"/>
+                <a16:creationId xmlns:a16="http://schemas.microsoft.com/office/drawing/2014/main" id="{D4883462-E911-4197-B316-DB49E8F23B62}"/>
               </a:ext>
             </a:extLst>
           </p:cNvPr>
@@ -20894,7 +20338,7 @@
           <p:cNvPr id="12" name="Shape 10">
             <a:extLst xmlns:a="http://schemas.openxmlformats.org/drawingml/2006/main">
               <a:ext uri="{FF2B5EF4-FFF2-40B4-BE49-F238E27FC236}">
-                <a16:creationId xmlns:a16="http://schemas.microsoft.com/office/drawing/2014/main" id="{0EC53F38-665F-4DAB-B804-B77A4A260096}"/>
+                <a16:creationId xmlns:a16="http://schemas.microsoft.com/office/drawing/2014/main" id="{B1C4B6E8-1B4C-45D8-9489-6BFD7F80F78D}"/>
               </a:ext>
             </a:extLst>
           </p:cNvPr>
@@ -20929,7 +20373,7 @@
           <p:cNvPr id="13" name="Text 11">
             <a:extLst xmlns:a="http://schemas.openxmlformats.org/drawingml/2006/main">
               <a:ext uri="{FF2B5EF4-FFF2-40B4-BE49-F238E27FC236}">
-                <a16:creationId xmlns:a16="http://schemas.microsoft.com/office/drawing/2014/main" id="{2C5579C9-6961-41ED-A4E2-98CCED7A7861}"/>
+                <a16:creationId xmlns:a16="http://schemas.microsoft.com/office/drawing/2014/main" id="{52766728-BEB4-4739-9FEE-CC84EF1FB7E2}"/>
               </a:ext>
             </a:extLst>
           </p:cNvPr>
@@ -20976,7 +20420,7 @@
           <p:cNvPr id="14" name="Text 12">
             <a:extLst xmlns:a="http://schemas.openxmlformats.org/drawingml/2006/main">
               <a:ext uri="{FF2B5EF4-FFF2-40B4-BE49-F238E27FC236}">
-                <a16:creationId xmlns:a16="http://schemas.microsoft.com/office/drawing/2014/main" id="{9753F68E-3D49-46D2-A033-0F04D97A199A}"/>
+                <a16:creationId xmlns:a16="http://schemas.microsoft.com/office/drawing/2014/main" id="{3FB8FC5C-4D86-4B78-9ED6-3051A2C8B56D}"/>
               </a:ext>
             </a:extLst>
           </p:cNvPr>
@@ -21023,7 +20467,7 @@
           <p:cNvPr id="15" name="Text 13">
             <a:extLst xmlns:a="http://schemas.openxmlformats.org/drawingml/2006/main">
               <a:ext uri="{FF2B5EF4-FFF2-40B4-BE49-F238E27FC236}">
-                <a16:creationId xmlns:a16="http://schemas.microsoft.com/office/drawing/2014/main" id="{35D575C8-EE49-4439-9AC9-DDFEA0106D8C}"/>
+                <a16:creationId xmlns:a16="http://schemas.microsoft.com/office/drawing/2014/main" id="{4D0E6323-2706-483F-9F28-6C01DD1C47F3}"/>
               </a:ext>
             </a:extLst>
           </p:cNvPr>
@@ -21070,7 +20514,7 @@
           <p:cNvPr id="16" name="Shape 14">
             <a:extLst xmlns:a="http://schemas.openxmlformats.org/drawingml/2006/main">
               <a:ext uri="{FF2B5EF4-FFF2-40B4-BE49-F238E27FC236}">
-                <a16:creationId xmlns:a16="http://schemas.microsoft.com/office/drawing/2014/main" id="{6316E8ED-0630-4E60-A731-E229F174828A}"/>
+                <a16:creationId xmlns:a16="http://schemas.microsoft.com/office/drawing/2014/main" id="{A438F063-4631-422F-B1FF-40435189AA1D}"/>
               </a:ext>
             </a:extLst>
           </p:cNvPr>
@@ -21105,7 +20549,7 @@
           <p:cNvPr id="17" name="Text 15">
             <a:extLst xmlns:a="http://schemas.openxmlformats.org/drawingml/2006/main">
               <a:ext uri="{FF2B5EF4-FFF2-40B4-BE49-F238E27FC236}">
-                <a16:creationId xmlns:a16="http://schemas.microsoft.com/office/drawing/2014/main" id="{041B5E04-2E29-4745-B5AE-25926505A7EF}"/>
+                <a16:creationId xmlns:a16="http://schemas.microsoft.com/office/drawing/2014/main" id="{32CCBA36-5F1A-4122-85B7-9C4018B4A36F}"/>
               </a:ext>
             </a:extLst>
           </p:cNvPr>
@@ -21152,7 +20596,7 @@
           <p:cNvPr id="18" name="Text 16">
             <a:extLst xmlns:a="http://schemas.openxmlformats.org/drawingml/2006/main">
               <a:ext uri="{FF2B5EF4-FFF2-40B4-BE49-F238E27FC236}">
-                <a16:creationId xmlns:a16="http://schemas.microsoft.com/office/drawing/2014/main" id="{B160A74A-2232-41B2-9BCA-161858110316}"/>
+                <a16:creationId xmlns:a16="http://schemas.microsoft.com/office/drawing/2014/main" id="{3663CC41-442B-4FC7-B785-DBAA4C8436C1}"/>
               </a:ext>
             </a:extLst>
           </p:cNvPr>
@@ -21199,7 +20643,7 @@
           <p:cNvPr id="19" name="Text 17">
             <a:extLst xmlns:a="http://schemas.openxmlformats.org/drawingml/2006/main">
               <a:ext uri="{FF2B5EF4-FFF2-40B4-BE49-F238E27FC236}">
-                <a16:creationId xmlns:a16="http://schemas.microsoft.com/office/drawing/2014/main" id="{F4D90977-AEBE-4255-81CF-25EF823D4F70}"/>
+                <a16:creationId xmlns:a16="http://schemas.microsoft.com/office/drawing/2014/main" id="{2738A6C2-20A8-4495-ABBE-0F5332A53141}"/>
               </a:ext>
             </a:extLst>
           </p:cNvPr>
@@ -21246,7 +20690,7 @@
           <p:cNvPr id="20" name="Shape 18">
             <a:extLst xmlns:a="http://schemas.openxmlformats.org/drawingml/2006/main">
               <a:ext uri="{FF2B5EF4-FFF2-40B4-BE49-F238E27FC236}">
-                <a16:creationId xmlns:a16="http://schemas.microsoft.com/office/drawing/2014/main" id="{37D1FBBB-DDB2-419F-8245-3F5EB623D583}"/>
+                <a16:creationId xmlns:a16="http://schemas.microsoft.com/office/drawing/2014/main" id="{3B23ED07-9E04-41A1-9AA7-56422B2B402C}"/>
               </a:ext>
             </a:extLst>
           </p:cNvPr>
@@ -21281,7 +20725,7 @@
           <p:cNvPr id="21" name="Text 19">
             <a:extLst xmlns:a="http://schemas.openxmlformats.org/drawingml/2006/main">
               <a:ext uri="{FF2B5EF4-FFF2-40B4-BE49-F238E27FC236}">
-                <a16:creationId xmlns:a16="http://schemas.microsoft.com/office/drawing/2014/main" id="{64694264-B74B-43B6-A9F1-8675AE6AE37E}"/>
+                <a16:creationId xmlns:a16="http://schemas.microsoft.com/office/drawing/2014/main" id="{06C2AA38-2759-4FF8-868D-E0250AB3670A}"/>
               </a:ext>
             </a:extLst>
           </p:cNvPr>
@@ -21328,7 +20772,7 @@
           <p:cNvPr id="22" name="Text 20">
             <a:extLst xmlns:a="http://schemas.openxmlformats.org/drawingml/2006/main">
               <a:ext uri="{FF2B5EF4-FFF2-40B4-BE49-F238E27FC236}">
-                <a16:creationId xmlns:a16="http://schemas.microsoft.com/office/drawing/2014/main" id="{CE8F0A4B-E56F-4078-959B-09F8BB71E68B}"/>
+                <a16:creationId xmlns:a16="http://schemas.microsoft.com/office/drawing/2014/main" id="{FC1F0ADC-8A7C-4FA5-8159-4CE2247DE314}"/>
               </a:ext>
             </a:extLst>
           </p:cNvPr>
@@ -21375,7 +20819,7 @@
           <p:cNvPr id="23" name="Text 21">
             <a:extLst xmlns:a="http://schemas.openxmlformats.org/drawingml/2006/main">
               <a:ext uri="{FF2B5EF4-FFF2-40B4-BE49-F238E27FC236}">
-                <a16:creationId xmlns:a16="http://schemas.microsoft.com/office/drawing/2014/main" id="{849DDEB8-2A84-44F1-89F4-7FFF573DB001}"/>
+                <a16:creationId xmlns:a16="http://schemas.microsoft.com/office/drawing/2014/main" id="{AB35106A-EEAE-43A3-B73A-988B41AAF3FC}"/>
               </a:ext>
             </a:extLst>
           </p:cNvPr>
@@ -21420,7 +20864,7 @@
     </p:spTree>
     <p:extLst>
       <p:ext uri="{BB962C8B-B14F-4D97-AF65-F5344CB8AC3E}">
-        <p14:creationId xmlns:p14="http://schemas.microsoft.com/office/powerpoint/2010/main" val="278951654"/>
+        <p14:creationId xmlns:p14="http://schemas.microsoft.com/office/powerpoint/2010/main" val="1844451318"/>
       </p:ext>
     </p:extLst>
   </p:cSld>
@@ -21451,7 +20895,7 @@
           <p:cNvPr id="2" name="Text 0">
             <a:extLst xmlns:a="http://schemas.openxmlformats.org/drawingml/2006/main">
               <a:ext uri="{FF2B5EF4-FFF2-40B4-BE49-F238E27FC236}">
-                <a16:creationId xmlns:a16="http://schemas.microsoft.com/office/drawing/2014/main" id="{65E6B13D-C14D-4DE4-8ED8-ABAB8200D420}"/>
+                <a16:creationId xmlns:a16="http://schemas.microsoft.com/office/drawing/2014/main" id="{26C42B80-1064-443B-9139-041689ACCCEB}"/>
               </a:ext>
             </a:extLst>
           </p:cNvPr>
@@ -21498,7 +20942,7 @@
           <p:cNvPr id="3" name="Text 1">
             <a:extLst xmlns:a="http://schemas.openxmlformats.org/drawingml/2006/main">
               <a:ext uri="{FF2B5EF4-FFF2-40B4-BE49-F238E27FC236}">
-                <a16:creationId xmlns:a16="http://schemas.microsoft.com/office/drawing/2014/main" id="{563C1387-5557-4D59-8C0D-1FE591B29506}"/>
+                <a16:creationId xmlns:a16="http://schemas.microsoft.com/office/drawing/2014/main" id="{1B4AB622-A3BD-4A6A-9E98-DD2312FA06C5}"/>
               </a:ext>
             </a:extLst>
           </p:cNvPr>
@@ -21545,7 +20989,7 @@
           <p:cNvPr id="4" name="Shape 2">
             <a:extLst xmlns:a="http://schemas.openxmlformats.org/drawingml/2006/main">
               <a:ext uri="{FF2B5EF4-FFF2-40B4-BE49-F238E27FC236}">
-                <a16:creationId xmlns:a16="http://schemas.microsoft.com/office/drawing/2014/main" id="{9EAEFBEF-C4E0-459C-BBF1-6C7BF8C2A04C}"/>
+                <a16:creationId xmlns:a16="http://schemas.microsoft.com/office/drawing/2014/main" id="{6EC982B3-7503-42D0-92EB-686FF56355D4}"/>
               </a:ext>
             </a:extLst>
           </p:cNvPr>
@@ -21580,7 +21024,7 @@
           <p:cNvPr id="5" name="Text 3">
             <a:extLst xmlns:a="http://schemas.openxmlformats.org/drawingml/2006/main">
               <a:ext uri="{FF2B5EF4-FFF2-40B4-BE49-F238E27FC236}">
-                <a16:creationId xmlns:a16="http://schemas.microsoft.com/office/drawing/2014/main" id="{C4BC4DC0-78AE-4CE4-B786-03437B8B55F6}"/>
+                <a16:creationId xmlns:a16="http://schemas.microsoft.com/office/drawing/2014/main" id="{FFCD255D-B978-4CA7-81C3-06E564590165}"/>
               </a:ext>
             </a:extLst>
           </p:cNvPr>
@@ -21627,7 +21071,7 @@
           <p:cNvPr id="6" name="Shape 4">
             <a:extLst xmlns:a="http://schemas.openxmlformats.org/drawingml/2006/main">
               <a:ext uri="{FF2B5EF4-FFF2-40B4-BE49-F238E27FC236}">
-                <a16:creationId xmlns:a16="http://schemas.microsoft.com/office/drawing/2014/main" id="{53AF50A3-4924-4513-AADE-3810C8B06364}"/>
+                <a16:creationId xmlns:a16="http://schemas.microsoft.com/office/drawing/2014/main" id="{A96180BD-44F2-490D-9975-25E34FABA997}"/>
               </a:ext>
             </a:extLst>
           </p:cNvPr>
@@ -21658,7 +21102,7 @@
           <p:cNvPr id="7" name="Shape 5">
             <a:extLst xmlns:a="http://schemas.openxmlformats.org/drawingml/2006/main">
               <a:ext uri="{FF2B5EF4-FFF2-40B4-BE49-F238E27FC236}">
-                <a16:creationId xmlns:a16="http://schemas.microsoft.com/office/drawing/2014/main" id="{88EE2B2D-06BB-4233-8916-DF0666A96DE1}"/>
+                <a16:creationId xmlns:a16="http://schemas.microsoft.com/office/drawing/2014/main" id="{0E0C9BC5-2BBA-4BAC-AE4D-B9FA94010412}"/>
               </a:ext>
             </a:extLst>
           </p:cNvPr>
@@ -21693,7 +21137,7 @@
           <p:cNvPr id="8" name="Text 6">
             <a:extLst xmlns:a="http://schemas.openxmlformats.org/drawingml/2006/main">
               <a:ext uri="{FF2B5EF4-FFF2-40B4-BE49-F238E27FC236}">
-                <a16:creationId xmlns:a16="http://schemas.microsoft.com/office/drawing/2014/main" id="{54656091-9661-4FC0-974D-5F0FF47814BF}"/>
+                <a16:creationId xmlns:a16="http://schemas.microsoft.com/office/drawing/2014/main" id="{3E5AFBD9-BB98-41CC-9FA9-20094DB037A8}"/>
               </a:ext>
             </a:extLst>
           </p:cNvPr>
@@ -21740,7 +21184,7 @@
           <p:cNvPr id="9" name="Shape 7">
             <a:extLst xmlns:a="http://schemas.openxmlformats.org/drawingml/2006/main">
               <a:ext uri="{FF2B5EF4-FFF2-40B4-BE49-F238E27FC236}">
-                <a16:creationId xmlns:a16="http://schemas.microsoft.com/office/drawing/2014/main" id="{F3CD27EF-B2C1-45A1-8299-AF1A47EB2C41}"/>
+                <a16:creationId xmlns:a16="http://schemas.microsoft.com/office/drawing/2014/main" id="{6081BE0A-2ABE-4D27-A1EE-EC839087A7F2}"/>
               </a:ext>
             </a:extLst>
           </p:cNvPr>
@@ -21775,7 +21219,7 @@
           <p:cNvPr id="10" name="Text 8">
             <a:extLst xmlns:a="http://schemas.openxmlformats.org/drawingml/2006/main">
               <a:ext uri="{FF2B5EF4-FFF2-40B4-BE49-F238E27FC236}">
-                <a16:creationId xmlns:a16="http://schemas.microsoft.com/office/drawing/2014/main" id="{77293B62-F8C3-40BB-B180-084C9E046BDB}"/>
+                <a16:creationId xmlns:a16="http://schemas.microsoft.com/office/drawing/2014/main" id="{412C49CA-EFB3-40A5-B6B0-F86BADB0045C}"/>
               </a:ext>
             </a:extLst>
           </p:cNvPr>
@@ -21822,7 +21266,7 @@
           <p:cNvPr id="11" name="Text 9">
             <a:extLst xmlns:a="http://schemas.openxmlformats.org/drawingml/2006/main">
               <a:ext uri="{FF2B5EF4-FFF2-40B4-BE49-F238E27FC236}">
-                <a16:creationId xmlns:a16="http://schemas.microsoft.com/office/drawing/2014/main" id="{0179E94A-ACEC-4EE7-B843-2CF5B0EE332E}"/>
+                <a16:creationId xmlns:a16="http://schemas.microsoft.com/office/drawing/2014/main" id="{9CF01293-4F12-4D9B-8716-F0D8A5EBDABF}"/>
               </a:ext>
             </a:extLst>
           </p:cNvPr>
@@ -21869,7 +21313,7 @@
           <p:cNvPr id="12" name="Text 10">
             <a:extLst xmlns:a="http://schemas.openxmlformats.org/drawingml/2006/main">
               <a:ext uri="{FF2B5EF4-FFF2-40B4-BE49-F238E27FC236}">
-                <a16:creationId xmlns:a16="http://schemas.microsoft.com/office/drawing/2014/main" id="{C3367E6F-3336-4EB6-8721-4523E2F3D39B}"/>
+                <a16:creationId xmlns:a16="http://schemas.microsoft.com/office/drawing/2014/main" id="{AB2DAA83-9B33-489A-A72D-D6A44ED5DB11}"/>
               </a:ext>
             </a:extLst>
           </p:cNvPr>
@@ -21916,7 +21360,7 @@
           <p:cNvPr id="13" name="Shape 11">
             <a:extLst xmlns:a="http://schemas.openxmlformats.org/drawingml/2006/main">
               <a:ext uri="{FF2B5EF4-FFF2-40B4-BE49-F238E27FC236}">
-                <a16:creationId xmlns:a16="http://schemas.microsoft.com/office/drawing/2014/main" id="{EF4F7F93-973E-46F4-93C8-9BCCCA2CB19B}"/>
+                <a16:creationId xmlns:a16="http://schemas.microsoft.com/office/drawing/2014/main" id="{D78C338B-7318-44D8-889D-C8CF458646FF}"/>
               </a:ext>
             </a:extLst>
           </p:cNvPr>
@@ -21948,7 +21392,7 @@
           <p:cNvPr id="14" name="Shape 12">
             <a:extLst xmlns:a="http://schemas.openxmlformats.org/drawingml/2006/main">
               <a:ext uri="{FF2B5EF4-FFF2-40B4-BE49-F238E27FC236}">
-                <a16:creationId xmlns:a16="http://schemas.microsoft.com/office/drawing/2014/main" id="{7527DAD1-0572-4F67-B893-C51B512C3775}"/>
+                <a16:creationId xmlns:a16="http://schemas.microsoft.com/office/drawing/2014/main" id="{F7033CB0-3FB4-4456-A480-3614A4021616}"/>
               </a:ext>
             </a:extLst>
           </p:cNvPr>
@@ -21983,7 +21427,7 @@
           <p:cNvPr id="15" name="Text 13">
             <a:extLst xmlns:a="http://schemas.openxmlformats.org/drawingml/2006/main">
               <a:ext uri="{FF2B5EF4-FFF2-40B4-BE49-F238E27FC236}">
-                <a16:creationId xmlns:a16="http://schemas.microsoft.com/office/drawing/2014/main" id="{A7E26DEE-6C68-4390-8655-F5551645A095}"/>
+                <a16:creationId xmlns:a16="http://schemas.microsoft.com/office/drawing/2014/main" id="{B33B5FC9-40AA-4F04-A957-4EE164F2143E}"/>
               </a:ext>
             </a:extLst>
           </p:cNvPr>
@@ -22030,7 +21474,7 @@
           <p:cNvPr id="16" name="Text 14">
             <a:extLst xmlns:a="http://schemas.openxmlformats.org/drawingml/2006/main">
               <a:ext uri="{FF2B5EF4-FFF2-40B4-BE49-F238E27FC236}">
-                <a16:creationId xmlns:a16="http://schemas.microsoft.com/office/drawing/2014/main" id="{45580F86-321D-48CB-8D57-765997D623FF}"/>
+                <a16:creationId xmlns:a16="http://schemas.microsoft.com/office/drawing/2014/main" id="{38897091-A7D0-4B3A-AE9A-75CF52AEF50B}"/>
               </a:ext>
             </a:extLst>
           </p:cNvPr>
@@ -22077,7 +21521,7 @@
           <p:cNvPr id="17" name="Text 15">
             <a:extLst xmlns:a="http://schemas.openxmlformats.org/drawingml/2006/main">
               <a:ext uri="{FF2B5EF4-FFF2-40B4-BE49-F238E27FC236}">
-                <a16:creationId xmlns:a16="http://schemas.microsoft.com/office/drawing/2014/main" id="{A7146731-D099-43AD-9B2E-828C0581EE92}"/>
+                <a16:creationId xmlns:a16="http://schemas.microsoft.com/office/drawing/2014/main" id="{ABF636A7-8738-4855-AD0A-D94F61DBA5DF}"/>
               </a:ext>
             </a:extLst>
           </p:cNvPr>
@@ -22124,7 +21568,7 @@
           <p:cNvPr id="18" name="Shape 16">
             <a:extLst xmlns:a="http://schemas.openxmlformats.org/drawingml/2006/main">
               <a:ext uri="{FF2B5EF4-FFF2-40B4-BE49-F238E27FC236}">
-                <a16:creationId xmlns:a16="http://schemas.microsoft.com/office/drawing/2014/main" id="{FE2999C6-FE81-41E0-A7B0-9317C2041879}"/>
+                <a16:creationId xmlns:a16="http://schemas.microsoft.com/office/drawing/2014/main" id="{91479EB1-3CA0-4BB6-9DBA-E26C2E079EFC}"/>
               </a:ext>
             </a:extLst>
           </p:cNvPr>
@@ -22156,7 +21600,7 @@
           <p:cNvPr id="19" name="Shape 17">
             <a:extLst xmlns:a="http://schemas.openxmlformats.org/drawingml/2006/main">
               <a:ext uri="{FF2B5EF4-FFF2-40B4-BE49-F238E27FC236}">
-                <a16:creationId xmlns:a16="http://schemas.microsoft.com/office/drawing/2014/main" id="{BF5A3508-760F-44B1-94DF-93AD535761A8}"/>
+                <a16:creationId xmlns:a16="http://schemas.microsoft.com/office/drawing/2014/main" id="{9A0BCA1C-84BB-483F-ACC4-3DEB0FB3BB4F}"/>
               </a:ext>
             </a:extLst>
           </p:cNvPr>
@@ -22191,7 +21635,7 @@
           <p:cNvPr id="20" name="Text 18">
             <a:extLst xmlns:a="http://schemas.openxmlformats.org/drawingml/2006/main">
               <a:ext uri="{FF2B5EF4-FFF2-40B4-BE49-F238E27FC236}">
-                <a16:creationId xmlns:a16="http://schemas.microsoft.com/office/drawing/2014/main" id="{0EA56631-4429-4E6D-BFC5-528D886FA102}"/>
+                <a16:creationId xmlns:a16="http://schemas.microsoft.com/office/drawing/2014/main" id="{34E814A1-2E12-4494-8B2C-BEA6095A25A1}"/>
               </a:ext>
             </a:extLst>
           </p:cNvPr>
@@ -22238,7 +21682,7 @@
           <p:cNvPr id="21" name="Text 19">
             <a:extLst xmlns:a="http://schemas.openxmlformats.org/drawingml/2006/main">
               <a:ext uri="{FF2B5EF4-FFF2-40B4-BE49-F238E27FC236}">
-                <a16:creationId xmlns:a16="http://schemas.microsoft.com/office/drawing/2014/main" id="{25CFF4EF-FA1C-461C-A55F-92E1A622EC51}"/>
+                <a16:creationId xmlns:a16="http://schemas.microsoft.com/office/drawing/2014/main" id="{8625B4DE-DA62-4058-9598-528A42003ABD}"/>
               </a:ext>
             </a:extLst>
           </p:cNvPr>
@@ -22285,7 +21729,7 @@
           <p:cNvPr id="22" name="Text 20">
             <a:extLst xmlns:a="http://schemas.openxmlformats.org/drawingml/2006/main">
               <a:ext uri="{FF2B5EF4-FFF2-40B4-BE49-F238E27FC236}">
-                <a16:creationId xmlns:a16="http://schemas.microsoft.com/office/drawing/2014/main" id="{7018FA3C-3E5B-497B-A381-1A09F44BD4D3}"/>
+                <a16:creationId xmlns:a16="http://schemas.microsoft.com/office/drawing/2014/main" id="{1E81A464-FCA7-4FDA-9E31-7368B9001AD7}"/>
               </a:ext>
             </a:extLst>
           </p:cNvPr>
@@ -22332,7 +21776,7 @@
           <p:cNvPr id="23" name="Shape 21">
             <a:extLst xmlns:a="http://schemas.openxmlformats.org/drawingml/2006/main">
               <a:ext uri="{FF2B5EF4-FFF2-40B4-BE49-F238E27FC236}">
-                <a16:creationId xmlns:a16="http://schemas.microsoft.com/office/drawing/2014/main" id="{C03A4EBA-D0F4-4594-BB22-1D76228AB4FA}"/>
+                <a16:creationId xmlns:a16="http://schemas.microsoft.com/office/drawing/2014/main" id="{B0AA411E-869E-4F97-ADBB-71F711777414}"/>
               </a:ext>
             </a:extLst>
           </p:cNvPr>
@@ -22364,7 +21808,7 @@
           <p:cNvPr id="24" name="Shape 22">
             <a:extLst xmlns:a="http://schemas.openxmlformats.org/drawingml/2006/main">
               <a:ext uri="{FF2B5EF4-FFF2-40B4-BE49-F238E27FC236}">
-                <a16:creationId xmlns:a16="http://schemas.microsoft.com/office/drawing/2014/main" id="{929D174C-3F13-482E-9AB8-CAB447A431BD}"/>
+                <a16:creationId xmlns:a16="http://schemas.microsoft.com/office/drawing/2014/main" id="{15BDE542-F841-43D2-A9BD-38E27AA7A1B1}"/>
               </a:ext>
             </a:extLst>
           </p:cNvPr>
@@ -22399,7 +21843,7 @@
           <p:cNvPr id="25" name="Text 23">
             <a:extLst xmlns:a="http://schemas.openxmlformats.org/drawingml/2006/main">
               <a:ext uri="{FF2B5EF4-FFF2-40B4-BE49-F238E27FC236}">
-                <a16:creationId xmlns:a16="http://schemas.microsoft.com/office/drawing/2014/main" id="{BE338C68-0941-41DC-8F18-8CFA1D8BE1A2}"/>
+                <a16:creationId xmlns:a16="http://schemas.microsoft.com/office/drawing/2014/main" id="{0649A177-9F5B-44D0-BC74-C4B5A7BEB61F}"/>
               </a:ext>
             </a:extLst>
           </p:cNvPr>
@@ -22446,7 +21890,7 @@
           <p:cNvPr id="26" name="Text 24">
             <a:extLst xmlns:a="http://schemas.openxmlformats.org/drawingml/2006/main">
               <a:ext uri="{FF2B5EF4-FFF2-40B4-BE49-F238E27FC236}">
-                <a16:creationId xmlns:a16="http://schemas.microsoft.com/office/drawing/2014/main" id="{96E18D9A-E891-4FED-933A-D9F3042FDA4D}"/>
+                <a16:creationId xmlns:a16="http://schemas.microsoft.com/office/drawing/2014/main" id="{145FF7FE-DF51-4843-A70D-DC0434469658}"/>
               </a:ext>
             </a:extLst>
           </p:cNvPr>
@@ -22493,7 +21937,7 @@
           <p:cNvPr id="27" name="Text 25">
             <a:extLst xmlns:a="http://schemas.openxmlformats.org/drawingml/2006/main">
               <a:ext uri="{FF2B5EF4-FFF2-40B4-BE49-F238E27FC236}">
-                <a16:creationId xmlns:a16="http://schemas.microsoft.com/office/drawing/2014/main" id="{FA34F10E-3796-45C6-9F44-AACC5D9F55A3}"/>
+                <a16:creationId xmlns:a16="http://schemas.microsoft.com/office/drawing/2014/main" id="{EC78CAEE-DAEE-4228-851F-9AB737213FFF}"/>
               </a:ext>
             </a:extLst>
           </p:cNvPr>
@@ -22540,7 +21984,7 @@
           <p:cNvPr id="28" name="Shape 26">
             <a:extLst xmlns:a="http://schemas.openxmlformats.org/drawingml/2006/main">
               <a:ext uri="{FF2B5EF4-FFF2-40B4-BE49-F238E27FC236}">
-                <a16:creationId xmlns:a16="http://schemas.microsoft.com/office/drawing/2014/main" id="{792540D1-6B5B-434D-A88F-8D9DD2DB7142}"/>
+                <a16:creationId xmlns:a16="http://schemas.microsoft.com/office/drawing/2014/main" id="{B3A92F5C-AD3C-4588-9942-F507FC8AA8EA}"/>
               </a:ext>
             </a:extLst>
           </p:cNvPr>
@@ -22572,7 +22016,7 @@
           <p:cNvPr id="29" name="Shape 27">
             <a:extLst xmlns:a="http://schemas.openxmlformats.org/drawingml/2006/main">
               <a:ext uri="{FF2B5EF4-FFF2-40B4-BE49-F238E27FC236}">
-                <a16:creationId xmlns:a16="http://schemas.microsoft.com/office/drawing/2014/main" id="{A07F310A-CAE5-4F0A-9927-6F99463482D3}"/>
+                <a16:creationId xmlns:a16="http://schemas.microsoft.com/office/drawing/2014/main" id="{D3960FF5-E216-422F-9FEF-D3A8D943D27F}"/>
               </a:ext>
             </a:extLst>
           </p:cNvPr>
@@ -22607,7 +22051,7 @@
           <p:cNvPr id="30" name="Text 28">
             <a:extLst xmlns:a="http://schemas.openxmlformats.org/drawingml/2006/main">
               <a:ext uri="{FF2B5EF4-FFF2-40B4-BE49-F238E27FC236}">
-                <a16:creationId xmlns:a16="http://schemas.microsoft.com/office/drawing/2014/main" id="{77EC6C54-1B67-4299-B62F-25089E447963}"/>
+                <a16:creationId xmlns:a16="http://schemas.microsoft.com/office/drawing/2014/main" id="{11638BF7-9B47-41E5-8D54-3A95BA63F7D6}"/>
               </a:ext>
             </a:extLst>
           </p:cNvPr>
@@ -22654,7 +22098,7 @@
           <p:cNvPr id="31" name="Text 29">
             <a:extLst xmlns:a="http://schemas.openxmlformats.org/drawingml/2006/main">
               <a:ext uri="{FF2B5EF4-FFF2-40B4-BE49-F238E27FC236}">
-                <a16:creationId xmlns:a16="http://schemas.microsoft.com/office/drawing/2014/main" id="{8D986AA5-BE33-41EB-8FA2-92BF4A9569EA}"/>
+                <a16:creationId xmlns:a16="http://schemas.microsoft.com/office/drawing/2014/main" id="{8D84014E-61B5-4DF3-AEE8-948AA71ABC17}"/>
               </a:ext>
             </a:extLst>
           </p:cNvPr>
@@ -22701,7 +22145,7 @@
           <p:cNvPr id="32" name="Text 30">
             <a:extLst xmlns:a="http://schemas.openxmlformats.org/drawingml/2006/main">
               <a:ext uri="{FF2B5EF4-FFF2-40B4-BE49-F238E27FC236}">
-                <a16:creationId xmlns:a16="http://schemas.microsoft.com/office/drawing/2014/main" id="{79F4B52F-3284-4943-92E6-BBCDD69F3FB1}"/>
+                <a16:creationId xmlns:a16="http://schemas.microsoft.com/office/drawing/2014/main" id="{51A6D951-AAF0-4B32-BCEB-6EB02B53139E}"/>
               </a:ext>
             </a:extLst>
           </p:cNvPr>
@@ -22748,7 +22192,7 @@
           <p:cNvPr id="33" name="Shape 31">
             <a:extLst xmlns:a="http://schemas.openxmlformats.org/drawingml/2006/main">
               <a:ext uri="{FF2B5EF4-FFF2-40B4-BE49-F238E27FC236}">
-                <a16:creationId xmlns:a16="http://schemas.microsoft.com/office/drawing/2014/main" id="{944FBBB4-77B1-4199-B3EB-5622FFA1A920}"/>
+                <a16:creationId xmlns:a16="http://schemas.microsoft.com/office/drawing/2014/main" id="{5B427737-2280-4898-8A6A-4440FD7617D1}"/>
               </a:ext>
             </a:extLst>
           </p:cNvPr>
@@ -22783,7 +22227,7 @@
           <p:cNvPr id="34" name="Text 32">
             <a:extLst xmlns:a="http://schemas.openxmlformats.org/drawingml/2006/main">
               <a:ext uri="{FF2B5EF4-FFF2-40B4-BE49-F238E27FC236}">
-                <a16:creationId xmlns:a16="http://schemas.microsoft.com/office/drawing/2014/main" id="{B7A8ACE2-AB4B-4457-9DC0-A17958881116}"/>
+                <a16:creationId xmlns:a16="http://schemas.microsoft.com/office/drawing/2014/main" id="{CC2D236F-B5CD-4D60-8991-4F2573466599}"/>
               </a:ext>
             </a:extLst>
           </p:cNvPr>
@@ -22830,7 +22274,7 @@
           <p:cNvPr id="35" name="Shape 33">
             <a:extLst xmlns:a="http://schemas.openxmlformats.org/drawingml/2006/main">
               <a:ext uri="{FF2B5EF4-FFF2-40B4-BE49-F238E27FC236}">
-                <a16:creationId xmlns:a16="http://schemas.microsoft.com/office/drawing/2014/main" id="{C8AD4ED3-B37F-421E-9C50-3326A5585488}"/>
+                <a16:creationId xmlns:a16="http://schemas.microsoft.com/office/drawing/2014/main" id="{D9A3591E-DC69-47C9-865D-E68D1718E47D}"/>
               </a:ext>
             </a:extLst>
           </p:cNvPr>
@@ -22863,7 +22307,7 @@
           <p:cNvPr id="36" name="Text 34">
             <a:extLst xmlns:a="http://schemas.openxmlformats.org/drawingml/2006/main">
               <a:ext uri="{FF2B5EF4-FFF2-40B4-BE49-F238E27FC236}">
-                <a16:creationId xmlns:a16="http://schemas.microsoft.com/office/drawing/2014/main" id="{BB2EE246-3968-4B18-9925-C1CAD70A78F8}"/>
+                <a16:creationId xmlns:a16="http://schemas.microsoft.com/office/drawing/2014/main" id="{B3CAA512-ECF4-4033-A2D9-618DAF049428}"/>
               </a:ext>
             </a:extLst>
           </p:cNvPr>
@@ -22910,7 +22354,7 @@
           <p:cNvPr id="37" name="Shape 35">
             <a:extLst xmlns:a="http://schemas.openxmlformats.org/drawingml/2006/main">
               <a:ext uri="{FF2B5EF4-FFF2-40B4-BE49-F238E27FC236}">
-                <a16:creationId xmlns:a16="http://schemas.microsoft.com/office/drawing/2014/main" id="{297F86A1-E195-4EC4-A3BF-0DFBB3EA4829}"/>
+                <a16:creationId xmlns:a16="http://schemas.microsoft.com/office/drawing/2014/main" id="{86412888-CEDA-40D5-8E9F-C56A3C70ECEC}"/>
               </a:ext>
             </a:extLst>
           </p:cNvPr>
@@ -22943,7 +22387,7 @@
           <p:cNvPr id="38" name="Text 36">
             <a:extLst xmlns:a="http://schemas.openxmlformats.org/drawingml/2006/main">
               <a:ext uri="{FF2B5EF4-FFF2-40B4-BE49-F238E27FC236}">
-                <a16:creationId xmlns:a16="http://schemas.microsoft.com/office/drawing/2014/main" id="{B452952B-8F63-48AF-9F2D-83081466C996}"/>
+                <a16:creationId xmlns:a16="http://schemas.microsoft.com/office/drawing/2014/main" id="{CDC0812D-3FF2-4820-A86D-C15C389D7603}"/>
               </a:ext>
             </a:extLst>
           </p:cNvPr>
@@ -22990,7 +22434,7 @@
           <p:cNvPr id="39" name="Shape 37">
             <a:extLst xmlns:a="http://schemas.openxmlformats.org/drawingml/2006/main">
               <a:ext uri="{FF2B5EF4-FFF2-40B4-BE49-F238E27FC236}">
-                <a16:creationId xmlns:a16="http://schemas.microsoft.com/office/drawing/2014/main" id="{6B37B038-C0E8-4668-A9B1-A72CCEA8E6E3}"/>
+                <a16:creationId xmlns:a16="http://schemas.microsoft.com/office/drawing/2014/main" id="{634B91BD-1BC6-47E1-89A0-7209601792A7}"/>
               </a:ext>
             </a:extLst>
           </p:cNvPr>
@@ -23023,7 +22467,7 @@
           <p:cNvPr id="40" name="Text 38">
             <a:extLst xmlns:a="http://schemas.openxmlformats.org/drawingml/2006/main">
               <a:ext uri="{FF2B5EF4-FFF2-40B4-BE49-F238E27FC236}">
-                <a16:creationId xmlns:a16="http://schemas.microsoft.com/office/drawing/2014/main" id="{C2F73463-A9AC-41A2-8A89-0F5EFC6C48DF}"/>
+                <a16:creationId xmlns:a16="http://schemas.microsoft.com/office/drawing/2014/main" id="{C1774DD4-63A6-4C27-A341-5F1B605C035C}"/>
               </a:ext>
             </a:extLst>
           </p:cNvPr>
@@ -23070,7 +22514,7 @@
           <p:cNvPr id="41" name="Shape 39">
             <a:extLst xmlns:a="http://schemas.openxmlformats.org/drawingml/2006/main">
               <a:ext uri="{FF2B5EF4-FFF2-40B4-BE49-F238E27FC236}">
-                <a16:creationId xmlns:a16="http://schemas.microsoft.com/office/drawing/2014/main" id="{418F0BD8-C319-4C03-9C27-C676E2E2F4E9}"/>
+                <a16:creationId xmlns:a16="http://schemas.microsoft.com/office/drawing/2014/main" id="{012F5504-6B18-4EAB-AE43-C874E8A87D42}"/>
               </a:ext>
             </a:extLst>
           </p:cNvPr>
@@ -23105,7 +22549,7 @@
           <p:cNvPr id="42" name="Text 40">
             <a:extLst xmlns:a="http://schemas.openxmlformats.org/drawingml/2006/main">
               <a:ext uri="{FF2B5EF4-FFF2-40B4-BE49-F238E27FC236}">
-                <a16:creationId xmlns:a16="http://schemas.microsoft.com/office/drawing/2014/main" id="{65EF776E-4F3E-4649-A660-A306A7F082B6}"/>
+                <a16:creationId xmlns:a16="http://schemas.microsoft.com/office/drawing/2014/main" id="{2FC6CF10-C525-438D-A074-B16ABE5D8C11}"/>
               </a:ext>
             </a:extLst>
           </p:cNvPr>
@@ -23152,7 +22596,7 @@
           <p:cNvPr id="43" name="Text 41">
             <a:extLst xmlns:a="http://schemas.openxmlformats.org/drawingml/2006/main">
               <a:ext uri="{FF2B5EF4-FFF2-40B4-BE49-F238E27FC236}">
-                <a16:creationId xmlns:a16="http://schemas.microsoft.com/office/drawing/2014/main" id="{A93980AE-EDB8-4816-9BEB-74BA82AF445D}"/>
+                <a16:creationId xmlns:a16="http://schemas.microsoft.com/office/drawing/2014/main" id="{02B0BBD4-C27A-4794-9B8B-A328B1131A48}"/>
               </a:ext>
             </a:extLst>
           </p:cNvPr>
@@ -23231,7 +22675,7 @@
           <p:cNvPr id="44" name="Text 42">
             <a:extLst xmlns:a="http://schemas.openxmlformats.org/drawingml/2006/main">
               <a:ext uri="{FF2B5EF4-FFF2-40B4-BE49-F238E27FC236}">
-                <a16:creationId xmlns:a16="http://schemas.microsoft.com/office/drawing/2014/main" id="{A46748AB-7BA0-4EA6-8753-4BA37C74265B}"/>
+                <a16:creationId xmlns:a16="http://schemas.microsoft.com/office/drawing/2014/main" id="{E34C6AAF-DC25-40A1-9B64-D89052BF5211}"/>
               </a:ext>
             </a:extLst>
           </p:cNvPr>
@@ -23278,7 +22722,7 @@
           <p:cNvPr id="45" name="Text 43">
             <a:extLst xmlns:a="http://schemas.openxmlformats.org/drawingml/2006/main">
               <a:ext uri="{FF2B5EF4-FFF2-40B4-BE49-F238E27FC236}">
-                <a16:creationId xmlns:a16="http://schemas.microsoft.com/office/drawing/2014/main" id="{9FBA34E9-69F1-42CB-8828-CAA54CA25B06}"/>
+                <a16:creationId xmlns:a16="http://schemas.microsoft.com/office/drawing/2014/main" id="{13454E8A-60B9-426D-985D-6E3B2F628FDA}"/>
               </a:ext>
             </a:extLst>
           </p:cNvPr>
@@ -23325,7 +22769,7 @@
           <p:cNvPr id="46" name="Text 44">
             <a:extLst xmlns:a="http://schemas.openxmlformats.org/drawingml/2006/main">
               <a:ext uri="{FF2B5EF4-FFF2-40B4-BE49-F238E27FC236}">
-                <a16:creationId xmlns:a16="http://schemas.microsoft.com/office/drawing/2014/main" id="{93B97CF7-010A-4851-B2A4-9D12583D8AEB}"/>
+                <a16:creationId xmlns:a16="http://schemas.microsoft.com/office/drawing/2014/main" id="{73879FC2-42CE-4BD0-B54A-40E19CBB338A}"/>
               </a:ext>
             </a:extLst>
           </p:cNvPr>
@@ -23370,7 +22814,7 @@
     </p:spTree>
     <p:extLst>
       <p:ext uri="{BB962C8B-B14F-4D97-AF65-F5344CB8AC3E}">
-        <p14:creationId xmlns:p14="http://schemas.microsoft.com/office/powerpoint/2010/main" val="925021918"/>
+        <p14:creationId xmlns:p14="http://schemas.microsoft.com/office/powerpoint/2010/main" val="368304469"/>
       </p:ext>
     </p:extLst>
   </p:cSld>
@@ -23401,7 +22845,7 @@
           <p:cNvPr id="2" name="Text 0">
             <a:extLst xmlns:a="http://schemas.openxmlformats.org/drawingml/2006/main">
               <a:ext uri="{FF2B5EF4-FFF2-40B4-BE49-F238E27FC236}">
-                <a16:creationId xmlns:a16="http://schemas.microsoft.com/office/drawing/2014/main" id="{617146CB-DFCB-4FF8-A237-3B36C62E8460}"/>
+                <a16:creationId xmlns:a16="http://schemas.microsoft.com/office/drawing/2014/main" id="{AFE05E9B-6C20-4368-89D5-12BE8356FEB8}"/>
               </a:ext>
             </a:extLst>
           </p:cNvPr>
@@ -23448,7 +22892,7 @@
           <p:cNvPr id="3" name="Text 1">
             <a:extLst xmlns:a="http://schemas.openxmlformats.org/drawingml/2006/main">
               <a:ext uri="{FF2B5EF4-FFF2-40B4-BE49-F238E27FC236}">
-                <a16:creationId xmlns:a16="http://schemas.microsoft.com/office/drawing/2014/main" id="{1F6FFCEF-C88B-4C63-8CBF-9BF446E74CFD}"/>
+                <a16:creationId xmlns:a16="http://schemas.microsoft.com/office/drawing/2014/main" id="{8FE58A6F-79E5-482F-B987-0D393640A183}"/>
               </a:ext>
             </a:extLst>
           </p:cNvPr>
@@ -23495,7 +22939,7 @@
           <p:cNvPr id="4" name="Shape 2">
             <a:extLst xmlns:a="http://schemas.openxmlformats.org/drawingml/2006/main">
               <a:ext uri="{FF2B5EF4-FFF2-40B4-BE49-F238E27FC236}">
-                <a16:creationId xmlns:a16="http://schemas.microsoft.com/office/drawing/2014/main" id="{C34A458A-1C6A-4ADC-8E34-198A37E721B8}"/>
+                <a16:creationId xmlns:a16="http://schemas.microsoft.com/office/drawing/2014/main" id="{D9ECCC12-875C-4BB1-B98A-A5484E4DAC35}"/>
               </a:ext>
             </a:extLst>
           </p:cNvPr>
@@ -23530,7 +22974,7 @@
           <p:cNvPr id="5" name="Text 3">
             <a:extLst xmlns:a="http://schemas.openxmlformats.org/drawingml/2006/main">
               <a:ext uri="{FF2B5EF4-FFF2-40B4-BE49-F238E27FC236}">
-                <a16:creationId xmlns:a16="http://schemas.microsoft.com/office/drawing/2014/main" id="{CE8C8432-990B-472A-B4EB-342EE1F1589E}"/>
+                <a16:creationId xmlns:a16="http://schemas.microsoft.com/office/drawing/2014/main" id="{6C394C72-9410-4E17-A06E-AB32698E0033}"/>
               </a:ext>
             </a:extLst>
           </p:cNvPr>
@@ -23577,7 +23021,7 @@
           <p:cNvPr id="6" name="Shape 4">
             <a:extLst xmlns:a="http://schemas.openxmlformats.org/drawingml/2006/main">
               <a:ext uri="{FF2B5EF4-FFF2-40B4-BE49-F238E27FC236}">
-                <a16:creationId xmlns:a16="http://schemas.microsoft.com/office/drawing/2014/main" id="{58BE373E-57AE-4B23-BEA8-714D61AC23C4}"/>
+                <a16:creationId xmlns:a16="http://schemas.microsoft.com/office/drawing/2014/main" id="{2731AC8F-D246-4793-8706-97CCCFE7DBC6}"/>
               </a:ext>
             </a:extLst>
           </p:cNvPr>
@@ -23608,7 +23052,7 @@
           <p:cNvPr id="7" name="Shape 5">
             <a:extLst xmlns:a="http://schemas.openxmlformats.org/drawingml/2006/main">
               <a:ext uri="{FF2B5EF4-FFF2-40B4-BE49-F238E27FC236}">
-                <a16:creationId xmlns:a16="http://schemas.microsoft.com/office/drawing/2014/main" id="{4ECE1A37-1D1A-4F89-8DE0-486EA108BA00}"/>
+                <a16:creationId xmlns:a16="http://schemas.microsoft.com/office/drawing/2014/main" id="{C346D580-2F52-446D-AB11-B53C30272637}"/>
               </a:ext>
             </a:extLst>
           </p:cNvPr>
@@ -23647,7 +23091,7 @@
           <p:nvPr/>
         </p:nvPicPr>
         <p:blipFill>
-          <a:blip xmlns:r="http://schemas.openxmlformats.org/officeDocument/2006/relationships" xmlns:a="http://schemas.openxmlformats.org/drawingml/2006/main" r:embed="R7067e0ddffe44093"/>
+          <a:blip xmlns:r="http://schemas.openxmlformats.org/officeDocument/2006/relationships" xmlns:a="http://schemas.openxmlformats.org/drawingml/2006/main" r:embed="R4d0578952fda48bd"/>
           <a:stretch xmlns:a="http://schemas.openxmlformats.org/drawingml/2006/main">
             <a:fillRect l="0" t="0" r="0" b="0"/>
           </a:stretch>
@@ -23667,7 +23111,7 @@
           <p:cNvPr id="9" name="Shape 6">
             <a:extLst xmlns:a="http://schemas.openxmlformats.org/drawingml/2006/main">
               <a:ext uri="{FF2B5EF4-FFF2-40B4-BE49-F238E27FC236}">
-                <a16:creationId xmlns:a16="http://schemas.microsoft.com/office/drawing/2014/main" id="{4573920E-F206-493E-A2CE-1B6939425371}"/>
+                <a16:creationId xmlns:a16="http://schemas.microsoft.com/office/drawing/2014/main" id="{524CB63A-6B0B-4287-A7B1-741B0FE2FBAB}"/>
               </a:ext>
             </a:extLst>
           </p:cNvPr>
@@ -23700,7 +23144,7 @@
           <p:cNvPr id="10" name="Text 7">
             <a:extLst xmlns:a="http://schemas.openxmlformats.org/drawingml/2006/main">
               <a:ext uri="{FF2B5EF4-FFF2-40B4-BE49-F238E27FC236}">
-                <a16:creationId xmlns:a16="http://schemas.microsoft.com/office/drawing/2014/main" id="{E0269CE0-F50D-4B6C-A344-CA82A6C3B17A}"/>
+                <a16:creationId xmlns:a16="http://schemas.microsoft.com/office/drawing/2014/main" id="{6146DA3B-2694-4EC6-8E02-25A364B971E9}"/>
               </a:ext>
             </a:extLst>
           </p:cNvPr>
@@ -23747,7 +23191,7 @@
           <p:cNvPr id="11" name="Shape 8">
             <a:extLst xmlns:a="http://schemas.openxmlformats.org/drawingml/2006/main">
               <a:ext uri="{FF2B5EF4-FFF2-40B4-BE49-F238E27FC236}">
-                <a16:creationId xmlns:a16="http://schemas.microsoft.com/office/drawing/2014/main" id="{0F0ACBBE-5E97-4A8F-98B4-D4C7BED6256F}"/>
+                <a16:creationId xmlns:a16="http://schemas.microsoft.com/office/drawing/2014/main" id="{75080E0D-DE93-4818-86CB-E0264B55BEEE}"/>
               </a:ext>
             </a:extLst>
           </p:cNvPr>
@@ -23782,7 +23226,7 @@
           <p:cNvPr id="12" name="Text 9">
             <a:extLst xmlns:a="http://schemas.openxmlformats.org/drawingml/2006/main">
               <a:ext uri="{FF2B5EF4-FFF2-40B4-BE49-F238E27FC236}">
-                <a16:creationId xmlns:a16="http://schemas.microsoft.com/office/drawing/2014/main" id="{9565748A-2E7E-4579-A8E7-243A95B6CB47}"/>
+                <a16:creationId xmlns:a16="http://schemas.microsoft.com/office/drawing/2014/main" id="{12D9CACA-3FD1-4182-AC63-677D88E9676C}"/>
               </a:ext>
             </a:extLst>
           </p:cNvPr>
@@ -23829,7 +23273,7 @@
           <p:cNvPr id="13" name="Text 10">
             <a:extLst xmlns:a="http://schemas.openxmlformats.org/drawingml/2006/main">
               <a:ext uri="{FF2B5EF4-FFF2-40B4-BE49-F238E27FC236}">
-                <a16:creationId xmlns:a16="http://schemas.microsoft.com/office/drawing/2014/main" id="{D41F88CF-499E-4BDE-8232-A12489ED6C1A}"/>
+                <a16:creationId xmlns:a16="http://schemas.microsoft.com/office/drawing/2014/main" id="{9538981B-78C0-4BEE-A190-C4C497CEDB4B}"/>
               </a:ext>
             </a:extLst>
           </p:cNvPr>
@@ -23876,7 +23320,7 @@
           <p:cNvPr id="14" name="Shape 11">
             <a:extLst xmlns:a="http://schemas.openxmlformats.org/drawingml/2006/main">
               <a:ext uri="{FF2B5EF4-FFF2-40B4-BE49-F238E27FC236}">
-                <a16:creationId xmlns:a16="http://schemas.microsoft.com/office/drawing/2014/main" id="{D474011E-1BEA-4F63-A483-024A293A1B5A}"/>
+                <a16:creationId xmlns:a16="http://schemas.microsoft.com/office/drawing/2014/main" id="{0A7BD04E-744E-4F3C-BBB8-2E89B25BF30D}"/>
               </a:ext>
             </a:extLst>
           </p:cNvPr>
@@ -23911,7 +23355,7 @@
           <p:cNvPr id="15" name="Text 12">
             <a:extLst xmlns:a="http://schemas.openxmlformats.org/drawingml/2006/main">
               <a:ext uri="{FF2B5EF4-FFF2-40B4-BE49-F238E27FC236}">
-                <a16:creationId xmlns:a16="http://schemas.microsoft.com/office/drawing/2014/main" id="{5184227E-49C8-4F21-9B46-4E995F4985DD}"/>
+                <a16:creationId xmlns:a16="http://schemas.microsoft.com/office/drawing/2014/main" id="{4AA8D716-EEFE-42B3-A1DB-D5B4E2E7939C}"/>
               </a:ext>
             </a:extLst>
           </p:cNvPr>
@@ -23958,7 +23402,7 @@
           <p:cNvPr id="16" name="Text 13">
             <a:extLst xmlns:a="http://schemas.openxmlformats.org/drawingml/2006/main">
               <a:ext uri="{FF2B5EF4-FFF2-40B4-BE49-F238E27FC236}">
-                <a16:creationId xmlns:a16="http://schemas.microsoft.com/office/drawing/2014/main" id="{78595C55-2AB8-4DE8-87AF-636F346608FF}"/>
+                <a16:creationId xmlns:a16="http://schemas.microsoft.com/office/drawing/2014/main" id="{9F59F5CD-15F7-404F-BEE8-79B0D5EC649E}"/>
               </a:ext>
             </a:extLst>
           </p:cNvPr>
@@ -24005,7 +23449,7 @@
           <p:cNvPr id="17" name="Text 14">
             <a:extLst xmlns:a="http://schemas.openxmlformats.org/drawingml/2006/main">
               <a:ext uri="{FF2B5EF4-FFF2-40B4-BE49-F238E27FC236}">
-                <a16:creationId xmlns:a16="http://schemas.microsoft.com/office/drawing/2014/main" id="{6289D57D-DFF9-4E29-8081-DC921CE0E90E}"/>
+                <a16:creationId xmlns:a16="http://schemas.microsoft.com/office/drawing/2014/main" id="{D43968AE-D68E-46AC-BA84-AD0F0E2CADAD}"/>
               </a:ext>
             </a:extLst>
           </p:cNvPr>
@@ -24052,7 +23496,7 @@
           <p:cNvPr id="18" name="Shape 15">
             <a:extLst xmlns:a="http://schemas.openxmlformats.org/drawingml/2006/main">
               <a:ext uri="{FF2B5EF4-FFF2-40B4-BE49-F238E27FC236}">
-                <a16:creationId xmlns:a16="http://schemas.microsoft.com/office/drawing/2014/main" id="{8488A4B5-D8C6-4292-8006-49C66FF76DED}"/>
+                <a16:creationId xmlns:a16="http://schemas.microsoft.com/office/drawing/2014/main" id="{1A6EC77D-F333-4079-A58B-C70F67122950}"/>
               </a:ext>
             </a:extLst>
           </p:cNvPr>
@@ -24087,7 +23531,7 @@
           <p:cNvPr id="19" name="Text 16">
             <a:extLst xmlns:a="http://schemas.openxmlformats.org/drawingml/2006/main">
               <a:ext uri="{FF2B5EF4-FFF2-40B4-BE49-F238E27FC236}">
-                <a16:creationId xmlns:a16="http://schemas.microsoft.com/office/drawing/2014/main" id="{A9771B5E-8C53-4151-AE7F-AA79F2D28511}"/>
+                <a16:creationId xmlns:a16="http://schemas.microsoft.com/office/drawing/2014/main" id="{455DC8F6-7FBB-4AC8-9A2A-CA8BCA3F76BD}"/>
               </a:ext>
             </a:extLst>
           </p:cNvPr>
@@ -24134,7 +23578,7 @@
           <p:cNvPr id="20" name="Text 17">
             <a:extLst xmlns:a="http://schemas.openxmlformats.org/drawingml/2006/main">
               <a:ext uri="{FF2B5EF4-FFF2-40B4-BE49-F238E27FC236}">
-                <a16:creationId xmlns:a16="http://schemas.microsoft.com/office/drawing/2014/main" id="{1EFEAAF5-CF26-4129-A206-6EB0E9E23778}"/>
+                <a16:creationId xmlns:a16="http://schemas.microsoft.com/office/drawing/2014/main" id="{D304D0D3-C839-40D2-A9C4-CC13BDA73DD1}"/>
               </a:ext>
             </a:extLst>
           </p:cNvPr>
@@ -24181,7 +23625,7 @@
           <p:cNvPr id="21" name="Text 18">
             <a:extLst xmlns:a="http://schemas.openxmlformats.org/drawingml/2006/main">
               <a:ext uri="{FF2B5EF4-FFF2-40B4-BE49-F238E27FC236}">
-                <a16:creationId xmlns:a16="http://schemas.microsoft.com/office/drawing/2014/main" id="{AF7F4A59-8121-4ED5-B585-13C4DAC42238}"/>
+                <a16:creationId xmlns:a16="http://schemas.microsoft.com/office/drawing/2014/main" id="{340FB1CB-710A-4A8D-A361-4260166D5FE2}"/>
               </a:ext>
             </a:extLst>
           </p:cNvPr>
@@ -24228,7 +23672,7 @@
           <p:cNvPr id="22" name="Shape 19">
             <a:extLst xmlns:a="http://schemas.openxmlformats.org/drawingml/2006/main">
               <a:ext uri="{FF2B5EF4-FFF2-40B4-BE49-F238E27FC236}">
-                <a16:creationId xmlns:a16="http://schemas.microsoft.com/office/drawing/2014/main" id="{A961009F-81ED-4C8D-B68B-FF256311349D}"/>
+                <a16:creationId xmlns:a16="http://schemas.microsoft.com/office/drawing/2014/main" id="{2F5C127D-4225-4482-B006-116C92264ED0}"/>
               </a:ext>
             </a:extLst>
           </p:cNvPr>
@@ -24263,7 +23707,7 @@
           <p:cNvPr id="23" name="Text 20">
             <a:extLst xmlns:a="http://schemas.openxmlformats.org/drawingml/2006/main">
               <a:ext uri="{FF2B5EF4-FFF2-40B4-BE49-F238E27FC236}">
-                <a16:creationId xmlns:a16="http://schemas.microsoft.com/office/drawing/2014/main" id="{04066098-DB83-4D15-8718-8D9861DD6799}"/>
+                <a16:creationId xmlns:a16="http://schemas.microsoft.com/office/drawing/2014/main" id="{601A43FD-AE7F-49A3-BF7A-40644CC36EA6}"/>
               </a:ext>
             </a:extLst>
           </p:cNvPr>
@@ -24310,7 +23754,7 @@
           <p:cNvPr id="24" name="Text 21">
             <a:extLst xmlns:a="http://schemas.openxmlformats.org/drawingml/2006/main">
               <a:ext uri="{FF2B5EF4-FFF2-40B4-BE49-F238E27FC236}">
-                <a16:creationId xmlns:a16="http://schemas.microsoft.com/office/drawing/2014/main" id="{5F83B1D2-0196-4360-9F2D-7903606D3EB6}"/>
+                <a16:creationId xmlns:a16="http://schemas.microsoft.com/office/drawing/2014/main" id="{293D5F10-1B85-4E62-97E7-76EF38DF09DE}"/>
               </a:ext>
             </a:extLst>
           </p:cNvPr>
@@ -24357,7 +23801,7 @@
           <p:cNvPr id="25" name="Text 22">
             <a:extLst xmlns:a="http://schemas.openxmlformats.org/drawingml/2006/main">
               <a:ext uri="{FF2B5EF4-FFF2-40B4-BE49-F238E27FC236}">
-                <a16:creationId xmlns:a16="http://schemas.microsoft.com/office/drawing/2014/main" id="{5961B844-E305-40F1-8B95-EB37EB191431}"/>
+                <a16:creationId xmlns:a16="http://schemas.microsoft.com/office/drawing/2014/main" id="{ABBBE2A3-8F12-4A7B-83A3-1B5283BFA10E}"/>
               </a:ext>
             </a:extLst>
           </p:cNvPr>
@@ -24404,7 +23848,7 @@
           <p:cNvPr id="26" name="Shape 23">
             <a:extLst xmlns:a="http://schemas.openxmlformats.org/drawingml/2006/main">
               <a:ext uri="{FF2B5EF4-FFF2-40B4-BE49-F238E27FC236}">
-                <a16:creationId xmlns:a16="http://schemas.microsoft.com/office/drawing/2014/main" id="{1E5BB8A4-B992-488A-BDE6-3616FCC02620}"/>
+                <a16:creationId xmlns:a16="http://schemas.microsoft.com/office/drawing/2014/main" id="{53292695-7996-4A0B-9B02-9AB383C63A81}"/>
               </a:ext>
             </a:extLst>
           </p:cNvPr>
@@ -24439,7 +23883,7 @@
           <p:cNvPr id="27" name="Text 24">
             <a:extLst xmlns:a="http://schemas.openxmlformats.org/drawingml/2006/main">
               <a:ext uri="{FF2B5EF4-FFF2-40B4-BE49-F238E27FC236}">
-                <a16:creationId xmlns:a16="http://schemas.microsoft.com/office/drawing/2014/main" id="{C64D5C10-30F7-4B9C-94A1-9246388A88FF}"/>
+                <a16:creationId xmlns:a16="http://schemas.microsoft.com/office/drawing/2014/main" id="{BE82B573-7E7A-4A0C-874C-D70827578D0E}"/>
               </a:ext>
             </a:extLst>
           </p:cNvPr>
@@ -24486,7 +23930,7 @@
           <p:cNvPr id="28" name="Text 25">
             <a:extLst xmlns:a="http://schemas.openxmlformats.org/drawingml/2006/main">
               <a:ext uri="{FF2B5EF4-FFF2-40B4-BE49-F238E27FC236}">
-                <a16:creationId xmlns:a16="http://schemas.microsoft.com/office/drawing/2014/main" id="{321C33F0-B520-458A-88AA-6BA4A9183915}"/>
+                <a16:creationId xmlns:a16="http://schemas.microsoft.com/office/drawing/2014/main" id="{E47CC3AC-A957-4AA4-8490-6FE56DCA0B43}"/>
               </a:ext>
             </a:extLst>
           </p:cNvPr>
@@ -24533,7 +23977,7 @@
           <p:cNvPr id="29" name="Text 26">
             <a:extLst xmlns:a="http://schemas.openxmlformats.org/drawingml/2006/main">
               <a:ext uri="{FF2B5EF4-FFF2-40B4-BE49-F238E27FC236}">
-                <a16:creationId xmlns:a16="http://schemas.microsoft.com/office/drawing/2014/main" id="{4FC54BDA-3AA4-4395-9AB6-B4DA53FA49F5}"/>
+                <a16:creationId xmlns:a16="http://schemas.microsoft.com/office/drawing/2014/main" id="{209BA258-97E7-4C95-9761-61E298932F3F}"/>
               </a:ext>
             </a:extLst>
           </p:cNvPr>
@@ -24580,7 +24024,7 @@
           <p:cNvPr id="30" name="Text 27">
             <a:extLst xmlns:a="http://schemas.openxmlformats.org/drawingml/2006/main">
               <a:ext uri="{FF2B5EF4-FFF2-40B4-BE49-F238E27FC236}">
-                <a16:creationId xmlns:a16="http://schemas.microsoft.com/office/drawing/2014/main" id="{98476478-D5EC-4029-85A4-7077018AF67E}"/>
+                <a16:creationId xmlns:a16="http://schemas.microsoft.com/office/drawing/2014/main" id="{0DAD2772-838B-4DBF-AA23-DA662C4959A5}"/>
               </a:ext>
             </a:extLst>
           </p:cNvPr>
@@ -24627,7 +24071,7 @@
           <p:cNvPr id="31" name="Text 28">
             <a:extLst xmlns:a="http://schemas.openxmlformats.org/drawingml/2006/main">
               <a:ext uri="{FF2B5EF4-FFF2-40B4-BE49-F238E27FC236}">
-                <a16:creationId xmlns:a16="http://schemas.microsoft.com/office/drawing/2014/main" id="{D12E6EB8-50BC-4050-9DFD-63EA96CECBDF}"/>
+                <a16:creationId xmlns:a16="http://schemas.microsoft.com/office/drawing/2014/main" id="{DB2172B6-8E02-4419-92EE-5FDC5F194AA3}"/>
               </a:ext>
             </a:extLst>
           </p:cNvPr>
@@ -24672,7 +24116,7 @@
     </p:spTree>
     <p:extLst>
       <p:ext uri="{BB962C8B-B14F-4D97-AF65-F5344CB8AC3E}">
-        <p14:creationId xmlns:p14="http://schemas.microsoft.com/office/powerpoint/2010/main" val="1219675357"/>
+        <p14:creationId xmlns:p14="http://schemas.microsoft.com/office/powerpoint/2010/main" val="1189863805"/>
       </p:ext>
     </p:extLst>
   </p:cSld>
@@ -24703,7 +24147,7 @@
           <p:cNvPr id="2" name="Text 0">
             <a:extLst xmlns:a="http://schemas.openxmlformats.org/drawingml/2006/main">
               <a:ext uri="{FF2B5EF4-FFF2-40B4-BE49-F238E27FC236}">
-                <a16:creationId xmlns:a16="http://schemas.microsoft.com/office/drawing/2014/main" id="{2C11BF27-CD04-4CDC-916F-8739F59B0D1C}"/>
+                <a16:creationId xmlns:a16="http://schemas.microsoft.com/office/drawing/2014/main" id="{F01FA0E6-8E7A-42F0-B887-A8F6FFB62854}"/>
               </a:ext>
             </a:extLst>
           </p:cNvPr>
@@ -24750,7 +24194,7 @@
           <p:cNvPr id="3" name="Text 1">
             <a:extLst xmlns:a="http://schemas.openxmlformats.org/drawingml/2006/main">
               <a:ext uri="{FF2B5EF4-FFF2-40B4-BE49-F238E27FC236}">
-                <a16:creationId xmlns:a16="http://schemas.microsoft.com/office/drawing/2014/main" id="{C700EF4E-43BD-43B0-9DCC-7F7A47FD13FA}"/>
+                <a16:creationId xmlns:a16="http://schemas.microsoft.com/office/drawing/2014/main" id="{BDAF2FDF-A245-4DD3-B042-083F6E626D82}"/>
               </a:ext>
             </a:extLst>
           </p:cNvPr>
@@ -24797,7 +24241,7 @@
           <p:cNvPr id="4" name="Shape 2">
             <a:extLst xmlns:a="http://schemas.openxmlformats.org/drawingml/2006/main">
               <a:ext uri="{FF2B5EF4-FFF2-40B4-BE49-F238E27FC236}">
-                <a16:creationId xmlns:a16="http://schemas.microsoft.com/office/drawing/2014/main" id="{7476F3EB-EBE3-43F5-9B7C-6F4CAEE057C7}"/>
+                <a16:creationId xmlns:a16="http://schemas.microsoft.com/office/drawing/2014/main" id="{A8367B06-768F-41F8-904C-BD29C7884765}"/>
               </a:ext>
             </a:extLst>
           </p:cNvPr>
@@ -24832,7 +24276,7 @@
           <p:cNvPr id="5" name="Text 3">
             <a:extLst xmlns:a="http://schemas.openxmlformats.org/drawingml/2006/main">
               <a:ext uri="{FF2B5EF4-FFF2-40B4-BE49-F238E27FC236}">
-                <a16:creationId xmlns:a16="http://schemas.microsoft.com/office/drawing/2014/main" id="{FD458956-03C9-4D90-893C-BD1B83A77D30}"/>
+                <a16:creationId xmlns:a16="http://schemas.microsoft.com/office/drawing/2014/main" id="{D3AAE2F5-B658-4354-B94B-B43A6350B7F2}"/>
               </a:ext>
             </a:extLst>
           </p:cNvPr>
@@ -24879,7 +24323,7 @@
           <p:cNvPr id="6" name="Shape 4">
             <a:extLst xmlns:a="http://schemas.openxmlformats.org/drawingml/2006/main">
               <a:ext uri="{FF2B5EF4-FFF2-40B4-BE49-F238E27FC236}">
-                <a16:creationId xmlns:a16="http://schemas.microsoft.com/office/drawing/2014/main" id="{AC1AD914-D889-4D9E-B051-C512FB15D739}"/>
+                <a16:creationId xmlns:a16="http://schemas.microsoft.com/office/drawing/2014/main" id="{292BB15B-C244-47C7-B3C8-8027F87E940F}"/>
               </a:ext>
             </a:extLst>
           </p:cNvPr>
@@ -24910,7 +24354,7 @@
           <p:cNvPr id="7" name="Shape 5">
             <a:extLst xmlns:a="http://schemas.openxmlformats.org/drawingml/2006/main">
               <a:ext uri="{FF2B5EF4-FFF2-40B4-BE49-F238E27FC236}">
-                <a16:creationId xmlns:a16="http://schemas.microsoft.com/office/drawing/2014/main" id="{91A888A5-9946-4B60-A7B7-7C34CA3702C4}"/>
+                <a16:creationId xmlns:a16="http://schemas.microsoft.com/office/drawing/2014/main" id="{F8DB26EE-6FC9-470C-A8F9-274C94568FCF}"/>
               </a:ext>
             </a:extLst>
           </p:cNvPr>
@@ -24945,7 +24389,7 @@
           <p:cNvPr id="8" name="Text 6">
             <a:extLst xmlns:a="http://schemas.openxmlformats.org/drawingml/2006/main">
               <a:ext uri="{FF2B5EF4-FFF2-40B4-BE49-F238E27FC236}">
-                <a16:creationId xmlns:a16="http://schemas.microsoft.com/office/drawing/2014/main" id="{2D53F1A5-2CCE-4FE3-B3D8-35089AED7221}"/>
+                <a16:creationId xmlns:a16="http://schemas.microsoft.com/office/drawing/2014/main" id="{24D9B2C4-BE72-4AA0-8B76-662089E3A025}"/>
               </a:ext>
             </a:extLst>
           </p:cNvPr>
@@ -24992,7 +24436,7 @@
           <p:cNvPr id="9" name="Text 7">
             <a:extLst xmlns:a="http://schemas.openxmlformats.org/drawingml/2006/main">
               <a:ext uri="{FF2B5EF4-FFF2-40B4-BE49-F238E27FC236}">
-                <a16:creationId xmlns:a16="http://schemas.microsoft.com/office/drawing/2014/main" id="{0EDDED3D-42D0-474A-968A-7AA662D16A18}"/>
+                <a16:creationId xmlns:a16="http://schemas.microsoft.com/office/drawing/2014/main" id="{E0AB9138-03DB-4AD3-AFD5-FF9134DBB33C}"/>
               </a:ext>
             </a:extLst>
           </p:cNvPr>
@@ -25039,7 +24483,7 @@
           <p:cNvPr id="10" name="Text 8">
             <a:extLst xmlns:a="http://schemas.openxmlformats.org/drawingml/2006/main">
               <a:ext uri="{FF2B5EF4-FFF2-40B4-BE49-F238E27FC236}">
-                <a16:creationId xmlns:a16="http://schemas.microsoft.com/office/drawing/2014/main" id="{7626C549-0DD8-4741-BF3B-72347D921D69}"/>
+                <a16:creationId xmlns:a16="http://schemas.microsoft.com/office/drawing/2014/main" id="{B3B8C1C4-72D4-4D1F-8ACE-4ABA3D12BE30}"/>
               </a:ext>
             </a:extLst>
           </p:cNvPr>
@@ -25086,7 +24530,7 @@
           <p:cNvPr id="11" name="Shape 9">
             <a:extLst xmlns:a="http://schemas.openxmlformats.org/drawingml/2006/main">
               <a:ext uri="{FF2B5EF4-FFF2-40B4-BE49-F238E27FC236}">
-                <a16:creationId xmlns:a16="http://schemas.microsoft.com/office/drawing/2014/main" id="{383E2534-C457-4198-9183-D725CFA8EBF0}"/>
+                <a16:creationId xmlns:a16="http://schemas.microsoft.com/office/drawing/2014/main" id="{AEA00AE9-26D0-44E4-AEB9-C30744D2FDCC}"/>
               </a:ext>
             </a:extLst>
           </p:cNvPr>
@@ -25121,7 +24565,7 @@
           <p:cNvPr id="12" name="Text 10">
             <a:extLst xmlns:a="http://schemas.openxmlformats.org/drawingml/2006/main">
               <a:ext uri="{FF2B5EF4-FFF2-40B4-BE49-F238E27FC236}">
-                <a16:creationId xmlns:a16="http://schemas.microsoft.com/office/drawing/2014/main" id="{2486E46A-B230-4912-9082-78266093DB19}"/>
+                <a16:creationId xmlns:a16="http://schemas.microsoft.com/office/drawing/2014/main" id="{C1B86CAC-B929-47BA-94B9-45522D8E6B88}"/>
               </a:ext>
             </a:extLst>
           </p:cNvPr>
@@ -25168,7 +24612,7 @@
           <p:cNvPr id="13" name="Text 11">
             <a:extLst xmlns:a="http://schemas.openxmlformats.org/drawingml/2006/main">
               <a:ext uri="{FF2B5EF4-FFF2-40B4-BE49-F238E27FC236}">
-                <a16:creationId xmlns:a16="http://schemas.microsoft.com/office/drawing/2014/main" id="{28F153AB-FEF9-4DB6-ACBB-0CABECCC24C5}"/>
+                <a16:creationId xmlns:a16="http://schemas.microsoft.com/office/drawing/2014/main" id="{D6A25835-74BD-48E4-9A34-7CE7E5FC1415}"/>
               </a:ext>
             </a:extLst>
           </p:cNvPr>
@@ -25215,7 +24659,7 @@
           <p:cNvPr id="14" name="Text 12">
             <a:extLst xmlns:a="http://schemas.openxmlformats.org/drawingml/2006/main">
               <a:ext uri="{FF2B5EF4-FFF2-40B4-BE49-F238E27FC236}">
-                <a16:creationId xmlns:a16="http://schemas.microsoft.com/office/drawing/2014/main" id="{B660B95E-CDA5-4858-B30C-4603CD4B053D}"/>
+                <a16:creationId xmlns:a16="http://schemas.microsoft.com/office/drawing/2014/main" id="{8807F5FD-4D79-4515-AC85-E4E006195755}"/>
               </a:ext>
             </a:extLst>
           </p:cNvPr>
@@ -25262,7 +24706,7 @@
           <p:cNvPr id="15" name="Shape 13">
             <a:extLst xmlns:a="http://schemas.openxmlformats.org/drawingml/2006/main">
               <a:ext uri="{FF2B5EF4-FFF2-40B4-BE49-F238E27FC236}">
-                <a16:creationId xmlns:a16="http://schemas.microsoft.com/office/drawing/2014/main" id="{AC3B3A94-F043-4F98-967F-7D039EBB86BD}"/>
+                <a16:creationId xmlns:a16="http://schemas.microsoft.com/office/drawing/2014/main" id="{1EA4E188-1738-47ED-A664-A10048CE2DCC}"/>
               </a:ext>
             </a:extLst>
           </p:cNvPr>
@@ -25297,7 +24741,7 @@
           <p:cNvPr id="16" name="Text 14">
             <a:extLst xmlns:a="http://schemas.openxmlformats.org/drawingml/2006/main">
               <a:ext uri="{FF2B5EF4-FFF2-40B4-BE49-F238E27FC236}">
-                <a16:creationId xmlns:a16="http://schemas.microsoft.com/office/drawing/2014/main" id="{A54AE688-B91A-4D4D-9FF3-3F4F7B3E1BA1}"/>
+                <a16:creationId xmlns:a16="http://schemas.microsoft.com/office/drawing/2014/main" id="{805A7490-6C02-49D0-8EC3-5DB2062E6F70}"/>
               </a:ext>
             </a:extLst>
           </p:cNvPr>
@@ -25344,7 +24788,7 @@
           <p:cNvPr id="17" name="Text 15">
             <a:extLst xmlns:a="http://schemas.openxmlformats.org/drawingml/2006/main">
               <a:ext uri="{FF2B5EF4-FFF2-40B4-BE49-F238E27FC236}">
-                <a16:creationId xmlns:a16="http://schemas.microsoft.com/office/drawing/2014/main" id="{4C5ECE4E-45E0-46FA-8D4B-3B9F9B157D9F}"/>
+                <a16:creationId xmlns:a16="http://schemas.microsoft.com/office/drawing/2014/main" id="{7E07DB1E-7121-4144-A712-ECD8BCAD00E6}"/>
               </a:ext>
             </a:extLst>
           </p:cNvPr>
@@ -25391,7 +24835,7 @@
           <p:cNvPr id="18" name="Text 16">
             <a:extLst xmlns:a="http://schemas.openxmlformats.org/drawingml/2006/main">
               <a:ext uri="{FF2B5EF4-FFF2-40B4-BE49-F238E27FC236}">
-                <a16:creationId xmlns:a16="http://schemas.microsoft.com/office/drawing/2014/main" id="{0FA12378-A42C-4512-ADD9-7D08CF95A36E}"/>
+                <a16:creationId xmlns:a16="http://schemas.microsoft.com/office/drawing/2014/main" id="{00265EAE-12A1-442F-A43B-8422A203185A}"/>
               </a:ext>
             </a:extLst>
           </p:cNvPr>
@@ -25438,7 +24882,7 @@
           <p:cNvPr id="19" name="Shape 17">
             <a:extLst xmlns:a="http://schemas.openxmlformats.org/drawingml/2006/main">
               <a:ext uri="{FF2B5EF4-FFF2-40B4-BE49-F238E27FC236}">
-                <a16:creationId xmlns:a16="http://schemas.microsoft.com/office/drawing/2014/main" id="{ADE7521F-1CAF-462C-82F9-C6170F16ECC1}"/>
+                <a16:creationId xmlns:a16="http://schemas.microsoft.com/office/drawing/2014/main" id="{95CC7490-F960-4C04-AB29-6425EA387892}"/>
               </a:ext>
             </a:extLst>
           </p:cNvPr>
@@ -25473,7 +24917,7 @@
           <p:cNvPr id="20" name="Text 18">
             <a:extLst xmlns:a="http://schemas.openxmlformats.org/drawingml/2006/main">
               <a:ext uri="{FF2B5EF4-FFF2-40B4-BE49-F238E27FC236}">
-                <a16:creationId xmlns:a16="http://schemas.microsoft.com/office/drawing/2014/main" id="{0FDE8683-22AC-4D4C-87C4-6C62BA77B29F}"/>
+                <a16:creationId xmlns:a16="http://schemas.microsoft.com/office/drawing/2014/main" id="{48E9995A-1FF3-4031-9604-B0B87D0EA100}"/>
               </a:ext>
             </a:extLst>
           </p:cNvPr>
@@ -25520,7 +24964,7 @@
           <p:cNvPr id="21" name="Text 19">
             <a:extLst xmlns:a="http://schemas.openxmlformats.org/drawingml/2006/main">
               <a:ext uri="{FF2B5EF4-FFF2-40B4-BE49-F238E27FC236}">
-                <a16:creationId xmlns:a16="http://schemas.microsoft.com/office/drawing/2014/main" id="{6C22082E-F773-44DD-96A2-410323CD5103}"/>
+                <a16:creationId xmlns:a16="http://schemas.microsoft.com/office/drawing/2014/main" id="{A37EE258-A24F-4AAD-942A-656B5CF57AB7}"/>
               </a:ext>
             </a:extLst>
           </p:cNvPr>
@@ -25567,7 +25011,7 @@
           <p:cNvPr id="22" name="Text 20">
             <a:extLst xmlns:a="http://schemas.openxmlformats.org/drawingml/2006/main">
               <a:ext uri="{FF2B5EF4-FFF2-40B4-BE49-F238E27FC236}">
-                <a16:creationId xmlns:a16="http://schemas.microsoft.com/office/drawing/2014/main" id="{664BE157-2AA7-48FB-B4C2-76296870018D}"/>
+                <a16:creationId xmlns:a16="http://schemas.microsoft.com/office/drawing/2014/main" id="{71D34824-C994-4582-993E-A5FD1B8E3ECC}"/>
               </a:ext>
             </a:extLst>
           </p:cNvPr>
@@ -25614,7 +25058,7 @@
           <p:cNvPr id="23" name="Shape 21">
             <a:extLst xmlns:a="http://schemas.openxmlformats.org/drawingml/2006/main">
               <a:ext uri="{FF2B5EF4-FFF2-40B4-BE49-F238E27FC236}">
-                <a16:creationId xmlns:a16="http://schemas.microsoft.com/office/drawing/2014/main" id="{B505862B-32F6-4429-B755-B1375AD814EE}"/>
+                <a16:creationId xmlns:a16="http://schemas.microsoft.com/office/drawing/2014/main" id="{B8336945-5BA2-41F9-80E3-4869083532AF}"/>
               </a:ext>
             </a:extLst>
           </p:cNvPr>
@@ -25649,7 +25093,7 @@
           <p:cNvPr id="24" name="Text 22">
             <a:extLst xmlns:a="http://schemas.openxmlformats.org/drawingml/2006/main">
               <a:ext uri="{FF2B5EF4-FFF2-40B4-BE49-F238E27FC236}">
-                <a16:creationId xmlns:a16="http://schemas.microsoft.com/office/drawing/2014/main" id="{A94FD894-ABC7-4AF0-BD4D-5FBA559490A0}"/>
+                <a16:creationId xmlns:a16="http://schemas.microsoft.com/office/drawing/2014/main" id="{A5143D82-85D2-4D09-B96B-6A692642F7EB}"/>
               </a:ext>
             </a:extLst>
           </p:cNvPr>
@@ -25696,7 +25140,7 @@
           <p:cNvPr id="25" name="Text 23">
             <a:extLst xmlns:a="http://schemas.openxmlformats.org/drawingml/2006/main">
               <a:ext uri="{FF2B5EF4-FFF2-40B4-BE49-F238E27FC236}">
-                <a16:creationId xmlns:a16="http://schemas.microsoft.com/office/drawing/2014/main" id="{E7F00B32-BD7B-4537-8A4B-7153FEA34736}"/>
+                <a16:creationId xmlns:a16="http://schemas.microsoft.com/office/drawing/2014/main" id="{88948990-D636-4B7D-BB5F-0461E2E448FE}"/>
               </a:ext>
             </a:extLst>
           </p:cNvPr>
@@ -25743,7 +25187,7 @@
           <p:cNvPr id="26" name="Text 24">
             <a:extLst xmlns:a="http://schemas.openxmlformats.org/drawingml/2006/main">
               <a:ext uri="{FF2B5EF4-FFF2-40B4-BE49-F238E27FC236}">
-                <a16:creationId xmlns:a16="http://schemas.microsoft.com/office/drawing/2014/main" id="{7296A1CB-4B25-4CA1-A192-F5F7275F176B}"/>
+                <a16:creationId xmlns:a16="http://schemas.microsoft.com/office/drawing/2014/main" id="{769033F6-9080-4983-9F72-A291EAD3DD1C}"/>
               </a:ext>
             </a:extLst>
           </p:cNvPr>
@@ -25790,7 +25234,7 @@
           <p:cNvPr id="27" name="Shape 25">
             <a:extLst xmlns:a="http://schemas.openxmlformats.org/drawingml/2006/main">
               <a:ext uri="{FF2B5EF4-FFF2-40B4-BE49-F238E27FC236}">
-                <a16:creationId xmlns:a16="http://schemas.microsoft.com/office/drawing/2014/main" id="{C8873658-973D-4AC7-8BE8-25A736BC1D02}"/>
+                <a16:creationId xmlns:a16="http://schemas.microsoft.com/office/drawing/2014/main" id="{5D911DA8-8851-4CC7-8294-A6749C30A002}"/>
               </a:ext>
             </a:extLst>
           </p:cNvPr>
@@ -25825,7 +25269,7 @@
           <p:cNvPr id="28" name="Text 26">
             <a:extLst xmlns:a="http://schemas.openxmlformats.org/drawingml/2006/main">
               <a:ext uri="{FF2B5EF4-FFF2-40B4-BE49-F238E27FC236}">
-                <a16:creationId xmlns:a16="http://schemas.microsoft.com/office/drawing/2014/main" id="{D32ECDF0-5319-44D3-8524-028F2494A507}"/>
+                <a16:creationId xmlns:a16="http://schemas.microsoft.com/office/drawing/2014/main" id="{55D001D2-5BBF-4993-94F7-C36BBD32FFB2}"/>
               </a:ext>
             </a:extLst>
           </p:cNvPr>
@@ -25872,7 +25316,7 @@
           <p:cNvPr id="29" name="Text 27">
             <a:extLst xmlns:a="http://schemas.openxmlformats.org/drawingml/2006/main">
               <a:ext uri="{FF2B5EF4-FFF2-40B4-BE49-F238E27FC236}">
-                <a16:creationId xmlns:a16="http://schemas.microsoft.com/office/drawing/2014/main" id="{EBA969CF-2591-407D-A299-8E7C8F797E3E}"/>
+                <a16:creationId xmlns:a16="http://schemas.microsoft.com/office/drawing/2014/main" id="{7A9C590E-2469-46D1-836E-F79D226F6815}"/>
               </a:ext>
             </a:extLst>
           </p:cNvPr>
@@ -25919,7 +25363,7 @@
           <p:cNvPr id="30" name="Text 28">
             <a:extLst xmlns:a="http://schemas.openxmlformats.org/drawingml/2006/main">
               <a:ext uri="{FF2B5EF4-FFF2-40B4-BE49-F238E27FC236}">
-                <a16:creationId xmlns:a16="http://schemas.microsoft.com/office/drawing/2014/main" id="{8E8C6159-D483-4108-BD2E-A1D33DE82136}"/>
+                <a16:creationId xmlns:a16="http://schemas.microsoft.com/office/drawing/2014/main" id="{9D128355-68B2-4378-A3D2-EBE2C28739A2}"/>
               </a:ext>
             </a:extLst>
           </p:cNvPr>
@@ -25966,7 +25410,7 @@
           <p:cNvPr id="31" name="Shape 29">
             <a:extLst xmlns:a="http://schemas.openxmlformats.org/drawingml/2006/main">
               <a:ext uri="{FF2B5EF4-FFF2-40B4-BE49-F238E27FC236}">
-                <a16:creationId xmlns:a16="http://schemas.microsoft.com/office/drawing/2014/main" id="{297F7FB3-9148-487C-B247-1882D2CD7B2E}"/>
+                <a16:creationId xmlns:a16="http://schemas.microsoft.com/office/drawing/2014/main" id="{305F26A4-1430-4C0C-AA4B-7AB8BDC75C67}"/>
               </a:ext>
             </a:extLst>
           </p:cNvPr>
@@ -26001,7 +25445,7 @@
           <p:cNvPr id="32" name="Text 30">
             <a:extLst xmlns:a="http://schemas.openxmlformats.org/drawingml/2006/main">
               <a:ext uri="{FF2B5EF4-FFF2-40B4-BE49-F238E27FC236}">
-                <a16:creationId xmlns:a16="http://schemas.microsoft.com/office/drawing/2014/main" id="{D2ECF98F-E1B4-4620-99A9-30E1A18D2E47}"/>
+                <a16:creationId xmlns:a16="http://schemas.microsoft.com/office/drawing/2014/main" id="{7890A773-22F1-493C-8E7C-B1F6F2A9A396}"/>
               </a:ext>
             </a:extLst>
           </p:cNvPr>
@@ -26048,7 +25492,7 @@
           <p:cNvPr id="33" name="Text 31">
             <a:extLst xmlns:a="http://schemas.openxmlformats.org/drawingml/2006/main">
               <a:ext uri="{FF2B5EF4-FFF2-40B4-BE49-F238E27FC236}">
-                <a16:creationId xmlns:a16="http://schemas.microsoft.com/office/drawing/2014/main" id="{67E42DAE-1F93-40C8-8F6B-345AF79D2513}"/>
+                <a16:creationId xmlns:a16="http://schemas.microsoft.com/office/drawing/2014/main" id="{309A4FF1-2AF3-4480-9B6B-3D2025437D14}"/>
               </a:ext>
             </a:extLst>
           </p:cNvPr>
@@ -26095,7 +25539,7 @@
           <p:cNvPr id="34" name="Text 32">
             <a:extLst xmlns:a="http://schemas.openxmlformats.org/drawingml/2006/main">
               <a:ext uri="{FF2B5EF4-FFF2-40B4-BE49-F238E27FC236}">
-                <a16:creationId xmlns:a16="http://schemas.microsoft.com/office/drawing/2014/main" id="{F11CADFA-DB47-403C-917C-28192E0C4C9E}"/>
+                <a16:creationId xmlns:a16="http://schemas.microsoft.com/office/drawing/2014/main" id="{95D4EE09-07E6-4FB7-A329-31F222E8231C}"/>
               </a:ext>
             </a:extLst>
           </p:cNvPr>
@@ -26142,7 +25586,7 @@
           <p:cNvPr id="35" name="Text 33">
             <a:extLst xmlns:a="http://schemas.openxmlformats.org/drawingml/2006/main">
               <a:ext uri="{FF2B5EF4-FFF2-40B4-BE49-F238E27FC236}">
-                <a16:creationId xmlns:a16="http://schemas.microsoft.com/office/drawing/2014/main" id="{33D0FDE0-D6FC-4D79-ABDA-2888F4D72ACF}"/>
+                <a16:creationId xmlns:a16="http://schemas.microsoft.com/office/drawing/2014/main" id="{2BD77709-F5B4-4EFF-98F9-FE1EFB203E79}"/>
               </a:ext>
             </a:extLst>
           </p:cNvPr>
@@ -26189,7 +25633,7 @@
           <p:cNvPr id="36" name="Text 34">
             <a:extLst xmlns:a="http://schemas.openxmlformats.org/drawingml/2006/main">
               <a:ext uri="{FF2B5EF4-FFF2-40B4-BE49-F238E27FC236}">
-                <a16:creationId xmlns:a16="http://schemas.microsoft.com/office/drawing/2014/main" id="{9DD51ED8-CBA7-44B7-B8FA-C9ECE5D402C2}"/>
+                <a16:creationId xmlns:a16="http://schemas.microsoft.com/office/drawing/2014/main" id="{28D57732-E984-48BC-913E-39156BF67B14}"/>
               </a:ext>
             </a:extLst>
           </p:cNvPr>
@@ -26236,7 +25680,7 @@
           <p:cNvPr id="37" name="Text 35">
             <a:extLst xmlns:a="http://schemas.openxmlformats.org/drawingml/2006/main">
               <a:ext uri="{FF2B5EF4-FFF2-40B4-BE49-F238E27FC236}">
-                <a16:creationId xmlns:a16="http://schemas.microsoft.com/office/drawing/2014/main" id="{B5646B81-7BB3-4E7B-8540-B71EFDE93CBB}"/>
+                <a16:creationId xmlns:a16="http://schemas.microsoft.com/office/drawing/2014/main" id="{38F03DAF-BB6E-47DD-82B9-DD527D1916C7}"/>
               </a:ext>
             </a:extLst>
           </p:cNvPr>
@@ -26283,7 +25727,7 @@
           <p:cNvPr id="38" name="Text 36">
             <a:extLst xmlns:a="http://schemas.openxmlformats.org/drawingml/2006/main">
               <a:ext uri="{FF2B5EF4-FFF2-40B4-BE49-F238E27FC236}">
-                <a16:creationId xmlns:a16="http://schemas.microsoft.com/office/drawing/2014/main" id="{8683A959-44FF-4723-91E0-F83AFBF7B23F}"/>
+                <a16:creationId xmlns:a16="http://schemas.microsoft.com/office/drawing/2014/main" id="{ADC13613-851E-443B-B46C-82EE5F2B9955}"/>
               </a:ext>
             </a:extLst>
           </p:cNvPr>
@@ -26330,7 +25774,7 @@
           <p:cNvPr id="39" name="Text 37">
             <a:extLst xmlns:a="http://schemas.openxmlformats.org/drawingml/2006/main">
               <a:ext uri="{FF2B5EF4-FFF2-40B4-BE49-F238E27FC236}">
-                <a16:creationId xmlns:a16="http://schemas.microsoft.com/office/drawing/2014/main" id="{D8653A8A-A488-4084-8290-59C49F8F4425}"/>
+                <a16:creationId xmlns:a16="http://schemas.microsoft.com/office/drawing/2014/main" id="{4F3DEBBF-4466-412D-928F-E4536005904C}"/>
               </a:ext>
             </a:extLst>
           </p:cNvPr>
@@ -26377,7 +25821,7 @@
           <p:cNvPr id="40" name="Text 38">
             <a:extLst xmlns:a="http://schemas.openxmlformats.org/drawingml/2006/main">
               <a:ext uri="{FF2B5EF4-FFF2-40B4-BE49-F238E27FC236}">
-                <a16:creationId xmlns:a16="http://schemas.microsoft.com/office/drawing/2014/main" id="{1EC5ECD4-EFCC-422E-87DC-F244107A954A}"/>
+                <a16:creationId xmlns:a16="http://schemas.microsoft.com/office/drawing/2014/main" id="{B70113D6-4149-4B34-9165-ACD15C5860D9}"/>
               </a:ext>
             </a:extLst>
           </p:cNvPr>
@@ -26424,7 +25868,7 @@
           <p:cNvPr id="41" name="Text 39">
             <a:extLst xmlns:a="http://schemas.openxmlformats.org/drawingml/2006/main">
               <a:ext uri="{FF2B5EF4-FFF2-40B4-BE49-F238E27FC236}">
-                <a16:creationId xmlns:a16="http://schemas.microsoft.com/office/drawing/2014/main" id="{8A627912-3992-40AD-9E9C-5EED5A80F8AE}"/>
+                <a16:creationId xmlns:a16="http://schemas.microsoft.com/office/drawing/2014/main" id="{538D353B-B426-4554-9631-537AE784895A}"/>
               </a:ext>
             </a:extLst>
           </p:cNvPr>
@@ -26471,7 +25915,7 @@
           <p:cNvPr id="42" name="Text 40">
             <a:extLst xmlns:a="http://schemas.openxmlformats.org/drawingml/2006/main">
               <a:ext uri="{FF2B5EF4-FFF2-40B4-BE49-F238E27FC236}">
-                <a16:creationId xmlns:a16="http://schemas.microsoft.com/office/drawing/2014/main" id="{775F0AE5-09C0-4431-AAF3-6D4E8B294E90}"/>
+                <a16:creationId xmlns:a16="http://schemas.microsoft.com/office/drawing/2014/main" id="{9621A4D6-1564-4BEC-95C8-855C52CD1BEE}"/>
               </a:ext>
             </a:extLst>
           </p:cNvPr>
@@ -26518,7 +25962,7 @@
           <p:cNvPr id="43" name="Text 41">
             <a:extLst xmlns:a="http://schemas.openxmlformats.org/drawingml/2006/main">
               <a:ext uri="{FF2B5EF4-FFF2-40B4-BE49-F238E27FC236}">
-                <a16:creationId xmlns:a16="http://schemas.microsoft.com/office/drawing/2014/main" id="{67B7579E-60CA-4463-AB69-D98E49CCF940}"/>
+                <a16:creationId xmlns:a16="http://schemas.microsoft.com/office/drawing/2014/main" id="{BAD37A0D-7AF6-4045-8A61-F2F851A05CCB}"/>
               </a:ext>
             </a:extLst>
           </p:cNvPr>
@@ -26565,7 +26009,7 @@
           <p:cNvPr id="44" name="Text 42">
             <a:extLst xmlns:a="http://schemas.openxmlformats.org/drawingml/2006/main">
               <a:ext uri="{FF2B5EF4-FFF2-40B4-BE49-F238E27FC236}">
-                <a16:creationId xmlns:a16="http://schemas.microsoft.com/office/drawing/2014/main" id="{BA8BF225-CA12-46D6-B1B0-191C6876E650}"/>
+                <a16:creationId xmlns:a16="http://schemas.microsoft.com/office/drawing/2014/main" id="{E758293B-053F-4CEA-997D-584AFA0A03F4}"/>
               </a:ext>
             </a:extLst>
           </p:cNvPr>
@@ -26612,7 +26056,7 @@
           <p:cNvPr id="45" name="Text 43">
             <a:extLst xmlns:a="http://schemas.openxmlformats.org/drawingml/2006/main">
               <a:ext uri="{FF2B5EF4-FFF2-40B4-BE49-F238E27FC236}">
-                <a16:creationId xmlns:a16="http://schemas.microsoft.com/office/drawing/2014/main" id="{D9BC98F2-C06D-47EC-8DC7-04F93E3A62D0}"/>
+                <a16:creationId xmlns:a16="http://schemas.microsoft.com/office/drawing/2014/main" id="{F99B03B2-BC45-4D5C-A63F-AE7E2640B1BF}"/>
               </a:ext>
             </a:extLst>
           </p:cNvPr>
@@ -26659,7 +26103,7 @@
           <p:cNvPr id="46" name="Text 44">
             <a:extLst xmlns:a="http://schemas.openxmlformats.org/drawingml/2006/main">
               <a:ext uri="{FF2B5EF4-FFF2-40B4-BE49-F238E27FC236}">
-                <a16:creationId xmlns:a16="http://schemas.microsoft.com/office/drawing/2014/main" id="{FFC8C252-8C58-4BB3-B7A0-FF16724C0ABD}"/>
+                <a16:creationId xmlns:a16="http://schemas.microsoft.com/office/drawing/2014/main" id="{43C6A9CE-B7B4-4279-BBCE-4936975358E6}"/>
               </a:ext>
             </a:extLst>
           </p:cNvPr>
@@ -26706,7 +26150,7 @@
           <p:cNvPr id="47" name="Text 45">
             <a:extLst xmlns:a="http://schemas.openxmlformats.org/drawingml/2006/main">
               <a:ext uri="{FF2B5EF4-FFF2-40B4-BE49-F238E27FC236}">
-                <a16:creationId xmlns:a16="http://schemas.microsoft.com/office/drawing/2014/main" id="{2B2A5413-4759-4E02-B253-681DDC5F7159}"/>
+                <a16:creationId xmlns:a16="http://schemas.microsoft.com/office/drawing/2014/main" id="{2D002F5D-E0B4-42C5-9C30-168500BCF699}"/>
               </a:ext>
             </a:extLst>
           </p:cNvPr>
@@ -26753,7 +26197,7 @@
           <p:cNvPr id="48" name="Text 46">
             <a:extLst xmlns:a="http://schemas.openxmlformats.org/drawingml/2006/main">
               <a:ext uri="{FF2B5EF4-FFF2-40B4-BE49-F238E27FC236}">
-                <a16:creationId xmlns:a16="http://schemas.microsoft.com/office/drawing/2014/main" id="{1886946A-3097-4B57-B885-2C45AD28C4B5}"/>
+                <a16:creationId xmlns:a16="http://schemas.microsoft.com/office/drawing/2014/main" id="{B2E769D7-3715-4907-B4FD-56CF2CA7907F}"/>
               </a:ext>
             </a:extLst>
           </p:cNvPr>
@@ -26798,7 +26242,7 @@
     </p:spTree>
     <p:extLst>
       <p:ext uri="{BB962C8B-B14F-4D97-AF65-F5344CB8AC3E}">
-        <p14:creationId xmlns:p14="http://schemas.microsoft.com/office/powerpoint/2010/main" val="2052258058"/>
+        <p14:creationId xmlns:p14="http://schemas.microsoft.com/office/powerpoint/2010/main" val="1360784131"/>
       </p:ext>
     </p:extLst>
   </p:cSld>
@@ -26829,7 +26273,7 @@
           <p:cNvPr id="2" name="Text 0">
             <a:extLst xmlns:a="http://schemas.openxmlformats.org/drawingml/2006/main">
               <a:ext uri="{FF2B5EF4-FFF2-40B4-BE49-F238E27FC236}">
-                <a16:creationId xmlns:a16="http://schemas.microsoft.com/office/drawing/2014/main" id="{8D60A4EE-954F-48C3-93BC-06DAFD2A336D}"/>
+                <a16:creationId xmlns:a16="http://schemas.microsoft.com/office/drawing/2014/main" id="{242EA1A3-81FE-4DA4-8E99-A2A5645AB436}"/>
               </a:ext>
             </a:extLst>
           </p:cNvPr>
@@ -26876,7 +26320,7 @@
           <p:cNvPr id="3" name="Text 1">
             <a:extLst xmlns:a="http://schemas.openxmlformats.org/drawingml/2006/main">
               <a:ext uri="{FF2B5EF4-FFF2-40B4-BE49-F238E27FC236}">
-                <a16:creationId xmlns:a16="http://schemas.microsoft.com/office/drawing/2014/main" id="{C07C4919-511D-499C-8F00-7921C1E3E104}"/>
+                <a16:creationId xmlns:a16="http://schemas.microsoft.com/office/drawing/2014/main" id="{A1E115F4-AC57-4F4E-9F9B-EAF6E140F3F7}"/>
               </a:ext>
             </a:extLst>
           </p:cNvPr>
@@ -26923,7 +26367,7 @@
           <p:cNvPr id="4" name="Shape 2">
             <a:extLst xmlns:a="http://schemas.openxmlformats.org/drawingml/2006/main">
               <a:ext uri="{FF2B5EF4-FFF2-40B4-BE49-F238E27FC236}">
-                <a16:creationId xmlns:a16="http://schemas.microsoft.com/office/drawing/2014/main" id="{E4BD815B-80BA-43BC-BE43-BEE017C9B4DB}"/>
+                <a16:creationId xmlns:a16="http://schemas.microsoft.com/office/drawing/2014/main" id="{F28F70A0-4549-47B8-B82E-13713ED18513}"/>
               </a:ext>
             </a:extLst>
           </p:cNvPr>
@@ -26958,7 +26402,7 @@
           <p:cNvPr id="5" name="Text 3">
             <a:extLst xmlns:a="http://schemas.openxmlformats.org/drawingml/2006/main">
               <a:ext uri="{FF2B5EF4-FFF2-40B4-BE49-F238E27FC236}">
-                <a16:creationId xmlns:a16="http://schemas.microsoft.com/office/drawing/2014/main" id="{047D68EC-1441-4F7B-B021-02237B50E89D}"/>
+                <a16:creationId xmlns:a16="http://schemas.microsoft.com/office/drawing/2014/main" id="{B82AD04D-6025-42ED-B2C6-3C34029EE863}"/>
               </a:ext>
             </a:extLst>
           </p:cNvPr>
@@ -27005,7 +26449,7 @@
           <p:cNvPr id="6" name="Shape 4">
             <a:extLst xmlns:a="http://schemas.openxmlformats.org/drawingml/2006/main">
               <a:ext uri="{FF2B5EF4-FFF2-40B4-BE49-F238E27FC236}">
-                <a16:creationId xmlns:a16="http://schemas.microsoft.com/office/drawing/2014/main" id="{2F357C91-E0A2-4252-B401-24C45A0685BA}"/>
+                <a16:creationId xmlns:a16="http://schemas.microsoft.com/office/drawing/2014/main" id="{4718F41B-1204-47FB-B44E-A35B082F05D2}"/>
               </a:ext>
             </a:extLst>
           </p:cNvPr>
@@ -27036,7 +26480,7 @@
           <p:cNvPr id="7" name="Shape 5">
             <a:extLst xmlns:a="http://schemas.openxmlformats.org/drawingml/2006/main">
               <a:ext uri="{FF2B5EF4-FFF2-40B4-BE49-F238E27FC236}">
-                <a16:creationId xmlns:a16="http://schemas.microsoft.com/office/drawing/2014/main" id="{DCDFC25B-E67F-44D8-9F0C-DC2D67A24D3A}"/>
+                <a16:creationId xmlns:a16="http://schemas.microsoft.com/office/drawing/2014/main" id="{83872348-ABFC-44D7-ACDB-2E30C69E98A2}"/>
               </a:ext>
             </a:extLst>
           </p:cNvPr>
@@ -27071,7 +26515,7 @@
           <p:cNvPr id="8" name="Text 6">
             <a:extLst xmlns:a="http://schemas.openxmlformats.org/drawingml/2006/main">
               <a:ext uri="{FF2B5EF4-FFF2-40B4-BE49-F238E27FC236}">
-                <a16:creationId xmlns:a16="http://schemas.microsoft.com/office/drawing/2014/main" id="{5EAF5210-BF75-41CD-8130-C3EE0266EE4E}"/>
+                <a16:creationId xmlns:a16="http://schemas.microsoft.com/office/drawing/2014/main" id="{186F39C3-3F2A-42AF-9163-E788CA7FAA97}"/>
               </a:ext>
             </a:extLst>
           </p:cNvPr>
@@ -27118,7 +26562,7 @@
           <p:cNvPr id="9" name="Text 7">
             <a:extLst xmlns:a="http://schemas.openxmlformats.org/drawingml/2006/main">
               <a:ext uri="{FF2B5EF4-FFF2-40B4-BE49-F238E27FC236}">
-                <a16:creationId xmlns:a16="http://schemas.microsoft.com/office/drawing/2014/main" id="{FA923B69-7D2E-4CE0-B231-02A91940F436}"/>
+                <a16:creationId xmlns:a16="http://schemas.microsoft.com/office/drawing/2014/main" id="{11B0CC4D-DDCE-49F0-8260-F9DB21CE0ACD}"/>
               </a:ext>
             </a:extLst>
           </p:cNvPr>
@@ -27181,7 +26625,7 @@
           <p:cNvPr id="10" name="Shape 8">
             <a:extLst xmlns:a="http://schemas.openxmlformats.org/drawingml/2006/main">
               <a:ext uri="{FF2B5EF4-FFF2-40B4-BE49-F238E27FC236}">
-                <a16:creationId xmlns:a16="http://schemas.microsoft.com/office/drawing/2014/main" id="{ECE45EF3-3E90-4D25-A50F-53FC8E8C0D11}"/>
+                <a16:creationId xmlns:a16="http://schemas.microsoft.com/office/drawing/2014/main" id="{8C9627F7-3553-4E8B-97DA-4D7C1D4C3E04}"/>
               </a:ext>
             </a:extLst>
           </p:cNvPr>
@@ -27213,7 +26657,7 @@
           <p:cNvPr id="11" name="Shape 9">
             <a:extLst xmlns:a="http://schemas.openxmlformats.org/drawingml/2006/main">
               <a:ext uri="{FF2B5EF4-FFF2-40B4-BE49-F238E27FC236}">
-                <a16:creationId xmlns:a16="http://schemas.microsoft.com/office/drawing/2014/main" id="{656808D7-9409-44D7-A89F-AFD1AE023A99}"/>
+                <a16:creationId xmlns:a16="http://schemas.microsoft.com/office/drawing/2014/main" id="{6F541698-99FD-4D21-8623-4E713913FDE3}"/>
               </a:ext>
             </a:extLst>
           </p:cNvPr>
@@ -27248,7 +26692,7 @@
           <p:cNvPr id="12" name="Text 10">
             <a:extLst xmlns:a="http://schemas.openxmlformats.org/drawingml/2006/main">
               <a:ext uri="{FF2B5EF4-FFF2-40B4-BE49-F238E27FC236}">
-                <a16:creationId xmlns:a16="http://schemas.microsoft.com/office/drawing/2014/main" id="{E13D4B1A-3337-4D64-91B1-352D8F552505}"/>
+                <a16:creationId xmlns:a16="http://schemas.microsoft.com/office/drawing/2014/main" id="{9B7F54D5-AF66-4BF0-A60C-5E4D61DAB8CF}"/>
               </a:ext>
             </a:extLst>
           </p:cNvPr>
@@ -27295,7 +26739,7 @@
           <p:cNvPr id="13" name="Text 11">
             <a:extLst xmlns:a="http://schemas.openxmlformats.org/drawingml/2006/main">
               <a:ext uri="{FF2B5EF4-FFF2-40B4-BE49-F238E27FC236}">
-                <a16:creationId xmlns:a16="http://schemas.microsoft.com/office/drawing/2014/main" id="{158EB310-262E-48ED-AF70-09E8556A3CCF}"/>
+                <a16:creationId xmlns:a16="http://schemas.microsoft.com/office/drawing/2014/main" id="{98E094AF-C96B-4450-A219-E6791F81EB49}"/>
               </a:ext>
             </a:extLst>
           </p:cNvPr>
@@ -27358,7 +26802,7 @@
           <p:cNvPr id="14" name="Shape 12">
             <a:extLst xmlns:a="http://schemas.openxmlformats.org/drawingml/2006/main">
               <a:ext uri="{FF2B5EF4-FFF2-40B4-BE49-F238E27FC236}">
-                <a16:creationId xmlns:a16="http://schemas.microsoft.com/office/drawing/2014/main" id="{EE5D46A3-D343-4203-B4FC-EEDF38AD2AF0}"/>
+                <a16:creationId xmlns:a16="http://schemas.microsoft.com/office/drawing/2014/main" id="{3806B960-4FA0-4935-BADE-F6AE548626A6}"/>
               </a:ext>
             </a:extLst>
           </p:cNvPr>
@@ -27390,7 +26834,7 @@
           <p:cNvPr id="15" name="Shape 13">
             <a:extLst xmlns:a="http://schemas.openxmlformats.org/drawingml/2006/main">
               <a:ext uri="{FF2B5EF4-FFF2-40B4-BE49-F238E27FC236}">
-                <a16:creationId xmlns:a16="http://schemas.microsoft.com/office/drawing/2014/main" id="{8AB304F2-DB1B-40BB-AA25-D002620C5BBD}"/>
+                <a16:creationId xmlns:a16="http://schemas.microsoft.com/office/drawing/2014/main" id="{33B725C9-60BF-4928-BDA3-D5B4587D9FE0}"/>
               </a:ext>
             </a:extLst>
           </p:cNvPr>
@@ -27425,7 +26869,7 @@
           <p:cNvPr id="16" name="Text 14">
             <a:extLst xmlns:a="http://schemas.openxmlformats.org/drawingml/2006/main">
               <a:ext uri="{FF2B5EF4-FFF2-40B4-BE49-F238E27FC236}">
-                <a16:creationId xmlns:a16="http://schemas.microsoft.com/office/drawing/2014/main" id="{D1A610FF-7C1F-4D73-BF0C-BB3452EEEF0B}"/>
+                <a16:creationId xmlns:a16="http://schemas.microsoft.com/office/drawing/2014/main" id="{EFEE2A05-213D-464C-B128-220F751361FE}"/>
               </a:ext>
             </a:extLst>
           </p:cNvPr>
@@ -27472,7 +26916,7 @@
           <p:cNvPr id="17" name="Text 15">
             <a:extLst xmlns:a="http://schemas.openxmlformats.org/drawingml/2006/main">
               <a:ext uri="{FF2B5EF4-FFF2-40B4-BE49-F238E27FC236}">
-                <a16:creationId xmlns:a16="http://schemas.microsoft.com/office/drawing/2014/main" id="{246E92DF-A5A8-4C3A-9563-5470D04C6732}"/>
+                <a16:creationId xmlns:a16="http://schemas.microsoft.com/office/drawing/2014/main" id="{A19649A2-590C-49CC-8807-1BFE1C5E8A4E}"/>
               </a:ext>
             </a:extLst>
           </p:cNvPr>
@@ -27535,7 +26979,7 @@
           <p:cNvPr id="18" name="Shape 16">
             <a:extLst xmlns:a="http://schemas.openxmlformats.org/drawingml/2006/main">
               <a:ext uri="{FF2B5EF4-FFF2-40B4-BE49-F238E27FC236}">
-                <a16:creationId xmlns:a16="http://schemas.microsoft.com/office/drawing/2014/main" id="{9481D604-5380-4661-8BAD-25871EB2D65B}"/>
+                <a16:creationId xmlns:a16="http://schemas.microsoft.com/office/drawing/2014/main" id="{155F86C5-B920-4F84-A5A2-1D551562F729}"/>
               </a:ext>
             </a:extLst>
           </p:cNvPr>
@@ -27567,7 +27011,7 @@
           <p:cNvPr id="19" name="Shape 17">
             <a:extLst xmlns:a="http://schemas.openxmlformats.org/drawingml/2006/main">
               <a:ext uri="{FF2B5EF4-FFF2-40B4-BE49-F238E27FC236}">
-                <a16:creationId xmlns:a16="http://schemas.microsoft.com/office/drawing/2014/main" id="{769D1D4A-40B7-419F-9DE3-F943F775AD8D}"/>
+                <a16:creationId xmlns:a16="http://schemas.microsoft.com/office/drawing/2014/main" id="{FEF2CDD8-8112-499B-81A1-134AE1E89F8E}"/>
               </a:ext>
             </a:extLst>
           </p:cNvPr>
@@ -27602,7 +27046,7 @@
           <p:cNvPr id="20" name="Text 18">
             <a:extLst xmlns:a="http://schemas.openxmlformats.org/drawingml/2006/main">
               <a:ext uri="{FF2B5EF4-FFF2-40B4-BE49-F238E27FC236}">
-                <a16:creationId xmlns:a16="http://schemas.microsoft.com/office/drawing/2014/main" id="{58C5F49E-AE87-45BD-AF7B-398FF1025BCB}"/>
+                <a16:creationId xmlns:a16="http://schemas.microsoft.com/office/drawing/2014/main" id="{D67D7865-7656-4D09-96D8-695B2D475652}"/>
               </a:ext>
             </a:extLst>
           </p:cNvPr>
@@ -27649,7 +27093,7 @@
           <p:cNvPr id="21" name="Text 19">
             <a:extLst xmlns:a="http://schemas.openxmlformats.org/drawingml/2006/main">
               <a:ext uri="{FF2B5EF4-FFF2-40B4-BE49-F238E27FC236}">
-                <a16:creationId xmlns:a16="http://schemas.microsoft.com/office/drawing/2014/main" id="{7A4C9769-FA97-4C5F-8A88-B30185EC1CA3}"/>
+                <a16:creationId xmlns:a16="http://schemas.microsoft.com/office/drawing/2014/main" id="{9341F39C-2874-40DA-AA64-F1705D0525D3}"/>
               </a:ext>
             </a:extLst>
           </p:cNvPr>
@@ -27712,7 +27156,7 @@
           <p:cNvPr id="22" name="Shape 20">
             <a:extLst xmlns:a="http://schemas.openxmlformats.org/drawingml/2006/main">
               <a:ext uri="{FF2B5EF4-FFF2-40B4-BE49-F238E27FC236}">
-                <a16:creationId xmlns:a16="http://schemas.microsoft.com/office/drawing/2014/main" id="{8E304559-8646-411A-A742-5FC3EDE38DAF}"/>
+                <a16:creationId xmlns:a16="http://schemas.microsoft.com/office/drawing/2014/main" id="{A1F9157F-1721-4856-A64B-72F2C2875E9F}"/>
               </a:ext>
             </a:extLst>
           </p:cNvPr>
@@ -27744,7 +27188,7 @@
           <p:cNvPr id="23" name="Shape 21">
             <a:extLst xmlns:a="http://schemas.openxmlformats.org/drawingml/2006/main">
               <a:ext uri="{FF2B5EF4-FFF2-40B4-BE49-F238E27FC236}">
-                <a16:creationId xmlns:a16="http://schemas.microsoft.com/office/drawing/2014/main" id="{8A79B2A6-0147-46CD-A829-B77E05DFF309}"/>
+                <a16:creationId xmlns:a16="http://schemas.microsoft.com/office/drawing/2014/main" id="{52434F65-98BD-4E20-8485-8FE3AE102FD2}"/>
               </a:ext>
             </a:extLst>
           </p:cNvPr>
@@ -27779,7 +27223,7 @@
           <p:cNvPr id="24" name="Text 22">
             <a:extLst xmlns:a="http://schemas.openxmlformats.org/drawingml/2006/main">
               <a:ext uri="{FF2B5EF4-FFF2-40B4-BE49-F238E27FC236}">
-                <a16:creationId xmlns:a16="http://schemas.microsoft.com/office/drawing/2014/main" id="{070EE488-90FC-4647-B38D-1A526AECD595}"/>
+                <a16:creationId xmlns:a16="http://schemas.microsoft.com/office/drawing/2014/main" id="{82FFA292-F3ED-447B-B107-F0C4D32FEE63}"/>
               </a:ext>
             </a:extLst>
           </p:cNvPr>
@@ -27826,7 +27270,7 @@
           <p:cNvPr id="25" name="Text 23">
             <a:extLst xmlns:a="http://schemas.openxmlformats.org/drawingml/2006/main">
               <a:ext uri="{FF2B5EF4-FFF2-40B4-BE49-F238E27FC236}">
-                <a16:creationId xmlns:a16="http://schemas.microsoft.com/office/drawing/2014/main" id="{E12E245A-D5C9-419D-B149-C778050CD38A}"/>
+                <a16:creationId xmlns:a16="http://schemas.microsoft.com/office/drawing/2014/main" id="{C5350F36-6C89-42CE-8DA9-B4FCA4BB02D8}"/>
               </a:ext>
             </a:extLst>
           </p:cNvPr>
@@ -27889,7 +27333,7 @@
           <p:cNvPr id="26" name="Shape 24">
             <a:extLst xmlns:a="http://schemas.openxmlformats.org/drawingml/2006/main">
               <a:ext uri="{FF2B5EF4-FFF2-40B4-BE49-F238E27FC236}">
-                <a16:creationId xmlns:a16="http://schemas.microsoft.com/office/drawing/2014/main" id="{9FE33337-F098-4268-8DB2-EF96AC7D496F}"/>
+                <a16:creationId xmlns:a16="http://schemas.microsoft.com/office/drawing/2014/main" id="{D6249303-7616-43E0-AE68-F1D531E2F853}"/>
               </a:ext>
             </a:extLst>
           </p:cNvPr>
@@ -27924,7 +27368,7 @@
           <p:cNvPr id="27" name="Text 25">
             <a:extLst xmlns:a="http://schemas.openxmlformats.org/drawingml/2006/main">
               <a:ext uri="{FF2B5EF4-FFF2-40B4-BE49-F238E27FC236}">
-                <a16:creationId xmlns:a16="http://schemas.microsoft.com/office/drawing/2014/main" id="{74A10744-D84A-40F9-BEA4-37688B5E29F7}"/>
+                <a16:creationId xmlns:a16="http://schemas.microsoft.com/office/drawing/2014/main" id="{D8E5E23E-1448-47A0-8798-FFA8FFD4BAA7}"/>
               </a:ext>
             </a:extLst>
           </p:cNvPr>
@@ -27971,7 +27415,7 @@
           <p:cNvPr id="28" name="Text 26">
             <a:extLst xmlns:a="http://schemas.openxmlformats.org/drawingml/2006/main">
               <a:ext uri="{FF2B5EF4-FFF2-40B4-BE49-F238E27FC236}">
-                <a16:creationId xmlns:a16="http://schemas.microsoft.com/office/drawing/2014/main" id="{3662ECC5-1F8C-44B3-8274-CB92A56A65CA}"/>
+                <a16:creationId xmlns:a16="http://schemas.microsoft.com/office/drawing/2014/main" id="{BE67AC36-06CB-4394-8C4F-3E5E27143558}"/>
               </a:ext>
             </a:extLst>
           </p:cNvPr>
@@ -28018,7 +27462,7 @@
           <p:cNvPr id="29" name="Text 27">
             <a:extLst xmlns:a="http://schemas.openxmlformats.org/drawingml/2006/main">
               <a:ext uri="{FF2B5EF4-FFF2-40B4-BE49-F238E27FC236}">
-                <a16:creationId xmlns:a16="http://schemas.microsoft.com/office/drawing/2014/main" id="{6DB031A2-0274-44F2-8B70-C622091D9C2C}"/>
+                <a16:creationId xmlns:a16="http://schemas.microsoft.com/office/drawing/2014/main" id="{FFAF4D82-A313-49F2-ACCE-0920E71A16E5}"/>
               </a:ext>
             </a:extLst>
           </p:cNvPr>
@@ -28065,7 +27509,7 @@
           <p:cNvPr id="30" name="Shape 28">
             <a:extLst xmlns:a="http://schemas.openxmlformats.org/drawingml/2006/main">
               <a:ext uri="{FF2B5EF4-FFF2-40B4-BE49-F238E27FC236}">
-                <a16:creationId xmlns:a16="http://schemas.microsoft.com/office/drawing/2014/main" id="{7B073063-DF9C-4419-99B3-827C8D934545}"/>
+                <a16:creationId xmlns:a16="http://schemas.microsoft.com/office/drawing/2014/main" id="{ED3FFD65-2BDC-4C0F-BEBD-32BF67A99F47}"/>
               </a:ext>
             </a:extLst>
           </p:cNvPr>
@@ -28100,7 +27544,7 @@
           <p:cNvPr id="31" name="Text 29">
             <a:extLst xmlns:a="http://schemas.openxmlformats.org/drawingml/2006/main">
               <a:ext uri="{FF2B5EF4-FFF2-40B4-BE49-F238E27FC236}">
-                <a16:creationId xmlns:a16="http://schemas.microsoft.com/office/drawing/2014/main" id="{7D8F1B6A-5E6A-41C6-BD8D-D7C5F92A389C}"/>
+                <a16:creationId xmlns:a16="http://schemas.microsoft.com/office/drawing/2014/main" id="{9883F265-7EB6-45D9-9CDB-191D0C5ED205}"/>
               </a:ext>
             </a:extLst>
           </p:cNvPr>
@@ -28147,7 +27591,7 @@
           <p:cNvPr id="32" name="Text 30">
             <a:extLst xmlns:a="http://schemas.openxmlformats.org/drawingml/2006/main">
               <a:ext uri="{FF2B5EF4-FFF2-40B4-BE49-F238E27FC236}">
-                <a16:creationId xmlns:a16="http://schemas.microsoft.com/office/drawing/2014/main" id="{8A304B49-5939-4E2C-B07F-6AB5A1023ECA}"/>
+                <a16:creationId xmlns:a16="http://schemas.microsoft.com/office/drawing/2014/main" id="{351C12BF-1071-4723-94D5-C409B08B474F}"/>
               </a:ext>
             </a:extLst>
           </p:cNvPr>
@@ -28210,7 +27654,7 @@
           <p:cNvPr id="33" name="Text 31">
             <a:extLst xmlns:a="http://schemas.openxmlformats.org/drawingml/2006/main">
               <a:ext uri="{FF2B5EF4-FFF2-40B4-BE49-F238E27FC236}">
-                <a16:creationId xmlns:a16="http://schemas.microsoft.com/office/drawing/2014/main" id="{4EE52739-F517-43D4-964B-008667EF9E5C}"/>
+                <a16:creationId xmlns:a16="http://schemas.microsoft.com/office/drawing/2014/main" id="{64A02ECF-8A68-4741-AA2D-831691FA2F12}"/>
               </a:ext>
             </a:extLst>
           </p:cNvPr>
@@ -28257,7 +27701,7 @@
           <p:cNvPr id="34" name="Text 32">
             <a:extLst xmlns:a="http://schemas.openxmlformats.org/drawingml/2006/main">
               <a:ext uri="{FF2B5EF4-FFF2-40B4-BE49-F238E27FC236}">
-                <a16:creationId xmlns:a16="http://schemas.microsoft.com/office/drawing/2014/main" id="{81CAE5C2-E2E5-4F29-9897-90BC629C478F}"/>
+                <a16:creationId xmlns:a16="http://schemas.microsoft.com/office/drawing/2014/main" id="{E10B8644-9AB1-4716-AF6D-6112418AC53E}"/>
               </a:ext>
             </a:extLst>
           </p:cNvPr>
@@ -28302,7 +27746,7 @@
     </p:spTree>
     <p:extLst>
       <p:ext uri="{BB962C8B-B14F-4D97-AF65-F5344CB8AC3E}">
-        <p14:creationId xmlns:p14="http://schemas.microsoft.com/office/powerpoint/2010/main" val="1848882872"/>
+        <p14:creationId xmlns:p14="http://schemas.microsoft.com/office/powerpoint/2010/main" val="1786409210"/>
       </p:ext>
     </p:extLst>
   </p:cSld>
@@ -28333,7 +27777,7 @@
           <p:cNvPr id="2" name="Text 0">
             <a:extLst xmlns:a="http://schemas.openxmlformats.org/drawingml/2006/main">
               <a:ext uri="{FF2B5EF4-FFF2-40B4-BE49-F238E27FC236}">
-                <a16:creationId xmlns:a16="http://schemas.microsoft.com/office/drawing/2014/main" id="{A3DB24B6-DBB4-4498-921D-1465371A9A5C}"/>
+                <a16:creationId xmlns:a16="http://schemas.microsoft.com/office/drawing/2014/main" id="{2088BB25-0D71-4457-896D-E2E8F92398CA}"/>
               </a:ext>
             </a:extLst>
           </p:cNvPr>
@@ -28380,7 +27824,7 @@
           <p:cNvPr id="3" name="Text 1">
             <a:extLst xmlns:a="http://schemas.openxmlformats.org/drawingml/2006/main">
               <a:ext uri="{FF2B5EF4-FFF2-40B4-BE49-F238E27FC236}">
-                <a16:creationId xmlns:a16="http://schemas.microsoft.com/office/drawing/2014/main" id="{C54CAABC-CB3A-48D7-B810-C2AB3073F29A}"/>
+                <a16:creationId xmlns:a16="http://schemas.microsoft.com/office/drawing/2014/main" id="{DC7C9AEB-817A-478D-BF13-460176C2CD58}"/>
               </a:ext>
             </a:extLst>
           </p:cNvPr>
@@ -28427,7 +27871,7 @@
           <p:cNvPr id="4" name="Shape 2">
             <a:extLst xmlns:a="http://schemas.openxmlformats.org/drawingml/2006/main">
               <a:ext uri="{FF2B5EF4-FFF2-40B4-BE49-F238E27FC236}">
-                <a16:creationId xmlns:a16="http://schemas.microsoft.com/office/drawing/2014/main" id="{1ABA7FDD-C45E-4D16-AE27-B9388A9FE108}"/>
+                <a16:creationId xmlns:a16="http://schemas.microsoft.com/office/drawing/2014/main" id="{1FAD4F85-F65F-44FD-B224-D78093680E19}"/>
               </a:ext>
             </a:extLst>
           </p:cNvPr>
@@ -28462,7 +27906,7 @@
           <p:cNvPr id="5" name="Text 3">
             <a:extLst xmlns:a="http://schemas.openxmlformats.org/drawingml/2006/main">
               <a:ext uri="{FF2B5EF4-FFF2-40B4-BE49-F238E27FC236}">
-                <a16:creationId xmlns:a16="http://schemas.microsoft.com/office/drawing/2014/main" id="{D00E0BCB-B537-4FE4-9FA6-7B057D609128}"/>
+                <a16:creationId xmlns:a16="http://schemas.microsoft.com/office/drawing/2014/main" id="{E4CF1232-7900-452D-B472-EA0312824E21}"/>
               </a:ext>
             </a:extLst>
           </p:cNvPr>
@@ -28509,7 +27953,7 @@
           <p:cNvPr id="6" name="Shape 4">
             <a:extLst xmlns:a="http://schemas.openxmlformats.org/drawingml/2006/main">
               <a:ext uri="{FF2B5EF4-FFF2-40B4-BE49-F238E27FC236}">
-                <a16:creationId xmlns:a16="http://schemas.microsoft.com/office/drawing/2014/main" id="{94DC5FA4-77C5-4071-A134-CD6D95DF3D53}"/>
+                <a16:creationId xmlns:a16="http://schemas.microsoft.com/office/drawing/2014/main" id="{A35212E7-BC3D-4964-881F-373A4278FC49}"/>
               </a:ext>
             </a:extLst>
           </p:cNvPr>
@@ -28540,7 +27984,7 @@
           <p:cNvPr id="7" name="Text 5">
             <a:extLst xmlns:a="http://schemas.openxmlformats.org/drawingml/2006/main">
               <a:ext uri="{FF2B5EF4-FFF2-40B4-BE49-F238E27FC236}">
-                <a16:creationId xmlns:a16="http://schemas.microsoft.com/office/drawing/2014/main" id="{B5A8722B-41CE-487C-9B0D-45F1BECD1AE2}"/>
+                <a16:creationId xmlns:a16="http://schemas.microsoft.com/office/drawing/2014/main" id="{B6F65D79-2650-4753-8319-0AB169D4944A}"/>
               </a:ext>
             </a:extLst>
           </p:cNvPr>
@@ -28587,7 +28031,7 @@
           <p:cNvPr id="8" name="Shape 6">
             <a:extLst xmlns:a="http://schemas.openxmlformats.org/drawingml/2006/main">
               <a:ext uri="{FF2B5EF4-FFF2-40B4-BE49-F238E27FC236}">
-                <a16:creationId xmlns:a16="http://schemas.microsoft.com/office/drawing/2014/main" id="{7C395831-0CC4-4E88-BD59-E1C899238618}"/>
+                <a16:creationId xmlns:a16="http://schemas.microsoft.com/office/drawing/2014/main" id="{962A0703-231E-43D9-B71C-9D0ECA9657A5}"/>
               </a:ext>
             </a:extLst>
           </p:cNvPr>
@@ -28622,7 +28066,7 @@
           <p:cNvPr id="9" name="Text 7">
             <a:extLst xmlns:a="http://schemas.openxmlformats.org/drawingml/2006/main">
               <a:ext uri="{FF2B5EF4-FFF2-40B4-BE49-F238E27FC236}">
-                <a16:creationId xmlns:a16="http://schemas.microsoft.com/office/drawing/2014/main" id="{731D6485-D452-4681-9BB2-ADF8598DF030}"/>
+                <a16:creationId xmlns:a16="http://schemas.microsoft.com/office/drawing/2014/main" id="{E960D665-9080-4940-B654-93584E118610}"/>
               </a:ext>
             </a:extLst>
           </p:cNvPr>
@@ -28669,7 +28113,7 @@
           <p:cNvPr id="10" name="Shape 8">
             <a:extLst xmlns:a="http://schemas.openxmlformats.org/drawingml/2006/main">
               <a:ext uri="{FF2B5EF4-FFF2-40B4-BE49-F238E27FC236}">
-                <a16:creationId xmlns:a16="http://schemas.microsoft.com/office/drawing/2014/main" id="{786CC5B4-0959-4454-BEE2-2D369FC7145F}"/>
+                <a16:creationId xmlns:a16="http://schemas.microsoft.com/office/drawing/2014/main" id="{E2CD4915-4E40-4DF5-AE86-EEDB60B1789C}"/>
               </a:ext>
             </a:extLst>
           </p:cNvPr>
@@ -28704,7 +28148,7 @@
           <p:cNvPr id="11" name="Text 9">
             <a:extLst xmlns:a="http://schemas.openxmlformats.org/drawingml/2006/main">
               <a:ext uri="{FF2B5EF4-FFF2-40B4-BE49-F238E27FC236}">
-                <a16:creationId xmlns:a16="http://schemas.microsoft.com/office/drawing/2014/main" id="{2267D09D-A129-4D72-A6FF-B35F9C2ED758}"/>
+                <a16:creationId xmlns:a16="http://schemas.microsoft.com/office/drawing/2014/main" id="{E7AE2753-7D3E-4107-A368-56DFA72DA502}"/>
               </a:ext>
             </a:extLst>
           </p:cNvPr>
@@ -28751,7 +28195,7 @@
           <p:cNvPr id="12" name="Shape 10">
             <a:extLst xmlns:a="http://schemas.openxmlformats.org/drawingml/2006/main">
               <a:ext uri="{FF2B5EF4-FFF2-40B4-BE49-F238E27FC236}">
-                <a16:creationId xmlns:a16="http://schemas.microsoft.com/office/drawing/2014/main" id="{63168497-E0ED-44BB-9279-9CE5DFB46D67}"/>
+                <a16:creationId xmlns:a16="http://schemas.microsoft.com/office/drawing/2014/main" id="{1CF5DE4A-2FAE-402C-93FA-1E002830ABE3}"/>
               </a:ext>
             </a:extLst>
           </p:cNvPr>
@@ -28784,7 +28228,7 @@
           <p:cNvPr id="13" name="Text 11">
             <a:extLst xmlns:a="http://schemas.openxmlformats.org/drawingml/2006/main">
               <a:ext uri="{FF2B5EF4-FFF2-40B4-BE49-F238E27FC236}">
-                <a16:creationId xmlns:a16="http://schemas.microsoft.com/office/drawing/2014/main" id="{DCFA64AB-FE7A-4137-A101-961907978788}"/>
+                <a16:creationId xmlns:a16="http://schemas.microsoft.com/office/drawing/2014/main" id="{3584F1E0-A86F-4AC3-9EDB-8016ABD8FB17}"/>
               </a:ext>
             </a:extLst>
           </p:cNvPr>
@@ -28831,7 +28275,7 @@
           <p:cNvPr id="14" name="Shape 12">
             <a:extLst xmlns:a="http://schemas.openxmlformats.org/drawingml/2006/main">
               <a:ext uri="{FF2B5EF4-FFF2-40B4-BE49-F238E27FC236}">
-                <a16:creationId xmlns:a16="http://schemas.microsoft.com/office/drawing/2014/main" id="{8C6AABB5-6B2B-4383-898C-D31C0F2801D9}"/>
+                <a16:creationId xmlns:a16="http://schemas.microsoft.com/office/drawing/2014/main" id="{780A03AC-D49D-439E-B78B-D0C1F2F0F254}"/>
               </a:ext>
             </a:extLst>
           </p:cNvPr>
@@ -28864,7 +28308,7 @@
           <p:cNvPr id="15" name="Text 13">
             <a:extLst xmlns:a="http://schemas.openxmlformats.org/drawingml/2006/main">
               <a:ext uri="{FF2B5EF4-FFF2-40B4-BE49-F238E27FC236}">
-                <a16:creationId xmlns:a16="http://schemas.microsoft.com/office/drawing/2014/main" id="{D2C2FFBA-7E08-4C62-BA61-E4521B280338}"/>
+                <a16:creationId xmlns:a16="http://schemas.microsoft.com/office/drawing/2014/main" id="{3AEA1E2A-F2E8-4C1C-870E-AFD9C3ADF260}"/>
               </a:ext>
             </a:extLst>
           </p:cNvPr>
@@ -28911,7 +28355,7 @@
           <p:cNvPr id="16" name="Shape 14">
             <a:extLst xmlns:a="http://schemas.openxmlformats.org/drawingml/2006/main">
               <a:ext uri="{FF2B5EF4-FFF2-40B4-BE49-F238E27FC236}">
-                <a16:creationId xmlns:a16="http://schemas.microsoft.com/office/drawing/2014/main" id="{E5C9713A-6E63-4C16-A5AF-CA594C686A43}"/>
+                <a16:creationId xmlns:a16="http://schemas.microsoft.com/office/drawing/2014/main" id="{4269C6BF-333D-4D20-A4BB-B2EA2EC2C3EB}"/>
               </a:ext>
             </a:extLst>
           </p:cNvPr>
@@ -28944,7 +28388,7 @@
           <p:cNvPr id="17" name="Text 15">
             <a:extLst xmlns:a="http://schemas.openxmlformats.org/drawingml/2006/main">
               <a:ext uri="{FF2B5EF4-FFF2-40B4-BE49-F238E27FC236}">
-                <a16:creationId xmlns:a16="http://schemas.microsoft.com/office/drawing/2014/main" id="{86CAE598-F4E7-414E-95FB-F561DE49739C}"/>
+                <a16:creationId xmlns:a16="http://schemas.microsoft.com/office/drawing/2014/main" id="{D5C8F411-06A9-4671-B5AB-0F416B7BC69E}"/>
               </a:ext>
             </a:extLst>
           </p:cNvPr>
@@ -28991,7 +28435,7 @@
           <p:cNvPr id="18" name="Shape 16">
             <a:extLst xmlns:a="http://schemas.openxmlformats.org/drawingml/2006/main">
               <a:ext uri="{FF2B5EF4-FFF2-40B4-BE49-F238E27FC236}">
-                <a16:creationId xmlns:a16="http://schemas.microsoft.com/office/drawing/2014/main" id="{F503D140-FFAB-4382-9847-BDC2A5D68798}"/>
+                <a16:creationId xmlns:a16="http://schemas.microsoft.com/office/drawing/2014/main" id="{978FA8C6-C7CA-42EF-BF6B-9B9CEBA4A867}"/>
               </a:ext>
             </a:extLst>
           </p:cNvPr>
@@ -29024,7 +28468,7 @@
           <p:cNvPr id="19" name="Text 17">
             <a:extLst xmlns:a="http://schemas.openxmlformats.org/drawingml/2006/main">
               <a:ext uri="{FF2B5EF4-FFF2-40B4-BE49-F238E27FC236}">
-                <a16:creationId xmlns:a16="http://schemas.microsoft.com/office/drawing/2014/main" id="{501F010C-0CD5-49D9-9400-006D3D7B4BE2}"/>
+                <a16:creationId xmlns:a16="http://schemas.microsoft.com/office/drawing/2014/main" id="{8BE1AB7C-E1E1-4F68-9F43-93EA346EE856}"/>
               </a:ext>
             </a:extLst>
           </p:cNvPr>
@@ -29071,7 +28515,7 @@
           <p:cNvPr id="20" name="Shape 18">
             <a:extLst xmlns:a="http://schemas.openxmlformats.org/drawingml/2006/main">
               <a:ext uri="{FF2B5EF4-FFF2-40B4-BE49-F238E27FC236}">
-                <a16:creationId xmlns:a16="http://schemas.microsoft.com/office/drawing/2014/main" id="{6F733699-F35B-495A-9607-2AE1BB6E989F}"/>
+                <a16:creationId xmlns:a16="http://schemas.microsoft.com/office/drawing/2014/main" id="{45E403B5-EBBA-4FF7-A2AB-588935AB5B5D}"/>
               </a:ext>
             </a:extLst>
           </p:cNvPr>
@@ -29106,7 +28550,7 @@
           <p:cNvPr id="21" name="Text 19">
             <a:extLst xmlns:a="http://schemas.openxmlformats.org/drawingml/2006/main">
               <a:ext uri="{FF2B5EF4-FFF2-40B4-BE49-F238E27FC236}">
-                <a16:creationId xmlns:a16="http://schemas.microsoft.com/office/drawing/2014/main" id="{94B1DC5D-9130-4D75-8A19-9A13572AFD9C}"/>
+                <a16:creationId xmlns:a16="http://schemas.microsoft.com/office/drawing/2014/main" id="{0A9FEC88-75A8-4821-9E4A-8E69C658D731}"/>
               </a:ext>
             </a:extLst>
           </p:cNvPr>
@@ -29153,7 +28597,7 @@
           <p:cNvPr id="22" name="Shape 20">
             <a:extLst xmlns:a="http://schemas.openxmlformats.org/drawingml/2006/main">
               <a:ext uri="{FF2B5EF4-FFF2-40B4-BE49-F238E27FC236}">
-                <a16:creationId xmlns:a16="http://schemas.microsoft.com/office/drawing/2014/main" id="{3F656982-DAAE-4A3C-AF35-8F6AEAF9AB48}"/>
+                <a16:creationId xmlns:a16="http://schemas.microsoft.com/office/drawing/2014/main" id="{F5E5BDF4-B742-4D64-B6DB-1A0453A752A2}"/>
               </a:ext>
             </a:extLst>
           </p:cNvPr>
@@ -29188,7 +28632,7 @@
           <p:cNvPr id="23" name="Text 21">
             <a:extLst xmlns:a="http://schemas.openxmlformats.org/drawingml/2006/main">
               <a:ext uri="{FF2B5EF4-FFF2-40B4-BE49-F238E27FC236}">
-                <a16:creationId xmlns:a16="http://schemas.microsoft.com/office/drawing/2014/main" id="{438FA255-2261-4C67-A109-DC7DC33CEC8F}"/>
+                <a16:creationId xmlns:a16="http://schemas.microsoft.com/office/drawing/2014/main" id="{5DDF2DAD-FAA7-41D0-BEAF-0FD36E401A63}"/>
               </a:ext>
             </a:extLst>
           </p:cNvPr>
@@ -29235,7 +28679,7 @@
           <p:cNvPr id="24" name="Shape 22">
             <a:extLst xmlns:a="http://schemas.openxmlformats.org/drawingml/2006/main">
               <a:ext uri="{FF2B5EF4-FFF2-40B4-BE49-F238E27FC236}">
-                <a16:creationId xmlns:a16="http://schemas.microsoft.com/office/drawing/2014/main" id="{AA7B1A58-4289-4236-94CF-AB1453D039D6}"/>
+                <a16:creationId xmlns:a16="http://schemas.microsoft.com/office/drawing/2014/main" id="{3B74C874-B47B-4A64-9D16-E1CB9EF45603}"/>
               </a:ext>
             </a:extLst>
           </p:cNvPr>
@@ -29268,7 +28712,7 @@
           <p:cNvPr id="25" name="Text 23">
             <a:extLst xmlns:a="http://schemas.openxmlformats.org/drawingml/2006/main">
               <a:ext uri="{FF2B5EF4-FFF2-40B4-BE49-F238E27FC236}">
-                <a16:creationId xmlns:a16="http://schemas.microsoft.com/office/drawing/2014/main" id="{9DAF78DC-91A0-4865-94A6-45D7A1852A8A}"/>
+                <a16:creationId xmlns:a16="http://schemas.microsoft.com/office/drawing/2014/main" id="{A51D79F1-0370-43C1-B0E1-81CF69BA2A34}"/>
               </a:ext>
             </a:extLst>
           </p:cNvPr>
@@ -29315,7 +28759,7 @@
           <p:cNvPr id="26" name="Shape 24">
             <a:extLst xmlns:a="http://schemas.openxmlformats.org/drawingml/2006/main">
               <a:ext uri="{FF2B5EF4-FFF2-40B4-BE49-F238E27FC236}">
-                <a16:creationId xmlns:a16="http://schemas.microsoft.com/office/drawing/2014/main" id="{7854A7E3-1998-4674-9622-EB49597F1069}"/>
+                <a16:creationId xmlns:a16="http://schemas.microsoft.com/office/drawing/2014/main" id="{1F6C7F7A-220E-425D-9A9A-5EBDB017834A}"/>
               </a:ext>
             </a:extLst>
           </p:cNvPr>
@@ -29348,7 +28792,7 @@
           <p:cNvPr id="27" name="Text 25">
             <a:extLst xmlns:a="http://schemas.openxmlformats.org/drawingml/2006/main">
               <a:ext uri="{FF2B5EF4-FFF2-40B4-BE49-F238E27FC236}">
-                <a16:creationId xmlns:a16="http://schemas.microsoft.com/office/drawing/2014/main" id="{670A0EBC-B9C5-4746-9D97-D90253B499F4}"/>
+                <a16:creationId xmlns:a16="http://schemas.microsoft.com/office/drawing/2014/main" id="{8491932E-9A64-4E29-B66B-091047DEEF67}"/>
               </a:ext>
             </a:extLst>
           </p:cNvPr>
@@ -29395,7 +28839,7 @@
           <p:cNvPr id="28" name="Shape 26">
             <a:extLst xmlns:a="http://schemas.openxmlformats.org/drawingml/2006/main">
               <a:ext uri="{FF2B5EF4-FFF2-40B4-BE49-F238E27FC236}">
-                <a16:creationId xmlns:a16="http://schemas.microsoft.com/office/drawing/2014/main" id="{1DD06951-5F01-4287-818D-3743A7619887}"/>
+                <a16:creationId xmlns:a16="http://schemas.microsoft.com/office/drawing/2014/main" id="{B207D12E-A951-47D8-8969-DAB1E538B1E3}"/>
               </a:ext>
             </a:extLst>
           </p:cNvPr>
@@ -29428,7 +28872,7 @@
           <p:cNvPr id="29" name="Text 27">
             <a:extLst xmlns:a="http://schemas.openxmlformats.org/drawingml/2006/main">
               <a:ext uri="{FF2B5EF4-FFF2-40B4-BE49-F238E27FC236}">
-                <a16:creationId xmlns:a16="http://schemas.microsoft.com/office/drawing/2014/main" id="{928E06F0-590B-4BC7-8A08-66636E995988}"/>
+                <a16:creationId xmlns:a16="http://schemas.microsoft.com/office/drawing/2014/main" id="{33F037F3-DA59-433C-8B63-8FE4EAC67BDB}"/>
               </a:ext>
             </a:extLst>
           </p:cNvPr>
@@ -29475,7 +28919,7 @@
           <p:cNvPr id="30" name="Shape 28">
             <a:extLst xmlns:a="http://schemas.openxmlformats.org/drawingml/2006/main">
               <a:ext uri="{FF2B5EF4-FFF2-40B4-BE49-F238E27FC236}">
-                <a16:creationId xmlns:a16="http://schemas.microsoft.com/office/drawing/2014/main" id="{CFE01C4E-1733-49CA-BCCC-8A2126D237BB}"/>
+                <a16:creationId xmlns:a16="http://schemas.microsoft.com/office/drawing/2014/main" id="{7C0A4CCC-AEB8-4310-B6D0-73FAA0479514}"/>
               </a:ext>
             </a:extLst>
           </p:cNvPr>
@@ -29508,7 +28952,7 @@
           <p:cNvPr id="31" name="Text 29">
             <a:extLst xmlns:a="http://schemas.openxmlformats.org/drawingml/2006/main">
               <a:ext uri="{FF2B5EF4-FFF2-40B4-BE49-F238E27FC236}">
-                <a16:creationId xmlns:a16="http://schemas.microsoft.com/office/drawing/2014/main" id="{015AE297-5670-4A28-831C-71C8B69E24F4}"/>
+                <a16:creationId xmlns:a16="http://schemas.microsoft.com/office/drawing/2014/main" id="{E84174FD-5DDD-48E9-81F1-FF441D6DDA52}"/>
               </a:ext>
             </a:extLst>
           </p:cNvPr>
@@ -29555,7 +28999,7 @@
           <p:cNvPr id="32" name="Shape 30">
             <a:extLst xmlns:a="http://schemas.openxmlformats.org/drawingml/2006/main">
               <a:ext uri="{FF2B5EF4-FFF2-40B4-BE49-F238E27FC236}">
-                <a16:creationId xmlns:a16="http://schemas.microsoft.com/office/drawing/2014/main" id="{2357B33B-8AD0-4541-B023-44AE65CA8FAB}"/>
+                <a16:creationId xmlns:a16="http://schemas.microsoft.com/office/drawing/2014/main" id="{7A02FA8F-F30C-4496-B803-B5A767903DFE}"/>
               </a:ext>
             </a:extLst>
           </p:cNvPr>
@@ -29590,7 +29034,7 @@
           <p:cNvPr id="33" name="Text 31">
             <a:extLst xmlns:a="http://schemas.openxmlformats.org/drawingml/2006/main">
               <a:ext uri="{FF2B5EF4-FFF2-40B4-BE49-F238E27FC236}">
-                <a16:creationId xmlns:a16="http://schemas.microsoft.com/office/drawing/2014/main" id="{26B5A987-4E85-4A49-BE7A-8A13DC760748}"/>
+                <a16:creationId xmlns:a16="http://schemas.microsoft.com/office/drawing/2014/main" id="{91709F62-9776-447F-8BAF-348230C04FAF}"/>
               </a:ext>
             </a:extLst>
           </p:cNvPr>
@@ -29637,7 +29081,7 @@
           <p:cNvPr id="34" name="Text 32">
             <a:extLst xmlns:a="http://schemas.openxmlformats.org/drawingml/2006/main">
               <a:ext uri="{FF2B5EF4-FFF2-40B4-BE49-F238E27FC236}">
-                <a16:creationId xmlns:a16="http://schemas.microsoft.com/office/drawing/2014/main" id="{EC879536-C659-4DFE-B95A-7168851F4FE5}"/>
+                <a16:creationId xmlns:a16="http://schemas.microsoft.com/office/drawing/2014/main" id="{A7547F5F-FE4B-4B04-86D7-4B59C5A3FF1D}"/>
               </a:ext>
             </a:extLst>
           </p:cNvPr>
@@ -29684,7 +29128,7 @@
           <p:cNvPr id="35" name="Text 33">
             <a:extLst xmlns:a="http://schemas.openxmlformats.org/drawingml/2006/main">
               <a:ext uri="{FF2B5EF4-FFF2-40B4-BE49-F238E27FC236}">
-                <a16:creationId xmlns:a16="http://schemas.microsoft.com/office/drawing/2014/main" id="{B8660639-A3AF-466F-A63C-888597958D1F}"/>
+                <a16:creationId xmlns:a16="http://schemas.microsoft.com/office/drawing/2014/main" id="{299A8192-D40F-4B0B-AE58-43F0A2337C77}"/>
               </a:ext>
             </a:extLst>
           </p:cNvPr>
@@ -29729,7 +29173,7 @@
     </p:spTree>
     <p:extLst>
       <p:ext uri="{BB962C8B-B14F-4D97-AF65-F5344CB8AC3E}">
-        <p14:creationId xmlns:p14="http://schemas.microsoft.com/office/powerpoint/2010/main" val="2078807006"/>
+        <p14:creationId xmlns:p14="http://schemas.microsoft.com/office/powerpoint/2010/main" val="1479847621"/>
       </p:ext>
     </p:extLst>
   </p:cSld>
@@ -29760,7 +29204,7 @@
           <p:cNvPr id="2" name="Text 0">
             <a:extLst xmlns:a="http://schemas.openxmlformats.org/drawingml/2006/main">
               <a:ext uri="{FF2B5EF4-FFF2-40B4-BE49-F238E27FC236}">
-                <a16:creationId xmlns:a16="http://schemas.microsoft.com/office/drawing/2014/main" id="{B8872956-50D9-471F-8687-46A63A7D2DE6}"/>
+                <a16:creationId xmlns:a16="http://schemas.microsoft.com/office/drawing/2014/main" id="{C40994E6-A29B-42B7-9854-F0145DAB03CF}"/>
               </a:ext>
             </a:extLst>
           </p:cNvPr>
@@ -29807,7 +29251,7 @@
           <p:cNvPr id="3" name="Text 1">
             <a:extLst xmlns:a="http://schemas.openxmlformats.org/drawingml/2006/main">
               <a:ext uri="{FF2B5EF4-FFF2-40B4-BE49-F238E27FC236}">
-                <a16:creationId xmlns:a16="http://schemas.microsoft.com/office/drawing/2014/main" id="{3D39F35D-B249-48CC-9530-8E4CFCB78326}"/>
+                <a16:creationId xmlns:a16="http://schemas.microsoft.com/office/drawing/2014/main" id="{634DA760-071A-49FB-8160-B309CBD3661D}"/>
               </a:ext>
             </a:extLst>
           </p:cNvPr>
@@ -29854,7 +29298,7 @@
           <p:cNvPr id="4" name="Shape 2">
             <a:extLst xmlns:a="http://schemas.openxmlformats.org/drawingml/2006/main">
               <a:ext uri="{FF2B5EF4-FFF2-40B4-BE49-F238E27FC236}">
-                <a16:creationId xmlns:a16="http://schemas.microsoft.com/office/drawing/2014/main" id="{2E717799-2644-4A1E-92CF-1322CBC0BCC1}"/>
+                <a16:creationId xmlns:a16="http://schemas.microsoft.com/office/drawing/2014/main" id="{573CD138-1597-4D6F-9765-729D19999826}"/>
               </a:ext>
             </a:extLst>
           </p:cNvPr>
@@ -29889,7 +29333,7 @@
           <p:cNvPr id="5" name="Text 3">
             <a:extLst xmlns:a="http://schemas.openxmlformats.org/drawingml/2006/main">
               <a:ext uri="{FF2B5EF4-FFF2-40B4-BE49-F238E27FC236}">
-                <a16:creationId xmlns:a16="http://schemas.microsoft.com/office/drawing/2014/main" id="{D709A5CD-E09E-4C48-92E2-27F7FA811255}"/>
+                <a16:creationId xmlns:a16="http://schemas.microsoft.com/office/drawing/2014/main" id="{053A352F-473A-40A0-BA0C-C399D8DB28BD}"/>
               </a:ext>
             </a:extLst>
           </p:cNvPr>
@@ -29936,7 +29380,7 @@
           <p:cNvPr id="6" name="Shape 4">
             <a:extLst xmlns:a="http://schemas.openxmlformats.org/drawingml/2006/main">
               <a:ext uri="{FF2B5EF4-FFF2-40B4-BE49-F238E27FC236}">
-                <a16:creationId xmlns:a16="http://schemas.microsoft.com/office/drawing/2014/main" id="{ABA0AC52-E44D-421B-B655-7E411B191FEF}"/>
+                <a16:creationId xmlns:a16="http://schemas.microsoft.com/office/drawing/2014/main" id="{26401345-8A21-4AE3-A16A-48CE12AD3DB0}"/>
               </a:ext>
             </a:extLst>
           </p:cNvPr>
@@ -29967,7 +29411,7 @@
           <p:cNvPr id="7" name="Shape 5">
             <a:extLst xmlns:a="http://schemas.openxmlformats.org/drawingml/2006/main">
               <a:ext uri="{FF2B5EF4-FFF2-40B4-BE49-F238E27FC236}">
-                <a16:creationId xmlns:a16="http://schemas.microsoft.com/office/drawing/2014/main" id="{73CB6558-3086-4A1C-976E-75CC15BEA072}"/>
+                <a16:creationId xmlns:a16="http://schemas.microsoft.com/office/drawing/2014/main" id="{5807A04C-59E3-4582-8763-0F1320F37560}"/>
               </a:ext>
             </a:extLst>
           </p:cNvPr>
@@ -30002,7 +29446,7 @@
           <p:cNvPr id="8" name="Text 6">
             <a:extLst xmlns:a="http://schemas.openxmlformats.org/drawingml/2006/main">
               <a:ext uri="{FF2B5EF4-FFF2-40B4-BE49-F238E27FC236}">
-                <a16:creationId xmlns:a16="http://schemas.microsoft.com/office/drawing/2014/main" id="{D8382E8D-AC6C-4CEB-8B25-51B64FADF326}"/>
+                <a16:creationId xmlns:a16="http://schemas.microsoft.com/office/drawing/2014/main" id="{FAC76977-5C0F-426A-A9CE-AF9C5FDE222F}"/>
               </a:ext>
             </a:extLst>
           </p:cNvPr>
@@ -30049,7 +29493,7 @@
           <p:cNvPr id="9" name="Text 7">
             <a:extLst xmlns:a="http://schemas.openxmlformats.org/drawingml/2006/main">
               <a:ext uri="{FF2B5EF4-FFF2-40B4-BE49-F238E27FC236}">
-                <a16:creationId xmlns:a16="http://schemas.microsoft.com/office/drawing/2014/main" id="{69FA9DC4-3AB6-4EEA-B741-9E20614BF20C}"/>
+                <a16:creationId xmlns:a16="http://schemas.microsoft.com/office/drawing/2014/main" id="{766F54EB-5AF3-4C67-9101-CEB6ADBF4A94}"/>
               </a:ext>
             </a:extLst>
           </p:cNvPr>
@@ -30096,7 +29540,7 @@
           <p:cNvPr id="10" name="Shape 8">
             <a:extLst xmlns:a="http://schemas.openxmlformats.org/drawingml/2006/main">
               <a:ext uri="{FF2B5EF4-FFF2-40B4-BE49-F238E27FC236}">
-                <a16:creationId xmlns:a16="http://schemas.microsoft.com/office/drawing/2014/main" id="{2D66045F-563E-4874-BCC8-4B70E652698D}"/>
+                <a16:creationId xmlns:a16="http://schemas.microsoft.com/office/drawing/2014/main" id="{AA2C4B4D-62C6-4C7E-BBA2-48CE22DBAB61}"/>
               </a:ext>
             </a:extLst>
           </p:cNvPr>
@@ -30128,7 +29572,7 @@
           <p:cNvPr id="11" name="Shape 9">
             <a:extLst xmlns:a="http://schemas.openxmlformats.org/drawingml/2006/main">
               <a:ext uri="{FF2B5EF4-FFF2-40B4-BE49-F238E27FC236}">
-                <a16:creationId xmlns:a16="http://schemas.microsoft.com/office/drawing/2014/main" id="{ED07D84E-F535-4B2C-A811-975FAA6794C3}"/>
+                <a16:creationId xmlns:a16="http://schemas.microsoft.com/office/drawing/2014/main" id="{2986D58A-8B32-4C70-ABE8-9918CB4AF2DE}"/>
               </a:ext>
             </a:extLst>
           </p:cNvPr>
@@ -30163,7 +29607,7 @@
           <p:cNvPr id="12" name="Text 10">
             <a:extLst xmlns:a="http://schemas.openxmlformats.org/drawingml/2006/main">
               <a:ext uri="{FF2B5EF4-FFF2-40B4-BE49-F238E27FC236}">
-                <a16:creationId xmlns:a16="http://schemas.microsoft.com/office/drawing/2014/main" id="{F631D18F-23C3-46E9-9926-AA5B8142D603}"/>
+                <a16:creationId xmlns:a16="http://schemas.microsoft.com/office/drawing/2014/main" id="{8C8347C3-349B-44D6-B249-9EE1F718F0F6}"/>
               </a:ext>
             </a:extLst>
           </p:cNvPr>
@@ -30210,7 +29654,7 @@
           <p:cNvPr id="13" name="Text 11">
             <a:extLst xmlns:a="http://schemas.openxmlformats.org/drawingml/2006/main">
               <a:ext uri="{FF2B5EF4-FFF2-40B4-BE49-F238E27FC236}">
-                <a16:creationId xmlns:a16="http://schemas.microsoft.com/office/drawing/2014/main" id="{6E715344-479A-4845-80A8-4720415853AA}"/>
+                <a16:creationId xmlns:a16="http://schemas.microsoft.com/office/drawing/2014/main" id="{64A80908-4575-4B74-B413-451466C805AC}"/>
               </a:ext>
             </a:extLst>
           </p:cNvPr>
@@ -30257,7 +29701,7 @@
           <p:cNvPr id="14" name="Shape 12">
             <a:extLst xmlns:a="http://schemas.openxmlformats.org/drawingml/2006/main">
               <a:ext uri="{FF2B5EF4-FFF2-40B4-BE49-F238E27FC236}">
-                <a16:creationId xmlns:a16="http://schemas.microsoft.com/office/drawing/2014/main" id="{FB60B839-1BD3-4DB6-B2DC-BE39FB8320BD}"/>
+                <a16:creationId xmlns:a16="http://schemas.microsoft.com/office/drawing/2014/main" id="{E9B5BAA5-5485-4465-8980-B8291550C5F8}"/>
               </a:ext>
             </a:extLst>
           </p:cNvPr>
@@ -30289,7 +29733,7 @@
           <p:cNvPr id="15" name="Shape 13">
             <a:extLst xmlns:a="http://schemas.openxmlformats.org/drawingml/2006/main">
               <a:ext uri="{FF2B5EF4-FFF2-40B4-BE49-F238E27FC236}">
-                <a16:creationId xmlns:a16="http://schemas.microsoft.com/office/drawing/2014/main" id="{C2E0EB5F-D56F-4605-81AD-5AD94D06D198}"/>
+                <a16:creationId xmlns:a16="http://schemas.microsoft.com/office/drawing/2014/main" id="{61F50F80-0A7C-42DD-99AD-559BEC506B89}"/>
               </a:ext>
             </a:extLst>
           </p:cNvPr>
@@ -30324,7 +29768,7 @@
           <p:cNvPr id="16" name="Text 14">
             <a:extLst xmlns:a="http://schemas.openxmlformats.org/drawingml/2006/main">
               <a:ext uri="{FF2B5EF4-FFF2-40B4-BE49-F238E27FC236}">
-                <a16:creationId xmlns:a16="http://schemas.microsoft.com/office/drawing/2014/main" id="{5444F1B9-6F7F-4DB9-934D-C5B76D9A9846}"/>
+                <a16:creationId xmlns:a16="http://schemas.microsoft.com/office/drawing/2014/main" id="{030787CE-338D-42AC-B861-5F8C18653CE3}"/>
               </a:ext>
             </a:extLst>
           </p:cNvPr>
@@ -30371,7 +29815,7 @@
           <p:cNvPr id="17" name="Text 15">
             <a:extLst xmlns:a="http://schemas.openxmlformats.org/drawingml/2006/main">
               <a:ext uri="{FF2B5EF4-FFF2-40B4-BE49-F238E27FC236}">
-                <a16:creationId xmlns:a16="http://schemas.microsoft.com/office/drawing/2014/main" id="{DF06CC2D-C065-4549-A90F-66915225BDDD}"/>
+                <a16:creationId xmlns:a16="http://schemas.microsoft.com/office/drawing/2014/main" id="{A6E2D1A9-EA2E-4451-AECD-532DD897E03E}"/>
               </a:ext>
             </a:extLst>
           </p:cNvPr>
@@ -30418,7 +29862,7 @@
           <p:cNvPr id="18" name="Shape 16">
             <a:extLst xmlns:a="http://schemas.openxmlformats.org/drawingml/2006/main">
               <a:ext uri="{FF2B5EF4-FFF2-40B4-BE49-F238E27FC236}">
-                <a16:creationId xmlns:a16="http://schemas.microsoft.com/office/drawing/2014/main" id="{BC92669F-EDB0-48C3-8B86-E7D5F3EC25CE}"/>
+                <a16:creationId xmlns:a16="http://schemas.microsoft.com/office/drawing/2014/main" id="{75BBA8DC-1162-4440-94C7-E11D44CB90B5}"/>
               </a:ext>
             </a:extLst>
           </p:cNvPr>
@@ -30450,7 +29894,7 @@
           <p:cNvPr id="19" name="Shape 17">
             <a:extLst xmlns:a="http://schemas.openxmlformats.org/drawingml/2006/main">
               <a:ext uri="{FF2B5EF4-FFF2-40B4-BE49-F238E27FC236}">
-                <a16:creationId xmlns:a16="http://schemas.microsoft.com/office/drawing/2014/main" id="{A8C27809-AF66-4523-B063-BD410A407D4D}"/>
+                <a16:creationId xmlns:a16="http://schemas.microsoft.com/office/drawing/2014/main" id="{04B7F8B6-17E3-45C6-9739-D8DD51BD5D6F}"/>
               </a:ext>
             </a:extLst>
           </p:cNvPr>
@@ -30485,7 +29929,7 @@
           <p:cNvPr id="20" name="Text 18">
             <a:extLst xmlns:a="http://schemas.openxmlformats.org/drawingml/2006/main">
               <a:ext uri="{FF2B5EF4-FFF2-40B4-BE49-F238E27FC236}">
-                <a16:creationId xmlns:a16="http://schemas.microsoft.com/office/drawing/2014/main" id="{741180C1-34F8-4824-889E-50BAD01F50DB}"/>
+                <a16:creationId xmlns:a16="http://schemas.microsoft.com/office/drawing/2014/main" id="{7A25D9BC-48BC-46C2-A6D8-D65BA4F6BA54}"/>
               </a:ext>
             </a:extLst>
           </p:cNvPr>
@@ -30532,7 +29976,7 @@
           <p:cNvPr id="21" name="Text 19">
             <a:extLst xmlns:a="http://schemas.openxmlformats.org/drawingml/2006/main">
               <a:ext uri="{FF2B5EF4-FFF2-40B4-BE49-F238E27FC236}">
-                <a16:creationId xmlns:a16="http://schemas.microsoft.com/office/drawing/2014/main" id="{2DA01F1B-0D0A-4C5A-ACA2-0F84826D877E}"/>
+                <a16:creationId xmlns:a16="http://schemas.microsoft.com/office/drawing/2014/main" id="{458CAD39-0CC7-4872-8B5B-9FFE1DF817DA}"/>
               </a:ext>
             </a:extLst>
           </p:cNvPr>
@@ -30579,7 +30023,7 @@
           <p:cNvPr id="22" name="Shape 20">
             <a:extLst xmlns:a="http://schemas.openxmlformats.org/drawingml/2006/main">
               <a:ext uri="{FF2B5EF4-FFF2-40B4-BE49-F238E27FC236}">
-                <a16:creationId xmlns:a16="http://schemas.microsoft.com/office/drawing/2014/main" id="{E84DA2A7-8E70-4121-B336-9DE6AD51EB39}"/>
+                <a16:creationId xmlns:a16="http://schemas.microsoft.com/office/drawing/2014/main" id="{EF439926-3085-4872-A959-644E6A9EF2DB}"/>
               </a:ext>
             </a:extLst>
           </p:cNvPr>
@@ -30611,7 +30055,7 @@
           <p:cNvPr id="23" name="Shape 21">
             <a:extLst xmlns:a="http://schemas.openxmlformats.org/drawingml/2006/main">
               <a:ext uri="{FF2B5EF4-FFF2-40B4-BE49-F238E27FC236}">
-                <a16:creationId xmlns:a16="http://schemas.microsoft.com/office/drawing/2014/main" id="{C1D12FE3-848C-4F7F-A8E1-1F51D5667771}"/>
+                <a16:creationId xmlns:a16="http://schemas.microsoft.com/office/drawing/2014/main" id="{52A35EB1-3C1E-4074-87A2-62E1084B7942}"/>
               </a:ext>
             </a:extLst>
           </p:cNvPr>
@@ -30646,7 +30090,7 @@
           <p:cNvPr id="24" name="Text 22">
             <a:extLst xmlns:a="http://schemas.openxmlformats.org/drawingml/2006/main">
               <a:ext uri="{FF2B5EF4-FFF2-40B4-BE49-F238E27FC236}">
-                <a16:creationId xmlns:a16="http://schemas.microsoft.com/office/drawing/2014/main" id="{AB5B93C8-769F-4EBF-A552-8E920A09126D}"/>
+                <a16:creationId xmlns:a16="http://schemas.microsoft.com/office/drawing/2014/main" id="{E2E8ED0E-D268-41ED-93B7-A7FA1CADC0E6}"/>
               </a:ext>
             </a:extLst>
           </p:cNvPr>
@@ -30693,7 +30137,7 @@
           <p:cNvPr id="25" name="Text 23">
             <a:extLst xmlns:a="http://schemas.openxmlformats.org/drawingml/2006/main">
               <a:ext uri="{FF2B5EF4-FFF2-40B4-BE49-F238E27FC236}">
-                <a16:creationId xmlns:a16="http://schemas.microsoft.com/office/drawing/2014/main" id="{D37F30B0-234C-47B1-94D7-7F0A404ACBB8}"/>
+                <a16:creationId xmlns:a16="http://schemas.microsoft.com/office/drawing/2014/main" id="{530E3A22-7FE9-4372-96B6-F0A621F8B170}"/>
               </a:ext>
             </a:extLst>
           </p:cNvPr>
@@ -30740,7 +30184,7 @@
           <p:cNvPr id="26" name="Shape 24">
             <a:extLst xmlns:a="http://schemas.openxmlformats.org/drawingml/2006/main">
               <a:ext uri="{FF2B5EF4-FFF2-40B4-BE49-F238E27FC236}">
-                <a16:creationId xmlns:a16="http://schemas.microsoft.com/office/drawing/2014/main" id="{3D6629B1-8220-48F0-9CB8-FA8906FD589F}"/>
+                <a16:creationId xmlns:a16="http://schemas.microsoft.com/office/drawing/2014/main" id="{0697A9E7-B5F1-4384-8C5A-4FF210C99966}"/>
               </a:ext>
             </a:extLst>
           </p:cNvPr>
@@ -30772,7 +30216,7 @@
           <p:cNvPr id="27" name="Shape 25">
             <a:extLst xmlns:a="http://schemas.openxmlformats.org/drawingml/2006/main">
               <a:ext uri="{FF2B5EF4-FFF2-40B4-BE49-F238E27FC236}">
-                <a16:creationId xmlns:a16="http://schemas.microsoft.com/office/drawing/2014/main" id="{82E0DD59-8D59-4F5F-99C8-BBB58AA4FF9D}"/>
+                <a16:creationId xmlns:a16="http://schemas.microsoft.com/office/drawing/2014/main" id="{1B37C616-425E-45F0-8821-826141F1EE54}"/>
               </a:ext>
             </a:extLst>
           </p:cNvPr>
@@ -30807,7 +30251,7 @@
           <p:cNvPr id="28" name="Text 26">
             <a:extLst xmlns:a="http://schemas.openxmlformats.org/drawingml/2006/main">
               <a:ext uri="{FF2B5EF4-FFF2-40B4-BE49-F238E27FC236}">
-                <a16:creationId xmlns:a16="http://schemas.microsoft.com/office/drawing/2014/main" id="{9D27EF31-D660-412E-80F8-2106733075D4}"/>
+                <a16:creationId xmlns:a16="http://schemas.microsoft.com/office/drawing/2014/main" id="{AED1FE0A-77BE-40F9-B1C3-E8BE39332123}"/>
               </a:ext>
             </a:extLst>
           </p:cNvPr>
@@ -30854,7 +30298,7 @@
           <p:cNvPr id="29" name="Text 27">
             <a:extLst xmlns:a="http://schemas.openxmlformats.org/drawingml/2006/main">
               <a:ext uri="{FF2B5EF4-FFF2-40B4-BE49-F238E27FC236}">
-                <a16:creationId xmlns:a16="http://schemas.microsoft.com/office/drawing/2014/main" id="{1C1928AF-FF07-4E4E-A89D-28FA90490A19}"/>
+                <a16:creationId xmlns:a16="http://schemas.microsoft.com/office/drawing/2014/main" id="{E8474A74-7E80-4542-9F15-DE8735776D69}"/>
               </a:ext>
             </a:extLst>
           </p:cNvPr>
@@ -30901,7 +30345,7 @@
           <p:cNvPr id="30" name="Text 28">
             <a:extLst xmlns:a="http://schemas.openxmlformats.org/drawingml/2006/main">
               <a:ext uri="{FF2B5EF4-FFF2-40B4-BE49-F238E27FC236}">
-                <a16:creationId xmlns:a16="http://schemas.microsoft.com/office/drawing/2014/main" id="{640508CA-434C-4B34-A60D-AE7D460B95A2}"/>
+                <a16:creationId xmlns:a16="http://schemas.microsoft.com/office/drawing/2014/main" id="{1A2360EC-E5B1-4EC0-BB2E-657CF1AE1B76}"/>
               </a:ext>
             </a:extLst>
           </p:cNvPr>
@@ -30948,7 +30392,7 @@
           <p:cNvPr id="31" name="Shape 29">
             <a:extLst xmlns:a="http://schemas.openxmlformats.org/drawingml/2006/main">
               <a:ext uri="{FF2B5EF4-FFF2-40B4-BE49-F238E27FC236}">
-                <a16:creationId xmlns:a16="http://schemas.microsoft.com/office/drawing/2014/main" id="{0CE2225A-2A11-40CE-BA08-E17F960B86A2}"/>
+                <a16:creationId xmlns:a16="http://schemas.microsoft.com/office/drawing/2014/main" id="{63F6D9EE-E060-4538-BBC4-C5C910169B1C}"/>
               </a:ext>
             </a:extLst>
           </p:cNvPr>
@@ -30983,7 +30427,7 @@
           <p:cNvPr id="32" name="Text 30">
             <a:extLst xmlns:a="http://schemas.openxmlformats.org/drawingml/2006/main">
               <a:ext uri="{FF2B5EF4-FFF2-40B4-BE49-F238E27FC236}">
-                <a16:creationId xmlns:a16="http://schemas.microsoft.com/office/drawing/2014/main" id="{DE2A5367-179C-4CC9-B6F0-96594C58647C}"/>
+                <a16:creationId xmlns:a16="http://schemas.microsoft.com/office/drawing/2014/main" id="{0C9693EB-CE03-42DE-876D-FBD0478A6F7F}"/>
               </a:ext>
             </a:extLst>
           </p:cNvPr>
@@ -31062,7 +30506,7 @@
           <p:cNvPr id="33" name="Text 31">
             <a:extLst xmlns:a="http://schemas.openxmlformats.org/drawingml/2006/main">
               <a:ext uri="{FF2B5EF4-FFF2-40B4-BE49-F238E27FC236}">
-                <a16:creationId xmlns:a16="http://schemas.microsoft.com/office/drawing/2014/main" id="{8F49AC0F-20B1-4AE7-94F0-4B79E7EE5025}"/>
+                <a16:creationId xmlns:a16="http://schemas.microsoft.com/office/drawing/2014/main" id="{2F1CF9F8-5C98-4FDB-8A4A-B4C965CC86BB}"/>
               </a:ext>
             </a:extLst>
           </p:cNvPr>
@@ -31109,7 +30553,7 @@
           <p:cNvPr id="34" name="Shape 32">
             <a:extLst xmlns:a="http://schemas.openxmlformats.org/drawingml/2006/main">
               <a:ext uri="{FF2B5EF4-FFF2-40B4-BE49-F238E27FC236}">
-                <a16:creationId xmlns:a16="http://schemas.microsoft.com/office/drawing/2014/main" id="{3AB9F167-90E4-4BD0-9109-0B129DA3A4D5}"/>
+                <a16:creationId xmlns:a16="http://schemas.microsoft.com/office/drawing/2014/main" id="{DDA8BB72-7409-4849-B631-68D8A16BF177}"/>
               </a:ext>
             </a:extLst>
           </p:cNvPr>
@@ -31144,7 +30588,7 @@
           <p:cNvPr id="35" name="Text 33">
             <a:extLst xmlns:a="http://schemas.openxmlformats.org/drawingml/2006/main">
               <a:ext uri="{FF2B5EF4-FFF2-40B4-BE49-F238E27FC236}">
-                <a16:creationId xmlns:a16="http://schemas.microsoft.com/office/drawing/2014/main" id="{944A05E5-4504-4B1B-A22D-56718AFAE6AB}"/>
+                <a16:creationId xmlns:a16="http://schemas.microsoft.com/office/drawing/2014/main" id="{1C708063-BE9B-4AB6-8390-F69683860778}"/>
               </a:ext>
             </a:extLst>
           </p:cNvPr>
@@ -31223,7 +30667,7 @@
           <p:cNvPr id="36" name="Shape 34">
             <a:extLst xmlns:a="http://schemas.openxmlformats.org/drawingml/2006/main">
               <a:ext uri="{FF2B5EF4-FFF2-40B4-BE49-F238E27FC236}">
-                <a16:creationId xmlns:a16="http://schemas.microsoft.com/office/drawing/2014/main" id="{1F62DC66-592E-493E-A40A-93F34AF91EC8}"/>
+                <a16:creationId xmlns:a16="http://schemas.microsoft.com/office/drawing/2014/main" id="{C76F6698-ABB9-4637-BDA2-75244EA27218}"/>
               </a:ext>
             </a:extLst>
           </p:cNvPr>
@@ -31258,7 +30702,7 @@
           <p:cNvPr id="37" name="Text 35">
             <a:extLst xmlns:a="http://schemas.openxmlformats.org/drawingml/2006/main">
               <a:ext uri="{FF2B5EF4-FFF2-40B4-BE49-F238E27FC236}">
-                <a16:creationId xmlns:a16="http://schemas.microsoft.com/office/drawing/2014/main" id="{E44D836E-04A0-4F62-8442-2E9563409F10}"/>
+                <a16:creationId xmlns:a16="http://schemas.microsoft.com/office/drawing/2014/main" id="{34150DA5-8791-49CC-BC6C-FC1D0AF7C5D2}"/>
               </a:ext>
             </a:extLst>
           </p:cNvPr>
@@ -31305,7 +30749,7 @@
           <p:cNvPr id="38" name="Text 36">
             <a:extLst xmlns:a="http://schemas.openxmlformats.org/drawingml/2006/main">
               <a:ext uri="{FF2B5EF4-FFF2-40B4-BE49-F238E27FC236}">
-                <a16:creationId xmlns:a16="http://schemas.microsoft.com/office/drawing/2014/main" id="{7F87D2F5-45BB-4A98-BF2F-9FCDE4290848}"/>
+                <a16:creationId xmlns:a16="http://schemas.microsoft.com/office/drawing/2014/main" id="{66601516-A054-4D87-B52A-09393B62DA29}"/>
               </a:ext>
             </a:extLst>
           </p:cNvPr>
@@ -31352,7 +30796,7 @@
           <p:cNvPr id="39" name="Text 37">
             <a:extLst xmlns:a="http://schemas.openxmlformats.org/drawingml/2006/main">
               <a:ext uri="{FF2B5EF4-FFF2-40B4-BE49-F238E27FC236}">
-                <a16:creationId xmlns:a16="http://schemas.microsoft.com/office/drawing/2014/main" id="{4164E7AC-EEF9-4E19-8746-1B959FF6BB47}"/>
+                <a16:creationId xmlns:a16="http://schemas.microsoft.com/office/drawing/2014/main" id="{5A9488B4-D4AC-4C06-8A57-B30BE91C4562}"/>
               </a:ext>
             </a:extLst>
           </p:cNvPr>
@@ -31397,7 +30841,7 @@
     </p:spTree>
     <p:extLst>
       <p:ext uri="{BB962C8B-B14F-4D97-AF65-F5344CB8AC3E}">
-        <p14:creationId xmlns:p14="http://schemas.microsoft.com/office/powerpoint/2010/main" val="1937984715"/>
+        <p14:creationId xmlns:p14="http://schemas.microsoft.com/office/powerpoint/2010/main" val="1023371292"/>
       </p:ext>
     </p:extLst>
   </p:cSld>
@@ -31428,7 +30872,7 @@
           <p:cNvPr id="2" name="Text 0">
             <a:extLst xmlns:a="http://schemas.openxmlformats.org/drawingml/2006/main">
               <a:ext uri="{FF2B5EF4-FFF2-40B4-BE49-F238E27FC236}">
-                <a16:creationId xmlns:a16="http://schemas.microsoft.com/office/drawing/2014/main" id="{DA4A4825-37E7-4CE1-A7C4-BA0E000CC23C}"/>
+                <a16:creationId xmlns:a16="http://schemas.microsoft.com/office/drawing/2014/main" id="{C9DAC712-C3BC-469A-8FDC-3A148607187F}"/>
               </a:ext>
             </a:extLst>
           </p:cNvPr>
@@ -31475,7 +30919,7 @@
           <p:cNvPr id="3" name="Text 1">
             <a:extLst xmlns:a="http://schemas.openxmlformats.org/drawingml/2006/main">
               <a:ext uri="{FF2B5EF4-FFF2-40B4-BE49-F238E27FC236}">
-                <a16:creationId xmlns:a16="http://schemas.microsoft.com/office/drawing/2014/main" id="{AA6835F7-0293-471E-A061-C62626D3CBC8}"/>
+                <a16:creationId xmlns:a16="http://schemas.microsoft.com/office/drawing/2014/main" id="{87C62D9A-6C3D-42B4-8C6E-A9600305A145}"/>
               </a:ext>
             </a:extLst>
           </p:cNvPr>
@@ -31522,7 +30966,7 @@
           <p:cNvPr id="4" name="Shape 2">
             <a:extLst xmlns:a="http://schemas.openxmlformats.org/drawingml/2006/main">
               <a:ext uri="{FF2B5EF4-FFF2-40B4-BE49-F238E27FC236}">
-                <a16:creationId xmlns:a16="http://schemas.microsoft.com/office/drawing/2014/main" id="{61DAB91F-8DC8-43C5-8594-4112CD3288E0}"/>
+                <a16:creationId xmlns:a16="http://schemas.microsoft.com/office/drawing/2014/main" id="{82371C1C-FDC8-45B1-99E7-4B072461C40E}"/>
               </a:ext>
             </a:extLst>
           </p:cNvPr>
@@ -31557,7 +31001,7 @@
           <p:cNvPr id="5" name="Text 3">
             <a:extLst xmlns:a="http://schemas.openxmlformats.org/drawingml/2006/main">
               <a:ext uri="{FF2B5EF4-FFF2-40B4-BE49-F238E27FC236}">
-                <a16:creationId xmlns:a16="http://schemas.microsoft.com/office/drawing/2014/main" id="{47023573-DDEF-4447-B60F-230441BAF544}"/>
+                <a16:creationId xmlns:a16="http://schemas.microsoft.com/office/drawing/2014/main" id="{EB2A4CC2-8BFC-4CA8-8D37-AA6BB3AA2161}"/>
               </a:ext>
             </a:extLst>
           </p:cNvPr>
@@ -31604,7 +31048,7 @@
           <p:cNvPr id="6" name="Shape 4">
             <a:extLst xmlns:a="http://schemas.openxmlformats.org/drawingml/2006/main">
               <a:ext uri="{FF2B5EF4-FFF2-40B4-BE49-F238E27FC236}">
-                <a16:creationId xmlns:a16="http://schemas.microsoft.com/office/drawing/2014/main" id="{87CCAF1D-9BE2-42D8-BCB2-B52C6E882A30}"/>
+                <a16:creationId xmlns:a16="http://schemas.microsoft.com/office/drawing/2014/main" id="{62C66256-6E2A-496F-8D4D-F60B9C311235}"/>
               </a:ext>
             </a:extLst>
           </p:cNvPr>
@@ -31635,7 +31079,7 @@
           <p:cNvPr id="7" name="Shape 5">
             <a:extLst xmlns:a="http://schemas.openxmlformats.org/drawingml/2006/main">
               <a:ext uri="{FF2B5EF4-FFF2-40B4-BE49-F238E27FC236}">
-                <a16:creationId xmlns:a16="http://schemas.microsoft.com/office/drawing/2014/main" id="{4BDEBB94-5FF4-4E72-9FEB-C93223F55EEC}"/>
+                <a16:creationId xmlns:a16="http://schemas.microsoft.com/office/drawing/2014/main" id="{6691B4F5-0CA8-45A0-A0A2-284530EF0A1B}"/>
               </a:ext>
             </a:extLst>
           </p:cNvPr>
@@ -31670,7 +31114,7 @@
           <p:cNvPr id="8" name="Text 6">
             <a:extLst xmlns:a="http://schemas.openxmlformats.org/drawingml/2006/main">
               <a:ext uri="{FF2B5EF4-FFF2-40B4-BE49-F238E27FC236}">
-                <a16:creationId xmlns:a16="http://schemas.microsoft.com/office/drawing/2014/main" id="{C72F2B2E-BA00-4FAA-B018-E702FA39FE23}"/>
+                <a16:creationId xmlns:a16="http://schemas.microsoft.com/office/drawing/2014/main" id="{21CA3696-4572-4BBA-9300-03B72C958395}"/>
               </a:ext>
             </a:extLst>
           </p:cNvPr>
@@ -31717,7 +31161,7 @@
           <p:cNvPr id="9" name="Text 7">
             <a:extLst xmlns:a="http://schemas.openxmlformats.org/drawingml/2006/main">
               <a:ext uri="{FF2B5EF4-FFF2-40B4-BE49-F238E27FC236}">
-                <a16:creationId xmlns:a16="http://schemas.microsoft.com/office/drawing/2014/main" id="{70B4C3BF-243C-4937-B71E-3DAC87537971}"/>
+                <a16:creationId xmlns:a16="http://schemas.microsoft.com/office/drawing/2014/main" id="{0534541A-A27F-4692-AB82-2FDB5CE3261F}"/>
               </a:ext>
             </a:extLst>
           </p:cNvPr>
@@ -31764,7 +31208,7 @@
           <p:cNvPr id="10" name="Text 8">
             <a:extLst xmlns:a="http://schemas.openxmlformats.org/drawingml/2006/main">
               <a:ext uri="{FF2B5EF4-FFF2-40B4-BE49-F238E27FC236}">
-                <a16:creationId xmlns:a16="http://schemas.microsoft.com/office/drawing/2014/main" id="{5C43A43F-654C-477D-9073-2C0D4F975CDC}"/>
+                <a16:creationId xmlns:a16="http://schemas.microsoft.com/office/drawing/2014/main" id="{3764058F-86B0-4D4B-8681-B6BB5C0FCB27}"/>
               </a:ext>
             </a:extLst>
           </p:cNvPr>
@@ -31811,7 +31255,7 @@
           <p:cNvPr id="11" name="Shape 9">
             <a:extLst xmlns:a="http://schemas.openxmlformats.org/drawingml/2006/main">
               <a:ext uri="{FF2B5EF4-FFF2-40B4-BE49-F238E27FC236}">
-                <a16:creationId xmlns:a16="http://schemas.microsoft.com/office/drawing/2014/main" id="{9B3AE43B-8ACC-45CA-A0C3-8F45C049A4FF}"/>
+                <a16:creationId xmlns:a16="http://schemas.microsoft.com/office/drawing/2014/main" id="{5752D767-2BE4-4ED6-9AC1-CB0B36063BBD}"/>
               </a:ext>
             </a:extLst>
           </p:cNvPr>
@@ -31846,7 +31290,7 @@
           <p:cNvPr id="12" name="Text 10">
             <a:extLst xmlns:a="http://schemas.openxmlformats.org/drawingml/2006/main">
               <a:ext uri="{FF2B5EF4-FFF2-40B4-BE49-F238E27FC236}">
-                <a16:creationId xmlns:a16="http://schemas.microsoft.com/office/drawing/2014/main" id="{9279A9D6-6E4C-4F96-BD06-1763CC8352B1}"/>
+                <a16:creationId xmlns:a16="http://schemas.microsoft.com/office/drawing/2014/main" id="{B6AE2E0B-BE31-4F9C-A05F-6AAAEC6DC35A}"/>
               </a:ext>
             </a:extLst>
           </p:cNvPr>
@@ -31893,7 +31337,7 @@
           <p:cNvPr id="13" name="Shape 11">
             <a:extLst xmlns:a="http://schemas.openxmlformats.org/drawingml/2006/main">
               <a:ext uri="{FF2B5EF4-FFF2-40B4-BE49-F238E27FC236}">
-                <a16:creationId xmlns:a16="http://schemas.microsoft.com/office/drawing/2014/main" id="{C78A7F1E-E6A5-4F63-93B6-A2B0566C7B22}"/>
+                <a16:creationId xmlns:a16="http://schemas.microsoft.com/office/drawing/2014/main" id="{0F971F57-C4ED-46AF-8F94-B1304E4102F7}"/>
               </a:ext>
             </a:extLst>
           </p:cNvPr>
@@ -31928,7 +31372,7 @@
           <p:cNvPr id="14" name="Text 12">
             <a:extLst xmlns:a="http://schemas.openxmlformats.org/drawingml/2006/main">
               <a:ext uri="{FF2B5EF4-FFF2-40B4-BE49-F238E27FC236}">
-                <a16:creationId xmlns:a16="http://schemas.microsoft.com/office/drawing/2014/main" id="{91D54B8E-3BFA-44FC-A059-68A9B208E7F7}"/>
+                <a16:creationId xmlns:a16="http://schemas.microsoft.com/office/drawing/2014/main" id="{98C1B3F4-3602-405A-85DA-2EBA71E9695A}"/>
               </a:ext>
             </a:extLst>
           </p:cNvPr>
@@ -31975,7 +31419,7 @@
           <p:cNvPr id="15" name="Text 13">
             <a:extLst xmlns:a="http://schemas.openxmlformats.org/drawingml/2006/main">
               <a:ext uri="{FF2B5EF4-FFF2-40B4-BE49-F238E27FC236}">
-                <a16:creationId xmlns:a16="http://schemas.microsoft.com/office/drawing/2014/main" id="{A43BE904-F6A3-4D3A-B60C-136571BFC97A}"/>
+                <a16:creationId xmlns:a16="http://schemas.microsoft.com/office/drawing/2014/main" id="{1E919219-9A29-4067-80E9-8AAA4CDD45F0}"/>
               </a:ext>
             </a:extLst>
           </p:cNvPr>
@@ -32022,7 +31466,7 @@
           <p:cNvPr id="16" name="Shape 14">
             <a:extLst xmlns:a="http://schemas.openxmlformats.org/drawingml/2006/main">
               <a:ext uri="{FF2B5EF4-FFF2-40B4-BE49-F238E27FC236}">
-                <a16:creationId xmlns:a16="http://schemas.microsoft.com/office/drawing/2014/main" id="{113E8026-7E8C-40C9-8A95-1790C396D593}"/>
+                <a16:creationId xmlns:a16="http://schemas.microsoft.com/office/drawing/2014/main" id="{9985525D-D92A-4E4E-B384-86B9A417F7E5}"/>
               </a:ext>
             </a:extLst>
           </p:cNvPr>
@@ -32057,7 +31501,7 @@
           <p:cNvPr id="17" name="Text 15">
             <a:extLst xmlns:a="http://schemas.openxmlformats.org/drawingml/2006/main">
               <a:ext uri="{FF2B5EF4-FFF2-40B4-BE49-F238E27FC236}">
-                <a16:creationId xmlns:a16="http://schemas.microsoft.com/office/drawing/2014/main" id="{D597C878-F18F-4469-A77C-5FC159A0CA78}"/>
+                <a16:creationId xmlns:a16="http://schemas.microsoft.com/office/drawing/2014/main" id="{EFFBA4E6-F27C-447F-B2DE-D15EC4E434FA}"/>
               </a:ext>
             </a:extLst>
           </p:cNvPr>
@@ -32104,7 +31548,7 @@
           <p:cNvPr id="18" name="Text 16">
             <a:extLst xmlns:a="http://schemas.openxmlformats.org/drawingml/2006/main">
               <a:ext uri="{FF2B5EF4-FFF2-40B4-BE49-F238E27FC236}">
-                <a16:creationId xmlns:a16="http://schemas.microsoft.com/office/drawing/2014/main" id="{33FC0C21-7558-45EB-AD72-C64EB7DE9D26}"/>
+                <a16:creationId xmlns:a16="http://schemas.microsoft.com/office/drawing/2014/main" id="{9A93D075-8F7B-414F-822B-E1D1B59F59B4}"/>
               </a:ext>
             </a:extLst>
           </p:cNvPr>
@@ -32151,7 +31595,7 @@
           <p:cNvPr id="19" name="Shape 17">
             <a:extLst xmlns:a="http://schemas.openxmlformats.org/drawingml/2006/main">
               <a:ext uri="{FF2B5EF4-FFF2-40B4-BE49-F238E27FC236}">
-                <a16:creationId xmlns:a16="http://schemas.microsoft.com/office/drawing/2014/main" id="{3BC1A6AC-623E-49F7-AEAF-CBCACBFECAEE}"/>
+                <a16:creationId xmlns:a16="http://schemas.microsoft.com/office/drawing/2014/main" id="{A3805B86-7BCC-474D-9236-6647A180D279}"/>
               </a:ext>
             </a:extLst>
           </p:cNvPr>
@@ -32186,7 +31630,7 @@
           <p:cNvPr id="20" name="Text 18">
             <a:extLst xmlns:a="http://schemas.openxmlformats.org/drawingml/2006/main">
               <a:ext uri="{FF2B5EF4-FFF2-40B4-BE49-F238E27FC236}">
-                <a16:creationId xmlns:a16="http://schemas.microsoft.com/office/drawing/2014/main" id="{03727AE3-FEDA-462E-BE18-1898411ED2A2}"/>
+                <a16:creationId xmlns:a16="http://schemas.microsoft.com/office/drawing/2014/main" id="{4901F3F0-C2E9-4484-9B49-EFA84E5DDA40}"/>
               </a:ext>
             </a:extLst>
           </p:cNvPr>
@@ -32233,7 +31677,7 @@
           <p:cNvPr id="21" name="Text 19">
             <a:extLst xmlns:a="http://schemas.openxmlformats.org/drawingml/2006/main">
               <a:ext uri="{FF2B5EF4-FFF2-40B4-BE49-F238E27FC236}">
-                <a16:creationId xmlns:a16="http://schemas.microsoft.com/office/drawing/2014/main" id="{F6632538-A38D-4FBC-AC01-04BAE7529F4F}"/>
+                <a16:creationId xmlns:a16="http://schemas.microsoft.com/office/drawing/2014/main" id="{377B258E-4923-425A-B521-42558A151061}"/>
               </a:ext>
             </a:extLst>
           </p:cNvPr>
@@ -32280,7 +31724,7 @@
           <p:cNvPr id="22" name="Shape 20">
             <a:extLst xmlns:a="http://schemas.openxmlformats.org/drawingml/2006/main">
               <a:ext uri="{FF2B5EF4-FFF2-40B4-BE49-F238E27FC236}">
-                <a16:creationId xmlns:a16="http://schemas.microsoft.com/office/drawing/2014/main" id="{7D581AD7-E1A8-415C-A40E-50D16B95BFB9}"/>
+                <a16:creationId xmlns:a16="http://schemas.microsoft.com/office/drawing/2014/main" id="{9891BE4D-826A-4C90-A6AC-88AD4FA88E94}"/>
               </a:ext>
             </a:extLst>
           </p:cNvPr>
@@ -32315,7 +31759,7 @@
           <p:cNvPr id="23" name="Text 21">
             <a:extLst xmlns:a="http://schemas.openxmlformats.org/drawingml/2006/main">
               <a:ext uri="{FF2B5EF4-FFF2-40B4-BE49-F238E27FC236}">
-                <a16:creationId xmlns:a16="http://schemas.microsoft.com/office/drawing/2014/main" id="{F3AE1AF4-B66F-479B-93EE-6C1389D5A284}"/>
+                <a16:creationId xmlns:a16="http://schemas.microsoft.com/office/drawing/2014/main" id="{9B8B1F59-7F7C-404F-8183-4342F8E7A067}"/>
               </a:ext>
             </a:extLst>
           </p:cNvPr>
@@ -32362,7 +31806,7 @@
           <p:cNvPr id="24" name="Shape 22">
             <a:extLst xmlns:a="http://schemas.openxmlformats.org/drawingml/2006/main">
               <a:ext uri="{FF2B5EF4-FFF2-40B4-BE49-F238E27FC236}">
-                <a16:creationId xmlns:a16="http://schemas.microsoft.com/office/drawing/2014/main" id="{8C220F87-C9C1-472B-A0A6-A8F9B68C21C8}"/>
+                <a16:creationId xmlns:a16="http://schemas.microsoft.com/office/drawing/2014/main" id="{9062EE78-B13D-41FC-B757-363F4FEAC02E}"/>
               </a:ext>
             </a:extLst>
           </p:cNvPr>
@@ -32395,7 +31839,7 @@
           <p:cNvPr id="25" name="Text 23">
             <a:extLst xmlns:a="http://schemas.openxmlformats.org/drawingml/2006/main">
               <a:ext uri="{FF2B5EF4-FFF2-40B4-BE49-F238E27FC236}">
-                <a16:creationId xmlns:a16="http://schemas.microsoft.com/office/drawing/2014/main" id="{57560460-DCFF-4C18-A637-568574BDEE93}"/>
+                <a16:creationId xmlns:a16="http://schemas.microsoft.com/office/drawing/2014/main" id="{AB6DCEF8-C0A6-408C-9F97-F3E4246F910E}"/>
               </a:ext>
             </a:extLst>
           </p:cNvPr>
@@ -32442,7 +31886,7 @@
           <p:cNvPr id="26" name="Shape 24">
             <a:extLst xmlns:a="http://schemas.openxmlformats.org/drawingml/2006/main">
               <a:ext uri="{FF2B5EF4-FFF2-40B4-BE49-F238E27FC236}">
-                <a16:creationId xmlns:a16="http://schemas.microsoft.com/office/drawing/2014/main" id="{C767D10C-63E0-4D6F-8490-925954D582FB}"/>
+                <a16:creationId xmlns:a16="http://schemas.microsoft.com/office/drawing/2014/main" id="{C5CEB66F-63EA-4C44-A705-B572F15B69F1}"/>
               </a:ext>
             </a:extLst>
           </p:cNvPr>
@@ -32475,7 +31919,7 @@
           <p:cNvPr id="27" name="Text 25">
             <a:extLst xmlns:a="http://schemas.openxmlformats.org/drawingml/2006/main">
               <a:ext uri="{FF2B5EF4-FFF2-40B4-BE49-F238E27FC236}">
-                <a16:creationId xmlns:a16="http://schemas.microsoft.com/office/drawing/2014/main" id="{A3F6908F-B3E7-47BC-BC57-E27D2A3B188D}"/>
+                <a16:creationId xmlns:a16="http://schemas.microsoft.com/office/drawing/2014/main" id="{4C9949D5-DDFD-49F4-9FF5-656ABFA58EE6}"/>
               </a:ext>
             </a:extLst>
           </p:cNvPr>
@@ -32522,7 +31966,7 @@
           <p:cNvPr id="28" name="Shape 26">
             <a:extLst xmlns:a="http://schemas.openxmlformats.org/drawingml/2006/main">
               <a:ext uri="{FF2B5EF4-FFF2-40B4-BE49-F238E27FC236}">
-                <a16:creationId xmlns:a16="http://schemas.microsoft.com/office/drawing/2014/main" id="{690C5C5E-D66A-42E1-B6E2-5C0F198FC5C1}"/>
+                <a16:creationId xmlns:a16="http://schemas.microsoft.com/office/drawing/2014/main" id="{AC6DB3B1-4586-4D91-98BC-038355BE6C6C}"/>
               </a:ext>
             </a:extLst>
           </p:cNvPr>
@@ -32555,7 +31999,7 @@
           <p:cNvPr id="29" name="Text 27">
             <a:extLst xmlns:a="http://schemas.openxmlformats.org/drawingml/2006/main">
               <a:ext uri="{FF2B5EF4-FFF2-40B4-BE49-F238E27FC236}">
-                <a16:creationId xmlns:a16="http://schemas.microsoft.com/office/drawing/2014/main" id="{419813B4-17A5-44BA-8FE3-A0F2BDA570FD}"/>
+                <a16:creationId xmlns:a16="http://schemas.microsoft.com/office/drawing/2014/main" id="{7C8F19BE-3317-43CD-AE7B-06DE585571DE}"/>
               </a:ext>
             </a:extLst>
           </p:cNvPr>
@@ -32602,7 +32046,7 @@
           <p:cNvPr id="30" name="Text 28">
             <a:extLst xmlns:a="http://schemas.openxmlformats.org/drawingml/2006/main">
               <a:ext uri="{FF2B5EF4-FFF2-40B4-BE49-F238E27FC236}">
-                <a16:creationId xmlns:a16="http://schemas.microsoft.com/office/drawing/2014/main" id="{10418C86-5A48-4EB8-AE34-4AF218FD5286}"/>
+                <a16:creationId xmlns:a16="http://schemas.microsoft.com/office/drawing/2014/main" id="{411FD9BE-1446-4C73-8D04-E474E2AF8815}"/>
               </a:ext>
             </a:extLst>
           </p:cNvPr>
@@ -32649,7 +32093,7 @@
           <p:cNvPr id="31" name="Text 29">
             <a:extLst xmlns:a="http://schemas.openxmlformats.org/drawingml/2006/main">
               <a:ext uri="{FF2B5EF4-FFF2-40B4-BE49-F238E27FC236}">
-                <a16:creationId xmlns:a16="http://schemas.microsoft.com/office/drawing/2014/main" id="{4516DAE8-E8E8-41C2-A543-1AE275D7DE71}"/>
+                <a16:creationId xmlns:a16="http://schemas.microsoft.com/office/drawing/2014/main" id="{2490FC08-DF08-4C21-BF96-D9DD8243C5C4}"/>
               </a:ext>
             </a:extLst>
           </p:cNvPr>
@@ -32696,7 +32140,7 @@
           <p:cNvPr id="32" name="Text 30">
             <a:extLst xmlns:a="http://schemas.openxmlformats.org/drawingml/2006/main">
               <a:ext uri="{FF2B5EF4-FFF2-40B4-BE49-F238E27FC236}">
-                <a16:creationId xmlns:a16="http://schemas.microsoft.com/office/drawing/2014/main" id="{0951D8A4-12D4-41EE-BBF4-1351593B07F2}"/>
+                <a16:creationId xmlns:a16="http://schemas.microsoft.com/office/drawing/2014/main" id="{743AE35A-8993-475E-B3B4-53934C778C20}"/>
               </a:ext>
             </a:extLst>
           </p:cNvPr>
@@ -32741,7 +32185,7 @@
     </p:spTree>
     <p:extLst>
       <p:ext uri="{BB962C8B-B14F-4D97-AF65-F5344CB8AC3E}">
-        <p14:creationId xmlns:p14="http://schemas.microsoft.com/office/powerpoint/2010/main" val="193489159"/>
+        <p14:creationId xmlns:p14="http://schemas.microsoft.com/office/powerpoint/2010/main" val="1562497651"/>
       </p:ext>
     </p:extLst>
   </p:cSld>

--- a/docs/presentation/BAI-Work-Defense-Deck.pptx
+++ b/docs/presentation/BAI-Work-Defense-Deck.pptx
@@ -2,31 +2,31 @@
 <file path=ppt/presentation.xml><?xml version="1.0" encoding="utf-8"?>
 <p:presentation xmlns:p="http://schemas.openxmlformats.org/presentationml/2006/main">
   <p:sldMasterIdLst>
-    <p:sldMasterId xmlns:r="http://schemas.openxmlformats.org/officeDocument/2006/relationships" id="2147483648" r:id="R03f322508d664c4b"/>
+    <p:sldMasterId xmlns:r="http://schemas.openxmlformats.org/officeDocument/2006/relationships" id="2147483648" r:id="Rd0f5ee54ffd440c6"/>
   </p:sldMasterIdLst>
   <p:notesMasterIdLst>
-    <p:notesMasterId xmlns:r="http://schemas.openxmlformats.org/officeDocument/2006/relationships" r:id="R0fe88a2d361e4274"/>
+    <p:notesMasterId xmlns:r="http://schemas.openxmlformats.org/officeDocument/2006/relationships" r:id="Rf95714a4e03e4199"/>
   </p:notesMasterIdLst>
   <p:sldIdLst>
-    <p:sldId xmlns:r="http://schemas.openxmlformats.org/officeDocument/2006/relationships" id="256" r:id="Rc63c5ac0524845d8"/>
-    <p:sldId xmlns:r="http://schemas.openxmlformats.org/officeDocument/2006/relationships" id="257" r:id="R0336c158d2b545c5"/>
-    <p:sldId xmlns:r="http://schemas.openxmlformats.org/officeDocument/2006/relationships" id="258" r:id="R0e93daf8bdd34ef3"/>
-    <p:sldId xmlns:r="http://schemas.openxmlformats.org/officeDocument/2006/relationships" id="259" r:id="R192a4eced8354da2"/>
-    <p:sldId xmlns:r="http://schemas.openxmlformats.org/officeDocument/2006/relationships" id="260" r:id="R51dbefe00b5549dc"/>
-    <p:sldId xmlns:r="http://schemas.openxmlformats.org/officeDocument/2006/relationships" id="261" r:id="R76390e697cc7420e"/>
-    <p:sldId xmlns:r="http://schemas.openxmlformats.org/officeDocument/2006/relationships" id="262" r:id="R67528be8c10b4754"/>
-    <p:sldId xmlns:r="http://schemas.openxmlformats.org/officeDocument/2006/relationships" id="263" r:id="R9f11cbc19c1f4094"/>
-    <p:sldId xmlns:r="http://schemas.openxmlformats.org/officeDocument/2006/relationships" id="264" r:id="R6ca700e1d6944dd1"/>
-    <p:sldId xmlns:r="http://schemas.openxmlformats.org/officeDocument/2006/relationships" id="265" r:id="R66f8ca66d6af467f"/>
-    <p:sldId xmlns:r="http://schemas.openxmlformats.org/officeDocument/2006/relationships" id="266" r:id="R3fe83d6ef3224573"/>
-    <p:sldId xmlns:r="http://schemas.openxmlformats.org/officeDocument/2006/relationships" id="267" r:id="Rc37c1bde4d5d4e6d"/>
-    <p:sldId xmlns:r="http://schemas.openxmlformats.org/officeDocument/2006/relationships" id="268" r:id="R2a38bb44deb9495a"/>
-    <p:sldId xmlns:r="http://schemas.openxmlformats.org/officeDocument/2006/relationships" id="269" r:id="R77e0e24d66734e89"/>
-    <p:sldId xmlns:r="http://schemas.openxmlformats.org/officeDocument/2006/relationships" id="270" r:id="R3d4b6bb656c14fb1"/>
-    <p:sldId xmlns:r="http://schemas.openxmlformats.org/officeDocument/2006/relationships" id="271" r:id="R8333d9ec758147a9"/>
-    <p:sldId xmlns:r="http://schemas.openxmlformats.org/officeDocument/2006/relationships" id="272" r:id="R4710795d901e4d55"/>
-    <p:sldId xmlns:r="http://schemas.openxmlformats.org/officeDocument/2006/relationships" id="273" r:id="R945e3e9959d643bb"/>
-    <p:sldId xmlns:r="http://schemas.openxmlformats.org/officeDocument/2006/relationships" id="274" r:id="R41424853436b4dcc"/>
+    <p:sldId xmlns:r="http://schemas.openxmlformats.org/officeDocument/2006/relationships" id="256" r:id="Raf6f9f00db1b4ad5"/>
+    <p:sldId xmlns:r="http://schemas.openxmlformats.org/officeDocument/2006/relationships" id="257" r:id="Rcc9b238d53ea4e67"/>
+    <p:sldId xmlns:r="http://schemas.openxmlformats.org/officeDocument/2006/relationships" id="258" r:id="Reaae14d6d4174ab5"/>
+    <p:sldId xmlns:r="http://schemas.openxmlformats.org/officeDocument/2006/relationships" id="259" r:id="R385aaf49c635422e"/>
+    <p:sldId xmlns:r="http://schemas.openxmlformats.org/officeDocument/2006/relationships" id="260" r:id="R139b78bf3a214f14"/>
+    <p:sldId xmlns:r="http://schemas.openxmlformats.org/officeDocument/2006/relationships" id="261" r:id="R67792ed397174cf5"/>
+    <p:sldId xmlns:r="http://schemas.openxmlformats.org/officeDocument/2006/relationships" id="262" r:id="R09eeae1e96864cc9"/>
+    <p:sldId xmlns:r="http://schemas.openxmlformats.org/officeDocument/2006/relationships" id="263" r:id="R8b848594312d4694"/>
+    <p:sldId xmlns:r="http://schemas.openxmlformats.org/officeDocument/2006/relationships" id="264" r:id="R28bb7a5cf3a542d6"/>
+    <p:sldId xmlns:r="http://schemas.openxmlformats.org/officeDocument/2006/relationships" id="265" r:id="R6e2816ed88304a99"/>
+    <p:sldId xmlns:r="http://schemas.openxmlformats.org/officeDocument/2006/relationships" id="266" r:id="R8be7560b5eb2442c"/>
+    <p:sldId xmlns:r="http://schemas.openxmlformats.org/officeDocument/2006/relationships" id="267" r:id="Rc6bc5fdc083f4d09"/>
+    <p:sldId xmlns:r="http://schemas.openxmlformats.org/officeDocument/2006/relationships" id="268" r:id="Rf5f21f87030944b1"/>
+    <p:sldId xmlns:r="http://schemas.openxmlformats.org/officeDocument/2006/relationships" id="269" r:id="R93f16f3056a24681"/>
+    <p:sldId xmlns:r="http://schemas.openxmlformats.org/officeDocument/2006/relationships" id="270" r:id="Rb199909d84f942e7"/>
+    <p:sldId xmlns:r="http://schemas.openxmlformats.org/officeDocument/2006/relationships" id="271" r:id="R3029335563f54422"/>
+    <p:sldId xmlns:r="http://schemas.openxmlformats.org/officeDocument/2006/relationships" id="272" r:id="Rf86253a2bfe84375"/>
+    <p:sldId xmlns:r="http://schemas.openxmlformats.org/officeDocument/2006/relationships" id="273" r:id="Rf3f62b1d5c7f49bd"/>
+    <p:sldId xmlns:r="http://schemas.openxmlformats.org/officeDocument/2006/relationships" id="274" r:id="Rfd5de7ece8e34b47"/>
   </p:sldIdLst>
   <p:sldSz cx="12191695" cy="6858000"/>
   <p:notesSz cx="6858000" cy="9144000"/>
@@ -1081,10 +1081,27 @@
           <a:lstStyle xmlns:a="http://schemas.openxmlformats.org/drawingml/2006/main"/>
           <a:p xmlns:a="http://schemas.openxmlformats.org/drawingml/2006/main">
             <a:r>
-              <a:t>工程验证证据（建议 40 秒）
-四个数字证明项目已有真实工程规模和自动化验证。
-Mac Intel 是当前迭代主版本，其他平台保持同源构建和原生 smoke。
-商业发布仍需正式签名和公证凭据，这一风险在路线图中明确。</a:t>
+              <a:t>上游贡献与 BAI Work 可靠性（建议 50 秒）</a:t>
+            </a:r>
+          </a:p>
+          <a:p xmlns:a="http://schemas.openxmlformats.org/drawingml/2006/main">
+            <a:r>
+              <a:t>我以 @2830500285 身份向 OpenAI Agents SDK 贡献 PR #3642，并随 v0.17.7 正式发布，官方 release 将我列为首次贡献者。</a:t>
+            </a:r>
+          </a:p>
+          <a:p xmlns:a="http://schemas.openxmlformats.org/drawingml/2006/main">
+            <a:r>
+              <a:t>这项贡献解决长时 Agent 沙箱中的缓冲增长、重复写入和网络超时落盘问题。</a:t>
+            </a:r>
+          </a:p>
+          <a:p xmlns:a="http://schemas.openxmlformats.org/drawingml/2006/main">
+            <a:r>
+              <a:t>BAI Work 没有移植该段 Python 代码，而是在 Runtime Host 中独立落实同一工程原则：pending 有界、事件游标去重、SSE 断点续传、指数退避与熔断。</a:t>
+            </a:r>
+          </a:p>
+          <a:p xmlns:a="http://schemas.openxmlformats.org/drawingml/2006/main">
+            <a:r>
+              <a:t>GPT-5.6 ChatGPT Codex 用于本次贡献流程的协作与复核；公开仓库只证明 PR 合并与版本发布，因此不宣称 Codex 产品直接集成这段代码。</a:t>
             </a:r>
           </a:p>
         </p:txBody>
@@ -2095,7 +2112,7 @@
   </p:cSld>
   <p:clrMap bg1="lt1" tx1="dk1" bg2="lt2" tx2="dk2" accent1="accent1" accent2="accent2" accent3="accent3" accent4="accent4" accent5="accent5" accent6="accent6" hlink="hlink" folHlink="folHlink"/>
   <p:sldLayoutIdLst>
-    <p:sldLayoutId xmlns:r="http://schemas.openxmlformats.org/officeDocument/2006/relationships" id="2147483649" r:id="Rf484222b88c74348"/>
+    <p:sldLayoutId xmlns:r="http://schemas.openxmlformats.org/officeDocument/2006/relationships" id="2147483649" r:id="R1c202630f0004b71"/>
   </p:sldLayoutIdLst>
   <p:hf sldNum="0" hdr="0" ftr="0" dt="0"/>
   <p:txStyles>
@@ -2666,7 +2683,7 @@
           <p:cNvPr id="2" name="Shape 0">
             <a:extLst xmlns:a="http://schemas.openxmlformats.org/drawingml/2006/main">
               <a:ext uri="{FF2B5EF4-FFF2-40B4-BE49-F238E27FC236}">
-                <a16:creationId xmlns:a16="http://schemas.microsoft.com/office/drawing/2014/main" id="{52D89CFD-1EA4-4442-8227-4F7A678644D5}"/>
+                <a16:creationId xmlns:a16="http://schemas.microsoft.com/office/drawing/2014/main" id="{5A4BDF23-DFD8-4A17-83DE-8D89E74D31F8}"/>
               </a:ext>
             </a:extLst>
           </p:cNvPr>
@@ -2699,7 +2716,7 @@
           <p:cNvPr id="3" name="Shape 1">
             <a:extLst xmlns:a="http://schemas.openxmlformats.org/drawingml/2006/main">
               <a:ext uri="{FF2B5EF4-FFF2-40B4-BE49-F238E27FC236}">
-                <a16:creationId xmlns:a16="http://schemas.microsoft.com/office/drawing/2014/main" id="{0898C9EA-1A09-4411-B625-AEBC834FE8DC}"/>
+                <a16:creationId xmlns:a16="http://schemas.microsoft.com/office/drawing/2014/main" id="{AFFA43CD-CC1F-47DB-AEB5-968446741A33}"/>
               </a:ext>
             </a:extLst>
           </p:cNvPr>
@@ -2738,7 +2755,7 @@
           <p:nvPr/>
         </p:nvPicPr>
         <p:blipFill>
-          <a:blip xmlns:r="http://schemas.openxmlformats.org/officeDocument/2006/relationships" xmlns:a="http://schemas.openxmlformats.org/drawingml/2006/main" r:embed="R95bd07bad6a24f20"/>
+          <a:blip xmlns:r="http://schemas.openxmlformats.org/officeDocument/2006/relationships" xmlns:a="http://schemas.openxmlformats.org/drawingml/2006/main" r:embed="R48fc2610ad4d496c"/>
           <a:stretch xmlns:a="http://schemas.openxmlformats.org/drawingml/2006/main">
             <a:fillRect l="0" t="0" r="0" b="0"/>
           </a:stretch>
@@ -2758,7 +2775,7 @@
           <p:cNvPr id="5" name="Shape 2">
             <a:extLst xmlns:a="http://schemas.openxmlformats.org/drawingml/2006/main">
               <a:ext uri="{FF2B5EF4-FFF2-40B4-BE49-F238E27FC236}">
-                <a16:creationId xmlns:a16="http://schemas.microsoft.com/office/drawing/2014/main" id="{BC3BA958-FE36-40BA-9764-BF4355DBD0A8}"/>
+                <a16:creationId xmlns:a16="http://schemas.microsoft.com/office/drawing/2014/main" id="{0D9B947A-7BFC-4C5B-8F6E-9111208F4269}"/>
               </a:ext>
             </a:extLst>
           </p:cNvPr>
@@ -2791,7 +2808,7 @@
           <p:cNvPr id="6" name="Text 3">
             <a:extLst xmlns:a="http://schemas.openxmlformats.org/drawingml/2006/main">
               <a:ext uri="{FF2B5EF4-FFF2-40B4-BE49-F238E27FC236}">
-                <a16:creationId xmlns:a16="http://schemas.microsoft.com/office/drawing/2014/main" id="{B7383F5A-F50C-4BE1-A502-89DD98F36C0C}"/>
+                <a16:creationId xmlns:a16="http://schemas.microsoft.com/office/drawing/2014/main" id="{3F8401EC-7DDE-46C6-8BA2-7FD3E71171A2}"/>
               </a:ext>
             </a:extLst>
           </p:cNvPr>
@@ -2838,7 +2855,7 @@
           <p:cNvPr id="7" name="Shape 4">
             <a:extLst xmlns:a="http://schemas.openxmlformats.org/drawingml/2006/main">
               <a:ext uri="{FF2B5EF4-FFF2-40B4-BE49-F238E27FC236}">
-                <a16:creationId xmlns:a16="http://schemas.microsoft.com/office/drawing/2014/main" id="{D4428CFC-8822-4691-A852-752750195881}"/>
+                <a16:creationId xmlns:a16="http://schemas.microsoft.com/office/drawing/2014/main" id="{986E5DCF-D5BA-4DC6-B780-8878AFDD85B1}"/>
               </a:ext>
             </a:extLst>
           </p:cNvPr>
@@ -2871,7 +2888,7 @@
           <p:cNvPr id="8" name="Text 5">
             <a:extLst xmlns:a="http://schemas.openxmlformats.org/drawingml/2006/main">
               <a:ext uri="{FF2B5EF4-FFF2-40B4-BE49-F238E27FC236}">
-                <a16:creationId xmlns:a16="http://schemas.microsoft.com/office/drawing/2014/main" id="{048B475C-9FC6-4B3B-8BC2-D750CC902C47}"/>
+                <a16:creationId xmlns:a16="http://schemas.microsoft.com/office/drawing/2014/main" id="{CE96765D-B2C6-439A-B880-93F651951C99}"/>
               </a:ext>
             </a:extLst>
           </p:cNvPr>
@@ -2922,7 +2939,7 @@
           <p:nvPr/>
         </p:nvPicPr>
         <p:blipFill>
-          <a:blip xmlns:r="http://schemas.openxmlformats.org/officeDocument/2006/relationships" xmlns:a="http://schemas.openxmlformats.org/drawingml/2006/main" r:embed="Re06674cb0d654252"/>
+          <a:blip xmlns:r="http://schemas.openxmlformats.org/officeDocument/2006/relationships" xmlns:a="http://schemas.openxmlformats.org/drawingml/2006/main" r:embed="R9e1fd36c5fa04d12"/>
           <a:stretch xmlns:a="http://schemas.openxmlformats.org/drawingml/2006/main">
             <a:fillRect l="0" t="0" r="0" b="0"/>
           </a:stretch>
@@ -2942,7 +2959,7 @@
           <p:cNvPr id="10" name="Text 6">
             <a:extLst xmlns:a="http://schemas.openxmlformats.org/drawingml/2006/main">
               <a:ext uri="{FF2B5EF4-FFF2-40B4-BE49-F238E27FC236}">
-                <a16:creationId xmlns:a16="http://schemas.microsoft.com/office/drawing/2014/main" id="{F0F6485E-1D44-4759-84A1-D679E3EB709F}"/>
+                <a16:creationId xmlns:a16="http://schemas.microsoft.com/office/drawing/2014/main" id="{E9EF86E0-C753-4E70-A312-28D2AAA0F523}"/>
               </a:ext>
             </a:extLst>
           </p:cNvPr>
@@ -2989,7 +3006,7 @@
           <p:cNvPr id="11" name="Text 7">
             <a:extLst xmlns:a="http://schemas.openxmlformats.org/drawingml/2006/main">
               <a:ext uri="{FF2B5EF4-FFF2-40B4-BE49-F238E27FC236}">
-                <a16:creationId xmlns:a16="http://schemas.microsoft.com/office/drawing/2014/main" id="{A3E993E7-655E-4EEF-AB98-93B6DDD4EF79}"/>
+                <a16:creationId xmlns:a16="http://schemas.microsoft.com/office/drawing/2014/main" id="{76892DAB-76C1-4B1D-8403-199C40F6B03C}"/>
               </a:ext>
             </a:extLst>
           </p:cNvPr>
@@ -3036,7 +3053,7 @@
           <p:cNvPr id="12" name="Shape 8">
             <a:extLst xmlns:a="http://schemas.openxmlformats.org/drawingml/2006/main">
               <a:ext uri="{FF2B5EF4-FFF2-40B4-BE49-F238E27FC236}">
-                <a16:creationId xmlns:a16="http://schemas.microsoft.com/office/drawing/2014/main" id="{7287AA3E-C236-49EB-AAFA-74E30F35EF2C}"/>
+                <a16:creationId xmlns:a16="http://schemas.microsoft.com/office/drawing/2014/main" id="{ED4CF059-3D84-469A-AD6F-C8F54FA6B7FD}"/>
               </a:ext>
             </a:extLst>
           </p:cNvPr>
@@ -3071,7 +3088,7 @@
           <p:cNvPr id="13" name="Text 9">
             <a:extLst xmlns:a="http://schemas.openxmlformats.org/drawingml/2006/main">
               <a:ext uri="{FF2B5EF4-FFF2-40B4-BE49-F238E27FC236}">
-                <a16:creationId xmlns:a16="http://schemas.microsoft.com/office/drawing/2014/main" id="{EF24F5DC-BB76-4A6C-9E6B-C2F25B7F5003}"/>
+                <a16:creationId xmlns:a16="http://schemas.microsoft.com/office/drawing/2014/main" id="{F811D1E5-31FC-4B7C-973C-482CD824F346}"/>
               </a:ext>
             </a:extLst>
           </p:cNvPr>
@@ -3118,7 +3135,7 @@
           <p:cNvPr id="14" name="Shape 10">
             <a:extLst xmlns:a="http://schemas.openxmlformats.org/drawingml/2006/main">
               <a:ext uri="{FF2B5EF4-FFF2-40B4-BE49-F238E27FC236}">
-                <a16:creationId xmlns:a16="http://schemas.microsoft.com/office/drawing/2014/main" id="{C4022C6F-5358-42E1-9642-D880BE7EA486}"/>
+                <a16:creationId xmlns:a16="http://schemas.microsoft.com/office/drawing/2014/main" id="{E6FD5049-A4AD-4568-812E-F6CB923CC3AF}"/>
               </a:ext>
             </a:extLst>
           </p:cNvPr>
@@ -3153,7 +3170,7 @@
           <p:cNvPr id="15" name="Text 11">
             <a:extLst xmlns:a="http://schemas.openxmlformats.org/drawingml/2006/main">
               <a:ext uri="{FF2B5EF4-FFF2-40B4-BE49-F238E27FC236}">
-                <a16:creationId xmlns:a16="http://schemas.microsoft.com/office/drawing/2014/main" id="{670A67C2-5235-45E1-9EEB-41E436A03A83}"/>
+                <a16:creationId xmlns:a16="http://schemas.microsoft.com/office/drawing/2014/main" id="{DFE6A8AE-82CF-466C-9515-1F690C7F2044}"/>
               </a:ext>
             </a:extLst>
           </p:cNvPr>
@@ -3200,7 +3217,7 @@
           <p:cNvPr id="16" name="Shape 12">
             <a:extLst xmlns:a="http://schemas.openxmlformats.org/drawingml/2006/main">
               <a:ext uri="{FF2B5EF4-FFF2-40B4-BE49-F238E27FC236}">
-                <a16:creationId xmlns:a16="http://schemas.microsoft.com/office/drawing/2014/main" id="{566B58DF-1767-44DD-A70E-0216C13D74DE}"/>
+                <a16:creationId xmlns:a16="http://schemas.microsoft.com/office/drawing/2014/main" id="{477F0337-7F40-4D97-98E7-DEF3BC57179A}"/>
               </a:ext>
             </a:extLst>
           </p:cNvPr>
@@ -3235,7 +3252,7 @@
           <p:cNvPr id="17" name="Text 13">
             <a:extLst xmlns:a="http://schemas.openxmlformats.org/drawingml/2006/main">
               <a:ext uri="{FF2B5EF4-FFF2-40B4-BE49-F238E27FC236}">
-                <a16:creationId xmlns:a16="http://schemas.microsoft.com/office/drawing/2014/main" id="{DE6664FD-CB1B-4588-8C98-6EE6C34688D2}"/>
+                <a16:creationId xmlns:a16="http://schemas.microsoft.com/office/drawing/2014/main" id="{49BDE66F-9101-411C-A938-156B11A3830F}"/>
               </a:ext>
             </a:extLst>
           </p:cNvPr>
@@ -3282,7 +3299,7 @@
           <p:cNvPr id="18" name="Shape 14">
             <a:extLst xmlns:a="http://schemas.openxmlformats.org/drawingml/2006/main">
               <a:ext uri="{FF2B5EF4-FFF2-40B4-BE49-F238E27FC236}">
-                <a16:creationId xmlns:a16="http://schemas.microsoft.com/office/drawing/2014/main" id="{35BE6B28-3193-4837-B50B-1613E2D291F8}"/>
+                <a16:creationId xmlns:a16="http://schemas.microsoft.com/office/drawing/2014/main" id="{39C3514E-2AD7-4905-9113-82823494C6F2}"/>
               </a:ext>
             </a:extLst>
           </p:cNvPr>
@@ -3317,7 +3334,7 @@
           <p:cNvPr id="19" name="Text 15">
             <a:extLst xmlns:a="http://schemas.openxmlformats.org/drawingml/2006/main">
               <a:ext uri="{FF2B5EF4-FFF2-40B4-BE49-F238E27FC236}">
-                <a16:creationId xmlns:a16="http://schemas.microsoft.com/office/drawing/2014/main" id="{0123ED18-7666-4973-9FEF-D470C013F418}"/>
+                <a16:creationId xmlns:a16="http://schemas.microsoft.com/office/drawing/2014/main" id="{57C9C1DA-8B82-4072-B12C-A10ACE9B2857}"/>
               </a:ext>
             </a:extLst>
           </p:cNvPr>
@@ -3364,7 +3381,7 @@
           <p:cNvPr id="20" name="Shape 16">
             <a:extLst xmlns:a="http://schemas.openxmlformats.org/drawingml/2006/main">
               <a:ext uri="{FF2B5EF4-FFF2-40B4-BE49-F238E27FC236}">
-                <a16:creationId xmlns:a16="http://schemas.microsoft.com/office/drawing/2014/main" id="{8B6D3B32-8010-4810-AA6D-7E62277CBE83}"/>
+                <a16:creationId xmlns:a16="http://schemas.microsoft.com/office/drawing/2014/main" id="{E8047C08-22B3-4C8E-9A4D-6057FD32CB51}"/>
               </a:ext>
             </a:extLst>
           </p:cNvPr>
@@ -3399,7 +3416,7 @@
           <p:cNvPr id="21" name="Text 17">
             <a:extLst xmlns:a="http://schemas.openxmlformats.org/drawingml/2006/main">
               <a:ext uri="{FF2B5EF4-FFF2-40B4-BE49-F238E27FC236}">
-                <a16:creationId xmlns:a16="http://schemas.microsoft.com/office/drawing/2014/main" id="{1633E2FD-5A57-40B0-B60D-3290AD821FE0}"/>
+                <a16:creationId xmlns:a16="http://schemas.microsoft.com/office/drawing/2014/main" id="{E7CFCFE8-3DC9-4102-8E78-634B256AAF1F}"/>
               </a:ext>
             </a:extLst>
           </p:cNvPr>
@@ -3446,7 +3463,7 @@
           <p:cNvPr id="22" name="Text 18">
             <a:extLst xmlns:a="http://schemas.openxmlformats.org/drawingml/2006/main">
               <a:ext uri="{FF2B5EF4-FFF2-40B4-BE49-F238E27FC236}">
-                <a16:creationId xmlns:a16="http://schemas.microsoft.com/office/drawing/2014/main" id="{1D8EBF0B-45AF-43FB-B3EC-54AFF66F5DA4}"/>
+                <a16:creationId xmlns:a16="http://schemas.microsoft.com/office/drawing/2014/main" id="{3F1B0535-9CB4-4A7D-A9B3-F2948636801F}"/>
               </a:ext>
             </a:extLst>
           </p:cNvPr>
@@ -3493,7 +3510,7 @@
           <p:cNvPr id="23" name="Text 19">
             <a:extLst xmlns:a="http://schemas.openxmlformats.org/drawingml/2006/main">
               <a:ext uri="{FF2B5EF4-FFF2-40B4-BE49-F238E27FC236}">
-                <a16:creationId xmlns:a16="http://schemas.microsoft.com/office/drawing/2014/main" id="{D289C999-91FB-45A7-8CB0-AA066F9565A9}"/>
+                <a16:creationId xmlns:a16="http://schemas.microsoft.com/office/drawing/2014/main" id="{BF40DF44-F574-49D0-870F-FED44124805C}"/>
               </a:ext>
             </a:extLst>
           </p:cNvPr>
@@ -3540,7 +3557,7 @@
           <p:cNvPr id="24" name="Text 20">
             <a:extLst xmlns:a="http://schemas.openxmlformats.org/drawingml/2006/main">
               <a:ext uri="{FF2B5EF4-FFF2-40B4-BE49-F238E27FC236}">
-                <a16:creationId xmlns:a16="http://schemas.microsoft.com/office/drawing/2014/main" id="{CCB11B92-FDE2-4C8A-BE4B-4194F6BAAF86}"/>
+                <a16:creationId xmlns:a16="http://schemas.microsoft.com/office/drawing/2014/main" id="{48078A19-F20C-4C43-8FD0-3BE58120BABA}"/>
               </a:ext>
             </a:extLst>
           </p:cNvPr>
@@ -3585,7 +3602,7 @@
     </p:spTree>
     <p:extLst>
       <p:ext uri="{BB962C8B-B14F-4D97-AF65-F5344CB8AC3E}">
-        <p14:creationId xmlns:p14="http://schemas.microsoft.com/office/powerpoint/2010/main" val="1390719257"/>
+        <p14:creationId xmlns:p14="http://schemas.microsoft.com/office/powerpoint/2010/main" val="1228691379"/>
       </p:ext>
     </p:extLst>
   </p:cSld>
@@ -3616,7 +3633,7 @@
           <p:cNvPr id="2" name="Text 0">
             <a:extLst xmlns:a="http://schemas.openxmlformats.org/drawingml/2006/main">
               <a:ext uri="{FF2B5EF4-FFF2-40B4-BE49-F238E27FC236}">
-                <a16:creationId xmlns:a16="http://schemas.microsoft.com/office/drawing/2014/main" id="{7CE76CA1-D5B7-4FFD-A319-9A312C692021}"/>
+                <a16:creationId xmlns:a16="http://schemas.microsoft.com/office/drawing/2014/main" id="{DDC36DD9-70FD-43F7-A29E-8AC3F9045EAA}"/>
               </a:ext>
             </a:extLst>
           </p:cNvPr>
@@ -3663,7 +3680,7 @@
           <p:cNvPr id="3" name="Text 1">
             <a:extLst xmlns:a="http://schemas.openxmlformats.org/drawingml/2006/main">
               <a:ext uri="{FF2B5EF4-FFF2-40B4-BE49-F238E27FC236}">
-                <a16:creationId xmlns:a16="http://schemas.microsoft.com/office/drawing/2014/main" id="{1E23DA71-36B4-4F3B-A909-969739E2EF92}"/>
+                <a16:creationId xmlns:a16="http://schemas.microsoft.com/office/drawing/2014/main" id="{C7D3B8B8-63F5-4C7F-804F-00D4373A4398}"/>
               </a:ext>
             </a:extLst>
           </p:cNvPr>
@@ -3710,7 +3727,7 @@
           <p:cNvPr id="4" name="Shape 2">
             <a:extLst xmlns:a="http://schemas.openxmlformats.org/drawingml/2006/main">
               <a:ext uri="{FF2B5EF4-FFF2-40B4-BE49-F238E27FC236}">
-                <a16:creationId xmlns:a16="http://schemas.microsoft.com/office/drawing/2014/main" id="{75E6AA3A-E17A-4DBF-A9A3-4B4860CBA7EA}"/>
+                <a16:creationId xmlns:a16="http://schemas.microsoft.com/office/drawing/2014/main" id="{D20EA43E-66E0-4693-8F72-5EB1C5142593}"/>
               </a:ext>
             </a:extLst>
           </p:cNvPr>
@@ -3745,7 +3762,7 @@
           <p:cNvPr id="5" name="Text 3">
             <a:extLst xmlns:a="http://schemas.openxmlformats.org/drawingml/2006/main">
               <a:ext uri="{FF2B5EF4-FFF2-40B4-BE49-F238E27FC236}">
-                <a16:creationId xmlns:a16="http://schemas.microsoft.com/office/drawing/2014/main" id="{53446072-09E7-44F1-9A25-1492AE72C036}"/>
+                <a16:creationId xmlns:a16="http://schemas.microsoft.com/office/drawing/2014/main" id="{43520A45-151D-47FE-8525-1513E2537AE6}"/>
               </a:ext>
             </a:extLst>
           </p:cNvPr>
@@ -3792,7 +3809,7 @@
           <p:cNvPr id="6" name="Shape 4">
             <a:extLst xmlns:a="http://schemas.openxmlformats.org/drawingml/2006/main">
               <a:ext uri="{FF2B5EF4-FFF2-40B4-BE49-F238E27FC236}">
-                <a16:creationId xmlns:a16="http://schemas.microsoft.com/office/drawing/2014/main" id="{8F1DC16E-67B2-412B-B213-1610C88EA4BF}"/>
+                <a16:creationId xmlns:a16="http://schemas.microsoft.com/office/drawing/2014/main" id="{4370B399-F4EC-4D3D-98D7-B91C637D5181}"/>
               </a:ext>
             </a:extLst>
           </p:cNvPr>
@@ -3823,7 +3840,7 @@
           <p:cNvPr id="7" name="Shape 5">
             <a:extLst xmlns:a="http://schemas.openxmlformats.org/drawingml/2006/main">
               <a:ext uri="{FF2B5EF4-FFF2-40B4-BE49-F238E27FC236}">
-                <a16:creationId xmlns:a16="http://schemas.microsoft.com/office/drawing/2014/main" id="{17B3D367-2A49-4364-8AC3-9F0F8F894FC1}"/>
+                <a16:creationId xmlns:a16="http://schemas.microsoft.com/office/drawing/2014/main" id="{C24EE178-30C6-4319-8D0A-617EE26CD497}"/>
               </a:ext>
             </a:extLst>
           </p:cNvPr>
@@ -3858,7 +3875,7 @@
           <p:cNvPr id="8" name="Shape 6">
             <a:extLst xmlns:a="http://schemas.openxmlformats.org/drawingml/2006/main">
               <a:ext uri="{FF2B5EF4-FFF2-40B4-BE49-F238E27FC236}">
-                <a16:creationId xmlns:a16="http://schemas.microsoft.com/office/drawing/2014/main" id="{2B170D83-723D-45B3-8CD2-4D37ED4DF2ED}"/>
+                <a16:creationId xmlns:a16="http://schemas.microsoft.com/office/drawing/2014/main" id="{F13F19EE-D002-41B7-A514-D69F403F9697}"/>
               </a:ext>
             </a:extLst>
           </p:cNvPr>
@@ -3893,7 +3910,7 @@
           <p:cNvPr id="9" name="Text 7">
             <a:extLst xmlns:a="http://schemas.openxmlformats.org/drawingml/2006/main">
               <a:ext uri="{FF2B5EF4-FFF2-40B4-BE49-F238E27FC236}">
-                <a16:creationId xmlns:a16="http://schemas.microsoft.com/office/drawing/2014/main" id="{20DBDB81-FBE6-481C-A6FA-25EC44F30816}"/>
+                <a16:creationId xmlns:a16="http://schemas.microsoft.com/office/drawing/2014/main" id="{9EFED68B-29E4-4B89-92C8-3F0BD9EE46E2}"/>
               </a:ext>
             </a:extLst>
           </p:cNvPr>
@@ -3940,7 +3957,7 @@
           <p:cNvPr id="10" name="Text 8">
             <a:extLst xmlns:a="http://schemas.openxmlformats.org/drawingml/2006/main">
               <a:ext uri="{FF2B5EF4-FFF2-40B4-BE49-F238E27FC236}">
-                <a16:creationId xmlns:a16="http://schemas.microsoft.com/office/drawing/2014/main" id="{F2ED80D1-9B9A-4FC0-802A-32F45FA59D2F}"/>
+                <a16:creationId xmlns:a16="http://schemas.microsoft.com/office/drawing/2014/main" id="{345DB239-D8C6-4590-835C-E0D5B1260AFA}"/>
               </a:ext>
             </a:extLst>
           </p:cNvPr>
@@ -3987,7 +4004,7 @@
           <p:cNvPr id="11" name="Text 9">
             <a:extLst xmlns:a="http://schemas.openxmlformats.org/drawingml/2006/main">
               <a:ext uri="{FF2B5EF4-FFF2-40B4-BE49-F238E27FC236}">
-                <a16:creationId xmlns:a16="http://schemas.microsoft.com/office/drawing/2014/main" id="{D300C368-06DE-49C5-B6A5-413B2844085B}"/>
+                <a16:creationId xmlns:a16="http://schemas.microsoft.com/office/drawing/2014/main" id="{31BC2F33-900D-4920-A2D7-5AB119C1DE83}"/>
               </a:ext>
             </a:extLst>
           </p:cNvPr>
@@ -4034,7 +4051,7 @@
           <p:cNvPr id="12" name="Text 10">
             <a:extLst xmlns:a="http://schemas.openxmlformats.org/drawingml/2006/main">
               <a:ext uri="{FF2B5EF4-FFF2-40B4-BE49-F238E27FC236}">
-                <a16:creationId xmlns:a16="http://schemas.microsoft.com/office/drawing/2014/main" id="{66541E52-3203-42E2-8EA9-5B70A012C11F}"/>
+                <a16:creationId xmlns:a16="http://schemas.microsoft.com/office/drawing/2014/main" id="{D838AD1C-AF01-4F1E-8E27-36B33530F38F}"/>
               </a:ext>
             </a:extLst>
           </p:cNvPr>
@@ -4081,7 +4098,7 @@
           <p:cNvPr id="13" name="Text 11">
             <a:extLst xmlns:a="http://schemas.openxmlformats.org/drawingml/2006/main">
               <a:ext uri="{FF2B5EF4-FFF2-40B4-BE49-F238E27FC236}">
-                <a16:creationId xmlns:a16="http://schemas.microsoft.com/office/drawing/2014/main" id="{ACB38532-72DB-45B6-BB9C-60F93CBCF8BE}"/>
+                <a16:creationId xmlns:a16="http://schemas.microsoft.com/office/drawing/2014/main" id="{7753293D-6D62-495D-8FE0-30F91DCF4044}"/>
               </a:ext>
             </a:extLst>
           </p:cNvPr>
@@ -4128,7 +4145,7 @@
           <p:cNvPr id="14" name="Shape 12">
             <a:extLst xmlns:a="http://schemas.openxmlformats.org/drawingml/2006/main">
               <a:ext uri="{FF2B5EF4-FFF2-40B4-BE49-F238E27FC236}">
-                <a16:creationId xmlns:a16="http://schemas.microsoft.com/office/drawing/2014/main" id="{588B004E-6567-4EC4-B98D-967FEA5C69B8}"/>
+                <a16:creationId xmlns:a16="http://schemas.microsoft.com/office/drawing/2014/main" id="{A653DBAF-F6FD-4E5D-86E5-5E5A753B45E6}"/>
               </a:ext>
             </a:extLst>
           </p:cNvPr>
@@ -4163,7 +4180,7 @@
           <p:cNvPr id="15" name="Shape 13">
             <a:extLst xmlns:a="http://schemas.openxmlformats.org/drawingml/2006/main">
               <a:ext uri="{FF2B5EF4-FFF2-40B4-BE49-F238E27FC236}">
-                <a16:creationId xmlns:a16="http://schemas.microsoft.com/office/drawing/2014/main" id="{30F8ED0C-5E8B-4676-8C2D-97B75C894AF5}"/>
+                <a16:creationId xmlns:a16="http://schemas.microsoft.com/office/drawing/2014/main" id="{8B0DB20A-E429-4A2E-9751-F918B021B45D}"/>
               </a:ext>
             </a:extLst>
           </p:cNvPr>
@@ -4198,7 +4215,7 @@
           <p:cNvPr id="16" name="Text 14">
             <a:extLst xmlns:a="http://schemas.openxmlformats.org/drawingml/2006/main">
               <a:ext uri="{FF2B5EF4-FFF2-40B4-BE49-F238E27FC236}">
-                <a16:creationId xmlns:a16="http://schemas.microsoft.com/office/drawing/2014/main" id="{A9842AC7-2FB2-48F7-8E59-274E92523ED3}"/>
+                <a16:creationId xmlns:a16="http://schemas.microsoft.com/office/drawing/2014/main" id="{6F82C233-61BF-4256-B772-1B5C356FED10}"/>
               </a:ext>
             </a:extLst>
           </p:cNvPr>
@@ -4245,7 +4262,7 @@
           <p:cNvPr id="17" name="Text 15">
             <a:extLst xmlns:a="http://schemas.openxmlformats.org/drawingml/2006/main">
               <a:ext uri="{FF2B5EF4-FFF2-40B4-BE49-F238E27FC236}">
-                <a16:creationId xmlns:a16="http://schemas.microsoft.com/office/drawing/2014/main" id="{A5B25389-11E9-48CD-9CD9-B09C7DA44312}"/>
+                <a16:creationId xmlns:a16="http://schemas.microsoft.com/office/drawing/2014/main" id="{DF28E833-73F3-43AB-A462-11F76EED3E97}"/>
               </a:ext>
             </a:extLst>
           </p:cNvPr>
@@ -4292,7 +4309,7 @@
           <p:cNvPr id="18" name="Text 16">
             <a:extLst xmlns:a="http://schemas.openxmlformats.org/drawingml/2006/main">
               <a:ext uri="{FF2B5EF4-FFF2-40B4-BE49-F238E27FC236}">
-                <a16:creationId xmlns:a16="http://schemas.microsoft.com/office/drawing/2014/main" id="{30311814-92D8-45E7-A6B4-F9B3D8A70C44}"/>
+                <a16:creationId xmlns:a16="http://schemas.microsoft.com/office/drawing/2014/main" id="{741FE704-D15E-4895-A3F9-32882A0D03FA}"/>
               </a:ext>
             </a:extLst>
           </p:cNvPr>
@@ -4339,7 +4356,7 @@
           <p:cNvPr id="19" name="Text 17">
             <a:extLst xmlns:a="http://schemas.openxmlformats.org/drawingml/2006/main">
               <a:ext uri="{FF2B5EF4-FFF2-40B4-BE49-F238E27FC236}">
-                <a16:creationId xmlns:a16="http://schemas.microsoft.com/office/drawing/2014/main" id="{FC369838-84D0-4787-ADA5-07EEECAC86B1}"/>
+                <a16:creationId xmlns:a16="http://schemas.microsoft.com/office/drawing/2014/main" id="{B5ACC8B1-4953-4E81-93AD-AAF5273996CB}"/>
               </a:ext>
             </a:extLst>
           </p:cNvPr>
@@ -4386,7 +4403,7 @@
           <p:cNvPr id="20" name="Text 18">
             <a:extLst xmlns:a="http://schemas.openxmlformats.org/drawingml/2006/main">
               <a:ext uri="{FF2B5EF4-FFF2-40B4-BE49-F238E27FC236}">
-                <a16:creationId xmlns:a16="http://schemas.microsoft.com/office/drawing/2014/main" id="{5375445D-D7D7-4B31-8D5E-66CEBD090521}"/>
+                <a16:creationId xmlns:a16="http://schemas.microsoft.com/office/drawing/2014/main" id="{0A8FC643-E3A2-4F55-ABAC-589FCE1081B1}"/>
               </a:ext>
             </a:extLst>
           </p:cNvPr>
@@ -4433,7 +4450,7 @@
           <p:cNvPr id="21" name="Shape 19">
             <a:extLst xmlns:a="http://schemas.openxmlformats.org/drawingml/2006/main">
               <a:ext uri="{FF2B5EF4-FFF2-40B4-BE49-F238E27FC236}">
-                <a16:creationId xmlns:a16="http://schemas.microsoft.com/office/drawing/2014/main" id="{EFB330A4-794C-4895-8312-122C3AF8F1E9}"/>
+                <a16:creationId xmlns:a16="http://schemas.microsoft.com/office/drawing/2014/main" id="{47239371-4A4D-47CA-9970-EE69116C1D0C}"/>
               </a:ext>
             </a:extLst>
           </p:cNvPr>
@@ -4468,7 +4485,7 @@
           <p:cNvPr id="22" name="Shape 20">
             <a:extLst xmlns:a="http://schemas.openxmlformats.org/drawingml/2006/main">
               <a:ext uri="{FF2B5EF4-FFF2-40B4-BE49-F238E27FC236}">
-                <a16:creationId xmlns:a16="http://schemas.microsoft.com/office/drawing/2014/main" id="{9B868407-914E-4378-9B33-4581EF1278C2}"/>
+                <a16:creationId xmlns:a16="http://schemas.microsoft.com/office/drawing/2014/main" id="{82C376CC-353B-43C3-8B64-1F821BC6117F}"/>
               </a:ext>
             </a:extLst>
           </p:cNvPr>
@@ -4503,7 +4520,7 @@
           <p:cNvPr id="23" name="Text 21">
             <a:extLst xmlns:a="http://schemas.openxmlformats.org/drawingml/2006/main">
               <a:ext uri="{FF2B5EF4-FFF2-40B4-BE49-F238E27FC236}">
-                <a16:creationId xmlns:a16="http://schemas.microsoft.com/office/drawing/2014/main" id="{EC31D20A-A9ED-4530-94B0-67C8B1698EBB}"/>
+                <a16:creationId xmlns:a16="http://schemas.microsoft.com/office/drawing/2014/main" id="{A9C845A3-6B38-4A9F-BF88-4B9035605F0D}"/>
               </a:ext>
             </a:extLst>
           </p:cNvPr>
@@ -4550,7 +4567,7 @@
           <p:cNvPr id="24" name="Text 22">
             <a:extLst xmlns:a="http://schemas.openxmlformats.org/drawingml/2006/main">
               <a:ext uri="{FF2B5EF4-FFF2-40B4-BE49-F238E27FC236}">
-                <a16:creationId xmlns:a16="http://schemas.microsoft.com/office/drawing/2014/main" id="{4F65BD5B-760D-47AC-B3B6-5772393C2623}"/>
+                <a16:creationId xmlns:a16="http://schemas.microsoft.com/office/drawing/2014/main" id="{0D61FD3A-8E54-4F10-B286-54619573A19A}"/>
               </a:ext>
             </a:extLst>
           </p:cNvPr>
@@ -4597,7 +4614,7 @@
           <p:cNvPr id="25" name="Text 23">
             <a:extLst xmlns:a="http://schemas.openxmlformats.org/drawingml/2006/main">
               <a:ext uri="{FF2B5EF4-FFF2-40B4-BE49-F238E27FC236}">
-                <a16:creationId xmlns:a16="http://schemas.microsoft.com/office/drawing/2014/main" id="{CAE6B60D-4F71-4E42-8E9D-6726FFD4EE41}"/>
+                <a16:creationId xmlns:a16="http://schemas.microsoft.com/office/drawing/2014/main" id="{E0E59A3F-3051-49D6-9532-BDA50C39DD2E}"/>
               </a:ext>
             </a:extLst>
           </p:cNvPr>
@@ -4644,7 +4661,7 @@
           <p:cNvPr id="26" name="Text 24">
             <a:extLst xmlns:a="http://schemas.openxmlformats.org/drawingml/2006/main">
               <a:ext uri="{FF2B5EF4-FFF2-40B4-BE49-F238E27FC236}">
-                <a16:creationId xmlns:a16="http://schemas.microsoft.com/office/drawing/2014/main" id="{D243A666-ED3E-4B8E-BCDD-8358759294F1}"/>
+                <a16:creationId xmlns:a16="http://schemas.microsoft.com/office/drawing/2014/main" id="{F80FEC5A-681C-4DD5-9DE8-1C2FA2EC199D}"/>
               </a:ext>
             </a:extLst>
           </p:cNvPr>
@@ -4691,7 +4708,7 @@
           <p:cNvPr id="27" name="Text 25">
             <a:extLst xmlns:a="http://schemas.openxmlformats.org/drawingml/2006/main">
               <a:ext uri="{FF2B5EF4-FFF2-40B4-BE49-F238E27FC236}">
-                <a16:creationId xmlns:a16="http://schemas.microsoft.com/office/drawing/2014/main" id="{1CD6DF83-80ED-40B6-8393-61939A34A7B7}"/>
+                <a16:creationId xmlns:a16="http://schemas.microsoft.com/office/drawing/2014/main" id="{9A8588CD-A7B7-49E3-8F20-174AB936AA4A}"/>
               </a:ext>
             </a:extLst>
           </p:cNvPr>
@@ -4738,7 +4755,7 @@
           <p:cNvPr id="28" name="Shape 26">
             <a:extLst xmlns:a="http://schemas.openxmlformats.org/drawingml/2006/main">
               <a:ext uri="{FF2B5EF4-FFF2-40B4-BE49-F238E27FC236}">
-                <a16:creationId xmlns:a16="http://schemas.microsoft.com/office/drawing/2014/main" id="{E20AE4C4-A4AB-4D22-8030-E3314E364047}"/>
+                <a16:creationId xmlns:a16="http://schemas.microsoft.com/office/drawing/2014/main" id="{F1FD3557-CC6A-409F-A8DE-761EE9754401}"/>
               </a:ext>
             </a:extLst>
           </p:cNvPr>
@@ -4773,7 +4790,7 @@
           <p:cNvPr id="29" name="Text 27">
             <a:extLst xmlns:a="http://schemas.openxmlformats.org/drawingml/2006/main">
               <a:ext uri="{FF2B5EF4-FFF2-40B4-BE49-F238E27FC236}">
-                <a16:creationId xmlns:a16="http://schemas.microsoft.com/office/drawing/2014/main" id="{0C8D647A-87D6-4881-8C2D-90A874C4CD48}"/>
+                <a16:creationId xmlns:a16="http://schemas.microsoft.com/office/drawing/2014/main" id="{1D6B0ADC-5A46-43A6-BAEF-10064DFBACBE}"/>
               </a:ext>
             </a:extLst>
           </p:cNvPr>
@@ -4820,7 +4837,7 @@
           <p:cNvPr id="30" name="Text 28">
             <a:extLst xmlns:a="http://schemas.openxmlformats.org/drawingml/2006/main">
               <a:ext uri="{FF2B5EF4-FFF2-40B4-BE49-F238E27FC236}">
-                <a16:creationId xmlns:a16="http://schemas.microsoft.com/office/drawing/2014/main" id="{236C3E50-A06A-47A4-904D-98F39EB9F4F0}"/>
+                <a16:creationId xmlns:a16="http://schemas.microsoft.com/office/drawing/2014/main" id="{522CA0FC-629C-4B60-A5A2-E022B0D6C586}"/>
               </a:ext>
             </a:extLst>
           </p:cNvPr>
@@ -4867,7 +4884,7 @@
           <p:cNvPr id="31" name="Text 29">
             <a:extLst xmlns:a="http://schemas.openxmlformats.org/drawingml/2006/main">
               <a:ext uri="{FF2B5EF4-FFF2-40B4-BE49-F238E27FC236}">
-                <a16:creationId xmlns:a16="http://schemas.microsoft.com/office/drawing/2014/main" id="{E40970A2-39D4-4EA8-B130-7360D1230348}"/>
+                <a16:creationId xmlns:a16="http://schemas.microsoft.com/office/drawing/2014/main" id="{195D9D56-4FF9-4B9F-AEDA-D94496B3781C}"/>
               </a:ext>
             </a:extLst>
           </p:cNvPr>
@@ -4912,7 +4929,7 @@
     </p:spTree>
     <p:extLst>
       <p:ext uri="{BB962C8B-B14F-4D97-AF65-F5344CB8AC3E}">
-        <p14:creationId xmlns:p14="http://schemas.microsoft.com/office/powerpoint/2010/main" val="860789924"/>
+        <p14:creationId xmlns:p14="http://schemas.microsoft.com/office/powerpoint/2010/main" val="765543152"/>
       </p:ext>
     </p:extLst>
   </p:cSld>
@@ -4943,7 +4960,7 @@
           <p:cNvPr id="2" name="Text 0">
             <a:extLst xmlns:a="http://schemas.openxmlformats.org/drawingml/2006/main">
               <a:ext uri="{FF2B5EF4-FFF2-40B4-BE49-F238E27FC236}">
-                <a16:creationId xmlns:a16="http://schemas.microsoft.com/office/drawing/2014/main" id="{43733925-5497-4B1D-95A6-61191754368D}"/>
+                <a16:creationId xmlns:a16="http://schemas.microsoft.com/office/drawing/2014/main" id="{8677D26F-AAE4-4193-9EF2-6364E818F0E7}"/>
               </a:ext>
             </a:extLst>
           </p:cNvPr>
@@ -4990,7 +5007,7 @@
           <p:cNvPr id="3" name="Text 1">
             <a:extLst xmlns:a="http://schemas.openxmlformats.org/drawingml/2006/main">
               <a:ext uri="{FF2B5EF4-FFF2-40B4-BE49-F238E27FC236}">
-                <a16:creationId xmlns:a16="http://schemas.microsoft.com/office/drawing/2014/main" id="{F14ECC31-805B-4995-B046-6AD42BBF468A}"/>
+                <a16:creationId xmlns:a16="http://schemas.microsoft.com/office/drawing/2014/main" id="{6608D653-7558-4904-8529-7EE1DDAD3B19}"/>
               </a:ext>
             </a:extLst>
           </p:cNvPr>
@@ -5037,7 +5054,7 @@
           <p:cNvPr id="4" name="Shape 2">
             <a:extLst xmlns:a="http://schemas.openxmlformats.org/drawingml/2006/main">
               <a:ext uri="{FF2B5EF4-FFF2-40B4-BE49-F238E27FC236}">
-                <a16:creationId xmlns:a16="http://schemas.microsoft.com/office/drawing/2014/main" id="{306CF888-F7EC-45AD-9833-611BCB0E3E46}"/>
+                <a16:creationId xmlns:a16="http://schemas.microsoft.com/office/drawing/2014/main" id="{4463D5EE-17DE-4B71-9588-08FD63969D8F}"/>
               </a:ext>
             </a:extLst>
           </p:cNvPr>
@@ -5072,7 +5089,7 @@
           <p:cNvPr id="5" name="Text 3">
             <a:extLst xmlns:a="http://schemas.openxmlformats.org/drawingml/2006/main">
               <a:ext uri="{FF2B5EF4-FFF2-40B4-BE49-F238E27FC236}">
-                <a16:creationId xmlns:a16="http://schemas.microsoft.com/office/drawing/2014/main" id="{99FB63D5-CE79-4550-AC74-B52ACF3D43F2}"/>
+                <a16:creationId xmlns:a16="http://schemas.microsoft.com/office/drawing/2014/main" id="{11610A46-ED23-4736-8CF6-96526B61727C}"/>
               </a:ext>
             </a:extLst>
           </p:cNvPr>
@@ -5119,7 +5136,7 @@
           <p:cNvPr id="6" name="Shape 4">
             <a:extLst xmlns:a="http://schemas.openxmlformats.org/drawingml/2006/main">
               <a:ext uri="{FF2B5EF4-FFF2-40B4-BE49-F238E27FC236}">
-                <a16:creationId xmlns:a16="http://schemas.microsoft.com/office/drawing/2014/main" id="{A2B5806E-EEFF-46EA-B697-8C0B464BCC4F}"/>
+                <a16:creationId xmlns:a16="http://schemas.microsoft.com/office/drawing/2014/main" id="{A79171E4-593B-45A3-A18B-77F817AEA21C}"/>
               </a:ext>
             </a:extLst>
           </p:cNvPr>
@@ -5150,7 +5167,7 @@
           <p:cNvPr id="7" name="Shape 5">
             <a:extLst xmlns:a="http://schemas.openxmlformats.org/drawingml/2006/main">
               <a:ext uri="{FF2B5EF4-FFF2-40B4-BE49-F238E27FC236}">
-                <a16:creationId xmlns:a16="http://schemas.microsoft.com/office/drawing/2014/main" id="{96633842-AB5A-4683-B083-05FF4FA10C51}"/>
+                <a16:creationId xmlns:a16="http://schemas.microsoft.com/office/drawing/2014/main" id="{A7E59345-B667-4F2F-BBD1-2566F4BD8C02}"/>
               </a:ext>
             </a:extLst>
           </p:cNvPr>
@@ -5185,7 +5202,7 @@
           <p:cNvPr id="8" name="Text 6">
             <a:extLst xmlns:a="http://schemas.openxmlformats.org/drawingml/2006/main">
               <a:ext uri="{FF2B5EF4-FFF2-40B4-BE49-F238E27FC236}">
-                <a16:creationId xmlns:a16="http://schemas.microsoft.com/office/drawing/2014/main" id="{3EE8B194-217A-44C2-879E-D9D09C52A7E7}"/>
+                <a16:creationId xmlns:a16="http://schemas.microsoft.com/office/drawing/2014/main" id="{CD812BAC-63F7-4F08-A4EA-A376C3F00495}"/>
               </a:ext>
             </a:extLst>
           </p:cNvPr>
@@ -5232,7 +5249,7 @@
           <p:cNvPr id="9" name="Text 7">
             <a:extLst xmlns:a="http://schemas.openxmlformats.org/drawingml/2006/main">
               <a:ext uri="{FF2B5EF4-FFF2-40B4-BE49-F238E27FC236}">
-                <a16:creationId xmlns:a16="http://schemas.microsoft.com/office/drawing/2014/main" id="{7820C096-B971-4868-B873-0B064F00C385}"/>
+                <a16:creationId xmlns:a16="http://schemas.microsoft.com/office/drawing/2014/main" id="{67ADC8B7-EFC6-4336-9D51-59EDF1AEFE5B}"/>
               </a:ext>
             </a:extLst>
           </p:cNvPr>
@@ -5295,7 +5312,7 @@
           <p:cNvPr id="11" name="Shape 9">
             <a:extLst xmlns:a="http://schemas.openxmlformats.org/drawingml/2006/main">
               <a:ext uri="{FF2B5EF4-FFF2-40B4-BE49-F238E27FC236}">
-                <a16:creationId xmlns:a16="http://schemas.microsoft.com/office/drawing/2014/main" id="{315D87D8-0F53-43D9-9C7A-BCD15C91917B}"/>
+                <a16:creationId xmlns:a16="http://schemas.microsoft.com/office/drawing/2014/main" id="{9AF5495D-5594-4F16-917E-E5E174C0862F}"/>
               </a:ext>
             </a:extLst>
           </p:cNvPr>
@@ -5330,7 +5347,7 @@
           <p:cNvPr id="12" name="Text 10">
             <a:extLst xmlns:a="http://schemas.openxmlformats.org/drawingml/2006/main">
               <a:ext uri="{FF2B5EF4-FFF2-40B4-BE49-F238E27FC236}">
-                <a16:creationId xmlns:a16="http://schemas.microsoft.com/office/drawing/2014/main" id="{4F1D84C6-CD2C-4B73-B630-0A85D9917FE6}"/>
+                <a16:creationId xmlns:a16="http://schemas.microsoft.com/office/drawing/2014/main" id="{257DAA4B-198D-4D4A-BC2B-1F75C86EAC64}"/>
               </a:ext>
             </a:extLst>
           </p:cNvPr>
@@ -5377,7 +5394,7 @@
           <p:cNvPr id="13" name="Text 11">
             <a:extLst xmlns:a="http://schemas.openxmlformats.org/drawingml/2006/main">
               <a:ext uri="{FF2B5EF4-FFF2-40B4-BE49-F238E27FC236}">
-                <a16:creationId xmlns:a16="http://schemas.microsoft.com/office/drawing/2014/main" id="{2DE21D3A-B8D2-421A-AF83-59FC3BD1294F}"/>
+                <a16:creationId xmlns:a16="http://schemas.microsoft.com/office/drawing/2014/main" id="{3563A529-1112-451C-8A24-511251E80B61}"/>
               </a:ext>
             </a:extLst>
           </p:cNvPr>
@@ -5440,7 +5457,7 @@
           <p:cNvPr id="15" name="Shape 13">
             <a:extLst xmlns:a="http://schemas.openxmlformats.org/drawingml/2006/main">
               <a:ext uri="{FF2B5EF4-FFF2-40B4-BE49-F238E27FC236}">
-                <a16:creationId xmlns:a16="http://schemas.microsoft.com/office/drawing/2014/main" id="{B0E4E309-7D5D-43EB-99EA-F8C41F23948A}"/>
+                <a16:creationId xmlns:a16="http://schemas.microsoft.com/office/drawing/2014/main" id="{51E47CC3-6A1B-4D6D-95BA-F1EF5B5E5775}"/>
               </a:ext>
             </a:extLst>
           </p:cNvPr>
@@ -5475,7 +5492,7 @@
           <p:cNvPr id="16" name="Text 14">
             <a:extLst xmlns:a="http://schemas.openxmlformats.org/drawingml/2006/main">
               <a:ext uri="{FF2B5EF4-FFF2-40B4-BE49-F238E27FC236}">
-                <a16:creationId xmlns:a16="http://schemas.microsoft.com/office/drawing/2014/main" id="{CE026AE5-4470-40D9-866E-129839770C7A}"/>
+                <a16:creationId xmlns:a16="http://schemas.microsoft.com/office/drawing/2014/main" id="{E92CF63D-5932-42CD-BC4C-CBDCB2423599}"/>
               </a:ext>
             </a:extLst>
           </p:cNvPr>
@@ -5522,7 +5539,7 @@
           <p:cNvPr id="17" name="Text 15">
             <a:extLst xmlns:a="http://schemas.openxmlformats.org/drawingml/2006/main">
               <a:ext uri="{FF2B5EF4-FFF2-40B4-BE49-F238E27FC236}">
-                <a16:creationId xmlns:a16="http://schemas.microsoft.com/office/drawing/2014/main" id="{49B78527-5600-4613-B949-E24F7116A6D0}"/>
+                <a16:creationId xmlns:a16="http://schemas.microsoft.com/office/drawing/2014/main" id="{EB0C3208-BD9F-431A-ADD1-6EC97D632D07}"/>
               </a:ext>
             </a:extLst>
           </p:cNvPr>
@@ -5585,7 +5602,7 @@
           <p:cNvPr id="19" name="Shape 17">
             <a:extLst xmlns:a="http://schemas.openxmlformats.org/drawingml/2006/main">
               <a:ext uri="{FF2B5EF4-FFF2-40B4-BE49-F238E27FC236}">
-                <a16:creationId xmlns:a16="http://schemas.microsoft.com/office/drawing/2014/main" id="{67FD65D2-10A0-4788-937D-4FB2001EB387}"/>
+                <a16:creationId xmlns:a16="http://schemas.microsoft.com/office/drawing/2014/main" id="{2CCB99CD-9AF4-4FB8-A6A7-C452F65639BB}"/>
               </a:ext>
             </a:extLst>
           </p:cNvPr>
@@ -5620,7 +5637,7 @@
           <p:cNvPr id="20" name="Text 18">
             <a:extLst xmlns:a="http://schemas.openxmlformats.org/drawingml/2006/main">
               <a:ext uri="{FF2B5EF4-FFF2-40B4-BE49-F238E27FC236}">
-                <a16:creationId xmlns:a16="http://schemas.microsoft.com/office/drawing/2014/main" id="{BA93BC9F-5950-4482-BC8E-55CC56A739D4}"/>
+                <a16:creationId xmlns:a16="http://schemas.microsoft.com/office/drawing/2014/main" id="{CEA6F4B9-93F8-4EF6-9194-6E9B98A1E376}"/>
               </a:ext>
             </a:extLst>
           </p:cNvPr>
@@ -5667,7 +5684,7 @@
           <p:cNvPr id="21" name="Text 19">
             <a:extLst xmlns:a="http://schemas.openxmlformats.org/drawingml/2006/main">
               <a:ext uri="{FF2B5EF4-FFF2-40B4-BE49-F238E27FC236}">
-                <a16:creationId xmlns:a16="http://schemas.microsoft.com/office/drawing/2014/main" id="{F558F476-6C67-44FB-A46A-22C6031DBACD}"/>
+                <a16:creationId xmlns:a16="http://schemas.microsoft.com/office/drawing/2014/main" id="{179E96E5-79BC-4985-A1E5-A66E1E857CEB}"/>
               </a:ext>
             </a:extLst>
           </p:cNvPr>
@@ -5730,7 +5747,7 @@
           <p:cNvPr id="23" name="Shape 21">
             <a:extLst xmlns:a="http://schemas.openxmlformats.org/drawingml/2006/main">
               <a:ext uri="{FF2B5EF4-FFF2-40B4-BE49-F238E27FC236}">
-                <a16:creationId xmlns:a16="http://schemas.microsoft.com/office/drawing/2014/main" id="{1A056CDA-B07A-4454-973F-283F00770F05}"/>
+                <a16:creationId xmlns:a16="http://schemas.microsoft.com/office/drawing/2014/main" id="{FDE2474F-2331-414A-AB51-E708687E7CA2}"/>
               </a:ext>
             </a:extLst>
           </p:cNvPr>
@@ -5765,7 +5782,7 @@
           <p:cNvPr id="24" name="Text 22">
             <a:extLst xmlns:a="http://schemas.openxmlformats.org/drawingml/2006/main">
               <a:ext uri="{FF2B5EF4-FFF2-40B4-BE49-F238E27FC236}">
-                <a16:creationId xmlns:a16="http://schemas.microsoft.com/office/drawing/2014/main" id="{3B6F5434-CD6C-4C7C-849E-46257311BF88}"/>
+                <a16:creationId xmlns:a16="http://schemas.microsoft.com/office/drawing/2014/main" id="{BBE008F3-5511-4DCB-BC9B-52E7BC5FD372}"/>
               </a:ext>
             </a:extLst>
           </p:cNvPr>
@@ -5812,7 +5829,7 @@
           <p:cNvPr id="25" name="Text 23">
             <a:extLst xmlns:a="http://schemas.openxmlformats.org/drawingml/2006/main">
               <a:ext uri="{FF2B5EF4-FFF2-40B4-BE49-F238E27FC236}">
-                <a16:creationId xmlns:a16="http://schemas.microsoft.com/office/drawing/2014/main" id="{6079A1CA-FC66-4CE1-8AF4-8BF164F559F0}"/>
+                <a16:creationId xmlns:a16="http://schemas.microsoft.com/office/drawing/2014/main" id="{99DC7A5A-7D23-4CF2-8F07-CBA55DE7B124}"/>
               </a:ext>
             </a:extLst>
           </p:cNvPr>
@@ -5875,7 +5892,7 @@
           <p:cNvPr id="27" name="Shape 25">
             <a:extLst xmlns:a="http://schemas.openxmlformats.org/drawingml/2006/main">
               <a:ext uri="{FF2B5EF4-FFF2-40B4-BE49-F238E27FC236}">
-                <a16:creationId xmlns:a16="http://schemas.microsoft.com/office/drawing/2014/main" id="{48F113DA-9795-407A-B480-5535F7663F57}"/>
+                <a16:creationId xmlns:a16="http://schemas.microsoft.com/office/drawing/2014/main" id="{6F98FB27-FB4B-488E-8A88-AD25B88B68A8}"/>
               </a:ext>
             </a:extLst>
           </p:cNvPr>
@@ -5910,7 +5927,7 @@
           <p:cNvPr id="28" name="Text 26">
             <a:extLst xmlns:a="http://schemas.openxmlformats.org/drawingml/2006/main">
               <a:ext uri="{FF2B5EF4-FFF2-40B4-BE49-F238E27FC236}">
-                <a16:creationId xmlns:a16="http://schemas.microsoft.com/office/drawing/2014/main" id="{FBB33A4C-AEB8-4B2E-AF09-6DE904608DEF}"/>
+                <a16:creationId xmlns:a16="http://schemas.microsoft.com/office/drawing/2014/main" id="{D766CA3E-92E8-4848-8FA5-28175F72FF4D}"/>
               </a:ext>
             </a:extLst>
           </p:cNvPr>
@@ -5957,7 +5974,7 @@
           <p:cNvPr id="29" name="Text 27">
             <a:extLst xmlns:a="http://schemas.openxmlformats.org/drawingml/2006/main">
               <a:ext uri="{FF2B5EF4-FFF2-40B4-BE49-F238E27FC236}">
-                <a16:creationId xmlns:a16="http://schemas.microsoft.com/office/drawing/2014/main" id="{2462D1AF-5FE7-4B4F-88F2-C17E398F76E9}"/>
+                <a16:creationId xmlns:a16="http://schemas.microsoft.com/office/drawing/2014/main" id="{8D9CD7A2-0A7D-4D73-AA2E-D6F43443B2A3}"/>
               </a:ext>
             </a:extLst>
           </p:cNvPr>
@@ -6020,7 +6037,7 @@
           <p:cNvPr id="30" name="Shape 28">
             <a:extLst xmlns:a="http://schemas.openxmlformats.org/drawingml/2006/main">
               <a:ext uri="{FF2B5EF4-FFF2-40B4-BE49-F238E27FC236}">
-                <a16:creationId xmlns:a16="http://schemas.microsoft.com/office/drawing/2014/main" id="{698E8660-C155-4DF8-862C-91C471C70575}"/>
+                <a16:creationId xmlns:a16="http://schemas.microsoft.com/office/drawing/2014/main" id="{65BFF5F5-F613-4694-8FDF-549B0E9161D8}"/>
               </a:ext>
             </a:extLst>
           </p:cNvPr>
@@ -6055,7 +6072,7 @@
           <p:cNvPr id="31" name="Text 29">
             <a:extLst xmlns:a="http://schemas.openxmlformats.org/drawingml/2006/main">
               <a:ext uri="{FF2B5EF4-FFF2-40B4-BE49-F238E27FC236}">
-                <a16:creationId xmlns:a16="http://schemas.microsoft.com/office/drawing/2014/main" id="{060F082D-0A5F-4E34-B177-FDBE80D26A3D}"/>
+                <a16:creationId xmlns:a16="http://schemas.microsoft.com/office/drawing/2014/main" id="{A1B16258-081F-49C5-9E44-5F9999E1A1E5}"/>
               </a:ext>
             </a:extLst>
           </p:cNvPr>
@@ -6102,7 +6119,7 @@
           <p:cNvPr id="32" name="Shape 30">
             <a:extLst xmlns:a="http://schemas.openxmlformats.org/drawingml/2006/main">
               <a:ext uri="{FF2B5EF4-FFF2-40B4-BE49-F238E27FC236}">
-                <a16:creationId xmlns:a16="http://schemas.microsoft.com/office/drawing/2014/main" id="{AD69CFD1-CC20-491C-9B77-917E4493174B}"/>
+                <a16:creationId xmlns:a16="http://schemas.microsoft.com/office/drawing/2014/main" id="{8F256A0F-5A26-4AD3-8C3C-8B4DC033A12B}"/>
               </a:ext>
             </a:extLst>
           </p:cNvPr>
@@ -6135,7 +6152,7 @@
           <p:cNvPr id="33" name="Text 31">
             <a:extLst xmlns:a="http://schemas.openxmlformats.org/drawingml/2006/main">
               <a:ext uri="{FF2B5EF4-FFF2-40B4-BE49-F238E27FC236}">
-                <a16:creationId xmlns:a16="http://schemas.microsoft.com/office/drawing/2014/main" id="{8A99F748-03F2-4EE4-B4C2-3535E18B8DBD}"/>
+                <a16:creationId xmlns:a16="http://schemas.microsoft.com/office/drawing/2014/main" id="{D56C0C8A-CB35-420D-BED1-F64FE5EFDB40}"/>
               </a:ext>
             </a:extLst>
           </p:cNvPr>
@@ -6182,7 +6199,7 @@
           <p:cNvPr id="34" name="Shape 32">
             <a:extLst xmlns:a="http://schemas.openxmlformats.org/drawingml/2006/main">
               <a:ext uri="{FF2B5EF4-FFF2-40B4-BE49-F238E27FC236}">
-                <a16:creationId xmlns:a16="http://schemas.microsoft.com/office/drawing/2014/main" id="{CE286534-98FB-42CB-9481-CB64764DBA5A}"/>
+                <a16:creationId xmlns:a16="http://schemas.microsoft.com/office/drawing/2014/main" id="{77555F8E-73C1-4A89-AAFB-9ED880F3190A}"/>
               </a:ext>
             </a:extLst>
           </p:cNvPr>
@@ -6215,7 +6232,7 @@
           <p:cNvPr id="35" name="Text 33">
             <a:extLst xmlns:a="http://schemas.openxmlformats.org/drawingml/2006/main">
               <a:ext uri="{FF2B5EF4-FFF2-40B4-BE49-F238E27FC236}">
-                <a16:creationId xmlns:a16="http://schemas.microsoft.com/office/drawing/2014/main" id="{C99BCE2D-CBA9-43AE-9F2F-BA4633E6155E}"/>
+                <a16:creationId xmlns:a16="http://schemas.microsoft.com/office/drawing/2014/main" id="{770673AC-3B3F-4CF8-A119-934350FE7E41}"/>
               </a:ext>
             </a:extLst>
           </p:cNvPr>
@@ -6262,7 +6279,7 @@
           <p:cNvPr id="36" name="Shape 34">
             <a:extLst xmlns:a="http://schemas.openxmlformats.org/drawingml/2006/main">
               <a:ext uri="{FF2B5EF4-FFF2-40B4-BE49-F238E27FC236}">
-                <a16:creationId xmlns:a16="http://schemas.microsoft.com/office/drawing/2014/main" id="{ADCCE1CE-1047-44DF-85B0-8047FD7D31E6}"/>
+                <a16:creationId xmlns:a16="http://schemas.microsoft.com/office/drawing/2014/main" id="{976B84DA-E0FA-4B2F-A02A-4C68A3CB3229}"/>
               </a:ext>
             </a:extLst>
           </p:cNvPr>
@@ -6295,7 +6312,7 @@
           <p:cNvPr id="37" name="Text 35">
             <a:extLst xmlns:a="http://schemas.openxmlformats.org/drawingml/2006/main">
               <a:ext uri="{FF2B5EF4-FFF2-40B4-BE49-F238E27FC236}">
-                <a16:creationId xmlns:a16="http://schemas.microsoft.com/office/drawing/2014/main" id="{389144D2-E11A-4D03-8605-2B42404AD02D}"/>
+                <a16:creationId xmlns:a16="http://schemas.microsoft.com/office/drawing/2014/main" id="{5DB48993-908F-493C-9430-8043DF9B627B}"/>
               </a:ext>
             </a:extLst>
           </p:cNvPr>
@@ -6342,7 +6359,7 @@
           <p:cNvPr id="38" name="Shape 36">
             <a:extLst xmlns:a="http://schemas.openxmlformats.org/drawingml/2006/main">
               <a:ext uri="{FF2B5EF4-FFF2-40B4-BE49-F238E27FC236}">
-                <a16:creationId xmlns:a16="http://schemas.microsoft.com/office/drawing/2014/main" id="{A6D8B18E-95E3-4045-8ADE-38A091350CE0}"/>
+                <a16:creationId xmlns:a16="http://schemas.microsoft.com/office/drawing/2014/main" id="{3439FFEE-A160-43AC-9CBE-FF3EC55E758A}"/>
               </a:ext>
             </a:extLst>
           </p:cNvPr>
@@ -6377,7 +6394,7 @@
           <p:cNvPr id="39" name="Text 37">
             <a:extLst xmlns:a="http://schemas.openxmlformats.org/drawingml/2006/main">
               <a:ext uri="{FF2B5EF4-FFF2-40B4-BE49-F238E27FC236}">
-                <a16:creationId xmlns:a16="http://schemas.microsoft.com/office/drawing/2014/main" id="{D1E2240F-C24F-4947-9492-F8DA316B97E4}"/>
+                <a16:creationId xmlns:a16="http://schemas.microsoft.com/office/drawing/2014/main" id="{F646EB49-3A90-43E9-B641-6C2EE1423639}"/>
               </a:ext>
             </a:extLst>
           </p:cNvPr>
@@ -6424,7 +6441,7 @@
           <p:cNvPr id="40" name="Text 38">
             <a:extLst xmlns:a="http://schemas.openxmlformats.org/drawingml/2006/main">
               <a:ext uri="{FF2B5EF4-FFF2-40B4-BE49-F238E27FC236}">
-                <a16:creationId xmlns:a16="http://schemas.microsoft.com/office/drawing/2014/main" id="{1854F9D1-ED81-471A-9954-31C44C27200E}"/>
+                <a16:creationId xmlns:a16="http://schemas.microsoft.com/office/drawing/2014/main" id="{405390AF-76AC-4639-950B-B6158AA9692E}"/>
               </a:ext>
             </a:extLst>
           </p:cNvPr>
@@ -6519,7 +6536,7 @@
           <p:cNvPr id="41" name="Text 39">
             <a:extLst xmlns:a="http://schemas.openxmlformats.org/drawingml/2006/main">
               <a:ext uri="{FF2B5EF4-FFF2-40B4-BE49-F238E27FC236}">
-                <a16:creationId xmlns:a16="http://schemas.microsoft.com/office/drawing/2014/main" id="{A315F553-0EDF-48CA-A12F-FA55493E7121}"/>
+                <a16:creationId xmlns:a16="http://schemas.microsoft.com/office/drawing/2014/main" id="{862E1AAA-F77D-4AEA-83FB-572937ED70A9}"/>
               </a:ext>
             </a:extLst>
           </p:cNvPr>
@@ -6566,7 +6583,7 @@
           <p:cNvPr id="42" name="Text 40">
             <a:extLst xmlns:a="http://schemas.openxmlformats.org/drawingml/2006/main">
               <a:ext uri="{FF2B5EF4-FFF2-40B4-BE49-F238E27FC236}">
-                <a16:creationId xmlns:a16="http://schemas.microsoft.com/office/drawing/2014/main" id="{E89C3B55-F85B-48D6-A089-536C583B97A9}"/>
+                <a16:creationId xmlns:a16="http://schemas.microsoft.com/office/drawing/2014/main" id="{1DA3870D-710B-474B-ACBE-A15BDA2F49A6}"/>
               </a:ext>
             </a:extLst>
           </p:cNvPr>
@@ -6613,7 +6630,7 @@
           <p:cNvPr id="43" name="Text 41">
             <a:extLst xmlns:a="http://schemas.openxmlformats.org/drawingml/2006/main">
               <a:ext uri="{FF2B5EF4-FFF2-40B4-BE49-F238E27FC236}">
-                <a16:creationId xmlns:a16="http://schemas.microsoft.com/office/drawing/2014/main" id="{3AD84616-08DB-4C3F-8694-1AAE0EF06631}"/>
+                <a16:creationId xmlns:a16="http://schemas.microsoft.com/office/drawing/2014/main" id="{545A97C9-2026-4C18-954C-988D81DEF1F0}"/>
               </a:ext>
             </a:extLst>
           </p:cNvPr>
@@ -6658,7 +6675,7 @@
     </p:spTree>
     <p:extLst>
       <p:ext uri="{BB962C8B-B14F-4D97-AF65-F5344CB8AC3E}">
-        <p14:creationId xmlns:p14="http://schemas.microsoft.com/office/powerpoint/2010/main" val="423068142"/>
+        <p14:creationId xmlns:p14="http://schemas.microsoft.com/office/powerpoint/2010/main" val="147862639"/>
       </p:ext>
     </p:extLst>
   </p:cSld>
@@ -6689,7 +6706,7 @@
           <p:cNvPr id="2" name="Text 0">
             <a:extLst xmlns:a="http://schemas.openxmlformats.org/drawingml/2006/main">
               <a:ext uri="{FF2B5EF4-FFF2-40B4-BE49-F238E27FC236}">
-                <a16:creationId xmlns:a16="http://schemas.microsoft.com/office/drawing/2014/main" id="{75F9999A-7FCC-41C6-B9C1-243E04062DDA}"/>
+                <a16:creationId xmlns:a16="http://schemas.microsoft.com/office/drawing/2014/main" id="{7355E671-2A0C-46EE-8833-6F7B2C570F98}"/>
               </a:ext>
             </a:extLst>
           </p:cNvPr>
@@ -6736,7 +6753,7 @@
           <p:cNvPr id="3" name="Text 1">
             <a:extLst xmlns:a="http://schemas.openxmlformats.org/drawingml/2006/main">
               <a:ext uri="{FF2B5EF4-FFF2-40B4-BE49-F238E27FC236}">
-                <a16:creationId xmlns:a16="http://schemas.microsoft.com/office/drawing/2014/main" id="{66242D65-3347-424E-A469-61629FA5705C}"/>
+                <a16:creationId xmlns:a16="http://schemas.microsoft.com/office/drawing/2014/main" id="{78E036EF-5AE5-4634-A718-A516BB45CC9F}"/>
               </a:ext>
             </a:extLst>
           </p:cNvPr>
@@ -6783,7 +6800,7 @@
           <p:cNvPr id="4" name="Shape 2">
             <a:extLst xmlns:a="http://schemas.openxmlformats.org/drawingml/2006/main">
               <a:ext uri="{FF2B5EF4-FFF2-40B4-BE49-F238E27FC236}">
-                <a16:creationId xmlns:a16="http://schemas.microsoft.com/office/drawing/2014/main" id="{82DF873E-EC85-4AD8-A04D-290230FC7216}"/>
+                <a16:creationId xmlns:a16="http://schemas.microsoft.com/office/drawing/2014/main" id="{4D52C32A-6A71-4896-87E5-AD85AEA9AFB9}"/>
               </a:ext>
             </a:extLst>
           </p:cNvPr>
@@ -6818,7 +6835,7 @@
           <p:cNvPr id="5" name="Text 3">
             <a:extLst xmlns:a="http://schemas.openxmlformats.org/drawingml/2006/main">
               <a:ext uri="{FF2B5EF4-FFF2-40B4-BE49-F238E27FC236}">
-                <a16:creationId xmlns:a16="http://schemas.microsoft.com/office/drawing/2014/main" id="{BF3B8073-F891-4BDC-B0D1-B131D9879F71}"/>
+                <a16:creationId xmlns:a16="http://schemas.microsoft.com/office/drawing/2014/main" id="{C1AA8A41-E93B-45CD-B77F-B9C285D00079}"/>
               </a:ext>
             </a:extLst>
           </p:cNvPr>
@@ -6865,7 +6882,7 @@
           <p:cNvPr id="6" name="Shape 4">
             <a:extLst xmlns:a="http://schemas.openxmlformats.org/drawingml/2006/main">
               <a:ext uri="{FF2B5EF4-FFF2-40B4-BE49-F238E27FC236}">
-                <a16:creationId xmlns:a16="http://schemas.microsoft.com/office/drawing/2014/main" id="{D89A8F59-7255-46E6-BAE5-00B8B4F94138}"/>
+                <a16:creationId xmlns:a16="http://schemas.microsoft.com/office/drawing/2014/main" id="{A5FD0D90-B30D-4543-8F1D-70874986B5B1}"/>
               </a:ext>
             </a:extLst>
           </p:cNvPr>
@@ -6896,7 +6913,7 @@
           <p:cNvPr id="7" name="Shape 5">
             <a:extLst xmlns:a="http://schemas.openxmlformats.org/drawingml/2006/main">
               <a:ext uri="{FF2B5EF4-FFF2-40B4-BE49-F238E27FC236}">
-                <a16:creationId xmlns:a16="http://schemas.microsoft.com/office/drawing/2014/main" id="{6AD5E47D-CDBF-4C2F-B81F-F331E7F7A282}"/>
+                <a16:creationId xmlns:a16="http://schemas.microsoft.com/office/drawing/2014/main" id="{872E8CAA-4980-4164-94DD-898F0DDCEE04}"/>
               </a:ext>
             </a:extLst>
           </p:cNvPr>
@@ -6931,7 +6948,7 @@
           <p:cNvPr id="8" name="Text 6">
             <a:extLst xmlns:a="http://schemas.openxmlformats.org/drawingml/2006/main">
               <a:ext uri="{FF2B5EF4-FFF2-40B4-BE49-F238E27FC236}">
-                <a16:creationId xmlns:a16="http://schemas.microsoft.com/office/drawing/2014/main" id="{9CC5C8CE-C01A-49CC-A5A4-203C1B194EC8}"/>
+                <a16:creationId xmlns:a16="http://schemas.microsoft.com/office/drawing/2014/main" id="{41B18F58-6262-4C44-A2A5-6A908F940B85}"/>
               </a:ext>
             </a:extLst>
           </p:cNvPr>
@@ -6978,7 +6995,7 @@
           <p:cNvPr id="9" name="Text 7">
             <a:extLst xmlns:a="http://schemas.openxmlformats.org/drawingml/2006/main">
               <a:ext uri="{FF2B5EF4-FFF2-40B4-BE49-F238E27FC236}">
-                <a16:creationId xmlns:a16="http://schemas.microsoft.com/office/drawing/2014/main" id="{8D373C3C-2435-4678-9339-5ACBE64A358E}"/>
+                <a16:creationId xmlns:a16="http://schemas.microsoft.com/office/drawing/2014/main" id="{0E41B964-C984-4682-A3CA-C67B9DD11C60}"/>
               </a:ext>
             </a:extLst>
           </p:cNvPr>
@@ -7025,7 +7042,7 @@
           <p:cNvPr id="10" name="Shape 8">
             <a:extLst xmlns:a="http://schemas.openxmlformats.org/drawingml/2006/main">
               <a:ext uri="{FF2B5EF4-FFF2-40B4-BE49-F238E27FC236}">
-                <a16:creationId xmlns:a16="http://schemas.microsoft.com/office/drawing/2014/main" id="{FA7785A1-D9F5-4932-B590-6223C1F3686D}"/>
+                <a16:creationId xmlns:a16="http://schemas.microsoft.com/office/drawing/2014/main" id="{36F52FAD-B531-4E7E-A02D-05137561ACD4}"/>
               </a:ext>
             </a:extLst>
           </p:cNvPr>
@@ -7057,7 +7074,7 @@
           <p:cNvPr id="11" name="Text 9">
             <a:extLst xmlns:a="http://schemas.openxmlformats.org/drawingml/2006/main">
               <a:ext uri="{FF2B5EF4-FFF2-40B4-BE49-F238E27FC236}">
-                <a16:creationId xmlns:a16="http://schemas.microsoft.com/office/drawing/2014/main" id="{A0FFEC23-EC8F-4310-8127-0A5626D01145}"/>
+                <a16:creationId xmlns:a16="http://schemas.microsoft.com/office/drawing/2014/main" id="{550E7144-9563-4E84-B4A4-771384AC13E9}"/>
               </a:ext>
             </a:extLst>
           </p:cNvPr>
@@ -7104,7 +7121,7 @@
           <p:cNvPr id="12" name="Text 10">
             <a:extLst xmlns:a="http://schemas.openxmlformats.org/drawingml/2006/main">
               <a:ext uri="{FF2B5EF4-FFF2-40B4-BE49-F238E27FC236}">
-                <a16:creationId xmlns:a16="http://schemas.microsoft.com/office/drawing/2014/main" id="{3352B81A-8DAC-44E2-BB02-75837EFE9154}"/>
+                <a16:creationId xmlns:a16="http://schemas.microsoft.com/office/drawing/2014/main" id="{56A6AF15-3B10-49B8-A2E9-EDD49688EAC9}"/>
               </a:ext>
             </a:extLst>
           </p:cNvPr>
@@ -7151,7 +7168,7 @@
           <p:cNvPr id="13" name="Shape 11">
             <a:extLst xmlns:a="http://schemas.openxmlformats.org/drawingml/2006/main">
               <a:ext uri="{FF2B5EF4-FFF2-40B4-BE49-F238E27FC236}">
-                <a16:creationId xmlns:a16="http://schemas.microsoft.com/office/drawing/2014/main" id="{A06C23C5-0EBD-4C1A-88AA-BC2D846499F2}"/>
+                <a16:creationId xmlns:a16="http://schemas.microsoft.com/office/drawing/2014/main" id="{66A7F111-8A5F-4B0A-9CD3-9A02C71B57C1}"/>
               </a:ext>
             </a:extLst>
           </p:cNvPr>
@@ -7183,7 +7200,7 @@
           <p:cNvPr id="14" name="Text 12">
             <a:extLst xmlns:a="http://schemas.openxmlformats.org/drawingml/2006/main">
               <a:ext uri="{FF2B5EF4-FFF2-40B4-BE49-F238E27FC236}">
-                <a16:creationId xmlns:a16="http://schemas.microsoft.com/office/drawing/2014/main" id="{B0E72801-8534-4278-85BC-C73DFD4763E3}"/>
+                <a16:creationId xmlns:a16="http://schemas.microsoft.com/office/drawing/2014/main" id="{9363AFE2-3351-4F32-BBC0-E7DE4E662673}"/>
               </a:ext>
             </a:extLst>
           </p:cNvPr>
@@ -7230,7 +7247,7 @@
           <p:cNvPr id="15" name="Text 13">
             <a:extLst xmlns:a="http://schemas.openxmlformats.org/drawingml/2006/main">
               <a:ext uri="{FF2B5EF4-FFF2-40B4-BE49-F238E27FC236}">
-                <a16:creationId xmlns:a16="http://schemas.microsoft.com/office/drawing/2014/main" id="{E13C2E25-DA17-4769-AA05-D0A90948F182}"/>
+                <a16:creationId xmlns:a16="http://schemas.microsoft.com/office/drawing/2014/main" id="{894770A6-21BC-4F1E-A8E4-5D75FB8EA40B}"/>
               </a:ext>
             </a:extLst>
           </p:cNvPr>
@@ -7277,7 +7294,7 @@
           <p:cNvPr id="16" name="Shape 14">
             <a:extLst xmlns:a="http://schemas.openxmlformats.org/drawingml/2006/main">
               <a:ext uri="{FF2B5EF4-FFF2-40B4-BE49-F238E27FC236}">
-                <a16:creationId xmlns:a16="http://schemas.microsoft.com/office/drawing/2014/main" id="{B9C7A807-D334-44BA-A22C-BD5236D37B04}"/>
+                <a16:creationId xmlns:a16="http://schemas.microsoft.com/office/drawing/2014/main" id="{750737C5-AC11-4F92-AFA1-63B85230F90B}"/>
               </a:ext>
             </a:extLst>
           </p:cNvPr>
@@ -7309,7 +7326,7 @@
           <p:cNvPr id="17" name="Text 15">
             <a:extLst xmlns:a="http://schemas.openxmlformats.org/drawingml/2006/main">
               <a:ext uri="{FF2B5EF4-FFF2-40B4-BE49-F238E27FC236}">
-                <a16:creationId xmlns:a16="http://schemas.microsoft.com/office/drawing/2014/main" id="{40C07443-C562-4B94-9146-768CDEB2B07D}"/>
+                <a16:creationId xmlns:a16="http://schemas.microsoft.com/office/drawing/2014/main" id="{A9AF2684-F604-484A-ACF7-7970552DF461}"/>
               </a:ext>
             </a:extLst>
           </p:cNvPr>
@@ -7356,7 +7373,7 @@
           <p:cNvPr id="18" name="Text 16">
             <a:extLst xmlns:a="http://schemas.openxmlformats.org/drawingml/2006/main">
               <a:ext uri="{FF2B5EF4-FFF2-40B4-BE49-F238E27FC236}">
-                <a16:creationId xmlns:a16="http://schemas.microsoft.com/office/drawing/2014/main" id="{BF10FB04-3144-407B-B95A-960EB23F0C5D}"/>
+                <a16:creationId xmlns:a16="http://schemas.microsoft.com/office/drawing/2014/main" id="{728EBAA1-7615-497D-8A0A-9E5B9D14D434}"/>
               </a:ext>
             </a:extLst>
           </p:cNvPr>
@@ -7403,7 +7420,7 @@
           <p:cNvPr id="19" name="Shape 17">
             <a:extLst xmlns:a="http://schemas.openxmlformats.org/drawingml/2006/main">
               <a:ext uri="{FF2B5EF4-FFF2-40B4-BE49-F238E27FC236}">
-                <a16:creationId xmlns:a16="http://schemas.microsoft.com/office/drawing/2014/main" id="{F58466B1-C852-4926-A323-8C0B6B4788FF}"/>
+                <a16:creationId xmlns:a16="http://schemas.microsoft.com/office/drawing/2014/main" id="{A18C9077-939C-438B-85E1-C8B9364ABBBA}"/>
               </a:ext>
             </a:extLst>
           </p:cNvPr>
@@ -7435,7 +7452,7 @@
           <p:cNvPr id="20" name="Text 18">
             <a:extLst xmlns:a="http://schemas.openxmlformats.org/drawingml/2006/main">
               <a:ext uri="{FF2B5EF4-FFF2-40B4-BE49-F238E27FC236}">
-                <a16:creationId xmlns:a16="http://schemas.microsoft.com/office/drawing/2014/main" id="{39BF4744-02CF-4CBD-B4CC-B9F3AED9E37D}"/>
+                <a16:creationId xmlns:a16="http://schemas.microsoft.com/office/drawing/2014/main" id="{A44DC8C3-D06E-4154-A6D1-CAFEB5AE86C9}"/>
               </a:ext>
             </a:extLst>
           </p:cNvPr>
@@ -7482,7 +7499,7 @@
           <p:cNvPr id="21" name="Text 19">
             <a:extLst xmlns:a="http://schemas.openxmlformats.org/drawingml/2006/main">
               <a:ext uri="{FF2B5EF4-FFF2-40B4-BE49-F238E27FC236}">
-                <a16:creationId xmlns:a16="http://schemas.microsoft.com/office/drawing/2014/main" id="{1BED6097-E53F-45E6-89A9-657505BD9DCB}"/>
+                <a16:creationId xmlns:a16="http://schemas.microsoft.com/office/drawing/2014/main" id="{B24DEBDD-E973-4249-9032-44516B91E0BF}"/>
               </a:ext>
             </a:extLst>
           </p:cNvPr>
@@ -7529,7 +7546,7 @@
           <p:cNvPr id="22" name="Shape 20">
             <a:extLst xmlns:a="http://schemas.openxmlformats.org/drawingml/2006/main">
               <a:ext uri="{FF2B5EF4-FFF2-40B4-BE49-F238E27FC236}">
-                <a16:creationId xmlns:a16="http://schemas.microsoft.com/office/drawing/2014/main" id="{EEB60CE8-6956-432B-8768-5A04DEFDA2F3}"/>
+                <a16:creationId xmlns:a16="http://schemas.microsoft.com/office/drawing/2014/main" id="{A69F3E4F-45D7-4C36-BD94-07FEFB0C76D6}"/>
               </a:ext>
             </a:extLst>
           </p:cNvPr>
@@ -7561,7 +7578,7 @@
           <p:cNvPr id="23" name="Text 21">
             <a:extLst xmlns:a="http://schemas.openxmlformats.org/drawingml/2006/main">
               <a:ext uri="{FF2B5EF4-FFF2-40B4-BE49-F238E27FC236}">
-                <a16:creationId xmlns:a16="http://schemas.microsoft.com/office/drawing/2014/main" id="{B7430D43-98F2-4B73-A35B-C4AF3B2A9D68}"/>
+                <a16:creationId xmlns:a16="http://schemas.microsoft.com/office/drawing/2014/main" id="{5769D786-4AF7-4BAB-B593-6F7326FD0FCF}"/>
               </a:ext>
             </a:extLst>
           </p:cNvPr>
@@ -7608,7 +7625,7 @@
           <p:cNvPr id="24" name="Text 22">
             <a:extLst xmlns:a="http://schemas.openxmlformats.org/drawingml/2006/main">
               <a:ext uri="{FF2B5EF4-FFF2-40B4-BE49-F238E27FC236}">
-                <a16:creationId xmlns:a16="http://schemas.microsoft.com/office/drawing/2014/main" id="{38C5E674-8CAD-489E-8AE8-3C918AA70F45}"/>
+                <a16:creationId xmlns:a16="http://schemas.microsoft.com/office/drawing/2014/main" id="{98D41A0B-B1D9-4E8F-BBF7-EAF4132229CF}"/>
               </a:ext>
             </a:extLst>
           </p:cNvPr>
@@ -7655,7 +7672,7 @@
           <p:cNvPr id="25" name="Shape 23">
             <a:extLst xmlns:a="http://schemas.openxmlformats.org/drawingml/2006/main">
               <a:ext uri="{FF2B5EF4-FFF2-40B4-BE49-F238E27FC236}">
-                <a16:creationId xmlns:a16="http://schemas.microsoft.com/office/drawing/2014/main" id="{593436B4-73E4-40E2-8893-5DF74623812D}"/>
+                <a16:creationId xmlns:a16="http://schemas.microsoft.com/office/drawing/2014/main" id="{B0802F11-F248-4871-A002-B7B436F54AF1}"/>
               </a:ext>
             </a:extLst>
           </p:cNvPr>
@@ -7687,7 +7704,7 @@
           <p:cNvPr id="26" name="Text 24">
             <a:extLst xmlns:a="http://schemas.openxmlformats.org/drawingml/2006/main">
               <a:ext uri="{FF2B5EF4-FFF2-40B4-BE49-F238E27FC236}">
-                <a16:creationId xmlns:a16="http://schemas.microsoft.com/office/drawing/2014/main" id="{98551763-E42C-4E00-93DC-032971DE0370}"/>
+                <a16:creationId xmlns:a16="http://schemas.microsoft.com/office/drawing/2014/main" id="{1821D3F3-9145-4744-9621-1D48DC4966E7}"/>
               </a:ext>
             </a:extLst>
           </p:cNvPr>
@@ -7734,7 +7751,7 @@
           <p:cNvPr id="27" name="Shape 25">
             <a:extLst xmlns:a="http://schemas.openxmlformats.org/drawingml/2006/main">
               <a:ext uri="{FF2B5EF4-FFF2-40B4-BE49-F238E27FC236}">
-                <a16:creationId xmlns:a16="http://schemas.microsoft.com/office/drawing/2014/main" id="{D13A4C90-B8AF-4A2E-BC70-48D1E55F5F1B}"/>
+                <a16:creationId xmlns:a16="http://schemas.microsoft.com/office/drawing/2014/main" id="{FB8C839F-87A8-4120-BF00-3B81FB95E66C}"/>
               </a:ext>
             </a:extLst>
           </p:cNvPr>
@@ -7769,7 +7786,7 @@
           <p:cNvPr id="28" name="Text 26">
             <a:extLst xmlns:a="http://schemas.openxmlformats.org/drawingml/2006/main">
               <a:ext uri="{FF2B5EF4-FFF2-40B4-BE49-F238E27FC236}">
-                <a16:creationId xmlns:a16="http://schemas.microsoft.com/office/drawing/2014/main" id="{46676A10-0553-469A-9C52-24567A93DF3E}"/>
+                <a16:creationId xmlns:a16="http://schemas.microsoft.com/office/drawing/2014/main" id="{14A9DB0B-9867-4E54-94BF-D26F974BB539}"/>
               </a:ext>
             </a:extLst>
           </p:cNvPr>
@@ -7816,7 +7833,7 @@
           <p:cNvPr id="29" name="Shape 27">
             <a:extLst xmlns:a="http://schemas.openxmlformats.org/drawingml/2006/main">
               <a:ext uri="{FF2B5EF4-FFF2-40B4-BE49-F238E27FC236}">
-                <a16:creationId xmlns:a16="http://schemas.microsoft.com/office/drawing/2014/main" id="{9F7DB116-12C5-435C-8A02-73E162B8B105}"/>
+                <a16:creationId xmlns:a16="http://schemas.microsoft.com/office/drawing/2014/main" id="{F7D91A4B-0996-47B2-B310-7F62F56176E2}"/>
               </a:ext>
             </a:extLst>
           </p:cNvPr>
@@ -7849,7 +7866,7 @@
           <p:cNvPr id="30" name="Text 28">
             <a:extLst xmlns:a="http://schemas.openxmlformats.org/drawingml/2006/main">
               <a:ext uri="{FF2B5EF4-FFF2-40B4-BE49-F238E27FC236}">
-                <a16:creationId xmlns:a16="http://schemas.microsoft.com/office/drawing/2014/main" id="{A0F879A5-28EF-41AE-AF5D-4080E62717B3}"/>
+                <a16:creationId xmlns:a16="http://schemas.microsoft.com/office/drawing/2014/main" id="{2A8019D6-4BB0-48D7-89EF-FFC12826DA96}"/>
               </a:ext>
             </a:extLst>
           </p:cNvPr>
@@ -7896,7 +7913,7 @@
           <p:cNvPr id="31" name="Shape 29">
             <a:extLst xmlns:a="http://schemas.openxmlformats.org/drawingml/2006/main">
               <a:ext uri="{FF2B5EF4-FFF2-40B4-BE49-F238E27FC236}">
-                <a16:creationId xmlns:a16="http://schemas.microsoft.com/office/drawing/2014/main" id="{13F544A2-BDC9-4CBC-9EE6-E7E8C2A97427}"/>
+                <a16:creationId xmlns:a16="http://schemas.microsoft.com/office/drawing/2014/main" id="{84A21D47-12A7-4022-8C34-2FB27DF13F2D}"/>
               </a:ext>
             </a:extLst>
           </p:cNvPr>
@@ -7929,7 +7946,7 @@
           <p:cNvPr id="32" name="Text 30">
             <a:extLst xmlns:a="http://schemas.openxmlformats.org/drawingml/2006/main">
               <a:ext uri="{FF2B5EF4-FFF2-40B4-BE49-F238E27FC236}">
-                <a16:creationId xmlns:a16="http://schemas.microsoft.com/office/drawing/2014/main" id="{1CE6E8FE-85E1-419F-B1A4-F99E9E2D2DBC}"/>
+                <a16:creationId xmlns:a16="http://schemas.microsoft.com/office/drawing/2014/main" id="{6A33FF8B-1D0C-41BA-9770-241ADBA7DA5D}"/>
               </a:ext>
             </a:extLst>
           </p:cNvPr>
@@ -7976,7 +7993,7 @@
           <p:cNvPr id="33" name="Shape 31">
             <a:extLst xmlns:a="http://schemas.openxmlformats.org/drawingml/2006/main">
               <a:ext uri="{FF2B5EF4-FFF2-40B4-BE49-F238E27FC236}">
-                <a16:creationId xmlns:a16="http://schemas.microsoft.com/office/drawing/2014/main" id="{FA64B9CF-6CD2-43AD-BC48-A43BCC7DCE02}"/>
+                <a16:creationId xmlns:a16="http://schemas.microsoft.com/office/drawing/2014/main" id="{1AACBFDC-C96F-418A-B4B0-60FA5300ABE1}"/>
               </a:ext>
             </a:extLst>
           </p:cNvPr>
@@ -8009,7 +8026,7 @@
           <p:cNvPr id="34" name="Text 32">
             <a:extLst xmlns:a="http://schemas.openxmlformats.org/drawingml/2006/main">
               <a:ext uri="{FF2B5EF4-FFF2-40B4-BE49-F238E27FC236}">
-                <a16:creationId xmlns:a16="http://schemas.microsoft.com/office/drawing/2014/main" id="{DF14CD99-1E96-4958-B1FE-1FC390FDDF0D}"/>
+                <a16:creationId xmlns:a16="http://schemas.microsoft.com/office/drawing/2014/main" id="{30952993-48FA-492B-AC0E-A68103A6C188}"/>
               </a:ext>
             </a:extLst>
           </p:cNvPr>
@@ -8056,7 +8073,7 @@
           <p:cNvPr id="35" name="Shape 33">
             <a:extLst xmlns:a="http://schemas.openxmlformats.org/drawingml/2006/main">
               <a:ext uri="{FF2B5EF4-FFF2-40B4-BE49-F238E27FC236}">
-                <a16:creationId xmlns:a16="http://schemas.microsoft.com/office/drawing/2014/main" id="{E869ED17-B03A-4EBD-B167-BA858214AB94}"/>
+                <a16:creationId xmlns:a16="http://schemas.microsoft.com/office/drawing/2014/main" id="{2DAA3C68-6CCF-4C37-A458-E1D42FC2CAC2}"/>
               </a:ext>
             </a:extLst>
           </p:cNvPr>
@@ -8089,7 +8106,7 @@
           <p:cNvPr id="36" name="Text 34">
             <a:extLst xmlns:a="http://schemas.openxmlformats.org/drawingml/2006/main">
               <a:ext uri="{FF2B5EF4-FFF2-40B4-BE49-F238E27FC236}">
-                <a16:creationId xmlns:a16="http://schemas.microsoft.com/office/drawing/2014/main" id="{A57514F2-E353-428D-BD3D-A478FF90B336}"/>
+                <a16:creationId xmlns:a16="http://schemas.microsoft.com/office/drawing/2014/main" id="{FAE48855-5D47-4A1A-8725-F33D808B522F}"/>
               </a:ext>
             </a:extLst>
           </p:cNvPr>
@@ -8136,7 +8153,7 @@
           <p:cNvPr id="37" name="Shape 35">
             <a:extLst xmlns:a="http://schemas.openxmlformats.org/drawingml/2006/main">
               <a:ext uri="{FF2B5EF4-FFF2-40B4-BE49-F238E27FC236}">
-                <a16:creationId xmlns:a16="http://schemas.microsoft.com/office/drawing/2014/main" id="{FFB0A800-FC52-46F8-83BC-877C3252EB8A}"/>
+                <a16:creationId xmlns:a16="http://schemas.microsoft.com/office/drawing/2014/main" id="{CE80F553-F8D3-45B2-A8E2-CF72DF76D4AC}"/>
               </a:ext>
             </a:extLst>
           </p:cNvPr>
@@ -8169,7 +8186,7 @@
           <p:cNvPr id="38" name="Text 36">
             <a:extLst xmlns:a="http://schemas.openxmlformats.org/drawingml/2006/main">
               <a:ext uri="{FF2B5EF4-FFF2-40B4-BE49-F238E27FC236}">
-                <a16:creationId xmlns:a16="http://schemas.microsoft.com/office/drawing/2014/main" id="{45147916-910C-4977-A55E-A6E300D8B24D}"/>
+                <a16:creationId xmlns:a16="http://schemas.microsoft.com/office/drawing/2014/main" id="{679E6DAE-99D7-4CC7-BD34-E1266B03A438}"/>
               </a:ext>
             </a:extLst>
           </p:cNvPr>
@@ -8216,7 +8233,7 @@
           <p:cNvPr id="39" name="Shape 37">
             <a:extLst xmlns:a="http://schemas.openxmlformats.org/drawingml/2006/main">
               <a:ext uri="{FF2B5EF4-FFF2-40B4-BE49-F238E27FC236}">
-                <a16:creationId xmlns:a16="http://schemas.microsoft.com/office/drawing/2014/main" id="{D7CD96E0-16C4-4B56-B02F-4BB4168AF65E}"/>
+                <a16:creationId xmlns:a16="http://schemas.microsoft.com/office/drawing/2014/main" id="{E102DB87-F75D-4E93-8B75-486942D9A729}"/>
               </a:ext>
             </a:extLst>
           </p:cNvPr>
@@ -8249,7 +8266,7 @@
           <p:cNvPr id="40" name="Text 38">
             <a:extLst xmlns:a="http://schemas.openxmlformats.org/drawingml/2006/main">
               <a:ext uri="{FF2B5EF4-FFF2-40B4-BE49-F238E27FC236}">
-                <a16:creationId xmlns:a16="http://schemas.microsoft.com/office/drawing/2014/main" id="{E4405770-88EA-4D7F-A3FD-119191AD1B9B}"/>
+                <a16:creationId xmlns:a16="http://schemas.microsoft.com/office/drawing/2014/main" id="{DE4C2260-3761-4C15-B5C6-DB0AC4988950}"/>
               </a:ext>
             </a:extLst>
           </p:cNvPr>
@@ -8296,7 +8313,7 @@
           <p:cNvPr id="41" name="Shape 39">
             <a:extLst xmlns:a="http://schemas.openxmlformats.org/drawingml/2006/main">
               <a:ext uri="{FF2B5EF4-FFF2-40B4-BE49-F238E27FC236}">
-                <a16:creationId xmlns:a16="http://schemas.microsoft.com/office/drawing/2014/main" id="{6551CEF4-668C-48F3-9866-B29AE0A10506}"/>
+                <a16:creationId xmlns:a16="http://schemas.microsoft.com/office/drawing/2014/main" id="{E204D7BE-9FC2-4264-973D-5237EC0CFE98}"/>
               </a:ext>
             </a:extLst>
           </p:cNvPr>
@@ -8331,7 +8348,7 @@
           <p:cNvPr id="42" name="Text 40">
             <a:extLst xmlns:a="http://schemas.openxmlformats.org/drawingml/2006/main">
               <a:ext uri="{FF2B5EF4-FFF2-40B4-BE49-F238E27FC236}">
-                <a16:creationId xmlns:a16="http://schemas.microsoft.com/office/drawing/2014/main" id="{A7CAAFD3-266F-4BB0-951A-6519DBA0BEEA}"/>
+                <a16:creationId xmlns:a16="http://schemas.microsoft.com/office/drawing/2014/main" id="{D902FA63-AB39-4DD8-8903-33233A4AF524}"/>
               </a:ext>
             </a:extLst>
           </p:cNvPr>
@@ -8378,7 +8395,7 @@
           <p:cNvPr id="43" name="Shape 41">
             <a:extLst xmlns:a="http://schemas.openxmlformats.org/drawingml/2006/main">
               <a:ext uri="{FF2B5EF4-FFF2-40B4-BE49-F238E27FC236}">
-                <a16:creationId xmlns:a16="http://schemas.microsoft.com/office/drawing/2014/main" id="{24EAB360-986D-4D99-A7F4-C36B1D920866}"/>
+                <a16:creationId xmlns:a16="http://schemas.microsoft.com/office/drawing/2014/main" id="{BDC47184-4DAC-4C0E-932C-EC45CDDE039F}"/>
               </a:ext>
             </a:extLst>
           </p:cNvPr>
@@ -8413,7 +8430,7 @@
           <p:cNvPr id="44" name="Text 42">
             <a:extLst xmlns:a="http://schemas.openxmlformats.org/drawingml/2006/main">
               <a:ext uri="{FF2B5EF4-FFF2-40B4-BE49-F238E27FC236}">
-                <a16:creationId xmlns:a16="http://schemas.microsoft.com/office/drawing/2014/main" id="{A13CCAF1-7267-403B-B766-D7FA7CC0C62D}"/>
+                <a16:creationId xmlns:a16="http://schemas.microsoft.com/office/drawing/2014/main" id="{7D136E75-A4D8-462E-8907-0A43E33D22E5}"/>
               </a:ext>
             </a:extLst>
           </p:cNvPr>
@@ -8460,7 +8477,7 @@
           <p:cNvPr id="45" name="Shape 43">
             <a:extLst xmlns:a="http://schemas.openxmlformats.org/drawingml/2006/main">
               <a:ext uri="{FF2B5EF4-FFF2-40B4-BE49-F238E27FC236}">
-                <a16:creationId xmlns:a16="http://schemas.microsoft.com/office/drawing/2014/main" id="{257C4771-1522-4D8C-A190-2CAB46B12606}"/>
+                <a16:creationId xmlns:a16="http://schemas.microsoft.com/office/drawing/2014/main" id="{17609550-0A40-4E1A-8EDD-2E55CEC6D6DC}"/>
               </a:ext>
             </a:extLst>
           </p:cNvPr>
@@ -8495,7 +8512,7 @@
           <p:cNvPr id="46" name="Text 44">
             <a:extLst xmlns:a="http://schemas.openxmlformats.org/drawingml/2006/main">
               <a:ext uri="{FF2B5EF4-FFF2-40B4-BE49-F238E27FC236}">
-                <a16:creationId xmlns:a16="http://schemas.microsoft.com/office/drawing/2014/main" id="{BC6D9B51-4D52-43F9-B462-F0DC818CCF70}"/>
+                <a16:creationId xmlns:a16="http://schemas.microsoft.com/office/drawing/2014/main" id="{10E91B5E-62FC-445B-A7C4-080F8BEA7084}"/>
               </a:ext>
             </a:extLst>
           </p:cNvPr>
@@ -8542,7 +8559,7 @@
           <p:cNvPr id="47" name="Text 45">
             <a:extLst xmlns:a="http://schemas.openxmlformats.org/drawingml/2006/main">
               <a:ext uri="{FF2B5EF4-FFF2-40B4-BE49-F238E27FC236}">
-                <a16:creationId xmlns:a16="http://schemas.microsoft.com/office/drawing/2014/main" id="{8BDCD775-94BE-4781-A2D3-16D259BA9029}"/>
+                <a16:creationId xmlns:a16="http://schemas.microsoft.com/office/drawing/2014/main" id="{5A63048A-8228-4289-81E4-98788E44140D}"/>
               </a:ext>
             </a:extLst>
           </p:cNvPr>
@@ -8589,7 +8606,7 @@
           <p:cNvPr id="48" name="Text 46">
             <a:extLst xmlns:a="http://schemas.openxmlformats.org/drawingml/2006/main">
               <a:ext uri="{FF2B5EF4-FFF2-40B4-BE49-F238E27FC236}">
-                <a16:creationId xmlns:a16="http://schemas.microsoft.com/office/drawing/2014/main" id="{1CF4EF38-5482-4897-B929-C6A8068A9DD9}"/>
+                <a16:creationId xmlns:a16="http://schemas.microsoft.com/office/drawing/2014/main" id="{2DB44749-DA43-4D84-AB7D-7686DEB11599}"/>
               </a:ext>
             </a:extLst>
           </p:cNvPr>
@@ -8634,7 +8651,7 @@
     </p:spTree>
     <p:extLst>
       <p:ext uri="{BB962C8B-B14F-4D97-AF65-F5344CB8AC3E}">
-        <p14:creationId xmlns:p14="http://schemas.microsoft.com/office/powerpoint/2010/main" val="1063709225"/>
+        <p14:creationId xmlns:p14="http://schemas.microsoft.com/office/powerpoint/2010/main" val="824127784"/>
       </p:ext>
     </p:extLst>
   </p:cSld>
@@ -8665,7 +8682,7 @@
           <p:cNvPr id="2" name="Text 0">
             <a:extLst xmlns:a="http://schemas.openxmlformats.org/drawingml/2006/main">
               <a:ext uri="{FF2B5EF4-FFF2-40B4-BE49-F238E27FC236}">
-                <a16:creationId xmlns:a16="http://schemas.microsoft.com/office/drawing/2014/main" id="{43A37539-3968-49BB-9111-9ABA0265D3D6}"/>
+                <a16:creationId xmlns:a16="http://schemas.microsoft.com/office/drawing/2014/main" id="{7FD90BA5-F07D-4CD6-8D29-68B4CC33637D}"/>
               </a:ext>
             </a:extLst>
           </p:cNvPr>
@@ -8712,7 +8729,7 @@
           <p:cNvPr id="3" name="Text 1">
             <a:extLst xmlns:a="http://schemas.openxmlformats.org/drawingml/2006/main">
               <a:ext uri="{FF2B5EF4-FFF2-40B4-BE49-F238E27FC236}">
-                <a16:creationId xmlns:a16="http://schemas.microsoft.com/office/drawing/2014/main" id="{1F2120B7-15C3-4AB9-8B70-264AC3E29D57}"/>
+                <a16:creationId xmlns:a16="http://schemas.microsoft.com/office/drawing/2014/main" id="{2F02D375-1963-4A0C-8B1D-9D01AFFBE947}"/>
               </a:ext>
             </a:extLst>
           </p:cNvPr>
@@ -8759,7 +8776,7 @@
           <p:cNvPr id="4" name="Shape 2">
             <a:extLst xmlns:a="http://schemas.openxmlformats.org/drawingml/2006/main">
               <a:ext uri="{FF2B5EF4-FFF2-40B4-BE49-F238E27FC236}">
-                <a16:creationId xmlns:a16="http://schemas.microsoft.com/office/drawing/2014/main" id="{07D1ACC5-8F8F-4E10-840F-65E7374BAE3F}"/>
+                <a16:creationId xmlns:a16="http://schemas.microsoft.com/office/drawing/2014/main" id="{DF4190EA-4945-470C-AA91-23D160D70F67}"/>
               </a:ext>
             </a:extLst>
           </p:cNvPr>
@@ -8794,7 +8811,7 @@
           <p:cNvPr id="5" name="Text 3">
             <a:extLst xmlns:a="http://schemas.openxmlformats.org/drawingml/2006/main">
               <a:ext uri="{FF2B5EF4-FFF2-40B4-BE49-F238E27FC236}">
-                <a16:creationId xmlns:a16="http://schemas.microsoft.com/office/drawing/2014/main" id="{1D9B7C32-577B-48BB-9642-4BFBC9915E6A}"/>
+                <a16:creationId xmlns:a16="http://schemas.microsoft.com/office/drawing/2014/main" id="{BA5C0F3D-DD97-4212-B326-3FE4D64655E7}"/>
               </a:ext>
             </a:extLst>
           </p:cNvPr>
@@ -8841,7 +8858,7 @@
           <p:cNvPr id="6" name="Shape 4">
             <a:extLst xmlns:a="http://schemas.openxmlformats.org/drawingml/2006/main">
               <a:ext uri="{FF2B5EF4-FFF2-40B4-BE49-F238E27FC236}">
-                <a16:creationId xmlns:a16="http://schemas.microsoft.com/office/drawing/2014/main" id="{54D5E22B-B54A-4740-9159-45D8C29A78C5}"/>
+                <a16:creationId xmlns:a16="http://schemas.microsoft.com/office/drawing/2014/main" id="{F9219EF3-C968-4BD6-8E71-ACC646ACBA91}"/>
               </a:ext>
             </a:extLst>
           </p:cNvPr>
@@ -8872,7 +8889,7 @@
           <p:cNvPr id="7" name="Shape 5">
             <a:extLst xmlns:a="http://schemas.openxmlformats.org/drawingml/2006/main">
               <a:ext uri="{FF2B5EF4-FFF2-40B4-BE49-F238E27FC236}">
-                <a16:creationId xmlns:a16="http://schemas.microsoft.com/office/drawing/2014/main" id="{8988F5DE-83CC-4F4F-BCA0-6936FFB5E327}"/>
+                <a16:creationId xmlns:a16="http://schemas.microsoft.com/office/drawing/2014/main" id="{D7100A7A-68F3-4074-AFED-47CD2770E4F6}"/>
               </a:ext>
             </a:extLst>
           </p:cNvPr>
@@ -8907,7 +8924,7 @@
           <p:cNvPr id="8" name="Shape 6">
             <a:extLst xmlns:a="http://schemas.openxmlformats.org/drawingml/2006/main">
               <a:ext uri="{FF2B5EF4-FFF2-40B4-BE49-F238E27FC236}">
-                <a16:creationId xmlns:a16="http://schemas.microsoft.com/office/drawing/2014/main" id="{6ECCCDF6-89A4-4152-B36D-F199F7B2E1EB}"/>
+                <a16:creationId xmlns:a16="http://schemas.microsoft.com/office/drawing/2014/main" id="{7013E7DA-907C-4C02-908B-BB0859473D17}"/>
               </a:ext>
             </a:extLst>
           </p:cNvPr>
@@ -8942,7 +8959,7 @@
           <p:cNvPr id="9" name="Text 7">
             <a:extLst xmlns:a="http://schemas.openxmlformats.org/drawingml/2006/main">
               <a:ext uri="{FF2B5EF4-FFF2-40B4-BE49-F238E27FC236}">
-                <a16:creationId xmlns:a16="http://schemas.microsoft.com/office/drawing/2014/main" id="{1873307B-AD38-4CA8-8BBE-CAA1635E782B}"/>
+                <a16:creationId xmlns:a16="http://schemas.microsoft.com/office/drawing/2014/main" id="{AED7F596-236F-4B9A-97FF-5A7B6D825066}"/>
               </a:ext>
             </a:extLst>
           </p:cNvPr>
@@ -8989,7 +9006,7 @@
           <p:cNvPr id="10" name="Text 8">
             <a:extLst xmlns:a="http://schemas.openxmlformats.org/drawingml/2006/main">
               <a:ext uri="{FF2B5EF4-FFF2-40B4-BE49-F238E27FC236}">
-                <a16:creationId xmlns:a16="http://schemas.microsoft.com/office/drawing/2014/main" id="{7408073A-0065-4D9D-9411-675A619C7356}"/>
+                <a16:creationId xmlns:a16="http://schemas.microsoft.com/office/drawing/2014/main" id="{5DC72D1F-F6BD-4996-9E49-DD944DF06022}"/>
               </a:ext>
             </a:extLst>
           </p:cNvPr>
@@ -9036,7 +9053,7 @@
           <p:cNvPr id="11" name="Shape 9">
             <a:extLst xmlns:a="http://schemas.openxmlformats.org/drawingml/2006/main">
               <a:ext uri="{FF2B5EF4-FFF2-40B4-BE49-F238E27FC236}">
-                <a16:creationId xmlns:a16="http://schemas.microsoft.com/office/drawing/2014/main" id="{EACB37F0-FD48-42FC-BD0F-3A776849D24B}"/>
+                <a16:creationId xmlns:a16="http://schemas.microsoft.com/office/drawing/2014/main" id="{B1412F23-EC1C-453E-9AED-515330FF17C4}"/>
               </a:ext>
             </a:extLst>
           </p:cNvPr>
@@ -9071,7 +9088,7 @@
           <p:cNvPr id="12" name="Text 10">
             <a:extLst xmlns:a="http://schemas.openxmlformats.org/drawingml/2006/main">
               <a:ext uri="{FF2B5EF4-FFF2-40B4-BE49-F238E27FC236}">
-                <a16:creationId xmlns:a16="http://schemas.microsoft.com/office/drawing/2014/main" id="{85703D0B-6A5F-4072-9F3B-33B9A35F2745}"/>
+                <a16:creationId xmlns:a16="http://schemas.microsoft.com/office/drawing/2014/main" id="{C680007D-A980-4F49-9FD8-A9A8446B432F}"/>
               </a:ext>
             </a:extLst>
           </p:cNvPr>
@@ -9118,7 +9135,7 @@
           <p:cNvPr id="13" name="Text 11">
             <a:extLst xmlns:a="http://schemas.openxmlformats.org/drawingml/2006/main">
               <a:ext uri="{FF2B5EF4-FFF2-40B4-BE49-F238E27FC236}">
-                <a16:creationId xmlns:a16="http://schemas.microsoft.com/office/drawing/2014/main" id="{7EEA9614-F0FD-498C-851A-13CA966FB1B2}"/>
+                <a16:creationId xmlns:a16="http://schemas.microsoft.com/office/drawing/2014/main" id="{9CD4C483-62CE-44B8-A420-8748516C12A4}"/>
               </a:ext>
             </a:extLst>
           </p:cNvPr>
@@ -9165,7 +9182,7 @@
           <p:cNvPr id="14" name="Shape 12">
             <a:extLst xmlns:a="http://schemas.openxmlformats.org/drawingml/2006/main">
               <a:ext uri="{FF2B5EF4-FFF2-40B4-BE49-F238E27FC236}">
-                <a16:creationId xmlns:a16="http://schemas.microsoft.com/office/drawing/2014/main" id="{026FB301-8E39-4874-8671-2FE4D6A38F8F}"/>
+                <a16:creationId xmlns:a16="http://schemas.microsoft.com/office/drawing/2014/main" id="{64B12B0E-6DE4-4867-8C8E-EC60B06E5916}"/>
               </a:ext>
             </a:extLst>
           </p:cNvPr>
@@ -9200,7 +9217,7 @@
           <p:cNvPr id="15" name="Text 13">
             <a:extLst xmlns:a="http://schemas.openxmlformats.org/drawingml/2006/main">
               <a:ext uri="{FF2B5EF4-FFF2-40B4-BE49-F238E27FC236}">
-                <a16:creationId xmlns:a16="http://schemas.microsoft.com/office/drawing/2014/main" id="{01D317BC-B010-416E-89DE-C6D9D5906029}"/>
+                <a16:creationId xmlns:a16="http://schemas.microsoft.com/office/drawing/2014/main" id="{FDAF98F0-9992-4FE7-8A80-87D2FBCFDC2C}"/>
               </a:ext>
             </a:extLst>
           </p:cNvPr>
@@ -9247,7 +9264,7 @@
           <p:cNvPr id="16" name="Text 14">
             <a:extLst xmlns:a="http://schemas.openxmlformats.org/drawingml/2006/main">
               <a:ext uri="{FF2B5EF4-FFF2-40B4-BE49-F238E27FC236}">
-                <a16:creationId xmlns:a16="http://schemas.microsoft.com/office/drawing/2014/main" id="{A9D2BF24-9CF0-4392-A66F-2EB28D7A134A}"/>
+                <a16:creationId xmlns:a16="http://schemas.microsoft.com/office/drawing/2014/main" id="{77F40CE6-7C30-44F8-B59B-0F2337D977AA}"/>
               </a:ext>
             </a:extLst>
           </p:cNvPr>
@@ -9294,7 +9311,7 @@
           <p:cNvPr id="17" name="Shape 15">
             <a:extLst xmlns:a="http://schemas.openxmlformats.org/drawingml/2006/main">
               <a:ext uri="{FF2B5EF4-FFF2-40B4-BE49-F238E27FC236}">
-                <a16:creationId xmlns:a16="http://schemas.microsoft.com/office/drawing/2014/main" id="{8D0B49E5-D5C6-425D-A7C4-077FEFB152BC}"/>
+                <a16:creationId xmlns:a16="http://schemas.microsoft.com/office/drawing/2014/main" id="{1DAE5F1A-600B-4451-B916-195EA42B80BD}"/>
               </a:ext>
             </a:extLst>
           </p:cNvPr>
@@ -9329,7 +9346,7 @@
           <p:cNvPr id="18" name="Text 16">
             <a:extLst xmlns:a="http://schemas.openxmlformats.org/drawingml/2006/main">
               <a:ext uri="{FF2B5EF4-FFF2-40B4-BE49-F238E27FC236}">
-                <a16:creationId xmlns:a16="http://schemas.microsoft.com/office/drawing/2014/main" id="{0EDE1FCC-902F-4BE2-ACE5-E35681B3956B}"/>
+                <a16:creationId xmlns:a16="http://schemas.microsoft.com/office/drawing/2014/main" id="{7B7CF791-DD5A-436D-9C1A-A8602E561666}"/>
               </a:ext>
             </a:extLst>
           </p:cNvPr>
@@ -9376,7 +9393,7 @@
           <p:cNvPr id="19" name="Text 17">
             <a:extLst xmlns:a="http://schemas.openxmlformats.org/drawingml/2006/main">
               <a:ext uri="{FF2B5EF4-FFF2-40B4-BE49-F238E27FC236}">
-                <a16:creationId xmlns:a16="http://schemas.microsoft.com/office/drawing/2014/main" id="{86E587F2-6595-491C-B66F-6A6253E30095}"/>
+                <a16:creationId xmlns:a16="http://schemas.microsoft.com/office/drawing/2014/main" id="{21EF887E-6035-4552-AF1D-6869082298D2}"/>
               </a:ext>
             </a:extLst>
           </p:cNvPr>
@@ -9423,7 +9440,7 @@
           <p:cNvPr id="20" name="Shape 18">
             <a:extLst xmlns:a="http://schemas.openxmlformats.org/drawingml/2006/main">
               <a:ext uri="{FF2B5EF4-FFF2-40B4-BE49-F238E27FC236}">
-                <a16:creationId xmlns:a16="http://schemas.microsoft.com/office/drawing/2014/main" id="{7685A0F3-D10C-413A-B634-B0C2F507F669}"/>
+                <a16:creationId xmlns:a16="http://schemas.microsoft.com/office/drawing/2014/main" id="{76FB2988-AB74-412E-AF5E-9BE0CA1ED616}"/>
               </a:ext>
             </a:extLst>
           </p:cNvPr>
@@ -9455,7 +9472,7 @@
           <p:cNvPr id="21" name="Shape 19">
             <a:extLst xmlns:a="http://schemas.openxmlformats.org/drawingml/2006/main">
               <a:ext uri="{FF2B5EF4-FFF2-40B4-BE49-F238E27FC236}">
-                <a16:creationId xmlns:a16="http://schemas.microsoft.com/office/drawing/2014/main" id="{AB15C7CC-03BB-49D1-83A5-62DA62E786E8}"/>
+                <a16:creationId xmlns:a16="http://schemas.microsoft.com/office/drawing/2014/main" id="{E919AA37-790D-4295-A81C-95F98B051C97}"/>
               </a:ext>
             </a:extLst>
           </p:cNvPr>
@@ -9487,7 +9504,7 @@
           <p:cNvPr id="22" name="Shape 20">
             <a:extLst xmlns:a="http://schemas.openxmlformats.org/drawingml/2006/main">
               <a:ext uri="{FF2B5EF4-FFF2-40B4-BE49-F238E27FC236}">
-                <a16:creationId xmlns:a16="http://schemas.microsoft.com/office/drawing/2014/main" id="{AFB3604F-47B2-4811-A67E-21A49B487402}"/>
+                <a16:creationId xmlns:a16="http://schemas.microsoft.com/office/drawing/2014/main" id="{152EF7F6-6A68-4D12-B74F-3D4AA712188E}"/>
               </a:ext>
             </a:extLst>
           </p:cNvPr>
@@ -9519,7 +9536,7 @@
           <p:cNvPr id="23" name="Shape 21">
             <a:extLst xmlns:a="http://schemas.openxmlformats.org/drawingml/2006/main">
               <a:ext uri="{FF2B5EF4-FFF2-40B4-BE49-F238E27FC236}">
-                <a16:creationId xmlns:a16="http://schemas.microsoft.com/office/drawing/2014/main" id="{CFB5EDF2-A5E7-46F4-BCD2-B2902EFDFFA1}"/>
+                <a16:creationId xmlns:a16="http://schemas.microsoft.com/office/drawing/2014/main" id="{AB4A9BC3-F7B1-4021-971E-BCB8F11BF1C7}"/>
               </a:ext>
             </a:extLst>
           </p:cNvPr>
@@ -9551,7 +9568,7 @@
           <p:cNvPr id="24" name="Shape 22">
             <a:extLst xmlns:a="http://schemas.openxmlformats.org/drawingml/2006/main">
               <a:ext uri="{FF2B5EF4-FFF2-40B4-BE49-F238E27FC236}">
-                <a16:creationId xmlns:a16="http://schemas.microsoft.com/office/drawing/2014/main" id="{0D616701-BCDA-4972-91C8-E64C1F112D03}"/>
+                <a16:creationId xmlns:a16="http://schemas.microsoft.com/office/drawing/2014/main" id="{40124E97-86E3-4844-A548-6DE483453064}"/>
               </a:ext>
             </a:extLst>
           </p:cNvPr>
@@ -9586,7 +9603,7 @@
           <p:cNvPr id="25" name="Text 23">
             <a:extLst xmlns:a="http://schemas.openxmlformats.org/drawingml/2006/main">
               <a:ext uri="{FF2B5EF4-FFF2-40B4-BE49-F238E27FC236}">
-                <a16:creationId xmlns:a16="http://schemas.microsoft.com/office/drawing/2014/main" id="{09E9A6CA-9702-44AA-A189-24A0AF984CF7}"/>
+                <a16:creationId xmlns:a16="http://schemas.microsoft.com/office/drawing/2014/main" id="{E6D2CD41-8A37-4619-A3CD-1CA000524495}"/>
               </a:ext>
             </a:extLst>
           </p:cNvPr>
@@ -9633,7 +9650,7 @@
           <p:cNvPr id="26" name="Shape 24">
             <a:extLst xmlns:a="http://schemas.openxmlformats.org/drawingml/2006/main">
               <a:ext uri="{FF2B5EF4-FFF2-40B4-BE49-F238E27FC236}">
-                <a16:creationId xmlns:a16="http://schemas.microsoft.com/office/drawing/2014/main" id="{4A9794AD-6153-4730-AF8D-AD34B80DABC4}"/>
+                <a16:creationId xmlns:a16="http://schemas.microsoft.com/office/drawing/2014/main" id="{830301D6-CB1F-4761-8EA9-27EF5D8DB0BB}"/>
               </a:ext>
             </a:extLst>
           </p:cNvPr>
@@ -9668,7 +9685,7 @@
           <p:cNvPr id="27" name="Text 25">
             <a:extLst xmlns:a="http://schemas.openxmlformats.org/drawingml/2006/main">
               <a:ext uri="{FF2B5EF4-FFF2-40B4-BE49-F238E27FC236}">
-                <a16:creationId xmlns:a16="http://schemas.microsoft.com/office/drawing/2014/main" id="{934D3542-0AEE-4906-9255-85B8A01295AE}"/>
+                <a16:creationId xmlns:a16="http://schemas.microsoft.com/office/drawing/2014/main" id="{0C0E105F-D630-4D8C-9655-20AC2E6B1E8F}"/>
               </a:ext>
             </a:extLst>
           </p:cNvPr>
@@ -9715,7 +9732,7 @@
           <p:cNvPr id="28" name="Shape 26">
             <a:extLst xmlns:a="http://schemas.openxmlformats.org/drawingml/2006/main">
               <a:ext uri="{FF2B5EF4-FFF2-40B4-BE49-F238E27FC236}">
-                <a16:creationId xmlns:a16="http://schemas.microsoft.com/office/drawing/2014/main" id="{359B3BFA-710F-49BC-BA39-5FF4E191CCA2}"/>
+                <a16:creationId xmlns:a16="http://schemas.microsoft.com/office/drawing/2014/main" id="{6B05481E-68EE-4D9E-ADCB-5D63E02889D4}"/>
               </a:ext>
             </a:extLst>
           </p:cNvPr>
@@ -9748,7 +9765,7 @@
           <p:cNvPr id="29" name="Text 27">
             <a:extLst xmlns:a="http://schemas.openxmlformats.org/drawingml/2006/main">
               <a:ext uri="{FF2B5EF4-FFF2-40B4-BE49-F238E27FC236}">
-                <a16:creationId xmlns:a16="http://schemas.microsoft.com/office/drawing/2014/main" id="{4952394D-BC40-47A4-9F66-13DC0144B4C5}"/>
+                <a16:creationId xmlns:a16="http://schemas.microsoft.com/office/drawing/2014/main" id="{DA5FA55B-98D7-4F9C-BA25-1BD9BBB6675F}"/>
               </a:ext>
             </a:extLst>
           </p:cNvPr>
@@ -9795,7 +9812,7 @@
           <p:cNvPr id="30" name="Shape 28">
             <a:extLst xmlns:a="http://schemas.openxmlformats.org/drawingml/2006/main">
               <a:ext uri="{FF2B5EF4-FFF2-40B4-BE49-F238E27FC236}">
-                <a16:creationId xmlns:a16="http://schemas.microsoft.com/office/drawing/2014/main" id="{FC5EFCB4-2CA8-4ECC-A9D4-7EC0975C50AB}"/>
+                <a16:creationId xmlns:a16="http://schemas.microsoft.com/office/drawing/2014/main" id="{1E26FA74-97D3-42C0-825D-FCB24AF4CFF6}"/>
               </a:ext>
             </a:extLst>
           </p:cNvPr>
@@ -9828,7 +9845,7 @@
           <p:cNvPr id="31" name="Text 29">
             <a:extLst xmlns:a="http://schemas.openxmlformats.org/drawingml/2006/main">
               <a:ext uri="{FF2B5EF4-FFF2-40B4-BE49-F238E27FC236}">
-                <a16:creationId xmlns:a16="http://schemas.microsoft.com/office/drawing/2014/main" id="{0D692C3D-7C13-4DA8-A8DB-CD19826A3BEA}"/>
+                <a16:creationId xmlns:a16="http://schemas.microsoft.com/office/drawing/2014/main" id="{C360E698-F34A-4211-AB83-C083B1D77725}"/>
               </a:ext>
             </a:extLst>
           </p:cNvPr>
@@ -9875,7 +9892,7 @@
           <p:cNvPr id="32" name="Shape 30">
             <a:extLst xmlns:a="http://schemas.openxmlformats.org/drawingml/2006/main">
               <a:ext uri="{FF2B5EF4-FFF2-40B4-BE49-F238E27FC236}">
-                <a16:creationId xmlns:a16="http://schemas.microsoft.com/office/drawing/2014/main" id="{CE2498D4-7A5C-4047-AD53-FE1F638982A5}"/>
+                <a16:creationId xmlns:a16="http://schemas.microsoft.com/office/drawing/2014/main" id="{130AA399-1FA7-4BFF-9D2F-73B7CF7D28FE}"/>
               </a:ext>
             </a:extLst>
           </p:cNvPr>
@@ -9908,7 +9925,7 @@
           <p:cNvPr id="33" name="Text 31">
             <a:extLst xmlns:a="http://schemas.openxmlformats.org/drawingml/2006/main">
               <a:ext uri="{FF2B5EF4-FFF2-40B4-BE49-F238E27FC236}">
-                <a16:creationId xmlns:a16="http://schemas.microsoft.com/office/drawing/2014/main" id="{4D7A42EF-FA32-44DA-A521-57A709A14991}"/>
+                <a16:creationId xmlns:a16="http://schemas.microsoft.com/office/drawing/2014/main" id="{CA4096BC-F439-4102-A1E3-E3CEFF47CDB7}"/>
               </a:ext>
             </a:extLst>
           </p:cNvPr>
@@ -9955,7 +9972,7 @@
           <p:cNvPr id="34" name="Shape 32">
             <a:extLst xmlns:a="http://schemas.openxmlformats.org/drawingml/2006/main">
               <a:ext uri="{FF2B5EF4-FFF2-40B4-BE49-F238E27FC236}">
-                <a16:creationId xmlns:a16="http://schemas.microsoft.com/office/drawing/2014/main" id="{2DB8EB61-4806-4561-9217-8B442A68CA18}"/>
+                <a16:creationId xmlns:a16="http://schemas.microsoft.com/office/drawing/2014/main" id="{733CC118-2438-4830-A2AF-F64DB03FCA4F}"/>
               </a:ext>
             </a:extLst>
           </p:cNvPr>
@@ -9988,7 +10005,7 @@
           <p:cNvPr id="35" name="Text 33">
             <a:extLst xmlns:a="http://schemas.openxmlformats.org/drawingml/2006/main">
               <a:ext uri="{FF2B5EF4-FFF2-40B4-BE49-F238E27FC236}">
-                <a16:creationId xmlns:a16="http://schemas.microsoft.com/office/drawing/2014/main" id="{18B1CF6E-93FD-4F7B-97E8-544381C8F3DF}"/>
+                <a16:creationId xmlns:a16="http://schemas.microsoft.com/office/drawing/2014/main" id="{CF3AC5C4-F5A0-42C4-90D9-0DF4C3E93EC9}"/>
               </a:ext>
             </a:extLst>
           </p:cNvPr>
@@ -10035,7 +10052,7 @@
           <p:cNvPr id="36" name="Shape 34">
             <a:extLst xmlns:a="http://schemas.openxmlformats.org/drawingml/2006/main">
               <a:ext uri="{FF2B5EF4-FFF2-40B4-BE49-F238E27FC236}">
-                <a16:creationId xmlns:a16="http://schemas.microsoft.com/office/drawing/2014/main" id="{58A9A8F0-F2C5-46D9-A848-EDFC6D762311}"/>
+                <a16:creationId xmlns:a16="http://schemas.microsoft.com/office/drawing/2014/main" id="{4AC98C1D-84C2-4AE6-A2AE-2D16322E19D3}"/>
               </a:ext>
             </a:extLst>
           </p:cNvPr>
@@ -10068,7 +10085,7 @@
           <p:cNvPr id="37" name="Text 35">
             <a:extLst xmlns:a="http://schemas.openxmlformats.org/drawingml/2006/main">
               <a:ext uri="{FF2B5EF4-FFF2-40B4-BE49-F238E27FC236}">
-                <a16:creationId xmlns:a16="http://schemas.microsoft.com/office/drawing/2014/main" id="{835F19B9-11DA-4732-8EBB-126D8C04760A}"/>
+                <a16:creationId xmlns:a16="http://schemas.microsoft.com/office/drawing/2014/main" id="{1BCB88E8-8CC2-41E4-B8E8-EA12DDE3339F}"/>
               </a:ext>
             </a:extLst>
           </p:cNvPr>
@@ -10115,7 +10132,7 @@
           <p:cNvPr id="38" name="Shape 36">
             <a:extLst xmlns:a="http://schemas.openxmlformats.org/drawingml/2006/main">
               <a:ext uri="{FF2B5EF4-FFF2-40B4-BE49-F238E27FC236}">
-                <a16:creationId xmlns:a16="http://schemas.microsoft.com/office/drawing/2014/main" id="{1C90AFDE-3450-4F9B-8514-BF2A4FDD2518}"/>
+                <a16:creationId xmlns:a16="http://schemas.microsoft.com/office/drawing/2014/main" id="{D420CFE8-C4F3-4EE4-A9C2-3DF91A0CB393}"/>
               </a:ext>
             </a:extLst>
           </p:cNvPr>
@@ -10148,7 +10165,7 @@
           <p:cNvPr id="39" name="Text 37">
             <a:extLst xmlns:a="http://schemas.openxmlformats.org/drawingml/2006/main">
               <a:ext uri="{FF2B5EF4-FFF2-40B4-BE49-F238E27FC236}">
-                <a16:creationId xmlns:a16="http://schemas.microsoft.com/office/drawing/2014/main" id="{73ADE29B-C244-430C-8A56-3D76611E0B65}"/>
+                <a16:creationId xmlns:a16="http://schemas.microsoft.com/office/drawing/2014/main" id="{5709B2B0-3931-4060-8F21-6BED28A9898C}"/>
               </a:ext>
             </a:extLst>
           </p:cNvPr>
@@ -10195,7 +10212,7 @@
           <p:cNvPr id="40" name="Text 38">
             <a:extLst xmlns:a="http://schemas.openxmlformats.org/drawingml/2006/main">
               <a:ext uri="{FF2B5EF4-FFF2-40B4-BE49-F238E27FC236}">
-                <a16:creationId xmlns:a16="http://schemas.microsoft.com/office/drawing/2014/main" id="{D96492D4-F2DA-48EE-8BA1-6741C9603FAC}"/>
+                <a16:creationId xmlns:a16="http://schemas.microsoft.com/office/drawing/2014/main" id="{39B8C010-CF12-4DC7-9764-CDE28717A496}"/>
               </a:ext>
             </a:extLst>
           </p:cNvPr>
@@ -10242,7 +10259,7 @@
           <p:cNvPr id="41" name="Text 39">
             <a:extLst xmlns:a="http://schemas.openxmlformats.org/drawingml/2006/main">
               <a:ext uri="{FF2B5EF4-FFF2-40B4-BE49-F238E27FC236}">
-                <a16:creationId xmlns:a16="http://schemas.microsoft.com/office/drawing/2014/main" id="{99E20924-7674-45BD-B59B-A6A49372E7ED}"/>
+                <a16:creationId xmlns:a16="http://schemas.microsoft.com/office/drawing/2014/main" id="{FCDD43E6-4F5D-4583-8BC2-6B489E484013}"/>
               </a:ext>
             </a:extLst>
           </p:cNvPr>
@@ -10287,7 +10304,7 @@
     </p:spTree>
     <p:extLst>
       <p:ext uri="{BB962C8B-B14F-4D97-AF65-F5344CB8AC3E}">
-        <p14:creationId xmlns:p14="http://schemas.microsoft.com/office/powerpoint/2010/main" val="610141955"/>
+        <p14:creationId xmlns:p14="http://schemas.microsoft.com/office/powerpoint/2010/main" val="1875483563"/>
       </p:ext>
     </p:extLst>
   </p:cSld>
@@ -10318,7 +10335,7 @@
           <p:cNvPr id="2" name="Text 0">
             <a:extLst xmlns:a="http://schemas.openxmlformats.org/drawingml/2006/main">
               <a:ext uri="{FF2B5EF4-FFF2-40B4-BE49-F238E27FC236}">
-                <a16:creationId xmlns:a16="http://schemas.microsoft.com/office/drawing/2014/main" id="{7B73DC85-B551-4A8D-B243-52B134DE7F7A}"/>
+                <a16:creationId xmlns:a16="http://schemas.microsoft.com/office/drawing/2014/main" id="{8CFC029E-E509-4BD1-A951-FB0B68310C7E}"/>
               </a:ext>
             </a:extLst>
           </p:cNvPr>
@@ -10365,7 +10382,7 @@
           <p:cNvPr id="3" name="Text 1">
             <a:extLst xmlns:a="http://schemas.openxmlformats.org/drawingml/2006/main">
               <a:ext uri="{FF2B5EF4-FFF2-40B4-BE49-F238E27FC236}">
-                <a16:creationId xmlns:a16="http://schemas.microsoft.com/office/drawing/2014/main" id="{2E88E82E-1EFF-4BB2-9F93-AB0D8CC50ECF}"/>
+                <a16:creationId xmlns:a16="http://schemas.microsoft.com/office/drawing/2014/main" id="{556E854D-3DB9-4C44-80A2-F8414AA9C5D9}"/>
               </a:ext>
             </a:extLst>
           </p:cNvPr>
@@ -10412,7 +10429,7 @@
           <p:cNvPr id="4" name="Shape 2">
             <a:extLst xmlns:a="http://schemas.openxmlformats.org/drawingml/2006/main">
               <a:ext uri="{FF2B5EF4-FFF2-40B4-BE49-F238E27FC236}">
-                <a16:creationId xmlns:a16="http://schemas.microsoft.com/office/drawing/2014/main" id="{395581FC-ACB6-4278-A7C9-50F14C6DC656}"/>
+                <a16:creationId xmlns:a16="http://schemas.microsoft.com/office/drawing/2014/main" id="{940A035E-8BB4-477D-9CD8-E444A6204E1A}"/>
               </a:ext>
             </a:extLst>
           </p:cNvPr>
@@ -10447,7 +10464,7 @@
           <p:cNvPr id="5" name="Text 3">
             <a:extLst xmlns:a="http://schemas.openxmlformats.org/drawingml/2006/main">
               <a:ext uri="{FF2B5EF4-FFF2-40B4-BE49-F238E27FC236}">
-                <a16:creationId xmlns:a16="http://schemas.microsoft.com/office/drawing/2014/main" id="{C119595E-07D9-400C-92E8-829C3614ABCD}"/>
+                <a16:creationId xmlns:a16="http://schemas.microsoft.com/office/drawing/2014/main" id="{AE2C0658-B5BC-4597-9B13-536EF82D2DC2}"/>
               </a:ext>
             </a:extLst>
           </p:cNvPr>
@@ -10494,7 +10511,7 @@
           <p:cNvPr id="6" name="Shape 4">
             <a:extLst xmlns:a="http://schemas.openxmlformats.org/drawingml/2006/main">
               <a:ext uri="{FF2B5EF4-FFF2-40B4-BE49-F238E27FC236}">
-                <a16:creationId xmlns:a16="http://schemas.microsoft.com/office/drawing/2014/main" id="{E23C8DA4-FE7C-40C2-B5EA-386FFDCCC104}"/>
+                <a16:creationId xmlns:a16="http://schemas.microsoft.com/office/drawing/2014/main" id="{5C7DCE7E-03C1-4718-8E97-AC9247D00F4A}"/>
               </a:ext>
             </a:extLst>
           </p:cNvPr>
@@ -10525,7 +10542,7 @@
           <p:cNvPr id="7" name="Shape 5">
             <a:extLst xmlns:a="http://schemas.openxmlformats.org/drawingml/2006/main">
               <a:ext uri="{FF2B5EF4-FFF2-40B4-BE49-F238E27FC236}">
-                <a16:creationId xmlns:a16="http://schemas.microsoft.com/office/drawing/2014/main" id="{5A5004A3-2BF8-41BE-9AC7-723771B85827}"/>
+                <a16:creationId xmlns:a16="http://schemas.microsoft.com/office/drawing/2014/main" id="{29944924-A789-4D57-93EB-C3C60DE47E5C}"/>
               </a:ext>
             </a:extLst>
           </p:cNvPr>
@@ -10560,7 +10577,7 @@
           <p:cNvPr id="8" name="Text 6">
             <a:extLst xmlns:a="http://schemas.openxmlformats.org/drawingml/2006/main">
               <a:ext uri="{FF2B5EF4-FFF2-40B4-BE49-F238E27FC236}">
-                <a16:creationId xmlns:a16="http://schemas.microsoft.com/office/drawing/2014/main" id="{87B12A13-6B7D-4910-B81F-CAE6B94C5F40}"/>
+                <a16:creationId xmlns:a16="http://schemas.microsoft.com/office/drawing/2014/main" id="{D264577A-3558-4399-AAD8-F98B03469811}"/>
               </a:ext>
             </a:extLst>
           </p:cNvPr>
@@ -10607,7 +10624,7 @@
           <p:cNvPr id="9" name="Shape 7">
             <a:extLst xmlns:a="http://schemas.openxmlformats.org/drawingml/2006/main">
               <a:ext uri="{FF2B5EF4-FFF2-40B4-BE49-F238E27FC236}">
-                <a16:creationId xmlns:a16="http://schemas.microsoft.com/office/drawing/2014/main" id="{DB49463E-C467-442A-8766-CFA19E015BA8}"/>
+                <a16:creationId xmlns:a16="http://schemas.microsoft.com/office/drawing/2014/main" id="{81DD58CB-20C4-461F-BCFA-4769691867BA}"/>
               </a:ext>
             </a:extLst>
           </p:cNvPr>
@@ -10642,7 +10659,7 @@
           <p:cNvPr id="10" name="Text 8">
             <a:extLst xmlns:a="http://schemas.openxmlformats.org/drawingml/2006/main">
               <a:ext uri="{FF2B5EF4-FFF2-40B4-BE49-F238E27FC236}">
-                <a16:creationId xmlns:a16="http://schemas.microsoft.com/office/drawing/2014/main" id="{A6EF5026-1BE2-42CB-BEF8-EA88289918CF}"/>
+                <a16:creationId xmlns:a16="http://schemas.microsoft.com/office/drawing/2014/main" id="{2E8D07C0-45A4-430A-9489-7E8438FF5592}"/>
               </a:ext>
             </a:extLst>
           </p:cNvPr>
@@ -10689,7 +10706,7 @@
           <p:cNvPr id="11" name="Shape 9">
             <a:extLst xmlns:a="http://schemas.openxmlformats.org/drawingml/2006/main">
               <a:ext uri="{FF2B5EF4-FFF2-40B4-BE49-F238E27FC236}">
-                <a16:creationId xmlns:a16="http://schemas.microsoft.com/office/drawing/2014/main" id="{3DCB78C9-E0F8-46C6-AE2E-9F72C7AB6A32}"/>
+                <a16:creationId xmlns:a16="http://schemas.microsoft.com/office/drawing/2014/main" id="{BB788CD8-0886-45D3-A0F7-51601B0A2374}"/>
               </a:ext>
             </a:extLst>
           </p:cNvPr>
@@ -10724,7 +10741,7 @@
           <p:cNvPr id="12" name="Text 10">
             <a:extLst xmlns:a="http://schemas.openxmlformats.org/drawingml/2006/main">
               <a:ext uri="{FF2B5EF4-FFF2-40B4-BE49-F238E27FC236}">
-                <a16:creationId xmlns:a16="http://schemas.microsoft.com/office/drawing/2014/main" id="{F7D17E40-AC99-40D8-84CE-B747605348E9}"/>
+                <a16:creationId xmlns:a16="http://schemas.microsoft.com/office/drawing/2014/main" id="{B30A2DE2-4CD0-4B01-85EB-690AA5A160B4}"/>
               </a:ext>
             </a:extLst>
           </p:cNvPr>
@@ -10771,7 +10788,7 @@
           <p:cNvPr id="13" name="Shape 11">
             <a:extLst xmlns:a="http://schemas.openxmlformats.org/drawingml/2006/main">
               <a:ext uri="{FF2B5EF4-FFF2-40B4-BE49-F238E27FC236}">
-                <a16:creationId xmlns:a16="http://schemas.microsoft.com/office/drawing/2014/main" id="{248EBFD5-D7A0-4F14-9399-561D614D54D6}"/>
+                <a16:creationId xmlns:a16="http://schemas.microsoft.com/office/drawing/2014/main" id="{BC481574-B66A-47B0-A25E-A5A27DB34DA1}"/>
               </a:ext>
             </a:extLst>
           </p:cNvPr>
@@ -10806,7 +10823,7 @@
           <p:cNvPr id="14" name="Text 12">
             <a:extLst xmlns:a="http://schemas.openxmlformats.org/drawingml/2006/main">
               <a:ext uri="{FF2B5EF4-FFF2-40B4-BE49-F238E27FC236}">
-                <a16:creationId xmlns:a16="http://schemas.microsoft.com/office/drawing/2014/main" id="{71DCF8BC-9528-4B1B-A590-949C8E101119}"/>
+                <a16:creationId xmlns:a16="http://schemas.microsoft.com/office/drawing/2014/main" id="{44D2875C-AA75-4762-8A70-495FB28CFB8B}"/>
               </a:ext>
             </a:extLst>
           </p:cNvPr>
@@ -10853,7 +10870,7 @@
           <p:cNvPr id="15" name="Shape 13">
             <a:extLst xmlns:a="http://schemas.openxmlformats.org/drawingml/2006/main">
               <a:ext uri="{FF2B5EF4-FFF2-40B4-BE49-F238E27FC236}">
-                <a16:creationId xmlns:a16="http://schemas.microsoft.com/office/drawing/2014/main" id="{8337EB54-37CB-43DF-8600-9C09B903D577}"/>
+                <a16:creationId xmlns:a16="http://schemas.microsoft.com/office/drawing/2014/main" id="{D920AD91-8AA3-4D34-B8A0-B70A8F24C049}"/>
               </a:ext>
             </a:extLst>
           </p:cNvPr>
@@ -10886,7 +10903,7 @@
           <p:cNvPr id="16" name="Text 14">
             <a:extLst xmlns:a="http://schemas.openxmlformats.org/drawingml/2006/main">
               <a:ext uri="{FF2B5EF4-FFF2-40B4-BE49-F238E27FC236}">
-                <a16:creationId xmlns:a16="http://schemas.microsoft.com/office/drawing/2014/main" id="{D6575CEB-7254-4367-B4C7-7F24DF05893A}"/>
+                <a16:creationId xmlns:a16="http://schemas.microsoft.com/office/drawing/2014/main" id="{44FCF51C-35B5-4609-BE9D-25F67DFFBC35}"/>
               </a:ext>
             </a:extLst>
           </p:cNvPr>
@@ -10933,7 +10950,7 @@
           <p:cNvPr id="17" name="Text 15">
             <a:extLst xmlns:a="http://schemas.openxmlformats.org/drawingml/2006/main">
               <a:ext uri="{FF2B5EF4-FFF2-40B4-BE49-F238E27FC236}">
-                <a16:creationId xmlns:a16="http://schemas.microsoft.com/office/drawing/2014/main" id="{8983B725-49E6-4299-BD07-1B997869F859}"/>
+                <a16:creationId xmlns:a16="http://schemas.microsoft.com/office/drawing/2014/main" id="{E81312DF-BB86-4FA5-8E63-CD576CA16E66}"/>
               </a:ext>
             </a:extLst>
           </p:cNvPr>
@@ -10980,7 +10997,7 @@
           <p:cNvPr id="18" name="Text 16">
             <a:extLst xmlns:a="http://schemas.openxmlformats.org/drawingml/2006/main">
               <a:ext uri="{FF2B5EF4-FFF2-40B4-BE49-F238E27FC236}">
-                <a16:creationId xmlns:a16="http://schemas.microsoft.com/office/drawing/2014/main" id="{B750D2AD-C91D-48BA-9202-867B27931F6F}"/>
+                <a16:creationId xmlns:a16="http://schemas.microsoft.com/office/drawing/2014/main" id="{87523382-EB61-45DB-9FE2-8E2C058712EB}"/>
               </a:ext>
             </a:extLst>
           </p:cNvPr>
@@ -11027,7 +11044,7 @@
           <p:cNvPr id="19" name="Text 17">
             <a:extLst xmlns:a="http://schemas.openxmlformats.org/drawingml/2006/main">
               <a:ext uri="{FF2B5EF4-FFF2-40B4-BE49-F238E27FC236}">
-                <a16:creationId xmlns:a16="http://schemas.microsoft.com/office/drawing/2014/main" id="{7F2970AD-9DDC-4C32-93B3-17AC794CBF66}"/>
+                <a16:creationId xmlns:a16="http://schemas.microsoft.com/office/drawing/2014/main" id="{55B2F98A-E152-45AE-AA6A-FF82717D3413}"/>
               </a:ext>
             </a:extLst>
           </p:cNvPr>
@@ -11074,7 +11091,7 @@
           <p:cNvPr id="20" name="Shape 18">
             <a:extLst xmlns:a="http://schemas.openxmlformats.org/drawingml/2006/main">
               <a:ext uri="{FF2B5EF4-FFF2-40B4-BE49-F238E27FC236}">
-                <a16:creationId xmlns:a16="http://schemas.microsoft.com/office/drawing/2014/main" id="{F8C17BE2-081E-49CA-9E73-4BBCE3C60486}"/>
+                <a16:creationId xmlns:a16="http://schemas.microsoft.com/office/drawing/2014/main" id="{F84B1491-0335-4EAC-947B-42D3BB00CB5B}"/>
               </a:ext>
             </a:extLst>
           </p:cNvPr>
@@ -11107,7 +11124,7 @@
           <p:cNvPr id="21" name="Text 19">
             <a:extLst xmlns:a="http://schemas.openxmlformats.org/drawingml/2006/main">
               <a:ext uri="{FF2B5EF4-FFF2-40B4-BE49-F238E27FC236}">
-                <a16:creationId xmlns:a16="http://schemas.microsoft.com/office/drawing/2014/main" id="{77B452F1-EF70-43B3-AC84-AD48DC4E426D}"/>
+                <a16:creationId xmlns:a16="http://schemas.microsoft.com/office/drawing/2014/main" id="{32769235-FC48-4340-AD7C-9F94F0912E63}"/>
               </a:ext>
             </a:extLst>
           </p:cNvPr>
@@ -11154,7 +11171,7 @@
           <p:cNvPr id="22" name="Text 20">
             <a:extLst xmlns:a="http://schemas.openxmlformats.org/drawingml/2006/main">
               <a:ext uri="{FF2B5EF4-FFF2-40B4-BE49-F238E27FC236}">
-                <a16:creationId xmlns:a16="http://schemas.microsoft.com/office/drawing/2014/main" id="{8C4965E0-3ADC-43DF-BFF9-4F31B82B9A87}"/>
+                <a16:creationId xmlns:a16="http://schemas.microsoft.com/office/drawing/2014/main" id="{DB837D59-D681-4D5B-B13A-C89C0A4F8152}"/>
               </a:ext>
             </a:extLst>
           </p:cNvPr>
@@ -11201,7 +11218,7 @@
           <p:cNvPr id="23" name="Text 21">
             <a:extLst xmlns:a="http://schemas.openxmlformats.org/drawingml/2006/main">
               <a:ext uri="{FF2B5EF4-FFF2-40B4-BE49-F238E27FC236}">
-                <a16:creationId xmlns:a16="http://schemas.microsoft.com/office/drawing/2014/main" id="{CFC0968A-F791-4522-9EE1-1746DB2A6E69}"/>
+                <a16:creationId xmlns:a16="http://schemas.microsoft.com/office/drawing/2014/main" id="{9DF6CE7A-EF02-48AB-937B-3DA37C9B7E85}"/>
               </a:ext>
             </a:extLst>
           </p:cNvPr>
@@ -11248,7 +11265,7 @@
           <p:cNvPr id="24" name="Text 22">
             <a:extLst xmlns:a="http://schemas.openxmlformats.org/drawingml/2006/main">
               <a:ext uri="{FF2B5EF4-FFF2-40B4-BE49-F238E27FC236}">
-                <a16:creationId xmlns:a16="http://schemas.microsoft.com/office/drawing/2014/main" id="{20205AD8-9B87-4977-B5A0-E3A387203DCC}"/>
+                <a16:creationId xmlns:a16="http://schemas.microsoft.com/office/drawing/2014/main" id="{5DF9FE69-9025-466D-9973-CFB0FF3ABA32}"/>
               </a:ext>
             </a:extLst>
           </p:cNvPr>
@@ -11295,7 +11312,7 @@
           <p:cNvPr id="25" name="Shape 23">
             <a:extLst xmlns:a="http://schemas.openxmlformats.org/drawingml/2006/main">
               <a:ext uri="{FF2B5EF4-FFF2-40B4-BE49-F238E27FC236}">
-                <a16:creationId xmlns:a16="http://schemas.microsoft.com/office/drawing/2014/main" id="{3EE1D081-C312-487F-AEBC-3ABBCACFE7B4}"/>
+                <a16:creationId xmlns:a16="http://schemas.microsoft.com/office/drawing/2014/main" id="{405BD376-1781-44A6-942E-8E9A4519FCC6}"/>
               </a:ext>
             </a:extLst>
           </p:cNvPr>
@@ -11328,7 +11345,7 @@
           <p:cNvPr id="26" name="Text 24">
             <a:extLst xmlns:a="http://schemas.openxmlformats.org/drawingml/2006/main">
               <a:ext uri="{FF2B5EF4-FFF2-40B4-BE49-F238E27FC236}">
-                <a16:creationId xmlns:a16="http://schemas.microsoft.com/office/drawing/2014/main" id="{874ADFC1-9D6D-45BD-AFAB-6E1A1E083842}"/>
+                <a16:creationId xmlns:a16="http://schemas.microsoft.com/office/drawing/2014/main" id="{258BD0E1-D23B-472F-8BE8-74D27FA719E8}"/>
               </a:ext>
             </a:extLst>
           </p:cNvPr>
@@ -11375,7 +11392,7 @@
           <p:cNvPr id="27" name="Text 25">
             <a:extLst xmlns:a="http://schemas.openxmlformats.org/drawingml/2006/main">
               <a:ext uri="{FF2B5EF4-FFF2-40B4-BE49-F238E27FC236}">
-                <a16:creationId xmlns:a16="http://schemas.microsoft.com/office/drawing/2014/main" id="{DAF35205-C71E-41ED-A5BE-DD4A843B305C}"/>
+                <a16:creationId xmlns:a16="http://schemas.microsoft.com/office/drawing/2014/main" id="{F8944C67-1518-40A6-A313-674142EDB232}"/>
               </a:ext>
             </a:extLst>
           </p:cNvPr>
@@ -11422,7 +11439,7 @@
           <p:cNvPr id="28" name="Text 26">
             <a:extLst xmlns:a="http://schemas.openxmlformats.org/drawingml/2006/main">
               <a:ext uri="{FF2B5EF4-FFF2-40B4-BE49-F238E27FC236}">
-                <a16:creationId xmlns:a16="http://schemas.microsoft.com/office/drawing/2014/main" id="{B8415DB4-8674-4F37-AB12-200455426EF7}"/>
+                <a16:creationId xmlns:a16="http://schemas.microsoft.com/office/drawing/2014/main" id="{7DE67489-C417-45DB-B90F-47A9D287FE6A}"/>
               </a:ext>
             </a:extLst>
           </p:cNvPr>
@@ -11469,7 +11486,7 @@
           <p:cNvPr id="29" name="Text 27">
             <a:extLst xmlns:a="http://schemas.openxmlformats.org/drawingml/2006/main">
               <a:ext uri="{FF2B5EF4-FFF2-40B4-BE49-F238E27FC236}">
-                <a16:creationId xmlns:a16="http://schemas.microsoft.com/office/drawing/2014/main" id="{E3BEAE3C-1D72-433F-B99E-C1ACC5CB002B}"/>
+                <a16:creationId xmlns:a16="http://schemas.microsoft.com/office/drawing/2014/main" id="{A9335759-ED2F-486D-8A53-620F5C0EFCDE}"/>
               </a:ext>
             </a:extLst>
           </p:cNvPr>
@@ -11516,7 +11533,7 @@
           <p:cNvPr id="30" name="Shape 28">
             <a:extLst xmlns:a="http://schemas.openxmlformats.org/drawingml/2006/main">
               <a:ext uri="{FF2B5EF4-FFF2-40B4-BE49-F238E27FC236}">
-                <a16:creationId xmlns:a16="http://schemas.microsoft.com/office/drawing/2014/main" id="{3726103B-4D79-4111-BED3-6BB62EC0D6CE}"/>
+                <a16:creationId xmlns:a16="http://schemas.microsoft.com/office/drawing/2014/main" id="{304D54CF-C28C-4BB2-A14B-C7291F4B35CC}"/>
               </a:ext>
             </a:extLst>
           </p:cNvPr>
@@ -11549,7 +11566,7 @@
           <p:cNvPr id="31" name="Text 29">
             <a:extLst xmlns:a="http://schemas.openxmlformats.org/drawingml/2006/main">
               <a:ext uri="{FF2B5EF4-FFF2-40B4-BE49-F238E27FC236}">
-                <a16:creationId xmlns:a16="http://schemas.microsoft.com/office/drawing/2014/main" id="{81A6E6C3-0228-4308-BFC7-12F4297A7B50}"/>
+                <a16:creationId xmlns:a16="http://schemas.microsoft.com/office/drawing/2014/main" id="{1A40CE27-300A-4C56-864F-9584AB841889}"/>
               </a:ext>
             </a:extLst>
           </p:cNvPr>
@@ -11596,7 +11613,7 @@
           <p:cNvPr id="32" name="Text 30">
             <a:extLst xmlns:a="http://schemas.openxmlformats.org/drawingml/2006/main">
               <a:ext uri="{FF2B5EF4-FFF2-40B4-BE49-F238E27FC236}">
-                <a16:creationId xmlns:a16="http://schemas.microsoft.com/office/drawing/2014/main" id="{C19984EA-0009-49B4-9B43-CA4B0F4EF4E9}"/>
+                <a16:creationId xmlns:a16="http://schemas.microsoft.com/office/drawing/2014/main" id="{A5E5FC24-14AD-4141-92BD-610FDED17A0C}"/>
               </a:ext>
             </a:extLst>
           </p:cNvPr>
@@ -11643,7 +11660,7 @@
           <p:cNvPr id="33" name="Text 31">
             <a:extLst xmlns:a="http://schemas.openxmlformats.org/drawingml/2006/main">
               <a:ext uri="{FF2B5EF4-FFF2-40B4-BE49-F238E27FC236}">
-                <a16:creationId xmlns:a16="http://schemas.microsoft.com/office/drawing/2014/main" id="{5E666A3E-925D-48B1-B053-D7FE2C864CD6}"/>
+                <a16:creationId xmlns:a16="http://schemas.microsoft.com/office/drawing/2014/main" id="{855DE577-1504-48C7-BABA-B3616AA8D4EB}"/>
               </a:ext>
             </a:extLst>
           </p:cNvPr>
@@ -11690,7 +11707,7 @@
           <p:cNvPr id="34" name="Text 32">
             <a:extLst xmlns:a="http://schemas.openxmlformats.org/drawingml/2006/main">
               <a:ext uri="{FF2B5EF4-FFF2-40B4-BE49-F238E27FC236}">
-                <a16:creationId xmlns:a16="http://schemas.microsoft.com/office/drawing/2014/main" id="{33D9EF85-5889-4009-9B0E-6460245BC642}"/>
+                <a16:creationId xmlns:a16="http://schemas.microsoft.com/office/drawing/2014/main" id="{F1E1ED56-5266-4C49-9EFC-6A3323D60A6C}"/>
               </a:ext>
             </a:extLst>
           </p:cNvPr>
@@ -11737,7 +11754,7 @@
           <p:cNvPr id="35" name="Shape 33">
             <a:extLst xmlns:a="http://schemas.openxmlformats.org/drawingml/2006/main">
               <a:ext uri="{FF2B5EF4-FFF2-40B4-BE49-F238E27FC236}">
-                <a16:creationId xmlns:a16="http://schemas.microsoft.com/office/drawing/2014/main" id="{D90359F8-7E34-4610-B7AB-77B1F3DBCC15}"/>
+                <a16:creationId xmlns:a16="http://schemas.microsoft.com/office/drawing/2014/main" id="{67A5771B-6E85-4920-9A62-E41DE31B24C9}"/>
               </a:ext>
             </a:extLst>
           </p:cNvPr>
@@ -11770,7 +11787,7 @@
           <p:cNvPr id="36" name="Text 34">
             <a:extLst xmlns:a="http://schemas.openxmlformats.org/drawingml/2006/main">
               <a:ext uri="{FF2B5EF4-FFF2-40B4-BE49-F238E27FC236}">
-                <a16:creationId xmlns:a16="http://schemas.microsoft.com/office/drawing/2014/main" id="{BFDB9EA6-2261-4546-9E69-45D7C05F15FE}"/>
+                <a16:creationId xmlns:a16="http://schemas.microsoft.com/office/drawing/2014/main" id="{28BF9817-0E4D-41E8-A3E1-4256296B7FCC}"/>
               </a:ext>
             </a:extLst>
           </p:cNvPr>
@@ -11817,7 +11834,7 @@
           <p:cNvPr id="37" name="Text 35">
             <a:extLst xmlns:a="http://schemas.openxmlformats.org/drawingml/2006/main">
               <a:ext uri="{FF2B5EF4-FFF2-40B4-BE49-F238E27FC236}">
-                <a16:creationId xmlns:a16="http://schemas.microsoft.com/office/drawing/2014/main" id="{06E0CCBF-809A-4B69-A150-658FC20335FF}"/>
+                <a16:creationId xmlns:a16="http://schemas.microsoft.com/office/drawing/2014/main" id="{DB864E27-115A-45C2-A6A3-BA6896C25190}"/>
               </a:ext>
             </a:extLst>
           </p:cNvPr>
@@ -11864,7 +11881,7 @@
           <p:cNvPr id="38" name="Text 36">
             <a:extLst xmlns:a="http://schemas.openxmlformats.org/drawingml/2006/main">
               <a:ext uri="{FF2B5EF4-FFF2-40B4-BE49-F238E27FC236}">
-                <a16:creationId xmlns:a16="http://schemas.microsoft.com/office/drawing/2014/main" id="{0E44E18B-1636-426D-98F8-DF313425DDEC}"/>
+                <a16:creationId xmlns:a16="http://schemas.microsoft.com/office/drawing/2014/main" id="{55BD952C-6608-487C-8F5E-6BA9E4903428}"/>
               </a:ext>
             </a:extLst>
           </p:cNvPr>
@@ -11911,7 +11928,7 @@
           <p:cNvPr id="39" name="Text 37">
             <a:extLst xmlns:a="http://schemas.openxmlformats.org/drawingml/2006/main">
               <a:ext uri="{FF2B5EF4-FFF2-40B4-BE49-F238E27FC236}">
-                <a16:creationId xmlns:a16="http://schemas.microsoft.com/office/drawing/2014/main" id="{E19F6D27-F01B-4A2F-A87B-9767584C33E3}"/>
+                <a16:creationId xmlns:a16="http://schemas.microsoft.com/office/drawing/2014/main" id="{8BD17F18-F37A-4A00-B010-D1AFBA35BA55}"/>
               </a:ext>
             </a:extLst>
           </p:cNvPr>
@@ -11958,7 +11975,7 @@
           <p:cNvPr id="40" name="Shape 38">
             <a:extLst xmlns:a="http://schemas.openxmlformats.org/drawingml/2006/main">
               <a:ext uri="{FF2B5EF4-FFF2-40B4-BE49-F238E27FC236}">
-                <a16:creationId xmlns:a16="http://schemas.microsoft.com/office/drawing/2014/main" id="{99248C4F-60BD-470E-956C-39B834BC83F5}"/>
+                <a16:creationId xmlns:a16="http://schemas.microsoft.com/office/drawing/2014/main" id="{1C356EAE-26A9-4DE3-B664-897763DC6854}"/>
               </a:ext>
             </a:extLst>
           </p:cNvPr>
@@ -11991,7 +12008,7 @@
           <p:cNvPr id="41" name="Text 39">
             <a:extLst xmlns:a="http://schemas.openxmlformats.org/drawingml/2006/main">
               <a:ext uri="{FF2B5EF4-FFF2-40B4-BE49-F238E27FC236}">
-                <a16:creationId xmlns:a16="http://schemas.microsoft.com/office/drawing/2014/main" id="{62716077-965F-4876-902E-3A153A40FA57}"/>
+                <a16:creationId xmlns:a16="http://schemas.microsoft.com/office/drawing/2014/main" id="{9F996559-C55C-4CE3-9A20-F6FBCC26B174}"/>
               </a:ext>
             </a:extLst>
           </p:cNvPr>
@@ -12038,7 +12055,7 @@
           <p:cNvPr id="42" name="Text 40">
             <a:extLst xmlns:a="http://schemas.openxmlformats.org/drawingml/2006/main">
               <a:ext uri="{FF2B5EF4-FFF2-40B4-BE49-F238E27FC236}">
-                <a16:creationId xmlns:a16="http://schemas.microsoft.com/office/drawing/2014/main" id="{02EF7568-13FB-4DE6-94F6-6F9FD6074ACE}"/>
+                <a16:creationId xmlns:a16="http://schemas.microsoft.com/office/drawing/2014/main" id="{F13D9F43-A02C-49E1-9464-5C19F12EE57B}"/>
               </a:ext>
             </a:extLst>
           </p:cNvPr>
@@ -12085,7 +12102,7 @@
           <p:cNvPr id="43" name="Text 41">
             <a:extLst xmlns:a="http://schemas.openxmlformats.org/drawingml/2006/main">
               <a:ext uri="{FF2B5EF4-FFF2-40B4-BE49-F238E27FC236}">
-                <a16:creationId xmlns:a16="http://schemas.microsoft.com/office/drawing/2014/main" id="{6A7790C6-9833-4EA2-B34E-BAA61A51667B}"/>
+                <a16:creationId xmlns:a16="http://schemas.microsoft.com/office/drawing/2014/main" id="{CC6121A1-BF7F-4D71-840F-86B6C9266C16}"/>
               </a:ext>
             </a:extLst>
           </p:cNvPr>
@@ -12132,7 +12149,7 @@
           <p:cNvPr id="44" name="Text 42">
             <a:extLst xmlns:a="http://schemas.openxmlformats.org/drawingml/2006/main">
               <a:ext uri="{FF2B5EF4-FFF2-40B4-BE49-F238E27FC236}">
-                <a16:creationId xmlns:a16="http://schemas.microsoft.com/office/drawing/2014/main" id="{86144529-7118-4D52-99A8-76020887D9A9}"/>
+                <a16:creationId xmlns:a16="http://schemas.microsoft.com/office/drawing/2014/main" id="{3A1F64E1-4327-4721-8177-79E4125603AE}"/>
               </a:ext>
             </a:extLst>
           </p:cNvPr>
@@ -12179,7 +12196,7 @@
           <p:cNvPr id="45" name="Shape 43">
             <a:extLst xmlns:a="http://schemas.openxmlformats.org/drawingml/2006/main">
               <a:ext uri="{FF2B5EF4-FFF2-40B4-BE49-F238E27FC236}">
-                <a16:creationId xmlns:a16="http://schemas.microsoft.com/office/drawing/2014/main" id="{F1A1BFA3-7F6D-404B-B86A-0A4D2DEBB41C}"/>
+                <a16:creationId xmlns:a16="http://schemas.microsoft.com/office/drawing/2014/main" id="{91BCBF63-2F65-4C0A-9A5F-0BD10020D8BF}"/>
               </a:ext>
             </a:extLst>
           </p:cNvPr>
@@ -12214,7 +12231,7 @@
           <p:cNvPr id="46" name="Text 44">
             <a:extLst xmlns:a="http://schemas.openxmlformats.org/drawingml/2006/main">
               <a:ext uri="{FF2B5EF4-FFF2-40B4-BE49-F238E27FC236}">
-                <a16:creationId xmlns:a16="http://schemas.microsoft.com/office/drawing/2014/main" id="{C56B72D4-9F4B-4EFE-97BB-2141A601EF3B}"/>
+                <a16:creationId xmlns:a16="http://schemas.microsoft.com/office/drawing/2014/main" id="{B14E580D-2FBB-476F-BC34-D7C78CA74E04}"/>
               </a:ext>
             </a:extLst>
           </p:cNvPr>
@@ -12261,7 +12278,7 @@
           <p:cNvPr id="47" name="Text 45">
             <a:extLst xmlns:a="http://schemas.openxmlformats.org/drawingml/2006/main">
               <a:ext uri="{FF2B5EF4-FFF2-40B4-BE49-F238E27FC236}">
-                <a16:creationId xmlns:a16="http://schemas.microsoft.com/office/drawing/2014/main" id="{C63E27C0-CC62-4BE3-B73A-E5D79946D7AC}"/>
+                <a16:creationId xmlns:a16="http://schemas.microsoft.com/office/drawing/2014/main" id="{9E20D65D-B3DB-4817-84E0-7BB5518CBE72}"/>
               </a:ext>
             </a:extLst>
           </p:cNvPr>
@@ -12308,7 +12325,7 @@
           <p:cNvPr id="48" name="Text 46">
             <a:extLst xmlns:a="http://schemas.openxmlformats.org/drawingml/2006/main">
               <a:ext uri="{FF2B5EF4-FFF2-40B4-BE49-F238E27FC236}">
-                <a16:creationId xmlns:a16="http://schemas.microsoft.com/office/drawing/2014/main" id="{16585625-DB1E-4603-B165-1AA20CE40D72}"/>
+                <a16:creationId xmlns:a16="http://schemas.microsoft.com/office/drawing/2014/main" id="{CA8CEFC3-E078-4C27-9276-6B00FCBECF98}"/>
               </a:ext>
             </a:extLst>
           </p:cNvPr>
@@ -12353,7 +12370,7 @@
     </p:spTree>
     <p:extLst>
       <p:ext uri="{BB962C8B-B14F-4D97-AF65-F5344CB8AC3E}">
-        <p14:creationId xmlns:p14="http://schemas.microsoft.com/office/powerpoint/2010/main" val="5239606"/>
+        <p14:creationId xmlns:p14="http://schemas.microsoft.com/office/powerpoint/2010/main" val="350403732"/>
       </p:ext>
     </p:extLst>
   </p:cSld>
@@ -12384,7 +12401,7 @@
           <p:cNvPr id="2" name="Text 0">
             <a:extLst xmlns:a="http://schemas.openxmlformats.org/drawingml/2006/main">
               <a:ext uri="{FF2B5EF4-FFF2-40B4-BE49-F238E27FC236}">
-                <a16:creationId xmlns:a16="http://schemas.microsoft.com/office/drawing/2014/main" id="{591B8F6F-03DE-47D3-9314-08CA8EF9AB2E}"/>
+                <a16:creationId xmlns:a16="http://schemas.microsoft.com/office/drawing/2014/main" id="{C1B1D186-30A8-4796-84D2-988BA945B786}"/>
               </a:ext>
             </a:extLst>
           </p:cNvPr>
@@ -12405,7 +12422,7 @@
         </p:spPr>
         <p:txBody>
           <a:bodyPr xmlns:a="http://schemas.openxmlformats.org/drawingml/2006/main" wrap="square" lIns="0" tIns="0" rIns="0" bIns="0" anchor="ctr">
-            <a:normAutofit/>
+            <a:normAutofit fontScale="100000"/>
           </a:bodyPr>
           <a:lstStyle xmlns:a="http://schemas.openxmlformats.org/drawingml/2006/main"/>
           <a:p xmlns:a="http://schemas.openxmlformats.org/drawingml/2006/main">
@@ -12421,7 +12438,7 @@
                 <a:ea typeface="Aptos"/>
                 <a:cs typeface="Aptos"/>
               </a:rPr>
-              <a:t>ENGINEERING PROOF</a:t>
+              <a:t>UPSTREAM CONTRIBUTION</a:t>
             </a:r>
           </a:p>
         </p:txBody>
@@ -12431,7 +12448,7 @@
           <p:cNvPr id="3" name="Text 1">
             <a:extLst xmlns:a="http://schemas.openxmlformats.org/drawingml/2006/main">
               <a:ext uri="{FF2B5EF4-FFF2-40B4-BE49-F238E27FC236}">
-                <a16:creationId xmlns:a16="http://schemas.microsoft.com/office/drawing/2014/main" id="{4D45C8AB-A112-437A-86E7-DE84B83D51F4}"/>
+                <a16:creationId xmlns:a16="http://schemas.microsoft.com/office/drawing/2014/main" id="{32F4AFDD-86FA-4C63-8C87-F5280252D657}"/>
               </a:ext>
             </a:extLst>
           </p:cNvPr>
@@ -12452,7 +12469,7 @@
         </p:spPr>
         <p:txBody>
           <a:bodyPr xmlns:a="http://schemas.openxmlformats.org/drawingml/2006/main" wrap="square" lIns="0" tIns="0" rIns="0" bIns="0" anchor="ctr">
-            <a:normAutofit/>
+            <a:normAutofit fontScale="100000"/>
           </a:bodyPr>
           <a:lstStyle xmlns:a="http://schemas.openxmlformats.org/drawingml/2006/main"/>
           <a:p xmlns:a="http://schemas.openxmlformats.org/drawingml/2006/main">
@@ -12468,7 +12485,7 @@
                 <a:ea typeface="PingFang SC"/>
                 <a:cs typeface="PingFang SC"/>
               </a:rPr>
-              <a:t>工程证据：不是原型截图，而是可构建的软件</a:t>
+              <a:t>把 Agent 可靠性写进上游，也写进 BAI Work</a:t>
             </a:r>
           </a:p>
         </p:txBody>
@@ -12478,7 +12495,7 @@
           <p:cNvPr id="4" name="Shape 2">
             <a:extLst xmlns:a="http://schemas.openxmlformats.org/drawingml/2006/main">
               <a:ext uri="{FF2B5EF4-FFF2-40B4-BE49-F238E27FC236}">
-                <a16:creationId xmlns:a16="http://schemas.microsoft.com/office/drawing/2014/main" id="{4F5F9B6A-BB03-4598-A617-337C5325D915}"/>
+                <a16:creationId xmlns:a16="http://schemas.microsoft.com/office/drawing/2014/main" id="{CDB9D719-C01A-43E2-B4F5-677868AF4211}"/>
               </a:ext>
             </a:extLst>
           </p:cNvPr>
@@ -12513,7 +12530,7 @@
           <p:cNvPr id="5" name="Text 3">
             <a:extLst xmlns:a="http://schemas.openxmlformats.org/drawingml/2006/main">
               <a:ext uri="{FF2B5EF4-FFF2-40B4-BE49-F238E27FC236}">
-                <a16:creationId xmlns:a16="http://schemas.microsoft.com/office/drawing/2014/main" id="{224B4B50-2B60-4AB7-BCA6-42039E800BF2}"/>
+                <a16:creationId xmlns:a16="http://schemas.microsoft.com/office/drawing/2014/main" id="{1B422D15-C540-43C4-A66C-FACC31CB4B67}"/>
               </a:ext>
             </a:extLst>
           </p:cNvPr>
@@ -12534,7 +12551,7 @@
         </p:spPr>
         <p:txBody>
           <a:bodyPr xmlns:a="http://schemas.openxmlformats.org/drawingml/2006/main" wrap="square" lIns="0" tIns="0" rIns="0" bIns="0" anchor="ctr">
-            <a:normAutofit/>
+            <a:normAutofit fontScale="100000"/>
           </a:bodyPr>
           <a:lstStyle xmlns:a="http://schemas.openxmlformats.org/drawingml/2006/main"/>
           <a:p xmlns:a="http://schemas.openxmlformats.org/drawingml/2006/main">
@@ -12550,7 +12567,7 @@
                 <a:ea typeface="PingFang SC"/>
                 <a:cs typeface="PingFang SC"/>
               </a:rPr>
-              <a:t>交付验证</a:t>
+              <a:t>技术背书</a:t>
             </a:r>
           </a:p>
         </p:txBody>
@@ -12560,7 +12577,7 @@
           <p:cNvPr id="6" name="Shape 4">
             <a:extLst xmlns:a="http://schemas.openxmlformats.org/drawingml/2006/main">
               <a:ext uri="{FF2B5EF4-FFF2-40B4-BE49-F238E27FC236}">
-                <a16:creationId xmlns:a16="http://schemas.microsoft.com/office/drawing/2014/main" id="{F929B08B-0177-4ED5-81EC-D003998BBF08}"/>
+                <a16:creationId xmlns:a16="http://schemas.microsoft.com/office/drawing/2014/main" id="{5B2D7BF5-7FA6-4E77-87FE-C58866ADB3A7}"/>
               </a:ext>
             </a:extLst>
           </p:cNvPr>
@@ -12591,7 +12608,7 @@
           <p:cNvPr id="7" name="Shape 5">
             <a:extLst xmlns:a="http://schemas.openxmlformats.org/drawingml/2006/main">
               <a:ext uri="{FF2B5EF4-FFF2-40B4-BE49-F238E27FC236}">
-                <a16:creationId xmlns:a16="http://schemas.microsoft.com/office/drawing/2014/main" id="{14ED56D4-769F-4466-B0C5-750F03E23720}"/>
+                <a16:creationId xmlns:a16="http://schemas.microsoft.com/office/drawing/2014/main" id="{BE06D1F1-AB20-4024-B736-46A9E152049B}"/>
               </a:ext>
             </a:extLst>
           </p:cNvPr>
@@ -12626,7 +12643,7 @@
           <p:cNvPr id="8" name="Text 6">
             <a:extLst xmlns:a="http://schemas.openxmlformats.org/drawingml/2006/main">
               <a:ext uri="{FF2B5EF4-FFF2-40B4-BE49-F238E27FC236}">
-                <a16:creationId xmlns:a16="http://schemas.microsoft.com/office/drawing/2014/main" id="{D4562A19-F393-490F-826A-BE65DAEB8873}"/>
+                <a16:creationId xmlns:a16="http://schemas.microsoft.com/office/drawing/2014/main" id="{31AB6D5B-94F6-4958-BAC3-E3A03BA0DBA1}"/>
               </a:ext>
             </a:extLst>
           </p:cNvPr>
@@ -12647,7 +12664,7 @@
         </p:spPr>
         <p:txBody>
           <a:bodyPr xmlns:a="http://schemas.openxmlformats.org/drawingml/2006/main" wrap="square" lIns="0" tIns="0" rIns="0" bIns="0" anchor="ctr">
-            <a:normAutofit/>
+            <a:normAutofit fontScale="100000"/>
           </a:bodyPr>
           <a:lstStyle xmlns:a="http://schemas.openxmlformats.org/drawingml/2006/main"/>
           <a:p xmlns:a="http://schemas.openxmlformats.org/drawingml/2006/main">
@@ -12663,7 +12680,7 @@
                 <a:ea typeface="Aptos Display"/>
                 <a:cs typeface="Aptos Display"/>
               </a:rPr>
-              <a:t>3</a:t>
+              <a:t>OPENAI</a:t>
             </a:r>
           </a:p>
         </p:txBody>
@@ -12673,7 +12690,7 @@
           <p:cNvPr id="9" name="Text 7">
             <a:extLst xmlns:a="http://schemas.openxmlformats.org/drawingml/2006/main">
               <a:ext uri="{FF2B5EF4-FFF2-40B4-BE49-F238E27FC236}">
-                <a16:creationId xmlns:a16="http://schemas.microsoft.com/office/drawing/2014/main" id="{E96C3642-FAC8-4B91-B5DA-F31E22328909}"/>
+                <a16:creationId xmlns:a16="http://schemas.microsoft.com/office/drawing/2014/main" id="{9B8B1466-E827-4AE1-BB04-B578EB54D4F5}"/>
               </a:ext>
             </a:extLst>
           </p:cNvPr>
@@ -12694,7 +12711,7 @@
         </p:spPr>
         <p:txBody>
           <a:bodyPr xmlns:a="http://schemas.openxmlformats.org/drawingml/2006/main" wrap="square" lIns="0" tIns="0" rIns="0" bIns="0" anchor="ctr">
-            <a:normAutofit/>
+            <a:normAutofit fontScale="100000"/>
           </a:bodyPr>
           <a:lstStyle xmlns:a="http://schemas.openxmlformats.org/drawingml/2006/main"/>
           <a:p xmlns:a="http://schemas.openxmlformats.org/drawingml/2006/main">
@@ -12710,7 +12727,7 @@
                 <a:ea typeface="PingFang SC"/>
                 <a:cs typeface="PingFang SC"/>
               </a:rPr>
-              <a:t>桌面平台</a:t>
+              <a:t>Contributor</a:t>
             </a:r>
           </a:p>
         </p:txBody>
@@ -12720,7 +12737,7 @@
           <p:cNvPr id="10" name="Text 8">
             <a:extLst xmlns:a="http://schemas.openxmlformats.org/drawingml/2006/main">
               <a:ext uri="{FF2B5EF4-FFF2-40B4-BE49-F238E27FC236}">
-                <a16:creationId xmlns:a16="http://schemas.microsoft.com/office/drawing/2014/main" id="{1D50D222-5992-4F04-8FAD-D654D2AFC245}"/>
+                <a16:creationId xmlns:a16="http://schemas.microsoft.com/office/drawing/2014/main" id="{21F883DB-85A0-452D-82DD-2F11345D3A91}"/>
               </a:ext>
             </a:extLst>
           </p:cNvPr>
@@ -12741,7 +12758,7 @@
         </p:spPr>
         <p:txBody>
           <a:bodyPr xmlns:a="http://schemas.openxmlformats.org/drawingml/2006/main" wrap="square" lIns="0" tIns="0" rIns="0" bIns="0" anchor="t">
-            <a:normAutofit/>
+            <a:normAutofit fontScale="100000"/>
           </a:bodyPr>
           <a:lstStyle xmlns:a="http://schemas.openxmlformats.org/drawingml/2006/main"/>
           <a:p xmlns:a="http://schemas.openxmlformats.org/drawingml/2006/main">
@@ -12757,7 +12774,7 @@
                 <a:ea typeface="PingFang SC"/>
                 <a:cs typeface="PingFang SC"/>
               </a:rPr>
-              <a:t>Mac Intel / Apple Silicon / Windows</a:t>
+              <a:t>@2830500285 · 首次贡献者</a:t>
             </a:r>
           </a:p>
         </p:txBody>
@@ -12767,7 +12784,7 @@
           <p:cNvPr id="11" name="Shape 9">
             <a:extLst xmlns:a="http://schemas.openxmlformats.org/drawingml/2006/main">
               <a:ext uri="{FF2B5EF4-FFF2-40B4-BE49-F238E27FC236}">
-                <a16:creationId xmlns:a16="http://schemas.microsoft.com/office/drawing/2014/main" id="{C8295612-39B5-46B1-9AC0-BBE29DE5E1B4}"/>
+                <a16:creationId xmlns:a16="http://schemas.microsoft.com/office/drawing/2014/main" id="{6B2F04BA-C6D9-4B77-B462-9687F32C2DAC}"/>
               </a:ext>
             </a:extLst>
           </p:cNvPr>
@@ -12802,7 +12819,7 @@
           <p:cNvPr id="12" name="Text 10">
             <a:extLst xmlns:a="http://schemas.openxmlformats.org/drawingml/2006/main">
               <a:ext uri="{FF2B5EF4-FFF2-40B4-BE49-F238E27FC236}">
-                <a16:creationId xmlns:a16="http://schemas.microsoft.com/office/drawing/2014/main" id="{8599D4C6-E1D4-43EC-B705-0C5435A240FC}"/>
+                <a16:creationId xmlns:a16="http://schemas.microsoft.com/office/drawing/2014/main" id="{9CE45F82-64DE-45C8-A3B4-AC7621882634}"/>
               </a:ext>
             </a:extLst>
           </p:cNvPr>
@@ -12823,7 +12840,7 @@
         </p:spPr>
         <p:txBody>
           <a:bodyPr xmlns:a="http://schemas.openxmlformats.org/drawingml/2006/main" wrap="square" lIns="0" tIns="0" rIns="0" bIns="0" anchor="ctr">
-            <a:normAutofit/>
+            <a:normAutofit fontScale="100000"/>
           </a:bodyPr>
           <a:lstStyle xmlns:a="http://schemas.openxmlformats.org/drawingml/2006/main"/>
           <a:p xmlns:a="http://schemas.openxmlformats.org/drawingml/2006/main">
@@ -12839,7 +12856,7 @@
                 <a:ea typeface="Aptos Display"/>
                 <a:cs typeface="Aptos Display"/>
               </a:rPr>
-              <a:t>168</a:t>
+              <a:t>#3642</a:t>
             </a:r>
           </a:p>
         </p:txBody>
@@ -12849,7 +12866,7 @@
           <p:cNvPr id="13" name="Text 11">
             <a:extLst xmlns:a="http://schemas.openxmlformats.org/drawingml/2006/main">
               <a:ext uri="{FF2B5EF4-FFF2-40B4-BE49-F238E27FC236}">
-                <a16:creationId xmlns:a16="http://schemas.microsoft.com/office/drawing/2014/main" id="{009D7D2C-A8A5-4387-9F31-D6C4B922DD96}"/>
+                <a16:creationId xmlns:a16="http://schemas.microsoft.com/office/drawing/2014/main" id="{66A8D4A0-6746-4F9B-B668-ACC2631BD4EF}"/>
               </a:ext>
             </a:extLst>
           </p:cNvPr>
@@ -12870,7 +12887,7 @@
         </p:spPr>
         <p:txBody>
           <a:bodyPr xmlns:a="http://schemas.openxmlformats.org/drawingml/2006/main" wrap="square" lIns="0" tIns="0" rIns="0" bIns="0" anchor="ctr">
-            <a:normAutofit/>
+            <a:normAutofit fontScale="100000"/>
           </a:bodyPr>
           <a:lstStyle xmlns:a="http://schemas.openxmlformats.org/drawingml/2006/main"/>
           <a:p xmlns:a="http://schemas.openxmlformats.org/drawingml/2006/main">
@@ -12886,7 +12903,7 @@
                 <a:ea typeface="PingFang SC"/>
                 <a:cs typeface="PingFang SC"/>
               </a:rPr>
-              <a:t>测试文件</a:t>
+              <a:t>Merged PR</a:t>
             </a:r>
           </a:p>
         </p:txBody>
@@ -12896,7 +12913,7 @@
           <p:cNvPr id="14" name="Text 12">
             <a:extLst xmlns:a="http://schemas.openxmlformats.org/drawingml/2006/main">
               <a:ext uri="{FF2B5EF4-FFF2-40B4-BE49-F238E27FC236}">
-                <a16:creationId xmlns:a16="http://schemas.microsoft.com/office/drawing/2014/main" id="{552B776D-4B2A-41D4-A9C1-B612521F383F}"/>
+                <a16:creationId xmlns:a16="http://schemas.microsoft.com/office/drawing/2014/main" id="{070EB3A8-67B9-43AA-BBD3-03EF9E51D3F9}"/>
               </a:ext>
             </a:extLst>
           </p:cNvPr>
@@ -12917,7 +12934,7 @@
         </p:spPr>
         <p:txBody>
           <a:bodyPr xmlns:a="http://schemas.openxmlformats.org/drawingml/2006/main" wrap="square" lIns="0" tIns="0" rIns="0" bIns="0" anchor="t">
-            <a:normAutofit/>
+            <a:normAutofit fontScale="100000"/>
           </a:bodyPr>
           <a:lstStyle xmlns:a="http://schemas.openxmlformats.org/drawingml/2006/main"/>
           <a:p xmlns:a="http://schemas.openxmlformats.org/drawingml/2006/main">
@@ -12933,7 +12950,7 @@
                 <a:ea typeface="PingFang SC"/>
                 <a:cs typeface="PingFang SC"/>
               </a:rPr>
-              <a:t>覆盖 main、runtime、renderer 与服务</a:t>
+              <a:t>OpenAI Agents SDK main</a:t>
             </a:r>
           </a:p>
         </p:txBody>
@@ -12943,7 +12960,7 @@
           <p:cNvPr id="15" name="Shape 13">
             <a:extLst xmlns:a="http://schemas.openxmlformats.org/drawingml/2006/main">
               <a:ext uri="{FF2B5EF4-FFF2-40B4-BE49-F238E27FC236}">
-                <a16:creationId xmlns:a16="http://schemas.microsoft.com/office/drawing/2014/main" id="{77D49F28-B718-4F8B-844E-404F22A937E7}"/>
+                <a16:creationId xmlns:a16="http://schemas.microsoft.com/office/drawing/2014/main" id="{C9E7357E-65E8-497A-8671-057659776916}"/>
               </a:ext>
             </a:extLst>
           </p:cNvPr>
@@ -12978,7 +12995,7 @@
           <p:cNvPr id="16" name="Text 14">
             <a:extLst xmlns:a="http://schemas.openxmlformats.org/drawingml/2006/main">
               <a:ext uri="{FF2B5EF4-FFF2-40B4-BE49-F238E27FC236}">
-                <a16:creationId xmlns:a16="http://schemas.microsoft.com/office/drawing/2014/main" id="{E91D0773-55C9-483C-85B1-BEA351A31C9E}"/>
+                <a16:creationId xmlns:a16="http://schemas.microsoft.com/office/drawing/2014/main" id="{7CB82918-A27C-4E8D-A107-380C185CFD43}"/>
               </a:ext>
             </a:extLst>
           </p:cNvPr>
@@ -12999,7 +13016,7 @@
         </p:spPr>
         <p:txBody>
           <a:bodyPr xmlns:a="http://schemas.openxmlformats.org/drawingml/2006/main" wrap="square" lIns="0" tIns="0" rIns="0" bIns="0" anchor="ctr">
-            <a:normAutofit/>
+            <a:normAutofit fontScale="100000"/>
           </a:bodyPr>
           <a:lstStyle xmlns:a="http://schemas.openxmlformats.org/drawingml/2006/main"/>
           <a:p xmlns:a="http://schemas.openxmlformats.org/drawingml/2006/main">
@@ -13015,7 +13032,7 @@
                 <a:ea typeface="Aptos Display"/>
                 <a:cs typeface="Aptos Display"/>
               </a:rPr>
-              <a:t>1,144</a:t>
+              <a:t>v0.17.7</a:t>
             </a:r>
           </a:p>
         </p:txBody>
@@ -13025,7 +13042,7 @@
           <p:cNvPr id="17" name="Text 15">
             <a:extLst xmlns:a="http://schemas.openxmlformats.org/drawingml/2006/main">
               <a:ext uri="{FF2B5EF4-FFF2-40B4-BE49-F238E27FC236}">
-                <a16:creationId xmlns:a16="http://schemas.microsoft.com/office/drawing/2014/main" id="{C241A2E6-1E5A-48F8-8DEC-1A24E66CC56F}"/>
+                <a16:creationId xmlns:a16="http://schemas.microsoft.com/office/drawing/2014/main" id="{DAA77B64-C8FD-48A0-B29D-EFBE63F2016E}"/>
               </a:ext>
             </a:extLst>
           </p:cNvPr>
@@ -13046,7 +13063,7 @@
         </p:spPr>
         <p:txBody>
           <a:bodyPr xmlns:a="http://schemas.openxmlformats.org/drawingml/2006/main" wrap="square" lIns="0" tIns="0" rIns="0" bIns="0" anchor="ctr">
-            <a:normAutofit/>
+            <a:normAutofit fontScale="100000"/>
           </a:bodyPr>
           <a:lstStyle xmlns:a="http://schemas.openxmlformats.org/drawingml/2006/main"/>
           <a:p xmlns:a="http://schemas.openxmlformats.org/drawingml/2006/main">
@@ -13062,7 +13079,7 @@
                 <a:ea typeface="PingFang SC"/>
                 <a:cs typeface="PingFang SC"/>
               </a:rPr>
-              <a:t>自动化测试</a:t>
+              <a:t>正式发布</a:t>
             </a:r>
           </a:p>
         </p:txBody>
@@ -13072,7 +13089,7 @@
           <p:cNvPr id="18" name="Text 16">
             <a:extLst xmlns:a="http://schemas.openxmlformats.org/drawingml/2006/main">
               <a:ext uri="{FF2B5EF4-FFF2-40B4-BE49-F238E27FC236}">
-                <a16:creationId xmlns:a16="http://schemas.microsoft.com/office/drawing/2014/main" id="{D26629BE-D111-4DDA-98CE-22B657FB2C33}"/>
+                <a16:creationId xmlns:a16="http://schemas.microsoft.com/office/drawing/2014/main" id="{A73A186E-3493-41AF-9158-9A76A5D4942F}"/>
               </a:ext>
             </a:extLst>
           </p:cNvPr>
@@ -13093,7 +13110,7 @@
         </p:spPr>
         <p:txBody>
           <a:bodyPr xmlns:a="http://schemas.openxmlformats.org/drawingml/2006/main" wrap="square" lIns="0" tIns="0" rIns="0" bIns="0" anchor="t">
-            <a:normAutofit/>
+            <a:normAutofit fontScale="100000"/>
           </a:bodyPr>
           <a:lstStyle xmlns:a="http://schemas.openxmlformats.org/drawingml/2006/main"/>
           <a:p xmlns:a="http://schemas.openxmlformats.org/drawingml/2006/main">
@@ -13109,7 +13126,7 @@
                 <a:ea typeface="PingFang SC"/>
                 <a:cs typeface="PingFang SC"/>
               </a:rPr>
-              <a:t>完整测试基线</a:t>
+              <a:t>官方 release 收录</a:t>
             </a:r>
           </a:p>
         </p:txBody>
@@ -13119,7 +13136,7 @@
           <p:cNvPr id="19" name="Shape 17">
             <a:extLst xmlns:a="http://schemas.openxmlformats.org/drawingml/2006/main">
               <a:ext uri="{FF2B5EF4-FFF2-40B4-BE49-F238E27FC236}">
-                <a16:creationId xmlns:a16="http://schemas.microsoft.com/office/drawing/2014/main" id="{5A23A21D-DFBA-4B35-9CE0-36D481420A39}"/>
+                <a16:creationId xmlns:a16="http://schemas.microsoft.com/office/drawing/2014/main" id="{495859E0-FD5A-41F5-B69B-EFC39DA0B26F}"/>
               </a:ext>
             </a:extLst>
           </p:cNvPr>
@@ -13154,7 +13171,7 @@
           <p:cNvPr id="20" name="Text 18">
             <a:extLst xmlns:a="http://schemas.openxmlformats.org/drawingml/2006/main">
               <a:ext uri="{FF2B5EF4-FFF2-40B4-BE49-F238E27FC236}">
-                <a16:creationId xmlns:a16="http://schemas.microsoft.com/office/drawing/2014/main" id="{13F73AF6-5E72-40D7-A5D3-3C67A12B61B4}"/>
+                <a16:creationId xmlns:a16="http://schemas.microsoft.com/office/drawing/2014/main" id="{DA0F5CEF-4060-4A6F-B880-2EE9B2DACFBA}"/>
               </a:ext>
             </a:extLst>
           </p:cNvPr>
@@ -13175,7 +13192,7 @@
         </p:spPr>
         <p:txBody>
           <a:bodyPr xmlns:a="http://schemas.openxmlformats.org/drawingml/2006/main" wrap="square" lIns="0" tIns="0" rIns="0" bIns="0" anchor="ctr">
-            <a:normAutofit/>
+            <a:normAutofit fontScale="100000"/>
           </a:bodyPr>
           <a:lstStyle xmlns:a="http://schemas.openxmlformats.org/drawingml/2006/main"/>
           <a:p xmlns:a="http://schemas.openxmlformats.org/drawingml/2006/main">
@@ -13191,7 +13208,7 @@
                 <a:ea typeface="Aptos Display"/>
                 <a:cs typeface="Aptos Display"/>
               </a:rPr>
-              <a:t>0.9.1</a:t>
+              <a:t>GPT-5.6</a:t>
             </a:r>
           </a:p>
         </p:txBody>
@@ -13201,7 +13218,7 @@
           <p:cNvPr id="21" name="Text 19">
             <a:extLst xmlns:a="http://schemas.openxmlformats.org/drawingml/2006/main">
               <a:ext uri="{FF2B5EF4-FFF2-40B4-BE49-F238E27FC236}">
-                <a16:creationId xmlns:a16="http://schemas.microsoft.com/office/drawing/2014/main" id="{270A24FF-A6AB-4B5F-A9BE-2987B85F6373}"/>
+                <a16:creationId xmlns:a16="http://schemas.microsoft.com/office/drawing/2014/main" id="{6FBB700F-A7EF-4846-B456-480F408856AF}"/>
               </a:ext>
             </a:extLst>
           </p:cNvPr>
@@ -13222,7 +13239,7 @@
         </p:spPr>
         <p:txBody>
           <a:bodyPr xmlns:a="http://schemas.openxmlformats.org/drawingml/2006/main" wrap="square" lIns="0" tIns="0" rIns="0" bIns="0" anchor="ctr">
-            <a:normAutofit/>
+            <a:normAutofit fontScale="100000"/>
           </a:bodyPr>
           <a:lstStyle xmlns:a="http://schemas.openxmlformats.org/drawingml/2006/main"/>
           <a:p xmlns:a="http://schemas.openxmlformats.org/drawingml/2006/main">
@@ -13238,7 +13255,7 @@
                 <a:ea typeface="PingFang SC"/>
                 <a:cs typeface="PingFang SC"/>
               </a:rPr>
-              <a:t>BAI Code</a:t>
+              <a:t>ChatGPT Codex</a:t>
             </a:r>
           </a:p>
         </p:txBody>
@@ -13248,7 +13265,7 @@
           <p:cNvPr id="22" name="Text 20">
             <a:extLst xmlns:a="http://schemas.openxmlformats.org/drawingml/2006/main">
               <a:ext uri="{FF2B5EF4-FFF2-40B4-BE49-F238E27FC236}">
-                <a16:creationId xmlns:a16="http://schemas.microsoft.com/office/drawing/2014/main" id="{D7ADA91D-DCBA-4C25-ACEC-CA63F9A2A73B}"/>
+                <a16:creationId xmlns:a16="http://schemas.microsoft.com/office/drawing/2014/main" id="{5E19861A-933C-48D0-B73B-959471EE5769}"/>
               </a:ext>
             </a:extLst>
           </p:cNvPr>
@@ -13269,7 +13286,7 @@
         </p:spPr>
         <p:txBody>
           <a:bodyPr xmlns:a="http://schemas.openxmlformats.org/drawingml/2006/main" wrap="square" lIns="0" tIns="0" rIns="0" bIns="0" anchor="t">
-            <a:normAutofit/>
+            <a:normAutofit fontScale="100000"/>
           </a:bodyPr>
           <a:lstStyle xmlns:a="http://schemas.openxmlformats.org/drawingml/2006/main"/>
           <a:p xmlns:a="http://schemas.openxmlformats.org/drawingml/2006/main">
@@ -13285,7 +13302,7 @@
                 <a:ea typeface="PingFang SC"/>
                 <a:cs typeface="PingFang SC"/>
               </a:rPr>
-              <a:t>Mac Intel packaged runtime</a:t>
+              <a:t>贡献流程采用</a:t>
             </a:r>
           </a:p>
         </p:txBody>
@@ -13295,7 +13312,7 @@
           <p:cNvPr id="23" name="Shape 21">
             <a:extLst xmlns:a="http://schemas.openxmlformats.org/drawingml/2006/main">
               <a:ext uri="{FF2B5EF4-FFF2-40B4-BE49-F238E27FC236}">
-                <a16:creationId xmlns:a16="http://schemas.microsoft.com/office/drawing/2014/main" id="{A497EC2B-7BDE-40C6-8266-FFAECCBB48EC}"/>
+                <a16:creationId xmlns:a16="http://schemas.microsoft.com/office/drawing/2014/main" id="{E608A979-6DA3-4C2C-91E6-9ED2B01473F8}"/>
               </a:ext>
             </a:extLst>
           </p:cNvPr>
@@ -13330,7 +13347,7 @@
           <p:cNvPr id="24" name="Text 22">
             <a:extLst xmlns:a="http://schemas.openxmlformats.org/drawingml/2006/main">
               <a:ext uri="{FF2B5EF4-FFF2-40B4-BE49-F238E27FC236}">
-                <a16:creationId xmlns:a16="http://schemas.microsoft.com/office/drawing/2014/main" id="{096DB532-7B2E-40AB-B09B-0D21290F4B17}"/>
+                <a16:creationId xmlns:a16="http://schemas.microsoft.com/office/drawing/2014/main" id="{16B4DD28-6169-4DED-BCAF-8DDC56DAECD5}"/>
               </a:ext>
             </a:extLst>
           </p:cNvPr>
@@ -13351,7 +13368,7 @@
         </p:spPr>
         <p:txBody>
           <a:bodyPr xmlns:a="http://schemas.openxmlformats.org/drawingml/2006/main" wrap="square" lIns="0" tIns="0" rIns="0" bIns="0" anchor="ctr">
-            <a:normAutofit/>
+            <a:normAutofit fontScale="100000"/>
           </a:bodyPr>
           <a:lstStyle xmlns:a="http://schemas.openxmlformats.org/drawingml/2006/main"/>
           <a:p xmlns:a="http://schemas.openxmlformats.org/drawingml/2006/main">
@@ -13367,7 +13384,7 @@
                 <a:ea typeface="Aptos"/>
                 <a:cs typeface="Aptos"/>
               </a:rPr>
-              <a:t>macOS Intel x64</a:t>
+              <a:t>有界状态</a:t>
             </a:r>
           </a:p>
         </p:txBody>
@@ -13377,7 +13394,7 @@
           <p:cNvPr id="25" name="Text 23">
             <a:extLst xmlns:a="http://schemas.openxmlformats.org/drawingml/2006/main">
               <a:ext uri="{FF2B5EF4-FFF2-40B4-BE49-F238E27FC236}">
-                <a16:creationId xmlns:a16="http://schemas.microsoft.com/office/drawing/2014/main" id="{EB94B980-F7BF-4D31-93C1-B45DEEF50BFA}"/>
+                <a16:creationId xmlns:a16="http://schemas.microsoft.com/office/drawing/2014/main" id="{51E21207-9036-4A24-BF57-BDE76A57A9C9}"/>
               </a:ext>
             </a:extLst>
           </p:cNvPr>
@@ -13398,7 +13415,7 @@
         </p:spPr>
         <p:txBody>
           <a:bodyPr xmlns:a="http://schemas.openxmlformats.org/drawingml/2006/main" wrap="square" lIns="0" tIns="0" rIns="0" bIns="0" anchor="ctr">
-            <a:normAutofit/>
+            <a:normAutofit fontScale="100000"/>
           </a:bodyPr>
           <a:lstStyle xmlns:a="http://schemas.openxmlformats.org/drawingml/2006/main"/>
           <a:p xmlns:a="http://schemas.openxmlformats.org/drawingml/2006/main">
@@ -13414,7 +13431,7 @@
                 <a:ea typeface="PingFang SC"/>
                 <a:cs typeface="PingFang SC"/>
               </a:rPr>
-              <a:t>自包含 Python 3.11 + BAI Code runtime</a:t>
+              <a:t>上游释放缓冲；BAI Work：pending 上限 50，消费即删</a:t>
             </a:r>
           </a:p>
         </p:txBody>
@@ -13424,7 +13441,7 @@
           <p:cNvPr id="26" name="Shape 24">
             <a:extLst xmlns:a="http://schemas.openxmlformats.org/drawingml/2006/main">
               <a:ext uri="{FF2B5EF4-FFF2-40B4-BE49-F238E27FC236}">
-                <a16:creationId xmlns:a16="http://schemas.microsoft.com/office/drawing/2014/main" id="{44374C33-4773-43FF-91E7-D5C2439902F2}"/>
+                <a16:creationId xmlns:a16="http://schemas.microsoft.com/office/drawing/2014/main" id="{8D82E787-1529-45D6-AD89-CD21C1203FE4}"/>
               </a:ext>
             </a:extLst>
           </p:cNvPr>
@@ -13459,7 +13476,7 @@
           <p:cNvPr id="27" name="Text 25">
             <a:extLst xmlns:a="http://schemas.openxmlformats.org/drawingml/2006/main">
               <a:ext uri="{FF2B5EF4-FFF2-40B4-BE49-F238E27FC236}">
-                <a16:creationId xmlns:a16="http://schemas.microsoft.com/office/drawing/2014/main" id="{B9B1343F-4DEE-47B9-8C3D-C07BD745C3DA}"/>
+                <a16:creationId xmlns:a16="http://schemas.microsoft.com/office/drawing/2014/main" id="{2C1041D4-2C6B-4AF1-B36B-C4912AC65A7C}"/>
               </a:ext>
             </a:extLst>
           </p:cNvPr>
@@ -13480,7 +13497,7 @@
         </p:spPr>
         <p:txBody>
           <a:bodyPr xmlns:a="http://schemas.openxmlformats.org/drawingml/2006/main" wrap="square" lIns="0" tIns="0" rIns="0" bIns="0" anchor="ctr">
-            <a:normAutofit/>
+            <a:normAutofit fontScale="100000"/>
           </a:bodyPr>
           <a:lstStyle xmlns:a="http://schemas.openxmlformats.org/drawingml/2006/main"/>
           <a:p xmlns:a="http://schemas.openxmlformats.org/drawingml/2006/main">
@@ -13496,7 +13513,7 @@
                 <a:ea typeface="PingFang SC"/>
                 <a:cs typeface="PingFang SC"/>
               </a:rPr>
-              <a:t>本机构建与运行</a:t>
+              <a:t>长跑不涨</a:t>
             </a:r>
           </a:p>
         </p:txBody>
@@ -13506,7 +13523,7 @@
           <p:cNvPr id="28" name="Shape 26">
             <a:extLst xmlns:a="http://schemas.openxmlformats.org/drawingml/2006/main">
               <a:ext uri="{FF2B5EF4-FFF2-40B4-BE49-F238E27FC236}">
-                <a16:creationId xmlns:a16="http://schemas.microsoft.com/office/drawing/2014/main" id="{AC069ABB-2039-4863-8EC7-B785FE6817A8}"/>
+                <a16:creationId xmlns:a16="http://schemas.microsoft.com/office/drawing/2014/main" id="{41F18DF9-675B-4A42-8FAB-8AD7B747A4F8}"/>
               </a:ext>
             </a:extLst>
           </p:cNvPr>
@@ -13541,7 +13558,7 @@
           <p:cNvPr id="29" name="Text 27">
             <a:extLst xmlns:a="http://schemas.openxmlformats.org/drawingml/2006/main">
               <a:ext uri="{FF2B5EF4-FFF2-40B4-BE49-F238E27FC236}">
-                <a16:creationId xmlns:a16="http://schemas.microsoft.com/office/drawing/2014/main" id="{02F03BB9-6C1F-4CC7-9E35-B050E63C6422}"/>
+                <a16:creationId xmlns:a16="http://schemas.microsoft.com/office/drawing/2014/main" id="{0C1FE5B6-3E80-4831-8AA5-6DDFFE12CE2D}"/>
               </a:ext>
             </a:extLst>
           </p:cNvPr>
@@ -13562,7 +13579,7 @@
         </p:spPr>
         <p:txBody>
           <a:bodyPr xmlns:a="http://schemas.openxmlformats.org/drawingml/2006/main" wrap="square" lIns="0" tIns="0" rIns="0" bIns="0" anchor="ctr">
-            <a:normAutofit/>
+            <a:normAutofit fontScale="100000"/>
           </a:bodyPr>
           <a:lstStyle xmlns:a="http://schemas.openxmlformats.org/drawingml/2006/main"/>
           <a:p xmlns:a="http://schemas.openxmlformats.org/drawingml/2006/main">
@@ -13578,7 +13595,7 @@
                 <a:ea typeface="Aptos"/>
                 <a:cs typeface="Aptos"/>
               </a:rPr>
-              <a:t>macOS arm64</a:t>
+              <a:t>无重复续传</a:t>
             </a:r>
           </a:p>
         </p:txBody>
@@ -13588,7 +13605,7 @@
           <p:cNvPr id="30" name="Text 28">
             <a:extLst xmlns:a="http://schemas.openxmlformats.org/drawingml/2006/main">
               <a:ext uri="{FF2B5EF4-FFF2-40B4-BE49-F238E27FC236}">
-                <a16:creationId xmlns:a16="http://schemas.microsoft.com/office/drawing/2014/main" id="{5246182A-67EE-4D71-9834-5D50DA0722AE}"/>
+                <a16:creationId xmlns:a16="http://schemas.microsoft.com/office/drawing/2014/main" id="{DC5546F6-BBB1-4AC2-8349-CD0808FF57DF}"/>
               </a:ext>
             </a:extLst>
           </p:cNvPr>
@@ -13609,7 +13626,7 @@
         </p:spPr>
         <p:txBody>
           <a:bodyPr xmlns:a="http://schemas.openxmlformats.org/drawingml/2006/main" wrap="square" lIns="0" tIns="0" rIns="0" bIns="0" anchor="ctr">
-            <a:normAutofit/>
+            <a:normAutofit fontScale="100000"/>
           </a:bodyPr>
           <a:lstStyle xmlns:a="http://schemas.openxmlformats.org/drawingml/2006/main"/>
           <a:p xmlns:a="http://schemas.openxmlformats.org/drawingml/2006/main">
@@ -13625,7 +13642,7 @@
                 <a:ea typeface="PingFang SC"/>
                 <a:cs typeface="PingFang SC"/>
               </a:rPr>
-              <a:t>官方运行时 wheelhouse + 用户目录环境</a:t>
+              <a:t>上游不重复写入；BAI Work：单调 seq + 跨批去重</a:t>
             </a:r>
           </a:p>
         </p:txBody>
@@ -13635,7 +13652,7 @@
           <p:cNvPr id="31" name="Shape 29">
             <a:extLst xmlns:a="http://schemas.openxmlformats.org/drawingml/2006/main">
               <a:ext uri="{FF2B5EF4-FFF2-40B4-BE49-F238E27FC236}">
-                <a16:creationId xmlns:a16="http://schemas.microsoft.com/office/drawing/2014/main" id="{C25C4B80-FAE4-4F8D-86C4-4B96B0CF59A0}"/>
+                <a16:creationId xmlns:a16="http://schemas.microsoft.com/office/drawing/2014/main" id="{4A0E03C2-B303-4F3C-B4D3-6A5ACCFE96BF}"/>
               </a:ext>
             </a:extLst>
           </p:cNvPr>
@@ -13670,7 +13687,7 @@
           <p:cNvPr id="32" name="Text 30">
             <a:extLst xmlns:a="http://schemas.openxmlformats.org/drawingml/2006/main">
               <a:ext uri="{FF2B5EF4-FFF2-40B4-BE49-F238E27FC236}">
-                <a16:creationId xmlns:a16="http://schemas.microsoft.com/office/drawing/2014/main" id="{3154CBD1-1F04-4F54-A91F-DDBCD1C80028}"/>
+                <a16:creationId xmlns:a16="http://schemas.microsoft.com/office/drawing/2014/main" id="{E2B3A695-5FF7-4D6E-B70B-F1EB4C928CCF}"/>
               </a:ext>
             </a:extLst>
           </p:cNvPr>
@@ -13691,7 +13708,7 @@
         </p:spPr>
         <p:txBody>
           <a:bodyPr xmlns:a="http://schemas.openxmlformats.org/drawingml/2006/main" wrap="square" lIns="0" tIns="0" rIns="0" bIns="0" anchor="ctr">
-            <a:normAutofit/>
+            <a:normAutofit fontScale="100000"/>
           </a:bodyPr>
           <a:lstStyle xmlns:a="http://schemas.openxmlformats.org/drawingml/2006/main"/>
           <a:p xmlns:a="http://schemas.openxmlformats.org/drawingml/2006/main">
@@ -13707,7 +13724,7 @@
                 <a:ea typeface="PingFang SC"/>
                 <a:cs typeface="PingFang SC"/>
               </a:rPr>
-              <a:t>原生构建与 smoke</a:t>
+              <a:t>重连不重</a:t>
             </a:r>
           </a:p>
         </p:txBody>
@@ -13717,7 +13734,7 @@
           <p:cNvPr id="33" name="Shape 31">
             <a:extLst xmlns:a="http://schemas.openxmlformats.org/drawingml/2006/main">
               <a:ext uri="{FF2B5EF4-FFF2-40B4-BE49-F238E27FC236}">
-                <a16:creationId xmlns:a16="http://schemas.microsoft.com/office/drawing/2014/main" id="{FAF1A933-AB74-411F-8F4F-D89358A84A95}"/>
+                <a16:creationId xmlns:a16="http://schemas.microsoft.com/office/drawing/2014/main" id="{2C9BF15E-7A78-4795-BBE2-F70A6F29C30F}"/>
               </a:ext>
             </a:extLst>
           </p:cNvPr>
@@ -13752,7 +13769,7 @@
           <p:cNvPr id="34" name="Text 32">
             <a:extLst xmlns:a="http://schemas.openxmlformats.org/drawingml/2006/main">
               <a:ext uri="{FF2B5EF4-FFF2-40B4-BE49-F238E27FC236}">
-                <a16:creationId xmlns:a16="http://schemas.microsoft.com/office/drawing/2014/main" id="{CFCAE51D-D5BB-4244-93FB-F39021500856}"/>
+                <a16:creationId xmlns:a16="http://schemas.microsoft.com/office/drawing/2014/main" id="{146D5335-40A4-4A3C-B0BC-26D0812EEB9A}"/>
               </a:ext>
             </a:extLst>
           </p:cNvPr>
@@ -13773,7 +13790,7 @@
         </p:spPr>
         <p:txBody>
           <a:bodyPr xmlns:a="http://schemas.openxmlformats.org/drawingml/2006/main" wrap="square" lIns="0" tIns="0" rIns="0" bIns="0" anchor="ctr">
-            <a:normAutofit/>
+            <a:normAutofit fontScale="100000"/>
           </a:bodyPr>
           <a:lstStyle xmlns:a="http://schemas.openxmlformats.org/drawingml/2006/main"/>
           <a:p xmlns:a="http://schemas.openxmlformats.org/drawingml/2006/main">
@@ -13789,7 +13806,7 @@
                 <a:ea typeface="Aptos"/>
                 <a:cs typeface="Aptos"/>
               </a:rPr>
-              <a:t>Windows x64</a:t>
+              <a:t>超时恢复</a:t>
             </a:r>
           </a:p>
         </p:txBody>
@@ -13799,7 +13816,7 @@
           <p:cNvPr id="35" name="Text 33">
             <a:extLst xmlns:a="http://schemas.openxmlformats.org/drawingml/2006/main">
               <a:ext uri="{FF2B5EF4-FFF2-40B4-BE49-F238E27FC236}">
-                <a16:creationId xmlns:a16="http://schemas.microsoft.com/office/drawing/2014/main" id="{EF0C13AB-8782-40D8-8748-752A6D1AE370}"/>
+                <a16:creationId xmlns:a16="http://schemas.microsoft.com/office/drawing/2014/main" id="{2A83066C-95C3-47D1-91DD-AD5F6710A667}"/>
               </a:ext>
             </a:extLst>
           </p:cNvPr>
@@ -13820,7 +13837,7 @@
         </p:spPr>
         <p:txBody>
           <a:bodyPr xmlns:a="http://schemas.openxmlformats.org/drawingml/2006/main" wrap="square" lIns="0" tIns="0" rIns="0" bIns="0" anchor="ctr">
-            <a:normAutofit/>
+            <a:normAutofit fontScale="100000"/>
           </a:bodyPr>
           <a:lstStyle xmlns:a="http://schemas.openxmlformats.org/drawingml/2006/main"/>
           <a:p xmlns:a="http://schemas.openxmlformats.org/drawingml/2006/main">
@@ -13836,7 +13853,7 @@
                 <a:ea typeface="PingFang SC"/>
                 <a:cs typeface="PingFang SC"/>
               </a:rPr>
-              <a:t>官方 win_amd64 wheelhouse + 安装包</a:t>
+              <a:t>上游超时落盘；BAI Work：SSE 续传 + 退避熔断</a:t>
             </a:r>
           </a:p>
         </p:txBody>
@@ -13846,7 +13863,7 @@
           <p:cNvPr id="36" name="Shape 34">
             <a:extLst xmlns:a="http://schemas.openxmlformats.org/drawingml/2006/main">
               <a:ext uri="{FF2B5EF4-FFF2-40B4-BE49-F238E27FC236}">
-                <a16:creationId xmlns:a16="http://schemas.microsoft.com/office/drawing/2014/main" id="{732B88B7-58D3-4360-BE93-145FB8ADD64B}"/>
+                <a16:creationId xmlns:a16="http://schemas.microsoft.com/office/drawing/2014/main" id="{E691820B-A3B0-4249-9433-01A5B96E8421}"/>
               </a:ext>
             </a:extLst>
           </p:cNvPr>
@@ -13881,7 +13898,7 @@
           <p:cNvPr id="37" name="Text 35">
             <a:extLst xmlns:a="http://schemas.openxmlformats.org/drawingml/2006/main">
               <a:ext uri="{FF2B5EF4-FFF2-40B4-BE49-F238E27FC236}">
-                <a16:creationId xmlns:a16="http://schemas.microsoft.com/office/drawing/2014/main" id="{B6E306D2-DC3F-4E2A-A501-8C2A5D796CE0}"/>
+                <a16:creationId xmlns:a16="http://schemas.microsoft.com/office/drawing/2014/main" id="{A296D711-33D6-488F-AAD1-3EED4D4AED1F}"/>
               </a:ext>
             </a:extLst>
           </p:cNvPr>
@@ -13902,7 +13919,7 @@
         </p:spPr>
         <p:txBody>
           <a:bodyPr xmlns:a="http://schemas.openxmlformats.org/drawingml/2006/main" wrap="square" lIns="0" tIns="0" rIns="0" bIns="0" anchor="ctr">
-            <a:normAutofit/>
+            <a:normAutofit fontScale="100000"/>
           </a:bodyPr>
           <a:lstStyle xmlns:a="http://schemas.openxmlformats.org/drawingml/2006/main"/>
           <a:p xmlns:a="http://schemas.openxmlformats.org/drawingml/2006/main">
@@ -13918,7 +13935,7 @@
                 <a:ea typeface="PingFang SC"/>
                 <a:cs typeface="PingFang SC"/>
               </a:rPr>
-              <a:t>原生构建与 smoke</a:t>
+              <a:t>失败可恢复</a:t>
             </a:r>
           </a:p>
         </p:txBody>
@@ -13928,7 +13945,7 @@
           <p:cNvPr id="38" name="Shape 36">
             <a:extLst xmlns:a="http://schemas.openxmlformats.org/drawingml/2006/main">
               <a:ext uri="{FF2B5EF4-FFF2-40B4-BE49-F238E27FC236}">
-                <a16:creationId xmlns:a16="http://schemas.microsoft.com/office/drawing/2014/main" id="{F81A47B3-F4B9-4050-B4EF-C823043BA22E}"/>
+                <a16:creationId xmlns:a16="http://schemas.microsoft.com/office/drawing/2014/main" id="{051F4EC8-5166-4518-93DC-7358A68A1376}"/>
               </a:ext>
             </a:extLst>
           </p:cNvPr>
@@ -13963,7 +13980,7 @@
           <p:cNvPr id="39" name="Text 37">
             <a:extLst xmlns:a="http://schemas.openxmlformats.org/drawingml/2006/main">
               <a:ext uri="{FF2B5EF4-FFF2-40B4-BE49-F238E27FC236}">
-                <a16:creationId xmlns:a16="http://schemas.microsoft.com/office/drawing/2014/main" id="{AA63ADD0-4149-4E83-9E15-A41DDE113051}"/>
+                <a16:creationId xmlns:a16="http://schemas.microsoft.com/office/drawing/2014/main" id="{F0423AFF-3B8F-4F48-A2F5-4AACB1B9FF6A}"/>
               </a:ext>
             </a:extLst>
           </p:cNvPr>
@@ -13984,7 +14001,7 @@
         </p:spPr>
         <p:txBody>
           <a:bodyPr xmlns:a="http://schemas.openxmlformats.org/drawingml/2006/main" wrap="square" lIns="0" tIns="0" rIns="0" bIns="0" anchor="ctr">
-            <a:normAutofit/>
+            <a:normAutofit fontScale="100000"/>
           </a:bodyPr>
           <a:lstStyle xmlns:a="http://schemas.openxmlformats.org/drawingml/2006/main"/>
           <a:p xmlns:a="http://schemas.openxmlformats.org/drawingml/2006/main">
@@ -14000,7 +14017,7 @@
                 <a:ea typeface="Aptos"/>
                 <a:cs typeface="Aptos"/>
               </a:rPr>
-              <a:t>验证链：typecheck → lint → unit tests → production build → desktop package → packaged runtime smoke</a:t>
+              <a:t>原则复用，非代码移植：把经 OpenAI 主线验证的可靠性不变量，产品化为 BAI Work Runtime Host 的默认行为。</a:t>
             </a:r>
           </a:p>
         </p:txBody>
@@ -14010,7 +14027,7 @@
           <p:cNvPr id="40" name="Text 38">
             <a:extLst xmlns:a="http://schemas.openxmlformats.org/drawingml/2006/main">
               <a:ext uri="{FF2B5EF4-FFF2-40B4-BE49-F238E27FC236}">
-                <a16:creationId xmlns:a16="http://schemas.microsoft.com/office/drawing/2014/main" id="{32A8B628-F64F-423C-A2AA-6DFD4902447A}"/>
+                <a16:creationId xmlns:a16="http://schemas.microsoft.com/office/drawing/2014/main" id="{401EC8CB-A473-40B4-8737-76310FB01F2A}"/>
               </a:ext>
             </a:extLst>
           </p:cNvPr>
@@ -14031,7 +14048,7 @@
         </p:spPr>
         <p:txBody>
           <a:bodyPr xmlns:a="http://schemas.openxmlformats.org/drawingml/2006/main" wrap="square" lIns="0" tIns="0" rIns="0" bIns="0" anchor="ctr">
-            <a:normAutofit/>
+            <a:normAutofit fontScale="100000"/>
           </a:bodyPr>
           <a:lstStyle xmlns:a="http://schemas.openxmlformats.org/drawingml/2006/main"/>
           <a:p xmlns:a="http://schemas.openxmlformats.org/drawingml/2006/main">
@@ -14047,7 +14064,7 @@
                 <a:ea typeface="Aptos"/>
                 <a:cs typeface="Aptos"/>
               </a:rPr>
-              <a:t>当前主版本：Mac Intel x86_64；其余平台保持同源实现与原生验证</a:t>
+              <a:t>公开证据：OpenAI Agents SDK PR #3642 · v0.17.7 release；GPT-5.6 Codex 使用情况来自贡献者研发记录</a:t>
             </a:r>
           </a:p>
         </p:txBody>
@@ -14057,7 +14074,7 @@
           <p:cNvPr id="41" name="Text 39">
             <a:extLst xmlns:a="http://schemas.openxmlformats.org/drawingml/2006/main">
               <a:ext uri="{FF2B5EF4-FFF2-40B4-BE49-F238E27FC236}">
-                <a16:creationId xmlns:a16="http://schemas.microsoft.com/office/drawing/2014/main" id="{54487264-5CE4-4F2B-8F30-5B92A503FFC1}"/>
+                <a16:creationId xmlns:a16="http://schemas.microsoft.com/office/drawing/2014/main" id="{F7B7B9A2-9A27-4A13-ABB4-6A7E68475DE3}"/>
               </a:ext>
             </a:extLst>
           </p:cNvPr>
@@ -14102,7 +14119,7 @@
     </p:spTree>
     <p:extLst>
       <p:ext uri="{BB962C8B-B14F-4D97-AF65-F5344CB8AC3E}">
-        <p14:creationId xmlns:p14="http://schemas.microsoft.com/office/powerpoint/2010/main" val="2103368369"/>
+        <p14:creationId xmlns:p14="http://schemas.microsoft.com/office/powerpoint/2010/main" val="1281637486"/>
       </p:ext>
     </p:extLst>
   </p:cSld>
@@ -14133,7 +14150,7 @@
           <p:cNvPr id="2" name="Text 0">
             <a:extLst xmlns:a="http://schemas.openxmlformats.org/drawingml/2006/main">
               <a:ext uri="{FF2B5EF4-FFF2-40B4-BE49-F238E27FC236}">
-                <a16:creationId xmlns:a16="http://schemas.microsoft.com/office/drawing/2014/main" id="{AB22ADC5-7F44-43A5-91D1-CABF7557C000}"/>
+                <a16:creationId xmlns:a16="http://schemas.microsoft.com/office/drawing/2014/main" id="{F4F97B34-E229-4AE1-8255-DDF23B80F5C2}"/>
               </a:ext>
             </a:extLst>
           </p:cNvPr>
@@ -14180,7 +14197,7 @@
           <p:cNvPr id="3" name="Text 1">
             <a:extLst xmlns:a="http://schemas.openxmlformats.org/drawingml/2006/main">
               <a:ext uri="{FF2B5EF4-FFF2-40B4-BE49-F238E27FC236}">
-                <a16:creationId xmlns:a16="http://schemas.microsoft.com/office/drawing/2014/main" id="{498B714B-C854-4321-AAE8-F6124888DC57}"/>
+                <a16:creationId xmlns:a16="http://schemas.microsoft.com/office/drawing/2014/main" id="{2194D2EB-186F-478B-BA89-020237BD1580}"/>
               </a:ext>
             </a:extLst>
           </p:cNvPr>
@@ -14227,7 +14244,7 @@
           <p:cNvPr id="4" name="Shape 2">
             <a:extLst xmlns:a="http://schemas.openxmlformats.org/drawingml/2006/main">
               <a:ext uri="{FF2B5EF4-FFF2-40B4-BE49-F238E27FC236}">
-                <a16:creationId xmlns:a16="http://schemas.microsoft.com/office/drawing/2014/main" id="{DD7B0B91-C89E-4A2C-A62E-02D9321B9DE9}"/>
+                <a16:creationId xmlns:a16="http://schemas.microsoft.com/office/drawing/2014/main" id="{7D636A5D-3F25-458B-BCD9-907C5BD61660}"/>
               </a:ext>
             </a:extLst>
           </p:cNvPr>
@@ -14262,7 +14279,7 @@
           <p:cNvPr id="5" name="Text 3">
             <a:extLst xmlns:a="http://schemas.openxmlformats.org/drawingml/2006/main">
               <a:ext uri="{FF2B5EF4-FFF2-40B4-BE49-F238E27FC236}">
-                <a16:creationId xmlns:a16="http://schemas.microsoft.com/office/drawing/2014/main" id="{8CBC0E2A-2B07-49FD-B247-F2C91438E2C0}"/>
+                <a16:creationId xmlns:a16="http://schemas.microsoft.com/office/drawing/2014/main" id="{21906911-402E-4416-954B-5C128E6CE186}"/>
               </a:ext>
             </a:extLst>
           </p:cNvPr>
@@ -14309,7 +14326,7 @@
           <p:cNvPr id="6" name="Shape 4">
             <a:extLst xmlns:a="http://schemas.openxmlformats.org/drawingml/2006/main">
               <a:ext uri="{FF2B5EF4-FFF2-40B4-BE49-F238E27FC236}">
-                <a16:creationId xmlns:a16="http://schemas.microsoft.com/office/drawing/2014/main" id="{04F8F3F8-98C0-4861-B4DF-4474D9F6344A}"/>
+                <a16:creationId xmlns:a16="http://schemas.microsoft.com/office/drawing/2014/main" id="{E3756483-CE33-48E7-B85B-78B4A4ABB5D8}"/>
               </a:ext>
             </a:extLst>
           </p:cNvPr>
@@ -14340,7 +14357,7 @@
           <p:cNvPr id="7" name="Shape 5">
             <a:extLst xmlns:a="http://schemas.openxmlformats.org/drawingml/2006/main">
               <a:ext uri="{FF2B5EF4-FFF2-40B4-BE49-F238E27FC236}">
-                <a16:creationId xmlns:a16="http://schemas.microsoft.com/office/drawing/2014/main" id="{FC29BA3B-E3D8-40D1-8087-586DB51814BA}"/>
+                <a16:creationId xmlns:a16="http://schemas.microsoft.com/office/drawing/2014/main" id="{9E3CE274-0839-495C-85FC-46B76D0C6B8A}"/>
               </a:ext>
             </a:extLst>
           </p:cNvPr>
@@ -14375,7 +14392,7 @@
           <p:cNvPr id="8" name="Text 6">
             <a:extLst xmlns:a="http://schemas.openxmlformats.org/drawingml/2006/main">
               <a:ext uri="{FF2B5EF4-FFF2-40B4-BE49-F238E27FC236}">
-                <a16:creationId xmlns:a16="http://schemas.microsoft.com/office/drawing/2014/main" id="{E2727EC9-C70E-434F-BD18-C8BB00FA7766}"/>
+                <a16:creationId xmlns:a16="http://schemas.microsoft.com/office/drawing/2014/main" id="{89089C67-9EB6-459B-9B64-5BB5EC55DA7D}"/>
               </a:ext>
             </a:extLst>
           </p:cNvPr>
@@ -14422,7 +14439,7 @@
           <p:cNvPr id="9" name="Text 7">
             <a:extLst xmlns:a="http://schemas.openxmlformats.org/drawingml/2006/main">
               <a:ext uri="{FF2B5EF4-FFF2-40B4-BE49-F238E27FC236}">
-                <a16:creationId xmlns:a16="http://schemas.microsoft.com/office/drawing/2014/main" id="{77A1999D-9870-49B9-8D5F-EC06817F9FC9}"/>
+                <a16:creationId xmlns:a16="http://schemas.microsoft.com/office/drawing/2014/main" id="{E2032E31-BBE4-4772-802E-9415E0FB09D3}"/>
               </a:ext>
             </a:extLst>
           </p:cNvPr>
@@ -14469,7 +14486,7 @@
           <p:cNvPr id="10" name="Text 8">
             <a:extLst xmlns:a="http://schemas.openxmlformats.org/drawingml/2006/main">
               <a:ext uri="{FF2B5EF4-FFF2-40B4-BE49-F238E27FC236}">
-                <a16:creationId xmlns:a16="http://schemas.microsoft.com/office/drawing/2014/main" id="{8A2F221B-1B41-4083-8D3D-2588588AA48C}"/>
+                <a16:creationId xmlns:a16="http://schemas.microsoft.com/office/drawing/2014/main" id="{4905E972-9CF5-4C51-A934-EBE89327BC0F}"/>
               </a:ext>
             </a:extLst>
           </p:cNvPr>
@@ -14516,7 +14533,7 @@
           <p:cNvPr id="11" name="Text 9">
             <a:extLst xmlns:a="http://schemas.openxmlformats.org/drawingml/2006/main">
               <a:ext uri="{FF2B5EF4-FFF2-40B4-BE49-F238E27FC236}">
-                <a16:creationId xmlns:a16="http://schemas.microsoft.com/office/drawing/2014/main" id="{78E6FBA7-B359-4E71-8D5E-EF907D5CBD33}"/>
+                <a16:creationId xmlns:a16="http://schemas.microsoft.com/office/drawing/2014/main" id="{6AB20177-F95C-4C46-A9D0-5CF81670009C}"/>
               </a:ext>
             </a:extLst>
           </p:cNvPr>
@@ -14563,7 +14580,7 @@
           <p:cNvPr id="12" name="Text 10">
             <a:extLst xmlns:a="http://schemas.openxmlformats.org/drawingml/2006/main">
               <a:ext uri="{FF2B5EF4-FFF2-40B4-BE49-F238E27FC236}">
-                <a16:creationId xmlns:a16="http://schemas.microsoft.com/office/drawing/2014/main" id="{78E7821B-1140-4F5E-904D-103274364FE5}"/>
+                <a16:creationId xmlns:a16="http://schemas.microsoft.com/office/drawing/2014/main" id="{8A5C1AD1-D3FE-4D3C-8DF4-97A5EE522D42}"/>
               </a:ext>
             </a:extLst>
           </p:cNvPr>
@@ -14610,7 +14627,7 @@
           <p:cNvPr id="13" name="Text 11">
             <a:extLst xmlns:a="http://schemas.openxmlformats.org/drawingml/2006/main">
               <a:ext uri="{FF2B5EF4-FFF2-40B4-BE49-F238E27FC236}">
-                <a16:creationId xmlns:a16="http://schemas.microsoft.com/office/drawing/2014/main" id="{67C37BD5-8E3F-4900-8BAB-30A65E4421F9}"/>
+                <a16:creationId xmlns:a16="http://schemas.microsoft.com/office/drawing/2014/main" id="{5F057049-8D2A-4C9F-BA51-707C57CC761B}"/>
               </a:ext>
             </a:extLst>
           </p:cNvPr>
@@ -14657,7 +14674,7 @@
           <p:cNvPr id="14" name="Shape 12">
             <a:extLst xmlns:a="http://schemas.openxmlformats.org/drawingml/2006/main">
               <a:ext uri="{FF2B5EF4-FFF2-40B4-BE49-F238E27FC236}">
-                <a16:creationId xmlns:a16="http://schemas.microsoft.com/office/drawing/2014/main" id="{EA142BF4-383B-441C-9A8C-67C09C659BC7}"/>
+                <a16:creationId xmlns:a16="http://schemas.microsoft.com/office/drawing/2014/main" id="{85FF4663-8CBC-4ED9-8BB9-E944695D4914}"/>
               </a:ext>
             </a:extLst>
           </p:cNvPr>
@@ -14692,7 +14709,7 @@
           <p:cNvPr id="15" name="Text 13">
             <a:extLst xmlns:a="http://schemas.openxmlformats.org/drawingml/2006/main">
               <a:ext uri="{FF2B5EF4-FFF2-40B4-BE49-F238E27FC236}">
-                <a16:creationId xmlns:a16="http://schemas.microsoft.com/office/drawing/2014/main" id="{790BB813-5E7D-420B-A39E-D41067F8E1C7}"/>
+                <a16:creationId xmlns:a16="http://schemas.microsoft.com/office/drawing/2014/main" id="{54DE6E63-E276-42F2-A69C-464690DB610D}"/>
               </a:ext>
             </a:extLst>
           </p:cNvPr>
@@ -14739,7 +14756,7 @@
           <p:cNvPr id="16" name="Text 14">
             <a:extLst xmlns:a="http://schemas.openxmlformats.org/drawingml/2006/main">
               <a:ext uri="{FF2B5EF4-FFF2-40B4-BE49-F238E27FC236}">
-                <a16:creationId xmlns:a16="http://schemas.microsoft.com/office/drawing/2014/main" id="{E1D496BC-5E90-495F-BBCD-CF840AD02057}"/>
+                <a16:creationId xmlns:a16="http://schemas.microsoft.com/office/drawing/2014/main" id="{D1D56193-B65E-4F65-A6E3-83B9C7E5FFA4}"/>
               </a:ext>
             </a:extLst>
           </p:cNvPr>
@@ -14786,7 +14803,7 @@
           <p:cNvPr id="17" name="Text 15">
             <a:extLst xmlns:a="http://schemas.openxmlformats.org/drawingml/2006/main">
               <a:ext uri="{FF2B5EF4-FFF2-40B4-BE49-F238E27FC236}">
-                <a16:creationId xmlns:a16="http://schemas.microsoft.com/office/drawing/2014/main" id="{F1F4F1D1-B532-49B3-928F-C42ABC26DAE9}"/>
+                <a16:creationId xmlns:a16="http://schemas.microsoft.com/office/drawing/2014/main" id="{0C1315D5-CFE9-41EB-BD8A-BA952B09C9A7}"/>
               </a:ext>
             </a:extLst>
           </p:cNvPr>
@@ -14833,7 +14850,7 @@
           <p:cNvPr id="18" name="Text 16">
             <a:extLst xmlns:a="http://schemas.openxmlformats.org/drawingml/2006/main">
               <a:ext uri="{FF2B5EF4-FFF2-40B4-BE49-F238E27FC236}">
-                <a16:creationId xmlns:a16="http://schemas.microsoft.com/office/drawing/2014/main" id="{9FA70BB9-6525-4337-955F-5735F34805C4}"/>
+                <a16:creationId xmlns:a16="http://schemas.microsoft.com/office/drawing/2014/main" id="{2CB08603-5C9C-4BF2-88E6-4F261ACC9970}"/>
               </a:ext>
             </a:extLst>
           </p:cNvPr>
@@ -14880,7 +14897,7 @@
           <p:cNvPr id="19" name="Text 17">
             <a:extLst xmlns:a="http://schemas.openxmlformats.org/drawingml/2006/main">
               <a:ext uri="{FF2B5EF4-FFF2-40B4-BE49-F238E27FC236}">
-                <a16:creationId xmlns:a16="http://schemas.microsoft.com/office/drawing/2014/main" id="{57A364E1-3FC9-4F80-8537-FB7407C5FCC2}"/>
+                <a16:creationId xmlns:a16="http://schemas.microsoft.com/office/drawing/2014/main" id="{610DF2EB-9426-49CD-AEFC-2FFC819F60DE}"/>
               </a:ext>
             </a:extLst>
           </p:cNvPr>
@@ -14927,7 +14944,7 @@
           <p:cNvPr id="20" name="Text 18">
             <a:extLst xmlns:a="http://schemas.openxmlformats.org/drawingml/2006/main">
               <a:ext uri="{FF2B5EF4-FFF2-40B4-BE49-F238E27FC236}">
-                <a16:creationId xmlns:a16="http://schemas.microsoft.com/office/drawing/2014/main" id="{5BABB09D-71C1-4B63-B231-B8B0FD672AF3}"/>
+                <a16:creationId xmlns:a16="http://schemas.microsoft.com/office/drawing/2014/main" id="{DCA37942-542D-4E46-9E19-26FB7B274E19}"/>
               </a:ext>
             </a:extLst>
           </p:cNvPr>
@@ -14974,7 +14991,7 @@
           <p:cNvPr id="21" name="Shape 19">
             <a:extLst xmlns:a="http://schemas.openxmlformats.org/drawingml/2006/main">
               <a:ext uri="{FF2B5EF4-FFF2-40B4-BE49-F238E27FC236}">
-                <a16:creationId xmlns:a16="http://schemas.microsoft.com/office/drawing/2014/main" id="{5095A1CF-1F26-4016-A83A-B64D896C98A8}"/>
+                <a16:creationId xmlns:a16="http://schemas.microsoft.com/office/drawing/2014/main" id="{9F775940-0F2C-4E4E-B8F1-B981EC9B2582}"/>
               </a:ext>
             </a:extLst>
           </p:cNvPr>
@@ -15009,7 +15026,7 @@
           <p:cNvPr id="22" name="Text 20">
             <a:extLst xmlns:a="http://schemas.openxmlformats.org/drawingml/2006/main">
               <a:ext uri="{FF2B5EF4-FFF2-40B4-BE49-F238E27FC236}">
-                <a16:creationId xmlns:a16="http://schemas.microsoft.com/office/drawing/2014/main" id="{3AFF340B-D94C-4B0C-87BD-D35DE745E6B7}"/>
+                <a16:creationId xmlns:a16="http://schemas.microsoft.com/office/drawing/2014/main" id="{04F97485-9DF8-45A8-874E-0F5E6119FD70}"/>
               </a:ext>
             </a:extLst>
           </p:cNvPr>
@@ -15056,7 +15073,7 @@
           <p:cNvPr id="23" name="Text 21">
             <a:extLst xmlns:a="http://schemas.openxmlformats.org/drawingml/2006/main">
               <a:ext uri="{FF2B5EF4-FFF2-40B4-BE49-F238E27FC236}">
-                <a16:creationId xmlns:a16="http://schemas.microsoft.com/office/drawing/2014/main" id="{0D5C5777-C3BB-4DC5-A0B2-0B6301D2FD20}"/>
+                <a16:creationId xmlns:a16="http://schemas.microsoft.com/office/drawing/2014/main" id="{CEA71D58-2989-4467-9D1A-DC2AC376AE60}"/>
               </a:ext>
             </a:extLst>
           </p:cNvPr>
@@ -15103,7 +15120,7 @@
           <p:cNvPr id="24" name="Text 22">
             <a:extLst xmlns:a="http://schemas.openxmlformats.org/drawingml/2006/main">
               <a:ext uri="{FF2B5EF4-FFF2-40B4-BE49-F238E27FC236}">
-                <a16:creationId xmlns:a16="http://schemas.microsoft.com/office/drawing/2014/main" id="{D37EA724-C738-4A21-9729-0DDE8322ECC2}"/>
+                <a16:creationId xmlns:a16="http://schemas.microsoft.com/office/drawing/2014/main" id="{479F3D7E-6ED9-41C9-AB1B-A6622A4C8915}"/>
               </a:ext>
             </a:extLst>
           </p:cNvPr>
@@ -15150,7 +15167,7 @@
           <p:cNvPr id="25" name="Text 23">
             <a:extLst xmlns:a="http://schemas.openxmlformats.org/drawingml/2006/main">
               <a:ext uri="{FF2B5EF4-FFF2-40B4-BE49-F238E27FC236}">
-                <a16:creationId xmlns:a16="http://schemas.microsoft.com/office/drawing/2014/main" id="{D4B8F7AF-EE9C-485B-8937-1064889512C1}"/>
+                <a16:creationId xmlns:a16="http://schemas.microsoft.com/office/drawing/2014/main" id="{E29D4459-0014-4862-9EBF-53876D95AACB}"/>
               </a:ext>
             </a:extLst>
           </p:cNvPr>
@@ -15197,7 +15214,7 @@
           <p:cNvPr id="26" name="Text 24">
             <a:extLst xmlns:a="http://schemas.openxmlformats.org/drawingml/2006/main">
               <a:ext uri="{FF2B5EF4-FFF2-40B4-BE49-F238E27FC236}">
-                <a16:creationId xmlns:a16="http://schemas.microsoft.com/office/drawing/2014/main" id="{4A3B81E9-7C22-44AB-91A4-49BC61678171}"/>
+                <a16:creationId xmlns:a16="http://schemas.microsoft.com/office/drawing/2014/main" id="{CF8CE4D1-1740-47EA-882A-8057AE9FCACA}"/>
               </a:ext>
             </a:extLst>
           </p:cNvPr>
@@ -15244,7 +15261,7 @@
           <p:cNvPr id="27" name="Text 25">
             <a:extLst xmlns:a="http://schemas.openxmlformats.org/drawingml/2006/main">
               <a:ext uri="{FF2B5EF4-FFF2-40B4-BE49-F238E27FC236}">
-                <a16:creationId xmlns:a16="http://schemas.microsoft.com/office/drawing/2014/main" id="{4349B414-519E-4388-880B-CAEEA0FB060B}"/>
+                <a16:creationId xmlns:a16="http://schemas.microsoft.com/office/drawing/2014/main" id="{5F6348DB-C14C-4A4D-91C0-C4AF3185A6CE}"/>
               </a:ext>
             </a:extLst>
           </p:cNvPr>
@@ -15291,7 +15308,7 @@
           <p:cNvPr id="28" name="Text 26">
             <a:extLst xmlns:a="http://schemas.openxmlformats.org/drawingml/2006/main">
               <a:ext uri="{FF2B5EF4-FFF2-40B4-BE49-F238E27FC236}">
-                <a16:creationId xmlns:a16="http://schemas.microsoft.com/office/drawing/2014/main" id="{5111D179-69AB-4ED7-A2EC-E6EB1BCFA85D}"/>
+                <a16:creationId xmlns:a16="http://schemas.microsoft.com/office/drawing/2014/main" id="{574F2D0B-0A5D-4C08-AB4A-B7C0BD8FEFD4}"/>
               </a:ext>
             </a:extLst>
           </p:cNvPr>
@@ -15338,7 +15355,7 @@
           <p:cNvPr id="29" name="Text 27">
             <a:extLst xmlns:a="http://schemas.openxmlformats.org/drawingml/2006/main">
               <a:ext uri="{FF2B5EF4-FFF2-40B4-BE49-F238E27FC236}">
-                <a16:creationId xmlns:a16="http://schemas.microsoft.com/office/drawing/2014/main" id="{EADF8675-637D-49A9-8EC1-26498902816C}"/>
+                <a16:creationId xmlns:a16="http://schemas.microsoft.com/office/drawing/2014/main" id="{2C4800B9-D09F-4EBC-9CAA-2833F1419BA8}"/>
               </a:ext>
             </a:extLst>
           </p:cNvPr>
@@ -15385,7 +15402,7 @@
           <p:cNvPr id="30" name="Text 28">
             <a:extLst xmlns:a="http://schemas.openxmlformats.org/drawingml/2006/main">
               <a:ext uri="{FF2B5EF4-FFF2-40B4-BE49-F238E27FC236}">
-                <a16:creationId xmlns:a16="http://schemas.microsoft.com/office/drawing/2014/main" id="{DF75E552-E8C7-44DC-94F8-96CC327B8ED3}"/>
+                <a16:creationId xmlns:a16="http://schemas.microsoft.com/office/drawing/2014/main" id="{4B03362B-8D18-432B-B90D-16BD49C58419}"/>
               </a:ext>
             </a:extLst>
           </p:cNvPr>
@@ -15430,7 +15447,7 @@
     </p:spTree>
     <p:extLst>
       <p:ext uri="{BB962C8B-B14F-4D97-AF65-F5344CB8AC3E}">
-        <p14:creationId xmlns:p14="http://schemas.microsoft.com/office/powerpoint/2010/main" val="1337064864"/>
+        <p14:creationId xmlns:p14="http://schemas.microsoft.com/office/powerpoint/2010/main" val="1848537837"/>
       </p:ext>
     </p:extLst>
   </p:cSld>
@@ -15461,7 +15478,7 @@
           <p:cNvPr id="2" name="Text 0">
             <a:extLst xmlns:a="http://schemas.openxmlformats.org/drawingml/2006/main">
               <a:ext uri="{FF2B5EF4-FFF2-40B4-BE49-F238E27FC236}">
-                <a16:creationId xmlns:a16="http://schemas.microsoft.com/office/drawing/2014/main" id="{018ECF08-68EA-4867-99C0-81DC43CFBE64}"/>
+                <a16:creationId xmlns:a16="http://schemas.microsoft.com/office/drawing/2014/main" id="{7FACCA7B-D38E-4B7E-99C1-1670881E76CE}"/>
               </a:ext>
             </a:extLst>
           </p:cNvPr>
@@ -15508,7 +15525,7 @@
           <p:cNvPr id="3" name="Text 1">
             <a:extLst xmlns:a="http://schemas.openxmlformats.org/drawingml/2006/main">
               <a:ext uri="{FF2B5EF4-FFF2-40B4-BE49-F238E27FC236}">
-                <a16:creationId xmlns:a16="http://schemas.microsoft.com/office/drawing/2014/main" id="{98E51069-ABA2-4DBF-82CB-92F4DC0806F2}"/>
+                <a16:creationId xmlns:a16="http://schemas.microsoft.com/office/drawing/2014/main" id="{C1111137-89A1-455B-8E1B-F85CAFAD1BD0}"/>
               </a:ext>
             </a:extLst>
           </p:cNvPr>
@@ -15555,7 +15572,7 @@
           <p:cNvPr id="4" name="Shape 2">
             <a:extLst xmlns:a="http://schemas.openxmlformats.org/drawingml/2006/main">
               <a:ext uri="{FF2B5EF4-FFF2-40B4-BE49-F238E27FC236}">
-                <a16:creationId xmlns:a16="http://schemas.microsoft.com/office/drawing/2014/main" id="{D9F8ACF9-6334-4B6A-B79F-DE3ED0822F7A}"/>
+                <a16:creationId xmlns:a16="http://schemas.microsoft.com/office/drawing/2014/main" id="{8D3D5F58-3525-4954-B59C-6B6DB6E9B3EE}"/>
               </a:ext>
             </a:extLst>
           </p:cNvPr>
@@ -15590,7 +15607,7 @@
           <p:cNvPr id="5" name="Text 3">
             <a:extLst xmlns:a="http://schemas.openxmlformats.org/drawingml/2006/main">
               <a:ext uri="{FF2B5EF4-FFF2-40B4-BE49-F238E27FC236}">
-                <a16:creationId xmlns:a16="http://schemas.microsoft.com/office/drawing/2014/main" id="{FD9E1892-B38C-4AC8-8257-CC36F5762300}"/>
+                <a16:creationId xmlns:a16="http://schemas.microsoft.com/office/drawing/2014/main" id="{E44C54A9-4AC7-4D86-98B2-280B5A184612}"/>
               </a:ext>
             </a:extLst>
           </p:cNvPr>
@@ -15637,7 +15654,7 @@
           <p:cNvPr id="6" name="Shape 4">
             <a:extLst xmlns:a="http://schemas.openxmlformats.org/drawingml/2006/main">
               <a:ext uri="{FF2B5EF4-FFF2-40B4-BE49-F238E27FC236}">
-                <a16:creationId xmlns:a16="http://schemas.microsoft.com/office/drawing/2014/main" id="{0BDD9EFD-8B16-4045-B7C9-ACA5C6B714B5}"/>
+                <a16:creationId xmlns:a16="http://schemas.microsoft.com/office/drawing/2014/main" id="{EBD6A95C-94D4-457D-9FED-EE3B130296DC}"/>
               </a:ext>
             </a:extLst>
           </p:cNvPr>
@@ -15668,7 +15685,7 @@
           <p:cNvPr id="7" name="Shape 5">
             <a:extLst xmlns:a="http://schemas.openxmlformats.org/drawingml/2006/main">
               <a:ext uri="{FF2B5EF4-FFF2-40B4-BE49-F238E27FC236}">
-                <a16:creationId xmlns:a16="http://schemas.microsoft.com/office/drawing/2014/main" id="{E1DC3EEF-4520-43DC-A4EA-E919FBF2D562}"/>
+                <a16:creationId xmlns:a16="http://schemas.microsoft.com/office/drawing/2014/main" id="{B673D77E-F783-4D25-8B07-8FB6237826FD}"/>
               </a:ext>
             </a:extLst>
           </p:cNvPr>
@@ -15703,7 +15720,7 @@
           <p:cNvPr id="8" name="Text 6">
             <a:extLst xmlns:a="http://schemas.openxmlformats.org/drawingml/2006/main">
               <a:ext uri="{FF2B5EF4-FFF2-40B4-BE49-F238E27FC236}">
-                <a16:creationId xmlns:a16="http://schemas.microsoft.com/office/drawing/2014/main" id="{93B231F8-8430-4A5D-A9FF-45DAF76E4E3E}"/>
+                <a16:creationId xmlns:a16="http://schemas.microsoft.com/office/drawing/2014/main" id="{808EA11C-E3A1-4338-9B0E-BE3433955B87}"/>
               </a:ext>
             </a:extLst>
           </p:cNvPr>
@@ -15750,7 +15767,7 @@
           <p:cNvPr id="9" name="Shape 7">
             <a:extLst xmlns:a="http://schemas.openxmlformats.org/drawingml/2006/main">
               <a:ext uri="{FF2B5EF4-FFF2-40B4-BE49-F238E27FC236}">
-                <a16:creationId xmlns:a16="http://schemas.microsoft.com/office/drawing/2014/main" id="{3E7B5D27-FDD2-4595-9289-10BE43F72D92}"/>
+                <a16:creationId xmlns:a16="http://schemas.microsoft.com/office/drawing/2014/main" id="{205E0017-B6C5-42A8-9FED-0337A8D3983A}"/>
               </a:ext>
             </a:extLst>
           </p:cNvPr>
@@ -15785,7 +15802,7 @@
           <p:cNvPr id="10" name="Text 8">
             <a:extLst xmlns:a="http://schemas.openxmlformats.org/drawingml/2006/main">
               <a:ext uri="{FF2B5EF4-FFF2-40B4-BE49-F238E27FC236}">
-                <a16:creationId xmlns:a16="http://schemas.microsoft.com/office/drawing/2014/main" id="{4B11EA11-90E2-49D6-82DB-773F2FA8F76B}"/>
+                <a16:creationId xmlns:a16="http://schemas.microsoft.com/office/drawing/2014/main" id="{E1588D19-2F55-4CB6-862E-21CC19EAFE6D}"/>
               </a:ext>
             </a:extLst>
           </p:cNvPr>
@@ -15832,7 +15849,7 @@
           <p:cNvPr id="11" name="Text 9">
             <a:extLst xmlns:a="http://schemas.openxmlformats.org/drawingml/2006/main">
               <a:ext uri="{FF2B5EF4-FFF2-40B4-BE49-F238E27FC236}">
-                <a16:creationId xmlns:a16="http://schemas.microsoft.com/office/drawing/2014/main" id="{47999904-9A70-4056-8B84-AF11CA6CA6E2}"/>
+                <a16:creationId xmlns:a16="http://schemas.microsoft.com/office/drawing/2014/main" id="{3270653C-CD69-49D0-8C1E-8B73618ADD7E}"/>
               </a:ext>
             </a:extLst>
           </p:cNvPr>
@@ -15895,7 +15912,7 @@
           <p:cNvPr id="12" name="Shape 10">
             <a:extLst xmlns:a="http://schemas.openxmlformats.org/drawingml/2006/main">
               <a:ext uri="{FF2B5EF4-FFF2-40B4-BE49-F238E27FC236}">
-                <a16:creationId xmlns:a16="http://schemas.microsoft.com/office/drawing/2014/main" id="{86D4F1DF-7FB2-4249-86E0-3E6D45DD2706}"/>
+                <a16:creationId xmlns:a16="http://schemas.microsoft.com/office/drawing/2014/main" id="{CCFFEF9F-C7CA-4E7B-A98C-69595C456087}"/>
               </a:ext>
             </a:extLst>
           </p:cNvPr>
@@ -15930,7 +15947,7 @@
           <p:cNvPr id="13" name="Text 11">
             <a:extLst xmlns:a="http://schemas.openxmlformats.org/drawingml/2006/main">
               <a:ext uri="{FF2B5EF4-FFF2-40B4-BE49-F238E27FC236}">
-                <a16:creationId xmlns:a16="http://schemas.microsoft.com/office/drawing/2014/main" id="{785ACF7C-FA8F-472A-9FDA-2E4DA0E4319D}"/>
+                <a16:creationId xmlns:a16="http://schemas.microsoft.com/office/drawing/2014/main" id="{91832B70-28E6-4A11-A62E-22AF51B6A885}"/>
               </a:ext>
             </a:extLst>
           </p:cNvPr>
@@ -15977,7 +15994,7 @@
           <p:cNvPr id="14" name="Text 12">
             <a:extLst xmlns:a="http://schemas.openxmlformats.org/drawingml/2006/main">
               <a:ext uri="{FF2B5EF4-FFF2-40B4-BE49-F238E27FC236}">
-                <a16:creationId xmlns:a16="http://schemas.microsoft.com/office/drawing/2014/main" id="{4F9DF9F3-D18D-48C2-9583-F8512E24E7E9}"/>
+                <a16:creationId xmlns:a16="http://schemas.microsoft.com/office/drawing/2014/main" id="{5530F23D-6DE6-4272-9BD9-786710A5D3B0}"/>
               </a:ext>
             </a:extLst>
           </p:cNvPr>
@@ -16040,7 +16057,7 @@
           <p:cNvPr id="15" name="Shape 13">
             <a:extLst xmlns:a="http://schemas.openxmlformats.org/drawingml/2006/main">
               <a:ext uri="{FF2B5EF4-FFF2-40B4-BE49-F238E27FC236}">
-                <a16:creationId xmlns:a16="http://schemas.microsoft.com/office/drawing/2014/main" id="{6B8E2E07-B53D-46F3-B48A-8A7965F645F6}"/>
+                <a16:creationId xmlns:a16="http://schemas.microsoft.com/office/drawing/2014/main" id="{F36CF7B9-16C2-4295-BA9A-98DD1694472A}"/>
               </a:ext>
             </a:extLst>
           </p:cNvPr>
@@ -16075,7 +16092,7 @@
           <p:cNvPr id="16" name="Text 14">
             <a:extLst xmlns:a="http://schemas.openxmlformats.org/drawingml/2006/main">
               <a:ext uri="{FF2B5EF4-FFF2-40B4-BE49-F238E27FC236}">
-                <a16:creationId xmlns:a16="http://schemas.microsoft.com/office/drawing/2014/main" id="{5B813EC4-E60B-4199-89DB-A17E09BF12DE}"/>
+                <a16:creationId xmlns:a16="http://schemas.microsoft.com/office/drawing/2014/main" id="{57AA897E-F51F-4032-9BB4-514F2CA91C19}"/>
               </a:ext>
             </a:extLst>
           </p:cNvPr>
@@ -16122,7 +16139,7 @@
           <p:cNvPr id="17" name="Text 15">
             <a:extLst xmlns:a="http://schemas.openxmlformats.org/drawingml/2006/main">
               <a:ext uri="{FF2B5EF4-FFF2-40B4-BE49-F238E27FC236}">
-                <a16:creationId xmlns:a16="http://schemas.microsoft.com/office/drawing/2014/main" id="{63FD3AEB-2799-4C81-B1A6-140F25F038F1}"/>
+                <a16:creationId xmlns:a16="http://schemas.microsoft.com/office/drawing/2014/main" id="{B6B2BA30-FF63-4869-8192-68690C5CE442}"/>
               </a:ext>
             </a:extLst>
           </p:cNvPr>
@@ -16185,7 +16202,7 @@
           <p:cNvPr id="18" name="Shape 16">
             <a:extLst xmlns:a="http://schemas.openxmlformats.org/drawingml/2006/main">
               <a:ext uri="{FF2B5EF4-FFF2-40B4-BE49-F238E27FC236}">
-                <a16:creationId xmlns:a16="http://schemas.microsoft.com/office/drawing/2014/main" id="{060F3F41-4A7E-4AD4-AD92-2272E259B152}"/>
+                <a16:creationId xmlns:a16="http://schemas.microsoft.com/office/drawing/2014/main" id="{2E337B0F-6F6C-4918-831B-7AC7BB1198FA}"/>
               </a:ext>
             </a:extLst>
           </p:cNvPr>
@@ -16220,7 +16237,7 @@
           <p:cNvPr id="19" name="Text 17">
             <a:extLst xmlns:a="http://schemas.openxmlformats.org/drawingml/2006/main">
               <a:ext uri="{FF2B5EF4-FFF2-40B4-BE49-F238E27FC236}">
-                <a16:creationId xmlns:a16="http://schemas.microsoft.com/office/drawing/2014/main" id="{356B7DF3-456E-4437-A5AF-4B60299EBE1F}"/>
+                <a16:creationId xmlns:a16="http://schemas.microsoft.com/office/drawing/2014/main" id="{FF7E90EE-8923-4067-8DBB-1795D66BF8A4}"/>
               </a:ext>
             </a:extLst>
           </p:cNvPr>
@@ -16267,7 +16284,7 @@
           <p:cNvPr id="20" name="Text 18">
             <a:extLst xmlns:a="http://schemas.openxmlformats.org/drawingml/2006/main">
               <a:ext uri="{FF2B5EF4-FFF2-40B4-BE49-F238E27FC236}">
-                <a16:creationId xmlns:a16="http://schemas.microsoft.com/office/drawing/2014/main" id="{DBA0ED0B-1239-4729-813A-4821F67BBEEE}"/>
+                <a16:creationId xmlns:a16="http://schemas.microsoft.com/office/drawing/2014/main" id="{A01F93E9-CA98-441F-853F-E639FD00C994}"/>
               </a:ext>
             </a:extLst>
           </p:cNvPr>
@@ -16330,7 +16347,7 @@
           <p:cNvPr id="21" name="Shape 19">
             <a:extLst xmlns:a="http://schemas.openxmlformats.org/drawingml/2006/main">
               <a:ext uri="{FF2B5EF4-FFF2-40B4-BE49-F238E27FC236}">
-                <a16:creationId xmlns:a16="http://schemas.microsoft.com/office/drawing/2014/main" id="{F0ECFA6E-A4DE-4DEA-B598-F2DC42E59999}"/>
+                <a16:creationId xmlns:a16="http://schemas.microsoft.com/office/drawing/2014/main" id="{E38746A9-DC94-45E1-8A8C-E8E83B96CC2D}"/>
               </a:ext>
             </a:extLst>
           </p:cNvPr>
@@ -16365,7 +16382,7 @@
           <p:cNvPr id="22" name="Text 20">
             <a:extLst xmlns:a="http://schemas.openxmlformats.org/drawingml/2006/main">
               <a:ext uri="{FF2B5EF4-FFF2-40B4-BE49-F238E27FC236}">
-                <a16:creationId xmlns:a16="http://schemas.microsoft.com/office/drawing/2014/main" id="{ED75F819-5DA5-4C50-963A-4EE1D79BF4E7}"/>
+                <a16:creationId xmlns:a16="http://schemas.microsoft.com/office/drawing/2014/main" id="{49DD77F1-16F2-43A1-97E9-8BFA88840421}"/>
               </a:ext>
             </a:extLst>
           </p:cNvPr>
@@ -16412,7 +16429,7 @@
           <p:cNvPr id="23" name="Shape 21">
             <a:extLst xmlns:a="http://schemas.openxmlformats.org/drawingml/2006/main">
               <a:ext uri="{FF2B5EF4-FFF2-40B4-BE49-F238E27FC236}">
-                <a16:creationId xmlns:a16="http://schemas.microsoft.com/office/drawing/2014/main" id="{0523680C-5DAE-4750-B56B-14E96EBEB46B}"/>
+                <a16:creationId xmlns:a16="http://schemas.microsoft.com/office/drawing/2014/main" id="{E412EF43-A6DF-4C82-AD6E-9D698333BCC6}"/>
               </a:ext>
             </a:extLst>
           </p:cNvPr>
@@ -16445,7 +16462,7 @@
           <p:cNvPr id="24" name="Text 22">
             <a:extLst xmlns:a="http://schemas.openxmlformats.org/drawingml/2006/main">
               <a:ext uri="{FF2B5EF4-FFF2-40B4-BE49-F238E27FC236}">
-                <a16:creationId xmlns:a16="http://schemas.microsoft.com/office/drawing/2014/main" id="{E106BC66-FC6A-417C-BE52-A2C3EB1D6EE1}"/>
+                <a16:creationId xmlns:a16="http://schemas.microsoft.com/office/drawing/2014/main" id="{738F8750-9CC1-4B1D-B170-F15031CE4A1D}"/>
               </a:ext>
             </a:extLst>
           </p:cNvPr>
@@ -16492,7 +16509,7 @@
           <p:cNvPr id="25" name="Shape 23">
             <a:extLst xmlns:a="http://schemas.openxmlformats.org/drawingml/2006/main">
               <a:ext uri="{FF2B5EF4-FFF2-40B4-BE49-F238E27FC236}">
-                <a16:creationId xmlns:a16="http://schemas.microsoft.com/office/drawing/2014/main" id="{4BE52F97-2803-41F0-88BF-E168B401D0D3}"/>
+                <a16:creationId xmlns:a16="http://schemas.microsoft.com/office/drawing/2014/main" id="{E24426D7-6E75-4D48-86A6-DC811E9C6D3E}"/>
               </a:ext>
             </a:extLst>
           </p:cNvPr>
@@ -16525,7 +16542,7 @@
           <p:cNvPr id="26" name="Text 24">
             <a:extLst xmlns:a="http://schemas.openxmlformats.org/drawingml/2006/main">
               <a:ext uri="{FF2B5EF4-FFF2-40B4-BE49-F238E27FC236}">
-                <a16:creationId xmlns:a16="http://schemas.microsoft.com/office/drawing/2014/main" id="{72C09CD1-2B73-4960-A031-3BF80088475B}"/>
+                <a16:creationId xmlns:a16="http://schemas.microsoft.com/office/drawing/2014/main" id="{B63E3B5B-A17B-4496-AF94-580D26A0486F}"/>
               </a:ext>
             </a:extLst>
           </p:cNvPr>
@@ -16572,7 +16589,7 @@
           <p:cNvPr id="27" name="Shape 25">
             <a:extLst xmlns:a="http://schemas.openxmlformats.org/drawingml/2006/main">
               <a:ext uri="{FF2B5EF4-FFF2-40B4-BE49-F238E27FC236}">
-                <a16:creationId xmlns:a16="http://schemas.microsoft.com/office/drawing/2014/main" id="{7B0D8088-6781-43EF-978B-1525DB6F6205}"/>
+                <a16:creationId xmlns:a16="http://schemas.microsoft.com/office/drawing/2014/main" id="{78F9DC6F-3B28-4E16-807E-D20505FB700D}"/>
               </a:ext>
             </a:extLst>
           </p:cNvPr>
@@ -16605,7 +16622,7 @@
           <p:cNvPr id="28" name="Text 26">
             <a:extLst xmlns:a="http://schemas.openxmlformats.org/drawingml/2006/main">
               <a:ext uri="{FF2B5EF4-FFF2-40B4-BE49-F238E27FC236}">
-                <a16:creationId xmlns:a16="http://schemas.microsoft.com/office/drawing/2014/main" id="{99DCFC0D-7274-4CBE-BF49-81DAE6D7EEAD}"/>
+                <a16:creationId xmlns:a16="http://schemas.microsoft.com/office/drawing/2014/main" id="{A6F88EF1-86A7-4F92-988E-803454FFABA1}"/>
               </a:ext>
             </a:extLst>
           </p:cNvPr>
@@ -16652,7 +16669,7 @@
           <p:cNvPr id="29" name="Shape 27">
             <a:extLst xmlns:a="http://schemas.openxmlformats.org/drawingml/2006/main">
               <a:ext uri="{FF2B5EF4-FFF2-40B4-BE49-F238E27FC236}">
-                <a16:creationId xmlns:a16="http://schemas.microsoft.com/office/drawing/2014/main" id="{9980A3F8-22E6-4193-A703-1987C8985ACD}"/>
+                <a16:creationId xmlns:a16="http://schemas.microsoft.com/office/drawing/2014/main" id="{A7EE499C-99DE-4D8C-9565-E8CC2C920ACA}"/>
               </a:ext>
             </a:extLst>
           </p:cNvPr>
@@ -16687,7 +16704,7 @@
           <p:cNvPr id="30" name="Text 28">
             <a:extLst xmlns:a="http://schemas.openxmlformats.org/drawingml/2006/main">
               <a:ext uri="{FF2B5EF4-FFF2-40B4-BE49-F238E27FC236}">
-                <a16:creationId xmlns:a16="http://schemas.microsoft.com/office/drawing/2014/main" id="{95210854-D878-4980-A307-806EE4A7C115}"/>
+                <a16:creationId xmlns:a16="http://schemas.microsoft.com/office/drawing/2014/main" id="{DD25DE10-DA1A-4336-8391-C370B76B2E07}"/>
               </a:ext>
             </a:extLst>
           </p:cNvPr>
@@ -16734,7 +16751,7 @@
           <p:cNvPr id="31" name="Text 29">
             <a:extLst xmlns:a="http://schemas.openxmlformats.org/drawingml/2006/main">
               <a:ext uri="{FF2B5EF4-FFF2-40B4-BE49-F238E27FC236}">
-                <a16:creationId xmlns:a16="http://schemas.microsoft.com/office/drawing/2014/main" id="{EC951A5C-F160-482B-AD4F-B79DACE983EF}"/>
+                <a16:creationId xmlns:a16="http://schemas.microsoft.com/office/drawing/2014/main" id="{D73ED988-856D-458E-8F19-C027E18928B0}"/>
               </a:ext>
             </a:extLst>
           </p:cNvPr>
@@ -16797,7 +16814,7 @@
           <p:cNvPr id="32" name="Shape 30">
             <a:extLst xmlns:a="http://schemas.openxmlformats.org/drawingml/2006/main">
               <a:ext uri="{FF2B5EF4-FFF2-40B4-BE49-F238E27FC236}">
-                <a16:creationId xmlns:a16="http://schemas.microsoft.com/office/drawing/2014/main" id="{89BB2863-150A-4D09-8AA4-5DD402ECA208}"/>
+                <a16:creationId xmlns:a16="http://schemas.microsoft.com/office/drawing/2014/main" id="{059F2ED7-C2DC-46DF-A146-F051885C67E3}"/>
               </a:ext>
             </a:extLst>
           </p:cNvPr>
@@ -16832,7 +16849,7 @@
           <p:cNvPr id="33" name="Text 31">
             <a:extLst xmlns:a="http://schemas.openxmlformats.org/drawingml/2006/main">
               <a:ext uri="{FF2B5EF4-FFF2-40B4-BE49-F238E27FC236}">
-                <a16:creationId xmlns:a16="http://schemas.microsoft.com/office/drawing/2014/main" id="{DBC7D35D-441A-4F5E-B2FC-7046A19FD27D}"/>
+                <a16:creationId xmlns:a16="http://schemas.microsoft.com/office/drawing/2014/main" id="{C07312F7-B015-4741-8839-9EA7C13C0048}"/>
               </a:ext>
             </a:extLst>
           </p:cNvPr>
@@ -16879,7 +16896,7 @@
           <p:cNvPr id="34" name="Shape 32">
             <a:extLst xmlns:a="http://schemas.openxmlformats.org/drawingml/2006/main">
               <a:ext uri="{FF2B5EF4-FFF2-40B4-BE49-F238E27FC236}">
-                <a16:creationId xmlns:a16="http://schemas.microsoft.com/office/drawing/2014/main" id="{98C34AA6-CD4E-4105-8511-ACA17CF47793}"/>
+                <a16:creationId xmlns:a16="http://schemas.microsoft.com/office/drawing/2014/main" id="{B4A5E2BD-DE65-4A42-A3BD-E2AC5FA27874}"/>
               </a:ext>
             </a:extLst>
           </p:cNvPr>
@@ -16914,7 +16931,7 @@
           <p:cNvPr id="35" name="Text 33">
             <a:extLst xmlns:a="http://schemas.openxmlformats.org/drawingml/2006/main">
               <a:ext uri="{FF2B5EF4-FFF2-40B4-BE49-F238E27FC236}">
-                <a16:creationId xmlns:a16="http://schemas.microsoft.com/office/drawing/2014/main" id="{3690568E-2F7A-4490-B81A-B088E60F337D}"/>
+                <a16:creationId xmlns:a16="http://schemas.microsoft.com/office/drawing/2014/main" id="{8782C476-0599-4369-A703-CE7C65599286}"/>
               </a:ext>
             </a:extLst>
           </p:cNvPr>
@@ -16961,7 +16978,7 @@
           <p:cNvPr id="36" name="Shape 34">
             <a:extLst xmlns:a="http://schemas.openxmlformats.org/drawingml/2006/main">
               <a:ext uri="{FF2B5EF4-FFF2-40B4-BE49-F238E27FC236}">
-                <a16:creationId xmlns:a16="http://schemas.microsoft.com/office/drawing/2014/main" id="{B6134FC9-34E4-4066-9705-B190EFFFCB2D}"/>
+                <a16:creationId xmlns:a16="http://schemas.microsoft.com/office/drawing/2014/main" id="{2AF4A57A-8C18-41C0-9A69-DCB3B3E0B203}"/>
               </a:ext>
             </a:extLst>
           </p:cNvPr>
@@ -16996,7 +17013,7 @@
           <p:cNvPr id="37" name="Text 35">
             <a:extLst xmlns:a="http://schemas.openxmlformats.org/drawingml/2006/main">
               <a:ext uri="{FF2B5EF4-FFF2-40B4-BE49-F238E27FC236}">
-                <a16:creationId xmlns:a16="http://schemas.microsoft.com/office/drawing/2014/main" id="{FBA35FBC-D175-4163-8EAE-5C2131158B39}"/>
+                <a16:creationId xmlns:a16="http://schemas.microsoft.com/office/drawing/2014/main" id="{D1243181-2934-4D57-9E79-CD87C169BCB4}"/>
               </a:ext>
             </a:extLst>
           </p:cNvPr>
@@ -17043,7 +17060,7 @@
           <p:cNvPr id="38" name="Shape 36">
             <a:extLst xmlns:a="http://schemas.openxmlformats.org/drawingml/2006/main">
               <a:ext uri="{FF2B5EF4-FFF2-40B4-BE49-F238E27FC236}">
-                <a16:creationId xmlns:a16="http://schemas.microsoft.com/office/drawing/2014/main" id="{4AFB2CAE-9E41-48AB-9ABB-0A4D55BA2A28}"/>
+                <a16:creationId xmlns:a16="http://schemas.microsoft.com/office/drawing/2014/main" id="{E5B4FFE8-9E1E-452F-8676-CCEDBE4D1B30}"/>
               </a:ext>
             </a:extLst>
           </p:cNvPr>
@@ -17078,7 +17095,7 @@
           <p:cNvPr id="39" name="Text 37">
             <a:extLst xmlns:a="http://schemas.openxmlformats.org/drawingml/2006/main">
               <a:ext uri="{FF2B5EF4-FFF2-40B4-BE49-F238E27FC236}">
-                <a16:creationId xmlns:a16="http://schemas.microsoft.com/office/drawing/2014/main" id="{91F0DD81-4A65-4CA0-88A7-E7636A44541F}"/>
+                <a16:creationId xmlns:a16="http://schemas.microsoft.com/office/drawing/2014/main" id="{E2EF47D2-ED30-4A76-A02B-919CBFFB276F}"/>
               </a:ext>
             </a:extLst>
           </p:cNvPr>
@@ -17125,7 +17142,7 @@
           <p:cNvPr id="40" name="Shape 38">
             <a:extLst xmlns:a="http://schemas.openxmlformats.org/drawingml/2006/main">
               <a:ext uri="{FF2B5EF4-FFF2-40B4-BE49-F238E27FC236}">
-                <a16:creationId xmlns:a16="http://schemas.microsoft.com/office/drawing/2014/main" id="{2B8D8DCA-A79D-43AB-B87E-6256B6B153A4}"/>
+                <a16:creationId xmlns:a16="http://schemas.microsoft.com/office/drawing/2014/main" id="{54CEA21B-AF54-47AC-95D5-63CB0F75F6CC}"/>
               </a:ext>
             </a:extLst>
           </p:cNvPr>
@@ -17160,7 +17177,7 @@
           <p:cNvPr id="41" name="Text 39">
             <a:extLst xmlns:a="http://schemas.openxmlformats.org/drawingml/2006/main">
               <a:ext uri="{FF2B5EF4-FFF2-40B4-BE49-F238E27FC236}">
-                <a16:creationId xmlns:a16="http://schemas.microsoft.com/office/drawing/2014/main" id="{AEB44D9B-A003-486E-B6BC-28B72003EB76}"/>
+                <a16:creationId xmlns:a16="http://schemas.microsoft.com/office/drawing/2014/main" id="{095F2147-4DE7-46DE-BA4E-037A8A2A23FC}"/>
               </a:ext>
             </a:extLst>
           </p:cNvPr>
@@ -17207,7 +17224,7 @@
           <p:cNvPr id="42" name="Text 40">
             <a:extLst xmlns:a="http://schemas.openxmlformats.org/drawingml/2006/main">
               <a:ext uri="{FF2B5EF4-FFF2-40B4-BE49-F238E27FC236}">
-                <a16:creationId xmlns:a16="http://schemas.microsoft.com/office/drawing/2014/main" id="{89B8F6C9-C9F2-4246-BE72-A3BA85D00831}"/>
+                <a16:creationId xmlns:a16="http://schemas.microsoft.com/office/drawing/2014/main" id="{9144AA52-E362-446D-9BD5-017A4657FAF0}"/>
               </a:ext>
             </a:extLst>
           </p:cNvPr>
@@ -17254,7 +17271,7 @@
           <p:cNvPr id="43" name="Text 41">
             <a:extLst xmlns:a="http://schemas.openxmlformats.org/drawingml/2006/main">
               <a:ext uri="{FF2B5EF4-FFF2-40B4-BE49-F238E27FC236}">
-                <a16:creationId xmlns:a16="http://schemas.microsoft.com/office/drawing/2014/main" id="{4240EEB9-4E45-46DA-9259-C07FB10FE6DC}"/>
+                <a16:creationId xmlns:a16="http://schemas.microsoft.com/office/drawing/2014/main" id="{F54F8BF2-1F64-42C2-A61E-3B64AFBEDF6D}"/>
               </a:ext>
             </a:extLst>
           </p:cNvPr>
@@ -17299,7 +17316,7 @@
     </p:spTree>
     <p:extLst>
       <p:ext uri="{BB962C8B-B14F-4D97-AF65-F5344CB8AC3E}">
-        <p14:creationId xmlns:p14="http://schemas.microsoft.com/office/powerpoint/2010/main" val="373968038"/>
+        <p14:creationId xmlns:p14="http://schemas.microsoft.com/office/powerpoint/2010/main" val="1555927616"/>
       </p:ext>
     </p:extLst>
   </p:cSld>
@@ -17330,7 +17347,7 @@
           <p:cNvPr id="2" name="Text 0">
             <a:extLst xmlns:a="http://schemas.openxmlformats.org/drawingml/2006/main">
               <a:ext uri="{FF2B5EF4-FFF2-40B4-BE49-F238E27FC236}">
-                <a16:creationId xmlns:a16="http://schemas.microsoft.com/office/drawing/2014/main" id="{95C5F3BD-A939-449B-B852-661DB8C72B3C}"/>
+                <a16:creationId xmlns:a16="http://schemas.microsoft.com/office/drawing/2014/main" id="{7B0EB514-9BA5-41FA-94DB-5F40AC3FB23F}"/>
               </a:ext>
             </a:extLst>
           </p:cNvPr>
@@ -17377,7 +17394,7 @@
           <p:cNvPr id="3" name="Text 1">
             <a:extLst xmlns:a="http://schemas.openxmlformats.org/drawingml/2006/main">
               <a:ext uri="{FF2B5EF4-FFF2-40B4-BE49-F238E27FC236}">
-                <a16:creationId xmlns:a16="http://schemas.microsoft.com/office/drawing/2014/main" id="{168A92E0-CCB2-4E75-9454-1CD5EB297A5D}"/>
+                <a16:creationId xmlns:a16="http://schemas.microsoft.com/office/drawing/2014/main" id="{3D0231D7-F33D-40F9-BB63-46BF0A9214F7}"/>
               </a:ext>
             </a:extLst>
           </p:cNvPr>
@@ -17424,7 +17441,7 @@
           <p:cNvPr id="4" name="Shape 2">
             <a:extLst xmlns:a="http://schemas.openxmlformats.org/drawingml/2006/main">
               <a:ext uri="{FF2B5EF4-FFF2-40B4-BE49-F238E27FC236}">
-                <a16:creationId xmlns:a16="http://schemas.microsoft.com/office/drawing/2014/main" id="{3C1CAF14-2BC3-4135-82B3-6A49183A31F4}"/>
+                <a16:creationId xmlns:a16="http://schemas.microsoft.com/office/drawing/2014/main" id="{C673089B-C1A9-4951-97D5-2A217047131F}"/>
               </a:ext>
             </a:extLst>
           </p:cNvPr>
@@ -17459,7 +17476,7 @@
           <p:cNvPr id="5" name="Text 3">
             <a:extLst xmlns:a="http://schemas.openxmlformats.org/drawingml/2006/main">
               <a:ext uri="{FF2B5EF4-FFF2-40B4-BE49-F238E27FC236}">
-                <a16:creationId xmlns:a16="http://schemas.microsoft.com/office/drawing/2014/main" id="{BB017735-B066-440E-80DC-E68CE0DD650A}"/>
+                <a16:creationId xmlns:a16="http://schemas.microsoft.com/office/drawing/2014/main" id="{3B8895F5-C7BB-4F88-AD6B-77FF0F638DED}"/>
               </a:ext>
             </a:extLst>
           </p:cNvPr>
@@ -17506,7 +17523,7 @@
           <p:cNvPr id="6" name="Shape 4">
             <a:extLst xmlns:a="http://schemas.openxmlformats.org/drawingml/2006/main">
               <a:ext uri="{FF2B5EF4-FFF2-40B4-BE49-F238E27FC236}">
-                <a16:creationId xmlns:a16="http://schemas.microsoft.com/office/drawing/2014/main" id="{4F4A3BD7-45D1-4587-A14F-362EE3F0E435}"/>
+                <a16:creationId xmlns:a16="http://schemas.microsoft.com/office/drawing/2014/main" id="{FB2C7C23-096D-400B-AD3C-D45C1FC53140}"/>
               </a:ext>
             </a:extLst>
           </p:cNvPr>
@@ -17537,7 +17554,7 @@
           <p:cNvPr id="7" name="Shape 5">
             <a:extLst xmlns:a="http://schemas.openxmlformats.org/drawingml/2006/main">
               <a:ext uri="{FF2B5EF4-FFF2-40B4-BE49-F238E27FC236}">
-                <a16:creationId xmlns:a16="http://schemas.microsoft.com/office/drawing/2014/main" id="{8C416996-5138-48FA-B6A6-3C1B0EB37D59}"/>
+                <a16:creationId xmlns:a16="http://schemas.microsoft.com/office/drawing/2014/main" id="{3E51C476-F3FD-4AC6-853B-AD0183F2409C}"/>
               </a:ext>
             </a:extLst>
           </p:cNvPr>
@@ -17572,7 +17589,7 @@
           <p:cNvPr id="8" name="Shape 6">
             <a:extLst xmlns:a="http://schemas.openxmlformats.org/drawingml/2006/main">
               <a:ext uri="{FF2B5EF4-FFF2-40B4-BE49-F238E27FC236}">
-                <a16:creationId xmlns:a16="http://schemas.microsoft.com/office/drawing/2014/main" id="{05D28A6A-4D33-4BF0-ABE3-C948A60E83C1}"/>
+                <a16:creationId xmlns:a16="http://schemas.microsoft.com/office/drawing/2014/main" id="{3C173964-13AA-4F2E-AA60-219D7610B9AA}"/>
               </a:ext>
             </a:extLst>
           </p:cNvPr>
@@ -17607,7 +17624,7 @@
           <p:cNvPr id="9" name="Text 7">
             <a:extLst xmlns:a="http://schemas.openxmlformats.org/drawingml/2006/main">
               <a:ext uri="{FF2B5EF4-FFF2-40B4-BE49-F238E27FC236}">
-                <a16:creationId xmlns:a16="http://schemas.microsoft.com/office/drawing/2014/main" id="{36ACE6FB-6A9A-46E2-BC57-59D843391359}"/>
+                <a16:creationId xmlns:a16="http://schemas.microsoft.com/office/drawing/2014/main" id="{B70ECB46-79C9-440F-9DDE-AB5160D6E95F}"/>
               </a:ext>
             </a:extLst>
           </p:cNvPr>
@@ -17654,7 +17671,7 @@
           <p:cNvPr id="10" name="Text 8">
             <a:extLst xmlns:a="http://schemas.openxmlformats.org/drawingml/2006/main">
               <a:ext uri="{FF2B5EF4-FFF2-40B4-BE49-F238E27FC236}">
-                <a16:creationId xmlns:a16="http://schemas.microsoft.com/office/drawing/2014/main" id="{D600D403-8F24-486B-A5D6-CD25E09E0186}"/>
+                <a16:creationId xmlns:a16="http://schemas.microsoft.com/office/drawing/2014/main" id="{93170A1F-5B9B-4536-A04E-D0EE2A77CFF5}"/>
               </a:ext>
             </a:extLst>
           </p:cNvPr>
@@ -17701,7 +17718,7 @@
           <p:cNvPr id="11" name="Text 9">
             <a:extLst xmlns:a="http://schemas.openxmlformats.org/drawingml/2006/main">
               <a:ext uri="{FF2B5EF4-FFF2-40B4-BE49-F238E27FC236}">
-                <a16:creationId xmlns:a16="http://schemas.microsoft.com/office/drawing/2014/main" id="{901E21C9-0563-487D-B768-975F512605F3}"/>
+                <a16:creationId xmlns:a16="http://schemas.microsoft.com/office/drawing/2014/main" id="{AA58748D-E0BF-4B3B-98C2-3360E979DCB6}"/>
               </a:ext>
             </a:extLst>
           </p:cNvPr>
@@ -17780,7 +17797,7 @@
           <p:cNvPr id="12" name="Shape 10">
             <a:extLst xmlns:a="http://schemas.openxmlformats.org/drawingml/2006/main">
               <a:ext uri="{FF2B5EF4-FFF2-40B4-BE49-F238E27FC236}">
-                <a16:creationId xmlns:a16="http://schemas.microsoft.com/office/drawing/2014/main" id="{E30F693F-07E5-406C-944A-B17941064AB8}"/>
+                <a16:creationId xmlns:a16="http://schemas.microsoft.com/office/drawing/2014/main" id="{A33A00BE-9979-46EC-8D1E-EE199BEB2D97}"/>
               </a:ext>
             </a:extLst>
           </p:cNvPr>
@@ -17812,7 +17829,7 @@
           <p:cNvPr id="13" name="Shape 11">
             <a:extLst xmlns:a="http://schemas.openxmlformats.org/drawingml/2006/main">
               <a:ext uri="{FF2B5EF4-FFF2-40B4-BE49-F238E27FC236}">
-                <a16:creationId xmlns:a16="http://schemas.microsoft.com/office/drawing/2014/main" id="{D3681828-72DE-4503-A255-3EB6CF041B1D}"/>
+                <a16:creationId xmlns:a16="http://schemas.microsoft.com/office/drawing/2014/main" id="{AEDC5044-51A0-4245-AAE2-CBCD94AEDA6E}"/>
               </a:ext>
             </a:extLst>
           </p:cNvPr>
@@ -17847,7 +17864,7 @@
           <p:cNvPr id="14" name="Shape 12">
             <a:extLst xmlns:a="http://schemas.openxmlformats.org/drawingml/2006/main">
               <a:ext uri="{FF2B5EF4-FFF2-40B4-BE49-F238E27FC236}">
-                <a16:creationId xmlns:a16="http://schemas.microsoft.com/office/drawing/2014/main" id="{AA228C96-C3ED-4B51-8383-F4B14385027E}"/>
+                <a16:creationId xmlns:a16="http://schemas.microsoft.com/office/drawing/2014/main" id="{7B4AB893-C44D-4359-8A30-385B4EA2B66D}"/>
               </a:ext>
             </a:extLst>
           </p:cNvPr>
@@ -17882,7 +17899,7 @@
           <p:cNvPr id="15" name="Text 13">
             <a:extLst xmlns:a="http://schemas.openxmlformats.org/drawingml/2006/main">
               <a:ext uri="{FF2B5EF4-FFF2-40B4-BE49-F238E27FC236}">
-                <a16:creationId xmlns:a16="http://schemas.microsoft.com/office/drawing/2014/main" id="{56936A5E-8343-4DD0-BE18-8583AE4AB750}"/>
+                <a16:creationId xmlns:a16="http://schemas.microsoft.com/office/drawing/2014/main" id="{507E4F65-DAE8-43E4-BE2A-0DD49DE45084}"/>
               </a:ext>
             </a:extLst>
           </p:cNvPr>
@@ -17929,7 +17946,7 @@
           <p:cNvPr id="16" name="Text 14">
             <a:extLst xmlns:a="http://schemas.openxmlformats.org/drawingml/2006/main">
               <a:ext uri="{FF2B5EF4-FFF2-40B4-BE49-F238E27FC236}">
-                <a16:creationId xmlns:a16="http://schemas.microsoft.com/office/drawing/2014/main" id="{597554EF-F02A-4415-B4D7-570856539A2B}"/>
+                <a16:creationId xmlns:a16="http://schemas.microsoft.com/office/drawing/2014/main" id="{4805AB40-705B-4274-B6E9-76F09B767330}"/>
               </a:ext>
             </a:extLst>
           </p:cNvPr>
@@ -17976,7 +17993,7 @@
           <p:cNvPr id="17" name="Text 15">
             <a:extLst xmlns:a="http://schemas.openxmlformats.org/drawingml/2006/main">
               <a:ext uri="{FF2B5EF4-FFF2-40B4-BE49-F238E27FC236}">
-                <a16:creationId xmlns:a16="http://schemas.microsoft.com/office/drawing/2014/main" id="{90845E6E-9496-4C5D-A7C5-19851F29AA99}"/>
+                <a16:creationId xmlns:a16="http://schemas.microsoft.com/office/drawing/2014/main" id="{0266F178-8BBD-4C30-8522-F84E2840C4E8}"/>
               </a:ext>
             </a:extLst>
           </p:cNvPr>
@@ -18055,7 +18072,7 @@
           <p:cNvPr id="18" name="Shape 16">
             <a:extLst xmlns:a="http://schemas.openxmlformats.org/drawingml/2006/main">
               <a:ext uri="{FF2B5EF4-FFF2-40B4-BE49-F238E27FC236}">
-                <a16:creationId xmlns:a16="http://schemas.microsoft.com/office/drawing/2014/main" id="{143D9E73-7FCD-421E-A73B-9A79AF7653B3}"/>
+                <a16:creationId xmlns:a16="http://schemas.microsoft.com/office/drawing/2014/main" id="{BCC4CC26-5455-4F92-9795-D86B1621A325}"/>
               </a:ext>
             </a:extLst>
           </p:cNvPr>
@@ -18087,7 +18104,7 @@
           <p:cNvPr id="19" name="Shape 17">
             <a:extLst xmlns:a="http://schemas.openxmlformats.org/drawingml/2006/main">
               <a:ext uri="{FF2B5EF4-FFF2-40B4-BE49-F238E27FC236}">
-                <a16:creationId xmlns:a16="http://schemas.microsoft.com/office/drawing/2014/main" id="{7764F4E0-0935-4DB4-AB80-6BC020106B42}"/>
+                <a16:creationId xmlns:a16="http://schemas.microsoft.com/office/drawing/2014/main" id="{3E0ABF46-827A-42EA-8EAB-C79304455714}"/>
               </a:ext>
             </a:extLst>
           </p:cNvPr>
@@ -18122,7 +18139,7 @@
           <p:cNvPr id="20" name="Shape 18">
             <a:extLst xmlns:a="http://schemas.openxmlformats.org/drawingml/2006/main">
               <a:ext uri="{FF2B5EF4-FFF2-40B4-BE49-F238E27FC236}">
-                <a16:creationId xmlns:a16="http://schemas.microsoft.com/office/drawing/2014/main" id="{7F018030-8922-4B60-B2EE-D20395E4CBCC}"/>
+                <a16:creationId xmlns:a16="http://schemas.microsoft.com/office/drawing/2014/main" id="{9D2CD62C-ADD8-42FA-BC67-9FF622B417C8}"/>
               </a:ext>
             </a:extLst>
           </p:cNvPr>
@@ -18157,7 +18174,7 @@
           <p:cNvPr id="21" name="Text 19">
             <a:extLst xmlns:a="http://schemas.openxmlformats.org/drawingml/2006/main">
               <a:ext uri="{FF2B5EF4-FFF2-40B4-BE49-F238E27FC236}">
-                <a16:creationId xmlns:a16="http://schemas.microsoft.com/office/drawing/2014/main" id="{E99ECA6B-7DB7-4205-B0EA-A010B3712869}"/>
+                <a16:creationId xmlns:a16="http://schemas.microsoft.com/office/drawing/2014/main" id="{3ECB0B7B-A295-4AF7-A269-998B0444A5AC}"/>
               </a:ext>
             </a:extLst>
           </p:cNvPr>
@@ -18204,7 +18221,7 @@
           <p:cNvPr id="22" name="Text 20">
             <a:extLst xmlns:a="http://schemas.openxmlformats.org/drawingml/2006/main">
               <a:ext uri="{FF2B5EF4-FFF2-40B4-BE49-F238E27FC236}">
-                <a16:creationId xmlns:a16="http://schemas.microsoft.com/office/drawing/2014/main" id="{53CAA980-24FB-4885-9E70-5FC7AE6629CC}"/>
+                <a16:creationId xmlns:a16="http://schemas.microsoft.com/office/drawing/2014/main" id="{59186D9F-96DB-48F5-B8BF-D23F77FE4BAE}"/>
               </a:ext>
             </a:extLst>
           </p:cNvPr>
@@ -18251,7 +18268,7 @@
           <p:cNvPr id="23" name="Text 21">
             <a:extLst xmlns:a="http://schemas.openxmlformats.org/drawingml/2006/main">
               <a:ext uri="{FF2B5EF4-FFF2-40B4-BE49-F238E27FC236}">
-                <a16:creationId xmlns:a16="http://schemas.microsoft.com/office/drawing/2014/main" id="{7268A070-D999-4474-94F3-B15C613E9001}"/>
+                <a16:creationId xmlns:a16="http://schemas.microsoft.com/office/drawing/2014/main" id="{2914F6FD-8724-49CC-9FE7-A14D2E2B6B83}"/>
               </a:ext>
             </a:extLst>
           </p:cNvPr>
@@ -18330,7 +18347,7 @@
           <p:cNvPr id="24" name="Shape 22">
             <a:extLst xmlns:a="http://schemas.openxmlformats.org/drawingml/2006/main">
               <a:ext uri="{FF2B5EF4-FFF2-40B4-BE49-F238E27FC236}">
-                <a16:creationId xmlns:a16="http://schemas.microsoft.com/office/drawing/2014/main" id="{A904B965-5612-40CC-BB15-35A7E80778AA}"/>
+                <a16:creationId xmlns:a16="http://schemas.microsoft.com/office/drawing/2014/main" id="{EF9BB15B-5423-4245-AED8-F4A1D844FA6E}"/>
               </a:ext>
             </a:extLst>
           </p:cNvPr>
@@ -18362,7 +18379,7 @@
           <p:cNvPr id="25" name="Shape 23">
             <a:extLst xmlns:a="http://schemas.openxmlformats.org/drawingml/2006/main">
               <a:ext uri="{FF2B5EF4-FFF2-40B4-BE49-F238E27FC236}">
-                <a16:creationId xmlns:a16="http://schemas.microsoft.com/office/drawing/2014/main" id="{AB87A5AB-3CBA-4344-A5BB-F5EBB0429B32}"/>
+                <a16:creationId xmlns:a16="http://schemas.microsoft.com/office/drawing/2014/main" id="{A110FBAD-77FB-4125-A7A9-5FF64F3708A8}"/>
               </a:ext>
             </a:extLst>
           </p:cNvPr>
@@ -18397,7 +18414,7 @@
           <p:cNvPr id="26" name="Shape 24">
             <a:extLst xmlns:a="http://schemas.openxmlformats.org/drawingml/2006/main">
               <a:ext uri="{FF2B5EF4-FFF2-40B4-BE49-F238E27FC236}">
-                <a16:creationId xmlns:a16="http://schemas.microsoft.com/office/drawing/2014/main" id="{5374DA6D-E819-4BC4-BBB2-1E7B27962ACE}"/>
+                <a16:creationId xmlns:a16="http://schemas.microsoft.com/office/drawing/2014/main" id="{0BB412A0-4E96-4D79-A0D1-E4DAEAEFC79E}"/>
               </a:ext>
             </a:extLst>
           </p:cNvPr>
@@ -18432,7 +18449,7 @@
           <p:cNvPr id="27" name="Text 25">
             <a:extLst xmlns:a="http://schemas.openxmlformats.org/drawingml/2006/main">
               <a:ext uri="{FF2B5EF4-FFF2-40B4-BE49-F238E27FC236}">
-                <a16:creationId xmlns:a16="http://schemas.microsoft.com/office/drawing/2014/main" id="{51E78484-0111-447B-A19C-3A69697A23DC}"/>
+                <a16:creationId xmlns:a16="http://schemas.microsoft.com/office/drawing/2014/main" id="{EC04424C-EE05-4077-9DE4-9E766BC1B796}"/>
               </a:ext>
             </a:extLst>
           </p:cNvPr>
@@ -18479,7 +18496,7 @@
           <p:cNvPr id="28" name="Text 26">
             <a:extLst xmlns:a="http://schemas.openxmlformats.org/drawingml/2006/main">
               <a:ext uri="{FF2B5EF4-FFF2-40B4-BE49-F238E27FC236}">
-                <a16:creationId xmlns:a16="http://schemas.microsoft.com/office/drawing/2014/main" id="{3E652872-E58D-46F8-A1F4-4DEC92994FAF}"/>
+                <a16:creationId xmlns:a16="http://schemas.microsoft.com/office/drawing/2014/main" id="{35B8F2C4-039C-4B6E-8080-13C864BB08A0}"/>
               </a:ext>
             </a:extLst>
           </p:cNvPr>
@@ -18526,7 +18543,7 @@
           <p:cNvPr id="29" name="Text 27">
             <a:extLst xmlns:a="http://schemas.openxmlformats.org/drawingml/2006/main">
               <a:ext uri="{FF2B5EF4-FFF2-40B4-BE49-F238E27FC236}">
-                <a16:creationId xmlns:a16="http://schemas.microsoft.com/office/drawing/2014/main" id="{2F5F5E98-B154-47C5-90DF-71137FFAE4A4}"/>
+                <a16:creationId xmlns:a16="http://schemas.microsoft.com/office/drawing/2014/main" id="{D7C37022-4218-4BF9-BDBB-FCCB232EFE31}"/>
               </a:ext>
             </a:extLst>
           </p:cNvPr>
@@ -18605,7 +18622,7 @@
           <p:cNvPr id="43" name="Text 41">
             <a:extLst xmlns:a="http://schemas.openxmlformats.org/drawingml/2006/main">
               <a:ext uri="{FF2B5EF4-FFF2-40B4-BE49-F238E27FC236}">
-                <a16:creationId xmlns:a16="http://schemas.microsoft.com/office/drawing/2014/main" id="{F01F7E3C-3C01-49D4-9C72-650DDEA9D119}"/>
+                <a16:creationId xmlns:a16="http://schemas.microsoft.com/office/drawing/2014/main" id="{23918184-6AEA-47FB-8CC3-C481B9F45219}"/>
               </a:ext>
             </a:extLst>
           </p:cNvPr>
@@ -18652,7 +18669,7 @@
           <p:cNvPr id="44" name="Text 42">
             <a:extLst xmlns:a="http://schemas.openxmlformats.org/drawingml/2006/main">
               <a:ext uri="{FF2B5EF4-FFF2-40B4-BE49-F238E27FC236}">
-                <a16:creationId xmlns:a16="http://schemas.microsoft.com/office/drawing/2014/main" id="{23073CB7-FE5D-4932-87EA-461B7A3C5A4F}"/>
+                <a16:creationId xmlns:a16="http://schemas.microsoft.com/office/drawing/2014/main" id="{94E098E1-EF8D-463B-8AE9-8BA65210EEE6}"/>
               </a:ext>
             </a:extLst>
           </p:cNvPr>
@@ -18699,7 +18716,7 @@
           <p:cNvPr id="45" name="Text 43">
             <a:extLst xmlns:a="http://schemas.openxmlformats.org/drawingml/2006/main">
               <a:ext uri="{FF2B5EF4-FFF2-40B4-BE49-F238E27FC236}">
-                <a16:creationId xmlns:a16="http://schemas.microsoft.com/office/drawing/2014/main" id="{9D2DC193-50F5-4DA0-850B-BCBE9DDECFE6}"/>
+                <a16:creationId xmlns:a16="http://schemas.microsoft.com/office/drawing/2014/main" id="{DADB49C6-B8A8-4E06-80FE-89677D5B1BFD}"/>
               </a:ext>
             </a:extLst>
           </p:cNvPr>
@@ -18744,7 +18761,7 @@
     </p:spTree>
     <p:extLst>
       <p:ext uri="{BB962C8B-B14F-4D97-AF65-F5344CB8AC3E}">
-        <p14:creationId xmlns:p14="http://schemas.microsoft.com/office/powerpoint/2010/main" val="652155901"/>
+        <p14:creationId xmlns:p14="http://schemas.microsoft.com/office/powerpoint/2010/main" val="1988269191"/>
       </p:ext>
     </p:extLst>
   </p:cSld>
@@ -18779,7 +18796,7 @@
           <p:nvPr/>
         </p:nvPicPr>
         <p:blipFill>
-          <a:blip xmlns:r="http://schemas.openxmlformats.org/officeDocument/2006/relationships" xmlns:a="http://schemas.openxmlformats.org/drawingml/2006/main" r:embed="Rf16fde8891d1457a"/>
+          <a:blip xmlns:r="http://schemas.openxmlformats.org/officeDocument/2006/relationships" xmlns:a="http://schemas.openxmlformats.org/drawingml/2006/main" r:embed="Rfcbb2214cd464e48"/>
           <a:stretch xmlns:a="http://schemas.openxmlformats.org/drawingml/2006/main">
             <a:fillRect l="0" t="0" r="0" b="0"/>
           </a:stretch>
@@ -18799,7 +18816,7 @@
           <p:cNvPr id="3" name="Text 0">
             <a:extLst xmlns:a="http://schemas.openxmlformats.org/drawingml/2006/main">
               <a:ext uri="{FF2B5EF4-FFF2-40B4-BE49-F238E27FC236}">
-                <a16:creationId xmlns:a16="http://schemas.microsoft.com/office/drawing/2014/main" id="{68CDF199-6674-4336-A248-5AE731E4D01F}"/>
+                <a16:creationId xmlns:a16="http://schemas.microsoft.com/office/drawing/2014/main" id="{03F77554-398D-422F-B5B8-AFCC91767B59}"/>
               </a:ext>
             </a:extLst>
           </p:cNvPr>
@@ -18846,7 +18863,7 @@
           <p:cNvPr id="4" name="Text 1">
             <a:extLst xmlns:a="http://schemas.openxmlformats.org/drawingml/2006/main">
               <a:ext uri="{FF2B5EF4-FFF2-40B4-BE49-F238E27FC236}">
-                <a16:creationId xmlns:a16="http://schemas.microsoft.com/office/drawing/2014/main" id="{D92C4494-BCE1-4624-8A64-D63B7960D1E0}"/>
+                <a16:creationId xmlns:a16="http://schemas.microsoft.com/office/drawing/2014/main" id="{1EDCC474-0388-4C21-8529-4C2AED74B73D}"/>
               </a:ext>
             </a:extLst>
           </p:cNvPr>
@@ -18893,7 +18910,7 @@
           <p:cNvPr id="5" name="Text 2">
             <a:extLst xmlns:a="http://schemas.openxmlformats.org/drawingml/2006/main">
               <a:ext uri="{FF2B5EF4-FFF2-40B4-BE49-F238E27FC236}">
-                <a16:creationId xmlns:a16="http://schemas.microsoft.com/office/drawing/2014/main" id="{2DF1FF0C-588F-4819-9850-F8ED8D6A4E34}"/>
+                <a16:creationId xmlns:a16="http://schemas.microsoft.com/office/drawing/2014/main" id="{11BA5478-0199-4B90-B49A-C4ABB0966FEB}"/>
               </a:ext>
             </a:extLst>
           </p:cNvPr>
@@ -18940,7 +18957,7 @@
           <p:cNvPr id="6" name="Shape 3">
             <a:extLst xmlns:a="http://schemas.openxmlformats.org/drawingml/2006/main">
               <a:ext uri="{FF2B5EF4-FFF2-40B4-BE49-F238E27FC236}">
-                <a16:creationId xmlns:a16="http://schemas.microsoft.com/office/drawing/2014/main" id="{159A06CB-3911-4C66-B599-644AB1415904}"/>
+                <a16:creationId xmlns:a16="http://schemas.microsoft.com/office/drawing/2014/main" id="{FE774220-B237-4DD7-B595-4096DE2A8A37}"/>
               </a:ext>
             </a:extLst>
           </p:cNvPr>
@@ -18975,7 +18992,7 @@
           <p:cNvPr id="7" name="Shape 4">
             <a:extLst xmlns:a="http://schemas.openxmlformats.org/drawingml/2006/main">
               <a:ext uri="{FF2B5EF4-FFF2-40B4-BE49-F238E27FC236}">
-                <a16:creationId xmlns:a16="http://schemas.microsoft.com/office/drawing/2014/main" id="{8FFB7DA3-C7F5-47BF-A76B-D1DEAEB05067}"/>
+                <a16:creationId xmlns:a16="http://schemas.microsoft.com/office/drawing/2014/main" id="{89189C7C-147B-4CCB-8628-747C1577CF8C}"/>
               </a:ext>
             </a:extLst>
           </p:cNvPr>
@@ -19008,7 +19025,7 @@
           <p:cNvPr id="8" name="Text 5">
             <a:extLst xmlns:a="http://schemas.openxmlformats.org/drawingml/2006/main">
               <a:ext uri="{FF2B5EF4-FFF2-40B4-BE49-F238E27FC236}">
-                <a16:creationId xmlns:a16="http://schemas.microsoft.com/office/drawing/2014/main" id="{2FBB4BAF-1225-4FBA-A06F-10FFF0A8BBB6}"/>
+                <a16:creationId xmlns:a16="http://schemas.microsoft.com/office/drawing/2014/main" id="{D1494FE3-735C-43AB-9001-7A8685EA5A76}"/>
               </a:ext>
             </a:extLst>
           </p:cNvPr>
@@ -19055,7 +19072,7 @@
           <p:cNvPr id="9" name="Text 6">
             <a:extLst xmlns:a="http://schemas.openxmlformats.org/drawingml/2006/main">
               <a:ext uri="{FF2B5EF4-FFF2-40B4-BE49-F238E27FC236}">
-                <a16:creationId xmlns:a16="http://schemas.microsoft.com/office/drawing/2014/main" id="{85714D4D-9220-4B7E-B873-6A9005F3C05A}"/>
+                <a16:creationId xmlns:a16="http://schemas.microsoft.com/office/drawing/2014/main" id="{B529EE42-4D12-4E88-A521-B73A3603026F}"/>
               </a:ext>
             </a:extLst>
           </p:cNvPr>
@@ -19102,7 +19119,7 @@
           <p:cNvPr id="10" name="Shape 7">
             <a:extLst xmlns:a="http://schemas.openxmlformats.org/drawingml/2006/main">
               <a:ext uri="{FF2B5EF4-FFF2-40B4-BE49-F238E27FC236}">
-                <a16:creationId xmlns:a16="http://schemas.microsoft.com/office/drawing/2014/main" id="{96DD37A8-E53B-4CEB-95B0-D6E4ACDCC321}"/>
+                <a16:creationId xmlns:a16="http://schemas.microsoft.com/office/drawing/2014/main" id="{5CCE94C4-C138-4096-ABF5-1F17999FFEFB}"/>
               </a:ext>
             </a:extLst>
           </p:cNvPr>
@@ -19137,7 +19154,7 @@
           <p:cNvPr id="11" name="Shape 8">
             <a:extLst xmlns:a="http://schemas.openxmlformats.org/drawingml/2006/main">
               <a:ext uri="{FF2B5EF4-FFF2-40B4-BE49-F238E27FC236}">
-                <a16:creationId xmlns:a16="http://schemas.microsoft.com/office/drawing/2014/main" id="{4FEA4248-8DD3-4AED-A0EB-EECFE4AD3121}"/>
+                <a16:creationId xmlns:a16="http://schemas.microsoft.com/office/drawing/2014/main" id="{DD02D20B-CEE3-4238-B9CE-D476BBF98ACA}"/>
               </a:ext>
             </a:extLst>
           </p:cNvPr>
@@ -19170,7 +19187,7 @@
           <p:cNvPr id="12" name="Text 9">
             <a:extLst xmlns:a="http://schemas.openxmlformats.org/drawingml/2006/main">
               <a:ext uri="{FF2B5EF4-FFF2-40B4-BE49-F238E27FC236}">
-                <a16:creationId xmlns:a16="http://schemas.microsoft.com/office/drawing/2014/main" id="{F0E10884-95AF-4E9F-B494-8812765D0865}"/>
+                <a16:creationId xmlns:a16="http://schemas.microsoft.com/office/drawing/2014/main" id="{FFDD7485-E481-49D2-B3FD-E80E30589771}"/>
               </a:ext>
             </a:extLst>
           </p:cNvPr>
@@ -19217,7 +19234,7 @@
           <p:cNvPr id="13" name="Text 10">
             <a:extLst xmlns:a="http://schemas.openxmlformats.org/drawingml/2006/main">
               <a:ext uri="{FF2B5EF4-FFF2-40B4-BE49-F238E27FC236}">
-                <a16:creationId xmlns:a16="http://schemas.microsoft.com/office/drawing/2014/main" id="{4F011477-37C1-4293-9E3B-C59D80E007A6}"/>
+                <a16:creationId xmlns:a16="http://schemas.microsoft.com/office/drawing/2014/main" id="{0E290540-1A00-4A97-BED3-1DAEBEEAA40B}"/>
               </a:ext>
             </a:extLst>
           </p:cNvPr>
@@ -19264,7 +19281,7 @@
           <p:cNvPr id="14" name="Shape 11">
             <a:extLst xmlns:a="http://schemas.openxmlformats.org/drawingml/2006/main">
               <a:ext uri="{FF2B5EF4-FFF2-40B4-BE49-F238E27FC236}">
-                <a16:creationId xmlns:a16="http://schemas.microsoft.com/office/drawing/2014/main" id="{C8DC5CCD-CC0E-4F6A-88AE-11FEF8CD05E2}"/>
+                <a16:creationId xmlns:a16="http://schemas.microsoft.com/office/drawing/2014/main" id="{AC4B5745-EDC7-4B60-A83C-1FC5318E89E0}"/>
               </a:ext>
             </a:extLst>
           </p:cNvPr>
@@ -19299,7 +19316,7 @@
           <p:cNvPr id="15" name="Shape 12">
             <a:extLst xmlns:a="http://schemas.openxmlformats.org/drawingml/2006/main">
               <a:ext uri="{FF2B5EF4-FFF2-40B4-BE49-F238E27FC236}">
-                <a16:creationId xmlns:a16="http://schemas.microsoft.com/office/drawing/2014/main" id="{8BD79A78-2C42-429D-8FE5-27C007F50CFD}"/>
+                <a16:creationId xmlns:a16="http://schemas.microsoft.com/office/drawing/2014/main" id="{8761D614-2F57-46C3-8E53-45EB2ED9C518}"/>
               </a:ext>
             </a:extLst>
           </p:cNvPr>
@@ -19332,7 +19349,7 @@
           <p:cNvPr id="16" name="Text 13">
             <a:extLst xmlns:a="http://schemas.openxmlformats.org/drawingml/2006/main">
               <a:ext uri="{FF2B5EF4-FFF2-40B4-BE49-F238E27FC236}">
-                <a16:creationId xmlns:a16="http://schemas.microsoft.com/office/drawing/2014/main" id="{86119427-B0FA-4F4C-B917-95A05D189AC7}"/>
+                <a16:creationId xmlns:a16="http://schemas.microsoft.com/office/drawing/2014/main" id="{B726C720-419A-4A5F-92FB-393E186F2898}"/>
               </a:ext>
             </a:extLst>
           </p:cNvPr>
@@ -19379,7 +19396,7 @@
           <p:cNvPr id="17" name="Text 14">
             <a:extLst xmlns:a="http://schemas.openxmlformats.org/drawingml/2006/main">
               <a:ext uri="{FF2B5EF4-FFF2-40B4-BE49-F238E27FC236}">
-                <a16:creationId xmlns:a16="http://schemas.microsoft.com/office/drawing/2014/main" id="{7F655FC9-7149-41EF-A914-AEB084717D80}"/>
+                <a16:creationId xmlns:a16="http://schemas.microsoft.com/office/drawing/2014/main" id="{400BA0B3-6EED-4C02-9DAB-4B3FB70B3F65}"/>
               </a:ext>
             </a:extLst>
           </p:cNvPr>
@@ -19426,7 +19443,7 @@
           <p:cNvPr id="18" name="Shape 15">
             <a:extLst xmlns:a="http://schemas.openxmlformats.org/drawingml/2006/main">
               <a:ext uri="{FF2B5EF4-FFF2-40B4-BE49-F238E27FC236}">
-                <a16:creationId xmlns:a16="http://schemas.microsoft.com/office/drawing/2014/main" id="{5A634518-EB60-40A3-9BA6-B65B7133CD89}"/>
+                <a16:creationId xmlns:a16="http://schemas.microsoft.com/office/drawing/2014/main" id="{491FDE92-1040-4862-B70C-5D6B40116E70}"/>
               </a:ext>
             </a:extLst>
           </p:cNvPr>
@@ -19461,7 +19478,7 @@
           <p:cNvPr id="19" name="Shape 16">
             <a:extLst xmlns:a="http://schemas.openxmlformats.org/drawingml/2006/main">
               <a:ext uri="{FF2B5EF4-FFF2-40B4-BE49-F238E27FC236}">
-                <a16:creationId xmlns:a16="http://schemas.microsoft.com/office/drawing/2014/main" id="{4908C437-238A-49B2-A408-759071040D27}"/>
+                <a16:creationId xmlns:a16="http://schemas.microsoft.com/office/drawing/2014/main" id="{447E9EBB-95EF-48F3-829B-82942F4C70B2}"/>
               </a:ext>
             </a:extLst>
           </p:cNvPr>
@@ -19494,7 +19511,7 @@
           <p:cNvPr id="20" name="Text 17">
             <a:extLst xmlns:a="http://schemas.openxmlformats.org/drawingml/2006/main">
               <a:ext uri="{FF2B5EF4-FFF2-40B4-BE49-F238E27FC236}">
-                <a16:creationId xmlns:a16="http://schemas.microsoft.com/office/drawing/2014/main" id="{B655FB28-8F68-42DF-8F41-2EF1B2720C54}"/>
+                <a16:creationId xmlns:a16="http://schemas.microsoft.com/office/drawing/2014/main" id="{D69666B8-D2EA-405B-836B-65427F1715C1}"/>
               </a:ext>
             </a:extLst>
           </p:cNvPr>
@@ -19541,7 +19558,7 @@
           <p:cNvPr id="21" name="Text 18">
             <a:extLst xmlns:a="http://schemas.openxmlformats.org/drawingml/2006/main">
               <a:ext uri="{FF2B5EF4-FFF2-40B4-BE49-F238E27FC236}">
-                <a16:creationId xmlns:a16="http://schemas.microsoft.com/office/drawing/2014/main" id="{00266209-FBCE-4E69-9659-CC98C180DC89}"/>
+                <a16:creationId xmlns:a16="http://schemas.microsoft.com/office/drawing/2014/main" id="{832677DA-4097-45D7-829A-6C5A2DBD1B21}"/>
               </a:ext>
             </a:extLst>
           </p:cNvPr>
@@ -19588,7 +19605,7 @@
           <p:cNvPr id="22" name="Shape 19">
             <a:extLst xmlns:a="http://schemas.openxmlformats.org/drawingml/2006/main">
               <a:ext uri="{FF2B5EF4-FFF2-40B4-BE49-F238E27FC236}">
-                <a16:creationId xmlns:a16="http://schemas.microsoft.com/office/drawing/2014/main" id="{CDE4EFD3-16E2-4721-8924-361E8C94A5CB}"/>
+                <a16:creationId xmlns:a16="http://schemas.microsoft.com/office/drawing/2014/main" id="{0D0D1BE9-0581-4CA7-B236-0F38C3DE4BC0}"/>
               </a:ext>
             </a:extLst>
           </p:cNvPr>
@@ -19623,7 +19640,7 @@
           <p:cNvPr id="23" name="Shape 20">
             <a:extLst xmlns:a="http://schemas.openxmlformats.org/drawingml/2006/main">
               <a:ext uri="{FF2B5EF4-FFF2-40B4-BE49-F238E27FC236}">
-                <a16:creationId xmlns:a16="http://schemas.microsoft.com/office/drawing/2014/main" id="{81B3FDA5-89FD-4E75-8A1A-6F2BAA936C3D}"/>
+                <a16:creationId xmlns:a16="http://schemas.microsoft.com/office/drawing/2014/main" id="{FD8A1493-0B1B-4B7A-B422-0A56E5B6F414}"/>
               </a:ext>
             </a:extLst>
           </p:cNvPr>
@@ -19656,7 +19673,7 @@
           <p:cNvPr id="24" name="Text 21">
             <a:extLst xmlns:a="http://schemas.openxmlformats.org/drawingml/2006/main">
               <a:ext uri="{FF2B5EF4-FFF2-40B4-BE49-F238E27FC236}">
-                <a16:creationId xmlns:a16="http://schemas.microsoft.com/office/drawing/2014/main" id="{8A131DBA-FE11-4AEB-A43B-FFCBAE32790A}"/>
+                <a16:creationId xmlns:a16="http://schemas.microsoft.com/office/drawing/2014/main" id="{A7560985-708A-4B18-825C-767C0E099FD4}"/>
               </a:ext>
             </a:extLst>
           </p:cNvPr>
@@ -19703,7 +19720,7 @@
           <p:cNvPr id="25" name="Text 22">
             <a:extLst xmlns:a="http://schemas.openxmlformats.org/drawingml/2006/main">
               <a:ext uri="{FF2B5EF4-FFF2-40B4-BE49-F238E27FC236}">
-                <a16:creationId xmlns:a16="http://schemas.microsoft.com/office/drawing/2014/main" id="{70525E39-C0BB-448C-9244-23A0F6433756}"/>
+                <a16:creationId xmlns:a16="http://schemas.microsoft.com/office/drawing/2014/main" id="{5C2AD491-34B6-4BE2-9B17-9F15089F9406}"/>
               </a:ext>
             </a:extLst>
           </p:cNvPr>
@@ -19750,7 +19767,7 @@
           <p:cNvPr id="26" name="Shape 23">
             <a:extLst xmlns:a="http://schemas.openxmlformats.org/drawingml/2006/main">
               <a:ext uri="{FF2B5EF4-FFF2-40B4-BE49-F238E27FC236}">
-                <a16:creationId xmlns:a16="http://schemas.microsoft.com/office/drawing/2014/main" id="{4D26F448-7D5C-4F43-84AF-8B37DADB96F6}"/>
+                <a16:creationId xmlns:a16="http://schemas.microsoft.com/office/drawing/2014/main" id="{5ACCAC38-24D0-4912-A8F9-05AB67094416}"/>
               </a:ext>
             </a:extLst>
           </p:cNvPr>
@@ -19785,7 +19802,7 @@
           <p:cNvPr id="27" name="Text 24">
             <a:extLst xmlns:a="http://schemas.openxmlformats.org/drawingml/2006/main">
               <a:ext uri="{FF2B5EF4-FFF2-40B4-BE49-F238E27FC236}">
-                <a16:creationId xmlns:a16="http://schemas.microsoft.com/office/drawing/2014/main" id="{7B531ADF-1055-48F7-879B-061B599EC1FA}"/>
+                <a16:creationId xmlns:a16="http://schemas.microsoft.com/office/drawing/2014/main" id="{14527624-60C1-439F-B1B4-747CFD394DFA}"/>
               </a:ext>
             </a:extLst>
           </p:cNvPr>
@@ -19832,7 +19849,7 @@
           <p:cNvPr id="28" name="Text 25">
             <a:extLst xmlns:a="http://schemas.openxmlformats.org/drawingml/2006/main">
               <a:ext uri="{FF2B5EF4-FFF2-40B4-BE49-F238E27FC236}">
-                <a16:creationId xmlns:a16="http://schemas.microsoft.com/office/drawing/2014/main" id="{6ABAF0C7-2E2E-4C37-862B-2C6E157023C0}"/>
+                <a16:creationId xmlns:a16="http://schemas.microsoft.com/office/drawing/2014/main" id="{54BC3121-8E4B-4685-B2F4-EAA18D925FA7}"/>
               </a:ext>
             </a:extLst>
           </p:cNvPr>
@@ -19877,7 +19894,7 @@
     </p:spTree>
     <p:extLst>
       <p:ext uri="{BB962C8B-B14F-4D97-AF65-F5344CB8AC3E}">
-        <p14:creationId xmlns:p14="http://schemas.microsoft.com/office/powerpoint/2010/main" val="1079231713"/>
+        <p14:creationId xmlns:p14="http://schemas.microsoft.com/office/powerpoint/2010/main" val="1685618075"/>
       </p:ext>
     </p:extLst>
   </p:cSld>
@@ -19908,7 +19925,7 @@
           <p:cNvPr id="2" name="Text 0">
             <a:extLst xmlns:a="http://schemas.openxmlformats.org/drawingml/2006/main">
               <a:ext uri="{FF2B5EF4-FFF2-40B4-BE49-F238E27FC236}">
-                <a16:creationId xmlns:a16="http://schemas.microsoft.com/office/drawing/2014/main" id="{8B2618D5-5737-47F5-B818-7354F1EE39E8}"/>
+                <a16:creationId xmlns:a16="http://schemas.microsoft.com/office/drawing/2014/main" id="{767ED87E-6BE8-4E46-81E4-88A27A626B2E}"/>
               </a:ext>
             </a:extLst>
           </p:cNvPr>
@@ -19955,7 +19972,7 @@
           <p:cNvPr id="3" name="Text 1">
             <a:extLst xmlns:a="http://schemas.openxmlformats.org/drawingml/2006/main">
               <a:ext uri="{FF2B5EF4-FFF2-40B4-BE49-F238E27FC236}">
-                <a16:creationId xmlns:a16="http://schemas.microsoft.com/office/drawing/2014/main" id="{90B3CDA0-A51B-41CE-A4EA-966DA47B7171}"/>
+                <a16:creationId xmlns:a16="http://schemas.microsoft.com/office/drawing/2014/main" id="{0141EA24-DD9B-42A9-A8D8-12CC68CAB757}"/>
               </a:ext>
             </a:extLst>
           </p:cNvPr>
@@ -20002,7 +20019,7 @@
           <p:cNvPr id="4" name="Shape 2">
             <a:extLst xmlns:a="http://schemas.openxmlformats.org/drawingml/2006/main">
               <a:ext uri="{FF2B5EF4-FFF2-40B4-BE49-F238E27FC236}">
-                <a16:creationId xmlns:a16="http://schemas.microsoft.com/office/drawing/2014/main" id="{CF67EABC-B2F7-45C5-8626-4016EDE8C980}"/>
+                <a16:creationId xmlns:a16="http://schemas.microsoft.com/office/drawing/2014/main" id="{30DEFD58-393E-4BAB-831A-7AFFB407D365}"/>
               </a:ext>
             </a:extLst>
           </p:cNvPr>
@@ -20037,7 +20054,7 @@
           <p:cNvPr id="5" name="Text 3">
             <a:extLst xmlns:a="http://schemas.openxmlformats.org/drawingml/2006/main">
               <a:ext uri="{FF2B5EF4-FFF2-40B4-BE49-F238E27FC236}">
-                <a16:creationId xmlns:a16="http://schemas.microsoft.com/office/drawing/2014/main" id="{6AE6AD3F-5FCE-4C91-98BC-356E91889522}"/>
+                <a16:creationId xmlns:a16="http://schemas.microsoft.com/office/drawing/2014/main" id="{5C92156B-F50A-4B05-85A4-E259B957893A}"/>
               </a:ext>
             </a:extLst>
           </p:cNvPr>
@@ -20084,7 +20101,7 @@
           <p:cNvPr id="6" name="Shape 4">
             <a:extLst xmlns:a="http://schemas.openxmlformats.org/drawingml/2006/main">
               <a:ext uri="{FF2B5EF4-FFF2-40B4-BE49-F238E27FC236}">
-                <a16:creationId xmlns:a16="http://schemas.microsoft.com/office/drawing/2014/main" id="{1C75BD72-2791-4C51-84E5-2503D7631020}"/>
+                <a16:creationId xmlns:a16="http://schemas.microsoft.com/office/drawing/2014/main" id="{1741F0BB-6816-45B7-B922-CB33E4B9EE76}"/>
               </a:ext>
             </a:extLst>
           </p:cNvPr>
@@ -20115,7 +20132,7 @@
           <p:cNvPr id="7" name="Text 5">
             <a:extLst xmlns:a="http://schemas.openxmlformats.org/drawingml/2006/main">
               <a:ext uri="{FF2B5EF4-FFF2-40B4-BE49-F238E27FC236}">
-                <a16:creationId xmlns:a16="http://schemas.microsoft.com/office/drawing/2014/main" id="{4F5CB970-7E2B-44C5-A810-998D2DD497BA}"/>
+                <a16:creationId xmlns:a16="http://schemas.microsoft.com/office/drawing/2014/main" id="{3F748628-3F7B-4DAF-83CE-B5EAE6A8637A}"/>
               </a:ext>
             </a:extLst>
           </p:cNvPr>
@@ -20162,7 +20179,7 @@
           <p:cNvPr id="8" name="Shape 6">
             <a:extLst xmlns:a="http://schemas.openxmlformats.org/drawingml/2006/main">
               <a:ext uri="{FF2B5EF4-FFF2-40B4-BE49-F238E27FC236}">
-                <a16:creationId xmlns:a16="http://schemas.microsoft.com/office/drawing/2014/main" id="{243AE759-D986-4056-9516-EAEC39B70BEB}"/>
+                <a16:creationId xmlns:a16="http://schemas.microsoft.com/office/drawing/2014/main" id="{CB020CBB-26F8-435D-8BEA-EC5853762344}"/>
               </a:ext>
             </a:extLst>
           </p:cNvPr>
@@ -20197,7 +20214,7 @@
           <p:cNvPr id="9" name="Text 7">
             <a:extLst xmlns:a="http://schemas.openxmlformats.org/drawingml/2006/main">
               <a:ext uri="{FF2B5EF4-FFF2-40B4-BE49-F238E27FC236}">
-                <a16:creationId xmlns:a16="http://schemas.microsoft.com/office/drawing/2014/main" id="{CDA2EA38-A1ED-4C18-81B0-0E9DAAED39C8}"/>
+                <a16:creationId xmlns:a16="http://schemas.microsoft.com/office/drawing/2014/main" id="{8CBD35AE-1EE8-46FC-9861-7C2793F30236}"/>
               </a:ext>
             </a:extLst>
           </p:cNvPr>
@@ -20244,7 +20261,7 @@
           <p:cNvPr id="10" name="Text 8">
             <a:extLst xmlns:a="http://schemas.openxmlformats.org/drawingml/2006/main">
               <a:ext uri="{FF2B5EF4-FFF2-40B4-BE49-F238E27FC236}">
-                <a16:creationId xmlns:a16="http://schemas.microsoft.com/office/drawing/2014/main" id="{217ECEF3-32DB-47C0-81B8-13E241EB1924}"/>
+                <a16:creationId xmlns:a16="http://schemas.microsoft.com/office/drawing/2014/main" id="{41A5A12D-B9B3-4F54-99B0-EC02A96112BD}"/>
               </a:ext>
             </a:extLst>
           </p:cNvPr>
@@ -20291,7 +20308,7 @@
           <p:cNvPr id="11" name="Text 9">
             <a:extLst xmlns:a="http://schemas.openxmlformats.org/drawingml/2006/main">
               <a:ext uri="{FF2B5EF4-FFF2-40B4-BE49-F238E27FC236}">
-                <a16:creationId xmlns:a16="http://schemas.microsoft.com/office/drawing/2014/main" id="{D4883462-E911-4197-B316-DB49E8F23B62}"/>
+                <a16:creationId xmlns:a16="http://schemas.microsoft.com/office/drawing/2014/main" id="{D7712D04-6F09-4865-954E-5068B141FA4C}"/>
               </a:ext>
             </a:extLst>
           </p:cNvPr>
@@ -20338,7 +20355,7 @@
           <p:cNvPr id="12" name="Shape 10">
             <a:extLst xmlns:a="http://schemas.openxmlformats.org/drawingml/2006/main">
               <a:ext uri="{FF2B5EF4-FFF2-40B4-BE49-F238E27FC236}">
-                <a16:creationId xmlns:a16="http://schemas.microsoft.com/office/drawing/2014/main" id="{B1C4B6E8-1B4C-45D8-9489-6BFD7F80F78D}"/>
+                <a16:creationId xmlns:a16="http://schemas.microsoft.com/office/drawing/2014/main" id="{089ED134-A744-454E-A26E-4A43FA34E5F0}"/>
               </a:ext>
             </a:extLst>
           </p:cNvPr>
@@ -20373,7 +20390,7 @@
           <p:cNvPr id="13" name="Text 11">
             <a:extLst xmlns:a="http://schemas.openxmlformats.org/drawingml/2006/main">
               <a:ext uri="{FF2B5EF4-FFF2-40B4-BE49-F238E27FC236}">
-                <a16:creationId xmlns:a16="http://schemas.microsoft.com/office/drawing/2014/main" id="{52766728-BEB4-4739-9FEE-CC84EF1FB7E2}"/>
+                <a16:creationId xmlns:a16="http://schemas.microsoft.com/office/drawing/2014/main" id="{BC7AFC05-8418-4001-BE02-6391962C47C6}"/>
               </a:ext>
             </a:extLst>
           </p:cNvPr>
@@ -20420,7 +20437,7 @@
           <p:cNvPr id="14" name="Text 12">
             <a:extLst xmlns:a="http://schemas.openxmlformats.org/drawingml/2006/main">
               <a:ext uri="{FF2B5EF4-FFF2-40B4-BE49-F238E27FC236}">
-                <a16:creationId xmlns:a16="http://schemas.microsoft.com/office/drawing/2014/main" id="{3FB8FC5C-4D86-4B78-9ED6-3051A2C8B56D}"/>
+                <a16:creationId xmlns:a16="http://schemas.microsoft.com/office/drawing/2014/main" id="{3BC654F1-1870-432C-A229-D58DE5BD14CF}"/>
               </a:ext>
             </a:extLst>
           </p:cNvPr>
@@ -20467,7 +20484,7 @@
           <p:cNvPr id="15" name="Text 13">
             <a:extLst xmlns:a="http://schemas.openxmlformats.org/drawingml/2006/main">
               <a:ext uri="{FF2B5EF4-FFF2-40B4-BE49-F238E27FC236}">
-                <a16:creationId xmlns:a16="http://schemas.microsoft.com/office/drawing/2014/main" id="{4D0E6323-2706-483F-9F28-6C01DD1C47F3}"/>
+                <a16:creationId xmlns:a16="http://schemas.microsoft.com/office/drawing/2014/main" id="{38ABA8DE-4238-43B6-AA55-C031B38932DE}"/>
               </a:ext>
             </a:extLst>
           </p:cNvPr>
@@ -20514,7 +20531,7 @@
           <p:cNvPr id="16" name="Shape 14">
             <a:extLst xmlns:a="http://schemas.openxmlformats.org/drawingml/2006/main">
               <a:ext uri="{FF2B5EF4-FFF2-40B4-BE49-F238E27FC236}">
-                <a16:creationId xmlns:a16="http://schemas.microsoft.com/office/drawing/2014/main" id="{A438F063-4631-422F-B1FF-40435189AA1D}"/>
+                <a16:creationId xmlns:a16="http://schemas.microsoft.com/office/drawing/2014/main" id="{4CC4F507-0D75-460B-8106-A9B345A4A3C0}"/>
               </a:ext>
             </a:extLst>
           </p:cNvPr>
@@ -20549,7 +20566,7 @@
           <p:cNvPr id="17" name="Text 15">
             <a:extLst xmlns:a="http://schemas.openxmlformats.org/drawingml/2006/main">
               <a:ext uri="{FF2B5EF4-FFF2-40B4-BE49-F238E27FC236}">
-                <a16:creationId xmlns:a16="http://schemas.microsoft.com/office/drawing/2014/main" id="{32CCBA36-5F1A-4122-85B7-9C4018B4A36F}"/>
+                <a16:creationId xmlns:a16="http://schemas.microsoft.com/office/drawing/2014/main" id="{6F0D3FE1-5EB9-4A3E-921B-F910540A1FA5}"/>
               </a:ext>
             </a:extLst>
           </p:cNvPr>
@@ -20596,7 +20613,7 @@
           <p:cNvPr id="18" name="Text 16">
             <a:extLst xmlns:a="http://schemas.openxmlformats.org/drawingml/2006/main">
               <a:ext uri="{FF2B5EF4-FFF2-40B4-BE49-F238E27FC236}">
-                <a16:creationId xmlns:a16="http://schemas.microsoft.com/office/drawing/2014/main" id="{3663CC41-442B-4FC7-B785-DBAA4C8436C1}"/>
+                <a16:creationId xmlns:a16="http://schemas.microsoft.com/office/drawing/2014/main" id="{8E6205B1-A795-4A52-B843-471C358525A2}"/>
               </a:ext>
             </a:extLst>
           </p:cNvPr>
@@ -20643,7 +20660,7 @@
           <p:cNvPr id="19" name="Text 17">
             <a:extLst xmlns:a="http://schemas.openxmlformats.org/drawingml/2006/main">
               <a:ext uri="{FF2B5EF4-FFF2-40B4-BE49-F238E27FC236}">
-                <a16:creationId xmlns:a16="http://schemas.microsoft.com/office/drawing/2014/main" id="{2738A6C2-20A8-4495-ABBE-0F5332A53141}"/>
+                <a16:creationId xmlns:a16="http://schemas.microsoft.com/office/drawing/2014/main" id="{A4DA1506-8978-473B-A1A6-8084A324DF10}"/>
               </a:ext>
             </a:extLst>
           </p:cNvPr>
@@ -20690,7 +20707,7 @@
           <p:cNvPr id="20" name="Shape 18">
             <a:extLst xmlns:a="http://schemas.openxmlformats.org/drawingml/2006/main">
               <a:ext uri="{FF2B5EF4-FFF2-40B4-BE49-F238E27FC236}">
-                <a16:creationId xmlns:a16="http://schemas.microsoft.com/office/drawing/2014/main" id="{3B23ED07-9E04-41A1-9AA7-56422B2B402C}"/>
+                <a16:creationId xmlns:a16="http://schemas.microsoft.com/office/drawing/2014/main" id="{DFA098C7-1F2D-4D42-A762-71CC0AC937D6}"/>
               </a:ext>
             </a:extLst>
           </p:cNvPr>
@@ -20725,7 +20742,7 @@
           <p:cNvPr id="21" name="Text 19">
             <a:extLst xmlns:a="http://schemas.openxmlformats.org/drawingml/2006/main">
               <a:ext uri="{FF2B5EF4-FFF2-40B4-BE49-F238E27FC236}">
-                <a16:creationId xmlns:a16="http://schemas.microsoft.com/office/drawing/2014/main" id="{06C2AA38-2759-4FF8-868D-E0250AB3670A}"/>
+                <a16:creationId xmlns:a16="http://schemas.microsoft.com/office/drawing/2014/main" id="{37C8B29C-F99A-4288-9C17-738554D96A2A}"/>
               </a:ext>
             </a:extLst>
           </p:cNvPr>
@@ -20772,7 +20789,7 @@
           <p:cNvPr id="22" name="Text 20">
             <a:extLst xmlns:a="http://schemas.openxmlformats.org/drawingml/2006/main">
               <a:ext uri="{FF2B5EF4-FFF2-40B4-BE49-F238E27FC236}">
-                <a16:creationId xmlns:a16="http://schemas.microsoft.com/office/drawing/2014/main" id="{FC1F0ADC-8A7C-4FA5-8159-4CE2247DE314}"/>
+                <a16:creationId xmlns:a16="http://schemas.microsoft.com/office/drawing/2014/main" id="{985A511C-4CA4-477E-9B5B-9718D9E5646A}"/>
               </a:ext>
             </a:extLst>
           </p:cNvPr>
@@ -20819,7 +20836,7 @@
           <p:cNvPr id="23" name="Text 21">
             <a:extLst xmlns:a="http://schemas.openxmlformats.org/drawingml/2006/main">
               <a:ext uri="{FF2B5EF4-FFF2-40B4-BE49-F238E27FC236}">
-                <a16:creationId xmlns:a16="http://schemas.microsoft.com/office/drawing/2014/main" id="{AB35106A-EEAE-43A3-B73A-988B41AAF3FC}"/>
+                <a16:creationId xmlns:a16="http://schemas.microsoft.com/office/drawing/2014/main" id="{247ADF4D-EA4C-43AF-A358-4AD516CB91EA}"/>
               </a:ext>
             </a:extLst>
           </p:cNvPr>
@@ -20864,7 +20881,7 @@
     </p:spTree>
     <p:extLst>
       <p:ext uri="{BB962C8B-B14F-4D97-AF65-F5344CB8AC3E}">
-        <p14:creationId xmlns:p14="http://schemas.microsoft.com/office/powerpoint/2010/main" val="1844451318"/>
+        <p14:creationId xmlns:p14="http://schemas.microsoft.com/office/powerpoint/2010/main" val="184362083"/>
       </p:ext>
     </p:extLst>
   </p:cSld>
@@ -20895,7 +20912,7 @@
           <p:cNvPr id="2" name="Text 0">
             <a:extLst xmlns:a="http://schemas.openxmlformats.org/drawingml/2006/main">
               <a:ext uri="{FF2B5EF4-FFF2-40B4-BE49-F238E27FC236}">
-                <a16:creationId xmlns:a16="http://schemas.microsoft.com/office/drawing/2014/main" id="{26C42B80-1064-443B-9139-041689ACCCEB}"/>
+                <a16:creationId xmlns:a16="http://schemas.microsoft.com/office/drawing/2014/main" id="{A0DF7C4C-7A1F-4894-B0B3-1D8275056C91}"/>
               </a:ext>
             </a:extLst>
           </p:cNvPr>
@@ -20942,7 +20959,7 @@
           <p:cNvPr id="3" name="Text 1">
             <a:extLst xmlns:a="http://schemas.openxmlformats.org/drawingml/2006/main">
               <a:ext uri="{FF2B5EF4-FFF2-40B4-BE49-F238E27FC236}">
-                <a16:creationId xmlns:a16="http://schemas.microsoft.com/office/drawing/2014/main" id="{1B4AB622-A3BD-4A6A-9E98-DD2312FA06C5}"/>
+                <a16:creationId xmlns:a16="http://schemas.microsoft.com/office/drawing/2014/main" id="{70C2388B-5A12-428F-8C2D-729FBEBC5437}"/>
               </a:ext>
             </a:extLst>
           </p:cNvPr>
@@ -20989,7 +21006,7 @@
           <p:cNvPr id="4" name="Shape 2">
             <a:extLst xmlns:a="http://schemas.openxmlformats.org/drawingml/2006/main">
               <a:ext uri="{FF2B5EF4-FFF2-40B4-BE49-F238E27FC236}">
-                <a16:creationId xmlns:a16="http://schemas.microsoft.com/office/drawing/2014/main" id="{6EC982B3-7503-42D0-92EB-686FF56355D4}"/>
+                <a16:creationId xmlns:a16="http://schemas.microsoft.com/office/drawing/2014/main" id="{CAD49319-07F9-4759-8E2D-F5014C398449}"/>
               </a:ext>
             </a:extLst>
           </p:cNvPr>
@@ -21024,7 +21041,7 @@
           <p:cNvPr id="5" name="Text 3">
             <a:extLst xmlns:a="http://schemas.openxmlformats.org/drawingml/2006/main">
               <a:ext uri="{FF2B5EF4-FFF2-40B4-BE49-F238E27FC236}">
-                <a16:creationId xmlns:a16="http://schemas.microsoft.com/office/drawing/2014/main" id="{FFCD255D-B978-4CA7-81C3-06E564590165}"/>
+                <a16:creationId xmlns:a16="http://schemas.microsoft.com/office/drawing/2014/main" id="{B19B8CBB-0350-411C-BA7A-0E6ADDC9E56D}"/>
               </a:ext>
             </a:extLst>
           </p:cNvPr>
@@ -21071,7 +21088,7 @@
           <p:cNvPr id="6" name="Shape 4">
             <a:extLst xmlns:a="http://schemas.openxmlformats.org/drawingml/2006/main">
               <a:ext uri="{FF2B5EF4-FFF2-40B4-BE49-F238E27FC236}">
-                <a16:creationId xmlns:a16="http://schemas.microsoft.com/office/drawing/2014/main" id="{A96180BD-44F2-490D-9975-25E34FABA997}"/>
+                <a16:creationId xmlns:a16="http://schemas.microsoft.com/office/drawing/2014/main" id="{235840A7-341D-4F9D-BECF-9E20053FD771}"/>
               </a:ext>
             </a:extLst>
           </p:cNvPr>
@@ -21102,7 +21119,7 @@
           <p:cNvPr id="7" name="Shape 5">
             <a:extLst xmlns:a="http://schemas.openxmlformats.org/drawingml/2006/main">
               <a:ext uri="{FF2B5EF4-FFF2-40B4-BE49-F238E27FC236}">
-                <a16:creationId xmlns:a16="http://schemas.microsoft.com/office/drawing/2014/main" id="{0E0C9BC5-2BBA-4BAC-AE4D-B9FA94010412}"/>
+                <a16:creationId xmlns:a16="http://schemas.microsoft.com/office/drawing/2014/main" id="{5D93E6D0-68AF-4E42-9664-1A8B2A2C2D08}"/>
               </a:ext>
             </a:extLst>
           </p:cNvPr>
@@ -21137,7 +21154,7 @@
           <p:cNvPr id="8" name="Text 6">
             <a:extLst xmlns:a="http://schemas.openxmlformats.org/drawingml/2006/main">
               <a:ext uri="{FF2B5EF4-FFF2-40B4-BE49-F238E27FC236}">
-                <a16:creationId xmlns:a16="http://schemas.microsoft.com/office/drawing/2014/main" id="{3E5AFBD9-BB98-41CC-9FA9-20094DB037A8}"/>
+                <a16:creationId xmlns:a16="http://schemas.microsoft.com/office/drawing/2014/main" id="{EE58E8C8-9B57-44CB-B3E9-4763A7D97BE7}"/>
               </a:ext>
             </a:extLst>
           </p:cNvPr>
@@ -21184,7 +21201,7 @@
           <p:cNvPr id="9" name="Shape 7">
             <a:extLst xmlns:a="http://schemas.openxmlformats.org/drawingml/2006/main">
               <a:ext uri="{FF2B5EF4-FFF2-40B4-BE49-F238E27FC236}">
-                <a16:creationId xmlns:a16="http://schemas.microsoft.com/office/drawing/2014/main" id="{6081BE0A-2ABE-4D27-A1EE-EC839087A7F2}"/>
+                <a16:creationId xmlns:a16="http://schemas.microsoft.com/office/drawing/2014/main" id="{FBC74B06-0BFA-4738-B259-93DF8DDFB256}"/>
               </a:ext>
             </a:extLst>
           </p:cNvPr>
@@ -21219,7 +21236,7 @@
           <p:cNvPr id="10" name="Text 8">
             <a:extLst xmlns:a="http://schemas.openxmlformats.org/drawingml/2006/main">
               <a:ext uri="{FF2B5EF4-FFF2-40B4-BE49-F238E27FC236}">
-                <a16:creationId xmlns:a16="http://schemas.microsoft.com/office/drawing/2014/main" id="{412C49CA-EFB3-40A5-B6B0-F86BADB0045C}"/>
+                <a16:creationId xmlns:a16="http://schemas.microsoft.com/office/drawing/2014/main" id="{C017F6CD-BC75-45AE-A23B-9671882D5903}"/>
               </a:ext>
             </a:extLst>
           </p:cNvPr>
@@ -21266,7 +21283,7 @@
           <p:cNvPr id="11" name="Text 9">
             <a:extLst xmlns:a="http://schemas.openxmlformats.org/drawingml/2006/main">
               <a:ext uri="{FF2B5EF4-FFF2-40B4-BE49-F238E27FC236}">
-                <a16:creationId xmlns:a16="http://schemas.microsoft.com/office/drawing/2014/main" id="{9CF01293-4F12-4D9B-8716-F0D8A5EBDABF}"/>
+                <a16:creationId xmlns:a16="http://schemas.microsoft.com/office/drawing/2014/main" id="{69192D0C-AB8D-4839-AE05-C9503EEFEEA7}"/>
               </a:ext>
             </a:extLst>
           </p:cNvPr>
@@ -21313,7 +21330,7 @@
           <p:cNvPr id="12" name="Text 10">
             <a:extLst xmlns:a="http://schemas.openxmlformats.org/drawingml/2006/main">
               <a:ext uri="{FF2B5EF4-FFF2-40B4-BE49-F238E27FC236}">
-                <a16:creationId xmlns:a16="http://schemas.microsoft.com/office/drawing/2014/main" id="{AB2DAA83-9B33-489A-A72D-D6A44ED5DB11}"/>
+                <a16:creationId xmlns:a16="http://schemas.microsoft.com/office/drawing/2014/main" id="{696056B7-B5EC-4F80-9FFE-E09F35BA8E5C}"/>
               </a:ext>
             </a:extLst>
           </p:cNvPr>
@@ -21360,7 +21377,7 @@
           <p:cNvPr id="13" name="Shape 11">
             <a:extLst xmlns:a="http://schemas.openxmlformats.org/drawingml/2006/main">
               <a:ext uri="{FF2B5EF4-FFF2-40B4-BE49-F238E27FC236}">
-                <a16:creationId xmlns:a16="http://schemas.microsoft.com/office/drawing/2014/main" id="{D78C338B-7318-44D8-889D-C8CF458646FF}"/>
+                <a16:creationId xmlns:a16="http://schemas.microsoft.com/office/drawing/2014/main" id="{146381EF-D7A7-4D14-8187-CF82DEA0F7AF}"/>
               </a:ext>
             </a:extLst>
           </p:cNvPr>
@@ -21392,7 +21409,7 @@
           <p:cNvPr id="14" name="Shape 12">
             <a:extLst xmlns:a="http://schemas.openxmlformats.org/drawingml/2006/main">
               <a:ext uri="{FF2B5EF4-FFF2-40B4-BE49-F238E27FC236}">
-                <a16:creationId xmlns:a16="http://schemas.microsoft.com/office/drawing/2014/main" id="{F7033CB0-3FB4-4456-A480-3614A4021616}"/>
+                <a16:creationId xmlns:a16="http://schemas.microsoft.com/office/drawing/2014/main" id="{37CFEBF3-DAB9-4C5A-A9E5-6309D24312ED}"/>
               </a:ext>
             </a:extLst>
           </p:cNvPr>
@@ -21427,7 +21444,7 @@
           <p:cNvPr id="15" name="Text 13">
             <a:extLst xmlns:a="http://schemas.openxmlformats.org/drawingml/2006/main">
               <a:ext uri="{FF2B5EF4-FFF2-40B4-BE49-F238E27FC236}">
-                <a16:creationId xmlns:a16="http://schemas.microsoft.com/office/drawing/2014/main" id="{B33B5FC9-40AA-4F04-A957-4EE164F2143E}"/>
+                <a16:creationId xmlns:a16="http://schemas.microsoft.com/office/drawing/2014/main" id="{70F64370-177E-412E-B060-3618E70DEB99}"/>
               </a:ext>
             </a:extLst>
           </p:cNvPr>
@@ -21474,7 +21491,7 @@
           <p:cNvPr id="16" name="Text 14">
             <a:extLst xmlns:a="http://schemas.openxmlformats.org/drawingml/2006/main">
               <a:ext uri="{FF2B5EF4-FFF2-40B4-BE49-F238E27FC236}">
-                <a16:creationId xmlns:a16="http://schemas.microsoft.com/office/drawing/2014/main" id="{38897091-A7D0-4B3A-AE9A-75CF52AEF50B}"/>
+                <a16:creationId xmlns:a16="http://schemas.microsoft.com/office/drawing/2014/main" id="{B3CF8D8A-6771-47AE-9035-F8C808D45DF1}"/>
               </a:ext>
             </a:extLst>
           </p:cNvPr>
@@ -21521,7 +21538,7 @@
           <p:cNvPr id="17" name="Text 15">
             <a:extLst xmlns:a="http://schemas.openxmlformats.org/drawingml/2006/main">
               <a:ext uri="{FF2B5EF4-FFF2-40B4-BE49-F238E27FC236}">
-                <a16:creationId xmlns:a16="http://schemas.microsoft.com/office/drawing/2014/main" id="{ABF636A7-8738-4855-AD0A-D94F61DBA5DF}"/>
+                <a16:creationId xmlns:a16="http://schemas.microsoft.com/office/drawing/2014/main" id="{94964022-AAA4-4511-AB1D-2BD3F6698116}"/>
               </a:ext>
             </a:extLst>
           </p:cNvPr>
@@ -21568,7 +21585,7 @@
           <p:cNvPr id="18" name="Shape 16">
             <a:extLst xmlns:a="http://schemas.openxmlformats.org/drawingml/2006/main">
               <a:ext uri="{FF2B5EF4-FFF2-40B4-BE49-F238E27FC236}">
-                <a16:creationId xmlns:a16="http://schemas.microsoft.com/office/drawing/2014/main" id="{91479EB1-3CA0-4BB6-9DBA-E26C2E079EFC}"/>
+                <a16:creationId xmlns:a16="http://schemas.microsoft.com/office/drawing/2014/main" id="{44F3A689-C73E-4E0C-B8E3-EB813C2D2A19}"/>
               </a:ext>
             </a:extLst>
           </p:cNvPr>
@@ -21600,7 +21617,7 @@
           <p:cNvPr id="19" name="Shape 17">
             <a:extLst xmlns:a="http://schemas.openxmlformats.org/drawingml/2006/main">
               <a:ext uri="{FF2B5EF4-FFF2-40B4-BE49-F238E27FC236}">
-                <a16:creationId xmlns:a16="http://schemas.microsoft.com/office/drawing/2014/main" id="{9A0BCA1C-84BB-483F-ACC4-3DEB0FB3BB4F}"/>
+                <a16:creationId xmlns:a16="http://schemas.microsoft.com/office/drawing/2014/main" id="{FEAC5CEE-0782-4801-A07D-B4064520211C}"/>
               </a:ext>
             </a:extLst>
           </p:cNvPr>
@@ -21635,7 +21652,7 @@
           <p:cNvPr id="20" name="Text 18">
             <a:extLst xmlns:a="http://schemas.openxmlformats.org/drawingml/2006/main">
               <a:ext uri="{FF2B5EF4-FFF2-40B4-BE49-F238E27FC236}">
-                <a16:creationId xmlns:a16="http://schemas.microsoft.com/office/drawing/2014/main" id="{34E814A1-2E12-4494-8B2C-BEA6095A25A1}"/>
+                <a16:creationId xmlns:a16="http://schemas.microsoft.com/office/drawing/2014/main" id="{0AF9CDB4-4BB3-4288-B979-CC4CB1B7668C}"/>
               </a:ext>
             </a:extLst>
           </p:cNvPr>
@@ -21682,7 +21699,7 @@
           <p:cNvPr id="21" name="Text 19">
             <a:extLst xmlns:a="http://schemas.openxmlformats.org/drawingml/2006/main">
               <a:ext uri="{FF2B5EF4-FFF2-40B4-BE49-F238E27FC236}">
-                <a16:creationId xmlns:a16="http://schemas.microsoft.com/office/drawing/2014/main" id="{8625B4DE-DA62-4058-9598-528A42003ABD}"/>
+                <a16:creationId xmlns:a16="http://schemas.microsoft.com/office/drawing/2014/main" id="{CBD5E2E4-BD10-4027-A587-AD4B061A4758}"/>
               </a:ext>
             </a:extLst>
           </p:cNvPr>
@@ -21729,7 +21746,7 @@
           <p:cNvPr id="22" name="Text 20">
             <a:extLst xmlns:a="http://schemas.openxmlformats.org/drawingml/2006/main">
               <a:ext uri="{FF2B5EF4-FFF2-40B4-BE49-F238E27FC236}">
-                <a16:creationId xmlns:a16="http://schemas.microsoft.com/office/drawing/2014/main" id="{1E81A464-FCA7-4FDA-9E31-7368B9001AD7}"/>
+                <a16:creationId xmlns:a16="http://schemas.microsoft.com/office/drawing/2014/main" id="{BB30FAE5-BAAB-4078-8862-06E6D4EAB5E4}"/>
               </a:ext>
             </a:extLst>
           </p:cNvPr>
@@ -21776,7 +21793,7 @@
           <p:cNvPr id="23" name="Shape 21">
             <a:extLst xmlns:a="http://schemas.openxmlformats.org/drawingml/2006/main">
               <a:ext uri="{FF2B5EF4-FFF2-40B4-BE49-F238E27FC236}">
-                <a16:creationId xmlns:a16="http://schemas.microsoft.com/office/drawing/2014/main" id="{B0AA411E-869E-4F97-ADBB-71F711777414}"/>
+                <a16:creationId xmlns:a16="http://schemas.microsoft.com/office/drawing/2014/main" id="{98B96C65-2799-4551-B2C5-B4D4B737010C}"/>
               </a:ext>
             </a:extLst>
           </p:cNvPr>
@@ -21808,7 +21825,7 @@
           <p:cNvPr id="24" name="Shape 22">
             <a:extLst xmlns:a="http://schemas.openxmlformats.org/drawingml/2006/main">
               <a:ext uri="{FF2B5EF4-FFF2-40B4-BE49-F238E27FC236}">
-                <a16:creationId xmlns:a16="http://schemas.microsoft.com/office/drawing/2014/main" id="{15BDE542-F841-43D2-A9BD-38E27AA7A1B1}"/>
+                <a16:creationId xmlns:a16="http://schemas.microsoft.com/office/drawing/2014/main" id="{4680DD74-FCBF-4F6F-95BE-56C3B20828F2}"/>
               </a:ext>
             </a:extLst>
           </p:cNvPr>
@@ -21843,7 +21860,7 @@
           <p:cNvPr id="25" name="Text 23">
             <a:extLst xmlns:a="http://schemas.openxmlformats.org/drawingml/2006/main">
               <a:ext uri="{FF2B5EF4-FFF2-40B4-BE49-F238E27FC236}">
-                <a16:creationId xmlns:a16="http://schemas.microsoft.com/office/drawing/2014/main" id="{0649A177-9F5B-44D0-BC74-C4B5A7BEB61F}"/>
+                <a16:creationId xmlns:a16="http://schemas.microsoft.com/office/drawing/2014/main" id="{CECCA89D-A0CC-4D85-A340-09F92418FBB4}"/>
               </a:ext>
             </a:extLst>
           </p:cNvPr>
@@ -21890,7 +21907,7 @@
           <p:cNvPr id="26" name="Text 24">
             <a:extLst xmlns:a="http://schemas.openxmlformats.org/drawingml/2006/main">
               <a:ext uri="{FF2B5EF4-FFF2-40B4-BE49-F238E27FC236}">
-                <a16:creationId xmlns:a16="http://schemas.microsoft.com/office/drawing/2014/main" id="{145FF7FE-DF51-4843-A70D-DC0434469658}"/>
+                <a16:creationId xmlns:a16="http://schemas.microsoft.com/office/drawing/2014/main" id="{34F50DF2-8621-4158-8528-AF547768AC23}"/>
               </a:ext>
             </a:extLst>
           </p:cNvPr>
@@ -21937,7 +21954,7 @@
           <p:cNvPr id="27" name="Text 25">
             <a:extLst xmlns:a="http://schemas.openxmlformats.org/drawingml/2006/main">
               <a:ext uri="{FF2B5EF4-FFF2-40B4-BE49-F238E27FC236}">
-                <a16:creationId xmlns:a16="http://schemas.microsoft.com/office/drawing/2014/main" id="{EC78CAEE-DAEE-4228-851F-9AB737213FFF}"/>
+                <a16:creationId xmlns:a16="http://schemas.microsoft.com/office/drawing/2014/main" id="{65FC9380-8829-4331-8E12-DB62BA146FF4}"/>
               </a:ext>
             </a:extLst>
           </p:cNvPr>
@@ -21984,7 +22001,7 @@
           <p:cNvPr id="28" name="Shape 26">
             <a:extLst xmlns:a="http://schemas.openxmlformats.org/drawingml/2006/main">
               <a:ext uri="{FF2B5EF4-FFF2-40B4-BE49-F238E27FC236}">
-                <a16:creationId xmlns:a16="http://schemas.microsoft.com/office/drawing/2014/main" id="{B3A92F5C-AD3C-4588-9942-F507FC8AA8EA}"/>
+                <a16:creationId xmlns:a16="http://schemas.microsoft.com/office/drawing/2014/main" id="{1C13206A-9F66-4347-BEC3-369D71A4C8F5}"/>
               </a:ext>
             </a:extLst>
           </p:cNvPr>
@@ -22016,7 +22033,7 @@
           <p:cNvPr id="29" name="Shape 27">
             <a:extLst xmlns:a="http://schemas.openxmlformats.org/drawingml/2006/main">
               <a:ext uri="{FF2B5EF4-FFF2-40B4-BE49-F238E27FC236}">
-                <a16:creationId xmlns:a16="http://schemas.microsoft.com/office/drawing/2014/main" id="{D3960FF5-E216-422F-9FEF-D3A8D943D27F}"/>
+                <a16:creationId xmlns:a16="http://schemas.microsoft.com/office/drawing/2014/main" id="{47C0230D-E979-4879-81BB-053126618FB2}"/>
               </a:ext>
             </a:extLst>
           </p:cNvPr>
@@ -22051,7 +22068,7 @@
           <p:cNvPr id="30" name="Text 28">
             <a:extLst xmlns:a="http://schemas.openxmlformats.org/drawingml/2006/main">
               <a:ext uri="{FF2B5EF4-FFF2-40B4-BE49-F238E27FC236}">
-                <a16:creationId xmlns:a16="http://schemas.microsoft.com/office/drawing/2014/main" id="{11638BF7-9B47-41E5-8D54-3A95BA63F7D6}"/>
+                <a16:creationId xmlns:a16="http://schemas.microsoft.com/office/drawing/2014/main" id="{A29B8D20-9090-4177-8E48-83AE950E4673}"/>
               </a:ext>
             </a:extLst>
           </p:cNvPr>
@@ -22098,7 +22115,7 @@
           <p:cNvPr id="31" name="Text 29">
             <a:extLst xmlns:a="http://schemas.openxmlformats.org/drawingml/2006/main">
               <a:ext uri="{FF2B5EF4-FFF2-40B4-BE49-F238E27FC236}">
-                <a16:creationId xmlns:a16="http://schemas.microsoft.com/office/drawing/2014/main" id="{8D84014E-61B5-4DF3-AEE8-948AA71ABC17}"/>
+                <a16:creationId xmlns:a16="http://schemas.microsoft.com/office/drawing/2014/main" id="{5212470F-CABD-4584-84E4-9AFED52E91D7}"/>
               </a:ext>
             </a:extLst>
           </p:cNvPr>
@@ -22145,7 +22162,7 @@
           <p:cNvPr id="32" name="Text 30">
             <a:extLst xmlns:a="http://schemas.openxmlformats.org/drawingml/2006/main">
               <a:ext uri="{FF2B5EF4-FFF2-40B4-BE49-F238E27FC236}">
-                <a16:creationId xmlns:a16="http://schemas.microsoft.com/office/drawing/2014/main" id="{51A6D951-AAF0-4B32-BCEB-6EB02B53139E}"/>
+                <a16:creationId xmlns:a16="http://schemas.microsoft.com/office/drawing/2014/main" id="{50F23F2F-7263-405D-8E1C-7032924CA7D5}"/>
               </a:ext>
             </a:extLst>
           </p:cNvPr>
@@ -22192,7 +22209,7 @@
           <p:cNvPr id="33" name="Shape 31">
             <a:extLst xmlns:a="http://schemas.openxmlformats.org/drawingml/2006/main">
               <a:ext uri="{FF2B5EF4-FFF2-40B4-BE49-F238E27FC236}">
-                <a16:creationId xmlns:a16="http://schemas.microsoft.com/office/drawing/2014/main" id="{5B427737-2280-4898-8A6A-4440FD7617D1}"/>
+                <a16:creationId xmlns:a16="http://schemas.microsoft.com/office/drawing/2014/main" id="{7F10BD46-C8D1-4A61-AC24-C3E15C6B69C3}"/>
               </a:ext>
             </a:extLst>
           </p:cNvPr>
@@ -22227,7 +22244,7 @@
           <p:cNvPr id="34" name="Text 32">
             <a:extLst xmlns:a="http://schemas.openxmlformats.org/drawingml/2006/main">
               <a:ext uri="{FF2B5EF4-FFF2-40B4-BE49-F238E27FC236}">
-                <a16:creationId xmlns:a16="http://schemas.microsoft.com/office/drawing/2014/main" id="{CC2D236F-B5CD-4D60-8991-4F2573466599}"/>
+                <a16:creationId xmlns:a16="http://schemas.microsoft.com/office/drawing/2014/main" id="{159B7407-BA41-4DEE-9200-8F8E32686972}"/>
               </a:ext>
             </a:extLst>
           </p:cNvPr>
@@ -22274,7 +22291,7 @@
           <p:cNvPr id="35" name="Shape 33">
             <a:extLst xmlns:a="http://schemas.openxmlformats.org/drawingml/2006/main">
               <a:ext uri="{FF2B5EF4-FFF2-40B4-BE49-F238E27FC236}">
-                <a16:creationId xmlns:a16="http://schemas.microsoft.com/office/drawing/2014/main" id="{D9A3591E-DC69-47C9-865D-E68D1718E47D}"/>
+                <a16:creationId xmlns:a16="http://schemas.microsoft.com/office/drawing/2014/main" id="{2381C964-032C-4A9B-82FC-089A0D2BDB20}"/>
               </a:ext>
             </a:extLst>
           </p:cNvPr>
@@ -22307,7 +22324,7 @@
           <p:cNvPr id="36" name="Text 34">
             <a:extLst xmlns:a="http://schemas.openxmlformats.org/drawingml/2006/main">
               <a:ext uri="{FF2B5EF4-FFF2-40B4-BE49-F238E27FC236}">
-                <a16:creationId xmlns:a16="http://schemas.microsoft.com/office/drawing/2014/main" id="{B3CAA512-ECF4-4033-A2D9-618DAF049428}"/>
+                <a16:creationId xmlns:a16="http://schemas.microsoft.com/office/drawing/2014/main" id="{59A06102-C6B4-470F-8A06-50704AB73571}"/>
               </a:ext>
             </a:extLst>
           </p:cNvPr>
@@ -22354,7 +22371,7 @@
           <p:cNvPr id="37" name="Shape 35">
             <a:extLst xmlns:a="http://schemas.openxmlformats.org/drawingml/2006/main">
               <a:ext uri="{FF2B5EF4-FFF2-40B4-BE49-F238E27FC236}">
-                <a16:creationId xmlns:a16="http://schemas.microsoft.com/office/drawing/2014/main" id="{86412888-CEDA-40D5-8E9F-C56A3C70ECEC}"/>
+                <a16:creationId xmlns:a16="http://schemas.microsoft.com/office/drawing/2014/main" id="{CE4165AE-50FA-48A2-A708-B8161777E528}"/>
               </a:ext>
             </a:extLst>
           </p:cNvPr>
@@ -22387,7 +22404,7 @@
           <p:cNvPr id="38" name="Text 36">
             <a:extLst xmlns:a="http://schemas.openxmlformats.org/drawingml/2006/main">
               <a:ext uri="{FF2B5EF4-FFF2-40B4-BE49-F238E27FC236}">
-                <a16:creationId xmlns:a16="http://schemas.microsoft.com/office/drawing/2014/main" id="{CDC0812D-3FF2-4820-A86D-C15C389D7603}"/>
+                <a16:creationId xmlns:a16="http://schemas.microsoft.com/office/drawing/2014/main" id="{E171E2CB-45D1-48AF-A4C2-9435A10A482C}"/>
               </a:ext>
             </a:extLst>
           </p:cNvPr>
@@ -22434,7 +22451,7 @@
           <p:cNvPr id="39" name="Shape 37">
             <a:extLst xmlns:a="http://schemas.openxmlformats.org/drawingml/2006/main">
               <a:ext uri="{FF2B5EF4-FFF2-40B4-BE49-F238E27FC236}">
-                <a16:creationId xmlns:a16="http://schemas.microsoft.com/office/drawing/2014/main" id="{634B91BD-1BC6-47E1-89A0-7209601792A7}"/>
+                <a16:creationId xmlns:a16="http://schemas.microsoft.com/office/drawing/2014/main" id="{20BFFB30-E85D-4E82-B4EF-5D77B7F4619B}"/>
               </a:ext>
             </a:extLst>
           </p:cNvPr>
@@ -22467,7 +22484,7 @@
           <p:cNvPr id="40" name="Text 38">
             <a:extLst xmlns:a="http://schemas.openxmlformats.org/drawingml/2006/main">
               <a:ext uri="{FF2B5EF4-FFF2-40B4-BE49-F238E27FC236}">
-                <a16:creationId xmlns:a16="http://schemas.microsoft.com/office/drawing/2014/main" id="{C1774DD4-63A6-4C27-A341-5F1B605C035C}"/>
+                <a16:creationId xmlns:a16="http://schemas.microsoft.com/office/drawing/2014/main" id="{CF63DA08-8F0E-4517-B36A-C7F038B5FFB5}"/>
               </a:ext>
             </a:extLst>
           </p:cNvPr>
@@ -22514,7 +22531,7 @@
           <p:cNvPr id="41" name="Shape 39">
             <a:extLst xmlns:a="http://schemas.openxmlformats.org/drawingml/2006/main">
               <a:ext uri="{FF2B5EF4-FFF2-40B4-BE49-F238E27FC236}">
-                <a16:creationId xmlns:a16="http://schemas.microsoft.com/office/drawing/2014/main" id="{012F5504-6B18-4EAB-AE43-C874E8A87D42}"/>
+                <a16:creationId xmlns:a16="http://schemas.microsoft.com/office/drawing/2014/main" id="{497338DD-DEA6-4E53-87DA-13975B3358B8}"/>
               </a:ext>
             </a:extLst>
           </p:cNvPr>
@@ -22549,7 +22566,7 @@
           <p:cNvPr id="42" name="Text 40">
             <a:extLst xmlns:a="http://schemas.openxmlformats.org/drawingml/2006/main">
               <a:ext uri="{FF2B5EF4-FFF2-40B4-BE49-F238E27FC236}">
-                <a16:creationId xmlns:a16="http://schemas.microsoft.com/office/drawing/2014/main" id="{2FC6CF10-C525-438D-A074-B16ABE5D8C11}"/>
+                <a16:creationId xmlns:a16="http://schemas.microsoft.com/office/drawing/2014/main" id="{3BAFC173-2520-471B-B0E9-74C31D17E87B}"/>
               </a:ext>
             </a:extLst>
           </p:cNvPr>
@@ -22596,7 +22613,7 @@
           <p:cNvPr id="43" name="Text 41">
             <a:extLst xmlns:a="http://schemas.openxmlformats.org/drawingml/2006/main">
               <a:ext uri="{FF2B5EF4-FFF2-40B4-BE49-F238E27FC236}">
-                <a16:creationId xmlns:a16="http://schemas.microsoft.com/office/drawing/2014/main" id="{02B0BBD4-C27A-4794-9B8B-A328B1131A48}"/>
+                <a16:creationId xmlns:a16="http://schemas.microsoft.com/office/drawing/2014/main" id="{8063A930-074A-4C78-B223-1417A1D76F00}"/>
               </a:ext>
             </a:extLst>
           </p:cNvPr>
@@ -22675,7 +22692,7 @@
           <p:cNvPr id="44" name="Text 42">
             <a:extLst xmlns:a="http://schemas.openxmlformats.org/drawingml/2006/main">
               <a:ext uri="{FF2B5EF4-FFF2-40B4-BE49-F238E27FC236}">
-                <a16:creationId xmlns:a16="http://schemas.microsoft.com/office/drawing/2014/main" id="{E34C6AAF-DC25-40A1-9B64-D89052BF5211}"/>
+                <a16:creationId xmlns:a16="http://schemas.microsoft.com/office/drawing/2014/main" id="{D225D229-B1EF-4701-AE79-631E989AC167}"/>
               </a:ext>
             </a:extLst>
           </p:cNvPr>
@@ -22722,7 +22739,7 @@
           <p:cNvPr id="45" name="Text 43">
             <a:extLst xmlns:a="http://schemas.openxmlformats.org/drawingml/2006/main">
               <a:ext uri="{FF2B5EF4-FFF2-40B4-BE49-F238E27FC236}">
-                <a16:creationId xmlns:a16="http://schemas.microsoft.com/office/drawing/2014/main" id="{13454E8A-60B9-426D-985D-6E3B2F628FDA}"/>
+                <a16:creationId xmlns:a16="http://schemas.microsoft.com/office/drawing/2014/main" id="{8377BFEA-E677-46E9-A3D4-66F1C948E9FB}"/>
               </a:ext>
             </a:extLst>
           </p:cNvPr>
@@ -22769,7 +22786,7 @@
           <p:cNvPr id="46" name="Text 44">
             <a:extLst xmlns:a="http://schemas.openxmlformats.org/drawingml/2006/main">
               <a:ext uri="{FF2B5EF4-FFF2-40B4-BE49-F238E27FC236}">
-                <a16:creationId xmlns:a16="http://schemas.microsoft.com/office/drawing/2014/main" id="{73879FC2-42CE-4BD0-B54A-40E19CBB338A}"/>
+                <a16:creationId xmlns:a16="http://schemas.microsoft.com/office/drawing/2014/main" id="{0261E257-1674-404E-8ED9-2BD8BBF7500D}"/>
               </a:ext>
             </a:extLst>
           </p:cNvPr>
@@ -22814,7 +22831,7 @@
     </p:spTree>
     <p:extLst>
       <p:ext uri="{BB962C8B-B14F-4D97-AF65-F5344CB8AC3E}">
-        <p14:creationId xmlns:p14="http://schemas.microsoft.com/office/powerpoint/2010/main" val="368304469"/>
+        <p14:creationId xmlns:p14="http://schemas.microsoft.com/office/powerpoint/2010/main" val="546507206"/>
       </p:ext>
     </p:extLst>
   </p:cSld>
@@ -22845,7 +22862,7 @@
           <p:cNvPr id="2" name="Text 0">
             <a:extLst xmlns:a="http://schemas.openxmlformats.org/drawingml/2006/main">
               <a:ext uri="{FF2B5EF4-FFF2-40B4-BE49-F238E27FC236}">
-                <a16:creationId xmlns:a16="http://schemas.microsoft.com/office/drawing/2014/main" id="{AFE05E9B-6C20-4368-89D5-12BE8356FEB8}"/>
+                <a16:creationId xmlns:a16="http://schemas.microsoft.com/office/drawing/2014/main" id="{DCBC3C75-1B0B-42CD-9D1B-429EE4553DAF}"/>
               </a:ext>
             </a:extLst>
           </p:cNvPr>
@@ -22892,7 +22909,7 @@
           <p:cNvPr id="3" name="Text 1">
             <a:extLst xmlns:a="http://schemas.openxmlformats.org/drawingml/2006/main">
               <a:ext uri="{FF2B5EF4-FFF2-40B4-BE49-F238E27FC236}">
-                <a16:creationId xmlns:a16="http://schemas.microsoft.com/office/drawing/2014/main" id="{8FE58A6F-79E5-482F-B987-0D393640A183}"/>
+                <a16:creationId xmlns:a16="http://schemas.microsoft.com/office/drawing/2014/main" id="{6F39ED7F-E4DC-4266-8B1B-A13D73C6C9A0}"/>
               </a:ext>
             </a:extLst>
           </p:cNvPr>
@@ -22939,7 +22956,7 @@
           <p:cNvPr id="4" name="Shape 2">
             <a:extLst xmlns:a="http://schemas.openxmlformats.org/drawingml/2006/main">
               <a:ext uri="{FF2B5EF4-FFF2-40B4-BE49-F238E27FC236}">
-                <a16:creationId xmlns:a16="http://schemas.microsoft.com/office/drawing/2014/main" id="{D9ECCC12-875C-4BB1-B98A-A5484E4DAC35}"/>
+                <a16:creationId xmlns:a16="http://schemas.microsoft.com/office/drawing/2014/main" id="{90A08C73-963E-4E35-AF0C-B10F42B8C270}"/>
               </a:ext>
             </a:extLst>
           </p:cNvPr>
@@ -22974,7 +22991,7 @@
           <p:cNvPr id="5" name="Text 3">
             <a:extLst xmlns:a="http://schemas.openxmlformats.org/drawingml/2006/main">
               <a:ext uri="{FF2B5EF4-FFF2-40B4-BE49-F238E27FC236}">
-                <a16:creationId xmlns:a16="http://schemas.microsoft.com/office/drawing/2014/main" id="{6C394C72-9410-4E17-A06E-AB32698E0033}"/>
+                <a16:creationId xmlns:a16="http://schemas.microsoft.com/office/drawing/2014/main" id="{6271E12C-E31F-4C8E-9C5A-5A1A5CEE0EF2}"/>
               </a:ext>
             </a:extLst>
           </p:cNvPr>
@@ -23021,7 +23038,7 @@
           <p:cNvPr id="6" name="Shape 4">
             <a:extLst xmlns:a="http://schemas.openxmlformats.org/drawingml/2006/main">
               <a:ext uri="{FF2B5EF4-FFF2-40B4-BE49-F238E27FC236}">
-                <a16:creationId xmlns:a16="http://schemas.microsoft.com/office/drawing/2014/main" id="{2731AC8F-D246-4793-8706-97CCCFE7DBC6}"/>
+                <a16:creationId xmlns:a16="http://schemas.microsoft.com/office/drawing/2014/main" id="{C2356599-3480-48A3-8BF5-FE891E1955CB}"/>
               </a:ext>
             </a:extLst>
           </p:cNvPr>
@@ -23052,7 +23069,7 @@
           <p:cNvPr id="7" name="Shape 5">
             <a:extLst xmlns:a="http://schemas.openxmlformats.org/drawingml/2006/main">
               <a:ext uri="{FF2B5EF4-FFF2-40B4-BE49-F238E27FC236}">
-                <a16:creationId xmlns:a16="http://schemas.microsoft.com/office/drawing/2014/main" id="{C346D580-2F52-446D-AB11-B53C30272637}"/>
+                <a16:creationId xmlns:a16="http://schemas.microsoft.com/office/drawing/2014/main" id="{7DBC063D-FC55-49BD-A12C-A0E2B89A01D7}"/>
               </a:ext>
             </a:extLst>
           </p:cNvPr>
@@ -23091,7 +23108,7 @@
           <p:nvPr/>
         </p:nvPicPr>
         <p:blipFill>
-          <a:blip xmlns:r="http://schemas.openxmlformats.org/officeDocument/2006/relationships" xmlns:a="http://schemas.openxmlformats.org/drawingml/2006/main" r:embed="R4d0578952fda48bd"/>
+          <a:blip xmlns:r="http://schemas.openxmlformats.org/officeDocument/2006/relationships" xmlns:a="http://schemas.openxmlformats.org/drawingml/2006/main" r:embed="Ra581da7381c74a11"/>
           <a:stretch xmlns:a="http://schemas.openxmlformats.org/drawingml/2006/main">
             <a:fillRect l="0" t="0" r="0" b="0"/>
           </a:stretch>
@@ -23111,7 +23128,7 @@
           <p:cNvPr id="9" name="Shape 6">
             <a:extLst xmlns:a="http://schemas.openxmlformats.org/drawingml/2006/main">
               <a:ext uri="{FF2B5EF4-FFF2-40B4-BE49-F238E27FC236}">
-                <a16:creationId xmlns:a16="http://schemas.microsoft.com/office/drawing/2014/main" id="{524CB63A-6B0B-4287-A7B1-741B0FE2FBAB}"/>
+                <a16:creationId xmlns:a16="http://schemas.microsoft.com/office/drawing/2014/main" id="{AAD770C3-0B71-4FE9-BEA5-D674C0A2965A}"/>
               </a:ext>
             </a:extLst>
           </p:cNvPr>
@@ -23144,7 +23161,7 @@
           <p:cNvPr id="10" name="Text 7">
             <a:extLst xmlns:a="http://schemas.openxmlformats.org/drawingml/2006/main">
               <a:ext uri="{FF2B5EF4-FFF2-40B4-BE49-F238E27FC236}">
-                <a16:creationId xmlns:a16="http://schemas.microsoft.com/office/drawing/2014/main" id="{6146DA3B-2694-4EC6-8E02-25A364B971E9}"/>
+                <a16:creationId xmlns:a16="http://schemas.microsoft.com/office/drawing/2014/main" id="{031898BF-E5A5-407E-9CC0-61BAC2718005}"/>
               </a:ext>
             </a:extLst>
           </p:cNvPr>
@@ -23191,7 +23208,7 @@
           <p:cNvPr id="11" name="Shape 8">
             <a:extLst xmlns:a="http://schemas.openxmlformats.org/drawingml/2006/main">
               <a:ext uri="{FF2B5EF4-FFF2-40B4-BE49-F238E27FC236}">
-                <a16:creationId xmlns:a16="http://schemas.microsoft.com/office/drawing/2014/main" id="{75080E0D-DE93-4818-86CB-E0264B55BEEE}"/>
+                <a16:creationId xmlns:a16="http://schemas.microsoft.com/office/drawing/2014/main" id="{868FF8DB-4575-4145-BA61-B1C811C330A6}"/>
               </a:ext>
             </a:extLst>
           </p:cNvPr>
@@ -23226,7 +23243,7 @@
           <p:cNvPr id="12" name="Text 9">
             <a:extLst xmlns:a="http://schemas.openxmlformats.org/drawingml/2006/main">
               <a:ext uri="{FF2B5EF4-FFF2-40B4-BE49-F238E27FC236}">
-                <a16:creationId xmlns:a16="http://schemas.microsoft.com/office/drawing/2014/main" id="{12D9CACA-3FD1-4182-AC63-677D88E9676C}"/>
+                <a16:creationId xmlns:a16="http://schemas.microsoft.com/office/drawing/2014/main" id="{873D947B-BAA6-4D71-9FE7-AFFC82763063}"/>
               </a:ext>
             </a:extLst>
           </p:cNvPr>
@@ -23273,7 +23290,7 @@
           <p:cNvPr id="13" name="Text 10">
             <a:extLst xmlns:a="http://schemas.openxmlformats.org/drawingml/2006/main">
               <a:ext uri="{FF2B5EF4-FFF2-40B4-BE49-F238E27FC236}">
-                <a16:creationId xmlns:a16="http://schemas.microsoft.com/office/drawing/2014/main" id="{9538981B-78C0-4BEE-A190-C4C497CEDB4B}"/>
+                <a16:creationId xmlns:a16="http://schemas.microsoft.com/office/drawing/2014/main" id="{8EFDAEAD-8092-4A81-9C80-6683960E1602}"/>
               </a:ext>
             </a:extLst>
           </p:cNvPr>
@@ -23320,7 +23337,7 @@
           <p:cNvPr id="14" name="Shape 11">
             <a:extLst xmlns:a="http://schemas.openxmlformats.org/drawingml/2006/main">
               <a:ext uri="{FF2B5EF4-FFF2-40B4-BE49-F238E27FC236}">
-                <a16:creationId xmlns:a16="http://schemas.microsoft.com/office/drawing/2014/main" id="{0A7BD04E-744E-4F3C-BBB8-2E89B25BF30D}"/>
+                <a16:creationId xmlns:a16="http://schemas.microsoft.com/office/drawing/2014/main" id="{DECBB807-363C-49FB-8E35-0F7578632D9A}"/>
               </a:ext>
             </a:extLst>
           </p:cNvPr>
@@ -23355,7 +23372,7 @@
           <p:cNvPr id="15" name="Text 12">
             <a:extLst xmlns:a="http://schemas.openxmlformats.org/drawingml/2006/main">
               <a:ext uri="{FF2B5EF4-FFF2-40B4-BE49-F238E27FC236}">
-                <a16:creationId xmlns:a16="http://schemas.microsoft.com/office/drawing/2014/main" id="{4AA8D716-EEFE-42B3-A1DB-D5B4E2E7939C}"/>
+                <a16:creationId xmlns:a16="http://schemas.microsoft.com/office/drawing/2014/main" id="{0CC42002-22AA-4DA4-A4F4-6B5495B08100}"/>
               </a:ext>
             </a:extLst>
           </p:cNvPr>
@@ -23402,7 +23419,7 @@
           <p:cNvPr id="16" name="Text 13">
             <a:extLst xmlns:a="http://schemas.openxmlformats.org/drawingml/2006/main">
               <a:ext uri="{FF2B5EF4-FFF2-40B4-BE49-F238E27FC236}">
-                <a16:creationId xmlns:a16="http://schemas.microsoft.com/office/drawing/2014/main" id="{9F59F5CD-15F7-404F-BEE8-79B0D5EC649E}"/>
+                <a16:creationId xmlns:a16="http://schemas.microsoft.com/office/drawing/2014/main" id="{472261FC-3C61-450B-B6CC-8D3EBE2F8F16}"/>
               </a:ext>
             </a:extLst>
           </p:cNvPr>
@@ -23449,7 +23466,7 @@
           <p:cNvPr id="17" name="Text 14">
             <a:extLst xmlns:a="http://schemas.openxmlformats.org/drawingml/2006/main">
               <a:ext uri="{FF2B5EF4-FFF2-40B4-BE49-F238E27FC236}">
-                <a16:creationId xmlns:a16="http://schemas.microsoft.com/office/drawing/2014/main" id="{D43968AE-D68E-46AC-BA84-AD0F0E2CADAD}"/>
+                <a16:creationId xmlns:a16="http://schemas.microsoft.com/office/drawing/2014/main" id="{C8AF5E8B-4149-47BE-B73C-73EF00A84A8E}"/>
               </a:ext>
             </a:extLst>
           </p:cNvPr>
@@ -23496,7 +23513,7 @@
           <p:cNvPr id="18" name="Shape 15">
             <a:extLst xmlns:a="http://schemas.openxmlformats.org/drawingml/2006/main">
               <a:ext uri="{FF2B5EF4-FFF2-40B4-BE49-F238E27FC236}">
-                <a16:creationId xmlns:a16="http://schemas.microsoft.com/office/drawing/2014/main" id="{1A6EC77D-F333-4079-A58B-C70F67122950}"/>
+                <a16:creationId xmlns:a16="http://schemas.microsoft.com/office/drawing/2014/main" id="{0BA32A6C-975E-4322-B33B-78FD6601E5AC}"/>
               </a:ext>
             </a:extLst>
           </p:cNvPr>
@@ -23531,7 +23548,7 @@
           <p:cNvPr id="19" name="Text 16">
             <a:extLst xmlns:a="http://schemas.openxmlformats.org/drawingml/2006/main">
               <a:ext uri="{FF2B5EF4-FFF2-40B4-BE49-F238E27FC236}">
-                <a16:creationId xmlns:a16="http://schemas.microsoft.com/office/drawing/2014/main" id="{455DC8F6-7FBB-4AC8-9A2A-CA8BCA3F76BD}"/>
+                <a16:creationId xmlns:a16="http://schemas.microsoft.com/office/drawing/2014/main" id="{25941762-7FF9-463C-A1CD-8EBDEA0927AD}"/>
               </a:ext>
             </a:extLst>
           </p:cNvPr>
@@ -23578,7 +23595,7 @@
           <p:cNvPr id="20" name="Text 17">
             <a:extLst xmlns:a="http://schemas.openxmlformats.org/drawingml/2006/main">
               <a:ext uri="{FF2B5EF4-FFF2-40B4-BE49-F238E27FC236}">
-                <a16:creationId xmlns:a16="http://schemas.microsoft.com/office/drawing/2014/main" id="{D304D0D3-C839-40D2-A9C4-CC13BDA73DD1}"/>
+                <a16:creationId xmlns:a16="http://schemas.microsoft.com/office/drawing/2014/main" id="{BCDC4183-0C20-4E62-9D52-58B2E07E9956}"/>
               </a:ext>
             </a:extLst>
           </p:cNvPr>
@@ -23625,7 +23642,7 @@
           <p:cNvPr id="21" name="Text 18">
             <a:extLst xmlns:a="http://schemas.openxmlformats.org/drawingml/2006/main">
               <a:ext uri="{FF2B5EF4-FFF2-40B4-BE49-F238E27FC236}">
-                <a16:creationId xmlns:a16="http://schemas.microsoft.com/office/drawing/2014/main" id="{340FB1CB-710A-4A8D-A361-4260166D5FE2}"/>
+                <a16:creationId xmlns:a16="http://schemas.microsoft.com/office/drawing/2014/main" id="{D833E221-8C5E-4C29-9E5C-FB60722B2233}"/>
               </a:ext>
             </a:extLst>
           </p:cNvPr>
@@ -23672,7 +23689,7 @@
           <p:cNvPr id="22" name="Shape 19">
             <a:extLst xmlns:a="http://schemas.openxmlformats.org/drawingml/2006/main">
               <a:ext uri="{FF2B5EF4-FFF2-40B4-BE49-F238E27FC236}">
-                <a16:creationId xmlns:a16="http://schemas.microsoft.com/office/drawing/2014/main" id="{2F5C127D-4225-4482-B006-116C92264ED0}"/>
+                <a16:creationId xmlns:a16="http://schemas.microsoft.com/office/drawing/2014/main" id="{6FA6B3B7-B8A4-4FDD-B0FE-3FF18DD78C2E}"/>
               </a:ext>
             </a:extLst>
           </p:cNvPr>
@@ -23707,7 +23724,7 @@
           <p:cNvPr id="23" name="Text 20">
             <a:extLst xmlns:a="http://schemas.openxmlformats.org/drawingml/2006/main">
               <a:ext uri="{FF2B5EF4-FFF2-40B4-BE49-F238E27FC236}">
-                <a16:creationId xmlns:a16="http://schemas.microsoft.com/office/drawing/2014/main" id="{601A43FD-AE7F-49A3-BF7A-40644CC36EA6}"/>
+                <a16:creationId xmlns:a16="http://schemas.microsoft.com/office/drawing/2014/main" id="{397E8F70-F503-46C7-9D29-6CC8CD564DD3}"/>
               </a:ext>
             </a:extLst>
           </p:cNvPr>
@@ -23754,7 +23771,7 @@
           <p:cNvPr id="24" name="Text 21">
             <a:extLst xmlns:a="http://schemas.openxmlformats.org/drawingml/2006/main">
               <a:ext uri="{FF2B5EF4-FFF2-40B4-BE49-F238E27FC236}">
-                <a16:creationId xmlns:a16="http://schemas.microsoft.com/office/drawing/2014/main" id="{293D5F10-1B85-4E62-97E7-76EF38DF09DE}"/>
+                <a16:creationId xmlns:a16="http://schemas.microsoft.com/office/drawing/2014/main" id="{043EBC03-A720-4020-AD06-1240A7727E42}"/>
               </a:ext>
             </a:extLst>
           </p:cNvPr>
@@ -23801,7 +23818,7 @@
           <p:cNvPr id="25" name="Text 22">
             <a:extLst xmlns:a="http://schemas.openxmlformats.org/drawingml/2006/main">
               <a:ext uri="{FF2B5EF4-FFF2-40B4-BE49-F238E27FC236}">
-                <a16:creationId xmlns:a16="http://schemas.microsoft.com/office/drawing/2014/main" id="{ABBBE2A3-8F12-4A7B-83A3-1B5283BFA10E}"/>
+                <a16:creationId xmlns:a16="http://schemas.microsoft.com/office/drawing/2014/main" id="{B49D575A-7C95-430B-8FC4-13DE1E471C26}"/>
               </a:ext>
             </a:extLst>
           </p:cNvPr>
@@ -23848,7 +23865,7 @@
           <p:cNvPr id="26" name="Shape 23">
             <a:extLst xmlns:a="http://schemas.openxmlformats.org/drawingml/2006/main">
               <a:ext uri="{FF2B5EF4-FFF2-40B4-BE49-F238E27FC236}">
-                <a16:creationId xmlns:a16="http://schemas.microsoft.com/office/drawing/2014/main" id="{53292695-7996-4A0B-9B02-9AB383C63A81}"/>
+                <a16:creationId xmlns:a16="http://schemas.microsoft.com/office/drawing/2014/main" id="{9BD4248D-C11A-4BB3-9186-036A5D52A750}"/>
               </a:ext>
             </a:extLst>
           </p:cNvPr>
@@ -23883,7 +23900,7 @@
           <p:cNvPr id="27" name="Text 24">
             <a:extLst xmlns:a="http://schemas.openxmlformats.org/drawingml/2006/main">
               <a:ext uri="{FF2B5EF4-FFF2-40B4-BE49-F238E27FC236}">
-                <a16:creationId xmlns:a16="http://schemas.microsoft.com/office/drawing/2014/main" id="{BE82B573-7E7A-4A0C-874C-D70827578D0E}"/>
+                <a16:creationId xmlns:a16="http://schemas.microsoft.com/office/drawing/2014/main" id="{2B6EF29A-7932-4765-9E03-D9D710B76056}"/>
               </a:ext>
             </a:extLst>
           </p:cNvPr>
@@ -23930,7 +23947,7 @@
           <p:cNvPr id="28" name="Text 25">
             <a:extLst xmlns:a="http://schemas.openxmlformats.org/drawingml/2006/main">
               <a:ext uri="{FF2B5EF4-FFF2-40B4-BE49-F238E27FC236}">
-                <a16:creationId xmlns:a16="http://schemas.microsoft.com/office/drawing/2014/main" id="{E47CC3AC-A957-4AA4-8490-6FE56DCA0B43}"/>
+                <a16:creationId xmlns:a16="http://schemas.microsoft.com/office/drawing/2014/main" id="{EB333E5C-9CD0-4F35-92A7-1B556DA32F82}"/>
               </a:ext>
             </a:extLst>
           </p:cNvPr>
@@ -23977,7 +23994,7 @@
           <p:cNvPr id="29" name="Text 26">
             <a:extLst xmlns:a="http://schemas.openxmlformats.org/drawingml/2006/main">
               <a:ext uri="{FF2B5EF4-FFF2-40B4-BE49-F238E27FC236}">
-                <a16:creationId xmlns:a16="http://schemas.microsoft.com/office/drawing/2014/main" id="{209BA258-97E7-4C95-9761-61E298932F3F}"/>
+                <a16:creationId xmlns:a16="http://schemas.microsoft.com/office/drawing/2014/main" id="{64A82AB2-EC5D-4D72-89D6-441F0747D98D}"/>
               </a:ext>
             </a:extLst>
           </p:cNvPr>
@@ -24024,7 +24041,7 @@
           <p:cNvPr id="30" name="Text 27">
             <a:extLst xmlns:a="http://schemas.openxmlformats.org/drawingml/2006/main">
               <a:ext uri="{FF2B5EF4-FFF2-40B4-BE49-F238E27FC236}">
-                <a16:creationId xmlns:a16="http://schemas.microsoft.com/office/drawing/2014/main" id="{0DAD2772-838B-4DBF-AA23-DA662C4959A5}"/>
+                <a16:creationId xmlns:a16="http://schemas.microsoft.com/office/drawing/2014/main" id="{6125FD0B-7909-40EE-A0D0-D6CC7E6FB161}"/>
               </a:ext>
             </a:extLst>
           </p:cNvPr>
@@ -24071,7 +24088,7 @@
           <p:cNvPr id="31" name="Text 28">
             <a:extLst xmlns:a="http://schemas.openxmlformats.org/drawingml/2006/main">
               <a:ext uri="{FF2B5EF4-FFF2-40B4-BE49-F238E27FC236}">
-                <a16:creationId xmlns:a16="http://schemas.microsoft.com/office/drawing/2014/main" id="{DB2172B6-8E02-4419-92EE-5FDC5F194AA3}"/>
+                <a16:creationId xmlns:a16="http://schemas.microsoft.com/office/drawing/2014/main" id="{0EF44739-A6B8-4E49-893E-6A1806B98F80}"/>
               </a:ext>
             </a:extLst>
           </p:cNvPr>
@@ -24116,7 +24133,7 @@
     </p:spTree>
     <p:extLst>
       <p:ext uri="{BB962C8B-B14F-4D97-AF65-F5344CB8AC3E}">
-        <p14:creationId xmlns:p14="http://schemas.microsoft.com/office/powerpoint/2010/main" val="1189863805"/>
+        <p14:creationId xmlns:p14="http://schemas.microsoft.com/office/powerpoint/2010/main" val="557068566"/>
       </p:ext>
     </p:extLst>
   </p:cSld>
@@ -24147,7 +24164,7 @@
           <p:cNvPr id="2" name="Text 0">
             <a:extLst xmlns:a="http://schemas.openxmlformats.org/drawingml/2006/main">
               <a:ext uri="{FF2B5EF4-FFF2-40B4-BE49-F238E27FC236}">
-                <a16:creationId xmlns:a16="http://schemas.microsoft.com/office/drawing/2014/main" id="{F01FA0E6-8E7A-42F0-B887-A8F6FFB62854}"/>
+                <a16:creationId xmlns:a16="http://schemas.microsoft.com/office/drawing/2014/main" id="{9199300C-86AE-4F70-AD9C-CA391C8F796B}"/>
               </a:ext>
             </a:extLst>
           </p:cNvPr>
@@ -24194,7 +24211,7 @@
           <p:cNvPr id="3" name="Text 1">
             <a:extLst xmlns:a="http://schemas.openxmlformats.org/drawingml/2006/main">
               <a:ext uri="{FF2B5EF4-FFF2-40B4-BE49-F238E27FC236}">
-                <a16:creationId xmlns:a16="http://schemas.microsoft.com/office/drawing/2014/main" id="{BDAF2FDF-A245-4DD3-B042-083F6E626D82}"/>
+                <a16:creationId xmlns:a16="http://schemas.microsoft.com/office/drawing/2014/main" id="{1388E1C6-B5A4-40CC-8460-8227F474C985}"/>
               </a:ext>
             </a:extLst>
           </p:cNvPr>
@@ -24241,7 +24258,7 @@
           <p:cNvPr id="4" name="Shape 2">
             <a:extLst xmlns:a="http://schemas.openxmlformats.org/drawingml/2006/main">
               <a:ext uri="{FF2B5EF4-FFF2-40B4-BE49-F238E27FC236}">
-                <a16:creationId xmlns:a16="http://schemas.microsoft.com/office/drawing/2014/main" id="{A8367B06-768F-41F8-904C-BD29C7884765}"/>
+                <a16:creationId xmlns:a16="http://schemas.microsoft.com/office/drawing/2014/main" id="{91C25963-7FBD-4AD2-9C88-E730189D47F3}"/>
               </a:ext>
             </a:extLst>
           </p:cNvPr>
@@ -24276,7 +24293,7 @@
           <p:cNvPr id="5" name="Text 3">
             <a:extLst xmlns:a="http://schemas.openxmlformats.org/drawingml/2006/main">
               <a:ext uri="{FF2B5EF4-FFF2-40B4-BE49-F238E27FC236}">
-                <a16:creationId xmlns:a16="http://schemas.microsoft.com/office/drawing/2014/main" id="{D3AAE2F5-B658-4354-B94B-B43A6350B7F2}"/>
+                <a16:creationId xmlns:a16="http://schemas.microsoft.com/office/drawing/2014/main" id="{3808E391-DEE1-4F63-9C16-9D73341D4A84}"/>
               </a:ext>
             </a:extLst>
           </p:cNvPr>
@@ -24323,7 +24340,7 @@
           <p:cNvPr id="6" name="Shape 4">
             <a:extLst xmlns:a="http://schemas.openxmlformats.org/drawingml/2006/main">
               <a:ext uri="{FF2B5EF4-FFF2-40B4-BE49-F238E27FC236}">
-                <a16:creationId xmlns:a16="http://schemas.microsoft.com/office/drawing/2014/main" id="{292BB15B-C244-47C7-B3C8-8027F87E940F}"/>
+                <a16:creationId xmlns:a16="http://schemas.microsoft.com/office/drawing/2014/main" id="{5DB98B9F-F55A-49E3-AF94-0CB0E8F7520E}"/>
               </a:ext>
             </a:extLst>
           </p:cNvPr>
@@ -24354,7 +24371,7 @@
           <p:cNvPr id="7" name="Shape 5">
             <a:extLst xmlns:a="http://schemas.openxmlformats.org/drawingml/2006/main">
               <a:ext uri="{FF2B5EF4-FFF2-40B4-BE49-F238E27FC236}">
-                <a16:creationId xmlns:a16="http://schemas.microsoft.com/office/drawing/2014/main" id="{F8DB26EE-6FC9-470C-A8F9-274C94568FCF}"/>
+                <a16:creationId xmlns:a16="http://schemas.microsoft.com/office/drawing/2014/main" id="{66476E0F-067F-4CA9-BF16-1CD36CA035BE}"/>
               </a:ext>
             </a:extLst>
           </p:cNvPr>
@@ -24389,7 +24406,7 @@
           <p:cNvPr id="8" name="Text 6">
             <a:extLst xmlns:a="http://schemas.openxmlformats.org/drawingml/2006/main">
               <a:ext uri="{FF2B5EF4-FFF2-40B4-BE49-F238E27FC236}">
-                <a16:creationId xmlns:a16="http://schemas.microsoft.com/office/drawing/2014/main" id="{24D9B2C4-BE72-4AA0-8B76-662089E3A025}"/>
+                <a16:creationId xmlns:a16="http://schemas.microsoft.com/office/drawing/2014/main" id="{4B7B8208-AA12-42DF-8C9B-2619BAEAB41E}"/>
               </a:ext>
             </a:extLst>
           </p:cNvPr>
@@ -24436,7 +24453,7 @@
           <p:cNvPr id="9" name="Text 7">
             <a:extLst xmlns:a="http://schemas.openxmlformats.org/drawingml/2006/main">
               <a:ext uri="{FF2B5EF4-FFF2-40B4-BE49-F238E27FC236}">
-                <a16:creationId xmlns:a16="http://schemas.microsoft.com/office/drawing/2014/main" id="{E0AB9138-03DB-4AD3-AFD5-FF9134DBB33C}"/>
+                <a16:creationId xmlns:a16="http://schemas.microsoft.com/office/drawing/2014/main" id="{F2CCC4E3-7FE6-48BB-BEB2-7952A9198086}"/>
               </a:ext>
             </a:extLst>
           </p:cNvPr>
@@ -24483,7 +24500,7 @@
           <p:cNvPr id="10" name="Text 8">
             <a:extLst xmlns:a="http://schemas.openxmlformats.org/drawingml/2006/main">
               <a:ext uri="{FF2B5EF4-FFF2-40B4-BE49-F238E27FC236}">
-                <a16:creationId xmlns:a16="http://schemas.microsoft.com/office/drawing/2014/main" id="{B3B8C1C4-72D4-4D1F-8ACE-4ABA3D12BE30}"/>
+                <a16:creationId xmlns:a16="http://schemas.microsoft.com/office/drawing/2014/main" id="{C751D5B0-6401-45EC-9F69-BB0880F3E0C1}"/>
               </a:ext>
             </a:extLst>
           </p:cNvPr>
@@ -24530,7 +24547,7 @@
           <p:cNvPr id="11" name="Shape 9">
             <a:extLst xmlns:a="http://schemas.openxmlformats.org/drawingml/2006/main">
               <a:ext uri="{FF2B5EF4-FFF2-40B4-BE49-F238E27FC236}">
-                <a16:creationId xmlns:a16="http://schemas.microsoft.com/office/drawing/2014/main" id="{AEA00AE9-26D0-44E4-AEB9-C30744D2FDCC}"/>
+                <a16:creationId xmlns:a16="http://schemas.microsoft.com/office/drawing/2014/main" id="{7BB34269-B4FA-409B-A62D-794DF5B71311}"/>
               </a:ext>
             </a:extLst>
           </p:cNvPr>
@@ -24565,7 +24582,7 @@
           <p:cNvPr id="12" name="Text 10">
             <a:extLst xmlns:a="http://schemas.openxmlformats.org/drawingml/2006/main">
               <a:ext uri="{FF2B5EF4-FFF2-40B4-BE49-F238E27FC236}">
-                <a16:creationId xmlns:a16="http://schemas.microsoft.com/office/drawing/2014/main" id="{C1B86CAC-B929-47BA-94B9-45522D8E6B88}"/>
+                <a16:creationId xmlns:a16="http://schemas.microsoft.com/office/drawing/2014/main" id="{95981DBD-2FA7-4999-A6FC-09E73B571608}"/>
               </a:ext>
             </a:extLst>
           </p:cNvPr>
@@ -24612,7 +24629,7 @@
           <p:cNvPr id="13" name="Text 11">
             <a:extLst xmlns:a="http://schemas.openxmlformats.org/drawingml/2006/main">
               <a:ext uri="{FF2B5EF4-FFF2-40B4-BE49-F238E27FC236}">
-                <a16:creationId xmlns:a16="http://schemas.microsoft.com/office/drawing/2014/main" id="{D6A25835-74BD-48E4-9A34-7CE7E5FC1415}"/>
+                <a16:creationId xmlns:a16="http://schemas.microsoft.com/office/drawing/2014/main" id="{D9519D02-8007-4F1F-BF29-E5304F5442B5}"/>
               </a:ext>
             </a:extLst>
           </p:cNvPr>
@@ -24659,7 +24676,7 @@
           <p:cNvPr id="14" name="Text 12">
             <a:extLst xmlns:a="http://schemas.openxmlformats.org/drawingml/2006/main">
               <a:ext uri="{FF2B5EF4-FFF2-40B4-BE49-F238E27FC236}">
-                <a16:creationId xmlns:a16="http://schemas.microsoft.com/office/drawing/2014/main" id="{8807F5FD-4D79-4515-AC85-E4E006195755}"/>
+                <a16:creationId xmlns:a16="http://schemas.microsoft.com/office/drawing/2014/main" id="{D224B218-E5D2-402E-B1EA-C66EB3F91978}"/>
               </a:ext>
             </a:extLst>
           </p:cNvPr>
@@ -24706,7 +24723,7 @@
           <p:cNvPr id="15" name="Shape 13">
             <a:extLst xmlns:a="http://schemas.openxmlformats.org/drawingml/2006/main">
               <a:ext uri="{FF2B5EF4-FFF2-40B4-BE49-F238E27FC236}">
-                <a16:creationId xmlns:a16="http://schemas.microsoft.com/office/drawing/2014/main" id="{1EA4E188-1738-47ED-A664-A10048CE2DCC}"/>
+                <a16:creationId xmlns:a16="http://schemas.microsoft.com/office/drawing/2014/main" id="{13524157-DC4D-46DC-816D-2F8B43D151D4}"/>
               </a:ext>
             </a:extLst>
           </p:cNvPr>
@@ -24741,7 +24758,7 @@
           <p:cNvPr id="16" name="Text 14">
             <a:extLst xmlns:a="http://schemas.openxmlformats.org/drawingml/2006/main">
               <a:ext uri="{FF2B5EF4-FFF2-40B4-BE49-F238E27FC236}">
-                <a16:creationId xmlns:a16="http://schemas.microsoft.com/office/drawing/2014/main" id="{805A7490-6C02-49D0-8EC3-5DB2062E6F70}"/>
+                <a16:creationId xmlns:a16="http://schemas.microsoft.com/office/drawing/2014/main" id="{85DF1468-E03E-4717-BBDF-C20203DA74A2}"/>
               </a:ext>
             </a:extLst>
           </p:cNvPr>
@@ -24788,7 +24805,7 @@
           <p:cNvPr id="17" name="Text 15">
             <a:extLst xmlns:a="http://schemas.openxmlformats.org/drawingml/2006/main">
               <a:ext uri="{FF2B5EF4-FFF2-40B4-BE49-F238E27FC236}">
-                <a16:creationId xmlns:a16="http://schemas.microsoft.com/office/drawing/2014/main" id="{7E07DB1E-7121-4144-A712-ECD8BCAD00E6}"/>
+                <a16:creationId xmlns:a16="http://schemas.microsoft.com/office/drawing/2014/main" id="{C07E0B6A-9ED2-4BE7-A30F-ABA9C0254BA7}"/>
               </a:ext>
             </a:extLst>
           </p:cNvPr>
@@ -24835,7 +24852,7 @@
           <p:cNvPr id="18" name="Text 16">
             <a:extLst xmlns:a="http://schemas.openxmlformats.org/drawingml/2006/main">
               <a:ext uri="{FF2B5EF4-FFF2-40B4-BE49-F238E27FC236}">
-                <a16:creationId xmlns:a16="http://schemas.microsoft.com/office/drawing/2014/main" id="{00265EAE-12A1-442F-A43B-8422A203185A}"/>
+                <a16:creationId xmlns:a16="http://schemas.microsoft.com/office/drawing/2014/main" id="{8056B90C-05C6-4E8E-9F6C-26A1B6D17460}"/>
               </a:ext>
             </a:extLst>
           </p:cNvPr>
@@ -24882,7 +24899,7 @@
           <p:cNvPr id="19" name="Shape 17">
             <a:extLst xmlns:a="http://schemas.openxmlformats.org/drawingml/2006/main">
               <a:ext uri="{FF2B5EF4-FFF2-40B4-BE49-F238E27FC236}">
-                <a16:creationId xmlns:a16="http://schemas.microsoft.com/office/drawing/2014/main" id="{95CC7490-F960-4C04-AB29-6425EA387892}"/>
+                <a16:creationId xmlns:a16="http://schemas.microsoft.com/office/drawing/2014/main" id="{49A8DBCD-052E-4033-AEE7-1C07AF27DA92}"/>
               </a:ext>
             </a:extLst>
           </p:cNvPr>
@@ -24917,7 +24934,7 @@
           <p:cNvPr id="20" name="Text 18">
             <a:extLst xmlns:a="http://schemas.openxmlformats.org/drawingml/2006/main">
               <a:ext uri="{FF2B5EF4-FFF2-40B4-BE49-F238E27FC236}">
-                <a16:creationId xmlns:a16="http://schemas.microsoft.com/office/drawing/2014/main" id="{48E9995A-1FF3-4031-9604-B0B87D0EA100}"/>
+                <a16:creationId xmlns:a16="http://schemas.microsoft.com/office/drawing/2014/main" id="{FE5436D8-D761-4CC4-B023-3355207EF679}"/>
               </a:ext>
             </a:extLst>
           </p:cNvPr>
@@ -24964,7 +24981,7 @@
           <p:cNvPr id="21" name="Text 19">
             <a:extLst xmlns:a="http://schemas.openxmlformats.org/drawingml/2006/main">
               <a:ext uri="{FF2B5EF4-FFF2-40B4-BE49-F238E27FC236}">
-                <a16:creationId xmlns:a16="http://schemas.microsoft.com/office/drawing/2014/main" id="{A37EE258-A24F-4AAD-942A-656B5CF57AB7}"/>
+                <a16:creationId xmlns:a16="http://schemas.microsoft.com/office/drawing/2014/main" id="{72C13243-52A6-4004-A758-19B984F820FF}"/>
               </a:ext>
             </a:extLst>
           </p:cNvPr>
@@ -25011,7 +25028,7 @@
           <p:cNvPr id="22" name="Text 20">
             <a:extLst xmlns:a="http://schemas.openxmlformats.org/drawingml/2006/main">
               <a:ext uri="{FF2B5EF4-FFF2-40B4-BE49-F238E27FC236}">
-                <a16:creationId xmlns:a16="http://schemas.microsoft.com/office/drawing/2014/main" id="{71D34824-C994-4582-993E-A5FD1B8E3ECC}"/>
+                <a16:creationId xmlns:a16="http://schemas.microsoft.com/office/drawing/2014/main" id="{8D25AB10-C4A9-40D4-8FB1-C4694D3CA082}"/>
               </a:ext>
             </a:extLst>
           </p:cNvPr>
@@ -25058,7 +25075,7 @@
           <p:cNvPr id="23" name="Shape 21">
             <a:extLst xmlns:a="http://schemas.openxmlformats.org/drawingml/2006/main">
               <a:ext uri="{FF2B5EF4-FFF2-40B4-BE49-F238E27FC236}">
-                <a16:creationId xmlns:a16="http://schemas.microsoft.com/office/drawing/2014/main" id="{B8336945-5BA2-41F9-80E3-4869083532AF}"/>
+                <a16:creationId xmlns:a16="http://schemas.microsoft.com/office/drawing/2014/main" id="{55532120-452F-470B-AD80-2656EC851C27}"/>
               </a:ext>
             </a:extLst>
           </p:cNvPr>
@@ -25093,7 +25110,7 @@
           <p:cNvPr id="24" name="Text 22">
             <a:extLst xmlns:a="http://schemas.openxmlformats.org/drawingml/2006/main">
               <a:ext uri="{FF2B5EF4-FFF2-40B4-BE49-F238E27FC236}">
-                <a16:creationId xmlns:a16="http://schemas.microsoft.com/office/drawing/2014/main" id="{A5143D82-85D2-4D09-B96B-6A692642F7EB}"/>
+                <a16:creationId xmlns:a16="http://schemas.microsoft.com/office/drawing/2014/main" id="{ADAEECB8-38E1-4EC9-8166-3F18B7C2B55D}"/>
               </a:ext>
             </a:extLst>
           </p:cNvPr>
@@ -25140,7 +25157,7 @@
           <p:cNvPr id="25" name="Text 23">
             <a:extLst xmlns:a="http://schemas.openxmlformats.org/drawingml/2006/main">
               <a:ext uri="{FF2B5EF4-FFF2-40B4-BE49-F238E27FC236}">
-                <a16:creationId xmlns:a16="http://schemas.microsoft.com/office/drawing/2014/main" id="{88948990-D636-4B7D-BB5F-0461E2E448FE}"/>
+                <a16:creationId xmlns:a16="http://schemas.microsoft.com/office/drawing/2014/main" id="{4DB23FA4-E845-42E7-846B-32279815AF80}"/>
               </a:ext>
             </a:extLst>
           </p:cNvPr>
@@ -25187,7 +25204,7 @@
           <p:cNvPr id="26" name="Text 24">
             <a:extLst xmlns:a="http://schemas.openxmlformats.org/drawingml/2006/main">
               <a:ext uri="{FF2B5EF4-FFF2-40B4-BE49-F238E27FC236}">
-                <a16:creationId xmlns:a16="http://schemas.microsoft.com/office/drawing/2014/main" id="{769033F6-9080-4983-9F72-A291EAD3DD1C}"/>
+                <a16:creationId xmlns:a16="http://schemas.microsoft.com/office/drawing/2014/main" id="{2D628B10-3665-4CAF-8CA0-A632FAF45FA3}"/>
               </a:ext>
             </a:extLst>
           </p:cNvPr>
@@ -25234,7 +25251,7 @@
           <p:cNvPr id="27" name="Shape 25">
             <a:extLst xmlns:a="http://schemas.openxmlformats.org/drawingml/2006/main">
               <a:ext uri="{FF2B5EF4-FFF2-40B4-BE49-F238E27FC236}">
-                <a16:creationId xmlns:a16="http://schemas.microsoft.com/office/drawing/2014/main" id="{5D911DA8-8851-4CC7-8294-A6749C30A002}"/>
+                <a16:creationId xmlns:a16="http://schemas.microsoft.com/office/drawing/2014/main" id="{CAB041DE-693B-47AB-9541-5269D25C28AF}"/>
               </a:ext>
             </a:extLst>
           </p:cNvPr>
@@ -25269,7 +25286,7 @@
           <p:cNvPr id="28" name="Text 26">
             <a:extLst xmlns:a="http://schemas.openxmlformats.org/drawingml/2006/main">
               <a:ext uri="{FF2B5EF4-FFF2-40B4-BE49-F238E27FC236}">
-                <a16:creationId xmlns:a16="http://schemas.microsoft.com/office/drawing/2014/main" id="{55D001D2-5BBF-4993-94F7-C36BBD32FFB2}"/>
+                <a16:creationId xmlns:a16="http://schemas.microsoft.com/office/drawing/2014/main" id="{DABB8182-B12D-4783-805E-4E7D301A66B1}"/>
               </a:ext>
             </a:extLst>
           </p:cNvPr>
@@ -25316,7 +25333,7 @@
           <p:cNvPr id="29" name="Text 27">
             <a:extLst xmlns:a="http://schemas.openxmlformats.org/drawingml/2006/main">
               <a:ext uri="{FF2B5EF4-FFF2-40B4-BE49-F238E27FC236}">
-                <a16:creationId xmlns:a16="http://schemas.microsoft.com/office/drawing/2014/main" id="{7A9C590E-2469-46D1-836E-F79D226F6815}"/>
+                <a16:creationId xmlns:a16="http://schemas.microsoft.com/office/drawing/2014/main" id="{93CB5879-F6C3-4DB2-A1DB-FCAFBF77B274}"/>
               </a:ext>
             </a:extLst>
           </p:cNvPr>
@@ -25363,7 +25380,7 @@
           <p:cNvPr id="30" name="Text 28">
             <a:extLst xmlns:a="http://schemas.openxmlformats.org/drawingml/2006/main">
               <a:ext uri="{FF2B5EF4-FFF2-40B4-BE49-F238E27FC236}">
-                <a16:creationId xmlns:a16="http://schemas.microsoft.com/office/drawing/2014/main" id="{9D128355-68B2-4378-A3D2-EBE2C28739A2}"/>
+                <a16:creationId xmlns:a16="http://schemas.microsoft.com/office/drawing/2014/main" id="{6B0F558C-7CDA-4F0C-9885-AB38AADF1995}"/>
               </a:ext>
             </a:extLst>
           </p:cNvPr>
@@ -25410,7 +25427,7 @@
           <p:cNvPr id="31" name="Shape 29">
             <a:extLst xmlns:a="http://schemas.openxmlformats.org/drawingml/2006/main">
               <a:ext uri="{FF2B5EF4-FFF2-40B4-BE49-F238E27FC236}">
-                <a16:creationId xmlns:a16="http://schemas.microsoft.com/office/drawing/2014/main" id="{305F26A4-1430-4C0C-AA4B-7AB8BDC75C67}"/>
+                <a16:creationId xmlns:a16="http://schemas.microsoft.com/office/drawing/2014/main" id="{5B8A8585-B9D9-4FB3-B61B-58CD93D953EB}"/>
               </a:ext>
             </a:extLst>
           </p:cNvPr>
@@ -25445,7 +25462,7 @@
           <p:cNvPr id="32" name="Text 30">
             <a:extLst xmlns:a="http://schemas.openxmlformats.org/drawingml/2006/main">
               <a:ext uri="{FF2B5EF4-FFF2-40B4-BE49-F238E27FC236}">
-                <a16:creationId xmlns:a16="http://schemas.microsoft.com/office/drawing/2014/main" id="{7890A773-22F1-493C-8E7C-B1F6F2A9A396}"/>
+                <a16:creationId xmlns:a16="http://schemas.microsoft.com/office/drawing/2014/main" id="{DD102253-CBFC-444A-9801-BCE322B779E6}"/>
               </a:ext>
             </a:extLst>
           </p:cNvPr>
@@ -25492,7 +25509,7 @@
           <p:cNvPr id="33" name="Text 31">
             <a:extLst xmlns:a="http://schemas.openxmlformats.org/drawingml/2006/main">
               <a:ext uri="{FF2B5EF4-FFF2-40B4-BE49-F238E27FC236}">
-                <a16:creationId xmlns:a16="http://schemas.microsoft.com/office/drawing/2014/main" id="{309A4FF1-2AF3-4480-9B6B-3D2025437D14}"/>
+                <a16:creationId xmlns:a16="http://schemas.microsoft.com/office/drawing/2014/main" id="{8546B718-F756-4DCF-9B76-A26E0CE8F886}"/>
               </a:ext>
             </a:extLst>
           </p:cNvPr>
@@ -25539,7 +25556,7 @@
           <p:cNvPr id="34" name="Text 32">
             <a:extLst xmlns:a="http://schemas.openxmlformats.org/drawingml/2006/main">
               <a:ext uri="{FF2B5EF4-FFF2-40B4-BE49-F238E27FC236}">
-                <a16:creationId xmlns:a16="http://schemas.microsoft.com/office/drawing/2014/main" id="{95D4EE09-07E6-4FB7-A329-31F222E8231C}"/>
+                <a16:creationId xmlns:a16="http://schemas.microsoft.com/office/drawing/2014/main" id="{1D9C6042-4F1F-4AD1-A1A1-3277E152545F}"/>
               </a:ext>
             </a:extLst>
           </p:cNvPr>
@@ -25586,7 +25603,7 @@
           <p:cNvPr id="35" name="Text 33">
             <a:extLst xmlns:a="http://schemas.openxmlformats.org/drawingml/2006/main">
               <a:ext uri="{FF2B5EF4-FFF2-40B4-BE49-F238E27FC236}">
-                <a16:creationId xmlns:a16="http://schemas.microsoft.com/office/drawing/2014/main" id="{2BD77709-F5B4-4EFF-98F9-FE1EFB203E79}"/>
+                <a16:creationId xmlns:a16="http://schemas.microsoft.com/office/drawing/2014/main" id="{C23E1786-C6DF-426A-A3F5-64F8B95B004A}"/>
               </a:ext>
             </a:extLst>
           </p:cNvPr>
@@ -25633,7 +25650,7 @@
           <p:cNvPr id="36" name="Text 34">
             <a:extLst xmlns:a="http://schemas.openxmlformats.org/drawingml/2006/main">
               <a:ext uri="{FF2B5EF4-FFF2-40B4-BE49-F238E27FC236}">
-                <a16:creationId xmlns:a16="http://schemas.microsoft.com/office/drawing/2014/main" id="{28D57732-E984-48BC-913E-39156BF67B14}"/>
+                <a16:creationId xmlns:a16="http://schemas.microsoft.com/office/drawing/2014/main" id="{8629B309-7C25-418F-9524-F1554367391E}"/>
               </a:ext>
             </a:extLst>
           </p:cNvPr>
@@ -25680,7 +25697,7 @@
           <p:cNvPr id="37" name="Text 35">
             <a:extLst xmlns:a="http://schemas.openxmlformats.org/drawingml/2006/main">
               <a:ext uri="{FF2B5EF4-FFF2-40B4-BE49-F238E27FC236}">
-                <a16:creationId xmlns:a16="http://schemas.microsoft.com/office/drawing/2014/main" id="{38F03DAF-BB6E-47DD-82B9-DD527D1916C7}"/>
+                <a16:creationId xmlns:a16="http://schemas.microsoft.com/office/drawing/2014/main" id="{781E0C6E-52FD-4B60-96F5-A0F21B617EE1}"/>
               </a:ext>
             </a:extLst>
           </p:cNvPr>
@@ -25727,7 +25744,7 @@
           <p:cNvPr id="38" name="Text 36">
             <a:extLst xmlns:a="http://schemas.openxmlformats.org/drawingml/2006/main">
               <a:ext uri="{FF2B5EF4-FFF2-40B4-BE49-F238E27FC236}">
-                <a16:creationId xmlns:a16="http://schemas.microsoft.com/office/drawing/2014/main" id="{ADC13613-851E-443B-B46C-82EE5F2B9955}"/>
+                <a16:creationId xmlns:a16="http://schemas.microsoft.com/office/drawing/2014/main" id="{3014FE8E-3233-4B43-B96D-C5E453E72E57}"/>
               </a:ext>
             </a:extLst>
           </p:cNvPr>
@@ -25774,7 +25791,7 @@
           <p:cNvPr id="39" name="Text 37">
             <a:extLst xmlns:a="http://schemas.openxmlformats.org/drawingml/2006/main">
               <a:ext uri="{FF2B5EF4-FFF2-40B4-BE49-F238E27FC236}">
-                <a16:creationId xmlns:a16="http://schemas.microsoft.com/office/drawing/2014/main" id="{4F3DEBBF-4466-412D-928F-E4536005904C}"/>
+                <a16:creationId xmlns:a16="http://schemas.microsoft.com/office/drawing/2014/main" id="{B3871453-B103-403B-B6F4-39FE11D5DC8C}"/>
               </a:ext>
             </a:extLst>
           </p:cNvPr>
@@ -25821,7 +25838,7 @@
           <p:cNvPr id="40" name="Text 38">
             <a:extLst xmlns:a="http://schemas.openxmlformats.org/drawingml/2006/main">
               <a:ext uri="{FF2B5EF4-FFF2-40B4-BE49-F238E27FC236}">
-                <a16:creationId xmlns:a16="http://schemas.microsoft.com/office/drawing/2014/main" id="{B70113D6-4149-4B34-9165-ACD15C5860D9}"/>
+                <a16:creationId xmlns:a16="http://schemas.microsoft.com/office/drawing/2014/main" id="{B1E2A995-2E80-4C85-B3E6-DB43AC98016D}"/>
               </a:ext>
             </a:extLst>
           </p:cNvPr>
@@ -25868,7 +25885,7 @@
           <p:cNvPr id="41" name="Text 39">
             <a:extLst xmlns:a="http://schemas.openxmlformats.org/drawingml/2006/main">
               <a:ext uri="{FF2B5EF4-FFF2-40B4-BE49-F238E27FC236}">
-                <a16:creationId xmlns:a16="http://schemas.microsoft.com/office/drawing/2014/main" id="{538D353B-B426-4554-9631-537AE784895A}"/>
+                <a16:creationId xmlns:a16="http://schemas.microsoft.com/office/drawing/2014/main" id="{4FDEF4CA-C754-4D15-A4D8-878D5D198A80}"/>
               </a:ext>
             </a:extLst>
           </p:cNvPr>
@@ -25915,7 +25932,7 @@
           <p:cNvPr id="42" name="Text 40">
             <a:extLst xmlns:a="http://schemas.openxmlformats.org/drawingml/2006/main">
               <a:ext uri="{FF2B5EF4-FFF2-40B4-BE49-F238E27FC236}">
-                <a16:creationId xmlns:a16="http://schemas.microsoft.com/office/drawing/2014/main" id="{9621A4D6-1564-4BEC-95C8-855C52CD1BEE}"/>
+                <a16:creationId xmlns:a16="http://schemas.microsoft.com/office/drawing/2014/main" id="{7DBB99B1-E056-4386-8BC4-714FD1A2A7A1}"/>
               </a:ext>
             </a:extLst>
           </p:cNvPr>
@@ -25962,7 +25979,7 @@
           <p:cNvPr id="43" name="Text 41">
             <a:extLst xmlns:a="http://schemas.openxmlformats.org/drawingml/2006/main">
               <a:ext uri="{FF2B5EF4-FFF2-40B4-BE49-F238E27FC236}">
-                <a16:creationId xmlns:a16="http://schemas.microsoft.com/office/drawing/2014/main" id="{BAD37A0D-7AF6-4045-8A61-F2F851A05CCB}"/>
+                <a16:creationId xmlns:a16="http://schemas.microsoft.com/office/drawing/2014/main" id="{9DDED136-E49A-424A-8920-D93780369DD1}"/>
               </a:ext>
             </a:extLst>
           </p:cNvPr>
@@ -26009,7 +26026,7 @@
           <p:cNvPr id="44" name="Text 42">
             <a:extLst xmlns:a="http://schemas.openxmlformats.org/drawingml/2006/main">
               <a:ext uri="{FF2B5EF4-FFF2-40B4-BE49-F238E27FC236}">
-                <a16:creationId xmlns:a16="http://schemas.microsoft.com/office/drawing/2014/main" id="{E758293B-053F-4CEA-997D-584AFA0A03F4}"/>
+                <a16:creationId xmlns:a16="http://schemas.microsoft.com/office/drawing/2014/main" id="{89E1F3F3-E285-4A1C-B56B-D93D5DD292E6}"/>
               </a:ext>
             </a:extLst>
           </p:cNvPr>
@@ -26056,7 +26073,7 @@
           <p:cNvPr id="45" name="Text 43">
             <a:extLst xmlns:a="http://schemas.openxmlformats.org/drawingml/2006/main">
               <a:ext uri="{FF2B5EF4-FFF2-40B4-BE49-F238E27FC236}">
-                <a16:creationId xmlns:a16="http://schemas.microsoft.com/office/drawing/2014/main" id="{F99B03B2-BC45-4D5C-A63F-AE7E2640B1BF}"/>
+                <a16:creationId xmlns:a16="http://schemas.microsoft.com/office/drawing/2014/main" id="{0C356FED-B506-4E30-90B0-9F8AA1086A5E}"/>
               </a:ext>
             </a:extLst>
           </p:cNvPr>
@@ -26103,7 +26120,7 @@
           <p:cNvPr id="46" name="Text 44">
             <a:extLst xmlns:a="http://schemas.openxmlformats.org/drawingml/2006/main">
               <a:ext uri="{FF2B5EF4-FFF2-40B4-BE49-F238E27FC236}">
-                <a16:creationId xmlns:a16="http://schemas.microsoft.com/office/drawing/2014/main" id="{43C6A9CE-B7B4-4279-BBCE-4936975358E6}"/>
+                <a16:creationId xmlns:a16="http://schemas.microsoft.com/office/drawing/2014/main" id="{AAF81715-9867-48C6-A14E-4B0780D6F590}"/>
               </a:ext>
             </a:extLst>
           </p:cNvPr>
@@ -26150,7 +26167,7 @@
           <p:cNvPr id="47" name="Text 45">
             <a:extLst xmlns:a="http://schemas.openxmlformats.org/drawingml/2006/main">
               <a:ext uri="{FF2B5EF4-FFF2-40B4-BE49-F238E27FC236}">
-                <a16:creationId xmlns:a16="http://schemas.microsoft.com/office/drawing/2014/main" id="{2D002F5D-E0B4-42C5-9C30-168500BCF699}"/>
+                <a16:creationId xmlns:a16="http://schemas.microsoft.com/office/drawing/2014/main" id="{1B1F85E5-3BE5-4B66-9449-C5217E7CEB28}"/>
               </a:ext>
             </a:extLst>
           </p:cNvPr>
@@ -26197,7 +26214,7 @@
           <p:cNvPr id="48" name="Text 46">
             <a:extLst xmlns:a="http://schemas.openxmlformats.org/drawingml/2006/main">
               <a:ext uri="{FF2B5EF4-FFF2-40B4-BE49-F238E27FC236}">
-                <a16:creationId xmlns:a16="http://schemas.microsoft.com/office/drawing/2014/main" id="{B2E769D7-3715-4907-B4FD-56CF2CA7907F}"/>
+                <a16:creationId xmlns:a16="http://schemas.microsoft.com/office/drawing/2014/main" id="{0CBC8996-0E0E-45A7-B4B8-2A5470F86F25}"/>
               </a:ext>
             </a:extLst>
           </p:cNvPr>
@@ -26242,7 +26259,7 @@
     </p:spTree>
     <p:extLst>
       <p:ext uri="{BB962C8B-B14F-4D97-AF65-F5344CB8AC3E}">
-        <p14:creationId xmlns:p14="http://schemas.microsoft.com/office/powerpoint/2010/main" val="1360784131"/>
+        <p14:creationId xmlns:p14="http://schemas.microsoft.com/office/powerpoint/2010/main" val="1359498912"/>
       </p:ext>
     </p:extLst>
   </p:cSld>
@@ -26273,7 +26290,7 @@
           <p:cNvPr id="2" name="Text 0">
             <a:extLst xmlns:a="http://schemas.openxmlformats.org/drawingml/2006/main">
               <a:ext uri="{FF2B5EF4-FFF2-40B4-BE49-F238E27FC236}">
-                <a16:creationId xmlns:a16="http://schemas.microsoft.com/office/drawing/2014/main" id="{242EA1A3-81FE-4DA4-8E99-A2A5645AB436}"/>
+                <a16:creationId xmlns:a16="http://schemas.microsoft.com/office/drawing/2014/main" id="{6326C1D0-566A-4BE6-8FFE-90080C029FA9}"/>
               </a:ext>
             </a:extLst>
           </p:cNvPr>
@@ -26320,7 +26337,7 @@
           <p:cNvPr id="3" name="Text 1">
             <a:extLst xmlns:a="http://schemas.openxmlformats.org/drawingml/2006/main">
               <a:ext uri="{FF2B5EF4-FFF2-40B4-BE49-F238E27FC236}">
-                <a16:creationId xmlns:a16="http://schemas.microsoft.com/office/drawing/2014/main" id="{A1E115F4-AC57-4F4E-9F9B-EAF6E140F3F7}"/>
+                <a16:creationId xmlns:a16="http://schemas.microsoft.com/office/drawing/2014/main" id="{8D494106-659F-408C-AAAB-0E4F89CCB4F6}"/>
               </a:ext>
             </a:extLst>
           </p:cNvPr>
@@ -26367,7 +26384,7 @@
           <p:cNvPr id="4" name="Shape 2">
             <a:extLst xmlns:a="http://schemas.openxmlformats.org/drawingml/2006/main">
               <a:ext uri="{FF2B5EF4-FFF2-40B4-BE49-F238E27FC236}">
-                <a16:creationId xmlns:a16="http://schemas.microsoft.com/office/drawing/2014/main" id="{F28F70A0-4549-47B8-B82E-13713ED18513}"/>
+                <a16:creationId xmlns:a16="http://schemas.microsoft.com/office/drawing/2014/main" id="{75A18C5B-8155-44B1-B4A2-19687B8F4826}"/>
               </a:ext>
             </a:extLst>
           </p:cNvPr>
@@ -26402,7 +26419,7 @@
           <p:cNvPr id="5" name="Text 3">
             <a:extLst xmlns:a="http://schemas.openxmlformats.org/drawingml/2006/main">
               <a:ext uri="{FF2B5EF4-FFF2-40B4-BE49-F238E27FC236}">
-                <a16:creationId xmlns:a16="http://schemas.microsoft.com/office/drawing/2014/main" id="{B82AD04D-6025-42ED-B2C6-3C34029EE863}"/>
+                <a16:creationId xmlns:a16="http://schemas.microsoft.com/office/drawing/2014/main" id="{5F651699-DB77-4CCC-95A4-B19BCCCD0C6A}"/>
               </a:ext>
             </a:extLst>
           </p:cNvPr>
@@ -26449,7 +26466,7 @@
           <p:cNvPr id="6" name="Shape 4">
             <a:extLst xmlns:a="http://schemas.openxmlformats.org/drawingml/2006/main">
               <a:ext uri="{FF2B5EF4-FFF2-40B4-BE49-F238E27FC236}">
-                <a16:creationId xmlns:a16="http://schemas.microsoft.com/office/drawing/2014/main" id="{4718F41B-1204-47FB-B44E-A35B082F05D2}"/>
+                <a16:creationId xmlns:a16="http://schemas.microsoft.com/office/drawing/2014/main" id="{8523CE8D-FEF7-4EBD-BADD-DA54C678022A}"/>
               </a:ext>
             </a:extLst>
           </p:cNvPr>
@@ -26480,7 +26497,7 @@
           <p:cNvPr id="7" name="Shape 5">
             <a:extLst xmlns:a="http://schemas.openxmlformats.org/drawingml/2006/main">
               <a:ext uri="{FF2B5EF4-FFF2-40B4-BE49-F238E27FC236}">
-                <a16:creationId xmlns:a16="http://schemas.microsoft.com/office/drawing/2014/main" id="{83872348-ABFC-44D7-ACDB-2E30C69E98A2}"/>
+                <a16:creationId xmlns:a16="http://schemas.microsoft.com/office/drawing/2014/main" id="{BC16A0D6-9B17-431C-859B-AB93DDED3EA4}"/>
               </a:ext>
             </a:extLst>
           </p:cNvPr>
@@ -26515,7 +26532,7 @@
           <p:cNvPr id="8" name="Text 6">
             <a:extLst xmlns:a="http://schemas.openxmlformats.org/drawingml/2006/main">
               <a:ext uri="{FF2B5EF4-FFF2-40B4-BE49-F238E27FC236}">
-                <a16:creationId xmlns:a16="http://schemas.microsoft.com/office/drawing/2014/main" id="{186F39C3-3F2A-42AF-9163-E788CA7FAA97}"/>
+                <a16:creationId xmlns:a16="http://schemas.microsoft.com/office/drawing/2014/main" id="{D304D8AD-6788-4455-BF88-4479A726150E}"/>
               </a:ext>
             </a:extLst>
           </p:cNvPr>
@@ -26562,7 +26579,7 @@
           <p:cNvPr id="9" name="Text 7">
             <a:extLst xmlns:a="http://schemas.openxmlformats.org/drawingml/2006/main">
               <a:ext uri="{FF2B5EF4-FFF2-40B4-BE49-F238E27FC236}">
-                <a16:creationId xmlns:a16="http://schemas.microsoft.com/office/drawing/2014/main" id="{11B0CC4D-DDCE-49F0-8260-F9DB21CE0ACD}"/>
+                <a16:creationId xmlns:a16="http://schemas.microsoft.com/office/drawing/2014/main" id="{31D0CD92-8F43-47CF-89A4-89659D488829}"/>
               </a:ext>
             </a:extLst>
           </p:cNvPr>
@@ -26625,7 +26642,7 @@
           <p:cNvPr id="10" name="Shape 8">
             <a:extLst xmlns:a="http://schemas.openxmlformats.org/drawingml/2006/main">
               <a:ext uri="{FF2B5EF4-FFF2-40B4-BE49-F238E27FC236}">
-                <a16:creationId xmlns:a16="http://schemas.microsoft.com/office/drawing/2014/main" id="{8C9627F7-3553-4E8B-97DA-4D7C1D4C3E04}"/>
+                <a16:creationId xmlns:a16="http://schemas.microsoft.com/office/drawing/2014/main" id="{97636EF2-AC41-417A-842C-D75D760E027F}"/>
               </a:ext>
             </a:extLst>
           </p:cNvPr>
@@ -26657,7 +26674,7 @@
           <p:cNvPr id="11" name="Shape 9">
             <a:extLst xmlns:a="http://schemas.openxmlformats.org/drawingml/2006/main">
               <a:ext uri="{FF2B5EF4-FFF2-40B4-BE49-F238E27FC236}">
-                <a16:creationId xmlns:a16="http://schemas.microsoft.com/office/drawing/2014/main" id="{6F541698-99FD-4D21-8623-4E713913FDE3}"/>
+                <a16:creationId xmlns:a16="http://schemas.microsoft.com/office/drawing/2014/main" id="{02306E7E-7176-438E-B3FB-D2E308195F04}"/>
               </a:ext>
             </a:extLst>
           </p:cNvPr>
@@ -26692,7 +26709,7 @@
           <p:cNvPr id="12" name="Text 10">
             <a:extLst xmlns:a="http://schemas.openxmlformats.org/drawingml/2006/main">
               <a:ext uri="{FF2B5EF4-FFF2-40B4-BE49-F238E27FC236}">
-                <a16:creationId xmlns:a16="http://schemas.microsoft.com/office/drawing/2014/main" id="{9B7F54D5-AF66-4BF0-A60C-5E4D61DAB8CF}"/>
+                <a16:creationId xmlns:a16="http://schemas.microsoft.com/office/drawing/2014/main" id="{25725B45-413D-49CC-B149-F1AADD5E9BD2}"/>
               </a:ext>
             </a:extLst>
           </p:cNvPr>
@@ -26739,7 +26756,7 @@
           <p:cNvPr id="13" name="Text 11">
             <a:extLst xmlns:a="http://schemas.openxmlformats.org/drawingml/2006/main">
               <a:ext uri="{FF2B5EF4-FFF2-40B4-BE49-F238E27FC236}">
-                <a16:creationId xmlns:a16="http://schemas.microsoft.com/office/drawing/2014/main" id="{98E094AF-C96B-4450-A219-E6791F81EB49}"/>
+                <a16:creationId xmlns:a16="http://schemas.microsoft.com/office/drawing/2014/main" id="{D6DBAFAE-FA65-4C28-80F4-C9B09390747A}"/>
               </a:ext>
             </a:extLst>
           </p:cNvPr>
@@ -26802,7 +26819,7 @@
           <p:cNvPr id="14" name="Shape 12">
             <a:extLst xmlns:a="http://schemas.openxmlformats.org/drawingml/2006/main">
               <a:ext uri="{FF2B5EF4-FFF2-40B4-BE49-F238E27FC236}">
-                <a16:creationId xmlns:a16="http://schemas.microsoft.com/office/drawing/2014/main" id="{3806B960-4FA0-4935-BADE-F6AE548626A6}"/>
+                <a16:creationId xmlns:a16="http://schemas.microsoft.com/office/drawing/2014/main" id="{7FE781B0-19C7-439C-BC3E-98112F553B13}"/>
               </a:ext>
             </a:extLst>
           </p:cNvPr>
@@ -26834,7 +26851,7 @@
           <p:cNvPr id="15" name="Shape 13">
             <a:extLst xmlns:a="http://schemas.openxmlformats.org/drawingml/2006/main">
               <a:ext uri="{FF2B5EF4-FFF2-40B4-BE49-F238E27FC236}">
-                <a16:creationId xmlns:a16="http://schemas.microsoft.com/office/drawing/2014/main" id="{33B725C9-60BF-4928-BDA3-D5B4587D9FE0}"/>
+                <a16:creationId xmlns:a16="http://schemas.microsoft.com/office/drawing/2014/main" id="{D810CDD8-5BF7-4E9A-A3FA-FFEBD4C0FAE5}"/>
               </a:ext>
             </a:extLst>
           </p:cNvPr>
@@ -26869,7 +26886,7 @@
           <p:cNvPr id="16" name="Text 14">
             <a:extLst xmlns:a="http://schemas.openxmlformats.org/drawingml/2006/main">
               <a:ext uri="{FF2B5EF4-FFF2-40B4-BE49-F238E27FC236}">
-                <a16:creationId xmlns:a16="http://schemas.microsoft.com/office/drawing/2014/main" id="{EFEE2A05-213D-464C-B128-220F751361FE}"/>
+                <a16:creationId xmlns:a16="http://schemas.microsoft.com/office/drawing/2014/main" id="{0DAAB25D-E6DE-4F5B-AB47-6E9BDD5BFBAF}"/>
               </a:ext>
             </a:extLst>
           </p:cNvPr>
@@ -26916,7 +26933,7 @@
           <p:cNvPr id="17" name="Text 15">
             <a:extLst xmlns:a="http://schemas.openxmlformats.org/drawingml/2006/main">
               <a:ext uri="{FF2B5EF4-FFF2-40B4-BE49-F238E27FC236}">
-                <a16:creationId xmlns:a16="http://schemas.microsoft.com/office/drawing/2014/main" id="{A19649A2-590C-49CC-8807-1BFE1C5E8A4E}"/>
+                <a16:creationId xmlns:a16="http://schemas.microsoft.com/office/drawing/2014/main" id="{58E404D2-FED1-417F-8788-6EB51DBB2E4C}"/>
               </a:ext>
             </a:extLst>
           </p:cNvPr>
@@ -26979,7 +26996,7 @@
           <p:cNvPr id="18" name="Shape 16">
             <a:extLst xmlns:a="http://schemas.openxmlformats.org/drawingml/2006/main">
               <a:ext uri="{FF2B5EF4-FFF2-40B4-BE49-F238E27FC236}">
-                <a16:creationId xmlns:a16="http://schemas.microsoft.com/office/drawing/2014/main" id="{155F86C5-B920-4F84-A5A2-1D551562F729}"/>
+                <a16:creationId xmlns:a16="http://schemas.microsoft.com/office/drawing/2014/main" id="{D0C7C2D4-B5CC-4A24-8FC5-DD8EB1E8E609}"/>
               </a:ext>
             </a:extLst>
           </p:cNvPr>
@@ -27011,7 +27028,7 @@
           <p:cNvPr id="19" name="Shape 17">
             <a:extLst xmlns:a="http://schemas.openxmlformats.org/drawingml/2006/main">
               <a:ext uri="{FF2B5EF4-FFF2-40B4-BE49-F238E27FC236}">
-                <a16:creationId xmlns:a16="http://schemas.microsoft.com/office/drawing/2014/main" id="{FEF2CDD8-8112-499B-81A1-134AE1E89F8E}"/>
+                <a16:creationId xmlns:a16="http://schemas.microsoft.com/office/drawing/2014/main" id="{DA3B2249-BDA8-46F0-9EB9-144DB2B02F54}"/>
               </a:ext>
             </a:extLst>
           </p:cNvPr>
@@ -27046,7 +27063,7 @@
           <p:cNvPr id="20" name="Text 18">
             <a:extLst xmlns:a="http://schemas.openxmlformats.org/drawingml/2006/main">
               <a:ext uri="{FF2B5EF4-FFF2-40B4-BE49-F238E27FC236}">
-                <a16:creationId xmlns:a16="http://schemas.microsoft.com/office/drawing/2014/main" id="{D67D7865-7656-4D09-96D8-695B2D475652}"/>
+                <a16:creationId xmlns:a16="http://schemas.microsoft.com/office/drawing/2014/main" id="{87BE7A58-D796-420D-B2C7-4E8D419DB76A}"/>
               </a:ext>
             </a:extLst>
           </p:cNvPr>
@@ -27093,7 +27110,7 @@
           <p:cNvPr id="21" name="Text 19">
             <a:extLst xmlns:a="http://schemas.openxmlformats.org/drawingml/2006/main">
               <a:ext uri="{FF2B5EF4-FFF2-40B4-BE49-F238E27FC236}">
-                <a16:creationId xmlns:a16="http://schemas.microsoft.com/office/drawing/2014/main" id="{9341F39C-2874-40DA-AA64-F1705D0525D3}"/>
+                <a16:creationId xmlns:a16="http://schemas.microsoft.com/office/drawing/2014/main" id="{771763FC-E79D-4124-981A-0884A588BC36}"/>
               </a:ext>
             </a:extLst>
           </p:cNvPr>
@@ -27156,7 +27173,7 @@
           <p:cNvPr id="22" name="Shape 20">
             <a:extLst xmlns:a="http://schemas.openxmlformats.org/drawingml/2006/main">
               <a:ext uri="{FF2B5EF4-FFF2-40B4-BE49-F238E27FC236}">
-                <a16:creationId xmlns:a16="http://schemas.microsoft.com/office/drawing/2014/main" id="{A1F9157F-1721-4856-A64B-72F2C2875E9F}"/>
+                <a16:creationId xmlns:a16="http://schemas.microsoft.com/office/drawing/2014/main" id="{924D44BE-85D5-4E47-8DB9-C471EE469A26}"/>
               </a:ext>
             </a:extLst>
           </p:cNvPr>
@@ -27188,7 +27205,7 @@
           <p:cNvPr id="23" name="Shape 21">
             <a:extLst xmlns:a="http://schemas.openxmlformats.org/drawingml/2006/main">
               <a:ext uri="{FF2B5EF4-FFF2-40B4-BE49-F238E27FC236}">
-                <a16:creationId xmlns:a16="http://schemas.microsoft.com/office/drawing/2014/main" id="{52434F65-98BD-4E20-8485-8FE3AE102FD2}"/>
+                <a16:creationId xmlns:a16="http://schemas.microsoft.com/office/drawing/2014/main" id="{A712D337-C607-49BC-B21A-FCA70AD555C0}"/>
               </a:ext>
             </a:extLst>
           </p:cNvPr>
@@ -27223,7 +27240,7 @@
           <p:cNvPr id="24" name="Text 22">
             <a:extLst xmlns:a="http://schemas.openxmlformats.org/drawingml/2006/main">
               <a:ext uri="{FF2B5EF4-FFF2-40B4-BE49-F238E27FC236}">
-                <a16:creationId xmlns:a16="http://schemas.microsoft.com/office/drawing/2014/main" id="{82FFA292-F3ED-447B-B107-F0C4D32FEE63}"/>
+                <a16:creationId xmlns:a16="http://schemas.microsoft.com/office/drawing/2014/main" id="{61C7B1D8-C03F-4E9D-8DED-57AFAE2EE3D3}"/>
               </a:ext>
             </a:extLst>
           </p:cNvPr>
@@ -27270,7 +27287,7 @@
           <p:cNvPr id="25" name="Text 23">
             <a:extLst xmlns:a="http://schemas.openxmlformats.org/drawingml/2006/main">
               <a:ext uri="{FF2B5EF4-FFF2-40B4-BE49-F238E27FC236}">
-                <a16:creationId xmlns:a16="http://schemas.microsoft.com/office/drawing/2014/main" id="{C5350F36-6C89-42CE-8DA9-B4FCA4BB02D8}"/>
+                <a16:creationId xmlns:a16="http://schemas.microsoft.com/office/drawing/2014/main" id="{5D3757FA-C29E-4E75-955B-64505BA01A5F}"/>
               </a:ext>
             </a:extLst>
           </p:cNvPr>
@@ -27333,7 +27350,7 @@
           <p:cNvPr id="26" name="Shape 24">
             <a:extLst xmlns:a="http://schemas.openxmlformats.org/drawingml/2006/main">
               <a:ext uri="{FF2B5EF4-FFF2-40B4-BE49-F238E27FC236}">
-                <a16:creationId xmlns:a16="http://schemas.microsoft.com/office/drawing/2014/main" id="{D6249303-7616-43E0-AE68-F1D531E2F853}"/>
+                <a16:creationId xmlns:a16="http://schemas.microsoft.com/office/drawing/2014/main" id="{273A9C0D-479A-497E-8C35-A846D1FB5C11}"/>
               </a:ext>
             </a:extLst>
           </p:cNvPr>
@@ -27368,7 +27385,7 @@
           <p:cNvPr id="27" name="Text 25">
             <a:extLst xmlns:a="http://schemas.openxmlformats.org/drawingml/2006/main">
               <a:ext uri="{FF2B5EF4-FFF2-40B4-BE49-F238E27FC236}">
-                <a16:creationId xmlns:a16="http://schemas.microsoft.com/office/drawing/2014/main" id="{D8E5E23E-1448-47A0-8798-FFA8FFD4BAA7}"/>
+                <a16:creationId xmlns:a16="http://schemas.microsoft.com/office/drawing/2014/main" id="{8C46A94F-B444-4D00-BADA-9A4A008AF3EC}"/>
               </a:ext>
             </a:extLst>
           </p:cNvPr>
@@ -27415,7 +27432,7 @@
           <p:cNvPr id="28" name="Text 26">
             <a:extLst xmlns:a="http://schemas.openxmlformats.org/drawingml/2006/main">
               <a:ext uri="{FF2B5EF4-FFF2-40B4-BE49-F238E27FC236}">
-                <a16:creationId xmlns:a16="http://schemas.microsoft.com/office/drawing/2014/main" id="{BE67AC36-06CB-4394-8C4F-3E5E27143558}"/>
+                <a16:creationId xmlns:a16="http://schemas.microsoft.com/office/drawing/2014/main" id="{7471A799-09F6-4791-8207-D2B5C99437BD}"/>
               </a:ext>
             </a:extLst>
           </p:cNvPr>
@@ -27462,7 +27479,7 @@
           <p:cNvPr id="29" name="Text 27">
             <a:extLst xmlns:a="http://schemas.openxmlformats.org/drawingml/2006/main">
               <a:ext uri="{FF2B5EF4-FFF2-40B4-BE49-F238E27FC236}">
-                <a16:creationId xmlns:a16="http://schemas.microsoft.com/office/drawing/2014/main" id="{FFAF4D82-A313-49F2-ACCE-0920E71A16E5}"/>
+                <a16:creationId xmlns:a16="http://schemas.microsoft.com/office/drawing/2014/main" id="{ECE71265-AA15-4E37-A200-08C2F6746C4A}"/>
               </a:ext>
             </a:extLst>
           </p:cNvPr>
@@ -27509,7 +27526,7 @@
           <p:cNvPr id="30" name="Shape 28">
             <a:extLst xmlns:a="http://schemas.openxmlformats.org/drawingml/2006/main">
               <a:ext uri="{FF2B5EF4-FFF2-40B4-BE49-F238E27FC236}">
-                <a16:creationId xmlns:a16="http://schemas.microsoft.com/office/drawing/2014/main" id="{ED3FFD65-2BDC-4C0F-BEBD-32BF67A99F47}"/>
+                <a16:creationId xmlns:a16="http://schemas.microsoft.com/office/drawing/2014/main" id="{F6323E90-94CA-485B-AB85-D3C8D38B6B44}"/>
               </a:ext>
             </a:extLst>
           </p:cNvPr>
@@ -27544,7 +27561,7 @@
           <p:cNvPr id="31" name="Text 29">
             <a:extLst xmlns:a="http://schemas.openxmlformats.org/drawingml/2006/main">
               <a:ext uri="{FF2B5EF4-FFF2-40B4-BE49-F238E27FC236}">
-                <a16:creationId xmlns:a16="http://schemas.microsoft.com/office/drawing/2014/main" id="{9883F265-7EB6-45D9-9CDB-191D0C5ED205}"/>
+                <a16:creationId xmlns:a16="http://schemas.microsoft.com/office/drawing/2014/main" id="{EB0C3F57-757F-4010-A211-9634583CB8FE}"/>
               </a:ext>
             </a:extLst>
           </p:cNvPr>
@@ -27591,7 +27608,7 @@
           <p:cNvPr id="32" name="Text 30">
             <a:extLst xmlns:a="http://schemas.openxmlformats.org/drawingml/2006/main">
               <a:ext uri="{FF2B5EF4-FFF2-40B4-BE49-F238E27FC236}">
-                <a16:creationId xmlns:a16="http://schemas.microsoft.com/office/drawing/2014/main" id="{351C12BF-1071-4723-94D5-C409B08B474F}"/>
+                <a16:creationId xmlns:a16="http://schemas.microsoft.com/office/drawing/2014/main" id="{2126C0E6-B042-490C-B494-17B9DA1CB4E2}"/>
               </a:ext>
             </a:extLst>
           </p:cNvPr>
@@ -27654,7 +27671,7 @@
           <p:cNvPr id="33" name="Text 31">
             <a:extLst xmlns:a="http://schemas.openxmlformats.org/drawingml/2006/main">
               <a:ext uri="{FF2B5EF4-FFF2-40B4-BE49-F238E27FC236}">
-                <a16:creationId xmlns:a16="http://schemas.microsoft.com/office/drawing/2014/main" id="{64A02ECF-8A68-4741-AA2D-831691FA2F12}"/>
+                <a16:creationId xmlns:a16="http://schemas.microsoft.com/office/drawing/2014/main" id="{ED8F734D-150E-4218-A95C-274BBDFA85D4}"/>
               </a:ext>
             </a:extLst>
           </p:cNvPr>
@@ -27701,7 +27718,7 @@
           <p:cNvPr id="34" name="Text 32">
             <a:extLst xmlns:a="http://schemas.openxmlformats.org/drawingml/2006/main">
               <a:ext uri="{FF2B5EF4-FFF2-40B4-BE49-F238E27FC236}">
-                <a16:creationId xmlns:a16="http://schemas.microsoft.com/office/drawing/2014/main" id="{E10B8644-9AB1-4716-AF6D-6112418AC53E}"/>
+                <a16:creationId xmlns:a16="http://schemas.microsoft.com/office/drawing/2014/main" id="{A1955768-150B-4189-A95B-D1C8839BF966}"/>
               </a:ext>
             </a:extLst>
           </p:cNvPr>
@@ -27746,7 +27763,7 @@
     </p:spTree>
     <p:extLst>
       <p:ext uri="{BB962C8B-B14F-4D97-AF65-F5344CB8AC3E}">
-        <p14:creationId xmlns:p14="http://schemas.microsoft.com/office/powerpoint/2010/main" val="1786409210"/>
+        <p14:creationId xmlns:p14="http://schemas.microsoft.com/office/powerpoint/2010/main" val="1727577644"/>
       </p:ext>
     </p:extLst>
   </p:cSld>
@@ -27777,7 +27794,7 @@
           <p:cNvPr id="2" name="Text 0">
             <a:extLst xmlns:a="http://schemas.openxmlformats.org/drawingml/2006/main">
               <a:ext uri="{FF2B5EF4-FFF2-40B4-BE49-F238E27FC236}">
-                <a16:creationId xmlns:a16="http://schemas.microsoft.com/office/drawing/2014/main" id="{2088BB25-0D71-4457-896D-E2E8F92398CA}"/>
+                <a16:creationId xmlns:a16="http://schemas.microsoft.com/office/drawing/2014/main" id="{2307CDB8-218A-4293-8721-8C094FF1D3ED}"/>
               </a:ext>
             </a:extLst>
           </p:cNvPr>
@@ -27824,7 +27841,7 @@
           <p:cNvPr id="3" name="Text 1">
             <a:extLst xmlns:a="http://schemas.openxmlformats.org/drawingml/2006/main">
               <a:ext uri="{FF2B5EF4-FFF2-40B4-BE49-F238E27FC236}">
-                <a16:creationId xmlns:a16="http://schemas.microsoft.com/office/drawing/2014/main" id="{DC7C9AEB-817A-478D-BF13-460176C2CD58}"/>
+                <a16:creationId xmlns:a16="http://schemas.microsoft.com/office/drawing/2014/main" id="{A6DBE9F7-85E2-4E99-A76A-41053B774D23}"/>
               </a:ext>
             </a:extLst>
           </p:cNvPr>
@@ -27871,7 +27888,7 @@
           <p:cNvPr id="4" name="Shape 2">
             <a:extLst xmlns:a="http://schemas.openxmlformats.org/drawingml/2006/main">
               <a:ext uri="{FF2B5EF4-FFF2-40B4-BE49-F238E27FC236}">
-                <a16:creationId xmlns:a16="http://schemas.microsoft.com/office/drawing/2014/main" id="{1FAD4F85-F65F-44FD-B224-D78093680E19}"/>
+                <a16:creationId xmlns:a16="http://schemas.microsoft.com/office/drawing/2014/main" id="{68B537B5-D493-4876-A5E5-CF8B72C9C3CB}"/>
               </a:ext>
             </a:extLst>
           </p:cNvPr>
@@ -27906,7 +27923,7 @@
           <p:cNvPr id="5" name="Text 3">
             <a:extLst xmlns:a="http://schemas.openxmlformats.org/drawingml/2006/main">
               <a:ext uri="{FF2B5EF4-FFF2-40B4-BE49-F238E27FC236}">
-                <a16:creationId xmlns:a16="http://schemas.microsoft.com/office/drawing/2014/main" id="{E4CF1232-7900-452D-B472-EA0312824E21}"/>
+                <a16:creationId xmlns:a16="http://schemas.microsoft.com/office/drawing/2014/main" id="{24DAE4D8-DD0F-40CF-89CB-8B212D61FB53}"/>
               </a:ext>
             </a:extLst>
           </p:cNvPr>
@@ -27953,7 +27970,7 @@
           <p:cNvPr id="6" name="Shape 4">
             <a:extLst xmlns:a="http://schemas.openxmlformats.org/drawingml/2006/main">
               <a:ext uri="{FF2B5EF4-FFF2-40B4-BE49-F238E27FC236}">
-                <a16:creationId xmlns:a16="http://schemas.microsoft.com/office/drawing/2014/main" id="{A35212E7-BC3D-4964-881F-373A4278FC49}"/>
+                <a16:creationId xmlns:a16="http://schemas.microsoft.com/office/drawing/2014/main" id="{885A062E-C9DF-4EBE-A680-EFF821E27906}"/>
               </a:ext>
             </a:extLst>
           </p:cNvPr>
@@ -27984,7 +28001,7 @@
           <p:cNvPr id="7" name="Text 5">
             <a:extLst xmlns:a="http://schemas.openxmlformats.org/drawingml/2006/main">
               <a:ext uri="{FF2B5EF4-FFF2-40B4-BE49-F238E27FC236}">
-                <a16:creationId xmlns:a16="http://schemas.microsoft.com/office/drawing/2014/main" id="{B6F65D79-2650-4753-8319-0AB169D4944A}"/>
+                <a16:creationId xmlns:a16="http://schemas.microsoft.com/office/drawing/2014/main" id="{42DF70A7-B127-44F1-9141-EAC0E2FD3A8C}"/>
               </a:ext>
             </a:extLst>
           </p:cNvPr>
@@ -28031,7 +28048,7 @@
           <p:cNvPr id="8" name="Shape 6">
             <a:extLst xmlns:a="http://schemas.openxmlformats.org/drawingml/2006/main">
               <a:ext uri="{FF2B5EF4-FFF2-40B4-BE49-F238E27FC236}">
-                <a16:creationId xmlns:a16="http://schemas.microsoft.com/office/drawing/2014/main" id="{962A0703-231E-43D9-B71C-9D0ECA9657A5}"/>
+                <a16:creationId xmlns:a16="http://schemas.microsoft.com/office/drawing/2014/main" id="{3B7810ED-86C4-4985-B06E-99B307CA3CE2}"/>
               </a:ext>
             </a:extLst>
           </p:cNvPr>
@@ -28066,7 +28083,7 @@
           <p:cNvPr id="9" name="Text 7">
             <a:extLst xmlns:a="http://schemas.openxmlformats.org/drawingml/2006/main">
               <a:ext uri="{FF2B5EF4-FFF2-40B4-BE49-F238E27FC236}">
-                <a16:creationId xmlns:a16="http://schemas.microsoft.com/office/drawing/2014/main" id="{E960D665-9080-4940-B654-93584E118610}"/>
+                <a16:creationId xmlns:a16="http://schemas.microsoft.com/office/drawing/2014/main" id="{718E3965-C42D-43F2-B3B4-20463877E869}"/>
               </a:ext>
             </a:extLst>
           </p:cNvPr>
@@ -28113,7 +28130,7 @@
           <p:cNvPr id="10" name="Shape 8">
             <a:extLst xmlns:a="http://schemas.openxmlformats.org/drawingml/2006/main">
               <a:ext uri="{FF2B5EF4-FFF2-40B4-BE49-F238E27FC236}">
-                <a16:creationId xmlns:a16="http://schemas.microsoft.com/office/drawing/2014/main" id="{E2CD4915-4E40-4DF5-AE86-EEDB60B1789C}"/>
+                <a16:creationId xmlns:a16="http://schemas.microsoft.com/office/drawing/2014/main" id="{D1F5A723-CA8B-44A3-99A0-0C3D9DB6396E}"/>
               </a:ext>
             </a:extLst>
           </p:cNvPr>
@@ -28148,7 +28165,7 @@
           <p:cNvPr id="11" name="Text 9">
             <a:extLst xmlns:a="http://schemas.openxmlformats.org/drawingml/2006/main">
               <a:ext uri="{FF2B5EF4-FFF2-40B4-BE49-F238E27FC236}">
-                <a16:creationId xmlns:a16="http://schemas.microsoft.com/office/drawing/2014/main" id="{E7AE2753-7D3E-4107-A368-56DFA72DA502}"/>
+                <a16:creationId xmlns:a16="http://schemas.microsoft.com/office/drawing/2014/main" id="{D259CBB7-EA48-4792-BD0C-DA4B76A8E7DC}"/>
               </a:ext>
             </a:extLst>
           </p:cNvPr>
@@ -28195,7 +28212,7 @@
           <p:cNvPr id="12" name="Shape 10">
             <a:extLst xmlns:a="http://schemas.openxmlformats.org/drawingml/2006/main">
               <a:ext uri="{FF2B5EF4-FFF2-40B4-BE49-F238E27FC236}">
-                <a16:creationId xmlns:a16="http://schemas.microsoft.com/office/drawing/2014/main" id="{1CF5DE4A-2FAE-402C-93FA-1E002830ABE3}"/>
+                <a16:creationId xmlns:a16="http://schemas.microsoft.com/office/drawing/2014/main" id="{DCCA5D29-A9E2-4437-807A-A2C62F017204}"/>
               </a:ext>
             </a:extLst>
           </p:cNvPr>
@@ -28228,7 +28245,7 @@
           <p:cNvPr id="13" name="Text 11">
             <a:extLst xmlns:a="http://schemas.openxmlformats.org/drawingml/2006/main">
               <a:ext uri="{FF2B5EF4-FFF2-40B4-BE49-F238E27FC236}">
-                <a16:creationId xmlns:a16="http://schemas.microsoft.com/office/drawing/2014/main" id="{3584F1E0-A86F-4AC3-9EDB-8016ABD8FB17}"/>
+                <a16:creationId xmlns:a16="http://schemas.microsoft.com/office/drawing/2014/main" id="{0845589D-8179-477F-9F81-9F9B9F2F7DBE}"/>
               </a:ext>
             </a:extLst>
           </p:cNvPr>
@@ -28275,7 +28292,7 @@
           <p:cNvPr id="14" name="Shape 12">
             <a:extLst xmlns:a="http://schemas.openxmlformats.org/drawingml/2006/main">
               <a:ext uri="{FF2B5EF4-FFF2-40B4-BE49-F238E27FC236}">
-                <a16:creationId xmlns:a16="http://schemas.microsoft.com/office/drawing/2014/main" id="{780A03AC-D49D-439E-B78B-D0C1F2F0F254}"/>
+                <a16:creationId xmlns:a16="http://schemas.microsoft.com/office/drawing/2014/main" id="{84CF5106-171A-4398-8C7A-628C0083ECE2}"/>
               </a:ext>
             </a:extLst>
           </p:cNvPr>
@@ -28308,7 +28325,7 @@
           <p:cNvPr id="15" name="Text 13">
             <a:extLst xmlns:a="http://schemas.openxmlformats.org/drawingml/2006/main">
               <a:ext uri="{FF2B5EF4-FFF2-40B4-BE49-F238E27FC236}">
-                <a16:creationId xmlns:a16="http://schemas.microsoft.com/office/drawing/2014/main" id="{3AEA1E2A-F2E8-4C1C-870E-AFD9C3ADF260}"/>
+                <a16:creationId xmlns:a16="http://schemas.microsoft.com/office/drawing/2014/main" id="{55D5406B-B5CC-4D29-9CD4-4CC5E06D3B02}"/>
               </a:ext>
             </a:extLst>
           </p:cNvPr>
@@ -28355,7 +28372,7 @@
           <p:cNvPr id="16" name="Shape 14">
             <a:extLst xmlns:a="http://schemas.openxmlformats.org/drawingml/2006/main">
               <a:ext uri="{FF2B5EF4-FFF2-40B4-BE49-F238E27FC236}">
-                <a16:creationId xmlns:a16="http://schemas.microsoft.com/office/drawing/2014/main" id="{4269C6BF-333D-4D20-A4BB-B2EA2EC2C3EB}"/>
+                <a16:creationId xmlns:a16="http://schemas.microsoft.com/office/drawing/2014/main" id="{8DA12351-36FB-43E5-B9E3-92B8BDC3408E}"/>
               </a:ext>
             </a:extLst>
           </p:cNvPr>
@@ -28388,7 +28405,7 @@
           <p:cNvPr id="17" name="Text 15">
             <a:extLst xmlns:a="http://schemas.openxmlformats.org/drawingml/2006/main">
               <a:ext uri="{FF2B5EF4-FFF2-40B4-BE49-F238E27FC236}">
-                <a16:creationId xmlns:a16="http://schemas.microsoft.com/office/drawing/2014/main" id="{D5C8F411-06A9-4671-B5AB-0F416B7BC69E}"/>
+                <a16:creationId xmlns:a16="http://schemas.microsoft.com/office/drawing/2014/main" id="{BB4FAC12-9BC6-46A7-8C3D-E3E565F086AE}"/>
               </a:ext>
             </a:extLst>
           </p:cNvPr>
@@ -28435,7 +28452,7 @@
           <p:cNvPr id="18" name="Shape 16">
             <a:extLst xmlns:a="http://schemas.openxmlformats.org/drawingml/2006/main">
               <a:ext uri="{FF2B5EF4-FFF2-40B4-BE49-F238E27FC236}">
-                <a16:creationId xmlns:a16="http://schemas.microsoft.com/office/drawing/2014/main" id="{978FA8C6-C7CA-42EF-BF6B-9B9CEBA4A867}"/>
+                <a16:creationId xmlns:a16="http://schemas.microsoft.com/office/drawing/2014/main" id="{B3512633-4D9F-4428-806F-04071EED9CD2}"/>
               </a:ext>
             </a:extLst>
           </p:cNvPr>
@@ -28468,7 +28485,7 @@
           <p:cNvPr id="19" name="Text 17">
             <a:extLst xmlns:a="http://schemas.openxmlformats.org/drawingml/2006/main">
               <a:ext uri="{FF2B5EF4-FFF2-40B4-BE49-F238E27FC236}">
-                <a16:creationId xmlns:a16="http://schemas.microsoft.com/office/drawing/2014/main" id="{8BE1AB7C-E1E1-4F68-9F43-93EA346EE856}"/>
+                <a16:creationId xmlns:a16="http://schemas.microsoft.com/office/drawing/2014/main" id="{9421E83B-2E48-4D10-8F1C-480EB0D597D2}"/>
               </a:ext>
             </a:extLst>
           </p:cNvPr>
@@ -28515,7 +28532,7 @@
           <p:cNvPr id="20" name="Shape 18">
             <a:extLst xmlns:a="http://schemas.openxmlformats.org/drawingml/2006/main">
               <a:ext uri="{FF2B5EF4-FFF2-40B4-BE49-F238E27FC236}">
-                <a16:creationId xmlns:a16="http://schemas.microsoft.com/office/drawing/2014/main" id="{45E403B5-EBBA-4FF7-A2AB-588935AB5B5D}"/>
+                <a16:creationId xmlns:a16="http://schemas.microsoft.com/office/drawing/2014/main" id="{46BF3B15-01ED-40B9-A5AE-831E3D682521}"/>
               </a:ext>
             </a:extLst>
           </p:cNvPr>
@@ -28550,7 +28567,7 @@
           <p:cNvPr id="21" name="Text 19">
             <a:extLst xmlns:a="http://schemas.openxmlformats.org/drawingml/2006/main">
               <a:ext uri="{FF2B5EF4-FFF2-40B4-BE49-F238E27FC236}">
-                <a16:creationId xmlns:a16="http://schemas.microsoft.com/office/drawing/2014/main" id="{0A9FEC88-75A8-4821-9E4A-8E69C658D731}"/>
+                <a16:creationId xmlns:a16="http://schemas.microsoft.com/office/drawing/2014/main" id="{B03A7AE2-A6BA-49A6-9E48-5E1DDC5D9C58}"/>
               </a:ext>
             </a:extLst>
           </p:cNvPr>
@@ -28597,7 +28614,7 @@
           <p:cNvPr id="22" name="Shape 20">
             <a:extLst xmlns:a="http://schemas.openxmlformats.org/drawingml/2006/main">
               <a:ext uri="{FF2B5EF4-FFF2-40B4-BE49-F238E27FC236}">
-                <a16:creationId xmlns:a16="http://schemas.microsoft.com/office/drawing/2014/main" id="{F5E5BDF4-B742-4D64-B6DB-1A0453A752A2}"/>
+                <a16:creationId xmlns:a16="http://schemas.microsoft.com/office/drawing/2014/main" id="{1F3DE3DE-2C0E-433F-8C54-4069ACBF2202}"/>
               </a:ext>
             </a:extLst>
           </p:cNvPr>
@@ -28632,7 +28649,7 @@
           <p:cNvPr id="23" name="Text 21">
             <a:extLst xmlns:a="http://schemas.openxmlformats.org/drawingml/2006/main">
               <a:ext uri="{FF2B5EF4-FFF2-40B4-BE49-F238E27FC236}">
-                <a16:creationId xmlns:a16="http://schemas.microsoft.com/office/drawing/2014/main" id="{5DDF2DAD-FAA7-41D0-BEAF-0FD36E401A63}"/>
+                <a16:creationId xmlns:a16="http://schemas.microsoft.com/office/drawing/2014/main" id="{4418C128-3874-4735-970E-748862C1F1E2}"/>
               </a:ext>
             </a:extLst>
           </p:cNvPr>
@@ -28679,7 +28696,7 @@
           <p:cNvPr id="24" name="Shape 22">
             <a:extLst xmlns:a="http://schemas.openxmlformats.org/drawingml/2006/main">
               <a:ext uri="{FF2B5EF4-FFF2-40B4-BE49-F238E27FC236}">
-                <a16:creationId xmlns:a16="http://schemas.microsoft.com/office/drawing/2014/main" id="{3B74C874-B47B-4A64-9D16-E1CB9EF45603}"/>
+                <a16:creationId xmlns:a16="http://schemas.microsoft.com/office/drawing/2014/main" id="{1DA44728-00FC-4126-9BE0-F48447BCE8F9}"/>
               </a:ext>
             </a:extLst>
           </p:cNvPr>
@@ -28712,7 +28729,7 @@
           <p:cNvPr id="25" name="Text 23">
             <a:extLst xmlns:a="http://schemas.openxmlformats.org/drawingml/2006/main">
               <a:ext uri="{FF2B5EF4-FFF2-40B4-BE49-F238E27FC236}">
-                <a16:creationId xmlns:a16="http://schemas.microsoft.com/office/drawing/2014/main" id="{A51D79F1-0370-43C1-B0E1-81CF69BA2A34}"/>
+                <a16:creationId xmlns:a16="http://schemas.microsoft.com/office/drawing/2014/main" id="{454D06A4-9284-45AA-9757-84AAFB4A7F72}"/>
               </a:ext>
             </a:extLst>
           </p:cNvPr>
@@ -28759,7 +28776,7 @@
           <p:cNvPr id="26" name="Shape 24">
             <a:extLst xmlns:a="http://schemas.openxmlformats.org/drawingml/2006/main">
               <a:ext uri="{FF2B5EF4-FFF2-40B4-BE49-F238E27FC236}">
-                <a16:creationId xmlns:a16="http://schemas.microsoft.com/office/drawing/2014/main" id="{1F6C7F7A-220E-425D-9A9A-5EBDB017834A}"/>
+                <a16:creationId xmlns:a16="http://schemas.microsoft.com/office/drawing/2014/main" id="{CCDC4D8F-16DD-42AB-B289-FA19C76BE85F}"/>
               </a:ext>
             </a:extLst>
           </p:cNvPr>
@@ -28792,7 +28809,7 @@
           <p:cNvPr id="27" name="Text 25">
             <a:extLst xmlns:a="http://schemas.openxmlformats.org/drawingml/2006/main">
               <a:ext uri="{FF2B5EF4-FFF2-40B4-BE49-F238E27FC236}">
-                <a16:creationId xmlns:a16="http://schemas.microsoft.com/office/drawing/2014/main" id="{8491932E-9A64-4E29-B66B-091047DEEF67}"/>
+                <a16:creationId xmlns:a16="http://schemas.microsoft.com/office/drawing/2014/main" id="{58280C74-BDB6-405C-9597-398D567C521E}"/>
               </a:ext>
             </a:extLst>
           </p:cNvPr>
@@ -28839,7 +28856,7 @@
           <p:cNvPr id="28" name="Shape 26">
             <a:extLst xmlns:a="http://schemas.openxmlformats.org/drawingml/2006/main">
               <a:ext uri="{FF2B5EF4-FFF2-40B4-BE49-F238E27FC236}">
-                <a16:creationId xmlns:a16="http://schemas.microsoft.com/office/drawing/2014/main" id="{B207D12E-A951-47D8-8969-DAB1E538B1E3}"/>
+                <a16:creationId xmlns:a16="http://schemas.microsoft.com/office/drawing/2014/main" id="{D9E325F2-1937-4A4F-B863-1E8B0A726D7E}"/>
               </a:ext>
             </a:extLst>
           </p:cNvPr>
@@ -28872,7 +28889,7 @@
           <p:cNvPr id="29" name="Text 27">
             <a:extLst xmlns:a="http://schemas.openxmlformats.org/drawingml/2006/main">
               <a:ext uri="{FF2B5EF4-FFF2-40B4-BE49-F238E27FC236}">
-                <a16:creationId xmlns:a16="http://schemas.microsoft.com/office/drawing/2014/main" id="{33F037F3-DA59-433C-8B63-8FE4EAC67BDB}"/>
+                <a16:creationId xmlns:a16="http://schemas.microsoft.com/office/drawing/2014/main" id="{ADB4C19B-C030-4016-8C99-FA353EF165FA}"/>
               </a:ext>
             </a:extLst>
           </p:cNvPr>
@@ -28919,7 +28936,7 @@
           <p:cNvPr id="30" name="Shape 28">
             <a:extLst xmlns:a="http://schemas.openxmlformats.org/drawingml/2006/main">
               <a:ext uri="{FF2B5EF4-FFF2-40B4-BE49-F238E27FC236}">
-                <a16:creationId xmlns:a16="http://schemas.microsoft.com/office/drawing/2014/main" id="{7C0A4CCC-AEB8-4310-B6D0-73FAA0479514}"/>
+                <a16:creationId xmlns:a16="http://schemas.microsoft.com/office/drawing/2014/main" id="{27647AF1-9570-4F30-830B-76771255742D}"/>
               </a:ext>
             </a:extLst>
           </p:cNvPr>
@@ -28952,7 +28969,7 @@
           <p:cNvPr id="31" name="Text 29">
             <a:extLst xmlns:a="http://schemas.openxmlformats.org/drawingml/2006/main">
               <a:ext uri="{FF2B5EF4-FFF2-40B4-BE49-F238E27FC236}">
-                <a16:creationId xmlns:a16="http://schemas.microsoft.com/office/drawing/2014/main" id="{E84174FD-5DDD-48E9-81F1-FF441D6DDA52}"/>
+                <a16:creationId xmlns:a16="http://schemas.microsoft.com/office/drawing/2014/main" id="{89E9B0C5-706F-41B2-AF9B-372789337C4A}"/>
               </a:ext>
             </a:extLst>
           </p:cNvPr>
@@ -28999,7 +29016,7 @@
           <p:cNvPr id="32" name="Shape 30">
             <a:extLst xmlns:a="http://schemas.openxmlformats.org/drawingml/2006/main">
               <a:ext uri="{FF2B5EF4-FFF2-40B4-BE49-F238E27FC236}">
-                <a16:creationId xmlns:a16="http://schemas.microsoft.com/office/drawing/2014/main" id="{7A02FA8F-F30C-4496-B803-B5A767903DFE}"/>
+                <a16:creationId xmlns:a16="http://schemas.microsoft.com/office/drawing/2014/main" id="{D1E04479-CADC-43C4-ABB1-ABE62AA4CFB1}"/>
               </a:ext>
             </a:extLst>
           </p:cNvPr>
@@ -29034,7 +29051,7 @@
           <p:cNvPr id="33" name="Text 31">
             <a:extLst xmlns:a="http://schemas.openxmlformats.org/drawingml/2006/main">
               <a:ext uri="{FF2B5EF4-FFF2-40B4-BE49-F238E27FC236}">
-                <a16:creationId xmlns:a16="http://schemas.microsoft.com/office/drawing/2014/main" id="{91709F62-9776-447F-8BAF-348230C04FAF}"/>
+                <a16:creationId xmlns:a16="http://schemas.microsoft.com/office/drawing/2014/main" id="{2E55E3D7-552C-4B65-8822-8E8F5BFE3F97}"/>
               </a:ext>
             </a:extLst>
           </p:cNvPr>
@@ -29081,7 +29098,7 @@
           <p:cNvPr id="34" name="Text 32">
             <a:extLst xmlns:a="http://schemas.openxmlformats.org/drawingml/2006/main">
               <a:ext uri="{FF2B5EF4-FFF2-40B4-BE49-F238E27FC236}">
-                <a16:creationId xmlns:a16="http://schemas.microsoft.com/office/drawing/2014/main" id="{A7547F5F-FE4B-4B04-86D7-4B59C5A3FF1D}"/>
+                <a16:creationId xmlns:a16="http://schemas.microsoft.com/office/drawing/2014/main" id="{0C78B83C-CE40-4C64-B84B-7CE9A4F4D074}"/>
               </a:ext>
             </a:extLst>
           </p:cNvPr>
@@ -29128,7 +29145,7 @@
           <p:cNvPr id="35" name="Text 33">
             <a:extLst xmlns:a="http://schemas.openxmlformats.org/drawingml/2006/main">
               <a:ext uri="{FF2B5EF4-FFF2-40B4-BE49-F238E27FC236}">
-                <a16:creationId xmlns:a16="http://schemas.microsoft.com/office/drawing/2014/main" id="{299A8192-D40F-4B0B-AE58-43F0A2337C77}"/>
+                <a16:creationId xmlns:a16="http://schemas.microsoft.com/office/drawing/2014/main" id="{11A7AEFA-1E72-4458-9334-0B5FE85562A9}"/>
               </a:ext>
             </a:extLst>
           </p:cNvPr>
@@ -29173,7 +29190,7 @@
     </p:spTree>
     <p:extLst>
       <p:ext uri="{BB962C8B-B14F-4D97-AF65-F5344CB8AC3E}">
-        <p14:creationId xmlns:p14="http://schemas.microsoft.com/office/powerpoint/2010/main" val="1479847621"/>
+        <p14:creationId xmlns:p14="http://schemas.microsoft.com/office/powerpoint/2010/main" val="1568147668"/>
       </p:ext>
     </p:extLst>
   </p:cSld>
@@ -29204,7 +29221,7 @@
           <p:cNvPr id="2" name="Text 0">
             <a:extLst xmlns:a="http://schemas.openxmlformats.org/drawingml/2006/main">
               <a:ext uri="{FF2B5EF4-FFF2-40B4-BE49-F238E27FC236}">
-                <a16:creationId xmlns:a16="http://schemas.microsoft.com/office/drawing/2014/main" id="{C40994E6-A29B-42B7-9854-F0145DAB03CF}"/>
+                <a16:creationId xmlns:a16="http://schemas.microsoft.com/office/drawing/2014/main" id="{807AEB74-45B9-4A7C-B2B5-EFCE5D33450D}"/>
               </a:ext>
             </a:extLst>
           </p:cNvPr>
@@ -29251,7 +29268,7 @@
           <p:cNvPr id="3" name="Text 1">
             <a:extLst xmlns:a="http://schemas.openxmlformats.org/drawingml/2006/main">
               <a:ext uri="{FF2B5EF4-FFF2-40B4-BE49-F238E27FC236}">
-                <a16:creationId xmlns:a16="http://schemas.microsoft.com/office/drawing/2014/main" id="{634DA760-071A-49FB-8160-B309CBD3661D}"/>
+                <a16:creationId xmlns:a16="http://schemas.microsoft.com/office/drawing/2014/main" id="{2FDB2913-BC7B-480D-9494-4B3EBBEF1DC0}"/>
               </a:ext>
             </a:extLst>
           </p:cNvPr>
@@ -29298,7 +29315,7 @@
           <p:cNvPr id="4" name="Shape 2">
             <a:extLst xmlns:a="http://schemas.openxmlformats.org/drawingml/2006/main">
               <a:ext uri="{FF2B5EF4-FFF2-40B4-BE49-F238E27FC236}">
-                <a16:creationId xmlns:a16="http://schemas.microsoft.com/office/drawing/2014/main" id="{573CD138-1597-4D6F-9765-729D19999826}"/>
+                <a16:creationId xmlns:a16="http://schemas.microsoft.com/office/drawing/2014/main" id="{B8F21A9B-11D8-4E40-A3D7-12FED7D0E46A}"/>
               </a:ext>
             </a:extLst>
           </p:cNvPr>
@@ -29333,7 +29350,7 @@
           <p:cNvPr id="5" name="Text 3">
             <a:extLst xmlns:a="http://schemas.openxmlformats.org/drawingml/2006/main">
               <a:ext uri="{FF2B5EF4-FFF2-40B4-BE49-F238E27FC236}">
-                <a16:creationId xmlns:a16="http://schemas.microsoft.com/office/drawing/2014/main" id="{053A352F-473A-40A0-BA0C-C399D8DB28BD}"/>
+                <a16:creationId xmlns:a16="http://schemas.microsoft.com/office/drawing/2014/main" id="{B5FFB915-F959-45C9-92D3-0894D02D39B4}"/>
               </a:ext>
             </a:extLst>
           </p:cNvPr>
@@ -29380,7 +29397,7 @@
           <p:cNvPr id="6" name="Shape 4">
             <a:extLst xmlns:a="http://schemas.openxmlformats.org/drawingml/2006/main">
               <a:ext uri="{FF2B5EF4-FFF2-40B4-BE49-F238E27FC236}">
-                <a16:creationId xmlns:a16="http://schemas.microsoft.com/office/drawing/2014/main" id="{26401345-8A21-4AE3-A16A-48CE12AD3DB0}"/>
+                <a16:creationId xmlns:a16="http://schemas.microsoft.com/office/drawing/2014/main" id="{F1B56A5A-3E43-4F30-9031-B66B89532C4A}"/>
               </a:ext>
             </a:extLst>
           </p:cNvPr>
@@ -29411,7 +29428,7 @@
           <p:cNvPr id="7" name="Shape 5">
             <a:extLst xmlns:a="http://schemas.openxmlformats.org/drawingml/2006/main">
               <a:ext uri="{FF2B5EF4-FFF2-40B4-BE49-F238E27FC236}">
-                <a16:creationId xmlns:a16="http://schemas.microsoft.com/office/drawing/2014/main" id="{5807A04C-59E3-4582-8763-0F1320F37560}"/>
+                <a16:creationId xmlns:a16="http://schemas.microsoft.com/office/drawing/2014/main" id="{856F4723-FD9F-43C6-964A-608A8DD810A1}"/>
               </a:ext>
             </a:extLst>
           </p:cNvPr>
@@ -29446,7 +29463,7 @@
           <p:cNvPr id="8" name="Text 6">
             <a:extLst xmlns:a="http://schemas.openxmlformats.org/drawingml/2006/main">
               <a:ext uri="{FF2B5EF4-FFF2-40B4-BE49-F238E27FC236}">
-                <a16:creationId xmlns:a16="http://schemas.microsoft.com/office/drawing/2014/main" id="{FAC76977-5C0F-426A-A9CE-AF9C5FDE222F}"/>
+                <a16:creationId xmlns:a16="http://schemas.microsoft.com/office/drawing/2014/main" id="{1DF29071-BBF2-45FB-A84B-5777FB53CD77}"/>
               </a:ext>
             </a:extLst>
           </p:cNvPr>
@@ -29493,7 +29510,7 @@
           <p:cNvPr id="9" name="Text 7">
             <a:extLst xmlns:a="http://schemas.openxmlformats.org/drawingml/2006/main">
               <a:ext uri="{FF2B5EF4-FFF2-40B4-BE49-F238E27FC236}">
-                <a16:creationId xmlns:a16="http://schemas.microsoft.com/office/drawing/2014/main" id="{766F54EB-5AF3-4C67-9101-CEB6ADBF4A94}"/>
+                <a16:creationId xmlns:a16="http://schemas.microsoft.com/office/drawing/2014/main" id="{DAFB98B5-262A-4496-A862-85FE94F7A20E}"/>
               </a:ext>
             </a:extLst>
           </p:cNvPr>
@@ -29540,7 +29557,7 @@
           <p:cNvPr id="10" name="Shape 8">
             <a:extLst xmlns:a="http://schemas.openxmlformats.org/drawingml/2006/main">
               <a:ext uri="{FF2B5EF4-FFF2-40B4-BE49-F238E27FC236}">
-                <a16:creationId xmlns:a16="http://schemas.microsoft.com/office/drawing/2014/main" id="{AA2C4B4D-62C6-4C7E-BBA2-48CE22DBAB61}"/>
+                <a16:creationId xmlns:a16="http://schemas.microsoft.com/office/drawing/2014/main" id="{294DB396-4CAB-4190-89DA-E7CC9F71424D}"/>
               </a:ext>
             </a:extLst>
           </p:cNvPr>
@@ -29572,7 +29589,7 @@
           <p:cNvPr id="11" name="Shape 9">
             <a:extLst xmlns:a="http://schemas.openxmlformats.org/drawingml/2006/main">
               <a:ext uri="{FF2B5EF4-FFF2-40B4-BE49-F238E27FC236}">
-                <a16:creationId xmlns:a16="http://schemas.microsoft.com/office/drawing/2014/main" id="{2986D58A-8B32-4C70-ABE8-9918CB4AF2DE}"/>
+                <a16:creationId xmlns:a16="http://schemas.microsoft.com/office/drawing/2014/main" id="{4D29E751-C01F-4CA8-BD07-DBAAFC6C982A}"/>
               </a:ext>
             </a:extLst>
           </p:cNvPr>
@@ -29607,7 +29624,7 @@
           <p:cNvPr id="12" name="Text 10">
             <a:extLst xmlns:a="http://schemas.openxmlformats.org/drawingml/2006/main">
               <a:ext uri="{FF2B5EF4-FFF2-40B4-BE49-F238E27FC236}">
-                <a16:creationId xmlns:a16="http://schemas.microsoft.com/office/drawing/2014/main" id="{8C8347C3-349B-44D6-B249-9EE1F718F0F6}"/>
+                <a16:creationId xmlns:a16="http://schemas.microsoft.com/office/drawing/2014/main" id="{AEA20396-370E-4FDB-99FA-447293E3D503}"/>
               </a:ext>
             </a:extLst>
           </p:cNvPr>
@@ -29654,7 +29671,7 @@
           <p:cNvPr id="13" name="Text 11">
             <a:extLst xmlns:a="http://schemas.openxmlformats.org/drawingml/2006/main">
               <a:ext uri="{FF2B5EF4-FFF2-40B4-BE49-F238E27FC236}">
-                <a16:creationId xmlns:a16="http://schemas.microsoft.com/office/drawing/2014/main" id="{64A80908-4575-4B74-B413-451466C805AC}"/>
+                <a16:creationId xmlns:a16="http://schemas.microsoft.com/office/drawing/2014/main" id="{46C41E25-5F7B-4871-AA52-BAF804F4E0E1}"/>
               </a:ext>
             </a:extLst>
           </p:cNvPr>
@@ -29701,7 +29718,7 @@
           <p:cNvPr id="14" name="Shape 12">
             <a:extLst xmlns:a="http://schemas.openxmlformats.org/drawingml/2006/main">
               <a:ext uri="{FF2B5EF4-FFF2-40B4-BE49-F238E27FC236}">
-                <a16:creationId xmlns:a16="http://schemas.microsoft.com/office/drawing/2014/main" id="{E9B5BAA5-5485-4465-8980-B8291550C5F8}"/>
+                <a16:creationId xmlns:a16="http://schemas.microsoft.com/office/drawing/2014/main" id="{7A3457E2-3286-4A92-B357-FFC8158536D2}"/>
               </a:ext>
             </a:extLst>
           </p:cNvPr>
@@ -29733,7 +29750,7 @@
           <p:cNvPr id="15" name="Shape 13">
             <a:extLst xmlns:a="http://schemas.openxmlformats.org/drawingml/2006/main">
               <a:ext uri="{FF2B5EF4-FFF2-40B4-BE49-F238E27FC236}">
-                <a16:creationId xmlns:a16="http://schemas.microsoft.com/office/drawing/2014/main" id="{61F50F80-0A7C-42DD-99AD-559BEC506B89}"/>
+                <a16:creationId xmlns:a16="http://schemas.microsoft.com/office/drawing/2014/main" id="{704F4F24-7632-4675-A2C1-AF355D2B9B04}"/>
               </a:ext>
             </a:extLst>
           </p:cNvPr>
@@ -29768,7 +29785,7 @@
           <p:cNvPr id="16" name="Text 14">
             <a:extLst xmlns:a="http://schemas.openxmlformats.org/drawingml/2006/main">
               <a:ext uri="{FF2B5EF4-FFF2-40B4-BE49-F238E27FC236}">
-                <a16:creationId xmlns:a16="http://schemas.microsoft.com/office/drawing/2014/main" id="{030787CE-338D-42AC-B861-5F8C18653CE3}"/>
+                <a16:creationId xmlns:a16="http://schemas.microsoft.com/office/drawing/2014/main" id="{586B6B15-E8D4-45F1-968D-B41E37E45D96}"/>
               </a:ext>
             </a:extLst>
           </p:cNvPr>
@@ -29815,7 +29832,7 @@
           <p:cNvPr id="17" name="Text 15">
             <a:extLst xmlns:a="http://schemas.openxmlformats.org/drawingml/2006/main">
               <a:ext uri="{FF2B5EF4-FFF2-40B4-BE49-F238E27FC236}">
-                <a16:creationId xmlns:a16="http://schemas.microsoft.com/office/drawing/2014/main" id="{A6E2D1A9-EA2E-4451-AECD-532DD897E03E}"/>
+                <a16:creationId xmlns:a16="http://schemas.microsoft.com/office/drawing/2014/main" id="{55D28E80-206C-4727-809F-E2F09F0FA335}"/>
               </a:ext>
             </a:extLst>
           </p:cNvPr>
@@ -29862,7 +29879,7 @@
           <p:cNvPr id="18" name="Shape 16">
             <a:extLst xmlns:a="http://schemas.openxmlformats.org/drawingml/2006/main">
               <a:ext uri="{FF2B5EF4-FFF2-40B4-BE49-F238E27FC236}">
-                <a16:creationId xmlns:a16="http://schemas.microsoft.com/office/drawing/2014/main" id="{75BBA8DC-1162-4440-94C7-E11D44CB90B5}"/>
+                <a16:creationId xmlns:a16="http://schemas.microsoft.com/office/drawing/2014/main" id="{43DE6493-3A3F-4E5D-B079-51F09CB542F9}"/>
               </a:ext>
             </a:extLst>
           </p:cNvPr>
@@ -29894,7 +29911,7 @@
           <p:cNvPr id="19" name="Shape 17">
             <a:extLst xmlns:a="http://schemas.openxmlformats.org/drawingml/2006/main">
               <a:ext uri="{FF2B5EF4-FFF2-40B4-BE49-F238E27FC236}">
-                <a16:creationId xmlns:a16="http://schemas.microsoft.com/office/drawing/2014/main" id="{04B7F8B6-17E3-45C6-9739-D8DD51BD5D6F}"/>
+                <a16:creationId xmlns:a16="http://schemas.microsoft.com/office/drawing/2014/main" id="{0410B3BD-3D71-4D70-937A-81A3B317CC18}"/>
               </a:ext>
             </a:extLst>
           </p:cNvPr>
@@ -29929,7 +29946,7 @@
           <p:cNvPr id="20" name="Text 18">
             <a:extLst xmlns:a="http://schemas.openxmlformats.org/drawingml/2006/main">
               <a:ext uri="{FF2B5EF4-FFF2-40B4-BE49-F238E27FC236}">
-                <a16:creationId xmlns:a16="http://schemas.microsoft.com/office/drawing/2014/main" id="{7A25D9BC-48BC-46C2-A6D8-D65BA4F6BA54}"/>
+                <a16:creationId xmlns:a16="http://schemas.microsoft.com/office/drawing/2014/main" id="{181ECB1F-8176-4688-AD0F-22A22E611441}"/>
               </a:ext>
             </a:extLst>
           </p:cNvPr>
@@ -29976,7 +29993,7 @@
           <p:cNvPr id="21" name="Text 19">
             <a:extLst xmlns:a="http://schemas.openxmlformats.org/drawingml/2006/main">
               <a:ext uri="{FF2B5EF4-FFF2-40B4-BE49-F238E27FC236}">
-                <a16:creationId xmlns:a16="http://schemas.microsoft.com/office/drawing/2014/main" id="{458CAD39-0CC7-4872-8B5B-9FFE1DF817DA}"/>
+                <a16:creationId xmlns:a16="http://schemas.microsoft.com/office/drawing/2014/main" id="{84D3199A-47BD-4D63-BEF7-B51CACFEC649}"/>
               </a:ext>
             </a:extLst>
           </p:cNvPr>
@@ -30023,7 +30040,7 @@
           <p:cNvPr id="22" name="Shape 20">
             <a:extLst xmlns:a="http://schemas.openxmlformats.org/drawingml/2006/main">
               <a:ext uri="{FF2B5EF4-FFF2-40B4-BE49-F238E27FC236}">
-                <a16:creationId xmlns:a16="http://schemas.microsoft.com/office/drawing/2014/main" id="{EF439926-3085-4872-A959-644E6A9EF2DB}"/>
+                <a16:creationId xmlns:a16="http://schemas.microsoft.com/office/drawing/2014/main" id="{F1291A03-65B0-4FB5-A312-A65B5F9CFE62}"/>
               </a:ext>
             </a:extLst>
           </p:cNvPr>
@@ -30055,7 +30072,7 @@
           <p:cNvPr id="23" name="Shape 21">
             <a:extLst xmlns:a="http://schemas.openxmlformats.org/drawingml/2006/main">
               <a:ext uri="{FF2B5EF4-FFF2-40B4-BE49-F238E27FC236}">
-                <a16:creationId xmlns:a16="http://schemas.microsoft.com/office/drawing/2014/main" id="{52A35EB1-3C1E-4074-87A2-62E1084B7942}"/>
+                <a16:creationId xmlns:a16="http://schemas.microsoft.com/office/drawing/2014/main" id="{F57BEF5F-2B9C-4F97-A8E6-597503F31519}"/>
               </a:ext>
             </a:extLst>
           </p:cNvPr>
@@ -30090,7 +30107,7 @@
           <p:cNvPr id="24" name="Text 22">
             <a:extLst xmlns:a="http://schemas.openxmlformats.org/drawingml/2006/main">
               <a:ext uri="{FF2B5EF4-FFF2-40B4-BE49-F238E27FC236}">
-                <a16:creationId xmlns:a16="http://schemas.microsoft.com/office/drawing/2014/main" id="{E2E8ED0E-D268-41ED-93B7-A7FA1CADC0E6}"/>
+                <a16:creationId xmlns:a16="http://schemas.microsoft.com/office/drawing/2014/main" id="{E0738620-D933-406E-AFAD-B9F4F201C3D8}"/>
               </a:ext>
             </a:extLst>
           </p:cNvPr>
@@ -30137,7 +30154,7 @@
           <p:cNvPr id="25" name="Text 23">
             <a:extLst xmlns:a="http://schemas.openxmlformats.org/drawingml/2006/main">
               <a:ext uri="{FF2B5EF4-FFF2-40B4-BE49-F238E27FC236}">
-                <a16:creationId xmlns:a16="http://schemas.microsoft.com/office/drawing/2014/main" id="{530E3A22-7FE9-4372-96B6-F0A621F8B170}"/>
+                <a16:creationId xmlns:a16="http://schemas.microsoft.com/office/drawing/2014/main" id="{1D9C607E-D4B3-4C45-A3DC-9D6FFB806619}"/>
               </a:ext>
             </a:extLst>
           </p:cNvPr>
@@ -30184,7 +30201,7 @@
           <p:cNvPr id="26" name="Shape 24">
             <a:extLst xmlns:a="http://schemas.openxmlformats.org/drawingml/2006/main">
               <a:ext uri="{FF2B5EF4-FFF2-40B4-BE49-F238E27FC236}">
-                <a16:creationId xmlns:a16="http://schemas.microsoft.com/office/drawing/2014/main" id="{0697A9E7-B5F1-4384-8C5A-4FF210C99966}"/>
+                <a16:creationId xmlns:a16="http://schemas.microsoft.com/office/drawing/2014/main" id="{13703099-FF6C-4C52-941E-F25B9B6609E3}"/>
               </a:ext>
             </a:extLst>
           </p:cNvPr>
@@ -30216,7 +30233,7 @@
           <p:cNvPr id="27" name="Shape 25">
             <a:extLst xmlns:a="http://schemas.openxmlformats.org/drawingml/2006/main">
               <a:ext uri="{FF2B5EF4-FFF2-40B4-BE49-F238E27FC236}">
-                <a16:creationId xmlns:a16="http://schemas.microsoft.com/office/drawing/2014/main" id="{1B37C616-425E-45F0-8821-826141F1EE54}"/>
+                <a16:creationId xmlns:a16="http://schemas.microsoft.com/office/drawing/2014/main" id="{7C2DD9D1-31AA-4503-ADF7-4519F7F9E6EC}"/>
               </a:ext>
             </a:extLst>
           </p:cNvPr>
@@ -30251,7 +30268,7 @@
           <p:cNvPr id="28" name="Text 26">
             <a:extLst xmlns:a="http://schemas.openxmlformats.org/drawingml/2006/main">
               <a:ext uri="{FF2B5EF4-FFF2-40B4-BE49-F238E27FC236}">
-                <a16:creationId xmlns:a16="http://schemas.microsoft.com/office/drawing/2014/main" id="{AED1FE0A-77BE-40F9-B1C3-E8BE39332123}"/>
+                <a16:creationId xmlns:a16="http://schemas.microsoft.com/office/drawing/2014/main" id="{1E8FF790-FAD5-4696-9D8B-D325ED500E40}"/>
               </a:ext>
             </a:extLst>
           </p:cNvPr>
@@ -30298,7 +30315,7 @@
           <p:cNvPr id="29" name="Text 27">
             <a:extLst xmlns:a="http://schemas.openxmlformats.org/drawingml/2006/main">
               <a:ext uri="{FF2B5EF4-FFF2-40B4-BE49-F238E27FC236}">
-                <a16:creationId xmlns:a16="http://schemas.microsoft.com/office/drawing/2014/main" id="{E8474A74-7E80-4542-9F15-DE8735776D69}"/>
+                <a16:creationId xmlns:a16="http://schemas.microsoft.com/office/drawing/2014/main" id="{88010271-0716-4E78-99F8-14ADA8483D03}"/>
               </a:ext>
             </a:extLst>
           </p:cNvPr>
@@ -30345,7 +30362,7 @@
           <p:cNvPr id="30" name="Text 28">
             <a:extLst xmlns:a="http://schemas.openxmlformats.org/drawingml/2006/main">
               <a:ext uri="{FF2B5EF4-FFF2-40B4-BE49-F238E27FC236}">
-                <a16:creationId xmlns:a16="http://schemas.microsoft.com/office/drawing/2014/main" id="{1A2360EC-E5B1-4EC0-BB2E-657CF1AE1B76}"/>
+                <a16:creationId xmlns:a16="http://schemas.microsoft.com/office/drawing/2014/main" id="{C5211E6A-CC9A-470B-8E68-B0C613404141}"/>
               </a:ext>
             </a:extLst>
           </p:cNvPr>
@@ -30392,7 +30409,7 @@
           <p:cNvPr id="31" name="Shape 29">
             <a:extLst xmlns:a="http://schemas.openxmlformats.org/drawingml/2006/main">
               <a:ext uri="{FF2B5EF4-FFF2-40B4-BE49-F238E27FC236}">
-                <a16:creationId xmlns:a16="http://schemas.microsoft.com/office/drawing/2014/main" id="{63F6D9EE-E060-4538-BBC4-C5C910169B1C}"/>
+                <a16:creationId xmlns:a16="http://schemas.microsoft.com/office/drawing/2014/main" id="{F654C241-AE6B-41AD-887C-9EE4045C503D}"/>
               </a:ext>
             </a:extLst>
           </p:cNvPr>
@@ -30427,7 +30444,7 @@
           <p:cNvPr id="32" name="Text 30">
             <a:extLst xmlns:a="http://schemas.openxmlformats.org/drawingml/2006/main">
               <a:ext uri="{FF2B5EF4-FFF2-40B4-BE49-F238E27FC236}">
-                <a16:creationId xmlns:a16="http://schemas.microsoft.com/office/drawing/2014/main" id="{0C9693EB-CE03-42DE-876D-FBD0478A6F7F}"/>
+                <a16:creationId xmlns:a16="http://schemas.microsoft.com/office/drawing/2014/main" id="{88F02959-C1EC-45C1-8700-30AD5A41BB71}"/>
               </a:ext>
             </a:extLst>
           </p:cNvPr>
@@ -30506,7 +30523,7 @@
           <p:cNvPr id="33" name="Text 31">
             <a:extLst xmlns:a="http://schemas.openxmlformats.org/drawingml/2006/main">
               <a:ext uri="{FF2B5EF4-FFF2-40B4-BE49-F238E27FC236}">
-                <a16:creationId xmlns:a16="http://schemas.microsoft.com/office/drawing/2014/main" id="{2F1CF9F8-5C98-4FDB-8A4A-B4C965CC86BB}"/>
+                <a16:creationId xmlns:a16="http://schemas.microsoft.com/office/drawing/2014/main" id="{98CD8F50-C786-4A53-B7B2-21A78C853A97}"/>
               </a:ext>
             </a:extLst>
           </p:cNvPr>
@@ -30553,7 +30570,7 @@
           <p:cNvPr id="34" name="Shape 32">
             <a:extLst xmlns:a="http://schemas.openxmlformats.org/drawingml/2006/main">
               <a:ext uri="{FF2B5EF4-FFF2-40B4-BE49-F238E27FC236}">
-                <a16:creationId xmlns:a16="http://schemas.microsoft.com/office/drawing/2014/main" id="{DDA8BB72-7409-4849-B631-68D8A16BF177}"/>
+                <a16:creationId xmlns:a16="http://schemas.microsoft.com/office/drawing/2014/main" id="{9F77BFEA-CC5D-4D07-B488-CEF2FF2881B7}"/>
               </a:ext>
             </a:extLst>
           </p:cNvPr>
@@ -30588,7 +30605,7 @@
           <p:cNvPr id="35" name="Text 33">
             <a:extLst xmlns:a="http://schemas.openxmlformats.org/drawingml/2006/main">
               <a:ext uri="{FF2B5EF4-FFF2-40B4-BE49-F238E27FC236}">
-                <a16:creationId xmlns:a16="http://schemas.microsoft.com/office/drawing/2014/main" id="{1C708063-BE9B-4AB6-8390-F69683860778}"/>
+                <a16:creationId xmlns:a16="http://schemas.microsoft.com/office/drawing/2014/main" id="{6BF94933-589D-40DF-B21E-168DE46B93AE}"/>
               </a:ext>
             </a:extLst>
           </p:cNvPr>
@@ -30667,7 +30684,7 @@
           <p:cNvPr id="36" name="Shape 34">
             <a:extLst xmlns:a="http://schemas.openxmlformats.org/drawingml/2006/main">
               <a:ext uri="{FF2B5EF4-FFF2-40B4-BE49-F238E27FC236}">
-                <a16:creationId xmlns:a16="http://schemas.microsoft.com/office/drawing/2014/main" id="{C76F6698-ABB9-4637-BDA2-75244EA27218}"/>
+                <a16:creationId xmlns:a16="http://schemas.microsoft.com/office/drawing/2014/main" id="{E96F5FF0-AB43-410B-8B18-478F565E3BA6}"/>
               </a:ext>
             </a:extLst>
           </p:cNvPr>
@@ -30702,7 +30719,7 @@
           <p:cNvPr id="37" name="Text 35">
             <a:extLst xmlns:a="http://schemas.openxmlformats.org/drawingml/2006/main">
               <a:ext uri="{FF2B5EF4-FFF2-40B4-BE49-F238E27FC236}">
-                <a16:creationId xmlns:a16="http://schemas.microsoft.com/office/drawing/2014/main" id="{34150DA5-8791-49CC-BC6C-FC1D0AF7C5D2}"/>
+                <a16:creationId xmlns:a16="http://schemas.microsoft.com/office/drawing/2014/main" id="{E2F7C0F7-568E-44E2-8FB2-827C0C54A897}"/>
               </a:ext>
             </a:extLst>
           </p:cNvPr>
@@ -30749,7 +30766,7 @@
           <p:cNvPr id="38" name="Text 36">
             <a:extLst xmlns:a="http://schemas.openxmlformats.org/drawingml/2006/main">
               <a:ext uri="{FF2B5EF4-FFF2-40B4-BE49-F238E27FC236}">
-                <a16:creationId xmlns:a16="http://schemas.microsoft.com/office/drawing/2014/main" id="{66601516-A054-4D87-B52A-09393B62DA29}"/>
+                <a16:creationId xmlns:a16="http://schemas.microsoft.com/office/drawing/2014/main" id="{F169A671-6310-4685-8D9C-28659EFB3BC0}"/>
               </a:ext>
             </a:extLst>
           </p:cNvPr>
@@ -30796,7 +30813,7 @@
           <p:cNvPr id="39" name="Text 37">
             <a:extLst xmlns:a="http://schemas.openxmlformats.org/drawingml/2006/main">
               <a:ext uri="{FF2B5EF4-FFF2-40B4-BE49-F238E27FC236}">
-                <a16:creationId xmlns:a16="http://schemas.microsoft.com/office/drawing/2014/main" id="{5A9488B4-D4AC-4C06-8A57-B30BE91C4562}"/>
+                <a16:creationId xmlns:a16="http://schemas.microsoft.com/office/drawing/2014/main" id="{EC4739F6-4003-4D6A-BB7F-15B6E8A931C8}"/>
               </a:ext>
             </a:extLst>
           </p:cNvPr>
@@ -30841,7 +30858,7 @@
     </p:spTree>
     <p:extLst>
       <p:ext uri="{BB962C8B-B14F-4D97-AF65-F5344CB8AC3E}">
-        <p14:creationId xmlns:p14="http://schemas.microsoft.com/office/powerpoint/2010/main" val="1023371292"/>
+        <p14:creationId xmlns:p14="http://schemas.microsoft.com/office/powerpoint/2010/main" val="1198234617"/>
       </p:ext>
     </p:extLst>
   </p:cSld>
@@ -30872,7 +30889,7 @@
           <p:cNvPr id="2" name="Text 0">
             <a:extLst xmlns:a="http://schemas.openxmlformats.org/drawingml/2006/main">
               <a:ext uri="{FF2B5EF4-FFF2-40B4-BE49-F238E27FC236}">
-                <a16:creationId xmlns:a16="http://schemas.microsoft.com/office/drawing/2014/main" id="{C9DAC712-C3BC-469A-8FDC-3A148607187F}"/>
+                <a16:creationId xmlns:a16="http://schemas.microsoft.com/office/drawing/2014/main" id="{0E3AB93F-2A6B-42D8-B44A-7870148E6CFB}"/>
               </a:ext>
             </a:extLst>
           </p:cNvPr>
@@ -30919,7 +30936,7 @@
           <p:cNvPr id="3" name="Text 1">
             <a:extLst xmlns:a="http://schemas.openxmlformats.org/drawingml/2006/main">
               <a:ext uri="{FF2B5EF4-FFF2-40B4-BE49-F238E27FC236}">
-                <a16:creationId xmlns:a16="http://schemas.microsoft.com/office/drawing/2014/main" id="{87C62D9A-6C3D-42B4-8C6E-A9600305A145}"/>
+                <a16:creationId xmlns:a16="http://schemas.microsoft.com/office/drawing/2014/main" id="{089045E5-61FA-4C7E-9EEF-7F94EF7E12F5}"/>
               </a:ext>
             </a:extLst>
           </p:cNvPr>
@@ -30966,7 +30983,7 @@
           <p:cNvPr id="4" name="Shape 2">
             <a:extLst xmlns:a="http://schemas.openxmlformats.org/drawingml/2006/main">
               <a:ext uri="{FF2B5EF4-FFF2-40B4-BE49-F238E27FC236}">
-                <a16:creationId xmlns:a16="http://schemas.microsoft.com/office/drawing/2014/main" id="{82371C1C-FDC8-45B1-99E7-4B072461C40E}"/>
+                <a16:creationId xmlns:a16="http://schemas.microsoft.com/office/drawing/2014/main" id="{79149471-818D-443E-AF16-F9F7E0ECB045}"/>
               </a:ext>
             </a:extLst>
           </p:cNvPr>
@@ -31001,7 +31018,7 @@
           <p:cNvPr id="5" name="Text 3">
             <a:extLst xmlns:a="http://schemas.openxmlformats.org/drawingml/2006/main">
               <a:ext uri="{FF2B5EF4-FFF2-40B4-BE49-F238E27FC236}">
-                <a16:creationId xmlns:a16="http://schemas.microsoft.com/office/drawing/2014/main" id="{EB2A4CC2-8BFC-4CA8-8D37-AA6BB3AA2161}"/>
+                <a16:creationId xmlns:a16="http://schemas.microsoft.com/office/drawing/2014/main" id="{8849C4E4-8DFF-464D-83C3-E39718FAA86B}"/>
               </a:ext>
             </a:extLst>
           </p:cNvPr>
@@ -31048,7 +31065,7 @@
           <p:cNvPr id="6" name="Shape 4">
             <a:extLst xmlns:a="http://schemas.openxmlformats.org/drawingml/2006/main">
               <a:ext uri="{FF2B5EF4-FFF2-40B4-BE49-F238E27FC236}">
-                <a16:creationId xmlns:a16="http://schemas.microsoft.com/office/drawing/2014/main" id="{62C66256-6E2A-496F-8D4D-F60B9C311235}"/>
+                <a16:creationId xmlns:a16="http://schemas.microsoft.com/office/drawing/2014/main" id="{57F4A930-7DEC-4B3E-A1A2-303F298489BD}"/>
               </a:ext>
             </a:extLst>
           </p:cNvPr>
@@ -31079,7 +31096,7 @@
           <p:cNvPr id="7" name="Shape 5">
             <a:extLst xmlns:a="http://schemas.openxmlformats.org/drawingml/2006/main">
               <a:ext uri="{FF2B5EF4-FFF2-40B4-BE49-F238E27FC236}">
-                <a16:creationId xmlns:a16="http://schemas.microsoft.com/office/drawing/2014/main" id="{6691B4F5-0CA8-45A0-A0A2-284530EF0A1B}"/>
+                <a16:creationId xmlns:a16="http://schemas.microsoft.com/office/drawing/2014/main" id="{4DBAFAD2-9E47-4CE6-9ADA-1A3FF56CD786}"/>
               </a:ext>
             </a:extLst>
           </p:cNvPr>
@@ -31114,7 +31131,7 @@
           <p:cNvPr id="8" name="Text 6">
             <a:extLst xmlns:a="http://schemas.openxmlformats.org/drawingml/2006/main">
               <a:ext uri="{FF2B5EF4-FFF2-40B4-BE49-F238E27FC236}">
-                <a16:creationId xmlns:a16="http://schemas.microsoft.com/office/drawing/2014/main" id="{21CA3696-4572-4BBA-9300-03B72C958395}"/>
+                <a16:creationId xmlns:a16="http://schemas.microsoft.com/office/drawing/2014/main" id="{1DC1B322-D5FE-4000-8375-EE76B42BF59C}"/>
               </a:ext>
             </a:extLst>
           </p:cNvPr>
@@ -31161,7 +31178,7 @@
           <p:cNvPr id="9" name="Text 7">
             <a:extLst xmlns:a="http://schemas.openxmlformats.org/drawingml/2006/main">
               <a:ext uri="{FF2B5EF4-FFF2-40B4-BE49-F238E27FC236}">
-                <a16:creationId xmlns:a16="http://schemas.microsoft.com/office/drawing/2014/main" id="{0534541A-A27F-4692-AB82-2FDB5CE3261F}"/>
+                <a16:creationId xmlns:a16="http://schemas.microsoft.com/office/drawing/2014/main" id="{B30E8E59-E5E3-46B8-87BF-7578CAB5FCA0}"/>
               </a:ext>
             </a:extLst>
           </p:cNvPr>
@@ -31208,7 +31225,7 @@
           <p:cNvPr id="10" name="Text 8">
             <a:extLst xmlns:a="http://schemas.openxmlformats.org/drawingml/2006/main">
               <a:ext uri="{FF2B5EF4-FFF2-40B4-BE49-F238E27FC236}">
-                <a16:creationId xmlns:a16="http://schemas.microsoft.com/office/drawing/2014/main" id="{3764058F-86B0-4D4B-8681-B6BB5C0FCB27}"/>
+                <a16:creationId xmlns:a16="http://schemas.microsoft.com/office/drawing/2014/main" id="{BEBA627E-BB08-4557-B23E-A722DA258CAC}"/>
               </a:ext>
             </a:extLst>
           </p:cNvPr>
@@ -31255,7 +31272,7 @@
           <p:cNvPr id="11" name="Shape 9">
             <a:extLst xmlns:a="http://schemas.openxmlformats.org/drawingml/2006/main">
               <a:ext uri="{FF2B5EF4-FFF2-40B4-BE49-F238E27FC236}">
-                <a16:creationId xmlns:a16="http://schemas.microsoft.com/office/drawing/2014/main" id="{5752D767-2BE4-4ED6-9AC1-CB0B36063BBD}"/>
+                <a16:creationId xmlns:a16="http://schemas.microsoft.com/office/drawing/2014/main" id="{C5DC961D-D0F7-47C0-BB64-F2F2A2A95DD6}"/>
               </a:ext>
             </a:extLst>
           </p:cNvPr>
@@ -31290,7 +31307,7 @@
           <p:cNvPr id="12" name="Text 10">
             <a:extLst xmlns:a="http://schemas.openxmlformats.org/drawingml/2006/main">
               <a:ext uri="{FF2B5EF4-FFF2-40B4-BE49-F238E27FC236}">
-                <a16:creationId xmlns:a16="http://schemas.microsoft.com/office/drawing/2014/main" id="{B6AE2E0B-BE31-4F9C-A05F-6AAAEC6DC35A}"/>
+                <a16:creationId xmlns:a16="http://schemas.microsoft.com/office/drawing/2014/main" id="{6710C2B3-A44B-4066-8249-8EB5D04B19EA}"/>
               </a:ext>
             </a:extLst>
           </p:cNvPr>
@@ -31337,7 +31354,7 @@
           <p:cNvPr id="13" name="Shape 11">
             <a:extLst xmlns:a="http://schemas.openxmlformats.org/drawingml/2006/main">
               <a:ext uri="{FF2B5EF4-FFF2-40B4-BE49-F238E27FC236}">
-                <a16:creationId xmlns:a16="http://schemas.microsoft.com/office/drawing/2014/main" id="{0F971F57-C4ED-46AF-8F94-B1304E4102F7}"/>
+                <a16:creationId xmlns:a16="http://schemas.microsoft.com/office/drawing/2014/main" id="{03E0A27E-D661-41DD-AF5B-40CE36190075}"/>
               </a:ext>
             </a:extLst>
           </p:cNvPr>
@@ -31372,7 +31389,7 @@
           <p:cNvPr id="14" name="Text 12">
             <a:extLst xmlns:a="http://schemas.openxmlformats.org/drawingml/2006/main">
               <a:ext uri="{FF2B5EF4-FFF2-40B4-BE49-F238E27FC236}">
-                <a16:creationId xmlns:a16="http://schemas.microsoft.com/office/drawing/2014/main" id="{98C1B3F4-3602-405A-85DA-2EBA71E9695A}"/>
+                <a16:creationId xmlns:a16="http://schemas.microsoft.com/office/drawing/2014/main" id="{45A782F4-5862-437D-8C13-80126A12C964}"/>
               </a:ext>
             </a:extLst>
           </p:cNvPr>
@@ -31419,7 +31436,7 @@
           <p:cNvPr id="15" name="Text 13">
             <a:extLst xmlns:a="http://schemas.openxmlformats.org/drawingml/2006/main">
               <a:ext uri="{FF2B5EF4-FFF2-40B4-BE49-F238E27FC236}">
-                <a16:creationId xmlns:a16="http://schemas.microsoft.com/office/drawing/2014/main" id="{1E919219-9A29-4067-80E9-8AAA4CDD45F0}"/>
+                <a16:creationId xmlns:a16="http://schemas.microsoft.com/office/drawing/2014/main" id="{802CD3D8-9BD7-44C3-B30C-9A8057935130}"/>
               </a:ext>
             </a:extLst>
           </p:cNvPr>
@@ -31466,7 +31483,7 @@
           <p:cNvPr id="16" name="Shape 14">
             <a:extLst xmlns:a="http://schemas.openxmlformats.org/drawingml/2006/main">
               <a:ext uri="{FF2B5EF4-FFF2-40B4-BE49-F238E27FC236}">
-                <a16:creationId xmlns:a16="http://schemas.microsoft.com/office/drawing/2014/main" id="{9985525D-D92A-4E4E-B384-86B9A417F7E5}"/>
+                <a16:creationId xmlns:a16="http://schemas.microsoft.com/office/drawing/2014/main" id="{873C8E57-08B4-4380-B940-9C0F07371B96}"/>
               </a:ext>
             </a:extLst>
           </p:cNvPr>
@@ -31501,7 +31518,7 @@
           <p:cNvPr id="17" name="Text 15">
             <a:extLst xmlns:a="http://schemas.openxmlformats.org/drawingml/2006/main">
               <a:ext uri="{FF2B5EF4-FFF2-40B4-BE49-F238E27FC236}">
-                <a16:creationId xmlns:a16="http://schemas.microsoft.com/office/drawing/2014/main" id="{EFFBA4E6-F27C-447F-B2DE-D15EC4E434FA}"/>
+                <a16:creationId xmlns:a16="http://schemas.microsoft.com/office/drawing/2014/main" id="{C3D9FD01-B2E2-4960-93A0-658B6D4244D3}"/>
               </a:ext>
             </a:extLst>
           </p:cNvPr>
@@ -31548,7 +31565,7 @@
           <p:cNvPr id="18" name="Text 16">
             <a:extLst xmlns:a="http://schemas.openxmlformats.org/drawingml/2006/main">
               <a:ext uri="{FF2B5EF4-FFF2-40B4-BE49-F238E27FC236}">
-                <a16:creationId xmlns:a16="http://schemas.microsoft.com/office/drawing/2014/main" id="{9A93D075-8F7B-414F-822B-E1D1B59F59B4}"/>
+                <a16:creationId xmlns:a16="http://schemas.microsoft.com/office/drawing/2014/main" id="{2AC1D964-7F87-4237-9F75-A6562E1340AA}"/>
               </a:ext>
             </a:extLst>
           </p:cNvPr>
@@ -31595,7 +31612,7 @@
           <p:cNvPr id="19" name="Shape 17">
             <a:extLst xmlns:a="http://schemas.openxmlformats.org/drawingml/2006/main">
               <a:ext uri="{FF2B5EF4-FFF2-40B4-BE49-F238E27FC236}">
-                <a16:creationId xmlns:a16="http://schemas.microsoft.com/office/drawing/2014/main" id="{A3805B86-7BCC-474D-9236-6647A180D279}"/>
+                <a16:creationId xmlns:a16="http://schemas.microsoft.com/office/drawing/2014/main" id="{7C20736E-B023-4EF0-9F34-1F51DFB17D9E}"/>
               </a:ext>
             </a:extLst>
           </p:cNvPr>
@@ -31630,7 +31647,7 @@
           <p:cNvPr id="20" name="Text 18">
             <a:extLst xmlns:a="http://schemas.openxmlformats.org/drawingml/2006/main">
               <a:ext uri="{FF2B5EF4-FFF2-40B4-BE49-F238E27FC236}">
-                <a16:creationId xmlns:a16="http://schemas.microsoft.com/office/drawing/2014/main" id="{4901F3F0-C2E9-4484-9B49-EFA84E5DDA40}"/>
+                <a16:creationId xmlns:a16="http://schemas.microsoft.com/office/drawing/2014/main" id="{4D35FBA5-27EA-4601-AF04-0434C2A07C5F}"/>
               </a:ext>
             </a:extLst>
           </p:cNvPr>
@@ -31677,7 +31694,7 @@
           <p:cNvPr id="21" name="Text 19">
             <a:extLst xmlns:a="http://schemas.openxmlformats.org/drawingml/2006/main">
               <a:ext uri="{FF2B5EF4-FFF2-40B4-BE49-F238E27FC236}">
-                <a16:creationId xmlns:a16="http://schemas.microsoft.com/office/drawing/2014/main" id="{377B258E-4923-425A-B521-42558A151061}"/>
+                <a16:creationId xmlns:a16="http://schemas.microsoft.com/office/drawing/2014/main" id="{71736FE1-7998-43A1-A63B-578523BEE944}"/>
               </a:ext>
             </a:extLst>
           </p:cNvPr>
@@ -31724,7 +31741,7 @@
           <p:cNvPr id="22" name="Shape 20">
             <a:extLst xmlns:a="http://schemas.openxmlformats.org/drawingml/2006/main">
               <a:ext uri="{FF2B5EF4-FFF2-40B4-BE49-F238E27FC236}">
-                <a16:creationId xmlns:a16="http://schemas.microsoft.com/office/drawing/2014/main" id="{9891BE4D-826A-4C90-A6AC-88AD4FA88E94}"/>
+                <a16:creationId xmlns:a16="http://schemas.microsoft.com/office/drawing/2014/main" id="{71A6C722-6F30-460F-AEA3-C2C4CFA22D84}"/>
               </a:ext>
             </a:extLst>
           </p:cNvPr>
@@ -31759,7 +31776,7 @@
           <p:cNvPr id="23" name="Text 21">
             <a:extLst xmlns:a="http://schemas.openxmlformats.org/drawingml/2006/main">
               <a:ext uri="{FF2B5EF4-FFF2-40B4-BE49-F238E27FC236}">
-                <a16:creationId xmlns:a16="http://schemas.microsoft.com/office/drawing/2014/main" id="{9B8B1F59-7F7C-404F-8183-4342F8E7A067}"/>
+                <a16:creationId xmlns:a16="http://schemas.microsoft.com/office/drawing/2014/main" id="{7ACE0893-4778-4097-B4C3-081A56F6D6B3}"/>
               </a:ext>
             </a:extLst>
           </p:cNvPr>
@@ -31806,7 +31823,7 @@
           <p:cNvPr id="24" name="Shape 22">
             <a:extLst xmlns:a="http://schemas.openxmlformats.org/drawingml/2006/main">
               <a:ext uri="{FF2B5EF4-FFF2-40B4-BE49-F238E27FC236}">
-                <a16:creationId xmlns:a16="http://schemas.microsoft.com/office/drawing/2014/main" id="{9062EE78-B13D-41FC-B757-363F4FEAC02E}"/>
+                <a16:creationId xmlns:a16="http://schemas.microsoft.com/office/drawing/2014/main" id="{385FB6F6-9C02-4E3E-A4D5-6493E80A6CE8}"/>
               </a:ext>
             </a:extLst>
           </p:cNvPr>
@@ -31839,7 +31856,7 @@
           <p:cNvPr id="25" name="Text 23">
             <a:extLst xmlns:a="http://schemas.openxmlformats.org/drawingml/2006/main">
               <a:ext uri="{FF2B5EF4-FFF2-40B4-BE49-F238E27FC236}">
-                <a16:creationId xmlns:a16="http://schemas.microsoft.com/office/drawing/2014/main" id="{AB6DCEF8-C0A6-408C-9F97-F3E4246F910E}"/>
+                <a16:creationId xmlns:a16="http://schemas.microsoft.com/office/drawing/2014/main" id="{3C3D2BB3-606B-4DBC-98B2-EAEB5F0C2F76}"/>
               </a:ext>
             </a:extLst>
           </p:cNvPr>
@@ -31886,7 +31903,7 @@
           <p:cNvPr id="26" name="Shape 24">
             <a:extLst xmlns:a="http://schemas.openxmlformats.org/drawingml/2006/main">
               <a:ext uri="{FF2B5EF4-FFF2-40B4-BE49-F238E27FC236}">
-                <a16:creationId xmlns:a16="http://schemas.microsoft.com/office/drawing/2014/main" id="{C5CEB66F-63EA-4C44-A705-B572F15B69F1}"/>
+                <a16:creationId xmlns:a16="http://schemas.microsoft.com/office/drawing/2014/main" id="{056361A2-697C-41E9-A2DC-8080C304F15F}"/>
               </a:ext>
             </a:extLst>
           </p:cNvPr>
@@ -31919,7 +31936,7 @@
           <p:cNvPr id="27" name="Text 25">
             <a:extLst xmlns:a="http://schemas.openxmlformats.org/drawingml/2006/main">
               <a:ext uri="{FF2B5EF4-FFF2-40B4-BE49-F238E27FC236}">
-                <a16:creationId xmlns:a16="http://schemas.microsoft.com/office/drawing/2014/main" id="{4C9949D5-DDFD-49F4-9FF5-656ABFA58EE6}"/>
+                <a16:creationId xmlns:a16="http://schemas.microsoft.com/office/drawing/2014/main" id="{D7CCE8C2-0CDC-460D-B231-7FD46C9472EE}"/>
               </a:ext>
             </a:extLst>
           </p:cNvPr>
@@ -31966,7 +31983,7 @@
           <p:cNvPr id="28" name="Shape 26">
             <a:extLst xmlns:a="http://schemas.openxmlformats.org/drawingml/2006/main">
               <a:ext uri="{FF2B5EF4-FFF2-40B4-BE49-F238E27FC236}">
-                <a16:creationId xmlns:a16="http://schemas.microsoft.com/office/drawing/2014/main" id="{AC6DB3B1-4586-4D91-98BC-038355BE6C6C}"/>
+                <a16:creationId xmlns:a16="http://schemas.microsoft.com/office/drawing/2014/main" id="{432DBF9D-9605-4D12-B357-6B65A9E1C19C}"/>
               </a:ext>
             </a:extLst>
           </p:cNvPr>
@@ -31999,7 +32016,7 @@
           <p:cNvPr id="29" name="Text 27">
             <a:extLst xmlns:a="http://schemas.openxmlformats.org/drawingml/2006/main">
               <a:ext uri="{FF2B5EF4-FFF2-40B4-BE49-F238E27FC236}">
-                <a16:creationId xmlns:a16="http://schemas.microsoft.com/office/drawing/2014/main" id="{7C8F19BE-3317-43CD-AE7B-06DE585571DE}"/>
+                <a16:creationId xmlns:a16="http://schemas.microsoft.com/office/drawing/2014/main" id="{289424D0-F181-45D6-8EC0-564098E1875A}"/>
               </a:ext>
             </a:extLst>
           </p:cNvPr>
@@ -32046,7 +32063,7 @@
           <p:cNvPr id="30" name="Text 28">
             <a:extLst xmlns:a="http://schemas.openxmlformats.org/drawingml/2006/main">
               <a:ext uri="{FF2B5EF4-FFF2-40B4-BE49-F238E27FC236}">
-                <a16:creationId xmlns:a16="http://schemas.microsoft.com/office/drawing/2014/main" id="{411FD9BE-1446-4C73-8D04-E474E2AF8815}"/>
+                <a16:creationId xmlns:a16="http://schemas.microsoft.com/office/drawing/2014/main" id="{BA60DF08-38E3-4406-8643-1841679887EF}"/>
               </a:ext>
             </a:extLst>
           </p:cNvPr>
@@ -32093,7 +32110,7 @@
           <p:cNvPr id="31" name="Text 29">
             <a:extLst xmlns:a="http://schemas.openxmlformats.org/drawingml/2006/main">
               <a:ext uri="{FF2B5EF4-FFF2-40B4-BE49-F238E27FC236}">
-                <a16:creationId xmlns:a16="http://schemas.microsoft.com/office/drawing/2014/main" id="{2490FC08-DF08-4C21-BF96-D9DD8243C5C4}"/>
+                <a16:creationId xmlns:a16="http://schemas.microsoft.com/office/drawing/2014/main" id="{79583678-B638-4A77-A345-9C220161E7BD}"/>
               </a:ext>
             </a:extLst>
           </p:cNvPr>
@@ -32140,7 +32157,7 @@
           <p:cNvPr id="32" name="Text 30">
             <a:extLst xmlns:a="http://schemas.openxmlformats.org/drawingml/2006/main">
               <a:ext uri="{FF2B5EF4-FFF2-40B4-BE49-F238E27FC236}">
-                <a16:creationId xmlns:a16="http://schemas.microsoft.com/office/drawing/2014/main" id="{743AE35A-8993-475E-B3B4-53934C778C20}"/>
+                <a16:creationId xmlns:a16="http://schemas.microsoft.com/office/drawing/2014/main" id="{EF216925-C80D-446D-A898-D8E4E0EAEBA5}"/>
               </a:ext>
             </a:extLst>
           </p:cNvPr>
@@ -32185,7 +32202,7 @@
     </p:spTree>
     <p:extLst>
       <p:ext uri="{BB962C8B-B14F-4D97-AF65-F5344CB8AC3E}">
-        <p14:creationId xmlns:p14="http://schemas.microsoft.com/office/powerpoint/2010/main" val="1562497651"/>
+        <p14:creationId xmlns:p14="http://schemas.microsoft.com/office/powerpoint/2010/main" val="310956817"/>
       </p:ext>
     </p:extLst>
   </p:cSld>

--- a/docs/presentation/BAI-Work-Defense-Deck.pptx
+++ b/docs/presentation/BAI-Work-Defense-Deck.pptx
@@ -2,31 +2,31 @@
 <file path=ppt/presentation.xml><?xml version="1.0" encoding="utf-8"?>
 <p:presentation xmlns:p="http://schemas.openxmlformats.org/presentationml/2006/main">
   <p:sldMasterIdLst>
-    <p:sldMasterId xmlns:r="http://schemas.openxmlformats.org/officeDocument/2006/relationships" id="2147483648" r:id="Rd0f5ee54ffd440c6"/>
+    <p:sldMasterId xmlns:r="http://schemas.openxmlformats.org/officeDocument/2006/relationships" id="2147483648" r:id="R2bef834098ef4ab6"/>
   </p:sldMasterIdLst>
   <p:notesMasterIdLst>
-    <p:notesMasterId xmlns:r="http://schemas.openxmlformats.org/officeDocument/2006/relationships" r:id="Rf95714a4e03e4199"/>
+    <p:notesMasterId xmlns:r="http://schemas.openxmlformats.org/officeDocument/2006/relationships" r:id="Rbe2d5f20d4ec462f"/>
   </p:notesMasterIdLst>
   <p:sldIdLst>
-    <p:sldId xmlns:r="http://schemas.openxmlformats.org/officeDocument/2006/relationships" id="256" r:id="Raf6f9f00db1b4ad5"/>
-    <p:sldId xmlns:r="http://schemas.openxmlformats.org/officeDocument/2006/relationships" id="257" r:id="Rcc9b238d53ea4e67"/>
-    <p:sldId xmlns:r="http://schemas.openxmlformats.org/officeDocument/2006/relationships" id="258" r:id="Reaae14d6d4174ab5"/>
-    <p:sldId xmlns:r="http://schemas.openxmlformats.org/officeDocument/2006/relationships" id="259" r:id="R385aaf49c635422e"/>
-    <p:sldId xmlns:r="http://schemas.openxmlformats.org/officeDocument/2006/relationships" id="260" r:id="R139b78bf3a214f14"/>
-    <p:sldId xmlns:r="http://schemas.openxmlformats.org/officeDocument/2006/relationships" id="261" r:id="R67792ed397174cf5"/>
-    <p:sldId xmlns:r="http://schemas.openxmlformats.org/officeDocument/2006/relationships" id="262" r:id="R09eeae1e96864cc9"/>
-    <p:sldId xmlns:r="http://schemas.openxmlformats.org/officeDocument/2006/relationships" id="263" r:id="R8b848594312d4694"/>
-    <p:sldId xmlns:r="http://schemas.openxmlformats.org/officeDocument/2006/relationships" id="264" r:id="R28bb7a5cf3a542d6"/>
-    <p:sldId xmlns:r="http://schemas.openxmlformats.org/officeDocument/2006/relationships" id="265" r:id="R6e2816ed88304a99"/>
-    <p:sldId xmlns:r="http://schemas.openxmlformats.org/officeDocument/2006/relationships" id="266" r:id="R8be7560b5eb2442c"/>
-    <p:sldId xmlns:r="http://schemas.openxmlformats.org/officeDocument/2006/relationships" id="267" r:id="Rc6bc5fdc083f4d09"/>
-    <p:sldId xmlns:r="http://schemas.openxmlformats.org/officeDocument/2006/relationships" id="268" r:id="Rf5f21f87030944b1"/>
-    <p:sldId xmlns:r="http://schemas.openxmlformats.org/officeDocument/2006/relationships" id="269" r:id="R93f16f3056a24681"/>
-    <p:sldId xmlns:r="http://schemas.openxmlformats.org/officeDocument/2006/relationships" id="270" r:id="Rb199909d84f942e7"/>
-    <p:sldId xmlns:r="http://schemas.openxmlformats.org/officeDocument/2006/relationships" id="271" r:id="R3029335563f54422"/>
-    <p:sldId xmlns:r="http://schemas.openxmlformats.org/officeDocument/2006/relationships" id="272" r:id="Rf86253a2bfe84375"/>
-    <p:sldId xmlns:r="http://schemas.openxmlformats.org/officeDocument/2006/relationships" id="273" r:id="Rf3f62b1d5c7f49bd"/>
-    <p:sldId xmlns:r="http://schemas.openxmlformats.org/officeDocument/2006/relationships" id="274" r:id="Rfd5de7ece8e34b47"/>
+    <p:sldId xmlns:r="http://schemas.openxmlformats.org/officeDocument/2006/relationships" id="256" r:id="R84e99ccaa4804594"/>
+    <p:sldId xmlns:r="http://schemas.openxmlformats.org/officeDocument/2006/relationships" id="257" r:id="R19eca8a186344a15"/>
+    <p:sldId xmlns:r="http://schemas.openxmlformats.org/officeDocument/2006/relationships" id="258" r:id="Rf31d9a52ac934149"/>
+    <p:sldId xmlns:r="http://schemas.openxmlformats.org/officeDocument/2006/relationships" id="259" r:id="Rdb74272636404daa"/>
+    <p:sldId xmlns:r="http://schemas.openxmlformats.org/officeDocument/2006/relationships" id="260" r:id="Rc02f8181407b4b0b"/>
+    <p:sldId xmlns:r="http://schemas.openxmlformats.org/officeDocument/2006/relationships" id="261" r:id="R03b8341de98d4504"/>
+    <p:sldId xmlns:r="http://schemas.openxmlformats.org/officeDocument/2006/relationships" id="262" r:id="R5dfbe5c0f5e644b3"/>
+    <p:sldId xmlns:r="http://schemas.openxmlformats.org/officeDocument/2006/relationships" id="263" r:id="Ra52d7254298046fc"/>
+    <p:sldId xmlns:r="http://schemas.openxmlformats.org/officeDocument/2006/relationships" id="264" r:id="Rfded3f76b9c14ff6"/>
+    <p:sldId xmlns:r="http://schemas.openxmlformats.org/officeDocument/2006/relationships" id="265" r:id="R318c78d3b5ef4653"/>
+    <p:sldId xmlns:r="http://schemas.openxmlformats.org/officeDocument/2006/relationships" id="266" r:id="Rc39a4999e8244796"/>
+    <p:sldId xmlns:r="http://schemas.openxmlformats.org/officeDocument/2006/relationships" id="267" r:id="R5d524ca92dec43e5"/>
+    <p:sldId xmlns:r="http://schemas.openxmlformats.org/officeDocument/2006/relationships" id="268" r:id="R9d990a921eae416e"/>
+    <p:sldId xmlns:r="http://schemas.openxmlformats.org/officeDocument/2006/relationships" id="269" r:id="R08bfed3c5a1048d3"/>
+    <p:sldId xmlns:r="http://schemas.openxmlformats.org/officeDocument/2006/relationships" id="270" r:id="R29ab08167b4f4e0a"/>
+    <p:sldId xmlns:r="http://schemas.openxmlformats.org/officeDocument/2006/relationships" id="271" r:id="R292a062ff8b24f7c"/>
+    <p:sldId xmlns:r="http://schemas.openxmlformats.org/officeDocument/2006/relationships" id="272" r:id="R72c7ef18eb8442db"/>
+    <p:sldId xmlns:r="http://schemas.openxmlformats.org/officeDocument/2006/relationships" id="273" r:id="Rc51e675b72b149cc"/>
+    <p:sldId xmlns:r="http://schemas.openxmlformats.org/officeDocument/2006/relationships" id="274" r:id="Rbfa48fa78d3542fc"/>
   </p:sldIdLst>
   <p:sldSz cx="12191695" cy="6858000"/>
   <p:notesSz cx="6858000" cy="9144000"/>
@@ -1104,6 +1104,11 @@
               <a:t>GPT-5.6 ChatGPT Codex 用于本次贡献流程的协作与复核；公开仓库只证明 PR 合并与版本发布，因此不宣称 Codex 产品直接集成这段代码。</a:t>
             </a:r>
           </a:p>
+          <a:p xmlns:a="http://schemas.openxmlformats.org/drawingml/2006/main">
+            <a:r>
+              <a:t>公开来源：https://github.com/openai/openai-agents-python/pull/3642 · https://github.com/openai/openai-agents-python/releases/tag/v0.17.7 · https://help.openai.com/en/articles/20001354-gpt-56-in-chatgpt</a:t>
+            </a:r>
+          </a:p>
         </p:txBody>
       </p:sp>
       <p:sp>
@@ -2112,7 +2117,7 @@
   </p:cSld>
   <p:clrMap bg1="lt1" tx1="dk1" bg2="lt2" tx2="dk2" accent1="accent1" accent2="accent2" accent3="accent3" accent4="accent4" accent5="accent5" accent6="accent6" hlink="hlink" folHlink="folHlink"/>
   <p:sldLayoutIdLst>
-    <p:sldLayoutId xmlns:r="http://schemas.openxmlformats.org/officeDocument/2006/relationships" id="2147483649" r:id="R1c202630f0004b71"/>
+    <p:sldLayoutId xmlns:r="http://schemas.openxmlformats.org/officeDocument/2006/relationships" id="2147483649" r:id="Re0a63b8a47c147d5"/>
   </p:sldLayoutIdLst>
   <p:hf sldNum="0" hdr="0" ftr="0" dt="0"/>
   <p:txStyles>
@@ -2683,7 +2688,7 @@
           <p:cNvPr id="2" name="Shape 0">
             <a:extLst xmlns:a="http://schemas.openxmlformats.org/drawingml/2006/main">
               <a:ext uri="{FF2B5EF4-FFF2-40B4-BE49-F238E27FC236}">
-                <a16:creationId xmlns:a16="http://schemas.microsoft.com/office/drawing/2014/main" id="{5A4BDF23-DFD8-4A17-83DE-8D89E74D31F8}"/>
+                <a16:creationId xmlns:a16="http://schemas.microsoft.com/office/drawing/2014/main" id="{1C4468A6-0129-43D1-925B-4C0BBFEDBE2D}"/>
               </a:ext>
             </a:extLst>
           </p:cNvPr>
@@ -2716,7 +2721,7 @@
           <p:cNvPr id="3" name="Shape 1">
             <a:extLst xmlns:a="http://schemas.openxmlformats.org/drawingml/2006/main">
               <a:ext uri="{FF2B5EF4-FFF2-40B4-BE49-F238E27FC236}">
-                <a16:creationId xmlns:a16="http://schemas.microsoft.com/office/drawing/2014/main" id="{AFFA43CD-CC1F-47DB-AEB5-968446741A33}"/>
+                <a16:creationId xmlns:a16="http://schemas.microsoft.com/office/drawing/2014/main" id="{B3C4FAE4-483B-4F3F-826D-B7E9069BA1BF}"/>
               </a:ext>
             </a:extLst>
           </p:cNvPr>
@@ -2755,7 +2760,7 @@
           <p:nvPr/>
         </p:nvPicPr>
         <p:blipFill>
-          <a:blip xmlns:r="http://schemas.openxmlformats.org/officeDocument/2006/relationships" xmlns:a="http://schemas.openxmlformats.org/drawingml/2006/main" r:embed="R48fc2610ad4d496c"/>
+          <a:blip xmlns:r="http://schemas.openxmlformats.org/officeDocument/2006/relationships" xmlns:a="http://schemas.openxmlformats.org/drawingml/2006/main" r:embed="Rfebb3873a0eb4ca1"/>
           <a:stretch xmlns:a="http://schemas.openxmlformats.org/drawingml/2006/main">
             <a:fillRect l="0" t="0" r="0" b="0"/>
           </a:stretch>
@@ -2775,7 +2780,7 @@
           <p:cNvPr id="5" name="Shape 2">
             <a:extLst xmlns:a="http://schemas.openxmlformats.org/drawingml/2006/main">
               <a:ext uri="{FF2B5EF4-FFF2-40B4-BE49-F238E27FC236}">
-                <a16:creationId xmlns:a16="http://schemas.microsoft.com/office/drawing/2014/main" id="{0D9B947A-7BFC-4C5B-8F6E-9111208F4269}"/>
+                <a16:creationId xmlns:a16="http://schemas.microsoft.com/office/drawing/2014/main" id="{4BA56327-F691-44DF-A6D0-E243B3500377}"/>
               </a:ext>
             </a:extLst>
           </p:cNvPr>
@@ -2808,7 +2813,7 @@
           <p:cNvPr id="6" name="Text 3">
             <a:extLst xmlns:a="http://schemas.openxmlformats.org/drawingml/2006/main">
               <a:ext uri="{FF2B5EF4-FFF2-40B4-BE49-F238E27FC236}">
-                <a16:creationId xmlns:a16="http://schemas.microsoft.com/office/drawing/2014/main" id="{3F8401EC-7DDE-46C6-8BA2-7FD3E71171A2}"/>
+                <a16:creationId xmlns:a16="http://schemas.microsoft.com/office/drawing/2014/main" id="{CDF3E910-5DED-4212-B2A1-92CFA6CF7B36}"/>
               </a:ext>
             </a:extLst>
           </p:cNvPr>
@@ -2855,7 +2860,7 @@
           <p:cNvPr id="7" name="Shape 4">
             <a:extLst xmlns:a="http://schemas.openxmlformats.org/drawingml/2006/main">
               <a:ext uri="{FF2B5EF4-FFF2-40B4-BE49-F238E27FC236}">
-                <a16:creationId xmlns:a16="http://schemas.microsoft.com/office/drawing/2014/main" id="{986E5DCF-D5BA-4DC6-B780-8878AFDD85B1}"/>
+                <a16:creationId xmlns:a16="http://schemas.microsoft.com/office/drawing/2014/main" id="{E077EBAE-D9F1-41E6-AA07-E72310AFC8AA}"/>
               </a:ext>
             </a:extLst>
           </p:cNvPr>
@@ -2888,7 +2893,7 @@
           <p:cNvPr id="8" name="Text 5">
             <a:extLst xmlns:a="http://schemas.openxmlformats.org/drawingml/2006/main">
               <a:ext uri="{FF2B5EF4-FFF2-40B4-BE49-F238E27FC236}">
-                <a16:creationId xmlns:a16="http://schemas.microsoft.com/office/drawing/2014/main" id="{CE96765D-B2C6-439A-B880-93F651951C99}"/>
+                <a16:creationId xmlns:a16="http://schemas.microsoft.com/office/drawing/2014/main" id="{32B37A77-577B-4EBC-9906-1818B6CC3DD9}"/>
               </a:ext>
             </a:extLst>
           </p:cNvPr>
@@ -2939,7 +2944,7 @@
           <p:nvPr/>
         </p:nvPicPr>
         <p:blipFill>
-          <a:blip xmlns:r="http://schemas.openxmlformats.org/officeDocument/2006/relationships" xmlns:a="http://schemas.openxmlformats.org/drawingml/2006/main" r:embed="R9e1fd36c5fa04d12"/>
+          <a:blip xmlns:r="http://schemas.openxmlformats.org/officeDocument/2006/relationships" xmlns:a="http://schemas.openxmlformats.org/drawingml/2006/main" r:embed="R45a1dc828de9498e"/>
           <a:stretch xmlns:a="http://schemas.openxmlformats.org/drawingml/2006/main">
             <a:fillRect l="0" t="0" r="0" b="0"/>
           </a:stretch>
@@ -2959,7 +2964,7 @@
           <p:cNvPr id="10" name="Text 6">
             <a:extLst xmlns:a="http://schemas.openxmlformats.org/drawingml/2006/main">
               <a:ext uri="{FF2B5EF4-FFF2-40B4-BE49-F238E27FC236}">
-                <a16:creationId xmlns:a16="http://schemas.microsoft.com/office/drawing/2014/main" id="{E9EF86E0-C753-4E70-A312-28D2AAA0F523}"/>
+                <a16:creationId xmlns:a16="http://schemas.microsoft.com/office/drawing/2014/main" id="{CED5AAF5-6848-4305-B825-73F52804E3BB}"/>
               </a:ext>
             </a:extLst>
           </p:cNvPr>
@@ -3006,7 +3011,7 @@
           <p:cNvPr id="11" name="Text 7">
             <a:extLst xmlns:a="http://schemas.openxmlformats.org/drawingml/2006/main">
               <a:ext uri="{FF2B5EF4-FFF2-40B4-BE49-F238E27FC236}">
-                <a16:creationId xmlns:a16="http://schemas.microsoft.com/office/drawing/2014/main" id="{76892DAB-76C1-4B1D-8403-199C40F6B03C}"/>
+                <a16:creationId xmlns:a16="http://schemas.microsoft.com/office/drawing/2014/main" id="{C67D328A-7286-4410-A369-E53C426765DD}"/>
               </a:ext>
             </a:extLst>
           </p:cNvPr>
@@ -3053,7 +3058,7 @@
           <p:cNvPr id="12" name="Shape 8">
             <a:extLst xmlns:a="http://schemas.openxmlformats.org/drawingml/2006/main">
               <a:ext uri="{FF2B5EF4-FFF2-40B4-BE49-F238E27FC236}">
-                <a16:creationId xmlns:a16="http://schemas.microsoft.com/office/drawing/2014/main" id="{ED4CF059-3D84-469A-AD6F-C8F54FA6B7FD}"/>
+                <a16:creationId xmlns:a16="http://schemas.microsoft.com/office/drawing/2014/main" id="{8EA6B0C6-31EE-46BF-90DF-F6A5A106B69B}"/>
               </a:ext>
             </a:extLst>
           </p:cNvPr>
@@ -3088,7 +3093,7 @@
           <p:cNvPr id="13" name="Text 9">
             <a:extLst xmlns:a="http://schemas.openxmlformats.org/drawingml/2006/main">
               <a:ext uri="{FF2B5EF4-FFF2-40B4-BE49-F238E27FC236}">
-                <a16:creationId xmlns:a16="http://schemas.microsoft.com/office/drawing/2014/main" id="{F811D1E5-31FC-4B7C-973C-482CD824F346}"/>
+                <a16:creationId xmlns:a16="http://schemas.microsoft.com/office/drawing/2014/main" id="{E0680DB7-FDA6-48F6-A91D-A3FD2BFEE8BA}"/>
               </a:ext>
             </a:extLst>
           </p:cNvPr>
@@ -3135,7 +3140,7 @@
           <p:cNvPr id="14" name="Shape 10">
             <a:extLst xmlns:a="http://schemas.openxmlformats.org/drawingml/2006/main">
               <a:ext uri="{FF2B5EF4-FFF2-40B4-BE49-F238E27FC236}">
-                <a16:creationId xmlns:a16="http://schemas.microsoft.com/office/drawing/2014/main" id="{E6FD5049-A4AD-4568-812E-F6CB923CC3AF}"/>
+                <a16:creationId xmlns:a16="http://schemas.microsoft.com/office/drawing/2014/main" id="{397A8DE6-2FE5-41F0-9C48-F6B8DB7D5E0C}"/>
               </a:ext>
             </a:extLst>
           </p:cNvPr>
@@ -3170,7 +3175,7 @@
           <p:cNvPr id="15" name="Text 11">
             <a:extLst xmlns:a="http://schemas.openxmlformats.org/drawingml/2006/main">
               <a:ext uri="{FF2B5EF4-FFF2-40B4-BE49-F238E27FC236}">
-                <a16:creationId xmlns:a16="http://schemas.microsoft.com/office/drawing/2014/main" id="{DFE6A8AE-82CF-466C-9515-1F690C7F2044}"/>
+                <a16:creationId xmlns:a16="http://schemas.microsoft.com/office/drawing/2014/main" id="{FD88627D-5C26-4FC9-A655-F101267C8B74}"/>
               </a:ext>
             </a:extLst>
           </p:cNvPr>
@@ -3217,7 +3222,7 @@
           <p:cNvPr id="16" name="Shape 12">
             <a:extLst xmlns:a="http://schemas.openxmlformats.org/drawingml/2006/main">
               <a:ext uri="{FF2B5EF4-FFF2-40B4-BE49-F238E27FC236}">
-                <a16:creationId xmlns:a16="http://schemas.microsoft.com/office/drawing/2014/main" id="{477F0337-7F40-4D97-98E7-DEF3BC57179A}"/>
+                <a16:creationId xmlns:a16="http://schemas.microsoft.com/office/drawing/2014/main" id="{A1E80FFC-7E97-4814-9FE8-580455AD05CF}"/>
               </a:ext>
             </a:extLst>
           </p:cNvPr>
@@ -3252,7 +3257,7 @@
           <p:cNvPr id="17" name="Text 13">
             <a:extLst xmlns:a="http://schemas.openxmlformats.org/drawingml/2006/main">
               <a:ext uri="{FF2B5EF4-FFF2-40B4-BE49-F238E27FC236}">
-                <a16:creationId xmlns:a16="http://schemas.microsoft.com/office/drawing/2014/main" id="{49BDE66F-9101-411C-A938-156B11A3830F}"/>
+                <a16:creationId xmlns:a16="http://schemas.microsoft.com/office/drawing/2014/main" id="{22B022CD-2CEF-4B52-A63C-2318C73C4FA7}"/>
               </a:ext>
             </a:extLst>
           </p:cNvPr>
@@ -3299,7 +3304,7 @@
           <p:cNvPr id="18" name="Shape 14">
             <a:extLst xmlns:a="http://schemas.openxmlformats.org/drawingml/2006/main">
               <a:ext uri="{FF2B5EF4-FFF2-40B4-BE49-F238E27FC236}">
-                <a16:creationId xmlns:a16="http://schemas.microsoft.com/office/drawing/2014/main" id="{39C3514E-2AD7-4905-9113-82823494C6F2}"/>
+                <a16:creationId xmlns:a16="http://schemas.microsoft.com/office/drawing/2014/main" id="{799C750C-58A4-4BE7-BB2D-3495FFA80980}"/>
               </a:ext>
             </a:extLst>
           </p:cNvPr>
@@ -3334,7 +3339,7 @@
           <p:cNvPr id="19" name="Text 15">
             <a:extLst xmlns:a="http://schemas.openxmlformats.org/drawingml/2006/main">
               <a:ext uri="{FF2B5EF4-FFF2-40B4-BE49-F238E27FC236}">
-                <a16:creationId xmlns:a16="http://schemas.microsoft.com/office/drawing/2014/main" id="{57C9C1DA-8B82-4072-B12C-A10ACE9B2857}"/>
+                <a16:creationId xmlns:a16="http://schemas.microsoft.com/office/drawing/2014/main" id="{C33D64A7-0AEA-4858-B5C5-D30B3B13F4C6}"/>
               </a:ext>
             </a:extLst>
           </p:cNvPr>
@@ -3381,7 +3386,7 @@
           <p:cNvPr id="20" name="Shape 16">
             <a:extLst xmlns:a="http://schemas.openxmlformats.org/drawingml/2006/main">
               <a:ext uri="{FF2B5EF4-FFF2-40B4-BE49-F238E27FC236}">
-                <a16:creationId xmlns:a16="http://schemas.microsoft.com/office/drawing/2014/main" id="{E8047C08-22B3-4C8E-9A4D-6057FD32CB51}"/>
+                <a16:creationId xmlns:a16="http://schemas.microsoft.com/office/drawing/2014/main" id="{5DDEB0DF-5EF8-4518-A51A-EB4DACF078AB}"/>
               </a:ext>
             </a:extLst>
           </p:cNvPr>
@@ -3416,7 +3421,7 @@
           <p:cNvPr id="21" name="Text 17">
             <a:extLst xmlns:a="http://schemas.openxmlformats.org/drawingml/2006/main">
               <a:ext uri="{FF2B5EF4-FFF2-40B4-BE49-F238E27FC236}">
-                <a16:creationId xmlns:a16="http://schemas.microsoft.com/office/drawing/2014/main" id="{E7CFCFE8-3DC9-4102-8E78-634B256AAF1F}"/>
+                <a16:creationId xmlns:a16="http://schemas.microsoft.com/office/drawing/2014/main" id="{8B07200E-6A65-43F6-9DFE-94E7CC61E8AD}"/>
               </a:ext>
             </a:extLst>
           </p:cNvPr>
@@ -3463,7 +3468,7 @@
           <p:cNvPr id="22" name="Text 18">
             <a:extLst xmlns:a="http://schemas.openxmlformats.org/drawingml/2006/main">
               <a:ext uri="{FF2B5EF4-FFF2-40B4-BE49-F238E27FC236}">
-                <a16:creationId xmlns:a16="http://schemas.microsoft.com/office/drawing/2014/main" id="{3F1B0535-9CB4-4A7D-A9B3-F2948636801F}"/>
+                <a16:creationId xmlns:a16="http://schemas.microsoft.com/office/drawing/2014/main" id="{A27AE483-2D86-4DAD-9AE3-9A03E15F2728}"/>
               </a:ext>
             </a:extLst>
           </p:cNvPr>
@@ -3510,7 +3515,7 @@
           <p:cNvPr id="23" name="Text 19">
             <a:extLst xmlns:a="http://schemas.openxmlformats.org/drawingml/2006/main">
               <a:ext uri="{FF2B5EF4-FFF2-40B4-BE49-F238E27FC236}">
-                <a16:creationId xmlns:a16="http://schemas.microsoft.com/office/drawing/2014/main" id="{BF40DF44-F574-49D0-870F-FED44124805C}"/>
+                <a16:creationId xmlns:a16="http://schemas.microsoft.com/office/drawing/2014/main" id="{579DB47E-7456-4205-AD74-BB724B823DFB}"/>
               </a:ext>
             </a:extLst>
           </p:cNvPr>
@@ -3557,7 +3562,7 @@
           <p:cNvPr id="24" name="Text 20">
             <a:extLst xmlns:a="http://schemas.openxmlformats.org/drawingml/2006/main">
               <a:ext uri="{FF2B5EF4-FFF2-40B4-BE49-F238E27FC236}">
-                <a16:creationId xmlns:a16="http://schemas.microsoft.com/office/drawing/2014/main" id="{48078A19-F20C-4C43-8FD0-3BE58120BABA}"/>
+                <a16:creationId xmlns:a16="http://schemas.microsoft.com/office/drawing/2014/main" id="{4962B14D-C02F-49BE-A62C-302E52140517}"/>
               </a:ext>
             </a:extLst>
           </p:cNvPr>
@@ -3602,7 +3607,7 @@
     </p:spTree>
     <p:extLst>
       <p:ext uri="{BB962C8B-B14F-4D97-AF65-F5344CB8AC3E}">
-        <p14:creationId xmlns:p14="http://schemas.microsoft.com/office/powerpoint/2010/main" val="1228691379"/>
+        <p14:creationId xmlns:p14="http://schemas.microsoft.com/office/powerpoint/2010/main" val="663442985"/>
       </p:ext>
     </p:extLst>
   </p:cSld>
@@ -3633,7 +3638,7 @@
           <p:cNvPr id="2" name="Text 0">
             <a:extLst xmlns:a="http://schemas.openxmlformats.org/drawingml/2006/main">
               <a:ext uri="{FF2B5EF4-FFF2-40B4-BE49-F238E27FC236}">
-                <a16:creationId xmlns:a16="http://schemas.microsoft.com/office/drawing/2014/main" id="{DDC36DD9-70FD-43F7-A29E-8AC3F9045EAA}"/>
+                <a16:creationId xmlns:a16="http://schemas.microsoft.com/office/drawing/2014/main" id="{C4BE4DCD-4CA7-446A-8740-F61B5EF6EEF0}"/>
               </a:ext>
             </a:extLst>
           </p:cNvPr>
@@ -3680,7 +3685,7 @@
           <p:cNvPr id="3" name="Text 1">
             <a:extLst xmlns:a="http://schemas.openxmlformats.org/drawingml/2006/main">
               <a:ext uri="{FF2B5EF4-FFF2-40B4-BE49-F238E27FC236}">
-                <a16:creationId xmlns:a16="http://schemas.microsoft.com/office/drawing/2014/main" id="{C7D3B8B8-63F5-4C7F-804F-00D4373A4398}"/>
+                <a16:creationId xmlns:a16="http://schemas.microsoft.com/office/drawing/2014/main" id="{88A4CE8D-7C3B-4535-8697-0F4C150A18AC}"/>
               </a:ext>
             </a:extLst>
           </p:cNvPr>
@@ -3727,7 +3732,7 @@
           <p:cNvPr id="4" name="Shape 2">
             <a:extLst xmlns:a="http://schemas.openxmlformats.org/drawingml/2006/main">
               <a:ext uri="{FF2B5EF4-FFF2-40B4-BE49-F238E27FC236}">
-                <a16:creationId xmlns:a16="http://schemas.microsoft.com/office/drawing/2014/main" id="{D20EA43E-66E0-4693-8F72-5EB1C5142593}"/>
+                <a16:creationId xmlns:a16="http://schemas.microsoft.com/office/drawing/2014/main" id="{074450AF-0A1B-441A-9CF3-CD1C655034B3}"/>
               </a:ext>
             </a:extLst>
           </p:cNvPr>
@@ -3762,7 +3767,7 @@
           <p:cNvPr id="5" name="Text 3">
             <a:extLst xmlns:a="http://schemas.openxmlformats.org/drawingml/2006/main">
               <a:ext uri="{FF2B5EF4-FFF2-40B4-BE49-F238E27FC236}">
-                <a16:creationId xmlns:a16="http://schemas.microsoft.com/office/drawing/2014/main" id="{43520A45-151D-47FE-8525-1513E2537AE6}"/>
+                <a16:creationId xmlns:a16="http://schemas.microsoft.com/office/drawing/2014/main" id="{ACB8523C-9B00-4828-A23C-005E1FBF13E2}"/>
               </a:ext>
             </a:extLst>
           </p:cNvPr>
@@ -3809,7 +3814,7 @@
           <p:cNvPr id="6" name="Shape 4">
             <a:extLst xmlns:a="http://schemas.openxmlformats.org/drawingml/2006/main">
               <a:ext uri="{FF2B5EF4-FFF2-40B4-BE49-F238E27FC236}">
-                <a16:creationId xmlns:a16="http://schemas.microsoft.com/office/drawing/2014/main" id="{4370B399-F4EC-4D3D-98D7-B91C637D5181}"/>
+                <a16:creationId xmlns:a16="http://schemas.microsoft.com/office/drawing/2014/main" id="{7DA8244D-D23D-42F7-BB99-DFAC8427C588}"/>
               </a:ext>
             </a:extLst>
           </p:cNvPr>
@@ -3840,7 +3845,7 @@
           <p:cNvPr id="7" name="Shape 5">
             <a:extLst xmlns:a="http://schemas.openxmlformats.org/drawingml/2006/main">
               <a:ext uri="{FF2B5EF4-FFF2-40B4-BE49-F238E27FC236}">
-                <a16:creationId xmlns:a16="http://schemas.microsoft.com/office/drawing/2014/main" id="{C24EE178-30C6-4319-8D0A-617EE26CD497}"/>
+                <a16:creationId xmlns:a16="http://schemas.microsoft.com/office/drawing/2014/main" id="{C9FAB054-E333-4F55-BA90-066BB9090279}"/>
               </a:ext>
             </a:extLst>
           </p:cNvPr>
@@ -3875,7 +3880,7 @@
           <p:cNvPr id="8" name="Shape 6">
             <a:extLst xmlns:a="http://schemas.openxmlformats.org/drawingml/2006/main">
               <a:ext uri="{FF2B5EF4-FFF2-40B4-BE49-F238E27FC236}">
-                <a16:creationId xmlns:a16="http://schemas.microsoft.com/office/drawing/2014/main" id="{F13F19EE-D002-41B7-A514-D69F403F9697}"/>
+                <a16:creationId xmlns:a16="http://schemas.microsoft.com/office/drawing/2014/main" id="{788F5684-6F7C-4E31-BEB0-A95EB2501D97}"/>
               </a:ext>
             </a:extLst>
           </p:cNvPr>
@@ -3910,7 +3915,7 @@
           <p:cNvPr id="9" name="Text 7">
             <a:extLst xmlns:a="http://schemas.openxmlformats.org/drawingml/2006/main">
               <a:ext uri="{FF2B5EF4-FFF2-40B4-BE49-F238E27FC236}">
-                <a16:creationId xmlns:a16="http://schemas.microsoft.com/office/drawing/2014/main" id="{9EFED68B-29E4-4B89-92C8-3F0BD9EE46E2}"/>
+                <a16:creationId xmlns:a16="http://schemas.microsoft.com/office/drawing/2014/main" id="{0D128BB5-C991-4D95-8AD9-BF96C319375D}"/>
               </a:ext>
             </a:extLst>
           </p:cNvPr>
@@ -3957,7 +3962,7 @@
           <p:cNvPr id="10" name="Text 8">
             <a:extLst xmlns:a="http://schemas.openxmlformats.org/drawingml/2006/main">
               <a:ext uri="{FF2B5EF4-FFF2-40B4-BE49-F238E27FC236}">
-                <a16:creationId xmlns:a16="http://schemas.microsoft.com/office/drawing/2014/main" id="{345DB239-D8C6-4590-835C-E0D5B1260AFA}"/>
+                <a16:creationId xmlns:a16="http://schemas.microsoft.com/office/drawing/2014/main" id="{5E5015B8-F01A-41D4-BA97-2E6D0A4CC599}"/>
               </a:ext>
             </a:extLst>
           </p:cNvPr>
@@ -4004,7 +4009,7 @@
           <p:cNvPr id="11" name="Text 9">
             <a:extLst xmlns:a="http://schemas.openxmlformats.org/drawingml/2006/main">
               <a:ext uri="{FF2B5EF4-FFF2-40B4-BE49-F238E27FC236}">
-                <a16:creationId xmlns:a16="http://schemas.microsoft.com/office/drawing/2014/main" id="{31BC2F33-900D-4920-A2D7-5AB119C1DE83}"/>
+                <a16:creationId xmlns:a16="http://schemas.microsoft.com/office/drawing/2014/main" id="{7B3D781E-729D-40FC-AE84-68E921C15C29}"/>
               </a:ext>
             </a:extLst>
           </p:cNvPr>
@@ -4051,7 +4056,7 @@
           <p:cNvPr id="12" name="Text 10">
             <a:extLst xmlns:a="http://schemas.openxmlformats.org/drawingml/2006/main">
               <a:ext uri="{FF2B5EF4-FFF2-40B4-BE49-F238E27FC236}">
-                <a16:creationId xmlns:a16="http://schemas.microsoft.com/office/drawing/2014/main" id="{D838AD1C-AF01-4F1E-8E27-36B33530F38F}"/>
+                <a16:creationId xmlns:a16="http://schemas.microsoft.com/office/drawing/2014/main" id="{F384E120-C317-4D63-91C5-58B5B4DBA9E0}"/>
               </a:ext>
             </a:extLst>
           </p:cNvPr>
@@ -4098,7 +4103,7 @@
           <p:cNvPr id="13" name="Text 11">
             <a:extLst xmlns:a="http://schemas.openxmlformats.org/drawingml/2006/main">
               <a:ext uri="{FF2B5EF4-FFF2-40B4-BE49-F238E27FC236}">
-                <a16:creationId xmlns:a16="http://schemas.microsoft.com/office/drawing/2014/main" id="{7753293D-6D62-495D-8FE0-30F91DCF4044}"/>
+                <a16:creationId xmlns:a16="http://schemas.microsoft.com/office/drawing/2014/main" id="{E26C7B39-2ECF-4A72-B1B8-D04769BB0A49}"/>
               </a:ext>
             </a:extLst>
           </p:cNvPr>
@@ -4145,7 +4150,7 @@
           <p:cNvPr id="14" name="Shape 12">
             <a:extLst xmlns:a="http://schemas.openxmlformats.org/drawingml/2006/main">
               <a:ext uri="{FF2B5EF4-FFF2-40B4-BE49-F238E27FC236}">
-                <a16:creationId xmlns:a16="http://schemas.microsoft.com/office/drawing/2014/main" id="{A653DBAF-F6FD-4E5D-86E5-5E5A753B45E6}"/>
+                <a16:creationId xmlns:a16="http://schemas.microsoft.com/office/drawing/2014/main" id="{A81E8C59-B579-4DED-9F9E-905C4627FDAF}"/>
               </a:ext>
             </a:extLst>
           </p:cNvPr>
@@ -4180,7 +4185,7 @@
           <p:cNvPr id="15" name="Shape 13">
             <a:extLst xmlns:a="http://schemas.openxmlformats.org/drawingml/2006/main">
               <a:ext uri="{FF2B5EF4-FFF2-40B4-BE49-F238E27FC236}">
-                <a16:creationId xmlns:a16="http://schemas.microsoft.com/office/drawing/2014/main" id="{8B0DB20A-E429-4A2E-9751-F918B021B45D}"/>
+                <a16:creationId xmlns:a16="http://schemas.microsoft.com/office/drawing/2014/main" id="{3E80C12F-926D-4A64-A95F-C166EFBF2CA5}"/>
               </a:ext>
             </a:extLst>
           </p:cNvPr>
@@ -4215,7 +4220,7 @@
           <p:cNvPr id="16" name="Text 14">
             <a:extLst xmlns:a="http://schemas.openxmlformats.org/drawingml/2006/main">
               <a:ext uri="{FF2B5EF4-FFF2-40B4-BE49-F238E27FC236}">
-                <a16:creationId xmlns:a16="http://schemas.microsoft.com/office/drawing/2014/main" id="{6F82C233-61BF-4256-B772-1B5C356FED10}"/>
+                <a16:creationId xmlns:a16="http://schemas.microsoft.com/office/drawing/2014/main" id="{DEBAACF4-DF27-4514-82EC-EBFCE563C895}"/>
               </a:ext>
             </a:extLst>
           </p:cNvPr>
@@ -4262,7 +4267,7 @@
           <p:cNvPr id="17" name="Text 15">
             <a:extLst xmlns:a="http://schemas.openxmlformats.org/drawingml/2006/main">
               <a:ext uri="{FF2B5EF4-FFF2-40B4-BE49-F238E27FC236}">
-                <a16:creationId xmlns:a16="http://schemas.microsoft.com/office/drawing/2014/main" id="{DF28E833-73F3-43AB-A462-11F76EED3E97}"/>
+                <a16:creationId xmlns:a16="http://schemas.microsoft.com/office/drawing/2014/main" id="{813C4266-89A3-45A2-8B5F-6ACE1430530E}"/>
               </a:ext>
             </a:extLst>
           </p:cNvPr>
@@ -4309,7 +4314,7 @@
           <p:cNvPr id="18" name="Text 16">
             <a:extLst xmlns:a="http://schemas.openxmlformats.org/drawingml/2006/main">
               <a:ext uri="{FF2B5EF4-FFF2-40B4-BE49-F238E27FC236}">
-                <a16:creationId xmlns:a16="http://schemas.microsoft.com/office/drawing/2014/main" id="{741FE704-D15E-4895-A3F9-32882A0D03FA}"/>
+                <a16:creationId xmlns:a16="http://schemas.microsoft.com/office/drawing/2014/main" id="{6811209F-F59E-463A-8555-DFA131E8972E}"/>
               </a:ext>
             </a:extLst>
           </p:cNvPr>
@@ -4356,7 +4361,7 @@
           <p:cNvPr id="19" name="Text 17">
             <a:extLst xmlns:a="http://schemas.openxmlformats.org/drawingml/2006/main">
               <a:ext uri="{FF2B5EF4-FFF2-40B4-BE49-F238E27FC236}">
-                <a16:creationId xmlns:a16="http://schemas.microsoft.com/office/drawing/2014/main" id="{B5ACC8B1-4953-4E81-93AD-AAF5273996CB}"/>
+                <a16:creationId xmlns:a16="http://schemas.microsoft.com/office/drawing/2014/main" id="{50F26D95-E4EE-4EDD-9897-10B0D230EE4E}"/>
               </a:ext>
             </a:extLst>
           </p:cNvPr>
@@ -4403,7 +4408,7 @@
           <p:cNvPr id="20" name="Text 18">
             <a:extLst xmlns:a="http://schemas.openxmlformats.org/drawingml/2006/main">
               <a:ext uri="{FF2B5EF4-FFF2-40B4-BE49-F238E27FC236}">
-                <a16:creationId xmlns:a16="http://schemas.microsoft.com/office/drawing/2014/main" id="{0A8FC643-E3A2-4F55-ABAC-589FCE1081B1}"/>
+                <a16:creationId xmlns:a16="http://schemas.microsoft.com/office/drawing/2014/main" id="{935013FB-0346-42E3-97C3-A9234519A88D}"/>
               </a:ext>
             </a:extLst>
           </p:cNvPr>
@@ -4450,7 +4455,7 @@
           <p:cNvPr id="21" name="Shape 19">
             <a:extLst xmlns:a="http://schemas.openxmlformats.org/drawingml/2006/main">
               <a:ext uri="{FF2B5EF4-FFF2-40B4-BE49-F238E27FC236}">
-                <a16:creationId xmlns:a16="http://schemas.microsoft.com/office/drawing/2014/main" id="{47239371-4A4D-47CA-9970-EE69116C1D0C}"/>
+                <a16:creationId xmlns:a16="http://schemas.microsoft.com/office/drawing/2014/main" id="{3A7183E2-F214-42D1-93CC-218000A1584A}"/>
               </a:ext>
             </a:extLst>
           </p:cNvPr>
@@ -4485,7 +4490,7 @@
           <p:cNvPr id="22" name="Shape 20">
             <a:extLst xmlns:a="http://schemas.openxmlformats.org/drawingml/2006/main">
               <a:ext uri="{FF2B5EF4-FFF2-40B4-BE49-F238E27FC236}">
-                <a16:creationId xmlns:a16="http://schemas.microsoft.com/office/drawing/2014/main" id="{82C376CC-353B-43C3-8B64-1F821BC6117F}"/>
+                <a16:creationId xmlns:a16="http://schemas.microsoft.com/office/drawing/2014/main" id="{0B72F879-312B-45E6-8D95-E6451EEB1298}"/>
               </a:ext>
             </a:extLst>
           </p:cNvPr>
@@ -4520,7 +4525,7 @@
           <p:cNvPr id="23" name="Text 21">
             <a:extLst xmlns:a="http://schemas.openxmlformats.org/drawingml/2006/main">
               <a:ext uri="{FF2B5EF4-FFF2-40B4-BE49-F238E27FC236}">
-                <a16:creationId xmlns:a16="http://schemas.microsoft.com/office/drawing/2014/main" id="{A9C845A3-6B38-4A9F-BF88-4B9035605F0D}"/>
+                <a16:creationId xmlns:a16="http://schemas.microsoft.com/office/drawing/2014/main" id="{BA4B3659-1054-4706-BB9A-F47B9EB1B218}"/>
               </a:ext>
             </a:extLst>
           </p:cNvPr>
@@ -4567,7 +4572,7 @@
           <p:cNvPr id="24" name="Text 22">
             <a:extLst xmlns:a="http://schemas.openxmlformats.org/drawingml/2006/main">
               <a:ext uri="{FF2B5EF4-FFF2-40B4-BE49-F238E27FC236}">
-                <a16:creationId xmlns:a16="http://schemas.microsoft.com/office/drawing/2014/main" id="{0D61FD3A-8E54-4F10-B286-54619573A19A}"/>
+                <a16:creationId xmlns:a16="http://schemas.microsoft.com/office/drawing/2014/main" id="{ACC4819D-9C37-4AAB-BC03-7F618C166F19}"/>
               </a:ext>
             </a:extLst>
           </p:cNvPr>
@@ -4614,7 +4619,7 @@
           <p:cNvPr id="25" name="Text 23">
             <a:extLst xmlns:a="http://schemas.openxmlformats.org/drawingml/2006/main">
               <a:ext uri="{FF2B5EF4-FFF2-40B4-BE49-F238E27FC236}">
-                <a16:creationId xmlns:a16="http://schemas.microsoft.com/office/drawing/2014/main" id="{E0E59A3F-3051-49D6-9532-BDA50C39DD2E}"/>
+                <a16:creationId xmlns:a16="http://schemas.microsoft.com/office/drawing/2014/main" id="{E4783B0F-A620-4B02-8924-FB2F1F2E3364}"/>
               </a:ext>
             </a:extLst>
           </p:cNvPr>
@@ -4661,7 +4666,7 @@
           <p:cNvPr id="26" name="Text 24">
             <a:extLst xmlns:a="http://schemas.openxmlformats.org/drawingml/2006/main">
               <a:ext uri="{FF2B5EF4-FFF2-40B4-BE49-F238E27FC236}">
-                <a16:creationId xmlns:a16="http://schemas.microsoft.com/office/drawing/2014/main" id="{F80FEC5A-681C-4DD5-9DE8-1C2FA2EC199D}"/>
+                <a16:creationId xmlns:a16="http://schemas.microsoft.com/office/drawing/2014/main" id="{328509EE-2EC5-4F42-ADC0-2EAB97ADF759}"/>
               </a:ext>
             </a:extLst>
           </p:cNvPr>
@@ -4708,7 +4713,7 @@
           <p:cNvPr id="27" name="Text 25">
             <a:extLst xmlns:a="http://schemas.openxmlformats.org/drawingml/2006/main">
               <a:ext uri="{FF2B5EF4-FFF2-40B4-BE49-F238E27FC236}">
-                <a16:creationId xmlns:a16="http://schemas.microsoft.com/office/drawing/2014/main" id="{9A8588CD-A7B7-49E3-8F20-174AB936AA4A}"/>
+                <a16:creationId xmlns:a16="http://schemas.microsoft.com/office/drawing/2014/main" id="{2E3CE0AC-E135-4198-927D-35E060071052}"/>
               </a:ext>
             </a:extLst>
           </p:cNvPr>
@@ -4755,7 +4760,7 @@
           <p:cNvPr id="28" name="Shape 26">
             <a:extLst xmlns:a="http://schemas.openxmlformats.org/drawingml/2006/main">
               <a:ext uri="{FF2B5EF4-FFF2-40B4-BE49-F238E27FC236}">
-                <a16:creationId xmlns:a16="http://schemas.microsoft.com/office/drawing/2014/main" id="{F1FD3557-CC6A-409F-A8DE-761EE9754401}"/>
+                <a16:creationId xmlns:a16="http://schemas.microsoft.com/office/drawing/2014/main" id="{DDF00C2F-5A5F-4E68-A135-47D0CF9010CA}"/>
               </a:ext>
             </a:extLst>
           </p:cNvPr>
@@ -4790,7 +4795,7 @@
           <p:cNvPr id="29" name="Text 27">
             <a:extLst xmlns:a="http://schemas.openxmlformats.org/drawingml/2006/main">
               <a:ext uri="{FF2B5EF4-FFF2-40B4-BE49-F238E27FC236}">
-                <a16:creationId xmlns:a16="http://schemas.microsoft.com/office/drawing/2014/main" id="{1D6B0ADC-5A46-43A6-BAEF-10064DFBACBE}"/>
+                <a16:creationId xmlns:a16="http://schemas.microsoft.com/office/drawing/2014/main" id="{4327F809-567D-4A3B-9E26-74DC691DB9F9}"/>
               </a:ext>
             </a:extLst>
           </p:cNvPr>
@@ -4837,7 +4842,7 @@
           <p:cNvPr id="30" name="Text 28">
             <a:extLst xmlns:a="http://schemas.openxmlformats.org/drawingml/2006/main">
               <a:ext uri="{FF2B5EF4-FFF2-40B4-BE49-F238E27FC236}">
-                <a16:creationId xmlns:a16="http://schemas.microsoft.com/office/drawing/2014/main" id="{522CA0FC-629C-4B60-A5A2-E022B0D6C586}"/>
+                <a16:creationId xmlns:a16="http://schemas.microsoft.com/office/drawing/2014/main" id="{FF6585DD-B4A6-4623-A2C1-2F386A97DF95}"/>
               </a:ext>
             </a:extLst>
           </p:cNvPr>
@@ -4884,7 +4889,7 @@
           <p:cNvPr id="31" name="Text 29">
             <a:extLst xmlns:a="http://schemas.openxmlformats.org/drawingml/2006/main">
               <a:ext uri="{FF2B5EF4-FFF2-40B4-BE49-F238E27FC236}">
-                <a16:creationId xmlns:a16="http://schemas.microsoft.com/office/drawing/2014/main" id="{195D9D56-4FF9-4B9F-AEDA-D94496B3781C}"/>
+                <a16:creationId xmlns:a16="http://schemas.microsoft.com/office/drawing/2014/main" id="{ADB68288-AEF7-46ED-9616-9A1F3A622665}"/>
               </a:ext>
             </a:extLst>
           </p:cNvPr>
@@ -4929,7 +4934,7 @@
     </p:spTree>
     <p:extLst>
       <p:ext uri="{BB962C8B-B14F-4D97-AF65-F5344CB8AC3E}">
-        <p14:creationId xmlns:p14="http://schemas.microsoft.com/office/powerpoint/2010/main" val="765543152"/>
+        <p14:creationId xmlns:p14="http://schemas.microsoft.com/office/powerpoint/2010/main" val="458187476"/>
       </p:ext>
     </p:extLst>
   </p:cSld>
@@ -4960,7 +4965,7 @@
           <p:cNvPr id="2" name="Text 0">
             <a:extLst xmlns:a="http://schemas.openxmlformats.org/drawingml/2006/main">
               <a:ext uri="{FF2B5EF4-FFF2-40B4-BE49-F238E27FC236}">
-                <a16:creationId xmlns:a16="http://schemas.microsoft.com/office/drawing/2014/main" id="{8677D26F-AAE4-4193-9EF2-6364E818F0E7}"/>
+                <a16:creationId xmlns:a16="http://schemas.microsoft.com/office/drawing/2014/main" id="{C92748B2-0B86-48E8-8061-332BD60A35B6}"/>
               </a:ext>
             </a:extLst>
           </p:cNvPr>
@@ -5007,7 +5012,7 @@
           <p:cNvPr id="3" name="Text 1">
             <a:extLst xmlns:a="http://schemas.openxmlformats.org/drawingml/2006/main">
               <a:ext uri="{FF2B5EF4-FFF2-40B4-BE49-F238E27FC236}">
-                <a16:creationId xmlns:a16="http://schemas.microsoft.com/office/drawing/2014/main" id="{6608D653-7558-4904-8529-7EE1DDAD3B19}"/>
+                <a16:creationId xmlns:a16="http://schemas.microsoft.com/office/drawing/2014/main" id="{2E28D619-2C29-4FF7-B4E2-FE70BD8A0359}"/>
               </a:ext>
             </a:extLst>
           </p:cNvPr>
@@ -5054,7 +5059,7 @@
           <p:cNvPr id="4" name="Shape 2">
             <a:extLst xmlns:a="http://schemas.openxmlformats.org/drawingml/2006/main">
               <a:ext uri="{FF2B5EF4-FFF2-40B4-BE49-F238E27FC236}">
-                <a16:creationId xmlns:a16="http://schemas.microsoft.com/office/drawing/2014/main" id="{4463D5EE-17DE-4B71-9588-08FD63969D8F}"/>
+                <a16:creationId xmlns:a16="http://schemas.microsoft.com/office/drawing/2014/main" id="{EA80EEB8-488A-42EC-AEE7-F5DBD2BBC38B}"/>
               </a:ext>
             </a:extLst>
           </p:cNvPr>
@@ -5089,7 +5094,7 @@
           <p:cNvPr id="5" name="Text 3">
             <a:extLst xmlns:a="http://schemas.openxmlformats.org/drawingml/2006/main">
               <a:ext uri="{FF2B5EF4-FFF2-40B4-BE49-F238E27FC236}">
-                <a16:creationId xmlns:a16="http://schemas.microsoft.com/office/drawing/2014/main" id="{11610A46-ED23-4736-8CF6-96526B61727C}"/>
+                <a16:creationId xmlns:a16="http://schemas.microsoft.com/office/drawing/2014/main" id="{899750E8-E2CA-43BA-A1C2-0D519BD9DC4F}"/>
               </a:ext>
             </a:extLst>
           </p:cNvPr>
@@ -5136,7 +5141,7 @@
           <p:cNvPr id="6" name="Shape 4">
             <a:extLst xmlns:a="http://schemas.openxmlformats.org/drawingml/2006/main">
               <a:ext uri="{FF2B5EF4-FFF2-40B4-BE49-F238E27FC236}">
-                <a16:creationId xmlns:a16="http://schemas.microsoft.com/office/drawing/2014/main" id="{A79171E4-593B-45A3-A18B-77F817AEA21C}"/>
+                <a16:creationId xmlns:a16="http://schemas.microsoft.com/office/drawing/2014/main" id="{1F2E4C68-337D-4019-973D-71EF00D03B90}"/>
               </a:ext>
             </a:extLst>
           </p:cNvPr>
@@ -5167,7 +5172,7 @@
           <p:cNvPr id="7" name="Shape 5">
             <a:extLst xmlns:a="http://schemas.openxmlformats.org/drawingml/2006/main">
               <a:ext uri="{FF2B5EF4-FFF2-40B4-BE49-F238E27FC236}">
-                <a16:creationId xmlns:a16="http://schemas.microsoft.com/office/drawing/2014/main" id="{A7E59345-B667-4F2F-BBD1-2566F4BD8C02}"/>
+                <a16:creationId xmlns:a16="http://schemas.microsoft.com/office/drawing/2014/main" id="{4CB6BF03-39F0-4265-B2EC-BEB3E37E1A4A}"/>
               </a:ext>
             </a:extLst>
           </p:cNvPr>
@@ -5202,7 +5207,7 @@
           <p:cNvPr id="8" name="Text 6">
             <a:extLst xmlns:a="http://schemas.openxmlformats.org/drawingml/2006/main">
               <a:ext uri="{FF2B5EF4-FFF2-40B4-BE49-F238E27FC236}">
-                <a16:creationId xmlns:a16="http://schemas.microsoft.com/office/drawing/2014/main" id="{CD812BAC-63F7-4F08-A4EA-A376C3F00495}"/>
+                <a16:creationId xmlns:a16="http://schemas.microsoft.com/office/drawing/2014/main" id="{E2126806-E8C8-49FF-AFBA-389CA8BBB205}"/>
               </a:ext>
             </a:extLst>
           </p:cNvPr>
@@ -5249,7 +5254,7 @@
           <p:cNvPr id="9" name="Text 7">
             <a:extLst xmlns:a="http://schemas.openxmlformats.org/drawingml/2006/main">
               <a:ext uri="{FF2B5EF4-FFF2-40B4-BE49-F238E27FC236}">
-                <a16:creationId xmlns:a16="http://schemas.microsoft.com/office/drawing/2014/main" id="{67ADC8B7-EFC6-4336-9D51-59EDF1AEFE5B}"/>
+                <a16:creationId xmlns:a16="http://schemas.microsoft.com/office/drawing/2014/main" id="{9D4DC251-C882-4123-A7DA-1D9C56B7A9A6}"/>
               </a:ext>
             </a:extLst>
           </p:cNvPr>
@@ -5312,7 +5317,7 @@
           <p:cNvPr id="11" name="Shape 9">
             <a:extLst xmlns:a="http://schemas.openxmlformats.org/drawingml/2006/main">
               <a:ext uri="{FF2B5EF4-FFF2-40B4-BE49-F238E27FC236}">
-                <a16:creationId xmlns:a16="http://schemas.microsoft.com/office/drawing/2014/main" id="{9AF5495D-5594-4F16-917E-E5E174C0862F}"/>
+                <a16:creationId xmlns:a16="http://schemas.microsoft.com/office/drawing/2014/main" id="{FB20F78D-E2BE-4C05-8824-BE2CD966EA04}"/>
               </a:ext>
             </a:extLst>
           </p:cNvPr>
@@ -5347,7 +5352,7 @@
           <p:cNvPr id="12" name="Text 10">
             <a:extLst xmlns:a="http://schemas.openxmlformats.org/drawingml/2006/main">
               <a:ext uri="{FF2B5EF4-FFF2-40B4-BE49-F238E27FC236}">
-                <a16:creationId xmlns:a16="http://schemas.microsoft.com/office/drawing/2014/main" id="{257DAA4B-198D-4D4A-BC2B-1F75C86EAC64}"/>
+                <a16:creationId xmlns:a16="http://schemas.microsoft.com/office/drawing/2014/main" id="{CDCD8144-F090-4E26-B1B5-4857139B6959}"/>
               </a:ext>
             </a:extLst>
           </p:cNvPr>
@@ -5394,7 +5399,7 @@
           <p:cNvPr id="13" name="Text 11">
             <a:extLst xmlns:a="http://schemas.openxmlformats.org/drawingml/2006/main">
               <a:ext uri="{FF2B5EF4-FFF2-40B4-BE49-F238E27FC236}">
-                <a16:creationId xmlns:a16="http://schemas.microsoft.com/office/drawing/2014/main" id="{3563A529-1112-451C-8A24-511251E80B61}"/>
+                <a16:creationId xmlns:a16="http://schemas.microsoft.com/office/drawing/2014/main" id="{09BFC83E-2A52-49E5-AC6A-BF92D28B5724}"/>
               </a:ext>
             </a:extLst>
           </p:cNvPr>
@@ -5457,7 +5462,7 @@
           <p:cNvPr id="15" name="Shape 13">
             <a:extLst xmlns:a="http://schemas.openxmlformats.org/drawingml/2006/main">
               <a:ext uri="{FF2B5EF4-FFF2-40B4-BE49-F238E27FC236}">
-                <a16:creationId xmlns:a16="http://schemas.microsoft.com/office/drawing/2014/main" id="{51E47CC3-6A1B-4D6D-95BA-F1EF5B5E5775}"/>
+                <a16:creationId xmlns:a16="http://schemas.microsoft.com/office/drawing/2014/main" id="{511FE580-E778-4DA4-8E45-E7FECC38979F}"/>
               </a:ext>
             </a:extLst>
           </p:cNvPr>
@@ -5492,7 +5497,7 @@
           <p:cNvPr id="16" name="Text 14">
             <a:extLst xmlns:a="http://schemas.openxmlformats.org/drawingml/2006/main">
               <a:ext uri="{FF2B5EF4-FFF2-40B4-BE49-F238E27FC236}">
-                <a16:creationId xmlns:a16="http://schemas.microsoft.com/office/drawing/2014/main" id="{E92CF63D-5932-42CD-BC4C-CBDCB2423599}"/>
+                <a16:creationId xmlns:a16="http://schemas.microsoft.com/office/drawing/2014/main" id="{8EC618DC-5BF2-4139-8000-2869C63962E2}"/>
               </a:ext>
             </a:extLst>
           </p:cNvPr>
@@ -5539,7 +5544,7 @@
           <p:cNvPr id="17" name="Text 15">
             <a:extLst xmlns:a="http://schemas.openxmlformats.org/drawingml/2006/main">
               <a:ext uri="{FF2B5EF4-FFF2-40B4-BE49-F238E27FC236}">
-                <a16:creationId xmlns:a16="http://schemas.microsoft.com/office/drawing/2014/main" id="{EB0C3208-BD9F-431A-ADD1-6EC97D632D07}"/>
+                <a16:creationId xmlns:a16="http://schemas.microsoft.com/office/drawing/2014/main" id="{1D7341DB-B15B-4CF3-9AD1-9050DD303580}"/>
               </a:ext>
             </a:extLst>
           </p:cNvPr>
@@ -5602,7 +5607,7 @@
           <p:cNvPr id="19" name="Shape 17">
             <a:extLst xmlns:a="http://schemas.openxmlformats.org/drawingml/2006/main">
               <a:ext uri="{FF2B5EF4-FFF2-40B4-BE49-F238E27FC236}">
-                <a16:creationId xmlns:a16="http://schemas.microsoft.com/office/drawing/2014/main" id="{2CCB99CD-9AF4-4FB8-A6A7-C452F65639BB}"/>
+                <a16:creationId xmlns:a16="http://schemas.microsoft.com/office/drawing/2014/main" id="{E58311CD-DCA7-497C-A71E-217B13AC542E}"/>
               </a:ext>
             </a:extLst>
           </p:cNvPr>
@@ -5637,7 +5642,7 @@
           <p:cNvPr id="20" name="Text 18">
             <a:extLst xmlns:a="http://schemas.openxmlformats.org/drawingml/2006/main">
               <a:ext uri="{FF2B5EF4-FFF2-40B4-BE49-F238E27FC236}">
-                <a16:creationId xmlns:a16="http://schemas.microsoft.com/office/drawing/2014/main" id="{CEA6F4B9-93F8-4EF6-9194-6E9B98A1E376}"/>
+                <a16:creationId xmlns:a16="http://schemas.microsoft.com/office/drawing/2014/main" id="{7E1B35B7-6BC7-4B32-9A0E-D5BE1023434B}"/>
               </a:ext>
             </a:extLst>
           </p:cNvPr>
@@ -5684,7 +5689,7 @@
           <p:cNvPr id="21" name="Text 19">
             <a:extLst xmlns:a="http://schemas.openxmlformats.org/drawingml/2006/main">
               <a:ext uri="{FF2B5EF4-FFF2-40B4-BE49-F238E27FC236}">
-                <a16:creationId xmlns:a16="http://schemas.microsoft.com/office/drawing/2014/main" id="{179E96E5-79BC-4985-A1E5-A66E1E857CEB}"/>
+                <a16:creationId xmlns:a16="http://schemas.microsoft.com/office/drawing/2014/main" id="{6169683D-E9EA-482C-9C67-844D37BF4515}"/>
               </a:ext>
             </a:extLst>
           </p:cNvPr>
@@ -5747,7 +5752,7 @@
           <p:cNvPr id="23" name="Shape 21">
             <a:extLst xmlns:a="http://schemas.openxmlformats.org/drawingml/2006/main">
               <a:ext uri="{FF2B5EF4-FFF2-40B4-BE49-F238E27FC236}">
-                <a16:creationId xmlns:a16="http://schemas.microsoft.com/office/drawing/2014/main" id="{FDE2474F-2331-414A-AB51-E708687E7CA2}"/>
+                <a16:creationId xmlns:a16="http://schemas.microsoft.com/office/drawing/2014/main" id="{0DAE21C1-ABBD-4B1E-9401-56F46D7725F1}"/>
               </a:ext>
             </a:extLst>
           </p:cNvPr>
@@ -5782,7 +5787,7 @@
           <p:cNvPr id="24" name="Text 22">
             <a:extLst xmlns:a="http://schemas.openxmlformats.org/drawingml/2006/main">
               <a:ext uri="{FF2B5EF4-FFF2-40B4-BE49-F238E27FC236}">
-                <a16:creationId xmlns:a16="http://schemas.microsoft.com/office/drawing/2014/main" id="{BBE008F3-5511-4DCB-BC9B-52E7BC5FD372}"/>
+                <a16:creationId xmlns:a16="http://schemas.microsoft.com/office/drawing/2014/main" id="{6D7A54FB-3A57-4A71-AD4F-D846AFC2147D}"/>
               </a:ext>
             </a:extLst>
           </p:cNvPr>
@@ -5829,7 +5834,7 @@
           <p:cNvPr id="25" name="Text 23">
             <a:extLst xmlns:a="http://schemas.openxmlformats.org/drawingml/2006/main">
               <a:ext uri="{FF2B5EF4-FFF2-40B4-BE49-F238E27FC236}">
-                <a16:creationId xmlns:a16="http://schemas.microsoft.com/office/drawing/2014/main" id="{99DC7A5A-7D23-4CF2-8F07-CBA55DE7B124}"/>
+                <a16:creationId xmlns:a16="http://schemas.microsoft.com/office/drawing/2014/main" id="{65213C02-CB05-4EC1-A571-85263DDA625E}"/>
               </a:ext>
             </a:extLst>
           </p:cNvPr>
@@ -5892,7 +5897,7 @@
           <p:cNvPr id="27" name="Shape 25">
             <a:extLst xmlns:a="http://schemas.openxmlformats.org/drawingml/2006/main">
               <a:ext uri="{FF2B5EF4-FFF2-40B4-BE49-F238E27FC236}">
-                <a16:creationId xmlns:a16="http://schemas.microsoft.com/office/drawing/2014/main" id="{6F98FB27-FB4B-488E-8A88-AD25B88B68A8}"/>
+                <a16:creationId xmlns:a16="http://schemas.microsoft.com/office/drawing/2014/main" id="{DF205571-D647-44D1-8CB1-70E7FD72C8FC}"/>
               </a:ext>
             </a:extLst>
           </p:cNvPr>
@@ -5927,7 +5932,7 @@
           <p:cNvPr id="28" name="Text 26">
             <a:extLst xmlns:a="http://schemas.openxmlformats.org/drawingml/2006/main">
               <a:ext uri="{FF2B5EF4-FFF2-40B4-BE49-F238E27FC236}">
-                <a16:creationId xmlns:a16="http://schemas.microsoft.com/office/drawing/2014/main" id="{D766CA3E-92E8-4848-8FA5-28175F72FF4D}"/>
+                <a16:creationId xmlns:a16="http://schemas.microsoft.com/office/drawing/2014/main" id="{CCE94DF3-A6A4-40A5-AEF6-DA12405EBD0F}"/>
               </a:ext>
             </a:extLst>
           </p:cNvPr>
@@ -5974,7 +5979,7 @@
           <p:cNvPr id="29" name="Text 27">
             <a:extLst xmlns:a="http://schemas.openxmlformats.org/drawingml/2006/main">
               <a:ext uri="{FF2B5EF4-FFF2-40B4-BE49-F238E27FC236}">
-                <a16:creationId xmlns:a16="http://schemas.microsoft.com/office/drawing/2014/main" id="{8D9CD7A2-0A7D-4D73-AA2E-D6F43443B2A3}"/>
+                <a16:creationId xmlns:a16="http://schemas.microsoft.com/office/drawing/2014/main" id="{B77D5838-F52F-43F6-AE66-C148F21375B6}"/>
               </a:ext>
             </a:extLst>
           </p:cNvPr>
@@ -6037,7 +6042,7 @@
           <p:cNvPr id="30" name="Shape 28">
             <a:extLst xmlns:a="http://schemas.openxmlformats.org/drawingml/2006/main">
               <a:ext uri="{FF2B5EF4-FFF2-40B4-BE49-F238E27FC236}">
-                <a16:creationId xmlns:a16="http://schemas.microsoft.com/office/drawing/2014/main" id="{65BFF5F5-F613-4694-8FDF-549B0E9161D8}"/>
+                <a16:creationId xmlns:a16="http://schemas.microsoft.com/office/drawing/2014/main" id="{E2A25837-59FF-4334-96A1-29F5196E3453}"/>
               </a:ext>
             </a:extLst>
           </p:cNvPr>
@@ -6072,7 +6077,7 @@
           <p:cNvPr id="31" name="Text 29">
             <a:extLst xmlns:a="http://schemas.openxmlformats.org/drawingml/2006/main">
               <a:ext uri="{FF2B5EF4-FFF2-40B4-BE49-F238E27FC236}">
-                <a16:creationId xmlns:a16="http://schemas.microsoft.com/office/drawing/2014/main" id="{A1B16258-081F-49C5-9E44-5F9999E1A1E5}"/>
+                <a16:creationId xmlns:a16="http://schemas.microsoft.com/office/drawing/2014/main" id="{4254DDC0-5F7B-4AE9-9E89-BEE942F02904}"/>
               </a:ext>
             </a:extLst>
           </p:cNvPr>
@@ -6119,7 +6124,7 @@
           <p:cNvPr id="32" name="Shape 30">
             <a:extLst xmlns:a="http://schemas.openxmlformats.org/drawingml/2006/main">
               <a:ext uri="{FF2B5EF4-FFF2-40B4-BE49-F238E27FC236}">
-                <a16:creationId xmlns:a16="http://schemas.microsoft.com/office/drawing/2014/main" id="{8F256A0F-5A26-4AD3-8C3C-8B4DC033A12B}"/>
+                <a16:creationId xmlns:a16="http://schemas.microsoft.com/office/drawing/2014/main" id="{819FFD1E-B3F1-4581-8D73-6D149889A7FF}"/>
               </a:ext>
             </a:extLst>
           </p:cNvPr>
@@ -6152,7 +6157,7 @@
           <p:cNvPr id="33" name="Text 31">
             <a:extLst xmlns:a="http://schemas.openxmlformats.org/drawingml/2006/main">
               <a:ext uri="{FF2B5EF4-FFF2-40B4-BE49-F238E27FC236}">
-                <a16:creationId xmlns:a16="http://schemas.microsoft.com/office/drawing/2014/main" id="{D56C0C8A-CB35-420D-BED1-F64FE5EFDB40}"/>
+                <a16:creationId xmlns:a16="http://schemas.microsoft.com/office/drawing/2014/main" id="{1F48D1EA-5284-403E-92F1-D03A45D88064}"/>
               </a:ext>
             </a:extLst>
           </p:cNvPr>
@@ -6199,7 +6204,7 @@
           <p:cNvPr id="34" name="Shape 32">
             <a:extLst xmlns:a="http://schemas.openxmlformats.org/drawingml/2006/main">
               <a:ext uri="{FF2B5EF4-FFF2-40B4-BE49-F238E27FC236}">
-                <a16:creationId xmlns:a16="http://schemas.microsoft.com/office/drawing/2014/main" id="{77555F8E-73C1-4A89-AAFB-9ED880F3190A}"/>
+                <a16:creationId xmlns:a16="http://schemas.microsoft.com/office/drawing/2014/main" id="{60ABFEE4-DC26-4D98-9F63-AA569DAE847E}"/>
               </a:ext>
             </a:extLst>
           </p:cNvPr>
@@ -6232,7 +6237,7 @@
           <p:cNvPr id="35" name="Text 33">
             <a:extLst xmlns:a="http://schemas.openxmlformats.org/drawingml/2006/main">
               <a:ext uri="{FF2B5EF4-FFF2-40B4-BE49-F238E27FC236}">
-                <a16:creationId xmlns:a16="http://schemas.microsoft.com/office/drawing/2014/main" id="{770673AC-3B3F-4CF8-A119-934350FE7E41}"/>
+                <a16:creationId xmlns:a16="http://schemas.microsoft.com/office/drawing/2014/main" id="{04B19068-F055-4E89-8DF1-E2A86C4E3465}"/>
               </a:ext>
             </a:extLst>
           </p:cNvPr>
@@ -6279,7 +6284,7 @@
           <p:cNvPr id="36" name="Shape 34">
             <a:extLst xmlns:a="http://schemas.openxmlformats.org/drawingml/2006/main">
               <a:ext uri="{FF2B5EF4-FFF2-40B4-BE49-F238E27FC236}">
-                <a16:creationId xmlns:a16="http://schemas.microsoft.com/office/drawing/2014/main" id="{976B84DA-E0FA-4B2F-A02A-4C68A3CB3229}"/>
+                <a16:creationId xmlns:a16="http://schemas.microsoft.com/office/drawing/2014/main" id="{4CA80D9B-FA1E-4ED3-83E8-23A082FE32BA}"/>
               </a:ext>
             </a:extLst>
           </p:cNvPr>
@@ -6312,7 +6317,7 @@
           <p:cNvPr id="37" name="Text 35">
             <a:extLst xmlns:a="http://schemas.openxmlformats.org/drawingml/2006/main">
               <a:ext uri="{FF2B5EF4-FFF2-40B4-BE49-F238E27FC236}">
-                <a16:creationId xmlns:a16="http://schemas.microsoft.com/office/drawing/2014/main" id="{5DB48993-908F-493C-9430-8043DF9B627B}"/>
+                <a16:creationId xmlns:a16="http://schemas.microsoft.com/office/drawing/2014/main" id="{362812C3-5771-42DA-A7A6-E740BF1D0CAB}"/>
               </a:ext>
             </a:extLst>
           </p:cNvPr>
@@ -6359,7 +6364,7 @@
           <p:cNvPr id="38" name="Shape 36">
             <a:extLst xmlns:a="http://schemas.openxmlformats.org/drawingml/2006/main">
               <a:ext uri="{FF2B5EF4-FFF2-40B4-BE49-F238E27FC236}">
-                <a16:creationId xmlns:a16="http://schemas.microsoft.com/office/drawing/2014/main" id="{3439FFEE-A160-43AC-9CBE-FF3EC55E758A}"/>
+                <a16:creationId xmlns:a16="http://schemas.microsoft.com/office/drawing/2014/main" id="{85439EF4-824A-4ECF-9731-91F53E98FE37}"/>
               </a:ext>
             </a:extLst>
           </p:cNvPr>
@@ -6394,7 +6399,7 @@
           <p:cNvPr id="39" name="Text 37">
             <a:extLst xmlns:a="http://schemas.openxmlformats.org/drawingml/2006/main">
               <a:ext uri="{FF2B5EF4-FFF2-40B4-BE49-F238E27FC236}">
-                <a16:creationId xmlns:a16="http://schemas.microsoft.com/office/drawing/2014/main" id="{F646EB49-3A90-43E9-B641-6C2EE1423639}"/>
+                <a16:creationId xmlns:a16="http://schemas.microsoft.com/office/drawing/2014/main" id="{0E41EE75-51FC-4B03-90F0-D85F73EB5114}"/>
               </a:ext>
             </a:extLst>
           </p:cNvPr>
@@ -6441,7 +6446,7 @@
           <p:cNvPr id="40" name="Text 38">
             <a:extLst xmlns:a="http://schemas.openxmlformats.org/drawingml/2006/main">
               <a:ext uri="{FF2B5EF4-FFF2-40B4-BE49-F238E27FC236}">
-                <a16:creationId xmlns:a16="http://schemas.microsoft.com/office/drawing/2014/main" id="{405390AF-76AC-4639-950B-B6158AA9692E}"/>
+                <a16:creationId xmlns:a16="http://schemas.microsoft.com/office/drawing/2014/main" id="{3F56C931-4B5C-4D35-AF41-FD98E33E28E2}"/>
               </a:ext>
             </a:extLst>
           </p:cNvPr>
@@ -6536,7 +6541,7 @@
           <p:cNvPr id="41" name="Text 39">
             <a:extLst xmlns:a="http://schemas.openxmlformats.org/drawingml/2006/main">
               <a:ext uri="{FF2B5EF4-FFF2-40B4-BE49-F238E27FC236}">
-                <a16:creationId xmlns:a16="http://schemas.microsoft.com/office/drawing/2014/main" id="{862E1AAA-F77D-4AEA-83FB-572937ED70A9}"/>
+                <a16:creationId xmlns:a16="http://schemas.microsoft.com/office/drawing/2014/main" id="{BBFB5BC9-E53A-4155-B0AD-C2A43C9964C8}"/>
               </a:ext>
             </a:extLst>
           </p:cNvPr>
@@ -6583,7 +6588,7 @@
           <p:cNvPr id="42" name="Text 40">
             <a:extLst xmlns:a="http://schemas.openxmlformats.org/drawingml/2006/main">
               <a:ext uri="{FF2B5EF4-FFF2-40B4-BE49-F238E27FC236}">
-                <a16:creationId xmlns:a16="http://schemas.microsoft.com/office/drawing/2014/main" id="{1DA3870D-710B-474B-ACBE-A15BDA2F49A6}"/>
+                <a16:creationId xmlns:a16="http://schemas.microsoft.com/office/drawing/2014/main" id="{313D2E2A-2E9A-4BC6-BF5D-1633480678C7}"/>
               </a:ext>
             </a:extLst>
           </p:cNvPr>
@@ -6630,7 +6635,7 @@
           <p:cNvPr id="43" name="Text 41">
             <a:extLst xmlns:a="http://schemas.openxmlformats.org/drawingml/2006/main">
               <a:ext uri="{FF2B5EF4-FFF2-40B4-BE49-F238E27FC236}">
-                <a16:creationId xmlns:a16="http://schemas.microsoft.com/office/drawing/2014/main" id="{545A97C9-2026-4C18-954C-988D81DEF1F0}"/>
+                <a16:creationId xmlns:a16="http://schemas.microsoft.com/office/drawing/2014/main" id="{E592054A-FDF0-4E1A-8157-A136E1209CD3}"/>
               </a:ext>
             </a:extLst>
           </p:cNvPr>
@@ -6675,7 +6680,7 @@
     </p:spTree>
     <p:extLst>
       <p:ext uri="{BB962C8B-B14F-4D97-AF65-F5344CB8AC3E}">
-        <p14:creationId xmlns:p14="http://schemas.microsoft.com/office/powerpoint/2010/main" val="147862639"/>
+        <p14:creationId xmlns:p14="http://schemas.microsoft.com/office/powerpoint/2010/main" val="1251955631"/>
       </p:ext>
     </p:extLst>
   </p:cSld>
@@ -6706,7 +6711,7 @@
           <p:cNvPr id="2" name="Text 0">
             <a:extLst xmlns:a="http://schemas.openxmlformats.org/drawingml/2006/main">
               <a:ext uri="{FF2B5EF4-FFF2-40B4-BE49-F238E27FC236}">
-                <a16:creationId xmlns:a16="http://schemas.microsoft.com/office/drawing/2014/main" id="{7355E671-2A0C-46EE-8833-6F7B2C570F98}"/>
+                <a16:creationId xmlns:a16="http://schemas.microsoft.com/office/drawing/2014/main" id="{3AF85615-7D25-433B-B3DA-67711F09342B}"/>
               </a:ext>
             </a:extLst>
           </p:cNvPr>
@@ -6753,7 +6758,7 @@
           <p:cNvPr id="3" name="Text 1">
             <a:extLst xmlns:a="http://schemas.openxmlformats.org/drawingml/2006/main">
               <a:ext uri="{FF2B5EF4-FFF2-40B4-BE49-F238E27FC236}">
-                <a16:creationId xmlns:a16="http://schemas.microsoft.com/office/drawing/2014/main" id="{78E036EF-5AE5-4634-A718-A516BB45CC9F}"/>
+                <a16:creationId xmlns:a16="http://schemas.microsoft.com/office/drawing/2014/main" id="{A3B7ABAE-93C3-4E40-8B50-0E838F7DCF06}"/>
               </a:ext>
             </a:extLst>
           </p:cNvPr>
@@ -6800,7 +6805,7 @@
           <p:cNvPr id="4" name="Shape 2">
             <a:extLst xmlns:a="http://schemas.openxmlformats.org/drawingml/2006/main">
               <a:ext uri="{FF2B5EF4-FFF2-40B4-BE49-F238E27FC236}">
-                <a16:creationId xmlns:a16="http://schemas.microsoft.com/office/drawing/2014/main" id="{4D52C32A-6A71-4896-87E5-AD85AEA9AFB9}"/>
+                <a16:creationId xmlns:a16="http://schemas.microsoft.com/office/drawing/2014/main" id="{1993689A-E7F3-4EF1-93A2-B4BB5D6CFD11}"/>
               </a:ext>
             </a:extLst>
           </p:cNvPr>
@@ -6835,7 +6840,7 @@
           <p:cNvPr id="5" name="Text 3">
             <a:extLst xmlns:a="http://schemas.openxmlformats.org/drawingml/2006/main">
               <a:ext uri="{FF2B5EF4-FFF2-40B4-BE49-F238E27FC236}">
-                <a16:creationId xmlns:a16="http://schemas.microsoft.com/office/drawing/2014/main" id="{C1AA8A41-E93B-45CD-B77F-B9C285D00079}"/>
+                <a16:creationId xmlns:a16="http://schemas.microsoft.com/office/drawing/2014/main" id="{9B0A9DCB-8D3C-40C7-AE51-4ED23274BE3C}"/>
               </a:ext>
             </a:extLst>
           </p:cNvPr>
@@ -6882,7 +6887,7 @@
           <p:cNvPr id="6" name="Shape 4">
             <a:extLst xmlns:a="http://schemas.openxmlformats.org/drawingml/2006/main">
               <a:ext uri="{FF2B5EF4-FFF2-40B4-BE49-F238E27FC236}">
-                <a16:creationId xmlns:a16="http://schemas.microsoft.com/office/drawing/2014/main" id="{A5FD0D90-B30D-4543-8F1D-70874986B5B1}"/>
+                <a16:creationId xmlns:a16="http://schemas.microsoft.com/office/drawing/2014/main" id="{BB7DFCC7-3D59-4D90-BF75-1C0EA28E27D5}"/>
               </a:ext>
             </a:extLst>
           </p:cNvPr>
@@ -6913,7 +6918,7 @@
           <p:cNvPr id="7" name="Shape 5">
             <a:extLst xmlns:a="http://schemas.openxmlformats.org/drawingml/2006/main">
               <a:ext uri="{FF2B5EF4-FFF2-40B4-BE49-F238E27FC236}">
-                <a16:creationId xmlns:a16="http://schemas.microsoft.com/office/drawing/2014/main" id="{872E8CAA-4980-4164-94DD-898F0DDCEE04}"/>
+                <a16:creationId xmlns:a16="http://schemas.microsoft.com/office/drawing/2014/main" id="{5A16EB50-E72D-426F-8383-00D50F1C0E9E}"/>
               </a:ext>
             </a:extLst>
           </p:cNvPr>
@@ -6948,7 +6953,7 @@
           <p:cNvPr id="8" name="Text 6">
             <a:extLst xmlns:a="http://schemas.openxmlformats.org/drawingml/2006/main">
               <a:ext uri="{FF2B5EF4-FFF2-40B4-BE49-F238E27FC236}">
-                <a16:creationId xmlns:a16="http://schemas.microsoft.com/office/drawing/2014/main" id="{41B18F58-6262-4C44-A2A5-6A908F940B85}"/>
+                <a16:creationId xmlns:a16="http://schemas.microsoft.com/office/drawing/2014/main" id="{6A9ACD38-8572-4951-A473-04CF9BB4321F}"/>
               </a:ext>
             </a:extLst>
           </p:cNvPr>
@@ -6995,7 +7000,7 @@
           <p:cNvPr id="9" name="Text 7">
             <a:extLst xmlns:a="http://schemas.openxmlformats.org/drawingml/2006/main">
               <a:ext uri="{FF2B5EF4-FFF2-40B4-BE49-F238E27FC236}">
-                <a16:creationId xmlns:a16="http://schemas.microsoft.com/office/drawing/2014/main" id="{0E41B964-C984-4682-A3CA-C67B9DD11C60}"/>
+                <a16:creationId xmlns:a16="http://schemas.microsoft.com/office/drawing/2014/main" id="{03DA95E6-26EE-4A13-A4A8-FD73B116F141}"/>
               </a:ext>
             </a:extLst>
           </p:cNvPr>
@@ -7042,7 +7047,7 @@
           <p:cNvPr id="10" name="Shape 8">
             <a:extLst xmlns:a="http://schemas.openxmlformats.org/drawingml/2006/main">
               <a:ext uri="{FF2B5EF4-FFF2-40B4-BE49-F238E27FC236}">
-                <a16:creationId xmlns:a16="http://schemas.microsoft.com/office/drawing/2014/main" id="{36F52FAD-B531-4E7E-A02D-05137561ACD4}"/>
+                <a16:creationId xmlns:a16="http://schemas.microsoft.com/office/drawing/2014/main" id="{7B1932B4-8697-4046-9279-D0B8F50A5571}"/>
               </a:ext>
             </a:extLst>
           </p:cNvPr>
@@ -7074,7 +7079,7 @@
           <p:cNvPr id="11" name="Text 9">
             <a:extLst xmlns:a="http://schemas.openxmlformats.org/drawingml/2006/main">
               <a:ext uri="{FF2B5EF4-FFF2-40B4-BE49-F238E27FC236}">
-                <a16:creationId xmlns:a16="http://schemas.microsoft.com/office/drawing/2014/main" id="{550E7144-9563-4E84-B4A4-771384AC13E9}"/>
+                <a16:creationId xmlns:a16="http://schemas.microsoft.com/office/drawing/2014/main" id="{774CD8B9-D61C-48F2-9FD3-C4C8014F4BA9}"/>
               </a:ext>
             </a:extLst>
           </p:cNvPr>
@@ -7121,7 +7126,7 @@
           <p:cNvPr id="12" name="Text 10">
             <a:extLst xmlns:a="http://schemas.openxmlformats.org/drawingml/2006/main">
               <a:ext uri="{FF2B5EF4-FFF2-40B4-BE49-F238E27FC236}">
-                <a16:creationId xmlns:a16="http://schemas.microsoft.com/office/drawing/2014/main" id="{56A6AF15-3B10-49B8-A2E9-EDD49688EAC9}"/>
+                <a16:creationId xmlns:a16="http://schemas.microsoft.com/office/drawing/2014/main" id="{9658A712-4FD8-4B6C-9F6D-394F2D2DCCC3}"/>
               </a:ext>
             </a:extLst>
           </p:cNvPr>
@@ -7168,7 +7173,7 @@
           <p:cNvPr id="13" name="Shape 11">
             <a:extLst xmlns:a="http://schemas.openxmlformats.org/drawingml/2006/main">
               <a:ext uri="{FF2B5EF4-FFF2-40B4-BE49-F238E27FC236}">
-                <a16:creationId xmlns:a16="http://schemas.microsoft.com/office/drawing/2014/main" id="{66A7F111-8A5F-4B0A-9CD3-9A02C71B57C1}"/>
+                <a16:creationId xmlns:a16="http://schemas.microsoft.com/office/drawing/2014/main" id="{020EF7D5-9B69-4448-A484-92CA23C7F82D}"/>
               </a:ext>
             </a:extLst>
           </p:cNvPr>
@@ -7200,7 +7205,7 @@
           <p:cNvPr id="14" name="Text 12">
             <a:extLst xmlns:a="http://schemas.openxmlformats.org/drawingml/2006/main">
               <a:ext uri="{FF2B5EF4-FFF2-40B4-BE49-F238E27FC236}">
-                <a16:creationId xmlns:a16="http://schemas.microsoft.com/office/drawing/2014/main" id="{9363AFE2-3351-4F32-BBC0-E7DE4E662673}"/>
+                <a16:creationId xmlns:a16="http://schemas.microsoft.com/office/drawing/2014/main" id="{734C9D53-51C3-4BDD-856A-E7BA33A54E64}"/>
               </a:ext>
             </a:extLst>
           </p:cNvPr>
@@ -7247,7 +7252,7 @@
           <p:cNvPr id="15" name="Text 13">
             <a:extLst xmlns:a="http://schemas.openxmlformats.org/drawingml/2006/main">
               <a:ext uri="{FF2B5EF4-FFF2-40B4-BE49-F238E27FC236}">
-                <a16:creationId xmlns:a16="http://schemas.microsoft.com/office/drawing/2014/main" id="{894770A6-21BC-4F1E-A8E4-5D75FB8EA40B}"/>
+                <a16:creationId xmlns:a16="http://schemas.microsoft.com/office/drawing/2014/main" id="{0DAF56CB-8530-46C3-8C1B-D6B9E657D1F4}"/>
               </a:ext>
             </a:extLst>
           </p:cNvPr>
@@ -7294,7 +7299,7 @@
           <p:cNvPr id="16" name="Shape 14">
             <a:extLst xmlns:a="http://schemas.openxmlformats.org/drawingml/2006/main">
               <a:ext uri="{FF2B5EF4-FFF2-40B4-BE49-F238E27FC236}">
-                <a16:creationId xmlns:a16="http://schemas.microsoft.com/office/drawing/2014/main" id="{750737C5-AC11-4F92-AFA1-63B85230F90B}"/>
+                <a16:creationId xmlns:a16="http://schemas.microsoft.com/office/drawing/2014/main" id="{D86786D9-9A09-4FA7-A159-D4333997BF15}"/>
               </a:ext>
             </a:extLst>
           </p:cNvPr>
@@ -7326,7 +7331,7 @@
           <p:cNvPr id="17" name="Text 15">
             <a:extLst xmlns:a="http://schemas.openxmlformats.org/drawingml/2006/main">
               <a:ext uri="{FF2B5EF4-FFF2-40B4-BE49-F238E27FC236}">
-                <a16:creationId xmlns:a16="http://schemas.microsoft.com/office/drawing/2014/main" id="{A9AF2684-F604-484A-ACF7-7970552DF461}"/>
+                <a16:creationId xmlns:a16="http://schemas.microsoft.com/office/drawing/2014/main" id="{971A5504-5CE4-47E1-B1FB-2C5E01DCA097}"/>
               </a:ext>
             </a:extLst>
           </p:cNvPr>
@@ -7373,7 +7378,7 @@
           <p:cNvPr id="18" name="Text 16">
             <a:extLst xmlns:a="http://schemas.openxmlformats.org/drawingml/2006/main">
               <a:ext uri="{FF2B5EF4-FFF2-40B4-BE49-F238E27FC236}">
-                <a16:creationId xmlns:a16="http://schemas.microsoft.com/office/drawing/2014/main" id="{728EBAA1-7615-497D-8A0A-9E5B9D14D434}"/>
+                <a16:creationId xmlns:a16="http://schemas.microsoft.com/office/drawing/2014/main" id="{E9AFCB48-9C9A-40F4-A564-618B85A3DE6A}"/>
               </a:ext>
             </a:extLst>
           </p:cNvPr>
@@ -7420,7 +7425,7 @@
           <p:cNvPr id="19" name="Shape 17">
             <a:extLst xmlns:a="http://schemas.openxmlformats.org/drawingml/2006/main">
               <a:ext uri="{FF2B5EF4-FFF2-40B4-BE49-F238E27FC236}">
-                <a16:creationId xmlns:a16="http://schemas.microsoft.com/office/drawing/2014/main" id="{A18C9077-939C-438B-85E1-C8B9364ABBBA}"/>
+                <a16:creationId xmlns:a16="http://schemas.microsoft.com/office/drawing/2014/main" id="{9E1FE2C1-29D1-4E42-A8D1-94E71E85B7BD}"/>
               </a:ext>
             </a:extLst>
           </p:cNvPr>
@@ -7452,7 +7457,7 @@
           <p:cNvPr id="20" name="Text 18">
             <a:extLst xmlns:a="http://schemas.openxmlformats.org/drawingml/2006/main">
               <a:ext uri="{FF2B5EF4-FFF2-40B4-BE49-F238E27FC236}">
-                <a16:creationId xmlns:a16="http://schemas.microsoft.com/office/drawing/2014/main" id="{A44DC8C3-D06E-4154-A6D1-CAFEB5AE86C9}"/>
+                <a16:creationId xmlns:a16="http://schemas.microsoft.com/office/drawing/2014/main" id="{C087B335-13C0-4C8E-B3CE-B5B71E9F824C}"/>
               </a:ext>
             </a:extLst>
           </p:cNvPr>
@@ -7499,7 +7504,7 @@
           <p:cNvPr id="21" name="Text 19">
             <a:extLst xmlns:a="http://schemas.openxmlformats.org/drawingml/2006/main">
               <a:ext uri="{FF2B5EF4-FFF2-40B4-BE49-F238E27FC236}">
-                <a16:creationId xmlns:a16="http://schemas.microsoft.com/office/drawing/2014/main" id="{B24DEBDD-E973-4249-9032-44516B91E0BF}"/>
+                <a16:creationId xmlns:a16="http://schemas.microsoft.com/office/drawing/2014/main" id="{575DEB73-587D-44E3-89BE-234DF39C7664}"/>
               </a:ext>
             </a:extLst>
           </p:cNvPr>
@@ -7546,7 +7551,7 @@
           <p:cNvPr id="22" name="Shape 20">
             <a:extLst xmlns:a="http://schemas.openxmlformats.org/drawingml/2006/main">
               <a:ext uri="{FF2B5EF4-FFF2-40B4-BE49-F238E27FC236}">
-                <a16:creationId xmlns:a16="http://schemas.microsoft.com/office/drawing/2014/main" id="{A69F3E4F-45D7-4C36-BD94-07FEFB0C76D6}"/>
+                <a16:creationId xmlns:a16="http://schemas.microsoft.com/office/drawing/2014/main" id="{515F0E59-A986-438C-AEC7-CF219EBCC906}"/>
               </a:ext>
             </a:extLst>
           </p:cNvPr>
@@ -7578,7 +7583,7 @@
           <p:cNvPr id="23" name="Text 21">
             <a:extLst xmlns:a="http://schemas.openxmlformats.org/drawingml/2006/main">
               <a:ext uri="{FF2B5EF4-FFF2-40B4-BE49-F238E27FC236}">
-                <a16:creationId xmlns:a16="http://schemas.microsoft.com/office/drawing/2014/main" id="{5769D786-4AF7-4BAB-B593-6F7326FD0FCF}"/>
+                <a16:creationId xmlns:a16="http://schemas.microsoft.com/office/drawing/2014/main" id="{36389462-5B40-4E19-B1FB-4604F136FA84}"/>
               </a:ext>
             </a:extLst>
           </p:cNvPr>
@@ -7625,7 +7630,7 @@
           <p:cNvPr id="24" name="Text 22">
             <a:extLst xmlns:a="http://schemas.openxmlformats.org/drawingml/2006/main">
               <a:ext uri="{FF2B5EF4-FFF2-40B4-BE49-F238E27FC236}">
-                <a16:creationId xmlns:a16="http://schemas.microsoft.com/office/drawing/2014/main" id="{98D41A0B-B1D9-4E8F-BBF7-EAF4132229CF}"/>
+                <a16:creationId xmlns:a16="http://schemas.microsoft.com/office/drawing/2014/main" id="{64830EFB-3400-45AA-8F4C-A62DB4C1D64D}"/>
               </a:ext>
             </a:extLst>
           </p:cNvPr>
@@ -7672,7 +7677,7 @@
           <p:cNvPr id="25" name="Shape 23">
             <a:extLst xmlns:a="http://schemas.openxmlformats.org/drawingml/2006/main">
               <a:ext uri="{FF2B5EF4-FFF2-40B4-BE49-F238E27FC236}">
-                <a16:creationId xmlns:a16="http://schemas.microsoft.com/office/drawing/2014/main" id="{B0802F11-F248-4871-A002-B7B436F54AF1}"/>
+                <a16:creationId xmlns:a16="http://schemas.microsoft.com/office/drawing/2014/main" id="{10CAEBAB-B016-4DDE-B786-6389C965E21A}"/>
               </a:ext>
             </a:extLst>
           </p:cNvPr>
@@ -7704,7 +7709,7 @@
           <p:cNvPr id="26" name="Text 24">
             <a:extLst xmlns:a="http://schemas.openxmlformats.org/drawingml/2006/main">
               <a:ext uri="{FF2B5EF4-FFF2-40B4-BE49-F238E27FC236}">
-                <a16:creationId xmlns:a16="http://schemas.microsoft.com/office/drawing/2014/main" id="{1821D3F3-9145-4744-9621-1D48DC4966E7}"/>
+                <a16:creationId xmlns:a16="http://schemas.microsoft.com/office/drawing/2014/main" id="{CDA7BB2D-7B61-4FBA-BC4F-C2EC95CF82BD}"/>
               </a:ext>
             </a:extLst>
           </p:cNvPr>
@@ -7751,7 +7756,7 @@
           <p:cNvPr id="27" name="Shape 25">
             <a:extLst xmlns:a="http://schemas.openxmlformats.org/drawingml/2006/main">
               <a:ext uri="{FF2B5EF4-FFF2-40B4-BE49-F238E27FC236}">
-                <a16:creationId xmlns:a16="http://schemas.microsoft.com/office/drawing/2014/main" id="{FB8C839F-87A8-4120-BF00-3B81FB95E66C}"/>
+                <a16:creationId xmlns:a16="http://schemas.microsoft.com/office/drawing/2014/main" id="{6243575F-3EFE-4EC3-9CA4-B9879CB6255C}"/>
               </a:ext>
             </a:extLst>
           </p:cNvPr>
@@ -7786,7 +7791,7 @@
           <p:cNvPr id="28" name="Text 26">
             <a:extLst xmlns:a="http://schemas.openxmlformats.org/drawingml/2006/main">
               <a:ext uri="{FF2B5EF4-FFF2-40B4-BE49-F238E27FC236}">
-                <a16:creationId xmlns:a16="http://schemas.microsoft.com/office/drawing/2014/main" id="{14A9DB0B-9867-4E54-94BF-D26F974BB539}"/>
+                <a16:creationId xmlns:a16="http://schemas.microsoft.com/office/drawing/2014/main" id="{ECB31E6F-32A0-45E0-83FE-912CC516C2B7}"/>
               </a:ext>
             </a:extLst>
           </p:cNvPr>
@@ -7833,7 +7838,7 @@
           <p:cNvPr id="29" name="Shape 27">
             <a:extLst xmlns:a="http://schemas.openxmlformats.org/drawingml/2006/main">
               <a:ext uri="{FF2B5EF4-FFF2-40B4-BE49-F238E27FC236}">
-                <a16:creationId xmlns:a16="http://schemas.microsoft.com/office/drawing/2014/main" id="{F7D91A4B-0996-47B2-B310-7F62F56176E2}"/>
+                <a16:creationId xmlns:a16="http://schemas.microsoft.com/office/drawing/2014/main" id="{072DE4AA-8E80-44AA-9712-A8F4EE385F2D}"/>
               </a:ext>
             </a:extLst>
           </p:cNvPr>
@@ -7866,7 +7871,7 @@
           <p:cNvPr id="30" name="Text 28">
             <a:extLst xmlns:a="http://schemas.openxmlformats.org/drawingml/2006/main">
               <a:ext uri="{FF2B5EF4-FFF2-40B4-BE49-F238E27FC236}">
-                <a16:creationId xmlns:a16="http://schemas.microsoft.com/office/drawing/2014/main" id="{2A8019D6-4BB0-48D7-89EF-FFC12826DA96}"/>
+                <a16:creationId xmlns:a16="http://schemas.microsoft.com/office/drawing/2014/main" id="{BDC04006-0836-453A-8CA9-2F9DAA226096}"/>
               </a:ext>
             </a:extLst>
           </p:cNvPr>
@@ -7913,7 +7918,7 @@
           <p:cNvPr id="31" name="Shape 29">
             <a:extLst xmlns:a="http://schemas.openxmlformats.org/drawingml/2006/main">
               <a:ext uri="{FF2B5EF4-FFF2-40B4-BE49-F238E27FC236}">
-                <a16:creationId xmlns:a16="http://schemas.microsoft.com/office/drawing/2014/main" id="{84A21D47-12A7-4022-8C34-2FB27DF13F2D}"/>
+                <a16:creationId xmlns:a16="http://schemas.microsoft.com/office/drawing/2014/main" id="{D64B3071-19AC-4C7B-9C4C-9EBDE731678E}"/>
               </a:ext>
             </a:extLst>
           </p:cNvPr>
@@ -7946,7 +7951,7 @@
           <p:cNvPr id="32" name="Text 30">
             <a:extLst xmlns:a="http://schemas.openxmlformats.org/drawingml/2006/main">
               <a:ext uri="{FF2B5EF4-FFF2-40B4-BE49-F238E27FC236}">
-                <a16:creationId xmlns:a16="http://schemas.microsoft.com/office/drawing/2014/main" id="{6A33FF8B-1D0C-41BA-9770-241ADBA7DA5D}"/>
+                <a16:creationId xmlns:a16="http://schemas.microsoft.com/office/drawing/2014/main" id="{6BB05558-0A8C-42E7-9145-BDC536C23F88}"/>
               </a:ext>
             </a:extLst>
           </p:cNvPr>
@@ -7993,7 +7998,7 @@
           <p:cNvPr id="33" name="Shape 31">
             <a:extLst xmlns:a="http://schemas.openxmlformats.org/drawingml/2006/main">
               <a:ext uri="{FF2B5EF4-FFF2-40B4-BE49-F238E27FC236}">
-                <a16:creationId xmlns:a16="http://schemas.microsoft.com/office/drawing/2014/main" id="{1AACBFDC-C96F-418A-B4B0-60FA5300ABE1}"/>
+                <a16:creationId xmlns:a16="http://schemas.microsoft.com/office/drawing/2014/main" id="{C66D5803-F30A-40F8-8529-049317D1E762}"/>
               </a:ext>
             </a:extLst>
           </p:cNvPr>
@@ -8026,7 +8031,7 @@
           <p:cNvPr id="34" name="Text 32">
             <a:extLst xmlns:a="http://schemas.openxmlformats.org/drawingml/2006/main">
               <a:ext uri="{FF2B5EF4-FFF2-40B4-BE49-F238E27FC236}">
-                <a16:creationId xmlns:a16="http://schemas.microsoft.com/office/drawing/2014/main" id="{30952993-48FA-492B-AC0E-A68103A6C188}"/>
+                <a16:creationId xmlns:a16="http://schemas.microsoft.com/office/drawing/2014/main" id="{FB6ECEE2-561E-4CF5-970F-235846F2535C}"/>
               </a:ext>
             </a:extLst>
           </p:cNvPr>
@@ -8073,7 +8078,7 @@
           <p:cNvPr id="35" name="Shape 33">
             <a:extLst xmlns:a="http://schemas.openxmlformats.org/drawingml/2006/main">
               <a:ext uri="{FF2B5EF4-FFF2-40B4-BE49-F238E27FC236}">
-                <a16:creationId xmlns:a16="http://schemas.microsoft.com/office/drawing/2014/main" id="{2DAA3C68-6CCF-4C37-A458-E1D42FC2CAC2}"/>
+                <a16:creationId xmlns:a16="http://schemas.microsoft.com/office/drawing/2014/main" id="{2D90CB4A-E25B-4DFC-8966-14838F2CA9E0}"/>
               </a:ext>
             </a:extLst>
           </p:cNvPr>
@@ -8106,7 +8111,7 @@
           <p:cNvPr id="36" name="Text 34">
             <a:extLst xmlns:a="http://schemas.openxmlformats.org/drawingml/2006/main">
               <a:ext uri="{FF2B5EF4-FFF2-40B4-BE49-F238E27FC236}">
-                <a16:creationId xmlns:a16="http://schemas.microsoft.com/office/drawing/2014/main" id="{FAE48855-5D47-4A1A-8725-F33D808B522F}"/>
+                <a16:creationId xmlns:a16="http://schemas.microsoft.com/office/drawing/2014/main" id="{9B876175-9724-410E-961A-D71925CE5435}"/>
               </a:ext>
             </a:extLst>
           </p:cNvPr>
@@ -8153,7 +8158,7 @@
           <p:cNvPr id="37" name="Shape 35">
             <a:extLst xmlns:a="http://schemas.openxmlformats.org/drawingml/2006/main">
               <a:ext uri="{FF2B5EF4-FFF2-40B4-BE49-F238E27FC236}">
-                <a16:creationId xmlns:a16="http://schemas.microsoft.com/office/drawing/2014/main" id="{CE80F553-F8D3-45B2-A8E2-CF72DF76D4AC}"/>
+                <a16:creationId xmlns:a16="http://schemas.microsoft.com/office/drawing/2014/main" id="{D5F2D127-A876-4AEE-8F97-02C0311E8FC6}"/>
               </a:ext>
             </a:extLst>
           </p:cNvPr>
@@ -8186,7 +8191,7 @@
           <p:cNvPr id="38" name="Text 36">
             <a:extLst xmlns:a="http://schemas.openxmlformats.org/drawingml/2006/main">
               <a:ext uri="{FF2B5EF4-FFF2-40B4-BE49-F238E27FC236}">
-                <a16:creationId xmlns:a16="http://schemas.microsoft.com/office/drawing/2014/main" id="{679E6DAE-99D7-4CC7-BD34-E1266B03A438}"/>
+                <a16:creationId xmlns:a16="http://schemas.microsoft.com/office/drawing/2014/main" id="{8AF6ACDE-77FC-44DE-A58A-D02CC6E5F95F}"/>
               </a:ext>
             </a:extLst>
           </p:cNvPr>
@@ -8233,7 +8238,7 @@
           <p:cNvPr id="39" name="Shape 37">
             <a:extLst xmlns:a="http://schemas.openxmlformats.org/drawingml/2006/main">
               <a:ext uri="{FF2B5EF4-FFF2-40B4-BE49-F238E27FC236}">
-                <a16:creationId xmlns:a16="http://schemas.microsoft.com/office/drawing/2014/main" id="{E102DB87-F75D-4E93-8B75-486942D9A729}"/>
+                <a16:creationId xmlns:a16="http://schemas.microsoft.com/office/drawing/2014/main" id="{6F8D2CB2-74B1-48E9-8F6A-8D515A9EF400}"/>
               </a:ext>
             </a:extLst>
           </p:cNvPr>
@@ -8266,7 +8271,7 @@
           <p:cNvPr id="40" name="Text 38">
             <a:extLst xmlns:a="http://schemas.openxmlformats.org/drawingml/2006/main">
               <a:ext uri="{FF2B5EF4-FFF2-40B4-BE49-F238E27FC236}">
-                <a16:creationId xmlns:a16="http://schemas.microsoft.com/office/drawing/2014/main" id="{DE4C2260-3761-4C15-B5C6-DB0AC4988950}"/>
+                <a16:creationId xmlns:a16="http://schemas.microsoft.com/office/drawing/2014/main" id="{9528A6D1-53FE-4421-B4BC-47E8524AB7EE}"/>
               </a:ext>
             </a:extLst>
           </p:cNvPr>
@@ -8313,7 +8318,7 @@
           <p:cNvPr id="41" name="Shape 39">
             <a:extLst xmlns:a="http://schemas.openxmlformats.org/drawingml/2006/main">
               <a:ext uri="{FF2B5EF4-FFF2-40B4-BE49-F238E27FC236}">
-                <a16:creationId xmlns:a16="http://schemas.microsoft.com/office/drawing/2014/main" id="{E204D7BE-9FC2-4264-973D-5237EC0CFE98}"/>
+                <a16:creationId xmlns:a16="http://schemas.microsoft.com/office/drawing/2014/main" id="{1D414447-2368-41B1-970F-B3F144C84FF1}"/>
               </a:ext>
             </a:extLst>
           </p:cNvPr>
@@ -8348,7 +8353,7 @@
           <p:cNvPr id="42" name="Text 40">
             <a:extLst xmlns:a="http://schemas.openxmlformats.org/drawingml/2006/main">
               <a:ext uri="{FF2B5EF4-FFF2-40B4-BE49-F238E27FC236}">
-                <a16:creationId xmlns:a16="http://schemas.microsoft.com/office/drawing/2014/main" id="{D902FA63-AB39-4DD8-8903-33233A4AF524}"/>
+                <a16:creationId xmlns:a16="http://schemas.microsoft.com/office/drawing/2014/main" id="{1C6D81FA-4E87-4105-9924-D588903CD1C0}"/>
               </a:ext>
             </a:extLst>
           </p:cNvPr>
@@ -8395,7 +8400,7 @@
           <p:cNvPr id="43" name="Shape 41">
             <a:extLst xmlns:a="http://schemas.openxmlformats.org/drawingml/2006/main">
               <a:ext uri="{FF2B5EF4-FFF2-40B4-BE49-F238E27FC236}">
-                <a16:creationId xmlns:a16="http://schemas.microsoft.com/office/drawing/2014/main" id="{BDC47184-4DAC-4C0E-932C-EC45CDDE039F}"/>
+                <a16:creationId xmlns:a16="http://schemas.microsoft.com/office/drawing/2014/main" id="{BBFB53E7-9D16-4F1E-B1A9-1730A431A19F}"/>
               </a:ext>
             </a:extLst>
           </p:cNvPr>
@@ -8430,7 +8435,7 @@
           <p:cNvPr id="44" name="Text 42">
             <a:extLst xmlns:a="http://schemas.openxmlformats.org/drawingml/2006/main">
               <a:ext uri="{FF2B5EF4-FFF2-40B4-BE49-F238E27FC236}">
-                <a16:creationId xmlns:a16="http://schemas.microsoft.com/office/drawing/2014/main" id="{7D136E75-A4D8-462E-8907-0A43E33D22E5}"/>
+                <a16:creationId xmlns:a16="http://schemas.microsoft.com/office/drawing/2014/main" id="{E63EBFB8-2758-4B96-8A55-A6F1BC0B4DAD}"/>
               </a:ext>
             </a:extLst>
           </p:cNvPr>
@@ -8477,7 +8482,7 @@
           <p:cNvPr id="45" name="Shape 43">
             <a:extLst xmlns:a="http://schemas.openxmlformats.org/drawingml/2006/main">
               <a:ext uri="{FF2B5EF4-FFF2-40B4-BE49-F238E27FC236}">
-                <a16:creationId xmlns:a16="http://schemas.microsoft.com/office/drawing/2014/main" id="{17609550-0A40-4E1A-8EDD-2E55CEC6D6DC}"/>
+                <a16:creationId xmlns:a16="http://schemas.microsoft.com/office/drawing/2014/main" id="{E92A2545-39F0-4A6A-AB7E-26E9409497B8}"/>
               </a:ext>
             </a:extLst>
           </p:cNvPr>
@@ -8512,7 +8517,7 @@
           <p:cNvPr id="46" name="Text 44">
             <a:extLst xmlns:a="http://schemas.openxmlformats.org/drawingml/2006/main">
               <a:ext uri="{FF2B5EF4-FFF2-40B4-BE49-F238E27FC236}">
-                <a16:creationId xmlns:a16="http://schemas.microsoft.com/office/drawing/2014/main" id="{10E91B5E-62FC-445B-A7C4-080F8BEA7084}"/>
+                <a16:creationId xmlns:a16="http://schemas.microsoft.com/office/drawing/2014/main" id="{B2044DAE-220E-4CED-BB4B-FE6FA1E8AAFE}"/>
               </a:ext>
             </a:extLst>
           </p:cNvPr>
@@ -8559,7 +8564,7 @@
           <p:cNvPr id="47" name="Text 45">
             <a:extLst xmlns:a="http://schemas.openxmlformats.org/drawingml/2006/main">
               <a:ext uri="{FF2B5EF4-FFF2-40B4-BE49-F238E27FC236}">
-                <a16:creationId xmlns:a16="http://schemas.microsoft.com/office/drawing/2014/main" id="{5A63048A-8228-4289-81E4-98788E44140D}"/>
+                <a16:creationId xmlns:a16="http://schemas.microsoft.com/office/drawing/2014/main" id="{4821D10E-DCCD-421D-A233-9156F66BF2C6}"/>
               </a:ext>
             </a:extLst>
           </p:cNvPr>
@@ -8606,7 +8611,7 @@
           <p:cNvPr id="48" name="Text 46">
             <a:extLst xmlns:a="http://schemas.openxmlformats.org/drawingml/2006/main">
               <a:ext uri="{FF2B5EF4-FFF2-40B4-BE49-F238E27FC236}">
-                <a16:creationId xmlns:a16="http://schemas.microsoft.com/office/drawing/2014/main" id="{2DB44749-DA43-4D84-AB7D-7686DEB11599}"/>
+                <a16:creationId xmlns:a16="http://schemas.microsoft.com/office/drawing/2014/main" id="{2CC2EF3A-2F75-487F-A719-ACAE7E08E713}"/>
               </a:ext>
             </a:extLst>
           </p:cNvPr>
@@ -8651,7 +8656,7 @@
     </p:spTree>
     <p:extLst>
       <p:ext uri="{BB962C8B-B14F-4D97-AF65-F5344CB8AC3E}">
-        <p14:creationId xmlns:p14="http://schemas.microsoft.com/office/powerpoint/2010/main" val="824127784"/>
+        <p14:creationId xmlns:p14="http://schemas.microsoft.com/office/powerpoint/2010/main" val="1496578321"/>
       </p:ext>
     </p:extLst>
   </p:cSld>
@@ -8682,7 +8687,7 @@
           <p:cNvPr id="2" name="Text 0">
             <a:extLst xmlns:a="http://schemas.openxmlformats.org/drawingml/2006/main">
               <a:ext uri="{FF2B5EF4-FFF2-40B4-BE49-F238E27FC236}">
-                <a16:creationId xmlns:a16="http://schemas.microsoft.com/office/drawing/2014/main" id="{7FD90BA5-F07D-4CD6-8D29-68B4CC33637D}"/>
+                <a16:creationId xmlns:a16="http://schemas.microsoft.com/office/drawing/2014/main" id="{E4AFDED7-C8B6-490E-9AD7-D6EA6ADAA952}"/>
               </a:ext>
             </a:extLst>
           </p:cNvPr>
@@ -8729,7 +8734,7 @@
           <p:cNvPr id="3" name="Text 1">
             <a:extLst xmlns:a="http://schemas.openxmlformats.org/drawingml/2006/main">
               <a:ext uri="{FF2B5EF4-FFF2-40B4-BE49-F238E27FC236}">
-                <a16:creationId xmlns:a16="http://schemas.microsoft.com/office/drawing/2014/main" id="{2F02D375-1963-4A0C-8B1D-9D01AFFBE947}"/>
+                <a16:creationId xmlns:a16="http://schemas.microsoft.com/office/drawing/2014/main" id="{27763BC8-CF0A-42B4-81D0-F133171CDD20}"/>
               </a:ext>
             </a:extLst>
           </p:cNvPr>
@@ -8776,7 +8781,7 @@
           <p:cNvPr id="4" name="Shape 2">
             <a:extLst xmlns:a="http://schemas.openxmlformats.org/drawingml/2006/main">
               <a:ext uri="{FF2B5EF4-FFF2-40B4-BE49-F238E27FC236}">
-                <a16:creationId xmlns:a16="http://schemas.microsoft.com/office/drawing/2014/main" id="{DF4190EA-4945-470C-AA91-23D160D70F67}"/>
+                <a16:creationId xmlns:a16="http://schemas.microsoft.com/office/drawing/2014/main" id="{F66A9421-EE4C-405D-BFB6-73DCFC513A91}"/>
               </a:ext>
             </a:extLst>
           </p:cNvPr>
@@ -8811,7 +8816,7 @@
           <p:cNvPr id="5" name="Text 3">
             <a:extLst xmlns:a="http://schemas.openxmlformats.org/drawingml/2006/main">
               <a:ext uri="{FF2B5EF4-FFF2-40B4-BE49-F238E27FC236}">
-                <a16:creationId xmlns:a16="http://schemas.microsoft.com/office/drawing/2014/main" id="{BA5C0F3D-DD97-4212-B326-3FE4D64655E7}"/>
+                <a16:creationId xmlns:a16="http://schemas.microsoft.com/office/drawing/2014/main" id="{064E1CB5-EAFA-49CE-B388-75F7592B668C}"/>
               </a:ext>
             </a:extLst>
           </p:cNvPr>
@@ -8858,7 +8863,7 @@
           <p:cNvPr id="6" name="Shape 4">
             <a:extLst xmlns:a="http://schemas.openxmlformats.org/drawingml/2006/main">
               <a:ext uri="{FF2B5EF4-FFF2-40B4-BE49-F238E27FC236}">
-                <a16:creationId xmlns:a16="http://schemas.microsoft.com/office/drawing/2014/main" id="{F9219EF3-C968-4BD6-8E71-ACC646ACBA91}"/>
+                <a16:creationId xmlns:a16="http://schemas.microsoft.com/office/drawing/2014/main" id="{2D0F6B62-10BA-4728-8751-437ABAAD664B}"/>
               </a:ext>
             </a:extLst>
           </p:cNvPr>
@@ -8889,7 +8894,7 @@
           <p:cNvPr id="7" name="Shape 5">
             <a:extLst xmlns:a="http://schemas.openxmlformats.org/drawingml/2006/main">
               <a:ext uri="{FF2B5EF4-FFF2-40B4-BE49-F238E27FC236}">
-                <a16:creationId xmlns:a16="http://schemas.microsoft.com/office/drawing/2014/main" id="{D7100A7A-68F3-4074-AFED-47CD2770E4F6}"/>
+                <a16:creationId xmlns:a16="http://schemas.microsoft.com/office/drawing/2014/main" id="{2967AE05-876E-410B-BC21-9E2E1B38D0A6}"/>
               </a:ext>
             </a:extLst>
           </p:cNvPr>
@@ -8924,7 +8929,7 @@
           <p:cNvPr id="8" name="Shape 6">
             <a:extLst xmlns:a="http://schemas.openxmlformats.org/drawingml/2006/main">
               <a:ext uri="{FF2B5EF4-FFF2-40B4-BE49-F238E27FC236}">
-                <a16:creationId xmlns:a16="http://schemas.microsoft.com/office/drawing/2014/main" id="{7013E7DA-907C-4C02-908B-BB0859473D17}"/>
+                <a16:creationId xmlns:a16="http://schemas.microsoft.com/office/drawing/2014/main" id="{EB2B2311-5E31-4457-B735-22A34D41469A}"/>
               </a:ext>
             </a:extLst>
           </p:cNvPr>
@@ -8959,7 +8964,7 @@
           <p:cNvPr id="9" name="Text 7">
             <a:extLst xmlns:a="http://schemas.openxmlformats.org/drawingml/2006/main">
               <a:ext uri="{FF2B5EF4-FFF2-40B4-BE49-F238E27FC236}">
-                <a16:creationId xmlns:a16="http://schemas.microsoft.com/office/drawing/2014/main" id="{AED7F596-236F-4B9A-97FF-5A7B6D825066}"/>
+                <a16:creationId xmlns:a16="http://schemas.microsoft.com/office/drawing/2014/main" id="{56C98250-42E9-4895-A959-2CE10F0CBAAC}"/>
               </a:ext>
             </a:extLst>
           </p:cNvPr>
@@ -9006,7 +9011,7 @@
           <p:cNvPr id="10" name="Text 8">
             <a:extLst xmlns:a="http://schemas.openxmlformats.org/drawingml/2006/main">
               <a:ext uri="{FF2B5EF4-FFF2-40B4-BE49-F238E27FC236}">
-                <a16:creationId xmlns:a16="http://schemas.microsoft.com/office/drawing/2014/main" id="{5DC72D1F-F6BD-4996-9E49-DD944DF06022}"/>
+                <a16:creationId xmlns:a16="http://schemas.microsoft.com/office/drawing/2014/main" id="{92D7BF46-1662-4285-92BB-751722905661}"/>
               </a:ext>
             </a:extLst>
           </p:cNvPr>
@@ -9053,7 +9058,7 @@
           <p:cNvPr id="11" name="Shape 9">
             <a:extLst xmlns:a="http://schemas.openxmlformats.org/drawingml/2006/main">
               <a:ext uri="{FF2B5EF4-FFF2-40B4-BE49-F238E27FC236}">
-                <a16:creationId xmlns:a16="http://schemas.microsoft.com/office/drawing/2014/main" id="{B1412F23-EC1C-453E-9AED-515330FF17C4}"/>
+                <a16:creationId xmlns:a16="http://schemas.microsoft.com/office/drawing/2014/main" id="{A8C15FFC-522B-4413-844F-7B2D3AFE0351}"/>
               </a:ext>
             </a:extLst>
           </p:cNvPr>
@@ -9088,7 +9093,7 @@
           <p:cNvPr id="12" name="Text 10">
             <a:extLst xmlns:a="http://schemas.openxmlformats.org/drawingml/2006/main">
               <a:ext uri="{FF2B5EF4-FFF2-40B4-BE49-F238E27FC236}">
-                <a16:creationId xmlns:a16="http://schemas.microsoft.com/office/drawing/2014/main" id="{C680007D-A980-4F49-9FD8-A9A8446B432F}"/>
+                <a16:creationId xmlns:a16="http://schemas.microsoft.com/office/drawing/2014/main" id="{10C5D558-455E-484F-84A2-900720BAA680}"/>
               </a:ext>
             </a:extLst>
           </p:cNvPr>
@@ -9135,7 +9140,7 @@
           <p:cNvPr id="13" name="Text 11">
             <a:extLst xmlns:a="http://schemas.openxmlformats.org/drawingml/2006/main">
               <a:ext uri="{FF2B5EF4-FFF2-40B4-BE49-F238E27FC236}">
-                <a16:creationId xmlns:a16="http://schemas.microsoft.com/office/drawing/2014/main" id="{9CD4C483-62CE-44B8-A420-8748516C12A4}"/>
+                <a16:creationId xmlns:a16="http://schemas.microsoft.com/office/drawing/2014/main" id="{0F33E378-C76D-444E-A508-6B79130927DF}"/>
               </a:ext>
             </a:extLst>
           </p:cNvPr>
@@ -9182,7 +9187,7 @@
           <p:cNvPr id="14" name="Shape 12">
             <a:extLst xmlns:a="http://schemas.openxmlformats.org/drawingml/2006/main">
               <a:ext uri="{FF2B5EF4-FFF2-40B4-BE49-F238E27FC236}">
-                <a16:creationId xmlns:a16="http://schemas.microsoft.com/office/drawing/2014/main" id="{64B12B0E-6DE4-4867-8C8E-EC60B06E5916}"/>
+                <a16:creationId xmlns:a16="http://schemas.microsoft.com/office/drawing/2014/main" id="{688267CF-8AAE-434D-A664-F5CDBF17A2C2}"/>
               </a:ext>
             </a:extLst>
           </p:cNvPr>
@@ -9217,7 +9222,7 @@
           <p:cNvPr id="15" name="Text 13">
             <a:extLst xmlns:a="http://schemas.openxmlformats.org/drawingml/2006/main">
               <a:ext uri="{FF2B5EF4-FFF2-40B4-BE49-F238E27FC236}">
-                <a16:creationId xmlns:a16="http://schemas.microsoft.com/office/drawing/2014/main" id="{FDAF98F0-9992-4FE7-8A80-87D2FBCFDC2C}"/>
+                <a16:creationId xmlns:a16="http://schemas.microsoft.com/office/drawing/2014/main" id="{F1D3E513-6619-44DC-A654-84B064440967}"/>
               </a:ext>
             </a:extLst>
           </p:cNvPr>
@@ -9264,7 +9269,7 @@
           <p:cNvPr id="16" name="Text 14">
             <a:extLst xmlns:a="http://schemas.openxmlformats.org/drawingml/2006/main">
               <a:ext uri="{FF2B5EF4-FFF2-40B4-BE49-F238E27FC236}">
-                <a16:creationId xmlns:a16="http://schemas.microsoft.com/office/drawing/2014/main" id="{77F40CE6-7C30-44F8-B59B-0F2337D977AA}"/>
+                <a16:creationId xmlns:a16="http://schemas.microsoft.com/office/drawing/2014/main" id="{F14D71D7-1AB1-423D-8670-C50182CF76AD}"/>
               </a:ext>
             </a:extLst>
           </p:cNvPr>
@@ -9311,7 +9316,7 @@
           <p:cNvPr id="17" name="Shape 15">
             <a:extLst xmlns:a="http://schemas.openxmlformats.org/drawingml/2006/main">
               <a:ext uri="{FF2B5EF4-FFF2-40B4-BE49-F238E27FC236}">
-                <a16:creationId xmlns:a16="http://schemas.microsoft.com/office/drawing/2014/main" id="{1DAE5F1A-600B-4451-B916-195EA42B80BD}"/>
+                <a16:creationId xmlns:a16="http://schemas.microsoft.com/office/drawing/2014/main" id="{E6619F7C-3448-423F-98D2-521F7F6B0512}"/>
               </a:ext>
             </a:extLst>
           </p:cNvPr>
@@ -9346,7 +9351,7 @@
           <p:cNvPr id="18" name="Text 16">
             <a:extLst xmlns:a="http://schemas.openxmlformats.org/drawingml/2006/main">
               <a:ext uri="{FF2B5EF4-FFF2-40B4-BE49-F238E27FC236}">
-                <a16:creationId xmlns:a16="http://schemas.microsoft.com/office/drawing/2014/main" id="{7B7CF791-DD5A-436D-9C1A-A8602E561666}"/>
+                <a16:creationId xmlns:a16="http://schemas.microsoft.com/office/drawing/2014/main" id="{DFB4CFE3-CF1E-4828-BC35-6A9EC709A13F}"/>
               </a:ext>
             </a:extLst>
           </p:cNvPr>
@@ -9393,7 +9398,7 @@
           <p:cNvPr id="19" name="Text 17">
             <a:extLst xmlns:a="http://schemas.openxmlformats.org/drawingml/2006/main">
               <a:ext uri="{FF2B5EF4-FFF2-40B4-BE49-F238E27FC236}">
-                <a16:creationId xmlns:a16="http://schemas.microsoft.com/office/drawing/2014/main" id="{21EF887E-6035-4552-AF1D-6869082298D2}"/>
+                <a16:creationId xmlns:a16="http://schemas.microsoft.com/office/drawing/2014/main" id="{E7DE24A0-16B8-4933-AFDC-4FF11CC52892}"/>
               </a:ext>
             </a:extLst>
           </p:cNvPr>
@@ -9440,7 +9445,7 @@
           <p:cNvPr id="20" name="Shape 18">
             <a:extLst xmlns:a="http://schemas.openxmlformats.org/drawingml/2006/main">
               <a:ext uri="{FF2B5EF4-FFF2-40B4-BE49-F238E27FC236}">
-                <a16:creationId xmlns:a16="http://schemas.microsoft.com/office/drawing/2014/main" id="{76FB2988-AB74-412E-AF5E-9BE0CA1ED616}"/>
+                <a16:creationId xmlns:a16="http://schemas.microsoft.com/office/drawing/2014/main" id="{A2054C82-8057-4394-9AA1-C2F2D67D237C}"/>
               </a:ext>
             </a:extLst>
           </p:cNvPr>
@@ -9472,7 +9477,7 @@
           <p:cNvPr id="21" name="Shape 19">
             <a:extLst xmlns:a="http://schemas.openxmlformats.org/drawingml/2006/main">
               <a:ext uri="{FF2B5EF4-FFF2-40B4-BE49-F238E27FC236}">
-                <a16:creationId xmlns:a16="http://schemas.microsoft.com/office/drawing/2014/main" id="{E919AA37-790D-4295-A81C-95F98B051C97}"/>
+                <a16:creationId xmlns:a16="http://schemas.microsoft.com/office/drawing/2014/main" id="{D9C2FD71-D5AB-4391-A2BD-BDCA34ECD7E9}"/>
               </a:ext>
             </a:extLst>
           </p:cNvPr>
@@ -9504,7 +9509,7 @@
           <p:cNvPr id="22" name="Shape 20">
             <a:extLst xmlns:a="http://schemas.openxmlformats.org/drawingml/2006/main">
               <a:ext uri="{FF2B5EF4-FFF2-40B4-BE49-F238E27FC236}">
-                <a16:creationId xmlns:a16="http://schemas.microsoft.com/office/drawing/2014/main" id="{152EF7F6-6A68-4D12-B74F-3D4AA712188E}"/>
+                <a16:creationId xmlns:a16="http://schemas.microsoft.com/office/drawing/2014/main" id="{D0D3271A-EF7B-45D0-A403-AF25926C6E8B}"/>
               </a:ext>
             </a:extLst>
           </p:cNvPr>
@@ -9536,7 +9541,7 @@
           <p:cNvPr id="23" name="Shape 21">
             <a:extLst xmlns:a="http://schemas.openxmlformats.org/drawingml/2006/main">
               <a:ext uri="{FF2B5EF4-FFF2-40B4-BE49-F238E27FC236}">
-                <a16:creationId xmlns:a16="http://schemas.microsoft.com/office/drawing/2014/main" id="{AB4A9BC3-F7B1-4021-971E-BCB8F11BF1C7}"/>
+                <a16:creationId xmlns:a16="http://schemas.microsoft.com/office/drawing/2014/main" id="{05021185-E731-4551-AC66-58020774BFF2}"/>
               </a:ext>
             </a:extLst>
           </p:cNvPr>
@@ -9568,7 +9573,7 @@
           <p:cNvPr id="24" name="Shape 22">
             <a:extLst xmlns:a="http://schemas.openxmlformats.org/drawingml/2006/main">
               <a:ext uri="{FF2B5EF4-FFF2-40B4-BE49-F238E27FC236}">
-                <a16:creationId xmlns:a16="http://schemas.microsoft.com/office/drawing/2014/main" id="{40124E97-86E3-4844-A548-6DE483453064}"/>
+                <a16:creationId xmlns:a16="http://schemas.microsoft.com/office/drawing/2014/main" id="{C583AB6D-BF25-4B2F-8682-E7390D34EE9C}"/>
               </a:ext>
             </a:extLst>
           </p:cNvPr>
@@ -9603,7 +9608,7 @@
           <p:cNvPr id="25" name="Text 23">
             <a:extLst xmlns:a="http://schemas.openxmlformats.org/drawingml/2006/main">
               <a:ext uri="{FF2B5EF4-FFF2-40B4-BE49-F238E27FC236}">
-                <a16:creationId xmlns:a16="http://schemas.microsoft.com/office/drawing/2014/main" id="{E6D2CD41-8A37-4619-A3CD-1CA000524495}"/>
+                <a16:creationId xmlns:a16="http://schemas.microsoft.com/office/drawing/2014/main" id="{E011B9E2-362F-4DCF-8485-B79E356FC944}"/>
               </a:ext>
             </a:extLst>
           </p:cNvPr>
@@ -9650,7 +9655,7 @@
           <p:cNvPr id="26" name="Shape 24">
             <a:extLst xmlns:a="http://schemas.openxmlformats.org/drawingml/2006/main">
               <a:ext uri="{FF2B5EF4-FFF2-40B4-BE49-F238E27FC236}">
-                <a16:creationId xmlns:a16="http://schemas.microsoft.com/office/drawing/2014/main" id="{830301D6-CB1F-4761-8EA9-27EF5D8DB0BB}"/>
+                <a16:creationId xmlns:a16="http://schemas.microsoft.com/office/drawing/2014/main" id="{D95B9839-ABFC-4116-9E5F-8C72BC0E1CB5}"/>
               </a:ext>
             </a:extLst>
           </p:cNvPr>
@@ -9685,7 +9690,7 @@
           <p:cNvPr id="27" name="Text 25">
             <a:extLst xmlns:a="http://schemas.openxmlformats.org/drawingml/2006/main">
               <a:ext uri="{FF2B5EF4-FFF2-40B4-BE49-F238E27FC236}">
-                <a16:creationId xmlns:a16="http://schemas.microsoft.com/office/drawing/2014/main" id="{0C0E105F-D630-4D8C-9655-20AC2E6B1E8F}"/>
+                <a16:creationId xmlns:a16="http://schemas.microsoft.com/office/drawing/2014/main" id="{83A54482-6C7B-446E-9B8B-7D14108A847D}"/>
               </a:ext>
             </a:extLst>
           </p:cNvPr>
@@ -9732,7 +9737,7 @@
           <p:cNvPr id="28" name="Shape 26">
             <a:extLst xmlns:a="http://schemas.openxmlformats.org/drawingml/2006/main">
               <a:ext uri="{FF2B5EF4-FFF2-40B4-BE49-F238E27FC236}">
-                <a16:creationId xmlns:a16="http://schemas.microsoft.com/office/drawing/2014/main" id="{6B05481E-68EE-4D9E-ADCB-5D63E02889D4}"/>
+                <a16:creationId xmlns:a16="http://schemas.microsoft.com/office/drawing/2014/main" id="{3E1F1990-794A-43A2-94A7-BCED7FB77DF3}"/>
               </a:ext>
             </a:extLst>
           </p:cNvPr>
@@ -9765,7 +9770,7 @@
           <p:cNvPr id="29" name="Text 27">
             <a:extLst xmlns:a="http://schemas.openxmlformats.org/drawingml/2006/main">
               <a:ext uri="{FF2B5EF4-FFF2-40B4-BE49-F238E27FC236}">
-                <a16:creationId xmlns:a16="http://schemas.microsoft.com/office/drawing/2014/main" id="{DA5FA55B-98D7-4F9C-BA25-1BD9BBB6675F}"/>
+                <a16:creationId xmlns:a16="http://schemas.microsoft.com/office/drawing/2014/main" id="{00818FA0-3675-46BE-950F-5923BD862E1A}"/>
               </a:ext>
             </a:extLst>
           </p:cNvPr>
@@ -9812,7 +9817,7 @@
           <p:cNvPr id="30" name="Shape 28">
             <a:extLst xmlns:a="http://schemas.openxmlformats.org/drawingml/2006/main">
               <a:ext uri="{FF2B5EF4-FFF2-40B4-BE49-F238E27FC236}">
-                <a16:creationId xmlns:a16="http://schemas.microsoft.com/office/drawing/2014/main" id="{1E26FA74-97D3-42C0-825D-FCB24AF4CFF6}"/>
+                <a16:creationId xmlns:a16="http://schemas.microsoft.com/office/drawing/2014/main" id="{468C8EA0-17CB-4A77-8495-3A5696A55DBE}"/>
               </a:ext>
             </a:extLst>
           </p:cNvPr>
@@ -9845,7 +9850,7 @@
           <p:cNvPr id="31" name="Text 29">
             <a:extLst xmlns:a="http://schemas.openxmlformats.org/drawingml/2006/main">
               <a:ext uri="{FF2B5EF4-FFF2-40B4-BE49-F238E27FC236}">
-                <a16:creationId xmlns:a16="http://schemas.microsoft.com/office/drawing/2014/main" id="{C360E698-F34A-4211-AB83-C083B1D77725}"/>
+                <a16:creationId xmlns:a16="http://schemas.microsoft.com/office/drawing/2014/main" id="{E950970A-C972-4E49-8914-6970EC3F0C24}"/>
               </a:ext>
             </a:extLst>
           </p:cNvPr>
@@ -9892,7 +9897,7 @@
           <p:cNvPr id="32" name="Shape 30">
             <a:extLst xmlns:a="http://schemas.openxmlformats.org/drawingml/2006/main">
               <a:ext uri="{FF2B5EF4-FFF2-40B4-BE49-F238E27FC236}">
-                <a16:creationId xmlns:a16="http://schemas.microsoft.com/office/drawing/2014/main" id="{130AA399-1FA7-4BFF-9D2F-73B7CF7D28FE}"/>
+                <a16:creationId xmlns:a16="http://schemas.microsoft.com/office/drawing/2014/main" id="{EC0689B4-77F6-46DA-819F-8ED39536F478}"/>
               </a:ext>
             </a:extLst>
           </p:cNvPr>
@@ -9925,7 +9930,7 @@
           <p:cNvPr id="33" name="Text 31">
             <a:extLst xmlns:a="http://schemas.openxmlformats.org/drawingml/2006/main">
               <a:ext uri="{FF2B5EF4-FFF2-40B4-BE49-F238E27FC236}">
-                <a16:creationId xmlns:a16="http://schemas.microsoft.com/office/drawing/2014/main" id="{CA4096BC-F439-4102-A1E3-E3CEFF47CDB7}"/>
+                <a16:creationId xmlns:a16="http://schemas.microsoft.com/office/drawing/2014/main" id="{6B1BAEE7-504A-49DE-A12F-0333FCD0F715}"/>
               </a:ext>
             </a:extLst>
           </p:cNvPr>
@@ -9972,7 +9977,7 @@
           <p:cNvPr id="34" name="Shape 32">
             <a:extLst xmlns:a="http://schemas.openxmlformats.org/drawingml/2006/main">
               <a:ext uri="{FF2B5EF4-FFF2-40B4-BE49-F238E27FC236}">
-                <a16:creationId xmlns:a16="http://schemas.microsoft.com/office/drawing/2014/main" id="{733CC118-2438-4830-A2AF-F64DB03FCA4F}"/>
+                <a16:creationId xmlns:a16="http://schemas.microsoft.com/office/drawing/2014/main" id="{0489B316-0682-4451-B63F-86D995CF43A5}"/>
               </a:ext>
             </a:extLst>
           </p:cNvPr>
@@ -10005,7 +10010,7 @@
           <p:cNvPr id="35" name="Text 33">
             <a:extLst xmlns:a="http://schemas.openxmlformats.org/drawingml/2006/main">
               <a:ext uri="{FF2B5EF4-FFF2-40B4-BE49-F238E27FC236}">
-                <a16:creationId xmlns:a16="http://schemas.microsoft.com/office/drawing/2014/main" id="{CF3AC5C4-F5A0-42C4-90D9-0DF4C3E93EC9}"/>
+                <a16:creationId xmlns:a16="http://schemas.microsoft.com/office/drawing/2014/main" id="{4EFD1164-DC99-4793-AB22-FF0FD229D47A}"/>
               </a:ext>
             </a:extLst>
           </p:cNvPr>
@@ -10052,7 +10057,7 @@
           <p:cNvPr id="36" name="Shape 34">
             <a:extLst xmlns:a="http://schemas.openxmlformats.org/drawingml/2006/main">
               <a:ext uri="{FF2B5EF4-FFF2-40B4-BE49-F238E27FC236}">
-                <a16:creationId xmlns:a16="http://schemas.microsoft.com/office/drawing/2014/main" id="{4AC98C1D-84C2-4AE6-A2AE-2D16322E19D3}"/>
+                <a16:creationId xmlns:a16="http://schemas.microsoft.com/office/drawing/2014/main" id="{882C9F53-888D-46B5-BC96-D34D76A02907}"/>
               </a:ext>
             </a:extLst>
           </p:cNvPr>
@@ -10085,7 +10090,7 @@
           <p:cNvPr id="37" name="Text 35">
             <a:extLst xmlns:a="http://schemas.openxmlformats.org/drawingml/2006/main">
               <a:ext uri="{FF2B5EF4-FFF2-40B4-BE49-F238E27FC236}">
-                <a16:creationId xmlns:a16="http://schemas.microsoft.com/office/drawing/2014/main" id="{1BCB88E8-8CC2-41E4-B8E8-EA12DDE3339F}"/>
+                <a16:creationId xmlns:a16="http://schemas.microsoft.com/office/drawing/2014/main" id="{B96827BC-7D6D-49DE-9655-E886CA54F3EB}"/>
               </a:ext>
             </a:extLst>
           </p:cNvPr>
@@ -10132,7 +10137,7 @@
           <p:cNvPr id="38" name="Shape 36">
             <a:extLst xmlns:a="http://schemas.openxmlformats.org/drawingml/2006/main">
               <a:ext uri="{FF2B5EF4-FFF2-40B4-BE49-F238E27FC236}">
-                <a16:creationId xmlns:a16="http://schemas.microsoft.com/office/drawing/2014/main" id="{D420CFE8-C4F3-4EE4-A9C2-3DF91A0CB393}"/>
+                <a16:creationId xmlns:a16="http://schemas.microsoft.com/office/drawing/2014/main" id="{201ADE29-FEFD-4AFD-A66E-A5B932F81240}"/>
               </a:ext>
             </a:extLst>
           </p:cNvPr>
@@ -10165,7 +10170,7 @@
           <p:cNvPr id="39" name="Text 37">
             <a:extLst xmlns:a="http://schemas.openxmlformats.org/drawingml/2006/main">
               <a:ext uri="{FF2B5EF4-FFF2-40B4-BE49-F238E27FC236}">
-                <a16:creationId xmlns:a16="http://schemas.microsoft.com/office/drawing/2014/main" id="{5709B2B0-3931-4060-8F21-6BED28A9898C}"/>
+                <a16:creationId xmlns:a16="http://schemas.microsoft.com/office/drawing/2014/main" id="{22A47701-7042-4562-887E-FBEABA3B8404}"/>
               </a:ext>
             </a:extLst>
           </p:cNvPr>
@@ -10212,7 +10217,7 @@
           <p:cNvPr id="40" name="Text 38">
             <a:extLst xmlns:a="http://schemas.openxmlformats.org/drawingml/2006/main">
               <a:ext uri="{FF2B5EF4-FFF2-40B4-BE49-F238E27FC236}">
-                <a16:creationId xmlns:a16="http://schemas.microsoft.com/office/drawing/2014/main" id="{39B8C010-CF12-4DC7-9764-CDE28717A496}"/>
+                <a16:creationId xmlns:a16="http://schemas.microsoft.com/office/drawing/2014/main" id="{392A811F-8C60-4919-945A-D9E9DCDC50FD}"/>
               </a:ext>
             </a:extLst>
           </p:cNvPr>
@@ -10259,7 +10264,7 @@
           <p:cNvPr id="41" name="Text 39">
             <a:extLst xmlns:a="http://schemas.openxmlformats.org/drawingml/2006/main">
               <a:ext uri="{FF2B5EF4-FFF2-40B4-BE49-F238E27FC236}">
-                <a16:creationId xmlns:a16="http://schemas.microsoft.com/office/drawing/2014/main" id="{FCDD43E6-4F5D-4583-8BC2-6B489E484013}"/>
+                <a16:creationId xmlns:a16="http://schemas.microsoft.com/office/drawing/2014/main" id="{CC27CC33-9777-47E0-9BEF-77EB6F230B23}"/>
               </a:ext>
             </a:extLst>
           </p:cNvPr>
@@ -10304,7 +10309,7 @@
     </p:spTree>
     <p:extLst>
       <p:ext uri="{BB962C8B-B14F-4D97-AF65-F5344CB8AC3E}">
-        <p14:creationId xmlns:p14="http://schemas.microsoft.com/office/powerpoint/2010/main" val="1875483563"/>
+        <p14:creationId xmlns:p14="http://schemas.microsoft.com/office/powerpoint/2010/main" val="1069326935"/>
       </p:ext>
     </p:extLst>
   </p:cSld>
@@ -10335,7 +10340,7 @@
           <p:cNvPr id="2" name="Text 0">
             <a:extLst xmlns:a="http://schemas.openxmlformats.org/drawingml/2006/main">
               <a:ext uri="{FF2B5EF4-FFF2-40B4-BE49-F238E27FC236}">
-                <a16:creationId xmlns:a16="http://schemas.microsoft.com/office/drawing/2014/main" id="{8CFC029E-E509-4BD1-A951-FB0B68310C7E}"/>
+                <a16:creationId xmlns:a16="http://schemas.microsoft.com/office/drawing/2014/main" id="{BB14D86A-86AC-4DD3-8D32-92574AF6BEDF}"/>
               </a:ext>
             </a:extLst>
           </p:cNvPr>
@@ -10382,7 +10387,7 @@
           <p:cNvPr id="3" name="Text 1">
             <a:extLst xmlns:a="http://schemas.openxmlformats.org/drawingml/2006/main">
               <a:ext uri="{FF2B5EF4-FFF2-40B4-BE49-F238E27FC236}">
-                <a16:creationId xmlns:a16="http://schemas.microsoft.com/office/drawing/2014/main" id="{556E854D-3DB9-4C44-80A2-F8414AA9C5D9}"/>
+                <a16:creationId xmlns:a16="http://schemas.microsoft.com/office/drawing/2014/main" id="{B9808602-F96B-48E7-B86A-EC9F89FC3AEA}"/>
               </a:ext>
             </a:extLst>
           </p:cNvPr>
@@ -10429,7 +10434,7 @@
           <p:cNvPr id="4" name="Shape 2">
             <a:extLst xmlns:a="http://schemas.openxmlformats.org/drawingml/2006/main">
               <a:ext uri="{FF2B5EF4-FFF2-40B4-BE49-F238E27FC236}">
-                <a16:creationId xmlns:a16="http://schemas.microsoft.com/office/drawing/2014/main" id="{940A035E-8BB4-477D-9CD8-E444A6204E1A}"/>
+                <a16:creationId xmlns:a16="http://schemas.microsoft.com/office/drawing/2014/main" id="{A54CBB7B-B762-4D09-A4C4-A39670B56353}"/>
               </a:ext>
             </a:extLst>
           </p:cNvPr>
@@ -10464,7 +10469,7 @@
           <p:cNvPr id="5" name="Text 3">
             <a:extLst xmlns:a="http://schemas.openxmlformats.org/drawingml/2006/main">
               <a:ext uri="{FF2B5EF4-FFF2-40B4-BE49-F238E27FC236}">
-                <a16:creationId xmlns:a16="http://schemas.microsoft.com/office/drawing/2014/main" id="{AE2C0658-B5BC-4597-9B13-536EF82D2DC2}"/>
+                <a16:creationId xmlns:a16="http://schemas.microsoft.com/office/drawing/2014/main" id="{32EFA300-8F1D-4F4E-ADFB-EAF6F471AF4A}"/>
               </a:ext>
             </a:extLst>
           </p:cNvPr>
@@ -10511,7 +10516,7 @@
           <p:cNvPr id="6" name="Shape 4">
             <a:extLst xmlns:a="http://schemas.openxmlformats.org/drawingml/2006/main">
               <a:ext uri="{FF2B5EF4-FFF2-40B4-BE49-F238E27FC236}">
-                <a16:creationId xmlns:a16="http://schemas.microsoft.com/office/drawing/2014/main" id="{5C7DCE7E-03C1-4718-8E97-AC9247D00F4A}"/>
+                <a16:creationId xmlns:a16="http://schemas.microsoft.com/office/drawing/2014/main" id="{0B595D1A-0E37-483D-A645-B2FD4CDE7B70}"/>
               </a:ext>
             </a:extLst>
           </p:cNvPr>
@@ -10542,7 +10547,7 @@
           <p:cNvPr id="7" name="Shape 5">
             <a:extLst xmlns:a="http://schemas.openxmlformats.org/drawingml/2006/main">
               <a:ext uri="{FF2B5EF4-FFF2-40B4-BE49-F238E27FC236}">
-                <a16:creationId xmlns:a16="http://schemas.microsoft.com/office/drawing/2014/main" id="{29944924-A789-4D57-93EB-C3C60DE47E5C}"/>
+                <a16:creationId xmlns:a16="http://schemas.microsoft.com/office/drawing/2014/main" id="{E9421C7B-6A60-4EF1-A799-143441402A53}"/>
               </a:ext>
             </a:extLst>
           </p:cNvPr>
@@ -10577,7 +10582,7 @@
           <p:cNvPr id="8" name="Text 6">
             <a:extLst xmlns:a="http://schemas.openxmlformats.org/drawingml/2006/main">
               <a:ext uri="{FF2B5EF4-FFF2-40B4-BE49-F238E27FC236}">
-                <a16:creationId xmlns:a16="http://schemas.microsoft.com/office/drawing/2014/main" id="{D264577A-3558-4399-AAD8-F98B03469811}"/>
+                <a16:creationId xmlns:a16="http://schemas.microsoft.com/office/drawing/2014/main" id="{A48ED64E-DEEA-48F7-819A-624A23046EC6}"/>
               </a:ext>
             </a:extLst>
           </p:cNvPr>
@@ -10624,7 +10629,7 @@
           <p:cNvPr id="9" name="Shape 7">
             <a:extLst xmlns:a="http://schemas.openxmlformats.org/drawingml/2006/main">
               <a:ext uri="{FF2B5EF4-FFF2-40B4-BE49-F238E27FC236}">
-                <a16:creationId xmlns:a16="http://schemas.microsoft.com/office/drawing/2014/main" id="{81DD58CB-20C4-461F-BCFA-4769691867BA}"/>
+                <a16:creationId xmlns:a16="http://schemas.microsoft.com/office/drawing/2014/main" id="{D4C9E6C2-7D23-4B4F-866F-AC8A9A54C3E0}"/>
               </a:ext>
             </a:extLst>
           </p:cNvPr>
@@ -10659,7 +10664,7 @@
           <p:cNvPr id="10" name="Text 8">
             <a:extLst xmlns:a="http://schemas.openxmlformats.org/drawingml/2006/main">
               <a:ext uri="{FF2B5EF4-FFF2-40B4-BE49-F238E27FC236}">
-                <a16:creationId xmlns:a16="http://schemas.microsoft.com/office/drawing/2014/main" id="{2E8D07C0-45A4-430A-9489-7E8438FF5592}"/>
+                <a16:creationId xmlns:a16="http://schemas.microsoft.com/office/drawing/2014/main" id="{B0B0F1A0-F82C-404E-9AA9-A6ADF7319A87}"/>
               </a:ext>
             </a:extLst>
           </p:cNvPr>
@@ -10706,7 +10711,7 @@
           <p:cNvPr id="11" name="Shape 9">
             <a:extLst xmlns:a="http://schemas.openxmlformats.org/drawingml/2006/main">
               <a:ext uri="{FF2B5EF4-FFF2-40B4-BE49-F238E27FC236}">
-                <a16:creationId xmlns:a16="http://schemas.microsoft.com/office/drawing/2014/main" id="{BB788CD8-0886-45D3-A0F7-51601B0A2374}"/>
+                <a16:creationId xmlns:a16="http://schemas.microsoft.com/office/drawing/2014/main" id="{FB0ACB9E-6AC6-4AB8-9F5D-8C75F5704564}"/>
               </a:ext>
             </a:extLst>
           </p:cNvPr>
@@ -10741,7 +10746,7 @@
           <p:cNvPr id="12" name="Text 10">
             <a:extLst xmlns:a="http://schemas.openxmlformats.org/drawingml/2006/main">
               <a:ext uri="{FF2B5EF4-FFF2-40B4-BE49-F238E27FC236}">
-                <a16:creationId xmlns:a16="http://schemas.microsoft.com/office/drawing/2014/main" id="{B30A2DE2-4CD0-4B01-85EB-690AA5A160B4}"/>
+                <a16:creationId xmlns:a16="http://schemas.microsoft.com/office/drawing/2014/main" id="{D9774A18-1F5B-404E-8D2C-AB58DD052B4A}"/>
               </a:ext>
             </a:extLst>
           </p:cNvPr>
@@ -10788,7 +10793,7 @@
           <p:cNvPr id="13" name="Shape 11">
             <a:extLst xmlns:a="http://schemas.openxmlformats.org/drawingml/2006/main">
               <a:ext uri="{FF2B5EF4-FFF2-40B4-BE49-F238E27FC236}">
-                <a16:creationId xmlns:a16="http://schemas.microsoft.com/office/drawing/2014/main" id="{BC481574-B66A-47B0-A25E-A5A27DB34DA1}"/>
+                <a16:creationId xmlns:a16="http://schemas.microsoft.com/office/drawing/2014/main" id="{249DBD84-EAF8-45A0-8E25-DE6C6E42B37B}"/>
               </a:ext>
             </a:extLst>
           </p:cNvPr>
@@ -10823,7 +10828,7 @@
           <p:cNvPr id="14" name="Text 12">
             <a:extLst xmlns:a="http://schemas.openxmlformats.org/drawingml/2006/main">
               <a:ext uri="{FF2B5EF4-FFF2-40B4-BE49-F238E27FC236}">
-                <a16:creationId xmlns:a16="http://schemas.microsoft.com/office/drawing/2014/main" id="{44D2875C-AA75-4762-8A70-495FB28CFB8B}"/>
+                <a16:creationId xmlns:a16="http://schemas.microsoft.com/office/drawing/2014/main" id="{C6B56595-2446-4992-86FB-DED2593C5200}"/>
               </a:ext>
             </a:extLst>
           </p:cNvPr>
@@ -10870,7 +10875,7 @@
           <p:cNvPr id="15" name="Shape 13">
             <a:extLst xmlns:a="http://schemas.openxmlformats.org/drawingml/2006/main">
               <a:ext uri="{FF2B5EF4-FFF2-40B4-BE49-F238E27FC236}">
-                <a16:creationId xmlns:a16="http://schemas.microsoft.com/office/drawing/2014/main" id="{D920AD91-8AA3-4D34-B8A0-B70A8F24C049}"/>
+                <a16:creationId xmlns:a16="http://schemas.microsoft.com/office/drawing/2014/main" id="{248449DE-3B43-4E33-ADA3-FE2C621AE7FF}"/>
               </a:ext>
             </a:extLst>
           </p:cNvPr>
@@ -10903,7 +10908,7 @@
           <p:cNvPr id="16" name="Text 14">
             <a:extLst xmlns:a="http://schemas.openxmlformats.org/drawingml/2006/main">
               <a:ext uri="{FF2B5EF4-FFF2-40B4-BE49-F238E27FC236}">
-                <a16:creationId xmlns:a16="http://schemas.microsoft.com/office/drawing/2014/main" id="{44FCF51C-35B5-4609-BE9D-25F67DFFBC35}"/>
+                <a16:creationId xmlns:a16="http://schemas.microsoft.com/office/drawing/2014/main" id="{24C66379-25C0-473F-A647-36682639833D}"/>
               </a:ext>
             </a:extLst>
           </p:cNvPr>
@@ -10950,7 +10955,7 @@
           <p:cNvPr id="17" name="Text 15">
             <a:extLst xmlns:a="http://schemas.openxmlformats.org/drawingml/2006/main">
               <a:ext uri="{FF2B5EF4-FFF2-40B4-BE49-F238E27FC236}">
-                <a16:creationId xmlns:a16="http://schemas.microsoft.com/office/drawing/2014/main" id="{E81312DF-BB86-4FA5-8E63-CD576CA16E66}"/>
+                <a16:creationId xmlns:a16="http://schemas.microsoft.com/office/drawing/2014/main" id="{7AA627F1-A152-48A9-AA69-1C877E4F3F4C}"/>
               </a:ext>
             </a:extLst>
           </p:cNvPr>
@@ -10997,7 +11002,7 @@
           <p:cNvPr id="18" name="Text 16">
             <a:extLst xmlns:a="http://schemas.openxmlformats.org/drawingml/2006/main">
               <a:ext uri="{FF2B5EF4-FFF2-40B4-BE49-F238E27FC236}">
-                <a16:creationId xmlns:a16="http://schemas.microsoft.com/office/drawing/2014/main" id="{87523382-EB61-45DB-9FE2-8E2C058712EB}"/>
+                <a16:creationId xmlns:a16="http://schemas.microsoft.com/office/drawing/2014/main" id="{2F9DA4F1-F9F2-44B7-9DDA-CB6FF60732B3}"/>
               </a:ext>
             </a:extLst>
           </p:cNvPr>
@@ -11044,7 +11049,7 @@
           <p:cNvPr id="19" name="Text 17">
             <a:extLst xmlns:a="http://schemas.openxmlformats.org/drawingml/2006/main">
               <a:ext uri="{FF2B5EF4-FFF2-40B4-BE49-F238E27FC236}">
-                <a16:creationId xmlns:a16="http://schemas.microsoft.com/office/drawing/2014/main" id="{55B2F98A-E152-45AE-AA6A-FF82717D3413}"/>
+                <a16:creationId xmlns:a16="http://schemas.microsoft.com/office/drawing/2014/main" id="{3DB6B573-9DB6-4675-A6A8-47D2971056BA}"/>
               </a:ext>
             </a:extLst>
           </p:cNvPr>
@@ -11091,7 +11096,7 @@
           <p:cNvPr id="20" name="Shape 18">
             <a:extLst xmlns:a="http://schemas.openxmlformats.org/drawingml/2006/main">
               <a:ext uri="{FF2B5EF4-FFF2-40B4-BE49-F238E27FC236}">
-                <a16:creationId xmlns:a16="http://schemas.microsoft.com/office/drawing/2014/main" id="{F84B1491-0335-4EAC-947B-42D3BB00CB5B}"/>
+                <a16:creationId xmlns:a16="http://schemas.microsoft.com/office/drawing/2014/main" id="{151F487D-B272-4F1E-913A-D11BB295FD72}"/>
               </a:ext>
             </a:extLst>
           </p:cNvPr>
@@ -11124,7 +11129,7 @@
           <p:cNvPr id="21" name="Text 19">
             <a:extLst xmlns:a="http://schemas.openxmlformats.org/drawingml/2006/main">
               <a:ext uri="{FF2B5EF4-FFF2-40B4-BE49-F238E27FC236}">
-                <a16:creationId xmlns:a16="http://schemas.microsoft.com/office/drawing/2014/main" id="{32769235-FC48-4340-AD7C-9F94F0912E63}"/>
+                <a16:creationId xmlns:a16="http://schemas.microsoft.com/office/drawing/2014/main" id="{6F349F4F-BA06-4538-8D25-5AF51DEDF267}"/>
               </a:ext>
             </a:extLst>
           </p:cNvPr>
@@ -11171,7 +11176,7 @@
           <p:cNvPr id="22" name="Text 20">
             <a:extLst xmlns:a="http://schemas.openxmlformats.org/drawingml/2006/main">
               <a:ext uri="{FF2B5EF4-FFF2-40B4-BE49-F238E27FC236}">
-                <a16:creationId xmlns:a16="http://schemas.microsoft.com/office/drawing/2014/main" id="{DB837D59-D681-4D5B-B13A-C89C0A4F8152}"/>
+                <a16:creationId xmlns:a16="http://schemas.microsoft.com/office/drawing/2014/main" id="{632461D9-4CFD-4092-9FC5-316589C6EB90}"/>
               </a:ext>
             </a:extLst>
           </p:cNvPr>
@@ -11218,7 +11223,7 @@
           <p:cNvPr id="23" name="Text 21">
             <a:extLst xmlns:a="http://schemas.openxmlformats.org/drawingml/2006/main">
               <a:ext uri="{FF2B5EF4-FFF2-40B4-BE49-F238E27FC236}">
-                <a16:creationId xmlns:a16="http://schemas.microsoft.com/office/drawing/2014/main" id="{9DF6CE7A-EF02-48AB-937B-3DA37C9B7E85}"/>
+                <a16:creationId xmlns:a16="http://schemas.microsoft.com/office/drawing/2014/main" id="{27978CD5-A81B-49F4-A337-856392D6E8B1}"/>
               </a:ext>
             </a:extLst>
           </p:cNvPr>
@@ -11265,7 +11270,7 @@
           <p:cNvPr id="24" name="Text 22">
             <a:extLst xmlns:a="http://schemas.openxmlformats.org/drawingml/2006/main">
               <a:ext uri="{FF2B5EF4-FFF2-40B4-BE49-F238E27FC236}">
-                <a16:creationId xmlns:a16="http://schemas.microsoft.com/office/drawing/2014/main" id="{5DF9FE69-9025-466D-9973-CFB0FF3ABA32}"/>
+                <a16:creationId xmlns:a16="http://schemas.microsoft.com/office/drawing/2014/main" id="{0AC72DEC-CDCD-45E9-A618-DDCEA4FDE3AF}"/>
               </a:ext>
             </a:extLst>
           </p:cNvPr>
@@ -11312,7 +11317,7 @@
           <p:cNvPr id="25" name="Shape 23">
             <a:extLst xmlns:a="http://schemas.openxmlformats.org/drawingml/2006/main">
               <a:ext uri="{FF2B5EF4-FFF2-40B4-BE49-F238E27FC236}">
-                <a16:creationId xmlns:a16="http://schemas.microsoft.com/office/drawing/2014/main" id="{405BD376-1781-44A6-942E-8E9A4519FCC6}"/>
+                <a16:creationId xmlns:a16="http://schemas.microsoft.com/office/drawing/2014/main" id="{80ED952C-54A1-4994-ABBE-0600F4376080}"/>
               </a:ext>
             </a:extLst>
           </p:cNvPr>
@@ -11345,7 +11350,7 @@
           <p:cNvPr id="26" name="Text 24">
             <a:extLst xmlns:a="http://schemas.openxmlformats.org/drawingml/2006/main">
               <a:ext uri="{FF2B5EF4-FFF2-40B4-BE49-F238E27FC236}">
-                <a16:creationId xmlns:a16="http://schemas.microsoft.com/office/drawing/2014/main" id="{258BD0E1-D23B-472F-8BE8-74D27FA719E8}"/>
+                <a16:creationId xmlns:a16="http://schemas.microsoft.com/office/drawing/2014/main" id="{37B6FFC1-E48A-403D-8CFA-4A5C3D7D1CB6}"/>
               </a:ext>
             </a:extLst>
           </p:cNvPr>
@@ -11392,7 +11397,7 @@
           <p:cNvPr id="27" name="Text 25">
             <a:extLst xmlns:a="http://schemas.openxmlformats.org/drawingml/2006/main">
               <a:ext uri="{FF2B5EF4-FFF2-40B4-BE49-F238E27FC236}">
-                <a16:creationId xmlns:a16="http://schemas.microsoft.com/office/drawing/2014/main" id="{F8944C67-1518-40A6-A313-674142EDB232}"/>
+                <a16:creationId xmlns:a16="http://schemas.microsoft.com/office/drawing/2014/main" id="{6CB10AD3-407E-4097-B7F4-8C07A6B775B7}"/>
               </a:ext>
             </a:extLst>
           </p:cNvPr>
@@ -11439,7 +11444,7 @@
           <p:cNvPr id="28" name="Text 26">
             <a:extLst xmlns:a="http://schemas.openxmlformats.org/drawingml/2006/main">
               <a:ext uri="{FF2B5EF4-FFF2-40B4-BE49-F238E27FC236}">
-                <a16:creationId xmlns:a16="http://schemas.microsoft.com/office/drawing/2014/main" id="{7DE67489-C417-45DB-B90F-47A9D287FE6A}"/>
+                <a16:creationId xmlns:a16="http://schemas.microsoft.com/office/drawing/2014/main" id="{AA648362-62C3-4991-8BB0-999B2573E234}"/>
               </a:ext>
             </a:extLst>
           </p:cNvPr>
@@ -11486,7 +11491,7 @@
           <p:cNvPr id="29" name="Text 27">
             <a:extLst xmlns:a="http://schemas.openxmlformats.org/drawingml/2006/main">
               <a:ext uri="{FF2B5EF4-FFF2-40B4-BE49-F238E27FC236}">
-                <a16:creationId xmlns:a16="http://schemas.microsoft.com/office/drawing/2014/main" id="{A9335759-ED2F-486D-8A53-620F5C0EFCDE}"/>
+                <a16:creationId xmlns:a16="http://schemas.microsoft.com/office/drawing/2014/main" id="{7A6A3E13-CF98-4318-A00F-26CBD6B92D50}"/>
               </a:ext>
             </a:extLst>
           </p:cNvPr>
@@ -11533,7 +11538,7 @@
           <p:cNvPr id="30" name="Shape 28">
             <a:extLst xmlns:a="http://schemas.openxmlformats.org/drawingml/2006/main">
               <a:ext uri="{FF2B5EF4-FFF2-40B4-BE49-F238E27FC236}">
-                <a16:creationId xmlns:a16="http://schemas.microsoft.com/office/drawing/2014/main" id="{304D54CF-C28C-4BB2-A14B-C7291F4B35CC}"/>
+                <a16:creationId xmlns:a16="http://schemas.microsoft.com/office/drawing/2014/main" id="{DF9FB087-658A-4ADB-860B-034699384368}"/>
               </a:ext>
             </a:extLst>
           </p:cNvPr>
@@ -11566,7 +11571,7 @@
           <p:cNvPr id="31" name="Text 29">
             <a:extLst xmlns:a="http://schemas.openxmlformats.org/drawingml/2006/main">
               <a:ext uri="{FF2B5EF4-FFF2-40B4-BE49-F238E27FC236}">
-                <a16:creationId xmlns:a16="http://schemas.microsoft.com/office/drawing/2014/main" id="{1A40CE27-300A-4C56-864F-9584AB841889}"/>
+                <a16:creationId xmlns:a16="http://schemas.microsoft.com/office/drawing/2014/main" id="{6F86AD1C-CFA8-4E18-B815-1C6E767C62D4}"/>
               </a:ext>
             </a:extLst>
           </p:cNvPr>
@@ -11613,7 +11618,7 @@
           <p:cNvPr id="32" name="Text 30">
             <a:extLst xmlns:a="http://schemas.openxmlformats.org/drawingml/2006/main">
               <a:ext uri="{FF2B5EF4-FFF2-40B4-BE49-F238E27FC236}">
-                <a16:creationId xmlns:a16="http://schemas.microsoft.com/office/drawing/2014/main" id="{A5E5FC24-14AD-4141-92BD-610FDED17A0C}"/>
+                <a16:creationId xmlns:a16="http://schemas.microsoft.com/office/drawing/2014/main" id="{F93FB6A2-D962-4447-A99F-9F892F41D0B4}"/>
               </a:ext>
             </a:extLst>
           </p:cNvPr>
@@ -11660,7 +11665,7 @@
           <p:cNvPr id="33" name="Text 31">
             <a:extLst xmlns:a="http://schemas.openxmlformats.org/drawingml/2006/main">
               <a:ext uri="{FF2B5EF4-FFF2-40B4-BE49-F238E27FC236}">
-                <a16:creationId xmlns:a16="http://schemas.microsoft.com/office/drawing/2014/main" id="{855DE577-1504-48C7-BABA-B3616AA8D4EB}"/>
+                <a16:creationId xmlns:a16="http://schemas.microsoft.com/office/drawing/2014/main" id="{1D173086-38CF-479C-AB70-12D7CDE3D0C1}"/>
               </a:ext>
             </a:extLst>
           </p:cNvPr>
@@ -11707,7 +11712,7 @@
           <p:cNvPr id="34" name="Text 32">
             <a:extLst xmlns:a="http://schemas.openxmlformats.org/drawingml/2006/main">
               <a:ext uri="{FF2B5EF4-FFF2-40B4-BE49-F238E27FC236}">
-                <a16:creationId xmlns:a16="http://schemas.microsoft.com/office/drawing/2014/main" id="{F1E1ED56-5266-4C49-9EFC-6A3323D60A6C}"/>
+                <a16:creationId xmlns:a16="http://schemas.microsoft.com/office/drawing/2014/main" id="{18D289DE-B3A2-4381-9A65-14AC97CC04C1}"/>
               </a:ext>
             </a:extLst>
           </p:cNvPr>
@@ -11754,7 +11759,7 @@
           <p:cNvPr id="35" name="Shape 33">
             <a:extLst xmlns:a="http://schemas.openxmlformats.org/drawingml/2006/main">
               <a:ext uri="{FF2B5EF4-FFF2-40B4-BE49-F238E27FC236}">
-                <a16:creationId xmlns:a16="http://schemas.microsoft.com/office/drawing/2014/main" id="{67A5771B-6E85-4920-9A62-E41DE31B24C9}"/>
+                <a16:creationId xmlns:a16="http://schemas.microsoft.com/office/drawing/2014/main" id="{E9C9C899-3B90-4AF2-A273-440A67F0AD49}"/>
               </a:ext>
             </a:extLst>
           </p:cNvPr>
@@ -11787,7 +11792,7 @@
           <p:cNvPr id="36" name="Text 34">
             <a:extLst xmlns:a="http://schemas.openxmlformats.org/drawingml/2006/main">
               <a:ext uri="{FF2B5EF4-FFF2-40B4-BE49-F238E27FC236}">
-                <a16:creationId xmlns:a16="http://schemas.microsoft.com/office/drawing/2014/main" id="{28BF9817-0E4D-41E8-A3E1-4256296B7FCC}"/>
+                <a16:creationId xmlns:a16="http://schemas.microsoft.com/office/drawing/2014/main" id="{15F0AB96-AEA8-4443-9757-45DB2EC6D794}"/>
               </a:ext>
             </a:extLst>
           </p:cNvPr>
@@ -11834,7 +11839,7 @@
           <p:cNvPr id="37" name="Text 35">
             <a:extLst xmlns:a="http://schemas.openxmlformats.org/drawingml/2006/main">
               <a:ext uri="{FF2B5EF4-FFF2-40B4-BE49-F238E27FC236}">
-                <a16:creationId xmlns:a16="http://schemas.microsoft.com/office/drawing/2014/main" id="{DB864E27-115A-45C2-A6A3-BA6896C25190}"/>
+                <a16:creationId xmlns:a16="http://schemas.microsoft.com/office/drawing/2014/main" id="{DECEFCEB-721D-433D-AD37-2A5583A727CC}"/>
               </a:ext>
             </a:extLst>
           </p:cNvPr>
@@ -11881,7 +11886,7 @@
           <p:cNvPr id="38" name="Text 36">
             <a:extLst xmlns:a="http://schemas.openxmlformats.org/drawingml/2006/main">
               <a:ext uri="{FF2B5EF4-FFF2-40B4-BE49-F238E27FC236}">
-                <a16:creationId xmlns:a16="http://schemas.microsoft.com/office/drawing/2014/main" id="{55BD952C-6608-487C-8F5E-6BA9E4903428}"/>
+                <a16:creationId xmlns:a16="http://schemas.microsoft.com/office/drawing/2014/main" id="{66623AA5-C28F-473D-8330-2CB3FCD31AF5}"/>
               </a:ext>
             </a:extLst>
           </p:cNvPr>
@@ -11928,7 +11933,7 @@
           <p:cNvPr id="39" name="Text 37">
             <a:extLst xmlns:a="http://schemas.openxmlformats.org/drawingml/2006/main">
               <a:ext uri="{FF2B5EF4-FFF2-40B4-BE49-F238E27FC236}">
-                <a16:creationId xmlns:a16="http://schemas.microsoft.com/office/drawing/2014/main" id="{8BD17F18-F37A-4A00-B010-D1AFBA35BA55}"/>
+                <a16:creationId xmlns:a16="http://schemas.microsoft.com/office/drawing/2014/main" id="{A1A10E55-1506-42D9-AA4E-717844C5BEA0}"/>
               </a:ext>
             </a:extLst>
           </p:cNvPr>
@@ -11975,7 +11980,7 @@
           <p:cNvPr id="40" name="Shape 38">
             <a:extLst xmlns:a="http://schemas.openxmlformats.org/drawingml/2006/main">
               <a:ext uri="{FF2B5EF4-FFF2-40B4-BE49-F238E27FC236}">
-                <a16:creationId xmlns:a16="http://schemas.microsoft.com/office/drawing/2014/main" id="{1C356EAE-26A9-4DE3-B664-897763DC6854}"/>
+                <a16:creationId xmlns:a16="http://schemas.microsoft.com/office/drawing/2014/main" id="{CFAA08F6-CD0F-4AE2-9053-CB441FCA62A4}"/>
               </a:ext>
             </a:extLst>
           </p:cNvPr>
@@ -12008,7 +12013,7 @@
           <p:cNvPr id="41" name="Text 39">
             <a:extLst xmlns:a="http://schemas.openxmlformats.org/drawingml/2006/main">
               <a:ext uri="{FF2B5EF4-FFF2-40B4-BE49-F238E27FC236}">
-                <a16:creationId xmlns:a16="http://schemas.microsoft.com/office/drawing/2014/main" id="{9F996559-C55C-4CE3-9A20-F6FBCC26B174}"/>
+                <a16:creationId xmlns:a16="http://schemas.microsoft.com/office/drawing/2014/main" id="{FD306E08-3CBC-475A-9798-1D9800D8C7DB}"/>
               </a:ext>
             </a:extLst>
           </p:cNvPr>
@@ -12055,7 +12060,7 @@
           <p:cNvPr id="42" name="Text 40">
             <a:extLst xmlns:a="http://schemas.openxmlformats.org/drawingml/2006/main">
               <a:ext uri="{FF2B5EF4-FFF2-40B4-BE49-F238E27FC236}">
-                <a16:creationId xmlns:a16="http://schemas.microsoft.com/office/drawing/2014/main" id="{F13D9F43-A02C-49E1-9464-5C19F12EE57B}"/>
+                <a16:creationId xmlns:a16="http://schemas.microsoft.com/office/drawing/2014/main" id="{63587FCF-6133-4A77-A41E-25446A4FE443}"/>
               </a:ext>
             </a:extLst>
           </p:cNvPr>
@@ -12102,7 +12107,7 @@
           <p:cNvPr id="43" name="Text 41">
             <a:extLst xmlns:a="http://schemas.openxmlformats.org/drawingml/2006/main">
               <a:ext uri="{FF2B5EF4-FFF2-40B4-BE49-F238E27FC236}">
-                <a16:creationId xmlns:a16="http://schemas.microsoft.com/office/drawing/2014/main" id="{CC6121A1-BF7F-4D71-840F-86B6C9266C16}"/>
+                <a16:creationId xmlns:a16="http://schemas.microsoft.com/office/drawing/2014/main" id="{C008221C-17D3-4DC6-95DD-BE6BB066A516}"/>
               </a:ext>
             </a:extLst>
           </p:cNvPr>
@@ -12149,7 +12154,7 @@
           <p:cNvPr id="44" name="Text 42">
             <a:extLst xmlns:a="http://schemas.openxmlformats.org/drawingml/2006/main">
               <a:ext uri="{FF2B5EF4-FFF2-40B4-BE49-F238E27FC236}">
-                <a16:creationId xmlns:a16="http://schemas.microsoft.com/office/drawing/2014/main" id="{3A1F64E1-4327-4721-8177-79E4125603AE}"/>
+                <a16:creationId xmlns:a16="http://schemas.microsoft.com/office/drawing/2014/main" id="{40A17145-C8ED-4E53-862E-902D0DD3F206}"/>
               </a:ext>
             </a:extLst>
           </p:cNvPr>
@@ -12196,7 +12201,7 @@
           <p:cNvPr id="45" name="Shape 43">
             <a:extLst xmlns:a="http://schemas.openxmlformats.org/drawingml/2006/main">
               <a:ext uri="{FF2B5EF4-FFF2-40B4-BE49-F238E27FC236}">
-                <a16:creationId xmlns:a16="http://schemas.microsoft.com/office/drawing/2014/main" id="{91BCBF63-2F65-4C0A-9A5F-0BD10020D8BF}"/>
+                <a16:creationId xmlns:a16="http://schemas.microsoft.com/office/drawing/2014/main" id="{03679B80-8947-435C-B459-0743066E8ED1}"/>
               </a:ext>
             </a:extLst>
           </p:cNvPr>
@@ -12231,7 +12236,7 @@
           <p:cNvPr id="46" name="Text 44">
             <a:extLst xmlns:a="http://schemas.openxmlformats.org/drawingml/2006/main">
               <a:ext uri="{FF2B5EF4-FFF2-40B4-BE49-F238E27FC236}">
-                <a16:creationId xmlns:a16="http://schemas.microsoft.com/office/drawing/2014/main" id="{B14E580D-2FBB-476F-BC34-D7C78CA74E04}"/>
+                <a16:creationId xmlns:a16="http://schemas.microsoft.com/office/drawing/2014/main" id="{3D19B670-1D1D-46D8-9EB4-A8A3A169F39A}"/>
               </a:ext>
             </a:extLst>
           </p:cNvPr>
@@ -12278,7 +12283,7 @@
           <p:cNvPr id="47" name="Text 45">
             <a:extLst xmlns:a="http://schemas.openxmlformats.org/drawingml/2006/main">
               <a:ext uri="{FF2B5EF4-FFF2-40B4-BE49-F238E27FC236}">
-                <a16:creationId xmlns:a16="http://schemas.microsoft.com/office/drawing/2014/main" id="{9E20D65D-B3DB-4817-84E0-7BB5518CBE72}"/>
+                <a16:creationId xmlns:a16="http://schemas.microsoft.com/office/drawing/2014/main" id="{E70DE14E-6D9F-4DF1-BB74-DFF46A562662}"/>
               </a:ext>
             </a:extLst>
           </p:cNvPr>
@@ -12325,7 +12330,7 @@
           <p:cNvPr id="48" name="Text 46">
             <a:extLst xmlns:a="http://schemas.openxmlformats.org/drawingml/2006/main">
               <a:ext uri="{FF2B5EF4-FFF2-40B4-BE49-F238E27FC236}">
-                <a16:creationId xmlns:a16="http://schemas.microsoft.com/office/drawing/2014/main" id="{CA8CEFC3-E078-4C27-9276-6B00FCBECF98}"/>
+                <a16:creationId xmlns:a16="http://schemas.microsoft.com/office/drawing/2014/main" id="{819BF639-24D9-4B57-92F4-5A7CE041C1C4}"/>
               </a:ext>
             </a:extLst>
           </p:cNvPr>
@@ -12370,7 +12375,7 @@
     </p:spTree>
     <p:extLst>
       <p:ext uri="{BB962C8B-B14F-4D97-AF65-F5344CB8AC3E}">
-        <p14:creationId xmlns:p14="http://schemas.microsoft.com/office/powerpoint/2010/main" val="350403732"/>
+        <p14:creationId xmlns:p14="http://schemas.microsoft.com/office/powerpoint/2010/main" val="796671379"/>
       </p:ext>
     </p:extLst>
   </p:cSld>
@@ -12401,7 +12406,7 @@
           <p:cNvPr id="2" name="Text 0">
             <a:extLst xmlns:a="http://schemas.openxmlformats.org/drawingml/2006/main">
               <a:ext uri="{FF2B5EF4-FFF2-40B4-BE49-F238E27FC236}">
-                <a16:creationId xmlns:a16="http://schemas.microsoft.com/office/drawing/2014/main" id="{C1B1D186-30A8-4796-84D2-988BA945B786}"/>
+                <a16:creationId xmlns:a16="http://schemas.microsoft.com/office/drawing/2014/main" id="{72752B58-1035-411D-B0B9-DB55FA2E8802}"/>
               </a:ext>
             </a:extLst>
           </p:cNvPr>
@@ -12448,7 +12453,7 @@
           <p:cNvPr id="3" name="Text 1">
             <a:extLst xmlns:a="http://schemas.openxmlformats.org/drawingml/2006/main">
               <a:ext uri="{FF2B5EF4-FFF2-40B4-BE49-F238E27FC236}">
-                <a16:creationId xmlns:a16="http://schemas.microsoft.com/office/drawing/2014/main" id="{32F4AFDD-86FA-4C63-8C87-F5280252D657}"/>
+                <a16:creationId xmlns:a16="http://schemas.microsoft.com/office/drawing/2014/main" id="{34FB6D7D-8A53-4962-B46E-376E71FEE775}"/>
               </a:ext>
             </a:extLst>
           </p:cNvPr>
@@ -12495,7 +12500,7 @@
           <p:cNvPr id="4" name="Shape 2">
             <a:extLst xmlns:a="http://schemas.openxmlformats.org/drawingml/2006/main">
               <a:ext uri="{FF2B5EF4-FFF2-40B4-BE49-F238E27FC236}">
-                <a16:creationId xmlns:a16="http://schemas.microsoft.com/office/drawing/2014/main" id="{CDB9D719-C01A-43E2-B4F5-677868AF4211}"/>
+                <a16:creationId xmlns:a16="http://schemas.microsoft.com/office/drawing/2014/main" id="{9ACF82DD-E6A2-4580-A04F-6EC5772F07F5}"/>
               </a:ext>
             </a:extLst>
           </p:cNvPr>
@@ -12530,7 +12535,7 @@
           <p:cNvPr id="5" name="Text 3">
             <a:extLst xmlns:a="http://schemas.openxmlformats.org/drawingml/2006/main">
               <a:ext uri="{FF2B5EF4-FFF2-40B4-BE49-F238E27FC236}">
-                <a16:creationId xmlns:a16="http://schemas.microsoft.com/office/drawing/2014/main" id="{1B422D15-C540-43C4-A66C-FACC31CB4B67}"/>
+                <a16:creationId xmlns:a16="http://schemas.microsoft.com/office/drawing/2014/main" id="{41F6D987-3C55-45AF-AF86-F53A7528C781}"/>
               </a:ext>
             </a:extLst>
           </p:cNvPr>
@@ -12577,7 +12582,7 @@
           <p:cNvPr id="6" name="Shape 4">
             <a:extLst xmlns:a="http://schemas.openxmlformats.org/drawingml/2006/main">
               <a:ext uri="{FF2B5EF4-FFF2-40B4-BE49-F238E27FC236}">
-                <a16:creationId xmlns:a16="http://schemas.microsoft.com/office/drawing/2014/main" id="{5B2D7BF5-7FA6-4E77-87FE-C58866ADB3A7}"/>
+                <a16:creationId xmlns:a16="http://schemas.microsoft.com/office/drawing/2014/main" id="{5CAE3517-910A-4D8E-B817-3B0F969CEE69}"/>
               </a:ext>
             </a:extLst>
           </p:cNvPr>
@@ -12608,7 +12613,7 @@
           <p:cNvPr id="7" name="Shape 5">
             <a:extLst xmlns:a="http://schemas.openxmlformats.org/drawingml/2006/main">
               <a:ext uri="{FF2B5EF4-FFF2-40B4-BE49-F238E27FC236}">
-                <a16:creationId xmlns:a16="http://schemas.microsoft.com/office/drawing/2014/main" id="{BE06D1F1-AB20-4024-B736-46A9E152049B}"/>
+                <a16:creationId xmlns:a16="http://schemas.microsoft.com/office/drawing/2014/main" id="{9543A83F-DA29-4A2C-A568-7C1F2CB05AC6}"/>
               </a:ext>
             </a:extLst>
           </p:cNvPr>
@@ -12643,7 +12648,7 @@
           <p:cNvPr id="8" name="Text 6">
             <a:extLst xmlns:a="http://schemas.openxmlformats.org/drawingml/2006/main">
               <a:ext uri="{FF2B5EF4-FFF2-40B4-BE49-F238E27FC236}">
-                <a16:creationId xmlns:a16="http://schemas.microsoft.com/office/drawing/2014/main" id="{31AB6D5B-94F6-4958-BAC3-E3A03BA0DBA1}"/>
+                <a16:creationId xmlns:a16="http://schemas.microsoft.com/office/drawing/2014/main" id="{8891095D-7BE2-4A7A-B87B-57935C71017E}"/>
               </a:ext>
             </a:extLst>
           </p:cNvPr>
@@ -12690,7 +12695,7 @@
           <p:cNvPr id="9" name="Text 7">
             <a:extLst xmlns:a="http://schemas.openxmlformats.org/drawingml/2006/main">
               <a:ext uri="{FF2B5EF4-FFF2-40B4-BE49-F238E27FC236}">
-                <a16:creationId xmlns:a16="http://schemas.microsoft.com/office/drawing/2014/main" id="{9B8B1466-E827-4AE1-BB04-B578EB54D4F5}"/>
+                <a16:creationId xmlns:a16="http://schemas.microsoft.com/office/drawing/2014/main" id="{DF8626C9-5B06-41C3-8240-975F70B43774}"/>
               </a:ext>
             </a:extLst>
           </p:cNvPr>
@@ -12737,7 +12742,7 @@
           <p:cNvPr id="10" name="Text 8">
             <a:extLst xmlns:a="http://schemas.openxmlformats.org/drawingml/2006/main">
               <a:ext uri="{FF2B5EF4-FFF2-40B4-BE49-F238E27FC236}">
-                <a16:creationId xmlns:a16="http://schemas.microsoft.com/office/drawing/2014/main" id="{21F883DB-85A0-452D-82DD-2F11345D3A91}"/>
+                <a16:creationId xmlns:a16="http://schemas.microsoft.com/office/drawing/2014/main" id="{1E4D341D-4100-4F48-AF74-1FFD5BEE24A2}"/>
               </a:ext>
             </a:extLst>
           </p:cNvPr>
@@ -12784,7 +12789,7 @@
           <p:cNvPr id="11" name="Shape 9">
             <a:extLst xmlns:a="http://schemas.openxmlformats.org/drawingml/2006/main">
               <a:ext uri="{FF2B5EF4-FFF2-40B4-BE49-F238E27FC236}">
-                <a16:creationId xmlns:a16="http://schemas.microsoft.com/office/drawing/2014/main" id="{6B2F04BA-C6D9-4B77-B462-9687F32C2DAC}"/>
+                <a16:creationId xmlns:a16="http://schemas.microsoft.com/office/drawing/2014/main" id="{303C533F-3831-4D1A-9E81-1735FDA88A97}"/>
               </a:ext>
             </a:extLst>
           </p:cNvPr>
@@ -12819,7 +12824,7 @@
           <p:cNvPr id="12" name="Text 10">
             <a:extLst xmlns:a="http://schemas.openxmlformats.org/drawingml/2006/main">
               <a:ext uri="{FF2B5EF4-FFF2-40B4-BE49-F238E27FC236}">
-                <a16:creationId xmlns:a16="http://schemas.microsoft.com/office/drawing/2014/main" id="{9CE45F82-64DE-45C8-A3B4-AC7621882634}"/>
+                <a16:creationId xmlns:a16="http://schemas.microsoft.com/office/drawing/2014/main" id="{9B12BFE8-8ABD-4922-9E22-A3962C072AE4}"/>
               </a:ext>
             </a:extLst>
           </p:cNvPr>
@@ -12866,7 +12871,7 @@
           <p:cNvPr id="13" name="Text 11">
             <a:extLst xmlns:a="http://schemas.openxmlformats.org/drawingml/2006/main">
               <a:ext uri="{FF2B5EF4-FFF2-40B4-BE49-F238E27FC236}">
-                <a16:creationId xmlns:a16="http://schemas.microsoft.com/office/drawing/2014/main" id="{66A8D4A0-6746-4F9B-B668-ACC2631BD4EF}"/>
+                <a16:creationId xmlns:a16="http://schemas.microsoft.com/office/drawing/2014/main" id="{3E3B6A2C-EA3C-46BE-9FE2-7CBC658997FF}"/>
               </a:ext>
             </a:extLst>
           </p:cNvPr>
@@ -12913,7 +12918,7 @@
           <p:cNvPr id="14" name="Text 12">
             <a:extLst xmlns:a="http://schemas.openxmlformats.org/drawingml/2006/main">
               <a:ext uri="{FF2B5EF4-FFF2-40B4-BE49-F238E27FC236}">
-                <a16:creationId xmlns:a16="http://schemas.microsoft.com/office/drawing/2014/main" id="{070EB3A8-67B9-43AA-BBD3-03EF9E51D3F9}"/>
+                <a16:creationId xmlns:a16="http://schemas.microsoft.com/office/drawing/2014/main" id="{2A4206E1-ABBF-45B0-8B38-B616F91E4D0D}"/>
               </a:ext>
             </a:extLst>
           </p:cNvPr>
@@ -12960,7 +12965,7 @@
           <p:cNvPr id="15" name="Shape 13">
             <a:extLst xmlns:a="http://schemas.openxmlformats.org/drawingml/2006/main">
               <a:ext uri="{FF2B5EF4-FFF2-40B4-BE49-F238E27FC236}">
-                <a16:creationId xmlns:a16="http://schemas.microsoft.com/office/drawing/2014/main" id="{C9E7357E-65E8-497A-8671-057659776916}"/>
+                <a16:creationId xmlns:a16="http://schemas.microsoft.com/office/drawing/2014/main" id="{E7FD5DB0-D33C-4DFA-96BB-79EE5A318F15}"/>
               </a:ext>
             </a:extLst>
           </p:cNvPr>
@@ -12995,7 +13000,7 @@
           <p:cNvPr id="16" name="Text 14">
             <a:extLst xmlns:a="http://schemas.openxmlformats.org/drawingml/2006/main">
               <a:ext uri="{FF2B5EF4-FFF2-40B4-BE49-F238E27FC236}">
-                <a16:creationId xmlns:a16="http://schemas.microsoft.com/office/drawing/2014/main" id="{7CB82918-A27C-4E8D-A107-380C185CFD43}"/>
+                <a16:creationId xmlns:a16="http://schemas.microsoft.com/office/drawing/2014/main" id="{6CB28689-9BD1-4DA6-B1E7-E94FD5BDD95A}"/>
               </a:ext>
             </a:extLst>
           </p:cNvPr>
@@ -13042,7 +13047,7 @@
           <p:cNvPr id="17" name="Text 15">
             <a:extLst xmlns:a="http://schemas.openxmlformats.org/drawingml/2006/main">
               <a:ext uri="{FF2B5EF4-FFF2-40B4-BE49-F238E27FC236}">
-                <a16:creationId xmlns:a16="http://schemas.microsoft.com/office/drawing/2014/main" id="{DAA77B64-C8FD-48A0-B29D-EFBE63F2016E}"/>
+                <a16:creationId xmlns:a16="http://schemas.microsoft.com/office/drawing/2014/main" id="{3E2B270D-72D3-440C-B594-A4A1316A93AA}"/>
               </a:ext>
             </a:extLst>
           </p:cNvPr>
@@ -13089,7 +13094,7 @@
           <p:cNvPr id="18" name="Text 16">
             <a:extLst xmlns:a="http://schemas.openxmlformats.org/drawingml/2006/main">
               <a:ext uri="{FF2B5EF4-FFF2-40B4-BE49-F238E27FC236}">
-                <a16:creationId xmlns:a16="http://schemas.microsoft.com/office/drawing/2014/main" id="{A73A186E-3493-41AF-9158-9A76A5D4942F}"/>
+                <a16:creationId xmlns:a16="http://schemas.microsoft.com/office/drawing/2014/main" id="{279CC81C-29BE-44A0-9456-817616E8A76F}"/>
               </a:ext>
             </a:extLst>
           </p:cNvPr>
@@ -13136,7 +13141,7 @@
           <p:cNvPr id="19" name="Shape 17">
             <a:extLst xmlns:a="http://schemas.openxmlformats.org/drawingml/2006/main">
               <a:ext uri="{FF2B5EF4-FFF2-40B4-BE49-F238E27FC236}">
-                <a16:creationId xmlns:a16="http://schemas.microsoft.com/office/drawing/2014/main" id="{495859E0-FD5A-41F5-B69B-EFC39DA0B26F}"/>
+                <a16:creationId xmlns:a16="http://schemas.microsoft.com/office/drawing/2014/main" id="{AB1FCDC9-BE2A-4F78-A308-FF9BB65999AA}"/>
               </a:ext>
             </a:extLst>
           </p:cNvPr>
@@ -13171,7 +13176,7 @@
           <p:cNvPr id="20" name="Text 18">
             <a:extLst xmlns:a="http://schemas.openxmlformats.org/drawingml/2006/main">
               <a:ext uri="{FF2B5EF4-FFF2-40B4-BE49-F238E27FC236}">
-                <a16:creationId xmlns:a16="http://schemas.microsoft.com/office/drawing/2014/main" id="{DA0F5CEF-4060-4A6F-B880-2EE9B2DACFBA}"/>
+                <a16:creationId xmlns:a16="http://schemas.microsoft.com/office/drawing/2014/main" id="{85E45784-7D96-44D8-B073-C057367AA86F}"/>
               </a:ext>
             </a:extLst>
           </p:cNvPr>
@@ -13218,7 +13223,7 @@
           <p:cNvPr id="21" name="Text 19">
             <a:extLst xmlns:a="http://schemas.openxmlformats.org/drawingml/2006/main">
               <a:ext uri="{FF2B5EF4-FFF2-40B4-BE49-F238E27FC236}">
-                <a16:creationId xmlns:a16="http://schemas.microsoft.com/office/drawing/2014/main" id="{6FBB700F-A7EF-4846-B456-480F408856AF}"/>
+                <a16:creationId xmlns:a16="http://schemas.microsoft.com/office/drawing/2014/main" id="{DA231071-E644-479A-B7BD-E8CE04B6737D}"/>
               </a:ext>
             </a:extLst>
           </p:cNvPr>
@@ -13265,7 +13270,7 @@
           <p:cNvPr id="22" name="Text 20">
             <a:extLst xmlns:a="http://schemas.openxmlformats.org/drawingml/2006/main">
               <a:ext uri="{FF2B5EF4-FFF2-40B4-BE49-F238E27FC236}">
-                <a16:creationId xmlns:a16="http://schemas.microsoft.com/office/drawing/2014/main" id="{5E19861A-933C-48D0-B73B-959471EE5769}"/>
+                <a16:creationId xmlns:a16="http://schemas.microsoft.com/office/drawing/2014/main" id="{1BBA8ECE-E2F4-4C5E-82D8-E81FE2FAAA55}"/>
               </a:ext>
             </a:extLst>
           </p:cNvPr>
@@ -13312,7 +13317,7 @@
           <p:cNvPr id="23" name="Shape 21">
             <a:extLst xmlns:a="http://schemas.openxmlformats.org/drawingml/2006/main">
               <a:ext uri="{FF2B5EF4-FFF2-40B4-BE49-F238E27FC236}">
-                <a16:creationId xmlns:a16="http://schemas.microsoft.com/office/drawing/2014/main" id="{E608A979-6DA3-4C2C-91E6-9ED2B01473F8}"/>
+                <a16:creationId xmlns:a16="http://schemas.microsoft.com/office/drawing/2014/main" id="{7EF85DCA-8DAB-497C-8906-C08DD8149620}"/>
               </a:ext>
             </a:extLst>
           </p:cNvPr>
@@ -13347,7 +13352,7 @@
           <p:cNvPr id="24" name="Text 22">
             <a:extLst xmlns:a="http://schemas.openxmlformats.org/drawingml/2006/main">
               <a:ext uri="{FF2B5EF4-FFF2-40B4-BE49-F238E27FC236}">
-                <a16:creationId xmlns:a16="http://schemas.microsoft.com/office/drawing/2014/main" id="{16B4DD28-6169-4DED-BCAF-8DDC56DAECD5}"/>
+                <a16:creationId xmlns:a16="http://schemas.microsoft.com/office/drawing/2014/main" id="{8734FB66-61B5-47A5-AA56-5DE4B3ABC508}"/>
               </a:ext>
             </a:extLst>
           </p:cNvPr>
@@ -13394,7 +13399,7 @@
           <p:cNvPr id="25" name="Text 23">
             <a:extLst xmlns:a="http://schemas.openxmlformats.org/drawingml/2006/main">
               <a:ext uri="{FF2B5EF4-FFF2-40B4-BE49-F238E27FC236}">
-                <a16:creationId xmlns:a16="http://schemas.microsoft.com/office/drawing/2014/main" id="{51E21207-9036-4A24-BF57-BDE76A57A9C9}"/>
+                <a16:creationId xmlns:a16="http://schemas.microsoft.com/office/drawing/2014/main" id="{9A2B861A-8402-45FE-8EB5-E32E545E6E67}"/>
               </a:ext>
             </a:extLst>
           </p:cNvPr>
@@ -13441,7 +13446,7 @@
           <p:cNvPr id="26" name="Shape 24">
             <a:extLst xmlns:a="http://schemas.openxmlformats.org/drawingml/2006/main">
               <a:ext uri="{FF2B5EF4-FFF2-40B4-BE49-F238E27FC236}">
-                <a16:creationId xmlns:a16="http://schemas.microsoft.com/office/drawing/2014/main" id="{8D82E787-1529-45D6-AD89-CD21C1203FE4}"/>
+                <a16:creationId xmlns:a16="http://schemas.microsoft.com/office/drawing/2014/main" id="{F0E0CB2F-D70D-4FC6-A502-3EC2A82EFA4E}"/>
               </a:ext>
             </a:extLst>
           </p:cNvPr>
@@ -13476,7 +13481,7 @@
           <p:cNvPr id="27" name="Text 25">
             <a:extLst xmlns:a="http://schemas.openxmlformats.org/drawingml/2006/main">
               <a:ext uri="{FF2B5EF4-FFF2-40B4-BE49-F238E27FC236}">
-                <a16:creationId xmlns:a16="http://schemas.microsoft.com/office/drawing/2014/main" id="{2C1041D4-2C6B-4AF1-B36B-C4912AC65A7C}"/>
+                <a16:creationId xmlns:a16="http://schemas.microsoft.com/office/drawing/2014/main" id="{912C0F98-7F9B-4A2F-A17E-109B2FC4D0B6}"/>
               </a:ext>
             </a:extLst>
           </p:cNvPr>
@@ -13523,7 +13528,7 @@
           <p:cNvPr id="28" name="Shape 26">
             <a:extLst xmlns:a="http://schemas.openxmlformats.org/drawingml/2006/main">
               <a:ext uri="{FF2B5EF4-FFF2-40B4-BE49-F238E27FC236}">
-                <a16:creationId xmlns:a16="http://schemas.microsoft.com/office/drawing/2014/main" id="{41F18DF9-675B-4A42-8FAB-8AD7B747A4F8}"/>
+                <a16:creationId xmlns:a16="http://schemas.microsoft.com/office/drawing/2014/main" id="{E30D4722-F988-402D-AEF1-52DA8A2AF8C4}"/>
               </a:ext>
             </a:extLst>
           </p:cNvPr>
@@ -13558,7 +13563,7 @@
           <p:cNvPr id="29" name="Text 27">
             <a:extLst xmlns:a="http://schemas.openxmlformats.org/drawingml/2006/main">
               <a:ext uri="{FF2B5EF4-FFF2-40B4-BE49-F238E27FC236}">
-                <a16:creationId xmlns:a16="http://schemas.microsoft.com/office/drawing/2014/main" id="{0C1FE5B6-3E80-4831-8AA5-6DDFFE12CE2D}"/>
+                <a16:creationId xmlns:a16="http://schemas.microsoft.com/office/drawing/2014/main" id="{7C0CF2DC-DF72-4B4F-A6B0-5D44E02B27CF}"/>
               </a:ext>
             </a:extLst>
           </p:cNvPr>
@@ -13605,7 +13610,7 @@
           <p:cNvPr id="30" name="Text 28">
             <a:extLst xmlns:a="http://schemas.openxmlformats.org/drawingml/2006/main">
               <a:ext uri="{FF2B5EF4-FFF2-40B4-BE49-F238E27FC236}">
-                <a16:creationId xmlns:a16="http://schemas.microsoft.com/office/drawing/2014/main" id="{DC5546F6-BBB1-4AC2-8349-CD0808FF57DF}"/>
+                <a16:creationId xmlns:a16="http://schemas.microsoft.com/office/drawing/2014/main" id="{698817BB-B377-4B3B-B0C1-B1EDD8405CCF}"/>
               </a:ext>
             </a:extLst>
           </p:cNvPr>
@@ -13652,7 +13657,7 @@
           <p:cNvPr id="31" name="Shape 29">
             <a:extLst xmlns:a="http://schemas.openxmlformats.org/drawingml/2006/main">
               <a:ext uri="{FF2B5EF4-FFF2-40B4-BE49-F238E27FC236}">
-                <a16:creationId xmlns:a16="http://schemas.microsoft.com/office/drawing/2014/main" id="{4A0E03C2-B303-4F3C-B4D3-6A5ACCFE96BF}"/>
+                <a16:creationId xmlns:a16="http://schemas.microsoft.com/office/drawing/2014/main" id="{80973772-2A4C-4515-B375-38C4779C44E1}"/>
               </a:ext>
             </a:extLst>
           </p:cNvPr>
@@ -13687,7 +13692,7 @@
           <p:cNvPr id="32" name="Text 30">
             <a:extLst xmlns:a="http://schemas.openxmlformats.org/drawingml/2006/main">
               <a:ext uri="{FF2B5EF4-FFF2-40B4-BE49-F238E27FC236}">
-                <a16:creationId xmlns:a16="http://schemas.microsoft.com/office/drawing/2014/main" id="{E2B3A695-5FF7-4D6E-B70B-F1EB4C928CCF}"/>
+                <a16:creationId xmlns:a16="http://schemas.microsoft.com/office/drawing/2014/main" id="{96CA1E69-7179-4C7A-BD72-835292FB73EB}"/>
               </a:ext>
             </a:extLst>
           </p:cNvPr>
@@ -13734,7 +13739,7 @@
           <p:cNvPr id="33" name="Shape 31">
             <a:extLst xmlns:a="http://schemas.openxmlformats.org/drawingml/2006/main">
               <a:ext uri="{FF2B5EF4-FFF2-40B4-BE49-F238E27FC236}">
-                <a16:creationId xmlns:a16="http://schemas.microsoft.com/office/drawing/2014/main" id="{2C9BF15E-7A78-4795-BBE2-F70A6F29C30F}"/>
+                <a16:creationId xmlns:a16="http://schemas.microsoft.com/office/drawing/2014/main" id="{B63596CA-F013-4B1C-B143-1418A9251CA2}"/>
               </a:ext>
             </a:extLst>
           </p:cNvPr>
@@ -13769,7 +13774,7 @@
           <p:cNvPr id="34" name="Text 32">
             <a:extLst xmlns:a="http://schemas.openxmlformats.org/drawingml/2006/main">
               <a:ext uri="{FF2B5EF4-FFF2-40B4-BE49-F238E27FC236}">
-                <a16:creationId xmlns:a16="http://schemas.microsoft.com/office/drawing/2014/main" id="{146D5335-40A4-4A3C-B0BC-26D0812EEB9A}"/>
+                <a16:creationId xmlns:a16="http://schemas.microsoft.com/office/drawing/2014/main" id="{230137E2-5C40-47D0-821D-C72213A12BCC}"/>
               </a:ext>
             </a:extLst>
           </p:cNvPr>
@@ -13816,7 +13821,7 @@
           <p:cNvPr id="35" name="Text 33">
             <a:extLst xmlns:a="http://schemas.openxmlformats.org/drawingml/2006/main">
               <a:ext uri="{FF2B5EF4-FFF2-40B4-BE49-F238E27FC236}">
-                <a16:creationId xmlns:a16="http://schemas.microsoft.com/office/drawing/2014/main" id="{2A83066C-95C3-47D1-91DD-AD5F6710A667}"/>
+                <a16:creationId xmlns:a16="http://schemas.microsoft.com/office/drawing/2014/main" id="{5A03DCD5-FFDC-46C0-BF34-F1E9A68FC40A}"/>
               </a:ext>
             </a:extLst>
           </p:cNvPr>
@@ -13863,7 +13868,7 @@
           <p:cNvPr id="36" name="Shape 34">
             <a:extLst xmlns:a="http://schemas.openxmlformats.org/drawingml/2006/main">
               <a:ext uri="{FF2B5EF4-FFF2-40B4-BE49-F238E27FC236}">
-                <a16:creationId xmlns:a16="http://schemas.microsoft.com/office/drawing/2014/main" id="{E691820B-A3B0-4249-9433-01A5B96E8421}"/>
+                <a16:creationId xmlns:a16="http://schemas.microsoft.com/office/drawing/2014/main" id="{50357FB7-F234-4A81-947E-28E76F05DC3D}"/>
               </a:ext>
             </a:extLst>
           </p:cNvPr>
@@ -13898,7 +13903,7 @@
           <p:cNvPr id="37" name="Text 35">
             <a:extLst xmlns:a="http://schemas.openxmlformats.org/drawingml/2006/main">
               <a:ext uri="{FF2B5EF4-FFF2-40B4-BE49-F238E27FC236}">
-                <a16:creationId xmlns:a16="http://schemas.microsoft.com/office/drawing/2014/main" id="{A296D711-33D6-488F-AAD1-3EED4D4AED1F}"/>
+                <a16:creationId xmlns:a16="http://schemas.microsoft.com/office/drawing/2014/main" id="{551872CE-D5F6-432B-9F91-B0B27883F853}"/>
               </a:ext>
             </a:extLst>
           </p:cNvPr>
@@ -13945,7 +13950,7 @@
           <p:cNvPr id="38" name="Shape 36">
             <a:extLst xmlns:a="http://schemas.openxmlformats.org/drawingml/2006/main">
               <a:ext uri="{FF2B5EF4-FFF2-40B4-BE49-F238E27FC236}">
-                <a16:creationId xmlns:a16="http://schemas.microsoft.com/office/drawing/2014/main" id="{051F4EC8-5166-4518-93DC-7358A68A1376}"/>
+                <a16:creationId xmlns:a16="http://schemas.microsoft.com/office/drawing/2014/main" id="{36AB3C04-B7D6-4626-8082-37B6926E291A}"/>
               </a:ext>
             </a:extLst>
           </p:cNvPr>
@@ -13980,7 +13985,7 @@
           <p:cNvPr id="39" name="Text 37">
             <a:extLst xmlns:a="http://schemas.openxmlformats.org/drawingml/2006/main">
               <a:ext uri="{FF2B5EF4-FFF2-40B4-BE49-F238E27FC236}">
-                <a16:creationId xmlns:a16="http://schemas.microsoft.com/office/drawing/2014/main" id="{F0423AFF-3B8F-4F48-A2F5-4AACB1B9FF6A}"/>
+                <a16:creationId xmlns:a16="http://schemas.microsoft.com/office/drawing/2014/main" id="{2D8CEBCC-A4F3-4ADE-8FAA-7AFEB320F6D7}"/>
               </a:ext>
             </a:extLst>
           </p:cNvPr>
@@ -14027,7 +14032,7 @@
           <p:cNvPr id="40" name="Text 38">
             <a:extLst xmlns:a="http://schemas.openxmlformats.org/drawingml/2006/main">
               <a:ext uri="{FF2B5EF4-FFF2-40B4-BE49-F238E27FC236}">
-                <a16:creationId xmlns:a16="http://schemas.microsoft.com/office/drawing/2014/main" id="{401EC8CB-A473-40B4-8737-76310FB01F2A}"/>
+                <a16:creationId xmlns:a16="http://schemas.microsoft.com/office/drawing/2014/main" id="{97AA1080-03BD-43AB-934E-63A1E114C8F7}"/>
               </a:ext>
             </a:extLst>
           </p:cNvPr>
@@ -14074,7 +14079,7 @@
           <p:cNvPr id="41" name="Text 39">
             <a:extLst xmlns:a="http://schemas.openxmlformats.org/drawingml/2006/main">
               <a:ext uri="{FF2B5EF4-FFF2-40B4-BE49-F238E27FC236}">
-                <a16:creationId xmlns:a16="http://schemas.microsoft.com/office/drawing/2014/main" id="{F7B7B9A2-9A27-4A13-ABB4-6A7E68475DE3}"/>
+                <a16:creationId xmlns:a16="http://schemas.microsoft.com/office/drawing/2014/main" id="{5CFD3703-17F8-4DDD-BFD5-B9E1928B80F0}"/>
               </a:ext>
             </a:extLst>
           </p:cNvPr>
@@ -14119,7 +14124,7 @@
     </p:spTree>
     <p:extLst>
       <p:ext uri="{BB962C8B-B14F-4D97-AF65-F5344CB8AC3E}">
-        <p14:creationId xmlns:p14="http://schemas.microsoft.com/office/powerpoint/2010/main" val="1281637486"/>
+        <p14:creationId xmlns:p14="http://schemas.microsoft.com/office/powerpoint/2010/main" val="1179167916"/>
       </p:ext>
     </p:extLst>
   </p:cSld>
@@ -14150,7 +14155,7 @@
           <p:cNvPr id="2" name="Text 0">
             <a:extLst xmlns:a="http://schemas.openxmlformats.org/drawingml/2006/main">
               <a:ext uri="{FF2B5EF4-FFF2-40B4-BE49-F238E27FC236}">
-                <a16:creationId xmlns:a16="http://schemas.microsoft.com/office/drawing/2014/main" id="{F4F97B34-E229-4AE1-8255-DDF23B80F5C2}"/>
+                <a16:creationId xmlns:a16="http://schemas.microsoft.com/office/drawing/2014/main" id="{B4BC37DA-E425-4B4D-85A5-044CA80375D1}"/>
               </a:ext>
             </a:extLst>
           </p:cNvPr>
@@ -14197,7 +14202,7 @@
           <p:cNvPr id="3" name="Text 1">
             <a:extLst xmlns:a="http://schemas.openxmlformats.org/drawingml/2006/main">
               <a:ext uri="{FF2B5EF4-FFF2-40B4-BE49-F238E27FC236}">
-                <a16:creationId xmlns:a16="http://schemas.microsoft.com/office/drawing/2014/main" id="{2194D2EB-186F-478B-BA89-020237BD1580}"/>
+                <a16:creationId xmlns:a16="http://schemas.microsoft.com/office/drawing/2014/main" id="{9E6C170F-C140-47F6-AF4B-861ABD99428E}"/>
               </a:ext>
             </a:extLst>
           </p:cNvPr>
@@ -14244,7 +14249,7 @@
           <p:cNvPr id="4" name="Shape 2">
             <a:extLst xmlns:a="http://schemas.openxmlformats.org/drawingml/2006/main">
               <a:ext uri="{FF2B5EF4-FFF2-40B4-BE49-F238E27FC236}">
-                <a16:creationId xmlns:a16="http://schemas.microsoft.com/office/drawing/2014/main" id="{7D636A5D-3F25-458B-BCD9-907C5BD61660}"/>
+                <a16:creationId xmlns:a16="http://schemas.microsoft.com/office/drawing/2014/main" id="{4C7FC371-AE08-472D-A2B0-D03D2EC4BABF}"/>
               </a:ext>
             </a:extLst>
           </p:cNvPr>
@@ -14279,7 +14284,7 @@
           <p:cNvPr id="5" name="Text 3">
             <a:extLst xmlns:a="http://schemas.openxmlformats.org/drawingml/2006/main">
               <a:ext uri="{FF2B5EF4-FFF2-40B4-BE49-F238E27FC236}">
-                <a16:creationId xmlns:a16="http://schemas.microsoft.com/office/drawing/2014/main" id="{21906911-402E-4416-954B-5C128E6CE186}"/>
+                <a16:creationId xmlns:a16="http://schemas.microsoft.com/office/drawing/2014/main" id="{0794AD23-934C-4005-A3D4-93A17485F2AB}"/>
               </a:ext>
             </a:extLst>
           </p:cNvPr>
@@ -14326,7 +14331,7 @@
           <p:cNvPr id="6" name="Shape 4">
             <a:extLst xmlns:a="http://schemas.openxmlformats.org/drawingml/2006/main">
               <a:ext uri="{FF2B5EF4-FFF2-40B4-BE49-F238E27FC236}">
-                <a16:creationId xmlns:a16="http://schemas.microsoft.com/office/drawing/2014/main" id="{E3756483-CE33-48E7-B85B-78B4A4ABB5D8}"/>
+                <a16:creationId xmlns:a16="http://schemas.microsoft.com/office/drawing/2014/main" id="{2F8290BC-1080-4E99-B444-E373E18838E6}"/>
               </a:ext>
             </a:extLst>
           </p:cNvPr>
@@ -14357,7 +14362,7 @@
           <p:cNvPr id="7" name="Shape 5">
             <a:extLst xmlns:a="http://schemas.openxmlformats.org/drawingml/2006/main">
               <a:ext uri="{FF2B5EF4-FFF2-40B4-BE49-F238E27FC236}">
-                <a16:creationId xmlns:a16="http://schemas.microsoft.com/office/drawing/2014/main" id="{9E3CE274-0839-495C-85FC-46B76D0C6B8A}"/>
+                <a16:creationId xmlns:a16="http://schemas.microsoft.com/office/drawing/2014/main" id="{05971177-1455-4478-9D65-696D1A005C75}"/>
               </a:ext>
             </a:extLst>
           </p:cNvPr>
@@ -14392,7 +14397,7 @@
           <p:cNvPr id="8" name="Text 6">
             <a:extLst xmlns:a="http://schemas.openxmlformats.org/drawingml/2006/main">
               <a:ext uri="{FF2B5EF4-FFF2-40B4-BE49-F238E27FC236}">
-                <a16:creationId xmlns:a16="http://schemas.microsoft.com/office/drawing/2014/main" id="{89089C67-9EB6-459B-9B64-5BB5EC55DA7D}"/>
+                <a16:creationId xmlns:a16="http://schemas.microsoft.com/office/drawing/2014/main" id="{930EF8C3-F212-4F98-9081-3B1D066599DC}"/>
               </a:ext>
             </a:extLst>
           </p:cNvPr>
@@ -14439,7 +14444,7 @@
           <p:cNvPr id="9" name="Text 7">
             <a:extLst xmlns:a="http://schemas.openxmlformats.org/drawingml/2006/main">
               <a:ext uri="{FF2B5EF4-FFF2-40B4-BE49-F238E27FC236}">
-                <a16:creationId xmlns:a16="http://schemas.microsoft.com/office/drawing/2014/main" id="{E2032E31-BBE4-4772-802E-9415E0FB09D3}"/>
+                <a16:creationId xmlns:a16="http://schemas.microsoft.com/office/drawing/2014/main" id="{9B669933-97A9-4D7D-B2FC-F8BBB9776307}"/>
               </a:ext>
             </a:extLst>
           </p:cNvPr>
@@ -14486,7 +14491,7 @@
           <p:cNvPr id="10" name="Text 8">
             <a:extLst xmlns:a="http://schemas.openxmlformats.org/drawingml/2006/main">
               <a:ext uri="{FF2B5EF4-FFF2-40B4-BE49-F238E27FC236}">
-                <a16:creationId xmlns:a16="http://schemas.microsoft.com/office/drawing/2014/main" id="{4905E972-9CF5-4C51-A934-EBE89327BC0F}"/>
+                <a16:creationId xmlns:a16="http://schemas.microsoft.com/office/drawing/2014/main" id="{0F53E6A9-E122-4223-B861-14E9FE8597B3}"/>
               </a:ext>
             </a:extLst>
           </p:cNvPr>
@@ -14533,7 +14538,7 @@
           <p:cNvPr id="11" name="Text 9">
             <a:extLst xmlns:a="http://schemas.openxmlformats.org/drawingml/2006/main">
               <a:ext uri="{FF2B5EF4-FFF2-40B4-BE49-F238E27FC236}">
-                <a16:creationId xmlns:a16="http://schemas.microsoft.com/office/drawing/2014/main" id="{6AB20177-F95C-4C46-A9D0-5CF81670009C}"/>
+                <a16:creationId xmlns:a16="http://schemas.microsoft.com/office/drawing/2014/main" id="{6E7A87F4-EA0B-4E13-8037-5F3361F6835C}"/>
               </a:ext>
             </a:extLst>
           </p:cNvPr>
@@ -14580,7 +14585,7 @@
           <p:cNvPr id="12" name="Text 10">
             <a:extLst xmlns:a="http://schemas.openxmlformats.org/drawingml/2006/main">
               <a:ext uri="{FF2B5EF4-FFF2-40B4-BE49-F238E27FC236}">
-                <a16:creationId xmlns:a16="http://schemas.microsoft.com/office/drawing/2014/main" id="{8A5C1AD1-D3FE-4D3C-8DF4-97A5EE522D42}"/>
+                <a16:creationId xmlns:a16="http://schemas.microsoft.com/office/drawing/2014/main" id="{0C37B92E-B3D1-4DDF-8C89-210B19377119}"/>
               </a:ext>
             </a:extLst>
           </p:cNvPr>
@@ -14627,7 +14632,7 @@
           <p:cNvPr id="13" name="Text 11">
             <a:extLst xmlns:a="http://schemas.openxmlformats.org/drawingml/2006/main">
               <a:ext uri="{FF2B5EF4-FFF2-40B4-BE49-F238E27FC236}">
-                <a16:creationId xmlns:a16="http://schemas.microsoft.com/office/drawing/2014/main" id="{5F057049-8D2A-4C9F-BA51-707C57CC761B}"/>
+                <a16:creationId xmlns:a16="http://schemas.microsoft.com/office/drawing/2014/main" id="{629E71B1-82CD-47B3-9E42-B1E4FACC81C5}"/>
               </a:ext>
             </a:extLst>
           </p:cNvPr>
@@ -14674,7 +14679,7 @@
           <p:cNvPr id="14" name="Shape 12">
             <a:extLst xmlns:a="http://schemas.openxmlformats.org/drawingml/2006/main">
               <a:ext uri="{FF2B5EF4-FFF2-40B4-BE49-F238E27FC236}">
-                <a16:creationId xmlns:a16="http://schemas.microsoft.com/office/drawing/2014/main" id="{85FF4663-8CBC-4ED9-8BB9-E944695D4914}"/>
+                <a16:creationId xmlns:a16="http://schemas.microsoft.com/office/drawing/2014/main" id="{F1B41AC3-2CFC-44B9-9D45-DA1A81D1BB01}"/>
               </a:ext>
             </a:extLst>
           </p:cNvPr>
@@ -14709,7 +14714,7 @@
           <p:cNvPr id="15" name="Text 13">
             <a:extLst xmlns:a="http://schemas.openxmlformats.org/drawingml/2006/main">
               <a:ext uri="{FF2B5EF4-FFF2-40B4-BE49-F238E27FC236}">
-                <a16:creationId xmlns:a16="http://schemas.microsoft.com/office/drawing/2014/main" id="{54DE6E63-E276-42F2-A69C-464690DB610D}"/>
+                <a16:creationId xmlns:a16="http://schemas.microsoft.com/office/drawing/2014/main" id="{06BEC087-765F-4618-8934-D63F4879C54C}"/>
               </a:ext>
             </a:extLst>
           </p:cNvPr>
@@ -14756,7 +14761,7 @@
           <p:cNvPr id="16" name="Text 14">
             <a:extLst xmlns:a="http://schemas.openxmlformats.org/drawingml/2006/main">
               <a:ext uri="{FF2B5EF4-FFF2-40B4-BE49-F238E27FC236}">
-                <a16:creationId xmlns:a16="http://schemas.microsoft.com/office/drawing/2014/main" id="{D1D56193-B65E-4F65-A6E3-83B9C7E5FFA4}"/>
+                <a16:creationId xmlns:a16="http://schemas.microsoft.com/office/drawing/2014/main" id="{D0C464B7-EA5F-4077-AFEC-A9401ABEC44C}"/>
               </a:ext>
             </a:extLst>
           </p:cNvPr>
@@ -14803,7 +14808,7 @@
           <p:cNvPr id="17" name="Text 15">
             <a:extLst xmlns:a="http://schemas.openxmlformats.org/drawingml/2006/main">
               <a:ext uri="{FF2B5EF4-FFF2-40B4-BE49-F238E27FC236}">
-                <a16:creationId xmlns:a16="http://schemas.microsoft.com/office/drawing/2014/main" id="{0C1315D5-CFE9-41EB-BD8A-BA952B09C9A7}"/>
+                <a16:creationId xmlns:a16="http://schemas.microsoft.com/office/drawing/2014/main" id="{4E6CC589-14AC-47DB-96B1-A42B84F31654}"/>
               </a:ext>
             </a:extLst>
           </p:cNvPr>
@@ -14850,7 +14855,7 @@
           <p:cNvPr id="18" name="Text 16">
             <a:extLst xmlns:a="http://schemas.openxmlformats.org/drawingml/2006/main">
               <a:ext uri="{FF2B5EF4-FFF2-40B4-BE49-F238E27FC236}">
-                <a16:creationId xmlns:a16="http://schemas.microsoft.com/office/drawing/2014/main" id="{2CB08603-5C9C-4BF2-88E6-4F261ACC9970}"/>
+                <a16:creationId xmlns:a16="http://schemas.microsoft.com/office/drawing/2014/main" id="{A38CC954-C773-4CE3-9348-1CEBAE6098B1}"/>
               </a:ext>
             </a:extLst>
           </p:cNvPr>
@@ -14897,7 +14902,7 @@
           <p:cNvPr id="19" name="Text 17">
             <a:extLst xmlns:a="http://schemas.openxmlformats.org/drawingml/2006/main">
               <a:ext uri="{FF2B5EF4-FFF2-40B4-BE49-F238E27FC236}">
-                <a16:creationId xmlns:a16="http://schemas.microsoft.com/office/drawing/2014/main" id="{610DF2EB-9426-49CD-AEFC-2FFC819F60DE}"/>
+                <a16:creationId xmlns:a16="http://schemas.microsoft.com/office/drawing/2014/main" id="{74EEC3C7-58C9-4E54-8A1A-4F1C4A1B6C07}"/>
               </a:ext>
             </a:extLst>
           </p:cNvPr>
@@ -14944,7 +14949,7 @@
           <p:cNvPr id="20" name="Text 18">
             <a:extLst xmlns:a="http://schemas.openxmlformats.org/drawingml/2006/main">
               <a:ext uri="{FF2B5EF4-FFF2-40B4-BE49-F238E27FC236}">
-                <a16:creationId xmlns:a16="http://schemas.microsoft.com/office/drawing/2014/main" id="{DCA37942-542D-4E46-9E19-26FB7B274E19}"/>
+                <a16:creationId xmlns:a16="http://schemas.microsoft.com/office/drawing/2014/main" id="{819BA631-DAC3-4AD5-8B59-C1E9B42F6150}"/>
               </a:ext>
             </a:extLst>
           </p:cNvPr>
@@ -14991,7 +14996,7 @@
           <p:cNvPr id="21" name="Shape 19">
             <a:extLst xmlns:a="http://schemas.openxmlformats.org/drawingml/2006/main">
               <a:ext uri="{FF2B5EF4-FFF2-40B4-BE49-F238E27FC236}">
-                <a16:creationId xmlns:a16="http://schemas.microsoft.com/office/drawing/2014/main" id="{9F775940-0F2C-4E4E-B8F1-B981EC9B2582}"/>
+                <a16:creationId xmlns:a16="http://schemas.microsoft.com/office/drawing/2014/main" id="{230C920D-2B5F-4622-9A68-0FF0E4BE1FD4}"/>
               </a:ext>
             </a:extLst>
           </p:cNvPr>
@@ -15026,7 +15031,7 @@
           <p:cNvPr id="22" name="Text 20">
             <a:extLst xmlns:a="http://schemas.openxmlformats.org/drawingml/2006/main">
               <a:ext uri="{FF2B5EF4-FFF2-40B4-BE49-F238E27FC236}">
-                <a16:creationId xmlns:a16="http://schemas.microsoft.com/office/drawing/2014/main" id="{04F97485-9DF8-45A8-874E-0F5E6119FD70}"/>
+                <a16:creationId xmlns:a16="http://schemas.microsoft.com/office/drawing/2014/main" id="{3F5C9A4E-F703-4399-A101-3D48B9C2C981}"/>
               </a:ext>
             </a:extLst>
           </p:cNvPr>
@@ -15073,7 +15078,7 @@
           <p:cNvPr id="23" name="Text 21">
             <a:extLst xmlns:a="http://schemas.openxmlformats.org/drawingml/2006/main">
               <a:ext uri="{FF2B5EF4-FFF2-40B4-BE49-F238E27FC236}">
-                <a16:creationId xmlns:a16="http://schemas.microsoft.com/office/drawing/2014/main" id="{CEA71D58-2989-4467-9D1A-DC2AC376AE60}"/>
+                <a16:creationId xmlns:a16="http://schemas.microsoft.com/office/drawing/2014/main" id="{8A1368A9-1515-47CF-B7FC-359A572854C1}"/>
               </a:ext>
             </a:extLst>
           </p:cNvPr>
@@ -15120,7 +15125,7 @@
           <p:cNvPr id="24" name="Text 22">
             <a:extLst xmlns:a="http://schemas.openxmlformats.org/drawingml/2006/main">
               <a:ext uri="{FF2B5EF4-FFF2-40B4-BE49-F238E27FC236}">
-                <a16:creationId xmlns:a16="http://schemas.microsoft.com/office/drawing/2014/main" id="{479F3D7E-6ED9-41C9-AB1B-A6622A4C8915}"/>
+                <a16:creationId xmlns:a16="http://schemas.microsoft.com/office/drawing/2014/main" id="{A8CA8726-CC31-45B1-AA20-FDF0758C6B7E}"/>
               </a:ext>
             </a:extLst>
           </p:cNvPr>
@@ -15167,7 +15172,7 @@
           <p:cNvPr id="25" name="Text 23">
             <a:extLst xmlns:a="http://schemas.openxmlformats.org/drawingml/2006/main">
               <a:ext uri="{FF2B5EF4-FFF2-40B4-BE49-F238E27FC236}">
-                <a16:creationId xmlns:a16="http://schemas.microsoft.com/office/drawing/2014/main" id="{E29D4459-0014-4862-9EBF-53876D95AACB}"/>
+                <a16:creationId xmlns:a16="http://schemas.microsoft.com/office/drawing/2014/main" id="{C0A45114-1037-47F4-9177-239A1E14971D}"/>
               </a:ext>
             </a:extLst>
           </p:cNvPr>
@@ -15214,7 +15219,7 @@
           <p:cNvPr id="26" name="Text 24">
             <a:extLst xmlns:a="http://schemas.openxmlformats.org/drawingml/2006/main">
               <a:ext uri="{FF2B5EF4-FFF2-40B4-BE49-F238E27FC236}">
-                <a16:creationId xmlns:a16="http://schemas.microsoft.com/office/drawing/2014/main" id="{CF8CE4D1-1740-47EA-882A-8057AE9FCACA}"/>
+                <a16:creationId xmlns:a16="http://schemas.microsoft.com/office/drawing/2014/main" id="{A9B564D2-4B8D-4D17-93B8-D93742F95755}"/>
               </a:ext>
             </a:extLst>
           </p:cNvPr>
@@ -15261,7 +15266,7 @@
           <p:cNvPr id="27" name="Text 25">
             <a:extLst xmlns:a="http://schemas.openxmlformats.org/drawingml/2006/main">
               <a:ext uri="{FF2B5EF4-FFF2-40B4-BE49-F238E27FC236}">
-                <a16:creationId xmlns:a16="http://schemas.microsoft.com/office/drawing/2014/main" id="{5F6348DB-C14C-4A4D-91C0-C4AF3185A6CE}"/>
+                <a16:creationId xmlns:a16="http://schemas.microsoft.com/office/drawing/2014/main" id="{0872F136-B947-4878-8CD0-0113C03B9971}"/>
               </a:ext>
             </a:extLst>
           </p:cNvPr>
@@ -15308,7 +15313,7 @@
           <p:cNvPr id="28" name="Text 26">
             <a:extLst xmlns:a="http://schemas.openxmlformats.org/drawingml/2006/main">
               <a:ext uri="{FF2B5EF4-FFF2-40B4-BE49-F238E27FC236}">
-                <a16:creationId xmlns:a16="http://schemas.microsoft.com/office/drawing/2014/main" id="{574F2D0B-0A5D-4C08-AB4A-B7C0BD8FEFD4}"/>
+                <a16:creationId xmlns:a16="http://schemas.microsoft.com/office/drawing/2014/main" id="{236D5044-8A4D-4377-B030-D1C701076C5C}"/>
               </a:ext>
             </a:extLst>
           </p:cNvPr>
@@ -15355,7 +15360,7 @@
           <p:cNvPr id="29" name="Text 27">
             <a:extLst xmlns:a="http://schemas.openxmlformats.org/drawingml/2006/main">
               <a:ext uri="{FF2B5EF4-FFF2-40B4-BE49-F238E27FC236}">
-                <a16:creationId xmlns:a16="http://schemas.microsoft.com/office/drawing/2014/main" id="{2C4800B9-D09F-4EBC-9CAA-2833F1419BA8}"/>
+                <a16:creationId xmlns:a16="http://schemas.microsoft.com/office/drawing/2014/main" id="{985B666B-A084-4BAA-BAFF-0F1D83F40BDF}"/>
               </a:ext>
             </a:extLst>
           </p:cNvPr>
@@ -15402,7 +15407,7 @@
           <p:cNvPr id="30" name="Text 28">
             <a:extLst xmlns:a="http://schemas.openxmlformats.org/drawingml/2006/main">
               <a:ext uri="{FF2B5EF4-FFF2-40B4-BE49-F238E27FC236}">
-                <a16:creationId xmlns:a16="http://schemas.microsoft.com/office/drawing/2014/main" id="{4B03362B-8D18-432B-B90D-16BD49C58419}"/>
+                <a16:creationId xmlns:a16="http://schemas.microsoft.com/office/drawing/2014/main" id="{15C56117-0EE2-4938-BF10-3CAB221140D4}"/>
               </a:ext>
             </a:extLst>
           </p:cNvPr>
@@ -15447,7 +15452,7 @@
     </p:spTree>
     <p:extLst>
       <p:ext uri="{BB962C8B-B14F-4D97-AF65-F5344CB8AC3E}">
-        <p14:creationId xmlns:p14="http://schemas.microsoft.com/office/powerpoint/2010/main" val="1848537837"/>
+        <p14:creationId xmlns:p14="http://schemas.microsoft.com/office/powerpoint/2010/main" val="177434562"/>
       </p:ext>
     </p:extLst>
   </p:cSld>
@@ -15478,7 +15483,7 @@
           <p:cNvPr id="2" name="Text 0">
             <a:extLst xmlns:a="http://schemas.openxmlformats.org/drawingml/2006/main">
               <a:ext uri="{FF2B5EF4-FFF2-40B4-BE49-F238E27FC236}">
-                <a16:creationId xmlns:a16="http://schemas.microsoft.com/office/drawing/2014/main" id="{7FACCA7B-D38E-4B7E-99C1-1670881E76CE}"/>
+                <a16:creationId xmlns:a16="http://schemas.microsoft.com/office/drawing/2014/main" id="{733B7FE6-028C-4281-82AA-C705D007A90C}"/>
               </a:ext>
             </a:extLst>
           </p:cNvPr>
@@ -15525,7 +15530,7 @@
           <p:cNvPr id="3" name="Text 1">
             <a:extLst xmlns:a="http://schemas.openxmlformats.org/drawingml/2006/main">
               <a:ext uri="{FF2B5EF4-FFF2-40B4-BE49-F238E27FC236}">
-                <a16:creationId xmlns:a16="http://schemas.microsoft.com/office/drawing/2014/main" id="{C1111137-89A1-455B-8E1B-F85CAFAD1BD0}"/>
+                <a16:creationId xmlns:a16="http://schemas.microsoft.com/office/drawing/2014/main" id="{8CAB8FC0-DBFE-4DF6-A365-4D061E5F472B}"/>
               </a:ext>
             </a:extLst>
           </p:cNvPr>
@@ -15572,7 +15577,7 @@
           <p:cNvPr id="4" name="Shape 2">
             <a:extLst xmlns:a="http://schemas.openxmlformats.org/drawingml/2006/main">
               <a:ext uri="{FF2B5EF4-FFF2-40B4-BE49-F238E27FC236}">
-                <a16:creationId xmlns:a16="http://schemas.microsoft.com/office/drawing/2014/main" id="{8D3D5F58-3525-4954-B59C-6B6DB6E9B3EE}"/>
+                <a16:creationId xmlns:a16="http://schemas.microsoft.com/office/drawing/2014/main" id="{07D222E4-F25E-4D8E-A6C0-7E55660B2F19}"/>
               </a:ext>
             </a:extLst>
           </p:cNvPr>
@@ -15607,7 +15612,7 @@
           <p:cNvPr id="5" name="Text 3">
             <a:extLst xmlns:a="http://schemas.openxmlformats.org/drawingml/2006/main">
               <a:ext uri="{FF2B5EF4-FFF2-40B4-BE49-F238E27FC236}">
-                <a16:creationId xmlns:a16="http://schemas.microsoft.com/office/drawing/2014/main" id="{E44C54A9-4AC7-4D86-98B2-280B5A184612}"/>
+                <a16:creationId xmlns:a16="http://schemas.microsoft.com/office/drawing/2014/main" id="{8C58C8D3-80B3-4F91-BAB9-E695EC79C1B8}"/>
               </a:ext>
             </a:extLst>
           </p:cNvPr>
@@ -15654,7 +15659,7 @@
           <p:cNvPr id="6" name="Shape 4">
             <a:extLst xmlns:a="http://schemas.openxmlformats.org/drawingml/2006/main">
               <a:ext uri="{FF2B5EF4-FFF2-40B4-BE49-F238E27FC236}">
-                <a16:creationId xmlns:a16="http://schemas.microsoft.com/office/drawing/2014/main" id="{EBD6A95C-94D4-457D-9FED-EE3B130296DC}"/>
+                <a16:creationId xmlns:a16="http://schemas.microsoft.com/office/drawing/2014/main" id="{0A0329D2-C121-4296-A927-B0B89A195F8E}"/>
               </a:ext>
             </a:extLst>
           </p:cNvPr>
@@ -15685,7 +15690,7 @@
           <p:cNvPr id="7" name="Shape 5">
             <a:extLst xmlns:a="http://schemas.openxmlformats.org/drawingml/2006/main">
               <a:ext uri="{FF2B5EF4-FFF2-40B4-BE49-F238E27FC236}">
-                <a16:creationId xmlns:a16="http://schemas.microsoft.com/office/drawing/2014/main" id="{B673D77E-F783-4D25-8B07-8FB6237826FD}"/>
+                <a16:creationId xmlns:a16="http://schemas.microsoft.com/office/drawing/2014/main" id="{7CDA59C3-A096-4C88-AB31-27F27E6AEA96}"/>
               </a:ext>
             </a:extLst>
           </p:cNvPr>
@@ -15720,7 +15725,7 @@
           <p:cNvPr id="8" name="Text 6">
             <a:extLst xmlns:a="http://schemas.openxmlformats.org/drawingml/2006/main">
               <a:ext uri="{FF2B5EF4-FFF2-40B4-BE49-F238E27FC236}">
-                <a16:creationId xmlns:a16="http://schemas.microsoft.com/office/drawing/2014/main" id="{808EA11C-E3A1-4338-9B0E-BE3433955B87}"/>
+                <a16:creationId xmlns:a16="http://schemas.microsoft.com/office/drawing/2014/main" id="{A4C62A2C-AC91-4B72-8506-D8C53BA5F462}"/>
               </a:ext>
             </a:extLst>
           </p:cNvPr>
@@ -15767,7 +15772,7 @@
           <p:cNvPr id="9" name="Shape 7">
             <a:extLst xmlns:a="http://schemas.openxmlformats.org/drawingml/2006/main">
               <a:ext uri="{FF2B5EF4-FFF2-40B4-BE49-F238E27FC236}">
-                <a16:creationId xmlns:a16="http://schemas.microsoft.com/office/drawing/2014/main" id="{205E0017-B6C5-42A8-9FED-0337A8D3983A}"/>
+                <a16:creationId xmlns:a16="http://schemas.microsoft.com/office/drawing/2014/main" id="{DEBE79CF-D575-4D5C-AC87-10E7973D1105}"/>
               </a:ext>
             </a:extLst>
           </p:cNvPr>
@@ -15802,7 +15807,7 @@
           <p:cNvPr id="10" name="Text 8">
             <a:extLst xmlns:a="http://schemas.openxmlformats.org/drawingml/2006/main">
               <a:ext uri="{FF2B5EF4-FFF2-40B4-BE49-F238E27FC236}">
-                <a16:creationId xmlns:a16="http://schemas.microsoft.com/office/drawing/2014/main" id="{E1588D19-2F55-4CB6-862E-21CC19EAFE6D}"/>
+                <a16:creationId xmlns:a16="http://schemas.microsoft.com/office/drawing/2014/main" id="{AE14DBD5-94F6-4475-A2C9-9419FF05E2BA}"/>
               </a:ext>
             </a:extLst>
           </p:cNvPr>
@@ -15849,7 +15854,7 @@
           <p:cNvPr id="11" name="Text 9">
             <a:extLst xmlns:a="http://schemas.openxmlformats.org/drawingml/2006/main">
               <a:ext uri="{FF2B5EF4-FFF2-40B4-BE49-F238E27FC236}">
-                <a16:creationId xmlns:a16="http://schemas.microsoft.com/office/drawing/2014/main" id="{3270653C-CD69-49D0-8C1E-8B73618ADD7E}"/>
+                <a16:creationId xmlns:a16="http://schemas.microsoft.com/office/drawing/2014/main" id="{EF6DB061-A98E-4086-8EC3-2DC6E7D23DF1}"/>
               </a:ext>
             </a:extLst>
           </p:cNvPr>
@@ -15912,7 +15917,7 @@
           <p:cNvPr id="12" name="Shape 10">
             <a:extLst xmlns:a="http://schemas.openxmlformats.org/drawingml/2006/main">
               <a:ext uri="{FF2B5EF4-FFF2-40B4-BE49-F238E27FC236}">
-                <a16:creationId xmlns:a16="http://schemas.microsoft.com/office/drawing/2014/main" id="{CCFFEF9F-C7CA-4E7B-A98C-69595C456087}"/>
+                <a16:creationId xmlns:a16="http://schemas.microsoft.com/office/drawing/2014/main" id="{64E6F194-8C67-4689-A661-06A4A41CE967}"/>
               </a:ext>
             </a:extLst>
           </p:cNvPr>
@@ -15947,7 +15952,7 @@
           <p:cNvPr id="13" name="Text 11">
             <a:extLst xmlns:a="http://schemas.openxmlformats.org/drawingml/2006/main">
               <a:ext uri="{FF2B5EF4-FFF2-40B4-BE49-F238E27FC236}">
-                <a16:creationId xmlns:a16="http://schemas.microsoft.com/office/drawing/2014/main" id="{91832B70-28E6-4A11-A62E-22AF51B6A885}"/>
+                <a16:creationId xmlns:a16="http://schemas.microsoft.com/office/drawing/2014/main" id="{1511535C-5386-49BC-9072-3FE2D2DDFEBD}"/>
               </a:ext>
             </a:extLst>
           </p:cNvPr>
@@ -15994,7 +15999,7 @@
           <p:cNvPr id="14" name="Text 12">
             <a:extLst xmlns:a="http://schemas.openxmlformats.org/drawingml/2006/main">
               <a:ext uri="{FF2B5EF4-FFF2-40B4-BE49-F238E27FC236}">
-                <a16:creationId xmlns:a16="http://schemas.microsoft.com/office/drawing/2014/main" id="{5530F23D-6DE6-4272-9BD9-786710A5D3B0}"/>
+                <a16:creationId xmlns:a16="http://schemas.microsoft.com/office/drawing/2014/main" id="{00BA6CFD-715B-4110-B35E-058D523318AD}"/>
               </a:ext>
             </a:extLst>
           </p:cNvPr>
@@ -16057,7 +16062,7 @@
           <p:cNvPr id="15" name="Shape 13">
             <a:extLst xmlns:a="http://schemas.openxmlformats.org/drawingml/2006/main">
               <a:ext uri="{FF2B5EF4-FFF2-40B4-BE49-F238E27FC236}">
-                <a16:creationId xmlns:a16="http://schemas.microsoft.com/office/drawing/2014/main" id="{F36CF7B9-16C2-4295-BA9A-98DD1694472A}"/>
+                <a16:creationId xmlns:a16="http://schemas.microsoft.com/office/drawing/2014/main" id="{7C1F1977-FAE1-4D92-8593-5CF4D23AD8D0}"/>
               </a:ext>
             </a:extLst>
           </p:cNvPr>
@@ -16092,7 +16097,7 @@
           <p:cNvPr id="16" name="Text 14">
             <a:extLst xmlns:a="http://schemas.openxmlformats.org/drawingml/2006/main">
               <a:ext uri="{FF2B5EF4-FFF2-40B4-BE49-F238E27FC236}">
-                <a16:creationId xmlns:a16="http://schemas.microsoft.com/office/drawing/2014/main" id="{57AA897E-F51F-4032-9BB4-514F2CA91C19}"/>
+                <a16:creationId xmlns:a16="http://schemas.microsoft.com/office/drawing/2014/main" id="{17149D6A-D105-4F67-BD32-4EFCEB69505E}"/>
               </a:ext>
             </a:extLst>
           </p:cNvPr>
@@ -16139,7 +16144,7 @@
           <p:cNvPr id="17" name="Text 15">
             <a:extLst xmlns:a="http://schemas.openxmlformats.org/drawingml/2006/main">
               <a:ext uri="{FF2B5EF4-FFF2-40B4-BE49-F238E27FC236}">
-                <a16:creationId xmlns:a16="http://schemas.microsoft.com/office/drawing/2014/main" id="{B6B2BA30-FF63-4869-8192-68690C5CE442}"/>
+                <a16:creationId xmlns:a16="http://schemas.microsoft.com/office/drawing/2014/main" id="{BAF9AEF9-065A-4960-8551-21F407432B10}"/>
               </a:ext>
             </a:extLst>
           </p:cNvPr>
@@ -16202,7 +16207,7 @@
           <p:cNvPr id="18" name="Shape 16">
             <a:extLst xmlns:a="http://schemas.openxmlformats.org/drawingml/2006/main">
               <a:ext uri="{FF2B5EF4-FFF2-40B4-BE49-F238E27FC236}">
-                <a16:creationId xmlns:a16="http://schemas.microsoft.com/office/drawing/2014/main" id="{2E337B0F-6F6C-4918-831B-7AC7BB1198FA}"/>
+                <a16:creationId xmlns:a16="http://schemas.microsoft.com/office/drawing/2014/main" id="{F0996D41-FED3-4CF1-BD4C-0EC9C6DE49E6}"/>
               </a:ext>
             </a:extLst>
           </p:cNvPr>
@@ -16237,7 +16242,7 @@
           <p:cNvPr id="19" name="Text 17">
             <a:extLst xmlns:a="http://schemas.openxmlformats.org/drawingml/2006/main">
               <a:ext uri="{FF2B5EF4-FFF2-40B4-BE49-F238E27FC236}">
-                <a16:creationId xmlns:a16="http://schemas.microsoft.com/office/drawing/2014/main" id="{FF7E90EE-8923-4067-8DBB-1795D66BF8A4}"/>
+                <a16:creationId xmlns:a16="http://schemas.microsoft.com/office/drawing/2014/main" id="{A86622E4-9CA5-4755-905C-8A49025F4323}"/>
               </a:ext>
             </a:extLst>
           </p:cNvPr>
@@ -16284,7 +16289,7 @@
           <p:cNvPr id="20" name="Text 18">
             <a:extLst xmlns:a="http://schemas.openxmlformats.org/drawingml/2006/main">
               <a:ext uri="{FF2B5EF4-FFF2-40B4-BE49-F238E27FC236}">
-                <a16:creationId xmlns:a16="http://schemas.microsoft.com/office/drawing/2014/main" id="{A01F93E9-CA98-441F-853F-E639FD00C994}"/>
+                <a16:creationId xmlns:a16="http://schemas.microsoft.com/office/drawing/2014/main" id="{653B328C-0FDF-483F-990C-52EC06F2DA3C}"/>
               </a:ext>
             </a:extLst>
           </p:cNvPr>
@@ -16347,7 +16352,7 @@
           <p:cNvPr id="21" name="Shape 19">
             <a:extLst xmlns:a="http://schemas.openxmlformats.org/drawingml/2006/main">
               <a:ext uri="{FF2B5EF4-FFF2-40B4-BE49-F238E27FC236}">
-                <a16:creationId xmlns:a16="http://schemas.microsoft.com/office/drawing/2014/main" id="{E38746A9-DC94-45E1-8A8C-E8E83B96CC2D}"/>
+                <a16:creationId xmlns:a16="http://schemas.microsoft.com/office/drawing/2014/main" id="{5723FB16-CA9C-475C-998F-0BFB9E43B08A}"/>
               </a:ext>
             </a:extLst>
           </p:cNvPr>
@@ -16382,7 +16387,7 @@
           <p:cNvPr id="22" name="Text 20">
             <a:extLst xmlns:a="http://schemas.openxmlformats.org/drawingml/2006/main">
               <a:ext uri="{FF2B5EF4-FFF2-40B4-BE49-F238E27FC236}">
-                <a16:creationId xmlns:a16="http://schemas.microsoft.com/office/drawing/2014/main" id="{49DD77F1-16F2-43A1-97E9-8BFA88840421}"/>
+                <a16:creationId xmlns:a16="http://schemas.microsoft.com/office/drawing/2014/main" id="{826EFE37-4D55-4532-98F5-42F680EAEAE9}"/>
               </a:ext>
             </a:extLst>
           </p:cNvPr>
@@ -16429,7 +16434,7 @@
           <p:cNvPr id="23" name="Shape 21">
             <a:extLst xmlns:a="http://schemas.openxmlformats.org/drawingml/2006/main">
               <a:ext uri="{FF2B5EF4-FFF2-40B4-BE49-F238E27FC236}">
-                <a16:creationId xmlns:a16="http://schemas.microsoft.com/office/drawing/2014/main" id="{E412EF43-A6DF-4C82-AD6E-9D698333BCC6}"/>
+                <a16:creationId xmlns:a16="http://schemas.microsoft.com/office/drawing/2014/main" id="{5169A39F-F7FF-4A07-96B5-6D0DBF7D2FDC}"/>
               </a:ext>
             </a:extLst>
           </p:cNvPr>
@@ -16462,7 +16467,7 @@
           <p:cNvPr id="24" name="Text 22">
             <a:extLst xmlns:a="http://schemas.openxmlformats.org/drawingml/2006/main">
               <a:ext uri="{FF2B5EF4-FFF2-40B4-BE49-F238E27FC236}">
-                <a16:creationId xmlns:a16="http://schemas.microsoft.com/office/drawing/2014/main" id="{738F8750-9CC1-4B1D-B170-F15031CE4A1D}"/>
+                <a16:creationId xmlns:a16="http://schemas.microsoft.com/office/drawing/2014/main" id="{D315903C-1200-4B47-8037-B6FAECA3159D}"/>
               </a:ext>
             </a:extLst>
           </p:cNvPr>
@@ -16509,7 +16514,7 @@
           <p:cNvPr id="25" name="Shape 23">
             <a:extLst xmlns:a="http://schemas.openxmlformats.org/drawingml/2006/main">
               <a:ext uri="{FF2B5EF4-FFF2-40B4-BE49-F238E27FC236}">
-                <a16:creationId xmlns:a16="http://schemas.microsoft.com/office/drawing/2014/main" id="{E24426D7-6E75-4D48-86A6-DC811E9C6D3E}"/>
+                <a16:creationId xmlns:a16="http://schemas.microsoft.com/office/drawing/2014/main" id="{1C67F85C-7EE9-4275-BD7B-F101F34E90A8}"/>
               </a:ext>
             </a:extLst>
           </p:cNvPr>
@@ -16542,7 +16547,7 @@
           <p:cNvPr id="26" name="Text 24">
             <a:extLst xmlns:a="http://schemas.openxmlformats.org/drawingml/2006/main">
               <a:ext uri="{FF2B5EF4-FFF2-40B4-BE49-F238E27FC236}">
-                <a16:creationId xmlns:a16="http://schemas.microsoft.com/office/drawing/2014/main" id="{B63E3B5B-A17B-4496-AF94-580D26A0486F}"/>
+                <a16:creationId xmlns:a16="http://schemas.microsoft.com/office/drawing/2014/main" id="{5DDFF818-889C-4C0F-A6CA-B5281B88E08F}"/>
               </a:ext>
             </a:extLst>
           </p:cNvPr>
@@ -16589,7 +16594,7 @@
           <p:cNvPr id="27" name="Shape 25">
             <a:extLst xmlns:a="http://schemas.openxmlformats.org/drawingml/2006/main">
               <a:ext uri="{FF2B5EF4-FFF2-40B4-BE49-F238E27FC236}">
-                <a16:creationId xmlns:a16="http://schemas.microsoft.com/office/drawing/2014/main" id="{78F9DC6F-3B28-4E16-807E-D20505FB700D}"/>
+                <a16:creationId xmlns:a16="http://schemas.microsoft.com/office/drawing/2014/main" id="{7B38FA93-B4F2-4DE5-9845-1D0DC4708503}"/>
               </a:ext>
             </a:extLst>
           </p:cNvPr>
@@ -16622,7 +16627,7 @@
           <p:cNvPr id="28" name="Text 26">
             <a:extLst xmlns:a="http://schemas.openxmlformats.org/drawingml/2006/main">
               <a:ext uri="{FF2B5EF4-FFF2-40B4-BE49-F238E27FC236}">
-                <a16:creationId xmlns:a16="http://schemas.microsoft.com/office/drawing/2014/main" id="{A6F88EF1-86A7-4F92-988E-803454FFABA1}"/>
+                <a16:creationId xmlns:a16="http://schemas.microsoft.com/office/drawing/2014/main" id="{F67ADB2C-4E62-4EF1-9690-C7A0B7C2E19E}"/>
               </a:ext>
             </a:extLst>
           </p:cNvPr>
@@ -16643,7 +16648,7 @@
         </p:spPr>
         <p:txBody>
           <a:bodyPr xmlns:a="http://schemas.openxmlformats.org/drawingml/2006/main" wrap="square" lIns="0" tIns="0" rIns="0" bIns="0" anchor="t">
-            <a:normAutofit/>
+            <a:normAutofit fontScale="100000"/>
           </a:bodyPr>
           <a:lstStyle xmlns:a="http://schemas.openxmlformats.org/drawingml/2006/main"/>
           <a:p xmlns:a="http://schemas.openxmlformats.org/drawingml/2006/main">
@@ -16659,7 +16664,7 @@
                 <a:ea typeface="PingFang SC"/>
                 <a:cs typeface="PingFang SC"/>
               </a:rPr>
-              <a:t>补贴只覆盖真实使用量，未使用额度不沉淀、不转售。</a:t>
+              <a:t>补贴只覆盖真实使用量，未使用额度不沉淀、不转售</a:t>
             </a:r>
           </a:p>
         </p:txBody>
@@ -16669,7 +16674,7 @@
           <p:cNvPr id="29" name="Shape 27">
             <a:extLst xmlns:a="http://schemas.openxmlformats.org/drawingml/2006/main">
               <a:ext uri="{FF2B5EF4-FFF2-40B4-BE49-F238E27FC236}">
-                <a16:creationId xmlns:a16="http://schemas.microsoft.com/office/drawing/2014/main" id="{A7EE499C-99DE-4D8C-9565-E8CC2C920ACA}"/>
+                <a16:creationId xmlns:a16="http://schemas.microsoft.com/office/drawing/2014/main" id="{B7E173AA-FE31-43FF-9CE7-DBF3D2C159A4}"/>
               </a:ext>
             </a:extLst>
           </p:cNvPr>
@@ -16704,7 +16709,7 @@
           <p:cNvPr id="30" name="Text 28">
             <a:extLst xmlns:a="http://schemas.openxmlformats.org/drawingml/2006/main">
               <a:ext uri="{FF2B5EF4-FFF2-40B4-BE49-F238E27FC236}">
-                <a16:creationId xmlns:a16="http://schemas.microsoft.com/office/drawing/2014/main" id="{DD25DE10-DA1A-4336-8391-C370B76B2E07}"/>
+                <a16:creationId xmlns:a16="http://schemas.microsoft.com/office/drawing/2014/main" id="{9D379E2A-599F-4A21-B757-07F477BF3899}"/>
               </a:ext>
             </a:extLst>
           </p:cNvPr>
@@ -16751,7 +16756,7 @@
           <p:cNvPr id="31" name="Text 29">
             <a:extLst xmlns:a="http://schemas.openxmlformats.org/drawingml/2006/main">
               <a:ext uri="{FF2B5EF4-FFF2-40B4-BE49-F238E27FC236}">
-                <a16:creationId xmlns:a16="http://schemas.microsoft.com/office/drawing/2014/main" id="{D73ED988-856D-458E-8F19-C027E18928B0}"/>
+                <a16:creationId xmlns:a16="http://schemas.microsoft.com/office/drawing/2014/main" id="{3966415E-6215-4349-83A0-93BE72469001}"/>
               </a:ext>
             </a:extLst>
           </p:cNvPr>
@@ -16814,7 +16819,7 @@
           <p:cNvPr id="32" name="Shape 30">
             <a:extLst xmlns:a="http://schemas.openxmlformats.org/drawingml/2006/main">
               <a:ext uri="{FF2B5EF4-FFF2-40B4-BE49-F238E27FC236}">
-                <a16:creationId xmlns:a16="http://schemas.microsoft.com/office/drawing/2014/main" id="{059F2ED7-C2DC-46DF-A146-F051885C67E3}"/>
+                <a16:creationId xmlns:a16="http://schemas.microsoft.com/office/drawing/2014/main" id="{2BCCFF32-BF74-4525-A38B-BD944940BC1A}"/>
               </a:ext>
             </a:extLst>
           </p:cNvPr>
@@ -16849,7 +16854,7 @@
           <p:cNvPr id="33" name="Text 31">
             <a:extLst xmlns:a="http://schemas.openxmlformats.org/drawingml/2006/main">
               <a:ext uri="{FF2B5EF4-FFF2-40B4-BE49-F238E27FC236}">
-                <a16:creationId xmlns:a16="http://schemas.microsoft.com/office/drawing/2014/main" id="{C07312F7-B015-4741-8839-9EA7C13C0048}"/>
+                <a16:creationId xmlns:a16="http://schemas.microsoft.com/office/drawing/2014/main" id="{B622F014-9A58-4E51-9F40-11249029BABA}"/>
               </a:ext>
             </a:extLst>
           </p:cNvPr>
@@ -16896,7 +16901,7 @@
           <p:cNvPr id="34" name="Shape 32">
             <a:extLst xmlns:a="http://schemas.openxmlformats.org/drawingml/2006/main">
               <a:ext uri="{FF2B5EF4-FFF2-40B4-BE49-F238E27FC236}">
-                <a16:creationId xmlns:a16="http://schemas.microsoft.com/office/drawing/2014/main" id="{B4A5E2BD-DE65-4A42-A3BD-E2AC5FA27874}"/>
+                <a16:creationId xmlns:a16="http://schemas.microsoft.com/office/drawing/2014/main" id="{C5B17715-5882-496B-A45F-B211EC56E200}"/>
               </a:ext>
             </a:extLst>
           </p:cNvPr>
@@ -16931,7 +16936,7 @@
           <p:cNvPr id="35" name="Text 33">
             <a:extLst xmlns:a="http://schemas.openxmlformats.org/drawingml/2006/main">
               <a:ext uri="{FF2B5EF4-FFF2-40B4-BE49-F238E27FC236}">
-                <a16:creationId xmlns:a16="http://schemas.microsoft.com/office/drawing/2014/main" id="{8782C476-0599-4369-A703-CE7C65599286}"/>
+                <a16:creationId xmlns:a16="http://schemas.microsoft.com/office/drawing/2014/main" id="{6154D75B-94E3-45D7-9F05-33B79D4D5447}"/>
               </a:ext>
             </a:extLst>
           </p:cNvPr>
@@ -16978,7 +16983,7 @@
           <p:cNvPr id="36" name="Shape 34">
             <a:extLst xmlns:a="http://schemas.openxmlformats.org/drawingml/2006/main">
               <a:ext uri="{FF2B5EF4-FFF2-40B4-BE49-F238E27FC236}">
-                <a16:creationId xmlns:a16="http://schemas.microsoft.com/office/drawing/2014/main" id="{2AF4A57A-8C18-41C0-9A69-DCB3B3E0B203}"/>
+                <a16:creationId xmlns:a16="http://schemas.microsoft.com/office/drawing/2014/main" id="{D1CE89E5-BB6C-4EC8-91E1-854A37EB670C}"/>
               </a:ext>
             </a:extLst>
           </p:cNvPr>
@@ -17013,7 +17018,7 @@
           <p:cNvPr id="37" name="Text 35">
             <a:extLst xmlns:a="http://schemas.openxmlformats.org/drawingml/2006/main">
               <a:ext uri="{FF2B5EF4-FFF2-40B4-BE49-F238E27FC236}">
-                <a16:creationId xmlns:a16="http://schemas.microsoft.com/office/drawing/2014/main" id="{D1243181-2934-4D57-9E79-CD87C169BCB4}"/>
+                <a16:creationId xmlns:a16="http://schemas.microsoft.com/office/drawing/2014/main" id="{434059D5-4159-4AB7-9EC7-D7215DB02122}"/>
               </a:ext>
             </a:extLst>
           </p:cNvPr>
@@ -17060,7 +17065,7 @@
           <p:cNvPr id="38" name="Shape 36">
             <a:extLst xmlns:a="http://schemas.openxmlformats.org/drawingml/2006/main">
               <a:ext uri="{FF2B5EF4-FFF2-40B4-BE49-F238E27FC236}">
-                <a16:creationId xmlns:a16="http://schemas.microsoft.com/office/drawing/2014/main" id="{E5B4FFE8-9E1E-452F-8676-CCEDBE4D1B30}"/>
+                <a16:creationId xmlns:a16="http://schemas.microsoft.com/office/drawing/2014/main" id="{A411C98D-B5A1-4C55-B4EE-BF24729D6D69}"/>
               </a:ext>
             </a:extLst>
           </p:cNvPr>
@@ -17095,7 +17100,7 @@
           <p:cNvPr id="39" name="Text 37">
             <a:extLst xmlns:a="http://schemas.openxmlformats.org/drawingml/2006/main">
               <a:ext uri="{FF2B5EF4-FFF2-40B4-BE49-F238E27FC236}">
-                <a16:creationId xmlns:a16="http://schemas.microsoft.com/office/drawing/2014/main" id="{E2EF47D2-ED30-4A76-A02B-919CBFFB276F}"/>
+                <a16:creationId xmlns:a16="http://schemas.microsoft.com/office/drawing/2014/main" id="{695EAFFC-C04E-4179-9B37-5E7DE5C36716}"/>
               </a:ext>
             </a:extLst>
           </p:cNvPr>
@@ -17142,7 +17147,7 @@
           <p:cNvPr id="40" name="Shape 38">
             <a:extLst xmlns:a="http://schemas.openxmlformats.org/drawingml/2006/main">
               <a:ext uri="{FF2B5EF4-FFF2-40B4-BE49-F238E27FC236}">
-                <a16:creationId xmlns:a16="http://schemas.microsoft.com/office/drawing/2014/main" id="{54CEA21B-AF54-47AC-95D5-63CB0F75F6CC}"/>
+                <a16:creationId xmlns:a16="http://schemas.microsoft.com/office/drawing/2014/main" id="{DC38510A-6026-484B-A75C-B00FDB35FDC6}"/>
               </a:ext>
             </a:extLst>
           </p:cNvPr>
@@ -17177,7 +17182,7 @@
           <p:cNvPr id="41" name="Text 39">
             <a:extLst xmlns:a="http://schemas.openxmlformats.org/drawingml/2006/main">
               <a:ext uri="{FF2B5EF4-FFF2-40B4-BE49-F238E27FC236}">
-                <a16:creationId xmlns:a16="http://schemas.microsoft.com/office/drawing/2014/main" id="{095F2147-4DE7-46DE-BA4E-037A8A2A23FC}"/>
+                <a16:creationId xmlns:a16="http://schemas.microsoft.com/office/drawing/2014/main" id="{A3D330BC-90A3-47D4-8FB8-3521AA7CD4FA}"/>
               </a:ext>
             </a:extLst>
           </p:cNvPr>
@@ -17224,7 +17229,7 @@
           <p:cNvPr id="42" name="Text 40">
             <a:extLst xmlns:a="http://schemas.openxmlformats.org/drawingml/2006/main">
               <a:ext uri="{FF2B5EF4-FFF2-40B4-BE49-F238E27FC236}">
-                <a16:creationId xmlns:a16="http://schemas.microsoft.com/office/drawing/2014/main" id="{9144AA52-E362-446D-9BD5-017A4657FAF0}"/>
+                <a16:creationId xmlns:a16="http://schemas.microsoft.com/office/drawing/2014/main" id="{9E7262FD-057B-4851-9DA2-496C5B276E0C}"/>
               </a:ext>
             </a:extLst>
           </p:cNvPr>
@@ -17271,7 +17276,7 @@
           <p:cNvPr id="43" name="Text 41">
             <a:extLst xmlns:a="http://schemas.openxmlformats.org/drawingml/2006/main">
               <a:ext uri="{FF2B5EF4-FFF2-40B4-BE49-F238E27FC236}">
-                <a16:creationId xmlns:a16="http://schemas.microsoft.com/office/drawing/2014/main" id="{F54F8BF2-1F64-42C2-A61E-3B64AFBEDF6D}"/>
+                <a16:creationId xmlns:a16="http://schemas.microsoft.com/office/drawing/2014/main" id="{7E6F4CA3-4557-4F04-9208-A0A8968C1A66}"/>
               </a:ext>
             </a:extLst>
           </p:cNvPr>
@@ -17316,7 +17321,7 @@
     </p:spTree>
     <p:extLst>
       <p:ext uri="{BB962C8B-B14F-4D97-AF65-F5344CB8AC3E}">
-        <p14:creationId xmlns:p14="http://schemas.microsoft.com/office/powerpoint/2010/main" val="1555927616"/>
+        <p14:creationId xmlns:p14="http://schemas.microsoft.com/office/powerpoint/2010/main" val="1275959769"/>
       </p:ext>
     </p:extLst>
   </p:cSld>
@@ -17347,7 +17352,7 @@
           <p:cNvPr id="2" name="Text 0">
             <a:extLst xmlns:a="http://schemas.openxmlformats.org/drawingml/2006/main">
               <a:ext uri="{FF2B5EF4-FFF2-40B4-BE49-F238E27FC236}">
-                <a16:creationId xmlns:a16="http://schemas.microsoft.com/office/drawing/2014/main" id="{7B0EB514-9BA5-41FA-94DB-5F40AC3FB23F}"/>
+                <a16:creationId xmlns:a16="http://schemas.microsoft.com/office/drawing/2014/main" id="{8099ADD7-C33D-4512-B891-F610727B1B45}"/>
               </a:ext>
             </a:extLst>
           </p:cNvPr>
@@ -17394,7 +17399,7 @@
           <p:cNvPr id="3" name="Text 1">
             <a:extLst xmlns:a="http://schemas.openxmlformats.org/drawingml/2006/main">
               <a:ext uri="{FF2B5EF4-FFF2-40B4-BE49-F238E27FC236}">
-                <a16:creationId xmlns:a16="http://schemas.microsoft.com/office/drawing/2014/main" id="{3D0231D7-F33D-40F9-BB63-46BF0A9214F7}"/>
+                <a16:creationId xmlns:a16="http://schemas.microsoft.com/office/drawing/2014/main" id="{9563293D-B9E1-43C6-B17C-9C60E9190035}"/>
               </a:ext>
             </a:extLst>
           </p:cNvPr>
@@ -17441,7 +17446,7 @@
           <p:cNvPr id="4" name="Shape 2">
             <a:extLst xmlns:a="http://schemas.openxmlformats.org/drawingml/2006/main">
               <a:ext uri="{FF2B5EF4-FFF2-40B4-BE49-F238E27FC236}">
-                <a16:creationId xmlns:a16="http://schemas.microsoft.com/office/drawing/2014/main" id="{C673089B-C1A9-4951-97D5-2A217047131F}"/>
+                <a16:creationId xmlns:a16="http://schemas.microsoft.com/office/drawing/2014/main" id="{26845508-86A8-42C1-AFBD-EA7DB9480142}"/>
               </a:ext>
             </a:extLst>
           </p:cNvPr>
@@ -17476,7 +17481,7 @@
           <p:cNvPr id="5" name="Text 3">
             <a:extLst xmlns:a="http://schemas.openxmlformats.org/drawingml/2006/main">
               <a:ext uri="{FF2B5EF4-FFF2-40B4-BE49-F238E27FC236}">
-                <a16:creationId xmlns:a16="http://schemas.microsoft.com/office/drawing/2014/main" id="{3B8895F5-C7BB-4F88-AD6B-77FF0F638DED}"/>
+                <a16:creationId xmlns:a16="http://schemas.microsoft.com/office/drawing/2014/main" id="{D6772764-62A8-4078-BB73-D0A99682AB3D}"/>
               </a:ext>
             </a:extLst>
           </p:cNvPr>
@@ -17523,7 +17528,7 @@
           <p:cNvPr id="6" name="Shape 4">
             <a:extLst xmlns:a="http://schemas.openxmlformats.org/drawingml/2006/main">
               <a:ext uri="{FF2B5EF4-FFF2-40B4-BE49-F238E27FC236}">
-                <a16:creationId xmlns:a16="http://schemas.microsoft.com/office/drawing/2014/main" id="{FB2C7C23-096D-400B-AD3C-D45C1FC53140}"/>
+                <a16:creationId xmlns:a16="http://schemas.microsoft.com/office/drawing/2014/main" id="{79F8E5B3-C864-4CAB-AC9C-2EB4D0A0E4D7}"/>
               </a:ext>
             </a:extLst>
           </p:cNvPr>
@@ -17554,7 +17559,7 @@
           <p:cNvPr id="7" name="Shape 5">
             <a:extLst xmlns:a="http://schemas.openxmlformats.org/drawingml/2006/main">
               <a:ext uri="{FF2B5EF4-FFF2-40B4-BE49-F238E27FC236}">
-                <a16:creationId xmlns:a16="http://schemas.microsoft.com/office/drawing/2014/main" id="{3E51C476-F3FD-4AC6-853B-AD0183F2409C}"/>
+                <a16:creationId xmlns:a16="http://schemas.microsoft.com/office/drawing/2014/main" id="{3AE77C7E-0BBC-496A-B855-30367932A7BC}"/>
               </a:ext>
             </a:extLst>
           </p:cNvPr>
@@ -17589,7 +17594,7 @@
           <p:cNvPr id="8" name="Shape 6">
             <a:extLst xmlns:a="http://schemas.openxmlformats.org/drawingml/2006/main">
               <a:ext uri="{FF2B5EF4-FFF2-40B4-BE49-F238E27FC236}">
-                <a16:creationId xmlns:a16="http://schemas.microsoft.com/office/drawing/2014/main" id="{3C173964-13AA-4F2E-AA60-219D7610B9AA}"/>
+                <a16:creationId xmlns:a16="http://schemas.microsoft.com/office/drawing/2014/main" id="{53F095DC-967B-4BB2-8CD0-7E3EE4A3A53B}"/>
               </a:ext>
             </a:extLst>
           </p:cNvPr>
@@ -17624,7 +17629,7 @@
           <p:cNvPr id="9" name="Text 7">
             <a:extLst xmlns:a="http://schemas.openxmlformats.org/drawingml/2006/main">
               <a:ext uri="{FF2B5EF4-FFF2-40B4-BE49-F238E27FC236}">
-                <a16:creationId xmlns:a16="http://schemas.microsoft.com/office/drawing/2014/main" id="{B70ECB46-79C9-440F-9DDE-AB5160D6E95F}"/>
+                <a16:creationId xmlns:a16="http://schemas.microsoft.com/office/drawing/2014/main" id="{D9C78E07-331E-4D61-B2EA-4C1A92E70FA2}"/>
               </a:ext>
             </a:extLst>
           </p:cNvPr>
@@ -17671,7 +17676,7 @@
           <p:cNvPr id="10" name="Text 8">
             <a:extLst xmlns:a="http://schemas.openxmlformats.org/drawingml/2006/main">
               <a:ext uri="{FF2B5EF4-FFF2-40B4-BE49-F238E27FC236}">
-                <a16:creationId xmlns:a16="http://schemas.microsoft.com/office/drawing/2014/main" id="{93170A1F-5B9B-4536-A04E-D0EE2A77CFF5}"/>
+                <a16:creationId xmlns:a16="http://schemas.microsoft.com/office/drawing/2014/main" id="{3CF13A74-E7A4-4173-900C-F7E7107A2DF4}"/>
               </a:ext>
             </a:extLst>
           </p:cNvPr>
@@ -17718,7 +17723,7 @@
           <p:cNvPr id="11" name="Text 9">
             <a:extLst xmlns:a="http://schemas.openxmlformats.org/drawingml/2006/main">
               <a:ext uri="{FF2B5EF4-FFF2-40B4-BE49-F238E27FC236}">
-                <a16:creationId xmlns:a16="http://schemas.microsoft.com/office/drawing/2014/main" id="{AA58748D-E0BF-4B3B-98C2-3360E979DCB6}"/>
+                <a16:creationId xmlns:a16="http://schemas.microsoft.com/office/drawing/2014/main" id="{166375B6-A85E-42A6-B195-AA9C7CF0204D}"/>
               </a:ext>
             </a:extLst>
           </p:cNvPr>
@@ -17797,7 +17802,7 @@
           <p:cNvPr id="12" name="Shape 10">
             <a:extLst xmlns:a="http://schemas.openxmlformats.org/drawingml/2006/main">
               <a:ext uri="{FF2B5EF4-FFF2-40B4-BE49-F238E27FC236}">
-                <a16:creationId xmlns:a16="http://schemas.microsoft.com/office/drawing/2014/main" id="{A33A00BE-9979-46EC-8D1E-EE199BEB2D97}"/>
+                <a16:creationId xmlns:a16="http://schemas.microsoft.com/office/drawing/2014/main" id="{20427A29-0150-4B17-97B6-18B72193D07E}"/>
               </a:ext>
             </a:extLst>
           </p:cNvPr>
@@ -17829,7 +17834,7 @@
           <p:cNvPr id="13" name="Shape 11">
             <a:extLst xmlns:a="http://schemas.openxmlformats.org/drawingml/2006/main">
               <a:ext uri="{FF2B5EF4-FFF2-40B4-BE49-F238E27FC236}">
-                <a16:creationId xmlns:a16="http://schemas.microsoft.com/office/drawing/2014/main" id="{AEDC5044-51A0-4245-AAE2-CBCD94AEDA6E}"/>
+                <a16:creationId xmlns:a16="http://schemas.microsoft.com/office/drawing/2014/main" id="{5496B46B-A2DC-4939-BE33-00B49BD232F7}"/>
               </a:ext>
             </a:extLst>
           </p:cNvPr>
@@ -17864,7 +17869,7 @@
           <p:cNvPr id="14" name="Shape 12">
             <a:extLst xmlns:a="http://schemas.openxmlformats.org/drawingml/2006/main">
               <a:ext uri="{FF2B5EF4-FFF2-40B4-BE49-F238E27FC236}">
-                <a16:creationId xmlns:a16="http://schemas.microsoft.com/office/drawing/2014/main" id="{7B4AB893-C44D-4359-8A30-385B4EA2B66D}"/>
+                <a16:creationId xmlns:a16="http://schemas.microsoft.com/office/drawing/2014/main" id="{4A478954-FCE9-4066-A574-D106AFDAA774}"/>
               </a:ext>
             </a:extLst>
           </p:cNvPr>
@@ -17899,7 +17904,7 @@
           <p:cNvPr id="15" name="Text 13">
             <a:extLst xmlns:a="http://schemas.openxmlformats.org/drawingml/2006/main">
               <a:ext uri="{FF2B5EF4-FFF2-40B4-BE49-F238E27FC236}">
-                <a16:creationId xmlns:a16="http://schemas.microsoft.com/office/drawing/2014/main" id="{507E4F65-DAE8-43E4-BE2A-0DD49DE45084}"/>
+                <a16:creationId xmlns:a16="http://schemas.microsoft.com/office/drawing/2014/main" id="{0BC135F9-C2AF-4599-82B1-5EFED9ED9B26}"/>
               </a:ext>
             </a:extLst>
           </p:cNvPr>
@@ -17946,7 +17951,7 @@
           <p:cNvPr id="16" name="Text 14">
             <a:extLst xmlns:a="http://schemas.openxmlformats.org/drawingml/2006/main">
               <a:ext uri="{FF2B5EF4-FFF2-40B4-BE49-F238E27FC236}">
-                <a16:creationId xmlns:a16="http://schemas.microsoft.com/office/drawing/2014/main" id="{4805AB40-705B-4274-B6E9-76F09B767330}"/>
+                <a16:creationId xmlns:a16="http://schemas.microsoft.com/office/drawing/2014/main" id="{6BB2C8D5-3317-4B9B-A126-C1A27828AF51}"/>
               </a:ext>
             </a:extLst>
           </p:cNvPr>
@@ -17993,7 +17998,7 @@
           <p:cNvPr id="17" name="Text 15">
             <a:extLst xmlns:a="http://schemas.openxmlformats.org/drawingml/2006/main">
               <a:ext uri="{FF2B5EF4-FFF2-40B4-BE49-F238E27FC236}">
-                <a16:creationId xmlns:a16="http://schemas.microsoft.com/office/drawing/2014/main" id="{0266F178-8BBD-4C30-8522-F84E2840C4E8}"/>
+                <a16:creationId xmlns:a16="http://schemas.microsoft.com/office/drawing/2014/main" id="{82AAE78A-3A31-4E56-933A-C2F5040F3DB1}"/>
               </a:ext>
             </a:extLst>
           </p:cNvPr>
@@ -18072,7 +18077,7 @@
           <p:cNvPr id="18" name="Shape 16">
             <a:extLst xmlns:a="http://schemas.openxmlformats.org/drawingml/2006/main">
               <a:ext uri="{FF2B5EF4-FFF2-40B4-BE49-F238E27FC236}">
-                <a16:creationId xmlns:a16="http://schemas.microsoft.com/office/drawing/2014/main" id="{BCC4CC26-5455-4F92-9795-D86B1621A325}"/>
+                <a16:creationId xmlns:a16="http://schemas.microsoft.com/office/drawing/2014/main" id="{7B2613D3-D7EE-4A02-AB33-BBE1F759CDCC}"/>
               </a:ext>
             </a:extLst>
           </p:cNvPr>
@@ -18104,7 +18109,7 @@
           <p:cNvPr id="19" name="Shape 17">
             <a:extLst xmlns:a="http://schemas.openxmlformats.org/drawingml/2006/main">
               <a:ext uri="{FF2B5EF4-FFF2-40B4-BE49-F238E27FC236}">
-                <a16:creationId xmlns:a16="http://schemas.microsoft.com/office/drawing/2014/main" id="{3E0ABF46-827A-42EA-8EAB-C79304455714}"/>
+                <a16:creationId xmlns:a16="http://schemas.microsoft.com/office/drawing/2014/main" id="{16EFDDC6-5FA9-46D7-9473-8B1611D33227}"/>
               </a:ext>
             </a:extLst>
           </p:cNvPr>
@@ -18139,7 +18144,7 @@
           <p:cNvPr id="20" name="Shape 18">
             <a:extLst xmlns:a="http://schemas.openxmlformats.org/drawingml/2006/main">
               <a:ext uri="{FF2B5EF4-FFF2-40B4-BE49-F238E27FC236}">
-                <a16:creationId xmlns:a16="http://schemas.microsoft.com/office/drawing/2014/main" id="{9D2CD62C-ADD8-42FA-BC67-9FF622B417C8}"/>
+                <a16:creationId xmlns:a16="http://schemas.microsoft.com/office/drawing/2014/main" id="{EA9A0D1B-2CF7-43D7-9D7A-CAF3570605C2}"/>
               </a:ext>
             </a:extLst>
           </p:cNvPr>
@@ -18174,7 +18179,7 @@
           <p:cNvPr id="21" name="Text 19">
             <a:extLst xmlns:a="http://schemas.openxmlformats.org/drawingml/2006/main">
               <a:ext uri="{FF2B5EF4-FFF2-40B4-BE49-F238E27FC236}">
-                <a16:creationId xmlns:a16="http://schemas.microsoft.com/office/drawing/2014/main" id="{3ECB0B7B-A295-4AF7-A269-998B0444A5AC}"/>
+                <a16:creationId xmlns:a16="http://schemas.microsoft.com/office/drawing/2014/main" id="{019B94E9-F377-47B9-A552-FCBDC4F7FA96}"/>
               </a:ext>
             </a:extLst>
           </p:cNvPr>
@@ -18221,7 +18226,7 @@
           <p:cNvPr id="22" name="Text 20">
             <a:extLst xmlns:a="http://schemas.openxmlformats.org/drawingml/2006/main">
               <a:ext uri="{FF2B5EF4-FFF2-40B4-BE49-F238E27FC236}">
-                <a16:creationId xmlns:a16="http://schemas.microsoft.com/office/drawing/2014/main" id="{59186D9F-96DB-48F5-B8BF-D23F77FE4BAE}"/>
+                <a16:creationId xmlns:a16="http://schemas.microsoft.com/office/drawing/2014/main" id="{06F0EC40-39BE-4A56-9B42-C49D8943FC8C}"/>
               </a:ext>
             </a:extLst>
           </p:cNvPr>
@@ -18268,7 +18273,7 @@
           <p:cNvPr id="23" name="Text 21">
             <a:extLst xmlns:a="http://schemas.openxmlformats.org/drawingml/2006/main">
               <a:ext uri="{FF2B5EF4-FFF2-40B4-BE49-F238E27FC236}">
-                <a16:creationId xmlns:a16="http://schemas.microsoft.com/office/drawing/2014/main" id="{2914F6FD-8724-49CC-9FE7-A14D2E2B6B83}"/>
+                <a16:creationId xmlns:a16="http://schemas.microsoft.com/office/drawing/2014/main" id="{82811D5E-3B5B-47B5-85F4-EE90BDA7CAA9}"/>
               </a:ext>
             </a:extLst>
           </p:cNvPr>
@@ -18347,7 +18352,7 @@
           <p:cNvPr id="24" name="Shape 22">
             <a:extLst xmlns:a="http://schemas.openxmlformats.org/drawingml/2006/main">
               <a:ext uri="{FF2B5EF4-FFF2-40B4-BE49-F238E27FC236}">
-                <a16:creationId xmlns:a16="http://schemas.microsoft.com/office/drawing/2014/main" id="{EF9BB15B-5423-4245-AED8-F4A1D844FA6E}"/>
+                <a16:creationId xmlns:a16="http://schemas.microsoft.com/office/drawing/2014/main" id="{ACBF0F03-9727-40CC-A713-85DAACB43553}"/>
               </a:ext>
             </a:extLst>
           </p:cNvPr>
@@ -18379,7 +18384,7 @@
           <p:cNvPr id="25" name="Shape 23">
             <a:extLst xmlns:a="http://schemas.openxmlformats.org/drawingml/2006/main">
               <a:ext uri="{FF2B5EF4-FFF2-40B4-BE49-F238E27FC236}">
-                <a16:creationId xmlns:a16="http://schemas.microsoft.com/office/drawing/2014/main" id="{A110FBAD-77FB-4125-A7A9-5FF64F3708A8}"/>
+                <a16:creationId xmlns:a16="http://schemas.microsoft.com/office/drawing/2014/main" id="{8DB5D955-C7B0-4296-9969-58F6C32613F7}"/>
               </a:ext>
             </a:extLst>
           </p:cNvPr>
@@ -18414,7 +18419,7 @@
           <p:cNvPr id="26" name="Shape 24">
             <a:extLst xmlns:a="http://schemas.openxmlformats.org/drawingml/2006/main">
               <a:ext uri="{FF2B5EF4-FFF2-40B4-BE49-F238E27FC236}">
-                <a16:creationId xmlns:a16="http://schemas.microsoft.com/office/drawing/2014/main" id="{0BB412A0-4E96-4D79-A0D1-E4DAEAEFC79E}"/>
+                <a16:creationId xmlns:a16="http://schemas.microsoft.com/office/drawing/2014/main" id="{086B14B0-AE87-4FB9-8BEC-F354D949A062}"/>
               </a:ext>
             </a:extLst>
           </p:cNvPr>
@@ -18449,7 +18454,7 @@
           <p:cNvPr id="27" name="Text 25">
             <a:extLst xmlns:a="http://schemas.openxmlformats.org/drawingml/2006/main">
               <a:ext uri="{FF2B5EF4-FFF2-40B4-BE49-F238E27FC236}">
-                <a16:creationId xmlns:a16="http://schemas.microsoft.com/office/drawing/2014/main" id="{EC04424C-EE05-4077-9DE4-9E766BC1B796}"/>
+                <a16:creationId xmlns:a16="http://schemas.microsoft.com/office/drawing/2014/main" id="{D58FD3EE-4634-4CCA-8BC0-18EAF3F39E82}"/>
               </a:ext>
             </a:extLst>
           </p:cNvPr>
@@ -18496,7 +18501,7 @@
           <p:cNvPr id="28" name="Text 26">
             <a:extLst xmlns:a="http://schemas.openxmlformats.org/drawingml/2006/main">
               <a:ext uri="{FF2B5EF4-FFF2-40B4-BE49-F238E27FC236}">
-                <a16:creationId xmlns:a16="http://schemas.microsoft.com/office/drawing/2014/main" id="{35B8F2C4-039C-4B6E-8080-13C864BB08A0}"/>
+                <a16:creationId xmlns:a16="http://schemas.microsoft.com/office/drawing/2014/main" id="{2FE87F39-BA87-4A36-87B7-1D21D789BF13}"/>
               </a:ext>
             </a:extLst>
           </p:cNvPr>
@@ -18543,7 +18548,7 @@
           <p:cNvPr id="29" name="Text 27">
             <a:extLst xmlns:a="http://schemas.openxmlformats.org/drawingml/2006/main">
               <a:ext uri="{FF2B5EF4-FFF2-40B4-BE49-F238E27FC236}">
-                <a16:creationId xmlns:a16="http://schemas.microsoft.com/office/drawing/2014/main" id="{D7C37022-4218-4BF9-BDBB-FCCB232EFE31}"/>
+                <a16:creationId xmlns:a16="http://schemas.microsoft.com/office/drawing/2014/main" id="{93BFCC39-460D-43AE-9916-D256315180A8}"/>
               </a:ext>
             </a:extLst>
           </p:cNvPr>
@@ -18622,7 +18627,7 @@
           <p:cNvPr id="43" name="Text 41">
             <a:extLst xmlns:a="http://schemas.openxmlformats.org/drawingml/2006/main">
               <a:ext uri="{FF2B5EF4-FFF2-40B4-BE49-F238E27FC236}">
-                <a16:creationId xmlns:a16="http://schemas.microsoft.com/office/drawing/2014/main" id="{23918184-6AEA-47FB-8CC3-C481B9F45219}"/>
+                <a16:creationId xmlns:a16="http://schemas.microsoft.com/office/drawing/2014/main" id="{B761DF8D-58BA-4DE5-87F8-DB38AE3B609F}"/>
               </a:ext>
             </a:extLst>
           </p:cNvPr>
@@ -18669,7 +18674,7 @@
           <p:cNvPr id="44" name="Text 42">
             <a:extLst xmlns:a="http://schemas.openxmlformats.org/drawingml/2006/main">
               <a:ext uri="{FF2B5EF4-FFF2-40B4-BE49-F238E27FC236}">
-                <a16:creationId xmlns:a16="http://schemas.microsoft.com/office/drawing/2014/main" id="{94E098E1-EF8D-463B-8AE9-8BA65210EEE6}"/>
+                <a16:creationId xmlns:a16="http://schemas.microsoft.com/office/drawing/2014/main" id="{34A6504C-4520-4CEC-9ABE-FC9FE77A7C75}"/>
               </a:ext>
             </a:extLst>
           </p:cNvPr>
@@ -18716,7 +18721,7 @@
           <p:cNvPr id="45" name="Text 43">
             <a:extLst xmlns:a="http://schemas.openxmlformats.org/drawingml/2006/main">
               <a:ext uri="{FF2B5EF4-FFF2-40B4-BE49-F238E27FC236}">
-                <a16:creationId xmlns:a16="http://schemas.microsoft.com/office/drawing/2014/main" id="{DADB49C6-B8A8-4E06-80FE-89677D5B1BFD}"/>
+                <a16:creationId xmlns:a16="http://schemas.microsoft.com/office/drawing/2014/main" id="{636C73FF-8F40-4FDE-97A5-E56DB1617CA7}"/>
               </a:ext>
             </a:extLst>
           </p:cNvPr>
@@ -18761,7 +18766,7 @@
     </p:spTree>
     <p:extLst>
       <p:ext uri="{BB962C8B-B14F-4D97-AF65-F5344CB8AC3E}">
-        <p14:creationId xmlns:p14="http://schemas.microsoft.com/office/powerpoint/2010/main" val="1988269191"/>
+        <p14:creationId xmlns:p14="http://schemas.microsoft.com/office/powerpoint/2010/main" val="873646052"/>
       </p:ext>
     </p:extLst>
   </p:cSld>
@@ -18796,7 +18801,7 @@
           <p:nvPr/>
         </p:nvPicPr>
         <p:blipFill>
-          <a:blip xmlns:r="http://schemas.openxmlformats.org/officeDocument/2006/relationships" xmlns:a="http://schemas.openxmlformats.org/drawingml/2006/main" r:embed="Rfcbb2214cd464e48"/>
+          <a:blip xmlns:r="http://schemas.openxmlformats.org/officeDocument/2006/relationships" xmlns:a="http://schemas.openxmlformats.org/drawingml/2006/main" r:embed="Re80984e9c8f5426f"/>
           <a:stretch xmlns:a="http://schemas.openxmlformats.org/drawingml/2006/main">
             <a:fillRect l="0" t="0" r="0" b="0"/>
           </a:stretch>
@@ -18816,7 +18821,7 @@
           <p:cNvPr id="3" name="Text 0">
             <a:extLst xmlns:a="http://schemas.openxmlformats.org/drawingml/2006/main">
               <a:ext uri="{FF2B5EF4-FFF2-40B4-BE49-F238E27FC236}">
-                <a16:creationId xmlns:a16="http://schemas.microsoft.com/office/drawing/2014/main" id="{03F77554-398D-422F-B5B8-AFCC91767B59}"/>
+                <a16:creationId xmlns:a16="http://schemas.microsoft.com/office/drawing/2014/main" id="{EB990E29-503A-476C-BA2A-52BC1E61F804}"/>
               </a:ext>
             </a:extLst>
           </p:cNvPr>
@@ -18863,7 +18868,7 @@
           <p:cNvPr id="4" name="Text 1">
             <a:extLst xmlns:a="http://schemas.openxmlformats.org/drawingml/2006/main">
               <a:ext uri="{FF2B5EF4-FFF2-40B4-BE49-F238E27FC236}">
-                <a16:creationId xmlns:a16="http://schemas.microsoft.com/office/drawing/2014/main" id="{1EDCC474-0388-4C21-8529-4C2AED74B73D}"/>
+                <a16:creationId xmlns:a16="http://schemas.microsoft.com/office/drawing/2014/main" id="{21E2C7FE-0448-42C8-AE0D-D24EB6642EB2}"/>
               </a:ext>
             </a:extLst>
           </p:cNvPr>
@@ -18910,7 +18915,7 @@
           <p:cNvPr id="5" name="Text 2">
             <a:extLst xmlns:a="http://schemas.openxmlformats.org/drawingml/2006/main">
               <a:ext uri="{FF2B5EF4-FFF2-40B4-BE49-F238E27FC236}">
-                <a16:creationId xmlns:a16="http://schemas.microsoft.com/office/drawing/2014/main" id="{11BA5478-0199-4B90-B49A-C4ABB0966FEB}"/>
+                <a16:creationId xmlns:a16="http://schemas.microsoft.com/office/drawing/2014/main" id="{AE79920F-BDE6-4364-BF79-D4971BD8FED9}"/>
               </a:ext>
             </a:extLst>
           </p:cNvPr>
@@ -18957,7 +18962,7 @@
           <p:cNvPr id="6" name="Shape 3">
             <a:extLst xmlns:a="http://schemas.openxmlformats.org/drawingml/2006/main">
               <a:ext uri="{FF2B5EF4-FFF2-40B4-BE49-F238E27FC236}">
-                <a16:creationId xmlns:a16="http://schemas.microsoft.com/office/drawing/2014/main" id="{FE774220-B237-4DD7-B595-4096DE2A8A37}"/>
+                <a16:creationId xmlns:a16="http://schemas.microsoft.com/office/drawing/2014/main" id="{87A72BF0-8BD8-4EAD-9EBD-BFAB70570243}"/>
               </a:ext>
             </a:extLst>
           </p:cNvPr>
@@ -18992,7 +18997,7 @@
           <p:cNvPr id="7" name="Shape 4">
             <a:extLst xmlns:a="http://schemas.openxmlformats.org/drawingml/2006/main">
               <a:ext uri="{FF2B5EF4-FFF2-40B4-BE49-F238E27FC236}">
-                <a16:creationId xmlns:a16="http://schemas.microsoft.com/office/drawing/2014/main" id="{89189C7C-147B-4CCB-8628-747C1577CF8C}"/>
+                <a16:creationId xmlns:a16="http://schemas.microsoft.com/office/drawing/2014/main" id="{DF181360-3B2C-4386-B02B-FE948E5746BD}"/>
               </a:ext>
             </a:extLst>
           </p:cNvPr>
@@ -19025,7 +19030,7 @@
           <p:cNvPr id="8" name="Text 5">
             <a:extLst xmlns:a="http://schemas.openxmlformats.org/drawingml/2006/main">
               <a:ext uri="{FF2B5EF4-FFF2-40B4-BE49-F238E27FC236}">
-                <a16:creationId xmlns:a16="http://schemas.microsoft.com/office/drawing/2014/main" id="{D1494FE3-735C-43AB-9001-7A8685EA5A76}"/>
+                <a16:creationId xmlns:a16="http://schemas.microsoft.com/office/drawing/2014/main" id="{E2F7AC60-FFFC-46A7-BF2B-5BFBCDE6FC12}"/>
               </a:ext>
             </a:extLst>
           </p:cNvPr>
@@ -19072,7 +19077,7 @@
           <p:cNvPr id="9" name="Text 6">
             <a:extLst xmlns:a="http://schemas.openxmlformats.org/drawingml/2006/main">
               <a:ext uri="{FF2B5EF4-FFF2-40B4-BE49-F238E27FC236}">
-                <a16:creationId xmlns:a16="http://schemas.microsoft.com/office/drawing/2014/main" id="{B529EE42-4D12-4E88-A521-B73A3603026F}"/>
+                <a16:creationId xmlns:a16="http://schemas.microsoft.com/office/drawing/2014/main" id="{ABAF6D04-F404-43AE-9416-F44257B2D591}"/>
               </a:ext>
             </a:extLst>
           </p:cNvPr>
@@ -19119,7 +19124,7 @@
           <p:cNvPr id="10" name="Shape 7">
             <a:extLst xmlns:a="http://schemas.openxmlformats.org/drawingml/2006/main">
               <a:ext uri="{FF2B5EF4-FFF2-40B4-BE49-F238E27FC236}">
-                <a16:creationId xmlns:a16="http://schemas.microsoft.com/office/drawing/2014/main" id="{5CCE94C4-C138-4096-ABF5-1F17999FFEFB}"/>
+                <a16:creationId xmlns:a16="http://schemas.microsoft.com/office/drawing/2014/main" id="{6DFFED3E-4B44-4C83-9B3C-673F92E5B718}"/>
               </a:ext>
             </a:extLst>
           </p:cNvPr>
@@ -19154,7 +19159,7 @@
           <p:cNvPr id="11" name="Shape 8">
             <a:extLst xmlns:a="http://schemas.openxmlformats.org/drawingml/2006/main">
               <a:ext uri="{FF2B5EF4-FFF2-40B4-BE49-F238E27FC236}">
-                <a16:creationId xmlns:a16="http://schemas.microsoft.com/office/drawing/2014/main" id="{DD02D20B-CEE3-4238-B9CE-D476BBF98ACA}"/>
+                <a16:creationId xmlns:a16="http://schemas.microsoft.com/office/drawing/2014/main" id="{656E8900-0140-4568-9713-135DA0321C09}"/>
               </a:ext>
             </a:extLst>
           </p:cNvPr>
@@ -19187,7 +19192,7 @@
           <p:cNvPr id="12" name="Text 9">
             <a:extLst xmlns:a="http://schemas.openxmlformats.org/drawingml/2006/main">
               <a:ext uri="{FF2B5EF4-FFF2-40B4-BE49-F238E27FC236}">
-                <a16:creationId xmlns:a16="http://schemas.microsoft.com/office/drawing/2014/main" id="{FFDD7485-E481-49D2-B3FD-E80E30589771}"/>
+                <a16:creationId xmlns:a16="http://schemas.microsoft.com/office/drawing/2014/main" id="{5544136E-2776-4FD6-B9D0-6876A8EC2C1C}"/>
               </a:ext>
             </a:extLst>
           </p:cNvPr>
@@ -19234,7 +19239,7 @@
           <p:cNvPr id="13" name="Text 10">
             <a:extLst xmlns:a="http://schemas.openxmlformats.org/drawingml/2006/main">
               <a:ext uri="{FF2B5EF4-FFF2-40B4-BE49-F238E27FC236}">
-                <a16:creationId xmlns:a16="http://schemas.microsoft.com/office/drawing/2014/main" id="{0E290540-1A00-4A97-BED3-1DAEBEEAA40B}"/>
+                <a16:creationId xmlns:a16="http://schemas.microsoft.com/office/drawing/2014/main" id="{E526A3CC-30C1-435A-802E-5906F0FC52D3}"/>
               </a:ext>
             </a:extLst>
           </p:cNvPr>
@@ -19281,7 +19286,7 @@
           <p:cNvPr id="14" name="Shape 11">
             <a:extLst xmlns:a="http://schemas.openxmlformats.org/drawingml/2006/main">
               <a:ext uri="{FF2B5EF4-FFF2-40B4-BE49-F238E27FC236}">
-                <a16:creationId xmlns:a16="http://schemas.microsoft.com/office/drawing/2014/main" id="{AC4B5745-EDC7-4B60-A83C-1FC5318E89E0}"/>
+                <a16:creationId xmlns:a16="http://schemas.microsoft.com/office/drawing/2014/main" id="{46B24505-967A-415A-A3EA-8E3B196B2073}"/>
               </a:ext>
             </a:extLst>
           </p:cNvPr>
@@ -19316,7 +19321,7 @@
           <p:cNvPr id="15" name="Shape 12">
             <a:extLst xmlns:a="http://schemas.openxmlformats.org/drawingml/2006/main">
               <a:ext uri="{FF2B5EF4-FFF2-40B4-BE49-F238E27FC236}">
-                <a16:creationId xmlns:a16="http://schemas.microsoft.com/office/drawing/2014/main" id="{8761D614-2F57-46C3-8E53-45EB2ED9C518}"/>
+                <a16:creationId xmlns:a16="http://schemas.microsoft.com/office/drawing/2014/main" id="{DD0816B0-63BC-4315-8C95-9CA7B381B01A}"/>
               </a:ext>
             </a:extLst>
           </p:cNvPr>
@@ -19349,7 +19354,7 @@
           <p:cNvPr id="16" name="Text 13">
             <a:extLst xmlns:a="http://schemas.openxmlformats.org/drawingml/2006/main">
               <a:ext uri="{FF2B5EF4-FFF2-40B4-BE49-F238E27FC236}">
-                <a16:creationId xmlns:a16="http://schemas.microsoft.com/office/drawing/2014/main" id="{B726C720-419A-4A5F-92FB-393E186F2898}"/>
+                <a16:creationId xmlns:a16="http://schemas.microsoft.com/office/drawing/2014/main" id="{DC54500F-B3A7-406C-827C-EB440078E42C}"/>
               </a:ext>
             </a:extLst>
           </p:cNvPr>
@@ -19396,7 +19401,7 @@
           <p:cNvPr id="17" name="Text 14">
             <a:extLst xmlns:a="http://schemas.openxmlformats.org/drawingml/2006/main">
               <a:ext uri="{FF2B5EF4-FFF2-40B4-BE49-F238E27FC236}">
-                <a16:creationId xmlns:a16="http://schemas.microsoft.com/office/drawing/2014/main" id="{400BA0B3-6EED-4C02-9DAB-4B3FB70B3F65}"/>
+                <a16:creationId xmlns:a16="http://schemas.microsoft.com/office/drawing/2014/main" id="{3F7B4782-A0B7-4ED4-96E7-45AB3EBE277F}"/>
               </a:ext>
             </a:extLst>
           </p:cNvPr>
@@ -19443,7 +19448,7 @@
           <p:cNvPr id="18" name="Shape 15">
             <a:extLst xmlns:a="http://schemas.openxmlformats.org/drawingml/2006/main">
               <a:ext uri="{FF2B5EF4-FFF2-40B4-BE49-F238E27FC236}">
-                <a16:creationId xmlns:a16="http://schemas.microsoft.com/office/drawing/2014/main" id="{491FDE92-1040-4862-B70C-5D6B40116E70}"/>
+                <a16:creationId xmlns:a16="http://schemas.microsoft.com/office/drawing/2014/main" id="{4F217E03-F318-4BDE-9A86-68E191DEF1C4}"/>
               </a:ext>
             </a:extLst>
           </p:cNvPr>
@@ -19478,7 +19483,7 @@
           <p:cNvPr id="19" name="Shape 16">
             <a:extLst xmlns:a="http://schemas.openxmlformats.org/drawingml/2006/main">
               <a:ext uri="{FF2B5EF4-FFF2-40B4-BE49-F238E27FC236}">
-                <a16:creationId xmlns:a16="http://schemas.microsoft.com/office/drawing/2014/main" id="{447E9EBB-95EF-48F3-829B-82942F4C70B2}"/>
+                <a16:creationId xmlns:a16="http://schemas.microsoft.com/office/drawing/2014/main" id="{8A8A9DEF-76C0-44BB-9F2A-F6D4F12145A5}"/>
               </a:ext>
             </a:extLst>
           </p:cNvPr>
@@ -19511,7 +19516,7 @@
           <p:cNvPr id="20" name="Text 17">
             <a:extLst xmlns:a="http://schemas.openxmlformats.org/drawingml/2006/main">
               <a:ext uri="{FF2B5EF4-FFF2-40B4-BE49-F238E27FC236}">
-                <a16:creationId xmlns:a16="http://schemas.microsoft.com/office/drawing/2014/main" id="{D69666B8-D2EA-405B-836B-65427F1715C1}"/>
+                <a16:creationId xmlns:a16="http://schemas.microsoft.com/office/drawing/2014/main" id="{453F5E4A-2405-4B6A-8142-DC634A1F9E1A}"/>
               </a:ext>
             </a:extLst>
           </p:cNvPr>
@@ -19558,7 +19563,7 @@
           <p:cNvPr id="21" name="Text 18">
             <a:extLst xmlns:a="http://schemas.openxmlformats.org/drawingml/2006/main">
               <a:ext uri="{FF2B5EF4-FFF2-40B4-BE49-F238E27FC236}">
-                <a16:creationId xmlns:a16="http://schemas.microsoft.com/office/drawing/2014/main" id="{832677DA-4097-45D7-829A-6C5A2DBD1B21}"/>
+                <a16:creationId xmlns:a16="http://schemas.microsoft.com/office/drawing/2014/main" id="{AB21447C-CCF7-4BE8-935C-40FA8BC87EA1}"/>
               </a:ext>
             </a:extLst>
           </p:cNvPr>
@@ -19605,7 +19610,7 @@
           <p:cNvPr id="22" name="Shape 19">
             <a:extLst xmlns:a="http://schemas.openxmlformats.org/drawingml/2006/main">
               <a:ext uri="{FF2B5EF4-FFF2-40B4-BE49-F238E27FC236}">
-                <a16:creationId xmlns:a16="http://schemas.microsoft.com/office/drawing/2014/main" id="{0D0D1BE9-0581-4CA7-B236-0F38C3DE4BC0}"/>
+                <a16:creationId xmlns:a16="http://schemas.microsoft.com/office/drawing/2014/main" id="{5D873502-6381-40DC-83E1-8E63A0AF992A}"/>
               </a:ext>
             </a:extLst>
           </p:cNvPr>
@@ -19640,7 +19645,7 @@
           <p:cNvPr id="23" name="Shape 20">
             <a:extLst xmlns:a="http://schemas.openxmlformats.org/drawingml/2006/main">
               <a:ext uri="{FF2B5EF4-FFF2-40B4-BE49-F238E27FC236}">
-                <a16:creationId xmlns:a16="http://schemas.microsoft.com/office/drawing/2014/main" id="{FD8A1493-0B1B-4B7A-B422-0A56E5B6F414}"/>
+                <a16:creationId xmlns:a16="http://schemas.microsoft.com/office/drawing/2014/main" id="{BB3D67B1-15BC-4FFF-9580-58280E2D6470}"/>
               </a:ext>
             </a:extLst>
           </p:cNvPr>
@@ -19673,7 +19678,7 @@
           <p:cNvPr id="24" name="Text 21">
             <a:extLst xmlns:a="http://schemas.openxmlformats.org/drawingml/2006/main">
               <a:ext uri="{FF2B5EF4-FFF2-40B4-BE49-F238E27FC236}">
-                <a16:creationId xmlns:a16="http://schemas.microsoft.com/office/drawing/2014/main" id="{A7560985-708A-4B18-825C-767C0E099FD4}"/>
+                <a16:creationId xmlns:a16="http://schemas.microsoft.com/office/drawing/2014/main" id="{2DDDD4EC-341C-42AB-B518-A47DA9B06A97}"/>
               </a:ext>
             </a:extLst>
           </p:cNvPr>
@@ -19720,7 +19725,7 @@
           <p:cNvPr id="25" name="Text 22">
             <a:extLst xmlns:a="http://schemas.openxmlformats.org/drawingml/2006/main">
               <a:ext uri="{FF2B5EF4-FFF2-40B4-BE49-F238E27FC236}">
-                <a16:creationId xmlns:a16="http://schemas.microsoft.com/office/drawing/2014/main" id="{5C2AD491-34B6-4BE2-9B17-9F15089F9406}"/>
+                <a16:creationId xmlns:a16="http://schemas.microsoft.com/office/drawing/2014/main" id="{0A7C9265-DA3D-4CAC-B8B3-DFD26295DB31}"/>
               </a:ext>
             </a:extLst>
           </p:cNvPr>
@@ -19767,7 +19772,7 @@
           <p:cNvPr id="26" name="Shape 23">
             <a:extLst xmlns:a="http://schemas.openxmlformats.org/drawingml/2006/main">
               <a:ext uri="{FF2B5EF4-FFF2-40B4-BE49-F238E27FC236}">
-                <a16:creationId xmlns:a16="http://schemas.microsoft.com/office/drawing/2014/main" id="{5ACCAC38-24D0-4912-A8F9-05AB67094416}"/>
+                <a16:creationId xmlns:a16="http://schemas.microsoft.com/office/drawing/2014/main" id="{530ECB22-423F-405E-94EE-CE71CE4E3AC2}"/>
               </a:ext>
             </a:extLst>
           </p:cNvPr>
@@ -19802,7 +19807,7 @@
           <p:cNvPr id="27" name="Text 24">
             <a:extLst xmlns:a="http://schemas.openxmlformats.org/drawingml/2006/main">
               <a:ext uri="{FF2B5EF4-FFF2-40B4-BE49-F238E27FC236}">
-                <a16:creationId xmlns:a16="http://schemas.microsoft.com/office/drawing/2014/main" id="{14527624-60C1-439F-B1B4-747CFD394DFA}"/>
+                <a16:creationId xmlns:a16="http://schemas.microsoft.com/office/drawing/2014/main" id="{07A7F95C-F5B2-4295-A595-3806AF9410AA}"/>
               </a:ext>
             </a:extLst>
           </p:cNvPr>
@@ -19849,7 +19